--- a/songsTemplate.pptx
+++ b/songsTemplate.pptx
@@ -108,7 +108,7 @@
   <p:extLst>
     <p:ext uri="{EFAFB233-063F-42B5-8137-9DF3F51BA10A}">
       <p15:sldGuideLst xmlns:p15="http://schemas.microsoft.com/office/powerpoint/2012/main">
-        <p15:guide id="1" orient="horz" pos="2160" userDrawn="1">
+        <p15:guide id="1" orient="horz" pos="2137" userDrawn="1">
           <p15:clr>
             <a:srgbClr val="A4A3A4"/>
           </p15:clr>
@@ -255,7 +255,7 @@
           <a:p>
             <a:fld id="{F1102B08-ED9E-409F-B95F-09CAA1DAF6E0}" type="datetimeFigureOut">
               <a:rPr lang="en-IN" smtClean="0"/>
-              <a:t>21-09-2024</a:t>
+              <a:t>28-09-2024</a:t>
             </a:fld>
             <a:endParaRPr lang="en-IN"/>
           </a:p>
@@ -425,7 +425,7 @@
           <a:p>
             <a:fld id="{F1102B08-ED9E-409F-B95F-09CAA1DAF6E0}" type="datetimeFigureOut">
               <a:rPr lang="en-IN" smtClean="0"/>
-              <a:t>21-09-2024</a:t>
+              <a:t>28-09-2024</a:t>
             </a:fld>
             <a:endParaRPr lang="en-IN"/>
           </a:p>
@@ -605,7 +605,7 @@
           <a:p>
             <a:fld id="{F1102B08-ED9E-409F-B95F-09CAA1DAF6E0}" type="datetimeFigureOut">
               <a:rPr lang="en-IN" smtClean="0"/>
-              <a:t>21-09-2024</a:t>
+              <a:t>28-09-2024</a:t>
             </a:fld>
             <a:endParaRPr lang="en-IN"/>
           </a:p>
@@ -775,7 +775,7 @@
           <a:p>
             <a:fld id="{F1102B08-ED9E-409F-B95F-09CAA1DAF6E0}" type="datetimeFigureOut">
               <a:rPr lang="en-IN" smtClean="0"/>
-              <a:t>21-09-2024</a:t>
+              <a:t>28-09-2024</a:t>
             </a:fld>
             <a:endParaRPr lang="en-IN"/>
           </a:p>
@@ -1019,7 +1019,7 @@
           <a:p>
             <a:fld id="{F1102B08-ED9E-409F-B95F-09CAA1DAF6E0}" type="datetimeFigureOut">
               <a:rPr lang="en-IN" smtClean="0"/>
-              <a:t>21-09-2024</a:t>
+              <a:t>28-09-2024</a:t>
             </a:fld>
             <a:endParaRPr lang="en-IN"/>
           </a:p>
@@ -1251,7 +1251,7 @@
           <a:p>
             <a:fld id="{F1102B08-ED9E-409F-B95F-09CAA1DAF6E0}" type="datetimeFigureOut">
               <a:rPr lang="en-IN" smtClean="0"/>
-              <a:t>21-09-2024</a:t>
+              <a:t>28-09-2024</a:t>
             </a:fld>
             <a:endParaRPr lang="en-IN"/>
           </a:p>
@@ -1618,7 +1618,7 @@
           <a:p>
             <a:fld id="{F1102B08-ED9E-409F-B95F-09CAA1DAF6E0}" type="datetimeFigureOut">
               <a:rPr lang="en-IN" smtClean="0"/>
-              <a:t>21-09-2024</a:t>
+              <a:t>28-09-2024</a:t>
             </a:fld>
             <a:endParaRPr lang="en-IN"/>
           </a:p>
@@ -1736,7 +1736,7 @@
           <a:p>
             <a:fld id="{F1102B08-ED9E-409F-B95F-09CAA1DAF6E0}" type="datetimeFigureOut">
               <a:rPr lang="en-IN" smtClean="0"/>
-              <a:t>21-09-2024</a:t>
+              <a:t>28-09-2024</a:t>
             </a:fld>
             <a:endParaRPr lang="en-IN"/>
           </a:p>
@@ -1831,7 +1831,7 @@
           <a:p>
             <a:fld id="{F1102B08-ED9E-409F-B95F-09CAA1DAF6E0}" type="datetimeFigureOut">
               <a:rPr lang="en-IN" smtClean="0"/>
-              <a:t>21-09-2024</a:t>
+              <a:t>28-09-2024</a:t>
             </a:fld>
             <a:endParaRPr lang="en-IN"/>
           </a:p>
@@ -2108,7 +2108,7 @@
           <a:p>
             <a:fld id="{F1102B08-ED9E-409F-B95F-09CAA1DAF6E0}" type="datetimeFigureOut">
               <a:rPr lang="en-IN" smtClean="0"/>
-              <a:t>21-09-2024</a:t>
+              <a:t>28-09-2024</a:t>
             </a:fld>
             <a:endParaRPr lang="en-IN"/>
           </a:p>
@@ -2365,7 +2365,7 @@
           <a:p>
             <a:fld id="{F1102B08-ED9E-409F-B95F-09CAA1DAF6E0}" type="datetimeFigureOut">
               <a:rPr lang="en-IN" smtClean="0"/>
-              <a:t>21-09-2024</a:t>
+              <a:t>28-09-2024</a:t>
             </a:fld>
             <a:endParaRPr lang="en-IN"/>
           </a:p>
@@ -2578,7 +2578,7 @@
           <a:p>
             <a:fld id="{F1102B08-ED9E-409F-B95F-09CAA1DAF6E0}" type="datetimeFigureOut">
               <a:rPr lang="en-IN" smtClean="0"/>
-              <a:t>21-09-2024</a:t>
+              <a:t>28-09-2024</a:t>
             </a:fld>
             <a:endParaRPr lang="en-IN"/>
           </a:p>
@@ -3073,7 +3073,7 @@
           <p:spPr>
             <a:xfrm>
               <a:off x="267762" y="787955"/>
-              <a:ext cx="4836576" cy="5262979"/>
+              <a:ext cx="4836576" cy="4939814"/>
             </a:xfrm>
             <a:prstGeom prst="rect">
               <a:avLst/>
@@ -3090,82 +3090,68 @@
                 <a:defRPr/>
               </a:pPr>
               <a:r>
-                <a:rPr lang="te-IN" sz="2400" dirty="0">
-                  <a:latin typeface="Ramabhadra" panose="02000600000000000000" pitchFamily="2" charset="0"/>
-                  <a:cs typeface="Ramabhadra" panose="02000600000000000000" pitchFamily="2" charset="0"/>
-                </a:rPr>
-                <a:t>యేసు నీ కృపలో</a:t>
-              </a:r>
-              <a:r>
-                <a:rPr lang="en-IN" sz="2400" dirty="0">
+                <a:rPr lang="te-IN" sz="2100" dirty="0">
+                  <a:latin typeface="Ramabhadra" panose="02000600000000000000" pitchFamily="2" charset="0"/>
+                  <a:cs typeface="Ramabhadra" panose="02000600000000000000" pitchFamily="2" charset="0"/>
+                </a:rPr>
+                <a:t>నేనెందుకని నీ సొత్తుగా మారితిని</a:t>
+              </a:r>
+            </a:p>
+            <a:p>
+              <a:pPr defTabSz="439781">
+                <a:defRPr/>
+              </a:pPr>
+              <a:r>
+                <a:rPr lang="te-IN" sz="2100" dirty="0">
+                  <a:latin typeface="Ramabhadra" panose="02000600000000000000" pitchFamily="2" charset="0"/>
+                  <a:cs typeface="Ramabhadra" panose="02000600000000000000" pitchFamily="2" charset="0"/>
+                </a:rPr>
+                <a:t>యేసయ్యా నీ రక్తముచే... కడుగబడి</a:t>
+              </a:r>
+              <a:r>
+                <a:rPr lang="en-IN" sz="2100" dirty="0">
                   <a:latin typeface="Ramabhadra" panose="02000600000000000000" pitchFamily="2" charset="0"/>
                   <a:cs typeface="Ramabhadra" panose="02000600000000000000" pitchFamily="2" charset="0"/>
                 </a:rPr>
                 <a:t> </a:t>
               </a:r>
               <a:r>
-                <a:rPr lang="te-IN" sz="2400" dirty="0">
-                  <a:latin typeface="Ramabhadra" panose="02000600000000000000" pitchFamily="2" charset="0"/>
-                  <a:cs typeface="Ramabhadra" panose="02000600000000000000" pitchFamily="2" charset="0"/>
-                </a:rPr>
-                <a:t>-</a:t>
-              </a:r>
-              <a:r>
-                <a:rPr lang="en-IN" sz="2400" dirty="0">
-                  <a:latin typeface="Ramabhadra" panose="02000600000000000000" pitchFamily="2" charset="0"/>
-                  <a:cs typeface="Ramabhadra" panose="02000600000000000000" pitchFamily="2" charset="0"/>
-                </a:rPr>
-                <a:t> </a:t>
-              </a:r>
-              <a:r>
-                <a:rPr lang="te-IN" sz="2400" dirty="0">
-                  <a:latin typeface="Ramabhadra" panose="02000600000000000000" pitchFamily="2" charset="0"/>
-                  <a:cs typeface="Ramabhadra" panose="02000600000000000000" pitchFamily="2" charset="0"/>
-                </a:rPr>
-                <a:t>మమ్ము కాపాడుము దేవా</a:t>
-              </a:r>
-            </a:p>
-            <a:p>
-              <a:pPr defTabSz="439781">
-                <a:defRPr/>
-              </a:pPr>
-              <a:r>
-                <a:rPr lang="te-IN" sz="2400" dirty="0">
-                  <a:latin typeface="Ramabhadra" panose="02000600000000000000" pitchFamily="2" charset="0"/>
-                  <a:cs typeface="Ramabhadra" panose="02000600000000000000" pitchFamily="2" charset="0"/>
-                </a:rPr>
-                <a:t>మమ్ము రక్షించి - నిత్య రాజ్యములో</a:t>
-              </a:r>
-            </a:p>
-            <a:p>
-              <a:pPr defTabSz="439781">
-                <a:defRPr/>
-              </a:pPr>
-              <a:r>
-                <a:rPr lang="te-IN" sz="2400" dirty="0">
-                  <a:latin typeface="Ramabhadra" panose="02000600000000000000" pitchFamily="2" charset="0"/>
-                  <a:cs typeface="Ramabhadra" panose="02000600000000000000" pitchFamily="2" charset="0"/>
-                </a:rPr>
-                <a:t>నడుపుము మా ప్రభువా -</a:t>
-              </a:r>
-            </a:p>
-            <a:p>
-              <a:pPr defTabSz="439781">
-                <a:defRPr/>
-              </a:pPr>
-              <a:r>
-                <a:rPr lang="te-IN" sz="2400" dirty="0">
-                  <a:latin typeface="Ramabhadra" panose="02000600000000000000" pitchFamily="2" charset="0"/>
-                  <a:cs typeface="Ramabhadra" panose="02000600000000000000" pitchFamily="2" charset="0"/>
-                </a:rPr>
-                <a:t>నడుపుము మా ప్రభువా</a:t>
-              </a:r>
-            </a:p>
-            <a:p>
-              <a:pPr defTabSz="439781">
-                <a:defRPr/>
-              </a:pPr>
-              <a:endParaRPr lang="te-IN" sz="2400" dirty="0">
+                <a:rPr lang="te-IN" sz="2100" dirty="0">
+                  <a:latin typeface="Ramabhadra" panose="02000600000000000000" pitchFamily="2" charset="0"/>
+                  <a:cs typeface="Ramabhadra" panose="02000600000000000000" pitchFamily="2" charset="0"/>
+                </a:rPr>
+                <a:t>నందున</a:t>
+              </a:r>
+            </a:p>
+            <a:p>
+              <a:pPr defTabSz="439781">
+                <a:defRPr/>
+              </a:pPr>
+              <a:r>
+                <a:rPr lang="te-IN" sz="2100" dirty="0">
+                  <a:latin typeface="Ramabhadra" panose="02000600000000000000" pitchFamily="2" charset="0"/>
+                  <a:cs typeface="Ramabhadra" panose="02000600000000000000" pitchFamily="2" charset="0"/>
+                </a:rPr>
+                <a:t>నీ అనాది ప్రణాళికలో...</a:t>
+              </a:r>
+            </a:p>
+            <a:p>
+              <a:pPr defTabSz="439781">
+                <a:defRPr/>
+              </a:pPr>
+              <a:r>
+                <a:rPr lang="te-IN" sz="2100" dirty="0">
+                  <a:latin typeface="Ramabhadra" panose="02000600000000000000" pitchFamily="2" charset="0"/>
+                  <a:cs typeface="Ramabhadra" panose="02000600000000000000" pitchFamily="2" charset="0"/>
+                </a:rPr>
+                <a:t>హర్షించెను నా హృదయసీమ</a:t>
+              </a:r>
+            </a:p>
+            <a:p>
+              <a:pPr defTabSz="439781">
+                <a:defRPr/>
+              </a:pPr>
+              <a:endParaRPr lang="te-IN" sz="2100" dirty="0">
                 <a:latin typeface="Ramabhadra" panose="02000600000000000000" pitchFamily="2" charset="0"/>
                 <a:cs typeface="Ramabhadra" panose="02000600000000000000" pitchFamily="2" charset="0"/>
               </a:endParaRPr>
@@ -3175,54 +3161,77 @@
                 <a:defRPr/>
               </a:pPr>
               <a:r>
-                <a:rPr lang="te-IN" sz="2400" dirty="0">
-                  <a:latin typeface="Ramabhadra" panose="02000600000000000000" pitchFamily="2" charset="0"/>
-                  <a:cs typeface="Ramabhadra" panose="02000600000000000000" pitchFamily="2" charset="0"/>
-                </a:rPr>
-                <a:t>కృంగిన వేళలలో – అలసిన సమయములో</a:t>
-              </a:r>
-            </a:p>
-            <a:p>
-              <a:pPr defTabSz="439781">
-                <a:defRPr/>
-              </a:pPr>
-              <a:r>
-                <a:rPr lang="te-IN" sz="2400" dirty="0">
-                  <a:latin typeface="Ramabhadra" panose="02000600000000000000" pitchFamily="2" charset="0"/>
-                  <a:cs typeface="Ramabhadra" panose="02000600000000000000" pitchFamily="2" charset="0"/>
-                </a:rPr>
-                <a:t>నా చేయి విడువకుము – నన్ను నిలబెట్టు</a:t>
-              </a:r>
-            </a:p>
-            <a:p>
-              <a:pPr defTabSz="439781">
-                <a:defRPr/>
-              </a:pPr>
-              <a:r>
-                <a:rPr lang="te-IN" sz="2400" dirty="0">
-                  <a:latin typeface="Ramabhadra" panose="02000600000000000000" pitchFamily="2" charset="0"/>
-                  <a:cs typeface="Ramabhadra" panose="02000600000000000000" pitchFamily="2" charset="0"/>
-                </a:rPr>
-                <a:t>యేసు నీ రక్తములో – శుద్ధి పరచి నన్ను</a:t>
-              </a:r>
-            </a:p>
-            <a:p>
-              <a:pPr defTabSz="439781">
-                <a:defRPr/>
-              </a:pPr>
-              <a:r>
-                <a:rPr lang="te-IN" sz="2400" dirty="0">
-                  <a:latin typeface="Ramabhadra" panose="02000600000000000000" pitchFamily="2" charset="0"/>
-                  <a:cs typeface="Ramabhadra" panose="02000600000000000000" pitchFamily="2" charset="0"/>
-                </a:rPr>
-                <a:t>నిలుపుము జ్యోతివలె – నిలుపుము జ్యోతివలె</a:t>
-              </a:r>
-            </a:p>
-            <a:p>
-              <a:pPr defTabSz="439781">
-                <a:defRPr/>
-              </a:pPr>
-              <a:endParaRPr lang="te-IN" sz="2400" dirty="0">
+                <a:rPr lang="te-IN" sz="2100" dirty="0">
+                  <a:latin typeface="Ramabhadra" panose="02000600000000000000" pitchFamily="2" charset="0"/>
+                  <a:cs typeface="Ramabhadra" panose="02000600000000000000" pitchFamily="2" charset="0"/>
+                </a:rPr>
+                <a:t>నీ పరిచర్యను తుదముట్టించుటే...</a:t>
+              </a:r>
+            </a:p>
+            <a:p>
+              <a:pPr defTabSz="439781">
+                <a:defRPr/>
+              </a:pPr>
+              <a:r>
+                <a:rPr lang="te-IN" sz="2100" dirty="0">
+                  <a:latin typeface="Ramabhadra" panose="02000600000000000000" pitchFamily="2" charset="0"/>
+                  <a:cs typeface="Ramabhadra" panose="02000600000000000000" pitchFamily="2" charset="0"/>
+                </a:rPr>
+                <a:t>నా నియమమాయెనే</a:t>
+              </a:r>
+            </a:p>
+            <a:p>
+              <a:pPr defTabSz="439781">
+                <a:defRPr/>
+              </a:pPr>
+              <a:r>
+                <a:rPr lang="te-IN" sz="2100" dirty="0">
+                  <a:latin typeface="Ramabhadra" panose="02000600000000000000" pitchFamily="2" charset="0"/>
+                  <a:cs typeface="Ramabhadra" panose="02000600000000000000" pitchFamily="2" charset="0"/>
+                </a:rPr>
+                <a:t>నీ సన్నిధిలో నీ పోందుకోరి...</a:t>
+              </a:r>
+              <a:r>
+                <a:rPr lang="en-IN" sz="2100" dirty="0">
+                  <a:latin typeface="Ramabhadra" panose="02000600000000000000" pitchFamily="2" charset="0"/>
+                  <a:cs typeface="Ramabhadra" panose="02000600000000000000" pitchFamily="2" charset="0"/>
+                </a:rPr>
+                <a:t> </a:t>
+              </a:r>
+              <a:r>
+                <a:rPr lang="te-IN" sz="2100" dirty="0">
+                  <a:latin typeface="Ramabhadra" panose="02000600000000000000" pitchFamily="2" charset="0"/>
+                  <a:cs typeface="Ramabhadra" panose="02000600000000000000" pitchFamily="2" charset="0"/>
+                </a:rPr>
+                <a:t>నీ స్నేహితుడనైతినే</a:t>
+              </a:r>
+            </a:p>
+            <a:p>
+              <a:pPr defTabSz="439781">
+                <a:defRPr/>
+              </a:pPr>
+              <a:r>
+                <a:rPr lang="te-IN" sz="2100" dirty="0">
+                  <a:latin typeface="Ramabhadra" panose="02000600000000000000" pitchFamily="2" charset="0"/>
+                  <a:cs typeface="Ramabhadra" panose="02000600000000000000" pitchFamily="2" charset="0"/>
+                </a:rPr>
+                <a:t>అహా..! నాధన్యత ఓహో...!</a:t>
+              </a:r>
+              <a:r>
+                <a:rPr lang="en-IN" sz="2100" dirty="0">
+                  <a:latin typeface="Ramabhadra" panose="02000600000000000000" pitchFamily="2" charset="0"/>
+                  <a:cs typeface="Ramabhadra" panose="02000600000000000000" pitchFamily="2" charset="0"/>
+                </a:rPr>
+                <a:t> </a:t>
+              </a:r>
+              <a:r>
+                <a:rPr lang="te-IN" sz="2100" dirty="0">
+                  <a:latin typeface="Ramabhadra" panose="02000600000000000000" pitchFamily="2" charset="0"/>
+                  <a:cs typeface="Ramabhadra" panose="02000600000000000000" pitchFamily="2" charset="0"/>
+                </a:rPr>
+                <a:t>నాభాగ్యము...</a:t>
+              </a:r>
+              <a:endParaRPr lang="en-IN" sz="2100" dirty="0">
                 <a:latin typeface="Ramabhadra" panose="02000600000000000000" pitchFamily="2" charset="0"/>
                 <a:cs typeface="Ramabhadra" panose="02000600000000000000" pitchFamily="2" charset="0"/>
               </a:endParaRPr>
@@ -3232,47 +3241,111 @@
                 <a:defRPr/>
               </a:pPr>
               <a:r>
-                <a:rPr lang="te-IN" sz="2400" dirty="0">
-                  <a:latin typeface="Ramabhadra" panose="02000600000000000000" pitchFamily="2" charset="0"/>
-                  <a:cs typeface="Ramabhadra" panose="02000600000000000000" pitchFamily="2" charset="0"/>
-                </a:rPr>
-                <a:t>సిలువని మోసుకొని – సువార్త చాటింప</a:t>
-              </a:r>
-            </a:p>
-            <a:p>
-              <a:pPr defTabSz="439781">
-                <a:defRPr/>
-              </a:pPr>
-              <a:r>
-                <a:rPr lang="te-IN" sz="2400" dirty="0">
-                  <a:latin typeface="Ramabhadra" panose="02000600000000000000" pitchFamily="2" charset="0"/>
-                  <a:cs typeface="Ramabhadra" panose="02000600000000000000" pitchFamily="2" charset="0"/>
-                </a:rPr>
-                <a:t>విలువగు నీ శక్తిచే – నిత్యము నడిపించు </a:t>
-              </a:r>
-            </a:p>
-            <a:p>
-              <a:pPr defTabSz="439781">
-                <a:defRPr/>
-              </a:pPr>
-              <a:r>
-                <a:rPr lang="te-IN" sz="2400" dirty="0">
-                  <a:latin typeface="Ramabhadra" panose="02000600000000000000" pitchFamily="2" charset="0"/>
-                  <a:cs typeface="Ramabhadra" panose="02000600000000000000" pitchFamily="2" charset="0"/>
-                </a:rPr>
-                <a:t>యేసు నీ రాకడలో – నిన్ను చూచుటకు</a:t>
-              </a:r>
-            </a:p>
-            <a:p>
-              <a:pPr defTabSz="439781">
-                <a:defRPr/>
-              </a:pPr>
-              <a:r>
-                <a:rPr lang="te-IN" sz="2400" dirty="0">
-                  <a:latin typeface="Ramabhadra" panose="02000600000000000000" pitchFamily="2" charset="0"/>
-                  <a:cs typeface="Ramabhadra" panose="02000600000000000000" pitchFamily="2" charset="0"/>
-                </a:rPr>
-                <a:t>నీ కృప నీయుమయా –నీ కృప నీయుమయా</a:t>
+                <a:rPr lang="te-IN" sz="2100" dirty="0">
+                  <a:latin typeface="Ramabhadra" panose="02000600000000000000" pitchFamily="2" charset="0"/>
+                  <a:cs typeface="Ramabhadra" panose="02000600000000000000" pitchFamily="2" charset="0"/>
+                </a:rPr>
+                <a:t>ఏమని వివరింతును</a:t>
+              </a:r>
+              <a:r>
+                <a:rPr lang="en-IN" sz="2100" dirty="0">
+                  <a:latin typeface="Ramabhadra" panose="02000600000000000000" pitchFamily="2" charset="0"/>
+                  <a:cs typeface="Ramabhadra" panose="02000600000000000000" pitchFamily="2" charset="0"/>
+                </a:rPr>
+                <a:t>...</a:t>
+              </a:r>
+              <a:endParaRPr lang="te-IN" sz="2100" dirty="0">
+                <a:latin typeface="Ramabhadra" panose="02000600000000000000" pitchFamily="2" charset="0"/>
+                <a:cs typeface="Ramabhadra" panose="02000600000000000000" pitchFamily="2" charset="0"/>
+              </a:endParaRPr>
+            </a:p>
+            <a:p>
+              <a:pPr defTabSz="439781">
+                <a:defRPr/>
+              </a:pPr>
+              <a:endParaRPr lang="te-IN" sz="2100" dirty="0">
+                <a:latin typeface="Ramabhadra" panose="02000600000000000000" pitchFamily="2" charset="0"/>
+                <a:cs typeface="Ramabhadra" panose="02000600000000000000" pitchFamily="2" charset="0"/>
+              </a:endParaRPr>
+            </a:p>
+            <a:p>
+              <a:pPr defTabSz="439781">
+                <a:defRPr/>
+              </a:pPr>
+              <a:r>
+                <a:rPr lang="te-IN" sz="2100" dirty="0">
+                  <a:latin typeface="Ramabhadra" panose="02000600000000000000" pitchFamily="2" charset="0"/>
+                  <a:cs typeface="Ramabhadra" panose="02000600000000000000" pitchFamily="2" charset="0"/>
+                </a:rPr>
+                <a:t>నీ శ్రమలలో పాలొందుటయే... నా దర్శనమాయెనే</a:t>
+              </a:r>
+            </a:p>
+            <a:p>
+              <a:pPr defTabSz="439781">
+                <a:defRPr/>
+              </a:pPr>
+              <a:r>
+                <a:rPr lang="te-IN" sz="2100" dirty="0">
+                  <a:latin typeface="Ramabhadra" panose="02000600000000000000" pitchFamily="2" charset="0"/>
+                  <a:cs typeface="Ramabhadra" panose="02000600000000000000" pitchFamily="2" charset="0"/>
+                </a:rPr>
+                <a:t>నా తనువందున శ్రమలు సహించి...</a:t>
+              </a:r>
+              <a:r>
+                <a:rPr lang="en-IN" sz="2100" dirty="0">
+                  <a:latin typeface="Ramabhadra" panose="02000600000000000000" pitchFamily="2" charset="0"/>
+                  <a:cs typeface="Ramabhadra" panose="02000600000000000000" pitchFamily="2" charset="0"/>
+                </a:rPr>
+                <a:t> </a:t>
+              </a:r>
+              <a:r>
+                <a:rPr lang="te-IN" dirty="0">
+                  <a:latin typeface="Ramabhadra" panose="02000600000000000000" pitchFamily="2" charset="0"/>
+                  <a:cs typeface="Ramabhadra" panose="02000600000000000000" pitchFamily="2" charset="0"/>
+                </a:rPr>
+                <a:t>నీ వారసుడనైతినే</a:t>
+              </a:r>
+            </a:p>
+            <a:p>
+              <a:pPr defTabSz="439781">
+                <a:defRPr/>
+              </a:pPr>
+              <a:r>
+                <a:rPr lang="te-IN" sz="2100" dirty="0">
+                  <a:latin typeface="Ramabhadra" panose="02000600000000000000" pitchFamily="2" charset="0"/>
+                  <a:cs typeface="Ramabhadra" panose="02000600000000000000" pitchFamily="2" charset="0"/>
+                </a:rPr>
+                <a:t>అహా..! నాధన్యత ఓహో...!</a:t>
+              </a:r>
+              <a:r>
+                <a:rPr lang="en-IN" sz="2100" dirty="0">
+                  <a:latin typeface="Ramabhadra" panose="02000600000000000000" pitchFamily="2" charset="0"/>
+                  <a:cs typeface="Ramabhadra" panose="02000600000000000000" pitchFamily="2" charset="0"/>
+                </a:rPr>
+                <a:t> </a:t>
+              </a:r>
+              <a:r>
+                <a:rPr lang="te-IN" sz="2100" dirty="0">
+                  <a:latin typeface="Ramabhadra" panose="02000600000000000000" pitchFamily="2" charset="0"/>
+                  <a:cs typeface="Ramabhadra" panose="02000600000000000000" pitchFamily="2" charset="0"/>
+                </a:rPr>
+                <a:t>నాభాగ్యము...</a:t>
+              </a:r>
+              <a:endParaRPr lang="en-IN" sz="2100" dirty="0">
+                <a:latin typeface="Ramabhadra" panose="02000600000000000000" pitchFamily="2" charset="0"/>
+                <a:cs typeface="Ramabhadra" panose="02000600000000000000" pitchFamily="2" charset="0"/>
+              </a:endParaRPr>
+            </a:p>
+            <a:p>
+              <a:pPr defTabSz="439781">
+                <a:defRPr/>
+              </a:pPr>
+              <a:r>
+                <a:rPr lang="te-IN" sz="2100" dirty="0">
+                  <a:latin typeface="Ramabhadra" panose="02000600000000000000" pitchFamily="2" charset="0"/>
+                  <a:cs typeface="Ramabhadra" panose="02000600000000000000" pitchFamily="2" charset="0"/>
+                </a:rPr>
+                <a:t>ఏమని వివరింతును</a:t>
               </a:r>
             </a:p>
           </p:txBody>
@@ -3335,788 +3408,6 @@
                   </a:solidFill>
                 </a:rPr>
                 <a:t>4</a:t>
-              </a:r>
-            </a:p>
-          </p:txBody>
-        </p:sp>
-      </p:grpSp>
-      <p:grpSp>
-        <p:nvGrpSpPr>
-          <p:cNvPr id="10" name="Group 9">
-            <a:extLst>
-              <a:ext uri="{FF2B5EF4-FFF2-40B4-BE49-F238E27FC236}">
-                <a16:creationId xmlns:a16="http://schemas.microsoft.com/office/drawing/2014/main" id="{BD4861E3-0140-4666-A772-E1339125A35F}"/>
-              </a:ext>
-            </a:extLst>
-          </p:cNvPr>
-          <p:cNvGrpSpPr/>
-          <p:nvPr/>
-        </p:nvGrpSpPr>
-        <p:grpSpPr>
-          <a:xfrm>
-            <a:off x="5104338" y="182031"/>
-            <a:ext cx="4711520" cy="6493935"/>
-            <a:chOff x="160868" y="182032"/>
-            <a:chExt cx="4711520" cy="6493935"/>
-          </a:xfrm>
-        </p:grpSpPr>
-        <p:sp>
-          <p:nvSpPr>
-            <p:cNvPr id="11" name="Rectangle 10">
-              <a:extLst>
-                <a:ext uri="{FF2B5EF4-FFF2-40B4-BE49-F238E27FC236}">
-                  <a16:creationId xmlns:a16="http://schemas.microsoft.com/office/drawing/2014/main" id="{0E606F7A-0439-43E4-A07F-A35A8691EB42}"/>
-                </a:ext>
-              </a:extLst>
-            </p:cNvPr>
-            <p:cNvSpPr/>
-            <p:nvPr/>
-          </p:nvSpPr>
-          <p:spPr>
-            <a:xfrm>
-              <a:off x="160868" y="182032"/>
-              <a:ext cx="4648200" cy="6493935"/>
-            </a:xfrm>
-            <a:prstGeom prst="rect">
-              <a:avLst/>
-            </a:prstGeom>
-            <a:noFill/>
-            <a:ln w="19050" cmpd="thinThick">
-              <a:solidFill>
-                <a:schemeClr val="tx1">
-                  <a:lumMod val="50000"/>
-                  <a:lumOff val="50000"/>
-                </a:schemeClr>
-              </a:solidFill>
-            </a:ln>
-          </p:spPr>
-          <p:style>
-            <a:lnRef idx="2">
-              <a:schemeClr val="accent1">
-                <a:shade val="50000"/>
-              </a:schemeClr>
-            </a:lnRef>
-            <a:fillRef idx="1">
-              <a:schemeClr val="accent1"/>
-            </a:fillRef>
-            <a:effectRef idx="0">
-              <a:schemeClr val="accent1"/>
-            </a:effectRef>
-            <a:fontRef idx="minor">
-              <a:schemeClr val="lt1"/>
-            </a:fontRef>
-          </p:style>
-          <p:txBody>
-            <a:bodyPr rtlCol="0" anchor="ctr"/>
-            <a:lstStyle/>
-            <a:p>
-              <a:pPr algn="ctr"/>
-              <a:endParaRPr lang="en-IN"/>
-            </a:p>
-          </p:txBody>
-        </p:sp>
-        <p:sp>
-          <p:nvSpPr>
-            <p:cNvPr id="12" name="TextBox 11">
-              <a:extLst>
-                <a:ext uri="{FF2B5EF4-FFF2-40B4-BE49-F238E27FC236}">
-                  <a16:creationId xmlns:a16="http://schemas.microsoft.com/office/drawing/2014/main" id="{DD950E5A-63C0-4187-892B-9549599FCD15}"/>
-                </a:ext>
-              </a:extLst>
-            </p:cNvPr>
-            <p:cNvSpPr txBox="1"/>
-            <p:nvPr/>
-          </p:nvSpPr>
-          <p:spPr>
-            <a:xfrm>
-              <a:off x="331082" y="742713"/>
-              <a:ext cx="4541306" cy="5647700"/>
-            </a:xfrm>
-            <a:prstGeom prst="rect">
-              <a:avLst/>
-            </a:prstGeom>
-            <a:noFill/>
-          </p:spPr>
-          <p:txBody>
-            <a:bodyPr wrap="square" rtlCol="0">
-              <a:spAutoFit/>
-            </a:bodyPr>
-            <a:lstStyle/>
-            <a:p>
-              <a:pPr defTabSz="439781">
-                <a:defRPr/>
-              </a:pPr>
-              <a:r>
-                <a:rPr lang="te-IN" sz="1900" dirty="0">
-                  <a:latin typeface="Ramabhadra" panose="02000600000000000000" pitchFamily="2" charset="0"/>
-                  <a:cs typeface="Ramabhadra" panose="02000600000000000000" pitchFamily="2" charset="0"/>
-                </a:rPr>
-                <a:t>స్తుతి పాడుటకే బ్రతికించిన – జీవనదాతవు నీవేనయ్యా</a:t>
-              </a:r>
-            </a:p>
-            <a:p>
-              <a:pPr defTabSz="439781">
-                <a:defRPr/>
-              </a:pPr>
-              <a:r>
-                <a:rPr lang="te-IN" sz="1900" dirty="0">
-                  <a:latin typeface="Ramabhadra" panose="02000600000000000000" pitchFamily="2" charset="0"/>
-                  <a:cs typeface="Ramabhadra" panose="02000600000000000000" pitchFamily="2" charset="0"/>
-                </a:rPr>
-                <a:t>ఇన్నాళ్లుగా నను పోషించిన – తల్లివలె నను ఓదార్చిన</a:t>
-              </a:r>
-            </a:p>
-            <a:p>
-              <a:pPr defTabSz="439781">
-                <a:defRPr/>
-              </a:pPr>
-              <a:r>
-                <a:rPr lang="te-IN" sz="1900" dirty="0">
-                  <a:latin typeface="Ramabhadra" panose="02000600000000000000" pitchFamily="2" charset="0"/>
-                  <a:cs typeface="Ramabhadra" panose="02000600000000000000" pitchFamily="2" charset="0"/>
-                </a:rPr>
-                <a:t>నీ ప్రేమ నాపై ఎన్నడు మారదు యేసయ్యా (2)</a:t>
-              </a:r>
-            </a:p>
-            <a:p>
-              <a:pPr defTabSz="439781">
-                <a:defRPr/>
-              </a:pPr>
-              <a:r>
-                <a:rPr lang="te-IN" sz="1900" dirty="0">
-                  <a:latin typeface="Ramabhadra" panose="02000600000000000000" pitchFamily="2" charset="0"/>
-                  <a:cs typeface="Ramabhadra" panose="02000600000000000000" pitchFamily="2" charset="0"/>
-                </a:rPr>
-                <a:t>జీవితకాలమంతా ఆధారం నీవేనయ్యా</a:t>
-              </a:r>
-            </a:p>
-            <a:p>
-              <a:pPr defTabSz="439781">
-                <a:defRPr/>
-              </a:pPr>
-              <a:r>
-                <a:rPr lang="te-IN" sz="1900" dirty="0">
-                  <a:latin typeface="Ramabhadra" panose="02000600000000000000" pitchFamily="2" charset="0"/>
-                  <a:cs typeface="Ramabhadra" panose="02000600000000000000" pitchFamily="2" charset="0"/>
-                </a:rPr>
-                <a:t>నా జీవితకాలమంతా ఆరాధించి ఘనపరతును</a:t>
-              </a:r>
-            </a:p>
-            <a:p>
-              <a:pPr defTabSz="439781">
-                <a:defRPr/>
-              </a:pPr>
-              <a:endParaRPr lang="te-IN" sz="1900" dirty="0">
-                <a:latin typeface="Ramabhadra" panose="02000600000000000000" pitchFamily="2" charset="0"/>
-                <a:cs typeface="Ramabhadra" panose="02000600000000000000" pitchFamily="2" charset="0"/>
-              </a:endParaRPr>
-            </a:p>
-            <a:p>
-              <a:pPr defTabSz="439781">
-                <a:defRPr/>
-              </a:pPr>
-              <a:r>
-                <a:rPr lang="te-IN" sz="1900" dirty="0">
-                  <a:latin typeface="Ramabhadra" panose="02000600000000000000" pitchFamily="2" charset="0"/>
-                  <a:cs typeface="Ramabhadra" panose="02000600000000000000" pitchFamily="2" charset="0"/>
-                </a:rPr>
-                <a:t>ప్రాణభయమును తొలగించినావు -</a:t>
-              </a:r>
-            </a:p>
-            <a:p>
-              <a:pPr defTabSz="439781">
-                <a:defRPr/>
-              </a:pPr>
-              <a:r>
-                <a:rPr lang="te-IN" sz="1900" dirty="0">
-                  <a:latin typeface="Ramabhadra" panose="02000600000000000000" pitchFamily="2" charset="0"/>
-                  <a:cs typeface="Ramabhadra" panose="02000600000000000000" pitchFamily="2" charset="0"/>
-                </a:rPr>
-                <a:t>ప్రాకారములను స్థాపించినావు</a:t>
-              </a:r>
-            </a:p>
-            <a:p>
-              <a:pPr defTabSz="439781">
-                <a:defRPr/>
-              </a:pPr>
-              <a:r>
-                <a:rPr lang="te-IN" sz="1900" dirty="0">
-                  <a:latin typeface="Ramabhadra" panose="02000600000000000000" pitchFamily="2" charset="0"/>
-                  <a:cs typeface="Ramabhadra" panose="02000600000000000000" pitchFamily="2" charset="0"/>
-                </a:rPr>
-                <a:t>సర్వజనులలో నీ మహిమ వివరింప -</a:t>
-              </a:r>
-            </a:p>
-            <a:p>
-              <a:pPr defTabSz="439781">
-                <a:defRPr/>
-              </a:pPr>
-              <a:r>
-                <a:rPr lang="te-IN" sz="1900" dirty="0">
-                  <a:latin typeface="Ramabhadra" panose="02000600000000000000" pitchFamily="2" charset="0"/>
-                  <a:cs typeface="Ramabhadra" panose="02000600000000000000" pitchFamily="2" charset="0"/>
-                </a:rPr>
-                <a:t>దీర్ఘాయువుతో నను నింపినావు (2)</a:t>
-              </a:r>
-            </a:p>
-            <a:p>
-              <a:pPr defTabSz="439781">
-                <a:defRPr/>
-              </a:pPr>
-              <a:r>
-                <a:rPr lang="te-IN" sz="1900" dirty="0">
-                  <a:latin typeface="Ramabhadra" panose="02000600000000000000" pitchFamily="2" charset="0"/>
-                  <a:cs typeface="Ramabhadra" panose="02000600000000000000" pitchFamily="2" charset="0"/>
-                </a:rPr>
-                <a:t>నీ కృపా బాహుళ్యమే వీడని అనుబంధమై</a:t>
-              </a:r>
-            </a:p>
-            <a:p>
-              <a:pPr defTabSz="439781">
-                <a:defRPr/>
-              </a:pPr>
-              <a:r>
-                <a:rPr lang="te-IN" sz="1900" dirty="0">
-                  <a:latin typeface="Ramabhadra" panose="02000600000000000000" pitchFamily="2" charset="0"/>
-                  <a:cs typeface="Ramabhadra" panose="02000600000000000000" pitchFamily="2" charset="0"/>
-                </a:rPr>
-                <a:t>తలచిన ప్రతిక్షణమున నూతన బలమిచ్చెను</a:t>
-              </a:r>
-            </a:p>
-            <a:p>
-              <a:pPr defTabSz="439781">
-                <a:defRPr/>
-              </a:pPr>
-              <a:endParaRPr lang="te-IN" sz="1900" dirty="0">
-                <a:latin typeface="Ramabhadra" panose="02000600000000000000" pitchFamily="2" charset="0"/>
-                <a:cs typeface="Ramabhadra" panose="02000600000000000000" pitchFamily="2" charset="0"/>
-              </a:endParaRPr>
-            </a:p>
-            <a:p>
-              <a:pPr defTabSz="439781">
-                <a:defRPr/>
-              </a:pPr>
-              <a:r>
-                <a:rPr lang="te-IN" sz="1900" dirty="0">
-                  <a:latin typeface="Ramabhadra" panose="02000600000000000000" pitchFamily="2" charset="0"/>
-                  <a:cs typeface="Ramabhadra" panose="02000600000000000000" pitchFamily="2" charset="0"/>
-                </a:rPr>
-                <a:t>నాపై ఉదయించె నీ మహిమ కిరణాలు –</a:t>
-              </a:r>
-            </a:p>
-            <a:p>
-              <a:pPr defTabSz="439781">
-                <a:defRPr/>
-              </a:pPr>
-              <a:r>
-                <a:rPr lang="te-IN" sz="1900" dirty="0">
-                  <a:latin typeface="Ramabhadra" panose="02000600000000000000" pitchFamily="2" charset="0"/>
-                  <a:cs typeface="Ramabhadra" panose="02000600000000000000" pitchFamily="2" charset="0"/>
-                </a:rPr>
-                <a:t>కనుమరుగాయెను నా దుఖ:దినములు</a:t>
-              </a:r>
-            </a:p>
-            <a:p>
-              <a:pPr defTabSz="439781">
-                <a:defRPr/>
-              </a:pPr>
-              <a:r>
-                <a:rPr lang="te-IN" sz="1900" dirty="0">
-                  <a:latin typeface="Ramabhadra" panose="02000600000000000000" pitchFamily="2" charset="0"/>
-                  <a:cs typeface="Ramabhadra" panose="02000600000000000000" pitchFamily="2" charset="0"/>
-                </a:rPr>
-                <a:t>కృపలనుపొంది నీ కాడి మోయుటకు -</a:t>
-              </a:r>
-            </a:p>
-            <a:p>
-              <a:pPr defTabSz="439781">
-                <a:defRPr/>
-              </a:pPr>
-              <a:r>
-                <a:rPr lang="te-IN" sz="1900" dirty="0">
-                  <a:latin typeface="Ramabhadra" panose="02000600000000000000" pitchFamily="2" charset="0"/>
-                  <a:cs typeface="Ramabhadra" panose="02000600000000000000" pitchFamily="2" charset="0"/>
-                </a:rPr>
-                <a:t>లోకములోనుండి ఏర్పరచినావు (2)</a:t>
-              </a:r>
-            </a:p>
-            <a:p>
-              <a:pPr defTabSz="439781">
-                <a:defRPr/>
-              </a:pPr>
-              <a:r>
-                <a:rPr lang="te-IN" sz="1900" dirty="0">
-                  <a:latin typeface="Ramabhadra" panose="02000600000000000000" pitchFamily="2" charset="0"/>
-                  <a:cs typeface="Ramabhadra" panose="02000600000000000000" pitchFamily="2" charset="0"/>
-                </a:rPr>
-                <a:t>నీ దివ్య సంకల్పమే- అవనిలో శుభప్రదమై</a:t>
-              </a:r>
-            </a:p>
-            <a:p>
-              <a:pPr defTabSz="439781">
-                <a:defRPr/>
-              </a:pPr>
-              <a:r>
-                <a:rPr lang="te-IN" sz="1900" dirty="0">
-                  <a:latin typeface="Ramabhadra" panose="02000600000000000000" pitchFamily="2" charset="0"/>
-                  <a:cs typeface="Ramabhadra" panose="02000600000000000000" pitchFamily="2" charset="0"/>
-                </a:rPr>
-                <a:t>నీ నిత్య రాజ్యమునకై నిరీక్షణ కలిగించెను</a:t>
-              </a:r>
-            </a:p>
-          </p:txBody>
-        </p:sp>
-        <p:sp>
-          <p:nvSpPr>
-            <p:cNvPr id="13" name="Oval 12">
-              <a:extLst>
-                <a:ext uri="{FF2B5EF4-FFF2-40B4-BE49-F238E27FC236}">
-                  <a16:creationId xmlns:a16="http://schemas.microsoft.com/office/drawing/2014/main" id="{26F461D1-594E-4D24-8238-761378173A6A}"/>
-                </a:ext>
-              </a:extLst>
-            </p:cNvPr>
-            <p:cNvSpPr/>
-            <p:nvPr/>
-          </p:nvSpPr>
-          <p:spPr>
-            <a:xfrm>
-              <a:off x="343961" y="326430"/>
-              <a:ext cx="390525" cy="390525"/>
-            </a:xfrm>
-            <a:prstGeom prst="ellipse">
-              <a:avLst/>
-            </a:prstGeom>
-            <a:noFill/>
-            <a:ln w="19050">
-              <a:solidFill>
-                <a:schemeClr val="tx1">
-                  <a:lumMod val="50000"/>
-                  <a:lumOff val="50000"/>
-                </a:schemeClr>
-              </a:solidFill>
-            </a:ln>
-          </p:spPr>
-          <p:style>
-            <a:lnRef idx="2">
-              <a:schemeClr val="accent1">
-                <a:shade val="50000"/>
-              </a:schemeClr>
-            </a:lnRef>
-            <a:fillRef idx="1">
-              <a:schemeClr val="accent1"/>
-            </a:fillRef>
-            <a:effectRef idx="0">
-              <a:schemeClr val="accent1"/>
-            </a:effectRef>
-            <a:fontRef idx="minor">
-              <a:schemeClr val="lt1"/>
-            </a:fontRef>
-          </p:style>
-          <p:txBody>
-            <a:bodyPr rtlCol="0" anchor="ctr"/>
-            <a:lstStyle/>
-            <a:p>
-              <a:pPr algn="ctr"/>
-              <a:r>
-                <a:rPr lang="en-IN" dirty="0">
-                  <a:solidFill>
-                    <a:schemeClr val="tx1"/>
-                  </a:solidFill>
-                </a:rPr>
-                <a:t>1</a:t>
-              </a:r>
-            </a:p>
-          </p:txBody>
-        </p:sp>
-      </p:grpSp>
-    </p:spTree>
-    <p:extLst>
-      <p:ext uri="{BB962C8B-B14F-4D97-AF65-F5344CB8AC3E}">
-        <p14:creationId xmlns:p14="http://schemas.microsoft.com/office/powerpoint/2010/main" val="3342490066"/>
-      </p:ext>
-    </p:extLst>
-  </p:cSld>
-  <p:clrMapOvr>
-    <a:masterClrMapping/>
-  </p:clrMapOvr>
-</p:sld>
-</file>
-
-<file path=ppt/slides/slide2.xml><?xml version="1.0" encoding="utf-8"?>
-<p:sld xmlns:a="http://schemas.openxmlformats.org/drawingml/2006/main" xmlns:r="http://schemas.openxmlformats.org/officeDocument/2006/relationships" xmlns:p="http://schemas.openxmlformats.org/presentationml/2006/main">
-  <p:cSld>
-    <p:spTree>
-      <p:nvGrpSpPr>
-        <p:cNvPr id="1" name=""/>
-        <p:cNvGrpSpPr/>
-        <p:nvPr/>
-      </p:nvGrpSpPr>
-      <p:grpSpPr>
-        <a:xfrm>
-          <a:off x="0" y="0"/>
-          <a:ext cx="0" cy="0"/>
-          <a:chOff x="0" y="0"/>
-          <a:chExt cx="0" cy="0"/>
-        </a:xfrm>
-      </p:grpSpPr>
-      <p:grpSp>
-        <p:nvGrpSpPr>
-          <p:cNvPr id="9" name="Group 8">
-            <a:extLst>
-              <a:ext uri="{FF2B5EF4-FFF2-40B4-BE49-F238E27FC236}">
-                <a16:creationId xmlns:a16="http://schemas.microsoft.com/office/drawing/2014/main" id="{A7E1EC36-C610-4951-92FB-5FA9BAA559EC}"/>
-              </a:ext>
-            </a:extLst>
-          </p:cNvPr>
-          <p:cNvGrpSpPr/>
-          <p:nvPr/>
-        </p:nvGrpSpPr>
-        <p:grpSpPr>
-          <a:xfrm>
-            <a:off x="160868" y="182032"/>
-            <a:ext cx="4780852" cy="6493935"/>
-            <a:chOff x="160868" y="182032"/>
-            <a:chExt cx="4780852" cy="6493935"/>
-          </a:xfrm>
-        </p:grpSpPr>
-        <p:sp>
-          <p:nvSpPr>
-            <p:cNvPr id="4" name="Rectangle 3">
-              <a:extLst>
-                <a:ext uri="{FF2B5EF4-FFF2-40B4-BE49-F238E27FC236}">
-                  <a16:creationId xmlns:a16="http://schemas.microsoft.com/office/drawing/2014/main" id="{7B702E0D-FD8D-4F00-8F9D-9ACEED91C763}"/>
-                </a:ext>
-              </a:extLst>
-            </p:cNvPr>
-            <p:cNvSpPr/>
-            <p:nvPr/>
-          </p:nvSpPr>
-          <p:spPr>
-            <a:xfrm>
-              <a:off x="160868" y="182032"/>
-              <a:ext cx="4648200" cy="6493935"/>
-            </a:xfrm>
-            <a:prstGeom prst="rect">
-              <a:avLst/>
-            </a:prstGeom>
-            <a:noFill/>
-            <a:ln w="19050" cmpd="thinThick">
-              <a:solidFill>
-                <a:schemeClr val="tx1">
-                  <a:lumMod val="50000"/>
-                  <a:lumOff val="50000"/>
-                </a:schemeClr>
-              </a:solidFill>
-            </a:ln>
-          </p:spPr>
-          <p:style>
-            <a:lnRef idx="2">
-              <a:schemeClr val="accent1">
-                <a:shade val="50000"/>
-              </a:schemeClr>
-            </a:lnRef>
-            <a:fillRef idx="1">
-              <a:schemeClr val="accent1"/>
-            </a:fillRef>
-            <a:effectRef idx="0">
-              <a:schemeClr val="accent1"/>
-            </a:effectRef>
-            <a:fontRef idx="minor">
-              <a:schemeClr val="lt1"/>
-            </a:fontRef>
-          </p:style>
-          <p:txBody>
-            <a:bodyPr rtlCol="0" anchor="ctr"/>
-            <a:lstStyle/>
-            <a:p>
-              <a:pPr algn="ctr"/>
-              <a:endParaRPr lang="en-IN"/>
-            </a:p>
-          </p:txBody>
-        </p:sp>
-        <p:sp>
-          <p:nvSpPr>
-            <p:cNvPr id="7" name="TextBox 6">
-              <a:extLst>
-                <a:ext uri="{FF2B5EF4-FFF2-40B4-BE49-F238E27FC236}">
-                  <a16:creationId xmlns:a16="http://schemas.microsoft.com/office/drawing/2014/main" id="{C5F65C11-52F8-415B-A70B-C02268F6F4A1}"/>
-                </a:ext>
-              </a:extLst>
-            </p:cNvPr>
-            <p:cNvSpPr txBox="1"/>
-            <p:nvPr/>
-          </p:nvSpPr>
-          <p:spPr>
-            <a:xfrm>
-              <a:off x="293520" y="758873"/>
-              <a:ext cx="4648200" cy="5847755"/>
-            </a:xfrm>
-            <a:prstGeom prst="rect">
-              <a:avLst/>
-            </a:prstGeom>
-            <a:noFill/>
-          </p:spPr>
-          <p:txBody>
-            <a:bodyPr wrap="square" rtlCol="0">
-              <a:spAutoFit/>
-            </a:bodyPr>
-            <a:lstStyle/>
-            <a:p>
-              <a:pPr defTabSz="439781">
-                <a:defRPr/>
-              </a:pPr>
-              <a:r>
-                <a:rPr lang="te-IN" sz="2200" dirty="0">
-                  <a:latin typeface="Ramabhadra" panose="02000600000000000000" pitchFamily="2" charset="0"/>
-                  <a:cs typeface="Ramabhadra" panose="02000600000000000000" pitchFamily="2" charset="0"/>
-                </a:rPr>
-                <a:t>కృపలను తలంచుచు (2)</a:t>
-              </a:r>
-            </a:p>
-            <a:p>
-              <a:pPr defTabSz="439781">
-                <a:defRPr/>
-              </a:pPr>
-              <a:r>
-                <a:rPr lang="te-IN" sz="2200" dirty="0">
-                  <a:latin typeface="Ramabhadra" panose="02000600000000000000" pitchFamily="2" charset="0"/>
-                  <a:cs typeface="Ramabhadra" panose="02000600000000000000" pitchFamily="2" charset="0"/>
-                </a:rPr>
-                <a:t>ఆయుష్కాలమంతా ప్రభుని</a:t>
-              </a:r>
-            </a:p>
-            <a:p>
-              <a:pPr defTabSz="439781">
-                <a:defRPr/>
-              </a:pPr>
-              <a:r>
-                <a:rPr lang="te-IN" sz="2200" dirty="0">
-                  <a:latin typeface="Ramabhadra" panose="02000600000000000000" pitchFamily="2" charset="0"/>
-                  <a:cs typeface="Ramabhadra" panose="02000600000000000000" pitchFamily="2" charset="0"/>
-                </a:rPr>
-                <a:t>కృతజ్ఞతతో స్తుతింతున్ (2)</a:t>
-              </a:r>
-            </a:p>
-            <a:p>
-              <a:pPr defTabSz="439781">
-                <a:defRPr/>
-              </a:pPr>
-              <a:endParaRPr lang="te-IN" sz="2200" dirty="0">
-                <a:latin typeface="Ramabhadra" panose="02000600000000000000" pitchFamily="2" charset="0"/>
-                <a:cs typeface="Ramabhadra" panose="02000600000000000000" pitchFamily="2" charset="0"/>
-              </a:endParaRPr>
-            </a:p>
-            <a:p>
-              <a:pPr defTabSz="439781">
-                <a:defRPr/>
-              </a:pPr>
-              <a:r>
-                <a:rPr lang="te-IN" sz="2200" dirty="0">
-                  <a:latin typeface="Ramabhadra" panose="02000600000000000000" pitchFamily="2" charset="0"/>
-                  <a:cs typeface="Ramabhadra" panose="02000600000000000000" pitchFamily="2" charset="0"/>
-                </a:rPr>
-                <a:t>రూపింపబడుచున్న</a:t>
-              </a:r>
-            </a:p>
-            <a:p>
-              <a:pPr defTabSz="439781">
-                <a:defRPr/>
-              </a:pPr>
-              <a:r>
-                <a:rPr lang="te-IN" sz="2200" dirty="0">
-                  <a:latin typeface="Ramabhadra" panose="02000600000000000000" pitchFamily="2" charset="0"/>
-                  <a:cs typeface="Ramabhadra" panose="02000600000000000000" pitchFamily="2" charset="0"/>
-                </a:rPr>
-                <a:t>ఏ ఆయుధముండినను (2)</a:t>
-              </a:r>
-            </a:p>
-            <a:p>
-              <a:pPr defTabSz="439781">
-                <a:defRPr/>
-              </a:pPr>
-              <a:r>
-                <a:rPr lang="te-IN" sz="2200" dirty="0">
-                  <a:latin typeface="Ramabhadra" panose="02000600000000000000" pitchFamily="2" charset="0"/>
-                  <a:cs typeface="Ramabhadra" panose="02000600000000000000" pitchFamily="2" charset="0"/>
-                </a:rPr>
-                <a:t>నాకు విరోధమై వర్ధిల్లదు యని</a:t>
-              </a:r>
-            </a:p>
-            <a:p>
-              <a:pPr defTabSz="439781">
-                <a:defRPr/>
-              </a:pPr>
-              <a:r>
-                <a:rPr lang="te-IN" sz="2200" dirty="0">
-                  <a:latin typeface="Ramabhadra" panose="02000600000000000000" pitchFamily="2" charset="0"/>
-                  <a:cs typeface="Ramabhadra" panose="02000600000000000000" pitchFamily="2" charset="0"/>
-                </a:rPr>
-                <a:t>చెప్పిన మాట సత్యం – (2)</a:t>
-              </a:r>
-              <a:endParaRPr lang="en-IN" sz="2200" dirty="0">
-                <a:latin typeface="Ramabhadra" panose="02000600000000000000" pitchFamily="2" charset="0"/>
-                <a:cs typeface="Ramabhadra" panose="02000600000000000000" pitchFamily="2" charset="0"/>
-              </a:endParaRPr>
-            </a:p>
-            <a:p>
-              <a:pPr defTabSz="439781">
-                <a:defRPr/>
-              </a:pPr>
-              <a:endParaRPr lang="en-IN" sz="2200" dirty="0">
-                <a:latin typeface="Ramabhadra" panose="02000600000000000000" pitchFamily="2" charset="0"/>
-                <a:cs typeface="Ramabhadra" panose="02000600000000000000" pitchFamily="2" charset="0"/>
-              </a:endParaRPr>
-            </a:p>
-            <a:p>
-              <a:pPr defTabSz="439781">
-                <a:defRPr/>
-              </a:pPr>
-              <a:r>
-                <a:rPr lang="te-IN" sz="2200" dirty="0">
-                  <a:latin typeface="Ramabhadra" panose="02000600000000000000" pitchFamily="2" charset="0"/>
-                  <a:cs typeface="Ramabhadra" panose="02000600000000000000" pitchFamily="2" charset="0"/>
-                </a:rPr>
-                <a:t>కన్నీటి లోయలలో నే కృంగిన వేళలలో (2)</a:t>
-              </a:r>
-              <a:br>
-                <a:rPr lang="te-IN" sz="2200" dirty="0">
-                  <a:latin typeface="Ramabhadra" panose="02000600000000000000" pitchFamily="2" charset="0"/>
-                  <a:cs typeface="Ramabhadra" panose="02000600000000000000" pitchFamily="2" charset="0"/>
-                </a:rPr>
-              </a:br>
-              <a:r>
-                <a:rPr lang="te-IN" sz="2200" dirty="0">
-                  <a:latin typeface="Ramabhadra" panose="02000600000000000000" pitchFamily="2" charset="0"/>
-                  <a:cs typeface="Ramabhadra" panose="02000600000000000000" pitchFamily="2" charset="0"/>
-                </a:rPr>
-                <a:t>నింగిని చీల్చి వర్షము పంపి </a:t>
-              </a:r>
-              <a:br>
-                <a:rPr lang="te-IN" sz="2200" dirty="0">
-                  <a:latin typeface="Ramabhadra" panose="02000600000000000000" pitchFamily="2" charset="0"/>
-                  <a:cs typeface="Ramabhadra" panose="02000600000000000000" pitchFamily="2" charset="0"/>
-                </a:rPr>
-              </a:br>
-              <a:r>
-                <a:rPr lang="te-IN" sz="2200" dirty="0">
-                  <a:latin typeface="Ramabhadra" panose="02000600000000000000" pitchFamily="2" charset="0"/>
-                  <a:cs typeface="Ramabhadra" panose="02000600000000000000" pitchFamily="2" charset="0"/>
-                </a:rPr>
-                <a:t>నింపెను నా హృదయం (యేసు)</a:t>
-              </a:r>
-            </a:p>
-            <a:p>
-              <a:pPr defTabSz="439781">
-                <a:defRPr/>
-              </a:pPr>
-              <a:endParaRPr lang="en-IN" sz="2200" dirty="0">
-                <a:latin typeface="Ramabhadra" panose="02000600000000000000" pitchFamily="2" charset="0"/>
-                <a:cs typeface="Ramabhadra" panose="02000600000000000000" pitchFamily="2" charset="0"/>
-              </a:endParaRPr>
-            </a:p>
-            <a:p>
-              <a:pPr defTabSz="439781">
-                <a:defRPr/>
-              </a:pPr>
-              <a:r>
-                <a:rPr lang="te-IN" sz="2200" dirty="0">
-                  <a:latin typeface="Ramabhadra" panose="02000600000000000000" pitchFamily="2" charset="0"/>
-                  <a:cs typeface="Ramabhadra" panose="02000600000000000000" pitchFamily="2" charset="0"/>
-                </a:rPr>
-                <a:t>హల్లెలూయా ఆమెన్ ఆ.. నాకెంతో ఆనందమే (2)</a:t>
-              </a:r>
-            </a:p>
-            <a:p>
-              <a:pPr defTabSz="439781">
-                <a:defRPr/>
-              </a:pPr>
-              <a:r>
-                <a:rPr lang="te-IN" sz="2200" dirty="0">
-                  <a:latin typeface="Ramabhadra" panose="02000600000000000000" pitchFamily="2" charset="0"/>
-                  <a:cs typeface="Ramabhadra" panose="02000600000000000000" pitchFamily="2" charset="0"/>
-                </a:rPr>
-                <a:t>సీయోను నివాసం నాకెంతో ఆనందం</a:t>
-              </a:r>
-            </a:p>
-            <a:p>
-              <a:pPr defTabSz="439781">
-                <a:defRPr/>
-              </a:pPr>
-              <a:r>
-                <a:rPr lang="te-IN" sz="2200" dirty="0">
-                  <a:latin typeface="Ramabhadra" panose="02000600000000000000" pitchFamily="2" charset="0"/>
-                  <a:cs typeface="Ramabhadra" panose="02000600000000000000" pitchFamily="2" charset="0"/>
-                </a:rPr>
-                <a:t>ఆనందమానందమే – (2)</a:t>
-              </a:r>
-              <a:endParaRPr lang="en-IN" sz="2200" dirty="0">
-                <a:latin typeface="Ramabhadra" panose="02000600000000000000" pitchFamily="2" charset="0"/>
-                <a:cs typeface="Ramabhadra" panose="02000600000000000000" pitchFamily="2" charset="0"/>
-              </a:endParaRPr>
-            </a:p>
-            <a:p>
-              <a:endParaRPr lang="en-IN" sz="2200" dirty="0"/>
-            </a:p>
-          </p:txBody>
-        </p:sp>
-        <p:sp>
-          <p:nvSpPr>
-            <p:cNvPr id="8" name="Oval 7">
-              <a:extLst>
-                <a:ext uri="{FF2B5EF4-FFF2-40B4-BE49-F238E27FC236}">
-                  <a16:creationId xmlns:a16="http://schemas.microsoft.com/office/drawing/2014/main" id="{B70ED263-63AA-434F-8E88-AB7AD897A1CD}"/>
-                </a:ext>
-              </a:extLst>
-            </p:cNvPr>
-            <p:cNvSpPr/>
-            <p:nvPr/>
-          </p:nvSpPr>
-          <p:spPr>
-            <a:xfrm>
-              <a:off x="343961" y="326430"/>
-              <a:ext cx="390525" cy="390525"/>
-            </a:xfrm>
-            <a:prstGeom prst="ellipse">
-              <a:avLst/>
-            </a:prstGeom>
-            <a:noFill/>
-            <a:ln w="19050">
-              <a:solidFill>
-                <a:schemeClr val="tx1">
-                  <a:lumMod val="50000"/>
-                  <a:lumOff val="50000"/>
-                </a:schemeClr>
-              </a:solidFill>
-            </a:ln>
-          </p:spPr>
-          <p:style>
-            <a:lnRef idx="2">
-              <a:schemeClr val="accent1">
-                <a:shade val="50000"/>
-              </a:schemeClr>
-            </a:lnRef>
-            <a:fillRef idx="1">
-              <a:schemeClr val="accent1"/>
-            </a:fillRef>
-            <a:effectRef idx="0">
-              <a:schemeClr val="accent1"/>
-            </a:effectRef>
-            <a:fontRef idx="minor">
-              <a:schemeClr val="lt1"/>
-            </a:fontRef>
-          </p:style>
-          <p:txBody>
-            <a:bodyPr rtlCol="0" anchor="ctr"/>
-            <a:lstStyle/>
-            <a:p>
-              <a:pPr algn="ctr"/>
-              <a:r>
-                <a:rPr lang="en-IN" dirty="0">
-                  <a:solidFill>
-                    <a:schemeClr val="tx1"/>
-                  </a:solidFill>
-                </a:rPr>
-                <a:t>2</a:t>
               </a:r>
             </a:p>
           </p:txBody>
@@ -4211,8 +3502,8 @@
           </p:nvSpPr>
           <p:spPr>
             <a:xfrm>
-              <a:off x="343961" y="797511"/>
-              <a:ext cx="4541306" cy="5262979"/>
+              <a:off x="343961" y="841707"/>
+              <a:ext cx="4541306" cy="4832092"/>
             </a:xfrm>
             <a:prstGeom prst="rect">
               <a:avLst/>
@@ -4229,11 +3520,370 @@
                 <a:defRPr/>
               </a:pPr>
               <a:r>
+                <a:rPr lang="te-IN" sz="2200" dirty="0">
+                  <a:latin typeface="Ramabhadra" panose="02000600000000000000" pitchFamily="2" charset="0"/>
+                  <a:cs typeface="Ramabhadra" panose="02000600000000000000" pitchFamily="2" charset="0"/>
+                </a:rPr>
+                <a:t>స్తోత్రము చెల్లించెదము మన యేసుకే</a:t>
+              </a:r>
+            </a:p>
+            <a:p>
+              <a:pPr defTabSz="439781">
+                <a:defRPr/>
+              </a:pPr>
+              <a:r>
+                <a:rPr lang="te-IN" sz="2200" dirty="0">
+                  <a:latin typeface="Ramabhadra" panose="02000600000000000000" pitchFamily="2" charset="0"/>
+                  <a:cs typeface="Ramabhadra" panose="02000600000000000000" pitchFamily="2" charset="0"/>
+                </a:rPr>
+                <a:t>స్తోత్రము చెల్లించెదము</a:t>
+              </a:r>
+            </a:p>
+            <a:p>
+              <a:pPr defTabSz="439781">
+                <a:defRPr/>
+              </a:pPr>
+              <a:r>
+                <a:rPr lang="te-IN" sz="2200" dirty="0">
+                  <a:latin typeface="Ramabhadra" panose="02000600000000000000" pitchFamily="2" charset="0"/>
+                  <a:cs typeface="Ramabhadra" panose="02000600000000000000" pitchFamily="2" charset="0"/>
+                </a:rPr>
+                <a:t>మంచివాడు గొప్పవాడు మన దేవుడు</a:t>
+              </a:r>
+            </a:p>
+            <a:p>
+              <a:pPr defTabSz="439781">
+                <a:defRPr/>
+              </a:pPr>
+              <a:r>
+                <a:rPr lang="te-IN" sz="2200" dirty="0">
+                  <a:latin typeface="Ramabhadra" panose="02000600000000000000" pitchFamily="2" charset="0"/>
+                  <a:cs typeface="Ramabhadra" panose="02000600000000000000" pitchFamily="2" charset="0"/>
+                </a:rPr>
+                <a:t>వాక్యమునిచ్చు దేవుడు (2)</a:t>
+              </a:r>
+            </a:p>
+            <a:p>
+              <a:pPr defTabSz="439781">
+                <a:defRPr/>
+              </a:pPr>
+              <a:endParaRPr lang="te-IN" sz="2200" dirty="0">
+                <a:latin typeface="Ramabhadra" panose="02000600000000000000" pitchFamily="2" charset="0"/>
+                <a:cs typeface="Ramabhadra" panose="02000600000000000000" pitchFamily="2" charset="0"/>
+              </a:endParaRPr>
+            </a:p>
+            <a:p>
+              <a:pPr defTabSz="439781">
+                <a:defRPr/>
+              </a:pPr>
+              <a:r>
+                <a:rPr lang="te-IN" sz="2200" dirty="0">
+                  <a:latin typeface="Ramabhadra" panose="02000600000000000000" pitchFamily="2" charset="0"/>
+                  <a:cs typeface="Ramabhadra" panose="02000600000000000000" pitchFamily="2" charset="0"/>
+                </a:rPr>
+                <a:t>యెరికో మనకు ముందు వచ్చినా –</a:t>
+              </a:r>
+            </a:p>
+            <a:p>
+              <a:pPr defTabSz="439781">
+                <a:defRPr/>
+              </a:pPr>
+              <a:r>
+                <a:rPr lang="te-IN" sz="2200" dirty="0">
+                  <a:latin typeface="Ramabhadra" panose="02000600000000000000" pitchFamily="2" charset="0"/>
+                  <a:cs typeface="Ramabhadra" panose="02000600000000000000" pitchFamily="2" charset="0"/>
+                </a:rPr>
+                <a:t>క్రీస్తు యేసు ముందే నిలుచును</a:t>
+              </a:r>
+            </a:p>
+            <a:p>
+              <a:pPr defTabSz="439781">
+                <a:defRPr/>
+              </a:pPr>
+              <a:r>
+                <a:rPr lang="te-IN" sz="2200" dirty="0">
+                  <a:latin typeface="Ramabhadra" panose="02000600000000000000" pitchFamily="2" charset="0"/>
+                  <a:cs typeface="Ramabhadra" panose="02000600000000000000" pitchFamily="2" charset="0"/>
+                </a:rPr>
+                <a:t>భయపడకు దిగులు పడకు -</a:t>
+              </a:r>
+            </a:p>
+            <a:p>
+              <a:pPr defTabSz="439781">
+                <a:defRPr/>
+              </a:pPr>
+              <a:r>
+                <a:rPr lang="te-IN" sz="2200" dirty="0">
+                  <a:latin typeface="Ramabhadra" panose="02000600000000000000" pitchFamily="2" charset="0"/>
+                  <a:cs typeface="Ramabhadra" panose="02000600000000000000" pitchFamily="2" charset="0"/>
+                </a:rPr>
+                <a:t>ప్రార్ధించి స్తుతియించుము</a:t>
+              </a:r>
+            </a:p>
+            <a:p>
+              <a:pPr defTabSz="439781">
+                <a:defRPr/>
+              </a:pPr>
+              <a:endParaRPr lang="te-IN" sz="2200" dirty="0">
+                <a:latin typeface="Ramabhadra" panose="02000600000000000000" pitchFamily="2" charset="0"/>
+                <a:cs typeface="Ramabhadra" panose="02000600000000000000" pitchFamily="2" charset="0"/>
+              </a:endParaRPr>
+            </a:p>
+            <a:p>
+              <a:pPr defTabSz="439781">
+                <a:defRPr/>
+              </a:pPr>
+              <a:r>
+                <a:rPr lang="te-IN" sz="2200" dirty="0">
+                  <a:latin typeface="Ramabhadra" panose="02000600000000000000" pitchFamily="2" charset="0"/>
+                  <a:cs typeface="Ramabhadra" panose="02000600000000000000" pitchFamily="2" charset="0"/>
+                </a:rPr>
+                <a:t>గొల్యాత్ మనకు ఎదురు వచ్చినా –</a:t>
+              </a:r>
+            </a:p>
+            <a:p>
+              <a:pPr defTabSz="439781">
+                <a:defRPr/>
+              </a:pPr>
+              <a:r>
+                <a:rPr lang="te-IN" sz="2200" dirty="0">
+                  <a:latin typeface="Ramabhadra" panose="02000600000000000000" pitchFamily="2" charset="0"/>
+                  <a:cs typeface="Ramabhadra" panose="02000600000000000000" pitchFamily="2" charset="0"/>
+                </a:rPr>
+                <a:t>క్రీస్తుయేసు ముందే నిలుచును</a:t>
+              </a:r>
+            </a:p>
+            <a:p>
+              <a:pPr defTabSz="439781">
+                <a:defRPr/>
+              </a:pPr>
+              <a:r>
+                <a:rPr lang="te-IN" sz="2200" dirty="0">
+                  <a:latin typeface="Ramabhadra" panose="02000600000000000000" pitchFamily="2" charset="0"/>
+                  <a:cs typeface="Ramabhadra" panose="02000600000000000000" pitchFamily="2" charset="0"/>
+                </a:rPr>
+                <a:t>హల్లేలూయా – హల్లేలూయా</a:t>
+              </a:r>
+            </a:p>
+            <a:p>
+              <a:pPr defTabSz="439781">
+                <a:defRPr/>
+              </a:pPr>
+              <a:r>
+                <a:rPr lang="te-IN" sz="2200" dirty="0">
+                  <a:latin typeface="Ramabhadra" panose="02000600000000000000" pitchFamily="2" charset="0"/>
+                  <a:cs typeface="Ramabhadra" panose="02000600000000000000" pitchFamily="2" charset="0"/>
+                </a:rPr>
+                <a:t>జయమని పాడెదమూ</a:t>
+              </a:r>
+            </a:p>
+          </p:txBody>
+        </p:sp>
+        <p:sp>
+          <p:nvSpPr>
+            <p:cNvPr id="13" name="Oval 12">
+              <a:extLst>
+                <a:ext uri="{FF2B5EF4-FFF2-40B4-BE49-F238E27FC236}">
+                  <a16:creationId xmlns:a16="http://schemas.microsoft.com/office/drawing/2014/main" id="{26F461D1-594E-4D24-8238-761378173A6A}"/>
+                </a:ext>
+              </a:extLst>
+            </p:cNvPr>
+            <p:cNvSpPr/>
+            <p:nvPr/>
+          </p:nvSpPr>
+          <p:spPr>
+            <a:xfrm>
+              <a:off x="343961" y="326430"/>
+              <a:ext cx="390525" cy="390525"/>
+            </a:xfrm>
+            <a:prstGeom prst="ellipse">
+              <a:avLst/>
+            </a:prstGeom>
+            <a:noFill/>
+            <a:ln w="19050">
+              <a:solidFill>
+                <a:schemeClr val="tx1">
+                  <a:lumMod val="50000"/>
+                  <a:lumOff val="50000"/>
+                </a:schemeClr>
+              </a:solidFill>
+            </a:ln>
+          </p:spPr>
+          <p:style>
+            <a:lnRef idx="2">
+              <a:schemeClr val="accent1">
+                <a:shade val="50000"/>
+              </a:schemeClr>
+            </a:lnRef>
+            <a:fillRef idx="1">
+              <a:schemeClr val="accent1"/>
+            </a:fillRef>
+            <a:effectRef idx="0">
+              <a:schemeClr val="accent1"/>
+            </a:effectRef>
+            <a:fontRef idx="minor">
+              <a:schemeClr val="lt1"/>
+            </a:fontRef>
+          </p:style>
+          <p:txBody>
+            <a:bodyPr rtlCol="0" anchor="ctr"/>
+            <a:lstStyle/>
+            <a:p>
+              <a:pPr algn="ctr"/>
+              <a:r>
+                <a:rPr lang="en-IN" dirty="0">
+                  <a:solidFill>
+                    <a:schemeClr val="tx1"/>
+                  </a:solidFill>
+                </a:rPr>
+                <a:t>1</a:t>
+              </a:r>
+            </a:p>
+          </p:txBody>
+        </p:sp>
+      </p:grpSp>
+    </p:spTree>
+    <p:extLst>
+      <p:ext uri="{BB962C8B-B14F-4D97-AF65-F5344CB8AC3E}">
+        <p14:creationId xmlns:p14="http://schemas.microsoft.com/office/powerpoint/2010/main" val="3342490066"/>
+      </p:ext>
+    </p:extLst>
+  </p:cSld>
+  <p:clrMapOvr>
+    <a:masterClrMapping/>
+  </p:clrMapOvr>
+</p:sld>
+</file>
+
+<file path=ppt/slides/slide2.xml><?xml version="1.0" encoding="utf-8"?>
+<p:sld xmlns:a="http://schemas.openxmlformats.org/drawingml/2006/main" xmlns:r="http://schemas.openxmlformats.org/officeDocument/2006/relationships" xmlns:p="http://schemas.openxmlformats.org/presentationml/2006/main">
+  <p:cSld>
+    <p:spTree>
+      <p:nvGrpSpPr>
+        <p:cNvPr id="1" name=""/>
+        <p:cNvGrpSpPr/>
+        <p:nvPr/>
+      </p:nvGrpSpPr>
+      <p:grpSpPr>
+        <a:xfrm>
+          <a:off x="0" y="0"/>
+          <a:ext cx="0" cy="0"/>
+          <a:chOff x="0" y="0"/>
+          <a:chExt cx="0" cy="0"/>
+        </a:xfrm>
+      </p:grpSpPr>
+      <p:grpSp>
+        <p:nvGrpSpPr>
+          <p:cNvPr id="9" name="Group 8">
+            <a:extLst>
+              <a:ext uri="{FF2B5EF4-FFF2-40B4-BE49-F238E27FC236}">
+                <a16:creationId xmlns:a16="http://schemas.microsoft.com/office/drawing/2014/main" id="{A7E1EC36-C610-4951-92FB-5FA9BAA559EC}"/>
+              </a:ext>
+            </a:extLst>
+          </p:cNvPr>
+          <p:cNvGrpSpPr/>
+          <p:nvPr/>
+        </p:nvGrpSpPr>
+        <p:grpSpPr>
+          <a:xfrm>
+            <a:off x="160868" y="182032"/>
+            <a:ext cx="4767793" cy="6493935"/>
+            <a:chOff x="160868" y="182032"/>
+            <a:chExt cx="4767793" cy="6493935"/>
+          </a:xfrm>
+        </p:grpSpPr>
+        <p:sp>
+          <p:nvSpPr>
+            <p:cNvPr id="4" name="Rectangle 3">
+              <a:extLst>
+                <a:ext uri="{FF2B5EF4-FFF2-40B4-BE49-F238E27FC236}">
+                  <a16:creationId xmlns:a16="http://schemas.microsoft.com/office/drawing/2014/main" id="{7B702E0D-FD8D-4F00-8F9D-9ACEED91C763}"/>
+                </a:ext>
+              </a:extLst>
+            </p:cNvPr>
+            <p:cNvSpPr/>
+            <p:nvPr/>
+          </p:nvSpPr>
+          <p:spPr>
+            <a:xfrm>
+              <a:off x="160868" y="182032"/>
+              <a:ext cx="4648200" cy="6493935"/>
+            </a:xfrm>
+            <a:prstGeom prst="rect">
+              <a:avLst/>
+            </a:prstGeom>
+            <a:noFill/>
+            <a:ln w="19050" cmpd="thinThick">
+              <a:solidFill>
+                <a:schemeClr val="tx1">
+                  <a:lumMod val="50000"/>
+                  <a:lumOff val="50000"/>
+                </a:schemeClr>
+              </a:solidFill>
+            </a:ln>
+          </p:spPr>
+          <p:style>
+            <a:lnRef idx="2">
+              <a:schemeClr val="accent1">
+                <a:shade val="50000"/>
+              </a:schemeClr>
+            </a:lnRef>
+            <a:fillRef idx="1">
+              <a:schemeClr val="accent1"/>
+            </a:fillRef>
+            <a:effectRef idx="0">
+              <a:schemeClr val="accent1"/>
+            </a:effectRef>
+            <a:fontRef idx="minor">
+              <a:schemeClr val="lt1"/>
+            </a:fontRef>
+          </p:style>
+          <p:txBody>
+            <a:bodyPr rtlCol="0" anchor="ctr"/>
+            <a:lstStyle/>
+            <a:p>
+              <a:pPr algn="ctr"/>
+              <a:endParaRPr lang="en-IN"/>
+            </a:p>
+          </p:txBody>
+        </p:sp>
+        <p:sp>
+          <p:nvSpPr>
+            <p:cNvPr id="7" name="TextBox 6">
+              <a:extLst>
+                <a:ext uri="{FF2B5EF4-FFF2-40B4-BE49-F238E27FC236}">
+                  <a16:creationId xmlns:a16="http://schemas.microsoft.com/office/drawing/2014/main" id="{C5F65C11-52F8-415B-A70B-C02268F6F4A1}"/>
+                </a:ext>
+              </a:extLst>
+            </p:cNvPr>
+            <p:cNvSpPr txBox="1"/>
+            <p:nvPr/>
+          </p:nvSpPr>
+          <p:spPr>
+            <a:xfrm>
+              <a:off x="280461" y="835357"/>
+              <a:ext cx="4648200" cy="4154984"/>
+            </a:xfrm>
+            <a:prstGeom prst="rect">
+              <a:avLst/>
+            </a:prstGeom>
+            <a:noFill/>
+          </p:spPr>
+          <p:txBody>
+            <a:bodyPr wrap="square" rtlCol="0">
+              <a:spAutoFit/>
+            </a:bodyPr>
+            <a:lstStyle/>
+            <a:p>
+              <a:pPr defTabSz="439781">
+                <a:defRPr/>
+              </a:pPr>
+              <a:r>
                 <a:rPr lang="te-IN" sz="2400" dirty="0">
                   <a:latin typeface="Ramabhadra" panose="02000600000000000000" pitchFamily="2" charset="0"/>
                   <a:cs typeface="Ramabhadra" panose="02000600000000000000" pitchFamily="2" charset="0"/>
                 </a:rPr>
-                <a:t>నీవు చేసిన ఉపకారములకు</a:t>
+                <a:t>నా కొకరు ఉన్నారు నను ప్రేమించే వారు</a:t>
               </a:r>
             </a:p>
             <a:p>
@@ -4245,7 +3895,7 @@
                   <a:latin typeface="Ramabhadra" panose="02000600000000000000" pitchFamily="2" charset="0"/>
                   <a:cs typeface="Ramabhadra" panose="02000600000000000000" pitchFamily="2" charset="0"/>
                 </a:rPr>
-                <a:t>నేనేమి చెల్లింతును (2)</a:t>
+                <a:t>అడవులలో అల్లాడగా కరుణతో నను వెదకెను  </a:t>
               </a:r>
             </a:p>
             <a:p>
@@ -4257,19 +3907,7 @@
                   <a:latin typeface="Ramabhadra" panose="02000600000000000000" pitchFamily="2" charset="0"/>
                   <a:cs typeface="Ramabhadra" panose="02000600000000000000" pitchFamily="2" charset="0"/>
                 </a:rPr>
-                <a:t>ఏడాది దూడెలనా...</a:t>
-              </a:r>
-            </a:p>
-            <a:p>
-              <a:pPr defTabSz="439781">
-                <a:defRPr/>
-              </a:pPr>
-              <a:r>
-                <a:rPr lang="te-IN" sz="2400" dirty="0">
-                  <a:latin typeface="Ramabhadra" panose="02000600000000000000" pitchFamily="2" charset="0"/>
-                  <a:cs typeface="Ramabhadra" panose="02000600000000000000" pitchFamily="2" charset="0"/>
-                </a:rPr>
-                <a:t>వేలాది పోట్టేల్లనా (2)</a:t>
+                <a:t>ఆయనేసు... ఆయనేసు... </a:t>
               </a:r>
             </a:p>
             <a:p>
@@ -4290,7 +3928,7 @@
                   <a:latin typeface="Ramabhadra" panose="02000600000000000000" pitchFamily="2" charset="0"/>
                   <a:cs typeface="Ramabhadra" panose="02000600000000000000" pitchFamily="2" charset="0"/>
                 </a:rPr>
-                <a:t>వేలాది నదులంత విస్తార తైలము</a:t>
+                <a:t>మందలోని గొర్రెవలె మతి తప్పితిరిగితిని</a:t>
               </a:r>
             </a:p>
             <a:p>
@@ -4302,7 +3940,7 @@
                   <a:latin typeface="Ramabhadra" panose="02000600000000000000" pitchFamily="2" charset="0"/>
                   <a:cs typeface="Ramabhadra" panose="02000600000000000000" pitchFamily="2" charset="0"/>
                 </a:rPr>
-                <a:t>నీకిచ్చినా చాలునా (2)</a:t>
+                <a:t>కాపరివై వెదకి వచ్చి తనఒడి చేర్చుకొనున్</a:t>
               </a:r>
             </a:p>
             <a:p>
@@ -4314,19 +3952,7 @@
                   <a:latin typeface="Ramabhadra" panose="02000600000000000000" pitchFamily="2" charset="0"/>
                   <a:cs typeface="Ramabhadra" panose="02000600000000000000" pitchFamily="2" charset="0"/>
                 </a:rPr>
-                <a:t>గర్భ ఫలమైన నా జేష్ట పుత్రుని</a:t>
-              </a:r>
-            </a:p>
-            <a:p>
-              <a:pPr defTabSz="439781">
-                <a:defRPr/>
-              </a:pPr>
-              <a:r>
-                <a:rPr lang="te-IN" sz="2400" dirty="0">
-                  <a:latin typeface="Ramabhadra" panose="02000600000000000000" pitchFamily="2" charset="0"/>
-                  <a:cs typeface="Ramabhadra" panose="02000600000000000000" pitchFamily="2" charset="0"/>
-                </a:rPr>
-                <a:t>నీకిచ్చినా చాలునా (2)</a:t>
+                <a:t>ఆయనేసు... ఆయనేసు... </a:t>
               </a:r>
             </a:p>
             <a:p>
@@ -4347,7 +3973,7 @@
                   <a:latin typeface="Ramabhadra" panose="02000600000000000000" pitchFamily="2" charset="0"/>
                   <a:cs typeface="Ramabhadra" panose="02000600000000000000" pitchFamily="2" charset="0"/>
                 </a:rPr>
-                <a:t>మరణపాత్రుడనైయున్న నాకై</a:t>
+                <a:t>నన్నెరిగి నను పిలువ నా రాజుని ఎరిగితిని</a:t>
               </a:r>
             </a:p>
             <a:p>
@@ -4359,7 +3985,7 @@
                   <a:latin typeface="Ramabhadra" panose="02000600000000000000" pitchFamily="2" charset="0"/>
                   <a:cs typeface="Ramabhadra" panose="02000600000000000000" pitchFamily="2" charset="0"/>
                 </a:rPr>
-                <a:t>మరణించితివి సిలువలో (2)</a:t>
+                <a:t>పరమున నను చేర్చెన్  పరిశుద్ధునిగా మార్చెన్</a:t>
               </a:r>
             </a:p>
             <a:p>
@@ -4371,19 +3997,384 @@
                   <a:latin typeface="Ramabhadra" panose="02000600000000000000" pitchFamily="2" charset="0"/>
                   <a:cs typeface="Ramabhadra" panose="02000600000000000000" pitchFamily="2" charset="0"/>
                 </a:rPr>
-                <a:t>కరుణ చూపి నీ జీవ మార్గాన</a:t>
-              </a:r>
-            </a:p>
-            <a:p>
-              <a:pPr defTabSz="439781">
-                <a:defRPr/>
-              </a:pPr>
-              <a:r>
-                <a:rPr lang="te-IN" sz="2400" dirty="0">
-                  <a:latin typeface="Ramabhadra" panose="02000600000000000000" pitchFamily="2" charset="0"/>
-                  <a:cs typeface="Ramabhadra" panose="02000600000000000000" pitchFamily="2" charset="0"/>
-                </a:rPr>
-                <a:t>నడిపించుమో యేసయ్యా (2)</a:t>
+                <a:t>ఆయనేసు... ఆయనేసు... </a:t>
+              </a:r>
+            </a:p>
+          </p:txBody>
+        </p:sp>
+        <p:sp>
+          <p:nvSpPr>
+            <p:cNvPr id="8" name="Oval 7">
+              <a:extLst>
+                <a:ext uri="{FF2B5EF4-FFF2-40B4-BE49-F238E27FC236}">
+                  <a16:creationId xmlns:a16="http://schemas.microsoft.com/office/drawing/2014/main" id="{B70ED263-63AA-434F-8E88-AB7AD897A1CD}"/>
+                </a:ext>
+              </a:extLst>
+            </p:cNvPr>
+            <p:cNvSpPr/>
+            <p:nvPr/>
+          </p:nvSpPr>
+          <p:spPr>
+            <a:xfrm>
+              <a:off x="343961" y="326430"/>
+              <a:ext cx="390525" cy="390525"/>
+            </a:xfrm>
+            <a:prstGeom prst="ellipse">
+              <a:avLst/>
+            </a:prstGeom>
+            <a:noFill/>
+            <a:ln w="19050">
+              <a:solidFill>
+                <a:schemeClr val="tx1">
+                  <a:lumMod val="50000"/>
+                  <a:lumOff val="50000"/>
+                </a:schemeClr>
+              </a:solidFill>
+            </a:ln>
+          </p:spPr>
+          <p:style>
+            <a:lnRef idx="2">
+              <a:schemeClr val="accent1">
+                <a:shade val="50000"/>
+              </a:schemeClr>
+            </a:lnRef>
+            <a:fillRef idx="1">
+              <a:schemeClr val="accent1"/>
+            </a:fillRef>
+            <a:effectRef idx="0">
+              <a:schemeClr val="accent1"/>
+            </a:effectRef>
+            <a:fontRef idx="minor">
+              <a:schemeClr val="lt1"/>
+            </a:fontRef>
+          </p:style>
+          <p:txBody>
+            <a:bodyPr rtlCol="0" anchor="ctr"/>
+            <a:lstStyle/>
+            <a:p>
+              <a:pPr algn="ctr"/>
+              <a:r>
+                <a:rPr lang="en-IN" dirty="0">
+                  <a:solidFill>
+                    <a:schemeClr val="tx1"/>
+                  </a:solidFill>
+                </a:rPr>
+                <a:t>2</a:t>
+              </a:r>
+            </a:p>
+          </p:txBody>
+        </p:sp>
+      </p:grpSp>
+      <p:grpSp>
+        <p:nvGrpSpPr>
+          <p:cNvPr id="10" name="Group 9">
+            <a:extLst>
+              <a:ext uri="{FF2B5EF4-FFF2-40B4-BE49-F238E27FC236}">
+                <a16:creationId xmlns:a16="http://schemas.microsoft.com/office/drawing/2014/main" id="{BD4861E3-0140-4666-A772-E1339125A35F}"/>
+              </a:ext>
+            </a:extLst>
+          </p:cNvPr>
+          <p:cNvGrpSpPr/>
+          <p:nvPr/>
+        </p:nvGrpSpPr>
+        <p:grpSpPr>
+          <a:xfrm>
+            <a:off x="5104338" y="182031"/>
+            <a:ext cx="5229224" cy="6493935"/>
+            <a:chOff x="160868" y="182032"/>
+            <a:chExt cx="5229224" cy="6493935"/>
+          </a:xfrm>
+        </p:grpSpPr>
+        <p:sp>
+          <p:nvSpPr>
+            <p:cNvPr id="11" name="Rectangle 10">
+              <a:extLst>
+                <a:ext uri="{FF2B5EF4-FFF2-40B4-BE49-F238E27FC236}">
+                  <a16:creationId xmlns:a16="http://schemas.microsoft.com/office/drawing/2014/main" id="{0E606F7A-0439-43E4-A07F-A35A8691EB42}"/>
+                </a:ext>
+              </a:extLst>
+            </p:cNvPr>
+            <p:cNvSpPr/>
+            <p:nvPr/>
+          </p:nvSpPr>
+          <p:spPr>
+            <a:xfrm>
+              <a:off x="160868" y="182032"/>
+              <a:ext cx="4648200" cy="6493935"/>
+            </a:xfrm>
+            <a:prstGeom prst="rect">
+              <a:avLst/>
+            </a:prstGeom>
+            <a:noFill/>
+            <a:ln w="19050" cmpd="thinThick">
+              <a:solidFill>
+                <a:schemeClr val="tx1">
+                  <a:lumMod val="50000"/>
+                  <a:lumOff val="50000"/>
+                </a:schemeClr>
+              </a:solidFill>
+            </a:ln>
+          </p:spPr>
+          <p:style>
+            <a:lnRef idx="2">
+              <a:schemeClr val="accent1">
+                <a:shade val="50000"/>
+              </a:schemeClr>
+            </a:lnRef>
+            <a:fillRef idx="1">
+              <a:schemeClr val="accent1"/>
+            </a:fillRef>
+            <a:effectRef idx="0">
+              <a:schemeClr val="accent1"/>
+            </a:effectRef>
+            <a:fontRef idx="minor">
+              <a:schemeClr val="lt1"/>
+            </a:fontRef>
+          </p:style>
+          <p:txBody>
+            <a:bodyPr rtlCol="0" anchor="ctr"/>
+            <a:lstStyle/>
+            <a:p>
+              <a:pPr algn="ctr"/>
+              <a:endParaRPr lang="en-IN"/>
+            </a:p>
+          </p:txBody>
+        </p:sp>
+        <p:sp>
+          <p:nvSpPr>
+            <p:cNvPr id="12" name="TextBox 11">
+              <a:extLst>
+                <a:ext uri="{FF2B5EF4-FFF2-40B4-BE49-F238E27FC236}">
+                  <a16:creationId xmlns:a16="http://schemas.microsoft.com/office/drawing/2014/main" id="{DD950E5A-63C0-4187-892B-9549599FCD15}"/>
+                </a:ext>
+              </a:extLst>
+            </p:cNvPr>
+            <p:cNvSpPr txBox="1"/>
+            <p:nvPr/>
+          </p:nvSpPr>
+          <p:spPr>
+            <a:xfrm>
+              <a:off x="848786" y="474344"/>
+              <a:ext cx="4541306" cy="5909310"/>
+            </a:xfrm>
+            <a:prstGeom prst="rect">
+              <a:avLst/>
+            </a:prstGeom>
+            <a:noFill/>
+          </p:spPr>
+          <p:txBody>
+            <a:bodyPr wrap="square" rtlCol="0">
+              <a:spAutoFit/>
+            </a:bodyPr>
+            <a:lstStyle/>
+            <a:p>
+              <a:pPr defTabSz="439781">
+                <a:defRPr/>
+              </a:pPr>
+              <a:r>
+                <a:rPr lang="te-IN" sz="2100" dirty="0">
+                  <a:latin typeface="Ramabhadra" panose="02000600000000000000" pitchFamily="2" charset="0"/>
+                  <a:cs typeface="Ramabhadra" panose="02000600000000000000" pitchFamily="2" charset="0"/>
+                </a:rPr>
+                <a:t>నీ ప్రేమ ఎంతో అపారము</a:t>
+              </a:r>
+            </a:p>
+            <a:p>
+              <a:pPr defTabSz="439781">
+                <a:defRPr/>
+              </a:pPr>
+              <a:r>
+                <a:rPr lang="te-IN" sz="2100" dirty="0">
+                  <a:latin typeface="Ramabhadra" panose="02000600000000000000" pitchFamily="2" charset="0"/>
+                  <a:cs typeface="Ramabhadra" panose="02000600000000000000" pitchFamily="2" charset="0"/>
+                </a:rPr>
+                <a:t>వర్ణింపతరమా నా ప్రభూ</a:t>
+              </a:r>
+            </a:p>
+            <a:p>
+              <a:pPr defTabSz="439781">
+                <a:defRPr/>
+              </a:pPr>
+              <a:r>
+                <a:rPr lang="te-IN" sz="2100" dirty="0">
+                  <a:latin typeface="Ramabhadra" panose="02000600000000000000" pitchFamily="2" charset="0"/>
+                  <a:cs typeface="Ramabhadra" panose="02000600000000000000" pitchFamily="2" charset="0"/>
+                </a:rPr>
+                <a:t>పులకింప చేసెను నా హృది</a:t>
+              </a:r>
+            </a:p>
+            <a:p>
+              <a:pPr defTabSz="439781">
+                <a:defRPr/>
+              </a:pPr>
+              <a:r>
+                <a:rPr lang="te-IN" sz="2100" dirty="0">
+                  <a:latin typeface="Ramabhadra" panose="02000600000000000000" pitchFamily="2" charset="0"/>
+                  <a:cs typeface="Ramabhadra" panose="02000600000000000000" pitchFamily="2" charset="0"/>
+                </a:rPr>
+                <a:t>హృదయేశ్వరా నా యేసువా</a:t>
+              </a:r>
+            </a:p>
+            <a:p>
+              <a:pPr defTabSz="439781">
+                <a:defRPr/>
+              </a:pPr>
+              <a:endParaRPr lang="te-IN" sz="2100" dirty="0">
+                <a:latin typeface="Ramabhadra" panose="02000600000000000000" pitchFamily="2" charset="0"/>
+                <a:cs typeface="Ramabhadra" panose="02000600000000000000" pitchFamily="2" charset="0"/>
+              </a:endParaRPr>
+            </a:p>
+            <a:p>
+              <a:pPr defTabSz="439781">
+                <a:defRPr/>
+              </a:pPr>
+              <a:r>
+                <a:rPr lang="te-IN" sz="2100" dirty="0">
+                  <a:latin typeface="Ramabhadra" panose="02000600000000000000" pitchFamily="2" charset="0"/>
+                  <a:cs typeface="Ramabhadra" panose="02000600000000000000" pitchFamily="2" charset="0"/>
+                </a:rPr>
+                <a:t>నన్ను ఎంతో ప్రేమించి</a:t>
+              </a:r>
+            </a:p>
+            <a:p>
+              <a:pPr defTabSz="439781">
+                <a:defRPr/>
+              </a:pPr>
+              <a:r>
+                <a:rPr lang="te-IN" sz="2100" dirty="0">
+                  <a:latin typeface="Ramabhadra" panose="02000600000000000000" pitchFamily="2" charset="0"/>
+                  <a:cs typeface="Ramabhadra" panose="02000600000000000000" pitchFamily="2" charset="0"/>
+                </a:rPr>
+                <a:t>నాదు పాపమె క్షమియించి</a:t>
+              </a:r>
+            </a:p>
+            <a:p>
+              <a:pPr defTabSz="439781">
+                <a:defRPr/>
+              </a:pPr>
+              <a:r>
+                <a:rPr lang="te-IN" sz="2100" dirty="0">
+                  <a:latin typeface="Ramabhadra" panose="02000600000000000000" pitchFamily="2" charset="0"/>
+                  <a:cs typeface="Ramabhadra" panose="02000600000000000000" pitchFamily="2" charset="0"/>
+                </a:rPr>
+                <a:t>కృప కనికరముల నీడలో</a:t>
+              </a:r>
+            </a:p>
+            <a:p>
+              <a:pPr defTabSz="439781">
+                <a:defRPr/>
+              </a:pPr>
+              <a:r>
+                <a:rPr lang="te-IN" sz="2100" dirty="0">
+                  <a:latin typeface="Ramabhadra" panose="02000600000000000000" pitchFamily="2" charset="0"/>
+                  <a:cs typeface="Ramabhadra" panose="02000600000000000000" pitchFamily="2" charset="0"/>
+                </a:rPr>
+                <a:t>నన్ను చేర్చిన నా ప్రభూ</a:t>
+              </a:r>
+            </a:p>
+            <a:p>
+              <a:pPr defTabSz="439781">
+                <a:defRPr/>
+              </a:pPr>
+              <a:r>
+                <a:rPr lang="te-IN" sz="2100" dirty="0">
+                  <a:latin typeface="Ramabhadra" panose="02000600000000000000" pitchFamily="2" charset="0"/>
+                  <a:cs typeface="Ramabhadra" panose="02000600000000000000" pitchFamily="2" charset="0"/>
+                </a:rPr>
+                <a:t>జీవితమంతా స్తుతియించినా</a:t>
+              </a:r>
+            </a:p>
+            <a:p>
+              <a:pPr defTabSz="439781">
+                <a:defRPr/>
+              </a:pPr>
+              <a:r>
+                <a:rPr lang="te-IN" sz="2100" dirty="0">
+                  <a:latin typeface="Ramabhadra" panose="02000600000000000000" pitchFamily="2" charset="0"/>
+                  <a:cs typeface="Ramabhadra" panose="02000600000000000000" pitchFamily="2" charset="0"/>
+                </a:rPr>
+                <a:t>తీరునా నీ ఋణం</a:t>
+              </a:r>
+            </a:p>
+            <a:p>
+              <a:pPr defTabSz="439781">
+                <a:defRPr/>
+              </a:pPr>
+              <a:endParaRPr lang="te-IN" sz="2100" dirty="0">
+                <a:latin typeface="Ramabhadra" panose="02000600000000000000" pitchFamily="2" charset="0"/>
+                <a:cs typeface="Ramabhadra" panose="02000600000000000000" pitchFamily="2" charset="0"/>
+              </a:endParaRPr>
+            </a:p>
+            <a:p>
+              <a:pPr defTabSz="439781">
+                <a:defRPr/>
+              </a:pPr>
+              <a:r>
+                <a:rPr lang="te-IN" sz="2100" dirty="0">
+                  <a:latin typeface="Ramabhadra" panose="02000600000000000000" pitchFamily="2" charset="0"/>
+                  <a:cs typeface="Ramabhadra" panose="02000600000000000000" pitchFamily="2" charset="0"/>
+                </a:rPr>
+                <a:t>నీదు సన్నిధినే కాంక్షించి</a:t>
+              </a:r>
+            </a:p>
+            <a:p>
+              <a:pPr defTabSz="439781">
+                <a:defRPr/>
+              </a:pPr>
+              <a:r>
+                <a:rPr lang="te-IN" sz="2100" dirty="0">
+                  <a:latin typeface="Ramabhadra" panose="02000600000000000000" pitchFamily="2" charset="0"/>
+                  <a:cs typeface="Ramabhadra" panose="02000600000000000000" pitchFamily="2" charset="0"/>
+                </a:rPr>
+                <a:t>పాప బ్రతుకే వీడితి</a:t>
+              </a:r>
+            </a:p>
+            <a:p>
+              <a:pPr defTabSz="439781">
+                <a:defRPr/>
+              </a:pPr>
+              <a:r>
+                <a:rPr lang="te-IN" sz="2100" dirty="0">
+                  <a:latin typeface="Ramabhadra" panose="02000600000000000000" pitchFamily="2" charset="0"/>
+                  <a:cs typeface="Ramabhadra" panose="02000600000000000000" pitchFamily="2" charset="0"/>
+                </a:rPr>
+                <a:t>నీదు జీవమె నిండుగ</a:t>
+              </a:r>
+            </a:p>
+            <a:p>
+              <a:pPr defTabSz="439781">
+                <a:defRPr/>
+              </a:pPr>
+              <a:r>
+                <a:rPr lang="te-IN" sz="2100" dirty="0">
+                  <a:latin typeface="Ramabhadra" panose="02000600000000000000" pitchFamily="2" charset="0"/>
+                  <a:cs typeface="Ramabhadra" panose="02000600000000000000" pitchFamily="2" charset="0"/>
+                </a:rPr>
+                <a:t>నాలో నింపుము నా ప్రభు</a:t>
+              </a:r>
+            </a:p>
+            <a:p>
+              <a:pPr defTabSz="439781">
+                <a:defRPr/>
+              </a:pPr>
+              <a:r>
+                <a:rPr lang="te-IN" sz="2100" dirty="0">
+                  <a:latin typeface="Ramabhadra" panose="02000600000000000000" pitchFamily="2" charset="0"/>
+                  <a:cs typeface="Ramabhadra" panose="02000600000000000000" pitchFamily="2" charset="0"/>
+                </a:rPr>
+                <a:t>జీవితమంతా నీ ప్రేమన్</a:t>
+              </a:r>
+            </a:p>
+            <a:p>
+              <a:pPr defTabSz="439781">
+                <a:defRPr/>
+              </a:pPr>
+              <a:r>
+                <a:rPr lang="te-IN" sz="2100" dirty="0">
+                  <a:latin typeface="Ramabhadra" panose="02000600000000000000" pitchFamily="2" charset="0"/>
+                  <a:cs typeface="Ramabhadra" panose="02000600000000000000" pitchFamily="2" charset="0"/>
+                </a:rPr>
+                <a:t>చాటు చుందును</a:t>
               </a:r>
             </a:p>
           </p:txBody>

--- a/songsTemplate.pptx
+++ b/songsTemplate.pptx
@@ -255,7 +255,7 @@
           <a:p>
             <a:fld id="{F1102B08-ED9E-409F-B95F-09CAA1DAF6E0}" type="datetimeFigureOut">
               <a:rPr lang="en-IN" smtClean="0"/>
-              <a:t>28-09-2024</a:t>
+              <a:t>05-10-2024</a:t>
             </a:fld>
             <a:endParaRPr lang="en-IN"/>
           </a:p>
@@ -425,7 +425,7 @@
           <a:p>
             <a:fld id="{F1102B08-ED9E-409F-B95F-09CAA1DAF6E0}" type="datetimeFigureOut">
               <a:rPr lang="en-IN" smtClean="0"/>
-              <a:t>28-09-2024</a:t>
+              <a:t>05-10-2024</a:t>
             </a:fld>
             <a:endParaRPr lang="en-IN"/>
           </a:p>
@@ -605,7 +605,7 @@
           <a:p>
             <a:fld id="{F1102B08-ED9E-409F-B95F-09CAA1DAF6E0}" type="datetimeFigureOut">
               <a:rPr lang="en-IN" smtClean="0"/>
-              <a:t>28-09-2024</a:t>
+              <a:t>05-10-2024</a:t>
             </a:fld>
             <a:endParaRPr lang="en-IN"/>
           </a:p>
@@ -775,7 +775,7 @@
           <a:p>
             <a:fld id="{F1102B08-ED9E-409F-B95F-09CAA1DAF6E0}" type="datetimeFigureOut">
               <a:rPr lang="en-IN" smtClean="0"/>
-              <a:t>28-09-2024</a:t>
+              <a:t>05-10-2024</a:t>
             </a:fld>
             <a:endParaRPr lang="en-IN"/>
           </a:p>
@@ -1019,7 +1019,7 @@
           <a:p>
             <a:fld id="{F1102B08-ED9E-409F-B95F-09CAA1DAF6E0}" type="datetimeFigureOut">
               <a:rPr lang="en-IN" smtClean="0"/>
-              <a:t>28-09-2024</a:t>
+              <a:t>05-10-2024</a:t>
             </a:fld>
             <a:endParaRPr lang="en-IN"/>
           </a:p>
@@ -1251,7 +1251,7 @@
           <a:p>
             <a:fld id="{F1102B08-ED9E-409F-B95F-09CAA1DAF6E0}" type="datetimeFigureOut">
               <a:rPr lang="en-IN" smtClean="0"/>
-              <a:t>28-09-2024</a:t>
+              <a:t>05-10-2024</a:t>
             </a:fld>
             <a:endParaRPr lang="en-IN"/>
           </a:p>
@@ -1618,7 +1618,7 @@
           <a:p>
             <a:fld id="{F1102B08-ED9E-409F-B95F-09CAA1DAF6E0}" type="datetimeFigureOut">
               <a:rPr lang="en-IN" smtClean="0"/>
-              <a:t>28-09-2024</a:t>
+              <a:t>05-10-2024</a:t>
             </a:fld>
             <a:endParaRPr lang="en-IN"/>
           </a:p>
@@ -1736,7 +1736,7 @@
           <a:p>
             <a:fld id="{F1102B08-ED9E-409F-B95F-09CAA1DAF6E0}" type="datetimeFigureOut">
               <a:rPr lang="en-IN" smtClean="0"/>
-              <a:t>28-09-2024</a:t>
+              <a:t>05-10-2024</a:t>
             </a:fld>
             <a:endParaRPr lang="en-IN"/>
           </a:p>
@@ -1831,7 +1831,7 @@
           <a:p>
             <a:fld id="{F1102B08-ED9E-409F-B95F-09CAA1DAF6E0}" type="datetimeFigureOut">
               <a:rPr lang="en-IN" smtClean="0"/>
-              <a:t>28-09-2024</a:t>
+              <a:t>05-10-2024</a:t>
             </a:fld>
             <a:endParaRPr lang="en-IN"/>
           </a:p>
@@ -2108,7 +2108,7 @@
           <a:p>
             <a:fld id="{F1102B08-ED9E-409F-B95F-09CAA1DAF6E0}" type="datetimeFigureOut">
               <a:rPr lang="en-IN" smtClean="0"/>
-              <a:t>28-09-2024</a:t>
+              <a:t>05-10-2024</a:t>
             </a:fld>
             <a:endParaRPr lang="en-IN"/>
           </a:p>
@@ -2365,7 +2365,7 @@
           <a:p>
             <a:fld id="{F1102B08-ED9E-409F-B95F-09CAA1DAF6E0}" type="datetimeFigureOut">
               <a:rPr lang="en-IN" smtClean="0"/>
-              <a:t>28-09-2024</a:t>
+              <a:t>05-10-2024</a:t>
             </a:fld>
             <a:endParaRPr lang="en-IN"/>
           </a:p>
@@ -2578,7 +2578,7 @@
           <a:p>
             <a:fld id="{F1102B08-ED9E-409F-B95F-09CAA1DAF6E0}" type="datetimeFigureOut">
               <a:rPr lang="en-IN" smtClean="0"/>
-              <a:t>28-09-2024</a:t>
+              <a:t>05-10-2024</a:t>
             </a:fld>
             <a:endParaRPr lang="en-IN"/>
           </a:p>
@@ -3072,8 +3072,8 @@
           </p:nvSpPr>
           <p:spPr>
             <a:xfrm>
-              <a:off x="267762" y="787955"/>
-              <a:ext cx="4836576" cy="4939814"/>
+              <a:off x="267762" y="709414"/>
+              <a:ext cx="4836576" cy="5847755"/>
             </a:xfrm>
             <a:prstGeom prst="rect">
               <a:avLst/>
@@ -3090,68 +3090,78 @@
                 <a:defRPr/>
               </a:pPr>
               <a:r>
-                <a:rPr lang="te-IN" sz="2100" dirty="0">
-                  <a:latin typeface="Ramabhadra" panose="02000600000000000000" pitchFamily="2" charset="0"/>
-                  <a:cs typeface="Ramabhadra" panose="02000600000000000000" pitchFamily="2" charset="0"/>
-                </a:rPr>
-                <a:t>నేనెందుకని నీ సొత్తుగా మారితిని</a:t>
-              </a:r>
-            </a:p>
-            <a:p>
-              <a:pPr defTabSz="439781">
-                <a:defRPr/>
-              </a:pPr>
-              <a:r>
-                <a:rPr lang="te-IN" sz="2100" dirty="0">
-                  <a:latin typeface="Ramabhadra" panose="02000600000000000000" pitchFamily="2" charset="0"/>
-                  <a:cs typeface="Ramabhadra" panose="02000600000000000000" pitchFamily="2" charset="0"/>
-                </a:rPr>
-                <a:t>యేసయ్యా నీ రక్తముచే... కడుగబడి</a:t>
-              </a:r>
-              <a:r>
-                <a:rPr lang="en-IN" sz="2100" dirty="0">
-                  <a:latin typeface="Ramabhadra" panose="02000600000000000000" pitchFamily="2" charset="0"/>
-                  <a:cs typeface="Ramabhadra" panose="02000600000000000000" pitchFamily="2" charset="0"/>
-                </a:rPr>
-                <a:t> </a:t>
-              </a:r>
-              <a:r>
-                <a:rPr lang="te-IN" sz="2100" dirty="0">
-                  <a:latin typeface="Ramabhadra" panose="02000600000000000000" pitchFamily="2" charset="0"/>
-                  <a:cs typeface="Ramabhadra" panose="02000600000000000000" pitchFamily="2" charset="0"/>
-                </a:rPr>
-                <a:t>నందున</a:t>
-              </a:r>
-            </a:p>
-            <a:p>
-              <a:pPr defTabSz="439781">
-                <a:defRPr/>
-              </a:pPr>
-              <a:r>
-                <a:rPr lang="te-IN" sz="2100" dirty="0">
-                  <a:latin typeface="Ramabhadra" panose="02000600000000000000" pitchFamily="2" charset="0"/>
-                  <a:cs typeface="Ramabhadra" panose="02000600000000000000" pitchFamily="2" charset="0"/>
-                </a:rPr>
-                <a:t>నీ అనాది ప్రణాళికలో...</a:t>
-              </a:r>
-            </a:p>
-            <a:p>
-              <a:pPr defTabSz="439781">
-                <a:defRPr/>
-              </a:pPr>
-              <a:r>
-                <a:rPr lang="te-IN" sz="2100" dirty="0">
-                  <a:latin typeface="Ramabhadra" panose="02000600000000000000" pitchFamily="2" charset="0"/>
-                  <a:cs typeface="Ramabhadra" panose="02000600000000000000" pitchFamily="2" charset="0"/>
-                </a:rPr>
-                <a:t>హర్షించెను నా హృదయసీమ</a:t>
-              </a:r>
-            </a:p>
-            <a:p>
-              <a:pPr defTabSz="439781">
-                <a:defRPr/>
-              </a:pPr>
-              <a:endParaRPr lang="te-IN" sz="2100" dirty="0">
+                <a:rPr lang="te-IN" sz="2200" dirty="0">
+                  <a:latin typeface="Ramabhadra" panose="02000600000000000000" pitchFamily="2" charset="0"/>
+                  <a:cs typeface="Ramabhadra" panose="02000600000000000000" pitchFamily="2" charset="0"/>
+                </a:rPr>
+                <a:t>చాలిన దేవుడవు యేసు </a:t>
+              </a:r>
+            </a:p>
+            <a:p>
+              <a:pPr defTabSz="439781">
+                <a:defRPr/>
+              </a:pPr>
+              <a:r>
+                <a:rPr lang="te-IN" sz="2200" dirty="0">
+                  <a:latin typeface="Ramabhadra" panose="02000600000000000000" pitchFamily="2" charset="0"/>
+                  <a:cs typeface="Ramabhadra" panose="02000600000000000000" pitchFamily="2" charset="0"/>
+                </a:rPr>
+                <a:t>చాలిన దేవుడ నీవు</a:t>
+              </a:r>
+            </a:p>
+            <a:p>
+              <a:pPr defTabSz="439781">
+                <a:defRPr/>
+              </a:pPr>
+              <a:r>
+                <a:rPr lang="te-IN" sz="2200" dirty="0">
+                  <a:latin typeface="Ramabhadra" panose="02000600000000000000" pitchFamily="2" charset="0"/>
+                  <a:cs typeface="Ramabhadra" panose="02000600000000000000" pitchFamily="2" charset="0"/>
+                </a:rPr>
+                <a:t>వ్యాధి బాధ సమయములో</a:t>
+              </a:r>
+            </a:p>
+            <a:p>
+              <a:pPr defTabSz="439781">
+                <a:defRPr/>
+              </a:pPr>
+              <a:r>
+                <a:rPr lang="te-IN" sz="2200" dirty="0">
+                  <a:latin typeface="Ramabhadra" panose="02000600000000000000" pitchFamily="2" charset="0"/>
+                  <a:cs typeface="Ramabhadra" panose="02000600000000000000" pitchFamily="2" charset="0"/>
+                </a:rPr>
+                <a:t>కష్టసుడుల తరంగములో</a:t>
+              </a:r>
+            </a:p>
+            <a:p>
+              <a:pPr defTabSz="439781">
+                <a:defRPr/>
+              </a:pPr>
+              <a:r>
+                <a:rPr lang="te-IN" sz="2200" dirty="0">
+                  <a:latin typeface="Ramabhadra" panose="02000600000000000000" pitchFamily="2" charset="0"/>
+                  <a:cs typeface="Ramabhadra" panose="02000600000000000000" pitchFamily="2" charset="0"/>
+                </a:rPr>
+                <a:t>ఏమున్నా లేకున్నా ఏ స్ధితికైనా</a:t>
+              </a:r>
+            </a:p>
+            <a:p>
+              <a:pPr defTabSz="439781">
+                <a:defRPr/>
+              </a:pPr>
+              <a:r>
+                <a:rPr lang="te-IN" sz="2200" dirty="0">
+                  <a:latin typeface="Ramabhadra" panose="02000600000000000000" pitchFamily="2" charset="0"/>
+                  <a:cs typeface="Ramabhadra" panose="02000600000000000000" pitchFamily="2" charset="0"/>
+                </a:rPr>
+                <a:t>చాలిన దేవుడ నీవు</a:t>
+              </a:r>
+            </a:p>
+            <a:p>
+              <a:pPr defTabSz="439781">
+                <a:defRPr/>
+              </a:pPr>
+              <a:endParaRPr lang="te-IN" sz="2200" dirty="0">
                 <a:latin typeface="Ramabhadra" panose="02000600000000000000" pitchFamily="2" charset="0"/>
                 <a:cs typeface="Ramabhadra" panose="02000600000000000000" pitchFamily="2" charset="0"/>
               </a:endParaRPr>
@@ -3161,77 +3171,54 @@
                 <a:defRPr/>
               </a:pPr>
               <a:r>
-                <a:rPr lang="te-IN" sz="2100" dirty="0">
-                  <a:latin typeface="Ramabhadra" panose="02000600000000000000" pitchFamily="2" charset="0"/>
-                  <a:cs typeface="Ramabhadra" panose="02000600000000000000" pitchFamily="2" charset="0"/>
-                </a:rPr>
-                <a:t>నీ పరిచర్యను తుదముట్టించుటే...</a:t>
-              </a:r>
-            </a:p>
-            <a:p>
-              <a:pPr defTabSz="439781">
-                <a:defRPr/>
-              </a:pPr>
-              <a:r>
-                <a:rPr lang="te-IN" sz="2100" dirty="0">
-                  <a:latin typeface="Ramabhadra" panose="02000600000000000000" pitchFamily="2" charset="0"/>
-                  <a:cs typeface="Ramabhadra" panose="02000600000000000000" pitchFamily="2" charset="0"/>
-                </a:rPr>
-                <a:t>నా నియమమాయెనే</a:t>
-              </a:r>
-            </a:p>
-            <a:p>
-              <a:pPr defTabSz="439781">
-                <a:defRPr/>
-              </a:pPr>
-              <a:r>
-                <a:rPr lang="te-IN" sz="2100" dirty="0">
-                  <a:latin typeface="Ramabhadra" panose="02000600000000000000" pitchFamily="2" charset="0"/>
-                  <a:cs typeface="Ramabhadra" panose="02000600000000000000" pitchFamily="2" charset="0"/>
-                </a:rPr>
-                <a:t>నీ సన్నిధిలో నీ పోందుకోరి...</a:t>
-              </a:r>
-              <a:r>
-                <a:rPr lang="en-IN" sz="2100" dirty="0">
-                  <a:latin typeface="Ramabhadra" panose="02000600000000000000" pitchFamily="2" charset="0"/>
-                  <a:cs typeface="Ramabhadra" panose="02000600000000000000" pitchFamily="2" charset="0"/>
-                </a:rPr>
-                <a:t> </a:t>
-              </a:r>
-              <a:r>
-                <a:rPr lang="te-IN" sz="2100" dirty="0">
-                  <a:latin typeface="Ramabhadra" panose="02000600000000000000" pitchFamily="2" charset="0"/>
-                  <a:cs typeface="Ramabhadra" panose="02000600000000000000" pitchFamily="2" charset="0"/>
-                </a:rPr>
-                <a:t>నీ స్నేహితుడనైతినే</a:t>
-              </a:r>
-            </a:p>
-            <a:p>
-              <a:pPr defTabSz="439781">
-                <a:defRPr/>
-              </a:pPr>
-              <a:r>
-                <a:rPr lang="te-IN" sz="2100" dirty="0">
-                  <a:latin typeface="Ramabhadra" panose="02000600000000000000" pitchFamily="2" charset="0"/>
-                  <a:cs typeface="Ramabhadra" panose="02000600000000000000" pitchFamily="2" charset="0"/>
-                </a:rPr>
-                <a:t>అహా..! నాధన్యత ఓహో...!</a:t>
-              </a:r>
-              <a:r>
-                <a:rPr lang="en-IN" sz="2100" dirty="0">
-                  <a:latin typeface="Ramabhadra" panose="02000600000000000000" pitchFamily="2" charset="0"/>
-                  <a:cs typeface="Ramabhadra" panose="02000600000000000000" pitchFamily="2" charset="0"/>
-                </a:rPr>
-                <a:t> </a:t>
-              </a:r>
-              <a:r>
-                <a:rPr lang="te-IN" sz="2100" dirty="0">
-                  <a:latin typeface="Ramabhadra" panose="02000600000000000000" pitchFamily="2" charset="0"/>
-                  <a:cs typeface="Ramabhadra" panose="02000600000000000000" pitchFamily="2" charset="0"/>
-                </a:rPr>
-                <a:t>నాభాగ్యము...</a:t>
-              </a:r>
-              <a:endParaRPr lang="en-IN" sz="2100" dirty="0">
+                <a:rPr lang="te-IN" sz="2200" dirty="0">
+                  <a:latin typeface="Ramabhadra" panose="02000600000000000000" pitchFamily="2" charset="0"/>
+                  <a:cs typeface="Ramabhadra" panose="02000600000000000000" pitchFamily="2" charset="0"/>
+                </a:rPr>
+                <a:t>అంజూర చెట్లు పూయకున్నను</a:t>
+              </a:r>
+            </a:p>
+            <a:p>
+              <a:pPr defTabSz="439781">
+                <a:defRPr/>
+              </a:pPr>
+              <a:r>
+                <a:rPr lang="te-IN" sz="2200" dirty="0">
+                  <a:latin typeface="Ramabhadra" panose="02000600000000000000" pitchFamily="2" charset="0"/>
+                  <a:cs typeface="Ramabhadra" panose="02000600000000000000" pitchFamily="2" charset="0"/>
+                </a:rPr>
+                <a:t> ద్రాక్ష చెట్లు ఫలింపకున్నను</a:t>
+              </a:r>
+            </a:p>
+            <a:p>
+              <a:pPr defTabSz="439781">
+                <a:defRPr/>
+              </a:pPr>
+              <a:r>
+                <a:rPr lang="te-IN" sz="2200" dirty="0">
+                  <a:latin typeface="Ramabhadra" panose="02000600000000000000" pitchFamily="2" charset="0"/>
+                  <a:cs typeface="Ramabhadra" panose="02000600000000000000" pitchFamily="2" charset="0"/>
+                </a:rPr>
+                <a:t>చేనులోని పైరు పండకపోయినను</a:t>
+              </a:r>
+            </a:p>
+            <a:p>
+              <a:pPr defTabSz="439781">
+                <a:defRPr/>
+              </a:pPr>
+              <a:r>
+                <a:rPr lang="te-IN" sz="2200" dirty="0">
+                  <a:latin typeface="Ramabhadra" panose="02000600000000000000" pitchFamily="2" charset="0"/>
+                  <a:cs typeface="Ramabhadra" panose="02000600000000000000" pitchFamily="2" charset="0"/>
+                </a:rPr>
+                <a:t>శాలలోని పశువులు లేక పోయినను</a:t>
+              </a:r>
+            </a:p>
+            <a:p>
+              <a:pPr defTabSz="439781">
+                <a:defRPr/>
+              </a:pPr>
+              <a:endParaRPr lang="te-IN" sz="2200" dirty="0">
                 <a:latin typeface="Ramabhadra" panose="02000600000000000000" pitchFamily="2" charset="0"/>
                 <a:cs typeface="Ramabhadra" panose="02000600000000000000" pitchFamily="2" charset="0"/>
               </a:endParaRPr>
@@ -3241,20 +3228,37 @@
                 <a:defRPr/>
               </a:pPr>
               <a:r>
-                <a:rPr lang="te-IN" sz="2100" dirty="0">
-                  <a:latin typeface="Ramabhadra" panose="02000600000000000000" pitchFamily="2" charset="0"/>
-                  <a:cs typeface="Ramabhadra" panose="02000600000000000000" pitchFamily="2" charset="0"/>
-                </a:rPr>
-                <a:t>ఏమని వివరింతును</a:t>
-              </a:r>
-              <a:r>
-                <a:rPr lang="en-IN" sz="2100" dirty="0">
-                  <a:latin typeface="Ramabhadra" panose="02000600000000000000" pitchFamily="2" charset="0"/>
-                  <a:cs typeface="Ramabhadra" panose="02000600000000000000" pitchFamily="2" charset="0"/>
-                </a:rPr>
-                <a:t>...</a:t>
-              </a:r>
-              <a:endParaRPr lang="te-IN" sz="2100" dirty="0">
+                <a:rPr lang="te-IN" sz="2200" dirty="0">
+                  <a:latin typeface="Ramabhadra" panose="02000600000000000000" pitchFamily="2" charset="0"/>
+                  <a:cs typeface="Ramabhadra" panose="02000600000000000000" pitchFamily="2" charset="0"/>
+                </a:rPr>
+                <a:t>గాఢాంధకారాన పయనించిన </a:t>
+              </a:r>
+            </a:p>
+            <a:p>
+              <a:pPr defTabSz="439781">
+                <a:defRPr/>
+              </a:pPr>
+              <a:r>
+                <a:rPr lang="te-IN" sz="2200" dirty="0">
+                  <a:latin typeface="Ramabhadra" panose="02000600000000000000" pitchFamily="2" charset="0"/>
+                  <a:cs typeface="Ramabhadra" panose="02000600000000000000" pitchFamily="2" charset="0"/>
+                </a:rPr>
+                <a:t>పొంగు సాగరా లెదురైన</a:t>
+              </a:r>
+            </a:p>
+            <a:p>
+              <a:pPr defTabSz="439781">
+                <a:defRPr/>
+              </a:pPr>
+              <a:r>
+                <a:rPr lang="te-IN" sz="2200" dirty="0">
+                  <a:latin typeface="Ramabhadra" panose="02000600000000000000" pitchFamily="2" charset="0"/>
+                  <a:cs typeface="Ramabhadra" panose="02000600000000000000" pitchFamily="2" charset="0"/>
+                </a:rPr>
+                <a:t>లోకమంత ఒకటైన</a:t>
+              </a:r>
+              <a:endParaRPr lang="en-IN" sz="2200" dirty="0">
                 <a:latin typeface="Ramabhadra" panose="02000600000000000000" pitchFamily="2" charset="0"/>
                 <a:cs typeface="Ramabhadra" panose="02000600000000000000" pitchFamily="2" charset="0"/>
               </a:endParaRPr>
@@ -3263,89 +3267,38 @@
               <a:pPr defTabSz="439781">
                 <a:defRPr/>
               </a:pPr>
-              <a:endParaRPr lang="te-IN" sz="2100" dirty="0">
-                <a:latin typeface="Ramabhadra" panose="02000600000000000000" pitchFamily="2" charset="0"/>
-                <a:cs typeface="Ramabhadra" panose="02000600000000000000" pitchFamily="2" charset="0"/>
-              </a:endParaRPr>
-            </a:p>
-            <a:p>
-              <a:pPr defTabSz="439781">
-                <a:defRPr/>
-              </a:pPr>
-              <a:r>
-                <a:rPr lang="te-IN" sz="2100" dirty="0">
-                  <a:latin typeface="Ramabhadra" panose="02000600000000000000" pitchFamily="2" charset="0"/>
-                  <a:cs typeface="Ramabhadra" panose="02000600000000000000" pitchFamily="2" charset="0"/>
-                </a:rPr>
-                <a:t>నీ శ్రమలలో పాలొందుటయే... నా దర్శనమాయెనే</a:t>
-              </a:r>
-            </a:p>
-            <a:p>
-              <a:pPr defTabSz="439781">
-                <a:defRPr/>
-              </a:pPr>
-              <a:r>
-                <a:rPr lang="te-IN" sz="2100" dirty="0">
-                  <a:latin typeface="Ramabhadra" panose="02000600000000000000" pitchFamily="2" charset="0"/>
-                  <a:cs typeface="Ramabhadra" panose="02000600000000000000" pitchFamily="2" charset="0"/>
-                </a:rPr>
-                <a:t>నా తనువందున శ్రమలు సహించి...</a:t>
-              </a:r>
-              <a:r>
-                <a:rPr lang="en-IN" sz="2100" dirty="0">
+              <a:r>
+                <a:rPr lang="te-IN" sz="2200" dirty="0">
+                  <a:latin typeface="Ramabhadra" panose="02000600000000000000" pitchFamily="2" charset="0"/>
+                  <a:cs typeface="Ramabhadra" panose="02000600000000000000" pitchFamily="2" charset="0"/>
+                </a:rPr>
+                <a:t>అన్యాయ</a:t>
+              </a:r>
+              <a:r>
+                <a:rPr lang="en-IN" sz="2200" dirty="0">
                   <a:latin typeface="Ramabhadra" panose="02000600000000000000" pitchFamily="2" charset="0"/>
                   <a:cs typeface="Ramabhadra" panose="02000600000000000000" pitchFamily="2" charset="0"/>
                 </a:rPr>
                 <a:t> </a:t>
               </a:r>
               <a:r>
-                <a:rPr lang="te-IN" dirty="0">
-                  <a:latin typeface="Ramabhadra" panose="02000600000000000000" pitchFamily="2" charset="0"/>
-                  <a:cs typeface="Ramabhadra" panose="02000600000000000000" pitchFamily="2" charset="0"/>
-                </a:rPr>
-                <a:t>నీ వారసుడనైతినే</a:t>
-              </a:r>
-            </a:p>
-            <a:p>
-              <a:pPr defTabSz="439781">
-                <a:defRPr/>
-              </a:pPr>
-              <a:r>
-                <a:rPr lang="te-IN" sz="2100" dirty="0">
-                  <a:latin typeface="Ramabhadra" panose="02000600000000000000" pitchFamily="2" charset="0"/>
-                  <a:cs typeface="Ramabhadra" panose="02000600000000000000" pitchFamily="2" charset="0"/>
-                </a:rPr>
-                <a:t>అహా..! నాధన్యత ఓహో...!</a:t>
-              </a:r>
-              <a:r>
-                <a:rPr lang="en-IN" sz="2100" dirty="0">
-                  <a:latin typeface="Ramabhadra" panose="02000600000000000000" pitchFamily="2" charset="0"/>
-                  <a:cs typeface="Ramabhadra" panose="02000600000000000000" pitchFamily="2" charset="0"/>
-                </a:rPr>
-                <a:t> </a:t>
-              </a:r>
-              <a:r>
-                <a:rPr lang="te-IN" sz="2100" dirty="0">
-                  <a:latin typeface="Ramabhadra" panose="02000600000000000000" pitchFamily="2" charset="0"/>
-                  <a:cs typeface="Ramabhadra" panose="02000600000000000000" pitchFamily="2" charset="0"/>
-                </a:rPr>
-                <a:t>నాభాగ్యము...</a:t>
-              </a:r>
-              <a:endParaRPr lang="en-IN" sz="2100" dirty="0">
-                <a:latin typeface="Ramabhadra" panose="02000600000000000000" pitchFamily="2" charset="0"/>
-                <a:cs typeface="Ramabhadra" panose="02000600000000000000" pitchFamily="2" charset="0"/>
-              </a:endParaRPr>
-            </a:p>
-            <a:p>
-              <a:pPr defTabSz="439781">
-                <a:defRPr/>
-              </a:pPr>
-              <a:r>
-                <a:rPr lang="te-IN" sz="2100" dirty="0">
-                  <a:latin typeface="Ramabhadra" panose="02000600000000000000" pitchFamily="2" charset="0"/>
-                  <a:cs typeface="Ramabhadra" panose="02000600000000000000" pitchFamily="2" charset="0"/>
-                </a:rPr>
-                <a:t>ఏమని వివరింతును</a:t>
+                <a:rPr lang="te-IN" sz="2200" dirty="0">
+                  <a:latin typeface="Ramabhadra" panose="02000600000000000000" pitchFamily="2" charset="0"/>
+                  <a:cs typeface="Ramabhadra" panose="02000600000000000000" pitchFamily="2" charset="0"/>
+                </a:rPr>
+                <a:t>తీర్పుకు గురిచేసిన</a:t>
+              </a:r>
+            </a:p>
+            <a:p>
+              <a:pPr defTabSz="439781">
+                <a:defRPr/>
+              </a:pPr>
+              <a:r>
+                <a:rPr lang="te-IN" sz="2200" dirty="0">
+                  <a:latin typeface="Ramabhadra" panose="02000600000000000000" pitchFamily="2" charset="0"/>
+                  <a:cs typeface="Ramabhadra" panose="02000600000000000000" pitchFamily="2" charset="0"/>
+                </a:rPr>
+                <a:t>సత్యము పలుకుటచే నష్టము కలిగినను</a:t>
               </a:r>
             </a:p>
           </p:txBody>
@@ -3502,8 +3455,8 @@
           </p:nvSpPr>
           <p:spPr>
             <a:xfrm>
-              <a:off x="343961" y="841707"/>
-              <a:ext cx="4541306" cy="4832092"/>
+              <a:off x="343961" y="736932"/>
+              <a:ext cx="4541306" cy="5847755"/>
             </a:xfrm>
             <a:prstGeom prst="rect">
               <a:avLst/>
@@ -3524,43 +3477,85 @@
                   <a:latin typeface="Ramabhadra" panose="02000600000000000000" pitchFamily="2" charset="0"/>
                   <a:cs typeface="Ramabhadra" panose="02000600000000000000" pitchFamily="2" charset="0"/>
                 </a:rPr>
-                <a:t>స్తోత్రము చెల్లించెదము మన యేసుకే</a:t>
-              </a:r>
-            </a:p>
-            <a:p>
-              <a:pPr defTabSz="439781">
-                <a:defRPr/>
-              </a:pPr>
-              <a:r>
+                <a:t>మహిమ ఘనతకు అర్హుడవు</a:t>
+              </a:r>
+              <a:br>
                 <a:rPr lang="te-IN" sz="2200" dirty="0">
                   <a:latin typeface="Ramabhadra" panose="02000600000000000000" pitchFamily="2" charset="0"/>
                   <a:cs typeface="Ramabhadra" panose="02000600000000000000" pitchFamily="2" charset="0"/>
                 </a:rPr>
-                <a:t>స్తోత్రము చెల్లించెదము</a:t>
-              </a:r>
-            </a:p>
-            <a:p>
-              <a:pPr defTabSz="439781">
-                <a:defRPr/>
-              </a:pPr>
+              </a:br>
               <a:r>
                 <a:rPr lang="te-IN" sz="2200" dirty="0">
                   <a:latin typeface="Ramabhadra" panose="02000600000000000000" pitchFamily="2" charset="0"/>
                   <a:cs typeface="Ramabhadra" panose="02000600000000000000" pitchFamily="2" charset="0"/>
                 </a:rPr>
-                <a:t>మంచివాడు గొప్పవాడు మన దేవుడు</a:t>
-              </a:r>
-            </a:p>
-            <a:p>
-              <a:pPr defTabSz="439781">
-                <a:defRPr/>
-              </a:pPr>
-              <a:r>
+                <a:t>నీవే నా దైవము</a:t>
+              </a:r>
+              <a:br>
                 <a:rPr lang="te-IN" sz="2200" dirty="0">
                   <a:latin typeface="Ramabhadra" panose="02000600000000000000" pitchFamily="2" charset="0"/>
                   <a:cs typeface="Ramabhadra" panose="02000600000000000000" pitchFamily="2" charset="0"/>
                 </a:rPr>
-                <a:t>వాక్యమునిచ్చు దేవుడు (2)</a:t>
+              </a:br>
+              <a:r>
+                <a:rPr lang="te-IN" sz="2200" dirty="0">
+                  <a:latin typeface="Ramabhadra" panose="02000600000000000000" pitchFamily="2" charset="0"/>
+                  <a:cs typeface="Ramabhadra" panose="02000600000000000000" pitchFamily="2" charset="0"/>
+                </a:rPr>
+                <a:t>సృష్టికర్త ముక్తి దాత (2)</a:t>
+              </a:r>
+              <a:br>
+                <a:rPr lang="te-IN" sz="2200" dirty="0">
+                  <a:latin typeface="Ramabhadra" panose="02000600000000000000" pitchFamily="2" charset="0"/>
+                  <a:cs typeface="Ramabhadra" panose="02000600000000000000" pitchFamily="2" charset="0"/>
+                </a:rPr>
+              </a:br>
+              <a:r>
+                <a:rPr lang="te-IN" sz="2200" dirty="0">
+                  <a:latin typeface="Ramabhadra" panose="02000600000000000000" pitchFamily="2" charset="0"/>
+                  <a:cs typeface="Ramabhadra" panose="02000600000000000000" pitchFamily="2" charset="0"/>
+                </a:rPr>
+                <a:t>మా స్తుతులకు పాత్రుడా</a:t>
+              </a:r>
+              <a:br>
+                <a:rPr lang="te-IN" sz="2200" dirty="0">
+                  <a:latin typeface="Ramabhadra" panose="02000600000000000000" pitchFamily="2" charset="0"/>
+                  <a:cs typeface="Ramabhadra" panose="02000600000000000000" pitchFamily="2" charset="0"/>
+                </a:rPr>
+              </a:br>
+              <a:r>
+                <a:rPr lang="te-IN" sz="2200" dirty="0">
+                  <a:latin typeface="Ramabhadra" panose="02000600000000000000" pitchFamily="2" charset="0"/>
+                  <a:cs typeface="Ramabhadra" panose="02000600000000000000" pitchFamily="2" charset="0"/>
+                </a:rPr>
+                <a:t>ఆరాధనా నీకే ఆరాధనా నీకే</a:t>
+              </a:r>
+              <a:br>
+                <a:rPr lang="te-IN" sz="2200" dirty="0">
+                  <a:latin typeface="Ramabhadra" panose="02000600000000000000" pitchFamily="2" charset="0"/>
+                  <a:cs typeface="Ramabhadra" panose="02000600000000000000" pitchFamily="2" charset="0"/>
+                </a:rPr>
+              </a:br>
+              <a:r>
+                <a:rPr lang="te-IN" sz="2200" dirty="0">
+                  <a:latin typeface="Ramabhadra" panose="02000600000000000000" pitchFamily="2" charset="0"/>
+                  <a:cs typeface="Ramabhadra" panose="02000600000000000000" pitchFamily="2" charset="0"/>
+                </a:rPr>
+                <a:t>ఆరాధనా స్తుతి ఆరాధనా ఆరాధనా నీకే (2)</a:t>
+              </a:r>
+              <a:br>
+                <a:rPr lang="te-IN" sz="2200" dirty="0">
+                  <a:latin typeface="Ramabhadra" panose="02000600000000000000" pitchFamily="2" charset="0"/>
+                  <a:cs typeface="Ramabhadra" panose="02000600000000000000" pitchFamily="2" charset="0"/>
+                </a:rPr>
+              </a:br>
+              <a:r>
+                <a:rPr lang="te-IN" sz="2200" dirty="0">
+                  <a:latin typeface="Ramabhadra" panose="02000600000000000000" pitchFamily="2" charset="0"/>
+                  <a:cs typeface="Ramabhadra" panose="02000600000000000000" pitchFamily="2" charset="0"/>
+                </a:rPr>
+                <a:t>ఆరాధనా నీకే ఆరాధనా నీకే</a:t>
               </a:r>
             </a:p>
             <a:p>
@@ -3581,43 +3576,46 @@
                   <a:latin typeface="Ramabhadra" panose="02000600000000000000" pitchFamily="2" charset="0"/>
                   <a:cs typeface="Ramabhadra" panose="02000600000000000000" pitchFamily="2" charset="0"/>
                 </a:rPr>
-                <a:t>యెరికో మనకు ముందు వచ్చినా –</a:t>
-              </a:r>
-            </a:p>
-            <a:p>
-              <a:pPr defTabSz="439781">
-                <a:defRPr/>
-              </a:pPr>
-              <a:r>
+                <a:t>మన్నాను కురిపించినావు</a:t>
+              </a:r>
+              <a:br>
                 <a:rPr lang="te-IN" sz="2200" dirty="0">
                   <a:latin typeface="Ramabhadra" panose="02000600000000000000" pitchFamily="2" charset="0"/>
                   <a:cs typeface="Ramabhadra" panose="02000600000000000000" pitchFamily="2" charset="0"/>
                 </a:rPr>
-                <a:t>క్రీస్తు యేసు ముందే నిలుచును</a:t>
-              </a:r>
-            </a:p>
-            <a:p>
-              <a:pPr defTabSz="439781">
-                <a:defRPr/>
-              </a:pPr>
+              </a:br>
               <a:r>
                 <a:rPr lang="te-IN" sz="2200" dirty="0">
                   <a:latin typeface="Ramabhadra" panose="02000600000000000000" pitchFamily="2" charset="0"/>
                   <a:cs typeface="Ramabhadra" panose="02000600000000000000" pitchFamily="2" charset="0"/>
                 </a:rPr>
-                <a:t>భయపడకు దిగులు పడకు -</a:t>
-              </a:r>
-            </a:p>
-            <a:p>
-              <a:pPr defTabSz="439781">
-                <a:defRPr/>
-              </a:pPr>
-              <a:r>
+                <a:t>బండనుండి నీల్లిచ్చినావు (2)</a:t>
+              </a:r>
+              <a:br>
                 <a:rPr lang="te-IN" sz="2200" dirty="0">
                   <a:latin typeface="Ramabhadra" panose="02000600000000000000" pitchFamily="2" charset="0"/>
                   <a:cs typeface="Ramabhadra" panose="02000600000000000000" pitchFamily="2" charset="0"/>
                 </a:rPr>
-                <a:t>ప్రార్ధించి స్తుతియించుము</a:t>
+              </a:br>
+              <a:r>
+                <a:rPr lang="te-IN" sz="2200" dirty="0">
+                  <a:latin typeface="Ramabhadra" panose="02000600000000000000" pitchFamily="2" charset="0"/>
+                  <a:cs typeface="Ramabhadra" panose="02000600000000000000" pitchFamily="2" charset="0"/>
+                </a:rPr>
+                <a:t>యెహోవా ఈరే చూచుకొనును</a:t>
+              </a:r>
+              <a:br>
+                <a:rPr lang="te-IN" sz="2200" dirty="0">
+                  <a:latin typeface="Ramabhadra" panose="02000600000000000000" pitchFamily="2" charset="0"/>
+                  <a:cs typeface="Ramabhadra" panose="02000600000000000000" pitchFamily="2" charset="0"/>
+                </a:rPr>
+              </a:br>
+              <a:r>
+                <a:rPr lang="te-IN" sz="2200" dirty="0">
+                  <a:latin typeface="Ramabhadra" panose="02000600000000000000" pitchFamily="2" charset="0"/>
+                  <a:cs typeface="Ramabhadra" panose="02000600000000000000" pitchFamily="2" charset="0"/>
+                </a:rPr>
+                <a:t>సర్వము సమకూర్చును           </a:t>
               </a:r>
             </a:p>
             <a:p>
@@ -3638,43 +3636,46 @@
                   <a:latin typeface="Ramabhadra" panose="02000600000000000000" pitchFamily="2" charset="0"/>
                   <a:cs typeface="Ramabhadra" panose="02000600000000000000" pitchFamily="2" charset="0"/>
                 </a:rPr>
-                <a:t>గొల్యాత్ మనకు ఎదురు వచ్చినా –</a:t>
-              </a:r>
-            </a:p>
-            <a:p>
-              <a:pPr defTabSz="439781">
-                <a:defRPr/>
-              </a:pPr>
-              <a:r>
+                <a:t>వ్యాధులను తొలగించినావు</a:t>
+              </a:r>
+              <a:br>
                 <a:rPr lang="te-IN" sz="2200" dirty="0">
                   <a:latin typeface="Ramabhadra" panose="02000600000000000000" pitchFamily="2" charset="0"/>
                   <a:cs typeface="Ramabhadra" panose="02000600000000000000" pitchFamily="2" charset="0"/>
                 </a:rPr>
-                <a:t>క్రీస్తుయేసు ముందే నిలుచును</a:t>
-              </a:r>
-            </a:p>
-            <a:p>
-              <a:pPr defTabSz="439781">
-                <a:defRPr/>
-              </a:pPr>
+              </a:br>
               <a:r>
                 <a:rPr lang="te-IN" sz="2200" dirty="0">
                   <a:latin typeface="Ramabhadra" panose="02000600000000000000" pitchFamily="2" charset="0"/>
                   <a:cs typeface="Ramabhadra" panose="02000600000000000000" pitchFamily="2" charset="0"/>
                 </a:rPr>
-                <a:t>హల్లేలూయా – హల్లేలూయా</a:t>
-              </a:r>
-            </a:p>
-            <a:p>
-              <a:pPr defTabSz="439781">
-                <a:defRPr/>
-              </a:pPr>
-              <a:r>
+                <a:t>మృతులను మరి లేపినావు (2)</a:t>
+              </a:r>
+              <a:br>
                 <a:rPr lang="te-IN" sz="2200" dirty="0">
                   <a:latin typeface="Ramabhadra" panose="02000600000000000000" pitchFamily="2" charset="0"/>
                   <a:cs typeface="Ramabhadra" panose="02000600000000000000" pitchFamily="2" charset="0"/>
                 </a:rPr>
-                <a:t>జయమని పాడెదమూ</a:t>
+              </a:br>
+              <a:r>
+                <a:rPr lang="te-IN" sz="2200" dirty="0">
+                  <a:latin typeface="Ramabhadra" panose="02000600000000000000" pitchFamily="2" charset="0"/>
+                  <a:cs typeface="Ramabhadra" panose="02000600000000000000" pitchFamily="2" charset="0"/>
+                </a:rPr>
+                <a:t>యెహోవా రాఫా స్వస్థపరచును</a:t>
+              </a:r>
+              <a:br>
+                <a:rPr lang="te-IN" sz="2200" dirty="0">
+                  <a:latin typeface="Ramabhadra" panose="02000600000000000000" pitchFamily="2" charset="0"/>
+                  <a:cs typeface="Ramabhadra" panose="02000600000000000000" pitchFamily="2" charset="0"/>
+                </a:rPr>
+              </a:br>
+              <a:r>
+                <a:rPr lang="te-IN" sz="2200" dirty="0">
+                  <a:latin typeface="Ramabhadra" panose="02000600000000000000" pitchFamily="2" charset="0"/>
+                  <a:cs typeface="Ramabhadra" panose="02000600000000000000" pitchFamily="2" charset="0"/>
+                </a:rPr>
+                <a:t>నను స్వస్థపరచును                 </a:t>
               </a:r>
             </a:p>
           </p:txBody>
@@ -3883,7 +3884,7 @@
                   <a:latin typeface="Ramabhadra" panose="02000600000000000000" pitchFamily="2" charset="0"/>
                   <a:cs typeface="Ramabhadra" panose="02000600000000000000" pitchFamily="2" charset="0"/>
                 </a:rPr>
-                <a:t>నా కొకరు ఉన్నారు నను ప్రేమించే వారు</a:t>
+                <a:t>మాధుర్యమే నా ప్రభుతో జీవితం</a:t>
               </a:r>
             </a:p>
             <a:p>
@@ -3895,19 +3896,7 @@
                   <a:latin typeface="Ramabhadra" panose="02000600000000000000" pitchFamily="2" charset="0"/>
                   <a:cs typeface="Ramabhadra" panose="02000600000000000000" pitchFamily="2" charset="0"/>
                 </a:rPr>
-                <a:t>అడవులలో అల్లాడగా కరుణతో నను వెదకెను  </a:t>
-              </a:r>
-            </a:p>
-            <a:p>
-              <a:pPr defTabSz="439781">
-                <a:defRPr/>
-              </a:pPr>
-              <a:r>
-                <a:rPr lang="te-IN" sz="2400" dirty="0">
-                  <a:latin typeface="Ramabhadra" panose="02000600000000000000" pitchFamily="2" charset="0"/>
-                  <a:cs typeface="Ramabhadra" panose="02000600000000000000" pitchFamily="2" charset="0"/>
-                </a:rPr>
-                <a:t>ఆయనేసు... ఆయనేసు... </a:t>
+                <a:t>మహిమానందమే – మహా ఆశ్చర్యమే</a:t>
               </a:r>
             </a:p>
             <a:p>
@@ -3928,7 +3917,7 @@
                   <a:latin typeface="Ramabhadra" panose="02000600000000000000" pitchFamily="2" charset="0"/>
                   <a:cs typeface="Ramabhadra" panose="02000600000000000000" pitchFamily="2" charset="0"/>
                 </a:rPr>
-                <a:t>మందలోని గొర్రెవలె మతి తప్పితిరిగితిని</a:t>
+                <a:t>సర్వ శరీరులు గడ్డిని పోలిన వారైయున్నారు</a:t>
               </a:r>
             </a:p>
             <a:p>
@@ -3940,7 +3929,7 @@
                   <a:latin typeface="Ramabhadra" panose="02000600000000000000" pitchFamily="2" charset="0"/>
                   <a:cs typeface="Ramabhadra" panose="02000600000000000000" pitchFamily="2" charset="0"/>
                 </a:rPr>
-                <a:t>కాపరివై వెదకి వచ్చి తనఒడి చేర్చుకొనున్</a:t>
+                <a:t>వారి అందమంతయు పువ్వు వలె</a:t>
               </a:r>
             </a:p>
             <a:p>
@@ -3952,7 +3941,7 @@
                   <a:latin typeface="Ramabhadra" panose="02000600000000000000" pitchFamily="2" charset="0"/>
                   <a:cs typeface="Ramabhadra" panose="02000600000000000000" pitchFamily="2" charset="0"/>
                 </a:rPr>
-                <a:t>ఆయనేసు... ఆయనేసు... </a:t>
+                <a:t>వాడిపోవును – వాడిపోవును</a:t>
               </a:r>
             </a:p>
             <a:p>
@@ -3973,7 +3962,7 @@
                   <a:latin typeface="Ramabhadra" panose="02000600000000000000" pitchFamily="2" charset="0"/>
                   <a:cs typeface="Ramabhadra" panose="02000600000000000000" pitchFamily="2" charset="0"/>
                 </a:rPr>
-                <a:t>నన్నెరిగి నను పిలువ నా రాజుని ఎరిగితిని</a:t>
+                <a:t>నెమ్మది లేకుండా విస్తారమైన</a:t>
               </a:r>
             </a:p>
             <a:p>
@@ -3985,7 +3974,7 @@
                   <a:latin typeface="Ramabhadra" panose="02000600000000000000" pitchFamily="2" charset="0"/>
                   <a:cs typeface="Ramabhadra" panose="02000600000000000000" pitchFamily="2" charset="0"/>
                 </a:rPr>
-                <a:t>పరమున నను చేర్చెన్  పరిశుద్ధునిగా మార్చెన్</a:t>
+                <a:t>ధనముండుట కంటే</a:t>
               </a:r>
             </a:p>
             <a:p>
@@ -3997,7 +3986,19 @@
                   <a:latin typeface="Ramabhadra" panose="02000600000000000000" pitchFamily="2" charset="0"/>
                   <a:cs typeface="Ramabhadra" panose="02000600000000000000" pitchFamily="2" charset="0"/>
                 </a:rPr>
-                <a:t>ఆయనేసు... ఆయనేసు... </a:t>
+                <a:t>దేవుని యందలి భయ భక్తులతో</a:t>
+              </a:r>
+            </a:p>
+            <a:p>
+              <a:pPr defTabSz="439781">
+                <a:defRPr/>
+              </a:pPr>
+              <a:r>
+                <a:rPr lang="te-IN" sz="2400" dirty="0">
+                  <a:latin typeface="Ramabhadra" panose="02000600000000000000" pitchFamily="2" charset="0"/>
+                  <a:cs typeface="Ramabhadra" panose="02000600000000000000" pitchFamily="2" charset="0"/>
+                </a:rPr>
+                <a:t>ఉండుటే మేలు – ఉండుటే మేలు</a:t>
               </a:r>
             </a:p>
           </p:txBody>
@@ -4080,9 +4081,9 @@
         <p:grpSpPr>
           <a:xfrm>
             <a:off x="5104338" y="182031"/>
-            <a:ext cx="5229224" cy="6493935"/>
+            <a:ext cx="4724399" cy="6493935"/>
             <a:chOff x="160868" y="182032"/>
-            <a:chExt cx="5229224" cy="6493935"/>
+            <a:chExt cx="4724399" cy="6493935"/>
           </a:xfrm>
         </p:grpSpPr>
         <p:sp>
@@ -4154,8 +4155,8 @@
           </p:nvSpPr>
           <p:spPr>
             <a:xfrm>
-              <a:off x="848786" y="474344"/>
-              <a:ext cx="4541306" cy="5909310"/>
+              <a:off x="343961" y="740943"/>
+              <a:ext cx="4541306" cy="5632311"/>
             </a:xfrm>
             <a:prstGeom prst="rect">
               <a:avLst/>
@@ -4172,54 +4173,13 @@
                 <a:defRPr/>
               </a:pPr>
               <a:r>
-                <a:rPr lang="te-IN" sz="2100" dirty="0">
-                  <a:latin typeface="Ramabhadra" panose="02000600000000000000" pitchFamily="2" charset="0"/>
-                  <a:cs typeface="Ramabhadra" panose="02000600000000000000" pitchFamily="2" charset="0"/>
-                </a:rPr>
-                <a:t>నీ ప్రేమ ఎంతో అపారము</a:t>
-              </a:r>
-            </a:p>
-            <a:p>
-              <a:pPr defTabSz="439781">
-                <a:defRPr/>
-              </a:pPr>
-              <a:r>
-                <a:rPr lang="te-IN" sz="2100" dirty="0">
-                  <a:latin typeface="Ramabhadra" panose="02000600000000000000" pitchFamily="2" charset="0"/>
-                  <a:cs typeface="Ramabhadra" panose="02000600000000000000" pitchFamily="2" charset="0"/>
-                </a:rPr>
-                <a:t>వర్ణింపతరమా నా ప్రభూ</a:t>
-              </a:r>
-            </a:p>
-            <a:p>
-              <a:pPr defTabSz="439781">
-                <a:defRPr/>
-              </a:pPr>
-              <a:r>
-                <a:rPr lang="te-IN" sz="2100" dirty="0">
-                  <a:latin typeface="Ramabhadra" panose="02000600000000000000" pitchFamily="2" charset="0"/>
-                  <a:cs typeface="Ramabhadra" panose="02000600000000000000" pitchFamily="2" charset="0"/>
-                </a:rPr>
-                <a:t>పులకింప చేసెను నా హృది</a:t>
-              </a:r>
-            </a:p>
-            <a:p>
-              <a:pPr defTabSz="439781">
-                <a:defRPr/>
-              </a:pPr>
-              <a:r>
-                <a:rPr lang="te-IN" sz="2100" dirty="0">
-                  <a:latin typeface="Ramabhadra" panose="02000600000000000000" pitchFamily="2" charset="0"/>
-                  <a:cs typeface="Ramabhadra" panose="02000600000000000000" pitchFamily="2" charset="0"/>
-                </a:rPr>
-                <a:t>హృదయేశ్వరా నా యేసువా</a:t>
-              </a:r>
-            </a:p>
-            <a:p>
-              <a:pPr defTabSz="439781">
-                <a:defRPr/>
-              </a:pPr>
-              <a:endParaRPr lang="te-IN" sz="2100" dirty="0">
+                <a:rPr lang="te-IN" sz="2400" dirty="0">
+                  <a:latin typeface="Ramabhadra" panose="02000600000000000000" pitchFamily="2" charset="0"/>
+                  <a:cs typeface="Ramabhadra" panose="02000600000000000000" pitchFamily="2" charset="0"/>
+                </a:rPr>
+                <a:t>నాదు రక్షక నీ మనసే ఉత్తమం</a:t>
+              </a:r>
+              <a:endParaRPr lang="en-IN" sz="2400" dirty="0">
                 <a:latin typeface="Ramabhadra" panose="02000600000000000000" pitchFamily="2" charset="0"/>
                 <a:cs typeface="Ramabhadra" panose="02000600000000000000" pitchFamily="2" charset="0"/>
               </a:endParaRPr>
@@ -4229,78 +4189,54 @@
                 <a:defRPr/>
               </a:pPr>
               <a:r>
-                <a:rPr lang="te-IN" sz="2100" dirty="0">
-                  <a:latin typeface="Ramabhadra" panose="02000600000000000000" pitchFamily="2" charset="0"/>
-                  <a:cs typeface="Ramabhadra" panose="02000600000000000000" pitchFamily="2" charset="0"/>
-                </a:rPr>
-                <a:t>నన్ను ఎంతో ప్రేమించి</a:t>
-              </a:r>
-            </a:p>
-            <a:p>
-              <a:pPr defTabSz="439781">
-                <a:defRPr/>
-              </a:pPr>
-              <a:r>
-                <a:rPr lang="te-IN" sz="2100" dirty="0">
-                  <a:latin typeface="Ramabhadra" panose="02000600000000000000" pitchFamily="2" charset="0"/>
-                  <a:cs typeface="Ramabhadra" panose="02000600000000000000" pitchFamily="2" charset="0"/>
-                </a:rPr>
-                <a:t>నాదు పాపమె క్షమియించి</a:t>
-              </a:r>
-            </a:p>
-            <a:p>
-              <a:pPr defTabSz="439781">
-                <a:defRPr/>
-              </a:pPr>
-              <a:r>
-                <a:rPr lang="te-IN" sz="2100" dirty="0">
-                  <a:latin typeface="Ramabhadra" panose="02000600000000000000" pitchFamily="2" charset="0"/>
-                  <a:cs typeface="Ramabhadra" panose="02000600000000000000" pitchFamily="2" charset="0"/>
-                </a:rPr>
-                <a:t>కృప కనికరముల నీడలో</a:t>
-              </a:r>
-            </a:p>
-            <a:p>
-              <a:pPr defTabSz="439781">
-                <a:defRPr/>
-              </a:pPr>
-              <a:r>
-                <a:rPr lang="te-IN" sz="2100" dirty="0">
-                  <a:latin typeface="Ramabhadra" panose="02000600000000000000" pitchFamily="2" charset="0"/>
-                  <a:cs typeface="Ramabhadra" panose="02000600000000000000" pitchFamily="2" charset="0"/>
-                </a:rPr>
-                <a:t>నన్ను చేర్చిన నా ప్రభూ</a:t>
-              </a:r>
-            </a:p>
-            <a:p>
-              <a:pPr defTabSz="439781">
-                <a:defRPr/>
-              </a:pPr>
-              <a:r>
-                <a:rPr lang="te-IN" sz="2100" dirty="0">
-                  <a:latin typeface="Ramabhadra" panose="02000600000000000000" pitchFamily="2" charset="0"/>
-                  <a:cs typeface="Ramabhadra" panose="02000600000000000000" pitchFamily="2" charset="0"/>
-                </a:rPr>
-                <a:t>జీవితమంతా స్తుతియించినా</a:t>
-              </a:r>
-            </a:p>
-            <a:p>
-              <a:pPr defTabSz="439781">
-                <a:defRPr/>
-              </a:pPr>
-              <a:r>
-                <a:rPr lang="te-IN" sz="2100" dirty="0">
-                  <a:latin typeface="Ramabhadra" panose="02000600000000000000" pitchFamily="2" charset="0"/>
-                  <a:cs typeface="Ramabhadra" panose="02000600000000000000" pitchFamily="2" charset="0"/>
-                </a:rPr>
-                <a:t>తీరునా నీ ఋణం</a:t>
-              </a:r>
-            </a:p>
-            <a:p>
-              <a:pPr defTabSz="439781">
-                <a:defRPr/>
-              </a:pPr>
-              <a:endParaRPr lang="te-IN" sz="2100" dirty="0">
+                <a:rPr lang="te-IN" sz="2400" dirty="0">
+                  <a:latin typeface="Ramabhadra" panose="02000600000000000000" pitchFamily="2" charset="0"/>
+                  <a:cs typeface="Ramabhadra" panose="02000600000000000000" pitchFamily="2" charset="0"/>
+                </a:rPr>
+                <a:t>దినదినము నీతోనే వసియింతును</a:t>
+              </a:r>
+            </a:p>
+            <a:p>
+              <a:pPr defTabSz="439781">
+                <a:defRPr/>
+              </a:pPr>
+              <a:r>
+                <a:rPr lang="te-IN" sz="2400" dirty="0">
+                  <a:latin typeface="Ramabhadra" panose="02000600000000000000" pitchFamily="2" charset="0"/>
+                  <a:cs typeface="Ramabhadra" panose="02000600000000000000" pitchFamily="2" charset="0"/>
+                </a:rPr>
+                <a:t>నేనేది పలికినను ఏమి చేసినను</a:t>
+              </a:r>
+            </a:p>
+            <a:p>
+              <a:pPr defTabSz="439781">
+                <a:defRPr/>
+              </a:pPr>
+              <a:r>
+                <a:rPr lang="te-IN" sz="2400" dirty="0">
+                  <a:latin typeface="Ramabhadra" panose="02000600000000000000" pitchFamily="2" charset="0"/>
+                  <a:cs typeface="Ramabhadra" panose="02000600000000000000" pitchFamily="2" charset="0"/>
+                </a:rPr>
+                <a:t>నీ ప్రేమనే కనుపరుతును</a:t>
+              </a:r>
+            </a:p>
+            <a:p>
+              <a:pPr defTabSz="439781">
+                <a:defRPr/>
+              </a:pPr>
+              <a:r>
+                <a:rPr lang="te-IN" sz="2400" dirty="0">
+                  <a:latin typeface="Ramabhadra" panose="02000600000000000000" pitchFamily="2" charset="0"/>
+                  <a:cs typeface="Ramabhadra" panose="02000600000000000000" pitchFamily="2" charset="0"/>
+                </a:rPr>
+                <a:t>నీ శక్తినే కొనియాడేదను</a:t>
+              </a:r>
+            </a:p>
+            <a:p>
+              <a:pPr defTabSz="439781">
+                <a:defRPr/>
+              </a:pPr>
+              <a:endParaRPr lang="te-IN" sz="2400" dirty="0">
                 <a:latin typeface="Ramabhadra" panose="02000600000000000000" pitchFamily="2" charset="0"/>
                 <a:cs typeface="Ramabhadra" panose="02000600000000000000" pitchFamily="2" charset="0"/>
               </a:endParaRPr>
@@ -4310,71 +4246,104 @@
                 <a:defRPr/>
               </a:pPr>
               <a:r>
-                <a:rPr lang="te-IN" sz="2100" dirty="0">
-                  <a:latin typeface="Ramabhadra" panose="02000600000000000000" pitchFamily="2" charset="0"/>
-                  <a:cs typeface="Ramabhadra" panose="02000600000000000000" pitchFamily="2" charset="0"/>
-                </a:rPr>
-                <a:t>నీదు సన్నిధినే కాంక్షించి</a:t>
-              </a:r>
-            </a:p>
-            <a:p>
-              <a:pPr defTabSz="439781">
-                <a:defRPr/>
-              </a:pPr>
-              <a:r>
-                <a:rPr lang="te-IN" sz="2100" dirty="0">
-                  <a:latin typeface="Ramabhadra" panose="02000600000000000000" pitchFamily="2" charset="0"/>
-                  <a:cs typeface="Ramabhadra" panose="02000600000000000000" pitchFamily="2" charset="0"/>
-                </a:rPr>
-                <a:t>పాప బ్రతుకే వీడితి</a:t>
-              </a:r>
-            </a:p>
-            <a:p>
-              <a:pPr defTabSz="439781">
-                <a:defRPr/>
-              </a:pPr>
-              <a:r>
-                <a:rPr lang="te-IN" sz="2100" dirty="0">
-                  <a:latin typeface="Ramabhadra" panose="02000600000000000000" pitchFamily="2" charset="0"/>
-                  <a:cs typeface="Ramabhadra" panose="02000600000000000000" pitchFamily="2" charset="0"/>
-                </a:rPr>
-                <a:t>నీదు జీవమె నిండుగ</a:t>
-              </a:r>
-            </a:p>
-            <a:p>
-              <a:pPr defTabSz="439781">
-                <a:defRPr/>
-              </a:pPr>
-              <a:r>
-                <a:rPr lang="te-IN" sz="2100" dirty="0">
-                  <a:latin typeface="Ramabhadra" panose="02000600000000000000" pitchFamily="2" charset="0"/>
-                  <a:cs typeface="Ramabhadra" panose="02000600000000000000" pitchFamily="2" charset="0"/>
-                </a:rPr>
-                <a:t>నాలో నింపుము నా ప్రభు</a:t>
-              </a:r>
-            </a:p>
-            <a:p>
-              <a:pPr defTabSz="439781">
-                <a:defRPr/>
-              </a:pPr>
-              <a:r>
-                <a:rPr lang="te-IN" sz="2100" dirty="0">
-                  <a:latin typeface="Ramabhadra" panose="02000600000000000000" pitchFamily="2" charset="0"/>
-                  <a:cs typeface="Ramabhadra" panose="02000600000000000000" pitchFamily="2" charset="0"/>
-                </a:rPr>
-                <a:t>జీవితమంతా నీ ప్రేమన్</a:t>
-              </a:r>
-            </a:p>
-            <a:p>
-              <a:pPr defTabSz="439781">
-                <a:defRPr/>
-              </a:pPr>
-              <a:r>
-                <a:rPr lang="te-IN" sz="2100" dirty="0">
-                  <a:latin typeface="Ramabhadra" panose="02000600000000000000" pitchFamily="2" charset="0"/>
-                  <a:cs typeface="Ramabhadra" panose="02000600000000000000" pitchFamily="2" charset="0"/>
-                </a:rPr>
-                <a:t>చాటు చుందును</a:t>
+                <a:rPr lang="te-IN" sz="2400" dirty="0">
+                  <a:latin typeface="Ramabhadra" panose="02000600000000000000" pitchFamily="2" charset="0"/>
+                  <a:cs typeface="Ramabhadra" panose="02000600000000000000" pitchFamily="2" charset="0"/>
+                </a:rPr>
+                <a:t>నా హృదిలో నీ వాక్యము నివసింపని </a:t>
+              </a:r>
+            </a:p>
+            <a:p>
+              <a:pPr defTabSz="439781">
+                <a:defRPr/>
+              </a:pPr>
+              <a:r>
+                <a:rPr lang="te-IN" sz="2400" dirty="0">
+                  <a:latin typeface="Ramabhadra" panose="02000600000000000000" pitchFamily="2" charset="0"/>
+                  <a:cs typeface="Ramabhadra" panose="02000600000000000000" pitchFamily="2" charset="0"/>
+                </a:rPr>
+                <a:t>ప్రతిక్షణము ప్రతిదినము ధ్యానింతును </a:t>
+              </a:r>
+            </a:p>
+            <a:p>
+              <a:pPr defTabSz="439781">
+                <a:defRPr/>
+              </a:pPr>
+              <a:r>
+                <a:rPr lang="te-IN" sz="2400" dirty="0">
+                  <a:latin typeface="Ramabhadra" panose="02000600000000000000" pitchFamily="2" charset="0"/>
+                  <a:cs typeface="Ramabhadra" panose="02000600000000000000" pitchFamily="2" charset="0"/>
+                </a:rPr>
+                <a:t>లోకము నను విడచిన నీవు విడువలేదు    </a:t>
+              </a:r>
+            </a:p>
+            <a:p>
+              <a:pPr defTabSz="439781">
+                <a:defRPr/>
+              </a:pPr>
+              <a:r>
+                <a:rPr lang="te-IN" sz="2400" dirty="0">
+                  <a:latin typeface="Ramabhadra" panose="02000600000000000000" pitchFamily="2" charset="0"/>
+                  <a:cs typeface="Ramabhadra" panose="02000600000000000000" pitchFamily="2" charset="0"/>
+                </a:rPr>
+                <a:t>నాకు జయము జయము నీ శక్తితోనే</a:t>
+              </a:r>
+            </a:p>
+            <a:p>
+              <a:pPr defTabSz="439781">
+                <a:defRPr/>
+              </a:pPr>
+              <a:endParaRPr lang="te-IN" sz="2400" dirty="0">
+                <a:latin typeface="Ramabhadra" panose="02000600000000000000" pitchFamily="2" charset="0"/>
+                <a:cs typeface="Ramabhadra" panose="02000600000000000000" pitchFamily="2" charset="0"/>
+              </a:endParaRPr>
+            </a:p>
+            <a:p>
+              <a:pPr defTabSz="439781">
+                <a:defRPr/>
+              </a:pPr>
+              <a:r>
+                <a:rPr lang="te-IN" sz="2400" dirty="0">
+                  <a:latin typeface="Ramabhadra" panose="02000600000000000000" pitchFamily="2" charset="0"/>
+                  <a:cs typeface="Ramabhadra" panose="02000600000000000000" pitchFamily="2" charset="0"/>
+                </a:rPr>
+                <a:t>నా తండ్రి నా విభుడా పాలించుమా</a:t>
+              </a:r>
+            </a:p>
+            <a:p>
+              <a:pPr defTabSz="439781">
+                <a:defRPr/>
+              </a:pPr>
+              <a:r>
+                <a:rPr lang="te-IN" sz="2400" dirty="0">
+                  <a:latin typeface="Ramabhadra" panose="02000600000000000000" pitchFamily="2" charset="0"/>
+                  <a:cs typeface="Ramabhadra" panose="02000600000000000000" pitchFamily="2" charset="0"/>
+                </a:rPr>
+                <a:t>ఆదరణ నా హృదిలోనా నింపుమయా </a:t>
+              </a:r>
+            </a:p>
+            <a:p>
+              <a:pPr defTabSz="439781">
+                <a:defRPr/>
+              </a:pPr>
+              <a:r>
+                <a:rPr lang="te-IN" sz="2400" dirty="0">
+                  <a:latin typeface="Ramabhadra" panose="02000600000000000000" pitchFamily="2" charset="0"/>
+                  <a:cs typeface="Ramabhadra" panose="02000600000000000000" pitchFamily="2" charset="0"/>
+                </a:rPr>
+                <a:t>మనుజులు నను మరిచిన నీవు మరువలేదు </a:t>
+              </a:r>
+            </a:p>
+            <a:p>
+              <a:pPr defTabSz="439781">
+                <a:defRPr/>
+              </a:pPr>
+              <a:r>
+                <a:rPr lang="te-IN" sz="2400" dirty="0">
+                  <a:latin typeface="Ramabhadra" panose="02000600000000000000" pitchFamily="2" charset="0"/>
+                  <a:cs typeface="Ramabhadra" panose="02000600000000000000" pitchFamily="2" charset="0"/>
+                </a:rPr>
+                <a:t>నాకు జయము జయము నీ ప్రేమతోనే</a:t>
               </a:r>
             </a:p>
           </p:txBody>

--- a/songsTemplate.pptx
+++ b/songsTemplate.pptx
@@ -255,7 +255,7 @@
           <a:p>
             <a:fld id="{F1102B08-ED9E-409F-B95F-09CAA1DAF6E0}" type="datetimeFigureOut">
               <a:rPr lang="en-IN" smtClean="0"/>
-              <a:t>05-10-2024</a:t>
+              <a:t>12-10-2024</a:t>
             </a:fld>
             <a:endParaRPr lang="en-IN"/>
           </a:p>
@@ -425,7 +425,7 @@
           <a:p>
             <a:fld id="{F1102B08-ED9E-409F-B95F-09CAA1DAF6E0}" type="datetimeFigureOut">
               <a:rPr lang="en-IN" smtClean="0"/>
-              <a:t>05-10-2024</a:t>
+              <a:t>12-10-2024</a:t>
             </a:fld>
             <a:endParaRPr lang="en-IN"/>
           </a:p>
@@ -605,7 +605,7 @@
           <a:p>
             <a:fld id="{F1102B08-ED9E-409F-B95F-09CAA1DAF6E0}" type="datetimeFigureOut">
               <a:rPr lang="en-IN" smtClean="0"/>
-              <a:t>05-10-2024</a:t>
+              <a:t>12-10-2024</a:t>
             </a:fld>
             <a:endParaRPr lang="en-IN"/>
           </a:p>
@@ -775,7 +775,7 @@
           <a:p>
             <a:fld id="{F1102B08-ED9E-409F-B95F-09CAA1DAF6E0}" type="datetimeFigureOut">
               <a:rPr lang="en-IN" smtClean="0"/>
-              <a:t>05-10-2024</a:t>
+              <a:t>12-10-2024</a:t>
             </a:fld>
             <a:endParaRPr lang="en-IN"/>
           </a:p>
@@ -1019,7 +1019,7 @@
           <a:p>
             <a:fld id="{F1102B08-ED9E-409F-B95F-09CAA1DAF6E0}" type="datetimeFigureOut">
               <a:rPr lang="en-IN" smtClean="0"/>
-              <a:t>05-10-2024</a:t>
+              <a:t>12-10-2024</a:t>
             </a:fld>
             <a:endParaRPr lang="en-IN"/>
           </a:p>
@@ -1251,7 +1251,7 @@
           <a:p>
             <a:fld id="{F1102B08-ED9E-409F-B95F-09CAA1DAF6E0}" type="datetimeFigureOut">
               <a:rPr lang="en-IN" smtClean="0"/>
-              <a:t>05-10-2024</a:t>
+              <a:t>12-10-2024</a:t>
             </a:fld>
             <a:endParaRPr lang="en-IN"/>
           </a:p>
@@ -1618,7 +1618,7 @@
           <a:p>
             <a:fld id="{F1102B08-ED9E-409F-B95F-09CAA1DAF6E0}" type="datetimeFigureOut">
               <a:rPr lang="en-IN" smtClean="0"/>
-              <a:t>05-10-2024</a:t>
+              <a:t>12-10-2024</a:t>
             </a:fld>
             <a:endParaRPr lang="en-IN"/>
           </a:p>
@@ -1736,7 +1736,7 @@
           <a:p>
             <a:fld id="{F1102B08-ED9E-409F-B95F-09CAA1DAF6E0}" type="datetimeFigureOut">
               <a:rPr lang="en-IN" smtClean="0"/>
-              <a:t>05-10-2024</a:t>
+              <a:t>12-10-2024</a:t>
             </a:fld>
             <a:endParaRPr lang="en-IN"/>
           </a:p>
@@ -1831,7 +1831,7 @@
           <a:p>
             <a:fld id="{F1102B08-ED9E-409F-B95F-09CAA1DAF6E0}" type="datetimeFigureOut">
               <a:rPr lang="en-IN" smtClean="0"/>
-              <a:t>05-10-2024</a:t>
+              <a:t>12-10-2024</a:t>
             </a:fld>
             <a:endParaRPr lang="en-IN"/>
           </a:p>
@@ -2108,7 +2108,7 @@
           <a:p>
             <a:fld id="{F1102B08-ED9E-409F-B95F-09CAA1DAF6E0}" type="datetimeFigureOut">
               <a:rPr lang="en-IN" smtClean="0"/>
-              <a:t>05-10-2024</a:t>
+              <a:t>12-10-2024</a:t>
             </a:fld>
             <a:endParaRPr lang="en-IN"/>
           </a:p>
@@ -2365,7 +2365,7 @@
           <a:p>
             <a:fld id="{F1102B08-ED9E-409F-B95F-09CAA1DAF6E0}" type="datetimeFigureOut">
               <a:rPr lang="en-IN" smtClean="0"/>
-              <a:t>05-10-2024</a:t>
+              <a:t>12-10-2024</a:t>
             </a:fld>
             <a:endParaRPr lang="en-IN"/>
           </a:p>
@@ -2578,7 +2578,7 @@
           <a:p>
             <a:fld id="{F1102B08-ED9E-409F-B95F-09CAA1DAF6E0}" type="datetimeFigureOut">
               <a:rPr lang="en-IN" smtClean="0"/>
-              <a:t>05-10-2024</a:t>
+              <a:t>12-10-2024</a:t>
             </a:fld>
             <a:endParaRPr lang="en-IN"/>
           </a:p>
@@ -2998,9 +2998,9 @@
         <p:grpSpPr>
           <a:xfrm>
             <a:off x="160868" y="182032"/>
-            <a:ext cx="4943470" cy="6493935"/>
+            <a:ext cx="5019669" cy="6493935"/>
             <a:chOff x="160868" y="182032"/>
-            <a:chExt cx="4943470" cy="6493935"/>
+            <a:chExt cx="5019669" cy="6493935"/>
           </a:xfrm>
         </p:grpSpPr>
         <p:sp>
@@ -3072,8 +3072,8 @@
           </p:nvSpPr>
           <p:spPr>
             <a:xfrm>
-              <a:off x="267762" y="709414"/>
-              <a:ext cx="4836576" cy="5847755"/>
+              <a:off x="343961" y="748108"/>
+              <a:ext cx="4836576" cy="5170646"/>
             </a:xfrm>
             <a:prstGeom prst="rect">
               <a:avLst/>
@@ -3094,56 +3094,38 @@
                   <a:latin typeface="Ramabhadra" panose="02000600000000000000" pitchFamily="2" charset="0"/>
                   <a:cs typeface="Ramabhadra" panose="02000600000000000000" pitchFamily="2" charset="0"/>
                 </a:rPr>
-                <a:t>చాలిన దేవుడవు యేసు </a:t>
-              </a:r>
-            </a:p>
-            <a:p>
-              <a:pPr defTabSz="439781">
-                <a:defRPr/>
-              </a:pPr>
-              <a:r>
+                <a:t>భూమ్యాకాశములు సృజించిన</a:t>
+              </a:r>
+              <a:br>
                 <a:rPr lang="te-IN" sz="2200" dirty="0">
                   <a:latin typeface="Ramabhadra" panose="02000600000000000000" pitchFamily="2" charset="0"/>
                   <a:cs typeface="Ramabhadra" panose="02000600000000000000" pitchFamily="2" charset="0"/>
                 </a:rPr>
-                <a:t>చాలిన దేవుడ నీవు</a:t>
-              </a:r>
-            </a:p>
-            <a:p>
-              <a:pPr defTabSz="439781">
-                <a:defRPr/>
-              </a:pPr>
+              </a:br>
               <a:r>
                 <a:rPr lang="te-IN" sz="2200" dirty="0">
                   <a:latin typeface="Ramabhadra" panose="02000600000000000000" pitchFamily="2" charset="0"/>
                   <a:cs typeface="Ramabhadra" panose="02000600000000000000" pitchFamily="2" charset="0"/>
                 </a:rPr>
-                <a:t>వ్యాధి బాధ సమయములో</a:t>
-              </a:r>
-            </a:p>
-            <a:p>
-              <a:pPr defTabSz="439781">
-                <a:defRPr/>
-              </a:pPr>
-              <a:r>
+                <a:t>యేసయ్యా నీకే స్తోత్రం (2)</a:t>
+              </a:r>
+              <a:br>
                 <a:rPr lang="te-IN" sz="2200" dirty="0">
                   <a:latin typeface="Ramabhadra" panose="02000600000000000000" pitchFamily="2" charset="0"/>
                   <a:cs typeface="Ramabhadra" panose="02000600000000000000" pitchFamily="2" charset="0"/>
                 </a:rPr>
-                <a:t>కష్టసుడుల తరంగములో</a:t>
-              </a:r>
-            </a:p>
-            <a:p>
-              <a:pPr defTabSz="439781">
-                <a:defRPr/>
-              </a:pPr>
+              </a:br>
               <a:r>
                 <a:rPr lang="te-IN" sz="2200" dirty="0">
                   <a:latin typeface="Ramabhadra" panose="02000600000000000000" pitchFamily="2" charset="0"/>
                   <a:cs typeface="Ramabhadra" panose="02000600000000000000" pitchFamily="2" charset="0"/>
                 </a:rPr>
-                <a:t>ఏమున్నా లేకున్నా ఏ స్ధితికైనా</a:t>
-              </a:r>
+                <a:t>నీ ఆశ్ఛర్యమైన క్రియలు</a:t>
+              </a:r>
+              <a:endParaRPr lang="en-IN" sz="2200" dirty="0">
+                <a:latin typeface="Ramabhadra" panose="02000600000000000000" pitchFamily="2" charset="0"/>
+                <a:cs typeface="Ramabhadra" panose="02000600000000000000" pitchFamily="2" charset="0"/>
+              </a:endParaRPr>
             </a:p>
             <a:p>
               <a:pPr defTabSz="439781">
@@ -3154,7 +3136,20 @@
                   <a:latin typeface="Ramabhadra" panose="02000600000000000000" pitchFamily="2" charset="0"/>
                   <a:cs typeface="Ramabhadra" panose="02000600000000000000" pitchFamily="2" charset="0"/>
                 </a:rPr>
-                <a:t>చాలిన దేవుడ నీవు</a:t>
+                <a:t>నేనెలా మరచిపోదును (2)</a:t>
+              </a:r>
+              <a:br>
+                <a:rPr lang="te-IN" sz="2200" dirty="0">
+                  <a:latin typeface="Ramabhadra" panose="02000600000000000000" pitchFamily="2" charset="0"/>
+                  <a:cs typeface="Ramabhadra" panose="02000600000000000000" pitchFamily="2" charset="0"/>
+                </a:rPr>
+              </a:br>
+              <a:r>
+                <a:rPr lang="te-IN" sz="2200" dirty="0">
+                  <a:latin typeface="Ramabhadra" panose="02000600000000000000" pitchFamily="2" charset="0"/>
+                  <a:cs typeface="Ramabhadra" panose="02000600000000000000" pitchFamily="2" charset="0"/>
+                </a:rPr>
+                <a:t>హల్లెలూయ లూయ హల్లెలూయా (4)</a:t>
               </a:r>
             </a:p>
             <a:p>
@@ -3175,8 +3170,12 @@
                   <a:latin typeface="Ramabhadra" panose="02000600000000000000" pitchFamily="2" charset="0"/>
                   <a:cs typeface="Ramabhadra" panose="02000600000000000000" pitchFamily="2" charset="0"/>
                 </a:rPr>
-                <a:t>అంజూర చెట్లు పూయకున్నను</a:t>
-              </a:r>
+                <a:t>బానిసత్వమునుండి శ్రమల బారినుండి</a:t>
+              </a:r>
+              <a:endParaRPr lang="en-IN" sz="2200" dirty="0">
+                <a:latin typeface="Ramabhadra" panose="02000600000000000000" pitchFamily="2" charset="0"/>
+                <a:cs typeface="Ramabhadra" panose="02000600000000000000" pitchFamily="2" charset="0"/>
+              </a:endParaRPr>
             </a:p>
             <a:p>
               <a:pPr defTabSz="439781">
@@ -3187,119 +3186,114 @@
                   <a:latin typeface="Ramabhadra" panose="02000600000000000000" pitchFamily="2" charset="0"/>
                   <a:cs typeface="Ramabhadra" panose="02000600000000000000" pitchFamily="2" charset="0"/>
                 </a:rPr>
-                <a:t> ద్రాక్ష చెట్లు ఫలింపకున్నను</a:t>
-              </a:r>
-            </a:p>
-            <a:p>
-              <a:pPr defTabSz="439781">
-                <a:defRPr/>
-              </a:pPr>
-              <a:r>
+                <a:t>విడిపించావు నన్ను</a:t>
+              </a:r>
+              <a:br>
                 <a:rPr lang="te-IN" sz="2200" dirty="0">
                   <a:latin typeface="Ramabhadra" panose="02000600000000000000" pitchFamily="2" charset="0"/>
                   <a:cs typeface="Ramabhadra" panose="02000600000000000000" pitchFamily="2" charset="0"/>
                 </a:rPr>
-                <a:t>చేనులోని పైరు పండకపోయినను</a:t>
-              </a:r>
-            </a:p>
-            <a:p>
-              <a:pPr defTabSz="439781">
-                <a:defRPr/>
-              </a:pPr>
+              </a:br>
               <a:r>
                 <a:rPr lang="te-IN" sz="2200" dirty="0">
                   <a:latin typeface="Ramabhadra" panose="02000600000000000000" pitchFamily="2" charset="0"/>
                   <a:cs typeface="Ramabhadra" panose="02000600000000000000" pitchFamily="2" charset="0"/>
                 </a:rPr>
-                <a:t>శాలలోని పశువులు లేక పోయినను</a:t>
-              </a:r>
-            </a:p>
-            <a:p>
-              <a:pPr defTabSz="439781">
-                <a:defRPr/>
-              </a:pPr>
+                <a:t>దీన దశలో నేనుండగా </a:t>
+              </a:r>
+              <a:endParaRPr lang="en-IN" sz="2200" dirty="0">
+                <a:latin typeface="Ramabhadra" panose="02000600000000000000" pitchFamily="2" charset="0"/>
+                <a:cs typeface="Ramabhadra" panose="02000600000000000000" pitchFamily="2" charset="0"/>
+              </a:endParaRPr>
+            </a:p>
+            <a:p>
+              <a:pPr defTabSz="439781">
+                <a:defRPr/>
+              </a:pPr>
+              <a:r>
+                <a:rPr lang="te-IN" sz="2200" dirty="0">
+                  <a:latin typeface="Ramabhadra" panose="02000600000000000000" pitchFamily="2" charset="0"/>
+                  <a:cs typeface="Ramabhadra" panose="02000600000000000000" pitchFamily="2" charset="0"/>
+                </a:rPr>
+                <a:t>నను విడువనైతివి (2) </a:t>
+              </a:r>
+            </a:p>
+            <a:p>
+              <a:pPr defTabSz="439781">
+                <a:defRPr/>
+              </a:pPr>
+              <a:endParaRPr lang="en-IN" sz="2200" dirty="0">
+                <a:latin typeface="Ramabhadra" panose="02000600000000000000" pitchFamily="2" charset="0"/>
+                <a:cs typeface="Ramabhadra" panose="02000600000000000000" pitchFamily="2" charset="0"/>
+              </a:endParaRPr>
+            </a:p>
+            <a:p>
+              <a:pPr defTabSz="439781">
+                <a:defRPr/>
+              </a:pPr>
+              <a:r>
+                <a:rPr lang="te-IN" sz="2200" dirty="0">
+                  <a:latin typeface="Ramabhadra" panose="02000600000000000000" pitchFamily="2" charset="0"/>
+                  <a:cs typeface="Ramabhadra" panose="02000600000000000000" pitchFamily="2" charset="0"/>
+                </a:rPr>
+                <a:t>జీవాహారమై నీదు వాక్యము</a:t>
+              </a:r>
+              <a:endParaRPr lang="en-IN" sz="2200" dirty="0">
+                <a:latin typeface="Ramabhadra" panose="02000600000000000000" pitchFamily="2" charset="0"/>
+                <a:cs typeface="Ramabhadra" panose="02000600000000000000" pitchFamily="2" charset="0"/>
+              </a:endParaRPr>
+            </a:p>
+            <a:p>
+              <a:pPr defTabSz="439781">
+                <a:defRPr/>
+              </a:pPr>
+              <a:r>
+                <a:rPr lang="te-IN" sz="2200" dirty="0">
+                  <a:latin typeface="Ramabhadra" panose="02000600000000000000" pitchFamily="2" charset="0"/>
+                  <a:cs typeface="Ramabhadra" panose="02000600000000000000" pitchFamily="2" charset="0"/>
+                </a:rPr>
+                <a:t>పోషించెను నన్ను</a:t>
+              </a:r>
+              <a:br>
+                <a:rPr lang="te-IN" sz="2200" dirty="0">
+                  <a:latin typeface="Ramabhadra" panose="02000600000000000000" pitchFamily="2" charset="0"/>
+                  <a:cs typeface="Ramabhadra" panose="02000600000000000000" pitchFamily="2" charset="0"/>
+                </a:rPr>
+              </a:br>
+              <a:r>
+                <a:rPr lang="te-IN" sz="2200" dirty="0">
+                  <a:latin typeface="Ramabhadra" panose="02000600000000000000" pitchFamily="2" charset="0"/>
+                  <a:cs typeface="Ramabhadra" panose="02000600000000000000" pitchFamily="2" charset="0"/>
+                </a:rPr>
+                <a:t>ఆకలితో అల్లాడగా</a:t>
+              </a:r>
+              <a:endParaRPr lang="en-IN" sz="2200" dirty="0">
+                <a:latin typeface="Ramabhadra" panose="02000600000000000000" pitchFamily="2" charset="0"/>
+                <a:cs typeface="Ramabhadra" panose="02000600000000000000" pitchFamily="2" charset="0"/>
+              </a:endParaRPr>
+            </a:p>
+            <a:p>
+              <a:pPr defTabSz="439781">
+                <a:defRPr/>
+              </a:pPr>
+              <a:r>
+                <a:rPr lang="te-IN" sz="2200" dirty="0">
+                  <a:latin typeface="Ramabhadra" panose="02000600000000000000" pitchFamily="2" charset="0"/>
+                  <a:cs typeface="Ramabhadra" panose="02000600000000000000" pitchFamily="2" charset="0"/>
+                </a:rPr>
+                <a:t>నను తృప్తిపరచితివి (2</a:t>
+              </a:r>
+              <a:r>
+                <a:rPr lang="en-IN" sz="2200" dirty="0">
+                  <a:latin typeface="Ramabhadra" panose="02000600000000000000" pitchFamily="2" charset="0"/>
+                  <a:cs typeface="Ramabhadra" panose="02000600000000000000" pitchFamily="2" charset="0"/>
+                </a:rPr>
+                <a:t>)</a:t>
+              </a:r>
               <a:endParaRPr lang="te-IN" sz="2200" dirty="0">
                 <a:latin typeface="Ramabhadra" panose="02000600000000000000" pitchFamily="2" charset="0"/>
                 <a:cs typeface="Ramabhadra" panose="02000600000000000000" pitchFamily="2" charset="0"/>
               </a:endParaRPr>
-            </a:p>
-            <a:p>
-              <a:pPr defTabSz="439781">
-                <a:defRPr/>
-              </a:pPr>
-              <a:r>
-                <a:rPr lang="te-IN" sz="2200" dirty="0">
-                  <a:latin typeface="Ramabhadra" panose="02000600000000000000" pitchFamily="2" charset="0"/>
-                  <a:cs typeface="Ramabhadra" panose="02000600000000000000" pitchFamily="2" charset="0"/>
-                </a:rPr>
-                <a:t>గాఢాంధకారాన పయనించిన </a:t>
-              </a:r>
-            </a:p>
-            <a:p>
-              <a:pPr defTabSz="439781">
-                <a:defRPr/>
-              </a:pPr>
-              <a:r>
-                <a:rPr lang="te-IN" sz="2200" dirty="0">
-                  <a:latin typeface="Ramabhadra" panose="02000600000000000000" pitchFamily="2" charset="0"/>
-                  <a:cs typeface="Ramabhadra" panose="02000600000000000000" pitchFamily="2" charset="0"/>
-                </a:rPr>
-                <a:t>పొంగు సాగరా లెదురైన</a:t>
-              </a:r>
-            </a:p>
-            <a:p>
-              <a:pPr defTabSz="439781">
-                <a:defRPr/>
-              </a:pPr>
-              <a:r>
-                <a:rPr lang="te-IN" sz="2200" dirty="0">
-                  <a:latin typeface="Ramabhadra" panose="02000600000000000000" pitchFamily="2" charset="0"/>
-                  <a:cs typeface="Ramabhadra" panose="02000600000000000000" pitchFamily="2" charset="0"/>
-                </a:rPr>
-                <a:t>లోకమంత ఒకటైన</a:t>
-              </a:r>
-              <a:endParaRPr lang="en-IN" sz="2200" dirty="0">
-                <a:latin typeface="Ramabhadra" panose="02000600000000000000" pitchFamily="2" charset="0"/>
-                <a:cs typeface="Ramabhadra" panose="02000600000000000000" pitchFamily="2" charset="0"/>
-              </a:endParaRPr>
-            </a:p>
-            <a:p>
-              <a:pPr defTabSz="439781">
-                <a:defRPr/>
-              </a:pPr>
-              <a:r>
-                <a:rPr lang="te-IN" sz="2200" dirty="0">
-                  <a:latin typeface="Ramabhadra" panose="02000600000000000000" pitchFamily="2" charset="0"/>
-                  <a:cs typeface="Ramabhadra" panose="02000600000000000000" pitchFamily="2" charset="0"/>
-                </a:rPr>
-                <a:t>అన్యాయ</a:t>
-              </a:r>
-              <a:r>
-                <a:rPr lang="en-IN" sz="2200" dirty="0">
-                  <a:latin typeface="Ramabhadra" panose="02000600000000000000" pitchFamily="2" charset="0"/>
-                  <a:cs typeface="Ramabhadra" panose="02000600000000000000" pitchFamily="2" charset="0"/>
-                </a:rPr>
-                <a:t> </a:t>
-              </a:r>
-              <a:r>
-                <a:rPr lang="te-IN" sz="2200" dirty="0">
-                  <a:latin typeface="Ramabhadra" panose="02000600000000000000" pitchFamily="2" charset="0"/>
-                  <a:cs typeface="Ramabhadra" panose="02000600000000000000" pitchFamily="2" charset="0"/>
-                </a:rPr>
-                <a:t>తీర్పుకు గురిచేసిన</a:t>
-              </a:r>
-            </a:p>
-            <a:p>
-              <a:pPr defTabSz="439781">
-                <a:defRPr/>
-              </a:pPr>
-              <a:r>
-                <a:rPr lang="te-IN" sz="2200" dirty="0">
-                  <a:latin typeface="Ramabhadra" panose="02000600000000000000" pitchFamily="2" charset="0"/>
-                  <a:cs typeface="Ramabhadra" panose="02000600000000000000" pitchFamily="2" charset="0"/>
-                </a:rPr>
-                <a:t>సత్యము పలుకుటచే నష్టము కలిగినను</a:t>
-              </a:r>
             </a:p>
           </p:txBody>
         </p:sp>
@@ -3455,8 +3449,8 @@
           </p:nvSpPr>
           <p:spPr>
             <a:xfrm>
-              <a:off x="343961" y="736932"/>
-              <a:ext cx="4541306" cy="5847755"/>
+              <a:off x="343961" y="770800"/>
+              <a:ext cx="4541306" cy="5632311"/>
             </a:xfrm>
             <a:prstGeom prst="rect">
               <a:avLst/>
@@ -3473,96 +3467,78 @@
                 <a:defRPr/>
               </a:pPr>
               <a:r>
-                <a:rPr lang="te-IN" sz="2200" dirty="0">
-                  <a:latin typeface="Ramabhadra" panose="02000600000000000000" pitchFamily="2" charset="0"/>
-                  <a:cs typeface="Ramabhadra" panose="02000600000000000000" pitchFamily="2" charset="0"/>
-                </a:rPr>
-                <a:t>మహిమ ఘనతకు అర్హుడవు</a:t>
-              </a:r>
-              <a:br>
-                <a:rPr lang="te-IN" sz="2200" dirty="0">
-                  <a:latin typeface="Ramabhadra" panose="02000600000000000000" pitchFamily="2" charset="0"/>
-                  <a:cs typeface="Ramabhadra" panose="02000600000000000000" pitchFamily="2" charset="0"/>
-                </a:rPr>
-              </a:br>
-              <a:r>
-                <a:rPr lang="te-IN" sz="2200" dirty="0">
-                  <a:latin typeface="Ramabhadra" panose="02000600000000000000" pitchFamily="2" charset="0"/>
-                  <a:cs typeface="Ramabhadra" panose="02000600000000000000" pitchFamily="2" charset="0"/>
-                </a:rPr>
-                <a:t>నీవే నా దైవము</a:t>
-              </a:r>
-              <a:br>
-                <a:rPr lang="te-IN" sz="2200" dirty="0">
-                  <a:latin typeface="Ramabhadra" panose="02000600000000000000" pitchFamily="2" charset="0"/>
-                  <a:cs typeface="Ramabhadra" panose="02000600000000000000" pitchFamily="2" charset="0"/>
-                </a:rPr>
-              </a:br>
-              <a:r>
-                <a:rPr lang="te-IN" sz="2200" dirty="0">
-                  <a:latin typeface="Ramabhadra" panose="02000600000000000000" pitchFamily="2" charset="0"/>
-                  <a:cs typeface="Ramabhadra" panose="02000600000000000000" pitchFamily="2" charset="0"/>
-                </a:rPr>
-                <a:t>సృష్టికర్త ముక్తి దాత (2)</a:t>
-              </a:r>
-              <a:br>
-                <a:rPr lang="te-IN" sz="2200" dirty="0">
-                  <a:latin typeface="Ramabhadra" panose="02000600000000000000" pitchFamily="2" charset="0"/>
-                  <a:cs typeface="Ramabhadra" panose="02000600000000000000" pitchFamily="2" charset="0"/>
-                </a:rPr>
-              </a:br>
-              <a:r>
-                <a:rPr lang="te-IN" sz="2200" dirty="0">
-                  <a:latin typeface="Ramabhadra" panose="02000600000000000000" pitchFamily="2" charset="0"/>
-                  <a:cs typeface="Ramabhadra" panose="02000600000000000000" pitchFamily="2" charset="0"/>
-                </a:rPr>
-                <a:t>మా స్తుతులకు పాత్రుడా</a:t>
-              </a:r>
-              <a:br>
-                <a:rPr lang="te-IN" sz="2200" dirty="0">
-                  <a:latin typeface="Ramabhadra" panose="02000600000000000000" pitchFamily="2" charset="0"/>
-                  <a:cs typeface="Ramabhadra" panose="02000600000000000000" pitchFamily="2" charset="0"/>
-                </a:rPr>
-              </a:br>
-              <a:r>
-                <a:rPr lang="te-IN" sz="2200" dirty="0">
-                  <a:latin typeface="Ramabhadra" panose="02000600000000000000" pitchFamily="2" charset="0"/>
-                  <a:cs typeface="Ramabhadra" panose="02000600000000000000" pitchFamily="2" charset="0"/>
-                </a:rPr>
-                <a:t>ఆరాధనా నీకే ఆరాధనా నీకే</a:t>
-              </a:r>
-              <a:br>
-                <a:rPr lang="te-IN" sz="2200" dirty="0">
-                  <a:latin typeface="Ramabhadra" panose="02000600000000000000" pitchFamily="2" charset="0"/>
-                  <a:cs typeface="Ramabhadra" panose="02000600000000000000" pitchFamily="2" charset="0"/>
-                </a:rPr>
-              </a:br>
-              <a:r>
-                <a:rPr lang="te-IN" sz="2200" dirty="0">
-                  <a:latin typeface="Ramabhadra" panose="02000600000000000000" pitchFamily="2" charset="0"/>
-                  <a:cs typeface="Ramabhadra" panose="02000600000000000000" pitchFamily="2" charset="0"/>
-                </a:rPr>
-                <a:t>ఆరాధనా స్తుతి ఆరాధనా ఆరాధనా నీకే (2)</a:t>
-              </a:r>
-              <a:br>
-                <a:rPr lang="te-IN" sz="2200" dirty="0">
-                  <a:latin typeface="Ramabhadra" panose="02000600000000000000" pitchFamily="2" charset="0"/>
-                  <a:cs typeface="Ramabhadra" panose="02000600000000000000" pitchFamily="2" charset="0"/>
-                </a:rPr>
-              </a:br>
-              <a:r>
-                <a:rPr lang="te-IN" sz="2200" dirty="0">
-                  <a:latin typeface="Ramabhadra" panose="02000600000000000000" pitchFamily="2" charset="0"/>
-                  <a:cs typeface="Ramabhadra" panose="02000600000000000000" pitchFamily="2" charset="0"/>
-                </a:rPr>
-                <a:t>ఆరాధనా నీకే ఆరాధనా నీకే</a:t>
-              </a:r>
-            </a:p>
-            <a:p>
-              <a:pPr defTabSz="439781">
-                <a:defRPr/>
-              </a:pPr>
-              <a:endParaRPr lang="te-IN" sz="2200" dirty="0">
+                <a:rPr lang="te-IN" dirty="0">
+                  <a:latin typeface="Ramabhadra" panose="02000600000000000000" pitchFamily="2" charset="0"/>
+                  <a:cs typeface="Ramabhadra" panose="02000600000000000000" pitchFamily="2" charset="0"/>
+                </a:rPr>
+                <a:t>నీ ప్రేమ నా జీవితాన్ని – నీకై వెలిగించెనే యేసయ్యా</a:t>
+              </a:r>
+            </a:p>
+            <a:p>
+              <a:pPr defTabSz="439781">
+                <a:defRPr/>
+              </a:pPr>
+              <a:r>
+                <a:rPr lang="te-IN" dirty="0">
+                  <a:latin typeface="Ramabhadra" panose="02000600000000000000" pitchFamily="2" charset="0"/>
+                  <a:cs typeface="Ramabhadra" panose="02000600000000000000" pitchFamily="2" charset="0"/>
+                </a:rPr>
+                <a:t>నీ కృప సెలయేరులా – నాలో ప్రవహించెనే (2)</a:t>
+              </a:r>
+            </a:p>
+            <a:p>
+              <a:pPr defTabSz="439781">
+                <a:defRPr/>
+              </a:pPr>
+              <a:r>
+                <a:rPr lang="te-IN" dirty="0">
+                  <a:latin typeface="Ramabhadra" panose="02000600000000000000" pitchFamily="2" charset="0"/>
+                  <a:cs typeface="Ramabhadra" panose="02000600000000000000" pitchFamily="2" charset="0"/>
+                </a:rPr>
+                <a:t>నన్ను క్షమియించెనే – నన్ను కరుణించెనే</a:t>
+              </a:r>
+            </a:p>
+            <a:p>
+              <a:pPr defTabSz="439781">
+                <a:defRPr/>
+              </a:pPr>
+              <a:r>
+                <a:rPr lang="te-IN" dirty="0">
+                  <a:latin typeface="Ramabhadra" panose="02000600000000000000" pitchFamily="2" charset="0"/>
+                  <a:cs typeface="Ramabhadra" panose="02000600000000000000" pitchFamily="2" charset="0"/>
+                </a:rPr>
+                <a:t>నన్ను స్థిరపరచెనే – నన్ను ఘనపరచెనే (2)</a:t>
+              </a:r>
+            </a:p>
+            <a:p>
+              <a:pPr defTabSz="439781">
+                <a:defRPr/>
+              </a:pPr>
+              <a:r>
+                <a:rPr lang="te-IN" dirty="0">
+                  <a:latin typeface="Ramabhadra" panose="02000600000000000000" pitchFamily="2" charset="0"/>
+                  <a:cs typeface="Ramabhadra" panose="02000600000000000000" pitchFamily="2" charset="0"/>
+                </a:rPr>
+                <a:t>యేసయ్యా యేసయ్యా నా యేసయ్యా</a:t>
+              </a:r>
+            </a:p>
+            <a:p>
+              <a:pPr defTabSz="439781">
+                <a:defRPr/>
+              </a:pPr>
+              <a:r>
+                <a:rPr lang="te-IN" dirty="0">
+                  <a:latin typeface="Ramabhadra" panose="02000600000000000000" pitchFamily="2" charset="0"/>
+                  <a:cs typeface="Ramabhadra" panose="02000600000000000000" pitchFamily="2" charset="0"/>
+                </a:rPr>
+                <a:t>యేసయ్యా యేసయ్యా ఓ మెస్సయ్యా (2)</a:t>
+              </a:r>
+            </a:p>
+            <a:p>
+              <a:pPr defTabSz="439781">
+                <a:defRPr/>
+              </a:pPr>
+              <a:endParaRPr lang="te-IN" dirty="0">
                 <a:latin typeface="Ramabhadra" panose="02000600000000000000" pitchFamily="2" charset="0"/>
                 <a:cs typeface="Ramabhadra" panose="02000600000000000000" pitchFamily="2" charset="0"/>
               </a:endParaRPr>
@@ -3572,57 +3548,78 @@
                 <a:defRPr/>
               </a:pPr>
               <a:r>
-                <a:rPr lang="te-IN" sz="2200" dirty="0">
-                  <a:latin typeface="Ramabhadra" panose="02000600000000000000" pitchFamily="2" charset="0"/>
-                  <a:cs typeface="Ramabhadra" panose="02000600000000000000" pitchFamily="2" charset="0"/>
-                </a:rPr>
-                <a:t>మన్నాను కురిపించినావు</a:t>
-              </a:r>
-              <a:br>
-                <a:rPr lang="te-IN" sz="2200" dirty="0">
-                  <a:latin typeface="Ramabhadra" panose="02000600000000000000" pitchFamily="2" charset="0"/>
-                  <a:cs typeface="Ramabhadra" panose="02000600000000000000" pitchFamily="2" charset="0"/>
-                </a:rPr>
-              </a:br>
-              <a:r>
-                <a:rPr lang="te-IN" sz="2200" dirty="0">
-                  <a:latin typeface="Ramabhadra" panose="02000600000000000000" pitchFamily="2" charset="0"/>
-                  <a:cs typeface="Ramabhadra" panose="02000600000000000000" pitchFamily="2" charset="0"/>
-                </a:rPr>
-                <a:t>బండనుండి నీల్లిచ్చినావు (2)</a:t>
-              </a:r>
-              <a:br>
-                <a:rPr lang="te-IN" sz="2200" dirty="0">
-                  <a:latin typeface="Ramabhadra" panose="02000600000000000000" pitchFamily="2" charset="0"/>
-                  <a:cs typeface="Ramabhadra" panose="02000600000000000000" pitchFamily="2" charset="0"/>
-                </a:rPr>
-              </a:br>
-              <a:r>
-                <a:rPr lang="te-IN" sz="2200" dirty="0">
-                  <a:latin typeface="Ramabhadra" panose="02000600000000000000" pitchFamily="2" charset="0"/>
-                  <a:cs typeface="Ramabhadra" panose="02000600000000000000" pitchFamily="2" charset="0"/>
-                </a:rPr>
-                <a:t>యెహోవా ఈరే చూచుకొనును</a:t>
-              </a:r>
-              <a:br>
-                <a:rPr lang="te-IN" sz="2200" dirty="0">
-                  <a:latin typeface="Ramabhadra" panose="02000600000000000000" pitchFamily="2" charset="0"/>
-                  <a:cs typeface="Ramabhadra" panose="02000600000000000000" pitchFamily="2" charset="0"/>
-                </a:rPr>
-              </a:br>
-              <a:r>
-                <a:rPr lang="te-IN" sz="2200" dirty="0">
-                  <a:latin typeface="Ramabhadra" panose="02000600000000000000" pitchFamily="2" charset="0"/>
-                  <a:cs typeface="Ramabhadra" panose="02000600000000000000" pitchFamily="2" charset="0"/>
-                </a:rPr>
-                <a:t>సర్వము సమకూర్చును           </a:t>
-              </a:r>
-            </a:p>
-            <a:p>
-              <a:pPr defTabSz="439781">
-                <a:defRPr/>
-              </a:pPr>
-              <a:endParaRPr lang="te-IN" sz="2200" dirty="0">
+                <a:rPr lang="te-IN" dirty="0">
+                  <a:latin typeface="Ramabhadra" panose="02000600000000000000" pitchFamily="2" charset="0"/>
+                  <a:cs typeface="Ramabhadra" panose="02000600000000000000" pitchFamily="2" charset="0"/>
+                </a:rPr>
+                <a:t>నేను నిన్ను విడచిననూ –</a:t>
+              </a:r>
+            </a:p>
+            <a:p>
+              <a:pPr defTabSz="439781">
+                <a:defRPr/>
+              </a:pPr>
+              <a:r>
+                <a:rPr lang="te-IN" dirty="0">
+                  <a:latin typeface="Ramabhadra" panose="02000600000000000000" pitchFamily="2" charset="0"/>
+                  <a:cs typeface="Ramabhadra" panose="02000600000000000000" pitchFamily="2" charset="0"/>
+                </a:rPr>
+                <a:t>నీవు నన్ను విడువలేదయ్యా</a:t>
+              </a:r>
+            </a:p>
+            <a:p>
+              <a:pPr defTabSz="439781">
+                <a:defRPr/>
+              </a:pPr>
+              <a:r>
+                <a:rPr lang="te-IN" dirty="0">
+                  <a:latin typeface="Ramabhadra" panose="02000600000000000000" pitchFamily="2" charset="0"/>
+                  <a:cs typeface="Ramabhadra" panose="02000600000000000000" pitchFamily="2" charset="0"/>
+                </a:rPr>
+                <a:t>దారి తప్పి తొలగిననూ –</a:t>
+              </a:r>
+            </a:p>
+            <a:p>
+              <a:pPr defTabSz="439781">
+                <a:defRPr/>
+              </a:pPr>
+              <a:r>
+                <a:rPr lang="te-IN" dirty="0">
+                  <a:latin typeface="Ramabhadra" panose="02000600000000000000" pitchFamily="2" charset="0"/>
+                  <a:cs typeface="Ramabhadra" panose="02000600000000000000" pitchFamily="2" charset="0"/>
+                </a:rPr>
+                <a:t>నీ దారిలో నను చేర్చినావయ్యా (2)</a:t>
+              </a:r>
+            </a:p>
+            <a:p>
+              <a:pPr defTabSz="439781">
+                <a:defRPr/>
+              </a:pPr>
+              <a:r>
+                <a:rPr lang="te-IN" dirty="0">
+                  <a:latin typeface="Ramabhadra" panose="02000600000000000000" pitchFamily="2" charset="0"/>
+                  <a:cs typeface="Ramabhadra" panose="02000600000000000000" pitchFamily="2" charset="0"/>
+                </a:rPr>
+                <a:t>ఏమివ్వగలను నీ కృపకు నేను</a:t>
+              </a:r>
+            </a:p>
+            <a:p>
+              <a:pPr defTabSz="439781">
+                <a:defRPr/>
+              </a:pPr>
+              <a:r>
+                <a:rPr lang="te-IN" dirty="0">
+                  <a:latin typeface="Ramabhadra" panose="02000600000000000000" pitchFamily="2" charset="0"/>
+                  <a:cs typeface="Ramabhadra" panose="02000600000000000000" pitchFamily="2" charset="0"/>
+                </a:rPr>
+                <a:t>వెలకట్టలేను నీ ప్రేమను (2)</a:t>
+              </a:r>
+            </a:p>
+            <a:p>
+              <a:pPr defTabSz="439781">
+                <a:defRPr/>
+              </a:pPr>
+              <a:endParaRPr lang="te-IN" dirty="0">
                 <a:latin typeface="Ramabhadra" panose="02000600000000000000" pitchFamily="2" charset="0"/>
                 <a:cs typeface="Ramabhadra" panose="02000600000000000000" pitchFamily="2" charset="0"/>
               </a:endParaRPr>
@@ -3632,50 +3629,71 @@
                 <a:defRPr/>
               </a:pPr>
               <a:r>
-                <a:rPr lang="te-IN" sz="2200" dirty="0">
-                  <a:latin typeface="Ramabhadra" panose="02000600000000000000" pitchFamily="2" charset="0"/>
-                  <a:cs typeface="Ramabhadra" panose="02000600000000000000" pitchFamily="2" charset="0"/>
-                </a:rPr>
-                <a:t>వ్యాధులను తొలగించినావు</a:t>
-              </a:r>
-              <a:br>
-                <a:rPr lang="te-IN" sz="2200" dirty="0">
-                  <a:latin typeface="Ramabhadra" panose="02000600000000000000" pitchFamily="2" charset="0"/>
-                  <a:cs typeface="Ramabhadra" panose="02000600000000000000" pitchFamily="2" charset="0"/>
-                </a:rPr>
-              </a:br>
-              <a:r>
-                <a:rPr lang="te-IN" sz="2200" dirty="0">
-                  <a:latin typeface="Ramabhadra" panose="02000600000000000000" pitchFamily="2" charset="0"/>
-                  <a:cs typeface="Ramabhadra" panose="02000600000000000000" pitchFamily="2" charset="0"/>
-                </a:rPr>
-                <a:t>మృతులను మరి లేపినావు (2)</a:t>
-              </a:r>
-              <a:br>
-                <a:rPr lang="te-IN" sz="2200" dirty="0">
-                  <a:latin typeface="Ramabhadra" panose="02000600000000000000" pitchFamily="2" charset="0"/>
-                  <a:cs typeface="Ramabhadra" panose="02000600000000000000" pitchFamily="2" charset="0"/>
-                </a:rPr>
-              </a:br>
-              <a:r>
-                <a:rPr lang="te-IN" sz="2200" dirty="0">
-                  <a:latin typeface="Ramabhadra" panose="02000600000000000000" pitchFamily="2" charset="0"/>
-                  <a:cs typeface="Ramabhadra" panose="02000600000000000000" pitchFamily="2" charset="0"/>
-                </a:rPr>
-                <a:t>యెహోవా రాఫా స్వస్థపరచును</a:t>
-              </a:r>
-              <a:br>
-                <a:rPr lang="te-IN" sz="2200" dirty="0">
-                  <a:latin typeface="Ramabhadra" panose="02000600000000000000" pitchFamily="2" charset="0"/>
-                  <a:cs typeface="Ramabhadra" panose="02000600000000000000" pitchFamily="2" charset="0"/>
-                </a:rPr>
-              </a:br>
-              <a:r>
-                <a:rPr lang="te-IN" sz="2200" dirty="0">
-                  <a:latin typeface="Ramabhadra" panose="02000600000000000000" pitchFamily="2" charset="0"/>
-                  <a:cs typeface="Ramabhadra" panose="02000600000000000000" pitchFamily="2" charset="0"/>
-                </a:rPr>
-                <a:t>నను స్వస్థపరచును                 </a:t>
+                <a:rPr lang="te-IN" dirty="0">
+                  <a:latin typeface="Ramabhadra" panose="02000600000000000000" pitchFamily="2" charset="0"/>
+                  <a:cs typeface="Ramabhadra" panose="02000600000000000000" pitchFamily="2" charset="0"/>
+                </a:rPr>
+                <a:t>జలములు నన్ను చుట్టిననూ –</a:t>
+              </a:r>
+            </a:p>
+            <a:p>
+              <a:pPr defTabSz="439781">
+                <a:defRPr/>
+              </a:pPr>
+              <a:r>
+                <a:rPr lang="te-IN" dirty="0">
+                  <a:latin typeface="Ramabhadra" panose="02000600000000000000" pitchFamily="2" charset="0"/>
+                  <a:cs typeface="Ramabhadra" panose="02000600000000000000" pitchFamily="2" charset="0"/>
+                </a:rPr>
+                <a:t>నీ చేతిలో నను దాచినావయ్యా</a:t>
+              </a:r>
+            </a:p>
+            <a:p>
+              <a:pPr defTabSz="439781">
+                <a:defRPr/>
+              </a:pPr>
+              <a:r>
+                <a:rPr lang="te-IN" dirty="0">
+                  <a:latin typeface="Ramabhadra" panose="02000600000000000000" pitchFamily="2" charset="0"/>
+                  <a:cs typeface="Ramabhadra" panose="02000600000000000000" pitchFamily="2" charset="0"/>
+                </a:rPr>
+                <a:t>జ్వాలలు నాపై లేచిననూ –</a:t>
+              </a:r>
+            </a:p>
+            <a:p>
+              <a:pPr defTabSz="439781">
+                <a:defRPr/>
+              </a:pPr>
+              <a:r>
+                <a:rPr lang="te-IN" dirty="0">
+                  <a:latin typeface="Ramabhadra" panose="02000600000000000000" pitchFamily="2" charset="0"/>
+                  <a:cs typeface="Ramabhadra" panose="02000600000000000000" pitchFamily="2" charset="0"/>
+                </a:rPr>
+                <a:t>నీ ఆత్మతో నను కప్పినావయ్యా (2)</a:t>
+              </a:r>
+            </a:p>
+            <a:p>
+              <a:pPr defTabSz="439781">
+                <a:defRPr/>
+              </a:pPr>
+              <a:r>
+                <a:rPr lang="te-IN" dirty="0">
+                  <a:latin typeface="Ramabhadra" panose="02000600000000000000" pitchFamily="2" charset="0"/>
+                  <a:cs typeface="Ramabhadra" panose="02000600000000000000" pitchFamily="2" charset="0"/>
+                </a:rPr>
+                <a:t>ఏమివ్వగలను నీ కృపకు నేను</a:t>
+              </a:r>
+            </a:p>
+            <a:p>
+              <a:pPr defTabSz="439781">
+                <a:defRPr/>
+              </a:pPr>
+              <a:r>
+                <a:rPr lang="te-IN" dirty="0">
+                  <a:latin typeface="Ramabhadra" panose="02000600000000000000" pitchFamily="2" charset="0"/>
+                  <a:cs typeface="Ramabhadra" panose="02000600000000000000" pitchFamily="2" charset="0"/>
+                </a:rPr>
+                <a:t>వెలకట్టలేను నీ ఆత్మను (2)</a:t>
               </a:r>
             </a:p>
           </p:txBody>
@@ -3862,8 +3880,8 @@
           </p:nvSpPr>
           <p:spPr>
             <a:xfrm>
-              <a:off x="280461" y="835357"/>
-              <a:ext cx="4648200" cy="4154984"/>
+              <a:off x="280461" y="749632"/>
+              <a:ext cx="4648200" cy="5509200"/>
             </a:xfrm>
             <a:prstGeom prst="rect">
               <a:avLst/>
@@ -3880,30 +3898,54 @@
                 <a:defRPr/>
               </a:pPr>
               <a:r>
-                <a:rPr lang="te-IN" sz="2400" dirty="0">
-                  <a:latin typeface="Ramabhadra" panose="02000600000000000000" pitchFamily="2" charset="0"/>
-                  <a:cs typeface="Ramabhadra" panose="02000600000000000000" pitchFamily="2" charset="0"/>
-                </a:rPr>
-                <a:t>మాధుర్యమే నా ప్రభుతో జీవితం</a:t>
-              </a:r>
-            </a:p>
-            <a:p>
-              <a:pPr defTabSz="439781">
-                <a:defRPr/>
-              </a:pPr>
-              <a:r>
-                <a:rPr lang="te-IN" sz="2400" dirty="0">
-                  <a:latin typeface="Ramabhadra" panose="02000600000000000000" pitchFamily="2" charset="0"/>
-                  <a:cs typeface="Ramabhadra" panose="02000600000000000000" pitchFamily="2" charset="0"/>
-                </a:rPr>
-                <a:t>మహిమానందమే – మహా ఆశ్చర్యమే</a:t>
-              </a:r>
-            </a:p>
-            <a:p>
-              <a:pPr defTabSz="439781">
-                <a:defRPr/>
-              </a:pPr>
-              <a:endParaRPr lang="te-IN" sz="2400" dirty="0">
+                <a:rPr lang="te-IN" sz="2200" dirty="0">
+                  <a:latin typeface="Ramabhadra" panose="02000600000000000000" pitchFamily="2" charset="0"/>
+                  <a:cs typeface="Ramabhadra" panose="02000600000000000000" pitchFamily="2" charset="0"/>
+                </a:rPr>
+                <a:t>నా స్తుతుల పైన నివసించువాడా</a:t>
+              </a:r>
+            </a:p>
+            <a:p>
+              <a:pPr defTabSz="439781">
+                <a:defRPr/>
+              </a:pPr>
+              <a:r>
+                <a:rPr lang="te-IN" sz="2200" dirty="0">
+                  <a:latin typeface="Ramabhadra" panose="02000600000000000000" pitchFamily="2" charset="0"/>
+                  <a:cs typeface="Ramabhadra" panose="02000600000000000000" pitchFamily="2" charset="0"/>
+                </a:rPr>
+                <a:t>నా అంతరంగికుడా యేసయ్యా (2)</a:t>
+              </a:r>
+            </a:p>
+            <a:p>
+              <a:pPr defTabSz="439781">
+                <a:defRPr/>
+              </a:pPr>
+              <a:r>
+                <a:rPr lang="te-IN" sz="2200" dirty="0">
+                  <a:latin typeface="Ramabhadra" panose="02000600000000000000" pitchFamily="2" charset="0"/>
+                  <a:cs typeface="Ramabhadra" panose="02000600000000000000" pitchFamily="2" charset="0"/>
+                </a:rPr>
+                <a:t>నీవు నా పక్షమై యున్నావు గనుకే</a:t>
+              </a:r>
+            </a:p>
+            <a:p>
+              <a:pPr defTabSz="439781">
+                <a:defRPr/>
+              </a:pPr>
+              <a:r>
+                <a:rPr lang="te-IN" sz="2200" dirty="0">
+                  <a:latin typeface="Ramabhadra" panose="02000600000000000000" pitchFamily="2" charset="0"/>
+                  <a:cs typeface="Ramabhadra" panose="02000600000000000000" pitchFamily="2" charset="0"/>
+                </a:rPr>
+                <a:t>జయమే జయమే ఎల్లవేళలా జయమే (2)</a:t>
+              </a:r>
+            </a:p>
+            <a:p>
+              <a:pPr defTabSz="439781">
+                <a:defRPr/>
+              </a:pPr>
+              <a:endParaRPr lang="te-IN" sz="2200" dirty="0">
                 <a:latin typeface="Ramabhadra" panose="02000600000000000000" pitchFamily="2" charset="0"/>
                 <a:cs typeface="Ramabhadra" panose="02000600000000000000" pitchFamily="2" charset="0"/>
               </a:endParaRPr>
@@ -3913,42 +3955,13 @@
                 <a:defRPr/>
               </a:pPr>
               <a:r>
-                <a:rPr lang="te-IN" sz="2400" dirty="0">
-                  <a:latin typeface="Ramabhadra" panose="02000600000000000000" pitchFamily="2" charset="0"/>
-                  <a:cs typeface="Ramabhadra" panose="02000600000000000000" pitchFamily="2" charset="0"/>
-                </a:rPr>
-                <a:t>సర్వ శరీరులు గడ్డిని పోలిన వారైయున్నారు</a:t>
-              </a:r>
-            </a:p>
-            <a:p>
-              <a:pPr defTabSz="439781">
-                <a:defRPr/>
-              </a:pPr>
-              <a:r>
-                <a:rPr lang="te-IN" sz="2400" dirty="0">
-                  <a:latin typeface="Ramabhadra" panose="02000600000000000000" pitchFamily="2" charset="0"/>
-                  <a:cs typeface="Ramabhadra" panose="02000600000000000000" pitchFamily="2" charset="0"/>
-                </a:rPr>
-                <a:t>వారి అందమంతయు పువ్వు వలె</a:t>
-              </a:r>
-            </a:p>
-            <a:p>
-              <a:pPr defTabSz="439781">
-                <a:defRPr/>
-              </a:pPr>
-              <a:r>
-                <a:rPr lang="te-IN" sz="2400" dirty="0">
-                  <a:latin typeface="Ramabhadra" panose="02000600000000000000" pitchFamily="2" charset="0"/>
-                  <a:cs typeface="Ramabhadra" panose="02000600000000000000" pitchFamily="2" charset="0"/>
-                </a:rPr>
-                <a:t>వాడిపోవును – వాడిపోవును</a:t>
-              </a:r>
-            </a:p>
-            <a:p>
-              <a:pPr defTabSz="439781">
-                <a:defRPr/>
-              </a:pPr>
-              <a:endParaRPr lang="te-IN" sz="2400" dirty="0">
+                <a:rPr lang="te-IN" sz="2200" dirty="0">
+                  <a:latin typeface="Ramabhadra" panose="02000600000000000000" pitchFamily="2" charset="0"/>
+                  <a:cs typeface="Ramabhadra" panose="02000600000000000000" pitchFamily="2" charset="0"/>
+                </a:rPr>
+                <a:t>నన్ను నిర్మించిన రీతి తలచగా –</a:t>
+              </a:r>
+              <a:endParaRPr lang="en-IN" sz="2200" dirty="0">
                 <a:latin typeface="Ramabhadra" panose="02000600000000000000" pitchFamily="2" charset="0"/>
                 <a:cs typeface="Ramabhadra" panose="02000600000000000000" pitchFamily="2" charset="0"/>
               </a:endParaRPr>
@@ -3958,47 +3971,120 @@
                 <a:defRPr/>
               </a:pPr>
               <a:r>
-                <a:rPr lang="te-IN" sz="2400" dirty="0">
-                  <a:latin typeface="Ramabhadra" panose="02000600000000000000" pitchFamily="2" charset="0"/>
-                  <a:cs typeface="Ramabhadra" panose="02000600000000000000" pitchFamily="2" charset="0"/>
-                </a:rPr>
-                <a:t>నెమ్మది లేకుండా విస్తారమైన</a:t>
-              </a:r>
-            </a:p>
-            <a:p>
-              <a:pPr defTabSz="439781">
-                <a:defRPr/>
-              </a:pPr>
-              <a:r>
-                <a:rPr lang="te-IN" sz="2400" dirty="0">
-                  <a:latin typeface="Ramabhadra" panose="02000600000000000000" pitchFamily="2" charset="0"/>
-                  <a:cs typeface="Ramabhadra" panose="02000600000000000000" pitchFamily="2" charset="0"/>
-                </a:rPr>
-                <a:t>ధనముండుట కంటే</a:t>
-              </a:r>
-            </a:p>
-            <a:p>
-              <a:pPr defTabSz="439781">
-                <a:defRPr/>
-              </a:pPr>
-              <a:r>
-                <a:rPr lang="te-IN" sz="2400" dirty="0">
-                  <a:latin typeface="Ramabhadra" panose="02000600000000000000" pitchFamily="2" charset="0"/>
-                  <a:cs typeface="Ramabhadra" panose="02000600000000000000" pitchFamily="2" charset="0"/>
-                </a:rPr>
-                <a:t>దేవుని యందలి భయ భక్తులతో</a:t>
-              </a:r>
-            </a:p>
-            <a:p>
-              <a:pPr defTabSz="439781">
-                <a:defRPr/>
-              </a:pPr>
-              <a:r>
-                <a:rPr lang="te-IN" sz="2400" dirty="0">
-                  <a:latin typeface="Ramabhadra" panose="02000600000000000000" pitchFamily="2" charset="0"/>
-                  <a:cs typeface="Ramabhadra" panose="02000600000000000000" pitchFamily="2" charset="0"/>
-                </a:rPr>
-                <a:t>ఉండుటే మేలు – ఉండుటే మేలు</a:t>
+                <a:rPr lang="te-IN" sz="2200" dirty="0">
+                  <a:latin typeface="Ramabhadra" panose="02000600000000000000" pitchFamily="2" charset="0"/>
+                  <a:cs typeface="Ramabhadra" panose="02000600000000000000" pitchFamily="2" charset="0"/>
+                </a:rPr>
+                <a:t>ఎంతో ఆశ్చర్యమే</a:t>
+              </a:r>
+            </a:p>
+            <a:p>
+              <a:pPr defTabSz="439781">
+                <a:defRPr/>
+              </a:pPr>
+              <a:r>
+                <a:rPr lang="te-IN" sz="2200" dirty="0">
+                  <a:latin typeface="Ramabhadra" panose="02000600000000000000" pitchFamily="2" charset="0"/>
+                  <a:cs typeface="Ramabhadra" panose="02000600000000000000" pitchFamily="2" charset="0"/>
+                </a:rPr>
+                <a:t>అది నా ఊహకే వింతైనది (2)</a:t>
+              </a:r>
+            </a:p>
+            <a:p>
+              <a:pPr defTabSz="439781">
+                <a:defRPr/>
+              </a:pPr>
+              <a:r>
+                <a:rPr lang="te-IN" sz="2200" dirty="0">
+                  <a:latin typeface="Ramabhadra" panose="02000600000000000000" pitchFamily="2" charset="0"/>
+                  <a:cs typeface="Ramabhadra" panose="02000600000000000000" pitchFamily="2" charset="0"/>
+                </a:rPr>
+                <a:t>ఎరుపెక్కిన శత్రువుల చూపు నుండి తప్పించి</a:t>
+              </a:r>
+            </a:p>
+            <a:p>
+              <a:pPr defTabSz="439781">
+                <a:defRPr/>
+              </a:pPr>
+              <a:r>
+                <a:rPr lang="te-IN" sz="2200" dirty="0">
+                  <a:latin typeface="Ramabhadra" panose="02000600000000000000" pitchFamily="2" charset="0"/>
+                  <a:cs typeface="Ramabhadra" panose="02000600000000000000" pitchFamily="2" charset="0"/>
+                </a:rPr>
+                <a:t>ఎనలేని ప్రేమను నాపై కురిపించావు (2)</a:t>
+              </a:r>
+            </a:p>
+            <a:p>
+              <a:pPr defTabSz="439781">
+                <a:defRPr/>
+              </a:pPr>
+              <a:endParaRPr lang="te-IN" sz="2200" dirty="0">
+                <a:latin typeface="Ramabhadra" panose="02000600000000000000" pitchFamily="2" charset="0"/>
+                <a:cs typeface="Ramabhadra" panose="02000600000000000000" pitchFamily="2" charset="0"/>
+              </a:endParaRPr>
+            </a:p>
+            <a:p>
+              <a:pPr defTabSz="439781">
+                <a:defRPr/>
+              </a:pPr>
+              <a:r>
+                <a:rPr lang="te-IN" sz="2200" dirty="0">
+                  <a:latin typeface="Ramabhadra" panose="02000600000000000000" pitchFamily="2" charset="0"/>
+                  <a:cs typeface="Ramabhadra" panose="02000600000000000000" pitchFamily="2" charset="0"/>
+                </a:rPr>
+                <a:t>ద్రాక్షావల్లి అయిన నీలోనే –</a:t>
+              </a:r>
+              <a:endParaRPr lang="en-IN" sz="2200" dirty="0">
+                <a:latin typeface="Ramabhadra" panose="02000600000000000000" pitchFamily="2" charset="0"/>
+                <a:cs typeface="Ramabhadra" panose="02000600000000000000" pitchFamily="2" charset="0"/>
+              </a:endParaRPr>
+            </a:p>
+            <a:p>
+              <a:pPr defTabSz="439781">
+                <a:defRPr/>
+              </a:pPr>
+              <a:r>
+                <a:rPr lang="te-IN" sz="2200" dirty="0">
+                  <a:latin typeface="Ramabhadra" panose="02000600000000000000" pitchFamily="2" charset="0"/>
+                  <a:cs typeface="Ramabhadra" panose="02000600000000000000" pitchFamily="2" charset="0"/>
+                </a:rPr>
+                <a:t>బహుగా వేరు పారగా</a:t>
+              </a:r>
+            </a:p>
+            <a:p>
+              <a:pPr defTabSz="439781">
+                <a:defRPr/>
+              </a:pPr>
+              <a:r>
+                <a:rPr lang="te-IN" sz="2200" dirty="0">
+                  <a:latin typeface="Ramabhadra" panose="02000600000000000000" pitchFamily="2" charset="0"/>
+                  <a:cs typeface="Ramabhadra" panose="02000600000000000000" pitchFamily="2" charset="0"/>
+                </a:rPr>
+                <a:t>నీతో మధురమైన ఫలములీయనా (2)</a:t>
+              </a:r>
+            </a:p>
+            <a:p>
+              <a:pPr defTabSz="439781">
+                <a:defRPr/>
+              </a:pPr>
+              <a:r>
+                <a:rPr lang="te-IN" sz="2200" dirty="0">
+                  <a:latin typeface="Ramabhadra" panose="02000600000000000000" pitchFamily="2" charset="0"/>
+                  <a:cs typeface="Ramabhadra" panose="02000600000000000000" pitchFamily="2" charset="0"/>
+                </a:rPr>
+                <a:t>ఉన్నత స్థలములపై నాకు స్థానమిచ్చితివే</a:t>
+              </a:r>
+            </a:p>
+            <a:p>
+              <a:pPr defTabSz="439781">
+                <a:defRPr/>
+              </a:pPr>
+              <a:r>
+                <a:rPr lang="te-IN" sz="2200" dirty="0">
+                  <a:latin typeface="Ramabhadra" panose="02000600000000000000" pitchFamily="2" charset="0"/>
+                  <a:cs typeface="Ramabhadra" panose="02000600000000000000" pitchFamily="2" charset="0"/>
+                </a:rPr>
+                <a:t>విజయుడా నీ కృప చాలును నా జీవితాన (2)</a:t>
               </a:r>
             </a:p>
           </p:txBody>
@@ -4156,7 +4242,7 @@
           <p:spPr>
             <a:xfrm>
               <a:off x="343961" y="740943"/>
-              <a:ext cx="4541306" cy="5632311"/>
+              <a:ext cx="4541306" cy="5170646"/>
             </a:xfrm>
             <a:prstGeom prst="rect">
               <a:avLst/>
@@ -4173,13 +4259,66 @@
                 <a:defRPr/>
               </a:pPr>
               <a:r>
-                <a:rPr lang="te-IN" sz="2400" dirty="0">
-                  <a:latin typeface="Ramabhadra" panose="02000600000000000000" pitchFamily="2" charset="0"/>
-                  <a:cs typeface="Ramabhadra" panose="02000600000000000000" pitchFamily="2" charset="0"/>
-                </a:rPr>
-                <a:t>నాదు రక్షక నీ మనసే ఉత్తమం</a:t>
-              </a:r>
-              <a:endParaRPr lang="en-IN" sz="2400" dirty="0">
+                <a:rPr lang="te-IN" sz="2200" dirty="0">
+                  <a:latin typeface="Ramabhadra" panose="02000600000000000000" pitchFamily="2" charset="0"/>
+                  <a:cs typeface="Ramabhadra" panose="02000600000000000000" pitchFamily="2" charset="0"/>
+                </a:rPr>
+                <a:t>ఎవరూ సమీపించలేని</a:t>
+              </a:r>
+            </a:p>
+            <a:p>
+              <a:pPr defTabSz="439781">
+                <a:defRPr/>
+              </a:pPr>
+              <a:r>
+                <a:rPr lang="te-IN" sz="2200" dirty="0">
+                  <a:latin typeface="Ramabhadra" panose="02000600000000000000" pitchFamily="2" charset="0"/>
+                  <a:cs typeface="Ramabhadra" panose="02000600000000000000" pitchFamily="2" charset="0"/>
+                </a:rPr>
+                <a:t>తేజస్సుతో నివసించు నా యేసయ్యా (2)</a:t>
+              </a:r>
+            </a:p>
+            <a:p>
+              <a:pPr defTabSz="439781">
+                <a:defRPr/>
+              </a:pPr>
+              <a:r>
+                <a:rPr lang="te-IN" sz="2200" dirty="0">
+                  <a:latin typeface="Ramabhadra" panose="02000600000000000000" pitchFamily="2" charset="0"/>
+                  <a:cs typeface="Ramabhadra" panose="02000600000000000000" pitchFamily="2" charset="0"/>
+                </a:rPr>
+                <a:t>నీ మహిమను ధరించిన పరిశుద్ధులు</a:t>
+              </a:r>
+            </a:p>
+            <a:p>
+              <a:pPr defTabSz="439781">
+                <a:defRPr/>
+              </a:pPr>
+              <a:r>
+                <a:rPr lang="te-IN" sz="2200" dirty="0">
+                  <a:latin typeface="Ramabhadra" panose="02000600000000000000" pitchFamily="2" charset="0"/>
+                  <a:cs typeface="Ramabhadra" panose="02000600000000000000" pitchFamily="2" charset="0"/>
+                </a:rPr>
+                <a:t>నా కంటబడగానే (2)</a:t>
+              </a:r>
+            </a:p>
+            <a:p>
+              <a:pPr defTabSz="439781">
+                <a:defRPr/>
+              </a:pPr>
+              <a:r>
+                <a:rPr lang="te-IN" sz="2200" dirty="0">
+                  <a:latin typeface="Ramabhadra" panose="02000600000000000000" pitchFamily="2" charset="0"/>
+                  <a:cs typeface="Ramabhadra" panose="02000600000000000000" pitchFamily="2" charset="0"/>
+                </a:rPr>
+                <a:t>ఏమౌదునో నేనేమౌదునో (2)</a:t>
+              </a:r>
+            </a:p>
+            <a:p>
+              <a:pPr defTabSz="439781">
+                <a:defRPr/>
+              </a:pPr>
+              <a:endParaRPr lang="te-IN" sz="2200" dirty="0">
                 <a:latin typeface="Ramabhadra" panose="02000600000000000000" pitchFamily="2" charset="0"/>
                 <a:cs typeface="Ramabhadra" panose="02000600000000000000" pitchFamily="2" charset="0"/>
               </a:endParaRPr>
@@ -4189,54 +4328,54 @@
                 <a:defRPr/>
               </a:pPr>
               <a:r>
-                <a:rPr lang="te-IN" sz="2400" dirty="0">
-                  <a:latin typeface="Ramabhadra" panose="02000600000000000000" pitchFamily="2" charset="0"/>
-                  <a:cs typeface="Ramabhadra" panose="02000600000000000000" pitchFamily="2" charset="0"/>
-                </a:rPr>
-                <a:t>దినదినము నీతోనే వసియింతును</a:t>
-              </a:r>
-            </a:p>
-            <a:p>
-              <a:pPr defTabSz="439781">
-                <a:defRPr/>
-              </a:pPr>
-              <a:r>
-                <a:rPr lang="te-IN" sz="2400" dirty="0">
-                  <a:latin typeface="Ramabhadra" panose="02000600000000000000" pitchFamily="2" charset="0"/>
-                  <a:cs typeface="Ramabhadra" panose="02000600000000000000" pitchFamily="2" charset="0"/>
-                </a:rPr>
-                <a:t>నేనేది పలికినను ఏమి చేసినను</a:t>
-              </a:r>
-            </a:p>
-            <a:p>
-              <a:pPr defTabSz="439781">
-                <a:defRPr/>
-              </a:pPr>
-              <a:r>
-                <a:rPr lang="te-IN" sz="2400" dirty="0">
-                  <a:latin typeface="Ramabhadra" panose="02000600000000000000" pitchFamily="2" charset="0"/>
-                  <a:cs typeface="Ramabhadra" panose="02000600000000000000" pitchFamily="2" charset="0"/>
-                </a:rPr>
-                <a:t>నీ ప్రేమనే కనుపరుతును</a:t>
-              </a:r>
-            </a:p>
-            <a:p>
-              <a:pPr defTabSz="439781">
-                <a:defRPr/>
-              </a:pPr>
-              <a:r>
-                <a:rPr lang="te-IN" sz="2400" dirty="0">
-                  <a:latin typeface="Ramabhadra" panose="02000600000000000000" pitchFamily="2" charset="0"/>
-                  <a:cs typeface="Ramabhadra" panose="02000600000000000000" pitchFamily="2" charset="0"/>
-                </a:rPr>
-                <a:t>నీ శక్తినే కొనియాడేదను</a:t>
-              </a:r>
-            </a:p>
-            <a:p>
-              <a:pPr defTabSz="439781">
-                <a:defRPr/>
-              </a:pPr>
-              <a:endParaRPr lang="te-IN" sz="2400" dirty="0">
+                <a:rPr lang="te-IN" sz="2200" dirty="0">
+                  <a:latin typeface="Ramabhadra" panose="02000600000000000000" pitchFamily="2" charset="0"/>
+                  <a:cs typeface="Ramabhadra" panose="02000600000000000000" pitchFamily="2" charset="0"/>
+                </a:rPr>
+                <a:t>ఇహలోక బంధాలు మరచి</a:t>
+              </a:r>
+            </a:p>
+            <a:p>
+              <a:pPr defTabSz="439781">
+                <a:defRPr/>
+              </a:pPr>
+              <a:r>
+                <a:rPr lang="te-IN" sz="2200" dirty="0">
+                  <a:latin typeface="Ramabhadra" panose="02000600000000000000" pitchFamily="2" charset="0"/>
+                  <a:cs typeface="Ramabhadra" panose="02000600000000000000" pitchFamily="2" charset="0"/>
+                </a:rPr>
+                <a:t>నీ యెదుటే నేను నిలిచి (2)</a:t>
+              </a:r>
+            </a:p>
+            <a:p>
+              <a:pPr defTabSz="439781">
+                <a:defRPr/>
+              </a:pPr>
+              <a:r>
+                <a:rPr lang="te-IN" sz="2200" dirty="0">
+                  <a:latin typeface="Ramabhadra" panose="02000600000000000000" pitchFamily="2" charset="0"/>
+                  <a:cs typeface="Ramabhadra" panose="02000600000000000000" pitchFamily="2" charset="0"/>
+                </a:rPr>
+                <a:t>నీవిచ్చు బహుమతులు నే స్వీకరించి</a:t>
+              </a:r>
+            </a:p>
+            <a:p>
+              <a:pPr defTabSz="439781">
+                <a:defRPr/>
+              </a:pPr>
+              <a:r>
+                <a:rPr lang="te-IN" sz="2200" dirty="0">
+                  <a:latin typeface="Ramabhadra" panose="02000600000000000000" pitchFamily="2" charset="0"/>
+                  <a:cs typeface="Ramabhadra" panose="02000600000000000000" pitchFamily="2" charset="0"/>
+                </a:rPr>
+                <a:t>నిత్యానందముతో పరవశించు వేళ (2)</a:t>
+              </a:r>
+            </a:p>
+            <a:p>
+              <a:pPr defTabSz="439781">
+                <a:defRPr/>
+              </a:pPr>
+              <a:endParaRPr lang="te-IN" sz="2200" dirty="0">
                 <a:latin typeface="Ramabhadra" panose="02000600000000000000" pitchFamily="2" charset="0"/>
                 <a:cs typeface="Ramabhadra" panose="02000600000000000000" pitchFamily="2" charset="0"/>
               </a:endParaRPr>
@@ -4246,104 +4385,47 @@
                 <a:defRPr/>
               </a:pPr>
               <a:r>
-                <a:rPr lang="te-IN" sz="2400" dirty="0">
-                  <a:latin typeface="Ramabhadra" panose="02000600000000000000" pitchFamily="2" charset="0"/>
-                  <a:cs typeface="Ramabhadra" panose="02000600000000000000" pitchFamily="2" charset="0"/>
-                </a:rPr>
-                <a:t>నా హృదిలో నీ వాక్యము నివసింపని </a:t>
-              </a:r>
-            </a:p>
-            <a:p>
-              <a:pPr defTabSz="439781">
-                <a:defRPr/>
-              </a:pPr>
-              <a:r>
-                <a:rPr lang="te-IN" sz="2400" dirty="0">
-                  <a:latin typeface="Ramabhadra" panose="02000600000000000000" pitchFamily="2" charset="0"/>
-                  <a:cs typeface="Ramabhadra" panose="02000600000000000000" pitchFamily="2" charset="0"/>
-                </a:rPr>
-                <a:t>ప్రతిక్షణము ప్రతిదినము ధ్యానింతును </a:t>
-              </a:r>
-            </a:p>
-            <a:p>
-              <a:pPr defTabSz="439781">
-                <a:defRPr/>
-              </a:pPr>
-              <a:r>
-                <a:rPr lang="te-IN" sz="2400" dirty="0">
-                  <a:latin typeface="Ramabhadra" panose="02000600000000000000" pitchFamily="2" charset="0"/>
-                  <a:cs typeface="Ramabhadra" panose="02000600000000000000" pitchFamily="2" charset="0"/>
-                </a:rPr>
-                <a:t>లోకము నను విడచిన నీవు విడువలేదు    </a:t>
-              </a:r>
-            </a:p>
-            <a:p>
-              <a:pPr defTabSz="439781">
-                <a:defRPr/>
-              </a:pPr>
-              <a:r>
-                <a:rPr lang="te-IN" sz="2400" dirty="0">
-                  <a:latin typeface="Ramabhadra" panose="02000600000000000000" pitchFamily="2" charset="0"/>
-                  <a:cs typeface="Ramabhadra" panose="02000600000000000000" pitchFamily="2" charset="0"/>
-                </a:rPr>
-                <a:t>నాకు జయము జయము నీ శక్తితోనే</a:t>
-              </a:r>
-            </a:p>
-            <a:p>
-              <a:pPr defTabSz="439781">
-                <a:defRPr/>
-              </a:pPr>
-              <a:endParaRPr lang="te-IN" sz="2400" dirty="0">
-                <a:latin typeface="Ramabhadra" panose="02000600000000000000" pitchFamily="2" charset="0"/>
-                <a:cs typeface="Ramabhadra" panose="02000600000000000000" pitchFamily="2" charset="0"/>
-              </a:endParaRPr>
-            </a:p>
-            <a:p>
-              <a:pPr defTabSz="439781">
-                <a:defRPr/>
-              </a:pPr>
-              <a:r>
-                <a:rPr lang="te-IN" sz="2400" dirty="0">
-                  <a:latin typeface="Ramabhadra" panose="02000600000000000000" pitchFamily="2" charset="0"/>
-                  <a:cs typeface="Ramabhadra" panose="02000600000000000000" pitchFamily="2" charset="0"/>
-                </a:rPr>
-                <a:t>నా తండ్రి నా విభుడా పాలించుమా</a:t>
-              </a:r>
-            </a:p>
-            <a:p>
-              <a:pPr defTabSz="439781">
-                <a:defRPr/>
-              </a:pPr>
-              <a:r>
-                <a:rPr lang="te-IN" sz="2400" dirty="0">
-                  <a:latin typeface="Ramabhadra" panose="02000600000000000000" pitchFamily="2" charset="0"/>
-                  <a:cs typeface="Ramabhadra" panose="02000600000000000000" pitchFamily="2" charset="0"/>
-                </a:rPr>
-                <a:t>ఆదరణ నా హృదిలోనా నింపుమయా </a:t>
-              </a:r>
-            </a:p>
-            <a:p>
-              <a:pPr defTabSz="439781">
-                <a:defRPr/>
-              </a:pPr>
-              <a:r>
-                <a:rPr lang="te-IN" sz="2400" dirty="0">
-                  <a:latin typeface="Ramabhadra" panose="02000600000000000000" pitchFamily="2" charset="0"/>
-                  <a:cs typeface="Ramabhadra" panose="02000600000000000000" pitchFamily="2" charset="0"/>
-                </a:rPr>
-                <a:t>మనుజులు నను మరిచిన నీవు మరువలేదు </a:t>
-              </a:r>
-            </a:p>
-            <a:p>
-              <a:pPr defTabSz="439781">
-                <a:defRPr/>
-              </a:pPr>
-              <a:r>
-                <a:rPr lang="te-IN" sz="2400" dirty="0">
-                  <a:latin typeface="Ramabhadra" panose="02000600000000000000" pitchFamily="2" charset="0"/>
-                  <a:cs typeface="Ramabhadra" panose="02000600000000000000" pitchFamily="2" charset="0"/>
-                </a:rPr>
-                <a:t>నాకు జయము జయము నీ ప్రేమతోనే</a:t>
+                <a:rPr lang="te-IN" sz="2200" dirty="0">
+                  <a:latin typeface="Ramabhadra" panose="02000600000000000000" pitchFamily="2" charset="0"/>
+                  <a:cs typeface="Ramabhadra" panose="02000600000000000000" pitchFamily="2" charset="0"/>
+                </a:rPr>
+                <a:t>పరలోక మహిమను తలచి</a:t>
+              </a:r>
+            </a:p>
+            <a:p>
+              <a:pPr defTabSz="439781">
+                <a:defRPr/>
+              </a:pPr>
+              <a:r>
+                <a:rPr lang="te-IN" sz="2200" dirty="0">
+                  <a:latin typeface="Ramabhadra" panose="02000600000000000000" pitchFamily="2" charset="0"/>
+                  <a:cs typeface="Ramabhadra" panose="02000600000000000000" pitchFamily="2" charset="0"/>
+                </a:rPr>
+                <a:t>నీ పాద పద్మములపై ఒరిగి (2)</a:t>
+              </a:r>
+            </a:p>
+            <a:p>
+              <a:pPr defTabSz="439781">
+                <a:defRPr/>
+              </a:pPr>
+              <a:r>
+                <a:rPr lang="te-IN" sz="2200" dirty="0">
+                  <a:latin typeface="Ramabhadra" panose="02000600000000000000" pitchFamily="2" charset="0"/>
+                  <a:cs typeface="Ramabhadra" panose="02000600000000000000" pitchFamily="2" charset="0"/>
+                </a:rPr>
+                <a:t>పరలోక సైన్య సమూహాలతో కలసి</a:t>
+              </a:r>
+            </a:p>
+            <a:p>
+              <a:pPr defTabSz="439781">
+                <a:defRPr/>
+              </a:pPr>
+              <a:r>
+                <a:rPr lang="te-IN" sz="2200" dirty="0">
+                  <a:latin typeface="Ramabhadra" panose="02000600000000000000" pitchFamily="2" charset="0"/>
+                  <a:cs typeface="Ramabhadra" panose="02000600000000000000" pitchFamily="2" charset="0"/>
+                </a:rPr>
+                <a:t>నిత్యారాధన నే చేయు ప్రశాంత వేళ (2)</a:t>
               </a:r>
             </a:p>
           </p:txBody>

--- a/songsTemplate.pptx
+++ b/songsTemplate.pptx
@@ -255,7 +255,7 @@
           <a:p>
             <a:fld id="{F1102B08-ED9E-409F-B95F-09CAA1DAF6E0}" type="datetimeFigureOut">
               <a:rPr lang="en-IN" smtClean="0"/>
-              <a:t>12-10-2024</a:t>
+              <a:t>16-10-2024</a:t>
             </a:fld>
             <a:endParaRPr lang="en-IN"/>
           </a:p>
@@ -425,7 +425,7 @@
           <a:p>
             <a:fld id="{F1102B08-ED9E-409F-B95F-09CAA1DAF6E0}" type="datetimeFigureOut">
               <a:rPr lang="en-IN" smtClean="0"/>
-              <a:t>12-10-2024</a:t>
+              <a:t>16-10-2024</a:t>
             </a:fld>
             <a:endParaRPr lang="en-IN"/>
           </a:p>
@@ -605,7 +605,7 @@
           <a:p>
             <a:fld id="{F1102B08-ED9E-409F-B95F-09CAA1DAF6E0}" type="datetimeFigureOut">
               <a:rPr lang="en-IN" smtClean="0"/>
-              <a:t>12-10-2024</a:t>
+              <a:t>16-10-2024</a:t>
             </a:fld>
             <a:endParaRPr lang="en-IN"/>
           </a:p>
@@ -775,7 +775,7 @@
           <a:p>
             <a:fld id="{F1102B08-ED9E-409F-B95F-09CAA1DAF6E0}" type="datetimeFigureOut">
               <a:rPr lang="en-IN" smtClean="0"/>
-              <a:t>12-10-2024</a:t>
+              <a:t>16-10-2024</a:t>
             </a:fld>
             <a:endParaRPr lang="en-IN"/>
           </a:p>
@@ -1019,7 +1019,7 @@
           <a:p>
             <a:fld id="{F1102B08-ED9E-409F-B95F-09CAA1DAF6E0}" type="datetimeFigureOut">
               <a:rPr lang="en-IN" smtClean="0"/>
-              <a:t>12-10-2024</a:t>
+              <a:t>16-10-2024</a:t>
             </a:fld>
             <a:endParaRPr lang="en-IN"/>
           </a:p>
@@ -1251,7 +1251,7 @@
           <a:p>
             <a:fld id="{F1102B08-ED9E-409F-B95F-09CAA1DAF6E0}" type="datetimeFigureOut">
               <a:rPr lang="en-IN" smtClean="0"/>
-              <a:t>12-10-2024</a:t>
+              <a:t>16-10-2024</a:t>
             </a:fld>
             <a:endParaRPr lang="en-IN"/>
           </a:p>
@@ -1618,7 +1618,7 @@
           <a:p>
             <a:fld id="{F1102B08-ED9E-409F-B95F-09CAA1DAF6E0}" type="datetimeFigureOut">
               <a:rPr lang="en-IN" smtClean="0"/>
-              <a:t>12-10-2024</a:t>
+              <a:t>16-10-2024</a:t>
             </a:fld>
             <a:endParaRPr lang="en-IN"/>
           </a:p>
@@ -1736,7 +1736,7 @@
           <a:p>
             <a:fld id="{F1102B08-ED9E-409F-B95F-09CAA1DAF6E0}" type="datetimeFigureOut">
               <a:rPr lang="en-IN" smtClean="0"/>
-              <a:t>12-10-2024</a:t>
+              <a:t>16-10-2024</a:t>
             </a:fld>
             <a:endParaRPr lang="en-IN"/>
           </a:p>
@@ -1831,7 +1831,7 @@
           <a:p>
             <a:fld id="{F1102B08-ED9E-409F-B95F-09CAA1DAF6E0}" type="datetimeFigureOut">
               <a:rPr lang="en-IN" smtClean="0"/>
-              <a:t>12-10-2024</a:t>
+              <a:t>16-10-2024</a:t>
             </a:fld>
             <a:endParaRPr lang="en-IN"/>
           </a:p>
@@ -2108,7 +2108,7 @@
           <a:p>
             <a:fld id="{F1102B08-ED9E-409F-B95F-09CAA1DAF6E0}" type="datetimeFigureOut">
               <a:rPr lang="en-IN" smtClean="0"/>
-              <a:t>12-10-2024</a:t>
+              <a:t>16-10-2024</a:t>
             </a:fld>
             <a:endParaRPr lang="en-IN"/>
           </a:p>
@@ -2365,7 +2365,7 @@
           <a:p>
             <a:fld id="{F1102B08-ED9E-409F-B95F-09CAA1DAF6E0}" type="datetimeFigureOut">
               <a:rPr lang="en-IN" smtClean="0"/>
-              <a:t>12-10-2024</a:t>
+              <a:t>16-10-2024</a:t>
             </a:fld>
             <a:endParaRPr lang="en-IN"/>
           </a:p>
@@ -2578,7 +2578,7 @@
           <a:p>
             <a:fld id="{F1102B08-ED9E-409F-B95F-09CAA1DAF6E0}" type="datetimeFigureOut">
               <a:rPr lang="en-IN" smtClean="0"/>
-              <a:t>12-10-2024</a:t>
+              <a:t>16-10-2024</a:t>
             </a:fld>
             <a:endParaRPr lang="en-IN"/>
           </a:p>
@@ -2998,9 +2998,9 @@
         <p:grpSpPr>
           <a:xfrm>
             <a:off x="160868" y="182032"/>
-            <a:ext cx="5019669" cy="6493935"/>
+            <a:ext cx="5190669" cy="6630833"/>
             <a:chOff x="160868" y="182032"/>
-            <a:chExt cx="5019669" cy="6493935"/>
+            <a:chExt cx="5190669" cy="6630833"/>
           </a:xfrm>
         </p:grpSpPr>
         <p:sp>
@@ -3072,8 +3072,8 @@
           </p:nvSpPr>
           <p:spPr>
             <a:xfrm>
-              <a:off x="343961" y="748108"/>
-              <a:ext cx="4836576" cy="5170646"/>
+              <a:off x="238127" y="257224"/>
+              <a:ext cx="5113410" cy="6555641"/>
             </a:xfrm>
             <a:prstGeom prst="rect">
               <a:avLst/>
@@ -3090,39 +3090,126 @@
                 <a:defRPr/>
               </a:pPr>
               <a:r>
-                <a:rPr lang="te-IN" sz="2200" dirty="0">
-                  <a:latin typeface="Ramabhadra" panose="02000600000000000000" pitchFamily="2" charset="0"/>
-                  <a:cs typeface="Ramabhadra" panose="02000600000000000000" pitchFamily="2" charset="0"/>
-                </a:rPr>
-                <a:t>భూమ్యాకాశములు సృజించిన</a:t>
-              </a:r>
-              <a:br>
-                <a:rPr lang="te-IN" sz="2200" dirty="0">
-                  <a:latin typeface="Ramabhadra" panose="02000600000000000000" pitchFamily="2" charset="0"/>
-                  <a:cs typeface="Ramabhadra" panose="02000600000000000000" pitchFamily="2" charset="0"/>
-                </a:rPr>
-              </a:br>
-              <a:r>
-                <a:rPr lang="te-IN" sz="2200" dirty="0">
-                  <a:latin typeface="Ramabhadra" panose="02000600000000000000" pitchFamily="2" charset="0"/>
-                  <a:cs typeface="Ramabhadra" panose="02000600000000000000" pitchFamily="2" charset="0"/>
-                </a:rPr>
-                <a:t>యేసయ్యా నీకే స్తోత్రం (2)</a:t>
-              </a:r>
-              <a:br>
-                <a:rPr lang="te-IN" sz="2200" dirty="0">
-                  <a:latin typeface="Ramabhadra" panose="02000600000000000000" pitchFamily="2" charset="0"/>
-                  <a:cs typeface="Ramabhadra" panose="02000600000000000000" pitchFamily="2" charset="0"/>
-                </a:rPr>
-              </a:br>
-              <a:r>
-                <a:rPr lang="te-IN" sz="2200" dirty="0">
-                  <a:latin typeface="Ramabhadra" panose="02000600000000000000" pitchFamily="2" charset="0"/>
-                  <a:cs typeface="Ramabhadra" panose="02000600000000000000" pitchFamily="2" charset="0"/>
-                </a:rPr>
-                <a:t>నీ ఆశ్ఛర్యమైన క్రియలు</a:t>
-              </a:r>
-              <a:endParaRPr lang="en-IN" sz="2200" dirty="0">
+                <a:rPr lang="te-IN" sz="2000" dirty="0">
+                  <a:latin typeface="Ramabhadra" panose="02000600000000000000" pitchFamily="2" charset="0"/>
+                  <a:cs typeface="Ramabhadra" panose="02000600000000000000" pitchFamily="2" charset="0"/>
+                </a:rPr>
+                <a:t>ప్రేమా పూర్ణుడా స్నేహశీలుడా </a:t>
+              </a:r>
+            </a:p>
+            <a:p>
+              <a:pPr defTabSz="439781">
+                <a:defRPr/>
+              </a:pPr>
+              <a:r>
+                <a:rPr lang="te-IN" sz="2000" dirty="0">
+                  <a:latin typeface="Ramabhadra" panose="02000600000000000000" pitchFamily="2" charset="0"/>
+                  <a:cs typeface="Ramabhadra" panose="02000600000000000000" pitchFamily="2" charset="0"/>
+                </a:rPr>
+                <a:t>విశ్వనాధుడా విజయ వీరుడా </a:t>
+              </a:r>
+            </a:p>
+            <a:p>
+              <a:pPr defTabSz="439781">
+                <a:defRPr/>
+              </a:pPr>
+              <a:r>
+                <a:rPr lang="te-IN" sz="2000" dirty="0">
+                  <a:latin typeface="Ramabhadra" panose="02000600000000000000" pitchFamily="2" charset="0"/>
+                  <a:cs typeface="Ramabhadra" panose="02000600000000000000" pitchFamily="2" charset="0"/>
+                </a:rPr>
+                <a:t>ఆపత్కాల మందున సర్వ లోకమందున్న </a:t>
+              </a:r>
+            </a:p>
+            <a:p>
+              <a:pPr defTabSz="439781">
+                <a:defRPr/>
+              </a:pPr>
+              <a:r>
+                <a:rPr lang="te-IN" sz="2000" dirty="0">
+                  <a:latin typeface="Ramabhadra" panose="02000600000000000000" pitchFamily="2" charset="0"/>
+                  <a:cs typeface="Ramabhadra" panose="02000600000000000000" pitchFamily="2" charset="0"/>
+                </a:rPr>
+                <a:t>దీన జనాలి దీపముగా వెలుగుచున్నవాడా  ..</a:t>
+              </a:r>
+            </a:p>
+            <a:p>
+              <a:pPr defTabSz="439781">
+                <a:defRPr/>
+              </a:pPr>
+              <a:r>
+                <a:rPr lang="te-IN" sz="2000" dirty="0">
+                  <a:latin typeface="Ramabhadra" panose="02000600000000000000" pitchFamily="2" charset="0"/>
+                  <a:cs typeface="Ramabhadra" panose="02000600000000000000" pitchFamily="2" charset="0"/>
+                </a:rPr>
+                <a:t>ఆరాధింతు నిన్నే లోక రక్షకుడా </a:t>
+              </a:r>
+            </a:p>
+            <a:p>
+              <a:pPr defTabSz="439781">
+                <a:defRPr/>
+              </a:pPr>
+              <a:r>
+                <a:rPr lang="te-IN" sz="2000" dirty="0">
+                  <a:latin typeface="Ramabhadra" panose="02000600000000000000" pitchFamily="2" charset="0"/>
+                  <a:cs typeface="Ramabhadra" panose="02000600000000000000" pitchFamily="2" charset="0"/>
+                </a:rPr>
+                <a:t>ఆనందింతు నీలో జీవితాంతము (2)</a:t>
+              </a:r>
+            </a:p>
+            <a:p>
+              <a:pPr defTabSz="439781">
+                <a:defRPr/>
+              </a:pPr>
+              <a:r>
+                <a:rPr lang="te-IN" sz="2000" dirty="0">
+                  <a:latin typeface="Ramabhadra" panose="02000600000000000000" pitchFamily="2" charset="0"/>
+                  <a:cs typeface="Ramabhadra" panose="02000600000000000000" pitchFamily="2" charset="0"/>
+                </a:rPr>
+                <a:t>నీ కృప ఎంత ఉన్నతమో వర్ణించలేను స్వామి </a:t>
+              </a:r>
+            </a:p>
+            <a:p>
+              <a:pPr defTabSz="439781">
+                <a:defRPr/>
+              </a:pPr>
+              <a:r>
+                <a:rPr lang="te-IN" sz="2000" dirty="0">
+                  <a:latin typeface="Ramabhadra" panose="02000600000000000000" pitchFamily="2" charset="0"/>
+                  <a:cs typeface="Ramabhadra" panose="02000600000000000000" pitchFamily="2" charset="0"/>
+                </a:rPr>
+                <a:t>నీ కృప యందు తుది వరకు నడిపించు యేసయ్యా (2)</a:t>
+              </a:r>
+            </a:p>
+            <a:p>
+              <a:pPr defTabSz="439781">
+                <a:defRPr/>
+              </a:pPr>
+              <a:r>
+                <a:rPr lang="te-IN" sz="2000" dirty="0">
+                  <a:latin typeface="Ramabhadra" panose="02000600000000000000" pitchFamily="2" charset="0"/>
+                  <a:cs typeface="Ramabhadra" panose="02000600000000000000" pitchFamily="2" charset="0"/>
+                </a:rPr>
+                <a:t>నా తోడు నీవుంటే అంతే చాలయ్యా </a:t>
+              </a:r>
+            </a:p>
+            <a:p>
+              <a:pPr defTabSz="439781">
+                <a:defRPr/>
+              </a:pPr>
+              <a:r>
+                <a:rPr lang="te-IN" sz="2000" dirty="0">
+                  <a:latin typeface="Ramabhadra" panose="02000600000000000000" pitchFamily="2" charset="0"/>
+                  <a:cs typeface="Ramabhadra" panose="02000600000000000000" pitchFamily="2" charset="0"/>
+                </a:rPr>
+                <a:t>నా ముందు నీవుంటే భయమే లేదయ్యా (2) </a:t>
+              </a:r>
+            </a:p>
+            <a:p>
+              <a:pPr defTabSz="439781">
+                <a:defRPr/>
+              </a:pPr>
+              <a:endParaRPr lang="te-IN" sz="2000" dirty="0">
                 <a:latin typeface="Ramabhadra" panose="02000600000000000000" pitchFamily="2" charset="0"/>
                 <a:cs typeface="Ramabhadra" panose="02000600000000000000" pitchFamily="2" charset="0"/>
               </a:endParaRPr>
@@ -3132,47 +3219,148 @@
                 <a:defRPr/>
               </a:pPr>
               <a:r>
-                <a:rPr lang="te-IN" sz="2200" dirty="0">
-                  <a:latin typeface="Ramabhadra" panose="02000600000000000000" pitchFamily="2" charset="0"/>
-                  <a:cs typeface="Ramabhadra" panose="02000600000000000000" pitchFamily="2" charset="0"/>
-                </a:rPr>
-                <a:t>నేనెలా మరచిపోదును (2)</a:t>
-              </a:r>
-              <a:br>
-                <a:rPr lang="te-IN" sz="2200" dirty="0">
-                  <a:latin typeface="Ramabhadra" panose="02000600000000000000" pitchFamily="2" charset="0"/>
-                  <a:cs typeface="Ramabhadra" panose="02000600000000000000" pitchFamily="2" charset="0"/>
-                </a:rPr>
-              </a:br>
-              <a:r>
-                <a:rPr lang="te-IN" sz="2200" dirty="0">
-                  <a:latin typeface="Ramabhadra" panose="02000600000000000000" pitchFamily="2" charset="0"/>
-                  <a:cs typeface="Ramabhadra" panose="02000600000000000000" pitchFamily="2" charset="0"/>
-                </a:rPr>
-                <a:t>హల్లెలూయ లూయ హల్లెలూయా (4)</a:t>
-              </a:r>
-            </a:p>
-            <a:p>
-              <a:pPr defTabSz="439781">
-                <a:defRPr/>
-              </a:pPr>
-              <a:endParaRPr lang="te-IN" sz="2200" dirty="0">
+                <a:rPr lang="en-IN" sz="2000" dirty="0">
+                  <a:latin typeface="Ramabhadra" panose="02000600000000000000" pitchFamily="2" charset="0"/>
+                  <a:cs typeface="Ramabhadra" panose="02000600000000000000" pitchFamily="2" charset="0"/>
+                </a:rPr>
+                <a:t>1. </a:t>
+              </a:r>
+              <a:r>
+                <a:rPr lang="te-IN" sz="2000" dirty="0">
+                  <a:latin typeface="Ramabhadra" panose="02000600000000000000" pitchFamily="2" charset="0"/>
+                  <a:cs typeface="Ramabhadra" panose="02000600000000000000" pitchFamily="2" charset="0"/>
+                </a:rPr>
+                <a:t>పూర్ణమై సంపూర్ణమైన నీ దివ్య చిత్తమే </a:t>
+              </a:r>
+            </a:p>
+            <a:p>
+              <a:pPr defTabSz="439781">
+                <a:defRPr/>
+              </a:pPr>
+              <a:r>
+                <a:rPr lang="te-IN" sz="2000" dirty="0">
+                  <a:latin typeface="Ramabhadra" panose="02000600000000000000" pitchFamily="2" charset="0"/>
+                  <a:cs typeface="Ramabhadra" panose="02000600000000000000" pitchFamily="2" charset="0"/>
+                </a:rPr>
+                <a:t>నీవు నను నడిపే నూతనమైన జీవ మార్గము (2) </a:t>
+              </a:r>
+            </a:p>
+            <a:p>
+              <a:pPr defTabSz="439781">
+                <a:defRPr/>
+              </a:pPr>
+              <a:r>
+                <a:rPr lang="te-IN" sz="2000" dirty="0">
+                  <a:latin typeface="Ramabhadra" panose="02000600000000000000" pitchFamily="2" charset="0"/>
+                  <a:cs typeface="Ramabhadra" panose="02000600000000000000" pitchFamily="2" charset="0"/>
+                </a:rPr>
+                <a:t>ఇహ మందు పరమందు ఆశ్రయమైన వాడవు </a:t>
+              </a:r>
+            </a:p>
+            <a:p>
+              <a:pPr defTabSz="439781">
+                <a:defRPr/>
+              </a:pPr>
+              <a:r>
+                <a:rPr lang="te-IN" sz="2000" dirty="0">
+                  <a:latin typeface="Ramabhadra" panose="02000600000000000000" pitchFamily="2" charset="0"/>
+                  <a:cs typeface="Ramabhadra" panose="02000600000000000000" pitchFamily="2" charset="0"/>
+                </a:rPr>
+                <a:t>ఇన్నాళ్లు క్షణమైనా నన్ను మరువని యేసయ్యా (2)</a:t>
+              </a:r>
+              <a:endParaRPr lang="en-IN" sz="2000" dirty="0">
                 <a:latin typeface="Ramabhadra" panose="02000600000000000000" pitchFamily="2" charset="0"/>
                 <a:cs typeface="Ramabhadra" panose="02000600000000000000" pitchFamily="2" charset="0"/>
               </a:endParaRPr>
             </a:p>
             <a:p>
-              <a:pPr defTabSz="439781">
-                <a:defRPr/>
-              </a:pPr>
-              <a:r>
-                <a:rPr lang="te-IN" sz="2200" dirty="0">
-                  <a:latin typeface="Ramabhadra" panose="02000600000000000000" pitchFamily="2" charset="0"/>
-                  <a:cs typeface="Ramabhadra" panose="02000600000000000000" pitchFamily="2" charset="0"/>
-                </a:rPr>
-                <a:t>బానిసత్వమునుండి శ్రమల బారినుండి</a:t>
-              </a:r>
-              <a:endParaRPr lang="en-IN" sz="2200" dirty="0">
+              <a:pPr algn="ctr" defTabSz="439781">
+                <a:defRPr/>
+              </a:pPr>
+              <a:r>
+                <a:rPr lang="en-IN" sz="2000" dirty="0">
+                  <a:latin typeface="Ramabhadra" panose="02000600000000000000" pitchFamily="2" charset="0"/>
+                  <a:cs typeface="Ramabhadra" panose="02000600000000000000" pitchFamily="2" charset="0"/>
+                </a:rPr>
+                <a:t>                              		|| </a:t>
+              </a:r>
+              <a:r>
+                <a:rPr lang="te-IN" sz="2000" dirty="0">
+                  <a:latin typeface="Ramabhadra" panose="02000600000000000000" pitchFamily="2" charset="0"/>
+                  <a:cs typeface="Ramabhadra" panose="02000600000000000000" pitchFamily="2" charset="0"/>
+                </a:rPr>
+                <a:t>నా తోడు</a:t>
+              </a:r>
+              <a:r>
+                <a:rPr lang="en-IN" sz="2000" dirty="0">
+                  <a:latin typeface="Ramabhadra" panose="02000600000000000000" pitchFamily="2" charset="0"/>
+                  <a:cs typeface="Ramabhadra" panose="02000600000000000000" pitchFamily="2" charset="0"/>
+                </a:rPr>
+                <a:t> ||</a:t>
+              </a:r>
+              <a:r>
+                <a:rPr lang="te-IN" sz="2000" dirty="0">
+                  <a:latin typeface="Ramabhadra" panose="02000600000000000000" pitchFamily="2" charset="0"/>
+                  <a:cs typeface="Ramabhadra" panose="02000600000000000000" pitchFamily="2" charset="0"/>
+                </a:rPr>
+                <a:t>                         </a:t>
+              </a:r>
+            </a:p>
+            <a:p>
+              <a:pPr defTabSz="439781">
+                <a:defRPr/>
+              </a:pPr>
+              <a:r>
+                <a:rPr lang="en-IN" sz="2000" dirty="0">
+                  <a:latin typeface="Ramabhadra" panose="02000600000000000000" pitchFamily="2" charset="0"/>
+                  <a:cs typeface="Ramabhadra" panose="02000600000000000000" pitchFamily="2" charset="0"/>
+                </a:rPr>
+                <a:t>2. </a:t>
+              </a:r>
+              <a:r>
+                <a:rPr lang="te-IN" sz="2000" dirty="0">
+                  <a:latin typeface="Ramabhadra" panose="02000600000000000000" pitchFamily="2" charset="0"/>
+                  <a:cs typeface="Ramabhadra" panose="02000600000000000000" pitchFamily="2" charset="0"/>
+                </a:rPr>
+                <a:t>భాగ్యమే సౌభాగ్యమే నీ దివ్య సన్నిధి </a:t>
+              </a:r>
+            </a:p>
+            <a:p>
+              <a:pPr defTabSz="439781">
+                <a:defRPr/>
+              </a:pPr>
+              <a:r>
+                <a:rPr lang="te-IN" sz="2000" dirty="0">
+                  <a:latin typeface="Ramabhadra" panose="02000600000000000000" pitchFamily="2" charset="0"/>
+                  <a:cs typeface="Ramabhadra" panose="02000600000000000000" pitchFamily="2" charset="0"/>
+                </a:rPr>
+                <a:t>బహు విస్తారమైన నీ కృప నాపై చూపితివే (2) </a:t>
+              </a:r>
+            </a:p>
+            <a:p>
+              <a:pPr defTabSz="439781">
+                <a:defRPr/>
+              </a:pPr>
+              <a:r>
+                <a:rPr lang="te-IN" sz="2000" dirty="0">
+                  <a:latin typeface="Ramabhadra" panose="02000600000000000000" pitchFamily="2" charset="0"/>
+                  <a:cs typeface="Ramabhadra" panose="02000600000000000000" pitchFamily="2" charset="0"/>
+                </a:rPr>
+                <a:t>బలమైన ఘనమైన నీ నామమందు హర్షించి </a:t>
+              </a:r>
+            </a:p>
+            <a:p>
+              <a:pPr defTabSz="439781">
+                <a:defRPr/>
+              </a:pPr>
+              <a:r>
+                <a:rPr lang="te-IN" sz="2000" dirty="0">
+                  <a:latin typeface="Ramabhadra" panose="02000600000000000000" pitchFamily="2" charset="0"/>
+                  <a:cs typeface="Ramabhadra" panose="02000600000000000000" pitchFamily="2" charset="0"/>
+                </a:rPr>
+                <a:t>భజయించి కీర్తించి ఘనపరతు నిన్ను యేసయ్యా (2)</a:t>
+              </a:r>
+              <a:endParaRPr lang="en-IN" sz="2000" dirty="0">
                 <a:latin typeface="Ramabhadra" panose="02000600000000000000" pitchFamily="2" charset="0"/>
                 <a:cs typeface="Ramabhadra" panose="02000600000000000000" pitchFamily="2" charset="0"/>
               </a:endParaRPr>
@@ -3182,115 +3370,27 @@
                 <a:defRPr/>
               </a:pPr>
               <a:r>
-                <a:rPr lang="te-IN" sz="2200" dirty="0">
-                  <a:latin typeface="Ramabhadra" panose="02000600000000000000" pitchFamily="2" charset="0"/>
-                  <a:cs typeface="Ramabhadra" panose="02000600000000000000" pitchFamily="2" charset="0"/>
-                </a:rPr>
-                <a:t>విడిపించావు నన్ను</a:t>
-              </a:r>
-              <a:br>
-                <a:rPr lang="te-IN" sz="2200" dirty="0">
-                  <a:latin typeface="Ramabhadra" panose="02000600000000000000" pitchFamily="2" charset="0"/>
-                  <a:cs typeface="Ramabhadra" panose="02000600000000000000" pitchFamily="2" charset="0"/>
-                </a:rPr>
-              </a:br>
-              <a:r>
-                <a:rPr lang="te-IN" sz="2200" dirty="0">
-                  <a:latin typeface="Ramabhadra" panose="02000600000000000000" pitchFamily="2" charset="0"/>
-                  <a:cs typeface="Ramabhadra" panose="02000600000000000000" pitchFamily="2" charset="0"/>
-                </a:rPr>
-                <a:t>దీన దశలో నేనుండగా </a:t>
-              </a:r>
-              <a:endParaRPr lang="en-IN" sz="2200" dirty="0">
-                <a:latin typeface="Ramabhadra" panose="02000600000000000000" pitchFamily="2" charset="0"/>
-                <a:cs typeface="Ramabhadra" panose="02000600000000000000" pitchFamily="2" charset="0"/>
-              </a:endParaRPr>
-            </a:p>
-            <a:p>
-              <a:pPr defTabSz="439781">
-                <a:defRPr/>
-              </a:pPr>
-              <a:r>
-                <a:rPr lang="te-IN" sz="2200" dirty="0">
-                  <a:latin typeface="Ramabhadra" panose="02000600000000000000" pitchFamily="2" charset="0"/>
-                  <a:cs typeface="Ramabhadra" panose="02000600000000000000" pitchFamily="2" charset="0"/>
-                </a:rPr>
-                <a:t>నను విడువనైతివి (2) </a:t>
-              </a:r>
-            </a:p>
-            <a:p>
-              <a:pPr defTabSz="439781">
-                <a:defRPr/>
-              </a:pPr>
-              <a:endParaRPr lang="en-IN" sz="2200" dirty="0">
-                <a:latin typeface="Ramabhadra" panose="02000600000000000000" pitchFamily="2" charset="0"/>
-                <a:cs typeface="Ramabhadra" panose="02000600000000000000" pitchFamily="2" charset="0"/>
-              </a:endParaRPr>
-            </a:p>
-            <a:p>
-              <a:pPr defTabSz="439781">
-                <a:defRPr/>
-              </a:pPr>
-              <a:r>
-                <a:rPr lang="te-IN" sz="2200" dirty="0">
-                  <a:latin typeface="Ramabhadra" panose="02000600000000000000" pitchFamily="2" charset="0"/>
-                  <a:cs typeface="Ramabhadra" panose="02000600000000000000" pitchFamily="2" charset="0"/>
-                </a:rPr>
-                <a:t>జీవాహారమై నీదు వాక్యము</a:t>
-              </a:r>
-              <a:endParaRPr lang="en-IN" sz="2200" dirty="0">
-                <a:latin typeface="Ramabhadra" panose="02000600000000000000" pitchFamily="2" charset="0"/>
-                <a:cs typeface="Ramabhadra" panose="02000600000000000000" pitchFamily="2" charset="0"/>
-              </a:endParaRPr>
-            </a:p>
-            <a:p>
-              <a:pPr defTabSz="439781">
-                <a:defRPr/>
-              </a:pPr>
-              <a:r>
-                <a:rPr lang="te-IN" sz="2200" dirty="0">
-                  <a:latin typeface="Ramabhadra" panose="02000600000000000000" pitchFamily="2" charset="0"/>
-                  <a:cs typeface="Ramabhadra" panose="02000600000000000000" pitchFamily="2" charset="0"/>
-                </a:rPr>
-                <a:t>పోషించెను నన్ను</a:t>
-              </a:r>
-              <a:br>
-                <a:rPr lang="te-IN" sz="2200" dirty="0">
-                  <a:latin typeface="Ramabhadra" panose="02000600000000000000" pitchFamily="2" charset="0"/>
-                  <a:cs typeface="Ramabhadra" panose="02000600000000000000" pitchFamily="2" charset="0"/>
-                </a:rPr>
-              </a:br>
-              <a:r>
-                <a:rPr lang="te-IN" sz="2200" dirty="0">
-                  <a:latin typeface="Ramabhadra" panose="02000600000000000000" pitchFamily="2" charset="0"/>
-                  <a:cs typeface="Ramabhadra" panose="02000600000000000000" pitchFamily="2" charset="0"/>
-                </a:rPr>
-                <a:t>ఆకలితో అల్లాడగా</a:t>
-              </a:r>
-              <a:endParaRPr lang="en-IN" sz="2200" dirty="0">
-                <a:latin typeface="Ramabhadra" panose="02000600000000000000" pitchFamily="2" charset="0"/>
-                <a:cs typeface="Ramabhadra" panose="02000600000000000000" pitchFamily="2" charset="0"/>
-              </a:endParaRPr>
-            </a:p>
-            <a:p>
-              <a:pPr defTabSz="439781">
-                <a:defRPr/>
-              </a:pPr>
-              <a:r>
-                <a:rPr lang="te-IN" sz="2200" dirty="0">
-                  <a:latin typeface="Ramabhadra" panose="02000600000000000000" pitchFamily="2" charset="0"/>
-                  <a:cs typeface="Ramabhadra" panose="02000600000000000000" pitchFamily="2" charset="0"/>
-                </a:rPr>
-                <a:t>నను తృప్తిపరచితివి (2</a:t>
-              </a:r>
-              <a:r>
-                <a:rPr lang="en-IN" sz="2200" dirty="0">
-                  <a:latin typeface="Ramabhadra" panose="02000600000000000000" pitchFamily="2" charset="0"/>
-                  <a:cs typeface="Ramabhadra" panose="02000600000000000000" pitchFamily="2" charset="0"/>
-                </a:rPr>
-                <a:t>)</a:t>
-              </a:r>
-              <a:endParaRPr lang="te-IN" sz="2200" dirty="0">
+                <a:rPr lang="en-IN" sz="2000" dirty="0">
+                  <a:latin typeface="Ramabhadra" panose="02000600000000000000" pitchFamily="2" charset="0"/>
+                  <a:cs typeface="Ramabhadra" panose="02000600000000000000" pitchFamily="2" charset="0"/>
+                </a:rPr>
+                <a:t>							|| </a:t>
+              </a:r>
+              <a:r>
+                <a:rPr lang="te-IN" sz="2000" dirty="0">
+                  <a:latin typeface="Ramabhadra" panose="02000600000000000000" pitchFamily="2" charset="0"/>
+                  <a:cs typeface="Ramabhadra" panose="02000600000000000000" pitchFamily="2" charset="0"/>
+                </a:rPr>
+                <a:t>నా తోడు</a:t>
+              </a:r>
+              <a:r>
+                <a:rPr lang="en-IN" sz="2000" dirty="0">
+                  <a:latin typeface="Ramabhadra" panose="02000600000000000000" pitchFamily="2" charset="0"/>
+                  <a:cs typeface="Ramabhadra" panose="02000600000000000000" pitchFamily="2" charset="0"/>
+                </a:rPr>
+                <a:t> ||</a:t>
+              </a:r>
+              <a:endParaRPr lang="te-IN" sz="2000" dirty="0">
                 <a:latin typeface="Ramabhadra" panose="02000600000000000000" pitchFamily="2" charset="0"/>
                 <a:cs typeface="Ramabhadra" panose="02000600000000000000" pitchFamily="2" charset="0"/>
               </a:endParaRPr>
@@ -3311,7 +3411,7 @@
           </p:nvSpPr>
           <p:spPr>
             <a:xfrm>
-              <a:off x="343961" y="326430"/>
+              <a:off x="4261380" y="326430"/>
               <a:ext cx="390525" cy="390525"/>
             </a:xfrm>
             <a:prstGeom prst="ellipse">
@@ -3450,7 +3550,7 @@
           <p:spPr>
             <a:xfrm>
               <a:off x="343961" y="770800"/>
-              <a:ext cx="4541306" cy="5632311"/>
+              <a:ext cx="4541306" cy="5047536"/>
             </a:xfrm>
             <a:prstGeom prst="rect">
               <a:avLst/>
@@ -3467,78 +3567,66 @@
                 <a:defRPr/>
               </a:pPr>
               <a:r>
-                <a:rPr lang="te-IN" dirty="0">
-                  <a:latin typeface="Ramabhadra" panose="02000600000000000000" pitchFamily="2" charset="0"/>
-                  <a:cs typeface="Ramabhadra" panose="02000600000000000000" pitchFamily="2" charset="0"/>
-                </a:rPr>
-                <a:t>నీ ప్రేమ నా జీవితాన్ని – నీకై వెలిగించెనే యేసయ్యా</a:t>
-              </a:r>
-            </a:p>
-            <a:p>
-              <a:pPr defTabSz="439781">
-                <a:defRPr/>
-              </a:pPr>
-              <a:r>
-                <a:rPr lang="te-IN" dirty="0">
-                  <a:latin typeface="Ramabhadra" panose="02000600000000000000" pitchFamily="2" charset="0"/>
-                  <a:cs typeface="Ramabhadra" panose="02000600000000000000" pitchFamily="2" charset="0"/>
-                </a:rPr>
-                <a:t>నీ కృప సెలయేరులా – నాలో ప్రవహించెనే (2)</a:t>
-              </a:r>
-            </a:p>
-            <a:p>
-              <a:pPr defTabSz="439781">
-                <a:defRPr/>
-              </a:pPr>
-              <a:r>
-                <a:rPr lang="te-IN" dirty="0">
-                  <a:latin typeface="Ramabhadra" panose="02000600000000000000" pitchFamily="2" charset="0"/>
-                  <a:cs typeface="Ramabhadra" panose="02000600000000000000" pitchFamily="2" charset="0"/>
-                </a:rPr>
-                <a:t>నన్ను క్షమియించెనే – నన్ను కరుణించెనే</a:t>
-              </a:r>
-            </a:p>
-            <a:p>
-              <a:pPr defTabSz="439781">
-                <a:defRPr/>
-              </a:pPr>
-              <a:r>
-                <a:rPr lang="te-IN" dirty="0">
-                  <a:latin typeface="Ramabhadra" panose="02000600000000000000" pitchFamily="2" charset="0"/>
-                  <a:cs typeface="Ramabhadra" panose="02000600000000000000" pitchFamily="2" charset="0"/>
-                </a:rPr>
-                <a:t>నన్ను స్థిరపరచెనే – నన్ను ఘనపరచెనే (2)</a:t>
-              </a:r>
-            </a:p>
-            <a:p>
-              <a:pPr defTabSz="439781">
-                <a:defRPr/>
-              </a:pPr>
-              <a:r>
-                <a:rPr lang="te-IN" dirty="0">
-                  <a:latin typeface="Ramabhadra" panose="02000600000000000000" pitchFamily="2" charset="0"/>
-                  <a:cs typeface="Ramabhadra" panose="02000600000000000000" pitchFamily="2" charset="0"/>
-                </a:rPr>
-                <a:t>యేసయ్యా యేసయ్యా నా యేసయ్యా</a:t>
-              </a:r>
-            </a:p>
-            <a:p>
-              <a:pPr defTabSz="439781">
-                <a:defRPr/>
-              </a:pPr>
-              <a:r>
-                <a:rPr lang="te-IN" dirty="0">
-                  <a:latin typeface="Ramabhadra" panose="02000600000000000000" pitchFamily="2" charset="0"/>
-                  <a:cs typeface="Ramabhadra" panose="02000600000000000000" pitchFamily="2" charset="0"/>
-                </a:rPr>
-                <a:t>యేసయ్యా యేసయ్యా ఓ మెస్సయ్యా (2)</a:t>
-              </a:r>
-            </a:p>
-            <a:p>
-              <a:pPr defTabSz="439781">
-                <a:defRPr/>
-              </a:pPr>
-              <a:endParaRPr lang="te-IN" dirty="0">
+                <a:rPr lang="te-IN" sz="2300" dirty="0">
+                  <a:latin typeface="Ramabhadra" panose="02000600000000000000" pitchFamily="2" charset="0"/>
+                  <a:cs typeface="Ramabhadra" panose="02000600000000000000" pitchFamily="2" charset="0"/>
+                </a:rPr>
+                <a:t>స్తోత్రము స్తుతి స్తోత్రము</a:t>
+              </a:r>
+            </a:p>
+            <a:p>
+              <a:pPr defTabSz="439781">
+                <a:defRPr/>
+              </a:pPr>
+              <a:r>
+                <a:rPr lang="te-IN" sz="2300" dirty="0">
+                  <a:latin typeface="Ramabhadra" panose="02000600000000000000" pitchFamily="2" charset="0"/>
+                  <a:cs typeface="Ramabhadra" panose="02000600000000000000" pitchFamily="2" charset="0"/>
+                </a:rPr>
+                <a:t>వేలాది వందనాలు</a:t>
+              </a:r>
+            </a:p>
+            <a:p>
+              <a:pPr defTabSz="439781">
+                <a:defRPr/>
+              </a:pPr>
+              <a:r>
+                <a:rPr lang="te-IN" sz="2300" dirty="0">
+                  <a:latin typeface="Ramabhadra" panose="02000600000000000000" pitchFamily="2" charset="0"/>
+                  <a:cs typeface="Ramabhadra" panose="02000600000000000000" pitchFamily="2" charset="0"/>
+                </a:rPr>
+                <a:t>కలుగును గాక నీకే మహిమ</a:t>
+              </a:r>
+            </a:p>
+            <a:p>
+              <a:pPr defTabSz="439781">
+                <a:defRPr/>
+              </a:pPr>
+              <a:r>
+                <a:rPr lang="te-IN" sz="2300" dirty="0">
+                  <a:latin typeface="Ramabhadra" panose="02000600000000000000" pitchFamily="2" charset="0"/>
+                  <a:cs typeface="Ramabhadra" panose="02000600000000000000" pitchFamily="2" charset="0"/>
+                </a:rPr>
+                <a:t>ఎల్లప్పుడూ స్తుతి స్తోత్రము</a:t>
+              </a:r>
+            </a:p>
+            <a:p>
+              <a:pPr defTabSz="439781">
+                <a:defRPr/>
+              </a:pPr>
+              <a:r>
+                <a:rPr lang="te-IN" sz="2300" dirty="0">
+                  <a:latin typeface="Ramabhadra" panose="02000600000000000000" pitchFamily="2" charset="0"/>
+                  <a:cs typeface="Ramabhadra" panose="02000600000000000000" pitchFamily="2" charset="0"/>
+                </a:rPr>
+                <a:t>యేసయ్య యేసయ్య యేసయ్య (4)</a:t>
+              </a:r>
+            </a:p>
+            <a:p>
+              <a:pPr defTabSz="439781">
+                <a:defRPr/>
+              </a:pPr>
+              <a:endParaRPr lang="te-IN" sz="2300" dirty="0">
                 <a:latin typeface="Ramabhadra" panose="02000600000000000000" pitchFamily="2" charset="0"/>
                 <a:cs typeface="Ramabhadra" panose="02000600000000000000" pitchFamily="2" charset="0"/>
               </a:endParaRPr>
@@ -3548,78 +3636,32 @@
                 <a:defRPr/>
               </a:pPr>
               <a:r>
-                <a:rPr lang="te-IN" dirty="0">
-                  <a:latin typeface="Ramabhadra" panose="02000600000000000000" pitchFamily="2" charset="0"/>
-                  <a:cs typeface="Ramabhadra" panose="02000600000000000000" pitchFamily="2" charset="0"/>
-                </a:rPr>
-                <a:t>నేను నిన్ను విడచిననూ –</a:t>
-              </a:r>
-            </a:p>
-            <a:p>
-              <a:pPr defTabSz="439781">
-                <a:defRPr/>
-              </a:pPr>
-              <a:r>
-                <a:rPr lang="te-IN" dirty="0">
-                  <a:latin typeface="Ramabhadra" panose="02000600000000000000" pitchFamily="2" charset="0"/>
-                  <a:cs typeface="Ramabhadra" panose="02000600000000000000" pitchFamily="2" charset="0"/>
-                </a:rPr>
-                <a:t>నీవు నన్ను విడువలేదయ్యా</a:t>
-              </a:r>
-            </a:p>
-            <a:p>
-              <a:pPr defTabSz="439781">
-                <a:defRPr/>
-              </a:pPr>
-              <a:r>
-                <a:rPr lang="te-IN" dirty="0">
-                  <a:latin typeface="Ramabhadra" panose="02000600000000000000" pitchFamily="2" charset="0"/>
-                  <a:cs typeface="Ramabhadra" panose="02000600000000000000" pitchFamily="2" charset="0"/>
-                </a:rPr>
-                <a:t>దారి తప్పి తొలగిననూ –</a:t>
-              </a:r>
-            </a:p>
-            <a:p>
-              <a:pPr defTabSz="439781">
-                <a:defRPr/>
-              </a:pPr>
-              <a:r>
-                <a:rPr lang="te-IN" dirty="0">
-                  <a:latin typeface="Ramabhadra" panose="02000600000000000000" pitchFamily="2" charset="0"/>
-                  <a:cs typeface="Ramabhadra" panose="02000600000000000000" pitchFamily="2" charset="0"/>
-                </a:rPr>
-                <a:t>నీ దారిలో నను చేర్చినావయ్యా (2)</a:t>
-              </a:r>
-            </a:p>
-            <a:p>
-              <a:pPr defTabSz="439781">
-                <a:defRPr/>
-              </a:pPr>
-              <a:r>
-                <a:rPr lang="te-IN" dirty="0">
-                  <a:latin typeface="Ramabhadra" panose="02000600000000000000" pitchFamily="2" charset="0"/>
-                  <a:cs typeface="Ramabhadra" panose="02000600000000000000" pitchFamily="2" charset="0"/>
-                </a:rPr>
-                <a:t>ఏమివ్వగలను నీ కృపకు నేను</a:t>
-              </a:r>
-            </a:p>
-            <a:p>
-              <a:pPr defTabSz="439781">
-                <a:defRPr/>
-              </a:pPr>
-              <a:r>
-                <a:rPr lang="te-IN" dirty="0">
-                  <a:latin typeface="Ramabhadra" panose="02000600000000000000" pitchFamily="2" charset="0"/>
-                  <a:cs typeface="Ramabhadra" panose="02000600000000000000" pitchFamily="2" charset="0"/>
-                </a:rPr>
-                <a:t>వెలకట్టలేను నీ ప్రేమను (2)</a:t>
-              </a:r>
-            </a:p>
-            <a:p>
-              <a:pPr defTabSz="439781">
-                <a:defRPr/>
-              </a:pPr>
-              <a:endParaRPr lang="te-IN" dirty="0">
+                <a:rPr lang="en-IN" sz="2300" dirty="0">
+                  <a:latin typeface="Ramabhadra" panose="02000600000000000000" pitchFamily="2" charset="0"/>
+                  <a:cs typeface="Ramabhadra" panose="02000600000000000000" pitchFamily="2" charset="0"/>
+                </a:rPr>
+                <a:t>1. </a:t>
+              </a:r>
+              <a:r>
+                <a:rPr lang="te-IN" sz="2300" dirty="0">
+                  <a:latin typeface="Ramabhadra" panose="02000600000000000000" pitchFamily="2" charset="0"/>
+                  <a:cs typeface="Ramabhadra" panose="02000600000000000000" pitchFamily="2" charset="0"/>
+                </a:rPr>
+                <a:t>శూన్యము నుండి సమస్తము కలుగజేసెను</a:t>
+              </a:r>
+            </a:p>
+            <a:p>
+              <a:pPr defTabSz="439781">
+                <a:defRPr/>
+              </a:pPr>
+              <a:r>
+                <a:rPr lang="te-IN" sz="2300" dirty="0">
+                  <a:latin typeface="Ramabhadra" panose="02000600000000000000" pitchFamily="2" charset="0"/>
+                  <a:cs typeface="Ramabhadra" panose="02000600000000000000" pitchFamily="2" charset="0"/>
+                </a:rPr>
+                <a:t>నిరాకారమైన నా జీవితమునకు</a:t>
+              </a:r>
+              <a:endParaRPr lang="en-IN" sz="2300" dirty="0">
                 <a:latin typeface="Ramabhadra" panose="02000600000000000000" pitchFamily="2" charset="0"/>
                 <a:cs typeface="Ramabhadra" panose="02000600000000000000" pitchFamily="2" charset="0"/>
               </a:endParaRPr>
@@ -3629,71 +3671,103 @@
                 <a:defRPr/>
               </a:pPr>
               <a:r>
-                <a:rPr lang="te-IN" dirty="0">
-                  <a:latin typeface="Ramabhadra" panose="02000600000000000000" pitchFamily="2" charset="0"/>
-                  <a:cs typeface="Ramabhadra" panose="02000600000000000000" pitchFamily="2" charset="0"/>
-                </a:rPr>
-                <a:t>జలములు నన్ను చుట్టిననూ –</a:t>
-              </a:r>
-            </a:p>
-            <a:p>
-              <a:pPr defTabSz="439781">
-                <a:defRPr/>
-              </a:pPr>
-              <a:r>
-                <a:rPr lang="te-IN" dirty="0">
-                  <a:latin typeface="Ramabhadra" panose="02000600000000000000" pitchFamily="2" charset="0"/>
-                  <a:cs typeface="Ramabhadra" panose="02000600000000000000" pitchFamily="2" charset="0"/>
-                </a:rPr>
-                <a:t>నీ చేతిలో నను దాచినావయ్యా</a:t>
-              </a:r>
-            </a:p>
-            <a:p>
-              <a:pPr defTabSz="439781">
-                <a:defRPr/>
-              </a:pPr>
-              <a:r>
-                <a:rPr lang="te-IN" dirty="0">
-                  <a:latin typeface="Ramabhadra" panose="02000600000000000000" pitchFamily="2" charset="0"/>
-                  <a:cs typeface="Ramabhadra" panose="02000600000000000000" pitchFamily="2" charset="0"/>
-                </a:rPr>
-                <a:t>జ్వాలలు నాపై లేచిననూ –</a:t>
-              </a:r>
-            </a:p>
-            <a:p>
-              <a:pPr defTabSz="439781">
-                <a:defRPr/>
-              </a:pPr>
-              <a:r>
-                <a:rPr lang="te-IN" dirty="0">
-                  <a:latin typeface="Ramabhadra" panose="02000600000000000000" pitchFamily="2" charset="0"/>
-                  <a:cs typeface="Ramabhadra" panose="02000600000000000000" pitchFamily="2" charset="0"/>
-                </a:rPr>
-                <a:t>నీ ఆత్మతో నను కప్పినావయ్యా (2)</a:t>
-              </a:r>
-            </a:p>
-            <a:p>
-              <a:pPr defTabSz="439781">
-                <a:defRPr/>
-              </a:pPr>
-              <a:r>
-                <a:rPr lang="te-IN" dirty="0">
-                  <a:latin typeface="Ramabhadra" panose="02000600000000000000" pitchFamily="2" charset="0"/>
-                  <a:cs typeface="Ramabhadra" panose="02000600000000000000" pitchFamily="2" charset="0"/>
-                </a:rPr>
-                <a:t>ఏమివ్వగలను నీ కృపకు నేను</a:t>
-              </a:r>
-            </a:p>
-            <a:p>
-              <a:pPr defTabSz="439781">
-                <a:defRPr/>
-              </a:pPr>
-              <a:r>
-                <a:rPr lang="te-IN" dirty="0">
-                  <a:latin typeface="Ramabhadra" panose="02000600000000000000" pitchFamily="2" charset="0"/>
-                  <a:cs typeface="Ramabhadra" panose="02000600000000000000" pitchFamily="2" charset="0"/>
-                </a:rPr>
-                <a:t>వెలకట్టలేను నీ ఆత్మను (2)</a:t>
+                <a:rPr lang="te-IN" sz="2300" dirty="0">
+                  <a:latin typeface="Ramabhadra" panose="02000600000000000000" pitchFamily="2" charset="0"/>
+                  <a:cs typeface="Ramabhadra" panose="02000600000000000000" pitchFamily="2" charset="0"/>
+                </a:rPr>
+                <a:t>రూపము నిచ్చెను</a:t>
+              </a:r>
+            </a:p>
+            <a:p>
+              <a:pPr defTabSz="439781">
+                <a:defRPr/>
+              </a:pPr>
+              <a:r>
+                <a:rPr lang="te-IN" sz="2300" dirty="0">
+                  <a:latin typeface="Ramabhadra" panose="02000600000000000000" pitchFamily="2" charset="0"/>
+                  <a:cs typeface="Ramabhadra" panose="02000600000000000000" pitchFamily="2" charset="0"/>
+                </a:rPr>
+                <a:t>యేసే నా సర్వము</a:t>
+              </a:r>
+              <a:r>
+                <a:rPr lang="en-IN" sz="2300" dirty="0">
+                  <a:latin typeface="Ramabhadra" panose="02000600000000000000" pitchFamily="2" charset="0"/>
+                  <a:cs typeface="Ramabhadra" panose="02000600000000000000" pitchFamily="2" charset="0"/>
+                </a:rPr>
+                <a:t> - </a:t>
+              </a:r>
+              <a:r>
+                <a:rPr lang="te-IN" sz="2300" dirty="0">
+                  <a:latin typeface="Ramabhadra" panose="02000600000000000000" pitchFamily="2" charset="0"/>
+                  <a:cs typeface="Ramabhadra" panose="02000600000000000000" pitchFamily="2" charset="0"/>
+                </a:rPr>
+                <a:t>యేసే నా సమస్తము</a:t>
+              </a:r>
+            </a:p>
+            <a:p>
+              <a:pPr defTabSz="439781">
+                <a:defRPr/>
+              </a:pPr>
+              <a:endParaRPr lang="te-IN" sz="2300" dirty="0">
+                <a:latin typeface="Ramabhadra" panose="02000600000000000000" pitchFamily="2" charset="0"/>
+                <a:cs typeface="Ramabhadra" panose="02000600000000000000" pitchFamily="2" charset="0"/>
+              </a:endParaRPr>
+            </a:p>
+            <a:p>
+              <a:pPr defTabSz="439781">
+                <a:defRPr/>
+              </a:pPr>
+              <a:r>
+                <a:rPr lang="en-IN" sz="2300" dirty="0">
+                  <a:latin typeface="Ramabhadra" panose="02000600000000000000" pitchFamily="2" charset="0"/>
+                  <a:cs typeface="Ramabhadra" panose="02000600000000000000" pitchFamily="2" charset="0"/>
+                </a:rPr>
+                <a:t>2. </a:t>
+              </a:r>
+              <a:r>
+                <a:rPr lang="te-IN" sz="2300" dirty="0">
+                  <a:latin typeface="Ramabhadra" panose="02000600000000000000" pitchFamily="2" charset="0"/>
+                  <a:cs typeface="Ramabhadra" panose="02000600000000000000" pitchFamily="2" charset="0"/>
+                </a:rPr>
+                <a:t>పరము నుండి భూమికి దిగివచ్చిన యేసు</a:t>
+              </a:r>
+            </a:p>
+            <a:p>
+              <a:pPr defTabSz="439781">
+                <a:defRPr/>
+              </a:pPr>
+              <a:r>
+                <a:rPr lang="te-IN" sz="2300" dirty="0">
+                  <a:latin typeface="Ramabhadra" panose="02000600000000000000" pitchFamily="2" charset="0"/>
+                  <a:cs typeface="Ramabhadra" panose="02000600000000000000" pitchFamily="2" charset="0"/>
+                </a:rPr>
+                <a:t>సిలువ మరణమునొంది మార్గము తెరిచెను</a:t>
+              </a:r>
+            </a:p>
+            <a:p>
+              <a:pPr defTabSz="439781">
+                <a:defRPr/>
+              </a:pPr>
+              <a:r>
+                <a:rPr lang="te-IN" sz="2300" dirty="0">
+                  <a:latin typeface="Ramabhadra" panose="02000600000000000000" pitchFamily="2" charset="0"/>
+                  <a:cs typeface="Ramabhadra" panose="02000600000000000000" pitchFamily="2" charset="0"/>
+                </a:rPr>
+                <a:t>యేసే నా రక్షణ</a:t>
+              </a:r>
+              <a:r>
+                <a:rPr lang="en-IN" sz="2300" dirty="0">
+                  <a:latin typeface="Ramabhadra" panose="02000600000000000000" pitchFamily="2" charset="0"/>
+                  <a:cs typeface="Ramabhadra" panose="02000600000000000000" pitchFamily="2" charset="0"/>
+                </a:rPr>
+                <a:t> - </a:t>
+              </a:r>
+              <a:r>
+                <a:rPr lang="te-IN" sz="2300" dirty="0">
+                  <a:latin typeface="Ramabhadra" panose="02000600000000000000" pitchFamily="2" charset="0"/>
+                  <a:cs typeface="Ramabhadra" panose="02000600000000000000" pitchFamily="2" charset="0"/>
+                </a:rPr>
+                <a:t>యేసే నా నిరీక్షణ</a:t>
               </a:r>
             </a:p>
           </p:txBody>
@@ -3806,9 +3880,9 @@
         <p:grpSpPr>
           <a:xfrm>
             <a:off x="160868" y="182032"/>
-            <a:ext cx="4767793" cy="6493935"/>
+            <a:ext cx="4831293" cy="6493935"/>
             <a:chOff x="160868" y="182032"/>
-            <a:chExt cx="4767793" cy="6493935"/>
+            <a:chExt cx="4831293" cy="6493935"/>
           </a:xfrm>
         </p:grpSpPr>
         <p:sp>
@@ -3880,8 +3954,8 @@
           </p:nvSpPr>
           <p:spPr>
             <a:xfrm>
-              <a:off x="280461" y="749632"/>
-              <a:ext cx="4648200" cy="5509200"/>
+              <a:off x="343961" y="729375"/>
+              <a:ext cx="4648200" cy="5632311"/>
             </a:xfrm>
             <a:prstGeom prst="rect">
               <a:avLst/>
@@ -3898,54 +3972,66 @@
                 <a:defRPr/>
               </a:pPr>
               <a:r>
-                <a:rPr lang="te-IN" sz="2200" dirty="0">
-                  <a:latin typeface="Ramabhadra" panose="02000600000000000000" pitchFamily="2" charset="0"/>
-                  <a:cs typeface="Ramabhadra" panose="02000600000000000000" pitchFamily="2" charset="0"/>
-                </a:rPr>
-                <a:t>నా స్తుతుల పైన నివసించువాడా</a:t>
-              </a:r>
-            </a:p>
-            <a:p>
-              <a:pPr defTabSz="439781">
-                <a:defRPr/>
-              </a:pPr>
-              <a:r>
-                <a:rPr lang="te-IN" sz="2200" dirty="0">
-                  <a:latin typeface="Ramabhadra" panose="02000600000000000000" pitchFamily="2" charset="0"/>
-                  <a:cs typeface="Ramabhadra" panose="02000600000000000000" pitchFamily="2" charset="0"/>
-                </a:rPr>
-                <a:t>నా అంతరంగికుడా యేసయ్యా (2)</a:t>
-              </a:r>
-            </a:p>
-            <a:p>
-              <a:pPr defTabSz="439781">
-                <a:defRPr/>
-              </a:pPr>
-              <a:r>
-                <a:rPr lang="te-IN" sz="2200" dirty="0">
-                  <a:latin typeface="Ramabhadra" panose="02000600000000000000" pitchFamily="2" charset="0"/>
-                  <a:cs typeface="Ramabhadra" panose="02000600000000000000" pitchFamily="2" charset="0"/>
-                </a:rPr>
-                <a:t>నీవు నా పక్షమై యున్నావు గనుకే</a:t>
-              </a:r>
-            </a:p>
-            <a:p>
-              <a:pPr defTabSz="439781">
-                <a:defRPr/>
-              </a:pPr>
-              <a:r>
-                <a:rPr lang="te-IN" sz="2200" dirty="0">
-                  <a:latin typeface="Ramabhadra" panose="02000600000000000000" pitchFamily="2" charset="0"/>
-                  <a:cs typeface="Ramabhadra" panose="02000600000000000000" pitchFamily="2" charset="0"/>
-                </a:rPr>
-                <a:t>జయమే జయమే ఎల్లవేళలా జయమే (2)</a:t>
-              </a:r>
-            </a:p>
-            <a:p>
-              <a:pPr defTabSz="439781">
-                <a:defRPr/>
-              </a:pPr>
-              <a:endParaRPr lang="te-IN" sz="2200" dirty="0">
+                <a:rPr lang="te-IN" sz="2400" dirty="0">
+                  <a:latin typeface="Ramabhadra" panose="02000600000000000000" pitchFamily="2" charset="0"/>
+                  <a:cs typeface="Ramabhadra" panose="02000600000000000000" pitchFamily="2" charset="0"/>
+                </a:rPr>
+                <a:t>నా ప్రాణమా నా అంతరంగమా </a:t>
+              </a:r>
+            </a:p>
+            <a:p>
+              <a:pPr defTabSz="439781">
+                <a:defRPr/>
+              </a:pPr>
+              <a:r>
+                <a:rPr lang="te-IN" sz="2400" dirty="0">
+                  <a:latin typeface="Ramabhadra" panose="02000600000000000000" pitchFamily="2" charset="0"/>
+                  <a:cs typeface="Ramabhadra" panose="02000600000000000000" pitchFamily="2" charset="0"/>
+                </a:rPr>
+                <a:t>నాలో వున్న నా సమస్తమా (2)</a:t>
+              </a:r>
+            </a:p>
+            <a:p>
+              <a:pPr defTabSz="439781">
+                <a:defRPr/>
+              </a:pPr>
+              <a:r>
+                <a:rPr lang="te-IN" sz="2400" dirty="0">
+                  <a:latin typeface="Ramabhadra" panose="02000600000000000000" pitchFamily="2" charset="0"/>
+                  <a:cs typeface="Ramabhadra" panose="02000600000000000000" pitchFamily="2" charset="0"/>
+                </a:rPr>
+                <a:t>యెహోవ చేసిన ఉపకారములలో</a:t>
+              </a:r>
+            </a:p>
+            <a:p>
+              <a:pPr defTabSz="439781">
+                <a:defRPr/>
+              </a:pPr>
+              <a:r>
+                <a:rPr lang="te-IN" sz="2400" dirty="0">
+                  <a:latin typeface="Ramabhadra" panose="02000600000000000000" pitchFamily="2" charset="0"/>
+                  <a:cs typeface="Ramabhadra" panose="02000600000000000000" pitchFamily="2" charset="0"/>
+                </a:rPr>
+                <a:t>దేనిని మరువక కొనియాడుమా (2)</a:t>
+              </a:r>
+            </a:p>
+            <a:p>
+              <a:pPr defTabSz="439781">
+                <a:defRPr/>
+              </a:pPr>
+              <a:r>
+                <a:rPr lang="te-IN" sz="2400" dirty="0">
+                  <a:latin typeface="Ramabhadra" panose="02000600000000000000" pitchFamily="2" charset="0"/>
+                  <a:cs typeface="Ramabhadra" panose="02000600000000000000" pitchFamily="2" charset="0"/>
+                </a:rPr>
+                <a:t>ఆ.. ఆ… ఆ.. ఆ… ఆ.. ఆ…</a:t>
+              </a:r>
+            </a:p>
+            <a:p>
+              <a:pPr defTabSz="439781">
+                <a:defRPr/>
+              </a:pPr>
+              <a:endParaRPr lang="te-IN" sz="2400" dirty="0">
                 <a:latin typeface="Ramabhadra" panose="02000600000000000000" pitchFamily="2" charset="0"/>
                 <a:cs typeface="Ramabhadra" panose="02000600000000000000" pitchFamily="2" charset="0"/>
               </a:endParaRPr>
@@ -3955,13 +4041,61 @@
                 <a:defRPr/>
               </a:pPr>
               <a:r>
-                <a:rPr lang="te-IN" sz="2200" dirty="0">
-                  <a:latin typeface="Ramabhadra" panose="02000600000000000000" pitchFamily="2" charset="0"/>
-                  <a:cs typeface="Ramabhadra" panose="02000600000000000000" pitchFamily="2" charset="0"/>
-                </a:rPr>
-                <a:t>నన్ను నిర్మించిన రీతి తలచగా –</a:t>
-              </a:r>
-              <a:endParaRPr lang="en-IN" sz="2200" dirty="0">
+                <a:rPr lang="en-IN" sz="2400" dirty="0">
+                  <a:latin typeface="Ramabhadra" panose="02000600000000000000" pitchFamily="2" charset="0"/>
+                  <a:cs typeface="Ramabhadra" panose="02000600000000000000" pitchFamily="2" charset="0"/>
+                </a:rPr>
+                <a:t>1. </a:t>
+              </a:r>
+              <a:r>
+                <a:rPr lang="te-IN" sz="2400" dirty="0">
+                  <a:latin typeface="Ramabhadra" panose="02000600000000000000" pitchFamily="2" charset="0"/>
+                  <a:cs typeface="Ramabhadra" panose="02000600000000000000" pitchFamily="2" charset="0"/>
+                </a:rPr>
+                <a:t>నీ దోషములన్ని క్షమియించువాడు </a:t>
+              </a:r>
+            </a:p>
+            <a:p>
+              <a:pPr defTabSz="439781">
+                <a:defRPr/>
+              </a:pPr>
+              <a:r>
+                <a:rPr lang="te-IN" sz="2400" dirty="0">
+                  <a:latin typeface="Ramabhadra" panose="02000600000000000000" pitchFamily="2" charset="0"/>
+                  <a:cs typeface="Ramabhadra" panose="02000600000000000000" pitchFamily="2" charset="0"/>
+                </a:rPr>
+                <a:t>నీ పాపములన్ని పార ద్రోలువాడు (2)</a:t>
+              </a:r>
+            </a:p>
+            <a:p>
+              <a:pPr defTabSz="439781">
+                <a:defRPr/>
+              </a:pPr>
+              <a:r>
+                <a:rPr lang="te-IN" sz="2400" dirty="0">
+                  <a:latin typeface="Ramabhadra" panose="02000600000000000000" pitchFamily="2" charset="0"/>
+                  <a:cs typeface="Ramabhadra" panose="02000600000000000000" pitchFamily="2" charset="0"/>
+                </a:rPr>
+                <a:t>పరమ వైద్యుడు ప్రభు యేసుడు </a:t>
+              </a:r>
+            </a:p>
+            <a:p>
+              <a:pPr defTabSz="439781">
+                <a:defRPr/>
+              </a:pPr>
+              <a:r>
+                <a:rPr lang="te-IN" sz="2400" dirty="0">
+                  <a:latin typeface="Ramabhadra" panose="02000600000000000000" pitchFamily="2" charset="0"/>
+                  <a:cs typeface="Ramabhadra" panose="02000600000000000000" pitchFamily="2" charset="0"/>
+                </a:rPr>
+                <a:t>పరిశుద్ధ నామమును సన్నుతించుమా (2)</a:t>
+              </a:r>
+            </a:p>
+            <a:p>
+              <a:pPr defTabSz="439781">
+                <a:defRPr/>
+              </a:pPr>
+              <a:endParaRPr lang="te-IN" sz="2400" dirty="0">
                 <a:latin typeface="Ramabhadra" panose="02000600000000000000" pitchFamily="2" charset="0"/>
                 <a:cs typeface="Ramabhadra" panose="02000600000000000000" pitchFamily="2" charset="0"/>
               </a:endParaRPr>
@@ -3971,120 +4105,54 @@
                 <a:defRPr/>
               </a:pPr>
               <a:r>
-                <a:rPr lang="te-IN" sz="2200" dirty="0">
-                  <a:latin typeface="Ramabhadra" panose="02000600000000000000" pitchFamily="2" charset="0"/>
-                  <a:cs typeface="Ramabhadra" panose="02000600000000000000" pitchFamily="2" charset="0"/>
-                </a:rPr>
-                <a:t>ఎంతో ఆశ్చర్యమే</a:t>
-              </a:r>
-            </a:p>
-            <a:p>
-              <a:pPr defTabSz="439781">
-                <a:defRPr/>
-              </a:pPr>
-              <a:r>
-                <a:rPr lang="te-IN" sz="2200" dirty="0">
-                  <a:latin typeface="Ramabhadra" panose="02000600000000000000" pitchFamily="2" charset="0"/>
-                  <a:cs typeface="Ramabhadra" panose="02000600000000000000" pitchFamily="2" charset="0"/>
-                </a:rPr>
-                <a:t>అది నా ఊహకే వింతైనది (2)</a:t>
-              </a:r>
-            </a:p>
-            <a:p>
-              <a:pPr defTabSz="439781">
-                <a:defRPr/>
-              </a:pPr>
-              <a:r>
-                <a:rPr lang="te-IN" sz="2200" dirty="0">
-                  <a:latin typeface="Ramabhadra" panose="02000600000000000000" pitchFamily="2" charset="0"/>
-                  <a:cs typeface="Ramabhadra" panose="02000600000000000000" pitchFamily="2" charset="0"/>
-                </a:rPr>
-                <a:t>ఎరుపెక్కిన శత్రువుల చూపు నుండి తప్పించి</a:t>
-              </a:r>
-            </a:p>
-            <a:p>
-              <a:pPr defTabSz="439781">
-                <a:defRPr/>
-              </a:pPr>
-              <a:r>
-                <a:rPr lang="te-IN" sz="2200" dirty="0">
-                  <a:latin typeface="Ramabhadra" panose="02000600000000000000" pitchFamily="2" charset="0"/>
-                  <a:cs typeface="Ramabhadra" panose="02000600000000000000" pitchFamily="2" charset="0"/>
-                </a:rPr>
-                <a:t>ఎనలేని ప్రేమను నాపై కురిపించావు (2)</a:t>
-              </a:r>
-            </a:p>
-            <a:p>
-              <a:pPr defTabSz="439781">
-                <a:defRPr/>
-              </a:pPr>
-              <a:endParaRPr lang="te-IN" sz="2200" dirty="0">
-                <a:latin typeface="Ramabhadra" panose="02000600000000000000" pitchFamily="2" charset="0"/>
-                <a:cs typeface="Ramabhadra" panose="02000600000000000000" pitchFamily="2" charset="0"/>
-              </a:endParaRPr>
-            </a:p>
-            <a:p>
-              <a:pPr defTabSz="439781">
-                <a:defRPr/>
-              </a:pPr>
-              <a:r>
-                <a:rPr lang="te-IN" sz="2200" dirty="0">
-                  <a:latin typeface="Ramabhadra" panose="02000600000000000000" pitchFamily="2" charset="0"/>
-                  <a:cs typeface="Ramabhadra" panose="02000600000000000000" pitchFamily="2" charset="0"/>
-                </a:rPr>
-                <a:t>ద్రాక్షావల్లి అయిన నీలోనే –</a:t>
-              </a:r>
-              <a:endParaRPr lang="en-IN" sz="2200" dirty="0">
-                <a:latin typeface="Ramabhadra" panose="02000600000000000000" pitchFamily="2" charset="0"/>
-                <a:cs typeface="Ramabhadra" panose="02000600000000000000" pitchFamily="2" charset="0"/>
-              </a:endParaRPr>
-            </a:p>
-            <a:p>
-              <a:pPr defTabSz="439781">
-                <a:defRPr/>
-              </a:pPr>
-              <a:r>
-                <a:rPr lang="te-IN" sz="2200" dirty="0">
-                  <a:latin typeface="Ramabhadra" panose="02000600000000000000" pitchFamily="2" charset="0"/>
-                  <a:cs typeface="Ramabhadra" panose="02000600000000000000" pitchFamily="2" charset="0"/>
-                </a:rPr>
-                <a:t>బహుగా వేరు పారగా</a:t>
-              </a:r>
-            </a:p>
-            <a:p>
-              <a:pPr defTabSz="439781">
-                <a:defRPr/>
-              </a:pPr>
-              <a:r>
-                <a:rPr lang="te-IN" sz="2200" dirty="0">
-                  <a:latin typeface="Ramabhadra" panose="02000600000000000000" pitchFamily="2" charset="0"/>
-                  <a:cs typeface="Ramabhadra" panose="02000600000000000000" pitchFamily="2" charset="0"/>
-                </a:rPr>
-                <a:t>నీతో మధురమైన ఫలములీయనా (2)</a:t>
-              </a:r>
-            </a:p>
-            <a:p>
-              <a:pPr defTabSz="439781">
-                <a:defRPr/>
-              </a:pPr>
-              <a:r>
-                <a:rPr lang="te-IN" sz="2200" dirty="0">
-                  <a:latin typeface="Ramabhadra" panose="02000600000000000000" pitchFamily="2" charset="0"/>
-                  <a:cs typeface="Ramabhadra" panose="02000600000000000000" pitchFamily="2" charset="0"/>
-                </a:rPr>
-                <a:t>ఉన్నత స్థలములపై నాకు స్థానమిచ్చితివే</a:t>
-              </a:r>
-            </a:p>
-            <a:p>
-              <a:pPr defTabSz="439781">
-                <a:defRPr/>
-              </a:pPr>
-              <a:r>
-                <a:rPr lang="te-IN" sz="2200" dirty="0">
-                  <a:latin typeface="Ramabhadra" panose="02000600000000000000" pitchFamily="2" charset="0"/>
-                  <a:cs typeface="Ramabhadra" panose="02000600000000000000" pitchFamily="2" charset="0"/>
-                </a:rPr>
-                <a:t>విజయుడా నీ కృప చాలును నా జీవితాన (2)</a:t>
+                <a:rPr lang="en-IN" sz="2400" dirty="0">
+                  <a:latin typeface="Ramabhadra" panose="02000600000000000000" pitchFamily="2" charset="0"/>
+                  <a:cs typeface="Ramabhadra" panose="02000600000000000000" pitchFamily="2" charset="0"/>
+                </a:rPr>
+                <a:t>2. </a:t>
+              </a:r>
+              <a:r>
+                <a:rPr lang="te-IN" sz="2400" dirty="0">
+                  <a:latin typeface="Ramabhadra" panose="02000600000000000000" pitchFamily="2" charset="0"/>
+                  <a:cs typeface="Ramabhadra" panose="02000600000000000000" pitchFamily="2" charset="0"/>
+                </a:rPr>
+                <a:t>సమాధిలోనుండి నీ ప్రాణమును </a:t>
+              </a:r>
+            </a:p>
+            <a:p>
+              <a:pPr defTabSz="439781">
+                <a:defRPr/>
+              </a:pPr>
+              <a:r>
+                <a:rPr lang="te-IN" sz="2400" dirty="0">
+                  <a:latin typeface="Ramabhadra" panose="02000600000000000000" pitchFamily="2" charset="0"/>
+                  <a:cs typeface="Ramabhadra" panose="02000600000000000000" pitchFamily="2" charset="0"/>
+                </a:rPr>
+                <a:t>విమోచించుచున్నాడు శ్రీయేసుడు (2)</a:t>
+              </a:r>
+            </a:p>
+            <a:p>
+              <a:pPr defTabSz="439781">
+                <a:defRPr/>
+              </a:pPr>
+              <a:r>
+                <a:rPr lang="te-IN" sz="2400" dirty="0">
+                  <a:latin typeface="Ramabhadra" panose="02000600000000000000" pitchFamily="2" charset="0"/>
+                  <a:cs typeface="Ramabhadra" panose="02000600000000000000" pitchFamily="2" charset="0"/>
+                </a:rPr>
+                <a:t>కరుణా కటాక్షములను నీకు కిరీటముగా </a:t>
+              </a:r>
+            </a:p>
+            <a:p>
+              <a:pPr defTabSz="439781">
+                <a:defRPr/>
+              </a:pPr>
+              <a:r>
+                <a:rPr lang="te-IN" sz="2400" dirty="0">
+                  <a:latin typeface="Ramabhadra" panose="02000600000000000000" pitchFamily="2" charset="0"/>
+                  <a:cs typeface="Ramabhadra" panose="02000600000000000000" pitchFamily="2" charset="0"/>
+                </a:rPr>
+                <a:t>ధరియింపజేయును ప్రభు యేసుడు (2)</a:t>
               </a:r>
             </a:p>
           </p:txBody>
@@ -4167,9 +4235,9 @@
         <p:grpSpPr>
           <a:xfrm>
             <a:off x="5104338" y="182031"/>
-            <a:ext cx="4724399" cy="6493935"/>
+            <a:ext cx="4660899" cy="6493935"/>
             <a:chOff x="160868" y="182032"/>
-            <a:chExt cx="4724399" cy="6493935"/>
+            <a:chExt cx="4660899" cy="6493935"/>
           </a:xfrm>
         </p:grpSpPr>
         <p:sp>
@@ -4241,8 +4309,8 @@
           </p:nvSpPr>
           <p:spPr>
             <a:xfrm>
-              <a:off x="343961" y="740943"/>
-              <a:ext cx="4541306" cy="5170646"/>
+              <a:off x="280461" y="861353"/>
+              <a:ext cx="4541306" cy="4832092"/>
             </a:xfrm>
             <a:prstGeom prst="rect">
               <a:avLst/>
@@ -4263,7 +4331,7 @@
                   <a:latin typeface="Ramabhadra" panose="02000600000000000000" pitchFamily="2" charset="0"/>
                   <a:cs typeface="Ramabhadra" panose="02000600000000000000" pitchFamily="2" charset="0"/>
                 </a:rPr>
-                <a:t>ఎవరూ సమీపించలేని</a:t>
+                <a:t>యేసయ్యా నా హృదయ స్పందన నీవే కదా (2)</a:t>
               </a:r>
             </a:p>
             <a:p>
@@ -4275,43 +4343,7 @@
                   <a:latin typeface="Ramabhadra" panose="02000600000000000000" pitchFamily="2" charset="0"/>
                   <a:cs typeface="Ramabhadra" panose="02000600000000000000" pitchFamily="2" charset="0"/>
                 </a:rPr>
-                <a:t>తేజస్సుతో నివసించు నా యేసయ్యా (2)</a:t>
-              </a:r>
-            </a:p>
-            <a:p>
-              <a:pPr defTabSz="439781">
-                <a:defRPr/>
-              </a:pPr>
-              <a:r>
-                <a:rPr lang="te-IN" sz="2200" dirty="0">
-                  <a:latin typeface="Ramabhadra" panose="02000600000000000000" pitchFamily="2" charset="0"/>
-                  <a:cs typeface="Ramabhadra" panose="02000600000000000000" pitchFamily="2" charset="0"/>
-                </a:rPr>
-                <a:t>నీ మహిమను ధరించిన పరిశుద్ధులు</a:t>
-              </a:r>
-            </a:p>
-            <a:p>
-              <a:pPr defTabSz="439781">
-                <a:defRPr/>
-              </a:pPr>
-              <a:r>
-                <a:rPr lang="te-IN" sz="2200" dirty="0">
-                  <a:latin typeface="Ramabhadra" panose="02000600000000000000" pitchFamily="2" charset="0"/>
-                  <a:cs typeface="Ramabhadra" panose="02000600000000000000" pitchFamily="2" charset="0"/>
-                </a:rPr>
-                <a:t>నా కంటబడగానే (2)</a:t>
-              </a:r>
-            </a:p>
-            <a:p>
-              <a:pPr defTabSz="439781">
-                <a:defRPr/>
-              </a:pPr>
-              <a:r>
-                <a:rPr lang="te-IN" sz="2200" dirty="0">
-                  <a:latin typeface="Ramabhadra" panose="02000600000000000000" pitchFamily="2" charset="0"/>
-                  <a:cs typeface="Ramabhadra" panose="02000600000000000000" pitchFamily="2" charset="0"/>
-                </a:rPr>
-                <a:t>ఏమౌదునో నేనేమౌదునో (2)</a:t>
+                <a:t>విశ్వమంతా నీ నామము ఘణనీయము (2)</a:t>
               </a:r>
             </a:p>
             <a:p>
@@ -4328,11 +4360,18 @@
                 <a:defRPr/>
               </a:pPr>
               <a:r>
+                <a:rPr lang="en-IN" sz="2200" dirty="0">
+                  <a:latin typeface="Ramabhadra" panose="02000600000000000000" pitchFamily="2" charset="0"/>
+                  <a:cs typeface="Ramabhadra" panose="02000600000000000000" pitchFamily="2" charset="0"/>
+                </a:rPr>
+                <a:t>1. </a:t>
+              </a:r>
+              <a:r>
                 <a:rPr lang="te-IN" sz="2200" dirty="0">
                   <a:latin typeface="Ramabhadra" panose="02000600000000000000" pitchFamily="2" charset="0"/>
                   <a:cs typeface="Ramabhadra" panose="02000600000000000000" pitchFamily="2" charset="0"/>
                 </a:rPr>
-                <a:t>ఇహలోక బంధాలు మరచి</a:t>
+                <a:t>నీవు కనిపించని రోజున</a:t>
               </a:r>
             </a:p>
             <a:p>
@@ -4344,7 +4383,7 @@
                   <a:latin typeface="Ramabhadra" panose="02000600000000000000" pitchFamily="2" charset="0"/>
                   <a:cs typeface="Ramabhadra" panose="02000600000000000000" pitchFamily="2" charset="0"/>
                 </a:rPr>
-                <a:t>నీ యెదుటే నేను నిలిచి (2)</a:t>
+                <a:t>ఒక క్షణమొక యుగముగా మారెనే (2)</a:t>
               </a:r>
             </a:p>
             <a:p>
@@ -4356,7 +4395,7 @@
                   <a:latin typeface="Ramabhadra" panose="02000600000000000000" pitchFamily="2" charset="0"/>
                   <a:cs typeface="Ramabhadra" panose="02000600000000000000" pitchFamily="2" charset="0"/>
                 </a:rPr>
-                <a:t>నీవిచ్చు బహుమతులు నే స్వీకరించి</a:t>
+                <a:t>నీవు నడిపించిన రోజున</a:t>
               </a:r>
             </a:p>
             <a:p>
@@ -4368,7 +4407,19 @@
                   <a:latin typeface="Ramabhadra" panose="02000600000000000000" pitchFamily="2" charset="0"/>
                   <a:cs typeface="Ramabhadra" panose="02000600000000000000" pitchFamily="2" charset="0"/>
                 </a:rPr>
-                <a:t>నిత్యానందముతో పరవశించు వేళ (2)</a:t>
+                <a:t>యుగయుగాల తలపు మది నిండెనే (2)</a:t>
+              </a:r>
+            </a:p>
+            <a:p>
+              <a:pPr defTabSz="439781">
+                <a:defRPr/>
+              </a:pPr>
+              <a:r>
+                <a:rPr lang="te-IN" sz="2200" dirty="0">
+                  <a:latin typeface="Ramabhadra" panose="02000600000000000000" pitchFamily="2" charset="0"/>
+                  <a:cs typeface="Ramabhadra" panose="02000600000000000000" pitchFamily="2" charset="0"/>
+                </a:rPr>
+                <a:t>యుగయుగాల తలపు మది నిండెనే</a:t>
               </a:r>
             </a:p>
             <a:p>
@@ -4385,11 +4436,18 @@
                 <a:defRPr/>
               </a:pPr>
               <a:r>
+                <a:rPr lang="en-IN" sz="2200" dirty="0">
+                  <a:latin typeface="Ramabhadra" panose="02000600000000000000" pitchFamily="2" charset="0"/>
+                  <a:cs typeface="Ramabhadra" panose="02000600000000000000" pitchFamily="2" charset="0"/>
+                </a:rPr>
+                <a:t>2. </a:t>
+              </a:r>
+              <a:r>
                 <a:rPr lang="te-IN" sz="2200" dirty="0">
                   <a:latin typeface="Ramabhadra" panose="02000600000000000000" pitchFamily="2" charset="0"/>
                   <a:cs typeface="Ramabhadra" panose="02000600000000000000" pitchFamily="2" charset="0"/>
                 </a:rPr>
-                <a:t>పరలోక మహిమను తలచి</a:t>
+                <a:t>నీవు మాట్లాడని రోజున</a:t>
               </a:r>
             </a:p>
             <a:p>
@@ -4401,7 +4459,7 @@
                   <a:latin typeface="Ramabhadra" panose="02000600000000000000" pitchFamily="2" charset="0"/>
                   <a:cs typeface="Ramabhadra" panose="02000600000000000000" pitchFamily="2" charset="0"/>
                 </a:rPr>
-                <a:t>నీ పాద పద్మములపై ఒరిగి (2)</a:t>
+                <a:t>నా కనులకు నిద్దుర కరువాయెనే (2)</a:t>
               </a:r>
             </a:p>
             <a:p>
@@ -4413,7 +4471,7 @@
                   <a:latin typeface="Ramabhadra" panose="02000600000000000000" pitchFamily="2" charset="0"/>
                   <a:cs typeface="Ramabhadra" panose="02000600000000000000" pitchFamily="2" charset="0"/>
                 </a:rPr>
-                <a:t>పరలోక సైన్య సమూహాలతో కలసి</a:t>
+                <a:t>నీవు పెదవిప్పిన రోజున</a:t>
               </a:r>
             </a:p>
             <a:p>
@@ -4425,7 +4483,19 @@
                   <a:latin typeface="Ramabhadra" panose="02000600000000000000" pitchFamily="2" charset="0"/>
                   <a:cs typeface="Ramabhadra" panose="02000600000000000000" pitchFamily="2" charset="0"/>
                 </a:rPr>
-                <a:t>నిత్యారాధన నే చేయు ప్రశాంత వేళ (2)</a:t>
+                <a:t>నీ సన్నిధి పచ్చిక బయలాయెనే (2)</a:t>
+              </a:r>
+            </a:p>
+            <a:p>
+              <a:pPr defTabSz="439781">
+                <a:defRPr/>
+              </a:pPr>
+              <a:r>
+                <a:rPr lang="te-IN" sz="2200" dirty="0">
+                  <a:latin typeface="Ramabhadra" panose="02000600000000000000" pitchFamily="2" charset="0"/>
+                  <a:cs typeface="Ramabhadra" panose="02000600000000000000" pitchFamily="2" charset="0"/>
+                </a:rPr>
+                <a:t>నీ సన్నిధి పచ్చిక బయలాయెనే</a:t>
               </a:r>
             </a:p>
           </p:txBody>

--- a/songsTemplate.pptx
+++ b/songsTemplate.pptx
@@ -255,7 +255,7 @@
           <a:p>
             <a:fld id="{F1102B08-ED9E-409F-B95F-09CAA1DAF6E0}" type="datetimeFigureOut">
               <a:rPr lang="en-IN" smtClean="0"/>
-              <a:t>16-10-2024</a:t>
+              <a:t>26-10-2024</a:t>
             </a:fld>
             <a:endParaRPr lang="en-IN"/>
           </a:p>
@@ -425,7 +425,7 @@
           <a:p>
             <a:fld id="{F1102B08-ED9E-409F-B95F-09CAA1DAF6E0}" type="datetimeFigureOut">
               <a:rPr lang="en-IN" smtClean="0"/>
-              <a:t>16-10-2024</a:t>
+              <a:t>26-10-2024</a:t>
             </a:fld>
             <a:endParaRPr lang="en-IN"/>
           </a:p>
@@ -605,7 +605,7 @@
           <a:p>
             <a:fld id="{F1102B08-ED9E-409F-B95F-09CAA1DAF6E0}" type="datetimeFigureOut">
               <a:rPr lang="en-IN" smtClean="0"/>
-              <a:t>16-10-2024</a:t>
+              <a:t>26-10-2024</a:t>
             </a:fld>
             <a:endParaRPr lang="en-IN"/>
           </a:p>
@@ -775,7 +775,7 @@
           <a:p>
             <a:fld id="{F1102B08-ED9E-409F-B95F-09CAA1DAF6E0}" type="datetimeFigureOut">
               <a:rPr lang="en-IN" smtClean="0"/>
-              <a:t>16-10-2024</a:t>
+              <a:t>26-10-2024</a:t>
             </a:fld>
             <a:endParaRPr lang="en-IN"/>
           </a:p>
@@ -1019,7 +1019,7 @@
           <a:p>
             <a:fld id="{F1102B08-ED9E-409F-B95F-09CAA1DAF6E0}" type="datetimeFigureOut">
               <a:rPr lang="en-IN" smtClean="0"/>
-              <a:t>16-10-2024</a:t>
+              <a:t>26-10-2024</a:t>
             </a:fld>
             <a:endParaRPr lang="en-IN"/>
           </a:p>
@@ -1251,7 +1251,7 @@
           <a:p>
             <a:fld id="{F1102B08-ED9E-409F-B95F-09CAA1DAF6E0}" type="datetimeFigureOut">
               <a:rPr lang="en-IN" smtClean="0"/>
-              <a:t>16-10-2024</a:t>
+              <a:t>26-10-2024</a:t>
             </a:fld>
             <a:endParaRPr lang="en-IN"/>
           </a:p>
@@ -1618,7 +1618,7 @@
           <a:p>
             <a:fld id="{F1102B08-ED9E-409F-B95F-09CAA1DAF6E0}" type="datetimeFigureOut">
               <a:rPr lang="en-IN" smtClean="0"/>
-              <a:t>16-10-2024</a:t>
+              <a:t>26-10-2024</a:t>
             </a:fld>
             <a:endParaRPr lang="en-IN"/>
           </a:p>
@@ -1736,7 +1736,7 @@
           <a:p>
             <a:fld id="{F1102B08-ED9E-409F-B95F-09CAA1DAF6E0}" type="datetimeFigureOut">
               <a:rPr lang="en-IN" smtClean="0"/>
-              <a:t>16-10-2024</a:t>
+              <a:t>26-10-2024</a:t>
             </a:fld>
             <a:endParaRPr lang="en-IN"/>
           </a:p>
@@ -1831,7 +1831,7 @@
           <a:p>
             <a:fld id="{F1102B08-ED9E-409F-B95F-09CAA1DAF6E0}" type="datetimeFigureOut">
               <a:rPr lang="en-IN" smtClean="0"/>
-              <a:t>16-10-2024</a:t>
+              <a:t>26-10-2024</a:t>
             </a:fld>
             <a:endParaRPr lang="en-IN"/>
           </a:p>
@@ -2108,7 +2108,7 @@
           <a:p>
             <a:fld id="{F1102B08-ED9E-409F-B95F-09CAA1DAF6E0}" type="datetimeFigureOut">
               <a:rPr lang="en-IN" smtClean="0"/>
-              <a:t>16-10-2024</a:t>
+              <a:t>26-10-2024</a:t>
             </a:fld>
             <a:endParaRPr lang="en-IN"/>
           </a:p>
@@ -2365,7 +2365,7 @@
           <a:p>
             <a:fld id="{F1102B08-ED9E-409F-B95F-09CAA1DAF6E0}" type="datetimeFigureOut">
               <a:rPr lang="en-IN" smtClean="0"/>
-              <a:t>16-10-2024</a:t>
+              <a:t>26-10-2024</a:t>
             </a:fld>
             <a:endParaRPr lang="en-IN"/>
           </a:p>
@@ -2578,7 +2578,7 @@
           <a:p>
             <a:fld id="{F1102B08-ED9E-409F-B95F-09CAA1DAF6E0}" type="datetimeFigureOut">
               <a:rPr lang="en-IN" smtClean="0"/>
-              <a:t>16-10-2024</a:t>
+              <a:t>26-10-2024</a:t>
             </a:fld>
             <a:endParaRPr lang="en-IN"/>
           </a:p>
@@ -2998,9 +2998,9 @@
         <p:grpSpPr>
           <a:xfrm>
             <a:off x="160868" y="182032"/>
-            <a:ext cx="5190669" cy="6630833"/>
+            <a:ext cx="5321825" cy="6493935"/>
             <a:chOff x="160868" y="182032"/>
-            <a:chExt cx="5190669" cy="6630833"/>
+            <a:chExt cx="5321825" cy="6493935"/>
           </a:xfrm>
         </p:grpSpPr>
         <p:sp>
@@ -3072,8 +3072,8 @@
           </p:nvSpPr>
           <p:spPr>
             <a:xfrm>
-              <a:off x="238127" y="257224"/>
-              <a:ext cx="5113410" cy="6555641"/>
+              <a:off x="369283" y="326308"/>
+              <a:ext cx="5113410" cy="6186309"/>
             </a:xfrm>
             <a:prstGeom prst="rect">
               <a:avLst/>
@@ -3090,126 +3090,25 @@
                 <a:defRPr/>
               </a:pPr>
               <a:r>
-                <a:rPr lang="te-IN" sz="2000" dirty="0">
-                  <a:latin typeface="Ramabhadra" panose="02000600000000000000" pitchFamily="2" charset="0"/>
-                  <a:cs typeface="Ramabhadra" panose="02000600000000000000" pitchFamily="2" charset="0"/>
-                </a:rPr>
-                <a:t>ప్రేమా పూర్ణుడా స్నేహశీలుడా </a:t>
-              </a:r>
-            </a:p>
-            <a:p>
-              <a:pPr defTabSz="439781">
-                <a:defRPr/>
-              </a:pPr>
-              <a:r>
-                <a:rPr lang="te-IN" sz="2000" dirty="0">
-                  <a:latin typeface="Ramabhadra" panose="02000600000000000000" pitchFamily="2" charset="0"/>
-                  <a:cs typeface="Ramabhadra" panose="02000600000000000000" pitchFamily="2" charset="0"/>
-                </a:rPr>
-                <a:t>విశ్వనాధుడా విజయ వీరుడా </a:t>
-              </a:r>
-            </a:p>
-            <a:p>
-              <a:pPr defTabSz="439781">
-                <a:defRPr/>
-              </a:pPr>
-              <a:r>
-                <a:rPr lang="te-IN" sz="2000" dirty="0">
-                  <a:latin typeface="Ramabhadra" panose="02000600000000000000" pitchFamily="2" charset="0"/>
-                  <a:cs typeface="Ramabhadra" panose="02000600000000000000" pitchFamily="2" charset="0"/>
-                </a:rPr>
-                <a:t>ఆపత్కాల మందున సర్వ లోకమందున్న </a:t>
-              </a:r>
-            </a:p>
-            <a:p>
-              <a:pPr defTabSz="439781">
-                <a:defRPr/>
-              </a:pPr>
-              <a:r>
-                <a:rPr lang="te-IN" sz="2000" dirty="0">
-                  <a:latin typeface="Ramabhadra" panose="02000600000000000000" pitchFamily="2" charset="0"/>
-                  <a:cs typeface="Ramabhadra" panose="02000600000000000000" pitchFamily="2" charset="0"/>
-                </a:rPr>
-                <a:t>దీన జనాలి దీపముగా వెలుగుచున్నవాడా  ..</a:t>
-              </a:r>
-            </a:p>
-            <a:p>
-              <a:pPr defTabSz="439781">
-                <a:defRPr/>
-              </a:pPr>
-              <a:r>
-                <a:rPr lang="te-IN" sz="2000" dirty="0">
-                  <a:latin typeface="Ramabhadra" panose="02000600000000000000" pitchFamily="2" charset="0"/>
-                  <a:cs typeface="Ramabhadra" panose="02000600000000000000" pitchFamily="2" charset="0"/>
-                </a:rPr>
-                <a:t>ఆరాధింతు నిన్నే లోక రక్షకుడా </a:t>
-              </a:r>
-            </a:p>
-            <a:p>
-              <a:pPr defTabSz="439781">
-                <a:defRPr/>
-              </a:pPr>
-              <a:r>
-                <a:rPr lang="te-IN" sz="2000" dirty="0">
-                  <a:latin typeface="Ramabhadra" panose="02000600000000000000" pitchFamily="2" charset="0"/>
-                  <a:cs typeface="Ramabhadra" panose="02000600000000000000" pitchFamily="2" charset="0"/>
-                </a:rPr>
-                <a:t>ఆనందింతు నీలో జీవితాంతము (2)</a:t>
-              </a:r>
-            </a:p>
-            <a:p>
-              <a:pPr defTabSz="439781">
-                <a:defRPr/>
-              </a:pPr>
-              <a:r>
-                <a:rPr lang="te-IN" sz="2000" dirty="0">
-                  <a:latin typeface="Ramabhadra" panose="02000600000000000000" pitchFamily="2" charset="0"/>
-                  <a:cs typeface="Ramabhadra" panose="02000600000000000000" pitchFamily="2" charset="0"/>
-                </a:rPr>
-                <a:t>నీ కృప ఎంత ఉన్నతమో వర్ణించలేను స్వామి </a:t>
-              </a:r>
-            </a:p>
-            <a:p>
-              <a:pPr defTabSz="439781">
-                <a:defRPr/>
-              </a:pPr>
-              <a:r>
-                <a:rPr lang="te-IN" sz="2000" dirty="0">
-                  <a:latin typeface="Ramabhadra" panose="02000600000000000000" pitchFamily="2" charset="0"/>
-                  <a:cs typeface="Ramabhadra" panose="02000600000000000000" pitchFamily="2" charset="0"/>
-                </a:rPr>
-                <a:t>నీ కృప యందు తుది వరకు నడిపించు యేసయ్యా (2)</a:t>
-              </a:r>
-            </a:p>
-            <a:p>
-              <a:pPr defTabSz="439781">
-                <a:defRPr/>
-              </a:pPr>
-              <a:r>
-                <a:rPr lang="te-IN" sz="2000" dirty="0">
-                  <a:latin typeface="Ramabhadra" panose="02000600000000000000" pitchFamily="2" charset="0"/>
-                  <a:cs typeface="Ramabhadra" panose="02000600000000000000" pitchFamily="2" charset="0"/>
-                </a:rPr>
-                <a:t>నా తోడు నీవుంటే అంతే చాలయ్యా </a:t>
-              </a:r>
-            </a:p>
-            <a:p>
-              <a:pPr defTabSz="439781">
-                <a:defRPr/>
-              </a:pPr>
-              <a:r>
-                <a:rPr lang="te-IN" sz="2000" dirty="0">
-                  <a:latin typeface="Ramabhadra" panose="02000600000000000000" pitchFamily="2" charset="0"/>
-                  <a:cs typeface="Ramabhadra" panose="02000600000000000000" pitchFamily="2" charset="0"/>
-                </a:rPr>
-                <a:t>నా ముందు నీవుంటే భయమే లేదయ్యా (2) </a:t>
-              </a:r>
-            </a:p>
-            <a:p>
-              <a:pPr defTabSz="439781">
-                <a:defRPr/>
-              </a:pPr>
-              <a:endParaRPr lang="te-IN" sz="2000" dirty="0">
+                <a:rPr lang="te-IN" sz="2200" dirty="0">
+                  <a:latin typeface="Ramabhadra" panose="02000600000000000000" pitchFamily="2" charset="0"/>
+                  <a:cs typeface="Ramabhadra" panose="02000600000000000000" pitchFamily="2" charset="0"/>
+                </a:rPr>
+                <a:t>స్తుతించి పాడెదం – స్తుతుల స్తోత్రార్హుడా</a:t>
+              </a:r>
+            </a:p>
+            <a:p>
+              <a:pPr defTabSz="439781">
+                <a:defRPr/>
+              </a:pPr>
+              <a:r>
+                <a:rPr lang="te-IN" sz="2200" dirty="0">
+                  <a:latin typeface="Ramabhadra" panose="02000600000000000000" pitchFamily="2" charset="0"/>
+                  <a:cs typeface="Ramabhadra" panose="02000600000000000000" pitchFamily="2" charset="0"/>
+                </a:rPr>
+                <a:t>ఉత్సాహించి పాడెదం –</a:t>
+              </a:r>
+              <a:endParaRPr lang="en-IN" sz="2200" dirty="0">
                 <a:latin typeface="Ramabhadra" panose="02000600000000000000" pitchFamily="2" charset="0"/>
                 <a:cs typeface="Ramabhadra" panose="02000600000000000000" pitchFamily="2" charset="0"/>
               </a:endParaRPr>
@@ -3219,148 +3118,72 @@
                 <a:defRPr/>
               </a:pPr>
               <a:r>
-                <a:rPr lang="en-IN" sz="2000" dirty="0">
-                  <a:latin typeface="Ramabhadra" panose="02000600000000000000" pitchFamily="2" charset="0"/>
-                  <a:cs typeface="Ramabhadra" panose="02000600000000000000" pitchFamily="2" charset="0"/>
-                </a:rPr>
-                <a:t>1. </a:t>
-              </a:r>
-              <a:r>
-                <a:rPr lang="te-IN" sz="2000" dirty="0">
-                  <a:latin typeface="Ramabhadra" panose="02000600000000000000" pitchFamily="2" charset="0"/>
-                  <a:cs typeface="Ramabhadra" panose="02000600000000000000" pitchFamily="2" charset="0"/>
-                </a:rPr>
-                <a:t>పూర్ణమై సంపూర్ణమైన నీ దివ్య చిత్తమే </a:t>
-              </a:r>
-            </a:p>
-            <a:p>
-              <a:pPr defTabSz="439781">
-                <a:defRPr/>
-              </a:pPr>
-              <a:r>
-                <a:rPr lang="te-IN" sz="2000" dirty="0">
-                  <a:latin typeface="Ramabhadra" panose="02000600000000000000" pitchFamily="2" charset="0"/>
-                  <a:cs typeface="Ramabhadra" panose="02000600000000000000" pitchFamily="2" charset="0"/>
-                </a:rPr>
-                <a:t>నీవు నను నడిపే నూతనమైన జీవ మార్గము (2) </a:t>
-              </a:r>
-            </a:p>
-            <a:p>
-              <a:pPr defTabSz="439781">
-                <a:defRPr/>
-              </a:pPr>
-              <a:r>
-                <a:rPr lang="te-IN" sz="2000" dirty="0">
-                  <a:latin typeface="Ramabhadra" panose="02000600000000000000" pitchFamily="2" charset="0"/>
-                  <a:cs typeface="Ramabhadra" panose="02000600000000000000" pitchFamily="2" charset="0"/>
-                </a:rPr>
-                <a:t>ఇహ మందు పరమందు ఆశ్రయమైన వాడవు </a:t>
-              </a:r>
-            </a:p>
-            <a:p>
-              <a:pPr defTabSz="439781">
-                <a:defRPr/>
-              </a:pPr>
-              <a:r>
-                <a:rPr lang="te-IN" sz="2000" dirty="0">
-                  <a:latin typeface="Ramabhadra" panose="02000600000000000000" pitchFamily="2" charset="0"/>
-                  <a:cs typeface="Ramabhadra" panose="02000600000000000000" pitchFamily="2" charset="0"/>
-                </a:rPr>
-                <a:t>ఇన్నాళ్లు క్షణమైనా నన్ను మరువని యేసయ్యా (2)</a:t>
-              </a:r>
-              <a:endParaRPr lang="en-IN" sz="2000" dirty="0">
+                <a:rPr lang="te-IN" sz="2200" dirty="0">
+                  <a:latin typeface="Ramabhadra" panose="02000600000000000000" pitchFamily="2" charset="0"/>
+                  <a:cs typeface="Ramabhadra" panose="02000600000000000000" pitchFamily="2" charset="0"/>
+                </a:rPr>
+                <a:t>ఉదయ సాయంత్రముల్</a:t>
+              </a:r>
+            </a:p>
+            <a:p>
+              <a:pPr defTabSz="439781">
+                <a:defRPr/>
+              </a:pPr>
+              <a:r>
+                <a:rPr lang="te-IN" sz="2200" dirty="0">
+                  <a:latin typeface="Ramabhadra" panose="02000600000000000000" pitchFamily="2" charset="0"/>
+                  <a:cs typeface="Ramabhadra" panose="02000600000000000000" pitchFamily="2" charset="0"/>
+                </a:rPr>
+                <a:t>స్తుతుల సింహాసనం మీద</a:t>
+              </a:r>
+              <a:r>
+                <a:rPr lang="en-IN" sz="2200" dirty="0">
+                  <a:latin typeface="Ramabhadra" panose="02000600000000000000" pitchFamily="2" charset="0"/>
+                  <a:cs typeface="Ramabhadra" panose="02000600000000000000" pitchFamily="2" charset="0"/>
+                </a:rPr>
+                <a:t> </a:t>
+              </a:r>
+              <a:r>
+                <a:rPr lang="te-IN" sz="2200" dirty="0">
+                  <a:latin typeface="Ramabhadra" panose="02000600000000000000" pitchFamily="2" charset="0"/>
+                  <a:cs typeface="Ramabhadra" panose="02000600000000000000" pitchFamily="2" charset="0"/>
+                </a:rPr>
+                <a:t>ఆసీనుడా</a:t>
+              </a:r>
+            </a:p>
+            <a:p>
+              <a:pPr defTabSz="439781">
+                <a:defRPr/>
+              </a:pPr>
+              <a:r>
+                <a:rPr lang="te-IN" sz="2200" dirty="0">
+                  <a:latin typeface="Ramabhadra" panose="02000600000000000000" pitchFamily="2" charset="0"/>
+                  <a:cs typeface="Ramabhadra" panose="02000600000000000000" pitchFamily="2" charset="0"/>
+                </a:rPr>
+                <a:t>మా స్తుతి ఆరాధన నీకే చెల్లింతుము (2)</a:t>
+              </a:r>
+            </a:p>
+            <a:p>
+              <a:pPr defTabSz="439781">
+                <a:defRPr/>
+              </a:pPr>
+              <a:endParaRPr lang="te-IN" sz="2200" dirty="0">
                 <a:latin typeface="Ramabhadra" panose="02000600000000000000" pitchFamily="2" charset="0"/>
                 <a:cs typeface="Ramabhadra" panose="02000600000000000000" pitchFamily="2" charset="0"/>
               </a:endParaRPr>
             </a:p>
             <a:p>
-              <a:pPr algn="ctr" defTabSz="439781">
-                <a:defRPr/>
-              </a:pPr>
-              <a:r>
-                <a:rPr lang="en-IN" sz="2000" dirty="0">
-                  <a:latin typeface="Ramabhadra" panose="02000600000000000000" pitchFamily="2" charset="0"/>
-                  <a:cs typeface="Ramabhadra" panose="02000600000000000000" pitchFamily="2" charset="0"/>
-                </a:rPr>
-                <a:t>                              		|| </a:t>
-              </a:r>
-              <a:r>
-                <a:rPr lang="te-IN" sz="2000" dirty="0">
-                  <a:latin typeface="Ramabhadra" panose="02000600000000000000" pitchFamily="2" charset="0"/>
-                  <a:cs typeface="Ramabhadra" panose="02000600000000000000" pitchFamily="2" charset="0"/>
-                </a:rPr>
-                <a:t>నా తోడు</a:t>
-              </a:r>
-              <a:r>
-                <a:rPr lang="en-IN" sz="2000" dirty="0">
-                  <a:latin typeface="Ramabhadra" panose="02000600000000000000" pitchFamily="2" charset="0"/>
-                  <a:cs typeface="Ramabhadra" panose="02000600000000000000" pitchFamily="2" charset="0"/>
-                </a:rPr>
-                <a:t> ||</a:t>
-              </a:r>
-              <a:r>
-                <a:rPr lang="te-IN" sz="2000" dirty="0">
-                  <a:latin typeface="Ramabhadra" panose="02000600000000000000" pitchFamily="2" charset="0"/>
-                  <a:cs typeface="Ramabhadra" panose="02000600000000000000" pitchFamily="2" charset="0"/>
-                </a:rPr>
-                <a:t>                         </a:t>
-              </a:r>
-            </a:p>
-            <a:p>
-              <a:pPr defTabSz="439781">
-                <a:defRPr/>
-              </a:pPr>
-              <a:r>
-                <a:rPr lang="en-IN" sz="2000" dirty="0">
-                  <a:latin typeface="Ramabhadra" panose="02000600000000000000" pitchFamily="2" charset="0"/>
-                  <a:cs typeface="Ramabhadra" panose="02000600000000000000" pitchFamily="2" charset="0"/>
-                </a:rPr>
-                <a:t>2. </a:t>
-              </a:r>
-              <a:r>
-                <a:rPr lang="te-IN" sz="2000" dirty="0">
-                  <a:latin typeface="Ramabhadra" panose="02000600000000000000" pitchFamily="2" charset="0"/>
-                  <a:cs typeface="Ramabhadra" panose="02000600000000000000" pitchFamily="2" charset="0"/>
-                </a:rPr>
-                <a:t>భాగ్యమే సౌభాగ్యమే నీ దివ్య సన్నిధి </a:t>
-              </a:r>
-            </a:p>
-            <a:p>
-              <a:pPr defTabSz="439781">
-                <a:defRPr/>
-              </a:pPr>
-              <a:r>
-                <a:rPr lang="te-IN" sz="2000" dirty="0">
-                  <a:latin typeface="Ramabhadra" panose="02000600000000000000" pitchFamily="2" charset="0"/>
-                  <a:cs typeface="Ramabhadra" panose="02000600000000000000" pitchFamily="2" charset="0"/>
-                </a:rPr>
-                <a:t>బహు విస్తారమైన నీ కృప నాపై చూపితివే (2) </a:t>
-              </a:r>
-            </a:p>
-            <a:p>
-              <a:pPr defTabSz="439781">
-                <a:defRPr/>
-              </a:pPr>
-              <a:r>
-                <a:rPr lang="te-IN" sz="2000" dirty="0">
-                  <a:latin typeface="Ramabhadra" panose="02000600000000000000" pitchFamily="2" charset="0"/>
-                  <a:cs typeface="Ramabhadra" panose="02000600000000000000" pitchFamily="2" charset="0"/>
-                </a:rPr>
-                <a:t>బలమైన ఘనమైన నీ నామమందు హర్షించి </a:t>
-              </a:r>
-            </a:p>
-            <a:p>
-              <a:pPr defTabSz="439781">
-                <a:defRPr/>
-              </a:pPr>
-              <a:r>
-                <a:rPr lang="te-IN" sz="2000" dirty="0">
-                  <a:latin typeface="Ramabhadra" panose="02000600000000000000" pitchFamily="2" charset="0"/>
-                  <a:cs typeface="Ramabhadra" panose="02000600000000000000" pitchFamily="2" charset="0"/>
-                </a:rPr>
-                <a:t>భజయించి కీర్తించి ఘనపరతు నిన్ను యేసయ్యా (2)</a:t>
-              </a:r>
-              <a:endParaRPr lang="en-IN" sz="2000" dirty="0">
+              <a:pPr defTabSz="439781">
+                <a:defRPr/>
+              </a:pPr>
+              <a:r>
+                <a:rPr lang="te-IN" sz="2200" dirty="0">
+                  <a:latin typeface="Ramabhadra" panose="02000600000000000000" pitchFamily="2" charset="0"/>
+                  <a:cs typeface="Ramabhadra" panose="02000600000000000000" pitchFamily="2" charset="0"/>
+                </a:rPr>
+                <a:t>గతకాలమంతా నీవు –</a:t>
+              </a:r>
+              <a:endParaRPr lang="en-IN" sz="2200" dirty="0">
                 <a:latin typeface="Ramabhadra" panose="02000600000000000000" pitchFamily="2" charset="0"/>
                 <a:cs typeface="Ramabhadra" panose="02000600000000000000" pitchFamily="2" charset="0"/>
               </a:endParaRPr>
@@ -3370,30 +3193,129 @@
                 <a:defRPr/>
               </a:pPr>
               <a:r>
-                <a:rPr lang="en-IN" sz="2000" dirty="0">
-                  <a:latin typeface="Ramabhadra" panose="02000600000000000000" pitchFamily="2" charset="0"/>
-                  <a:cs typeface="Ramabhadra" panose="02000600000000000000" pitchFamily="2" charset="0"/>
-                </a:rPr>
-                <a:t>							|| </a:t>
-              </a:r>
-              <a:r>
-                <a:rPr lang="te-IN" sz="2000" dirty="0">
-                  <a:latin typeface="Ramabhadra" panose="02000600000000000000" pitchFamily="2" charset="0"/>
-                  <a:cs typeface="Ramabhadra" panose="02000600000000000000" pitchFamily="2" charset="0"/>
-                </a:rPr>
-                <a:t>నా తోడు</a:t>
-              </a:r>
-              <a:r>
-                <a:rPr lang="en-IN" sz="2000" dirty="0">
-                  <a:latin typeface="Ramabhadra" panose="02000600000000000000" pitchFamily="2" charset="0"/>
-                  <a:cs typeface="Ramabhadra" panose="02000600000000000000" pitchFamily="2" charset="0"/>
-                </a:rPr>
-                <a:t> ||</a:t>
-              </a:r>
-              <a:endParaRPr lang="te-IN" sz="2000" dirty="0">
+                <a:rPr lang="te-IN" sz="2200" dirty="0">
+                  <a:latin typeface="Ramabhadra" panose="02000600000000000000" pitchFamily="2" charset="0"/>
+                  <a:cs typeface="Ramabhadra" panose="02000600000000000000" pitchFamily="2" charset="0"/>
+                </a:rPr>
+                <a:t>మము కాచి కాపాడావు</a:t>
+              </a:r>
+            </a:p>
+            <a:p>
+              <a:pPr defTabSz="439781">
+                <a:defRPr/>
+              </a:pPr>
+              <a:r>
+                <a:rPr lang="te-IN" sz="2200" dirty="0">
+                  <a:latin typeface="Ramabhadra" panose="02000600000000000000" pitchFamily="2" charset="0"/>
+                  <a:cs typeface="Ramabhadra" panose="02000600000000000000" pitchFamily="2" charset="0"/>
+                </a:rPr>
+                <a:t>వ్యధలన్ని తీసావు (2)</a:t>
+              </a:r>
+            </a:p>
+            <a:p>
+              <a:pPr defTabSz="439781">
+                <a:defRPr/>
+              </a:pPr>
+              <a:r>
+                <a:rPr lang="te-IN" sz="2200" dirty="0">
+                  <a:latin typeface="Ramabhadra" panose="02000600000000000000" pitchFamily="2" charset="0"/>
+                  <a:cs typeface="Ramabhadra" panose="02000600000000000000" pitchFamily="2" charset="0"/>
+                </a:rPr>
+                <a:t>గతిలేని మాపై నీవు</a:t>
+              </a:r>
+            </a:p>
+            <a:p>
+              <a:pPr defTabSz="439781">
+                <a:defRPr/>
+              </a:pPr>
+              <a:r>
+                <a:rPr lang="te-IN" sz="2200" dirty="0">
+                  <a:latin typeface="Ramabhadra" panose="02000600000000000000" pitchFamily="2" charset="0"/>
+                  <a:cs typeface="Ramabhadra" panose="02000600000000000000" pitchFamily="2" charset="0"/>
+                </a:rPr>
+                <a:t>మితిలేని ప్రేమ చూపి (2)</a:t>
+              </a:r>
+            </a:p>
+            <a:p>
+              <a:pPr defTabSz="439781">
+                <a:defRPr/>
+              </a:pPr>
+              <a:r>
+                <a:rPr lang="te-IN" sz="2200" dirty="0">
+                  <a:latin typeface="Ramabhadra" panose="02000600000000000000" pitchFamily="2" charset="0"/>
+                  <a:cs typeface="Ramabhadra" panose="02000600000000000000" pitchFamily="2" charset="0"/>
+                </a:rPr>
+                <a:t>శత సంఖ్యగా మమ్ము దీవించావు</a:t>
+              </a:r>
+            </a:p>
+            <a:p>
+              <a:pPr defTabSz="439781">
+                <a:defRPr/>
+              </a:pPr>
+              <a:endParaRPr lang="te-IN" sz="2200" dirty="0">
                 <a:latin typeface="Ramabhadra" panose="02000600000000000000" pitchFamily="2" charset="0"/>
                 <a:cs typeface="Ramabhadra" panose="02000600000000000000" pitchFamily="2" charset="0"/>
               </a:endParaRPr>
+            </a:p>
+            <a:p>
+              <a:pPr defTabSz="439781">
+                <a:defRPr/>
+              </a:pPr>
+              <a:r>
+                <a:rPr lang="te-IN" sz="2200" dirty="0">
+                  <a:latin typeface="Ramabhadra" panose="02000600000000000000" pitchFamily="2" charset="0"/>
+                  <a:cs typeface="Ramabhadra" panose="02000600000000000000" pitchFamily="2" charset="0"/>
+                </a:rPr>
+                <a:t>కరుణా కటాక్షములను కిరీటములుగాను</a:t>
+              </a:r>
+            </a:p>
+            <a:p>
+              <a:pPr defTabSz="439781">
+                <a:defRPr/>
+              </a:pPr>
+              <a:r>
+                <a:rPr lang="te-IN" sz="2200" dirty="0">
+                  <a:latin typeface="Ramabhadra" panose="02000600000000000000" pitchFamily="2" charset="0"/>
+                  <a:cs typeface="Ramabhadra" panose="02000600000000000000" pitchFamily="2" charset="0"/>
+                </a:rPr>
+                <a:t>ఉంచావు మా తలపై (2)</a:t>
+              </a:r>
+            </a:p>
+            <a:p>
+              <a:pPr defTabSz="439781">
+                <a:defRPr/>
+              </a:pPr>
+              <a:r>
+                <a:rPr lang="te-IN" sz="2200" dirty="0">
+                  <a:latin typeface="Ramabhadra" panose="02000600000000000000" pitchFamily="2" charset="0"/>
+                  <a:cs typeface="Ramabhadra" panose="02000600000000000000" pitchFamily="2" charset="0"/>
+                </a:rPr>
+                <a:t>పక్షి రాజు యవ్వనమువలె</a:t>
+              </a:r>
+            </a:p>
+            <a:p>
+              <a:pPr defTabSz="439781">
+                <a:defRPr/>
+              </a:pPr>
+              <a:r>
+                <a:rPr lang="te-IN" sz="2200" dirty="0">
+                  <a:latin typeface="Ramabhadra" panose="02000600000000000000" pitchFamily="2" charset="0"/>
+                  <a:cs typeface="Ramabhadra" panose="02000600000000000000" pitchFamily="2" charset="0"/>
+                </a:rPr>
+                <a:t>మా యవ్వనమునంతా (2)</a:t>
+              </a:r>
+            </a:p>
+            <a:p>
+              <a:pPr defTabSz="439781">
+                <a:defRPr/>
+              </a:pPr>
+              <a:r>
+                <a:rPr lang="te-IN" sz="2200" dirty="0">
+                  <a:latin typeface="Ramabhadra" panose="02000600000000000000" pitchFamily="2" charset="0"/>
+                  <a:cs typeface="Ramabhadra" panose="02000600000000000000" pitchFamily="2" charset="0"/>
+                </a:rPr>
+                <a:t>ఉత్తేజపరిచి తృప్తిని ఇచ్చావు</a:t>
+              </a:r>
             </a:p>
           </p:txBody>
         </p:sp>
@@ -3475,9 +3397,9 @@
         <p:grpSpPr>
           <a:xfrm>
             <a:off x="5104338" y="182031"/>
-            <a:ext cx="4724399" cy="6493935"/>
+            <a:ext cx="4773991" cy="6493935"/>
             <a:chOff x="160868" y="182032"/>
-            <a:chExt cx="4724399" cy="6493935"/>
+            <a:chExt cx="4773991" cy="6493935"/>
           </a:xfrm>
         </p:grpSpPr>
         <p:sp>
@@ -3549,8 +3471,8 @@
           </p:nvSpPr>
           <p:spPr>
             <a:xfrm>
-              <a:off x="343961" y="770800"/>
-              <a:ext cx="4541306" cy="5047536"/>
+              <a:off x="393553" y="732056"/>
+              <a:ext cx="4541306" cy="5847755"/>
             </a:xfrm>
             <a:prstGeom prst="rect">
               <a:avLst/>
@@ -3567,66 +3489,54 @@
                 <a:defRPr/>
               </a:pPr>
               <a:r>
-                <a:rPr lang="te-IN" sz="2300" dirty="0">
-                  <a:latin typeface="Ramabhadra" panose="02000600000000000000" pitchFamily="2" charset="0"/>
-                  <a:cs typeface="Ramabhadra" panose="02000600000000000000" pitchFamily="2" charset="0"/>
-                </a:rPr>
-                <a:t>స్తోత్రము స్తుతి స్తోత్రము</a:t>
-              </a:r>
-            </a:p>
-            <a:p>
-              <a:pPr defTabSz="439781">
-                <a:defRPr/>
-              </a:pPr>
-              <a:r>
-                <a:rPr lang="te-IN" sz="2300" dirty="0">
-                  <a:latin typeface="Ramabhadra" panose="02000600000000000000" pitchFamily="2" charset="0"/>
-                  <a:cs typeface="Ramabhadra" panose="02000600000000000000" pitchFamily="2" charset="0"/>
-                </a:rPr>
-                <a:t>వేలాది వందనాలు</a:t>
-              </a:r>
-            </a:p>
-            <a:p>
-              <a:pPr defTabSz="439781">
-                <a:defRPr/>
-              </a:pPr>
-              <a:r>
-                <a:rPr lang="te-IN" sz="2300" dirty="0">
-                  <a:latin typeface="Ramabhadra" panose="02000600000000000000" pitchFamily="2" charset="0"/>
-                  <a:cs typeface="Ramabhadra" panose="02000600000000000000" pitchFamily="2" charset="0"/>
-                </a:rPr>
-                <a:t>కలుగును గాక నీకే మహిమ</a:t>
-              </a:r>
-            </a:p>
-            <a:p>
-              <a:pPr defTabSz="439781">
-                <a:defRPr/>
-              </a:pPr>
-              <a:r>
-                <a:rPr lang="te-IN" sz="2300" dirty="0">
-                  <a:latin typeface="Ramabhadra" panose="02000600000000000000" pitchFamily="2" charset="0"/>
-                  <a:cs typeface="Ramabhadra" panose="02000600000000000000" pitchFamily="2" charset="0"/>
-                </a:rPr>
-                <a:t>ఎల్లప్పుడూ స్తుతి స్తోత్రము</a:t>
-              </a:r>
-            </a:p>
-            <a:p>
-              <a:pPr defTabSz="439781">
-                <a:defRPr/>
-              </a:pPr>
-              <a:r>
-                <a:rPr lang="te-IN" sz="2300" dirty="0">
-                  <a:latin typeface="Ramabhadra" panose="02000600000000000000" pitchFamily="2" charset="0"/>
-                  <a:cs typeface="Ramabhadra" panose="02000600000000000000" pitchFamily="2" charset="0"/>
-                </a:rPr>
-                <a:t>యేసయ్య యేసయ్య యేసయ్య (4)</a:t>
-              </a:r>
-            </a:p>
-            <a:p>
-              <a:pPr defTabSz="439781">
-                <a:defRPr/>
-              </a:pPr>
-              <a:endParaRPr lang="te-IN" sz="2300" dirty="0">
+                <a:rPr lang="te-IN" sz="2200" dirty="0">
+                  <a:latin typeface="Ramabhadra" panose="02000600000000000000" pitchFamily="2" charset="0"/>
+                  <a:cs typeface="Ramabhadra" panose="02000600000000000000" pitchFamily="2" charset="0"/>
+                </a:rPr>
+                <a:t>ఆనందం నీలోనే – ఆధారం నీవేగా</a:t>
+              </a:r>
+            </a:p>
+            <a:p>
+              <a:pPr defTabSz="439781">
+                <a:defRPr/>
+              </a:pPr>
+              <a:r>
+                <a:rPr lang="te-IN" sz="2200" dirty="0">
+                  <a:latin typeface="Ramabhadra" panose="02000600000000000000" pitchFamily="2" charset="0"/>
+                  <a:cs typeface="Ramabhadra" panose="02000600000000000000" pitchFamily="2" charset="0"/>
+                </a:rPr>
+                <a:t>ఆశ్రయం నీలోనే – నా యేసయ్యా – స్తోత్రార్హుడు</a:t>
+              </a:r>
+            </a:p>
+            <a:p>
+              <a:pPr defTabSz="439781">
+                <a:defRPr/>
+              </a:pPr>
+              <a:r>
+                <a:rPr lang="te-IN" sz="2200" dirty="0">
+                  <a:latin typeface="Ramabhadra" panose="02000600000000000000" pitchFamily="2" charset="0"/>
+                  <a:cs typeface="Ramabhadra" panose="02000600000000000000" pitchFamily="2" charset="0"/>
+                </a:rPr>
+                <a:t>అర్హతేలేని నన్ను – ప్రేమించినావు</a:t>
+              </a:r>
+            </a:p>
+            <a:p>
+              <a:pPr defTabSz="439781">
+                <a:defRPr/>
+              </a:pPr>
+              <a:r>
+                <a:rPr lang="te-IN" sz="2200" dirty="0">
+                  <a:latin typeface="Ramabhadra" panose="02000600000000000000" pitchFamily="2" charset="0"/>
+                  <a:cs typeface="Ramabhadra" panose="02000600000000000000" pitchFamily="2" charset="0"/>
+                </a:rPr>
+                <a:t>జీవింతు ఇలలో – నీ కోసమే – సాక్ష్యార్థమై   </a:t>
+              </a:r>
+            </a:p>
+            <a:p>
+              <a:pPr defTabSz="439781">
+                <a:defRPr/>
+              </a:pPr>
+              <a:endParaRPr lang="te-IN" sz="2200" dirty="0">
                 <a:latin typeface="Ramabhadra" panose="02000600000000000000" pitchFamily="2" charset="0"/>
                 <a:cs typeface="Ramabhadra" panose="02000600000000000000" pitchFamily="2" charset="0"/>
               </a:endParaRPr>
@@ -3636,32 +3546,66 @@
                 <a:defRPr/>
               </a:pPr>
               <a:r>
-                <a:rPr lang="en-IN" sz="2300" dirty="0">
-                  <a:latin typeface="Ramabhadra" panose="02000600000000000000" pitchFamily="2" charset="0"/>
-                  <a:cs typeface="Ramabhadra" panose="02000600000000000000" pitchFamily="2" charset="0"/>
-                </a:rPr>
-                <a:t>1. </a:t>
-              </a:r>
-              <a:r>
-                <a:rPr lang="te-IN" sz="2300" dirty="0">
-                  <a:latin typeface="Ramabhadra" panose="02000600000000000000" pitchFamily="2" charset="0"/>
-                  <a:cs typeface="Ramabhadra" panose="02000600000000000000" pitchFamily="2" charset="0"/>
-                </a:rPr>
-                <a:t>శూన్యము నుండి సమస్తము కలుగజేసెను</a:t>
-              </a:r>
-            </a:p>
-            <a:p>
-              <a:pPr defTabSz="439781">
-                <a:defRPr/>
-              </a:pPr>
-              <a:r>
-                <a:rPr lang="te-IN" sz="2300" dirty="0">
-                  <a:latin typeface="Ramabhadra" panose="02000600000000000000" pitchFamily="2" charset="0"/>
-                  <a:cs typeface="Ramabhadra" panose="02000600000000000000" pitchFamily="2" charset="0"/>
-                </a:rPr>
-                <a:t>నిరాకారమైన నా జీవితమునకు</a:t>
-              </a:r>
-              <a:endParaRPr lang="en-IN" sz="2300" dirty="0">
+                <a:rPr lang="te-IN" sz="2200" dirty="0">
+                  <a:latin typeface="Ramabhadra" panose="02000600000000000000" pitchFamily="2" charset="0"/>
+                  <a:cs typeface="Ramabhadra" panose="02000600000000000000" pitchFamily="2" charset="0"/>
+                </a:rPr>
+                <a:t>పదే పదే నిన్నే చేరగా</a:t>
+              </a:r>
+            </a:p>
+            <a:p>
+              <a:pPr defTabSz="439781">
+                <a:defRPr/>
+              </a:pPr>
+              <a:r>
+                <a:rPr lang="te-IN" sz="2200" dirty="0">
+                  <a:latin typeface="Ramabhadra" panose="02000600000000000000" pitchFamily="2" charset="0"/>
+                  <a:cs typeface="Ramabhadra" panose="02000600000000000000" pitchFamily="2" charset="0"/>
+                </a:rPr>
+                <a:t>ప్రతిక్షణం నీవే ధ్యాసగా (2)</a:t>
+              </a:r>
+            </a:p>
+            <a:p>
+              <a:pPr defTabSz="439781">
+                <a:defRPr/>
+              </a:pPr>
+              <a:r>
+                <a:rPr lang="te-IN" sz="2200" dirty="0">
+                  <a:latin typeface="Ramabhadra" panose="02000600000000000000" pitchFamily="2" charset="0"/>
+                  <a:cs typeface="Ramabhadra" panose="02000600000000000000" pitchFamily="2" charset="0"/>
+                </a:rPr>
+                <a:t>కలవరాల కోటలో – కన్నీటి బాటలో (2)</a:t>
+              </a:r>
+            </a:p>
+            <a:p>
+              <a:pPr defTabSz="439781">
+                <a:defRPr/>
+              </a:pPr>
+              <a:r>
+                <a:rPr lang="te-IN" sz="2200" dirty="0">
+                  <a:latin typeface="Ramabhadra" panose="02000600000000000000" pitchFamily="2" charset="0"/>
+                  <a:cs typeface="Ramabhadra" panose="02000600000000000000" pitchFamily="2" charset="0"/>
+                </a:rPr>
+                <a:t>కాపాడే కవచంగా – నన్ను ఆవరించిన</a:t>
+              </a:r>
+            </a:p>
+            <a:p>
+              <a:pPr defTabSz="439781">
+                <a:defRPr/>
+              </a:pPr>
+              <a:r>
+                <a:rPr lang="te-IN" sz="2200" dirty="0">
+                  <a:latin typeface="Ramabhadra" panose="02000600000000000000" pitchFamily="2" charset="0"/>
+                  <a:cs typeface="Ramabhadra" panose="02000600000000000000" pitchFamily="2" charset="0"/>
+                </a:rPr>
+                <a:t>దివ్యక్షేత్రమా – స్తోత్రగీతమా   </a:t>
+              </a:r>
+            </a:p>
+            <a:p>
+              <a:pPr defTabSz="439781">
+                <a:defRPr/>
+              </a:pPr>
+              <a:endParaRPr lang="te-IN" sz="2200" dirty="0">
                 <a:latin typeface="Ramabhadra" panose="02000600000000000000" pitchFamily="2" charset="0"/>
                 <a:cs typeface="Ramabhadra" panose="02000600000000000000" pitchFamily="2" charset="0"/>
               </a:endParaRPr>
@@ -3671,103 +3615,59 @@
                 <a:defRPr/>
               </a:pPr>
               <a:r>
-                <a:rPr lang="te-IN" sz="2300" dirty="0">
-                  <a:latin typeface="Ramabhadra" panose="02000600000000000000" pitchFamily="2" charset="0"/>
-                  <a:cs typeface="Ramabhadra" panose="02000600000000000000" pitchFamily="2" charset="0"/>
-                </a:rPr>
-                <a:t>రూపము నిచ్చెను</a:t>
-              </a:r>
-            </a:p>
-            <a:p>
-              <a:pPr defTabSz="439781">
-                <a:defRPr/>
-              </a:pPr>
-              <a:r>
-                <a:rPr lang="te-IN" sz="2300" dirty="0">
-                  <a:latin typeface="Ramabhadra" panose="02000600000000000000" pitchFamily="2" charset="0"/>
-                  <a:cs typeface="Ramabhadra" panose="02000600000000000000" pitchFamily="2" charset="0"/>
-                </a:rPr>
-                <a:t>యేసే నా సర్వము</a:t>
-              </a:r>
-              <a:r>
-                <a:rPr lang="en-IN" sz="2300" dirty="0">
-                  <a:latin typeface="Ramabhadra" panose="02000600000000000000" pitchFamily="2" charset="0"/>
-                  <a:cs typeface="Ramabhadra" panose="02000600000000000000" pitchFamily="2" charset="0"/>
-                </a:rPr>
-                <a:t> - </a:t>
-              </a:r>
-              <a:r>
-                <a:rPr lang="te-IN" sz="2300" dirty="0">
-                  <a:latin typeface="Ramabhadra" panose="02000600000000000000" pitchFamily="2" charset="0"/>
-                  <a:cs typeface="Ramabhadra" panose="02000600000000000000" pitchFamily="2" charset="0"/>
-                </a:rPr>
-                <a:t>యేసే నా సమస్తము</a:t>
-              </a:r>
-            </a:p>
-            <a:p>
-              <a:pPr defTabSz="439781">
-                <a:defRPr/>
-              </a:pPr>
-              <a:endParaRPr lang="te-IN" sz="2300" dirty="0">
-                <a:latin typeface="Ramabhadra" panose="02000600000000000000" pitchFamily="2" charset="0"/>
-                <a:cs typeface="Ramabhadra" panose="02000600000000000000" pitchFamily="2" charset="0"/>
-              </a:endParaRPr>
-            </a:p>
-            <a:p>
-              <a:pPr defTabSz="439781">
-                <a:defRPr/>
-              </a:pPr>
-              <a:r>
-                <a:rPr lang="en-IN" sz="2300" dirty="0">
-                  <a:latin typeface="Ramabhadra" panose="02000600000000000000" pitchFamily="2" charset="0"/>
-                  <a:cs typeface="Ramabhadra" panose="02000600000000000000" pitchFamily="2" charset="0"/>
-                </a:rPr>
-                <a:t>2. </a:t>
-              </a:r>
-              <a:r>
-                <a:rPr lang="te-IN" sz="2300" dirty="0">
-                  <a:latin typeface="Ramabhadra" panose="02000600000000000000" pitchFamily="2" charset="0"/>
-                  <a:cs typeface="Ramabhadra" panose="02000600000000000000" pitchFamily="2" charset="0"/>
-                </a:rPr>
-                <a:t>పరము నుండి భూమికి దిగివచ్చిన యేసు</a:t>
-              </a:r>
-            </a:p>
-            <a:p>
-              <a:pPr defTabSz="439781">
-                <a:defRPr/>
-              </a:pPr>
-              <a:r>
-                <a:rPr lang="te-IN" sz="2300" dirty="0">
-                  <a:latin typeface="Ramabhadra" panose="02000600000000000000" pitchFamily="2" charset="0"/>
-                  <a:cs typeface="Ramabhadra" panose="02000600000000000000" pitchFamily="2" charset="0"/>
-                </a:rPr>
-                <a:t>సిలువ మరణమునొంది మార్గము తెరిచెను</a:t>
-              </a:r>
-            </a:p>
-            <a:p>
-              <a:pPr defTabSz="439781">
-                <a:defRPr/>
-              </a:pPr>
-              <a:r>
-                <a:rPr lang="te-IN" sz="2300" dirty="0">
-                  <a:latin typeface="Ramabhadra" panose="02000600000000000000" pitchFamily="2" charset="0"/>
-                  <a:cs typeface="Ramabhadra" panose="02000600000000000000" pitchFamily="2" charset="0"/>
-                </a:rPr>
-                <a:t>యేసే నా రక్షణ</a:t>
-              </a:r>
-              <a:r>
-                <a:rPr lang="en-IN" sz="2300" dirty="0">
-                  <a:latin typeface="Ramabhadra" panose="02000600000000000000" pitchFamily="2" charset="0"/>
-                  <a:cs typeface="Ramabhadra" panose="02000600000000000000" pitchFamily="2" charset="0"/>
-                </a:rPr>
-                <a:t> - </a:t>
-              </a:r>
-              <a:r>
-                <a:rPr lang="te-IN" sz="2300" dirty="0">
-                  <a:latin typeface="Ramabhadra" panose="02000600000000000000" pitchFamily="2" charset="0"/>
-                  <a:cs typeface="Ramabhadra" panose="02000600000000000000" pitchFamily="2" charset="0"/>
-                </a:rPr>
-                <a:t>యేసే నా నిరీక్షణ</a:t>
+                <a:rPr lang="te-IN" sz="2200" dirty="0">
+                  <a:latin typeface="Ramabhadra" panose="02000600000000000000" pitchFamily="2" charset="0"/>
+                  <a:cs typeface="Ramabhadra" panose="02000600000000000000" pitchFamily="2" charset="0"/>
+                </a:rPr>
+                <a:t>నిరంతరం నీవే వెలుగని</a:t>
+              </a:r>
+            </a:p>
+            <a:p>
+              <a:pPr defTabSz="439781">
+                <a:defRPr/>
+              </a:pPr>
+              <a:r>
+                <a:rPr lang="te-IN" sz="2200" dirty="0">
+                  <a:latin typeface="Ramabhadra" panose="02000600000000000000" pitchFamily="2" charset="0"/>
+                  <a:cs typeface="Ramabhadra" panose="02000600000000000000" pitchFamily="2" charset="0"/>
+                </a:rPr>
+                <a:t>నిత్యమైన స్వాస్థ్యం నీదని (2)</a:t>
+              </a:r>
+            </a:p>
+            <a:p>
+              <a:pPr defTabSz="439781">
+                <a:defRPr/>
+              </a:pPr>
+              <a:r>
+                <a:rPr lang="te-IN" sz="2200" dirty="0">
+                  <a:latin typeface="Ramabhadra" panose="02000600000000000000" pitchFamily="2" charset="0"/>
+                  <a:cs typeface="Ramabhadra" panose="02000600000000000000" pitchFamily="2" charset="0"/>
+                </a:rPr>
+                <a:t>నీ సన్నిధి వీడక – సన్నుతించి పాడనా (2)</a:t>
+              </a:r>
+            </a:p>
+            <a:p>
+              <a:pPr defTabSz="439781">
+                <a:defRPr/>
+              </a:pPr>
+              <a:r>
+                <a:rPr lang="te-IN" sz="2200" dirty="0">
+                  <a:latin typeface="Ramabhadra" panose="02000600000000000000" pitchFamily="2" charset="0"/>
+                  <a:cs typeface="Ramabhadra" panose="02000600000000000000" pitchFamily="2" charset="0"/>
+                </a:rPr>
+                <a:t>నీకొరకే ధ్వజమెత్తి నిన్న ప్రకటించనా</a:t>
+              </a:r>
+            </a:p>
+            <a:p>
+              <a:pPr defTabSz="439781">
+                <a:defRPr/>
+              </a:pPr>
+              <a:r>
+                <a:rPr lang="te-IN" sz="2200" dirty="0">
+                  <a:latin typeface="Ramabhadra" panose="02000600000000000000" pitchFamily="2" charset="0"/>
+                  <a:cs typeface="Ramabhadra" panose="02000600000000000000" pitchFamily="2" charset="0"/>
+                </a:rPr>
+                <a:t>సత్యవాక్యమే – జీవవాక్యమే </a:t>
               </a:r>
             </a:p>
           </p:txBody>
@@ -3880,9 +3780,9 @@
         <p:grpSpPr>
           <a:xfrm>
             <a:off x="160868" y="182032"/>
-            <a:ext cx="4831293" cy="6493935"/>
+            <a:ext cx="4792132" cy="6493935"/>
             <a:chOff x="160868" y="182032"/>
-            <a:chExt cx="4831293" cy="6493935"/>
+            <a:chExt cx="4792132" cy="6493935"/>
           </a:xfrm>
         </p:grpSpPr>
         <p:sp>
@@ -3954,8 +3854,8 @@
           </p:nvSpPr>
           <p:spPr>
             <a:xfrm>
-              <a:off x="343961" y="729375"/>
-              <a:ext cx="4648200" cy="5632311"/>
+              <a:off x="304800" y="830573"/>
+              <a:ext cx="4648200" cy="5586145"/>
             </a:xfrm>
             <a:prstGeom prst="rect">
               <a:avLst/>
@@ -3972,66 +3872,49 @@
                 <a:defRPr/>
               </a:pPr>
               <a:r>
-                <a:rPr lang="te-IN" sz="2400" dirty="0">
-                  <a:latin typeface="Ramabhadra" panose="02000600000000000000" pitchFamily="2" charset="0"/>
-                  <a:cs typeface="Ramabhadra" panose="02000600000000000000" pitchFamily="2" charset="0"/>
-                </a:rPr>
-                <a:t>నా ప్రాణమా నా అంతరంగమా </a:t>
-              </a:r>
-            </a:p>
-            <a:p>
-              <a:pPr defTabSz="439781">
-                <a:defRPr/>
-              </a:pPr>
-              <a:r>
-                <a:rPr lang="te-IN" sz="2400" dirty="0">
-                  <a:latin typeface="Ramabhadra" panose="02000600000000000000" pitchFamily="2" charset="0"/>
-                  <a:cs typeface="Ramabhadra" panose="02000600000000000000" pitchFamily="2" charset="0"/>
-                </a:rPr>
-                <a:t>నాలో వున్న నా సమస్తమా (2)</a:t>
-              </a:r>
-            </a:p>
-            <a:p>
-              <a:pPr defTabSz="439781">
-                <a:defRPr/>
-              </a:pPr>
-              <a:r>
-                <a:rPr lang="te-IN" sz="2400" dirty="0">
-                  <a:latin typeface="Ramabhadra" panose="02000600000000000000" pitchFamily="2" charset="0"/>
-                  <a:cs typeface="Ramabhadra" panose="02000600000000000000" pitchFamily="2" charset="0"/>
-                </a:rPr>
-                <a:t>యెహోవ చేసిన ఉపకారములలో</a:t>
-              </a:r>
-            </a:p>
-            <a:p>
-              <a:pPr defTabSz="439781">
-                <a:defRPr/>
-              </a:pPr>
-              <a:r>
-                <a:rPr lang="te-IN" sz="2400" dirty="0">
-                  <a:latin typeface="Ramabhadra" panose="02000600000000000000" pitchFamily="2" charset="0"/>
-                  <a:cs typeface="Ramabhadra" panose="02000600000000000000" pitchFamily="2" charset="0"/>
-                </a:rPr>
-                <a:t>దేనిని మరువక కొనియాడుమా (2)</a:t>
-              </a:r>
-            </a:p>
-            <a:p>
-              <a:pPr defTabSz="439781">
-                <a:defRPr/>
-              </a:pPr>
-              <a:r>
-                <a:rPr lang="te-IN" sz="2400" dirty="0">
-                  <a:latin typeface="Ramabhadra" panose="02000600000000000000" pitchFamily="2" charset="0"/>
-                  <a:cs typeface="Ramabhadra" panose="02000600000000000000" pitchFamily="2" charset="0"/>
-                </a:rPr>
-                <a:t>ఆ.. ఆ… ఆ.. ఆ… ఆ.. ఆ…</a:t>
-              </a:r>
-            </a:p>
-            <a:p>
-              <a:pPr defTabSz="439781">
-                <a:defRPr/>
-              </a:pPr>
-              <a:endParaRPr lang="te-IN" sz="2400" dirty="0">
+                <a:rPr lang="te-IN" sz="2100" dirty="0">
+                  <a:latin typeface="Ramabhadra" panose="02000600000000000000" pitchFamily="2" charset="0"/>
+                  <a:cs typeface="Ramabhadra" panose="02000600000000000000" pitchFamily="2" charset="0"/>
+                </a:rPr>
+                <a:t>నేనెల్లప్పుడు యెహోవాను సన్నుతించెదన్‌</a:t>
+              </a:r>
+            </a:p>
+            <a:p>
+              <a:pPr defTabSz="439781">
+                <a:defRPr/>
+              </a:pPr>
+              <a:r>
+                <a:rPr lang="te-IN" sz="2100" dirty="0">
+                  <a:latin typeface="Ramabhadra" panose="02000600000000000000" pitchFamily="2" charset="0"/>
+                  <a:cs typeface="Ramabhadra" panose="02000600000000000000" pitchFamily="2" charset="0"/>
+                </a:rPr>
+                <a:t>నిత్యము ఆయన కీర్తి నా నోట నుండున్‌ - (2)</a:t>
+              </a:r>
+            </a:p>
+            <a:p>
+              <a:pPr defTabSz="439781">
+                <a:defRPr/>
+              </a:pPr>
+              <a:r>
+                <a:rPr lang="te-IN" sz="2100" dirty="0">
+                  <a:latin typeface="Ramabhadra" panose="02000600000000000000" pitchFamily="2" charset="0"/>
+                  <a:cs typeface="Ramabhadra" panose="02000600000000000000" pitchFamily="2" charset="0"/>
+                </a:rPr>
+                <a:t>అంతా నా మేలుకే - ఆరాధనా యేసుకే</a:t>
+              </a:r>
+            </a:p>
+            <a:p>
+              <a:pPr defTabSz="439781">
+                <a:defRPr/>
+              </a:pPr>
+              <a:r>
+                <a:rPr lang="te-IN" sz="2100" dirty="0">
+                  <a:latin typeface="Ramabhadra" panose="02000600000000000000" pitchFamily="2" charset="0"/>
+                  <a:cs typeface="Ramabhadra" panose="02000600000000000000" pitchFamily="2" charset="0"/>
+                </a:rPr>
+                <a:t>అంతా నా మంచికే –</a:t>
+              </a:r>
+              <a:endParaRPr lang="en-IN" sz="2100" dirty="0">
                 <a:latin typeface="Ramabhadra" panose="02000600000000000000" pitchFamily="2" charset="0"/>
                 <a:cs typeface="Ramabhadra" panose="02000600000000000000" pitchFamily="2" charset="0"/>
               </a:endParaRPr>
@@ -4041,61 +3924,42 @@
                 <a:defRPr/>
               </a:pPr>
               <a:r>
-                <a:rPr lang="en-IN" sz="2400" dirty="0">
-                  <a:latin typeface="Ramabhadra" panose="02000600000000000000" pitchFamily="2" charset="0"/>
-                  <a:cs typeface="Ramabhadra" panose="02000600000000000000" pitchFamily="2" charset="0"/>
-                </a:rPr>
-                <a:t>1. </a:t>
-              </a:r>
-              <a:r>
-                <a:rPr lang="te-IN" sz="2400" dirty="0">
-                  <a:latin typeface="Ramabhadra" panose="02000600000000000000" pitchFamily="2" charset="0"/>
-                  <a:cs typeface="Ramabhadra" panose="02000600000000000000" pitchFamily="2" charset="0"/>
-                </a:rPr>
-                <a:t>నీ దోషములన్ని క్షమియించువాడు </a:t>
-              </a:r>
-            </a:p>
-            <a:p>
-              <a:pPr defTabSz="439781">
-                <a:defRPr/>
-              </a:pPr>
-              <a:r>
-                <a:rPr lang="te-IN" sz="2400" dirty="0">
-                  <a:latin typeface="Ramabhadra" panose="02000600000000000000" pitchFamily="2" charset="0"/>
-                  <a:cs typeface="Ramabhadra" panose="02000600000000000000" pitchFamily="2" charset="0"/>
-                </a:rPr>
-                <a:t>నీ పాపములన్ని పార ద్రోలువాడు (2)</a:t>
-              </a:r>
-            </a:p>
-            <a:p>
-              <a:pPr defTabSz="439781">
-                <a:defRPr/>
-              </a:pPr>
-              <a:r>
-                <a:rPr lang="te-IN" sz="2400" dirty="0">
-                  <a:latin typeface="Ramabhadra" panose="02000600000000000000" pitchFamily="2" charset="0"/>
-                  <a:cs typeface="Ramabhadra" panose="02000600000000000000" pitchFamily="2" charset="0"/>
-                </a:rPr>
-                <a:t>పరమ వైద్యుడు ప్రభు యేసుడు </a:t>
-              </a:r>
-            </a:p>
-            <a:p>
-              <a:pPr defTabSz="439781">
-                <a:defRPr/>
-              </a:pPr>
-              <a:r>
-                <a:rPr lang="te-IN" sz="2400" dirty="0">
-                  <a:latin typeface="Ramabhadra" panose="02000600000000000000" pitchFamily="2" charset="0"/>
-                  <a:cs typeface="Ramabhadra" panose="02000600000000000000" pitchFamily="2" charset="0"/>
-                </a:rPr>
-                <a:t>పరిశుద్ధ నామమును సన్నుతించుమా (2)</a:t>
-              </a:r>
-            </a:p>
-            <a:p>
-              <a:pPr defTabSz="439781">
-                <a:defRPr/>
-              </a:pPr>
-              <a:endParaRPr lang="te-IN" sz="2400" dirty="0">
+                <a:rPr lang="te-IN" sz="2100" dirty="0">
+                  <a:latin typeface="Ramabhadra" panose="02000600000000000000" pitchFamily="2" charset="0"/>
+                  <a:cs typeface="Ramabhadra" panose="02000600000000000000" pitchFamily="2" charset="0"/>
+                </a:rPr>
+                <a:t>తన చిత్తమునకు తల వంచితే-(2)</a:t>
+              </a:r>
+            </a:p>
+            <a:p>
+              <a:pPr defTabSz="439781">
+                <a:defRPr/>
+              </a:pPr>
+              <a:r>
+                <a:rPr lang="te-IN" sz="2100" dirty="0">
+                  <a:latin typeface="Ramabhadra" panose="02000600000000000000" pitchFamily="2" charset="0"/>
+                  <a:cs typeface="Ramabhadra" panose="02000600000000000000" pitchFamily="2" charset="0"/>
+                </a:rPr>
+                <a:t>అరాధన ఆపను - స్తుతియించుట మానను - (2)</a:t>
+              </a:r>
+            </a:p>
+            <a:p>
+              <a:pPr defTabSz="439781">
+                <a:defRPr/>
+              </a:pPr>
+              <a:r>
+                <a:rPr lang="te-IN" sz="2100" dirty="0">
+                  <a:latin typeface="Ramabhadra" panose="02000600000000000000" pitchFamily="2" charset="0"/>
+                  <a:cs typeface="Ramabhadra" panose="02000600000000000000" pitchFamily="2" charset="0"/>
+                </a:rPr>
+                <a:t>స్తుతియించుట మానను</a:t>
+              </a:r>
+            </a:p>
+            <a:p>
+              <a:pPr defTabSz="439781">
+                <a:defRPr/>
+              </a:pPr>
+              <a:endParaRPr lang="te-IN" sz="2100" dirty="0">
                 <a:latin typeface="Ramabhadra" panose="02000600000000000000" pitchFamily="2" charset="0"/>
                 <a:cs typeface="Ramabhadra" panose="02000600000000000000" pitchFamily="2" charset="0"/>
               </a:endParaRPr>
@@ -4105,54 +3969,104 @@
                 <a:defRPr/>
               </a:pPr>
               <a:r>
-                <a:rPr lang="en-IN" sz="2400" dirty="0">
-                  <a:latin typeface="Ramabhadra" panose="02000600000000000000" pitchFamily="2" charset="0"/>
-                  <a:cs typeface="Ramabhadra" panose="02000600000000000000" pitchFamily="2" charset="0"/>
-                </a:rPr>
-                <a:t>2. </a:t>
-              </a:r>
-              <a:r>
-                <a:rPr lang="te-IN" sz="2400" dirty="0">
-                  <a:latin typeface="Ramabhadra" panose="02000600000000000000" pitchFamily="2" charset="0"/>
-                  <a:cs typeface="Ramabhadra" panose="02000600000000000000" pitchFamily="2" charset="0"/>
-                </a:rPr>
-                <a:t>సమాధిలోనుండి నీ ప్రాణమును </a:t>
-              </a:r>
-            </a:p>
-            <a:p>
-              <a:pPr defTabSz="439781">
-                <a:defRPr/>
-              </a:pPr>
-              <a:r>
-                <a:rPr lang="te-IN" sz="2400" dirty="0">
-                  <a:latin typeface="Ramabhadra" panose="02000600000000000000" pitchFamily="2" charset="0"/>
-                  <a:cs typeface="Ramabhadra" panose="02000600000000000000" pitchFamily="2" charset="0"/>
-                </a:rPr>
-                <a:t>విమోచించుచున్నాడు శ్రీయేసుడు (2)</a:t>
-              </a:r>
-            </a:p>
-            <a:p>
-              <a:pPr defTabSz="439781">
-                <a:defRPr/>
-              </a:pPr>
-              <a:r>
-                <a:rPr lang="te-IN" sz="2400" dirty="0">
-                  <a:latin typeface="Ramabhadra" panose="02000600000000000000" pitchFamily="2" charset="0"/>
-                  <a:cs typeface="Ramabhadra" panose="02000600000000000000" pitchFamily="2" charset="0"/>
-                </a:rPr>
-                <a:t>కరుణా కటాక్షములను నీకు కిరీటముగా </a:t>
-              </a:r>
-            </a:p>
-            <a:p>
-              <a:pPr defTabSz="439781">
-                <a:defRPr/>
-              </a:pPr>
-              <a:r>
-                <a:rPr lang="te-IN" sz="2400" dirty="0">
-                  <a:latin typeface="Ramabhadra" panose="02000600000000000000" pitchFamily="2" charset="0"/>
-                  <a:cs typeface="Ramabhadra" panose="02000600000000000000" pitchFamily="2" charset="0"/>
-                </a:rPr>
-                <a:t>ధరియింపజేయును ప్రభు యేసుడు (2)</a:t>
+                <a:rPr lang="te-IN" sz="2100" dirty="0">
+                  <a:latin typeface="Ramabhadra" panose="02000600000000000000" pitchFamily="2" charset="0"/>
+                  <a:cs typeface="Ramabhadra" panose="02000600000000000000" pitchFamily="2" charset="0"/>
+                </a:rPr>
+                <a:t>1. కన్నీల్లే పానములైన - కఠిన దుఃఖ బాధలైన</a:t>
+              </a:r>
+            </a:p>
+            <a:p>
+              <a:pPr defTabSz="439781">
+                <a:defRPr/>
+              </a:pPr>
+              <a:r>
+                <a:rPr lang="te-IN" sz="2100" dirty="0">
+                  <a:latin typeface="Ramabhadra" panose="02000600000000000000" pitchFamily="2" charset="0"/>
+                  <a:cs typeface="Ramabhadra" panose="02000600000000000000" pitchFamily="2" charset="0"/>
+                </a:rPr>
+                <a:t>స్థితిగతులే మారిన - అవకాశం చేజారిన</a:t>
+              </a:r>
+            </a:p>
+            <a:p>
+              <a:pPr defTabSz="439781">
+                <a:defRPr/>
+              </a:pPr>
+              <a:r>
+                <a:rPr lang="te-IN" sz="2100" dirty="0">
+                  <a:latin typeface="Ramabhadra" panose="02000600000000000000" pitchFamily="2" charset="0"/>
+                  <a:cs typeface="Ramabhadra" panose="02000600000000000000" pitchFamily="2" charset="0"/>
+                </a:rPr>
+                <a:t>మారదు యేసు ప్రేమ - నిత్యుడైన తండ్రి ప్రేమ - (2)</a:t>
+              </a:r>
+            </a:p>
+            <a:p>
+              <a:pPr defTabSz="439781">
+                <a:defRPr/>
+              </a:pPr>
+              <a:r>
+                <a:rPr lang="te-IN" sz="2100" dirty="0">
+                  <a:latin typeface="Ramabhadra" panose="02000600000000000000" pitchFamily="2" charset="0"/>
+                  <a:cs typeface="Ramabhadra" panose="02000600000000000000" pitchFamily="2" charset="0"/>
+                </a:rPr>
+                <a:t>మారదు యేసు ప్రేమ - నిత్యుడైన తండ్రి ప్రేమ - (2)</a:t>
+              </a:r>
+            </a:p>
+            <a:p>
+              <a:pPr defTabSz="439781">
+                <a:defRPr/>
+              </a:pPr>
+              <a:endParaRPr lang="te-IN" sz="2100" dirty="0">
+                <a:latin typeface="Ramabhadra" panose="02000600000000000000" pitchFamily="2" charset="0"/>
+                <a:cs typeface="Ramabhadra" panose="02000600000000000000" pitchFamily="2" charset="0"/>
+              </a:endParaRPr>
+            </a:p>
+            <a:p>
+              <a:pPr defTabSz="439781">
+                <a:defRPr/>
+              </a:pPr>
+              <a:r>
+                <a:rPr lang="te-IN" sz="2100" dirty="0">
+                  <a:latin typeface="Ramabhadra" panose="02000600000000000000" pitchFamily="2" charset="0"/>
+                  <a:cs typeface="Ramabhadra" panose="02000600000000000000" pitchFamily="2" charset="0"/>
+                </a:rPr>
+                <a:t>2. ఆస్తులన్ని కోల్పొయిన - కన్నవారే కునుమరుగైన</a:t>
+              </a:r>
+            </a:p>
+            <a:p>
+              <a:pPr defTabSz="439781">
+                <a:defRPr/>
+              </a:pPr>
+              <a:r>
+                <a:rPr lang="te-IN" sz="2100" dirty="0">
+                  <a:latin typeface="Ramabhadra" panose="02000600000000000000" pitchFamily="2" charset="0"/>
+                  <a:cs typeface="Ramabhadra" panose="02000600000000000000" pitchFamily="2" charset="0"/>
+                </a:rPr>
+                <a:t>ఊపిరి బరువైన - గుండెలే పగిలినా</a:t>
+              </a:r>
+            </a:p>
+            <a:p>
+              <a:pPr defTabSz="439781">
+                <a:defRPr/>
+              </a:pPr>
+              <a:r>
+                <a:rPr lang="te-IN" sz="2100" dirty="0">
+                  <a:latin typeface="Ramabhadra" panose="02000600000000000000" pitchFamily="2" charset="0"/>
+                  <a:cs typeface="Ramabhadra" panose="02000600000000000000" pitchFamily="2" charset="0"/>
+                </a:rPr>
+                <a:t>యెహోవా యిచ్చెను - యెహోవా తీసికొనెను - (2)</a:t>
+              </a:r>
+            </a:p>
+            <a:p>
+              <a:pPr defTabSz="439781">
+                <a:defRPr/>
+              </a:pPr>
+              <a:r>
+                <a:rPr lang="te-IN" sz="2100" dirty="0">
+                  <a:latin typeface="Ramabhadra" panose="02000600000000000000" pitchFamily="2" charset="0"/>
+                  <a:cs typeface="Ramabhadra" panose="02000600000000000000" pitchFamily="2" charset="0"/>
+                </a:rPr>
+                <a:t>ఆయన నామమునకే - స్తుతి కలుగు గాక - (2)</a:t>
               </a:r>
             </a:p>
           </p:txBody>
@@ -4235,9 +4149,9 @@
         <p:grpSpPr>
           <a:xfrm>
             <a:off x="5104338" y="182031"/>
-            <a:ext cx="4660899" cy="6493935"/>
+            <a:ext cx="4673149" cy="6493935"/>
             <a:chOff x="160868" y="182032"/>
-            <a:chExt cx="4660899" cy="6493935"/>
+            <a:chExt cx="4673149" cy="6493935"/>
           </a:xfrm>
         </p:grpSpPr>
         <p:sp>
@@ -4309,8 +4223,8 @@
           </p:nvSpPr>
           <p:spPr>
             <a:xfrm>
-              <a:off x="280461" y="861353"/>
-              <a:ext cx="4541306" cy="4832092"/>
+              <a:off x="292711" y="861353"/>
+              <a:ext cx="4541306" cy="5262979"/>
             </a:xfrm>
             <a:prstGeom prst="rect">
               <a:avLst/>
@@ -4327,30 +4241,56 @@
                 <a:defRPr/>
               </a:pPr>
               <a:r>
-                <a:rPr lang="te-IN" sz="2200" dirty="0">
-                  <a:latin typeface="Ramabhadra" panose="02000600000000000000" pitchFamily="2" charset="0"/>
-                  <a:cs typeface="Ramabhadra" panose="02000600000000000000" pitchFamily="2" charset="0"/>
-                </a:rPr>
-                <a:t>యేసయ్యా నా హృదయ స్పందన నీవే కదా (2)</a:t>
-              </a:r>
-            </a:p>
-            <a:p>
-              <a:pPr defTabSz="439781">
-                <a:defRPr/>
-              </a:pPr>
-              <a:r>
-                <a:rPr lang="te-IN" sz="2200" dirty="0">
-                  <a:latin typeface="Ramabhadra" panose="02000600000000000000" pitchFamily="2" charset="0"/>
-                  <a:cs typeface="Ramabhadra" panose="02000600000000000000" pitchFamily="2" charset="0"/>
-                </a:rPr>
-                <a:t>విశ్వమంతా నీ నామము ఘణనీయము (2)</a:t>
-              </a:r>
-            </a:p>
-            <a:p>
-              <a:pPr defTabSz="439781">
-                <a:defRPr/>
-              </a:pPr>
-              <a:endParaRPr lang="te-IN" sz="2200" dirty="0">
+                <a:rPr lang="te-IN" sz="2400" dirty="0">
+                  <a:latin typeface="Ramabhadra" panose="02000600000000000000" pitchFamily="2" charset="0"/>
+                  <a:cs typeface="Ramabhadra" panose="02000600000000000000" pitchFamily="2" charset="0"/>
+                </a:rPr>
+                <a:t>ప్రార్థన శక్తి నాకు కావాలయ్యా</a:t>
+              </a:r>
+            </a:p>
+            <a:p>
+              <a:pPr defTabSz="439781">
+                <a:defRPr/>
+              </a:pPr>
+              <a:r>
+                <a:rPr lang="te-IN" sz="2400" dirty="0">
+                  <a:latin typeface="Ramabhadra" panose="02000600000000000000" pitchFamily="2" charset="0"/>
+                  <a:cs typeface="Ramabhadra" panose="02000600000000000000" pitchFamily="2" charset="0"/>
+                </a:rPr>
+                <a:t>నీ పరలోక అభిషేకం కావాలయ్యా (2)</a:t>
+              </a:r>
+            </a:p>
+            <a:p>
+              <a:pPr defTabSz="439781">
+                <a:defRPr/>
+              </a:pPr>
+              <a:r>
+                <a:rPr lang="te-IN" sz="2400" dirty="0">
+                  <a:latin typeface="Ramabhadra" panose="02000600000000000000" pitchFamily="2" charset="0"/>
+                  <a:cs typeface="Ramabhadra" panose="02000600000000000000" pitchFamily="2" charset="0"/>
+                </a:rPr>
+                <a:t>యేసయ్యా కావాలయ్యా</a:t>
+              </a:r>
+            </a:p>
+            <a:p>
+              <a:pPr defTabSz="439781">
+                <a:defRPr/>
+              </a:pPr>
+              <a:r>
+                <a:rPr lang="te-IN" sz="2400" dirty="0">
+                  <a:latin typeface="Ramabhadra" panose="02000600000000000000" pitchFamily="2" charset="0"/>
+                  <a:cs typeface="Ramabhadra" panose="02000600000000000000" pitchFamily="2" charset="0"/>
+                </a:rPr>
+                <a:t>నీ ఆత్మ అభిషేకం కావలయ్యా (2</a:t>
+              </a:r>
+              <a:r>
+                <a:rPr lang="en-IN" sz="2400" dirty="0">
+                  <a:latin typeface="Ramabhadra" panose="02000600000000000000" pitchFamily="2" charset="0"/>
+                  <a:cs typeface="Ramabhadra" panose="02000600000000000000" pitchFamily="2" charset="0"/>
+                </a:rPr>
+                <a:t>)</a:t>
+              </a:r>
+              <a:endParaRPr lang="te-IN" sz="2400" dirty="0">
                 <a:latin typeface="Ramabhadra" panose="02000600000000000000" pitchFamily="2" charset="0"/>
                 <a:cs typeface="Ramabhadra" panose="02000600000000000000" pitchFamily="2" charset="0"/>
               </a:endParaRPr>
@@ -4359,74 +4299,7 @@
               <a:pPr defTabSz="439781">
                 <a:defRPr/>
               </a:pPr>
-              <a:r>
-                <a:rPr lang="en-IN" sz="2200" dirty="0">
-                  <a:latin typeface="Ramabhadra" panose="02000600000000000000" pitchFamily="2" charset="0"/>
-                  <a:cs typeface="Ramabhadra" panose="02000600000000000000" pitchFamily="2" charset="0"/>
-                </a:rPr>
-                <a:t>1. </a:t>
-              </a:r>
-              <a:r>
-                <a:rPr lang="te-IN" sz="2200" dirty="0">
-                  <a:latin typeface="Ramabhadra" panose="02000600000000000000" pitchFamily="2" charset="0"/>
-                  <a:cs typeface="Ramabhadra" panose="02000600000000000000" pitchFamily="2" charset="0"/>
-                </a:rPr>
-                <a:t>నీవు కనిపించని రోజున</a:t>
-              </a:r>
-            </a:p>
-            <a:p>
-              <a:pPr defTabSz="439781">
-                <a:defRPr/>
-              </a:pPr>
-              <a:r>
-                <a:rPr lang="te-IN" sz="2200" dirty="0">
-                  <a:latin typeface="Ramabhadra" panose="02000600000000000000" pitchFamily="2" charset="0"/>
-                  <a:cs typeface="Ramabhadra" panose="02000600000000000000" pitchFamily="2" charset="0"/>
-                </a:rPr>
-                <a:t>ఒక క్షణమొక యుగముగా మారెనే (2)</a:t>
-              </a:r>
-            </a:p>
-            <a:p>
-              <a:pPr defTabSz="439781">
-                <a:defRPr/>
-              </a:pPr>
-              <a:r>
-                <a:rPr lang="te-IN" sz="2200" dirty="0">
-                  <a:latin typeface="Ramabhadra" panose="02000600000000000000" pitchFamily="2" charset="0"/>
-                  <a:cs typeface="Ramabhadra" panose="02000600000000000000" pitchFamily="2" charset="0"/>
-                </a:rPr>
-                <a:t>నీవు నడిపించిన రోజున</a:t>
-              </a:r>
-            </a:p>
-            <a:p>
-              <a:pPr defTabSz="439781">
-                <a:defRPr/>
-              </a:pPr>
-              <a:r>
-                <a:rPr lang="te-IN" sz="2200" dirty="0">
-                  <a:latin typeface="Ramabhadra" panose="02000600000000000000" pitchFamily="2" charset="0"/>
-                  <a:cs typeface="Ramabhadra" panose="02000600000000000000" pitchFamily="2" charset="0"/>
-                </a:rPr>
-                <a:t>యుగయుగాల తలపు మది నిండెనే (2)</a:t>
-              </a:r>
-            </a:p>
-            <a:p>
-              <a:pPr defTabSz="439781">
-                <a:defRPr/>
-              </a:pPr>
-              <a:r>
-                <a:rPr lang="te-IN" sz="2200" dirty="0">
-                  <a:latin typeface="Ramabhadra" panose="02000600000000000000" pitchFamily="2" charset="0"/>
-                  <a:cs typeface="Ramabhadra" panose="02000600000000000000" pitchFamily="2" charset="0"/>
-                </a:rPr>
-                <a:t>యుగయుగాల తలపు మది నిండెనే</a:t>
-              </a:r>
-            </a:p>
-            <a:p>
-              <a:pPr defTabSz="439781">
-                <a:defRPr/>
-              </a:pPr>
-              <a:endParaRPr lang="te-IN" sz="2200" dirty="0">
+              <a:endParaRPr lang="te-IN" sz="2400" dirty="0">
                 <a:latin typeface="Ramabhadra" panose="02000600000000000000" pitchFamily="2" charset="0"/>
                 <a:cs typeface="Ramabhadra" panose="02000600000000000000" pitchFamily="2" charset="0"/>
               </a:endParaRPr>
@@ -4436,66 +4309,115 @@
                 <a:defRPr/>
               </a:pPr>
               <a:r>
-                <a:rPr lang="en-IN" sz="2200" dirty="0">
-                  <a:latin typeface="Ramabhadra" panose="02000600000000000000" pitchFamily="2" charset="0"/>
-                  <a:cs typeface="Ramabhadra" panose="02000600000000000000" pitchFamily="2" charset="0"/>
-                </a:rPr>
-                <a:t>2. </a:t>
-              </a:r>
-              <a:r>
-                <a:rPr lang="te-IN" sz="2200" dirty="0">
-                  <a:latin typeface="Ramabhadra" panose="02000600000000000000" pitchFamily="2" charset="0"/>
-                  <a:cs typeface="Ramabhadra" panose="02000600000000000000" pitchFamily="2" charset="0"/>
-                </a:rPr>
-                <a:t>నీవు మాట్లాడని రోజున</a:t>
-              </a:r>
-            </a:p>
-            <a:p>
-              <a:pPr defTabSz="439781">
-                <a:defRPr/>
-              </a:pPr>
-              <a:r>
-                <a:rPr lang="te-IN" sz="2200" dirty="0">
-                  <a:latin typeface="Ramabhadra" panose="02000600000000000000" pitchFamily="2" charset="0"/>
-                  <a:cs typeface="Ramabhadra" panose="02000600000000000000" pitchFamily="2" charset="0"/>
-                </a:rPr>
-                <a:t>నా కనులకు నిద్దుర కరువాయెనే (2)</a:t>
-              </a:r>
-            </a:p>
-            <a:p>
-              <a:pPr defTabSz="439781">
-                <a:defRPr/>
-              </a:pPr>
-              <a:r>
-                <a:rPr lang="te-IN" sz="2200" dirty="0">
-                  <a:latin typeface="Ramabhadra" panose="02000600000000000000" pitchFamily="2" charset="0"/>
-                  <a:cs typeface="Ramabhadra" panose="02000600000000000000" pitchFamily="2" charset="0"/>
-                </a:rPr>
-                <a:t>నీవు పెదవిప్పిన రోజున</a:t>
-              </a:r>
-            </a:p>
-            <a:p>
-              <a:pPr defTabSz="439781">
-                <a:defRPr/>
-              </a:pPr>
-              <a:r>
-                <a:rPr lang="te-IN" sz="2200" dirty="0">
-                  <a:latin typeface="Ramabhadra" panose="02000600000000000000" pitchFamily="2" charset="0"/>
-                  <a:cs typeface="Ramabhadra" panose="02000600000000000000" pitchFamily="2" charset="0"/>
-                </a:rPr>
-                <a:t>నీ సన్నిధి పచ్చిక బయలాయెనే (2)</a:t>
-              </a:r>
-            </a:p>
-            <a:p>
-              <a:pPr defTabSz="439781">
-                <a:defRPr/>
-              </a:pPr>
-              <a:r>
-                <a:rPr lang="te-IN" sz="2200" dirty="0">
-                  <a:latin typeface="Ramabhadra" panose="02000600000000000000" pitchFamily="2" charset="0"/>
-                  <a:cs typeface="Ramabhadra" panose="02000600000000000000" pitchFamily="2" charset="0"/>
-                </a:rPr>
-                <a:t>నీ సన్నిధి పచ్చిక బయలాయెనే</a:t>
+                <a:rPr lang="te-IN" sz="2400" dirty="0">
+                  <a:latin typeface="Ramabhadra" panose="02000600000000000000" pitchFamily="2" charset="0"/>
+                  <a:cs typeface="Ramabhadra" panose="02000600000000000000" pitchFamily="2" charset="0"/>
+                </a:rPr>
+                <a:t>ఏలియా ప్రార్థింపగ పొందిన శక్తి</a:t>
+              </a:r>
+            </a:p>
+            <a:p>
+              <a:pPr defTabSz="439781">
+                <a:defRPr/>
+              </a:pPr>
+              <a:r>
+                <a:rPr lang="te-IN" sz="2400" dirty="0">
+                  <a:latin typeface="Ramabhadra" panose="02000600000000000000" pitchFamily="2" charset="0"/>
+                  <a:cs typeface="Ramabhadra" panose="02000600000000000000" pitchFamily="2" charset="0"/>
+                </a:rPr>
+                <a:t>నేను ప్రార్థింపగ దయచేయుమా (2)</a:t>
+              </a:r>
+            </a:p>
+            <a:p>
+              <a:pPr defTabSz="439781">
+                <a:defRPr/>
+              </a:pPr>
+              <a:r>
+                <a:rPr lang="te-IN" sz="2400" dirty="0">
+                  <a:latin typeface="Ramabhadra" panose="02000600000000000000" pitchFamily="2" charset="0"/>
+                  <a:cs typeface="Ramabhadra" panose="02000600000000000000" pitchFamily="2" charset="0"/>
+                </a:rPr>
+                <a:t>ప్రార్థించి నిను చేరు భాగ్యమీయుమా (2)</a:t>
+              </a:r>
+            </a:p>
+            <a:p>
+              <a:pPr defTabSz="439781">
+                <a:defRPr/>
+              </a:pPr>
+              <a:r>
+                <a:rPr lang="te-IN" sz="2400" dirty="0">
+                  <a:latin typeface="Ramabhadra" panose="02000600000000000000" pitchFamily="2" charset="0"/>
+                  <a:cs typeface="Ramabhadra" panose="02000600000000000000" pitchFamily="2" charset="0"/>
+                </a:rPr>
+                <a:t>నిరంతరం ప్రార్థింప కృపనీయుమా (2</a:t>
+              </a:r>
+              <a:r>
+                <a:rPr lang="en-IN" sz="2400" dirty="0">
+                  <a:latin typeface="Ramabhadra" panose="02000600000000000000" pitchFamily="2" charset="0"/>
+                  <a:cs typeface="Ramabhadra" panose="02000600000000000000" pitchFamily="2" charset="0"/>
+                </a:rPr>
+                <a:t>)</a:t>
+              </a:r>
+              <a:endParaRPr lang="te-IN" sz="2400" dirty="0">
+                <a:latin typeface="Ramabhadra" panose="02000600000000000000" pitchFamily="2" charset="0"/>
+                <a:cs typeface="Ramabhadra" panose="02000600000000000000" pitchFamily="2" charset="0"/>
+              </a:endParaRPr>
+            </a:p>
+            <a:p>
+              <a:pPr defTabSz="439781">
+                <a:defRPr/>
+              </a:pPr>
+              <a:endParaRPr lang="te-IN" sz="2400" dirty="0">
+                <a:latin typeface="Ramabhadra" panose="02000600000000000000" pitchFamily="2" charset="0"/>
+                <a:cs typeface="Ramabhadra" panose="02000600000000000000" pitchFamily="2" charset="0"/>
+              </a:endParaRPr>
+            </a:p>
+            <a:p>
+              <a:pPr defTabSz="439781">
+                <a:defRPr/>
+              </a:pPr>
+              <a:r>
+                <a:rPr lang="te-IN" sz="2400" dirty="0">
+                  <a:latin typeface="Ramabhadra" panose="02000600000000000000" pitchFamily="2" charset="0"/>
+                  <a:cs typeface="Ramabhadra" panose="02000600000000000000" pitchFamily="2" charset="0"/>
+                </a:rPr>
+                <a:t>సింహాల గుహలోని దానియేలు శక్తి</a:t>
+              </a:r>
+            </a:p>
+            <a:p>
+              <a:pPr defTabSz="439781">
+                <a:defRPr/>
+              </a:pPr>
+              <a:r>
+                <a:rPr lang="te-IN" sz="2400" dirty="0">
+                  <a:latin typeface="Ramabhadra" panose="02000600000000000000" pitchFamily="2" charset="0"/>
+                  <a:cs typeface="Ramabhadra" panose="02000600000000000000" pitchFamily="2" charset="0"/>
+                </a:rPr>
+                <a:t>ఈ లోకంలో నాకు కావలయ్యా (2)</a:t>
+              </a:r>
+            </a:p>
+            <a:p>
+              <a:pPr defTabSz="439781">
+                <a:defRPr/>
+              </a:pPr>
+              <a:r>
+                <a:rPr lang="te-IN" sz="2400" dirty="0">
+                  <a:latin typeface="Ramabhadra" panose="02000600000000000000" pitchFamily="2" charset="0"/>
+                  <a:cs typeface="Ramabhadra" panose="02000600000000000000" pitchFamily="2" charset="0"/>
+                </a:rPr>
+                <a:t>నీతో నడిచే వరమీయుమా (2)</a:t>
+              </a:r>
+            </a:p>
+            <a:p>
+              <a:pPr defTabSz="439781">
+                <a:defRPr/>
+              </a:pPr>
+              <a:r>
+                <a:rPr lang="te-IN" sz="2400" dirty="0">
+                  <a:latin typeface="Ramabhadra" panose="02000600000000000000" pitchFamily="2" charset="0"/>
+                  <a:cs typeface="Ramabhadra" panose="02000600000000000000" pitchFamily="2" charset="0"/>
+                </a:rPr>
+                <a:t>నీ సిలువను మోసే కృపనీయుమా (2) </a:t>
               </a:r>
             </a:p>
           </p:txBody>

--- a/songsTemplate.pptx
+++ b/songsTemplate.pptx
@@ -255,7 +255,7 @@
           <a:p>
             <a:fld id="{F1102B08-ED9E-409F-B95F-09CAA1DAF6E0}" type="datetimeFigureOut">
               <a:rPr lang="en-IN" smtClean="0"/>
-              <a:t>26-10-2024</a:t>
+              <a:t>10-11-2024</a:t>
             </a:fld>
             <a:endParaRPr lang="en-IN"/>
           </a:p>
@@ -425,7 +425,7 @@
           <a:p>
             <a:fld id="{F1102B08-ED9E-409F-B95F-09CAA1DAF6E0}" type="datetimeFigureOut">
               <a:rPr lang="en-IN" smtClean="0"/>
-              <a:t>26-10-2024</a:t>
+              <a:t>10-11-2024</a:t>
             </a:fld>
             <a:endParaRPr lang="en-IN"/>
           </a:p>
@@ -605,7 +605,7 @@
           <a:p>
             <a:fld id="{F1102B08-ED9E-409F-B95F-09CAA1DAF6E0}" type="datetimeFigureOut">
               <a:rPr lang="en-IN" smtClean="0"/>
-              <a:t>26-10-2024</a:t>
+              <a:t>10-11-2024</a:t>
             </a:fld>
             <a:endParaRPr lang="en-IN"/>
           </a:p>
@@ -775,7 +775,7 @@
           <a:p>
             <a:fld id="{F1102B08-ED9E-409F-B95F-09CAA1DAF6E0}" type="datetimeFigureOut">
               <a:rPr lang="en-IN" smtClean="0"/>
-              <a:t>26-10-2024</a:t>
+              <a:t>10-11-2024</a:t>
             </a:fld>
             <a:endParaRPr lang="en-IN"/>
           </a:p>
@@ -1019,7 +1019,7 @@
           <a:p>
             <a:fld id="{F1102B08-ED9E-409F-B95F-09CAA1DAF6E0}" type="datetimeFigureOut">
               <a:rPr lang="en-IN" smtClean="0"/>
-              <a:t>26-10-2024</a:t>
+              <a:t>10-11-2024</a:t>
             </a:fld>
             <a:endParaRPr lang="en-IN"/>
           </a:p>
@@ -1251,7 +1251,7 @@
           <a:p>
             <a:fld id="{F1102B08-ED9E-409F-B95F-09CAA1DAF6E0}" type="datetimeFigureOut">
               <a:rPr lang="en-IN" smtClean="0"/>
-              <a:t>26-10-2024</a:t>
+              <a:t>10-11-2024</a:t>
             </a:fld>
             <a:endParaRPr lang="en-IN"/>
           </a:p>
@@ -1618,7 +1618,7 @@
           <a:p>
             <a:fld id="{F1102B08-ED9E-409F-B95F-09CAA1DAF6E0}" type="datetimeFigureOut">
               <a:rPr lang="en-IN" smtClean="0"/>
-              <a:t>26-10-2024</a:t>
+              <a:t>10-11-2024</a:t>
             </a:fld>
             <a:endParaRPr lang="en-IN"/>
           </a:p>
@@ -1736,7 +1736,7 @@
           <a:p>
             <a:fld id="{F1102B08-ED9E-409F-B95F-09CAA1DAF6E0}" type="datetimeFigureOut">
               <a:rPr lang="en-IN" smtClean="0"/>
-              <a:t>26-10-2024</a:t>
+              <a:t>10-11-2024</a:t>
             </a:fld>
             <a:endParaRPr lang="en-IN"/>
           </a:p>
@@ -1831,7 +1831,7 @@
           <a:p>
             <a:fld id="{F1102B08-ED9E-409F-B95F-09CAA1DAF6E0}" type="datetimeFigureOut">
               <a:rPr lang="en-IN" smtClean="0"/>
-              <a:t>26-10-2024</a:t>
+              <a:t>10-11-2024</a:t>
             </a:fld>
             <a:endParaRPr lang="en-IN"/>
           </a:p>
@@ -2108,7 +2108,7 @@
           <a:p>
             <a:fld id="{F1102B08-ED9E-409F-B95F-09CAA1DAF6E0}" type="datetimeFigureOut">
               <a:rPr lang="en-IN" smtClean="0"/>
-              <a:t>26-10-2024</a:t>
+              <a:t>10-11-2024</a:t>
             </a:fld>
             <a:endParaRPr lang="en-IN"/>
           </a:p>
@@ -2365,7 +2365,7 @@
           <a:p>
             <a:fld id="{F1102B08-ED9E-409F-B95F-09CAA1DAF6E0}" type="datetimeFigureOut">
               <a:rPr lang="en-IN" smtClean="0"/>
-              <a:t>26-10-2024</a:t>
+              <a:t>10-11-2024</a:t>
             </a:fld>
             <a:endParaRPr lang="en-IN"/>
           </a:p>
@@ -2578,7 +2578,7 @@
           <a:p>
             <a:fld id="{F1102B08-ED9E-409F-B95F-09CAA1DAF6E0}" type="datetimeFigureOut">
               <a:rPr lang="en-IN" smtClean="0"/>
-              <a:t>26-10-2024</a:t>
+              <a:t>10-11-2024</a:t>
             </a:fld>
             <a:endParaRPr lang="en-IN"/>
           </a:p>
@@ -2998,9 +2998,9 @@
         <p:grpSpPr>
           <a:xfrm>
             <a:off x="160868" y="182032"/>
-            <a:ext cx="5321825" cy="6493935"/>
+            <a:ext cx="5869513" cy="6493935"/>
             <a:chOff x="160868" y="182032"/>
-            <a:chExt cx="5321825" cy="6493935"/>
+            <a:chExt cx="5869513" cy="6493935"/>
           </a:xfrm>
         </p:grpSpPr>
         <p:sp>
@@ -3072,8 +3072,8 @@
           </p:nvSpPr>
           <p:spPr>
             <a:xfrm>
-              <a:off x="369283" y="326308"/>
-              <a:ext cx="5113410" cy="6186309"/>
+              <a:off x="916971" y="326429"/>
+              <a:ext cx="5113410" cy="6232475"/>
             </a:xfrm>
             <a:prstGeom prst="rect">
               <a:avLst/>
@@ -3090,25 +3090,25 @@
                 <a:defRPr/>
               </a:pPr>
               <a:r>
-                <a:rPr lang="te-IN" sz="2200" dirty="0">
-                  <a:latin typeface="Ramabhadra" panose="02000600000000000000" pitchFamily="2" charset="0"/>
-                  <a:cs typeface="Ramabhadra" panose="02000600000000000000" pitchFamily="2" charset="0"/>
-                </a:rPr>
-                <a:t>స్తుతించి పాడెదం – స్తుతుల స్తోత్రార్హుడా</a:t>
-              </a:r>
-            </a:p>
-            <a:p>
-              <a:pPr defTabSz="439781">
-                <a:defRPr/>
-              </a:pPr>
-              <a:r>
-                <a:rPr lang="te-IN" sz="2200" dirty="0">
-                  <a:latin typeface="Ramabhadra" panose="02000600000000000000" pitchFamily="2" charset="0"/>
-                  <a:cs typeface="Ramabhadra" panose="02000600000000000000" pitchFamily="2" charset="0"/>
-                </a:rPr>
-                <a:t>ఉత్సాహించి పాడెదం –</a:t>
-              </a:r>
-              <a:endParaRPr lang="en-IN" sz="2200" dirty="0">
+                <a:rPr lang="te-IN" sz="2100" dirty="0">
+                  <a:latin typeface="Ramabhadra" panose="02000600000000000000" pitchFamily="2" charset="0"/>
+                  <a:cs typeface="Ramabhadra" panose="02000600000000000000" pitchFamily="2" charset="0"/>
+                </a:rPr>
+                <a:t>సంఘమా - క్రైస్తవ సంఘమా</a:t>
+              </a:r>
+            </a:p>
+            <a:p>
+              <a:pPr defTabSz="439781">
+                <a:defRPr/>
+              </a:pPr>
+              <a:r>
+                <a:rPr lang="te-IN" sz="2100" dirty="0">
+                  <a:latin typeface="Ramabhadra" panose="02000600000000000000" pitchFamily="2" charset="0"/>
+                  <a:cs typeface="Ramabhadra" panose="02000600000000000000" pitchFamily="2" charset="0"/>
+                </a:rPr>
+                <a:t>యేసునే పోలి నడువుమా –</a:t>
+              </a:r>
+              <a:endParaRPr lang="en-IN" sz="2100" dirty="0">
                 <a:latin typeface="Ramabhadra" panose="02000600000000000000" pitchFamily="2" charset="0"/>
                 <a:cs typeface="Ramabhadra" panose="02000600000000000000" pitchFamily="2" charset="0"/>
               </a:endParaRPr>
@@ -3118,56 +3118,18 @@
                 <a:defRPr/>
               </a:pPr>
               <a:r>
-                <a:rPr lang="te-IN" sz="2200" dirty="0">
-                  <a:latin typeface="Ramabhadra" panose="02000600000000000000" pitchFamily="2" charset="0"/>
-                  <a:cs typeface="Ramabhadra" panose="02000600000000000000" pitchFamily="2" charset="0"/>
-                </a:rPr>
-                <a:t>ఉదయ సాయంత్రముల్</a:t>
-              </a:r>
-            </a:p>
-            <a:p>
-              <a:pPr defTabSz="439781">
-                <a:defRPr/>
-              </a:pPr>
-              <a:r>
-                <a:rPr lang="te-IN" sz="2200" dirty="0">
-                  <a:latin typeface="Ramabhadra" panose="02000600000000000000" pitchFamily="2" charset="0"/>
-                  <a:cs typeface="Ramabhadra" panose="02000600000000000000" pitchFamily="2" charset="0"/>
-                </a:rPr>
-                <a:t>స్తుతుల సింహాసనం మీద</a:t>
-              </a:r>
-              <a:r>
-                <a:rPr lang="en-IN" sz="2200" dirty="0">
-                  <a:latin typeface="Ramabhadra" panose="02000600000000000000" pitchFamily="2" charset="0"/>
-                  <a:cs typeface="Ramabhadra" panose="02000600000000000000" pitchFamily="2" charset="0"/>
-                </a:rPr>
-                <a:t> </a:t>
-              </a:r>
-              <a:r>
-                <a:rPr lang="te-IN" sz="2200" dirty="0">
-                  <a:latin typeface="Ramabhadra" panose="02000600000000000000" pitchFamily="2" charset="0"/>
-                  <a:cs typeface="Ramabhadra" panose="02000600000000000000" pitchFamily="2" charset="0"/>
-                </a:rPr>
-                <a:t>ఆసీనుడా</a:t>
-              </a:r>
-            </a:p>
-            <a:p>
-              <a:pPr defTabSz="439781">
-                <a:defRPr/>
-              </a:pPr>
-              <a:r>
-                <a:rPr lang="te-IN" sz="2200" dirty="0">
-                  <a:latin typeface="Ramabhadra" panose="02000600000000000000" pitchFamily="2" charset="0"/>
-                  <a:cs typeface="Ramabhadra" panose="02000600000000000000" pitchFamily="2" charset="0"/>
-                </a:rPr>
-                <a:t>మా స్తుతి ఆరాధన నీకే చెల్లింతుము (2)</a:t>
-              </a:r>
-            </a:p>
-            <a:p>
-              <a:pPr defTabSz="439781">
-                <a:defRPr/>
-              </a:pPr>
-              <a:endParaRPr lang="te-IN" sz="2200" dirty="0">
+                <a:rPr lang="te-IN" sz="2100" dirty="0">
+                  <a:latin typeface="Ramabhadra" panose="02000600000000000000" pitchFamily="2" charset="0"/>
+                  <a:cs typeface="Ramabhadra" panose="02000600000000000000" pitchFamily="2" charset="0"/>
+                </a:rPr>
+                <a:t>క్రీస్తు మనసు కలిగియుండుమా</a:t>
+              </a:r>
+            </a:p>
+            <a:p>
+              <a:pPr defTabSz="439781">
+                <a:defRPr/>
+              </a:pPr>
+              <a:endParaRPr lang="te-IN" sz="2100" dirty="0">
                 <a:latin typeface="Ramabhadra" panose="02000600000000000000" pitchFamily="2" charset="0"/>
                 <a:cs typeface="Ramabhadra" panose="02000600000000000000" pitchFamily="2" charset="0"/>
               </a:endParaRPr>
@@ -3177,13 +3139,90 @@
                 <a:defRPr/>
               </a:pPr>
               <a:r>
-                <a:rPr lang="te-IN" sz="2200" dirty="0">
-                  <a:latin typeface="Ramabhadra" panose="02000600000000000000" pitchFamily="2" charset="0"/>
-                  <a:cs typeface="Ramabhadra" panose="02000600000000000000" pitchFamily="2" charset="0"/>
-                </a:rPr>
-                <a:t>గతకాలమంతా నీవు –</a:t>
-              </a:r>
-              <a:endParaRPr lang="en-IN" sz="2200" dirty="0">
+                <a:rPr lang="te-IN" sz="2100" dirty="0">
+                  <a:latin typeface="Ramabhadra" panose="02000600000000000000" pitchFamily="2" charset="0"/>
+                  <a:cs typeface="Ramabhadra" panose="02000600000000000000" pitchFamily="2" charset="0"/>
+                </a:rPr>
+                <a:t>ఆది సంఘము మోకరిల్లగ</a:t>
+              </a:r>
+            </a:p>
+            <a:p>
+              <a:pPr defTabSz="439781">
+                <a:defRPr/>
+              </a:pPr>
+              <a:r>
+                <a:rPr lang="te-IN" sz="2100" dirty="0">
+                  <a:latin typeface="Ramabhadra" panose="02000600000000000000" pitchFamily="2" charset="0"/>
+                  <a:cs typeface="Ramabhadra" panose="02000600000000000000" pitchFamily="2" charset="0"/>
+                </a:rPr>
+                <a:t>చెరసాల తలుపులు - బ్రద్ధలాయెను</a:t>
+              </a:r>
+            </a:p>
+            <a:p>
+              <a:pPr defTabSz="439781">
+                <a:defRPr/>
+              </a:pPr>
+              <a:r>
+                <a:rPr lang="te-IN" sz="2100" dirty="0">
+                  <a:latin typeface="Ramabhadra" panose="02000600000000000000" pitchFamily="2" charset="0"/>
+                  <a:cs typeface="Ramabhadra" panose="02000600000000000000" pitchFamily="2" charset="0"/>
+                </a:rPr>
+                <a:t>ప్రధమ సంఘము - ప్రార్థింపగ</a:t>
+              </a:r>
+            </a:p>
+            <a:p>
+              <a:pPr defTabSz="439781">
+                <a:defRPr/>
+              </a:pPr>
+              <a:r>
+                <a:rPr lang="te-IN" sz="2100" dirty="0">
+                  <a:latin typeface="Ramabhadra" panose="02000600000000000000" pitchFamily="2" charset="0"/>
+                  <a:cs typeface="Ramabhadra" panose="02000600000000000000" pitchFamily="2" charset="0"/>
+                </a:rPr>
+                <a:t>పరిశుద్ధ  ఆత్మయే – భువికేగెను (2)</a:t>
+              </a:r>
+            </a:p>
+            <a:p>
+              <a:pPr defTabSz="439781">
+                <a:defRPr/>
+              </a:pPr>
+              <a:r>
+                <a:rPr lang="te-IN" sz="2100" dirty="0">
+                  <a:latin typeface="Ramabhadra" panose="02000600000000000000" pitchFamily="2" charset="0"/>
+                  <a:cs typeface="Ramabhadra" panose="02000600000000000000" pitchFamily="2" charset="0"/>
+                </a:rPr>
+                <a:t>ఆనాటి విజ్ఞాపన - ఏమాయెను</a:t>
+              </a:r>
+            </a:p>
+            <a:p>
+              <a:pPr defTabSz="439781">
+                <a:defRPr/>
+              </a:pPr>
+              <a:r>
+                <a:rPr lang="te-IN" sz="2100" dirty="0">
+                  <a:latin typeface="Ramabhadra" panose="02000600000000000000" pitchFamily="2" charset="0"/>
+                  <a:cs typeface="Ramabhadra" panose="02000600000000000000" pitchFamily="2" charset="0"/>
+                </a:rPr>
+                <a:t>ఈనాడు అద్భుతాలు కొదువాయెను</a:t>
+              </a:r>
+            </a:p>
+            <a:p>
+              <a:pPr defTabSz="439781">
+                <a:defRPr/>
+              </a:pPr>
+              <a:r>
+                <a:rPr lang="te-IN" sz="2100" dirty="0">
+                  <a:latin typeface="Ramabhadra" panose="02000600000000000000" pitchFamily="2" charset="0"/>
+                  <a:cs typeface="Ramabhadra" panose="02000600000000000000" pitchFamily="2" charset="0"/>
+                </a:rPr>
+                <a:t>మేలుకో లెమ్ము తేజరిల్లుమా</a:t>
+              </a:r>
+            </a:p>
+            <a:p>
+              <a:pPr defTabSz="439781">
+                <a:defRPr/>
+              </a:pPr>
+              <a:endParaRPr lang="te-IN" sz="2100" dirty="0">
                 <a:latin typeface="Ramabhadra" panose="02000600000000000000" pitchFamily="2" charset="0"/>
                 <a:cs typeface="Ramabhadra" panose="02000600000000000000" pitchFamily="2" charset="0"/>
               </a:endParaRPr>
@@ -3193,128 +3232,83 @@
                 <a:defRPr/>
               </a:pPr>
               <a:r>
-                <a:rPr lang="te-IN" sz="2200" dirty="0">
-                  <a:latin typeface="Ramabhadra" panose="02000600000000000000" pitchFamily="2" charset="0"/>
-                  <a:cs typeface="Ramabhadra" panose="02000600000000000000" pitchFamily="2" charset="0"/>
-                </a:rPr>
-                <a:t>మము కాచి కాపాడావు</a:t>
-              </a:r>
-            </a:p>
-            <a:p>
-              <a:pPr defTabSz="439781">
-                <a:defRPr/>
-              </a:pPr>
-              <a:r>
-                <a:rPr lang="te-IN" sz="2200" dirty="0">
-                  <a:latin typeface="Ramabhadra" panose="02000600000000000000" pitchFamily="2" charset="0"/>
-                  <a:cs typeface="Ramabhadra" panose="02000600000000000000" pitchFamily="2" charset="0"/>
-                </a:rPr>
-                <a:t>వ్యధలన్ని తీసావు (2)</a:t>
-              </a:r>
-            </a:p>
-            <a:p>
-              <a:pPr defTabSz="439781">
-                <a:defRPr/>
-              </a:pPr>
-              <a:r>
-                <a:rPr lang="te-IN" sz="2200" dirty="0">
-                  <a:latin typeface="Ramabhadra" panose="02000600000000000000" pitchFamily="2" charset="0"/>
-                  <a:cs typeface="Ramabhadra" panose="02000600000000000000" pitchFamily="2" charset="0"/>
-                </a:rPr>
-                <a:t>గతిలేని మాపై నీవు</a:t>
-              </a:r>
-            </a:p>
-            <a:p>
-              <a:pPr defTabSz="439781">
-                <a:defRPr/>
-              </a:pPr>
-              <a:r>
-                <a:rPr lang="te-IN" sz="2200" dirty="0">
-                  <a:latin typeface="Ramabhadra" panose="02000600000000000000" pitchFamily="2" charset="0"/>
-                  <a:cs typeface="Ramabhadra" panose="02000600000000000000" pitchFamily="2" charset="0"/>
-                </a:rPr>
-                <a:t>మితిలేని ప్రేమ చూపి (2)</a:t>
-              </a:r>
-            </a:p>
-            <a:p>
-              <a:pPr defTabSz="439781">
-                <a:defRPr/>
-              </a:pPr>
-              <a:r>
-                <a:rPr lang="te-IN" sz="2200" dirty="0">
-                  <a:latin typeface="Ramabhadra" panose="02000600000000000000" pitchFamily="2" charset="0"/>
-                  <a:cs typeface="Ramabhadra" panose="02000600000000000000" pitchFamily="2" charset="0"/>
-                </a:rPr>
-                <a:t>శత సంఖ్యగా మమ్ము దీవించావు</a:t>
-              </a:r>
-            </a:p>
-            <a:p>
-              <a:pPr defTabSz="439781">
-                <a:defRPr/>
-              </a:pPr>
-              <a:endParaRPr lang="te-IN" sz="2200" dirty="0">
-                <a:latin typeface="Ramabhadra" panose="02000600000000000000" pitchFamily="2" charset="0"/>
-                <a:cs typeface="Ramabhadra" panose="02000600000000000000" pitchFamily="2" charset="0"/>
-              </a:endParaRPr>
-            </a:p>
-            <a:p>
-              <a:pPr defTabSz="439781">
-                <a:defRPr/>
-              </a:pPr>
-              <a:r>
-                <a:rPr lang="te-IN" sz="2200" dirty="0">
-                  <a:latin typeface="Ramabhadra" panose="02000600000000000000" pitchFamily="2" charset="0"/>
-                  <a:cs typeface="Ramabhadra" panose="02000600000000000000" pitchFamily="2" charset="0"/>
-                </a:rPr>
-                <a:t>కరుణా కటాక్షములను కిరీటములుగాను</a:t>
-              </a:r>
-            </a:p>
-            <a:p>
-              <a:pPr defTabSz="439781">
-                <a:defRPr/>
-              </a:pPr>
-              <a:r>
-                <a:rPr lang="te-IN" sz="2200" dirty="0">
-                  <a:latin typeface="Ramabhadra" panose="02000600000000000000" pitchFamily="2" charset="0"/>
-                  <a:cs typeface="Ramabhadra" panose="02000600000000000000" pitchFamily="2" charset="0"/>
-                </a:rPr>
-                <a:t>ఉంచావు మా తలపై (2)</a:t>
-              </a:r>
-            </a:p>
-            <a:p>
-              <a:pPr defTabSz="439781">
-                <a:defRPr/>
-              </a:pPr>
-              <a:r>
-                <a:rPr lang="te-IN" sz="2200" dirty="0">
-                  <a:latin typeface="Ramabhadra" panose="02000600000000000000" pitchFamily="2" charset="0"/>
-                  <a:cs typeface="Ramabhadra" panose="02000600000000000000" pitchFamily="2" charset="0"/>
-                </a:rPr>
-                <a:t>పక్షి రాజు యవ్వనమువలె</a:t>
-              </a:r>
-            </a:p>
-            <a:p>
-              <a:pPr defTabSz="439781">
-                <a:defRPr/>
-              </a:pPr>
-              <a:r>
-                <a:rPr lang="te-IN" sz="2200" dirty="0">
-                  <a:latin typeface="Ramabhadra" panose="02000600000000000000" pitchFamily="2" charset="0"/>
-                  <a:cs typeface="Ramabhadra" panose="02000600000000000000" pitchFamily="2" charset="0"/>
-                </a:rPr>
-                <a:t>మా యవ్వనమునంతా (2)</a:t>
-              </a:r>
-            </a:p>
-            <a:p>
-              <a:pPr defTabSz="439781">
-                <a:defRPr/>
-              </a:pPr>
-              <a:r>
-                <a:rPr lang="te-IN" sz="2200" dirty="0">
-                  <a:latin typeface="Ramabhadra" panose="02000600000000000000" pitchFamily="2" charset="0"/>
-                  <a:cs typeface="Ramabhadra" panose="02000600000000000000" pitchFamily="2" charset="0"/>
-                </a:rPr>
-                <a:t>ఉత్తేజపరిచి తృప్తిని ఇచ్చావు</a:t>
+                <a:rPr lang="te-IN" sz="2100" dirty="0">
+                  <a:latin typeface="Ramabhadra" panose="02000600000000000000" pitchFamily="2" charset="0"/>
+                  <a:cs typeface="Ramabhadra" panose="02000600000000000000" pitchFamily="2" charset="0"/>
+                </a:rPr>
+                <a:t>క్రియలు లేని నీ - విశ్వాసము</a:t>
+              </a:r>
+            </a:p>
+            <a:p>
+              <a:pPr defTabSz="439781">
+                <a:defRPr/>
+              </a:pPr>
+              <a:r>
+                <a:rPr lang="te-IN" sz="2100" dirty="0">
+                  <a:latin typeface="Ramabhadra" panose="02000600000000000000" pitchFamily="2" charset="0"/>
+                  <a:cs typeface="Ramabhadra" panose="02000600000000000000" pitchFamily="2" charset="0"/>
+                </a:rPr>
+                <a:t>మ్రుతమైనది - అది కొరకానిది</a:t>
+              </a:r>
+            </a:p>
+            <a:p>
+              <a:pPr defTabSz="439781">
+                <a:defRPr/>
+              </a:pPr>
+              <a:r>
+                <a:rPr lang="te-IN" sz="2100" dirty="0">
+                  <a:latin typeface="Ramabhadra" panose="02000600000000000000" pitchFamily="2" charset="0"/>
+                  <a:cs typeface="Ramabhadra" panose="02000600000000000000" pitchFamily="2" charset="0"/>
+                </a:rPr>
+                <a:t>శక్తి లేని నీ - భక్తి మొత్తము</a:t>
+              </a:r>
+            </a:p>
+            <a:p>
+              <a:pPr defTabSz="439781">
+                <a:defRPr/>
+              </a:pPr>
+              <a:r>
+                <a:rPr lang="te-IN" sz="2100" dirty="0">
+                  <a:latin typeface="Ramabhadra" panose="02000600000000000000" pitchFamily="2" charset="0"/>
+                  <a:cs typeface="Ramabhadra" panose="02000600000000000000" pitchFamily="2" charset="0"/>
+                </a:rPr>
+                <a:t>వ్యర్థమైనది అది మేలు చేయదు (2)</a:t>
+              </a:r>
+            </a:p>
+            <a:p>
+              <a:pPr defTabSz="439781">
+                <a:defRPr/>
+              </a:pPr>
+              <a:r>
+                <a:rPr lang="te-IN" sz="2100" dirty="0">
+                  <a:latin typeface="Ramabhadra" panose="02000600000000000000" pitchFamily="2" charset="0"/>
+                  <a:cs typeface="Ramabhadra" panose="02000600000000000000" pitchFamily="2" charset="0"/>
+                </a:rPr>
+                <a:t>నామకార్ధమును విడిచి నమ్మీ చూడుము</a:t>
+              </a:r>
+            </a:p>
+            <a:p>
+              <a:pPr defTabSz="439781">
+                <a:defRPr/>
+              </a:pPr>
+              <a:r>
+                <a:rPr lang="te-IN" sz="2100" dirty="0">
+                  <a:latin typeface="Ramabhadra" panose="02000600000000000000" pitchFamily="2" charset="0"/>
+                  <a:cs typeface="Ramabhadra" panose="02000600000000000000" pitchFamily="2" charset="0"/>
+                </a:rPr>
+                <a:t>యదార్థమైన మనసును ఆశించుము</a:t>
+              </a:r>
+            </a:p>
+            <a:p>
+              <a:pPr defTabSz="439781">
+                <a:defRPr/>
+              </a:pPr>
+              <a:r>
+                <a:rPr lang="te-IN" sz="2100" dirty="0">
+                  <a:latin typeface="Ramabhadra" panose="02000600000000000000" pitchFamily="2" charset="0"/>
+                  <a:cs typeface="Ramabhadra" panose="02000600000000000000" pitchFamily="2" charset="0"/>
+                </a:rPr>
+                <a:t>మేలుకో లెమ్ము తేజరిల్లుమా</a:t>
               </a:r>
             </a:p>
           </p:txBody>
@@ -3333,7 +3327,7 @@
           </p:nvSpPr>
           <p:spPr>
             <a:xfrm>
-              <a:off x="4261380" y="326430"/>
+              <a:off x="369283" y="326430"/>
               <a:ext cx="390525" cy="390525"/>
             </a:xfrm>
             <a:prstGeom prst="ellipse">
@@ -3397,9 +3391,9 @@
         <p:grpSpPr>
           <a:xfrm>
             <a:off x="5104338" y="182031"/>
-            <a:ext cx="4773991" cy="6493935"/>
+            <a:ext cx="4881562" cy="6493935"/>
             <a:chOff x="160868" y="182032"/>
-            <a:chExt cx="4773991" cy="6493935"/>
+            <a:chExt cx="4881562" cy="6493935"/>
           </a:xfrm>
         </p:grpSpPr>
         <p:sp>
@@ -3471,8 +3465,8 @@
           </p:nvSpPr>
           <p:spPr>
             <a:xfrm>
-              <a:off x="393553" y="732056"/>
-              <a:ext cx="4541306" cy="5847755"/>
+              <a:off x="501124" y="716955"/>
+              <a:ext cx="4541306" cy="5693866"/>
             </a:xfrm>
             <a:prstGeom prst="rect">
               <a:avLst/>
@@ -3485,189 +3479,123 @@
             </a:bodyPr>
             <a:lstStyle/>
             <a:p>
-              <a:pPr defTabSz="439781">
-                <a:defRPr/>
-              </a:pPr>
-              <a:r>
-                <a:rPr lang="te-IN" sz="2200" dirty="0">
-                  <a:latin typeface="Ramabhadra" panose="02000600000000000000" pitchFamily="2" charset="0"/>
-                  <a:cs typeface="Ramabhadra" panose="02000600000000000000" pitchFamily="2" charset="0"/>
-                </a:rPr>
-                <a:t>ఆనందం నీలోనే – ఆధారం నీవేగా</a:t>
-              </a:r>
-            </a:p>
-            <a:p>
-              <a:pPr defTabSz="439781">
-                <a:defRPr/>
-              </a:pPr>
-              <a:r>
-                <a:rPr lang="te-IN" sz="2200" dirty="0">
-                  <a:latin typeface="Ramabhadra" panose="02000600000000000000" pitchFamily="2" charset="0"/>
-                  <a:cs typeface="Ramabhadra" panose="02000600000000000000" pitchFamily="2" charset="0"/>
-                </a:rPr>
-                <a:t>ఆశ్రయం నీలోనే – నా యేసయ్యా – స్తోత్రార్హుడు</a:t>
-              </a:r>
-            </a:p>
-            <a:p>
-              <a:pPr defTabSz="439781">
-                <a:defRPr/>
-              </a:pPr>
-              <a:r>
-                <a:rPr lang="te-IN" sz="2200" dirty="0">
-                  <a:latin typeface="Ramabhadra" panose="02000600000000000000" pitchFamily="2" charset="0"/>
-                  <a:cs typeface="Ramabhadra" panose="02000600000000000000" pitchFamily="2" charset="0"/>
-                </a:rPr>
-                <a:t>అర్హతేలేని నన్ను – ప్రేమించినావు</a:t>
-              </a:r>
-            </a:p>
-            <a:p>
-              <a:pPr defTabSz="439781">
-                <a:defRPr/>
-              </a:pPr>
-              <a:r>
-                <a:rPr lang="te-IN" sz="2200" dirty="0">
-                  <a:latin typeface="Ramabhadra" panose="02000600000000000000" pitchFamily="2" charset="0"/>
-                  <a:cs typeface="Ramabhadra" panose="02000600000000000000" pitchFamily="2" charset="0"/>
-                </a:rPr>
-                <a:t>జీవింతు ఇలలో – నీ కోసమే – సాక్ష్యార్థమై   </a:t>
-              </a:r>
-            </a:p>
-            <a:p>
-              <a:pPr defTabSz="439781">
-                <a:defRPr/>
-              </a:pPr>
-              <a:endParaRPr lang="te-IN" sz="2200" dirty="0">
+              <a:r>
+                <a:rPr lang="te-IN" sz="2600" dirty="0">
+                  <a:latin typeface="Ramabhadra" panose="02000600000000000000" pitchFamily="2" charset="0"/>
+                  <a:cs typeface="Ramabhadra" panose="02000600000000000000" pitchFamily="2" charset="0"/>
+                </a:rPr>
+                <a:t>స్తుతులన్ గైకొనుమా</a:t>
+              </a:r>
+            </a:p>
+            <a:p>
+              <a:r>
+                <a:rPr lang="te-IN" sz="2600" dirty="0">
+                  <a:latin typeface="Ramabhadra" panose="02000600000000000000" pitchFamily="2" charset="0"/>
+                  <a:cs typeface="Ramabhadra" panose="02000600000000000000" pitchFamily="2" charset="0"/>
+                </a:rPr>
+                <a:t>సుత యేసు క్రీస్తువా</a:t>
+              </a:r>
+            </a:p>
+            <a:p>
+              <a:r>
+                <a:rPr lang="te-IN" sz="2600" dirty="0">
+                  <a:latin typeface="Ramabhadra" panose="02000600000000000000" pitchFamily="2" charset="0"/>
+                  <a:cs typeface="Ramabhadra" panose="02000600000000000000" pitchFamily="2" charset="0"/>
+                </a:rPr>
+                <a:t>సతతము మమ్ములను </a:t>
+              </a:r>
+            </a:p>
+            <a:p>
+              <a:r>
+                <a:rPr lang="te-IN" sz="2600" dirty="0">
+                  <a:latin typeface="Ramabhadra" panose="02000600000000000000" pitchFamily="2" charset="0"/>
+                  <a:cs typeface="Ramabhadra" panose="02000600000000000000" pitchFamily="2" charset="0"/>
+                </a:rPr>
+                <a:t>కృపనిడి కావుమా</a:t>
+              </a:r>
+            </a:p>
+            <a:p>
+              <a:endParaRPr lang="te-IN" sz="2600" dirty="0">
                 <a:latin typeface="Ramabhadra" panose="02000600000000000000" pitchFamily="2" charset="0"/>
                 <a:cs typeface="Ramabhadra" panose="02000600000000000000" pitchFamily="2" charset="0"/>
               </a:endParaRPr>
             </a:p>
             <a:p>
-              <a:pPr defTabSz="439781">
-                <a:defRPr/>
-              </a:pPr>
-              <a:r>
-                <a:rPr lang="te-IN" sz="2200" dirty="0">
-                  <a:latin typeface="Ramabhadra" panose="02000600000000000000" pitchFamily="2" charset="0"/>
-                  <a:cs typeface="Ramabhadra" panose="02000600000000000000" pitchFamily="2" charset="0"/>
-                </a:rPr>
-                <a:t>పదే పదే నిన్నే చేరగా</a:t>
-              </a:r>
-            </a:p>
-            <a:p>
-              <a:pPr defTabSz="439781">
-                <a:defRPr/>
-              </a:pPr>
-              <a:r>
-                <a:rPr lang="te-IN" sz="2200" dirty="0">
-                  <a:latin typeface="Ramabhadra" panose="02000600000000000000" pitchFamily="2" charset="0"/>
-                  <a:cs typeface="Ramabhadra" panose="02000600000000000000" pitchFamily="2" charset="0"/>
-                </a:rPr>
-                <a:t>ప్రతిక్షణం నీవే ధ్యాసగా (2)</a:t>
-              </a:r>
-            </a:p>
-            <a:p>
-              <a:pPr defTabSz="439781">
-                <a:defRPr/>
-              </a:pPr>
-              <a:r>
-                <a:rPr lang="te-IN" sz="2200" dirty="0">
-                  <a:latin typeface="Ramabhadra" panose="02000600000000000000" pitchFamily="2" charset="0"/>
-                  <a:cs typeface="Ramabhadra" panose="02000600000000000000" pitchFamily="2" charset="0"/>
-                </a:rPr>
-                <a:t>కలవరాల కోటలో – కన్నీటి బాటలో (2)</a:t>
-              </a:r>
-            </a:p>
-            <a:p>
-              <a:pPr defTabSz="439781">
-                <a:defRPr/>
-              </a:pPr>
-              <a:r>
-                <a:rPr lang="te-IN" sz="2200" dirty="0">
-                  <a:latin typeface="Ramabhadra" panose="02000600000000000000" pitchFamily="2" charset="0"/>
-                  <a:cs typeface="Ramabhadra" panose="02000600000000000000" pitchFamily="2" charset="0"/>
-                </a:rPr>
-                <a:t>కాపాడే కవచంగా – నన్ను ఆవరించిన</a:t>
-              </a:r>
-            </a:p>
-            <a:p>
-              <a:pPr defTabSz="439781">
-                <a:defRPr/>
-              </a:pPr>
-              <a:r>
-                <a:rPr lang="te-IN" sz="2200" dirty="0">
-                  <a:latin typeface="Ramabhadra" panose="02000600000000000000" pitchFamily="2" charset="0"/>
-                  <a:cs typeface="Ramabhadra" panose="02000600000000000000" pitchFamily="2" charset="0"/>
-                </a:rPr>
-                <a:t>దివ్యక్షేత్రమా – స్తోత్రగీతమా   </a:t>
-              </a:r>
-            </a:p>
-            <a:p>
-              <a:pPr defTabSz="439781">
-                <a:defRPr/>
-              </a:pPr>
-              <a:endParaRPr lang="te-IN" sz="2200" dirty="0">
+              <a:r>
+                <a:rPr lang="te-IN" sz="2600" dirty="0">
+                  <a:latin typeface="Ramabhadra" panose="02000600000000000000" pitchFamily="2" charset="0"/>
+                  <a:cs typeface="Ramabhadra" panose="02000600000000000000" pitchFamily="2" charset="0"/>
+                </a:rPr>
+                <a:t>మా పెదవులతో ఎప్పుడు నీ</a:t>
+              </a:r>
+            </a:p>
+            <a:p>
+              <a:r>
+                <a:rPr lang="te-IN" sz="2600" dirty="0">
+                  <a:latin typeface="Ramabhadra" panose="02000600000000000000" pitchFamily="2" charset="0"/>
+                  <a:cs typeface="Ramabhadra" panose="02000600000000000000" pitchFamily="2" charset="0"/>
+                </a:rPr>
+                <a:t>వాక్యమును పఠింప నిమ్ము</a:t>
+              </a:r>
+            </a:p>
+            <a:p>
+              <a:r>
+                <a:rPr lang="te-IN" sz="2600" dirty="0">
+                  <a:latin typeface="Ramabhadra" panose="02000600000000000000" pitchFamily="2" charset="0"/>
+                  <a:cs typeface="Ramabhadra" panose="02000600000000000000" pitchFamily="2" charset="0"/>
+                </a:rPr>
+                <a:t>మా కాలు చేతులు ఎప్పుడు నీ </a:t>
+              </a:r>
+            </a:p>
+            <a:p>
+              <a:r>
+                <a:rPr lang="te-IN" sz="2600" dirty="0">
+                  <a:latin typeface="Ramabhadra" panose="02000600000000000000" pitchFamily="2" charset="0"/>
+                  <a:cs typeface="Ramabhadra" panose="02000600000000000000" pitchFamily="2" charset="0"/>
+                </a:rPr>
+                <a:t>సేవను చేయను వాడనిమ్ము </a:t>
+              </a:r>
+            </a:p>
+            <a:p>
+              <a:endParaRPr lang="te-IN" sz="2600" dirty="0">
                 <a:latin typeface="Ramabhadra" panose="02000600000000000000" pitchFamily="2" charset="0"/>
                 <a:cs typeface="Ramabhadra" panose="02000600000000000000" pitchFamily="2" charset="0"/>
               </a:endParaRPr>
             </a:p>
             <a:p>
-              <a:pPr defTabSz="439781">
-                <a:defRPr/>
-              </a:pPr>
-              <a:r>
-                <a:rPr lang="te-IN" sz="2200" dirty="0">
-                  <a:latin typeface="Ramabhadra" panose="02000600000000000000" pitchFamily="2" charset="0"/>
-                  <a:cs typeface="Ramabhadra" panose="02000600000000000000" pitchFamily="2" charset="0"/>
-                </a:rPr>
-                <a:t>నిరంతరం నీవే వెలుగని</a:t>
-              </a:r>
-            </a:p>
-            <a:p>
-              <a:pPr defTabSz="439781">
-                <a:defRPr/>
-              </a:pPr>
-              <a:r>
-                <a:rPr lang="te-IN" sz="2200" dirty="0">
-                  <a:latin typeface="Ramabhadra" panose="02000600000000000000" pitchFamily="2" charset="0"/>
-                  <a:cs typeface="Ramabhadra" panose="02000600000000000000" pitchFamily="2" charset="0"/>
-                </a:rPr>
-                <a:t>నిత్యమైన స్వాస్థ్యం నీదని (2)</a:t>
-              </a:r>
-            </a:p>
-            <a:p>
-              <a:pPr defTabSz="439781">
-                <a:defRPr/>
-              </a:pPr>
-              <a:r>
-                <a:rPr lang="te-IN" sz="2200" dirty="0">
-                  <a:latin typeface="Ramabhadra" panose="02000600000000000000" pitchFamily="2" charset="0"/>
-                  <a:cs typeface="Ramabhadra" panose="02000600000000000000" pitchFamily="2" charset="0"/>
-                </a:rPr>
-                <a:t>నీ సన్నిధి వీడక – సన్నుతించి పాడనా (2)</a:t>
-              </a:r>
-            </a:p>
-            <a:p>
-              <a:pPr defTabSz="439781">
-                <a:defRPr/>
-              </a:pPr>
-              <a:r>
-                <a:rPr lang="te-IN" sz="2200" dirty="0">
-                  <a:latin typeface="Ramabhadra" panose="02000600000000000000" pitchFamily="2" charset="0"/>
-                  <a:cs typeface="Ramabhadra" panose="02000600000000000000" pitchFamily="2" charset="0"/>
-                </a:rPr>
-                <a:t>నీకొరకే ధ్వజమెత్తి నిన్న ప్రకటించనా</a:t>
-              </a:r>
-            </a:p>
-            <a:p>
-              <a:pPr defTabSz="439781">
-                <a:defRPr/>
-              </a:pPr>
-              <a:r>
-                <a:rPr lang="te-IN" sz="2200" dirty="0">
-                  <a:latin typeface="Ramabhadra" panose="02000600000000000000" pitchFamily="2" charset="0"/>
-                  <a:cs typeface="Ramabhadra" panose="02000600000000000000" pitchFamily="2" charset="0"/>
-                </a:rPr>
-                <a:t>సత్యవాక్యమే – జీవవాక్యమే </a:t>
+              <a:r>
+                <a:rPr lang="te-IN" sz="2600" dirty="0">
+                  <a:latin typeface="Ramabhadra" panose="02000600000000000000" pitchFamily="2" charset="0"/>
+                  <a:cs typeface="Ramabhadra" panose="02000600000000000000" pitchFamily="2" charset="0"/>
+                </a:rPr>
+                <a:t>మా కలిమియు పదవుల నెల్ల </a:t>
+              </a:r>
+            </a:p>
+            <a:p>
+              <a:r>
+                <a:rPr lang="te-IN" sz="2600" dirty="0">
+                  <a:latin typeface="Ramabhadra" panose="02000600000000000000" pitchFamily="2" charset="0"/>
+                  <a:cs typeface="Ramabhadra" panose="02000600000000000000" pitchFamily="2" charset="0"/>
+                </a:rPr>
+                <a:t>నీ శుద్ధ కృపచే పొందితిమి </a:t>
+              </a:r>
+            </a:p>
+            <a:p>
+              <a:r>
+                <a:rPr lang="te-IN" sz="2600" dirty="0">
+                  <a:latin typeface="Ramabhadra" panose="02000600000000000000" pitchFamily="2" charset="0"/>
+                  <a:cs typeface="Ramabhadra" panose="02000600000000000000" pitchFamily="2" charset="0"/>
+                </a:rPr>
+                <a:t>మా కాలమంతయు జీవింప </a:t>
+              </a:r>
+            </a:p>
+            <a:p>
+              <a:r>
+                <a:rPr lang="te-IN" sz="2600" dirty="0">
+                  <a:latin typeface="Ramabhadra" panose="02000600000000000000" pitchFamily="2" charset="0"/>
+                  <a:cs typeface="Ramabhadra" panose="02000600000000000000" pitchFamily="2" charset="0"/>
+                </a:rPr>
+                <a:t>నిలకడగ నుండ దీవించుము</a:t>
               </a:r>
             </a:p>
           </p:txBody>
@@ -3780,9 +3708,9 @@
         <p:grpSpPr>
           <a:xfrm>
             <a:off x="160868" y="182032"/>
-            <a:ext cx="4792132" cy="6493935"/>
+            <a:ext cx="4792132" cy="6501382"/>
             <a:chOff x="160868" y="182032"/>
-            <a:chExt cx="4792132" cy="6493935"/>
+            <a:chExt cx="4792132" cy="6501382"/>
           </a:xfrm>
         </p:grpSpPr>
         <p:sp>
@@ -3854,8 +3782,8 @@
           </p:nvSpPr>
           <p:spPr>
             <a:xfrm>
-              <a:off x="304800" y="830573"/>
-              <a:ext cx="4648200" cy="5586145"/>
+              <a:off x="304800" y="774104"/>
+              <a:ext cx="4648200" cy="5909310"/>
             </a:xfrm>
             <a:prstGeom prst="rect">
               <a:avLst/>
@@ -3876,7 +3804,7 @@
                   <a:latin typeface="Ramabhadra" panose="02000600000000000000" pitchFamily="2" charset="0"/>
                   <a:cs typeface="Ramabhadra" panose="02000600000000000000" pitchFamily="2" charset="0"/>
                 </a:rPr>
-                <a:t>నేనెల్లప్పుడు యెహోవాను సన్నుతించెదన్‌</a:t>
+                <a:t>నమ్మకమైన దేవుడవైన నీవే చాలు యేసయ్యా (2)</a:t>
               </a:r>
             </a:p>
             <a:p>
@@ -3888,7 +3816,7 @@
                   <a:latin typeface="Ramabhadra" panose="02000600000000000000" pitchFamily="2" charset="0"/>
                   <a:cs typeface="Ramabhadra" panose="02000600000000000000" pitchFamily="2" charset="0"/>
                 </a:rPr>
-                <a:t>నిత్యము ఆయన కీర్తి నా నోట నుండున్‌ - (2)</a:t>
+                <a:t>నేనేమైయున్నా ఏ స్థితిలో ఉన్నా (2)</a:t>
               </a:r>
             </a:p>
             <a:p>
@@ -3900,59 +3828,7 @@
                   <a:latin typeface="Ramabhadra" panose="02000600000000000000" pitchFamily="2" charset="0"/>
                   <a:cs typeface="Ramabhadra" panose="02000600000000000000" pitchFamily="2" charset="0"/>
                 </a:rPr>
-                <a:t>అంతా నా మేలుకే - ఆరాధనా యేసుకే</a:t>
-              </a:r>
-            </a:p>
-            <a:p>
-              <a:pPr defTabSz="439781">
-                <a:defRPr/>
-              </a:pPr>
-              <a:r>
-                <a:rPr lang="te-IN" sz="2100" dirty="0">
-                  <a:latin typeface="Ramabhadra" panose="02000600000000000000" pitchFamily="2" charset="0"/>
-                  <a:cs typeface="Ramabhadra" panose="02000600000000000000" pitchFamily="2" charset="0"/>
-                </a:rPr>
-                <a:t>అంతా నా మంచికే –</a:t>
-              </a:r>
-              <a:endParaRPr lang="en-IN" sz="2100" dirty="0">
-                <a:latin typeface="Ramabhadra" panose="02000600000000000000" pitchFamily="2" charset="0"/>
-                <a:cs typeface="Ramabhadra" panose="02000600000000000000" pitchFamily="2" charset="0"/>
-              </a:endParaRPr>
-            </a:p>
-            <a:p>
-              <a:pPr defTabSz="439781">
-                <a:defRPr/>
-              </a:pPr>
-              <a:r>
-                <a:rPr lang="te-IN" sz="2100" dirty="0">
-                  <a:latin typeface="Ramabhadra" panose="02000600000000000000" pitchFamily="2" charset="0"/>
-                  <a:cs typeface="Ramabhadra" panose="02000600000000000000" pitchFamily="2" charset="0"/>
-                </a:rPr>
-                <a:t>తన చిత్తమునకు తల వంచితే-(2)</a:t>
-              </a:r>
-            </a:p>
-            <a:p>
-              <a:pPr defTabSz="439781">
-                <a:defRPr/>
-              </a:pPr>
-              <a:r>
-                <a:rPr lang="te-IN" sz="2100" dirty="0">
-                  <a:latin typeface="Ramabhadra" panose="02000600000000000000" pitchFamily="2" charset="0"/>
-                  <a:cs typeface="Ramabhadra" panose="02000600000000000000" pitchFamily="2" charset="0"/>
-                </a:rPr>
-                <a:t>అరాధన ఆపను - స్తుతియించుట మానను - (2)</a:t>
-              </a:r>
-            </a:p>
-            <a:p>
-              <a:pPr defTabSz="439781">
-                <a:defRPr/>
-              </a:pPr>
-              <a:r>
-                <a:rPr lang="te-IN" sz="2100" dirty="0">
-                  <a:latin typeface="Ramabhadra" panose="02000600000000000000" pitchFamily="2" charset="0"/>
-                  <a:cs typeface="Ramabhadra" panose="02000600000000000000" pitchFamily="2" charset="0"/>
-                </a:rPr>
-                <a:t>స్తుతియించుట మానను</a:t>
+                <a:t>ఇంకేమి కోరుకోనయ్యా (2)</a:t>
               </a:r>
             </a:p>
             <a:p>
@@ -3973,7 +3849,7 @@
                   <a:latin typeface="Ramabhadra" panose="02000600000000000000" pitchFamily="2" charset="0"/>
                   <a:cs typeface="Ramabhadra" panose="02000600000000000000" pitchFamily="2" charset="0"/>
                 </a:rPr>
-                <a:t>1. కన్నీల్లే పానములైన - కఠిన దుఃఖ బాధలైన</a:t>
+                <a:t>ఆప్తులైన వారే హాని చేయచూసినా</a:t>
               </a:r>
             </a:p>
             <a:p>
@@ -3985,7 +3861,7 @@
                   <a:latin typeface="Ramabhadra" panose="02000600000000000000" pitchFamily="2" charset="0"/>
                   <a:cs typeface="Ramabhadra" panose="02000600000000000000" pitchFamily="2" charset="0"/>
                 </a:rPr>
-                <a:t>స్థితిగతులే మారిన - అవకాశం చేజారిన</a:t>
+                <a:t>మిత్రులే నిలువకుండినా (2)</a:t>
               </a:r>
             </a:p>
             <a:p>
@@ -3997,7 +3873,7 @@
                   <a:latin typeface="Ramabhadra" panose="02000600000000000000" pitchFamily="2" charset="0"/>
                   <a:cs typeface="Ramabhadra" panose="02000600000000000000" pitchFamily="2" charset="0"/>
                 </a:rPr>
-                <a:t>మారదు యేసు ప్రేమ - నిత్యుడైన తండ్రి ప్రేమ - (2)</a:t>
+                <a:t>న్యాయము తీర్చే నీవు నాకుంటే (2)</a:t>
               </a:r>
             </a:p>
             <a:p>
@@ -4009,8 +3885,12 @@
                   <a:latin typeface="Ramabhadra" panose="02000600000000000000" pitchFamily="2" charset="0"/>
                   <a:cs typeface="Ramabhadra" panose="02000600000000000000" pitchFamily="2" charset="0"/>
                 </a:rPr>
-                <a:t>మారదు యేసు ప్రేమ - నిత్యుడైన తండ్రి ప్రేమ - (2)</a:t>
-              </a:r>
+                <a:t>చాలు యేసయ్యా (2)</a:t>
+              </a:r>
+              <a:endParaRPr lang="en-US" sz="2100" dirty="0">
+                <a:latin typeface="Ramabhadra" panose="02000600000000000000" pitchFamily="2" charset="0"/>
+                <a:cs typeface="Ramabhadra" panose="02000600000000000000" pitchFamily="2" charset="0"/>
+              </a:endParaRPr>
             </a:p>
             <a:p>
               <a:pPr defTabSz="439781">
@@ -4030,7 +3910,7 @@
                   <a:latin typeface="Ramabhadra" panose="02000600000000000000" pitchFamily="2" charset="0"/>
                   <a:cs typeface="Ramabhadra" panose="02000600000000000000" pitchFamily="2" charset="0"/>
                 </a:rPr>
-                <a:t>2. ఆస్తులన్ని కోల్పొయిన - కన్నవారే కునుమరుగైన</a:t>
+                <a:t>జ్ఞానమంత చూపి శక్తి ధారపోసినా</a:t>
               </a:r>
             </a:p>
             <a:p>
@@ -4042,7 +3922,7 @@
                   <a:latin typeface="Ramabhadra" panose="02000600000000000000" pitchFamily="2" charset="0"/>
                   <a:cs typeface="Ramabhadra" panose="02000600000000000000" pitchFamily="2" charset="0"/>
                 </a:rPr>
-                <a:t>ఊపిరి బరువైన - గుండెలే పగిలినా</a:t>
+                <a:t>నష్టమే మిగులుచుండినా (2)</a:t>
               </a:r>
             </a:p>
             <a:p>
@@ -4054,7 +3934,7 @@
                   <a:latin typeface="Ramabhadra" panose="02000600000000000000" pitchFamily="2" charset="0"/>
                   <a:cs typeface="Ramabhadra" panose="02000600000000000000" pitchFamily="2" charset="0"/>
                 </a:rPr>
-                <a:t>యెహోవా యిచ్చెను - యెహోవా తీసికొనెను - (2)</a:t>
+                <a:t>శాపము బాపే నీవు నాకుంటే (2)</a:t>
               </a:r>
             </a:p>
             <a:p>
@@ -4066,7 +3946,68 @@
                   <a:latin typeface="Ramabhadra" panose="02000600000000000000" pitchFamily="2" charset="0"/>
                   <a:cs typeface="Ramabhadra" panose="02000600000000000000" pitchFamily="2" charset="0"/>
                 </a:rPr>
-                <a:t>ఆయన నామమునకే - స్తుతి కలుగు గాక - (2)</a:t>
+                <a:t>చాలు యేసయ్యా (2)</a:t>
+              </a:r>
+              <a:endParaRPr lang="en-US" sz="2100" dirty="0">
+                <a:latin typeface="Ramabhadra" panose="02000600000000000000" pitchFamily="2" charset="0"/>
+                <a:cs typeface="Ramabhadra" panose="02000600000000000000" pitchFamily="2" charset="0"/>
+              </a:endParaRPr>
+            </a:p>
+            <a:p>
+              <a:pPr defTabSz="439781">
+                <a:defRPr/>
+              </a:pPr>
+              <a:endParaRPr lang="te-IN" sz="2100" dirty="0">
+                <a:latin typeface="Ramabhadra" panose="02000600000000000000" pitchFamily="2" charset="0"/>
+                <a:cs typeface="Ramabhadra" panose="02000600000000000000" pitchFamily="2" charset="0"/>
+              </a:endParaRPr>
+            </a:p>
+            <a:p>
+              <a:pPr defTabSz="439781">
+                <a:defRPr/>
+              </a:pPr>
+              <a:r>
+                <a:rPr lang="te-IN" sz="2100" dirty="0">
+                  <a:latin typeface="Ramabhadra" panose="02000600000000000000" pitchFamily="2" charset="0"/>
+                  <a:cs typeface="Ramabhadra" panose="02000600000000000000" pitchFamily="2" charset="0"/>
+                </a:rPr>
+                <a:t>కష్ట కాలమందు గుండె జారిపోయినా</a:t>
+              </a:r>
+            </a:p>
+            <a:p>
+              <a:pPr defTabSz="439781">
+                <a:defRPr/>
+              </a:pPr>
+              <a:r>
+                <a:rPr lang="te-IN" sz="2100" dirty="0">
+                  <a:latin typeface="Ramabhadra" panose="02000600000000000000" pitchFamily="2" charset="0"/>
+                  <a:cs typeface="Ramabhadra" panose="02000600000000000000" pitchFamily="2" charset="0"/>
+                </a:rPr>
+                <a:t>గమ్యమే తెలియకుండినా (2)</a:t>
+              </a:r>
+            </a:p>
+            <a:p>
+              <a:pPr defTabSz="439781">
+                <a:defRPr/>
+              </a:pPr>
+              <a:r>
+                <a:rPr lang="te-IN" sz="2100" dirty="0">
+                  <a:latin typeface="Ramabhadra" panose="02000600000000000000" pitchFamily="2" charset="0"/>
+                  <a:cs typeface="Ramabhadra" panose="02000600000000000000" pitchFamily="2" charset="0"/>
+                </a:rPr>
+                <a:t>సాయము చేసే నీవు నాకుంటే (2)</a:t>
+              </a:r>
+            </a:p>
+            <a:p>
+              <a:pPr defTabSz="439781">
+                <a:defRPr/>
+              </a:pPr>
+              <a:r>
+                <a:rPr lang="te-IN" sz="2100" dirty="0">
+                  <a:latin typeface="Ramabhadra" panose="02000600000000000000" pitchFamily="2" charset="0"/>
+                  <a:cs typeface="Ramabhadra" panose="02000600000000000000" pitchFamily="2" charset="0"/>
+                </a:rPr>
+                <a:t>చాలు యేసయ్యా (2)</a:t>
               </a:r>
             </a:p>
           </p:txBody>
@@ -4149,9 +4090,9 @@
         <p:grpSpPr>
           <a:xfrm>
             <a:off x="5104338" y="182031"/>
-            <a:ext cx="4673149" cy="6493935"/>
+            <a:ext cx="4648200" cy="6493935"/>
             <a:chOff x="160868" y="182032"/>
-            <a:chExt cx="4673149" cy="6493935"/>
+            <a:chExt cx="4648200" cy="6493935"/>
           </a:xfrm>
         </p:grpSpPr>
         <p:sp>
@@ -4223,8 +4164,8 @@
           </p:nvSpPr>
           <p:spPr>
             <a:xfrm>
-              <a:off x="292711" y="861353"/>
-              <a:ext cx="4541306" cy="5262979"/>
+              <a:off x="247650" y="745935"/>
+              <a:ext cx="4541306" cy="4693593"/>
             </a:xfrm>
             <a:prstGeom prst="rect">
               <a:avLst/>
@@ -4241,56 +4182,30 @@
                 <a:defRPr/>
               </a:pPr>
               <a:r>
-                <a:rPr lang="te-IN" sz="2400" dirty="0">
-                  <a:latin typeface="Ramabhadra" panose="02000600000000000000" pitchFamily="2" charset="0"/>
-                  <a:cs typeface="Ramabhadra" panose="02000600000000000000" pitchFamily="2" charset="0"/>
-                </a:rPr>
-                <a:t>ప్రార్థన శక్తి నాకు కావాలయ్యా</a:t>
-              </a:r>
-            </a:p>
-            <a:p>
-              <a:pPr defTabSz="439781">
-                <a:defRPr/>
-              </a:pPr>
-              <a:r>
-                <a:rPr lang="te-IN" sz="2400" dirty="0">
-                  <a:latin typeface="Ramabhadra" panose="02000600000000000000" pitchFamily="2" charset="0"/>
-                  <a:cs typeface="Ramabhadra" panose="02000600000000000000" pitchFamily="2" charset="0"/>
-                </a:rPr>
-                <a:t>నీ పరలోక అభిషేకం కావాలయ్యా (2)</a:t>
-              </a:r>
-            </a:p>
-            <a:p>
-              <a:pPr defTabSz="439781">
-                <a:defRPr/>
-              </a:pPr>
-              <a:r>
-                <a:rPr lang="te-IN" sz="2400" dirty="0">
-                  <a:latin typeface="Ramabhadra" panose="02000600000000000000" pitchFamily="2" charset="0"/>
-                  <a:cs typeface="Ramabhadra" panose="02000600000000000000" pitchFamily="2" charset="0"/>
-                </a:rPr>
-                <a:t>యేసయ్యా కావాలయ్యా</a:t>
-              </a:r>
-            </a:p>
-            <a:p>
-              <a:pPr defTabSz="439781">
-                <a:defRPr/>
-              </a:pPr>
-              <a:r>
-                <a:rPr lang="te-IN" sz="2400" dirty="0">
-                  <a:latin typeface="Ramabhadra" panose="02000600000000000000" pitchFamily="2" charset="0"/>
-                  <a:cs typeface="Ramabhadra" panose="02000600000000000000" pitchFamily="2" charset="0"/>
-                </a:rPr>
-                <a:t>నీ ఆత్మ అభిషేకం కావలయ్యా (2</a:t>
-              </a:r>
-              <a:r>
-                <a:rPr lang="en-IN" sz="2400" dirty="0">
-                  <a:latin typeface="Ramabhadra" panose="02000600000000000000" pitchFamily="2" charset="0"/>
-                  <a:cs typeface="Ramabhadra" panose="02000600000000000000" pitchFamily="2" charset="0"/>
-                </a:rPr>
-                <a:t>)</a:t>
-              </a:r>
-              <a:endParaRPr lang="te-IN" sz="2400" dirty="0">
+                <a:rPr lang="te-IN" sz="2300" dirty="0">
+                  <a:latin typeface="Ramabhadra" panose="02000600000000000000" pitchFamily="2" charset="0"/>
+                  <a:cs typeface="Ramabhadra" panose="02000600000000000000" pitchFamily="2" charset="0"/>
+                </a:rPr>
+                <a:t>మంచి దేవుడు భలే మంచి దేవుడు</a:t>
+              </a:r>
+            </a:p>
+            <a:p>
+              <a:pPr defTabSz="439781">
+                <a:defRPr/>
+              </a:pPr>
+              <a:r>
+                <a:rPr lang="te-IN" sz="2300" dirty="0">
+                  <a:latin typeface="Ramabhadra" panose="02000600000000000000" pitchFamily="2" charset="0"/>
+                  <a:cs typeface="Ramabhadra" panose="02000600000000000000" pitchFamily="2" charset="0"/>
+                </a:rPr>
+                <a:t>నిజ దైవం యేసు - అద్వితీయ దేవుడు</a:t>
+              </a:r>
+            </a:p>
+            <a:p>
+              <a:pPr defTabSz="439781">
+                <a:defRPr/>
+              </a:pPr>
+              <a:endParaRPr lang="te-IN" sz="2300" dirty="0">
                 <a:latin typeface="Ramabhadra" panose="02000600000000000000" pitchFamily="2" charset="0"/>
                 <a:cs typeface="Ramabhadra" panose="02000600000000000000" pitchFamily="2" charset="0"/>
               </a:endParaRPr>
@@ -4299,7 +4214,62 @@
               <a:pPr defTabSz="439781">
                 <a:defRPr/>
               </a:pPr>
-              <a:endParaRPr lang="te-IN" sz="2400" dirty="0">
+              <a:r>
+                <a:rPr lang="te-IN" sz="2300" dirty="0">
+                  <a:latin typeface="Ramabhadra" panose="02000600000000000000" pitchFamily="2" charset="0"/>
+                  <a:cs typeface="Ramabhadra" panose="02000600000000000000" pitchFamily="2" charset="0"/>
+                </a:rPr>
+                <a:t>మ్రొక్కులను కోరడు - మనసిస్తే చాలును</a:t>
+              </a:r>
+            </a:p>
+            <a:p>
+              <a:pPr defTabSz="439781">
+                <a:defRPr/>
+              </a:pPr>
+              <a:r>
+                <a:rPr lang="te-IN" sz="2300" dirty="0">
+                  <a:latin typeface="Ramabhadra" panose="02000600000000000000" pitchFamily="2" charset="0"/>
+                  <a:cs typeface="Ramabhadra" panose="02000600000000000000" pitchFamily="2" charset="0"/>
+                </a:rPr>
+                <a:t>కొండలెక్కి రమ్మనడు - మనలో కొలువుంటాడు</a:t>
+              </a:r>
+            </a:p>
+            <a:p>
+              <a:pPr defTabSz="439781">
+                <a:defRPr/>
+              </a:pPr>
+              <a:r>
+                <a:rPr lang="te-IN" sz="2300" dirty="0">
+                  <a:latin typeface="Ramabhadra" panose="02000600000000000000" pitchFamily="2" charset="0"/>
+                  <a:cs typeface="Ramabhadra" panose="02000600000000000000" pitchFamily="2" charset="0"/>
+                </a:rPr>
+                <a:t>వెదికితే ప్రతి వారికి - దొరికేను యేసు</a:t>
+              </a:r>
+            </a:p>
+            <a:p>
+              <a:pPr defTabSz="439781">
+                <a:defRPr/>
+              </a:pPr>
+              <a:r>
+                <a:rPr lang="te-IN" sz="2300" dirty="0">
+                  <a:latin typeface="Ramabhadra" panose="02000600000000000000" pitchFamily="2" charset="0"/>
+                  <a:cs typeface="Ramabhadra" panose="02000600000000000000" pitchFamily="2" charset="0"/>
+                </a:rPr>
+                <a:t>పిలిచే ప్రతి వారికి - పలికేను యేసు</a:t>
+              </a:r>
+            </a:p>
+            <a:p>
+              <a:pPr defTabSz="439781">
+                <a:defRPr/>
+              </a:pPr>
+              <a:r>
+                <a:rPr lang="te-IN" sz="2300" dirty="0">
+                  <a:latin typeface="Ramabhadra" panose="02000600000000000000" pitchFamily="2" charset="0"/>
+                  <a:cs typeface="Ramabhadra" panose="02000600000000000000" pitchFamily="2" charset="0"/>
+                </a:rPr>
+                <a:t>బొమ్మ కాదయ్యో - జీవమున్న దేవుడు</a:t>
+              </a:r>
+              <a:endParaRPr lang="en-US" sz="2300" dirty="0">
                 <a:latin typeface="Ramabhadra" panose="02000600000000000000" pitchFamily="2" charset="0"/>
                 <a:cs typeface="Ramabhadra" panose="02000600000000000000" pitchFamily="2" charset="0"/>
               </a:endParaRPr>
@@ -4308,57 +4278,7 @@
               <a:pPr defTabSz="439781">
                 <a:defRPr/>
               </a:pPr>
-              <a:r>
-                <a:rPr lang="te-IN" sz="2400" dirty="0">
-                  <a:latin typeface="Ramabhadra" panose="02000600000000000000" pitchFamily="2" charset="0"/>
-                  <a:cs typeface="Ramabhadra" panose="02000600000000000000" pitchFamily="2" charset="0"/>
-                </a:rPr>
-                <a:t>ఏలియా ప్రార్థింపగ పొందిన శక్తి</a:t>
-              </a:r>
-            </a:p>
-            <a:p>
-              <a:pPr defTabSz="439781">
-                <a:defRPr/>
-              </a:pPr>
-              <a:r>
-                <a:rPr lang="te-IN" sz="2400" dirty="0">
-                  <a:latin typeface="Ramabhadra" panose="02000600000000000000" pitchFamily="2" charset="0"/>
-                  <a:cs typeface="Ramabhadra" panose="02000600000000000000" pitchFamily="2" charset="0"/>
-                </a:rPr>
-                <a:t>నేను ప్రార్థింపగ దయచేయుమా (2)</a:t>
-              </a:r>
-            </a:p>
-            <a:p>
-              <a:pPr defTabSz="439781">
-                <a:defRPr/>
-              </a:pPr>
-              <a:r>
-                <a:rPr lang="te-IN" sz="2400" dirty="0">
-                  <a:latin typeface="Ramabhadra" panose="02000600000000000000" pitchFamily="2" charset="0"/>
-                  <a:cs typeface="Ramabhadra" panose="02000600000000000000" pitchFamily="2" charset="0"/>
-                </a:rPr>
-                <a:t>ప్రార్థించి నిను చేరు భాగ్యమీయుమా (2)</a:t>
-              </a:r>
-            </a:p>
-            <a:p>
-              <a:pPr defTabSz="439781">
-                <a:defRPr/>
-              </a:pPr>
-              <a:r>
-                <a:rPr lang="te-IN" sz="2400" dirty="0">
-                  <a:latin typeface="Ramabhadra" panose="02000600000000000000" pitchFamily="2" charset="0"/>
-                  <a:cs typeface="Ramabhadra" panose="02000600000000000000" pitchFamily="2" charset="0"/>
-                </a:rPr>
-                <a:t>నిరంతరం ప్రార్థింప కృపనీయుమా (2</a:t>
-              </a:r>
-              <a:r>
-                <a:rPr lang="en-IN" sz="2400" dirty="0">
-                  <a:latin typeface="Ramabhadra" panose="02000600000000000000" pitchFamily="2" charset="0"/>
-                  <a:cs typeface="Ramabhadra" panose="02000600000000000000" pitchFamily="2" charset="0"/>
-                </a:rPr>
-                <a:t>)</a:t>
-              </a:r>
-              <a:endParaRPr lang="te-IN" sz="2400" dirty="0">
+              <a:endParaRPr lang="te-IN" sz="2300" dirty="0">
                 <a:latin typeface="Ramabhadra" panose="02000600000000000000" pitchFamily="2" charset="0"/>
                 <a:cs typeface="Ramabhadra" panose="02000600000000000000" pitchFamily="2" charset="0"/>
               </a:endParaRPr>
@@ -4367,57 +4287,48 @@
               <a:pPr defTabSz="439781">
                 <a:defRPr/>
               </a:pPr>
-              <a:endParaRPr lang="te-IN" sz="2400" dirty="0">
-                <a:latin typeface="Ramabhadra" panose="02000600000000000000" pitchFamily="2" charset="0"/>
-                <a:cs typeface="Ramabhadra" panose="02000600000000000000" pitchFamily="2" charset="0"/>
-              </a:endParaRPr>
-            </a:p>
-            <a:p>
-              <a:pPr defTabSz="439781">
-                <a:defRPr/>
-              </a:pPr>
-              <a:r>
-                <a:rPr lang="te-IN" sz="2400" dirty="0">
-                  <a:latin typeface="Ramabhadra" panose="02000600000000000000" pitchFamily="2" charset="0"/>
-                  <a:cs typeface="Ramabhadra" panose="02000600000000000000" pitchFamily="2" charset="0"/>
-                </a:rPr>
-                <a:t>సింహాల గుహలోని దానియేలు శక్తి</a:t>
-              </a:r>
-            </a:p>
-            <a:p>
-              <a:pPr defTabSz="439781">
-                <a:defRPr/>
-              </a:pPr>
-              <a:r>
-                <a:rPr lang="te-IN" sz="2400" dirty="0">
-                  <a:latin typeface="Ramabhadra" panose="02000600000000000000" pitchFamily="2" charset="0"/>
-                  <a:cs typeface="Ramabhadra" panose="02000600000000000000" pitchFamily="2" charset="0"/>
-                </a:rPr>
-                <a:t>ఈ లోకంలో నాకు కావలయ్యా (2)</a:t>
-              </a:r>
-            </a:p>
-            <a:p>
-              <a:pPr defTabSz="439781">
-                <a:defRPr/>
-              </a:pPr>
-              <a:r>
-                <a:rPr lang="te-IN" sz="2400" dirty="0">
-                  <a:latin typeface="Ramabhadra" panose="02000600000000000000" pitchFamily="2" charset="0"/>
-                  <a:cs typeface="Ramabhadra" panose="02000600000000000000" pitchFamily="2" charset="0"/>
-                </a:rPr>
-                <a:t>నీతో నడిచే వరమీయుమా (2)</a:t>
-              </a:r>
-            </a:p>
-            <a:p>
-              <a:pPr defTabSz="439781">
-                <a:defRPr/>
-              </a:pPr>
-              <a:r>
-                <a:rPr lang="te-IN" sz="2400" dirty="0">
-                  <a:latin typeface="Ramabhadra" panose="02000600000000000000" pitchFamily="2" charset="0"/>
-                  <a:cs typeface="Ramabhadra" panose="02000600000000000000" pitchFamily="2" charset="0"/>
-                </a:rPr>
-                <a:t>నీ సిలువను మోసే కృపనీయుమా (2) </a:t>
+              <a:r>
+                <a:rPr lang="te-IN" sz="2300" dirty="0">
+                  <a:latin typeface="Ramabhadra" panose="02000600000000000000" pitchFamily="2" charset="0"/>
+                  <a:cs typeface="Ramabhadra" panose="02000600000000000000" pitchFamily="2" charset="0"/>
+                </a:rPr>
+                <a:t>కుంటివాడు గంతులేయ - కాళ్ళ నొసగినాడు</a:t>
+              </a:r>
+            </a:p>
+            <a:p>
+              <a:pPr defTabSz="439781">
+                <a:defRPr/>
+              </a:pPr>
+              <a:r>
+                <a:rPr lang="te-IN" sz="2300" dirty="0">
+                  <a:latin typeface="Ramabhadra" panose="02000600000000000000" pitchFamily="2" charset="0"/>
+                  <a:cs typeface="Ramabhadra" panose="02000600000000000000" pitchFamily="2" charset="0"/>
+                </a:rPr>
+                <a:t>మూగవారు స్తుతిచేయ - నోటినిచ్చినాడు</a:t>
+              </a:r>
+            </a:p>
+            <a:p>
+              <a:pPr defTabSz="439781">
+                <a:defRPr/>
+              </a:pPr>
+              <a:r>
+                <a:rPr lang="te-IN" sz="2300" dirty="0">
+                  <a:latin typeface="Ramabhadra" panose="02000600000000000000" pitchFamily="2" charset="0"/>
+                  <a:cs typeface="Ramabhadra" panose="02000600000000000000" pitchFamily="2" charset="0"/>
+                </a:rPr>
+                <a:t>బధిరులు తన స్వరము విన - చెవులిచ్చినాడు</a:t>
+              </a:r>
+            </a:p>
+            <a:p>
+              <a:pPr defTabSz="439781">
+                <a:defRPr/>
+              </a:pPr>
+              <a:r>
+                <a:rPr lang="te-IN" sz="2300" dirty="0">
+                  <a:latin typeface="Ramabhadra" panose="02000600000000000000" pitchFamily="2" charset="0"/>
+                  <a:cs typeface="Ramabhadra" panose="02000600000000000000" pitchFamily="2" charset="0"/>
+                </a:rPr>
+                <a:t>ప్రేమా మయుడు - ఆశ్చర్య దేవుడు</a:t>
               </a:r>
             </a:p>
           </p:txBody>

--- a/songsTemplate.pptx
+++ b/songsTemplate.pptx
@@ -255,7 +255,7 @@
           <a:p>
             <a:fld id="{F1102B08-ED9E-409F-B95F-09CAA1DAF6E0}" type="datetimeFigureOut">
               <a:rPr lang="en-IN" smtClean="0"/>
-              <a:t>10-11-2024</a:t>
+              <a:t>16-11-2024</a:t>
             </a:fld>
             <a:endParaRPr lang="en-IN"/>
           </a:p>
@@ -425,7 +425,7 @@
           <a:p>
             <a:fld id="{F1102B08-ED9E-409F-B95F-09CAA1DAF6E0}" type="datetimeFigureOut">
               <a:rPr lang="en-IN" smtClean="0"/>
-              <a:t>10-11-2024</a:t>
+              <a:t>16-11-2024</a:t>
             </a:fld>
             <a:endParaRPr lang="en-IN"/>
           </a:p>
@@ -605,7 +605,7 @@
           <a:p>
             <a:fld id="{F1102B08-ED9E-409F-B95F-09CAA1DAF6E0}" type="datetimeFigureOut">
               <a:rPr lang="en-IN" smtClean="0"/>
-              <a:t>10-11-2024</a:t>
+              <a:t>16-11-2024</a:t>
             </a:fld>
             <a:endParaRPr lang="en-IN"/>
           </a:p>
@@ -775,7 +775,7 @@
           <a:p>
             <a:fld id="{F1102B08-ED9E-409F-B95F-09CAA1DAF6E0}" type="datetimeFigureOut">
               <a:rPr lang="en-IN" smtClean="0"/>
-              <a:t>10-11-2024</a:t>
+              <a:t>16-11-2024</a:t>
             </a:fld>
             <a:endParaRPr lang="en-IN"/>
           </a:p>
@@ -1019,7 +1019,7 @@
           <a:p>
             <a:fld id="{F1102B08-ED9E-409F-B95F-09CAA1DAF6E0}" type="datetimeFigureOut">
               <a:rPr lang="en-IN" smtClean="0"/>
-              <a:t>10-11-2024</a:t>
+              <a:t>16-11-2024</a:t>
             </a:fld>
             <a:endParaRPr lang="en-IN"/>
           </a:p>
@@ -1251,7 +1251,7 @@
           <a:p>
             <a:fld id="{F1102B08-ED9E-409F-B95F-09CAA1DAF6E0}" type="datetimeFigureOut">
               <a:rPr lang="en-IN" smtClean="0"/>
-              <a:t>10-11-2024</a:t>
+              <a:t>16-11-2024</a:t>
             </a:fld>
             <a:endParaRPr lang="en-IN"/>
           </a:p>
@@ -1618,7 +1618,7 @@
           <a:p>
             <a:fld id="{F1102B08-ED9E-409F-B95F-09CAA1DAF6E0}" type="datetimeFigureOut">
               <a:rPr lang="en-IN" smtClean="0"/>
-              <a:t>10-11-2024</a:t>
+              <a:t>16-11-2024</a:t>
             </a:fld>
             <a:endParaRPr lang="en-IN"/>
           </a:p>
@@ -1736,7 +1736,7 @@
           <a:p>
             <a:fld id="{F1102B08-ED9E-409F-B95F-09CAA1DAF6E0}" type="datetimeFigureOut">
               <a:rPr lang="en-IN" smtClean="0"/>
-              <a:t>10-11-2024</a:t>
+              <a:t>16-11-2024</a:t>
             </a:fld>
             <a:endParaRPr lang="en-IN"/>
           </a:p>
@@ -1831,7 +1831,7 @@
           <a:p>
             <a:fld id="{F1102B08-ED9E-409F-B95F-09CAA1DAF6E0}" type="datetimeFigureOut">
               <a:rPr lang="en-IN" smtClean="0"/>
-              <a:t>10-11-2024</a:t>
+              <a:t>16-11-2024</a:t>
             </a:fld>
             <a:endParaRPr lang="en-IN"/>
           </a:p>
@@ -2108,7 +2108,7 @@
           <a:p>
             <a:fld id="{F1102B08-ED9E-409F-B95F-09CAA1DAF6E0}" type="datetimeFigureOut">
               <a:rPr lang="en-IN" smtClean="0"/>
-              <a:t>10-11-2024</a:t>
+              <a:t>16-11-2024</a:t>
             </a:fld>
             <a:endParaRPr lang="en-IN"/>
           </a:p>
@@ -2365,7 +2365,7 @@
           <a:p>
             <a:fld id="{F1102B08-ED9E-409F-B95F-09CAA1DAF6E0}" type="datetimeFigureOut">
               <a:rPr lang="en-IN" smtClean="0"/>
-              <a:t>10-11-2024</a:t>
+              <a:t>16-11-2024</a:t>
             </a:fld>
             <a:endParaRPr lang="en-IN"/>
           </a:p>
@@ -2578,7 +2578,7 @@
           <a:p>
             <a:fld id="{F1102B08-ED9E-409F-B95F-09CAA1DAF6E0}" type="datetimeFigureOut">
               <a:rPr lang="en-IN" smtClean="0"/>
-              <a:t>10-11-2024</a:t>
+              <a:t>16-11-2024</a:t>
             </a:fld>
             <a:endParaRPr lang="en-IN"/>
           </a:p>
@@ -2998,9 +2998,9 @@
         <p:grpSpPr>
           <a:xfrm>
             <a:off x="160868" y="182032"/>
-            <a:ext cx="5869513" cy="6493935"/>
+            <a:ext cx="5398025" cy="6493935"/>
             <a:chOff x="160868" y="182032"/>
-            <a:chExt cx="5869513" cy="6493935"/>
+            <a:chExt cx="5398025" cy="6493935"/>
           </a:xfrm>
         </p:grpSpPr>
         <p:sp>
@@ -3072,8 +3072,8 @@
           </p:nvSpPr>
           <p:spPr>
             <a:xfrm>
-              <a:off x="916971" y="326429"/>
-              <a:ext cx="5113410" cy="6232475"/>
+              <a:off x="445483" y="768681"/>
+              <a:ext cx="5113410" cy="4893647"/>
             </a:xfrm>
             <a:prstGeom prst="rect">
               <a:avLst/>
@@ -3090,11 +3090,11 @@
                 <a:defRPr/>
               </a:pPr>
               <a:r>
-                <a:rPr lang="te-IN" sz="2100" dirty="0">
-                  <a:latin typeface="Ramabhadra" panose="02000600000000000000" pitchFamily="2" charset="0"/>
-                  <a:cs typeface="Ramabhadra" panose="02000600000000000000" pitchFamily="2" charset="0"/>
-                </a:rPr>
-                <a:t>సంఘమా - క్రైస్తవ సంఘమా</a:t>
+                <a:rPr lang="te-IN" sz="2400" dirty="0">
+                  <a:latin typeface="Ramabhadra" panose="02000600000000000000" pitchFamily="2" charset="0"/>
+                  <a:cs typeface="Ramabhadra" panose="02000600000000000000" pitchFamily="2" charset="0"/>
+                </a:rPr>
+                <a:t>సన్నుతించెదను - దయాళుడవు నీవని</a:t>
               </a:r>
             </a:p>
             <a:p>
@@ -3102,13 +3102,13 @@
                 <a:defRPr/>
               </a:pPr>
               <a:r>
-                <a:rPr lang="te-IN" sz="2100" dirty="0">
-                  <a:latin typeface="Ramabhadra" panose="02000600000000000000" pitchFamily="2" charset="0"/>
-                  <a:cs typeface="Ramabhadra" panose="02000600000000000000" pitchFamily="2" charset="0"/>
-                </a:rPr>
-                <a:t>యేసునే పోలి నడువుమా –</a:t>
-              </a:r>
-              <a:endParaRPr lang="en-IN" sz="2100" dirty="0">
+                <a:rPr lang="te-IN" sz="2400" dirty="0">
+                  <a:latin typeface="Ramabhadra" panose="02000600000000000000" pitchFamily="2" charset="0"/>
+                  <a:cs typeface="Ramabhadra" panose="02000600000000000000" pitchFamily="2" charset="0"/>
+                </a:rPr>
+                <a:t>యెహోవా నీవే దయాళుడవని</a:t>
+              </a:r>
+              <a:endParaRPr lang="en-IN" sz="2400" dirty="0">
                 <a:latin typeface="Ramabhadra" panose="02000600000000000000" pitchFamily="2" charset="0"/>
                 <a:cs typeface="Ramabhadra" panose="02000600000000000000" pitchFamily="2" charset="0"/>
               </a:endParaRPr>
@@ -3118,18 +3118,18 @@
                 <a:defRPr/>
               </a:pPr>
               <a:r>
-                <a:rPr lang="te-IN" sz="2100" dirty="0">
-                  <a:latin typeface="Ramabhadra" panose="02000600000000000000" pitchFamily="2" charset="0"/>
-                  <a:cs typeface="Ramabhadra" panose="02000600000000000000" pitchFamily="2" charset="0"/>
-                </a:rPr>
-                <a:t>క్రీస్తు మనసు కలిగియుండుమా</a:t>
+                <a:rPr lang="te-IN" sz="2400" dirty="0">
+                  <a:latin typeface="Ramabhadra" panose="02000600000000000000" pitchFamily="2" charset="0"/>
+                  <a:cs typeface="Ramabhadra" panose="02000600000000000000" pitchFamily="2" charset="0"/>
+                </a:rPr>
+                <a:t>నిను సన్నుతించెదను - 2</a:t>
               </a:r>
             </a:p>
             <a:p>
               <a:pPr defTabSz="439781">
                 <a:defRPr/>
               </a:pPr>
-              <a:endParaRPr lang="te-IN" sz="2100" dirty="0">
+              <a:endParaRPr lang="te-IN" sz="2400" dirty="0">
                 <a:latin typeface="Ramabhadra" panose="02000600000000000000" pitchFamily="2" charset="0"/>
                 <a:cs typeface="Ramabhadra" panose="02000600000000000000" pitchFamily="2" charset="0"/>
               </a:endParaRPr>
@@ -3139,71 +3139,108 @@
                 <a:defRPr/>
               </a:pPr>
               <a:r>
-                <a:rPr lang="te-IN" sz="2100" dirty="0">
-                  <a:latin typeface="Ramabhadra" panose="02000600000000000000" pitchFamily="2" charset="0"/>
-                  <a:cs typeface="Ramabhadra" panose="02000600000000000000" pitchFamily="2" charset="0"/>
-                </a:rPr>
-                <a:t>ఆది సంఘము మోకరిల్లగ</a:t>
-              </a:r>
+                <a:rPr lang="te-IN" sz="2400" dirty="0">
+                  <a:latin typeface="Ramabhadra" panose="02000600000000000000" pitchFamily="2" charset="0"/>
+                  <a:cs typeface="Ramabhadra" panose="02000600000000000000" pitchFamily="2" charset="0"/>
+                </a:rPr>
+                <a:t>సర్వ సత్యములో నను నీవు నడిపి</a:t>
+              </a:r>
+              <a:endParaRPr lang="en-IN" sz="2400" dirty="0">
+                <a:latin typeface="Ramabhadra" panose="02000600000000000000" pitchFamily="2" charset="0"/>
+                <a:cs typeface="Ramabhadra" panose="02000600000000000000" pitchFamily="2" charset="0"/>
+              </a:endParaRPr>
             </a:p>
             <a:p>
               <a:pPr defTabSz="439781">
                 <a:defRPr/>
               </a:pPr>
               <a:r>
-                <a:rPr lang="te-IN" sz="2100" dirty="0">
-                  <a:latin typeface="Ramabhadra" panose="02000600000000000000" pitchFamily="2" charset="0"/>
-                  <a:cs typeface="Ramabhadra" panose="02000600000000000000" pitchFamily="2" charset="0"/>
-                </a:rPr>
-                <a:t>చెరసాల తలుపులు - బ్రద్ధలాయెను</a:t>
-              </a:r>
+                <a:rPr lang="te-IN" sz="2400" dirty="0">
+                  <a:latin typeface="Ramabhadra" panose="02000600000000000000" pitchFamily="2" charset="0"/>
+                  <a:cs typeface="Ramabhadra" panose="02000600000000000000" pitchFamily="2" charset="0"/>
+                </a:rPr>
+                <a:t>ఆదరించిన –</a:t>
+              </a:r>
+              <a:r>
+                <a:rPr lang="en-IN" sz="2400" dirty="0">
+                  <a:latin typeface="Ramabhadra" panose="02000600000000000000" pitchFamily="2" charset="0"/>
+                  <a:cs typeface="Ramabhadra" panose="02000600000000000000" pitchFamily="2" charset="0"/>
+                </a:rPr>
+                <a:t> </a:t>
+              </a:r>
+              <a:r>
+                <a:rPr lang="te-IN" sz="2400" dirty="0">
+                  <a:latin typeface="Ramabhadra" panose="02000600000000000000" pitchFamily="2" charset="0"/>
+                  <a:cs typeface="Ramabhadra" panose="02000600000000000000" pitchFamily="2" charset="0"/>
+                </a:rPr>
+                <a:t>పరిశుద్ధాత్ముడా</a:t>
+              </a:r>
+              <a:endParaRPr lang="en-IN" sz="2400" dirty="0">
+                <a:latin typeface="Ramabhadra" panose="02000600000000000000" pitchFamily="2" charset="0"/>
+                <a:cs typeface="Ramabhadra" panose="02000600000000000000" pitchFamily="2" charset="0"/>
+              </a:endParaRPr>
             </a:p>
             <a:p>
               <a:pPr defTabSz="439781">
                 <a:defRPr/>
               </a:pPr>
               <a:r>
-                <a:rPr lang="te-IN" sz="2100" dirty="0">
-                  <a:latin typeface="Ramabhadra" panose="02000600000000000000" pitchFamily="2" charset="0"/>
-                  <a:cs typeface="Ramabhadra" panose="02000600000000000000" pitchFamily="2" charset="0"/>
-                </a:rPr>
-                <a:t>ప్రధమ సంఘము - ప్రార్థింపగ</a:t>
-              </a:r>
+                <a:rPr lang="te-IN" sz="2400" dirty="0">
+                  <a:latin typeface="Ramabhadra" panose="02000600000000000000" pitchFamily="2" charset="0"/>
+                  <a:cs typeface="Ramabhadra" panose="02000600000000000000" pitchFamily="2" charset="0"/>
+                </a:rPr>
+                <a:t>కృపాధారము నీవెగా –</a:t>
+              </a:r>
+              <a:r>
+                <a:rPr lang="en-IN" sz="2400" dirty="0">
+                  <a:latin typeface="Ramabhadra" panose="02000600000000000000" pitchFamily="2" charset="0"/>
+                  <a:cs typeface="Ramabhadra" panose="02000600000000000000" pitchFamily="2" charset="0"/>
+                </a:rPr>
+                <a:t> </a:t>
+              </a:r>
+              <a:r>
+                <a:rPr lang="te-IN" sz="2400" dirty="0">
+                  <a:latin typeface="Ramabhadra" panose="02000600000000000000" pitchFamily="2" charset="0"/>
+                  <a:cs typeface="Ramabhadra" panose="02000600000000000000" pitchFamily="2" charset="0"/>
+                </a:rPr>
+                <a:t>షాలేమురాజా</a:t>
+              </a:r>
+              <a:endParaRPr lang="en-IN" sz="2400" dirty="0">
+                <a:latin typeface="Ramabhadra" panose="02000600000000000000" pitchFamily="2" charset="0"/>
+                <a:cs typeface="Ramabhadra" panose="02000600000000000000" pitchFamily="2" charset="0"/>
+              </a:endParaRPr>
             </a:p>
             <a:p>
               <a:pPr defTabSz="439781">
                 <a:defRPr/>
               </a:pPr>
               <a:r>
-                <a:rPr lang="te-IN" sz="2100" dirty="0">
-                  <a:latin typeface="Ramabhadra" panose="02000600000000000000" pitchFamily="2" charset="0"/>
-                  <a:cs typeface="Ramabhadra" panose="02000600000000000000" pitchFamily="2" charset="0"/>
-                </a:rPr>
-                <a:t>పరిశుద్ధ  ఆత్మయే – భువికేగెను (2)</a:t>
+                <a:rPr lang="te-IN" sz="2400" dirty="0">
+                  <a:latin typeface="Ramabhadra" panose="02000600000000000000" pitchFamily="2" charset="0"/>
+                  <a:cs typeface="Ramabhadra" panose="02000600000000000000" pitchFamily="2" charset="0"/>
+                </a:rPr>
+                <a:t>నిను సన్మానించెదను</a:t>
               </a:r>
             </a:p>
             <a:p>
               <a:pPr defTabSz="439781">
                 <a:defRPr/>
               </a:pPr>
-              <a:r>
-                <a:rPr lang="te-IN" sz="2100" dirty="0">
-                  <a:latin typeface="Ramabhadra" panose="02000600000000000000" pitchFamily="2" charset="0"/>
-                  <a:cs typeface="Ramabhadra" panose="02000600000000000000" pitchFamily="2" charset="0"/>
-                </a:rPr>
-                <a:t>ఆనాటి విజ్ఞాపన - ఏమాయెను</a:t>
-              </a:r>
+              <a:endParaRPr lang="te-IN" sz="2400" dirty="0">
+                <a:latin typeface="Ramabhadra" panose="02000600000000000000" pitchFamily="2" charset="0"/>
+                <a:cs typeface="Ramabhadra" panose="02000600000000000000" pitchFamily="2" charset="0"/>
+              </a:endParaRPr>
             </a:p>
             <a:p>
               <a:pPr defTabSz="439781">
                 <a:defRPr/>
               </a:pPr>
               <a:r>
-                <a:rPr lang="te-IN" sz="2100" dirty="0">
-                  <a:latin typeface="Ramabhadra" panose="02000600000000000000" pitchFamily="2" charset="0"/>
-                  <a:cs typeface="Ramabhadra" panose="02000600000000000000" pitchFamily="2" charset="0"/>
-                </a:rPr>
-                <a:t>ఈనాడు అద్భుతాలు కొదువాయెను</a:t>
+                <a:rPr lang="te-IN" sz="2400" dirty="0">
+                  <a:latin typeface="Ramabhadra" panose="02000600000000000000" pitchFamily="2" charset="0"/>
+                  <a:cs typeface="Ramabhadra" panose="02000600000000000000" pitchFamily="2" charset="0"/>
+                </a:rPr>
+                <a:t>నీ కను చూపుల పరిధిలోనన్ను నిలిపి</a:t>
               </a:r>
             </a:p>
             <a:p>
@@ -3211,18 +3248,25 @@
                 <a:defRPr/>
               </a:pPr>
               <a:r>
-                <a:rPr lang="te-IN" sz="2100" dirty="0">
-                  <a:latin typeface="Ramabhadra" panose="02000600000000000000" pitchFamily="2" charset="0"/>
-                  <a:cs typeface="Ramabhadra" panose="02000600000000000000" pitchFamily="2" charset="0"/>
-                </a:rPr>
-                <a:t>మేలుకో లెమ్ము తేజరిల్లుమా</a:t>
+                <a:rPr lang="te-IN" sz="2400" dirty="0">
+                  <a:latin typeface="Ramabhadra" panose="02000600000000000000" pitchFamily="2" charset="0"/>
+                  <a:cs typeface="Ramabhadra" panose="02000600000000000000" pitchFamily="2" charset="0"/>
+                </a:rPr>
+                <a:t>చూపితివా నీ వాత్సల్యమును</a:t>
               </a:r>
             </a:p>
             <a:p>
               <a:pPr defTabSz="439781">
                 <a:defRPr/>
               </a:pPr>
-              <a:endParaRPr lang="te-IN" sz="2100" dirty="0">
+              <a:r>
+                <a:rPr lang="te-IN" sz="2400" dirty="0">
+                  <a:latin typeface="Ramabhadra" panose="02000600000000000000" pitchFamily="2" charset="0"/>
+                  <a:cs typeface="Ramabhadra" panose="02000600000000000000" pitchFamily="2" charset="0"/>
+                </a:rPr>
+                <a:t>కృపానిధివి నీవెగా - నా యేసురాజా</a:t>
+              </a:r>
+              <a:endParaRPr lang="en-IN" sz="2400" dirty="0">
                 <a:latin typeface="Ramabhadra" panose="02000600000000000000" pitchFamily="2" charset="0"/>
                 <a:cs typeface="Ramabhadra" panose="02000600000000000000" pitchFamily="2" charset="0"/>
               </a:endParaRPr>
@@ -3232,83 +3276,11 @@
                 <a:defRPr/>
               </a:pPr>
               <a:r>
-                <a:rPr lang="te-IN" sz="2100" dirty="0">
-                  <a:latin typeface="Ramabhadra" panose="02000600000000000000" pitchFamily="2" charset="0"/>
-                  <a:cs typeface="Ramabhadra" panose="02000600000000000000" pitchFamily="2" charset="0"/>
-                </a:rPr>
-                <a:t>క్రియలు లేని నీ - విశ్వాసము</a:t>
-              </a:r>
-            </a:p>
-            <a:p>
-              <a:pPr defTabSz="439781">
-                <a:defRPr/>
-              </a:pPr>
-              <a:r>
-                <a:rPr lang="te-IN" sz="2100" dirty="0">
-                  <a:latin typeface="Ramabhadra" panose="02000600000000000000" pitchFamily="2" charset="0"/>
-                  <a:cs typeface="Ramabhadra" panose="02000600000000000000" pitchFamily="2" charset="0"/>
-                </a:rPr>
-                <a:t>మ్రుతమైనది - అది కొరకానిది</a:t>
-              </a:r>
-            </a:p>
-            <a:p>
-              <a:pPr defTabSz="439781">
-                <a:defRPr/>
-              </a:pPr>
-              <a:r>
-                <a:rPr lang="te-IN" sz="2100" dirty="0">
-                  <a:latin typeface="Ramabhadra" panose="02000600000000000000" pitchFamily="2" charset="0"/>
-                  <a:cs typeface="Ramabhadra" panose="02000600000000000000" pitchFamily="2" charset="0"/>
-                </a:rPr>
-                <a:t>శక్తి లేని నీ - భక్తి మొత్తము</a:t>
-              </a:r>
-            </a:p>
-            <a:p>
-              <a:pPr defTabSz="439781">
-                <a:defRPr/>
-              </a:pPr>
-              <a:r>
-                <a:rPr lang="te-IN" sz="2100" dirty="0">
-                  <a:latin typeface="Ramabhadra" panose="02000600000000000000" pitchFamily="2" charset="0"/>
-                  <a:cs typeface="Ramabhadra" panose="02000600000000000000" pitchFamily="2" charset="0"/>
-                </a:rPr>
-                <a:t>వ్యర్థమైనది అది మేలు చేయదు (2)</a:t>
-              </a:r>
-            </a:p>
-            <a:p>
-              <a:pPr defTabSz="439781">
-                <a:defRPr/>
-              </a:pPr>
-              <a:r>
-                <a:rPr lang="te-IN" sz="2100" dirty="0">
-                  <a:latin typeface="Ramabhadra" panose="02000600000000000000" pitchFamily="2" charset="0"/>
-                  <a:cs typeface="Ramabhadra" panose="02000600000000000000" pitchFamily="2" charset="0"/>
-                </a:rPr>
-                <a:t>నామకార్ధమును విడిచి నమ్మీ చూడుము</a:t>
-              </a:r>
-            </a:p>
-            <a:p>
-              <a:pPr defTabSz="439781">
-                <a:defRPr/>
-              </a:pPr>
-              <a:r>
-                <a:rPr lang="te-IN" sz="2100" dirty="0">
-                  <a:latin typeface="Ramabhadra" panose="02000600000000000000" pitchFamily="2" charset="0"/>
-                  <a:cs typeface="Ramabhadra" panose="02000600000000000000" pitchFamily="2" charset="0"/>
-                </a:rPr>
-                <a:t>యదార్థమైన మనసును ఆశించుము</a:t>
-              </a:r>
-            </a:p>
-            <a:p>
-              <a:pPr defTabSz="439781">
-                <a:defRPr/>
-              </a:pPr>
-              <a:r>
-                <a:rPr lang="te-IN" sz="2100" dirty="0">
-                  <a:latin typeface="Ramabhadra" panose="02000600000000000000" pitchFamily="2" charset="0"/>
-                  <a:cs typeface="Ramabhadra" panose="02000600000000000000" pitchFamily="2" charset="0"/>
-                </a:rPr>
-                <a:t>మేలుకో లెమ్ము తేజరిల్లుమా</a:t>
+                <a:rPr lang="te-IN" sz="2400" dirty="0">
+                  <a:latin typeface="Ramabhadra" panose="02000600000000000000" pitchFamily="2" charset="0"/>
+                  <a:cs typeface="Ramabhadra" panose="02000600000000000000" pitchFamily="2" charset="0"/>
+                </a:rPr>
+                <a:t>నిను సన్మానించెదను</a:t>
               </a:r>
             </a:p>
           </p:txBody>
@@ -3465,8 +3437,8 @@
           </p:nvSpPr>
           <p:spPr>
             <a:xfrm>
-              <a:off x="501124" y="716955"/>
-              <a:ext cx="4541306" cy="5693866"/>
+              <a:off x="501124" y="653009"/>
+              <a:ext cx="4541306" cy="6001643"/>
             </a:xfrm>
             <a:prstGeom prst="rect">
               <a:avLst/>
@@ -3480,122 +3452,151 @@
             <a:lstStyle/>
             <a:p>
               <a:r>
-                <a:rPr lang="te-IN" sz="2600" dirty="0">
-                  <a:latin typeface="Ramabhadra" panose="02000600000000000000" pitchFamily="2" charset="0"/>
-                  <a:cs typeface="Ramabhadra" panose="02000600000000000000" pitchFamily="2" charset="0"/>
-                </a:rPr>
-                <a:t>స్తుతులన్ గైకొనుమా</a:t>
-              </a:r>
-            </a:p>
-            <a:p>
-              <a:r>
-                <a:rPr lang="te-IN" sz="2600" dirty="0">
-                  <a:latin typeface="Ramabhadra" panose="02000600000000000000" pitchFamily="2" charset="0"/>
-                  <a:cs typeface="Ramabhadra" panose="02000600000000000000" pitchFamily="2" charset="0"/>
-                </a:rPr>
-                <a:t>సుత యేసు క్రీస్తువా</a:t>
-              </a:r>
-            </a:p>
-            <a:p>
-              <a:r>
-                <a:rPr lang="te-IN" sz="2600" dirty="0">
-                  <a:latin typeface="Ramabhadra" panose="02000600000000000000" pitchFamily="2" charset="0"/>
-                  <a:cs typeface="Ramabhadra" panose="02000600000000000000" pitchFamily="2" charset="0"/>
-                </a:rPr>
-                <a:t>సతతము మమ్ములను </a:t>
-              </a:r>
-            </a:p>
-            <a:p>
-              <a:r>
-                <a:rPr lang="te-IN" sz="2600" dirty="0">
-                  <a:latin typeface="Ramabhadra" panose="02000600000000000000" pitchFamily="2" charset="0"/>
-                  <a:cs typeface="Ramabhadra" panose="02000600000000000000" pitchFamily="2" charset="0"/>
-                </a:rPr>
-                <a:t>కృపనిడి కావుమా</a:t>
-              </a:r>
-            </a:p>
-            <a:p>
-              <a:endParaRPr lang="te-IN" sz="2600" dirty="0">
+                <a:rPr lang="te-IN" sz="2400" dirty="0">
+                  <a:latin typeface="Ramabhadra" panose="02000600000000000000" pitchFamily="2" charset="0"/>
+                  <a:cs typeface="Ramabhadra" panose="02000600000000000000" pitchFamily="2" charset="0"/>
+                </a:rPr>
+                <a:t>కృపామయుడా – నీలోనా (2)</a:t>
+              </a:r>
+            </a:p>
+            <a:p>
+              <a:r>
+                <a:rPr lang="te-IN" sz="2400" dirty="0">
+                  <a:latin typeface="Ramabhadra" panose="02000600000000000000" pitchFamily="2" charset="0"/>
+                  <a:cs typeface="Ramabhadra" panose="02000600000000000000" pitchFamily="2" charset="0"/>
+                </a:rPr>
+                <a:t>నివసింప జేసినందున</a:t>
+              </a:r>
+            </a:p>
+            <a:p>
+              <a:r>
+                <a:rPr lang="te-IN" sz="2400" dirty="0">
+                  <a:latin typeface="Ramabhadra" panose="02000600000000000000" pitchFamily="2" charset="0"/>
+                  <a:cs typeface="Ramabhadra" panose="02000600000000000000" pitchFamily="2" charset="0"/>
+                </a:rPr>
+                <a:t>ఇదిగో నా స్తుతుల సింహాసనం</a:t>
+              </a:r>
+            </a:p>
+            <a:p>
+              <a:r>
+                <a:rPr lang="te-IN" sz="2400" dirty="0">
+                  <a:latin typeface="Ramabhadra" panose="02000600000000000000" pitchFamily="2" charset="0"/>
+                  <a:cs typeface="Ramabhadra" panose="02000600000000000000" pitchFamily="2" charset="0"/>
+                </a:rPr>
+                <a:t>నీలో నివసింప జేసినందునా</a:t>
+              </a:r>
+            </a:p>
+            <a:p>
+              <a:r>
+                <a:rPr lang="te-IN" sz="2400" dirty="0">
+                  <a:latin typeface="Ramabhadra" panose="02000600000000000000" pitchFamily="2" charset="0"/>
+                  <a:cs typeface="Ramabhadra" panose="02000600000000000000" pitchFamily="2" charset="0"/>
+                </a:rPr>
+                <a:t>ఇదిగో నా స్తుతుల సింహాసనం</a:t>
+              </a:r>
+            </a:p>
+            <a:p>
+              <a:r>
+                <a:rPr lang="te-IN" sz="2400" dirty="0">
+                  <a:latin typeface="Ramabhadra" panose="02000600000000000000" pitchFamily="2" charset="0"/>
+                  <a:cs typeface="Ramabhadra" panose="02000600000000000000" pitchFamily="2" charset="0"/>
+                </a:rPr>
+                <a:t>కృపామయుడా</a:t>
+              </a:r>
+              <a:r>
+                <a:rPr lang="en-IN" sz="2400" dirty="0">
+                  <a:latin typeface="Ramabhadra" panose="02000600000000000000" pitchFamily="2" charset="0"/>
+                  <a:cs typeface="Ramabhadra" panose="02000600000000000000" pitchFamily="2" charset="0"/>
+                </a:rPr>
+                <a:t>...</a:t>
+              </a:r>
+              <a:endParaRPr lang="te-IN" sz="2400" dirty="0">
                 <a:latin typeface="Ramabhadra" panose="02000600000000000000" pitchFamily="2" charset="0"/>
                 <a:cs typeface="Ramabhadra" panose="02000600000000000000" pitchFamily="2" charset="0"/>
               </a:endParaRPr>
             </a:p>
             <a:p>
-              <a:r>
-                <a:rPr lang="te-IN" sz="2600" dirty="0">
-                  <a:latin typeface="Ramabhadra" panose="02000600000000000000" pitchFamily="2" charset="0"/>
-                  <a:cs typeface="Ramabhadra" panose="02000600000000000000" pitchFamily="2" charset="0"/>
-                </a:rPr>
-                <a:t>మా పెదవులతో ఎప్పుడు నీ</a:t>
-              </a:r>
-            </a:p>
-            <a:p>
-              <a:r>
-                <a:rPr lang="te-IN" sz="2600" dirty="0">
-                  <a:latin typeface="Ramabhadra" panose="02000600000000000000" pitchFamily="2" charset="0"/>
-                  <a:cs typeface="Ramabhadra" panose="02000600000000000000" pitchFamily="2" charset="0"/>
-                </a:rPr>
-                <a:t>వాక్యమును పఠింప నిమ్ము</a:t>
-              </a:r>
-            </a:p>
-            <a:p>
-              <a:r>
-                <a:rPr lang="te-IN" sz="2600" dirty="0">
-                  <a:latin typeface="Ramabhadra" panose="02000600000000000000" pitchFamily="2" charset="0"/>
-                  <a:cs typeface="Ramabhadra" panose="02000600000000000000" pitchFamily="2" charset="0"/>
-                </a:rPr>
-                <a:t>మా కాలు చేతులు ఎప్పుడు నీ </a:t>
-              </a:r>
-            </a:p>
-            <a:p>
-              <a:r>
-                <a:rPr lang="te-IN" sz="2600" dirty="0">
-                  <a:latin typeface="Ramabhadra" panose="02000600000000000000" pitchFamily="2" charset="0"/>
-                  <a:cs typeface="Ramabhadra" panose="02000600000000000000" pitchFamily="2" charset="0"/>
-                </a:rPr>
-                <a:t>సేవను చేయను వాడనిమ్ము </a:t>
-              </a:r>
-            </a:p>
-            <a:p>
-              <a:endParaRPr lang="te-IN" sz="2600" dirty="0">
+              <a:endParaRPr lang="te-IN" sz="2400" dirty="0">
                 <a:latin typeface="Ramabhadra" panose="02000600000000000000" pitchFamily="2" charset="0"/>
                 <a:cs typeface="Ramabhadra" panose="02000600000000000000" pitchFamily="2" charset="0"/>
               </a:endParaRPr>
             </a:p>
             <a:p>
               <a:r>
-                <a:rPr lang="te-IN" sz="2600" dirty="0">
-                  <a:latin typeface="Ramabhadra" panose="02000600000000000000" pitchFamily="2" charset="0"/>
-                  <a:cs typeface="Ramabhadra" panose="02000600000000000000" pitchFamily="2" charset="0"/>
-                </a:rPr>
-                <a:t>మా కలిమియు పదవుల నెల్ల </a:t>
-              </a:r>
-            </a:p>
-            <a:p>
-              <a:r>
-                <a:rPr lang="te-IN" sz="2600" dirty="0">
-                  <a:latin typeface="Ramabhadra" panose="02000600000000000000" pitchFamily="2" charset="0"/>
-                  <a:cs typeface="Ramabhadra" panose="02000600000000000000" pitchFamily="2" charset="0"/>
-                </a:rPr>
-                <a:t>నీ శుద్ధ కృపచే పొందితిమి </a:t>
-              </a:r>
-            </a:p>
-            <a:p>
-              <a:r>
-                <a:rPr lang="te-IN" sz="2600" dirty="0">
-                  <a:latin typeface="Ramabhadra" panose="02000600000000000000" pitchFamily="2" charset="0"/>
-                  <a:cs typeface="Ramabhadra" panose="02000600000000000000" pitchFamily="2" charset="0"/>
-                </a:rPr>
-                <a:t>మా కాలమంతయు జీవింప </a:t>
-              </a:r>
-            </a:p>
-            <a:p>
-              <a:r>
-                <a:rPr lang="te-IN" sz="2600" dirty="0">
-                  <a:latin typeface="Ramabhadra" panose="02000600000000000000" pitchFamily="2" charset="0"/>
-                  <a:cs typeface="Ramabhadra" panose="02000600000000000000" pitchFamily="2" charset="0"/>
-                </a:rPr>
-                <a:t>నిలకడగ నుండ దీవించుము</a:t>
+                <a:rPr lang="te-IN" sz="2400" dirty="0">
+                  <a:latin typeface="Ramabhadra" panose="02000600000000000000" pitchFamily="2" charset="0"/>
+                  <a:cs typeface="Ramabhadra" panose="02000600000000000000" pitchFamily="2" charset="0"/>
+                </a:rPr>
+                <a:t>ఏ అపాయము నా గుడారము</a:t>
+              </a:r>
+            </a:p>
+            <a:p>
+              <a:r>
+                <a:rPr lang="te-IN" sz="2400" dirty="0">
+                  <a:latin typeface="Ramabhadra" panose="02000600000000000000" pitchFamily="2" charset="0"/>
+                  <a:cs typeface="Ramabhadra" panose="02000600000000000000" pitchFamily="2" charset="0"/>
+                </a:rPr>
+                <a:t>సమీపించనీయక (2)</a:t>
+              </a:r>
+            </a:p>
+            <a:p>
+              <a:r>
+                <a:rPr lang="te-IN" sz="2400" dirty="0">
+                  <a:latin typeface="Ramabhadra" panose="02000600000000000000" pitchFamily="2" charset="0"/>
+                  <a:cs typeface="Ramabhadra" panose="02000600000000000000" pitchFamily="2" charset="0"/>
+                </a:rPr>
+                <a:t>నా మార్గములన్నిటిలో</a:t>
+              </a:r>
+            </a:p>
+            <a:p>
+              <a:r>
+                <a:rPr lang="te-IN" sz="2400" dirty="0">
+                  <a:latin typeface="Ramabhadra" panose="02000600000000000000" pitchFamily="2" charset="0"/>
+                  <a:cs typeface="Ramabhadra" panose="02000600000000000000" pitchFamily="2" charset="0"/>
+                </a:rPr>
+                <a:t>నీవే ఆశ్రయమైనందున (2)</a:t>
+              </a:r>
+            </a:p>
+            <a:p>
+              <a:endParaRPr lang="te-IN" sz="2400" dirty="0">
+                <a:latin typeface="Ramabhadra" panose="02000600000000000000" pitchFamily="2" charset="0"/>
+                <a:cs typeface="Ramabhadra" panose="02000600000000000000" pitchFamily="2" charset="0"/>
+              </a:endParaRPr>
+            </a:p>
+            <a:p>
+              <a:r>
+                <a:rPr lang="te-IN" sz="2400" dirty="0">
+                  <a:latin typeface="Ramabhadra" panose="02000600000000000000" pitchFamily="2" charset="0"/>
+                  <a:cs typeface="Ramabhadra" panose="02000600000000000000" pitchFamily="2" charset="0"/>
+                </a:rPr>
+                <a:t>చీకటి నుండి వెలుగులోనికి</a:t>
+              </a:r>
+            </a:p>
+            <a:p>
+              <a:r>
+                <a:rPr lang="te-IN" sz="2400" dirty="0">
+                  <a:latin typeface="Ramabhadra" panose="02000600000000000000" pitchFamily="2" charset="0"/>
+                  <a:cs typeface="Ramabhadra" panose="02000600000000000000" pitchFamily="2" charset="0"/>
+                </a:rPr>
+                <a:t>నన్ను పిలచిన తేజోమయా (2)</a:t>
+              </a:r>
+            </a:p>
+            <a:p>
+              <a:r>
+                <a:rPr lang="te-IN" sz="2400" dirty="0">
+                  <a:latin typeface="Ramabhadra" panose="02000600000000000000" pitchFamily="2" charset="0"/>
+                  <a:cs typeface="Ramabhadra" panose="02000600000000000000" pitchFamily="2" charset="0"/>
+                </a:rPr>
+                <a:t>రాజవంశములో</a:t>
+              </a:r>
+            </a:p>
+            <a:p>
+              <a:r>
+                <a:rPr lang="te-IN" sz="2400" dirty="0">
+                  <a:latin typeface="Ramabhadra" panose="02000600000000000000" pitchFamily="2" charset="0"/>
+                  <a:cs typeface="Ramabhadra" panose="02000600000000000000" pitchFamily="2" charset="0"/>
+                </a:rPr>
+                <a:t>యాజకత్వము చేసెదను (2)</a:t>
               </a:r>
             </a:p>
           </p:txBody>
@@ -3708,9 +3709,9 @@
         <p:grpSpPr>
           <a:xfrm>
             <a:off x="160868" y="182032"/>
-            <a:ext cx="4792132" cy="6501382"/>
+            <a:ext cx="5126563" cy="6493935"/>
             <a:chOff x="160868" y="182032"/>
-            <a:chExt cx="4792132" cy="6501382"/>
+            <a:chExt cx="5126563" cy="6493935"/>
           </a:xfrm>
         </p:grpSpPr>
         <p:sp>
@@ -3782,8 +3783,8 @@
           </p:nvSpPr>
           <p:spPr>
             <a:xfrm>
-              <a:off x="304800" y="774104"/>
-              <a:ext cx="4648200" cy="5909310"/>
+              <a:off x="639231" y="701293"/>
+              <a:ext cx="4648200" cy="5847755"/>
             </a:xfrm>
             <a:prstGeom prst="rect">
               <a:avLst/>
@@ -3800,11 +3801,11 @@
                 <a:defRPr/>
               </a:pPr>
               <a:r>
-                <a:rPr lang="te-IN" sz="2100" dirty="0">
-                  <a:latin typeface="Ramabhadra" panose="02000600000000000000" pitchFamily="2" charset="0"/>
-                  <a:cs typeface="Ramabhadra" panose="02000600000000000000" pitchFamily="2" charset="0"/>
-                </a:rPr>
-                <a:t>నమ్మకమైన దేవుడవైన నీవే చాలు యేసయ్యా (2)</a:t>
+                <a:rPr lang="te-IN" sz="2200" dirty="0">
+                  <a:latin typeface="Ramabhadra" panose="02000600000000000000" pitchFamily="2" charset="0"/>
+                  <a:cs typeface="Ramabhadra" panose="02000600000000000000" pitchFamily="2" charset="0"/>
+                </a:rPr>
+                <a:t>స్తుతి పాత్రుడా – స్తోత్రార్హుడా</a:t>
               </a:r>
             </a:p>
             <a:p>
@@ -3812,11 +3813,11 @@
                 <a:defRPr/>
               </a:pPr>
               <a:r>
-                <a:rPr lang="te-IN" sz="2100" dirty="0">
-                  <a:latin typeface="Ramabhadra" panose="02000600000000000000" pitchFamily="2" charset="0"/>
-                  <a:cs typeface="Ramabhadra" panose="02000600000000000000" pitchFamily="2" charset="0"/>
-                </a:rPr>
-                <a:t>నేనేమైయున్నా ఏ స్థితిలో ఉన్నా (2)</a:t>
+                <a:rPr lang="te-IN" sz="2200" dirty="0">
+                  <a:latin typeface="Ramabhadra" panose="02000600000000000000" pitchFamily="2" charset="0"/>
+                  <a:cs typeface="Ramabhadra" panose="02000600000000000000" pitchFamily="2" charset="0"/>
+                </a:rPr>
+                <a:t>స్తుతులందుకో - పూజార్హుడా</a:t>
               </a:r>
             </a:p>
             <a:p>
@@ -3824,18 +3825,46 @@
                 <a:defRPr/>
               </a:pPr>
               <a:r>
-                <a:rPr lang="te-IN" sz="2100" dirty="0">
-                  <a:latin typeface="Ramabhadra" panose="02000600000000000000" pitchFamily="2" charset="0"/>
-                  <a:cs typeface="Ramabhadra" panose="02000600000000000000" pitchFamily="2" charset="0"/>
-                </a:rPr>
-                <a:t>ఇంకేమి కోరుకోనయ్యా (2)</a:t>
-              </a:r>
+                <a:rPr lang="te-IN" sz="2200" dirty="0">
+                  <a:latin typeface="Ramabhadra" panose="02000600000000000000" pitchFamily="2" charset="0"/>
+                  <a:cs typeface="Ramabhadra" panose="02000600000000000000" pitchFamily="2" charset="0"/>
+                </a:rPr>
+                <a:t>ఆకాశమందు నీవు తప్ప</a:t>
+              </a:r>
+              <a:endParaRPr lang="en-IN" sz="2200" dirty="0">
+                <a:latin typeface="Ramabhadra" panose="02000600000000000000" pitchFamily="2" charset="0"/>
+                <a:cs typeface="Ramabhadra" panose="02000600000000000000" pitchFamily="2" charset="0"/>
+              </a:endParaRPr>
             </a:p>
             <a:p>
               <a:pPr defTabSz="439781">
                 <a:defRPr/>
               </a:pPr>
-              <a:endParaRPr lang="te-IN" sz="2100" dirty="0">
+              <a:r>
+                <a:rPr lang="te-IN" sz="2200" dirty="0">
+                  <a:latin typeface="Ramabhadra" panose="02000600000000000000" pitchFamily="2" charset="0"/>
+                  <a:cs typeface="Ramabhadra" panose="02000600000000000000" pitchFamily="2" charset="0"/>
+                </a:rPr>
+                <a:t>నాకెవరున్నారు నా ప్రభు</a:t>
+              </a:r>
+            </a:p>
+            <a:p>
+              <a:pPr defTabSz="439781">
+                <a:defRPr/>
+              </a:pPr>
+              <a:r>
+                <a:rPr lang="te-IN" sz="2200" dirty="0">
+                  <a:latin typeface="Ramabhadra" panose="02000600000000000000" pitchFamily="2" charset="0"/>
+                  <a:cs typeface="Ramabhadra" panose="02000600000000000000" pitchFamily="2" charset="0"/>
+                </a:rPr>
+                <a:t>స్తుతి పాత్రుడా.... ఆఆఅ</a:t>
+              </a:r>
+            </a:p>
+            <a:p>
+              <a:pPr defTabSz="439781">
+                <a:defRPr/>
+              </a:pPr>
+              <a:endParaRPr lang="te-IN" sz="2200" dirty="0">
                 <a:latin typeface="Ramabhadra" panose="02000600000000000000" pitchFamily="2" charset="0"/>
                 <a:cs typeface="Ramabhadra" panose="02000600000000000000" pitchFamily="2" charset="0"/>
               </a:endParaRPr>
@@ -3845,11 +3874,18 @@
                 <a:defRPr/>
               </a:pPr>
               <a:r>
-                <a:rPr lang="te-IN" sz="2100" dirty="0">
-                  <a:latin typeface="Ramabhadra" panose="02000600000000000000" pitchFamily="2" charset="0"/>
-                  <a:cs typeface="Ramabhadra" panose="02000600000000000000" pitchFamily="2" charset="0"/>
-                </a:rPr>
-                <a:t>ఆప్తులైన వారే హాని చేయచూసినా</a:t>
+                <a:rPr lang="te-IN" sz="2200" dirty="0">
+                  <a:latin typeface="Ramabhadra" panose="02000600000000000000" pitchFamily="2" charset="0"/>
+                  <a:cs typeface="Ramabhadra" panose="02000600000000000000" pitchFamily="2" charset="0"/>
+                </a:rPr>
+                <a:t>నా శత్రువులు నను తరుముచుండగా </a:t>
+              </a:r>
+              <a:r>
+                <a:rPr lang="en-IN" sz="2200" dirty="0">
+                  <a:latin typeface="Ramabhadra" panose="02000600000000000000" pitchFamily="2" charset="0"/>
+                  <a:cs typeface="Ramabhadra" panose="02000600000000000000" pitchFamily="2" charset="0"/>
+                </a:rPr>
+                <a:t>-</a:t>
               </a:r>
             </a:p>
             <a:p>
@@ -3857,11 +3893,11 @@
                 <a:defRPr/>
               </a:pPr>
               <a:r>
-                <a:rPr lang="te-IN" sz="2100" dirty="0">
-                  <a:latin typeface="Ramabhadra" panose="02000600000000000000" pitchFamily="2" charset="0"/>
-                  <a:cs typeface="Ramabhadra" panose="02000600000000000000" pitchFamily="2" charset="0"/>
-                </a:rPr>
-                <a:t>మిత్రులే నిలువకుండినా (2)</a:t>
+                <a:rPr lang="te-IN" sz="2200" dirty="0">
+                  <a:latin typeface="Ramabhadra" panose="02000600000000000000" pitchFamily="2" charset="0"/>
+                  <a:cs typeface="Ramabhadra" panose="02000600000000000000" pitchFamily="2" charset="0"/>
+                </a:rPr>
+                <a:t>నా యాత్మ నాలో కృంగెనే ప్రభూ -2</a:t>
               </a:r>
             </a:p>
             <a:p>
@@ -3869,11 +3905,18 @@
                 <a:defRPr/>
               </a:pPr>
               <a:r>
-                <a:rPr lang="te-IN" sz="2100" dirty="0">
-                  <a:latin typeface="Ramabhadra" panose="02000600000000000000" pitchFamily="2" charset="0"/>
-                  <a:cs typeface="Ramabhadra" panose="02000600000000000000" pitchFamily="2" charset="0"/>
-                </a:rPr>
-                <a:t>న్యాయము తీర్చే నీవు నాకుంటే (2)</a:t>
+                <a:rPr lang="te-IN" sz="2200" dirty="0">
+                  <a:latin typeface="Ramabhadra" panose="02000600000000000000" pitchFamily="2" charset="0"/>
+                  <a:cs typeface="Ramabhadra" panose="02000600000000000000" pitchFamily="2" charset="0"/>
+                </a:rPr>
+                <a:t>నా మనస్సు నీ వైపు త్రిప్పిన వెంటనే </a:t>
+              </a:r>
+              <a:r>
+                <a:rPr lang="en-IN" sz="2200" dirty="0">
+                  <a:latin typeface="Ramabhadra" panose="02000600000000000000" pitchFamily="2" charset="0"/>
+                  <a:cs typeface="Ramabhadra" panose="02000600000000000000" pitchFamily="2" charset="0"/>
+                </a:rPr>
+                <a:t>-</a:t>
               </a:r>
             </a:p>
             <a:p>
@@ -3881,13 +3924,13 @@
                 <a:defRPr/>
               </a:pPr>
               <a:r>
-                <a:rPr lang="te-IN" sz="2100" dirty="0">
-                  <a:latin typeface="Ramabhadra" panose="02000600000000000000" pitchFamily="2" charset="0"/>
-                  <a:cs typeface="Ramabhadra" panose="02000600000000000000" pitchFamily="2" charset="0"/>
-                </a:rPr>
-                <a:t>చాలు యేసయ్యా (2)</a:t>
-              </a:r>
-              <a:endParaRPr lang="en-US" sz="2100" dirty="0">
+                <a:rPr lang="te-IN" sz="2200" dirty="0">
+                  <a:latin typeface="Ramabhadra" panose="02000600000000000000" pitchFamily="2" charset="0"/>
+                  <a:cs typeface="Ramabhadra" panose="02000600000000000000" pitchFamily="2" charset="0"/>
+                </a:rPr>
+                <a:t>శత్రుల చేతినుండి</a:t>
+              </a:r>
+              <a:endParaRPr lang="en-IN" sz="2200" dirty="0">
                 <a:latin typeface="Ramabhadra" panose="02000600000000000000" pitchFamily="2" charset="0"/>
                 <a:cs typeface="Ramabhadra" panose="02000600000000000000" pitchFamily="2" charset="0"/>
               </a:endParaRPr>
@@ -3896,7 +3939,19 @@
               <a:pPr defTabSz="439781">
                 <a:defRPr/>
               </a:pPr>
-              <a:endParaRPr lang="te-IN" sz="2100" dirty="0">
+              <a:r>
+                <a:rPr lang="te-IN" sz="2200" dirty="0">
+                  <a:latin typeface="Ramabhadra" panose="02000600000000000000" pitchFamily="2" charset="0"/>
+                  <a:cs typeface="Ramabhadra" panose="02000600000000000000" pitchFamily="2" charset="0"/>
+                </a:rPr>
+                <a:t>విడిపించినావు - కాపాడినావు -2</a:t>
+              </a:r>
+            </a:p>
+            <a:p>
+              <a:pPr defTabSz="439781">
+                <a:defRPr/>
+              </a:pPr>
+              <a:endParaRPr lang="te-IN" sz="2200" dirty="0">
                 <a:latin typeface="Ramabhadra" panose="02000600000000000000" pitchFamily="2" charset="0"/>
                 <a:cs typeface="Ramabhadra" panose="02000600000000000000" pitchFamily="2" charset="0"/>
               </a:endParaRPr>
@@ -3906,11 +3961,18 @@
                 <a:defRPr/>
               </a:pPr>
               <a:r>
-                <a:rPr lang="te-IN" sz="2100" dirty="0">
-                  <a:latin typeface="Ramabhadra" panose="02000600000000000000" pitchFamily="2" charset="0"/>
-                  <a:cs typeface="Ramabhadra" panose="02000600000000000000" pitchFamily="2" charset="0"/>
-                </a:rPr>
-                <a:t>జ్ఞానమంత చూపి శక్తి ధారపోసినా</a:t>
+                <a:rPr lang="te-IN" sz="2200" dirty="0">
+                  <a:latin typeface="Ramabhadra" panose="02000600000000000000" pitchFamily="2" charset="0"/>
+                  <a:cs typeface="Ramabhadra" panose="02000600000000000000" pitchFamily="2" charset="0"/>
+                </a:rPr>
+                <a:t>నా ప్రాణ స్నేహితులు నన్ను చూచి</a:t>
+              </a:r>
+              <a:r>
+                <a:rPr lang="en-IN" sz="2200" dirty="0">
+                  <a:latin typeface="Ramabhadra" panose="02000600000000000000" pitchFamily="2" charset="0"/>
+                  <a:cs typeface="Ramabhadra" panose="02000600000000000000" pitchFamily="2" charset="0"/>
+                </a:rPr>
+                <a:t> -</a:t>
               </a:r>
             </a:p>
             <a:p>
@@ -3918,11 +3980,11 @@
                 <a:defRPr/>
               </a:pPr>
               <a:r>
-                <a:rPr lang="te-IN" sz="2100" dirty="0">
-                  <a:latin typeface="Ramabhadra" panose="02000600000000000000" pitchFamily="2" charset="0"/>
-                  <a:cs typeface="Ramabhadra" panose="02000600000000000000" pitchFamily="2" charset="0"/>
-                </a:rPr>
-                <a:t>నష్టమే మిగులుచుండినా (2)</a:t>
+                <a:rPr lang="te-IN" sz="2200" dirty="0">
+                  <a:latin typeface="Ramabhadra" panose="02000600000000000000" pitchFamily="2" charset="0"/>
+                  <a:cs typeface="Ramabhadra" panose="02000600000000000000" pitchFamily="2" charset="0"/>
+                </a:rPr>
+                <a:t>దూరాన నిలిచేరు నా ప్రభూ -2</a:t>
               </a:r>
             </a:p>
             <a:p>
@@ -3930,11 +3992,18 @@
                 <a:defRPr/>
               </a:pPr>
               <a:r>
-                <a:rPr lang="te-IN" sz="2100" dirty="0">
-                  <a:latin typeface="Ramabhadra" panose="02000600000000000000" pitchFamily="2" charset="0"/>
-                  <a:cs typeface="Ramabhadra" panose="02000600000000000000" pitchFamily="2" charset="0"/>
-                </a:rPr>
-                <a:t>శాపము బాపే నీవు నాకుంటే (2)</a:t>
+                <a:rPr lang="te-IN" sz="2200" dirty="0">
+                  <a:latin typeface="Ramabhadra" panose="02000600000000000000" pitchFamily="2" charset="0"/>
+                  <a:cs typeface="Ramabhadra" panose="02000600000000000000" pitchFamily="2" charset="0"/>
+                </a:rPr>
+                <a:t>నీ వాక్య ధ్యానమే నా త్రోవకు వెలుగై </a:t>
+              </a:r>
+              <a:r>
+                <a:rPr lang="en-IN" sz="2200" dirty="0">
+                  <a:latin typeface="Ramabhadra" panose="02000600000000000000" pitchFamily="2" charset="0"/>
+                  <a:cs typeface="Ramabhadra" panose="02000600000000000000" pitchFamily="2" charset="0"/>
+                </a:rPr>
+                <a:t>-</a:t>
               </a:r>
             </a:p>
             <a:p>
@@ -3942,13 +4011,13 @@
                 <a:defRPr/>
               </a:pPr>
               <a:r>
-                <a:rPr lang="te-IN" sz="2100" dirty="0">
-                  <a:latin typeface="Ramabhadra" panose="02000600000000000000" pitchFamily="2" charset="0"/>
-                  <a:cs typeface="Ramabhadra" panose="02000600000000000000" pitchFamily="2" charset="0"/>
-                </a:rPr>
-                <a:t>చాలు యేసయ్యా (2)</a:t>
-              </a:r>
-              <a:endParaRPr lang="en-US" sz="2100" dirty="0">
+                <a:rPr lang="te-IN" sz="2200" dirty="0">
+                  <a:latin typeface="Ramabhadra" panose="02000600000000000000" pitchFamily="2" charset="0"/>
+                  <a:cs typeface="Ramabhadra" panose="02000600000000000000" pitchFamily="2" charset="0"/>
+                </a:rPr>
+                <a:t>నను నిల్పెను</a:t>
+              </a:r>
+              <a:endParaRPr lang="en-IN" sz="2200" dirty="0">
                 <a:latin typeface="Ramabhadra" panose="02000600000000000000" pitchFamily="2" charset="0"/>
                 <a:cs typeface="Ramabhadra" panose="02000600000000000000" pitchFamily="2" charset="0"/>
               </a:endParaRPr>
@@ -3957,57 +4026,12 @@
               <a:pPr defTabSz="439781">
                 <a:defRPr/>
               </a:pPr>
-              <a:endParaRPr lang="te-IN" sz="2100" dirty="0">
-                <a:latin typeface="Ramabhadra" panose="02000600000000000000" pitchFamily="2" charset="0"/>
-                <a:cs typeface="Ramabhadra" panose="02000600000000000000" pitchFamily="2" charset="0"/>
-              </a:endParaRPr>
-            </a:p>
-            <a:p>
-              <a:pPr defTabSz="439781">
-                <a:defRPr/>
-              </a:pPr>
-              <a:r>
-                <a:rPr lang="te-IN" sz="2100" dirty="0">
-                  <a:latin typeface="Ramabhadra" panose="02000600000000000000" pitchFamily="2" charset="0"/>
-                  <a:cs typeface="Ramabhadra" panose="02000600000000000000" pitchFamily="2" charset="0"/>
-                </a:rPr>
-                <a:t>కష్ట కాలమందు గుండె జారిపోయినా</a:t>
-              </a:r>
-            </a:p>
-            <a:p>
-              <a:pPr defTabSz="439781">
-                <a:defRPr/>
-              </a:pPr>
-              <a:r>
-                <a:rPr lang="te-IN" sz="2100" dirty="0">
-                  <a:latin typeface="Ramabhadra" panose="02000600000000000000" pitchFamily="2" charset="0"/>
-                  <a:cs typeface="Ramabhadra" panose="02000600000000000000" pitchFamily="2" charset="0"/>
-                </a:rPr>
-                <a:t>గమ్యమే తెలియకుండినా (2)</a:t>
-              </a:r>
-            </a:p>
-            <a:p>
-              <a:pPr defTabSz="439781">
-                <a:defRPr/>
-              </a:pPr>
-              <a:r>
-                <a:rPr lang="te-IN" sz="2100" dirty="0">
-                  <a:latin typeface="Ramabhadra" panose="02000600000000000000" pitchFamily="2" charset="0"/>
-                  <a:cs typeface="Ramabhadra" panose="02000600000000000000" pitchFamily="2" charset="0"/>
-                </a:rPr>
-                <a:t>సాయము చేసే నీవు నాకుంటే (2)</a:t>
-              </a:r>
-            </a:p>
-            <a:p>
-              <a:pPr defTabSz="439781">
-                <a:defRPr/>
-              </a:pPr>
-              <a:r>
-                <a:rPr lang="te-IN" sz="2100" dirty="0">
-                  <a:latin typeface="Ramabhadra" panose="02000600000000000000" pitchFamily="2" charset="0"/>
-                  <a:cs typeface="Ramabhadra" panose="02000600000000000000" pitchFamily="2" charset="0"/>
-                </a:rPr>
-                <a:t>చాలు యేసయ్యా (2)</a:t>
+              <a:r>
+                <a:rPr lang="te-IN" sz="2200" dirty="0">
+                  <a:latin typeface="Ramabhadra" panose="02000600000000000000" pitchFamily="2" charset="0"/>
+                  <a:cs typeface="Ramabhadra" panose="02000600000000000000" pitchFamily="2" charset="0"/>
+                </a:rPr>
+                <a:t>నీ సన్నీధిలో - నీ సంఘములో -2</a:t>
               </a:r>
             </a:p>
           </p:txBody>
@@ -4090,9 +4114,9 @@
         <p:grpSpPr>
           <a:xfrm>
             <a:off x="5104338" y="182031"/>
-            <a:ext cx="4648200" cy="6493935"/>
+            <a:ext cx="4734975" cy="6493935"/>
             <a:chOff x="160868" y="182032"/>
-            <a:chExt cx="4648200" cy="6493935"/>
+            <a:chExt cx="4734975" cy="6493935"/>
           </a:xfrm>
         </p:grpSpPr>
         <p:sp>
@@ -4164,8 +4188,8 @@
           </p:nvSpPr>
           <p:spPr>
             <a:xfrm>
-              <a:off x="247650" y="745935"/>
-              <a:ext cx="4541306" cy="4693593"/>
+              <a:off x="354537" y="716955"/>
+              <a:ext cx="4541306" cy="5478423"/>
             </a:xfrm>
             <a:prstGeom prst="rect">
               <a:avLst/>
@@ -4182,30 +4206,63 @@
                 <a:defRPr/>
               </a:pPr>
               <a:r>
-                <a:rPr lang="te-IN" sz="2300" dirty="0">
-                  <a:latin typeface="Ramabhadra" panose="02000600000000000000" pitchFamily="2" charset="0"/>
-                  <a:cs typeface="Ramabhadra" panose="02000600000000000000" pitchFamily="2" charset="0"/>
-                </a:rPr>
-                <a:t>మంచి దేవుడు భలే మంచి దేవుడు</a:t>
-              </a:r>
+                <a:rPr lang="te-IN" sz="2500" dirty="0">
+                  <a:latin typeface="Ramabhadra" panose="02000600000000000000" pitchFamily="2" charset="0"/>
+                  <a:cs typeface="Ramabhadra" panose="02000600000000000000" pitchFamily="2" charset="0"/>
+                </a:rPr>
+                <a:t>ఎందుకో నన్నింతగా నీవు</a:t>
+              </a:r>
+              <a:endParaRPr lang="en-IN" sz="2500" dirty="0">
+                <a:latin typeface="Ramabhadra" panose="02000600000000000000" pitchFamily="2" charset="0"/>
+                <a:cs typeface="Ramabhadra" panose="02000600000000000000" pitchFamily="2" charset="0"/>
+              </a:endParaRPr>
             </a:p>
             <a:p>
               <a:pPr defTabSz="439781">
                 <a:defRPr/>
               </a:pPr>
               <a:r>
-                <a:rPr lang="te-IN" sz="2300" dirty="0">
-                  <a:latin typeface="Ramabhadra" panose="02000600000000000000" pitchFamily="2" charset="0"/>
-                  <a:cs typeface="Ramabhadra" panose="02000600000000000000" pitchFamily="2" charset="0"/>
-                </a:rPr>
-                <a:t>నిజ దైవం యేసు - అద్వితీయ దేవుడు</a:t>
-              </a:r>
+                <a:rPr lang="te-IN" sz="2500" dirty="0">
+                  <a:latin typeface="Ramabhadra" panose="02000600000000000000" pitchFamily="2" charset="0"/>
+                  <a:cs typeface="Ramabhadra" panose="02000600000000000000" pitchFamily="2" charset="0"/>
+                </a:rPr>
+                <a:t>ప్రేమించితివో దేవా</a:t>
+              </a:r>
+              <a:br>
+                <a:rPr lang="te-IN" sz="2500" dirty="0">
+                  <a:latin typeface="Ramabhadra" panose="02000600000000000000" pitchFamily="2" charset="0"/>
+                  <a:cs typeface="Ramabhadra" panose="02000600000000000000" pitchFamily="2" charset="0"/>
+                </a:rPr>
+              </a:br>
+              <a:r>
+                <a:rPr lang="te-IN" sz="2500" dirty="0">
+                  <a:latin typeface="Ramabhadra" panose="02000600000000000000" pitchFamily="2" charset="0"/>
+                  <a:cs typeface="Ramabhadra" panose="02000600000000000000" pitchFamily="2" charset="0"/>
+                </a:rPr>
+                <a:t>అందుకో నా దీన స్తుతిపాత్ర</a:t>
+              </a:r>
+              <a:endParaRPr lang="en-IN" sz="2500" dirty="0">
+                <a:latin typeface="Ramabhadra" panose="02000600000000000000" pitchFamily="2" charset="0"/>
+                <a:cs typeface="Ramabhadra" panose="02000600000000000000" pitchFamily="2" charset="0"/>
+              </a:endParaRPr>
             </a:p>
             <a:p>
               <a:pPr defTabSz="439781">
                 <a:defRPr/>
               </a:pPr>
-              <a:endParaRPr lang="te-IN" sz="2300" dirty="0">
+              <a:r>
+                <a:rPr lang="te-IN" sz="2500" dirty="0">
+                  <a:latin typeface="Ramabhadra" panose="02000600000000000000" pitchFamily="2" charset="0"/>
+                  <a:cs typeface="Ramabhadra" panose="02000600000000000000" pitchFamily="2" charset="0"/>
+                </a:rPr>
+                <a:t>హల్లెలూయ యేసయ్యా (2)</a:t>
+              </a:r>
+            </a:p>
+            <a:p>
+              <a:pPr defTabSz="439781">
+                <a:defRPr/>
+              </a:pPr>
+              <a:endParaRPr lang="te-IN" sz="2500" dirty="0">
                 <a:latin typeface="Ramabhadra" panose="02000600000000000000" pitchFamily="2" charset="0"/>
                 <a:cs typeface="Ramabhadra" panose="02000600000000000000" pitchFamily="2" charset="0"/>
               </a:endParaRPr>
@@ -4215,120 +4272,130 @@
                 <a:defRPr/>
               </a:pPr>
               <a:r>
-                <a:rPr lang="te-IN" sz="2300" dirty="0">
-                  <a:latin typeface="Ramabhadra" panose="02000600000000000000" pitchFamily="2" charset="0"/>
-                  <a:cs typeface="Ramabhadra" panose="02000600000000000000" pitchFamily="2" charset="0"/>
-                </a:rPr>
-                <a:t>మ్రొక్కులను కోరడు - మనసిస్తే చాలును</a:t>
-              </a:r>
+                <a:rPr lang="te-IN" sz="2500" dirty="0">
+                  <a:latin typeface="Ramabhadra" panose="02000600000000000000" pitchFamily="2" charset="0"/>
+                  <a:cs typeface="Ramabhadra" panose="02000600000000000000" pitchFamily="2" charset="0"/>
+                </a:rPr>
+                <a:t>నా పాపము బాప నరరూపివైనావు</a:t>
+              </a:r>
+              <a:br>
+                <a:rPr lang="te-IN" sz="2500" dirty="0">
+                  <a:latin typeface="Ramabhadra" panose="02000600000000000000" pitchFamily="2" charset="0"/>
+                  <a:cs typeface="Ramabhadra" panose="02000600000000000000" pitchFamily="2" charset="0"/>
+                </a:rPr>
+              </a:br>
+              <a:r>
+                <a:rPr lang="te-IN" sz="2500" dirty="0">
+                  <a:latin typeface="Ramabhadra" panose="02000600000000000000" pitchFamily="2" charset="0"/>
+                  <a:cs typeface="Ramabhadra" panose="02000600000000000000" pitchFamily="2" charset="0"/>
+                </a:rPr>
+                <a:t>నా శాపము మాప నలిగి వ్రేలాడితివి</a:t>
+              </a:r>
+              <a:br>
+                <a:rPr lang="te-IN" sz="2500" dirty="0">
+                  <a:latin typeface="Ramabhadra" panose="02000600000000000000" pitchFamily="2" charset="0"/>
+                  <a:cs typeface="Ramabhadra" panose="02000600000000000000" pitchFamily="2" charset="0"/>
+                </a:rPr>
+              </a:br>
+              <a:r>
+                <a:rPr lang="te-IN" sz="2500" dirty="0">
+                  <a:latin typeface="Ramabhadra" panose="02000600000000000000" pitchFamily="2" charset="0"/>
+                  <a:cs typeface="Ramabhadra" panose="02000600000000000000" pitchFamily="2" charset="0"/>
+                </a:rPr>
+                <a:t>నాకు చాలిన దేవుడవు</a:t>
+              </a:r>
+              <a:r>
+                <a:rPr lang="en-IN" sz="2500" dirty="0">
+                  <a:latin typeface="Ramabhadra" panose="02000600000000000000" pitchFamily="2" charset="0"/>
+                  <a:cs typeface="Ramabhadra" panose="02000600000000000000" pitchFamily="2" charset="0"/>
+                </a:rPr>
+                <a:t> </a:t>
+              </a:r>
+              <a:r>
+                <a:rPr lang="te-IN" sz="2500" dirty="0">
+                  <a:latin typeface="Ramabhadra" panose="02000600000000000000" pitchFamily="2" charset="0"/>
+                  <a:cs typeface="Ramabhadra" panose="02000600000000000000" pitchFamily="2" charset="0"/>
+                </a:rPr>
+                <a:t>నీవే </a:t>
+              </a:r>
+              <a:endParaRPr lang="en-IN" sz="2500" dirty="0">
+                <a:latin typeface="Ramabhadra" panose="02000600000000000000" pitchFamily="2" charset="0"/>
+                <a:cs typeface="Ramabhadra" panose="02000600000000000000" pitchFamily="2" charset="0"/>
+              </a:endParaRPr>
             </a:p>
             <a:p>
               <a:pPr defTabSz="439781">
                 <a:defRPr/>
               </a:pPr>
               <a:r>
-                <a:rPr lang="te-IN" sz="2300" dirty="0">
-                  <a:latin typeface="Ramabhadra" panose="02000600000000000000" pitchFamily="2" charset="0"/>
-                  <a:cs typeface="Ramabhadra" panose="02000600000000000000" pitchFamily="2" charset="0"/>
-                </a:rPr>
-                <a:t>కొండలెక్కి రమ్మనడు - మనలో కొలువుంటాడు</a:t>
+                <a:rPr lang="te-IN" sz="2500" dirty="0">
+                  <a:latin typeface="Ramabhadra" panose="02000600000000000000" pitchFamily="2" charset="0"/>
+                  <a:cs typeface="Ramabhadra" panose="02000600000000000000" pitchFamily="2" charset="0"/>
+                </a:rPr>
+                <a:t>నా స్థానములో నీవే (2)         </a:t>
               </a:r>
             </a:p>
             <a:p>
               <a:pPr defTabSz="439781">
                 <a:defRPr/>
               </a:pPr>
-              <a:r>
-                <a:rPr lang="te-IN" sz="2300" dirty="0">
-                  <a:latin typeface="Ramabhadra" panose="02000600000000000000" pitchFamily="2" charset="0"/>
-                  <a:cs typeface="Ramabhadra" panose="02000600000000000000" pitchFamily="2" charset="0"/>
-                </a:rPr>
-                <a:t>వెదికితే ప్రతి వారికి - దొరికేను యేసు</a:t>
-              </a:r>
+              <a:endParaRPr lang="te-IN" sz="2500" dirty="0">
+                <a:latin typeface="Ramabhadra" panose="02000600000000000000" pitchFamily="2" charset="0"/>
+                <a:cs typeface="Ramabhadra" panose="02000600000000000000" pitchFamily="2" charset="0"/>
+              </a:endParaRPr>
             </a:p>
             <a:p>
               <a:pPr defTabSz="439781">
                 <a:defRPr/>
               </a:pPr>
               <a:r>
-                <a:rPr lang="te-IN" sz="2300" dirty="0">
-                  <a:latin typeface="Ramabhadra" panose="02000600000000000000" pitchFamily="2" charset="0"/>
-                  <a:cs typeface="Ramabhadra" panose="02000600000000000000" pitchFamily="2" charset="0"/>
-                </a:rPr>
-                <a:t>పిలిచే ప్రతి వారికి - పలికేను యేసు</a:t>
-              </a:r>
+                <a:rPr lang="te-IN" sz="2500" dirty="0">
+                  <a:latin typeface="Ramabhadra" panose="02000600000000000000" pitchFamily="2" charset="0"/>
+                  <a:cs typeface="Ramabhadra" panose="02000600000000000000" pitchFamily="2" charset="0"/>
+                </a:rPr>
+                <a:t>నీ రూపము నాలో నిర్మించియున్నావు</a:t>
+              </a:r>
+              <a:br>
+                <a:rPr lang="te-IN" sz="2500" dirty="0">
+                  <a:latin typeface="Ramabhadra" panose="02000600000000000000" pitchFamily="2" charset="0"/>
+                  <a:cs typeface="Ramabhadra" panose="02000600000000000000" pitchFamily="2" charset="0"/>
+                </a:rPr>
+              </a:br>
+              <a:r>
+                <a:rPr lang="te-IN" sz="2500" dirty="0">
+                  <a:latin typeface="Ramabhadra" panose="02000600000000000000" pitchFamily="2" charset="0"/>
+                  <a:cs typeface="Ramabhadra" panose="02000600000000000000" pitchFamily="2" charset="0"/>
+                </a:rPr>
+                <a:t>నీ పోలికలోనే నివసించుమన్నావు</a:t>
+              </a:r>
+              <a:br>
+                <a:rPr lang="te-IN" sz="2500" dirty="0">
+                  <a:latin typeface="Ramabhadra" panose="02000600000000000000" pitchFamily="2" charset="0"/>
+                  <a:cs typeface="Ramabhadra" panose="02000600000000000000" pitchFamily="2" charset="0"/>
+                </a:rPr>
+              </a:br>
+              <a:r>
+                <a:rPr lang="te-IN" sz="2500" dirty="0">
+                  <a:latin typeface="Ramabhadra" panose="02000600000000000000" pitchFamily="2" charset="0"/>
+                  <a:cs typeface="Ramabhadra" panose="02000600000000000000" pitchFamily="2" charset="0"/>
+                </a:rPr>
+                <a:t>నీవు నన్ను ఎన్నుకొంటివి</a:t>
+              </a:r>
+              <a:endParaRPr lang="en-IN" sz="2500" dirty="0">
+                <a:latin typeface="Ramabhadra" panose="02000600000000000000" pitchFamily="2" charset="0"/>
+                <a:cs typeface="Ramabhadra" panose="02000600000000000000" pitchFamily="2" charset="0"/>
+              </a:endParaRPr>
             </a:p>
             <a:p>
               <a:pPr defTabSz="439781">
                 <a:defRPr/>
               </a:pPr>
               <a:r>
-                <a:rPr lang="te-IN" sz="2300" dirty="0">
-                  <a:latin typeface="Ramabhadra" panose="02000600000000000000" pitchFamily="2" charset="0"/>
-                  <a:cs typeface="Ramabhadra" panose="02000600000000000000" pitchFamily="2" charset="0"/>
-                </a:rPr>
-                <a:t>బొమ్మ కాదయ్యో - జీవమున్న దేవుడు</a:t>
-              </a:r>
-              <a:endParaRPr lang="en-US" sz="2300" dirty="0">
-                <a:latin typeface="Ramabhadra" panose="02000600000000000000" pitchFamily="2" charset="0"/>
-                <a:cs typeface="Ramabhadra" panose="02000600000000000000" pitchFamily="2" charset="0"/>
-              </a:endParaRPr>
-            </a:p>
-            <a:p>
-              <a:pPr defTabSz="439781">
-                <a:defRPr/>
-              </a:pPr>
-              <a:endParaRPr lang="te-IN" sz="2300" dirty="0">
-                <a:latin typeface="Ramabhadra" panose="02000600000000000000" pitchFamily="2" charset="0"/>
-                <a:cs typeface="Ramabhadra" panose="02000600000000000000" pitchFamily="2" charset="0"/>
-              </a:endParaRPr>
-            </a:p>
-            <a:p>
-              <a:pPr defTabSz="439781">
-                <a:defRPr/>
-              </a:pPr>
-              <a:r>
-                <a:rPr lang="te-IN" sz="2300" dirty="0">
-                  <a:latin typeface="Ramabhadra" panose="02000600000000000000" pitchFamily="2" charset="0"/>
-                  <a:cs typeface="Ramabhadra" panose="02000600000000000000" pitchFamily="2" charset="0"/>
-                </a:rPr>
-                <a:t>కుంటివాడు గంతులేయ - కాళ్ళ నొసగినాడు</a:t>
-              </a:r>
-            </a:p>
-            <a:p>
-              <a:pPr defTabSz="439781">
-                <a:defRPr/>
-              </a:pPr>
-              <a:r>
-                <a:rPr lang="te-IN" sz="2300" dirty="0">
-                  <a:latin typeface="Ramabhadra" panose="02000600000000000000" pitchFamily="2" charset="0"/>
-                  <a:cs typeface="Ramabhadra" panose="02000600000000000000" pitchFamily="2" charset="0"/>
-                </a:rPr>
-                <a:t>మూగవారు స్తుతిచేయ - నోటినిచ్చినాడు</a:t>
-              </a:r>
-            </a:p>
-            <a:p>
-              <a:pPr defTabSz="439781">
-                <a:defRPr/>
-              </a:pPr>
-              <a:r>
-                <a:rPr lang="te-IN" sz="2300" dirty="0">
-                  <a:latin typeface="Ramabhadra" panose="02000600000000000000" pitchFamily="2" charset="0"/>
-                  <a:cs typeface="Ramabhadra" panose="02000600000000000000" pitchFamily="2" charset="0"/>
-                </a:rPr>
-                <a:t>బధిరులు తన స్వరము విన - చెవులిచ్చినాడు</a:t>
-              </a:r>
-            </a:p>
-            <a:p>
-              <a:pPr defTabSz="439781">
-                <a:defRPr/>
-              </a:pPr>
-              <a:r>
-                <a:rPr lang="te-IN" sz="2300" dirty="0">
-                  <a:latin typeface="Ramabhadra" panose="02000600000000000000" pitchFamily="2" charset="0"/>
-                  <a:cs typeface="Ramabhadra" panose="02000600000000000000" pitchFamily="2" charset="0"/>
-                </a:rPr>
-                <a:t>ప్రేమా మయుడు - ఆశ్చర్య దేవుడు</a:t>
+                <a:rPr lang="te-IN" sz="2500" dirty="0">
+                  <a:latin typeface="Ramabhadra" panose="02000600000000000000" pitchFamily="2" charset="0"/>
+                  <a:cs typeface="Ramabhadra" panose="02000600000000000000" pitchFamily="2" charset="0"/>
+                </a:rPr>
+                <a:t>నీ కొరకై నీ కృపలో (2)           </a:t>
               </a:r>
             </a:p>
           </p:txBody>

--- a/songsTemplate.pptx
+++ b/songsTemplate.pptx
@@ -255,7 +255,7 @@
           <a:p>
             <a:fld id="{F1102B08-ED9E-409F-B95F-09CAA1DAF6E0}" type="datetimeFigureOut">
               <a:rPr lang="en-IN" smtClean="0"/>
-              <a:t>16-11-2024</a:t>
+              <a:t>23-11-2024</a:t>
             </a:fld>
             <a:endParaRPr lang="en-IN"/>
           </a:p>
@@ -425,7 +425,7 @@
           <a:p>
             <a:fld id="{F1102B08-ED9E-409F-B95F-09CAA1DAF6E0}" type="datetimeFigureOut">
               <a:rPr lang="en-IN" smtClean="0"/>
-              <a:t>16-11-2024</a:t>
+              <a:t>23-11-2024</a:t>
             </a:fld>
             <a:endParaRPr lang="en-IN"/>
           </a:p>
@@ -605,7 +605,7 @@
           <a:p>
             <a:fld id="{F1102B08-ED9E-409F-B95F-09CAA1DAF6E0}" type="datetimeFigureOut">
               <a:rPr lang="en-IN" smtClean="0"/>
-              <a:t>16-11-2024</a:t>
+              <a:t>23-11-2024</a:t>
             </a:fld>
             <a:endParaRPr lang="en-IN"/>
           </a:p>
@@ -775,7 +775,7 @@
           <a:p>
             <a:fld id="{F1102B08-ED9E-409F-B95F-09CAA1DAF6E0}" type="datetimeFigureOut">
               <a:rPr lang="en-IN" smtClean="0"/>
-              <a:t>16-11-2024</a:t>
+              <a:t>23-11-2024</a:t>
             </a:fld>
             <a:endParaRPr lang="en-IN"/>
           </a:p>
@@ -1019,7 +1019,7 @@
           <a:p>
             <a:fld id="{F1102B08-ED9E-409F-B95F-09CAA1DAF6E0}" type="datetimeFigureOut">
               <a:rPr lang="en-IN" smtClean="0"/>
-              <a:t>16-11-2024</a:t>
+              <a:t>23-11-2024</a:t>
             </a:fld>
             <a:endParaRPr lang="en-IN"/>
           </a:p>
@@ -1251,7 +1251,7 @@
           <a:p>
             <a:fld id="{F1102B08-ED9E-409F-B95F-09CAA1DAF6E0}" type="datetimeFigureOut">
               <a:rPr lang="en-IN" smtClean="0"/>
-              <a:t>16-11-2024</a:t>
+              <a:t>23-11-2024</a:t>
             </a:fld>
             <a:endParaRPr lang="en-IN"/>
           </a:p>
@@ -1618,7 +1618,7 @@
           <a:p>
             <a:fld id="{F1102B08-ED9E-409F-B95F-09CAA1DAF6E0}" type="datetimeFigureOut">
               <a:rPr lang="en-IN" smtClean="0"/>
-              <a:t>16-11-2024</a:t>
+              <a:t>23-11-2024</a:t>
             </a:fld>
             <a:endParaRPr lang="en-IN"/>
           </a:p>
@@ -1736,7 +1736,7 @@
           <a:p>
             <a:fld id="{F1102B08-ED9E-409F-B95F-09CAA1DAF6E0}" type="datetimeFigureOut">
               <a:rPr lang="en-IN" smtClean="0"/>
-              <a:t>16-11-2024</a:t>
+              <a:t>23-11-2024</a:t>
             </a:fld>
             <a:endParaRPr lang="en-IN"/>
           </a:p>
@@ -1831,7 +1831,7 @@
           <a:p>
             <a:fld id="{F1102B08-ED9E-409F-B95F-09CAA1DAF6E0}" type="datetimeFigureOut">
               <a:rPr lang="en-IN" smtClean="0"/>
-              <a:t>16-11-2024</a:t>
+              <a:t>23-11-2024</a:t>
             </a:fld>
             <a:endParaRPr lang="en-IN"/>
           </a:p>
@@ -2108,7 +2108,7 @@
           <a:p>
             <a:fld id="{F1102B08-ED9E-409F-B95F-09CAA1DAF6E0}" type="datetimeFigureOut">
               <a:rPr lang="en-IN" smtClean="0"/>
-              <a:t>16-11-2024</a:t>
+              <a:t>23-11-2024</a:t>
             </a:fld>
             <a:endParaRPr lang="en-IN"/>
           </a:p>
@@ -2365,7 +2365,7 @@
           <a:p>
             <a:fld id="{F1102B08-ED9E-409F-B95F-09CAA1DAF6E0}" type="datetimeFigureOut">
               <a:rPr lang="en-IN" smtClean="0"/>
-              <a:t>16-11-2024</a:t>
+              <a:t>23-11-2024</a:t>
             </a:fld>
             <a:endParaRPr lang="en-IN"/>
           </a:p>
@@ -2578,7 +2578,7 @@
           <a:p>
             <a:fld id="{F1102B08-ED9E-409F-B95F-09CAA1DAF6E0}" type="datetimeFigureOut">
               <a:rPr lang="en-IN" smtClean="0"/>
-              <a:t>16-11-2024</a:t>
+              <a:t>23-11-2024</a:t>
             </a:fld>
             <a:endParaRPr lang="en-IN"/>
           </a:p>
@@ -2998,9 +2998,9 @@
         <p:grpSpPr>
           <a:xfrm>
             <a:off x="160868" y="182032"/>
-            <a:ext cx="5398025" cy="6493935"/>
+            <a:ext cx="5236140" cy="6493935"/>
             <a:chOff x="160868" y="182032"/>
-            <a:chExt cx="5398025" cy="6493935"/>
+            <a:chExt cx="5236140" cy="6493935"/>
           </a:xfrm>
         </p:grpSpPr>
         <p:sp>
@@ -3072,8 +3072,8 @@
           </p:nvSpPr>
           <p:spPr>
             <a:xfrm>
-              <a:off x="445483" y="768681"/>
-              <a:ext cx="5113410" cy="4893647"/>
+              <a:off x="283598" y="241491"/>
+              <a:ext cx="5113410" cy="6370975"/>
             </a:xfrm>
             <a:prstGeom prst="rect">
               <a:avLst/>
@@ -3094,7 +3094,20 @@
                   <a:latin typeface="Ramabhadra" panose="02000600000000000000" pitchFamily="2" charset="0"/>
                   <a:cs typeface="Ramabhadra" panose="02000600000000000000" pitchFamily="2" charset="0"/>
                 </a:rPr>
-                <a:t>సన్నుతించెదను - దయాళుడవు నీవని</a:t>
+                <a:t>ఉత్సాహ గానము చేసెదము</a:t>
+              </a:r>
+              <a:br>
+                <a:rPr lang="te-IN" sz="2400" dirty="0">
+                  <a:latin typeface="Ramabhadra" panose="02000600000000000000" pitchFamily="2" charset="0"/>
+                  <a:cs typeface="Ramabhadra" panose="02000600000000000000" pitchFamily="2" charset="0"/>
+                </a:rPr>
+              </a:br>
+              <a:r>
+                <a:rPr lang="te-IN" sz="2400" dirty="0">
+                  <a:latin typeface="Ramabhadra" panose="02000600000000000000" pitchFamily="2" charset="0"/>
+                  <a:cs typeface="Ramabhadra" panose="02000600000000000000" pitchFamily="2" charset="0"/>
+                </a:rPr>
+                <a:t>ఘనపరచెదము మన </a:t>
               </a:r>
             </a:p>
             <a:p>
@@ -3106,23 +3119,59 @@
                   <a:latin typeface="Ramabhadra" panose="02000600000000000000" pitchFamily="2" charset="0"/>
                   <a:cs typeface="Ramabhadra" panose="02000600000000000000" pitchFamily="2" charset="0"/>
                 </a:rPr>
-                <a:t>యెహోవా నీవే దయాళుడవని</a:t>
-              </a:r>
-              <a:endParaRPr lang="en-IN" sz="2400" dirty="0">
-                <a:latin typeface="Ramabhadra" panose="02000600000000000000" pitchFamily="2" charset="0"/>
-                <a:cs typeface="Ramabhadra" panose="02000600000000000000" pitchFamily="2" charset="0"/>
-              </a:endParaRPr>
-            </a:p>
-            <a:p>
-              <a:pPr defTabSz="439781">
-                <a:defRPr/>
-              </a:pPr>
-              <a:r>
+                <a:t>యేసయ్య నామమును (2)</a:t>
+              </a:r>
+              <a:br>
                 <a:rPr lang="te-IN" sz="2400" dirty="0">
                   <a:latin typeface="Ramabhadra" panose="02000600000000000000" pitchFamily="2" charset="0"/>
                   <a:cs typeface="Ramabhadra" panose="02000600000000000000" pitchFamily="2" charset="0"/>
                 </a:rPr>
-                <a:t>నిను సన్నుతించెదను - 2</a:t>
+              </a:br>
+              <a:r>
+                <a:rPr lang="te-IN" sz="2400" dirty="0">
+                  <a:latin typeface="Ramabhadra" panose="02000600000000000000" pitchFamily="2" charset="0"/>
+                  <a:cs typeface="Ramabhadra" panose="02000600000000000000" pitchFamily="2" charset="0"/>
+                </a:rPr>
+                <a:t>హల్లెలూయ యెహోవ రాఫా</a:t>
+              </a:r>
+              <a:br>
+                <a:rPr lang="te-IN" sz="2400" dirty="0">
+                  <a:latin typeface="Ramabhadra" panose="02000600000000000000" pitchFamily="2" charset="0"/>
+                  <a:cs typeface="Ramabhadra" panose="02000600000000000000" pitchFamily="2" charset="0"/>
+                </a:rPr>
+              </a:br>
+              <a:r>
+                <a:rPr lang="te-IN" sz="2400" dirty="0">
+                  <a:latin typeface="Ramabhadra" panose="02000600000000000000" pitchFamily="2" charset="0"/>
+                  <a:cs typeface="Ramabhadra" panose="02000600000000000000" pitchFamily="2" charset="0"/>
+                </a:rPr>
+                <a:t>హల్లెలూయ యెహోవ షమ్మా</a:t>
+              </a:r>
+              <a:br>
+                <a:rPr lang="te-IN" sz="2400" dirty="0">
+                  <a:latin typeface="Ramabhadra" panose="02000600000000000000" pitchFamily="2" charset="0"/>
+                  <a:cs typeface="Ramabhadra" panose="02000600000000000000" pitchFamily="2" charset="0"/>
+                </a:rPr>
+              </a:br>
+              <a:r>
+                <a:rPr lang="te-IN" sz="2400" dirty="0">
+                  <a:latin typeface="Ramabhadra" panose="02000600000000000000" pitchFamily="2" charset="0"/>
+                  <a:cs typeface="Ramabhadra" panose="02000600000000000000" pitchFamily="2" charset="0"/>
+                </a:rPr>
+                <a:t>హల్లెలూయ యెహోవ ఈరే</a:t>
+              </a:r>
+              <a:br>
+                <a:rPr lang="te-IN" sz="2400" dirty="0">
+                  <a:latin typeface="Ramabhadra" panose="02000600000000000000" pitchFamily="2" charset="0"/>
+                  <a:cs typeface="Ramabhadra" panose="02000600000000000000" pitchFamily="2" charset="0"/>
+                </a:rPr>
+              </a:br>
+              <a:r>
+                <a:rPr lang="te-IN" sz="2400" dirty="0">
+                  <a:latin typeface="Ramabhadra" panose="02000600000000000000" pitchFamily="2" charset="0"/>
+                  <a:cs typeface="Ramabhadra" panose="02000600000000000000" pitchFamily="2" charset="0"/>
+                </a:rPr>
+                <a:t>హల్లెలూయ యెహోవ షాలోమ్ (2)</a:t>
               </a:r>
             </a:p>
             <a:p>
@@ -3143,12 +3192,34 @@
                   <a:latin typeface="Ramabhadra" panose="02000600000000000000" pitchFamily="2" charset="0"/>
                   <a:cs typeface="Ramabhadra" panose="02000600000000000000" pitchFamily="2" charset="0"/>
                 </a:rPr>
-                <a:t>సర్వ సత్యములో నను నీవు నడిపి</a:t>
-              </a:r>
-              <a:endParaRPr lang="en-IN" sz="2400" dirty="0">
-                <a:latin typeface="Ramabhadra" panose="02000600000000000000" pitchFamily="2" charset="0"/>
-                <a:cs typeface="Ramabhadra" panose="02000600000000000000" pitchFamily="2" charset="0"/>
-              </a:endParaRPr>
+                <a:t>అమూల్యములైన వాగ్ధానములు</a:t>
+              </a:r>
+              <a:br>
+                <a:rPr lang="te-IN" sz="2400" dirty="0">
+                  <a:latin typeface="Ramabhadra" panose="02000600000000000000" pitchFamily="2" charset="0"/>
+                  <a:cs typeface="Ramabhadra" panose="02000600000000000000" pitchFamily="2" charset="0"/>
+                </a:rPr>
+              </a:br>
+              <a:r>
+                <a:rPr lang="te-IN" sz="2400" dirty="0">
+                  <a:latin typeface="Ramabhadra" panose="02000600000000000000" pitchFamily="2" charset="0"/>
+                  <a:cs typeface="Ramabhadra" panose="02000600000000000000" pitchFamily="2" charset="0"/>
+                </a:rPr>
+                <a:t>అత్యధికముగా ఉన్నవి (2)</a:t>
+              </a:r>
+              <a:br>
+                <a:rPr lang="te-IN" sz="2400" dirty="0">
+                  <a:latin typeface="Ramabhadra" panose="02000600000000000000" pitchFamily="2" charset="0"/>
+                  <a:cs typeface="Ramabhadra" panose="02000600000000000000" pitchFamily="2" charset="0"/>
+                </a:rPr>
+              </a:br>
+              <a:r>
+                <a:rPr lang="te-IN" sz="2400" dirty="0">
+                  <a:latin typeface="Ramabhadra" panose="02000600000000000000" pitchFamily="2" charset="0"/>
+                  <a:cs typeface="Ramabhadra" panose="02000600000000000000" pitchFamily="2" charset="0"/>
+                </a:rPr>
+                <a:t>వాటిని మనము నమ్మినయెడల</a:t>
+              </a:r>
             </a:p>
             <a:p>
               <a:pPr defTabSz="439781">
@@ -3159,67 +3230,7 @@
                   <a:latin typeface="Ramabhadra" panose="02000600000000000000" pitchFamily="2" charset="0"/>
                   <a:cs typeface="Ramabhadra" panose="02000600000000000000" pitchFamily="2" charset="0"/>
                 </a:rPr>
-                <a:t>ఆదరించిన –</a:t>
-              </a:r>
-              <a:r>
-                <a:rPr lang="en-IN" sz="2400" dirty="0">
-                  <a:latin typeface="Ramabhadra" panose="02000600000000000000" pitchFamily="2" charset="0"/>
-                  <a:cs typeface="Ramabhadra" panose="02000600000000000000" pitchFamily="2" charset="0"/>
-                </a:rPr>
-                <a:t> </a:t>
-              </a:r>
-              <a:r>
-                <a:rPr lang="te-IN" sz="2400" dirty="0">
-                  <a:latin typeface="Ramabhadra" panose="02000600000000000000" pitchFamily="2" charset="0"/>
-                  <a:cs typeface="Ramabhadra" panose="02000600000000000000" pitchFamily="2" charset="0"/>
-                </a:rPr>
-                <a:t>పరిశుద్ధాత్ముడా</a:t>
-              </a:r>
-              <a:endParaRPr lang="en-IN" sz="2400" dirty="0">
-                <a:latin typeface="Ramabhadra" panose="02000600000000000000" pitchFamily="2" charset="0"/>
-                <a:cs typeface="Ramabhadra" panose="02000600000000000000" pitchFamily="2" charset="0"/>
-              </a:endParaRPr>
-            </a:p>
-            <a:p>
-              <a:pPr defTabSz="439781">
-                <a:defRPr/>
-              </a:pPr>
-              <a:r>
-                <a:rPr lang="te-IN" sz="2400" dirty="0">
-                  <a:latin typeface="Ramabhadra" panose="02000600000000000000" pitchFamily="2" charset="0"/>
-                  <a:cs typeface="Ramabhadra" panose="02000600000000000000" pitchFamily="2" charset="0"/>
-                </a:rPr>
-                <a:t>కృపాధారము నీవెగా –</a:t>
-              </a:r>
-              <a:r>
-                <a:rPr lang="en-IN" sz="2400" dirty="0">
-                  <a:latin typeface="Ramabhadra" panose="02000600000000000000" pitchFamily="2" charset="0"/>
-                  <a:cs typeface="Ramabhadra" panose="02000600000000000000" pitchFamily="2" charset="0"/>
-                </a:rPr>
-                <a:t> </a:t>
-              </a:r>
-              <a:r>
-                <a:rPr lang="te-IN" sz="2400" dirty="0">
-                  <a:latin typeface="Ramabhadra" panose="02000600000000000000" pitchFamily="2" charset="0"/>
-                  <a:cs typeface="Ramabhadra" panose="02000600000000000000" pitchFamily="2" charset="0"/>
-                </a:rPr>
-                <a:t>షాలేమురాజా</a:t>
-              </a:r>
-              <a:endParaRPr lang="en-IN" sz="2400" dirty="0">
-                <a:latin typeface="Ramabhadra" panose="02000600000000000000" pitchFamily="2" charset="0"/>
-                <a:cs typeface="Ramabhadra" panose="02000600000000000000" pitchFamily="2" charset="0"/>
-              </a:endParaRPr>
-            </a:p>
-            <a:p>
-              <a:pPr defTabSz="439781">
-                <a:defRPr/>
-              </a:pPr>
-              <a:r>
-                <a:rPr lang="te-IN" sz="2400" dirty="0">
-                  <a:latin typeface="Ramabhadra" panose="02000600000000000000" pitchFamily="2" charset="0"/>
-                  <a:cs typeface="Ramabhadra" panose="02000600000000000000" pitchFamily="2" charset="0"/>
-                </a:rPr>
-                <a:t>నిను సన్మానించెదను</a:t>
+                <a:t>దేవుని మహిమను ఆనుభవించెదము (2)</a:t>
               </a:r>
             </a:p>
             <a:p>
@@ -3240,7 +3251,7 @@
                   <a:latin typeface="Ramabhadra" panose="02000600000000000000" pitchFamily="2" charset="0"/>
                   <a:cs typeface="Ramabhadra" panose="02000600000000000000" pitchFamily="2" charset="0"/>
                 </a:rPr>
-                <a:t>నీ కను చూపుల పరిధిలోనన్ను నిలిపి</a:t>
+                <a:t>ఆత్మీయ ఆరాధనలు జరుగుచున్నవి </a:t>
               </a:r>
             </a:p>
             <a:p>
@@ -3252,7 +3263,7 @@
                   <a:latin typeface="Ramabhadra" panose="02000600000000000000" pitchFamily="2" charset="0"/>
                   <a:cs typeface="Ramabhadra" panose="02000600000000000000" pitchFamily="2" charset="0"/>
                 </a:rPr>
-                <a:t>చూపితివా నీ వాత్సల్యమును</a:t>
+                <a:t>ఇవన్ని వాగ్ధాన ఫలములెగా </a:t>
               </a:r>
             </a:p>
             <a:p>
@@ -3264,12 +3275,8 @@
                   <a:latin typeface="Ramabhadra" panose="02000600000000000000" pitchFamily="2" charset="0"/>
                   <a:cs typeface="Ramabhadra" panose="02000600000000000000" pitchFamily="2" charset="0"/>
                 </a:rPr>
-                <a:t>కృపానిధివి నీవెగా - నా యేసురాజా</a:t>
-              </a:r>
-              <a:endParaRPr lang="en-IN" sz="2400" dirty="0">
-                <a:latin typeface="Ramabhadra" panose="02000600000000000000" pitchFamily="2" charset="0"/>
-                <a:cs typeface="Ramabhadra" panose="02000600000000000000" pitchFamily="2" charset="0"/>
-              </a:endParaRPr>
+                <a:t>అత్మాభిషేకము సమృద్ధిగా పొంది </a:t>
+              </a:r>
             </a:p>
             <a:p>
               <a:pPr defTabSz="439781">
@@ -3280,7 +3287,7 @@
                   <a:latin typeface="Ramabhadra" panose="02000600000000000000" pitchFamily="2" charset="0"/>
                   <a:cs typeface="Ramabhadra" panose="02000600000000000000" pitchFamily="2" charset="0"/>
                 </a:rPr>
-                <a:t>నిను సన్మానించెదను</a:t>
+                <a:t>ఆత్మీయ వరములు అనుభవించెదము (2)</a:t>
               </a:r>
             </a:p>
           </p:txBody>
@@ -3299,7 +3306,7 @@
           </p:nvSpPr>
           <p:spPr>
             <a:xfrm>
-              <a:off x="369283" y="326430"/>
+              <a:off x="4237077" y="320474"/>
               <a:ext cx="390525" cy="390525"/>
             </a:xfrm>
             <a:prstGeom prst="ellipse">
@@ -3363,9 +3370,9 @@
         <p:grpSpPr>
           <a:xfrm>
             <a:off x="5104338" y="182031"/>
-            <a:ext cx="4881562" cy="6493935"/>
+            <a:ext cx="4738425" cy="6493935"/>
             <a:chOff x="160868" y="182032"/>
-            <a:chExt cx="4881562" cy="6493935"/>
+            <a:chExt cx="4738425" cy="6493935"/>
           </a:xfrm>
         </p:grpSpPr>
         <p:sp>
@@ -3437,8 +3444,8 @@
           </p:nvSpPr>
           <p:spPr>
             <a:xfrm>
-              <a:off x="501124" y="653009"/>
-              <a:ext cx="4541306" cy="6001643"/>
+              <a:off x="357987" y="391483"/>
+              <a:ext cx="4541306" cy="5909310"/>
             </a:xfrm>
             <a:prstGeom prst="rect">
               <a:avLst/>
@@ -3452,151 +3459,122 @@
             <a:lstStyle/>
             <a:p>
               <a:r>
-                <a:rPr lang="te-IN" sz="2400" dirty="0">
-                  <a:latin typeface="Ramabhadra" panose="02000600000000000000" pitchFamily="2" charset="0"/>
-                  <a:cs typeface="Ramabhadra" panose="02000600000000000000" pitchFamily="2" charset="0"/>
-                </a:rPr>
-                <a:t>కృపామయుడా – నీలోనా (2)</a:t>
-              </a:r>
-            </a:p>
-            <a:p>
-              <a:r>
-                <a:rPr lang="te-IN" sz="2400" dirty="0">
-                  <a:latin typeface="Ramabhadra" panose="02000600000000000000" pitchFamily="2" charset="0"/>
-                  <a:cs typeface="Ramabhadra" panose="02000600000000000000" pitchFamily="2" charset="0"/>
-                </a:rPr>
-                <a:t>నివసింప జేసినందున</a:t>
-              </a:r>
-            </a:p>
-            <a:p>
-              <a:r>
-                <a:rPr lang="te-IN" sz="2400" dirty="0">
-                  <a:latin typeface="Ramabhadra" panose="02000600000000000000" pitchFamily="2" charset="0"/>
-                  <a:cs typeface="Ramabhadra" panose="02000600000000000000" pitchFamily="2" charset="0"/>
-                </a:rPr>
-                <a:t>ఇదిగో నా స్తుతుల సింహాసనం</a:t>
-              </a:r>
-            </a:p>
-            <a:p>
-              <a:r>
-                <a:rPr lang="te-IN" sz="2400" dirty="0">
-                  <a:latin typeface="Ramabhadra" panose="02000600000000000000" pitchFamily="2" charset="0"/>
-                  <a:cs typeface="Ramabhadra" panose="02000600000000000000" pitchFamily="2" charset="0"/>
-                </a:rPr>
-                <a:t>నీలో నివసింప జేసినందునా</a:t>
-              </a:r>
-            </a:p>
-            <a:p>
-              <a:r>
-                <a:rPr lang="te-IN" sz="2400" dirty="0">
-                  <a:latin typeface="Ramabhadra" panose="02000600000000000000" pitchFamily="2" charset="0"/>
-                  <a:cs typeface="Ramabhadra" panose="02000600000000000000" pitchFamily="2" charset="0"/>
-                </a:rPr>
-                <a:t>ఇదిగో నా స్తుతుల సింహాసనం</a:t>
-              </a:r>
-            </a:p>
-            <a:p>
-              <a:r>
-                <a:rPr lang="te-IN" sz="2400" dirty="0">
-                  <a:latin typeface="Ramabhadra" panose="02000600000000000000" pitchFamily="2" charset="0"/>
-                  <a:cs typeface="Ramabhadra" panose="02000600000000000000" pitchFamily="2" charset="0"/>
-                </a:rPr>
-                <a:t>కృపామయుడా</a:t>
-              </a:r>
-              <a:r>
-                <a:rPr lang="en-IN" sz="2400" dirty="0">
-                  <a:latin typeface="Ramabhadra" panose="02000600000000000000" pitchFamily="2" charset="0"/>
-                  <a:cs typeface="Ramabhadra" panose="02000600000000000000" pitchFamily="2" charset="0"/>
-                </a:rPr>
-                <a:t>...</a:t>
-              </a:r>
-              <a:endParaRPr lang="te-IN" sz="2400" dirty="0">
+                <a:rPr lang="te-IN" sz="2700" dirty="0">
+                  <a:latin typeface="Ramabhadra" panose="02000600000000000000" pitchFamily="2" charset="0"/>
+                  <a:cs typeface="Ramabhadra" panose="02000600000000000000" pitchFamily="2" charset="0"/>
+                </a:rPr>
+                <a:t>ప్రేమించెదన్ అధికముగా</a:t>
+              </a:r>
+            </a:p>
+            <a:p>
+              <a:r>
+                <a:rPr lang="te-IN" sz="2700" dirty="0">
+                  <a:latin typeface="Ramabhadra" panose="02000600000000000000" pitchFamily="2" charset="0"/>
+                  <a:cs typeface="Ramabhadra" panose="02000600000000000000" pitchFamily="2" charset="0"/>
+                </a:rPr>
+                <a:t>ఆరాధింతున్ ఆసక్తితో (2)</a:t>
+              </a:r>
+            </a:p>
+            <a:p>
+              <a:r>
+                <a:rPr lang="te-IN" sz="2700" dirty="0">
+                  <a:latin typeface="Ramabhadra" panose="02000600000000000000" pitchFamily="2" charset="0"/>
+                  <a:cs typeface="Ramabhadra" panose="02000600000000000000" pitchFamily="2" charset="0"/>
+                </a:rPr>
+                <a:t>నిన్ను పూర్ణ మనసుతో ఆరాధింతున్</a:t>
+              </a:r>
+            </a:p>
+            <a:p>
+              <a:r>
+                <a:rPr lang="te-IN" sz="2700" dirty="0">
+                  <a:latin typeface="Ramabhadra" panose="02000600000000000000" pitchFamily="2" charset="0"/>
+                  <a:cs typeface="Ramabhadra" panose="02000600000000000000" pitchFamily="2" charset="0"/>
+                </a:rPr>
+                <a:t>పూర్ణ బలముతో ప్రేమించెదన్</a:t>
+              </a:r>
+            </a:p>
+            <a:p>
+              <a:r>
+                <a:rPr lang="te-IN" sz="2700" dirty="0">
+                  <a:latin typeface="Ramabhadra" panose="02000600000000000000" pitchFamily="2" charset="0"/>
+                  <a:cs typeface="Ramabhadra" panose="02000600000000000000" pitchFamily="2" charset="0"/>
+                </a:rPr>
+                <a:t>ఆరాధన ఆరాధనా ఆ.. ఆ.. </a:t>
+              </a:r>
+            </a:p>
+            <a:p>
+              <a:r>
+                <a:rPr lang="te-IN" sz="2700" dirty="0">
+                  <a:latin typeface="Ramabhadra" panose="02000600000000000000" pitchFamily="2" charset="0"/>
+                  <a:cs typeface="Ramabhadra" panose="02000600000000000000" pitchFamily="2" charset="0"/>
+                </a:rPr>
+                <a:t>ఆరాధన ఆరాధనా (2)</a:t>
+              </a:r>
+            </a:p>
+            <a:p>
+              <a:endParaRPr lang="te-IN" sz="2700" dirty="0">
                 <a:latin typeface="Ramabhadra" panose="02000600000000000000" pitchFamily="2" charset="0"/>
                 <a:cs typeface="Ramabhadra" panose="02000600000000000000" pitchFamily="2" charset="0"/>
               </a:endParaRPr>
             </a:p>
             <a:p>
-              <a:endParaRPr lang="te-IN" sz="2400" dirty="0">
+              <a:r>
+                <a:rPr lang="te-IN" sz="2700" dirty="0">
+                  <a:latin typeface="Ramabhadra" panose="02000600000000000000" pitchFamily="2" charset="0"/>
+                  <a:cs typeface="Ramabhadra" panose="02000600000000000000" pitchFamily="2" charset="0"/>
+                </a:rPr>
+                <a:t>ఎబినేజరే ఎబినేజరే</a:t>
+              </a:r>
+            </a:p>
+            <a:p>
+              <a:r>
+                <a:rPr lang="te-IN" sz="2700" dirty="0">
+                  <a:latin typeface="Ramabhadra" panose="02000600000000000000" pitchFamily="2" charset="0"/>
+                  <a:cs typeface="Ramabhadra" panose="02000600000000000000" pitchFamily="2" charset="0"/>
+                </a:rPr>
+                <a:t>ఇంత వరకు ఆదుకొన్నావే (2)</a:t>
+              </a:r>
+            </a:p>
+            <a:p>
+              <a:r>
+                <a:rPr lang="te-IN" sz="2700" dirty="0">
+                  <a:latin typeface="Ramabhadra" panose="02000600000000000000" pitchFamily="2" charset="0"/>
+                  <a:cs typeface="Ramabhadra" panose="02000600000000000000" pitchFamily="2" charset="0"/>
+                </a:rPr>
+                <a:t>నన్ను ఇంత వరకు ఆదుకొన్నావే</a:t>
+              </a:r>
+            </a:p>
+            <a:p>
+              <a:endParaRPr lang="te-IN" sz="2700" dirty="0">
                 <a:latin typeface="Ramabhadra" panose="02000600000000000000" pitchFamily="2" charset="0"/>
                 <a:cs typeface="Ramabhadra" panose="02000600000000000000" pitchFamily="2" charset="0"/>
               </a:endParaRPr>
             </a:p>
             <a:p>
               <a:r>
-                <a:rPr lang="te-IN" sz="2400" dirty="0">
-                  <a:latin typeface="Ramabhadra" panose="02000600000000000000" pitchFamily="2" charset="0"/>
-                  <a:cs typeface="Ramabhadra" panose="02000600000000000000" pitchFamily="2" charset="0"/>
-                </a:rPr>
-                <a:t>ఏ అపాయము నా గుడారము</a:t>
-              </a:r>
-            </a:p>
-            <a:p>
-              <a:r>
-                <a:rPr lang="te-IN" sz="2400" dirty="0">
-                  <a:latin typeface="Ramabhadra" panose="02000600000000000000" pitchFamily="2" charset="0"/>
-                  <a:cs typeface="Ramabhadra" panose="02000600000000000000" pitchFamily="2" charset="0"/>
-                </a:rPr>
-                <a:t>సమీపించనీయక (2)</a:t>
-              </a:r>
-            </a:p>
-            <a:p>
-              <a:r>
-                <a:rPr lang="te-IN" sz="2400" dirty="0">
-                  <a:latin typeface="Ramabhadra" panose="02000600000000000000" pitchFamily="2" charset="0"/>
-                  <a:cs typeface="Ramabhadra" panose="02000600000000000000" pitchFamily="2" charset="0"/>
-                </a:rPr>
-                <a:t>నా మార్గములన్నిటిలో</a:t>
-              </a:r>
-            </a:p>
-            <a:p>
-              <a:r>
-                <a:rPr lang="te-IN" sz="2400" dirty="0">
-                  <a:latin typeface="Ramabhadra" panose="02000600000000000000" pitchFamily="2" charset="0"/>
-                  <a:cs typeface="Ramabhadra" panose="02000600000000000000" pitchFamily="2" charset="0"/>
-                </a:rPr>
-                <a:t>నీవే ఆశ్రయమైనందున (2)</a:t>
-              </a:r>
-            </a:p>
-            <a:p>
-              <a:endParaRPr lang="te-IN" sz="2400" dirty="0">
-                <a:latin typeface="Ramabhadra" panose="02000600000000000000" pitchFamily="2" charset="0"/>
-                <a:cs typeface="Ramabhadra" panose="02000600000000000000" pitchFamily="2" charset="0"/>
-              </a:endParaRPr>
-            </a:p>
-            <a:p>
-              <a:r>
-                <a:rPr lang="te-IN" sz="2400" dirty="0">
-                  <a:latin typeface="Ramabhadra" panose="02000600000000000000" pitchFamily="2" charset="0"/>
-                  <a:cs typeface="Ramabhadra" panose="02000600000000000000" pitchFamily="2" charset="0"/>
-                </a:rPr>
-                <a:t>చీకటి నుండి వెలుగులోనికి</a:t>
-              </a:r>
-            </a:p>
-            <a:p>
-              <a:r>
-                <a:rPr lang="te-IN" sz="2400" dirty="0">
-                  <a:latin typeface="Ramabhadra" panose="02000600000000000000" pitchFamily="2" charset="0"/>
-                  <a:cs typeface="Ramabhadra" panose="02000600000000000000" pitchFamily="2" charset="0"/>
-                </a:rPr>
-                <a:t>నన్ను పిలచిన తేజోమయా (2)</a:t>
-              </a:r>
-            </a:p>
-            <a:p>
-              <a:r>
-                <a:rPr lang="te-IN" sz="2400" dirty="0">
-                  <a:latin typeface="Ramabhadra" panose="02000600000000000000" pitchFamily="2" charset="0"/>
-                  <a:cs typeface="Ramabhadra" panose="02000600000000000000" pitchFamily="2" charset="0"/>
-                </a:rPr>
-                <a:t>రాజవంశములో</a:t>
-              </a:r>
-            </a:p>
-            <a:p>
-              <a:r>
-                <a:rPr lang="te-IN" sz="2400" dirty="0">
-                  <a:latin typeface="Ramabhadra" panose="02000600000000000000" pitchFamily="2" charset="0"/>
-                  <a:cs typeface="Ramabhadra" panose="02000600000000000000" pitchFamily="2" charset="0"/>
-                </a:rPr>
-                <a:t>యాజకత్వము చేసెదను (2)</a:t>
+                <a:rPr lang="te-IN" sz="2700" dirty="0">
+                  <a:latin typeface="Ramabhadra" panose="02000600000000000000" pitchFamily="2" charset="0"/>
+                  <a:cs typeface="Ramabhadra" panose="02000600000000000000" pitchFamily="2" charset="0"/>
+                </a:rPr>
+                <a:t>ఎల్రోహి ఎల్రోహి</a:t>
+              </a:r>
+            </a:p>
+            <a:p>
+              <a:r>
+                <a:rPr lang="te-IN" sz="2700" dirty="0">
+                  <a:latin typeface="Ramabhadra" panose="02000600000000000000" pitchFamily="2" charset="0"/>
+                  <a:cs typeface="Ramabhadra" panose="02000600000000000000" pitchFamily="2" charset="0"/>
+                </a:rPr>
+                <a:t>నన్ను చూచావే వందనమయ్యా (2)</a:t>
+              </a:r>
+            </a:p>
+            <a:p>
+              <a:r>
+                <a:rPr lang="te-IN" sz="2700" dirty="0">
+                  <a:latin typeface="Ramabhadra" panose="02000600000000000000" pitchFamily="2" charset="0"/>
+                  <a:cs typeface="Ramabhadra" panose="02000600000000000000" pitchFamily="2" charset="0"/>
+                </a:rPr>
+                <a:t>నన్ను చూచావే వందనమయ్యా</a:t>
               </a:r>
             </a:p>
           </p:txBody>
@@ -3615,7 +3593,7 @@
           </p:nvSpPr>
           <p:spPr>
             <a:xfrm>
-              <a:off x="343961" y="326430"/>
+              <a:off x="4224907" y="326430"/>
               <a:ext cx="390525" cy="390525"/>
             </a:xfrm>
             <a:prstGeom prst="ellipse">
@@ -3709,9 +3687,9 @@
         <p:grpSpPr>
           <a:xfrm>
             <a:off x="160868" y="182032"/>
-            <a:ext cx="5126563" cy="6493935"/>
+            <a:ext cx="4831293" cy="6493935"/>
             <a:chOff x="160868" y="182032"/>
-            <a:chExt cx="5126563" cy="6493935"/>
+            <a:chExt cx="4831293" cy="6493935"/>
           </a:xfrm>
         </p:grpSpPr>
         <p:sp>
@@ -3783,8 +3761,8 @@
           </p:nvSpPr>
           <p:spPr>
             <a:xfrm>
-              <a:off x="639231" y="701293"/>
-              <a:ext cx="4648200" cy="5847755"/>
+              <a:off x="343961" y="797508"/>
+              <a:ext cx="4648200" cy="5262979"/>
             </a:xfrm>
             <a:prstGeom prst="rect">
               <a:avLst/>
@@ -3801,11 +3779,11 @@
                 <a:defRPr/>
               </a:pPr>
               <a:r>
-                <a:rPr lang="te-IN" sz="2200" dirty="0">
-                  <a:latin typeface="Ramabhadra" panose="02000600000000000000" pitchFamily="2" charset="0"/>
-                  <a:cs typeface="Ramabhadra" panose="02000600000000000000" pitchFamily="2" charset="0"/>
-                </a:rPr>
-                <a:t>స్తుతి పాత్రుడా – స్తోత్రార్హుడా</a:t>
+                <a:rPr lang="te-IN" sz="2400" dirty="0">
+                  <a:latin typeface="Ramabhadra" panose="02000600000000000000" pitchFamily="2" charset="0"/>
+                  <a:cs typeface="Ramabhadra" panose="02000600000000000000" pitchFamily="2" charset="0"/>
+                </a:rPr>
+                <a:t>సుగుణాల సంపన్నుడా</a:t>
               </a:r>
             </a:p>
             <a:p>
@@ -3813,11 +3791,11 @@
                 <a:defRPr/>
               </a:pPr>
               <a:r>
-                <a:rPr lang="te-IN" sz="2200" dirty="0">
-                  <a:latin typeface="Ramabhadra" panose="02000600000000000000" pitchFamily="2" charset="0"/>
-                  <a:cs typeface="Ramabhadra" panose="02000600000000000000" pitchFamily="2" charset="0"/>
-                </a:rPr>
-                <a:t>స్తుతులందుకో - పూజార్హుడా</a:t>
+                <a:rPr lang="te-IN" sz="2400" dirty="0">
+                  <a:latin typeface="Ramabhadra" panose="02000600000000000000" pitchFamily="2" charset="0"/>
+                  <a:cs typeface="Ramabhadra" panose="02000600000000000000" pitchFamily="2" charset="0"/>
+                </a:rPr>
+                <a:t>స్తుతిగానాల వారసుడా</a:t>
               </a:r>
             </a:p>
             <a:p>
@@ -3825,13 +3803,30 @@
                 <a:defRPr/>
               </a:pPr>
               <a:r>
-                <a:rPr lang="te-IN" sz="2200" dirty="0">
-                  <a:latin typeface="Ramabhadra" panose="02000600000000000000" pitchFamily="2" charset="0"/>
-                  <a:cs typeface="Ramabhadra" panose="02000600000000000000" pitchFamily="2" charset="0"/>
-                </a:rPr>
-                <a:t>ఆకాశమందు నీవు తప్ప</a:t>
-              </a:r>
-              <a:endParaRPr lang="en-IN" sz="2200" dirty="0">
+                <a:rPr lang="te-IN" sz="2400" dirty="0">
+                  <a:latin typeface="Ramabhadra" panose="02000600000000000000" pitchFamily="2" charset="0"/>
+                  <a:cs typeface="Ramabhadra" panose="02000600000000000000" pitchFamily="2" charset="0"/>
+                </a:rPr>
+                <a:t>జీవింతును నిత్యము నీ నీడలో</a:t>
+              </a:r>
+            </a:p>
+            <a:p>
+              <a:pPr defTabSz="439781">
+                <a:defRPr/>
+              </a:pPr>
+              <a:r>
+                <a:rPr lang="te-IN" sz="2400" dirty="0">
+                  <a:latin typeface="Ramabhadra" panose="02000600000000000000" pitchFamily="2" charset="0"/>
+                  <a:cs typeface="Ramabhadra" panose="02000600000000000000" pitchFamily="2" charset="0"/>
+                </a:rPr>
+                <a:t>ఆస్వాదింతును నీ మాటల మకరందము</a:t>
+              </a:r>
+            </a:p>
+            <a:p>
+              <a:pPr defTabSz="439781">
+                <a:defRPr/>
+              </a:pPr>
+              <a:endParaRPr lang="te-IN" sz="2400" dirty="0">
                 <a:latin typeface="Ramabhadra" panose="02000600000000000000" pitchFamily="2" charset="0"/>
                 <a:cs typeface="Ramabhadra" panose="02000600000000000000" pitchFamily="2" charset="0"/>
               </a:endParaRPr>
@@ -3841,11 +3836,11 @@
                 <a:defRPr/>
               </a:pPr>
               <a:r>
-                <a:rPr lang="te-IN" sz="2200" dirty="0">
-                  <a:latin typeface="Ramabhadra" panose="02000600000000000000" pitchFamily="2" charset="0"/>
-                  <a:cs typeface="Ramabhadra" panose="02000600000000000000" pitchFamily="2" charset="0"/>
-                </a:rPr>
-                <a:t>నాకెవరున్నారు నా ప్రభు</a:t>
+                <a:rPr lang="te-IN" sz="2400" dirty="0">
+                  <a:latin typeface="Ramabhadra" panose="02000600000000000000" pitchFamily="2" charset="0"/>
+                  <a:cs typeface="Ramabhadra" panose="02000600000000000000" pitchFamily="2" charset="0"/>
+                </a:rPr>
+                <a:t>యేసయ్య నీతో జీవించగానే</a:t>
               </a:r>
             </a:p>
             <a:p>
@@ -3853,18 +3848,42 @@
                 <a:defRPr/>
               </a:pPr>
               <a:r>
-                <a:rPr lang="te-IN" sz="2200" dirty="0">
-                  <a:latin typeface="Ramabhadra" panose="02000600000000000000" pitchFamily="2" charset="0"/>
-                  <a:cs typeface="Ramabhadra" panose="02000600000000000000" pitchFamily="2" charset="0"/>
-                </a:rPr>
-                <a:t>స్తుతి పాత్రుడా.... ఆఆఅ</a:t>
+                <a:rPr lang="te-IN" sz="2400" dirty="0">
+                  <a:latin typeface="Ramabhadra" panose="02000600000000000000" pitchFamily="2" charset="0"/>
+                  <a:cs typeface="Ramabhadra" panose="02000600000000000000" pitchFamily="2" charset="0"/>
+                </a:rPr>
+                <a:t>నా బ్రతుకు బ్రతుకుగా మారేనులే</a:t>
               </a:r>
             </a:p>
             <a:p>
               <a:pPr defTabSz="439781">
                 <a:defRPr/>
               </a:pPr>
-              <a:endParaRPr lang="te-IN" sz="2200" dirty="0">
+              <a:r>
+                <a:rPr lang="te-IN" sz="2400" dirty="0">
+                  <a:latin typeface="Ramabhadra" panose="02000600000000000000" pitchFamily="2" charset="0"/>
+                  <a:cs typeface="Ramabhadra" panose="02000600000000000000" pitchFamily="2" charset="0"/>
+                </a:rPr>
+                <a:t>నాట్యమాడేను నా అంతరంగము</a:t>
+              </a:r>
+            </a:p>
+            <a:p>
+              <a:pPr defTabSz="439781">
+                <a:defRPr/>
+              </a:pPr>
+              <a:r>
+                <a:rPr lang="te-IN" sz="2400" dirty="0">
+                  <a:latin typeface="Ramabhadra" panose="02000600000000000000" pitchFamily="2" charset="0"/>
+                  <a:cs typeface="Ramabhadra" panose="02000600000000000000" pitchFamily="2" charset="0"/>
+                </a:rPr>
+                <a:t>ఇది రక్షణానంద భాగ్యమే</a:t>
+              </a:r>
+            </a:p>
+            <a:p>
+              <a:pPr defTabSz="439781">
+                <a:defRPr/>
+              </a:pPr>
+              <a:endParaRPr lang="te-IN" sz="2400" dirty="0">
                 <a:latin typeface="Ramabhadra" panose="02000600000000000000" pitchFamily="2" charset="0"/>
                 <a:cs typeface="Ramabhadra" panose="02000600000000000000" pitchFamily="2" charset="0"/>
               </a:endParaRPr>
@@ -3874,18 +3893,11 @@
                 <a:defRPr/>
               </a:pPr>
               <a:r>
-                <a:rPr lang="te-IN" sz="2200" dirty="0">
-                  <a:latin typeface="Ramabhadra" panose="02000600000000000000" pitchFamily="2" charset="0"/>
-                  <a:cs typeface="Ramabhadra" panose="02000600000000000000" pitchFamily="2" charset="0"/>
-                </a:rPr>
-                <a:t>నా శత్రువులు నను తరుముచుండగా </a:t>
-              </a:r>
-              <a:r>
-                <a:rPr lang="en-IN" sz="2200" dirty="0">
-                  <a:latin typeface="Ramabhadra" panose="02000600000000000000" pitchFamily="2" charset="0"/>
-                  <a:cs typeface="Ramabhadra" panose="02000600000000000000" pitchFamily="2" charset="0"/>
-                </a:rPr>
-                <a:t>-</a:t>
+                <a:rPr lang="te-IN" sz="2400" dirty="0">
+                  <a:latin typeface="Ramabhadra" panose="02000600000000000000" pitchFamily="2" charset="0"/>
+                  <a:cs typeface="Ramabhadra" panose="02000600000000000000" pitchFamily="2" charset="0"/>
+                </a:rPr>
+                <a:t>యేసయ్య నిన్ను వెన్నంటగానే</a:t>
               </a:r>
             </a:p>
             <a:p>
@@ -3893,11 +3905,11 @@
                 <a:defRPr/>
               </a:pPr>
               <a:r>
-                <a:rPr lang="te-IN" sz="2200" dirty="0">
-                  <a:latin typeface="Ramabhadra" panose="02000600000000000000" pitchFamily="2" charset="0"/>
-                  <a:cs typeface="Ramabhadra" panose="02000600000000000000" pitchFamily="2" charset="0"/>
-                </a:rPr>
-                <a:t>నా యాత్మ నాలో కృంగెనే ప్రభూ -2</a:t>
+                <a:rPr lang="te-IN" sz="2400" dirty="0">
+                  <a:latin typeface="Ramabhadra" panose="02000600000000000000" pitchFamily="2" charset="0"/>
+                  <a:cs typeface="Ramabhadra" panose="02000600000000000000" pitchFamily="2" charset="0"/>
+                </a:rPr>
+                <a:t>ఆజ్ఞల మార్గము కనిపించెనే</a:t>
               </a:r>
             </a:p>
             <a:p>
@@ -3905,18 +3917,11 @@
                 <a:defRPr/>
               </a:pPr>
               <a:r>
-                <a:rPr lang="te-IN" sz="2200" dirty="0">
-                  <a:latin typeface="Ramabhadra" panose="02000600000000000000" pitchFamily="2" charset="0"/>
-                  <a:cs typeface="Ramabhadra" panose="02000600000000000000" pitchFamily="2" charset="0"/>
-                </a:rPr>
-                <a:t>నా మనస్సు నీ వైపు త్రిప్పిన వెంటనే </a:t>
-              </a:r>
-              <a:r>
-                <a:rPr lang="en-IN" sz="2200" dirty="0">
-                  <a:latin typeface="Ramabhadra" panose="02000600000000000000" pitchFamily="2" charset="0"/>
-                  <a:cs typeface="Ramabhadra" panose="02000600000000000000" pitchFamily="2" charset="0"/>
-                </a:rPr>
-                <a:t>-</a:t>
+                <a:rPr lang="te-IN" sz="2400" dirty="0">
+                  <a:latin typeface="Ramabhadra" panose="02000600000000000000" pitchFamily="2" charset="0"/>
+                  <a:cs typeface="Ramabhadra" panose="02000600000000000000" pitchFamily="2" charset="0"/>
+                </a:rPr>
+                <a:t>నీవు నన్ను నడిపించగలవు</a:t>
               </a:r>
             </a:p>
             <a:p>
@@ -3924,114 +3929,11 @@
                 <a:defRPr/>
               </a:pPr>
               <a:r>
-                <a:rPr lang="te-IN" sz="2200" dirty="0">
-                  <a:latin typeface="Ramabhadra" panose="02000600000000000000" pitchFamily="2" charset="0"/>
-                  <a:cs typeface="Ramabhadra" panose="02000600000000000000" pitchFamily="2" charset="0"/>
-                </a:rPr>
-                <a:t>శత్రుల చేతినుండి</a:t>
-              </a:r>
-              <a:endParaRPr lang="en-IN" sz="2200" dirty="0">
-                <a:latin typeface="Ramabhadra" panose="02000600000000000000" pitchFamily="2" charset="0"/>
-                <a:cs typeface="Ramabhadra" panose="02000600000000000000" pitchFamily="2" charset="0"/>
-              </a:endParaRPr>
-            </a:p>
-            <a:p>
-              <a:pPr defTabSz="439781">
-                <a:defRPr/>
-              </a:pPr>
-              <a:r>
-                <a:rPr lang="te-IN" sz="2200" dirty="0">
-                  <a:latin typeface="Ramabhadra" panose="02000600000000000000" pitchFamily="2" charset="0"/>
-                  <a:cs typeface="Ramabhadra" panose="02000600000000000000" pitchFamily="2" charset="0"/>
-                </a:rPr>
-                <a:t>విడిపించినావు - కాపాడినావు -2</a:t>
-              </a:r>
-            </a:p>
-            <a:p>
-              <a:pPr defTabSz="439781">
-                <a:defRPr/>
-              </a:pPr>
-              <a:endParaRPr lang="te-IN" sz="2200" dirty="0">
-                <a:latin typeface="Ramabhadra" panose="02000600000000000000" pitchFamily="2" charset="0"/>
-                <a:cs typeface="Ramabhadra" panose="02000600000000000000" pitchFamily="2" charset="0"/>
-              </a:endParaRPr>
-            </a:p>
-            <a:p>
-              <a:pPr defTabSz="439781">
-                <a:defRPr/>
-              </a:pPr>
-              <a:r>
-                <a:rPr lang="te-IN" sz="2200" dirty="0">
-                  <a:latin typeface="Ramabhadra" panose="02000600000000000000" pitchFamily="2" charset="0"/>
-                  <a:cs typeface="Ramabhadra" panose="02000600000000000000" pitchFamily="2" charset="0"/>
-                </a:rPr>
-                <a:t>నా ప్రాణ స్నేహితులు నన్ను చూచి</a:t>
-              </a:r>
-              <a:r>
-                <a:rPr lang="en-IN" sz="2200" dirty="0">
-                  <a:latin typeface="Ramabhadra" panose="02000600000000000000" pitchFamily="2" charset="0"/>
-                  <a:cs typeface="Ramabhadra" panose="02000600000000000000" pitchFamily="2" charset="0"/>
-                </a:rPr>
-                <a:t> -</a:t>
-              </a:r>
-            </a:p>
-            <a:p>
-              <a:pPr defTabSz="439781">
-                <a:defRPr/>
-              </a:pPr>
-              <a:r>
-                <a:rPr lang="te-IN" sz="2200" dirty="0">
-                  <a:latin typeface="Ramabhadra" panose="02000600000000000000" pitchFamily="2" charset="0"/>
-                  <a:cs typeface="Ramabhadra" panose="02000600000000000000" pitchFamily="2" charset="0"/>
-                </a:rPr>
-                <a:t>దూరాన నిలిచేరు నా ప్రభూ -2</a:t>
-              </a:r>
-            </a:p>
-            <a:p>
-              <a:pPr defTabSz="439781">
-                <a:defRPr/>
-              </a:pPr>
-              <a:r>
-                <a:rPr lang="te-IN" sz="2200" dirty="0">
-                  <a:latin typeface="Ramabhadra" panose="02000600000000000000" pitchFamily="2" charset="0"/>
-                  <a:cs typeface="Ramabhadra" panose="02000600000000000000" pitchFamily="2" charset="0"/>
-                </a:rPr>
-                <a:t>నీ వాక్య ధ్యానమే నా త్రోవకు వెలుగై </a:t>
-              </a:r>
-              <a:r>
-                <a:rPr lang="en-IN" sz="2200" dirty="0">
-                  <a:latin typeface="Ramabhadra" panose="02000600000000000000" pitchFamily="2" charset="0"/>
-                  <a:cs typeface="Ramabhadra" panose="02000600000000000000" pitchFamily="2" charset="0"/>
-                </a:rPr>
-                <a:t>-</a:t>
-              </a:r>
-            </a:p>
-            <a:p>
-              <a:pPr defTabSz="439781">
-                <a:defRPr/>
-              </a:pPr>
-              <a:r>
-                <a:rPr lang="te-IN" sz="2200" dirty="0">
-                  <a:latin typeface="Ramabhadra" panose="02000600000000000000" pitchFamily="2" charset="0"/>
-                  <a:cs typeface="Ramabhadra" panose="02000600000000000000" pitchFamily="2" charset="0"/>
-                </a:rPr>
-                <a:t>నను నిల్పెను</a:t>
-              </a:r>
-              <a:endParaRPr lang="en-IN" sz="2200" dirty="0">
-                <a:latin typeface="Ramabhadra" panose="02000600000000000000" pitchFamily="2" charset="0"/>
-                <a:cs typeface="Ramabhadra" panose="02000600000000000000" pitchFamily="2" charset="0"/>
-              </a:endParaRPr>
-            </a:p>
-            <a:p>
-              <a:pPr defTabSz="439781">
-                <a:defRPr/>
-              </a:pPr>
-              <a:r>
-                <a:rPr lang="te-IN" sz="2200" dirty="0">
-                  <a:latin typeface="Ramabhadra" panose="02000600000000000000" pitchFamily="2" charset="0"/>
-                  <a:cs typeface="Ramabhadra" panose="02000600000000000000" pitchFamily="2" charset="0"/>
-                </a:rPr>
-                <a:t>నీ సన్నీధిలో - నీ సంఘములో -2</a:t>
+                <a:rPr lang="te-IN" sz="2400" dirty="0">
+                  <a:latin typeface="Ramabhadra" panose="02000600000000000000" pitchFamily="2" charset="0"/>
+                  <a:cs typeface="Ramabhadra" panose="02000600000000000000" pitchFamily="2" charset="0"/>
+                </a:rPr>
+                <a:t>నేను నడువ వలసిన త్రోవలో</a:t>
               </a:r>
             </a:p>
           </p:txBody>
@@ -4114,9 +4016,9 @@
         <p:grpSpPr>
           <a:xfrm>
             <a:off x="5104338" y="182031"/>
-            <a:ext cx="4734975" cy="6493935"/>
+            <a:ext cx="4943469" cy="6493935"/>
             <a:chOff x="160868" y="182032"/>
-            <a:chExt cx="4734975" cy="6493935"/>
+            <a:chExt cx="4943469" cy="6493935"/>
           </a:xfrm>
         </p:grpSpPr>
         <p:sp>
@@ -4188,8 +4090,8 @@
           </p:nvSpPr>
           <p:spPr>
             <a:xfrm>
-              <a:off x="354537" y="716955"/>
-              <a:ext cx="4541306" cy="5478423"/>
+              <a:off x="354536" y="716955"/>
+              <a:ext cx="4749801" cy="5847755"/>
             </a:xfrm>
             <a:prstGeom prst="rect">
               <a:avLst/>
@@ -4206,13 +4108,30 @@
                 <a:defRPr/>
               </a:pPr>
               <a:r>
-                <a:rPr lang="te-IN" sz="2500" dirty="0">
-                  <a:latin typeface="Ramabhadra" panose="02000600000000000000" pitchFamily="2" charset="0"/>
-                  <a:cs typeface="Ramabhadra" panose="02000600000000000000" pitchFamily="2" charset="0"/>
-                </a:rPr>
-                <a:t>ఎందుకో నన్నింతగా నీవు</a:t>
-              </a:r>
-              <a:endParaRPr lang="en-IN" sz="2500" dirty="0">
+                <a:rPr lang="te-IN" sz="2200" dirty="0">
+                  <a:latin typeface="Ramabhadra" panose="02000600000000000000" pitchFamily="2" charset="0"/>
+                  <a:cs typeface="Ramabhadra" panose="02000600000000000000" pitchFamily="2" charset="0"/>
+                </a:rPr>
+                <a:t>కుమ్మరి ఓ కుమ్మరి జగతుత్పత్తిదారి</a:t>
+              </a:r>
+            </a:p>
+            <a:p>
+              <a:pPr defTabSz="439781">
+                <a:defRPr/>
+              </a:pPr>
+              <a:r>
+                <a:rPr lang="te-IN" sz="2200" dirty="0">
+                  <a:latin typeface="Ramabhadra" panose="02000600000000000000" pitchFamily="2" charset="0"/>
+                  <a:cs typeface="Ramabhadra" panose="02000600000000000000" pitchFamily="2" charset="0"/>
+                </a:rPr>
+                <a:t>జిగట మన్నైన నా వంక చల్లంగా చూడుమయా</a:t>
+              </a:r>
+            </a:p>
+            <a:p>
+              <a:pPr defTabSz="439781">
+                <a:defRPr/>
+              </a:pPr>
+              <a:endParaRPr lang="te-IN" sz="2200" dirty="0">
                 <a:latin typeface="Ramabhadra" panose="02000600000000000000" pitchFamily="2" charset="0"/>
                 <a:cs typeface="Ramabhadra" panose="02000600000000000000" pitchFamily="2" charset="0"/>
               </a:endParaRPr>
@@ -4222,26 +4141,54 @@
                 <a:defRPr/>
               </a:pPr>
               <a:r>
-                <a:rPr lang="te-IN" sz="2500" dirty="0">
-                  <a:latin typeface="Ramabhadra" panose="02000600000000000000" pitchFamily="2" charset="0"/>
-                  <a:cs typeface="Ramabhadra" panose="02000600000000000000" pitchFamily="2" charset="0"/>
-                </a:rPr>
-                <a:t>ప్రేమించితివో దేవా</a:t>
-              </a:r>
-              <a:br>
-                <a:rPr lang="te-IN" sz="2500" dirty="0">
-                  <a:latin typeface="Ramabhadra" panose="02000600000000000000" pitchFamily="2" charset="0"/>
-                  <a:cs typeface="Ramabhadra" panose="02000600000000000000" pitchFamily="2" charset="0"/>
-                </a:rPr>
-              </a:br>
-              <a:r>
-                <a:rPr lang="te-IN" sz="2500" dirty="0">
-                  <a:latin typeface="Ramabhadra" panose="02000600000000000000" pitchFamily="2" charset="0"/>
-                  <a:cs typeface="Ramabhadra" panose="02000600000000000000" pitchFamily="2" charset="0"/>
-                </a:rPr>
-                <a:t>అందుకో నా దీన స్తుతిపాత్ర</a:t>
-              </a:r>
-              <a:endParaRPr lang="en-IN" sz="2500" dirty="0">
+                <a:rPr lang="te-IN" sz="2200" dirty="0">
+                  <a:latin typeface="Ramabhadra" panose="02000600000000000000" pitchFamily="2" charset="0"/>
+                  <a:cs typeface="Ramabhadra" panose="02000600000000000000" pitchFamily="2" charset="0"/>
+                </a:rPr>
+                <a:t>పనికిరాని పాత్ర అని –</a:t>
+              </a:r>
+            </a:p>
+            <a:p>
+              <a:pPr defTabSz="439781">
+                <a:defRPr/>
+              </a:pPr>
+              <a:r>
+                <a:rPr lang="te-IN" sz="2200" dirty="0">
+                  <a:latin typeface="Ramabhadra" panose="02000600000000000000" pitchFamily="2" charset="0"/>
+                  <a:cs typeface="Ramabhadra" panose="02000600000000000000" pitchFamily="2" charset="0"/>
+                </a:rPr>
+                <a:t>పారవేయకుమా</a:t>
+              </a:r>
+            </a:p>
+            <a:p>
+              <a:pPr defTabSz="439781">
+                <a:defRPr/>
+              </a:pPr>
+              <a:r>
+                <a:rPr lang="te-IN" sz="2200" dirty="0">
+                  <a:latin typeface="Ramabhadra" panose="02000600000000000000" pitchFamily="2" charset="0"/>
+                  <a:cs typeface="Ramabhadra" panose="02000600000000000000" pitchFamily="2" charset="0"/>
+                </a:rPr>
+                <a:t>పొంగి పొరలు పాత్రగా –</a:t>
+              </a:r>
+            </a:p>
+            <a:p>
+              <a:pPr defTabSz="439781">
+                <a:defRPr/>
+              </a:pPr>
+              <a:r>
+                <a:rPr lang="te-IN" sz="2200" dirty="0">
+                  <a:latin typeface="Ramabhadra" panose="02000600000000000000" pitchFamily="2" charset="0"/>
+                  <a:cs typeface="Ramabhadra" panose="02000600000000000000" pitchFamily="2" charset="0"/>
+                </a:rPr>
+                <a:t>నన్ను చేయుమా (2)</a:t>
+              </a:r>
+            </a:p>
+            <a:p>
+              <a:pPr defTabSz="439781">
+                <a:defRPr/>
+              </a:pPr>
+              <a:endParaRPr lang="te-IN" sz="2200" dirty="0">
                 <a:latin typeface="Ramabhadra" panose="02000600000000000000" pitchFamily="2" charset="0"/>
                 <a:cs typeface="Ramabhadra" panose="02000600000000000000" pitchFamily="2" charset="0"/>
               </a:endParaRPr>
@@ -4251,18 +4198,54 @@
                 <a:defRPr/>
               </a:pPr>
               <a:r>
-                <a:rPr lang="te-IN" sz="2500" dirty="0">
-                  <a:latin typeface="Ramabhadra" panose="02000600000000000000" pitchFamily="2" charset="0"/>
-                  <a:cs typeface="Ramabhadra" panose="02000600000000000000" pitchFamily="2" charset="0"/>
-                </a:rPr>
-                <a:t>హల్లెలూయ యేసయ్యా (2)</a:t>
+                <a:rPr lang="te-IN" sz="2200" dirty="0">
+                  <a:latin typeface="Ramabhadra" panose="02000600000000000000" pitchFamily="2" charset="0"/>
+                  <a:cs typeface="Ramabhadra" panose="02000600000000000000" pitchFamily="2" charset="0"/>
+                </a:rPr>
+                <a:t>లేఖన మందలి పాత్రలు –</a:t>
               </a:r>
             </a:p>
             <a:p>
               <a:pPr defTabSz="439781">
                 <a:defRPr/>
               </a:pPr>
-              <a:endParaRPr lang="te-IN" sz="2500" dirty="0">
+              <a:r>
+                <a:rPr lang="te-IN" sz="2200" dirty="0">
+                  <a:latin typeface="Ramabhadra" panose="02000600000000000000" pitchFamily="2" charset="0"/>
+                  <a:cs typeface="Ramabhadra" panose="02000600000000000000" pitchFamily="2" charset="0"/>
+                </a:rPr>
+                <a:t>ప్రభుని స్తుతించెను</a:t>
+              </a:r>
+            </a:p>
+            <a:p>
+              <a:pPr defTabSz="439781">
+                <a:defRPr/>
+              </a:pPr>
+              <a:r>
+                <a:rPr lang="te-IN" sz="2200" dirty="0">
+                  <a:latin typeface="Ramabhadra" panose="02000600000000000000" pitchFamily="2" charset="0"/>
+                  <a:cs typeface="Ramabhadra" panose="02000600000000000000" pitchFamily="2" charset="0"/>
+                </a:rPr>
+                <a:t>నన్ను అలంటి పాత్రగా –</a:t>
+              </a:r>
+            </a:p>
+            <a:p>
+              <a:pPr defTabSz="439781">
+                <a:defRPr/>
+              </a:pPr>
+              <a:r>
+                <a:rPr lang="te-IN" sz="2200" dirty="0">
+                  <a:latin typeface="Ramabhadra" panose="02000600000000000000" pitchFamily="2" charset="0"/>
+                  <a:cs typeface="Ramabhadra" panose="02000600000000000000" pitchFamily="2" charset="0"/>
+                </a:rPr>
+                <a:t>మార్చి వేయుమా</a:t>
+              </a:r>
+            </a:p>
+            <a:p>
+              <a:pPr defTabSz="439781">
+                <a:defRPr/>
+              </a:pPr>
+              <a:endParaRPr lang="te-IN" sz="2200" dirty="0">
                 <a:latin typeface="Ramabhadra" panose="02000600000000000000" pitchFamily="2" charset="0"/>
                 <a:cs typeface="Ramabhadra" panose="02000600000000000000" pitchFamily="2" charset="0"/>
               </a:endParaRPr>
@@ -4272,130 +4255,47 @@
                 <a:defRPr/>
               </a:pPr>
               <a:r>
-                <a:rPr lang="te-IN" sz="2500" dirty="0">
-                  <a:latin typeface="Ramabhadra" panose="02000600000000000000" pitchFamily="2" charset="0"/>
-                  <a:cs typeface="Ramabhadra" panose="02000600000000000000" pitchFamily="2" charset="0"/>
-                </a:rPr>
-                <a:t>నా పాపము బాప నరరూపివైనావు</a:t>
-              </a:r>
-              <a:br>
-                <a:rPr lang="te-IN" sz="2500" dirty="0">
-                  <a:latin typeface="Ramabhadra" panose="02000600000000000000" pitchFamily="2" charset="0"/>
-                  <a:cs typeface="Ramabhadra" panose="02000600000000000000" pitchFamily="2" charset="0"/>
-                </a:rPr>
-              </a:br>
-              <a:r>
-                <a:rPr lang="te-IN" sz="2500" dirty="0">
-                  <a:latin typeface="Ramabhadra" panose="02000600000000000000" pitchFamily="2" charset="0"/>
-                  <a:cs typeface="Ramabhadra" panose="02000600000000000000" pitchFamily="2" charset="0"/>
-                </a:rPr>
-                <a:t>నా శాపము మాప నలిగి వ్రేలాడితివి</a:t>
-              </a:r>
-              <a:br>
-                <a:rPr lang="te-IN" sz="2500" dirty="0">
-                  <a:latin typeface="Ramabhadra" panose="02000600000000000000" pitchFamily="2" charset="0"/>
-                  <a:cs typeface="Ramabhadra" panose="02000600000000000000" pitchFamily="2" charset="0"/>
-                </a:rPr>
-              </a:br>
-              <a:r>
-                <a:rPr lang="te-IN" sz="2500" dirty="0">
-                  <a:latin typeface="Ramabhadra" panose="02000600000000000000" pitchFamily="2" charset="0"/>
-                  <a:cs typeface="Ramabhadra" panose="02000600000000000000" pitchFamily="2" charset="0"/>
-                </a:rPr>
-                <a:t>నాకు చాలిన దేవుడవు</a:t>
-              </a:r>
-              <a:r>
-                <a:rPr lang="en-IN" sz="2500" dirty="0">
-                  <a:latin typeface="Ramabhadra" panose="02000600000000000000" pitchFamily="2" charset="0"/>
-                  <a:cs typeface="Ramabhadra" panose="02000600000000000000" pitchFamily="2" charset="0"/>
-                </a:rPr>
-                <a:t> </a:t>
-              </a:r>
-              <a:r>
-                <a:rPr lang="te-IN" sz="2500" dirty="0">
-                  <a:latin typeface="Ramabhadra" panose="02000600000000000000" pitchFamily="2" charset="0"/>
-                  <a:cs typeface="Ramabhadra" panose="02000600000000000000" pitchFamily="2" charset="0"/>
-                </a:rPr>
-                <a:t>నీవే </a:t>
-              </a:r>
-              <a:endParaRPr lang="en-IN" sz="2500" dirty="0">
-                <a:latin typeface="Ramabhadra" panose="02000600000000000000" pitchFamily="2" charset="0"/>
-                <a:cs typeface="Ramabhadra" panose="02000600000000000000" pitchFamily="2" charset="0"/>
-              </a:endParaRPr>
+                <a:rPr lang="te-IN" sz="2200" dirty="0">
+                  <a:latin typeface="Ramabhadra" panose="02000600000000000000" pitchFamily="2" charset="0"/>
+                  <a:cs typeface="Ramabhadra" panose="02000600000000000000" pitchFamily="2" charset="0"/>
+                </a:rPr>
+                <a:t>సౌభాగ్యమైన పాత్రగా –</a:t>
+              </a:r>
             </a:p>
             <a:p>
               <a:pPr defTabSz="439781">
                 <a:defRPr/>
               </a:pPr>
               <a:r>
-                <a:rPr lang="te-IN" sz="2500" dirty="0">
-                  <a:latin typeface="Ramabhadra" panose="02000600000000000000" pitchFamily="2" charset="0"/>
-                  <a:cs typeface="Ramabhadra" panose="02000600000000000000" pitchFamily="2" charset="0"/>
-                </a:rPr>
-                <a:t>నా స్థానములో నీవే (2)         </a:t>
+                <a:rPr lang="te-IN" sz="2200" dirty="0">
+                  <a:latin typeface="Ramabhadra" panose="02000600000000000000" pitchFamily="2" charset="0"/>
+                  <a:cs typeface="Ramabhadra" panose="02000600000000000000" pitchFamily="2" charset="0"/>
+                </a:rPr>
+                <a:t>నన్ను చేయుమా</a:t>
               </a:r>
             </a:p>
             <a:p>
               <a:pPr defTabSz="439781">
                 <a:defRPr/>
               </a:pPr>
-              <a:endParaRPr lang="te-IN" sz="2500" dirty="0">
-                <a:latin typeface="Ramabhadra" panose="02000600000000000000" pitchFamily="2" charset="0"/>
-                <a:cs typeface="Ramabhadra" panose="02000600000000000000" pitchFamily="2" charset="0"/>
-              </a:endParaRPr>
+              <a:r>
+                <a:rPr lang="te-IN" sz="2200" dirty="0">
+                  <a:latin typeface="Ramabhadra" panose="02000600000000000000" pitchFamily="2" charset="0"/>
+                  <a:cs typeface="Ramabhadra" panose="02000600000000000000" pitchFamily="2" charset="0"/>
+                </a:rPr>
+                <a:t>సొగస్సులన్ని  కూడనుంచి –</a:t>
+              </a:r>
             </a:p>
             <a:p>
               <a:pPr defTabSz="439781">
                 <a:defRPr/>
               </a:pPr>
               <a:r>
-                <a:rPr lang="te-IN" sz="2500" dirty="0">
-                  <a:latin typeface="Ramabhadra" panose="02000600000000000000" pitchFamily="2" charset="0"/>
-                  <a:cs typeface="Ramabhadra" panose="02000600000000000000" pitchFamily="2" charset="0"/>
-                </a:rPr>
-                <a:t>నీ రూపము నాలో నిర్మించియున్నావు</a:t>
-              </a:r>
-              <a:br>
-                <a:rPr lang="te-IN" sz="2500" dirty="0">
-                  <a:latin typeface="Ramabhadra" panose="02000600000000000000" pitchFamily="2" charset="0"/>
-                  <a:cs typeface="Ramabhadra" panose="02000600000000000000" pitchFamily="2" charset="0"/>
-                </a:rPr>
-              </a:br>
-              <a:r>
-                <a:rPr lang="te-IN" sz="2500" dirty="0">
-                  <a:latin typeface="Ramabhadra" panose="02000600000000000000" pitchFamily="2" charset="0"/>
-                  <a:cs typeface="Ramabhadra" panose="02000600000000000000" pitchFamily="2" charset="0"/>
-                </a:rPr>
-                <a:t>నీ పోలికలోనే నివసించుమన్నావు</a:t>
-              </a:r>
-              <a:br>
-                <a:rPr lang="te-IN" sz="2500" dirty="0">
-                  <a:latin typeface="Ramabhadra" panose="02000600000000000000" pitchFamily="2" charset="0"/>
-                  <a:cs typeface="Ramabhadra" panose="02000600000000000000" pitchFamily="2" charset="0"/>
-                </a:rPr>
-              </a:br>
-              <a:r>
-                <a:rPr lang="te-IN" sz="2500" dirty="0">
-                  <a:latin typeface="Ramabhadra" panose="02000600000000000000" pitchFamily="2" charset="0"/>
-                  <a:cs typeface="Ramabhadra" panose="02000600000000000000" pitchFamily="2" charset="0"/>
-                </a:rPr>
-                <a:t>నీవు నన్ను ఎన్నుకొంటివి</a:t>
-              </a:r>
-              <a:endParaRPr lang="en-IN" sz="2500" dirty="0">
-                <a:latin typeface="Ramabhadra" panose="02000600000000000000" pitchFamily="2" charset="0"/>
-                <a:cs typeface="Ramabhadra" panose="02000600000000000000" pitchFamily="2" charset="0"/>
-              </a:endParaRPr>
-            </a:p>
-            <a:p>
-              <a:pPr defTabSz="439781">
-                <a:defRPr/>
-              </a:pPr>
-              <a:r>
-                <a:rPr lang="te-IN" sz="2500" dirty="0">
-                  <a:latin typeface="Ramabhadra" panose="02000600000000000000" pitchFamily="2" charset="0"/>
-                  <a:cs typeface="Ramabhadra" panose="02000600000000000000" pitchFamily="2" charset="0"/>
-                </a:rPr>
-                <a:t>నీ కొరకై నీ కృపలో (2)           </a:t>
+                <a:rPr lang="te-IN" sz="2200" dirty="0">
+                  <a:latin typeface="Ramabhadra" panose="02000600000000000000" pitchFamily="2" charset="0"/>
+                  <a:cs typeface="Ramabhadra" panose="02000600000000000000" pitchFamily="2" charset="0"/>
+                </a:rPr>
+                <a:t>నన్ను మార్చుమా</a:t>
               </a:r>
             </a:p>
           </p:txBody>

--- a/songsTemplate.pptx
+++ b/songsTemplate.pptx
@@ -255,7 +255,7 @@
           <a:p>
             <a:fld id="{F1102B08-ED9E-409F-B95F-09CAA1DAF6E0}" type="datetimeFigureOut">
               <a:rPr lang="en-IN" smtClean="0"/>
-              <a:t>23-11-2024</a:t>
+              <a:t>30-11-2024</a:t>
             </a:fld>
             <a:endParaRPr lang="en-IN"/>
           </a:p>
@@ -425,7 +425,7 @@
           <a:p>
             <a:fld id="{F1102B08-ED9E-409F-B95F-09CAA1DAF6E0}" type="datetimeFigureOut">
               <a:rPr lang="en-IN" smtClean="0"/>
-              <a:t>23-11-2024</a:t>
+              <a:t>30-11-2024</a:t>
             </a:fld>
             <a:endParaRPr lang="en-IN"/>
           </a:p>
@@ -605,7 +605,7 @@
           <a:p>
             <a:fld id="{F1102B08-ED9E-409F-B95F-09CAA1DAF6E0}" type="datetimeFigureOut">
               <a:rPr lang="en-IN" smtClean="0"/>
-              <a:t>23-11-2024</a:t>
+              <a:t>30-11-2024</a:t>
             </a:fld>
             <a:endParaRPr lang="en-IN"/>
           </a:p>
@@ -775,7 +775,7 @@
           <a:p>
             <a:fld id="{F1102B08-ED9E-409F-B95F-09CAA1DAF6E0}" type="datetimeFigureOut">
               <a:rPr lang="en-IN" smtClean="0"/>
-              <a:t>23-11-2024</a:t>
+              <a:t>30-11-2024</a:t>
             </a:fld>
             <a:endParaRPr lang="en-IN"/>
           </a:p>
@@ -1019,7 +1019,7 @@
           <a:p>
             <a:fld id="{F1102B08-ED9E-409F-B95F-09CAA1DAF6E0}" type="datetimeFigureOut">
               <a:rPr lang="en-IN" smtClean="0"/>
-              <a:t>23-11-2024</a:t>
+              <a:t>30-11-2024</a:t>
             </a:fld>
             <a:endParaRPr lang="en-IN"/>
           </a:p>
@@ -1251,7 +1251,7 @@
           <a:p>
             <a:fld id="{F1102B08-ED9E-409F-B95F-09CAA1DAF6E0}" type="datetimeFigureOut">
               <a:rPr lang="en-IN" smtClean="0"/>
-              <a:t>23-11-2024</a:t>
+              <a:t>30-11-2024</a:t>
             </a:fld>
             <a:endParaRPr lang="en-IN"/>
           </a:p>
@@ -1618,7 +1618,7 @@
           <a:p>
             <a:fld id="{F1102B08-ED9E-409F-B95F-09CAA1DAF6E0}" type="datetimeFigureOut">
               <a:rPr lang="en-IN" smtClean="0"/>
-              <a:t>23-11-2024</a:t>
+              <a:t>30-11-2024</a:t>
             </a:fld>
             <a:endParaRPr lang="en-IN"/>
           </a:p>
@@ -1736,7 +1736,7 @@
           <a:p>
             <a:fld id="{F1102B08-ED9E-409F-B95F-09CAA1DAF6E0}" type="datetimeFigureOut">
               <a:rPr lang="en-IN" smtClean="0"/>
-              <a:t>23-11-2024</a:t>
+              <a:t>30-11-2024</a:t>
             </a:fld>
             <a:endParaRPr lang="en-IN"/>
           </a:p>
@@ -1831,7 +1831,7 @@
           <a:p>
             <a:fld id="{F1102B08-ED9E-409F-B95F-09CAA1DAF6E0}" type="datetimeFigureOut">
               <a:rPr lang="en-IN" smtClean="0"/>
-              <a:t>23-11-2024</a:t>
+              <a:t>30-11-2024</a:t>
             </a:fld>
             <a:endParaRPr lang="en-IN"/>
           </a:p>
@@ -2108,7 +2108,7 @@
           <a:p>
             <a:fld id="{F1102B08-ED9E-409F-B95F-09CAA1DAF6E0}" type="datetimeFigureOut">
               <a:rPr lang="en-IN" smtClean="0"/>
-              <a:t>23-11-2024</a:t>
+              <a:t>30-11-2024</a:t>
             </a:fld>
             <a:endParaRPr lang="en-IN"/>
           </a:p>
@@ -2365,7 +2365,7 @@
           <a:p>
             <a:fld id="{F1102B08-ED9E-409F-B95F-09CAA1DAF6E0}" type="datetimeFigureOut">
               <a:rPr lang="en-IN" smtClean="0"/>
-              <a:t>23-11-2024</a:t>
+              <a:t>30-11-2024</a:t>
             </a:fld>
             <a:endParaRPr lang="en-IN"/>
           </a:p>
@@ -2578,7 +2578,7 @@
           <a:p>
             <a:fld id="{F1102B08-ED9E-409F-B95F-09CAA1DAF6E0}" type="datetimeFigureOut">
               <a:rPr lang="en-IN" smtClean="0"/>
-              <a:t>23-11-2024</a:t>
+              <a:t>30-11-2024</a:t>
             </a:fld>
             <a:endParaRPr lang="en-IN"/>
           </a:p>
@@ -2998,9 +2998,9 @@
         <p:grpSpPr>
           <a:xfrm>
             <a:off x="160868" y="182032"/>
-            <a:ext cx="5236140" cy="6493935"/>
+            <a:ext cx="5369490" cy="6493935"/>
             <a:chOff x="160868" y="182032"/>
-            <a:chExt cx="5236140" cy="6493935"/>
+            <a:chExt cx="5369490" cy="6493935"/>
           </a:xfrm>
         </p:grpSpPr>
         <p:sp>
@@ -3072,8 +3072,8 @@
           </p:nvSpPr>
           <p:spPr>
             <a:xfrm>
-              <a:off x="283598" y="241491"/>
-              <a:ext cx="5113410" cy="6370975"/>
+              <a:off x="416948" y="710999"/>
+              <a:ext cx="5113410" cy="5262979"/>
             </a:xfrm>
             <a:prstGeom prst="rect">
               <a:avLst/>
@@ -3094,20 +3094,7 @@
                   <a:latin typeface="Ramabhadra" panose="02000600000000000000" pitchFamily="2" charset="0"/>
                   <a:cs typeface="Ramabhadra" panose="02000600000000000000" pitchFamily="2" charset="0"/>
                 </a:rPr>
-                <a:t>ఉత్సాహ గానము చేసెదము</a:t>
-              </a:r>
-              <a:br>
-                <a:rPr lang="te-IN" sz="2400" dirty="0">
-                  <a:latin typeface="Ramabhadra" panose="02000600000000000000" pitchFamily="2" charset="0"/>
-                  <a:cs typeface="Ramabhadra" panose="02000600000000000000" pitchFamily="2" charset="0"/>
-                </a:rPr>
-              </a:br>
-              <a:r>
-                <a:rPr lang="te-IN" sz="2400" dirty="0">
-                  <a:latin typeface="Ramabhadra" panose="02000600000000000000" pitchFamily="2" charset="0"/>
-                  <a:cs typeface="Ramabhadra" panose="02000600000000000000" pitchFamily="2" charset="0"/>
-                </a:rPr>
-                <a:t>ఘనపరచెదము మన </a:t>
+                <a:t>నా స్తుతి పాత్రుడా – నా యేసయ్యా</a:t>
               </a:r>
             </a:p>
             <a:p>
@@ -3119,59 +3106,7 @@
                   <a:latin typeface="Ramabhadra" panose="02000600000000000000" pitchFamily="2" charset="0"/>
                   <a:cs typeface="Ramabhadra" panose="02000600000000000000" pitchFamily="2" charset="0"/>
                 </a:rPr>
-                <a:t>యేసయ్య నామమును (2)</a:t>
-              </a:r>
-              <a:br>
-                <a:rPr lang="te-IN" sz="2400" dirty="0">
-                  <a:latin typeface="Ramabhadra" panose="02000600000000000000" pitchFamily="2" charset="0"/>
-                  <a:cs typeface="Ramabhadra" panose="02000600000000000000" pitchFamily="2" charset="0"/>
-                </a:rPr>
-              </a:br>
-              <a:r>
-                <a:rPr lang="te-IN" sz="2400" dirty="0">
-                  <a:latin typeface="Ramabhadra" panose="02000600000000000000" pitchFamily="2" charset="0"/>
-                  <a:cs typeface="Ramabhadra" panose="02000600000000000000" pitchFamily="2" charset="0"/>
-                </a:rPr>
-                <a:t>హల్లెలూయ యెహోవ రాఫా</a:t>
-              </a:r>
-              <a:br>
-                <a:rPr lang="te-IN" sz="2400" dirty="0">
-                  <a:latin typeface="Ramabhadra" panose="02000600000000000000" pitchFamily="2" charset="0"/>
-                  <a:cs typeface="Ramabhadra" panose="02000600000000000000" pitchFamily="2" charset="0"/>
-                </a:rPr>
-              </a:br>
-              <a:r>
-                <a:rPr lang="te-IN" sz="2400" dirty="0">
-                  <a:latin typeface="Ramabhadra" panose="02000600000000000000" pitchFamily="2" charset="0"/>
-                  <a:cs typeface="Ramabhadra" panose="02000600000000000000" pitchFamily="2" charset="0"/>
-                </a:rPr>
-                <a:t>హల్లెలూయ యెహోవ షమ్మా</a:t>
-              </a:r>
-              <a:br>
-                <a:rPr lang="te-IN" sz="2400" dirty="0">
-                  <a:latin typeface="Ramabhadra" panose="02000600000000000000" pitchFamily="2" charset="0"/>
-                  <a:cs typeface="Ramabhadra" panose="02000600000000000000" pitchFamily="2" charset="0"/>
-                </a:rPr>
-              </a:br>
-              <a:r>
-                <a:rPr lang="te-IN" sz="2400" dirty="0">
-                  <a:latin typeface="Ramabhadra" panose="02000600000000000000" pitchFamily="2" charset="0"/>
-                  <a:cs typeface="Ramabhadra" panose="02000600000000000000" pitchFamily="2" charset="0"/>
-                </a:rPr>
-                <a:t>హల్లెలూయ యెహోవ ఈరే</a:t>
-              </a:r>
-              <a:br>
-                <a:rPr lang="te-IN" sz="2400" dirty="0">
-                  <a:latin typeface="Ramabhadra" panose="02000600000000000000" pitchFamily="2" charset="0"/>
-                  <a:cs typeface="Ramabhadra" panose="02000600000000000000" pitchFamily="2" charset="0"/>
-                </a:rPr>
-              </a:br>
-              <a:r>
-                <a:rPr lang="te-IN" sz="2400" dirty="0">
-                  <a:latin typeface="Ramabhadra" panose="02000600000000000000" pitchFamily="2" charset="0"/>
-                  <a:cs typeface="Ramabhadra" panose="02000600000000000000" pitchFamily="2" charset="0"/>
-                </a:rPr>
-                <a:t>హల్లెలూయ యెహోవ షాలోమ్ (2)</a:t>
+                <a:t>నా ఆరాధనకు నీవె యోగ్యుడవయ్యా (2)</a:t>
               </a:r>
             </a:p>
             <a:p>
@@ -3192,33 +3127,7 @@
                   <a:latin typeface="Ramabhadra" panose="02000600000000000000" pitchFamily="2" charset="0"/>
                   <a:cs typeface="Ramabhadra" panose="02000600000000000000" pitchFamily="2" charset="0"/>
                 </a:rPr>
-                <a:t>అమూల్యములైన వాగ్ధానములు</a:t>
-              </a:r>
-              <a:br>
-                <a:rPr lang="te-IN" sz="2400" dirty="0">
-                  <a:latin typeface="Ramabhadra" panose="02000600000000000000" pitchFamily="2" charset="0"/>
-                  <a:cs typeface="Ramabhadra" panose="02000600000000000000" pitchFamily="2" charset="0"/>
-                </a:rPr>
-              </a:br>
-              <a:r>
-                <a:rPr lang="te-IN" sz="2400" dirty="0">
-                  <a:latin typeface="Ramabhadra" panose="02000600000000000000" pitchFamily="2" charset="0"/>
-                  <a:cs typeface="Ramabhadra" panose="02000600000000000000" pitchFamily="2" charset="0"/>
-                </a:rPr>
-                <a:t>అత్యధికముగా ఉన్నవి (2)</a:t>
-              </a:r>
-              <a:br>
-                <a:rPr lang="te-IN" sz="2400" dirty="0">
-                  <a:latin typeface="Ramabhadra" panose="02000600000000000000" pitchFamily="2" charset="0"/>
-                  <a:cs typeface="Ramabhadra" panose="02000600000000000000" pitchFamily="2" charset="0"/>
-                </a:rPr>
-              </a:br>
-              <a:r>
-                <a:rPr lang="te-IN" sz="2400" dirty="0">
-                  <a:latin typeface="Ramabhadra" panose="02000600000000000000" pitchFamily="2" charset="0"/>
-                  <a:cs typeface="Ramabhadra" panose="02000600000000000000" pitchFamily="2" charset="0"/>
-                </a:rPr>
-                <a:t>వాటిని మనము నమ్మినయెడల</a:t>
+                <a:t>నీ వాక్యమే నా పరవశము</a:t>
               </a:r>
             </a:p>
             <a:p>
@@ -3230,7 +3139,19 @@
                   <a:latin typeface="Ramabhadra" panose="02000600000000000000" pitchFamily="2" charset="0"/>
                   <a:cs typeface="Ramabhadra" panose="02000600000000000000" pitchFamily="2" charset="0"/>
                 </a:rPr>
-                <a:t>దేవుని మహిమను ఆనుభవించెదము (2)</a:t>
+                <a:t>నీ వాక్యమే నా ఆత్మకు ఆహారము (2)</a:t>
+              </a:r>
+            </a:p>
+            <a:p>
+              <a:pPr defTabSz="439781">
+                <a:defRPr/>
+              </a:pPr>
+              <a:r>
+                <a:rPr lang="te-IN" sz="2400" dirty="0">
+                  <a:latin typeface="Ramabhadra" panose="02000600000000000000" pitchFamily="2" charset="0"/>
+                  <a:cs typeface="Ramabhadra" panose="02000600000000000000" pitchFamily="2" charset="0"/>
+                </a:rPr>
+                <a:t>నీ వాక్యమే నా పాదములకు దీపము (3)</a:t>
               </a:r>
             </a:p>
             <a:p>
@@ -3251,7 +3172,7 @@
                   <a:latin typeface="Ramabhadra" panose="02000600000000000000" pitchFamily="2" charset="0"/>
                   <a:cs typeface="Ramabhadra" panose="02000600000000000000" pitchFamily="2" charset="0"/>
                 </a:rPr>
-                <a:t>ఆత్మీయ ఆరాధనలు జరుగుచున్నవి </a:t>
+                <a:t>నీ కృపయే నా ఆశ్రయము</a:t>
               </a:r>
             </a:p>
             <a:p>
@@ -3263,7 +3184,7 @@
                   <a:latin typeface="Ramabhadra" panose="02000600000000000000" pitchFamily="2" charset="0"/>
                   <a:cs typeface="Ramabhadra" panose="02000600000000000000" pitchFamily="2" charset="0"/>
                 </a:rPr>
-                <a:t>ఇవన్ని వాగ్ధాన ఫలములెగా </a:t>
+                <a:t>నీ కృపయే నా ఆత్మకు అభిషేకము (2)</a:t>
               </a:r>
             </a:p>
             <a:p>
@@ -3275,19 +3196,52 @@
                   <a:latin typeface="Ramabhadra" panose="02000600000000000000" pitchFamily="2" charset="0"/>
                   <a:cs typeface="Ramabhadra" panose="02000600000000000000" pitchFamily="2" charset="0"/>
                 </a:rPr>
-                <a:t>అత్మాభిషేకము సమృద్ధిగా పొంది </a:t>
+                <a:t>నీ కృపయే నా జీవన ఆధారము (3)</a:t>
               </a:r>
             </a:p>
             <a:p>
               <a:pPr defTabSz="439781">
                 <a:defRPr/>
               </a:pPr>
+              <a:endParaRPr lang="te-IN" sz="2400" dirty="0">
+                <a:latin typeface="Ramabhadra" panose="02000600000000000000" pitchFamily="2" charset="0"/>
+                <a:cs typeface="Ramabhadra" panose="02000600000000000000" pitchFamily="2" charset="0"/>
+              </a:endParaRPr>
+            </a:p>
+            <a:p>
+              <a:pPr defTabSz="439781">
+                <a:defRPr/>
+              </a:pPr>
               <a:r>
                 <a:rPr lang="te-IN" sz="2400" dirty="0">
                   <a:latin typeface="Ramabhadra" panose="02000600000000000000" pitchFamily="2" charset="0"/>
                   <a:cs typeface="Ramabhadra" panose="02000600000000000000" pitchFamily="2" charset="0"/>
                 </a:rPr>
-                <a:t>ఆత్మీయ వరములు అనుభవించెదము (2)</a:t>
+                <a:t>నీ సౌందర్యము యెరూషలేము</a:t>
+              </a:r>
+            </a:p>
+            <a:p>
+              <a:pPr defTabSz="439781">
+                <a:defRPr/>
+              </a:pPr>
+              <a:r>
+                <a:rPr lang="te-IN" sz="2400" dirty="0">
+                  <a:latin typeface="Ramabhadra" panose="02000600000000000000" pitchFamily="2" charset="0"/>
+                  <a:cs typeface="Ramabhadra" panose="02000600000000000000" pitchFamily="2" charset="0"/>
+                </a:rPr>
+                <a:t>నీ పరిపూర్ణత సీయోను శిఖరము (2)</a:t>
+              </a:r>
+            </a:p>
+            <a:p>
+              <a:pPr defTabSz="439781">
+                <a:defRPr/>
+              </a:pPr>
+              <a:r>
+                <a:rPr lang="te-IN" sz="2400" dirty="0">
+                  <a:latin typeface="Ramabhadra" panose="02000600000000000000" pitchFamily="2" charset="0"/>
+                  <a:cs typeface="Ramabhadra" panose="02000600000000000000" pitchFamily="2" charset="0"/>
+                </a:rPr>
+                <a:t>నీ పరిపూర్ణత నా జీవిత గమ్యము (3)</a:t>
               </a:r>
             </a:p>
           </p:txBody>
@@ -3306,7 +3260,7 @@
           </p:nvSpPr>
           <p:spPr>
             <a:xfrm>
-              <a:off x="4237077" y="320474"/>
+              <a:off x="318523" y="320474"/>
               <a:ext cx="390525" cy="390525"/>
             </a:xfrm>
             <a:prstGeom prst="ellipse">
@@ -3370,9 +3324,9 @@
         <p:grpSpPr>
           <a:xfrm>
             <a:off x="5104338" y="182031"/>
-            <a:ext cx="4738425" cy="6493935"/>
+            <a:ext cx="4741088" cy="6493935"/>
             <a:chOff x="160868" y="182032"/>
-            <a:chExt cx="4738425" cy="6493935"/>
+            <a:chExt cx="4741088" cy="6493935"/>
           </a:xfrm>
         </p:grpSpPr>
         <p:sp>
@@ -3444,8 +3398,8 @@
           </p:nvSpPr>
           <p:spPr>
             <a:xfrm>
-              <a:off x="357987" y="391483"/>
-              <a:ext cx="4541306" cy="5909310"/>
+              <a:off x="360650" y="320475"/>
+              <a:ext cx="4541306" cy="5324535"/>
             </a:xfrm>
             <a:prstGeom prst="rect">
               <a:avLst/>
@@ -3459,122 +3413,192 @@
             <a:lstStyle/>
             <a:p>
               <a:r>
-                <a:rPr lang="te-IN" sz="2700" dirty="0">
-                  <a:latin typeface="Ramabhadra" panose="02000600000000000000" pitchFamily="2" charset="0"/>
-                  <a:cs typeface="Ramabhadra" panose="02000600000000000000" pitchFamily="2" charset="0"/>
-                </a:rPr>
-                <a:t>ప్రేమించెదన్ అధికముగా</a:t>
-              </a:r>
-            </a:p>
-            <a:p>
-              <a:r>
-                <a:rPr lang="te-IN" sz="2700" dirty="0">
-                  <a:latin typeface="Ramabhadra" panose="02000600000000000000" pitchFamily="2" charset="0"/>
-                  <a:cs typeface="Ramabhadra" panose="02000600000000000000" pitchFamily="2" charset="0"/>
-                </a:rPr>
-                <a:t>ఆరాధింతున్ ఆసక్తితో (2)</a:t>
-              </a:r>
-            </a:p>
-            <a:p>
-              <a:r>
-                <a:rPr lang="te-IN" sz="2700" dirty="0">
-                  <a:latin typeface="Ramabhadra" panose="02000600000000000000" pitchFamily="2" charset="0"/>
-                  <a:cs typeface="Ramabhadra" panose="02000600000000000000" pitchFamily="2" charset="0"/>
-                </a:rPr>
-                <a:t>నిన్ను పూర్ణ మనసుతో ఆరాధింతున్</a:t>
-              </a:r>
-            </a:p>
-            <a:p>
-              <a:r>
-                <a:rPr lang="te-IN" sz="2700" dirty="0">
-                  <a:latin typeface="Ramabhadra" panose="02000600000000000000" pitchFamily="2" charset="0"/>
-                  <a:cs typeface="Ramabhadra" panose="02000600000000000000" pitchFamily="2" charset="0"/>
-                </a:rPr>
-                <a:t>పూర్ణ బలముతో ప్రేమించెదన్</a:t>
-              </a:r>
-            </a:p>
-            <a:p>
-              <a:r>
-                <a:rPr lang="te-IN" sz="2700" dirty="0">
-                  <a:latin typeface="Ramabhadra" panose="02000600000000000000" pitchFamily="2" charset="0"/>
-                  <a:cs typeface="Ramabhadra" panose="02000600000000000000" pitchFamily="2" charset="0"/>
-                </a:rPr>
-                <a:t>ఆరాధన ఆరాధనా ఆ.. ఆ.. </a:t>
-              </a:r>
-            </a:p>
-            <a:p>
-              <a:r>
-                <a:rPr lang="te-IN" sz="2700" dirty="0">
-                  <a:latin typeface="Ramabhadra" panose="02000600000000000000" pitchFamily="2" charset="0"/>
-                  <a:cs typeface="Ramabhadra" panose="02000600000000000000" pitchFamily="2" charset="0"/>
-                </a:rPr>
-                <a:t>ఆరాధన ఆరాధనా (2)</a:t>
-              </a:r>
-            </a:p>
-            <a:p>
-              <a:endParaRPr lang="te-IN" sz="2700" dirty="0">
+                <a:rPr lang="te-IN" sz="2000" dirty="0">
+                  <a:latin typeface="Ramabhadra" panose="02000600000000000000" pitchFamily="2" charset="0"/>
+                  <a:cs typeface="Ramabhadra" panose="02000600000000000000" pitchFamily="2" charset="0"/>
+                </a:rPr>
+                <a:t>ఇంత కాలం నీదు కృపలో కాచిన దేవా (2)</a:t>
+              </a:r>
+              <a:br>
+                <a:rPr lang="te-IN" sz="2000" dirty="0">
+                  <a:latin typeface="Ramabhadra" panose="02000600000000000000" pitchFamily="2" charset="0"/>
+                  <a:cs typeface="Ramabhadra" panose="02000600000000000000" pitchFamily="2" charset="0"/>
+                </a:rPr>
+              </a:br>
+              <a:r>
+                <a:rPr lang="te-IN" sz="2000" dirty="0">
+                  <a:latin typeface="Ramabhadra" panose="02000600000000000000" pitchFamily="2" charset="0"/>
+                  <a:cs typeface="Ramabhadra" panose="02000600000000000000" pitchFamily="2" charset="0"/>
+                </a:rPr>
+                <a:t>ఇకను కూడా మాకు తోడు నీడ నీవే కదా (2)        </a:t>
+              </a:r>
+            </a:p>
+            <a:p>
+              <a:endParaRPr lang="te-IN" sz="2000" dirty="0">
                 <a:latin typeface="Ramabhadra" panose="02000600000000000000" pitchFamily="2" charset="0"/>
                 <a:cs typeface="Ramabhadra" panose="02000600000000000000" pitchFamily="2" charset="0"/>
               </a:endParaRPr>
             </a:p>
             <a:p>
               <a:r>
-                <a:rPr lang="te-IN" sz="2700" dirty="0">
-                  <a:latin typeface="Ramabhadra" panose="02000600000000000000" pitchFamily="2" charset="0"/>
-                  <a:cs typeface="Ramabhadra" panose="02000600000000000000" pitchFamily="2" charset="0"/>
-                </a:rPr>
-                <a:t>ఎబినేజరే ఎబినేజరే</a:t>
-              </a:r>
-            </a:p>
-            <a:p>
-              <a:r>
-                <a:rPr lang="te-IN" sz="2700" dirty="0">
-                  <a:latin typeface="Ramabhadra" panose="02000600000000000000" pitchFamily="2" charset="0"/>
-                  <a:cs typeface="Ramabhadra" panose="02000600000000000000" pitchFamily="2" charset="0"/>
-                </a:rPr>
-                <a:t>ఇంత వరకు ఆదుకొన్నావే (2)</a:t>
-              </a:r>
-            </a:p>
-            <a:p>
-              <a:r>
-                <a:rPr lang="te-IN" sz="2700" dirty="0">
-                  <a:latin typeface="Ramabhadra" panose="02000600000000000000" pitchFamily="2" charset="0"/>
-                  <a:cs typeface="Ramabhadra" panose="02000600000000000000" pitchFamily="2" charset="0"/>
-                </a:rPr>
-                <a:t>నన్ను ఇంత వరకు ఆదుకొన్నావే</a:t>
-              </a:r>
-            </a:p>
-            <a:p>
-              <a:endParaRPr lang="te-IN" sz="2700" dirty="0">
+                <a:rPr lang="te-IN" sz="2000" dirty="0">
+                  <a:latin typeface="Ramabhadra" panose="02000600000000000000" pitchFamily="2" charset="0"/>
+                  <a:cs typeface="Ramabhadra" panose="02000600000000000000" pitchFamily="2" charset="0"/>
+                </a:rPr>
+                <a:t>ఎన్ని ఏళ్ళు గడచినా –</a:t>
+              </a:r>
+              <a:endParaRPr lang="en-IN" sz="2000" dirty="0">
                 <a:latin typeface="Ramabhadra" panose="02000600000000000000" pitchFamily="2" charset="0"/>
                 <a:cs typeface="Ramabhadra" panose="02000600000000000000" pitchFamily="2" charset="0"/>
               </a:endParaRPr>
             </a:p>
             <a:p>
               <a:r>
-                <a:rPr lang="te-IN" sz="2700" dirty="0">
-                  <a:latin typeface="Ramabhadra" panose="02000600000000000000" pitchFamily="2" charset="0"/>
-                  <a:cs typeface="Ramabhadra" panose="02000600000000000000" pitchFamily="2" charset="0"/>
-                </a:rPr>
-                <a:t>ఎల్రోహి ఎల్రోహి</a:t>
-              </a:r>
-            </a:p>
-            <a:p>
-              <a:r>
-                <a:rPr lang="te-IN" sz="2700" dirty="0">
-                  <a:latin typeface="Ramabhadra" panose="02000600000000000000" pitchFamily="2" charset="0"/>
-                  <a:cs typeface="Ramabhadra" panose="02000600000000000000" pitchFamily="2" charset="0"/>
-                </a:rPr>
-                <a:t>నన్ను చూచావే వందనమయ్యా (2)</a:t>
-              </a:r>
-            </a:p>
-            <a:p>
-              <a:r>
-                <a:rPr lang="te-IN" sz="2700" dirty="0">
-                  <a:latin typeface="Ramabhadra" panose="02000600000000000000" pitchFamily="2" charset="0"/>
-                  <a:cs typeface="Ramabhadra" panose="02000600000000000000" pitchFamily="2" charset="0"/>
-                </a:rPr>
-                <a:t>నన్ను చూచావే వందనమయ్యా</a:t>
+                <a:rPr lang="te-IN" sz="2000" dirty="0">
+                  <a:latin typeface="Ramabhadra" panose="02000600000000000000" pitchFamily="2" charset="0"/>
+                  <a:cs typeface="Ramabhadra" panose="02000600000000000000" pitchFamily="2" charset="0"/>
+                </a:rPr>
+                <a:t>ఎన్ని తరాలు మారినా (2)</a:t>
+              </a:r>
+              <a:br>
+                <a:rPr lang="te-IN" sz="2000" dirty="0">
+                  <a:latin typeface="Ramabhadra" panose="02000600000000000000" pitchFamily="2" charset="0"/>
+                  <a:cs typeface="Ramabhadra" panose="02000600000000000000" pitchFamily="2" charset="0"/>
+                </a:rPr>
+              </a:br>
+              <a:r>
+                <a:rPr lang="te-IN" sz="2000" dirty="0">
+                  <a:latin typeface="Ramabhadra" panose="02000600000000000000" pitchFamily="2" charset="0"/>
+                  <a:cs typeface="Ramabhadra" panose="02000600000000000000" pitchFamily="2" charset="0"/>
+                </a:rPr>
+                <a:t>మారని వీడని ప్రేమే నీదయ్యా</a:t>
+              </a:r>
+              <a:br>
+                <a:rPr lang="te-IN" sz="2000" dirty="0">
+                  <a:latin typeface="Ramabhadra" panose="02000600000000000000" pitchFamily="2" charset="0"/>
+                  <a:cs typeface="Ramabhadra" panose="02000600000000000000" pitchFamily="2" charset="0"/>
+                </a:rPr>
+              </a:br>
+              <a:r>
+                <a:rPr lang="te-IN" sz="2000" dirty="0">
+                  <a:latin typeface="Ramabhadra" panose="02000600000000000000" pitchFamily="2" charset="0"/>
+                  <a:cs typeface="Ramabhadra" panose="02000600000000000000" pitchFamily="2" charset="0"/>
+                </a:rPr>
+                <a:t>మార్చిన నా జీవితం నీకే యేసయ్యా (2)  </a:t>
+              </a:r>
+            </a:p>
+            <a:p>
+              <a:r>
+                <a:rPr lang="te-IN" sz="2000" dirty="0">
+                  <a:latin typeface="Ramabhadra" panose="02000600000000000000" pitchFamily="2" charset="0"/>
+                  <a:cs typeface="Ramabhadra" panose="02000600000000000000" pitchFamily="2" charset="0"/>
+                </a:rPr>
+                <a:t>       </a:t>
+              </a:r>
+            </a:p>
+            <a:p>
+              <a:r>
+                <a:rPr lang="te-IN" sz="2000" dirty="0">
+                  <a:latin typeface="Ramabhadra" panose="02000600000000000000" pitchFamily="2" charset="0"/>
+                  <a:cs typeface="Ramabhadra" panose="02000600000000000000" pitchFamily="2" charset="0"/>
+                </a:rPr>
+                <a:t>నీవు చేసిన మేలులు –</a:t>
+              </a:r>
+              <a:endParaRPr lang="en-IN" sz="2000" dirty="0">
+                <a:latin typeface="Ramabhadra" panose="02000600000000000000" pitchFamily="2" charset="0"/>
+                <a:cs typeface="Ramabhadra" panose="02000600000000000000" pitchFamily="2" charset="0"/>
+              </a:endParaRPr>
+            </a:p>
+            <a:p>
+              <a:r>
+                <a:rPr lang="te-IN" sz="2000" dirty="0">
+                  <a:latin typeface="Ramabhadra" panose="02000600000000000000" pitchFamily="2" charset="0"/>
+                  <a:cs typeface="Ramabhadra" panose="02000600000000000000" pitchFamily="2" charset="0"/>
+                </a:rPr>
+                <a:t>తలచుకుందును అనుదినం (2)</a:t>
+              </a:r>
+              <a:br>
+                <a:rPr lang="te-IN" sz="2000" dirty="0">
+                  <a:latin typeface="Ramabhadra" panose="02000600000000000000" pitchFamily="2" charset="0"/>
+                  <a:cs typeface="Ramabhadra" panose="02000600000000000000" pitchFamily="2" charset="0"/>
+                </a:rPr>
+              </a:br>
+              <a:r>
+                <a:rPr lang="te-IN" sz="2000" dirty="0">
+                  <a:latin typeface="Ramabhadra" panose="02000600000000000000" pitchFamily="2" charset="0"/>
+                  <a:cs typeface="Ramabhadra" panose="02000600000000000000" pitchFamily="2" charset="0"/>
+                </a:rPr>
+                <a:t>నా స్తుతి స్తోత్రము నీకే యేసయ్యా</a:t>
+              </a:r>
+              <a:br>
+                <a:rPr lang="te-IN" sz="2000" dirty="0">
+                  <a:latin typeface="Ramabhadra" panose="02000600000000000000" pitchFamily="2" charset="0"/>
+                  <a:cs typeface="Ramabhadra" panose="02000600000000000000" pitchFamily="2" charset="0"/>
+                </a:rPr>
+              </a:br>
+              <a:r>
+                <a:rPr lang="te-IN" sz="2000" dirty="0">
+                  <a:latin typeface="Ramabhadra" panose="02000600000000000000" pitchFamily="2" charset="0"/>
+                  <a:cs typeface="Ramabhadra" panose="02000600000000000000" pitchFamily="2" charset="0"/>
+                </a:rPr>
+                <a:t>వేరుగా ఏమియు చెల్లించలేనయ్యా (2) </a:t>
+              </a:r>
+            </a:p>
+            <a:p>
+              <a:r>
+                <a:rPr lang="te-IN" sz="2000" dirty="0">
+                  <a:latin typeface="Ramabhadra" panose="02000600000000000000" pitchFamily="2" charset="0"/>
+                  <a:cs typeface="Ramabhadra" panose="02000600000000000000" pitchFamily="2" charset="0"/>
+                </a:rPr>
+                <a:t>          </a:t>
+              </a:r>
+            </a:p>
+            <a:p>
+              <a:r>
+                <a:rPr lang="te-IN" sz="2000" dirty="0">
+                  <a:latin typeface="Ramabhadra" panose="02000600000000000000" pitchFamily="2" charset="0"/>
+                  <a:cs typeface="Ramabhadra" panose="02000600000000000000" pitchFamily="2" charset="0"/>
+                </a:rPr>
+                <a:t>దూరమైతిరి ఆప్తులు –</a:t>
+              </a:r>
+              <a:endParaRPr lang="en-IN" sz="2000" dirty="0">
+                <a:latin typeface="Ramabhadra" panose="02000600000000000000" pitchFamily="2" charset="0"/>
+                <a:cs typeface="Ramabhadra" panose="02000600000000000000" pitchFamily="2" charset="0"/>
+              </a:endParaRPr>
+            </a:p>
+            <a:p>
+              <a:r>
+                <a:rPr lang="te-IN" sz="2000" dirty="0">
+                  <a:latin typeface="Ramabhadra" panose="02000600000000000000" pitchFamily="2" charset="0"/>
+                  <a:cs typeface="Ramabhadra" panose="02000600000000000000" pitchFamily="2" charset="0"/>
+                </a:rPr>
+                <a:t>విడచిపోతిరి నా హితులు (2)</a:t>
+              </a:r>
+              <a:br>
+                <a:rPr lang="te-IN" sz="2000" dirty="0">
+                  <a:latin typeface="Ramabhadra" panose="02000600000000000000" pitchFamily="2" charset="0"/>
+                  <a:cs typeface="Ramabhadra" panose="02000600000000000000" pitchFamily="2" charset="0"/>
+                </a:rPr>
+              </a:br>
+              <a:r>
+                <a:rPr lang="te-IN" sz="2000" dirty="0">
+                  <a:latin typeface="Ramabhadra" panose="02000600000000000000" pitchFamily="2" charset="0"/>
+                  <a:cs typeface="Ramabhadra" panose="02000600000000000000" pitchFamily="2" charset="0"/>
+                </a:rPr>
+                <a:t>శోధన వేదన తీర్చిన యేసయ్యా</a:t>
+              </a:r>
+              <a:br>
+                <a:rPr lang="te-IN" sz="2000" dirty="0">
+                  <a:latin typeface="Ramabhadra" panose="02000600000000000000" pitchFamily="2" charset="0"/>
+                  <a:cs typeface="Ramabhadra" panose="02000600000000000000" pitchFamily="2" charset="0"/>
+                </a:rPr>
+              </a:br>
+              <a:r>
+                <a:rPr lang="te-IN" sz="2000" dirty="0">
+                  <a:latin typeface="Ramabhadra" panose="02000600000000000000" pitchFamily="2" charset="0"/>
+                  <a:cs typeface="Ramabhadra" panose="02000600000000000000" pitchFamily="2" charset="0"/>
+                </a:rPr>
+                <a:t>తల్లిలా తండ్రిలా కాచిన యేసయ్యా (2) </a:t>
               </a:r>
             </a:p>
           </p:txBody>
@@ -3761,8 +3785,8 @@
           </p:nvSpPr>
           <p:spPr>
             <a:xfrm>
-              <a:off x="343961" y="797508"/>
-              <a:ext cx="4648200" cy="5262979"/>
+              <a:off x="343961" y="809050"/>
+              <a:ext cx="4648200" cy="5632311"/>
             </a:xfrm>
             <a:prstGeom prst="rect">
               <a:avLst/>
@@ -3783,7 +3807,7 @@
                   <a:latin typeface="Ramabhadra" panose="02000600000000000000" pitchFamily="2" charset="0"/>
                   <a:cs typeface="Ramabhadra" panose="02000600000000000000" pitchFamily="2" charset="0"/>
                 </a:rPr>
-                <a:t>సుగుణాల సంపన్నుడా</a:t>
+                <a:t>యేసయ్యా.. యేసయ్యా.. యేసయ్యా.. యేసయ్యా..</a:t>
               </a:r>
             </a:p>
             <a:p>
@@ -3795,7 +3819,7 @@
                   <a:latin typeface="Ramabhadra" panose="02000600000000000000" pitchFamily="2" charset="0"/>
                   <a:cs typeface="Ramabhadra" panose="02000600000000000000" pitchFamily="2" charset="0"/>
                 </a:rPr>
-                <a:t>స్తుతిగానాల వారసుడా</a:t>
+                <a:t>నిన్నే నిన్నే నే కొలుతునయ్యా</a:t>
               </a:r>
             </a:p>
             <a:p>
@@ -3807,7 +3831,7 @@
                   <a:latin typeface="Ramabhadra" panose="02000600000000000000" pitchFamily="2" charset="0"/>
                   <a:cs typeface="Ramabhadra" panose="02000600000000000000" pitchFamily="2" charset="0"/>
                 </a:rPr>
-                <a:t>జీవింతును నిత్యము నీ నీడలో</a:t>
+                <a:t>నీవే నీవే నా రాజువయ్యా (2)</a:t>
               </a:r>
             </a:p>
             <a:p>
@@ -3819,7 +3843,7 @@
                   <a:latin typeface="Ramabhadra" panose="02000600000000000000" pitchFamily="2" charset="0"/>
                   <a:cs typeface="Ramabhadra" panose="02000600000000000000" pitchFamily="2" charset="0"/>
                 </a:rPr>
-                <a:t>ఆస్వాదింతును నీ మాటల మకరందము</a:t>
+                <a:t>యేసయ్య యేసయ్య యేసయ్యా…</a:t>
               </a:r>
             </a:p>
             <a:p>
@@ -3840,7 +3864,7 @@
                   <a:latin typeface="Ramabhadra" panose="02000600000000000000" pitchFamily="2" charset="0"/>
                   <a:cs typeface="Ramabhadra" panose="02000600000000000000" pitchFamily="2" charset="0"/>
                 </a:rPr>
-                <a:t>యేసయ్య నీతో జీవించగానే</a:t>
+                <a:t>కొండలలో లోయలలో</a:t>
               </a:r>
             </a:p>
             <a:p>
@@ -3852,7 +3876,7 @@
                   <a:latin typeface="Ramabhadra" panose="02000600000000000000" pitchFamily="2" charset="0"/>
                   <a:cs typeface="Ramabhadra" panose="02000600000000000000" pitchFamily="2" charset="0"/>
                 </a:rPr>
-                <a:t>నా బ్రతుకు బ్రతుకుగా మారేనులే</a:t>
+                <a:t>అడవులలో ఎడారులలో (2)</a:t>
               </a:r>
             </a:p>
             <a:p>
@@ -3864,7 +3888,7 @@
                   <a:latin typeface="Ramabhadra" panose="02000600000000000000" pitchFamily="2" charset="0"/>
                   <a:cs typeface="Ramabhadra" panose="02000600000000000000" pitchFamily="2" charset="0"/>
                 </a:rPr>
-                <a:t>నాట్యమాడేను నా అంతరంగము</a:t>
+                <a:t>నన్ను గమనించినావా</a:t>
               </a:r>
             </a:p>
             <a:p>
@@ -3876,7 +3900,7 @@
                   <a:latin typeface="Ramabhadra" panose="02000600000000000000" pitchFamily="2" charset="0"/>
                   <a:cs typeface="Ramabhadra" panose="02000600000000000000" pitchFamily="2" charset="0"/>
                 </a:rPr>
-                <a:t>ఇది రక్షణానంద భాగ్యమే</a:t>
+                <a:t>నన్ను నడిపించినావా (2)</a:t>
               </a:r>
             </a:p>
             <a:p>
@@ -3897,7 +3921,7 @@
                   <a:latin typeface="Ramabhadra" panose="02000600000000000000" pitchFamily="2" charset="0"/>
                   <a:cs typeface="Ramabhadra" panose="02000600000000000000" pitchFamily="2" charset="0"/>
                 </a:rPr>
-                <a:t>యేసయ్య నిన్ను వెన్నంటగానే</a:t>
+                <a:t>ఆత్మీయులే నన్ను అవమానించగా</a:t>
               </a:r>
             </a:p>
             <a:p>
@@ -3909,7 +3933,7 @@
                   <a:latin typeface="Ramabhadra" panose="02000600000000000000" pitchFamily="2" charset="0"/>
                   <a:cs typeface="Ramabhadra" panose="02000600000000000000" pitchFamily="2" charset="0"/>
                 </a:rPr>
-                <a:t>ఆజ్ఞల మార్గము కనిపించెనే</a:t>
+                <a:t>అన్యులు నన్ను అపహసించగా (2)</a:t>
               </a:r>
             </a:p>
             <a:p>
@@ -3921,7 +3945,7 @@
                   <a:latin typeface="Ramabhadra" panose="02000600000000000000" pitchFamily="2" charset="0"/>
                   <a:cs typeface="Ramabhadra" panose="02000600000000000000" pitchFamily="2" charset="0"/>
                 </a:rPr>
-                <a:t>నీవు నన్ను నడిపించగలవు</a:t>
+                <a:t>అండ నీవైతివయ్యా</a:t>
               </a:r>
             </a:p>
             <a:p>
@@ -3933,7 +3957,7 @@
                   <a:latin typeface="Ramabhadra" panose="02000600000000000000" pitchFamily="2" charset="0"/>
                   <a:cs typeface="Ramabhadra" panose="02000600000000000000" pitchFamily="2" charset="0"/>
                 </a:rPr>
-                <a:t>నేను నడువ వలసిన త్రోవలో</a:t>
+                <a:t>నా.. కొండ నీవే యేసయ్యా (2)</a:t>
               </a:r>
             </a:p>
           </p:txBody>
@@ -4091,7 +4115,7 @@
           <p:spPr>
             <a:xfrm>
               <a:off x="354536" y="716955"/>
-              <a:ext cx="4749801" cy="5847755"/>
+              <a:ext cx="4749801" cy="5909310"/>
             </a:xfrm>
             <a:prstGeom prst="rect">
               <a:avLst/>
@@ -4108,11 +4132,11 @@
                 <a:defRPr/>
               </a:pPr>
               <a:r>
-                <a:rPr lang="te-IN" sz="2200" dirty="0">
-                  <a:latin typeface="Ramabhadra" panose="02000600000000000000" pitchFamily="2" charset="0"/>
-                  <a:cs typeface="Ramabhadra" panose="02000600000000000000" pitchFamily="2" charset="0"/>
-                </a:rPr>
-                <a:t>కుమ్మరి ఓ కుమ్మరి జగతుత్పత్తిదారి</a:t>
+                <a:rPr lang="te-IN" sz="2100" dirty="0">
+                  <a:latin typeface="Ramabhadra" panose="02000600000000000000" pitchFamily="2" charset="0"/>
+                  <a:cs typeface="Ramabhadra" panose="02000600000000000000" pitchFamily="2" charset="0"/>
+                </a:rPr>
+                <a:t>వందనం త్రియేకుడా - ఘన మహిమ నీకెగా (2)</a:t>
               </a:r>
             </a:p>
             <a:p>
@@ -4120,18 +4144,30 @@
                 <a:defRPr/>
               </a:pPr>
               <a:r>
-                <a:rPr lang="te-IN" sz="2200" dirty="0">
-                  <a:latin typeface="Ramabhadra" panose="02000600000000000000" pitchFamily="2" charset="0"/>
-                  <a:cs typeface="Ramabhadra" panose="02000600000000000000" pitchFamily="2" charset="0"/>
-                </a:rPr>
-                <a:t>జిగట మన్నైన నా వంక చల్లంగా చూడుమయా</a:t>
+                <a:rPr lang="te-IN" sz="2100" dirty="0">
+                  <a:latin typeface="Ramabhadra" panose="02000600000000000000" pitchFamily="2" charset="0"/>
+                  <a:cs typeface="Ramabhadra" panose="02000600000000000000" pitchFamily="2" charset="0"/>
+                </a:rPr>
+                <a:t>ఏ పాటి వాడను యేసయ్యా, నన్ను కోరుకొంటివే</a:t>
               </a:r>
             </a:p>
             <a:p>
               <a:pPr defTabSz="439781">
                 <a:defRPr/>
               </a:pPr>
-              <a:endParaRPr lang="te-IN" sz="2200" dirty="0">
+              <a:r>
+                <a:rPr lang="te-IN" sz="2100" dirty="0">
+                  <a:latin typeface="Ramabhadra" panose="02000600000000000000" pitchFamily="2" charset="0"/>
+                  <a:cs typeface="Ramabhadra" panose="02000600000000000000" pitchFamily="2" charset="0"/>
+                </a:rPr>
+                <a:t>ఏ పాటి దానను యేసయ్యా, నన్ను కోరుకొంటివే</a:t>
+              </a:r>
+            </a:p>
+            <a:p>
+              <a:pPr defTabSz="439781">
+                <a:defRPr/>
+              </a:pPr>
+              <a:endParaRPr lang="te-IN" sz="2100" dirty="0">
                 <a:latin typeface="Ramabhadra" panose="02000600000000000000" pitchFamily="2" charset="0"/>
                 <a:cs typeface="Ramabhadra" panose="02000600000000000000" pitchFamily="2" charset="0"/>
               </a:endParaRPr>
@@ -4141,11 +4177,11 @@
                 <a:defRPr/>
               </a:pPr>
               <a:r>
-                <a:rPr lang="te-IN" sz="2200" dirty="0">
-                  <a:latin typeface="Ramabhadra" panose="02000600000000000000" pitchFamily="2" charset="0"/>
-                  <a:cs typeface="Ramabhadra" panose="02000600000000000000" pitchFamily="2" charset="0"/>
-                </a:rPr>
-                <a:t>పనికిరాని పాత్ర అని –</a:t>
+                <a:rPr lang="te-IN" sz="2100" dirty="0">
+                  <a:latin typeface="Ramabhadra" panose="02000600000000000000" pitchFamily="2" charset="0"/>
+                  <a:cs typeface="Ramabhadra" panose="02000600000000000000" pitchFamily="2" charset="0"/>
+                </a:rPr>
+                <a:t>ఈవులెన్నెన్నో దయచేసితివి</a:t>
               </a:r>
             </a:p>
             <a:p>
@@ -4153,11 +4189,11 @@
                 <a:defRPr/>
               </a:pPr>
               <a:r>
-                <a:rPr lang="te-IN" sz="2200" dirty="0">
-                  <a:latin typeface="Ramabhadra" panose="02000600000000000000" pitchFamily="2" charset="0"/>
-                  <a:cs typeface="Ramabhadra" panose="02000600000000000000" pitchFamily="2" charset="0"/>
-                </a:rPr>
-                <a:t>పారవేయకుమా</a:t>
+                <a:rPr lang="te-IN" sz="2100" dirty="0">
+                  <a:latin typeface="Ramabhadra" panose="02000600000000000000" pitchFamily="2" charset="0"/>
+                  <a:cs typeface="Ramabhadra" panose="02000600000000000000" pitchFamily="2" charset="0"/>
+                </a:rPr>
+                <a:t>నీ స్నేహమే నాకు స్థిరపరచితివి (2)</a:t>
               </a:r>
             </a:p>
             <a:p>
@@ -4165,11 +4201,11 @@
                 <a:defRPr/>
               </a:pPr>
               <a:r>
-                <a:rPr lang="te-IN" sz="2200" dirty="0">
-                  <a:latin typeface="Ramabhadra" panose="02000600000000000000" pitchFamily="2" charset="0"/>
-                  <a:cs typeface="Ramabhadra" panose="02000600000000000000" pitchFamily="2" charset="0"/>
-                </a:rPr>
-                <a:t>పొంగి పొరలు పాత్రగా –</a:t>
+                <a:rPr lang="te-IN" sz="2100" dirty="0">
+                  <a:latin typeface="Ramabhadra" panose="02000600000000000000" pitchFamily="2" charset="0"/>
+                  <a:cs typeface="Ramabhadra" panose="02000600000000000000" pitchFamily="2" charset="0"/>
+                </a:rPr>
+                <a:t>నీ పాద సేవ చేయుట కన్నా</a:t>
               </a:r>
             </a:p>
             <a:p>
@@ -4177,18 +4213,18 @@
                 <a:defRPr/>
               </a:pPr>
               <a:r>
-                <a:rPr lang="te-IN" sz="2200" dirty="0">
-                  <a:latin typeface="Ramabhadra" panose="02000600000000000000" pitchFamily="2" charset="0"/>
-                  <a:cs typeface="Ramabhadra" panose="02000600000000000000" pitchFamily="2" charset="0"/>
-                </a:rPr>
-                <a:t>నన్ను చేయుమా (2)</a:t>
+                <a:rPr lang="te-IN" sz="2100" dirty="0">
+                  <a:latin typeface="Ramabhadra" panose="02000600000000000000" pitchFamily="2" charset="0"/>
+                  <a:cs typeface="Ramabhadra" panose="02000600000000000000" pitchFamily="2" charset="0"/>
+                </a:rPr>
+                <a:t>విలువైన భాగ్యం లేదు (2) నాకూ</a:t>
               </a:r>
             </a:p>
             <a:p>
               <a:pPr defTabSz="439781">
                 <a:defRPr/>
               </a:pPr>
-              <a:endParaRPr lang="te-IN" sz="2200" dirty="0">
+              <a:endParaRPr lang="te-IN" sz="2100" dirty="0">
                 <a:latin typeface="Ramabhadra" panose="02000600000000000000" pitchFamily="2" charset="0"/>
                 <a:cs typeface="Ramabhadra" panose="02000600000000000000" pitchFamily="2" charset="0"/>
               </a:endParaRPr>
@@ -4198,11 +4234,11 @@
                 <a:defRPr/>
               </a:pPr>
               <a:r>
-                <a:rPr lang="te-IN" sz="2200" dirty="0">
-                  <a:latin typeface="Ramabhadra" panose="02000600000000000000" pitchFamily="2" charset="0"/>
-                  <a:cs typeface="Ramabhadra" panose="02000600000000000000" pitchFamily="2" charset="0"/>
-                </a:rPr>
-                <a:t>లేఖన మందలి పాత్రలు –</a:t>
+                <a:rPr lang="te-IN" sz="2100" dirty="0">
+                  <a:latin typeface="Ramabhadra" panose="02000600000000000000" pitchFamily="2" charset="0"/>
+                  <a:cs typeface="Ramabhadra" panose="02000600000000000000" pitchFamily="2" charset="0"/>
+                </a:rPr>
+                <a:t>అవసరతలు ఏవైన తీర్చెడి</a:t>
               </a:r>
             </a:p>
             <a:p>
@@ -4210,11 +4246,11 @@
                 <a:defRPr/>
               </a:pPr>
               <a:r>
-                <a:rPr lang="te-IN" sz="2200" dirty="0">
-                  <a:latin typeface="Ramabhadra" panose="02000600000000000000" pitchFamily="2" charset="0"/>
-                  <a:cs typeface="Ramabhadra" panose="02000600000000000000" pitchFamily="2" charset="0"/>
-                </a:rPr>
-                <a:t>ప్రభుని స్తుతించెను</a:t>
+                <a:rPr lang="te-IN" sz="2100" dirty="0">
+                  <a:latin typeface="Ramabhadra" panose="02000600000000000000" pitchFamily="2" charset="0"/>
+                  <a:cs typeface="Ramabhadra" panose="02000600000000000000" pitchFamily="2" charset="0"/>
+                </a:rPr>
+                <a:t>యెహోవా యిరే నీవే (2)</a:t>
               </a:r>
             </a:p>
             <a:p>
@@ -4222,11 +4258,11 @@
                 <a:defRPr/>
               </a:pPr>
               <a:r>
-                <a:rPr lang="te-IN" sz="2200" dirty="0">
-                  <a:latin typeface="Ramabhadra" panose="02000600000000000000" pitchFamily="2" charset="0"/>
-                  <a:cs typeface="Ramabhadra" panose="02000600000000000000" pitchFamily="2" charset="0"/>
-                </a:rPr>
-                <a:t>నన్ను అలంటి పాత్రగా –</a:t>
+                <a:rPr lang="te-IN" sz="2100" dirty="0">
+                  <a:latin typeface="Ramabhadra" panose="02000600000000000000" pitchFamily="2" charset="0"/>
+                  <a:cs typeface="Ramabhadra" panose="02000600000000000000" pitchFamily="2" charset="0"/>
+                </a:rPr>
+                <a:t>నా కోరికంతా ఏ క్షణమైనా</a:t>
               </a:r>
             </a:p>
             <a:p>
@@ -4234,18 +4270,18 @@
                 <a:defRPr/>
               </a:pPr>
               <a:r>
-                <a:rPr lang="te-IN" sz="2200" dirty="0">
-                  <a:latin typeface="Ramabhadra" panose="02000600000000000000" pitchFamily="2" charset="0"/>
-                  <a:cs typeface="Ramabhadra" panose="02000600000000000000" pitchFamily="2" charset="0"/>
-                </a:rPr>
-                <a:t>మార్చి వేయుమా</a:t>
+                <a:rPr lang="te-IN" sz="2100" dirty="0">
+                  <a:latin typeface="Ramabhadra" panose="02000600000000000000" pitchFamily="2" charset="0"/>
+                  <a:cs typeface="Ramabhadra" panose="02000600000000000000" pitchFamily="2" charset="0"/>
+                </a:rPr>
+                <a:t>నీవేగా నా యేసూ (2) ఆమెన్</a:t>
               </a:r>
             </a:p>
             <a:p>
               <a:pPr defTabSz="439781">
                 <a:defRPr/>
               </a:pPr>
-              <a:endParaRPr lang="te-IN" sz="2200" dirty="0">
+              <a:endParaRPr lang="te-IN" sz="2100" dirty="0">
                 <a:latin typeface="Ramabhadra" panose="02000600000000000000" pitchFamily="2" charset="0"/>
                 <a:cs typeface="Ramabhadra" panose="02000600000000000000" pitchFamily="2" charset="0"/>
               </a:endParaRPr>
@@ -4255,11 +4291,11 @@
                 <a:defRPr/>
               </a:pPr>
               <a:r>
-                <a:rPr lang="te-IN" sz="2200" dirty="0">
-                  <a:latin typeface="Ramabhadra" panose="02000600000000000000" pitchFamily="2" charset="0"/>
-                  <a:cs typeface="Ramabhadra" panose="02000600000000000000" pitchFamily="2" charset="0"/>
-                </a:rPr>
-                <a:t>సౌభాగ్యమైన పాత్రగా –</a:t>
+                <a:rPr lang="te-IN" sz="2100" dirty="0">
+                  <a:latin typeface="Ramabhadra" panose="02000600000000000000" pitchFamily="2" charset="0"/>
+                  <a:cs typeface="Ramabhadra" panose="02000600000000000000" pitchFamily="2" charset="0"/>
+                </a:rPr>
+                <a:t>మా సర్వమంతా నీవే నయ్యా</a:t>
               </a:r>
             </a:p>
             <a:p>
@@ -4267,11 +4303,11 @@
                 <a:defRPr/>
               </a:pPr>
               <a:r>
-                <a:rPr lang="te-IN" sz="2200" dirty="0">
-                  <a:latin typeface="Ramabhadra" panose="02000600000000000000" pitchFamily="2" charset="0"/>
-                  <a:cs typeface="Ramabhadra" panose="02000600000000000000" pitchFamily="2" charset="0"/>
-                </a:rPr>
-                <a:t>నన్ను చేయుమా</a:t>
+                <a:rPr lang="te-IN" sz="2100" dirty="0">
+                  <a:latin typeface="Ramabhadra" panose="02000600000000000000" pitchFamily="2" charset="0"/>
+                  <a:cs typeface="Ramabhadra" panose="02000600000000000000" pitchFamily="2" charset="0"/>
+                </a:rPr>
+                <a:t>నీకే గా అంకితం చేసితిమీ (2)</a:t>
               </a:r>
             </a:p>
             <a:p>
@@ -4279,11 +4315,11 @@
                 <a:defRPr/>
               </a:pPr>
               <a:r>
-                <a:rPr lang="te-IN" sz="2200" dirty="0">
-                  <a:latin typeface="Ramabhadra" panose="02000600000000000000" pitchFamily="2" charset="0"/>
-                  <a:cs typeface="Ramabhadra" panose="02000600000000000000" pitchFamily="2" charset="0"/>
-                </a:rPr>
-                <a:t>సొగస్సులన్ని  కూడనుంచి –</a:t>
+                <a:rPr lang="te-IN" sz="2100" dirty="0">
+                  <a:latin typeface="Ramabhadra" panose="02000600000000000000" pitchFamily="2" charset="0"/>
+                  <a:cs typeface="Ramabhadra" panose="02000600000000000000" pitchFamily="2" charset="0"/>
+                </a:rPr>
+                <a:t>వేచియున్నాము సెలవిమ్ము దేవా</a:t>
               </a:r>
             </a:p>
             <a:p>
@@ -4291,11 +4327,11 @@
                 <a:defRPr/>
               </a:pPr>
               <a:r>
-                <a:rPr lang="te-IN" sz="2200" dirty="0">
-                  <a:latin typeface="Ramabhadra" panose="02000600000000000000" pitchFamily="2" charset="0"/>
-                  <a:cs typeface="Ramabhadra" panose="02000600000000000000" pitchFamily="2" charset="0"/>
-                </a:rPr>
-                <a:t>నన్ను మార్చుమా</a:t>
+                <a:rPr lang="te-IN" sz="2100" dirty="0">
+                  <a:latin typeface="Ramabhadra" panose="02000600000000000000" pitchFamily="2" charset="0"/>
+                  <a:cs typeface="Ramabhadra" panose="02000600000000000000" pitchFamily="2" charset="0"/>
+                </a:rPr>
+                <a:t>నీ ఆజ్ఞ పాటించెదమూ (2) స్తోత్రం</a:t>
               </a:r>
             </a:p>
           </p:txBody>

--- a/songsTemplate.pptx
+++ b/songsTemplate.pptx
@@ -255,7 +255,7 @@
           <a:p>
             <a:fld id="{F1102B08-ED9E-409F-B95F-09CAA1DAF6E0}" type="datetimeFigureOut">
               <a:rPr lang="en-IN" smtClean="0"/>
-              <a:t>30-11-2024</a:t>
+              <a:t>07-12-2024</a:t>
             </a:fld>
             <a:endParaRPr lang="en-IN"/>
           </a:p>
@@ -425,7 +425,7 @@
           <a:p>
             <a:fld id="{F1102B08-ED9E-409F-B95F-09CAA1DAF6E0}" type="datetimeFigureOut">
               <a:rPr lang="en-IN" smtClean="0"/>
-              <a:t>30-11-2024</a:t>
+              <a:t>07-12-2024</a:t>
             </a:fld>
             <a:endParaRPr lang="en-IN"/>
           </a:p>
@@ -605,7 +605,7 @@
           <a:p>
             <a:fld id="{F1102B08-ED9E-409F-B95F-09CAA1DAF6E0}" type="datetimeFigureOut">
               <a:rPr lang="en-IN" smtClean="0"/>
-              <a:t>30-11-2024</a:t>
+              <a:t>07-12-2024</a:t>
             </a:fld>
             <a:endParaRPr lang="en-IN"/>
           </a:p>
@@ -775,7 +775,7 @@
           <a:p>
             <a:fld id="{F1102B08-ED9E-409F-B95F-09CAA1DAF6E0}" type="datetimeFigureOut">
               <a:rPr lang="en-IN" smtClean="0"/>
-              <a:t>30-11-2024</a:t>
+              <a:t>07-12-2024</a:t>
             </a:fld>
             <a:endParaRPr lang="en-IN"/>
           </a:p>
@@ -1019,7 +1019,7 @@
           <a:p>
             <a:fld id="{F1102B08-ED9E-409F-B95F-09CAA1DAF6E0}" type="datetimeFigureOut">
               <a:rPr lang="en-IN" smtClean="0"/>
-              <a:t>30-11-2024</a:t>
+              <a:t>07-12-2024</a:t>
             </a:fld>
             <a:endParaRPr lang="en-IN"/>
           </a:p>
@@ -1251,7 +1251,7 @@
           <a:p>
             <a:fld id="{F1102B08-ED9E-409F-B95F-09CAA1DAF6E0}" type="datetimeFigureOut">
               <a:rPr lang="en-IN" smtClean="0"/>
-              <a:t>30-11-2024</a:t>
+              <a:t>07-12-2024</a:t>
             </a:fld>
             <a:endParaRPr lang="en-IN"/>
           </a:p>
@@ -1618,7 +1618,7 @@
           <a:p>
             <a:fld id="{F1102B08-ED9E-409F-B95F-09CAA1DAF6E0}" type="datetimeFigureOut">
               <a:rPr lang="en-IN" smtClean="0"/>
-              <a:t>30-11-2024</a:t>
+              <a:t>07-12-2024</a:t>
             </a:fld>
             <a:endParaRPr lang="en-IN"/>
           </a:p>
@@ -1736,7 +1736,7 @@
           <a:p>
             <a:fld id="{F1102B08-ED9E-409F-B95F-09CAA1DAF6E0}" type="datetimeFigureOut">
               <a:rPr lang="en-IN" smtClean="0"/>
-              <a:t>30-11-2024</a:t>
+              <a:t>07-12-2024</a:t>
             </a:fld>
             <a:endParaRPr lang="en-IN"/>
           </a:p>
@@ -1831,7 +1831,7 @@
           <a:p>
             <a:fld id="{F1102B08-ED9E-409F-B95F-09CAA1DAF6E0}" type="datetimeFigureOut">
               <a:rPr lang="en-IN" smtClean="0"/>
-              <a:t>30-11-2024</a:t>
+              <a:t>07-12-2024</a:t>
             </a:fld>
             <a:endParaRPr lang="en-IN"/>
           </a:p>
@@ -2108,7 +2108,7 @@
           <a:p>
             <a:fld id="{F1102B08-ED9E-409F-B95F-09CAA1DAF6E0}" type="datetimeFigureOut">
               <a:rPr lang="en-IN" smtClean="0"/>
-              <a:t>30-11-2024</a:t>
+              <a:t>07-12-2024</a:t>
             </a:fld>
             <a:endParaRPr lang="en-IN"/>
           </a:p>
@@ -2365,7 +2365,7 @@
           <a:p>
             <a:fld id="{F1102B08-ED9E-409F-B95F-09CAA1DAF6E0}" type="datetimeFigureOut">
               <a:rPr lang="en-IN" smtClean="0"/>
-              <a:t>30-11-2024</a:t>
+              <a:t>07-12-2024</a:t>
             </a:fld>
             <a:endParaRPr lang="en-IN"/>
           </a:p>
@@ -2578,7 +2578,7 @@
           <a:p>
             <a:fld id="{F1102B08-ED9E-409F-B95F-09CAA1DAF6E0}" type="datetimeFigureOut">
               <a:rPr lang="en-IN" smtClean="0"/>
-              <a:t>30-11-2024</a:t>
+              <a:t>07-12-2024</a:t>
             </a:fld>
             <a:endParaRPr lang="en-IN"/>
           </a:p>
@@ -2998,9 +2998,9 @@
         <p:grpSpPr>
           <a:xfrm>
             <a:off x="160868" y="182032"/>
-            <a:ext cx="5369490" cy="6493935"/>
+            <a:ext cx="4648200" cy="6493935"/>
             <a:chOff x="160868" y="182032"/>
-            <a:chExt cx="5369490" cy="6493935"/>
+            <a:chExt cx="4648200" cy="6493935"/>
           </a:xfrm>
         </p:grpSpPr>
         <p:sp>
@@ -3072,8 +3072,8 @@
           </p:nvSpPr>
           <p:spPr>
             <a:xfrm>
-              <a:off x="416948" y="710999"/>
-              <a:ext cx="5113410" cy="5262979"/>
+              <a:off x="272140" y="309857"/>
+              <a:ext cx="4483140" cy="5847755"/>
             </a:xfrm>
             <a:prstGeom prst="rect">
               <a:avLst/>
@@ -3090,11 +3090,11 @@
                 <a:defRPr/>
               </a:pPr>
               <a:r>
-                <a:rPr lang="te-IN" sz="2400" dirty="0">
-                  <a:latin typeface="Ramabhadra" panose="02000600000000000000" pitchFamily="2" charset="0"/>
-                  <a:cs typeface="Ramabhadra" panose="02000600000000000000" pitchFamily="2" charset="0"/>
-                </a:rPr>
-                <a:t>నా స్తుతి పాత్రుడా – నా యేసయ్యా</a:t>
+                <a:rPr lang="te-IN" sz="2200" dirty="0">
+                  <a:latin typeface="Ramabhadra" panose="02000600000000000000" pitchFamily="2" charset="0"/>
+                  <a:cs typeface="Ramabhadra" panose="02000600000000000000" pitchFamily="2" charset="0"/>
+                </a:rPr>
+                <a:t>మహాఘనుడవు మహోన్నతుడవు</a:t>
               </a:r>
             </a:p>
             <a:p>
@@ -3102,18 +3102,54 @@
                 <a:defRPr/>
               </a:pPr>
               <a:r>
-                <a:rPr lang="te-IN" sz="2400" dirty="0">
-                  <a:latin typeface="Ramabhadra" panose="02000600000000000000" pitchFamily="2" charset="0"/>
-                  <a:cs typeface="Ramabhadra" panose="02000600000000000000" pitchFamily="2" charset="0"/>
-                </a:rPr>
-                <a:t>నా ఆరాధనకు నీవె యోగ్యుడవయ్యా (2)</a:t>
+                <a:rPr lang="te-IN" sz="2200" dirty="0">
+                  <a:latin typeface="Ramabhadra" panose="02000600000000000000" pitchFamily="2" charset="0"/>
+                  <a:cs typeface="Ramabhadra" panose="02000600000000000000" pitchFamily="2" charset="0"/>
+                </a:rPr>
+                <a:t>పరిశుద్ధ స్థలములోనే నివసించువాడవు (2)</a:t>
               </a:r>
             </a:p>
             <a:p>
               <a:pPr defTabSz="439781">
                 <a:defRPr/>
               </a:pPr>
-              <a:endParaRPr lang="te-IN" sz="2400" dirty="0">
+              <a:r>
+                <a:rPr lang="te-IN" sz="2200" dirty="0">
+                  <a:latin typeface="Ramabhadra" panose="02000600000000000000" pitchFamily="2" charset="0"/>
+                  <a:cs typeface="Ramabhadra" panose="02000600000000000000" pitchFamily="2" charset="0"/>
+                </a:rPr>
+                <a:t>కృపా సత్య సంపూర్ణమై</a:t>
+              </a:r>
+            </a:p>
+            <a:p>
+              <a:pPr defTabSz="439781">
+                <a:defRPr/>
+              </a:pPr>
+              <a:r>
+                <a:rPr lang="te-IN" sz="2200" dirty="0">
+                  <a:latin typeface="Ramabhadra" panose="02000600000000000000" pitchFamily="2" charset="0"/>
+                  <a:cs typeface="Ramabhadra" panose="02000600000000000000" pitchFamily="2" charset="0"/>
+                </a:rPr>
+                <a:t>మా మధ్యలో నివసించుట న్యాయమా</a:t>
+              </a:r>
+            </a:p>
+            <a:p>
+              <a:pPr defTabSz="439781">
+                <a:defRPr/>
+              </a:pPr>
+              <a:r>
+                <a:rPr lang="te-IN" sz="2200" dirty="0">
+                  <a:latin typeface="Ramabhadra" panose="02000600000000000000" pitchFamily="2" charset="0"/>
+                  <a:cs typeface="Ramabhadra" panose="02000600000000000000" pitchFamily="2" charset="0"/>
+                </a:rPr>
+                <a:t>నను పరిశుద్ధపరచుటే నీ ధర్మమా (2)</a:t>
+              </a:r>
+            </a:p>
+            <a:p>
+              <a:pPr defTabSz="439781">
+                <a:defRPr/>
+              </a:pPr>
+              <a:endParaRPr lang="te-IN" sz="2200" dirty="0">
                 <a:latin typeface="Ramabhadra" panose="02000600000000000000" pitchFamily="2" charset="0"/>
                 <a:cs typeface="Ramabhadra" panose="02000600000000000000" pitchFamily="2" charset="0"/>
               </a:endParaRPr>
@@ -3123,11 +3159,11 @@
                 <a:defRPr/>
               </a:pPr>
               <a:r>
-                <a:rPr lang="te-IN" sz="2400" dirty="0">
-                  <a:latin typeface="Ramabhadra" panose="02000600000000000000" pitchFamily="2" charset="0"/>
-                  <a:cs typeface="Ramabhadra" panose="02000600000000000000" pitchFamily="2" charset="0"/>
-                </a:rPr>
-                <a:t>నీ వాక్యమే నా పరవశము</a:t>
+                <a:rPr lang="te-IN" sz="2200" dirty="0">
+                  <a:latin typeface="Ramabhadra" panose="02000600000000000000" pitchFamily="2" charset="0"/>
+                  <a:cs typeface="Ramabhadra" panose="02000600000000000000" pitchFamily="2" charset="0"/>
+                </a:rPr>
+                <a:t>వినయముగల వారిని</a:t>
               </a:r>
             </a:p>
             <a:p>
@@ -3135,11 +3171,11 @@
                 <a:defRPr/>
               </a:pPr>
               <a:r>
-                <a:rPr lang="te-IN" sz="2400" dirty="0">
-                  <a:latin typeface="Ramabhadra" panose="02000600000000000000" pitchFamily="2" charset="0"/>
-                  <a:cs typeface="Ramabhadra" panose="02000600000000000000" pitchFamily="2" charset="0"/>
-                </a:rPr>
-                <a:t>నీ వాక్యమే నా ఆత్మకు ఆహారము (2)</a:t>
+                <a:rPr lang="te-IN" sz="2200" dirty="0">
+                  <a:latin typeface="Ramabhadra" panose="02000600000000000000" pitchFamily="2" charset="0"/>
+                  <a:cs typeface="Ramabhadra" panose="02000600000000000000" pitchFamily="2" charset="0"/>
+                </a:rPr>
+                <a:t>తగిన సమయములో హెచ్చించువాడవని (2)</a:t>
               </a:r>
             </a:p>
             <a:p>
@@ -3147,18 +3183,37 @@
                 <a:defRPr/>
               </a:pPr>
               <a:r>
-                <a:rPr lang="te-IN" sz="2400" dirty="0">
-                  <a:latin typeface="Ramabhadra" panose="02000600000000000000" pitchFamily="2" charset="0"/>
-                  <a:cs typeface="Ramabhadra" panose="02000600000000000000" pitchFamily="2" charset="0"/>
-                </a:rPr>
-                <a:t>నీ వాక్యమే నా పాదములకు దీపము (3)</a:t>
+                <a:rPr lang="te-IN" sz="2200" dirty="0">
+                  <a:latin typeface="Ramabhadra" panose="02000600000000000000" pitchFamily="2" charset="0"/>
+                  <a:cs typeface="Ramabhadra" panose="02000600000000000000" pitchFamily="2" charset="0"/>
+                </a:rPr>
+                <a:t>నీవు వాడు పాత్రనై నేనుండుటకై</a:t>
               </a:r>
             </a:p>
             <a:p>
               <a:pPr defTabSz="439781">
                 <a:defRPr/>
               </a:pPr>
-              <a:endParaRPr lang="te-IN" sz="2400" dirty="0">
+              <a:r>
+                <a:rPr lang="te-IN" sz="2200" dirty="0">
+                  <a:latin typeface="Ramabhadra" panose="02000600000000000000" pitchFamily="2" charset="0"/>
+                  <a:cs typeface="Ramabhadra" panose="02000600000000000000" pitchFamily="2" charset="0"/>
+                </a:rPr>
+                <a:t>నిలిచియుందును పవిత్రతతో (2)</a:t>
+              </a:r>
+            </a:p>
+            <a:p>
+              <a:pPr defTabSz="439781">
+                <a:defRPr/>
+              </a:pPr>
+              <a:r>
+                <a:rPr lang="te-IN" sz="2200" dirty="0">
+                  <a:latin typeface="Ramabhadra" panose="02000600000000000000" pitchFamily="2" charset="0"/>
+                  <a:cs typeface="Ramabhadra" panose="02000600000000000000" pitchFamily="2" charset="0"/>
+                </a:rPr>
+                <a:t>హల్లెలూయా యేసయ్యా నీకే స్తోత్రమయా (2)</a:t>
+              </a:r>
+              <a:endParaRPr lang="en-IN" sz="2200" dirty="0">
                 <a:latin typeface="Ramabhadra" panose="02000600000000000000" pitchFamily="2" charset="0"/>
                 <a:cs typeface="Ramabhadra" panose="02000600000000000000" pitchFamily="2" charset="0"/>
               </a:endParaRPr>
@@ -3167,24 +3222,21 @@
               <a:pPr defTabSz="439781">
                 <a:defRPr/>
               </a:pPr>
-              <a:r>
-                <a:rPr lang="te-IN" sz="2400" dirty="0">
-                  <a:latin typeface="Ramabhadra" panose="02000600000000000000" pitchFamily="2" charset="0"/>
-                  <a:cs typeface="Ramabhadra" panose="02000600000000000000" pitchFamily="2" charset="0"/>
-                </a:rPr>
-                <a:t>నీ కృపయే నా ఆశ్రయము</a:t>
-              </a:r>
+              <a:endParaRPr lang="te-IN" sz="2200" dirty="0">
+                <a:latin typeface="Ramabhadra" panose="02000600000000000000" pitchFamily="2" charset="0"/>
+                <a:cs typeface="Ramabhadra" panose="02000600000000000000" pitchFamily="2" charset="0"/>
+              </a:endParaRPr>
             </a:p>
             <a:p>
               <a:pPr defTabSz="439781">
                 <a:defRPr/>
               </a:pPr>
               <a:r>
-                <a:rPr lang="te-IN" sz="2400" dirty="0">
-                  <a:latin typeface="Ramabhadra" panose="02000600000000000000" pitchFamily="2" charset="0"/>
-                  <a:cs typeface="Ramabhadra" panose="02000600000000000000" pitchFamily="2" charset="0"/>
-                </a:rPr>
-                <a:t>నీ కృపయే నా ఆత్మకు అభిషేకము (2)</a:t>
+                <a:rPr lang="te-IN" sz="2200" dirty="0">
+                  <a:latin typeface="Ramabhadra" panose="02000600000000000000" pitchFamily="2" charset="0"/>
+                  <a:cs typeface="Ramabhadra" panose="02000600000000000000" pitchFamily="2" charset="0"/>
+                </a:rPr>
+                <a:t>దీన మనస్సు గలవారికే</a:t>
               </a:r>
             </a:p>
             <a:p>
@@ -3192,32 +3244,35 @@
                 <a:defRPr/>
               </a:pPr>
               <a:r>
-                <a:rPr lang="te-IN" sz="2400" dirty="0">
-                  <a:latin typeface="Ramabhadra" panose="02000600000000000000" pitchFamily="2" charset="0"/>
-                  <a:cs typeface="Ramabhadra" panose="02000600000000000000" pitchFamily="2" charset="0"/>
-                </a:rPr>
-                <a:t>నీ కృపయే నా జీవన ఆధారము (3)</a:t>
+                <a:rPr lang="te-IN" sz="2200" dirty="0">
+                  <a:latin typeface="Ramabhadra" panose="02000600000000000000" pitchFamily="2" charset="0"/>
+                  <a:cs typeface="Ramabhadra" panose="02000600000000000000" pitchFamily="2" charset="0"/>
+                </a:rPr>
+                <a:t>సమృద్ధిగా కృపను దయచేయువాడవని (2)</a:t>
               </a:r>
             </a:p>
             <a:p>
               <a:pPr defTabSz="439781">
                 <a:defRPr/>
               </a:pPr>
-              <a:endParaRPr lang="te-IN" sz="2400" dirty="0">
-                <a:latin typeface="Ramabhadra" panose="02000600000000000000" pitchFamily="2" charset="0"/>
-                <a:cs typeface="Ramabhadra" panose="02000600000000000000" pitchFamily="2" charset="0"/>
-              </a:endParaRPr>
+              <a:r>
+                <a:rPr lang="te-IN" sz="2200" dirty="0">
+                  <a:latin typeface="Ramabhadra" panose="02000600000000000000" pitchFamily="2" charset="0"/>
+                  <a:cs typeface="Ramabhadra" panose="02000600000000000000" pitchFamily="2" charset="0"/>
+                </a:rPr>
+                <a:t>నీ సముఖములో సజీవ సాక్షినై</a:t>
+              </a:r>
             </a:p>
             <a:p>
               <a:pPr defTabSz="439781">
                 <a:defRPr/>
               </a:pPr>
               <a:r>
-                <a:rPr lang="te-IN" sz="2400" dirty="0">
-                  <a:latin typeface="Ramabhadra" panose="02000600000000000000" pitchFamily="2" charset="0"/>
-                  <a:cs typeface="Ramabhadra" panose="02000600000000000000" pitchFamily="2" charset="0"/>
-                </a:rPr>
-                <a:t>నీ సౌందర్యము యెరూషలేము</a:t>
+                <a:rPr lang="te-IN" sz="2200" dirty="0">
+                  <a:latin typeface="Ramabhadra" panose="02000600000000000000" pitchFamily="2" charset="0"/>
+                  <a:cs typeface="Ramabhadra" panose="02000600000000000000" pitchFamily="2" charset="0"/>
+                </a:rPr>
+                <a:t>కాపాడుకొందును మెళకువతో (2)</a:t>
               </a:r>
             </a:p>
             <a:p>
@@ -3225,23 +3280,11 @@
                 <a:defRPr/>
               </a:pPr>
               <a:r>
-                <a:rPr lang="te-IN" sz="2400" dirty="0">
-                  <a:latin typeface="Ramabhadra" panose="02000600000000000000" pitchFamily="2" charset="0"/>
-                  <a:cs typeface="Ramabhadra" panose="02000600000000000000" pitchFamily="2" charset="0"/>
-                </a:rPr>
-                <a:t>నీ పరిపూర్ణత సీయోను శిఖరము (2)</a:t>
-              </a:r>
-            </a:p>
-            <a:p>
-              <a:pPr defTabSz="439781">
-                <a:defRPr/>
-              </a:pPr>
-              <a:r>
-                <a:rPr lang="te-IN" sz="2400" dirty="0">
-                  <a:latin typeface="Ramabhadra" panose="02000600000000000000" pitchFamily="2" charset="0"/>
-                  <a:cs typeface="Ramabhadra" panose="02000600000000000000" pitchFamily="2" charset="0"/>
-                </a:rPr>
-                <a:t>నీ పరిపూర్ణత నా జీవిత గమ్యము (3)</a:t>
+                <a:rPr lang="te-IN" sz="2200" dirty="0">
+                  <a:latin typeface="Ramabhadra" panose="02000600000000000000" pitchFamily="2" charset="0"/>
+                  <a:cs typeface="Ramabhadra" panose="02000600000000000000" pitchFamily="2" charset="0"/>
+                </a:rPr>
+                <a:t>హల్లెలూయా యేసయ్యా నీకే స్తోత్రమయా (2)</a:t>
               </a:r>
             </a:p>
           </p:txBody>
@@ -3260,7 +3303,7 @@
           </p:nvSpPr>
           <p:spPr>
             <a:xfrm>
-              <a:off x="318523" y="320474"/>
+              <a:off x="4312694" y="309857"/>
               <a:ext cx="390525" cy="390525"/>
             </a:xfrm>
             <a:prstGeom prst="ellipse">
@@ -3324,9 +3367,9 @@
         <p:grpSpPr>
           <a:xfrm>
             <a:off x="5104338" y="182031"/>
-            <a:ext cx="4741088" cy="6493935"/>
+            <a:ext cx="4648200" cy="6493935"/>
             <a:chOff x="160868" y="182032"/>
-            <a:chExt cx="4741088" cy="6493935"/>
+            <a:chExt cx="4648200" cy="6493935"/>
           </a:xfrm>
         </p:grpSpPr>
         <p:sp>
@@ -3398,8 +3441,8 @@
           </p:nvSpPr>
           <p:spPr>
             <a:xfrm>
-              <a:off x="360650" y="320475"/>
-              <a:ext cx="4541306" cy="5324535"/>
+              <a:off x="267762" y="838158"/>
+              <a:ext cx="4541306" cy="4493538"/>
             </a:xfrm>
             <a:prstGeom prst="rect">
               <a:avLst/>
@@ -3413,192 +3456,157 @@
             <a:lstStyle/>
             <a:p>
               <a:r>
-                <a:rPr lang="te-IN" sz="2000" dirty="0">
-                  <a:latin typeface="Ramabhadra" panose="02000600000000000000" pitchFamily="2" charset="0"/>
-                  <a:cs typeface="Ramabhadra" panose="02000600000000000000" pitchFamily="2" charset="0"/>
-                </a:rPr>
-                <a:t>ఇంత కాలం నీదు కృపలో కాచిన దేవా (2)</a:t>
-              </a:r>
-              <a:br>
-                <a:rPr lang="te-IN" sz="2000" dirty="0">
-                  <a:latin typeface="Ramabhadra" panose="02000600000000000000" pitchFamily="2" charset="0"/>
-                  <a:cs typeface="Ramabhadra" panose="02000600000000000000" pitchFamily="2" charset="0"/>
-                </a:rPr>
-              </a:br>
-              <a:r>
-                <a:rPr lang="te-IN" sz="2000" dirty="0">
-                  <a:latin typeface="Ramabhadra" panose="02000600000000000000" pitchFamily="2" charset="0"/>
-                  <a:cs typeface="Ramabhadra" panose="02000600000000000000" pitchFamily="2" charset="0"/>
-                </a:rPr>
-                <a:t>ఇకను కూడా మాకు తోడు నీడ నీవే కదా (2)        </a:t>
-              </a:r>
-            </a:p>
-            <a:p>
-              <a:endParaRPr lang="te-IN" sz="2000" dirty="0">
+                <a:rPr lang="te-IN" sz="2200" dirty="0">
+                  <a:latin typeface="Ramabhadra" panose="02000600000000000000" pitchFamily="2" charset="0"/>
+                  <a:cs typeface="Ramabhadra" panose="02000600000000000000" pitchFamily="2" charset="0"/>
+                </a:rPr>
+                <a:t>యేసు నీకృపలో - మము కాపాడుము</a:t>
+              </a:r>
+              <a:r>
+                <a:rPr lang="en-IN" sz="2200" dirty="0">
+                  <a:latin typeface="Ramabhadra" panose="02000600000000000000" pitchFamily="2" charset="0"/>
+                  <a:cs typeface="Ramabhadra" panose="02000600000000000000" pitchFamily="2" charset="0"/>
+                </a:rPr>
+                <a:t> </a:t>
+              </a:r>
+              <a:r>
+                <a:rPr lang="te-IN" sz="2200" dirty="0">
+                  <a:latin typeface="Ramabhadra" panose="02000600000000000000" pitchFamily="2" charset="0"/>
+                  <a:cs typeface="Ramabhadra" panose="02000600000000000000" pitchFamily="2" charset="0"/>
+                </a:rPr>
+                <a:t>దేవా</a:t>
+              </a:r>
+              <a:endParaRPr lang="en-IN" sz="2200" dirty="0">
                 <a:latin typeface="Ramabhadra" panose="02000600000000000000" pitchFamily="2" charset="0"/>
                 <a:cs typeface="Ramabhadra" panose="02000600000000000000" pitchFamily="2" charset="0"/>
               </a:endParaRPr>
             </a:p>
             <a:p>
               <a:r>
-                <a:rPr lang="te-IN" sz="2000" dirty="0">
-                  <a:latin typeface="Ramabhadra" panose="02000600000000000000" pitchFamily="2" charset="0"/>
-                  <a:cs typeface="Ramabhadra" panose="02000600000000000000" pitchFamily="2" charset="0"/>
-                </a:rPr>
-                <a:t>ఎన్ని ఏళ్ళు గడచినా –</a:t>
-              </a:r>
-              <a:endParaRPr lang="en-IN" sz="2000" dirty="0">
+                <a:rPr lang="te-IN" sz="2200" dirty="0">
+                  <a:latin typeface="Ramabhadra" panose="02000600000000000000" pitchFamily="2" charset="0"/>
+                  <a:cs typeface="Ramabhadra" panose="02000600000000000000" pitchFamily="2" charset="0"/>
+                </a:rPr>
+                <a:t>మమ్ము రక్షించి </a:t>
+              </a:r>
+              <a:r>
+                <a:rPr lang="en-IN" sz="2200" dirty="0">
+                  <a:latin typeface="Ramabhadra" panose="02000600000000000000" pitchFamily="2" charset="0"/>
+                  <a:cs typeface="Ramabhadra" panose="02000600000000000000" pitchFamily="2" charset="0"/>
+                </a:rPr>
+                <a:t>- </a:t>
+              </a:r>
+              <a:r>
+                <a:rPr lang="te-IN" sz="2200" dirty="0">
+                  <a:latin typeface="Ramabhadra" panose="02000600000000000000" pitchFamily="2" charset="0"/>
+                  <a:cs typeface="Ramabhadra" panose="02000600000000000000" pitchFamily="2" charset="0"/>
+                </a:rPr>
+                <a:t>నిత్య రాజ్యములో</a:t>
+              </a:r>
+              <a:endParaRPr lang="en-IN" sz="2200" dirty="0">
                 <a:latin typeface="Ramabhadra" panose="02000600000000000000" pitchFamily="2" charset="0"/>
                 <a:cs typeface="Ramabhadra" panose="02000600000000000000" pitchFamily="2" charset="0"/>
               </a:endParaRPr>
             </a:p>
             <a:p>
               <a:r>
-                <a:rPr lang="te-IN" sz="2000" dirty="0">
-                  <a:latin typeface="Ramabhadra" panose="02000600000000000000" pitchFamily="2" charset="0"/>
-                  <a:cs typeface="Ramabhadra" panose="02000600000000000000" pitchFamily="2" charset="0"/>
-                </a:rPr>
-                <a:t>ఎన్ని తరాలు మారినా (2)</a:t>
-              </a:r>
-              <a:br>
-                <a:rPr lang="te-IN" sz="2000" dirty="0">
-                  <a:latin typeface="Ramabhadra" panose="02000600000000000000" pitchFamily="2" charset="0"/>
-                  <a:cs typeface="Ramabhadra" panose="02000600000000000000" pitchFamily="2" charset="0"/>
-                </a:rPr>
-              </a:br>
-              <a:r>
-                <a:rPr lang="te-IN" sz="2000" dirty="0">
-                  <a:latin typeface="Ramabhadra" panose="02000600000000000000" pitchFamily="2" charset="0"/>
-                  <a:cs typeface="Ramabhadra" panose="02000600000000000000" pitchFamily="2" charset="0"/>
-                </a:rPr>
-                <a:t>మారని వీడని ప్రేమే నీదయ్యా</a:t>
-              </a:r>
-              <a:br>
-                <a:rPr lang="te-IN" sz="2000" dirty="0">
-                  <a:latin typeface="Ramabhadra" panose="02000600000000000000" pitchFamily="2" charset="0"/>
-                  <a:cs typeface="Ramabhadra" panose="02000600000000000000" pitchFamily="2" charset="0"/>
-                </a:rPr>
-              </a:br>
-              <a:r>
-                <a:rPr lang="te-IN" sz="2000" dirty="0">
-                  <a:latin typeface="Ramabhadra" panose="02000600000000000000" pitchFamily="2" charset="0"/>
-                  <a:cs typeface="Ramabhadra" panose="02000600000000000000" pitchFamily="2" charset="0"/>
-                </a:rPr>
-                <a:t>మార్చిన నా జీవితం నీకే యేసయ్యా (2)  </a:t>
-              </a:r>
-            </a:p>
-            <a:p>
-              <a:r>
-                <a:rPr lang="te-IN" sz="2000" dirty="0">
-                  <a:latin typeface="Ramabhadra" panose="02000600000000000000" pitchFamily="2" charset="0"/>
-                  <a:cs typeface="Ramabhadra" panose="02000600000000000000" pitchFamily="2" charset="0"/>
-                </a:rPr>
-                <a:t>       </a:t>
-              </a:r>
-            </a:p>
-            <a:p>
-              <a:r>
-                <a:rPr lang="te-IN" sz="2000" dirty="0">
-                  <a:latin typeface="Ramabhadra" panose="02000600000000000000" pitchFamily="2" charset="0"/>
-                  <a:cs typeface="Ramabhadra" panose="02000600000000000000" pitchFamily="2" charset="0"/>
-                </a:rPr>
-                <a:t>నీవు చేసిన మేలులు –</a:t>
-              </a:r>
-              <a:endParaRPr lang="en-IN" sz="2000" dirty="0">
+                <a:rPr lang="te-IN" sz="2200" dirty="0">
+                  <a:latin typeface="Ramabhadra" panose="02000600000000000000" pitchFamily="2" charset="0"/>
+                  <a:cs typeface="Ramabhadra" panose="02000600000000000000" pitchFamily="2" charset="0"/>
+                </a:rPr>
+                <a:t>నడుపుము మా ప్రభువా - నడుపుము మా ప్రభువా</a:t>
+              </a:r>
+              <a:endParaRPr lang="en-IN" sz="2200" dirty="0">
                 <a:latin typeface="Ramabhadra" panose="02000600000000000000" pitchFamily="2" charset="0"/>
                 <a:cs typeface="Ramabhadra" panose="02000600000000000000" pitchFamily="2" charset="0"/>
               </a:endParaRPr>
             </a:p>
             <a:p>
-              <a:r>
-                <a:rPr lang="te-IN" sz="2000" dirty="0">
-                  <a:latin typeface="Ramabhadra" panose="02000600000000000000" pitchFamily="2" charset="0"/>
-                  <a:cs typeface="Ramabhadra" panose="02000600000000000000" pitchFamily="2" charset="0"/>
-                </a:rPr>
-                <a:t>తలచుకుందును అనుదినం (2)</a:t>
-              </a:r>
-              <a:br>
-                <a:rPr lang="te-IN" sz="2000" dirty="0">
-                  <a:latin typeface="Ramabhadra" panose="02000600000000000000" pitchFamily="2" charset="0"/>
-                  <a:cs typeface="Ramabhadra" panose="02000600000000000000" pitchFamily="2" charset="0"/>
-                </a:rPr>
-              </a:br>
-              <a:r>
-                <a:rPr lang="te-IN" sz="2000" dirty="0">
-                  <a:latin typeface="Ramabhadra" panose="02000600000000000000" pitchFamily="2" charset="0"/>
-                  <a:cs typeface="Ramabhadra" panose="02000600000000000000" pitchFamily="2" charset="0"/>
-                </a:rPr>
-                <a:t>నా స్తుతి స్తోత్రము నీకే యేసయ్యా</a:t>
-              </a:r>
-              <a:br>
-                <a:rPr lang="te-IN" sz="2000" dirty="0">
-                  <a:latin typeface="Ramabhadra" panose="02000600000000000000" pitchFamily="2" charset="0"/>
-                  <a:cs typeface="Ramabhadra" panose="02000600000000000000" pitchFamily="2" charset="0"/>
-                </a:rPr>
-              </a:br>
-              <a:r>
-                <a:rPr lang="te-IN" sz="2000" dirty="0">
-                  <a:latin typeface="Ramabhadra" panose="02000600000000000000" pitchFamily="2" charset="0"/>
-                  <a:cs typeface="Ramabhadra" panose="02000600000000000000" pitchFamily="2" charset="0"/>
-                </a:rPr>
-                <a:t>వేరుగా ఏమియు చెల్లించలేనయ్యా (2) </a:t>
-              </a:r>
-            </a:p>
-            <a:p>
-              <a:r>
-                <a:rPr lang="te-IN" sz="2000" dirty="0">
-                  <a:latin typeface="Ramabhadra" panose="02000600000000000000" pitchFamily="2" charset="0"/>
-                  <a:cs typeface="Ramabhadra" panose="02000600000000000000" pitchFamily="2" charset="0"/>
-                </a:rPr>
-                <a:t>          </a:t>
-              </a:r>
-            </a:p>
-            <a:p>
-              <a:r>
-                <a:rPr lang="te-IN" sz="2000" dirty="0">
-                  <a:latin typeface="Ramabhadra" panose="02000600000000000000" pitchFamily="2" charset="0"/>
-                  <a:cs typeface="Ramabhadra" panose="02000600000000000000" pitchFamily="2" charset="0"/>
-                </a:rPr>
-                <a:t>దూరమైతిరి ఆప్తులు –</a:t>
-              </a:r>
-              <a:endParaRPr lang="en-IN" sz="2000" dirty="0">
+              <a:endParaRPr lang="en-IN" sz="2200" dirty="0">
                 <a:latin typeface="Ramabhadra" panose="02000600000000000000" pitchFamily="2" charset="0"/>
                 <a:cs typeface="Ramabhadra" panose="02000600000000000000" pitchFamily="2" charset="0"/>
               </a:endParaRPr>
             </a:p>
             <a:p>
               <a:r>
-                <a:rPr lang="te-IN" sz="2000" dirty="0">
-                  <a:latin typeface="Ramabhadra" panose="02000600000000000000" pitchFamily="2" charset="0"/>
-                  <a:cs typeface="Ramabhadra" panose="02000600000000000000" pitchFamily="2" charset="0"/>
-                </a:rPr>
-                <a:t>విడచిపోతిరి నా హితులు (2)</a:t>
-              </a:r>
-              <a:br>
-                <a:rPr lang="te-IN" sz="2000" dirty="0">
-                  <a:latin typeface="Ramabhadra" panose="02000600000000000000" pitchFamily="2" charset="0"/>
-                  <a:cs typeface="Ramabhadra" panose="02000600000000000000" pitchFamily="2" charset="0"/>
-                </a:rPr>
-              </a:br>
-              <a:r>
-                <a:rPr lang="te-IN" sz="2000" dirty="0">
-                  <a:latin typeface="Ramabhadra" panose="02000600000000000000" pitchFamily="2" charset="0"/>
-                  <a:cs typeface="Ramabhadra" panose="02000600000000000000" pitchFamily="2" charset="0"/>
-                </a:rPr>
-                <a:t>శోధన వేదన తీర్చిన యేసయ్యా</a:t>
-              </a:r>
-              <a:br>
-                <a:rPr lang="te-IN" sz="2000" dirty="0">
-                  <a:latin typeface="Ramabhadra" panose="02000600000000000000" pitchFamily="2" charset="0"/>
-                  <a:cs typeface="Ramabhadra" panose="02000600000000000000" pitchFamily="2" charset="0"/>
-                </a:rPr>
-              </a:br>
-              <a:r>
-                <a:rPr lang="te-IN" sz="2000" dirty="0">
-                  <a:latin typeface="Ramabhadra" panose="02000600000000000000" pitchFamily="2" charset="0"/>
-                  <a:cs typeface="Ramabhadra" panose="02000600000000000000" pitchFamily="2" charset="0"/>
-                </a:rPr>
-                <a:t>తల్లిలా తండ్రిలా కాచిన యేసయ్యా (2) </a:t>
+                <a:rPr lang="te-IN" sz="2200" dirty="0">
+                  <a:latin typeface="Ramabhadra" panose="02000600000000000000" pitchFamily="2" charset="0"/>
+                  <a:cs typeface="Ramabhadra" panose="02000600000000000000" pitchFamily="2" charset="0"/>
+                </a:rPr>
+                <a:t>సిలువను మోసుకొని - సువార్త చాటింప</a:t>
+              </a:r>
+              <a:endParaRPr lang="en-IN" sz="2200" dirty="0">
+                <a:latin typeface="Ramabhadra" panose="02000600000000000000" pitchFamily="2" charset="0"/>
+                <a:cs typeface="Ramabhadra" panose="02000600000000000000" pitchFamily="2" charset="0"/>
+              </a:endParaRPr>
+            </a:p>
+            <a:p>
+              <a:r>
+                <a:rPr lang="te-IN" sz="2200" dirty="0">
+                  <a:latin typeface="Ramabhadra" panose="02000600000000000000" pitchFamily="2" charset="0"/>
+                  <a:cs typeface="Ramabhadra" panose="02000600000000000000" pitchFamily="2" charset="0"/>
+                </a:rPr>
+                <a:t>విలువగు నీ శక్తిచే - నిత్యము నడిపించు</a:t>
+              </a:r>
+            </a:p>
+            <a:p>
+              <a:r>
+                <a:rPr lang="te-IN" sz="2200" dirty="0">
+                  <a:latin typeface="Ramabhadra" panose="02000600000000000000" pitchFamily="2" charset="0"/>
+                  <a:cs typeface="Ramabhadra" panose="02000600000000000000" pitchFamily="2" charset="0"/>
+                </a:rPr>
+                <a:t>యేసు నీ రక్తములో - శుద్దిపరచి నన్ను</a:t>
+              </a:r>
+            </a:p>
+            <a:p>
+              <a:r>
+                <a:rPr lang="te-IN" sz="2200" dirty="0">
+                  <a:latin typeface="Ramabhadra" panose="02000600000000000000" pitchFamily="2" charset="0"/>
+                  <a:cs typeface="Ramabhadra" panose="02000600000000000000" pitchFamily="2" charset="0"/>
+                </a:rPr>
+                <a:t>నిలుపుము జ్యోతివలె - నిలుపుము జ్యోతివలె  </a:t>
+              </a:r>
+            </a:p>
+            <a:p>
+              <a:endParaRPr lang="te-IN" sz="2200" dirty="0">
+                <a:latin typeface="Ramabhadra" panose="02000600000000000000" pitchFamily="2" charset="0"/>
+                <a:cs typeface="Ramabhadra" panose="02000600000000000000" pitchFamily="2" charset="0"/>
+              </a:endParaRPr>
+            </a:p>
+            <a:p>
+              <a:r>
+                <a:rPr lang="te-IN" sz="2200" dirty="0">
+                  <a:latin typeface="Ramabhadra" panose="02000600000000000000" pitchFamily="2" charset="0"/>
+                  <a:cs typeface="Ramabhadra" panose="02000600000000000000" pitchFamily="2" charset="0"/>
+                </a:rPr>
+                <a:t>కృంగిన వేళలలో - అలసిన సమయములో</a:t>
+              </a:r>
+            </a:p>
+            <a:p>
+              <a:r>
+                <a:rPr lang="te-IN" sz="2200" dirty="0">
+                  <a:latin typeface="Ramabhadra" panose="02000600000000000000" pitchFamily="2" charset="0"/>
+                  <a:cs typeface="Ramabhadra" panose="02000600000000000000" pitchFamily="2" charset="0"/>
+                </a:rPr>
+                <a:t>నా చేయి విడువకుము - నన్ను నిలబెట్టు</a:t>
+              </a:r>
+            </a:p>
+            <a:p>
+              <a:r>
+                <a:rPr lang="te-IN" sz="2200" dirty="0">
+                  <a:latin typeface="Ramabhadra" panose="02000600000000000000" pitchFamily="2" charset="0"/>
+                  <a:cs typeface="Ramabhadra" panose="02000600000000000000" pitchFamily="2" charset="0"/>
+                </a:rPr>
+                <a:t>యేసు నీ రక్తములో - శుద్దిపరచి నన్ను</a:t>
+              </a:r>
+            </a:p>
+            <a:p>
+              <a:r>
+                <a:rPr lang="te-IN" sz="2200" dirty="0">
+                  <a:latin typeface="Ramabhadra" panose="02000600000000000000" pitchFamily="2" charset="0"/>
+                  <a:cs typeface="Ramabhadra" panose="02000600000000000000" pitchFamily="2" charset="0"/>
+                </a:rPr>
+                <a:t>నిలుపుము జ్యోతివలె - నిలుపుము జ్యోతివలె</a:t>
               </a:r>
             </a:p>
           </p:txBody>
@@ -3785,8 +3793,8 @@
           </p:nvSpPr>
           <p:spPr>
             <a:xfrm>
-              <a:off x="343961" y="809050"/>
-              <a:ext cx="4648200" cy="5632311"/>
+              <a:off x="343961" y="716954"/>
+              <a:ext cx="4648200" cy="5509200"/>
             </a:xfrm>
             <a:prstGeom prst="rect">
               <a:avLst/>
@@ -3803,11 +3811,18 @@
                 <a:defRPr/>
               </a:pPr>
               <a:r>
-                <a:rPr lang="te-IN" sz="2400" dirty="0">
-                  <a:latin typeface="Ramabhadra" panose="02000600000000000000" pitchFamily="2" charset="0"/>
-                  <a:cs typeface="Ramabhadra" panose="02000600000000000000" pitchFamily="2" charset="0"/>
-                </a:rPr>
-                <a:t>యేసయ్యా.. యేసయ్యా.. యేసయ్యా.. యేసయ్యా..</a:t>
+                <a:rPr lang="te-IN" sz="2200" dirty="0">
+                  <a:latin typeface="Ramabhadra" panose="02000600000000000000" pitchFamily="2" charset="0"/>
+                  <a:cs typeface="Ramabhadra" panose="02000600000000000000" pitchFamily="2" charset="0"/>
+                </a:rPr>
+                <a:t>మదుర స్తుతులతో </a:t>
+              </a:r>
+              <a:r>
+                <a:rPr lang="en-IN" sz="2200" dirty="0">
+                  <a:latin typeface="Ramabhadra" panose="02000600000000000000" pitchFamily="2" charset="0"/>
+                  <a:cs typeface="Ramabhadra" panose="02000600000000000000" pitchFamily="2" charset="0"/>
+                </a:rPr>
+                <a:t>–</a:t>
               </a:r>
             </a:p>
             <a:p>
@@ -3815,42 +3830,64 @@
                 <a:defRPr/>
               </a:pPr>
               <a:r>
-                <a:rPr lang="te-IN" sz="2400" dirty="0">
-                  <a:latin typeface="Ramabhadra" panose="02000600000000000000" pitchFamily="2" charset="0"/>
-                  <a:cs typeface="Ramabhadra" panose="02000600000000000000" pitchFamily="2" charset="0"/>
-                </a:rPr>
-                <a:t>నిన్నే నిన్నే నే కొలుతునయ్యా</a:t>
-              </a:r>
+                <a:rPr lang="te-IN" sz="2200" dirty="0">
+                  <a:latin typeface="Ramabhadra" panose="02000600000000000000" pitchFamily="2" charset="0"/>
+                  <a:cs typeface="Ramabhadra" panose="02000600000000000000" pitchFamily="2" charset="0"/>
+                </a:rPr>
+                <a:t>మ్రోదములరగ సదమదని</a:t>
+              </a:r>
+              <a:r>
+                <a:rPr lang="en-US" sz="2200" dirty="0">
+                  <a:latin typeface="Ramabhadra" panose="02000600000000000000" pitchFamily="2" charset="0"/>
+                  <a:cs typeface="Ramabhadra" panose="02000600000000000000" pitchFamily="2" charset="0"/>
+                </a:rPr>
+                <a:t> </a:t>
+              </a:r>
+              <a:r>
+                <a:rPr lang="te-IN" sz="2200" dirty="0">
+                  <a:latin typeface="Ramabhadra" panose="02000600000000000000" pitchFamily="2" charset="0"/>
+                  <a:cs typeface="Ramabhadra" panose="02000600000000000000" pitchFamily="2" charset="0"/>
+                </a:rPr>
+                <a:t>పాడుదమా</a:t>
+              </a:r>
+              <a:endParaRPr lang="en-IN" sz="2200" dirty="0">
+                <a:latin typeface="Ramabhadra" panose="02000600000000000000" pitchFamily="2" charset="0"/>
+                <a:cs typeface="Ramabhadra" panose="02000600000000000000" pitchFamily="2" charset="0"/>
+              </a:endParaRPr>
             </a:p>
             <a:p>
               <a:pPr defTabSz="439781">
                 <a:defRPr/>
               </a:pPr>
               <a:r>
-                <a:rPr lang="te-IN" sz="2400" dirty="0">
-                  <a:latin typeface="Ramabhadra" panose="02000600000000000000" pitchFamily="2" charset="0"/>
-                  <a:cs typeface="Ramabhadra" panose="02000600000000000000" pitchFamily="2" charset="0"/>
-                </a:rPr>
-                <a:t>నీవే నీవే నా రాజువయ్యా (2)</a:t>
-              </a:r>
+                <a:rPr lang="te-IN" sz="2200" dirty="0">
+                  <a:latin typeface="Ramabhadra" panose="02000600000000000000" pitchFamily="2" charset="0"/>
+                  <a:cs typeface="Ramabhadra" panose="02000600000000000000" pitchFamily="2" charset="0"/>
+                </a:rPr>
+                <a:t>క్రీస్తుకు గానం చేయుదమా –</a:t>
+              </a:r>
+              <a:endParaRPr lang="en-IN" sz="2200" dirty="0">
+                <a:latin typeface="Ramabhadra" panose="02000600000000000000" pitchFamily="2" charset="0"/>
+                <a:cs typeface="Ramabhadra" panose="02000600000000000000" pitchFamily="2" charset="0"/>
+              </a:endParaRPr>
             </a:p>
             <a:p>
               <a:pPr defTabSz="439781">
                 <a:defRPr/>
               </a:pPr>
               <a:r>
-                <a:rPr lang="te-IN" sz="2400" dirty="0">
-                  <a:latin typeface="Ramabhadra" panose="02000600000000000000" pitchFamily="2" charset="0"/>
-                  <a:cs typeface="Ramabhadra" panose="02000600000000000000" pitchFamily="2" charset="0"/>
-                </a:rPr>
-                <a:t>యేసయ్య యేసయ్య యేసయ్యా…</a:t>
+                <a:rPr lang="te-IN" sz="2200" dirty="0">
+                  <a:latin typeface="Ramabhadra" panose="02000600000000000000" pitchFamily="2" charset="0"/>
+                  <a:cs typeface="Ramabhadra" panose="02000600000000000000" pitchFamily="2" charset="0"/>
+                </a:rPr>
+                <a:t>నూతన గానము చేయుదమా</a:t>
               </a:r>
             </a:p>
             <a:p>
               <a:pPr defTabSz="439781">
                 <a:defRPr/>
               </a:pPr>
-              <a:endParaRPr lang="te-IN" sz="2400" dirty="0">
+              <a:endParaRPr lang="en-IN" sz="2200" dirty="0">
                 <a:latin typeface="Ramabhadra" panose="02000600000000000000" pitchFamily="2" charset="0"/>
                 <a:cs typeface="Ramabhadra" panose="02000600000000000000" pitchFamily="2" charset="0"/>
               </a:endParaRPr>
@@ -3860,11 +3897,25 @@
                 <a:defRPr/>
               </a:pPr>
               <a:r>
-                <a:rPr lang="te-IN" sz="2400" dirty="0">
-                  <a:latin typeface="Ramabhadra" panose="02000600000000000000" pitchFamily="2" charset="0"/>
-                  <a:cs typeface="Ramabhadra" panose="02000600000000000000" pitchFamily="2" charset="0"/>
-                </a:rPr>
-                <a:t>కొండలలో లోయలలో</a:t>
+                <a:rPr lang="te-IN" sz="2200" dirty="0">
+                  <a:latin typeface="Ramabhadra" panose="02000600000000000000" pitchFamily="2" charset="0"/>
+                  <a:cs typeface="Ramabhadra" panose="02000600000000000000" pitchFamily="2" charset="0"/>
+                </a:rPr>
+                <a:t>యేసే దేవుడని దేవుని కుమారుడని (</a:t>
+              </a:r>
+              <a:r>
+                <a:rPr lang="en-IN" sz="2200" dirty="0">
+                  <a:latin typeface="Ramabhadra" panose="02000600000000000000" pitchFamily="2" charset="0"/>
+                  <a:cs typeface="Ramabhadra" panose="02000600000000000000" pitchFamily="2" charset="0"/>
+                </a:rPr>
+                <a:t>2</a:t>
+              </a:r>
+              <a:r>
+                <a:rPr lang="te-IN" sz="2200" dirty="0">
+                  <a:latin typeface="Ramabhadra" panose="02000600000000000000" pitchFamily="2" charset="0"/>
+                  <a:cs typeface="Ramabhadra" panose="02000600000000000000" pitchFamily="2" charset="0"/>
+                </a:rPr>
+                <a:t>)</a:t>
               </a:r>
             </a:p>
             <a:p>
@@ -3872,42 +3923,54 @@
                 <a:defRPr/>
               </a:pPr>
               <a:r>
-                <a:rPr lang="te-IN" sz="2400" dirty="0">
-                  <a:latin typeface="Ramabhadra" panose="02000600000000000000" pitchFamily="2" charset="0"/>
-                  <a:cs typeface="Ramabhadra" panose="02000600000000000000" pitchFamily="2" charset="0"/>
-                </a:rPr>
-                <a:t>అడవులలో ఎడారులలో (2)</a:t>
-              </a:r>
+                <a:rPr lang="te-IN" sz="2200" dirty="0">
+                  <a:latin typeface="Ramabhadra" panose="02000600000000000000" pitchFamily="2" charset="0"/>
+                  <a:cs typeface="Ramabhadra" panose="02000600000000000000" pitchFamily="2" charset="0"/>
+                </a:rPr>
+                <a:t>ఆయనే పూజ్యడని –</a:t>
+              </a:r>
+              <a:endParaRPr lang="en-IN" sz="2200" dirty="0">
+                <a:latin typeface="Ramabhadra" panose="02000600000000000000" pitchFamily="2" charset="0"/>
+                <a:cs typeface="Ramabhadra" panose="02000600000000000000" pitchFamily="2" charset="0"/>
+              </a:endParaRPr>
             </a:p>
             <a:p>
               <a:pPr defTabSz="439781">
                 <a:defRPr/>
               </a:pPr>
               <a:r>
-                <a:rPr lang="te-IN" sz="2400" dirty="0">
-                  <a:latin typeface="Ramabhadra" panose="02000600000000000000" pitchFamily="2" charset="0"/>
-                  <a:cs typeface="Ramabhadra" panose="02000600000000000000" pitchFamily="2" charset="0"/>
-                </a:rPr>
-                <a:t>నన్ను గమనించినావా</a:t>
-              </a:r>
+                <a:rPr lang="te-IN" sz="2200" dirty="0">
+                  <a:latin typeface="Ramabhadra" panose="02000600000000000000" pitchFamily="2" charset="0"/>
+                  <a:cs typeface="Ramabhadra" panose="02000600000000000000" pitchFamily="2" charset="0"/>
+                </a:rPr>
+                <a:t>ప్రభువుకు గానం చేయుదమా</a:t>
+              </a:r>
+              <a:endParaRPr lang="en-US" sz="2200" dirty="0">
+                <a:latin typeface="Ramabhadra" panose="02000600000000000000" pitchFamily="2" charset="0"/>
+                <a:cs typeface="Ramabhadra" panose="02000600000000000000" pitchFamily="2" charset="0"/>
+              </a:endParaRPr>
             </a:p>
             <a:p>
               <a:pPr defTabSz="439781">
                 <a:defRPr/>
               </a:pPr>
               <a:r>
-                <a:rPr lang="te-IN" sz="2400" dirty="0">
-                  <a:latin typeface="Ramabhadra" panose="02000600000000000000" pitchFamily="2" charset="0"/>
-                  <a:cs typeface="Ramabhadra" panose="02000600000000000000" pitchFamily="2" charset="0"/>
-                </a:rPr>
-                <a:t>నన్ను నడిపించినావా (2)</a:t>
-              </a:r>
+                <a:rPr lang="te-IN" sz="2200" dirty="0">
+                  <a:latin typeface="Ramabhadra" panose="02000600000000000000" pitchFamily="2" charset="0"/>
+                  <a:cs typeface="Ramabhadra" panose="02000600000000000000" pitchFamily="2" charset="0"/>
+                </a:rPr>
+                <a:t>నూతన గానము చేయుదమా</a:t>
+              </a:r>
+              <a:endParaRPr lang="en-US" sz="2200" dirty="0">
+                <a:latin typeface="Ramabhadra" panose="02000600000000000000" pitchFamily="2" charset="0"/>
+                <a:cs typeface="Ramabhadra" panose="02000600000000000000" pitchFamily="2" charset="0"/>
+              </a:endParaRPr>
             </a:p>
             <a:p>
               <a:pPr defTabSz="439781">
                 <a:defRPr/>
               </a:pPr>
-              <a:endParaRPr lang="te-IN" sz="2400" dirty="0">
+              <a:endParaRPr lang="en-US" sz="2200" dirty="0">
                 <a:latin typeface="Ramabhadra" panose="02000600000000000000" pitchFamily="2" charset="0"/>
                 <a:cs typeface="Ramabhadra" panose="02000600000000000000" pitchFamily="2" charset="0"/>
               </a:endParaRPr>
@@ -3917,47 +3980,91 @@
                 <a:defRPr/>
               </a:pPr>
               <a:r>
-                <a:rPr lang="te-IN" sz="2400" dirty="0">
-                  <a:latin typeface="Ramabhadra" panose="02000600000000000000" pitchFamily="2" charset="0"/>
-                  <a:cs typeface="Ramabhadra" panose="02000600000000000000" pitchFamily="2" charset="0"/>
-                </a:rPr>
-                <a:t>ఆత్మీయులే నన్ను అవమానించగా</a:t>
-              </a:r>
+                <a:rPr lang="te-IN" sz="2200" dirty="0">
+                  <a:latin typeface="Ramabhadra" panose="02000600000000000000" pitchFamily="2" charset="0"/>
+                  <a:cs typeface="Ramabhadra" panose="02000600000000000000" pitchFamily="2" charset="0"/>
+                </a:rPr>
+                <a:t>స్వర మండలముతో సితార సునాదముతో</a:t>
+              </a:r>
+              <a:endParaRPr lang="en-US" sz="2200" dirty="0">
+                <a:latin typeface="Ramabhadra" panose="02000600000000000000" pitchFamily="2" charset="0"/>
+                <a:cs typeface="Ramabhadra" panose="02000600000000000000" pitchFamily="2" charset="0"/>
+              </a:endParaRPr>
             </a:p>
             <a:p>
               <a:pPr defTabSz="439781">
                 <a:defRPr/>
               </a:pPr>
               <a:r>
-                <a:rPr lang="te-IN" sz="2400" dirty="0">
-                  <a:latin typeface="Ramabhadra" panose="02000600000000000000" pitchFamily="2" charset="0"/>
-                  <a:cs typeface="Ramabhadra" panose="02000600000000000000" pitchFamily="2" charset="0"/>
-                </a:rPr>
-                <a:t>అన్యులు నన్ను అపహసించగా (2)</a:t>
-              </a:r>
+                <a:rPr lang="te-IN" sz="2200" dirty="0">
+                  <a:latin typeface="Ramabhadra" panose="02000600000000000000" pitchFamily="2" charset="0"/>
+                  <a:cs typeface="Ramabhadra" panose="02000600000000000000" pitchFamily="2" charset="0"/>
+                </a:rPr>
+                <a:t>తంతి వాయిద్యములతో పిల్లన గ్రోవులతో</a:t>
+              </a:r>
+              <a:endParaRPr lang="en-US" sz="2200" dirty="0">
+                <a:latin typeface="Ramabhadra" panose="02000600000000000000" pitchFamily="2" charset="0"/>
+                <a:cs typeface="Ramabhadra" panose="02000600000000000000" pitchFamily="2" charset="0"/>
+              </a:endParaRPr>
             </a:p>
             <a:p>
               <a:pPr defTabSz="439781">
                 <a:defRPr/>
               </a:pPr>
               <a:r>
-                <a:rPr lang="te-IN" sz="2400" dirty="0">
-                  <a:latin typeface="Ramabhadra" panose="02000600000000000000" pitchFamily="2" charset="0"/>
-                  <a:cs typeface="Ramabhadra" panose="02000600000000000000" pitchFamily="2" charset="0"/>
-                </a:rPr>
-                <a:t>అండ నీవైతివయ్యా</a:t>
-              </a:r>
+                <a:rPr lang="te-IN" sz="2200" dirty="0">
+                  <a:latin typeface="Ramabhadra" panose="02000600000000000000" pitchFamily="2" charset="0"/>
+                  <a:cs typeface="Ramabhadra" panose="02000600000000000000" pitchFamily="2" charset="0"/>
+                </a:rPr>
+                <a:t>మ్రోగుతాంబూలతో బూరల నాదముతో</a:t>
+              </a:r>
+              <a:endParaRPr lang="en-IN" sz="2200" dirty="0">
+                <a:latin typeface="Ramabhadra" panose="02000600000000000000" pitchFamily="2" charset="0"/>
+                <a:cs typeface="Ramabhadra" panose="02000600000000000000" pitchFamily="2" charset="0"/>
+              </a:endParaRPr>
             </a:p>
             <a:p>
               <a:pPr defTabSz="439781">
                 <a:defRPr/>
               </a:pPr>
               <a:r>
-                <a:rPr lang="te-IN" sz="2400" dirty="0">
-                  <a:latin typeface="Ramabhadra" panose="02000600000000000000" pitchFamily="2" charset="0"/>
-                  <a:cs typeface="Ramabhadra" panose="02000600000000000000" pitchFamily="2" charset="0"/>
-                </a:rPr>
-                <a:t>నా.. కొండ నీవే యేసయ్యా (2)</a:t>
+                <a:rPr lang="te-IN" sz="2200" dirty="0">
+                  <a:latin typeface="Ramabhadra" panose="02000600000000000000" pitchFamily="2" charset="0"/>
+                  <a:cs typeface="Ramabhadra" panose="02000600000000000000" pitchFamily="2" charset="0"/>
+                </a:rPr>
+                <a:t>గంభీర జయ ధ్వనులతో</a:t>
+              </a:r>
+              <a:endParaRPr lang="en-IN" sz="2200" dirty="0">
+                <a:latin typeface="Ramabhadra" panose="02000600000000000000" pitchFamily="2" charset="0"/>
+                <a:cs typeface="Ramabhadra" panose="02000600000000000000" pitchFamily="2" charset="0"/>
+              </a:endParaRPr>
+            </a:p>
+            <a:p>
+              <a:pPr defTabSz="439781">
+                <a:defRPr/>
+              </a:pPr>
+              <a:r>
+                <a:rPr lang="te-IN" sz="2200" dirty="0">
+                  <a:latin typeface="Ramabhadra" panose="02000600000000000000" pitchFamily="2" charset="0"/>
+                  <a:cs typeface="Ramabhadra" panose="02000600000000000000" pitchFamily="2" charset="0"/>
+                </a:rPr>
+                <a:t>ప్రభువుకు గానము చేయుదమా</a:t>
+              </a:r>
+              <a:endParaRPr lang="en-US" sz="2200" dirty="0">
+                <a:latin typeface="Ramabhadra" panose="02000600000000000000" pitchFamily="2" charset="0"/>
+                <a:cs typeface="Ramabhadra" panose="02000600000000000000" pitchFamily="2" charset="0"/>
+              </a:endParaRPr>
+            </a:p>
+            <a:p>
+              <a:pPr defTabSz="439781">
+                <a:defRPr/>
+              </a:pPr>
+              <a:r>
+                <a:rPr lang="te-IN" sz="2200" dirty="0">
+                  <a:latin typeface="Ramabhadra" panose="02000600000000000000" pitchFamily="2" charset="0"/>
+                  <a:cs typeface="Ramabhadra" panose="02000600000000000000" pitchFamily="2" charset="0"/>
+                </a:rPr>
+                <a:t>నూతన గానము చేయుదమా</a:t>
               </a:r>
             </a:p>
           </p:txBody>
@@ -4040,9 +4147,9 @@
         <p:grpSpPr>
           <a:xfrm>
             <a:off x="5104338" y="182031"/>
-            <a:ext cx="4943469" cy="6493935"/>
+            <a:ext cx="4932894" cy="6493935"/>
             <a:chOff x="160868" y="182032"/>
-            <a:chExt cx="4943469" cy="6493935"/>
+            <a:chExt cx="4932894" cy="6493935"/>
           </a:xfrm>
         </p:grpSpPr>
         <p:sp>
@@ -4114,8 +4221,8 @@
           </p:nvSpPr>
           <p:spPr>
             <a:xfrm>
-              <a:off x="354536" y="716955"/>
-              <a:ext cx="4749801" cy="5909310"/>
+              <a:off x="343961" y="799864"/>
+              <a:ext cx="4749801" cy="5693866"/>
             </a:xfrm>
             <a:prstGeom prst="rect">
               <a:avLst/>
@@ -4132,11 +4239,18 @@
                 <a:defRPr/>
               </a:pPr>
               <a:r>
-                <a:rPr lang="te-IN" sz="2100" dirty="0">
-                  <a:latin typeface="Ramabhadra" panose="02000600000000000000" pitchFamily="2" charset="0"/>
-                  <a:cs typeface="Ramabhadra" panose="02000600000000000000" pitchFamily="2" charset="0"/>
-                </a:rPr>
-                <a:t>వందనం త్రియేకుడా - ఘన మహిమ నీకెగా (2)</a:t>
+                <a:rPr lang="te-IN" sz="2600" dirty="0">
+                  <a:latin typeface="Ramabhadra" panose="02000600000000000000" pitchFamily="2" charset="0"/>
+                  <a:cs typeface="Ramabhadra" panose="02000600000000000000" pitchFamily="2" charset="0"/>
+                </a:rPr>
+                <a:t>తేజోమయా యేసయ్యా</a:t>
+              </a:r>
+              <a:r>
+                <a:rPr lang="en-US" sz="2600" dirty="0">
+                  <a:latin typeface="Ramabhadra" panose="02000600000000000000" pitchFamily="2" charset="0"/>
+                  <a:cs typeface="Ramabhadra" panose="02000600000000000000" pitchFamily="2" charset="0"/>
+                </a:rPr>
+                <a:t>-</a:t>
               </a:r>
             </a:p>
             <a:p>
@@ -4144,30 +4258,45 @@
                 <a:defRPr/>
               </a:pPr>
               <a:r>
-                <a:rPr lang="te-IN" sz="2100" dirty="0">
-                  <a:latin typeface="Ramabhadra" panose="02000600000000000000" pitchFamily="2" charset="0"/>
-                  <a:cs typeface="Ramabhadra" panose="02000600000000000000" pitchFamily="2" charset="0"/>
-                </a:rPr>
-                <a:t>ఏ పాటి వాడను యేసయ్యా, నన్ను కోరుకొంటివే</a:t>
-              </a:r>
+                <a:rPr lang="te-IN" sz="2600" dirty="0">
+                  <a:latin typeface="Ramabhadra" panose="02000600000000000000" pitchFamily="2" charset="0"/>
+                  <a:cs typeface="Ramabhadra" panose="02000600000000000000" pitchFamily="2" charset="0"/>
+                </a:rPr>
+                <a:t>స్తుతి పాత్రుడవు నీవయ్యా</a:t>
+              </a:r>
+              <a:endParaRPr lang="en-US" sz="2600" dirty="0">
+                <a:latin typeface="Ramabhadra" panose="02000600000000000000" pitchFamily="2" charset="0"/>
+                <a:cs typeface="Ramabhadra" panose="02000600000000000000" pitchFamily="2" charset="0"/>
+              </a:endParaRPr>
             </a:p>
             <a:p>
               <a:pPr defTabSz="439781">
                 <a:defRPr/>
               </a:pPr>
               <a:r>
-                <a:rPr lang="te-IN" sz="2100" dirty="0">
-                  <a:latin typeface="Ramabhadra" panose="02000600000000000000" pitchFamily="2" charset="0"/>
-                  <a:cs typeface="Ramabhadra" panose="02000600000000000000" pitchFamily="2" charset="0"/>
-                </a:rPr>
-                <a:t>ఏ పాటి దానను యేసయ్యా, నన్ను కోరుకొంటివే</a:t>
-              </a:r>
+                <a:rPr lang="te-IN" sz="2600" dirty="0">
+                  <a:latin typeface="Ramabhadra" panose="02000600000000000000" pitchFamily="2" charset="0"/>
+                  <a:cs typeface="Ramabhadra" panose="02000600000000000000" pitchFamily="2" charset="0"/>
+                </a:rPr>
+                <a:t>మహిమ ఘనత ప్రభావములు</a:t>
+              </a:r>
+              <a:endParaRPr lang="en-US" sz="2600" dirty="0">
+                <a:latin typeface="Ramabhadra" panose="02000600000000000000" pitchFamily="2" charset="0"/>
+                <a:cs typeface="Ramabhadra" panose="02000600000000000000" pitchFamily="2" charset="0"/>
+              </a:endParaRPr>
             </a:p>
             <a:p>
               <a:pPr defTabSz="439781">
                 <a:defRPr/>
               </a:pPr>
-              <a:endParaRPr lang="te-IN" sz="2100" dirty="0">
+              <a:r>
+                <a:rPr lang="te-IN" sz="2600" dirty="0">
+                  <a:latin typeface="Ramabhadra" panose="02000600000000000000" pitchFamily="2" charset="0"/>
+                  <a:cs typeface="Ramabhadra" panose="02000600000000000000" pitchFamily="2" charset="0"/>
+                </a:rPr>
+                <a:t>సమస్తము నీకేనయా</a:t>
+              </a:r>
+              <a:endParaRPr lang="en-US" sz="2600" dirty="0">
                 <a:latin typeface="Ramabhadra" panose="02000600000000000000" pitchFamily="2" charset="0"/>
                 <a:cs typeface="Ramabhadra" panose="02000600000000000000" pitchFamily="2" charset="0"/>
               </a:endParaRPr>
@@ -4176,162 +4305,143 @@
               <a:pPr defTabSz="439781">
                 <a:defRPr/>
               </a:pPr>
-              <a:r>
-                <a:rPr lang="te-IN" sz="2100" dirty="0">
-                  <a:latin typeface="Ramabhadra" panose="02000600000000000000" pitchFamily="2" charset="0"/>
-                  <a:cs typeface="Ramabhadra" panose="02000600000000000000" pitchFamily="2" charset="0"/>
-                </a:rPr>
-                <a:t>ఈవులెన్నెన్నో దయచేసితివి</a:t>
-              </a:r>
+              <a:endParaRPr lang="en-US" sz="2600" dirty="0">
+                <a:latin typeface="Ramabhadra" panose="02000600000000000000" pitchFamily="2" charset="0"/>
+                <a:cs typeface="Ramabhadra" panose="02000600000000000000" pitchFamily="2" charset="0"/>
+              </a:endParaRPr>
             </a:p>
             <a:p>
               <a:pPr defTabSz="439781">
                 <a:defRPr/>
               </a:pPr>
               <a:r>
-                <a:rPr lang="te-IN" sz="2100" dirty="0">
-                  <a:latin typeface="Ramabhadra" panose="02000600000000000000" pitchFamily="2" charset="0"/>
-                  <a:cs typeface="Ramabhadra" panose="02000600000000000000" pitchFamily="2" charset="0"/>
-                </a:rPr>
-                <a:t>నీ స్నేహమే నాకు స్థిరపరచితివి (2)</a:t>
-              </a:r>
+                <a:rPr lang="te-IN" sz="2600" dirty="0">
+                  <a:latin typeface="Ramabhadra" panose="02000600000000000000" pitchFamily="2" charset="0"/>
+                  <a:cs typeface="Ramabhadra" panose="02000600000000000000" pitchFamily="2" charset="0"/>
+                </a:rPr>
+                <a:t>నిజమైన దేవా నీవంటివాడు లేడు</a:t>
+              </a:r>
+              <a:endParaRPr lang="en-US" sz="2600" dirty="0">
+                <a:latin typeface="Ramabhadra" panose="02000600000000000000" pitchFamily="2" charset="0"/>
+                <a:cs typeface="Ramabhadra" panose="02000600000000000000" pitchFamily="2" charset="0"/>
+              </a:endParaRPr>
             </a:p>
             <a:p>
               <a:pPr defTabSz="439781">
                 <a:defRPr/>
               </a:pPr>
               <a:r>
-                <a:rPr lang="te-IN" sz="2100" dirty="0">
-                  <a:latin typeface="Ramabhadra" panose="02000600000000000000" pitchFamily="2" charset="0"/>
-                  <a:cs typeface="Ramabhadra" panose="02000600000000000000" pitchFamily="2" charset="0"/>
-                </a:rPr>
-                <a:t>నీ పాద సేవ చేయుట కన్నా</a:t>
-              </a:r>
+                <a:rPr lang="te-IN" sz="2600" dirty="0">
+                  <a:latin typeface="Ramabhadra" panose="02000600000000000000" pitchFamily="2" charset="0"/>
+                  <a:cs typeface="Ramabhadra" panose="02000600000000000000" pitchFamily="2" charset="0"/>
+                </a:rPr>
+                <a:t>మహాత్మ్యము గల నిన్ను పోలినవాడెవడు</a:t>
+              </a:r>
+              <a:endParaRPr lang="en-US" sz="2600" dirty="0">
+                <a:latin typeface="Ramabhadra" panose="02000600000000000000" pitchFamily="2" charset="0"/>
+                <a:cs typeface="Ramabhadra" panose="02000600000000000000" pitchFamily="2" charset="0"/>
+              </a:endParaRPr>
             </a:p>
             <a:p>
               <a:pPr defTabSz="439781">
                 <a:defRPr/>
               </a:pPr>
               <a:r>
-                <a:rPr lang="te-IN" sz="2100" dirty="0">
-                  <a:latin typeface="Ramabhadra" panose="02000600000000000000" pitchFamily="2" charset="0"/>
-                  <a:cs typeface="Ramabhadra" panose="02000600000000000000" pitchFamily="2" charset="0"/>
-                </a:rPr>
-                <a:t>విలువైన భాగ్యం లేదు (2) నాకూ</a:t>
-              </a:r>
+                <a:rPr lang="te-IN" sz="2600" dirty="0">
+                  <a:latin typeface="Ramabhadra" panose="02000600000000000000" pitchFamily="2" charset="0"/>
+                  <a:cs typeface="Ramabhadra" panose="02000600000000000000" pitchFamily="2" charset="0"/>
+                </a:rPr>
+                <a:t>నీ నామము ఘనమైనదయా –</a:t>
+              </a:r>
+              <a:endParaRPr lang="en-US" sz="2600" dirty="0">
+                <a:latin typeface="Ramabhadra" panose="02000600000000000000" pitchFamily="2" charset="0"/>
+                <a:cs typeface="Ramabhadra" panose="02000600000000000000" pitchFamily="2" charset="0"/>
+              </a:endParaRPr>
             </a:p>
             <a:p>
               <a:pPr defTabSz="439781">
                 <a:defRPr/>
               </a:pPr>
-              <a:endParaRPr lang="te-IN" sz="2100" dirty="0">
+              <a:r>
+                <a:rPr lang="te-IN" sz="2600" dirty="0">
+                  <a:latin typeface="Ramabhadra" panose="02000600000000000000" pitchFamily="2" charset="0"/>
+                  <a:cs typeface="Ramabhadra" panose="02000600000000000000" pitchFamily="2" charset="0"/>
+                </a:rPr>
+                <a:t>నరులు నీకు భయపడెదరయా</a:t>
+              </a:r>
+              <a:endParaRPr lang="en-US" sz="2600" dirty="0">
                 <a:latin typeface="Ramabhadra" panose="02000600000000000000" pitchFamily="2" charset="0"/>
                 <a:cs typeface="Ramabhadra" panose="02000600000000000000" pitchFamily="2" charset="0"/>
               </a:endParaRPr>
             </a:p>
             <a:p>
+              <a:pPr marL="457200" indent="-457200" defTabSz="439781">
+                <a:buAutoNum type="arabicPeriod"/>
+                <a:defRPr/>
+              </a:pPr>
+              <a:endParaRPr lang="en-US" sz="2600" dirty="0">
+                <a:latin typeface="Ramabhadra" panose="02000600000000000000" pitchFamily="2" charset="0"/>
+                <a:cs typeface="Ramabhadra" panose="02000600000000000000" pitchFamily="2" charset="0"/>
+              </a:endParaRPr>
+            </a:p>
+            <a:p>
               <a:pPr defTabSz="439781">
                 <a:defRPr/>
               </a:pPr>
               <a:r>
-                <a:rPr lang="te-IN" sz="2100" dirty="0">
-                  <a:latin typeface="Ramabhadra" panose="02000600000000000000" pitchFamily="2" charset="0"/>
-                  <a:cs typeface="Ramabhadra" panose="02000600000000000000" pitchFamily="2" charset="0"/>
-                </a:rPr>
-                <a:t>అవసరతలు ఏవైన తీర్చెడి</a:t>
-              </a:r>
+                <a:rPr lang="te-IN" sz="2600" dirty="0">
+                  <a:latin typeface="Ramabhadra" panose="02000600000000000000" pitchFamily="2" charset="0"/>
+                  <a:cs typeface="Ramabhadra" panose="02000600000000000000" pitchFamily="2" charset="0"/>
+                </a:rPr>
+                <a:t>జనములకు రాజా జీవముగలిగిన నాథా</a:t>
+              </a:r>
+              <a:endParaRPr lang="en-US" sz="2600" dirty="0">
+                <a:latin typeface="Ramabhadra" panose="02000600000000000000" pitchFamily="2" charset="0"/>
+                <a:cs typeface="Ramabhadra" panose="02000600000000000000" pitchFamily="2" charset="0"/>
+              </a:endParaRPr>
             </a:p>
             <a:p>
               <a:pPr defTabSz="439781">
                 <a:defRPr/>
               </a:pPr>
               <a:r>
-                <a:rPr lang="te-IN" sz="2100" dirty="0">
-                  <a:latin typeface="Ramabhadra" panose="02000600000000000000" pitchFamily="2" charset="0"/>
-                  <a:cs typeface="Ramabhadra" panose="02000600000000000000" pitchFamily="2" charset="0"/>
-                </a:rPr>
-                <a:t>యెహోవా యిరే నీవే (2)</a:t>
-              </a:r>
+                <a:rPr lang="te-IN" sz="2600" dirty="0">
+                  <a:latin typeface="Ramabhadra" panose="02000600000000000000" pitchFamily="2" charset="0"/>
+                  <a:cs typeface="Ramabhadra" panose="02000600000000000000" pitchFamily="2" charset="0"/>
+                </a:rPr>
+                <a:t>సమస్తము నిర్మించినవాడవు నీవెగదా</a:t>
+              </a:r>
+              <a:endParaRPr lang="en-US" sz="2600" dirty="0">
+                <a:latin typeface="Ramabhadra" panose="02000600000000000000" pitchFamily="2" charset="0"/>
+                <a:cs typeface="Ramabhadra" panose="02000600000000000000" pitchFamily="2" charset="0"/>
+              </a:endParaRPr>
             </a:p>
             <a:p>
               <a:pPr defTabSz="439781">
                 <a:defRPr/>
               </a:pPr>
               <a:r>
-                <a:rPr lang="te-IN" sz="2100" dirty="0">
-                  <a:latin typeface="Ramabhadra" panose="02000600000000000000" pitchFamily="2" charset="0"/>
-                  <a:cs typeface="Ramabhadra" panose="02000600000000000000" pitchFamily="2" charset="0"/>
-                </a:rPr>
-                <a:t>నా కోరికంతా ఏ క్షణమైనా</a:t>
-              </a:r>
+                <a:rPr lang="te-IN" sz="2600" dirty="0">
+                  <a:latin typeface="Ramabhadra" panose="02000600000000000000" pitchFamily="2" charset="0"/>
+                  <a:cs typeface="Ramabhadra" panose="02000600000000000000" pitchFamily="2" charset="0"/>
+                </a:rPr>
+                <a:t>నీ ఉగ్రత తాళలేమయా –</a:t>
+              </a:r>
+              <a:endParaRPr lang="en-US" sz="2600" dirty="0">
+                <a:latin typeface="Ramabhadra" panose="02000600000000000000" pitchFamily="2" charset="0"/>
+                <a:cs typeface="Ramabhadra" panose="02000600000000000000" pitchFamily="2" charset="0"/>
+              </a:endParaRPr>
             </a:p>
             <a:p>
               <a:pPr defTabSz="439781">
                 <a:defRPr/>
               </a:pPr>
               <a:r>
-                <a:rPr lang="te-IN" sz="2100" dirty="0">
-                  <a:latin typeface="Ramabhadra" panose="02000600000000000000" pitchFamily="2" charset="0"/>
-                  <a:cs typeface="Ramabhadra" panose="02000600000000000000" pitchFamily="2" charset="0"/>
-                </a:rPr>
-                <a:t>నీవేగా నా యేసూ (2) ఆమెన్</a:t>
-              </a:r>
-            </a:p>
-            <a:p>
-              <a:pPr defTabSz="439781">
-                <a:defRPr/>
-              </a:pPr>
-              <a:endParaRPr lang="te-IN" sz="2100" dirty="0">
-                <a:latin typeface="Ramabhadra" panose="02000600000000000000" pitchFamily="2" charset="0"/>
-                <a:cs typeface="Ramabhadra" panose="02000600000000000000" pitchFamily="2" charset="0"/>
-              </a:endParaRPr>
-            </a:p>
-            <a:p>
-              <a:pPr defTabSz="439781">
-                <a:defRPr/>
-              </a:pPr>
-              <a:r>
-                <a:rPr lang="te-IN" sz="2100" dirty="0">
-                  <a:latin typeface="Ramabhadra" panose="02000600000000000000" pitchFamily="2" charset="0"/>
-                  <a:cs typeface="Ramabhadra" panose="02000600000000000000" pitchFamily="2" charset="0"/>
-                </a:rPr>
-                <a:t>మా సర్వమంతా నీవే నయ్యా</a:t>
-              </a:r>
-            </a:p>
-            <a:p>
-              <a:pPr defTabSz="439781">
-                <a:defRPr/>
-              </a:pPr>
-              <a:r>
-                <a:rPr lang="te-IN" sz="2100" dirty="0">
-                  <a:latin typeface="Ramabhadra" panose="02000600000000000000" pitchFamily="2" charset="0"/>
-                  <a:cs typeface="Ramabhadra" panose="02000600000000000000" pitchFamily="2" charset="0"/>
-                </a:rPr>
-                <a:t>నీకే గా అంకితం చేసితిమీ (2)</a:t>
-              </a:r>
-            </a:p>
-            <a:p>
-              <a:pPr defTabSz="439781">
-                <a:defRPr/>
-              </a:pPr>
-              <a:r>
-                <a:rPr lang="te-IN" sz="2100" dirty="0">
-                  <a:latin typeface="Ramabhadra" panose="02000600000000000000" pitchFamily="2" charset="0"/>
-                  <a:cs typeface="Ramabhadra" panose="02000600000000000000" pitchFamily="2" charset="0"/>
-                </a:rPr>
-                <a:t>వేచియున్నాము సెలవిమ్ము దేవా</a:t>
-              </a:r>
-            </a:p>
-            <a:p>
-              <a:pPr defTabSz="439781">
-                <a:defRPr/>
-              </a:pPr>
-              <a:r>
-                <a:rPr lang="te-IN" sz="2100" dirty="0">
-                  <a:latin typeface="Ramabhadra" panose="02000600000000000000" pitchFamily="2" charset="0"/>
-                  <a:cs typeface="Ramabhadra" panose="02000600000000000000" pitchFamily="2" charset="0"/>
-                </a:rPr>
-                <a:t>నీ ఆజ్ఞ పాటించెదమూ (2) స్తోత్రం</a:t>
+                <a:rPr lang="te-IN" sz="2600" dirty="0">
+                  <a:latin typeface="Ramabhadra" panose="02000600000000000000" pitchFamily="2" charset="0"/>
+                  <a:cs typeface="Ramabhadra" panose="02000600000000000000" pitchFamily="2" charset="0"/>
+                </a:rPr>
+                <a:t>మేలు చేయగలవు నీవయా</a:t>
               </a:r>
             </a:p>
           </p:txBody>

--- a/songsTemplate.pptx
+++ b/songsTemplate.pptx
@@ -3834,7 +3834,7 @@
                   <a:latin typeface="Ramabhadra" panose="02000600000000000000" pitchFamily="2" charset="0"/>
                   <a:cs typeface="Ramabhadra" panose="02000600000000000000" pitchFamily="2" charset="0"/>
                 </a:rPr>
-                <a:t>మ్రోదములరగ సదమదని</a:t>
+                <a:t>మ్రోదములరగ సదమది</a:t>
               </a:r>
               <a:r>
                 <a:rPr lang="en-US" sz="2200" dirty="0">
@@ -3901,7 +3901,7 @@
                   <a:latin typeface="Ramabhadra" panose="02000600000000000000" pitchFamily="2" charset="0"/>
                   <a:cs typeface="Ramabhadra" panose="02000600000000000000" pitchFamily="2" charset="0"/>
                 </a:rPr>
-                <a:t>యేసే దేవుడని దేవుని కుమారుడని (</a:t>
+                <a:t>యేసే దేవుడని దేవుని కుమరుడని (</a:t>
               </a:r>
               <a:r>
                 <a:rPr lang="en-IN" sz="2200" dirty="0">
@@ -3927,7 +3927,7 @@
                   <a:latin typeface="Ramabhadra" panose="02000600000000000000" pitchFamily="2" charset="0"/>
                   <a:cs typeface="Ramabhadra" panose="02000600000000000000" pitchFamily="2" charset="0"/>
                 </a:rPr>
-                <a:t>ఆయనే పూజ్యడని –</a:t>
+                <a:t>ఆయనే పుజ్యుడని –</a:t>
               </a:r>
               <a:endParaRPr lang="en-IN" sz="2200" dirty="0">
                 <a:latin typeface="Ramabhadra" panose="02000600000000000000" pitchFamily="2" charset="0"/>
@@ -4016,7 +4016,7 @@
                   <a:latin typeface="Ramabhadra" panose="02000600000000000000" pitchFamily="2" charset="0"/>
                   <a:cs typeface="Ramabhadra" panose="02000600000000000000" pitchFamily="2" charset="0"/>
                 </a:rPr>
-                <a:t>మ్రోగుతాంబూలతో బూరల నాదముతో</a:t>
+                <a:t>మ్రోగుతాలంబులతో బూరల నాదముతో</a:t>
               </a:r>
               <a:endParaRPr lang="en-IN" sz="2200" dirty="0">
                 <a:latin typeface="Ramabhadra" panose="02000600000000000000" pitchFamily="2" charset="0"/>

--- a/songsTemplate.pptx
+++ b/songsTemplate.pptx
@@ -255,7 +255,7 @@
           <a:p>
             <a:fld id="{F1102B08-ED9E-409F-B95F-09CAA1DAF6E0}" type="datetimeFigureOut">
               <a:rPr lang="en-IN" smtClean="0"/>
-              <a:t>07-12-2024</a:t>
+              <a:t>14-12-2024</a:t>
             </a:fld>
             <a:endParaRPr lang="en-IN"/>
           </a:p>
@@ -425,7 +425,7 @@
           <a:p>
             <a:fld id="{F1102B08-ED9E-409F-B95F-09CAA1DAF6E0}" type="datetimeFigureOut">
               <a:rPr lang="en-IN" smtClean="0"/>
-              <a:t>07-12-2024</a:t>
+              <a:t>14-12-2024</a:t>
             </a:fld>
             <a:endParaRPr lang="en-IN"/>
           </a:p>
@@ -605,7 +605,7 @@
           <a:p>
             <a:fld id="{F1102B08-ED9E-409F-B95F-09CAA1DAF6E0}" type="datetimeFigureOut">
               <a:rPr lang="en-IN" smtClean="0"/>
-              <a:t>07-12-2024</a:t>
+              <a:t>14-12-2024</a:t>
             </a:fld>
             <a:endParaRPr lang="en-IN"/>
           </a:p>
@@ -775,7 +775,7 @@
           <a:p>
             <a:fld id="{F1102B08-ED9E-409F-B95F-09CAA1DAF6E0}" type="datetimeFigureOut">
               <a:rPr lang="en-IN" smtClean="0"/>
-              <a:t>07-12-2024</a:t>
+              <a:t>14-12-2024</a:t>
             </a:fld>
             <a:endParaRPr lang="en-IN"/>
           </a:p>
@@ -1019,7 +1019,7 @@
           <a:p>
             <a:fld id="{F1102B08-ED9E-409F-B95F-09CAA1DAF6E0}" type="datetimeFigureOut">
               <a:rPr lang="en-IN" smtClean="0"/>
-              <a:t>07-12-2024</a:t>
+              <a:t>14-12-2024</a:t>
             </a:fld>
             <a:endParaRPr lang="en-IN"/>
           </a:p>
@@ -1251,7 +1251,7 @@
           <a:p>
             <a:fld id="{F1102B08-ED9E-409F-B95F-09CAA1DAF6E0}" type="datetimeFigureOut">
               <a:rPr lang="en-IN" smtClean="0"/>
-              <a:t>07-12-2024</a:t>
+              <a:t>14-12-2024</a:t>
             </a:fld>
             <a:endParaRPr lang="en-IN"/>
           </a:p>
@@ -1618,7 +1618,7 @@
           <a:p>
             <a:fld id="{F1102B08-ED9E-409F-B95F-09CAA1DAF6E0}" type="datetimeFigureOut">
               <a:rPr lang="en-IN" smtClean="0"/>
-              <a:t>07-12-2024</a:t>
+              <a:t>14-12-2024</a:t>
             </a:fld>
             <a:endParaRPr lang="en-IN"/>
           </a:p>
@@ -1736,7 +1736,7 @@
           <a:p>
             <a:fld id="{F1102B08-ED9E-409F-B95F-09CAA1DAF6E0}" type="datetimeFigureOut">
               <a:rPr lang="en-IN" smtClean="0"/>
-              <a:t>07-12-2024</a:t>
+              <a:t>14-12-2024</a:t>
             </a:fld>
             <a:endParaRPr lang="en-IN"/>
           </a:p>
@@ -1831,7 +1831,7 @@
           <a:p>
             <a:fld id="{F1102B08-ED9E-409F-B95F-09CAA1DAF6E0}" type="datetimeFigureOut">
               <a:rPr lang="en-IN" smtClean="0"/>
-              <a:t>07-12-2024</a:t>
+              <a:t>14-12-2024</a:t>
             </a:fld>
             <a:endParaRPr lang="en-IN"/>
           </a:p>
@@ -2108,7 +2108,7 @@
           <a:p>
             <a:fld id="{F1102B08-ED9E-409F-B95F-09CAA1DAF6E0}" type="datetimeFigureOut">
               <a:rPr lang="en-IN" smtClean="0"/>
-              <a:t>07-12-2024</a:t>
+              <a:t>14-12-2024</a:t>
             </a:fld>
             <a:endParaRPr lang="en-IN"/>
           </a:p>
@@ -2365,7 +2365,7 @@
           <a:p>
             <a:fld id="{F1102B08-ED9E-409F-B95F-09CAA1DAF6E0}" type="datetimeFigureOut">
               <a:rPr lang="en-IN" smtClean="0"/>
-              <a:t>07-12-2024</a:t>
+              <a:t>14-12-2024</a:t>
             </a:fld>
             <a:endParaRPr lang="en-IN"/>
           </a:p>
@@ -2578,7 +2578,7 @@
           <a:p>
             <a:fld id="{F1102B08-ED9E-409F-B95F-09CAA1DAF6E0}" type="datetimeFigureOut">
               <a:rPr lang="en-IN" smtClean="0"/>
-              <a:t>07-12-2024</a:t>
+              <a:t>14-12-2024</a:t>
             </a:fld>
             <a:endParaRPr lang="en-IN"/>
           </a:p>
@@ -3073,7 +3073,7 @@
           <p:spPr>
             <a:xfrm>
               <a:off x="272140" y="309857"/>
-              <a:ext cx="4483140" cy="5847755"/>
+              <a:ext cx="4483140" cy="6001643"/>
             </a:xfrm>
             <a:prstGeom prst="rect">
               <a:avLst/>
@@ -3090,11 +3090,63 @@
                 <a:defRPr/>
               </a:pPr>
               <a:r>
-                <a:rPr lang="te-IN" sz="2200" dirty="0">
-                  <a:latin typeface="Ramabhadra" panose="02000600000000000000" pitchFamily="2" charset="0"/>
-                  <a:cs typeface="Ramabhadra" panose="02000600000000000000" pitchFamily="2" charset="0"/>
-                </a:rPr>
-                <a:t>మహాఘనుడవు మహోన్నతుడవు</a:t>
+                <a:rPr lang="te-IN" sz="2400" dirty="0">
+                  <a:latin typeface="Ramabhadra" panose="02000600000000000000" pitchFamily="2" charset="0"/>
+                  <a:cs typeface="Ramabhadra" panose="02000600000000000000" pitchFamily="2" charset="0"/>
+                </a:rPr>
+                <a:t>దేవా నా దేవా – నీవే నా కాపరి</a:t>
+              </a:r>
+              <a:br>
+                <a:rPr lang="te-IN" sz="2400" dirty="0">
+                  <a:latin typeface="Ramabhadra" panose="02000600000000000000" pitchFamily="2" charset="0"/>
+                  <a:cs typeface="Ramabhadra" panose="02000600000000000000" pitchFamily="2" charset="0"/>
+                </a:rPr>
+              </a:br>
+              <a:r>
+                <a:rPr lang="te-IN" sz="2400" dirty="0">
+                  <a:latin typeface="Ramabhadra" panose="02000600000000000000" pitchFamily="2" charset="0"/>
+                  <a:cs typeface="Ramabhadra" panose="02000600000000000000" pitchFamily="2" charset="0"/>
+                </a:rPr>
+                <a:t>నీ ప్రేమ నీ క్షమా – ఎంతో గొప్పది (2)</a:t>
+              </a:r>
+              <a:br>
+                <a:rPr lang="te-IN" sz="2400" dirty="0">
+                  <a:latin typeface="Ramabhadra" panose="02000600000000000000" pitchFamily="2" charset="0"/>
+                  <a:cs typeface="Ramabhadra" panose="02000600000000000000" pitchFamily="2" charset="0"/>
+                </a:rPr>
+              </a:br>
+              <a:r>
+                <a:rPr lang="te-IN" sz="2400" dirty="0">
+                  <a:latin typeface="Ramabhadra" panose="02000600000000000000" pitchFamily="2" charset="0"/>
+                  <a:cs typeface="Ramabhadra" panose="02000600000000000000" pitchFamily="2" charset="0"/>
+                </a:rPr>
+                <a:t>ఆరాధింతును హృదయాంతరంగములో</a:t>
+              </a:r>
+              <a:br>
+                <a:rPr lang="te-IN" sz="2400" dirty="0">
+                  <a:latin typeface="Ramabhadra" panose="02000600000000000000" pitchFamily="2" charset="0"/>
+                  <a:cs typeface="Ramabhadra" panose="02000600000000000000" pitchFamily="2" charset="0"/>
+                </a:rPr>
+              </a:br>
+              <a:r>
+                <a:rPr lang="te-IN" sz="2400" dirty="0">
+                  <a:latin typeface="Ramabhadra" panose="02000600000000000000" pitchFamily="2" charset="0"/>
+                  <a:cs typeface="Ramabhadra" panose="02000600000000000000" pitchFamily="2" charset="0"/>
+                </a:rPr>
+                <a:t>స్తుతించెదను నీ పాద సన్నిధిలో (2)</a:t>
+              </a:r>
+              <a:br>
+                <a:rPr lang="te-IN" sz="2400" dirty="0">
+                  <a:latin typeface="Ramabhadra" panose="02000600000000000000" pitchFamily="2" charset="0"/>
+                  <a:cs typeface="Ramabhadra" panose="02000600000000000000" pitchFamily="2" charset="0"/>
+                </a:rPr>
+              </a:br>
+              <a:r>
+                <a:rPr lang="te-IN" sz="2400" dirty="0">
+                  <a:latin typeface="Ramabhadra" panose="02000600000000000000" pitchFamily="2" charset="0"/>
+                  <a:cs typeface="Ramabhadra" panose="02000600000000000000" pitchFamily="2" charset="0"/>
+                </a:rPr>
+                <a:t>నీవే కదా దేవుడవు – (2)</a:t>
               </a:r>
             </a:p>
             <a:p>
@@ -3102,189 +3154,131 @@
                 <a:defRPr/>
               </a:pPr>
               <a:r>
-                <a:rPr lang="te-IN" sz="2200" dirty="0">
-                  <a:latin typeface="Ramabhadra" panose="02000600000000000000" pitchFamily="2" charset="0"/>
-                  <a:cs typeface="Ramabhadra" panose="02000600000000000000" pitchFamily="2" charset="0"/>
-                </a:rPr>
-                <a:t>పరిశుద్ధ స్థలములోనే నివసించువాడవు (2)</a:t>
+                <a:rPr lang="te-IN" sz="2400" dirty="0">
+                  <a:latin typeface="Ramabhadra" panose="02000600000000000000" pitchFamily="2" charset="0"/>
+                  <a:cs typeface="Ramabhadra" panose="02000600000000000000" pitchFamily="2" charset="0"/>
+                </a:rPr>
+                <a:t>దేవా యేసు దేవా (4)     </a:t>
               </a:r>
             </a:p>
             <a:p>
               <a:pPr defTabSz="439781">
                 <a:defRPr/>
               </a:pPr>
-              <a:r>
-                <a:rPr lang="te-IN" sz="2200" dirty="0">
-                  <a:latin typeface="Ramabhadra" panose="02000600000000000000" pitchFamily="2" charset="0"/>
-                  <a:cs typeface="Ramabhadra" panose="02000600000000000000" pitchFamily="2" charset="0"/>
-                </a:rPr>
-                <a:t>కృపా సత్య సంపూర్ణమై</a:t>
-              </a:r>
+              <a:endParaRPr lang="te-IN" sz="2400" dirty="0">
+                <a:latin typeface="Ramabhadra" panose="02000600000000000000" pitchFamily="2" charset="0"/>
+                <a:cs typeface="Ramabhadra" panose="02000600000000000000" pitchFamily="2" charset="0"/>
+              </a:endParaRPr>
             </a:p>
             <a:p>
               <a:pPr defTabSz="439781">
                 <a:defRPr/>
               </a:pPr>
               <a:r>
-                <a:rPr lang="te-IN" sz="2200" dirty="0">
-                  <a:latin typeface="Ramabhadra" panose="02000600000000000000" pitchFamily="2" charset="0"/>
-                  <a:cs typeface="Ramabhadra" panose="02000600000000000000" pitchFamily="2" charset="0"/>
-                </a:rPr>
-                <a:t>మా మధ్యలో నివసించుట న్యాయమా</a:t>
+                <a:rPr lang="te-IN" sz="2400" dirty="0">
+                  <a:latin typeface="Ramabhadra" panose="02000600000000000000" pitchFamily="2" charset="0"/>
+                  <a:cs typeface="Ramabhadra" panose="02000600000000000000" pitchFamily="2" charset="0"/>
+                </a:rPr>
+                <a:t>పాపము నుండి విడిపించినావు</a:t>
+              </a:r>
+              <a:br>
+                <a:rPr lang="te-IN" sz="2400" dirty="0">
+                  <a:latin typeface="Ramabhadra" panose="02000600000000000000" pitchFamily="2" charset="0"/>
+                  <a:cs typeface="Ramabhadra" panose="02000600000000000000" pitchFamily="2" charset="0"/>
+                </a:rPr>
+              </a:br>
+              <a:r>
+                <a:rPr lang="te-IN" sz="2400" dirty="0">
+                  <a:latin typeface="Ramabhadra" panose="02000600000000000000" pitchFamily="2" charset="0"/>
+                  <a:cs typeface="Ramabhadra" panose="02000600000000000000" pitchFamily="2" charset="0"/>
+                </a:rPr>
+                <a:t>పరిశుద్ధుని చేసి ప్రేమించినావు (2)</a:t>
+              </a:r>
+              <a:br>
+                <a:rPr lang="te-IN" sz="2400" dirty="0">
+                  <a:latin typeface="Ramabhadra" panose="02000600000000000000" pitchFamily="2" charset="0"/>
+                  <a:cs typeface="Ramabhadra" panose="02000600000000000000" pitchFamily="2" charset="0"/>
+                </a:rPr>
+              </a:br>
+              <a:r>
+                <a:rPr lang="te-IN" sz="2400" dirty="0">
+                  <a:latin typeface="Ramabhadra" panose="02000600000000000000" pitchFamily="2" charset="0"/>
+                  <a:cs typeface="Ramabhadra" panose="02000600000000000000" pitchFamily="2" charset="0"/>
+                </a:rPr>
+                <a:t>నీవే కదా దేవుడవు – (2)</a:t>
+              </a:r>
+              <a:br>
+                <a:rPr lang="te-IN" sz="2400" dirty="0">
+                  <a:latin typeface="Ramabhadra" panose="02000600000000000000" pitchFamily="2" charset="0"/>
+                  <a:cs typeface="Ramabhadra" panose="02000600000000000000" pitchFamily="2" charset="0"/>
+                </a:rPr>
+              </a:br>
+              <a:r>
+                <a:rPr lang="te-IN" sz="2400" dirty="0">
+                  <a:latin typeface="Ramabhadra" panose="02000600000000000000" pitchFamily="2" charset="0"/>
+                  <a:cs typeface="Ramabhadra" panose="02000600000000000000" pitchFamily="2" charset="0"/>
+                </a:rPr>
+                <a:t>దేవా యేసు దేవా (4)       </a:t>
               </a:r>
             </a:p>
             <a:p>
               <a:pPr defTabSz="439781">
                 <a:defRPr/>
               </a:pPr>
-              <a:r>
-                <a:rPr lang="te-IN" sz="2200" dirty="0">
-                  <a:latin typeface="Ramabhadra" panose="02000600000000000000" pitchFamily="2" charset="0"/>
-                  <a:cs typeface="Ramabhadra" panose="02000600000000000000" pitchFamily="2" charset="0"/>
-                </a:rPr>
-                <a:t>నను పరిశుద్ధపరచుటే నీ ధర్మమా (2)</a:t>
-              </a:r>
+              <a:endParaRPr lang="te-IN" sz="2400" dirty="0">
+                <a:latin typeface="Ramabhadra" panose="02000600000000000000" pitchFamily="2" charset="0"/>
+                <a:cs typeface="Ramabhadra" panose="02000600000000000000" pitchFamily="2" charset="0"/>
+              </a:endParaRPr>
             </a:p>
             <a:p>
               <a:pPr defTabSz="439781">
                 <a:defRPr/>
               </a:pPr>
-              <a:endParaRPr lang="te-IN" sz="2200" dirty="0">
-                <a:latin typeface="Ramabhadra" panose="02000600000000000000" pitchFamily="2" charset="0"/>
-                <a:cs typeface="Ramabhadra" panose="02000600000000000000" pitchFamily="2" charset="0"/>
-              </a:endParaRPr>
-            </a:p>
-            <a:p>
-              <a:pPr defTabSz="439781">
-                <a:defRPr/>
-              </a:pPr>
-              <a:r>
-                <a:rPr lang="te-IN" sz="2200" dirty="0">
-                  <a:latin typeface="Ramabhadra" panose="02000600000000000000" pitchFamily="2" charset="0"/>
-                  <a:cs typeface="Ramabhadra" panose="02000600000000000000" pitchFamily="2" charset="0"/>
-                </a:rPr>
-                <a:t>వినయముగల వారిని</a:t>
-              </a:r>
-            </a:p>
-            <a:p>
-              <a:pPr defTabSz="439781">
-                <a:defRPr/>
-              </a:pPr>
-              <a:r>
-                <a:rPr lang="te-IN" sz="2200" dirty="0">
-                  <a:latin typeface="Ramabhadra" panose="02000600000000000000" pitchFamily="2" charset="0"/>
-                  <a:cs typeface="Ramabhadra" panose="02000600000000000000" pitchFamily="2" charset="0"/>
-                </a:rPr>
-                <a:t>తగిన సమయములో హెచ్చించువాడవని (2)</a:t>
-              </a:r>
-            </a:p>
-            <a:p>
-              <a:pPr defTabSz="439781">
-                <a:defRPr/>
-              </a:pPr>
-              <a:r>
-                <a:rPr lang="te-IN" sz="2200" dirty="0">
-                  <a:latin typeface="Ramabhadra" panose="02000600000000000000" pitchFamily="2" charset="0"/>
-                  <a:cs typeface="Ramabhadra" panose="02000600000000000000" pitchFamily="2" charset="0"/>
-                </a:rPr>
-                <a:t>నీవు వాడు పాత్రనై నేనుండుటకై</a:t>
-              </a:r>
-            </a:p>
-            <a:p>
-              <a:pPr defTabSz="439781">
-                <a:defRPr/>
-              </a:pPr>
-              <a:r>
-                <a:rPr lang="te-IN" sz="2200" dirty="0">
-                  <a:latin typeface="Ramabhadra" panose="02000600000000000000" pitchFamily="2" charset="0"/>
-                  <a:cs typeface="Ramabhadra" panose="02000600000000000000" pitchFamily="2" charset="0"/>
-                </a:rPr>
-                <a:t>నిలిచియుందును పవిత్రతతో (2)</a:t>
-              </a:r>
-            </a:p>
-            <a:p>
-              <a:pPr defTabSz="439781">
-                <a:defRPr/>
-              </a:pPr>
-              <a:r>
-                <a:rPr lang="te-IN" sz="2200" dirty="0">
-                  <a:latin typeface="Ramabhadra" panose="02000600000000000000" pitchFamily="2" charset="0"/>
-                  <a:cs typeface="Ramabhadra" panose="02000600000000000000" pitchFamily="2" charset="0"/>
-                </a:rPr>
-                <a:t>హల్లెలూయా యేసయ్యా నీకే స్తోత్రమయా (2)</a:t>
-              </a:r>
-              <a:endParaRPr lang="en-IN" sz="2200" dirty="0">
-                <a:latin typeface="Ramabhadra" panose="02000600000000000000" pitchFamily="2" charset="0"/>
-                <a:cs typeface="Ramabhadra" panose="02000600000000000000" pitchFamily="2" charset="0"/>
-              </a:endParaRPr>
-            </a:p>
-            <a:p>
-              <a:pPr defTabSz="439781">
-                <a:defRPr/>
-              </a:pPr>
-              <a:endParaRPr lang="te-IN" sz="2200" dirty="0">
-                <a:latin typeface="Ramabhadra" panose="02000600000000000000" pitchFamily="2" charset="0"/>
-                <a:cs typeface="Ramabhadra" panose="02000600000000000000" pitchFamily="2" charset="0"/>
-              </a:endParaRPr>
-            </a:p>
-            <a:p>
-              <a:pPr defTabSz="439781">
-                <a:defRPr/>
-              </a:pPr>
-              <a:r>
-                <a:rPr lang="te-IN" sz="2200" dirty="0">
-                  <a:latin typeface="Ramabhadra" panose="02000600000000000000" pitchFamily="2" charset="0"/>
-                  <a:cs typeface="Ramabhadra" panose="02000600000000000000" pitchFamily="2" charset="0"/>
-                </a:rPr>
-                <a:t>దీన మనస్సు గలవారికే</a:t>
-              </a:r>
-            </a:p>
-            <a:p>
-              <a:pPr defTabSz="439781">
-                <a:defRPr/>
-              </a:pPr>
-              <a:r>
-                <a:rPr lang="te-IN" sz="2200" dirty="0">
-                  <a:latin typeface="Ramabhadra" panose="02000600000000000000" pitchFamily="2" charset="0"/>
-                  <a:cs typeface="Ramabhadra" panose="02000600000000000000" pitchFamily="2" charset="0"/>
-                </a:rPr>
-                <a:t>సమృద్ధిగా కృపను దయచేయువాడవని (2)</a:t>
-              </a:r>
-            </a:p>
-            <a:p>
-              <a:pPr defTabSz="439781">
-                <a:defRPr/>
-              </a:pPr>
-              <a:r>
-                <a:rPr lang="te-IN" sz="2200" dirty="0">
-                  <a:latin typeface="Ramabhadra" panose="02000600000000000000" pitchFamily="2" charset="0"/>
-                  <a:cs typeface="Ramabhadra" panose="02000600000000000000" pitchFamily="2" charset="0"/>
-                </a:rPr>
-                <a:t>నీ సముఖములో సజీవ సాక్షినై</a:t>
-              </a:r>
-            </a:p>
-            <a:p>
-              <a:pPr defTabSz="439781">
-                <a:defRPr/>
-              </a:pPr>
-              <a:r>
-                <a:rPr lang="te-IN" sz="2200" dirty="0">
-                  <a:latin typeface="Ramabhadra" panose="02000600000000000000" pitchFamily="2" charset="0"/>
-                  <a:cs typeface="Ramabhadra" panose="02000600000000000000" pitchFamily="2" charset="0"/>
-                </a:rPr>
-                <a:t>కాపాడుకొందును మెళకువతో (2)</a:t>
-              </a:r>
-            </a:p>
-            <a:p>
-              <a:pPr defTabSz="439781">
-                <a:defRPr/>
-              </a:pPr>
-              <a:r>
-                <a:rPr lang="te-IN" sz="2200" dirty="0">
-                  <a:latin typeface="Ramabhadra" panose="02000600000000000000" pitchFamily="2" charset="0"/>
-                  <a:cs typeface="Ramabhadra" panose="02000600000000000000" pitchFamily="2" charset="0"/>
-                </a:rPr>
-                <a:t>హల్లెలూయా యేసయ్యా నీకే స్తోత్రమయా (2)</a:t>
+              <a:r>
+                <a:rPr lang="te-IN" sz="2400" dirty="0">
+                  <a:latin typeface="Ramabhadra" panose="02000600000000000000" pitchFamily="2" charset="0"/>
+                  <a:cs typeface="Ramabhadra" panose="02000600000000000000" pitchFamily="2" charset="0"/>
+                </a:rPr>
+                <a:t>పరిశుద్ధాత్మను నాలో నింపావు</a:t>
+              </a:r>
+              <a:br>
+                <a:rPr lang="te-IN" sz="2400" dirty="0">
+                  <a:latin typeface="Ramabhadra" panose="02000600000000000000" pitchFamily="2" charset="0"/>
+                  <a:cs typeface="Ramabhadra" panose="02000600000000000000" pitchFamily="2" charset="0"/>
+                </a:rPr>
+              </a:br>
+              <a:r>
+                <a:rPr lang="te-IN" sz="2400" dirty="0">
+                  <a:latin typeface="Ramabhadra" panose="02000600000000000000" pitchFamily="2" charset="0"/>
+                  <a:cs typeface="Ramabhadra" panose="02000600000000000000" pitchFamily="2" charset="0"/>
+                </a:rPr>
+                <a:t>మట్టి దేహమును మహిమతో నింపావు (2)</a:t>
+              </a:r>
+              <a:br>
+                <a:rPr lang="te-IN" sz="2400" dirty="0">
+                  <a:latin typeface="Ramabhadra" panose="02000600000000000000" pitchFamily="2" charset="0"/>
+                  <a:cs typeface="Ramabhadra" panose="02000600000000000000" pitchFamily="2" charset="0"/>
+                </a:rPr>
+              </a:br>
+              <a:r>
+                <a:rPr lang="te-IN" sz="2400" dirty="0">
+                  <a:latin typeface="Ramabhadra" panose="02000600000000000000" pitchFamily="2" charset="0"/>
+                  <a:cs typeface="Ramabhadra" panose="02000600000000000000" pitchFamily="2" charset="0"/>
+                </a:rPr>
+                <a:t>నీవే కదా దేవుడవు – (2)</a:t>
+              </a:r>
+              <a:br>
+                <a:rPr lang="te-IN" sz="2400" dirty="0">
+                  <a:latin typeface="Ramabhadra" panose="02000600000000000000" pitchFamily="2" charset="0"/>
+                  <a:cs typeface="Ramabhadra" panose="02000600000000000000" pitchFamily="2" charset="0"/>
+                </a:rPr>
+              </a:br>
+              <a:r>
+                <a:rPr lang="te-IN" sz="2400" dirty="0">
+                  <a:latin typeface="Ramabhadra" panose="02000600000000000000" pitchFamily="2" charset="0"/>
+                  <a:cs typeface="Ramabhadra" panose="02000600000000000000" pitchFamily="2" charset="0"/>
+                </a:rPr>
+                <a:t>దేవా యేసు దేవా (4)       </a:t>
               </a:r>
             </a:p>
           </p:txBody>
@@ -3367,9 +3361,9 @@
         <p:grpSpPr>
           <a:xfrm>
             <a:off x="5104338" y="182031"/>
-            <a:ext cx="4648200" cy="6493935"/>
+            <a:ext cx="5703362" cy="6493935"/>
             <a:chOff x="160868" y="182032"/>
-            <a:chExt cx="4648200" cy="6493935"/>
+            <a:chExt cx="5703362" cy="6493935"/>
           </a:xfrm>
         </p:grpSpPr>
         <p:sp>
@@ -3441,8 +3435,8 @@
           </p:nvSpPr>
           <p:spPr>
             <a:xfrm>
-              <a:off x="267762" y="838158"/>
-              <a:ext cx="4541306" cy="4493538"/>
+              <a:off x="249768" y="309858"/>
+              <a:ext cx="5614462" cy="5632311"/>
             </a:xfrm>
             <a:prstGeom prst="rect">
               <a:avLst/>
@@ -3456,157 +3450,250 @@
             <a:lstStyle/>
             <a:p>
               <a:r>
-                <a:rPr lang="te-IN" sz="2200" dirty="0">
-                  <a:latin typeface="Ramabhadra" panose="02000600000000000000" pitchFamily="2" charset="0"/>
-                  <a:cs typeface="Ramabhadra" panose="02000600000000000000" pitchFamily="2" charset="0"/>
-                </a:rPr>
-                <a:t>యేసు నీకృపలో - మము కాపాడుము</a:t>
-              </a:r>
-              <a:r>
-                <a:rPr lang="en-IN" sz="2200" dirty="0">
-                  <a:latin typeface="Ramabhadra" panose="02000600000000000000" pitchFamily="2" charset="0"/>
-                  <a:cs typeface="Ramabhadra" panose="02000600000000000000" pitchFamily="2" charset="0"/>
-                </a:rPr>
-                <a:t> </a:t>
-              </a:r>
-              <a:r>
-                <a:rPr lang="te-IN" sz="2200" dirty="0">
-                  <a:latin typeface="Ramabhadra" panose="02000600000000000000" pitchFamily="2" charset="0"/>
-                  <a:cs typeface="Ramabhadra" panose="02000600000000000000" pitchFamily="2" charset="0"/>
-                </a:rPr>
-                <a:t>దేవా</a:t>
-              </a:r>
-              <a:endParaRPr lang="en-IN" sz="2200" dirty="0">
+                <a:rPr lang="te-IN" dirty="0">
+                  <a:latin typeface="Ramabhadra" panose="02000600000000000000" pitchFamily="2" charset="0"/>
+                  <a:cs typeface="Ramabhadra" panose="02000600000000000000" pitchFamily="2" charset="0"/>
+                </a:rPr>
+                <a:t>ఘనమైనవి నీ కార్యములు నా యెడల</a:t>
+              </a:r>
+              <a:br>
+                <a:rPr lang="te-IN" dirty="0">
+                  <a:latin typeface="Ramabhadra" panose="02000600000000000000" pitchFamily="2" charset="0"/>
+                  <a:cs typeface="Ramabhadra" panose="02000600000000000000" pitchFamily="2" charset="0"/>
+                </a:rPr>
+              </a:br>
+              <a:r>
+                <a:rPr lang="te-IN" dirty="0">
+                  <a:latin typeface="Ramabhadra" panose="02000600000000000000" pitchFamily="2" charset="0"/>
+                  <a:cs typeface="Ramabhadra" panose="02000600000000000000" pitchFamily="2" charset="0"/>
+                </a:rPr>
+                <a:t>స్థిరమైనవి నీ ఆలోచనలు నా యేసయ్యా (2)</a:t>
+              </a:r>
+              <a:br>
+                <a:rPr lang="te-IN" dirty="0">
+                  <a:latin typeface="Ramabhadra" panose="02000600000000000000" pitchFamily="2" charset="0"/>
+                  <a:cs typeface="Ramabhadra" panose="02000600000000000000" pitchFamily="2" charset="0"/>
+                </a:rPr>
+              </a:br>
+              <a:r>
+                <a:rPr lang="te-IN" dirty="0">
+                  <a:latin typeface="Ramabhadra" panose="02000600000000000000" pitchFamily="2" charset="0"/>
+                  <a:cs typeface="Ramabhadra" panose="02000600000000000000" pitchFamily="2" charset="0"/>
+                </a:rPr>
+                <a:t>కృపలను పొందుచు కృతజ్ఞత కలిగి</a:t>
+              </a:r>
+              <a:br>
+                <a:rPr lang="te-IN" dirty="0">
+                  <a:latin typeface="Ramabhadra" panose="02000600000000000000" pitchFamily="2" charset="0"/>
+                  <a:cs typeface="Ramabhadra" panose="02000600000000000000" pitchFamily="2" charset="0"/>
+                </a:rPr>
+              </a:br>
+              <a:r>
+                <a:rPr lang="te-IN" dirty="0">
+                  <a:latin typeface="Ramabhadra" panose="02000600000000000000" pitchFamily="2" charset="0"/>
+                  <a:cs typeface="Ramabhadra" panose="02000600000000000000" pitchFamily="2" charset="0"/>
+                </a:rPr>
+                <a:t>స్తుతులర్పించెదను అన్నివేళలా (2)</a:t>
+              </a:r>
+              <a:br>
+                <a:rPr lang="te-IN" dirty="0">
+                  <a:latin typeface="Ramabhadra" panose="02000600000000000000" pitchFamily="2" charset="0"/>
+                  <a:cs typeface="Ramabhadra" panose="02000600000000000000" pitchFamily="2" charset="0"/>
+                </a:rPr>
+              </a:br>
+              <a:r>
+                <a:rPr lang="te-IN" dirty="0">
+                  <a:latin typeface="Ramabhadra" panose="02000600000000000000" pitchFamily="2" charset="0"/>
+                  <a:cs typeface="Ramabhadra" panose="02000600000000000000" pitchFamily="2" charset="0"/>
+                </a:rPr>
+                <a:t>అనుదినము నీ అనుగ్రహమే</a:t>
+              </a:r>
+              <a:br>
+                <a:rPr lang="te-IN" dirty="0">
+                  <a:latin typeface="Ramabhadra" panose="02000600000000000000" pitchFamily="2" charset="0"/>
+                  <a:cs typeface="Ramabhadra" panose="02000600000000000000" pitchFamily="2" charset="0"/>
+                </a:rPr>
+              </a:br>
+              <a:r>
+                <a:rPr lang="te-IN" dirty="0">
+                  <a:latin typeface="Ramabhadra" panose="02000600000000000000" pitchFamily="2" charset="0"/>
+                  <a:cs typeface="Ramabhadra" panose="02000600000000000000" pitchFamily="2" charset="0"/>
+                </a:rPr>
+                <a:t>ఆయుష్కాలము నీ వరమే (2)</a:t>
+              </a:r>
+            </a:p>
+            <a:p>
+              <a:endParaRPr lang="te-IN" dirty="0">
                 <a:latin typeface="Ramabhadra" panose="02000600000000000000" pitchFamily="2" charset="0"/>
                 <a:cs typeface="Ramabhadra" panose="02000600000000000000" pitchFamily="2" charset="0"/>
               </a:endParaRPr>
             </a:p>
             <a:p>
               <a:r>
-                <a:rPr lang="te-IN" sz="2200" dirty="0">
-                  <a:latin typeface="Ramabhadra" panose="02000600000000000000" pitchFamily="2" charset="0"/>
-                  <a:cs typeface="Ramabhadra" panose="02000600000000000000" pitchFamily="2" charset="0"/>
-                </a:rPr>
-                <a:t>మమ్ము రక్షించి </a:t>
-              </a:r>
-              <a:r>
-                <a:rPr lang="en-IN" sz="2200" dirty="0">
-                  <a:latin typeface="Ramabhadra" panose="02000600000000000000" pitchFamily="2" charset="0"/>
-                  <a:cs typeface="Ramabhadra" panose="02000600000000000000" pitchFamily="2" charset="0"/>
-                </a:rPr>
-                <a:t>- </a:t>
-              </a:r>
-              <a:r>
-                <a:rPr lang="te-IN" sz="2200" dirty="0">
-                  <a:latin typeface="Ramabhadra" panose="02000600000000000000" pitchFamily="2" charset="0"/>
-                  <a:cs typeface="Ramabhadra" panose="02000600000000000000" pitchFamily="2" charset="0"/>
-                </a:rPr>
-                <a:t>నిత్య రాజ్యములో</a:t>
-              </a:r>
-              <a:endParaRPr lang="en-IN" sz="2200" dirty="0">
+                <a:rPr lang="te-IN" dirty="0">
+                  <a:latin typeface="Ramabhadra" panose="02000600000000000000" pitchFamily="2" charset="0"/>
+                  <a:cs typeface="Ramabhadra" panose="02000600000000000000" pitchFamily="2" charset="0"/>
+                </a:rPr>
+                <a:t>యే తెగులు సమీపించనీయక–</a:t>
+              </a:r>
+              <a:endParaRPr lang="en-IN" dirty="0">
                 <a:latin typeface="Ramabhadra" panose="02000600000000000000" pitchFamily="2" charset="0"/>
                 <a:cs typeface="Ramabhadra" panose="02000600000000000000" pitchFamily="2" charset="0"/>
               </a:endParaRPr>
             </a:p>
             <a:p>
               <a:r>
-                <a:rPr lang="te-IN" sz="2200" dirty="0">
-                  <a:latin typeface="Ramabhadra" panose="02000600000000000000" pitchFamily="2" charset="0"/>
-                  <a:cs typeface="Ramabhadra" panose="02000600000000000000" pitchFamily="2" charset="0"/>
-                </a:rPr>
-                <a:t>నడుపుము మా ప్రభువా - నడుపుము మా ప్రభువా</a:t>
-              </a:r>
-              <a:endParaRPr lang="en-IN" sz="2200" dirty="0">
+                <a:rPr lang="te-IN" dirty="0">
+                  <a:latin typeface="Ramabhadra" panose="02000600000000000000" pitchFamily="2" charset="0"/>
+                  <a:cs typeface="Ramabhadra" panose="02000600000000000000" pitchFamily="2" charset="0"/>
+                </a:rPr>
+                <a:t>యే కీడైన</a:t>
+              </a:r>
+              <a:r>
+                <a:rPr lang="en-IN" dirty="0">
+                  <a:latin typeface="Ramabhadra" panose="02000600000000000000" pitchFamily="2" charset="0"/>
+                  <a:cs typeface="Ramabhadra" panose="02000600000000000000" pitchFamily="2" charset="0"/>
+                </a:rPr>
+                <a:t> </a:t>
+              </a:r>
+              <a:r>
+                <a:rPr lang="te-IN" dirty="0">
+                  <a:latin typeface="Ramabhadra" panose="02000600000000000000" pitchFamily="2" charset="0"/>
+                  <a:cs typeface="Ramabhadra" panose="02000600000000000000" pitchFamily="2" charset="0"/>
+                </a:rPr>
+                <a:t>దరిచేరనీయక</a:t>
+              </a:r>
+              <a:br>
+                <a:rPr lang="te-IN" dirty="0">
+                  <a:latin typeface="Ramabhadra" panose="02000600000000000000" pitchFamily="2" charset="0"/>
+                  <a:cs typeface="Ramabhadra" panose="02000600000000000000" pitchFamily="2" charset="0"/>
+                </a:rPr>
+              </a:br>
+              <a:r>
+                <a:rPr lang="te-IN" dirty="0">
+                  <a:latin typeface="Ramabhadra" panose="02000600000000000000" pitchFamily="2" charset="0"/>
+                  <a:cs typeface="Ramabhadra" panose="02000600000000000000" pitchFamily="2" charset="0"/>
+                </a:rPr>
+                <a:t>ఆపదలన్ని తొలగే వరకు–</a:t>
+              </a:r>
+              <a:endParaRPr lang="en-IN" dirty="0">
                 <a:latin typeface="Ramabhadra" panose="02000600000000000000" pitchFamily="2" charset="0"/>
                 <a:cs typeface="Ramabhadra" panose="02000600000000000000" pitchFamily="2" charset="0"/>
               </a:endParaRPr>
             </a:p>
             <a:p>
-              <a:endParaRPr lang="en-IN" sz="2200" dirty="0">
+              <a:r>
+                <a:rPr lang="te-IN" dirty="0">
+                  <a:latin typeface="Ramabhadra" panose="02000600000000000000" pitchFamily="2" charset="0"/>
+                  <a:cs typeface="Ramabhadra" panose="02000600000000000000" pitchFamily="2" charset="0"/>
+                </a:rPr>
+                <a:t>ఆత్మలో నెమ్మది కలిగే వరకు (2)</a:t>
+              </a:r>
+              <a:br>
+                <a:rPr lang="te-IN" dirty="0">
+                  <a:latin typeface="Ramabhadra" panose="02000600000000000000" pitchFamily="2" charset="0"/>
+                  <a:cs typeface="Ramabhadra" panose="02000600000000000000" pitchFamily="2" charset="0"/>
+                </a:rPr>
+              </a:br>
+              <a:r>
+                <a:rPr lang="te-IN" dirty="0">
+                  <a:latin typeface="Ramabhadra" panose="02000600000000000000" pitchFamily="2" charset="0"/>
+                  <a:cs typeface="Ramabhadra" panose="02000600000000000000" pitchFamily="2" charset="0"/>
+                </a:rPr>
+                <a:t>నా భారము మోసి – బాసటగా నిలిచి – ఆదరించితివి</a:t>
+              </a:r>
+              <a:br>
+                <a:rPr lang="te-IN" dirty="0">
+                  <a:latin typeface="Ramabhadra" panose="02000600000000000000" pitchFamily="2" charset="0"/>
+                  <a:cs typeface="Ramabhadra" panose="02000600000000000000" pitchFamily="2" charset="0"/>
+                </a:rPr>
+              </a:br>
+              <a:r>
+                <a:rPr lang="te-IN" dirty="0">
+                  <a:latin typeface="Ramabhadra" panose="02000600000000000000" pitchFamily="2" charset="0"/>
+                  <a:cs typeface="Ramabhadra" panose="02000600000000000000" pitchFamily="2" charset="0"/>
+                </a:rPr>
+                <a:t>ఈ స్తుతి మహిమలు నీకే – చెల్లించెదను – జీవితాంతము</a:t>
+              </a:r>
+            </a:p>
+            <a:p>
+              <a:endParaRPr lang="te-IN" dirty="0">
                 <a:latin typeface="Ramabhadra" panose="02000600000000000000" pitchFamily="2" charset="0"/>
                 <a:cs typeface="Ramabhadra" panose="02000600000000000000" pitchFamily="2" charset="0"/>
               </a:endParaRPr>
             </a:p>
             <a:p>
               <a:r>
-                <a:rPr lang="te-IN" sz="2200" dirty="0">
-                  <a:latin typeface="Ramabhadra" panose="02000600000000000000" pitchFamily="2" charset="0"/>
-                  <a:cs typeface="Ramabhadra" panose="02000600000000000000" pitchFamily="2" charset="0"/>
-                </a:rPr>
-                <a:t>సిలువను మోసుకొని - సువార్త చాటింప</a:t>
-              </a:r>
-              <a:endParaRPr lang="en-IN" sz="2200" dirty="0">
+                <a:rPr lang="te-IN" dirty="0">
+                  <a:latin typeface="Ramabhadra" panose="02000600000000000000" pitchFamily="2" charset="0"/>
+                  <a:cs typeface="Ramabhadra" panose="02000600000000000000" pitchFamily="2" charset="0"/>
+                </a:rPr>
+                <a:t>నాకు ఎత్తైన కోటవు నీవే –</a:t>
+              </a:r>
+              <a:endParaRPr lang="en-IN" dirty="0">
                 <a:latin typeface="Ramabhadra" panose="02000600000000000000" pitchFamily="2" charset="0"/>
                 <a:cs typeface="Ramabhadra" panose="02000600000000000000" pitchFamily="2" charset="0"/>
               </a:endParaRPr>
             </a:p>
             <a:p>
               <a:r>
-                <a:rPr lang="te-IN" sz="2200" dirty="0">
-                  <a:latin typeface="Ramabhadra" panose="02000600000000000000" pitchFamily="2" charset="0"/>
-                  <a:cs typeface="Ramabhadra" panose="02000600000000000000" pitchFamily="2" charset="0"/>
-                </a:rPr>
-                <a:t>విలువగు నీ శక్తిచే - నిత్యము నడిపించు</a:t>
-              </a:r>
-            </a:p>
-            <a:p>
-              <a:r>
-                <a:rPr lang="te-IN" sz="2200" dirty="0">
-                  <a:latin typeface="Ramabhadra" panose="02000600000000000000" pitchFamily="2" charset="0"/>
-                  <a:cs typeface="Ramabhadra" panose="02000600000000000000" pitchFamily="2" charset="0"/>
-                </a:rPr>
-                <a:t>యేసు నీ రక్తములో - శుద్దిపరచి నన్ను</a:t>
-              </a:r>
-            </a:p>
-            <a:p>
-              <a:r>
-                <a:rPr lang="te-IN" sz="2200" dirty="0">
-                  <a:latin typeface="Ramabhadra" panose="02000600000000000000" pitchFamily="2" charset="0"/>
-                  <a:cs typeface="Ramabhadra" panose="02000600000000000000" pitchFamily="2" charset="0"/>
-                </a:rPr>
-                <a:t>నిలుపుము జ్యోతివలె - నిలుపుము జ్యోతివలె  </a:t>
-              </a:r>
-            </a:p>
-            <a:p>
-              <a:endParaRPr lang="te-IN" sz="2200" dirty="0">
+                <a:rPr lang="te-IN" dirty="0">
+                  <a:latin typeface="Ramabhadra" panose="02000600000000000000" pitchFamily="2" charset="0"/>
+                  <a:cs typeface="Ramabhadra" panose="02000600000000000000" pitchFamily="2" charset="0"/>
+                </a:rPr>
+                <a:t>నన్ను కాపాడు కేడెము నీవే</a:t>
+              </a:r>
+              <a:br>
+                <a:rPr lang="te-IN" dirty="0">
+                  <a:latin typeface="Ramabhadra" panose="02000600000000000000" pitchFamily="2" charset="0"/>
+                  <a:cs typeface="Ramabhadra" panose="02000600000000000000" pitchFamily="2" charset="0"/>
+                </a:rPr>
+              </a:br>
+              <a:r>
+                <a:rPr lang="te-IN" dirty="0">
+                  <a:latin typeface="Ramabhadra" panose="02000600000000000000" pitchFamily="2" charset="0"/>
+                  <a:cs typeface="Ramabhadra" panose="02000600000000000000" pitchFamily="2" charset="0"/>
+                </a:rPr>
+                <a:t>ఆశ్రయమైన బండవు నీవే –</a:t>
+              </a:r>
+              <a:endParaRPr lang="en-IN" dirty="0">
                 <a:latin typeface="Ramabhadra" panose="02000600000000000000" pitchFamily="2" charset="0"/>
                 <a:cs typeface="Ramabhadra" panose="02000600000000000000" pitchFamily="2" charset="0"/>
               </a:endParaRPr>
             </a:p>
             <a:p>
               <a:r>
-                <a:rPr lang="te-IN" sz="2200" dirty="0">
-                  <a:latin typeface="Ramabhadra" panose="02000600000000000000" pitchFamily="2" charset="0"/>
-                  <a:cs typeface="Ramabhadra" panose="02000600000000000000" pitchFamily="2" charset="0"/>
-                </a:rPr>
-                <a:t>కృంగిన వేళలలో - అలసిన సమయములో</a:t>
-              </a:r>
-            </a:p>
-            <a:p>
-              <a:r>
-                <a:rPr lang="te-IN" sz="2200" dirty="0">
-                  <a:latin typeface="Ramabhadra" panose="02000600000000000000" pitchFamily="2" charset="0"/>
-                  <a:cs typeface="Ramabhadra" panose="02000600000000000000" pitchFamily="2" charset="0"/>
-                </a:rPr>
-                <a:t>నా చేయి విడువకుము - నన్ను నిలబెట్టు</a:t>
-              </a:r>
-            </a:p>
-            <a:p>
-              <a:r>
-                <a:rPr lang="te-IN" sz="2200" dirty="0">
-                  <a:latin typeface="Ramabhadra" panose="02000600000000000000" pitchFamily="2" charset="0"/>
-                  <a:cs typeface="Ramabhadra" panose="02000600000000000000" pitchFamily="2" charset="0"/>
-                </a:rPr>
-                <a:t>యేసు నీ రక్తములో - శుద్దిపరచి నన్ను</a:t>
-              </a:r>
-            </a:p>
-            <a:p>
-              <a:r>
-                <a:rPr lang="te-IN" sz="2200" dirty="0">
-                  <a:latin typeface="Ramabhadra" panose="02000600000000000000" pitchFamily="2" charset="0"/>
-                  <a:cs typeface="Ramabhadra" panose="02000600000000000000" pitchFamily="2" charset="0"/>
-                </a:rPr>
-                <a:t>నిలుపుము జ్యోతివలె - నిలుపుము జ్యోతివలె</a:t>
+                <a:rPr lang="te-IN" dirty="0">
+                  <a:latin typeface="Ramabhadra" panose="02000600000000000000" pitchFamily="2" charset="0"/>
+                  <a:cs typeface="Ramabhadra" panose="02000600000000000000" pitchFamily="2" charset="0"/>
+                </a:rPr>
+                <a:t>శాశ్వత కృపకాధారము నీవే (2)</a:t>
+              </a:r>
+              <a:br>
+                <a:rPr lang="te-IN" dirty="0">
+                  <a:latin typeface="Ramabhadra" panose="02000600000000000000" pitchFamily="2" charset="0"/>
+                  <a:cs typeface="Ramabhadra" panose="02000600000000000000" pitchFamily="2" charset="0"/>
+                </a:rPr>
+              </a:br>
+              <a:r>
+                <a:rPr lang="te-IN" dirty="0">
+                  <a:latin typeface="Ramabhadra" panose="02000600000000000000" pitchFamily="2" charset="0"/>
+                  <a:cs typeface="Ramabhadra" panose="02000600000000000000" pitchFamily="2" charset="0"/>
+                </a:rPr>
+                <a:t>నా ప్రతిక్షణమును నీవు –దీవెనగా మార్చి–నడిపించుచున్నావు</a:t>
+              </a:r>
+              <a:br>
+                <a:rPr lang="te-IN" dirty="0">
+                  <a:latin typeface="Ramabhadra" panose="02000600000000000000" pitchFamily="2" charset="0"/>
+                  <a:cs typeface="Ramabhadra" panose="02000600000000000000" pitchFamily="2" charset="0"/>
+                </a:rPr>
+              </a:br>
+              <a:r>
+                <a:rPr lang="te-IN" dirty="0">
+                  <a:latin typeface="Ramabhadra" panose="02000600000000000000" pitchFamily="2" charset="0"/>
+                  <a:cs typeface="Ramabhadra" panose="02000600000000000000" pitchFamily="2" charset="0"/>
+                </a:rPr>
+                <a:t>ఈ స్తుతి మహిమలు నీకే – చెల్లించెదను – జీవితాంతము</a:t>
               </a:r>
             </a:p>
           </p:txBody>
@@ -3719,9 +3806,9 @@
         <p:grpSpPr>
           <a:xfrm>
             <a:off x="160868" y="182032"/>
-            <a:ext cx="4831293" cy="6493935"/>
+            <a:ext cx="4936066" cy="6493935"/>
             <a:chOff x="160868" y="182032"/>
-            <a:chExt cx="4831293" cy="6493935"/>
+            <a:chExt cx="4936066" cy="6493935"/>
           </a:xfrm>
         </p:grpSpPr>
         <p:sp>
@@ -3793,8 +3880,8 @@
           </p:nvSpPr>
           <p:spPr>
             <a:xfrm>
-              <a:off x="343961" y="716954"/>
-              <a:ext cx="4648200" cy="5509200"/>
+              <a:off x="448734" y="799863"/>
+              <a:ext cx="4648200" cy="5262979"/>
             </a:xfrm>
             <a:prstGeom prst="rect">
               <a:avLst/>
@@ -3811,18 +3898,11 @@
                 <a:defRPr/>
               </a:pPr>
               <a:r>
-                <a:rPr lang="te-IN" sz="2200" dirty="0">
-                  <a:latin typeface="Ramabhadra" panose="02000600000000000000" pitchFamily="2" charset="0"/>
-                  <a:cs typeface="Ramabhadra" panose="02000600000000000000" pitchFamily="2" charset="0"/>
-                </a:rPr>
-                <a:t>మదుర స్తుతులతో </a:t>
-              </a:r>
-              <a:r>
-                <a:rPr lang="en-IN" sz="2200" dirty="0">
-                  <a:latin typeface="Ramabhadra" panose="02000600000000000000" pitchFamily="2" charset="0"/>
-                  <a:cs typeface="Ramabhadra" panose="02000600000000000000" pitchFamily="2" charset="0"/>
-                </a:rPr>
-                <a:t>–</a:t>
+                <a:rPr lang="te-IN" sz="2400" dirty="0">
+                  <a:latin typeface="Ramabhadra" panose="02000600000000000000" pitchFamily="2" charset="0"/>
+                  <a:cs typeface="Ramabhadra" panose="02000600000000000000" pitchFamily="2" charset="0"/>
+                </a:rPr>
+                <a:t>స్తుతియించెదా నీ నామం</a:t>
               </a:r>
             </a:p>
             <a:p>
@@ -3830,27 +3910,42 @@
                 <a:defRPr/>
               </a:pPr>
               <a:r>
-                <a:rPr lang="te-IN" sz="2200" dirty="0">
-                  <a:latin typeface="Ramabhadra" panose="02000600000000000000" pitchFamily="2" charset="0"/>
-                  <a:cs typeface="Ramabhadra" panose="02000600000000000000" pitchFamily="2" charset="0"/>
-                </a:rPr>
-                <a:t>మ్రోదములరగ సదమది</a:t>
-              </a:r>
-              <a:r>
-                <a:rPr lang="en-US" sz="2200" dirty="0">
-                  <a:latin typeface="Ramabhadra" panose="02000600000000000000" pitchFamily="2" charset="0"/>
-                  <a:cs typeface="Ramabhadra" panose="02000600000000000000" pitchFamily="2" charset="0"/>
-                </a:rPr>
-                <a:t> </a:t>
-              </a:r>
-              <a:r>
-                <a:rPr lang="te-IN" sz="2200" dirty="0">
-                  <a:latin typeface="Ramabhadra" panose="02000600000000000000" pitchFamily="2" charset="0"/>
-                  <a:cs typeface="Ramabhadra" panose="02000600000000000000" pitchFamily="2" charset="0"/>
-                </a:rPr>
-                <a:t>పాడుదమా</a:t>
-              </a:r>
-              <a:endParaRPr lang="en-IN" sz="2200" dirty="0">
+                <a:rPr lang="te-IN" sz="2400" dirty="0">
+                  <a:latin typeface="Ramabhadra" panose="02000600000000000000" pitchFamily="2" charset="0"/>
+                  <a:cs typeface="Ramabhadra" panose="02000600000000000000" pitchFamily="2" charset="0"/>
+                </a:rPr>
+                <a:t>దేవా అనుదినం </a:t>
+              </a:r>
+            </a:p>
+            <a:p>
+              <a:pPr defTabSz="439781">
+                <a:defRPr/>
+              </a:pPr>
+              <a:r>
+                <a:rPr lang="te-IN" sz="2400" dirty="0">
+                  <a:latin typeface="Ramabhadra" panose="02000600000000000000" pitchFamily="2" charset="0"/>
+                  <a:cs typeface="Ramabhadra" panose="02000600000000000000" pitchFamily="2" charset="0"/>
+                </a:rPr>
+                <a:t>స్తుతియించెదా నీ నామం</a:t>
+              </a:r>
+            </a:p>
+            <a:p>
+              <a:pPr defTabSz="439781">
+                <a:defRPr/>
+              </a:pPr>
+              <a:r>
+                <a:rPr lang="te-IN" sz="2400" dirty="0">
+                  <a:latin typeface="Ramabhadra" panose="02000600000000000000" pitchFamily="2" charset="0"/>
+                  <a:cs typeface="Ramabhadra" panose="02000600000000000000" pitchFamily="2" charset="0"/>
+                </a:rPr>
+                <a:t>దేవా అనుక్షణం</a:t>
+              </a:r>
+            </a:p>
+            <a:p>
+              <a:pPr defTabSz="439781">
+                <a:defRPr/>
+              </a:pPr>
+              <a:endParaRPr lang="te-IN" sz="2400" dirty="0">
                 <a:latin typeface="Ramabhadra" panose="02000600000000000000" pitchFamily="2" charset="0"/>
                 <a:cs typeface="Ramabhadra" panose="02000600000000000000" pitchFamily="2" charset="0"/>
               </a:endParaRPr>
@@ -3860,62 +3955,47 @@
                 <a:defRPr/>
               </a:pPr>
               <a:r>
-                <a:rPr lang="te-IN" sz="2200" dirty="0">
-                  <a:latin typeface="Ramabhadra" panose="02000600000000000000" pitchFamily="2" charset="0"/>
-                  <a:cs typeface="Ramabhadra" panose="02000600000000000000" pitchFamily="2" charset="0"/>
-                </a:rPr>
-                <a:t>క్రీస్తుకు గానం చేయుదమా –</a:t>
-              </a:r>
-              <a:endParaRPr lang="en-IN" sz="2200" dirty="0">
-                <a:latin typeface="Ramabhadra" panose="02000600000000000000" pitchFamily="2" charset="0"/>
-                <a:cs typeface="Ramabhadra" panose="02000600000000000000" pitchFamily="2" charset="0"/>
-              </a:endParaRPr>
+                <a:rPr lang="te-IN" sz="2400" dirty="0">
+                  <a:latin typeface="Ramabhadra" panose="02000600000000000000" pitchFamily="2" charset="0"/>
+                  <a:cs typeface="Ramabhadra" panose="02000600000000000000" pitchFamily="2" charset="0"/>
+                </a:rPr>
+                <a:t>దయతో కాపాడినావు</a:t>
+              </a:r>
             </a:p>
             <a:p>
               <a:pPr defTabSz="439781">
                 <a:defRPr/>
               </a:pPr>
               <a:r>
-                <a:rPr lang="te-IN" sz="2200" dirty="0">
-                  <a:latin typeface="Ramabhadra" panose="02000600000000000000" pitchFamily="2" charset="0"/>
-                  <a:cs typeface="Ramabhadra" panose="02000600000000000000" pitchFamily="2" charset="0"/>
-                </a:rPr>
-                <a:t>నూతన గానము చేయుదమా</a:t>
+                <a:rPr lang="te-IN" sz="2400" dirty="0">
+                  <a:latin typeface="Ramabhadra" panose="02000600000000000000" pitchFamily="2" charset="0"/>
+                  <a:cs typeface="Ramabhadra" panose="02000600000000000000" pitchFamily="2" charset="0"/>
+                </a:rPr>
+                <a:t>కృపనే చూపించినావు (2) </a:t>
               </a:r>
             </a:p>
             <a:p>
               <a:pPr defTabSz="439781">
                 <a:defRPr/>
               </a:pPr>
-              <a:endParaRPr lang="en-IN" sz="2200" dirty="0">
-                <a:latin typeface="Ramabhadra" panose="02000600000000000000" pitchFamily="2" charset="0"/>
-                <a:cs typeface="Ramabhadra" panose="02000600000000000000" pitchFamily="2" charset="0"/>
-              </a:endParaRPr>
+              <a:r>
+                <a:rPr lang="te-IN" sz="2400" dirty="0">
+                  <a:latin typeface="Ramabhadra" panose="02000600000000000000" pitchFamily="2" charset="0"/>
+                  <a:cs typeface="Ramabhadra" panose="02000600000000000000" pitchFamily="2" charset="0"/>
+                </a:rPr>
+                <a:t>నిను నే మరువనేసు</a:t>
+              </a:r>
             </a:p>
             <a:p>
               <a:pPr defTabSz="439781">
                 <a:defRPr/>
               </a:pPr>
               <a:r>
-                <a:rPr lang="te-IN" sz="2200" dirty="0">
-                  <a:latin typeface="Ramabhadra" panose="02000600000000000000" pitchFamily="2" charset="0"/>
-                  <a:cs typeface="Ramabhadra" panose="02000600000000000000" pitchFamily="2" charset="0"/>
-                </a:rPr>
-                <a:t>యేసే దేవుడని దేవుని కుమరుడని (</a:t>
-              </a:r>
-              <a:r>
-                <a:rPr lang="en-IN" sz="2200" dirty="0">
-                  <a:latin typeface="Ramabhadra" panose="02000600000000000000" pitchFamily="2" charset="0"/>
-                  <a:cs typeface="Ramabhadra" panose="02000600000000000000" pitchFamily="2" charset="0"/>
-                </a:rPr>
-                <a:t>2</a:t>
-              </a:r>
-              <a:r>
-                <a:rPr lang="te-IN" sz="2200" dirty="0">
-                  <a:latin typeface="Ramabhadra" panose="02000600000000000000" pitchFamily="2" charset="0"/>
-                  <a:cs typeface="Ramabhadra" panose="02000600000000000000" pitchFamily="2" charset="0"/>
-                </a:rPr>
-                <a:t>)</a:t>
+                <a:rPr lang="te-IN" sz="2400" dirty="0">
+                  <a:latin typeface="Ramabhadra" panose="02000600000000000000" pitchFamily="2" charset="0"/>
+                  <a:cs typeface="Ramabhadra" panose="02000600000000000000" pitchFamily="2" charset="0"/>
+                </a:rPr>
+                <a:t>నిను నే విడువనేసు</a:t>
               </a:r>
             </a:p>
             <a:p>
@@ -3923,148 +4003,59 @@
                 <a:defRPr/>
               </a:pPr>
               <a:r>
-                <a:rPr lang="te-IN" sz="2200" dirty="0">
-                  <a:latin typeface="Ramabhadra" panose="02000600000000000000" pitchFamily="2" charset="0"/>
-                  <a:cs typeface="Ramabhadra" panose="02000600000000000000" pitchFamily="2" charset="0"/>
-                </a:rPr>
-                <a:t>ఆయనే పుజ్యుడని –</a:t>
-              </a:r>
-              <a:endParaRPr lang="en-IN" sz="2200" dirty="0">
-                <a:latin typeface="Ramabhadra" panose="02000600000000000000" pitchFamily="2" charset="0"/>
-                <a:cs typeface="Ramabhadra" panose="02000600000000000000" pitchFamily="2" charset="0"/>
-              </a:endParaRPr>
+                <a:rPr lang="te-IN" sz="2400" dirty="0">
+                  <a:latin typeface="Ramabhadra" panose="02000600000000000000" pitchFamily="2" charset="0"/>
+                  <a:cs typeface="Ramabhadra" panose="02000600000000000000" pitchFamily="2" charset="0"/>
+                </a:rPr>
+                <a:t> </a:t>
+              </a:r>
             </a:p>
             <a:p>
               <a:pPr defTabSz="439781">
                 <a:defRPr/>
               </a:pPr>
               <a:r>
-                <a:rPr lang="te-IN" sz="2200" dirty="0">
-                  <a:latin typeface="Ramabhadra" panose="02000600000000000000" pitchFamily="2" charset="0"/>
-                  <a:cs typeface="Ramabhadra" panose="02000600000000000000" pitchFamily="2" charset="0"/>
-                </a:rPr>
-                <a:t>ప్రభువుకు గానం చేయుదమా</a:t>
-              </a:r>
-              <a:endParaRPr lang="en-US" sz="2200" dirty="0">
-                <a:latin typeface="Ramabhadra" panose="02000600000000000000" pitchFamily="2" charset="0"/>
-                <a:cs typeface="Ramabhadra" panose="02000600000000000000" pitchFamily="2" charset="0"/>
-              </a:endParaRPr>
+                <a:rPr lang="te-IN" sz="2400" dirty="0">
+                  <a:latin typeface="Ramabhadra" panose="02000600000000000000" pitchFamily="2" charset="0"/>
+                  <a:cs typeface="Ramabhadra" panose="02000600000000000000" pitchFamily="2" charset="0"/>
+                </a:rPr>
+                <a:t>పాపినై యుండగ నేను</a:t>
+              </a:r>
             </a:p>
             <a:p>
               <a:pPr defTabSz="439781">
                 <a:defRPr/>
               </a:pPr>
               <a:r>
-                <a:rPr lang="te-IN" sz="2200" dirty="0">
-                  <a:latin typeface="Ramabhadra" panose="02000600000000000000" pitchFamily="2" charset="0"/>
-                  <a:cs typeface="Ramabhadra" panose="02000600000000000000" pitchFamily="2" charset="0"/>
-                </a:rPr>
-                <a:t>నూతన గానము చేయుదమా</a:t>
-              </a:r>
-              <a:endParaRPr lang="en-US" sz="2200" dirty="0">
-                <a:latin typeface="Ramabhadra" panose="02000600000000000000" pitchFamily="2" charset="0"/>
-                <a:cs typeface="Ramabhadra" panose="02000600000000000000" pitchFamily="2" charset="0"/>
-              </a:endParaRPr>
+                <a:rPr lang="te-IN" sz="2400" dirty="0">
+                  <a:latin typeface="Ramabhadra" panose="02000600000000000000" pitchFamily="2" charset="0"/>
+                  <a:cs typeface="Ramabhadra" panose="02000600000000000000" pitchFamily="2" charset="0"/>
+                </a:rPr>
+                <a:t>రక్షించి దరి చేర్చినావు (2)  </a:t>
+              </a:r>
             </a:p>
             <a:p>
               <a:pPr defTabSz="439781">
                 <a:defRPr/>
               </a:pPr>
-              <a:endParaRPr lang="en-US" sz="2200" dirty="0">
-                <a:latin typeface="Ramabhadra" panose="02000600000000000000" pitchFamily="2" charset="0"/>
-                <a:cs typeface="Ramabhadra" panose="02000600000000000000" pitchFamily="2" charset="0"/>
-              </a:endParaRPr>
+              <a:r>
+                <a:rPr lang="te-IN" sz="2400" dirty="0">
+                  <a:latin typeface="Ramabhadra" panose="02000600000000000000" pitchFamily="2" charset="0"/>
+                  <a:cs typeface="Ramabhadra" panose="02000600000000000000" pitchFamily="2" charset="0"/>
+                </a:rPr>
+                <a:t>నిను నే మరువనేసు</a:t>
+              </a:r>
             </a:p>
             <a:p>
               <a:pPr defTabSz="439781">
                 <a:defRPr/>
               </a:pPr>
               <a:r>
-                <a:rPr lang="te-IN" sz="2200" dirty="0">
-                  <a:latin typeface="Ramabhadra" panose="02000600000000000000" pitchFamily="2" charset="0"/>
-                  <a:cs typeface="Ramabhadra" panose="02000600000000000000" pitchFamily="2" charset="0"/>
-                </a:rPr>
-                <a:t>స్వర మండలముతో సితార సునాదముతో</a:t>
-              </a:r>
-              <a:endParaRPr lang="en-US" sz="2200" dirty="0">
-                <a:latin typeface="Ramabhadra" panose="02000600000000000000" pitchFamily="2" charset="0"/>
-                <a:cs typeface="Ramabhadra" panose="02000600000000000000" pitchFamily="2" charset="0"/>
-              </a:endParaRPr>
-            </a:p>
-            <a:p>
-              <a:pPr defTabSz="439781">
-                <a:defRPr/>
-              </a:pPr>
-              <a:r>
-                <a:rPr lang="te-IN" sz="2200" dirty="0">
-                  <a:latin typeface="Ramabhadra" panose="02000600000000000000" pitchFamily="2" charset="0"/>
-                  <a:cs typeface="Ramabhadra" panose="02000600000000000000" pitchFamily="2" charset="0"/>
-                </a:rPr>
-                <a:t>తంతి వాయిద్యములతో పిల్లన గ్రోవులతో</a:t>
-              </a:r>
-              <a:endParaRPr lang="en-US" sz="2200" dirty="0">
-                <a:latin typeface="Ramabhadra" panose="02000600000000000000" pitchFamily="2" charset="0"/>
-                <a:cs typeface="Ramabhadra" panose="02000600000000000000" pitchFamily="2" charset="0"/>
-              </a:endParaRPr>
-            </a:p>
-            <a:p>
-              <a:pPr defTabSz="439781">
-                <a:defRPr/>
-              </a:pPr>
-              <a:r>
-                <a:rPr lang="te-IN" sz="2200" dirty="0">
-                  <a:latin typeface="Ramabhadra" panose="02000600000000000000" pitchFamily="2" charset="0"/>
-                  <a:cs typeface="Ramabhadra" panose="02000600000000000000" pitchFamily="2" charset="0"/>
-                </a:rPr>
-                <a:t>మ్రోగుతాలంబులతో బూరల నాదముతో</a:t>
-              </a:r>
-              <a:endParaRPr lang="en-IN" sz="2200" dirty="0">
-                <a:latin typeface="Ramabhadra" panose="02000600000000000000" pitchFamily="2" charset="0"/>
-                <a:cs typeface="Ramabhadra" panose="02000600000000000000" pitchFamily="2" charset="0"/>
-              </a:endParaRPr>
-            </a:p>
-            <a:p>
-              <a:pPr defTabSz="439781">
-                <a:defRPr/>
-              </a:pPr>
-              <a:r>
-                <a:rPr lang="te-IN" sz="2200" dirty="0">
-                  <a:latin typeface="Ramabhadra" panose="02000600000000000000" pitchFamily="2" charset="0"/>
-                  <a:cs typeface="Ramabhadra" panose="02000600000000000000" pitchFamily="2" charset="0"/>
-                </a:rPr>
-                <a:t>గంభీర జయ ధ్వనులతో</a:t>
-              </a:r>
-              <a:endParaRPr lang="en-IN" sz="2200" dirty="0">
-                <a:latin typeface="Ramabhadra" panose="02000600000000000000" pitchFamily="2" charset="0"/>
-                <a:cs typeface="Ramabhadra" panose="02000600000000000000" pitchFamily="2" charset="0"/>
-              </a:endParaRPr>
-            </a:p>
-            <a:p>
-              <a:pPr defTabSz="439781">
-                <a:defRPr/>
-              </a:pPr>
-              <a:r>
-                <a:rPr lang="te-IN" sz="2200" dirty="0">
-                  <a:latin typeface="Ramabhadra" panose="02000600000000000000" pitchFamily="2" charset="0"/>
-                  <a:cs typeface="Ramabhadra" panose="02000600000000000000" pitchFamily="2" charset="0"/>
-                </a:rPr>
-                <a:t>ప్రభువుకు గానము చేయుదమా</a:t>
-              </a:r>
-              <a:endParaRPr lang="en-US" sz="2200" dirty="0">
-                <a:latin typeface="Ramabhadra" panose="02000600000000000000" pitchFamily="2" charset="0"/>
-                <a:cs typeface="Ramabhadra" panose="02000600000000000000" pitchFamily="2" charset="0"/>
-              </a:endParaRPr>
-            </a:p>
-            <a:p>
-              <a:pPr defTabSz="439781">
-                <a:defRPr/>
-              </a:pPr>
-              <a:r>
-                <a:rPr lang="te-IN" sz="2200" dirty="0">
-                  <a:latin typeface="Ramabhadra" panose="02000600000000000000" pitchFamily="2" charset="0"/>
-                  <a:cs typeface="Ramabhadra" panose="02000600000000000000" pitchFamily="2" charset="0"/>
-                </a:rPr>
-                <a:t>నూతన గానము చేయుదమా</a:t>
+                <a:rPr lang="te-IN" sz="2400" dirty="0">
+                  <a:latin typeface="Ramabhadra" panose="02000600000000000000" pitchFamily="2" charset="0"/>
+                  <a:cs typeface="Ramabhadra" panose="02000600000000000000" pitchFamily="2" charset="0"/>
+                </a:rPr>
+                <a:t>నిను నే విడువనేసు</a:t>
               </a:r>
             </a:p>
           </p:txBody>
@@ -4147,9 +4138,9 @@
         <p:grpSpPr>
           <a:xfrm>
             <a:off x="5104338" y="182031"/>
-            <a:ext cx="4932894" cy="6493935"/>
+            <a:ext cx="4801662" cy="6493935"/>
             <a:chOff x="160868" y="182032"/>
-            <a:chExt cx="4932894" cy="6493935"/>
+            <a:chExt cx="4801662" cy="6493935"/>
           </a:xfrm>
         </p:grpSpPr>
         <p:sp>
@@ -4221,8 +4212,8 @@
           </p:nvSpPr>
           <p:spPr>
             <a:xfrm>
-              <a:off x="343961" y="799864"/>
-              <a:ext cx="4749801" cy="5693866"/>
+              <a:off x="212729" y="286334"/>
+              <a:ext cx="4749801" cy="5940088"/>
             </a:xfrm>
             <a:prstGeom prst="rect">
               <a:avLst/>
@@ -4239,32 +4230,41 @@
                 <a:defRPr/>
               </a:pPr>
               <a:r>
-                <a:rPr lang="te-IN" sz="2600" dirty="0">
-                  <a:latin typeface="Ramabhadra" panose="02000600000000000000" pitchFamily="2" charset="0"/>
-                  <a:cs typeface="Ramabhadra" panose="02000600000000000000" pitchFamily="2" charset="0"/>
-                </a:rPr>
-                <a:t>తేజోమయా యేసయ్యా</a:t>
-              </a:r>
-              <a:r>
-                <a:rPr lang="en-US" sz="2600" dirty="0">
-                  <a:latin typeface="Ramabhadra" panose="02000600000000000000" pitchFamily="2" charset="0"/>
-                  <a:cs typeface="Ramabhadra" panose="02000600000000000000" pitchFamily="2" charset="0"/>
-                </a:rPr>
-                <a:t>-</a:t>
-              </a:r>
+                <a:rPr lang="te-IN" sz="2000" dirty="0">
+                  <a:latin typeface="Ramabhadra" panose="02000600000000000000" pitchFamily="2" charset="0"/>
+                  <a:cs typeface="Ramabhadra" panose="02000600000000000000" pitchFamily="2" charset="0"/>
+                </a:rPr>
+                <a:t>సుమధుర స్వరముల గానాలతో –</a:t>
+              </a:r>
+              <a:endParaRPr lang="en-IN" sz="2000" dirty="0">
+                <a:latin typeface="Ramabhadra" panose="02000600000000000000" pitchFamily="2" charset="0"/>
+                <a:cs typeface="Ramabhadra" panose="02000600000000000000" pitchFamily="2" charset="0"/>
+              </a:endParaRPr>
             </a:p>
             <a:p>
               <a:pPr defTabSz="439781">
                 <a:defRPr/>
               </a:pPr>
               <a:r>
-                <a:rPr lang="te-IN" sz="2600" dirty="0">
-                  <a:latin typeface="Ramabhadra" panose="02000600000000000000" pitchFamily="2" charset="0"/>
-                  <a:cs typeface="Ramabhadra" panose="02000600000000000000" pitchFamily="2" charset="0"/>
-                </a:rPr>
-                <a:t>స్తుతి పాత్రుడవు నీవయ్యా</a:t>
-              </a:r>
-              <a:endParaRPr lang="en-US" sz="2600" dirty="0">
+                <a:rPr lang="te-IN" sz="2000" dirty="0">
+                  <a:latin typeface="Ramabhadra" panose="02000600000000000000" pitchFamily="2" charset="0"/>
+                  <a:cs typeface="Ramabhadra" panose="02000600000000000000" pitchFamily="2" charset="0"/>
+                </a:rPr>
+                <a:t>వేలాది దూతల గళములతో</a:t>
+              </a:r>
+            </a:p>
+            <a:p>
+              <a:pPr defTabSz="439781">
+                <a:defRPr/>
+              </a:pPr>
+              <a:r>
+                <a:rPr lang="te-IN" sz="2000" dirty="0">
+                  <a:latin typeface="Ramabhadra" panose="02000600000000000000" pitchFamily="2" charset="0"/>
+                  <a:cs typeface="Ramabhadra" panose="02000600000000000000" pitchFamily="2" charset="0"/>
+                </a:rPr>
+                <a:t>కొనియాడబడుచున్న నా యేసయ్యా –</a:t>
+              </a:r>
+              <a:endParaRPr lang="en-IN" sz="2000" dirty="0">
                 <a:latin typeface="Ramabhadra" panose="02000600000000000000" pitchFamily="2" charset="0"/>
                 <a:cs typeface="Ramabhadra" panose="02000600000000000000" pitchFamily="2" charset="0"/>
               </a:endParaRPr>
@@ -4274,13 +4274,42 @@
                 <a:defRPr/>
               </a:pPr>
               <a:r>
-                <a:rPr lang="te-IN" sz="2600" dirty="0">
-                  <a:latin typeface="Ramabhadra" panose="02000600000000000000" pitchFamily="2" charset="0"/>
-                  <a:cs typeface="Ramabhadra" panose="02000600000000000000" pitchFamily="2" charset="0"/>
-                </a:rPr>
-                <a:t>మహిమ ఘనత ప్రభావములు</a:t>
-              </a:r>
-              <a:endParaRPr lang="en-US" sz="2600" dirty="0">
+                <a:rPr lang="te-IN" sz="2000" dirty="0">
+                  <a:latin typeface="Ramabhadra" panose="02000600000000000000" pitchFamily="2" charset="0"/>
+                  <a:cs typeface="Ramabhadra" panose="02000600000000000000" pitchFamily="2" charset="0"/>
+                </a:rPr>
+                <a:t>నీకే నా ఆరాధన (2)</a:t>
+              </a:r>
+            </a:p>
+            <a:p>
+              <a:pPr defTabSz="439781">
+                <a:defRPr/>
+              </a:pPr>
+              <a:r>
+                <a:rPr lang="te-IN" sz="2000" dirty="0">
+                  <a:latin typeface="Ramabhadra" panose="02000600000000000000" pitchFamily="2" charset="0"/>
+                  <a:cs typeface="Ramabhadra" panose="02000600000000000000" pitchFamily="2" charset="0"/>
+                </a:rPr>
+                <a:t>మహదానందమే నాలో పరవశమే</a:t>
+              </a:r>
+            </a:p>
+            <a:p>
+              <a:pPr defTabSz="439781">
+                <a:defRPr/>
+              </a:pPr>
+              <a:r>
+                <a:rPr lang="te-IN" sz="2000" dirty="0">
+                  <a:latin typeface="Ramabhadra" panose="02000600000000000000" pitchFamily="2" charset="0"/>
+                  <a:cs typeface="Ramabhadra" panose="02000600000000000000" pitchFamily="2" charset="0"/>
+                </a:rPr>
+                <a:t>నిన్ను స్తుతించిన ప్రతీక్షణం (2)</a:t>
+              </a:r>
+            </a:p>
+            <a:p>
+              <a:pPr defTabSz="439781">
+                <a:defRPr/>
+              </a:pPr>
+              <a:endParaRPr lang="te-IN" sz="2000" dirty="0">
                 <a:latin typeface="Ramabhadra" panose="02000600000000000000" pitchFamily="2" charset="0"/>
                 <a:cs typeface="Ramabhadra" panose="02000600000000000000" pitchFamily="2" charset="0"/>
               </a:endParaRPr>
@@ -4290,13 +4319,13 @@
                 <a:defRPr/>
               </a:pPr>
               <a:r>
-                <a:rPr lang="te-IN" sz="2600" dirty="0">
-                  <a:latin typeface="Ramabhadra" panose="02000600000000000000" pitchFamily="2" charset="0"/>
-                  <a:cs typeface="Ramabhadra" panose="02000600000000000000" pitchFamily="2" charset="0"/>
-                </a:rPr>
-                <a:t>సమస్తము నీకేనయా</a:t>
-              </a:r>
-              <a:endParaRPr lang="en-US" sz="2600" dirty="0">
+                <a:rPr lang="te-IN" sz="2000" dirty="0">
+                  <a:latin typeface="Ramabhadra" panose="02000600000000000000" pitchFamily="2" charset="0"/>
+                  <a:cs typeface="Ramabhadra" panose="02000600000000000000" pitchFamily="2" charset="0"/>
+                </a:rPr>
+                <a:t>ఎడారి త్రోవలో నే నడిచినా –</a:t>
+              </a:r>
+              <a:endParaRPr lang="en-IN" sz="2000" dirty="0">
                 <a:latin typeface="Ramabhadra" panose="02000600000000000000" pitchFamily="2" charset="0"/>
                 <a:cs typeface="Ramabhadra" panose="02000600000000000000" pitchFamily="2" charset="0"/>
               </a:endParaRPr>
@@ -4305,7 +4334,26 @@
               <a:pPr defTabSz="439781">
                 <a:defRPr/>
               </a:pPr>
-              <a:endParaRPr lang="en-US" sz="2600" dirty="0">
+              <a:r>
+                <a:rPr lang="te-IN" sz="2000" dirty="0">
+                  <a:latin typeface="Ramabhadra" panose="02000600000000000000" pitchFamily="2" charset="0"/>
+                  <a:cs typeface="Ramabhadra" panose="02000600000000000000" pitchFamily="2" charset="0"/>
+                </a:rPr>
+                <a:t>ఎరుగని మార్గములో నను నడిపినా</a:t>
+              </a:r>
+            </a:p>
+            <a:p>
+              <a:pPr defTabSz="439781">
+                <a:defRPr/>
+              </a:pPr>
+              <a:r>
+                <a:rPr lang="te-IN" sz="2000" dirty="0">
+                  <a:latin typeface="Ramabhadra" panose="02000600000000000000" pitchFamily="2" charset="0"/>
+                  <a:cs typeface="Ramabhadra" panose="02000600000000000000" pitchFamily="2" charset="0"/>
+                </a:rPr>
+                <a:t>నా ముందు నడచిన జయవీరుడా –</a:t>
+              </a:r>
+              <a:endParaRPr lang="en-IN" sz="2000" dirty="0">
                 <a:latin typeface="Ramabhadra" panose="02000600000000000000" pitchFamily="2" charset="0"/>
                 <a:cs typeface="Ramabhadra" panose="02000600000000000000" pitchFamily="2" charset="0"/>
               </a:endParaRPr>
@@ -4315,13 +4363,42 @@
                 <a:defRPr/>
               </a:pPr>
               <a:r>
-                <a:rPr lang="te-IN" sz="2600" dirty="0">
-                  <a:latin typeface="Ramabhadra" panose="02000600000000000000" pitchFamily="2" charset="0"/>
-                  <a:cs typeface="Ramabhadra" panose="02000600000000000000" pitchFamily="2" charset="0"/>
-                </a:rPr>
-                <a:t>నిజమైన దేవా నీవంటివాడు లేడు</a:t>
-              </a:r>
-              <a:endParaRPr lang="en-US" sz="2600" dirty="0">
+                <a:rPr lang="te-IN" sz="2000" dirty="0">
+                  <a:latin typeface="Ramabhadra" panose="02000600000000000000" pitchFamily="2" charset="0"/>
+                  <a:cs typeface="Ramabhadra" panose="02000600000000000000" pitchFamily="2" charset="0"/>
+                </a:rPr>
+                <a:t>నా విజయ సంకేతమా (2)</a:t>
+              </a:r>
+            </a:p>
+            <a:p>
+              <a:pPr defTabSz="439781">
+                <a:defRPr/>
+              </a:pPr>
+              <a:r>
+                <a:rPr lang="te-IN" sz="2000" dirty="0">
+                  <a:latin typeface="Ramabhadra" panose="02000600000000000000" pitchFamily="2" charset="0"/>
+                  <a:cs typeface="Ramabhadra" panose="02000600000000000000" pitchFamily="2" charset="0"/>
+                </a:rPr>
+                <a:t>నీవే నీవే – నా ఆనందము</a:t>
+              </a:r>
+            </a:p>
+            <a:p>
+              <a:pPr defTabSz="439781">
+                <a:defRPr/>
+              </a:pPr>
+              <a:r>
+                <a:rPr lang="te-IN" sz="2000" dirty="0">
+                  <a:latin typeface="Ramabhadra" panose="02000600000000000000" pitchFamily="2" charset="0"/>
+                  <a:cs typeface="Ramabhadra" panose="02000600000000000000" pitchFamily="2" charset="0"/>
+                </a:rPr>
+                <a:t>నీవే నీవే – నా ఆధారము (2)</a:t>
+              </a:r>
+            </a:p>
+            <a:p>
+              <a:pPr defTabSz="439781">
+                <a:defRPr/>
+              </a:pPr>
+              <a:endParaRPr lang="te-IN" sz="2000" dirty="0">
                 <a:latin typeface="Ramabhadra" panose="02000600000000000000" pitchFamily="2" charset="0"/>
                 <a:cs typeface="Ramabhadra" panose="02000600000000000000" pitchFamily="2" charset="0"/>
               </a:endParaRPr>
@@ -4331,13 +4408,25 @@
                 <a:defRPr/>
               </a:pPr>
               <a:r>
-                <a:rPr lang="te-IN" sz="2600" dirty="0">
-                  <a:latin typeface="Ramabhadra" panose="02000600000000000000" pitchFamily="2" charset="0"/>
-                  <a:cs typeface="Ramabhadra" panose="02000600000000000000" pitchFamily="2" charset="0"/>
-                </a:rPr>
-                <a:t>మహాత్మ్యము గల నిన్ను పోలినవాడెవడు</a:t>
-              </a:r>
-              <a:endParaRPr lang="en-US" sz="2600" dirty="0">
+                <a:rPr lang="te-IN" sz="2000" dirty="0">
+                  <a:latin typeface="Ramabhadra" panose="02000600000000000000" pitchFamily="2" charset="0"/>
+                  <a:cs typeface="Ramabhadra" panose="02000600000000000000" pitchFamily="2" charset="0"/>
+                </a:rPr>
+                <a:t>సంపూర్ణమైన నీ చిత్తమే – అనుకూలమైన సంకల్పమే</a:t>
+              </a:r>
+            </a:p>
+            <a:p>
+              <a:pPr defTabSz="439781">
+                <a:defRPr/>
+              </a:pPr>
+              <a:r>
+                <a:rPr lang="te-IN" sz="2000" dirty="0">
+                  <a:latin typeface="Ramabhadra" panose="02000600000000000000" pitchFamily="2" charset="0"/>
+                  <a:cs typeface="Ramabhadra" panose="02000600000000000000" pitchFamily="2" charset="0"/>
+                </a:rPr>
+                <a:t>జరిగించుచున్నావు నను విడువక –</a:t>
+              </a:r>
+              <a:endParaRPr lang="en-IN" sz="2000" dirty="0">
                 <a:latin typeface="Ramabhadra" panose="02000600000000000000" pitchFamily="2" charset="0"/>
                 <a:cs typeface="Ramabhadra" panose="02000600000000000000" pitchFamily="2" charset="0"/>
               </a:endParaRPr>
@@ -4347,101 +4436,35 @@
                 <a:defRPr/>
               </a:pPr>
               <a:r>
-                <a:rPr lang="te-IN" sz="2600" dirty="0">
-                  <a:latin typeface="Ramabhadra" panose="02000600000000000000" pitchFamily="2" charset="0"/>
-                  <a:cs typeface="Ramabhadra" panose="02000600000000000000" pitchFamily="2" charset="0"/>
-                </a:rPr>
-                <a:t>నీ నామము ఘనమైనదయా –</a:t>
-              </a:r>
-              <a:endParaRPr lang="en-US" sz="2600" dirty="0">
-                <a:latin typeface="Ramabhadra" panose="02000600000000000000" pitchFamily="2" charset="0"/>
-                <a:cs typeface="Ramabhadra" panose="02000600000000000000" pitchFamily="2" charset="0"/>
-              </a:endParaRPr>
+                <a:rPr lang="te-IN" sz="2000" dirty="0">
+                  <a:latin typeface="Ramabhadra" panose="02000600000000000000" pitchFamily="2" charset="0"/>
+                  <a:cs typeface="Ramabhadra" panose="02000600000000000000" pitchFamily="2" charset="0"/>
+                </a:rPr>
+                <a:t>నా ధైర్యము నీవేగా (2)</a:t>
+              </a:r>
             </a:p>
             <a:p>
               <a:pPr defTabSz="439781">
                 <a:defRPr/>
               </a:pPr>
               <a:r>
-                <a:rPr lang="te-IN" sz="2600" dirty="0">
-                  <a:latin typeface="Ramabhadra" panose="02000600000000000000" pitchFamily="2" charset="0"/>
-                  <a:cs typeface="Ramabhadra" panose="02000600000000000000" pitchFamily="2" charset="0"/>
-                </a:rPr>
-                <a:t>నరులు నీకు భయపడెదరయా</a:t>
-              </a:r>
-              <a:endParaRPr lang="en-US" sz="2600" dirty="0">
-                <a:latin typeface="Ramabhadra" panose="02000600000000000000" pitchFamily="2" charset="0"/>
-                <a:cs typeface="Ramabhadra" panose="02000600000000000000" pitchFamily="2" charset="0"/>
-              </a:endParaRPr>
-            </a:p>
-            <a:p>
-              <a:pPr marL="457200" indent="-457200" defTabSz="439781">
-                <a:buAutoNum type="arabicPeriod"/>
-                <a:defRPr/>
-              </a:pPr>
-              <a:endParaRPr lang="en-US" sz="2600" dirty="0">
-                <a:latin typeface="Ramabhadra" panose="02000600000000000000" pitchFamily="2" charset="0"/>
-                <a:cs typeface="Ramabhadra" panose="02000600000000000000" pitchFamily="2" charset="0"/>
-              </a:endParaRPr>
+                <a:rPr lang="te-IN" sz="2000" dirty="0">
+                  <a:latin typeface="Ramabhadra" panose="02000600000000000000" pitchFamily="2" charset="0"/>
+                  <a:cs typeface="Ramabhadra" panose="02000600000000000000" pitchFamily="2" charset="0"/>
+                </a:rPr>
+                <a:t>నీవే నీవే – నా జయగీతము</a:t>
+              </a:r>
             </a:p>
             <a:p>
               <a:pPr defTabSz="439781">
                 <a:defRPr/>
               </a:pPr>
               <a:r>
-                <a:rPr lang="te-IN" sz="2600" dirty="0">
-                  <a:latin typeface="Ramabhadra" panose="02000600000000000000" pitchFamily="2" charset="0"/>
-                  <a:cs typeface="Ramabhadra" panose="02000600000000000000" pitchFamily="2" charset="0"/>
-                </a:rPr>
-                <a:t>జనములకు రాజా జీవముగలిగిన నాథా</a:t>
-              </a:r>
-              <a:endParaRPr lang="en-US" sz="2600" dirty="0">
-                <a:latin typeface="Ramabhadra" panose="02000600000000000000" pitchFamily="2" charset="0"/>
-                <a:cs typeface="Ramabhadra" panose="02000600000000000000" pitchFamily="2" charset="0"/>
-              </a:endParaRPr>
-            </a:p>
-            <a:p>
-              <a:pPr defTabSz="439781">
-                <a:defRPr/>
-              </a:pPr>
-              <a:r>
-                <a:rPr lang="te-IN" sz="2600" dirty="0">
-                  <a:latin typeface="Ramabhadra" panose="02000600000000000000" pitchFamily="2" charset="0"/>
-                  <a:cs typeface="Ramabhadra" panose="02000600000000000000" pitchFamily="2" charset="0"/>
-                </a:rPr>
-                <a:t>సమస్తము నిర్మించినవాడవు నీవెగదా</a:t>
-              </a:r>
-              <a:endParaRPr lang="en-US" sz="2600" dirty="0">
-                <a:latin typeface="Ramabhadra" panose="02000600000000000000" pitchFamily="2" charset="0"/>
-                <a:cs typeface="Ramabhadra" panose="02000600000000000000" pitchFamily="2" charset="0"/>
-              </a:endParaRPr>
-            </a:p>
-            <a:p>
-              <a:pPr defTabSz="439781">
-                <a:defRPr/>
-              </a:pPr>
-              <a:r>
-                <a:rPr lang="te-IN" sz="2600" dirty="0">
-                  <a:latin typeface="Ramabhadra" panose="02000600000000000000" pitchFamily="2" charset="0"/>
-                  <a:cs typeface="Ramabhadra" panose="02000600000000000000" pitchFamily="2" charset="0"/>
-                </a:rPr>
-                <a:t>నీ ఉగ్రత తాళలేమయా –</a:t>
-              </a:r>
-              <a:endParaRPr lang="en-US" sz="2600" dirty="0">
-                <a:latin typeface="Ramabhadra" panose="02000600000000000000" pitchFamily="2" charset="0"/>
-                <a:cs typeface="Ramabhadra" panose="02000600000000000000" pitchFamily="2" charset="0"/>
-              </a:endParaRPr>
-            </a:p>
-            <a:p>
-              <a:pPr defTabSz="439781">
-                <a:defRPr/>
-              </a:pPr>
-              <a:r>
-                <a:rPr lang="te-IN" sz="2600" dirty="0">
-                  <a:latin typeface="Ramabhadra" panose="02000600000000000000" pitchFamily="2" charset="0"/>
-                  <a:cs typeface="Ramabhadra" panose="02000600000000000000" pitchFamily="2" charset="0"/>
-                </a:rPr>
-                <a:t>మేలు చేయగలవు నీవయా</a:t>
+                <a:rPr lang="te-IN" sz="2000" dirty="0">
+                  <a:latin typeface="Ramabhadra" panose="02000600000000000000" pitchFamily="2" charset="0"/>
+                  <a:cs typeface="Ramabhadra" panose="02000600000000000000" pitchFamily="2" charset="0"/>
+                </a:rPr>
+                <a:t>నీవే నీవే – నా స్తుతిగీతము (2)</a:t>
               </a:r>
             </a:p>
           </p:txBody>
@@ -4460,7 +4483,7 @@
           </p:nvSpPr>
           <p:spPr>
             <a:xfrm>
-              <a:off x="343961" y="326430"/>
+              <a:off x="4300012" y="286334"/>
               <a:ext cx="390525" cy="390525"/>
             </a:xfrm>
             <a:prstGeom prst="ellipse">

--- a/songsTemplate.pptx
+++ b/songsTemplate.pptx
@@ -255,7 +255,7 @@
           <a:p>
             <a:fld id="{F1102B08-ED9E-409F-B95F-09CAA1DAF6E0}" type="datetimeFigureOut">
               <a:rPr lang="en-IN" smtClean="0"/>
-              <a:t>14-12-2024</a:t>
+              <a:t>21-12-2024</a:t>
             </a:fld>
             <a:endParaRPr lang="en-IN"/>
           </a:p>
@@ -425,7 +425,7 @@
           <a:p>
             <a:fld id="{F1102B08-ED9E-409F-B95F-09CAA1DAF6E0}" type="datetimeFigureOut">
               <a:rPr lang="en-IN" smtClean="0"/>
-              <a:t>14-12-2024</a:t>
+              <a:t>21-12-2024</a:t>
             </a:fld>
             <a:endParaRPr lang="en-IN"/>
           </a:p>
@@ -605,7 +605,7 @@
           <a:p>
             <a:fld id="{F1102B08-ED9E-409F-B95F-09CAA1DAF6E0}" type="datetimeFigureOut">
               <a:rPr lang="en-IN" smtClean="0"/>
-              <a:t>14-12-2024</a:t>
+              <a:t>21-12-2024</a:t>
             </a:fld>
             <a:endParaRPr lang="en-IN"/>
           </a:p>
@@ -775,7 +775,7 @@
           <a:p>
             <a:fld id="{F1102B08-ED9E-409F-B95F-09CAA1DAF6E0}" type="datetimeFigureOut">
               <a:rPr lang="en-IN" smtClean="0"/>
-              <a:t>14-12-2024</a:t>
+              <a:t>21-12-2024</a:t>
             </a:fld>
             <a:endParaRPr lang="en-IN"/>
           </a:p>
@@ -1019,7 +1019,7 @@
           <a:p>
             <a:fld id="{F1102B08-ED9E-409F-B95F-09CAA1DAF6E0}" type="datetimeFigureOut">
               <a:rPr lang="en-IN" smtClean="0"/>
-              <a:t>14-12-2024</a:t>
+              <a:t>21-12-2024</a:t>
             </a:fld>
             <a:endParaRPr lang="en-IN"/>
           </a:p>
@@ -1251,7 +1251,7 @@
           <a:p>
             <a:fld id="{F1102B08-ED9E-409F-B95F-09CAA1DAF6E0}" type="datetimeFigureOut">
               <a:rPr lang="en-IN" smtClean="0"/>
-              <a:t>14-12-2024</a:t>
+              <a:t>21-12-2024</a:t>
             </a:fld>
             <a:endParaRPr lang="en-IN"/>
           </a:p>
@@ -1618,7 +1618,7 @@
           <a:p>
             <a:fld id="{F1102B08-ED9E-409F-B95F-09CAA1DAF6E0}" type="datetimeFigureOut">
               <a:rPr lang="en-IN" smtClean="0"/>
-              <a:t>14-12-2024</a:t>
+              <a:t>21-12-2024</a:t>
             </a:fld>
             <a:endParaRPr lang="en-IN"/>
           </a:p>
@@ -1736,7 +1736,7 @@
           <a:p>
             <a:fld id="{F1102B08-ED9E-409F-B95F-09CAA1DAF6E0}" type="datetimeFigureOut">
               <a:rPr lang="en-IN" smtClean="0"/>
-              <a:t>14-12-2024</a:t>
+              <a:t>21-12-2024</a:t>
             </a:fld>
             <a:endParaRPr lang="en-IN"/>
           </a:p>
@@ -1831,7 +1831,7 @@
           <a:p>
             <a:fld id="{F1102B08-ED9E-409F-B95F-09CAA1DAF6E0}" type="datetimeFigureOut">
               <a:rPr lang="en-IN" smtClean="0"/>
-              <a:t>14-12-2024</a:t>
+              <a:t>21-12-2024</a:t>
             </a:fld>
             <a:endParaRPr lang="en-IN"/>
           </a:p>
@@ -2108,7 +2108,7 @@
           <a:p>
             <a:fld id="{F1102B08-ED9E-409F-B95F-09CAA1DAF6E0}" type="datetimeFigureOut">
               <a:rPr lang="en-IN" smtClean="0"/>
-              <a:t>14-12-2024</a:t>
+              <a:t>21-12-2024</a:t>
             </a:fld>
             <a:endParaRPr lang="en-IN"/>
           </a:p>
@@ -2365,7 +2365,7 @@
           <a:p>
             <a:fld id="{F1102B08-ED9E-409F-B95F-09CAA1DAF6E0}" type="datetimeFigureOut">
               <a:rPr lang="en-IN" smtClean="0"/>
-              <a:t>14-12-2024</a:t>
+              <a:t>21-12-2024</a:t>
             </a:fld>
             <a:endParaRPr lang="en-IN"/>
           </a:p>
@@ -2578,7 +2578,7 @@
           <a:p>
             <a:fld id="{F1102B08-ED9E-409F-B95F-09CAA1DAF6E0}" type="datetimeFigureOut">
               <a:rPr lang="en-IN" smtClean="0"/>
-              <a:t>14-12-2024</a:t>
+              <a:t>21-12-2024</a:t>
             </a:fld>
             <a:endParaRPr lang="en-IN"/>
           </a:p>
@@ -3073,7 +3073,7 @@
           <p:spPr>
             <a:xfrm>
               <a:off x="272140" y="309857"/>
-              <a:ext cx="4483140" cy="6001643"/>
+              <a:ext cx="4483140" cy="5847755"/>
             </a:xfrm>
             <a:prstGeom prst="rect">
               <a:avLst/>
@@ -3090,82 +3090,78 @@
                 <a:defRPr/>
               </a:pPr>
               <a:r>
-                <a:rPr lang="te-IN" sz="2400" dirty="0">
-                  <a:latin typeface="Ramabhadra" panose="02000600000000000000" pitchFamily="2" charset="0"/>
-                  <a:cs typeface="Ramabhadra" panose="02000600000000000000" pitchFamily="2" charset="0"/>
-                </a:rPr>
-                <a:t>దేవా నా దేవా – నీవే నా కాపరి</a:t>
-              </a:r>
-              <a:br>
-                <a:rPr lang="te-IN" sz="2400" dirty="0">
-                  <a:latin typeface="Ramabhadra" panose="02000600000000000000" pitchFamily="2" charset="0"/>
-                  <a:cs typeface="Ramabhadra" panose="02000600000000000000" pitchFamily="2" charset="0"/>
-                </a:rPr>
-              </a:br>
-              <a:r>
-                <a:rPr lang="te-IN" sz="2400" dirty="0">
-                  <a:latin typeface="Ramabhadra" panose="02000600000000000000" pitchFamily="2" charset="0"/>
-                  <a:cs typeface="Ramabhadra" panose="02000600000000000000" pitchFamily="2" charset="0"/>
-                </a:rPr>
-                <a:t>నీ ప్రేమ నీ క్షమా – ఎంతో గొప్పది (2)</a:t>
-              </a:r>
-              <a:br>
-                <a:rPr lang="te-IN" sz="2400" dirty="0">
-                  <a:latin typeface="Ramabhadra" panose="02000600000000000000" pitchFamily="2" charset="0"/>
-                  <a:cs typeface="Ramabhadra" panose="02000600000000000000" pitchFamily="2" charset="0"/>
-                </a:rPr>
-              </a:br>
-              <a:r>
-                <a:rPr lang="te-IN" sz="2400" dirty="0">
-                  <a:latin typeface="Ramabhadra" panose="02000600000000000000" pitchFamily="2" charset="0"/>
-                  <a:cs typeface="Ramabhadra" panose="02000600000000000000" pitchFamily="2" charset="0"/>
-                </a:rPr>
-                <a:t>ఆరాధింతును హృదయాంతరంగములో</a:t>
-              </a:r>
-              <a:br>
-                <a:rPr lang="te-IN" sz="2400" dirty="0">
-                  <a:latin typeface="Ramabhadra" panose="02000600000000000000" pitchFamily="2" charset="0"/>
-                  <a:cs typeface="Ramabhadra" panose="02000600000000000000" pitchFamily="2" charset="0"/>
-                </a:rPr>
-              </a:br>
-              <a:r>
-                <a:rPr lang="te-IN" sz="2400" dirty="0">
-                  <a:latin typeface="Ramabhadra" panose="02000600000000000000" pitchFamily="2" charset="0"/>
-                  <a:cs typeface="Ramabhadra" panose="02000600000000000000" pitchFamily="2" charset="0"/>
-                </a:rPr>
-                <a:t>స్తుతించెదను నీ పాద సన్నిధిలో (2)</a:t>
-              </a:r>
-              <a:br>
-                <a:rPr lang="te-IN" sz="2400" dirty="0">
-                  <a:latin typeface="Ramabhadra" panose="02000600000000000000" pitchFamily="2" charset="0"/>
-                  <a:cs typeface="Ramabhadra" panose="02000600000000000000" pitchFamily="2" charset="0"/>
-                </a:rPr>
-              </a:br>
-              <a:r>
-                <a:rPr lang="te-IN" sz="2400" dirty="0">
-                  <a:latin typeface="Ramabhadra" panose="02000600000000000000" pitchFamily="2" charset="0"/>
-                  <a:cs typeface="Ramabhadra" panose="02000600000000000000" pitchFamily="2" charset="0"/>
-                </a:rPr>
-                <a:t>నీవే కదా దేవుడవు – (2)</a:t>
-              </a:r>
-            </a:p>
-            <a:p>
-              <a:pPr defTabSz="439781">
-                <a:defRPr/>
-              </a:pPr>
-              <a:r>
-                <a:rPr lang="te-IN" sz="2400" dirty="0">
-                  <a:latin typeface="Ramabhadra" panose="02000600000000000000" pitchFamily="2" charset="0"/>
-                  <a:cs typeface="Ramabhadra" panose="02000600000000000000" pitchFamily="2" charset="0"/>
-                </a:rPr>
-                <a:t>దేవా యేసు దేవా (4)     </a:t>
-              </a:r>
-            </a:p>
-            <a:p>
-              <a:pPr defTabSz="439781">
-                <a:defRPr/>
-              </a:pPr>
-              <a:endParaRPr lang="te-IN" sz="2400" dirty="0">
+                <a:rPr lang="te-IN" sz="2200" dirty="0">
+                  <a:latin typeface="Ramabhadra" panose="02000600000000000000" pitchFamily="2" charset="0"/>
+                  <a:cs typeface="Ramabhadra" panose="02000600000000000000" pitchFamily="2" charset="0"/>
+                </a:rPr>
+                <a:t>చాలిన దేవుడవు యేసు </a:t>
+              </a:r>
+            </a:p>
+            <a:p>
+              <a:pPr defTabSz="439781">
+                <a:defRPr/>
+              </a:pPr>
+              <a:r>
+                <a:rPr lang="te-IN" sz="2200" dirty="0">
+                  <a:latin typeface="Ramabhadra" panose="02000600000000000000" pitchFamily="2" charset="0"/>
+                  <a:cs typeface="Ramabhadra" panose="02000600000000000000" pitchFamily="2" charset="0"/>
+                </a:rPr>
+                <a:t>చాలిన దేవుడ నీవు</a:t>
+              </a:r>
+            </a:p>
+            <a:p>
+              <a:pPr defTabSz="439781">
+                <a:defRPr/>
+              </a:pPr>
+              <a:r>
+                <a:rPr lang="te-IN" sz="2200" dirty="0">
+                  <a:latin typeface="Ramabhadra" panose="02000600000000000000" pitchFamily="2" charset="0"/>
+                  <a:cs typeface="Ramabhadra" panose="02000600000000000000" pitchFamily="2" charset="0"/>
+                </a:rPr>
+                <a:t>వ్యాధి బాధ సమయములో</a:t>
+              </a:r>
+            </a:p>
+            <a:p>
+              <a:pPr defTabSz="439781">
+                <a:defRPr/>
+              </a:pPr>
+              <a:r>
+                <a:rPr lang="te-IN" sz="2200" dirty="0">
+                  <a:latin typeface="Ramabhadra" panose="02000600000000000000" pitchFamily="2" charset="0"/>
+                  <a:cs typeface="Ramabhadra" panose="02000600000000000000" pitchFamily="2" charset="0"/>
+                </a:rPr>
+                <a:t>కష్టసుడుల తరంగములో</a:t>
+              </a:r>
+            </a:p>
+            <a:p>
+              <a:pPr defTabSz="439781">
+                <a:defRPr/>
+              </a:pPr>
+              <a:r>
+                <a:rPr lang="te-IN" sz="2200" dirty="0">
+                  <a:latin typeface="Ramabhadra" panose="02000600000000000000" pitchFamily="2" charset="0"/>
+                  <a:cs typeface="Ramabhadra" panose="02000600000000000000" pitchFamily="2" charset="0"/>
+                </a:rPr>
+                <a:t>ఏమున్నా లేకున్నా ఏ స్ధితికైనా</a:t>
+              </a:r>
+            </a:p>
+            <a:p>
+              <a:pPr defTabSz="439781">
+                <a:defRPr/>
+              </a:pPr>
+              <a:r>
+                <a:rPr lang="te-IN" sz="2200" dirty="0">
+                  <a:latin typeface="Ramabhadra" panose="02000600000000000000" pitchFamily="2" charset="0"/>
+                  <a:cs typeface="Ramabhadra" panose="02000600000000000000" pitchFamily="2" charset="0"/>
+                </a:rPr>
+                <a:t>చాలిన దేవుడ నీవు</a:t>
+              </a:r>
+            </a:p>
+            <a:p>
+              <a:pPr defTabSz="439781">
+                <a:defRPr/>
+              </a:pPr>
+              <a:endParaRPr lang="te-IN" sz="2200" dirty="0">
                 <a:latin typeface="Ramabhadra" panose="02000600000000000000" pitchFamily="2" charset="0"/>
                 <a:cs typeface="Ramabhadra" panose="02000600000000000000" pitchFamily="2" charset="0"/>
               </a:endParaRPr>
@@ -3175,57 +3171,54 @@
                 <a:defRPr/>
               </a:pPr>
               <a:r>
-                <a:rPr lang="te-IN" sz="2400" dirty="0">
-                  <a:latin typeface="Ramabhadra" panose="02000600000000000000" pitchFamily="2" charset="0"/>
-                  <a:cs typeface="Ramabhadra" panose="02000600000000000000" pitchFamily="2" charset="0"/>
-                </a:rPr>
-                <a:t>పాపము నుండి విడిపించినావు</a:t>
-              </a:r>
-              <a:br>
-                <a:rPr lang="te-IN" sz="2400" dirty="0">
-                  <a:latin typeface="Ramabhadra" panose="02000600000000000000" pitchFamily="2" charset="0"/>
-                  <a:cs typeface="Ramabhadra" panose="02000600000000000000" pitchFamily="2" charset="0"/>
-                </a:rPr>
-              </a:br>
-              <a:r>
-                <a:rPr lang="te-IN" sz="2400" dirty="0">
-                  <a:latin typeface="Ramabhadra" panose="02000600000000000000" pitchFamily="2" charset="0"/>
-                  <a:cs typeface="Ramabhadra" panose="02000600000000000000" pitchFamily="2" charset="0"/>
-                </a:rPr>
-                <a:t>పరిశుద్ధుని చేసి ప్రేమించినావు (2)</a:t>
-              </a:r>
-              <a:br>
-                <a:rPr lang="te-IN" sz="2400" dirty="0">
-                  <a:latin typeface="Ramabhadra" panose="02000600000000000000" pitchFamily="2" charset="0"/>
-                  <a:cs typeface="Ramabhadra" panose="02000600000000000000" pitchFamily="2" charset="0"/>
-                </a:rPr>
-              </a:br>
-              <a:r>
-                <a:rPr lang="te-IN" sz="2400" dirty="0">
-                  <a:latin typeface="Ramabhadra" panose="02000600000000000000" pitchFamily="2" charset="0"/>
-                  <a:cs typeface="Ramabhadra" panose="02000600000000000000" pitchFamily="2" charset="0"/>
-                </a:rPr>
-                <a:t>నీవే కదా దేవుడవు – (2)</a:t>
-              </a:r>
-              <a:br>
-                <a:rPr lang="te-IN" sz="2400" dirty="0">
-                  <a:latin typeface="Ramabhadra" panose="02000600000000000000" pitchFamily="2" charset="0"/>
-                  <a:cs typeface="Ramabhadra" panose="02000600000000000000" pitchFamily="2" charset="0"/>
-                </a:rPr>
-              </a:br>
-              <a:r>
-                <a:rPr lang="te-IN" sz="2400" dirty="0">
-                  <a:latin typeface="Ramabhadra" panose="02000600000000000000" pitchFamily="2" charset="0"/>
-                  <a:cs typeface="Ramabhadra" panose="02000600000000000000" pitchFamily="2" charset="0"/>
-                </a:rPr>
-                <a:t>దేవా యేసు దేవా (4)       </a:t>
-              </a:r>
-            </a:p>
-            <a:p>
-              <a:pPr defTabSz="439781">
-                <a:defRPr/>
-              </a:pPr>
-              <a:endParaRPr lang="te-IN" sz="2400" dirty="0">
+                <a:rPr lang="te-IN" sz="2200" dirty="0">
+                  <a:latin typeface="Ramabhadra" panose="02000600000000000000" pitchFamily="2" charset="0"/>
+                  <a:cs typeface="Ramabhadra" panose="02000600000000000000" pitchFamily="2" charset="0"/>
+                </a:rPr>
+                <a:t>అంజూర చెట్లు పూయకున్నను</a:t>
+              </a:r>
+            </a:p>
+            <a:p>
+              <a:pPr defTabSz="439781">
+                <a:defRPr/>
+              </a:pPr>
+              <a:r>
+                <a:rPr lang="te-IN" sz="2200" dirty="0">
+                  <a:latin typeface="Ramabhadra" panose="02000600000000000000" pitchFamily="2" charset="0"/>
+                  <a:cs typeface="Ramabhadra" panose="02000600000000000000" pitchFamily="2" charset="0"/>
+                </a:rPr>
+                <a:t>ద్రాక్ష చెట్లు ఫలింపకున్నను</a:t>
+              </a:r>
+            </a:p>
+            <a:p>
+              <a:pPr defTabSz="439781">
+                <a:defRPr/>
+              </a:pPr>
+              <a:r>
+                <a:rPr lang="te-IN" sz="2200" dirty="0">
+                  <a:latin typeface="Ramabhadra" panose="02000600000000000000" pitchFamily="2" charset="0"/>
+                  <a:cs typeface="Ramabhadra" panose="02000600000000000000" pitchFamily="2" charset="0"/>
+                </a:rPr>
+                <a:t>చేనులోని పైరు పండకపోయినను</a:t>
+              </a:r>
+            </a:p>
+            <a:p>
+              <a:pPr defTabSz="439781">
+                <a:defRPr/>
+              </a:pPr>
+              <a:r>
+                <a:rPr lang="te-IN" sz="2200" dirty="0">
+                  <a:latin typeface="Ramabhadra" panose="02000600000000000000" pitchFamily="2" charset="0"/>
+                  <a:cs typeface="Ramabhadra" panose="02000600000000000000" pitchFamily="2" charset="0"/>
+                </a:rPr>
+                <a:t>శాలలోని పశువులు లేక పోయినను</a:t>
+              </a:r>
+            </a:p>
+            <a:p>
+              <a:pPr defTabSz="439781">
+                <a:defRPr/>
+              </a:pPr>
+              <a:endParaRPr lang="te-IN" sz="2200" dirty="0">
                 <a:latin typeface="Ramabhadra" panose="02000600000000000000" pitchFamily="2" charset="0"/>
                 <a:cs typeface="Ramabhadra" panose="02000600000000000000" pitchFamily="2" charset="0"/>
               </a:endParaRPr>
@@ -3235,50 +3228,63 @@
                 <a:defRPr/>
               </a:pPr>
               <a:r>
-                <a:rPr lang="te-IN" sz="2400" dirty="0">
-                  <a:latin typeface="Ramabhadra" panose="02000600000000000000" pitchFamily="2" charset="0"/>
-                  <a:cs typeface="Ramabhadra" panose="02000600000000000000" pitchFamily="2" charset="0"/>
-                </a:rPr>
-                <a:t>పరిశుద్ధాత్మను నాలో నింపావు</a:t>
-              </a:r>
-              <a:br>
-                <a:rPr lang="te-IN" sz="2400" dirty="0">
-                  <a:latin typeface="Ramabhadra" panose="02000600000000000000" pitchFamily="2" charset="0"/>
-                  <a:cs typeface="Ramabhadra" panose="02000600000000000000" pitchFamily="2" charset="0"/>
-                </a:rPr>
-              </a:br>
-              <a:r>
-                <a:rPr lang="te-IN" sz="2400" dirty="0">
-                  <a:latin typeface="Ramabhadra" panose="02000600000000000000" pitchFamily="2" charset="0"/>
-                  <a:cs typeface="Ramabhadra" panose="02000600000000000000" pitchFamily="2" charset="0"/>
-                </a:rPr>
-                <a:t>మట్టి దేహమును మహిమతో నింపావు (2)</a:t>
-              </a:r>
-              <a:br>
-                <a:rPr lang="te-IN" sz="2400" dirty="0">
-                  <a:latin typeface="Ramabhadra" panose="02000600000000000000" pitchFamily="2" charset="0"/>
-                  <a:cs typeface="Ramabhadra" panose="02000600000000000000" pitchFamily="2" charset="0"/>
-                </a:rPr>
-              </a:br>
-              <a:r>
-                <a:rPr lang="te-IN" sz="2400" dirty="0">
-                  <a:latin typeface="Ramabhadra" panose="02000600000000000000" pitchFamily="2" charset="0"/>
-                  <a:cs typeface="Ramabhadra" panose="02000600000000000000" pitchFamily="2" charset="0"/>
-                </a:rPr>
-                <a:t>నీవే కదా దేవుడవు – (2)</a:t>
-              </a:r>
-              <a:br>
-                <a:rPr lang="te-IN" sz="2400" dirty="0">
-                  <a:latin typeface="Ramabhadra" panose="02000600000000000000" pitchFamily="2" charset="0"/>
-                  <a:cs typeface="Ramabhadra" panose="02000600000000000000" pitchFamily="2" charset="0"/>
-                </a:rPr>
-              </a:br>
-              <a:r>
-                <a:rPr lang="te-IN" sz="2400" dirty="0">
-                  <a:latin typeface="Ramabhadra" panose="02000600000000000000" pitchFamily="2" charset="0"/>
-                  <a:cs typeface="Ramabhadra" panose="02000600000000000000" pitchFamily="2" charset="0"/>
-                </a:rPr>
-                <a:t>దేవా యేసు దేవా (4)       </a:t>
+                <a:rPr lang="te-IN" sz="2200" dirty="0">
+                  <a:latin typeface="Ramabhadra" panose="02000600000000000000" pitchFamily="2" charset="0"/>
+                  <a:cs typeface="Ramabhadra" panose="02000600000000000000" pitchFamily="2" charset="0"/>
+                </a:rPr>
+                <a:t>గాఢాంధకారాన పయనించిన </a:t>
+              </a:r>
+            </a:p>
+            <a:p>
+              <a:pPr defTabSz="439781">
+                <a:defRPr/>
+              </a:pPr>
+              <a:r>
+                <a:rPr lang="te-IN" sz="2200" dirty="0">
+                  <a:latin typeface="Ramabhadra" panose="02000600000000000000" pitchFamily="2" charset="0"/>
+                  <a:cs typeface="Ramabhadra" panose="02000600000000000000" pitchFamily="2" charset="0"/>
+                </a:rPr>
+                <a:t>పొంగు సాగరా లెదురైన</a:t>
+              </a:r>
+            </a:p>
+            <a:p>
+              <a:pPr defTabSz="439781">
+                <a:defRPr/>
+              </a:pPr>
+              <a:r>
+                <a:rPr lang="te-IN" sz="2200" dirty="0">
+                  <a:latin typeface="Ramabhadra" panose="02000600000000000000" pitchFamily="2" charset="0"/>
+                  <a:cs typeface="Ramabhadra" panose="02000600000000000000" pitchFamily="2" charset="0"/>
+                </a:rPr>
+                <a:t>లోకమంత ఒకటైన</a:t>
+              </a:r>
+              <a:endParaRPr lang="en-IN" sz="2200" dirty="0">
+                <a:latin typeface="Ramabhadra" panose="02000600000000000000" pitchFamily="2" charset="0"/>
+                <a:cs typeface="Ramabhadra" panose="02000600000000000000" pitchFamily="2" charset="0"/>
+              </a:endParaRPr>
+            </a:p>
+            <a:p>
+              <a:pPr defTabSz="439781">
+                <a:defRPr/>
+              </a:pPr>
+              <a:r>
+                <a:rPr lang="te-IN" sz="2200" dirty="0">
+                  <a:latin typeface="Ramabhadra" panose="02000600000000000000" pitchFamily="2" charset="0"/>
+                  <a:cs typeface="Ramabhadra" panose="02000600000000000000" pitchFamily="2" charset="0"/>
+                </a:rPr>
+                <a:t>అన్యాయ తీర్పుకు గురిచేసిన</a:t>
+              </a:r>
+            </a:p>
+            <a:p>
+              <a:pPr defTabSz="439781">
+                <a:defRPr/>
+              </a:pPr>
+              <a:r>
+                <a:rPr lang="te-IN" sz="2200" dirty="0">
+                  <a:latin typeface="Ramabhadra" panose="02000600000000000000" pitchFamily="2" charset="0"/>
+                  <a:cs typeface="Ramabhadra" panose="02000600000000000000" pitchFamily="2" charset="0"/>
+                </a:rPr>
+                <a:t>సత్యము పలుకుటచే నష్టము కలిగినను</a:t>
               </a:r>
             </a:p>
           </p:txBody>
@@ -3361,9 +3367,9 @@
         <p:grpSpPr>
           <a:xfrm>
             <a:off x="5104338" y="182031"/>
-            <a:ext cx="5703362" cy="6493935"/>
+            <a:ext cx="5693837" cy="6493935"/>
             <a:chOff x="160868" y="182032"/>
-            <a:chExt cx="5703362" cy="6493935"/>
+            <a:chExt cx="5693837" cy="6493935"/>
           </a:xfrm>
         </p:grpSpPr>
         <p:sp>
@@ -3435,8 +3441,8 @@
           </p:nvSpPr>
           <p:spPr>
             <a:xfrm>
-              <a:off x="249768" y="309858"/>
-              <a:ext cx="5614462" cy="5632311"/>
+              <a:off x="240243" y="276251"/>
+              <a:ext cx="5614462" cy="6232475"/>
             </a:xfrm>
             <a:prstGeom prst="rect">
               <a:avLst/>
@@ -3450,250 +3456,167 @@
             <a:lstStyle/>
             <a:p>
               <a:r>
-                <a:rPr lang="te-IN" dirty="0">
-                  <a:latin typeface="Ramabhadra" panose="02000600000000000000" pitchFamily="2" charset="0"/>
-                  <a:cs typeface="Ramabhadra" panose="02000600000000000000" pitchFamily="2" charset="0"/>
-                </a:rPr>
-                <a:t>ఘనమైనవి నీ కార్యములు నా యెడల</a:t>
-              </a:r>
-              <a:br>
-                <a:rPr lang="te-IN" dirty="0">
-                  <a:latin typeface="Ramabhadra" panose="02000600000000000000" pitchFamily="2" charset="0"/>
-                  <a:cs typeface="Ramabhadra" panose="02000600000000000000" pitchFamily="2" charset="0"/>
-                </a:rPr>
-              </a:br>
-              <a:r>
-                <a:rPr lang="te-IN" dirty="0">
-                  <a:latin typeface="Ramabhadra" panose="02000600000000000000" pitchFamily="2" charset="0"/>
-                  <a:cs typeface="Ramabhadra" panose="02000600000000000000" pitchFamily="2" charset="0"/>
-                </a:rPr>
-                <a:t>స్థిరమైనవి నీ ఆలోచనలు నా యేసయ్యా (2)</a:t>
-              </a:r>
-              <a:br>
-                <a:rPr lang="te-IN" dirty="0">
-                  <a:latin typeface="Ramabhadra" panose="02000600000000000000" pitchFamily="2" charset="0"/>
-                  <a:cs typeface="Ramabhadra" panose="02000600000000000000" pitchFamily="2" charset="0"/>
-                </a:rPr>
-              </a:br>
-              <a:r>
-                <a:rPr lang="te-IN" dirty="0">
-                  <a:latin typeface="Ramabhadra" panose="02000600000000000000" pitchFamily="2" charset="0"/>
-                  <a:cs typeface="Ramabhadra" panose="02000600000000000000" pitchFamily="2" charset="0"/>
-                </a:rPr>
-                <a:t>కృపలను పొందుచు కృతజ్ఞత కలిగి</a:t>
-              </a:r>
-              <a:br>
-                <a:rPr lang="te-IN" dirty="0">
-                  <a:latin typeface="Ramabhadra" panose="02000600000000000000" pitchFamily="2" charset="0"/>
-                  <a:cs typeface="Ramabhadra" panose="02000600000000000000" pitchFamily="2" charset="0"/>
-                </a:rPr>
-              </a:br>
-              <a:r>
-                <a:rPr lang="te-IN" dirty="0">
-                  <a:latin typeface="Ramabhadra" panose="02000600000000000000" pitchFamily="2" charset="0"/>
-                  <a:cs typeface="Ramabhadra" panose="02000600000000000000" pitchFamily="2" charset="0"/>
-                </a:rPr>
-                <a:t>స్తుతులర్పించెదను అన్నివేళలా (2)</a:t>
-              </a:r>
-              <a:br>
-                <a:rPr lang="te-IN" dirty="0">
-                  <a:latin typeface="Ramabhadra" panose="02000600000000000000" pitchFamily="2" charset="0"/>
-                  <a:cs typeface="Ramabhadra" panose="02000600000000000000" pitchFamily="2" charset="0"/>
-                </a:rPr>
-              </a:br>
-              <a:r>
-                <a:rPr lang="te-IN" dirty="0">
-                  <a:latin typeface="Ramabhadra" panose="02000600000000000000" pitchFamily="2" charset="0"/>
-                  <a:cs typeface="Ramabhadra" panose="02000600000000000000" pitchFamily="2" charset="0"/>
-                </a:rPr>
-                <a:t>అనుదినము నీ అనుగ్రహమే</a:t>
-              </a:r>
-              <a:br>
-                <a:rPr lang="te-IN" dirty="0">
-                  <a:latin typeface="Ramabhadra" panose="02000600000000000000" pitchFamily="2" charset="0"/>
-                  <a:cs typeface="Ramabhadra" panose="02000600000000000000" pitchFamily="2" charset="0"/>
-                </a:rPr>
-              </a:br>
-              <a:r>
-                <a:rPr lang="te-IN" dirty="0">
-                  <a:latin typeface="Ramabhadra" panose="02000600000000000000" pitchFamily="2" charset="0"/>
-                  <a:cs typeface="Ramabhadra" panose="02000600000000000000" pitchFamily="2" charset="0"/>
-                </a:rPr>
-                <a:t>ఆయుష్కాలము నీ వరమే (2)</a:t>
-              </a:r>
-            </a:p>
-            <a:p>
-              <a:endParaRPr lang="te-IN" dirty="0">
+                <a:rPr lang="te-IN" sz="2100" dirty="0">
+                  <a:latin typeface="Ramabhadra" panose="02000600000000000000" pitchFamily="2" charset="0"/>
+                  <a:cs typeface="Ramabhadra" panose="02000600000000000000" pitchFamily="2" charset="0"/>
+                </a:rPr>
+                <a:t>నీతో గడిపే ప్రతి క్షణము</a:t>
+              </a:r>
+            </a:p>
+            <a:p>
+              <a:r>
+                <a:rPr lang="te-IN" sz="2100" dirty="0">
+                  <a:latin typeface="Ramabhadra" panose="02000600000000000000" pitchFamily="2" charset="0"/>
+                  <a:cs typeface="Ramabhadra" panose="02000600000000000000" pitchFamily="2" charset="0"/>
+                </a:rPr>
+                <a:t>ఆనంద బాష్పాలు ఆగవయ్యా (2)</a:t>
+              </a:r>
+            </a:p>
+            <a:p>
+              <a:r>
+                <a:rPr lang="te-IN" sz="2100" dirty="0">
+                  <a:latin typeface="Ramabhadra" panose="02000600000000000000" pitchFamily="2" charset="0"/>
+                  <a:cs typeface="Ramabhadra" panose="02000600000000000000" pitchFamily="2" charset="0"/>
+                </a:rPr>
+                <a:t>కృప తలంచగా మేళ్లు యోచించగా (2)</a:t>
+              </a:r>
+            </a:p>
+            <a:p>
+              <a:r>
+                <a:rPr lang="te-IN" sz="2100" dirty="0">
+                  <a:latin typeface="Ramabhadra" panose="02000600000000000000" pitchFamily="2" charset="0"/>
+                  <a:cs typeface="Ramabhadra" panose="02000600000000000000" pitchFamily="2" charset="0"/>
+                </a:rPr>
+                <a:t>నా గలమాగదు స్తుతించక – నిను కీర్తించక</a:t>
+              </a:r>
+            </a:p>
+            <a:p>
+              <a:r>
+                <a:rPr lang="te-IN" sz="2100" dirty="0">
+                  <a:latin typeface="Ramabhadra" panose="02000600000000000000" pitchFamily="2" charset="0"/>
+                  <a:cs typeface="Ramabhadra" panose="02000600000000000000" pitchFamily="2" charset="0"/>
+                </a:rPr>
+                <a:t>యేసయ్యా యేసయ్యా – నా యేసయ్యా (4)</a:t>
+              </a:r>
+            </a:p>
+            <a:p>
+              <a:endParaRPr lang="te-IN" sz="2100" dirty="0">
                 <a:latin typeface="Ramabhadra" panose="02000600000000000000" pitchFamily="2" charset="0"/>
                 <a:cs typeface="Ramabhadra" panose="02000600000000000000" pitchFamily="2" charset="0"/>
               </a:endParaRPr>
             </a:p>
             <a:p>
               <a:r>
-                <a:rPr lang="te-IN" dirty="0">
-                  <a:latin typeface="Ramabhadra" panose="02000600000000000000" pitchFamily="2" charset="0"/>
-                  <a:cs typeface="Ramabhadra" panose="02000600000000000000" pitchFamily="2" charset="0"/>
-                </a:rPr>
-                <a:t>యే తెగులు సమీపించనీయక–</a:t>
-              </a:r>
-              <a:endParaRPr lang="en-IN" dirty="0">
+                <a:rPr lang="te-IN" sz="2100" dirty="0">
+                  <a:latin typeface="Ramabhadra" panose="02000600000000000000" pitchFamily="2" charset="0"/>
+                  <a:cs typeface="Ramabhadra" panose="02000600000000000000" pitchFamily="2" charset="0"/>
+                </a:rPr>
+                <a:t>మారా వంటి నా జీవితాన్ని</a:t>
+              </a:r>
+            </a:p>
+            <a:p>
+              <a:r>
+                <a:rPr lang="te-IN" sz="2100" dirty="0">
+                  <a:latin typeface="Ramabhadra" panose="02000600000000000000" pitchFamily="2" charset="0"/>
+                  <a:cs typeface="Ramabhadra" panose="02000600000000000000" pitchFamily="2" charset="0"/>
+                </a:rPr>
+                <a:t>మధురముగా మార్చి ఘనపరచినావు (2)</a:t>
+              </a:r>
+            </a:p>
+            <a:p>
+              <a:r>
+                <a:rPr lang="te-IN" sz="2100" dirty="0">
+                  <a:latin typeface="Ramabhadra" panose="02000600000000000000" pitchFamily="2" charset="0"/>
+                  <a:cs typeface="Ramabhadra" panose="02000600000000000000" pitchFamily="2" charset="0"/>
+                </a:rPr>
+                <a:t>నా ప్రేమ చేత కాదు</a:t>
+              </a:r>
+            </a:p>
+            <a:p>
+              <a:r>
+                <a:rPr lang="te-IN" sz="2100" dirty="0">
+                  <a:latin typeface="Ramabhadra" panose="02000600000000000000" pitchFamily="2" charset="0"/>
+                  <a:cs typeface="Ramabhadra" panose="02000600000000000000" pitchFamily="2" charset="0"/>
+                </a:rPr>
+                <a:t>నీవే నను ప్రేమించి (2)</a:t>
+              </a:r>
+            </a:p>
+            <a:p>
+              <a:r>
+                <a:rPr lang="te-IN" sz="2100" dirty="0">
+                  <a:latin typeface="Ramabhadra" panose="02000600000000000000" pitchFamily="2" charset="0"/>
+                  <a:cs typeface="Ramabhadra" panose="02000600000000000000" pitchFamily="2" charset="0"/>
+                </a:rPr>
+                <a:t>రక్తాన్ని చిందించి</a:t>
+              </a:r>
+            </a:p>
+            <a:p>
+              <a:r>
+                <a:rPr lang="te-IN" sz="2100" dirty="0">
+                  <a:latin typeface="Ramabhadra" panose="02000600000000000000" pitchFamily="2" charset="0"/>
+                  <a:cs typeface="Ramabhadra" panose="02000600000000000000" pitchFamily="2" charset="0"/>
+                </a:rPr>
+                <a:t>నన్ను రక్షించావు (2)</a:t>
+              </a:r>
+            </a:p>
+            <a:p>
+              <a:endParaRPr lang="te-IN" sz="2100" dirty="0">
                 <a:latin typeface="Ramabhadra" panose="02000600000000000000" pitchFamily="2" charset="0"/>
                 <a:cs typeface="Ramabhadra" panose="02000600000000000000" pitchFamily="2" charset="0"/>
               </a:endParaRPr>
             </a:p>
             <a:p>
               <a:r>
-                <a:rPr lang="te-IN" dirty="0">
-                  <a:latin typeface="Ramabhadra" panose="02000600000000000000" pitchFamily="2" charset="0"/>
-                  <a:cs typeface="Ramabhadra" panose="02000600000000000000" pitchFamily="2" charset="0"/>
-                </a:rPr>
-                <a:t>యే కీడైన</a:t>
-              </a:r>
-              <a:r>
-                <a:rPr lang="en-IN" dirty="0">
-                  <a:latin typeface="Ramabhadra" panose="02000600000000000000" pitchFamily="2" charset="0"/>
-                  <a:cs typeface="Ramabhadra" panose="02000600000000000000" pitchFamily="2" charset="0"/>
-                </a:rPr>
-                <a:t> </a:t>
-              </a:r>
-              <a:r>
-                <a:rPr lang="te-IN" dirty="0">
-                  <a:latin typeface="Ramabhadra" panose="02000600000000000000" pitchFamily="2" charset="0"/>
-                  <a:cs typeface="Ramabhadra" panose="02000600000000000000" pitchFamily="2" charset="0"/>
-                </a:rPr>
-                <a:t>దరిచేరనీయక</a:t>
-              </a:r>
-              <a:br>
-                <a:rPr lang="te-IN" dirty="0">
-                  <a:latin typeface="Ramabhadra" panose="02000600000000000000" pitchFamily="2" charset="0"/>
-                  <a:cs typeface="Ramabhadra" panose="02000600000000000000" pitchFamily="2" charset="0"/>
-                </a:rPr>
-              </a:br>
-              <a:r>
-                <a:rPr lang="te-IN" dirty="0">
-                  <a:latin typeface="Ramabhadra" panose="02000600000000000000" pitchFamily="2" charset="0"/>
-                  <a:cs typeface="Ramabhadra" panose="02000600000000000000" pitchFamily="2" charset="0"/>
-                </a:rPr>
-                <a:t>ఆపదలన్ని తొలగే వరకు–</a:t>
-              </a:r>
-              <a:endParaRPr lang="en-IN" dirty="0">
-                <a:latin typeface="Ramabhadra" panose="02000600000000000000" pitchFamily="2" charset="0"/>
-                <a:cs typeface="Ramabhadra" panose="02000600000000000000" pitchFamily="2" charset="0"/>
-              </a:endParaRPr>
-            </a:p>
-            <a:p>
-              <a:r>
-                <a:rPr lang="te-IN" dirty="0">
-                  <a:latin typeface="Ramabhadra" panose="02000600000000000000" pitchFamily="2" charset="0"/>
-                  <a:cs typeface="Ramabhadra" panose="02000600000000000000" pitchFamily="2" charset="0"/>
-                </a:rPr>
-                <a:t>ఆత్మలో నెమ్మది కలిగే వరకు (2)</a:t>
-              </a:r>
-              <a:br>
-                <a:rPr lang="te-IN" dirty="0">
-                  <a:latin typeface="Ramabhadra" panose="02000600000000000000" pitchFamily="2" charset="0"/>
-                  <a:cs typeface="Ramabhadra" panose="02000600000000000000" pitchFamily="2" charset="0"/>
-                </a:rPr>
-              </a:br>
-              <a:r>
-                <a:rPr lang="te-IN" dirty="0">
-                  <a:latin typeface="Ramabhadra" panose="02000600000000000000" pitchFamily="2" charset="0"/>
-                  <a:cs typeface="Ramabhadra" panose="02000600000000000000" pitchFamily="2" charset="0"/>
-                </a:rPr>
-                <a:t>నా భారము మోసి – బాసటగా నిలిచి – ఆదరించితివి</a:t>
-              </a:r>
-              <a:br>
-                <a:rPr lang="te-IN" dirty="0">
-                  <a:latin typeface="Ramabhadra" panose="02000600000000000000" pitchFamily="2" charset="0"/>
-                  <a:cs typeface="Ramabhadra" panose="02000600000000000000" pitchFamily="2" charset="0"/>
-                </a:rPr>
-              </a:br>
-              <a:r>
-                <a:rPr lang="te-IN" dirty="0">
-                  <a:latin typeface="Ramabhadra" panose="02000600000000000000" pitchFamily="2" charset="0"/>
-                  <a:cs typeface="Ramabhadra" panose="02000600000000000000" pitchFamily="2" charset="0"/>
-                </a:rPr>
-                <a:t>ఈ స్తుతి మహిమలు నీకే – చెల్లించెదను – జీవితాంతము</a:t>
-              </a:r>
-            </a:p>
-            <a:p>
-              <a:endParaRPr lang="te-IN" dirty="0">
-                <a:latin typeface="Ramabhadra" panose="02000600000000000000" pitchFamily="2" charset="0"/>
-                <a:cs typeface="Ramabhadra" panose="02000600000000000000" pitchFamily="2" charset="0"/>
-              </a:endParaRPr>
-            </a:p>
-            <a:p>
-              <a:r>
-                <a:rPr lang="te-IN" dirty="0">
-                  <a:latin typeface="Ramabhadra" panose="02000600000000000000" pitchFamily="2" charset="0"/>
-                  <a:cs typeface="Ramabhadra" panose="02000600000000000000" pitchFamily="2" charset="0"/>
-                </a:rPr>
-                <a:t>నాకు ఎత్తైన కోటవు నీవే –</a:t>
-              </a:r>
-              <a:endParaRPr lang="en-IN" dirty="0">
-                <a:latin typeface="Ramabhadra" panose="02000600000000000000" pitchFamily="2" charset="0"/>
-                <a:cs typeface="Ramabhadra" panose="02000600000000000000" pitchFamily="2" charset="0"/>
-              </a:endParaRPr>
-            </a:p>
-            <a:p>
-              <a:r>
-                <a:rPr lang="te-IN" dirty="0">
-                  <a:latin typeface="Ramabhadra" panose="02000600000000000000" pitchFamily="2" charset="0"/>
-                  <a:cs typeface="Ramabhadra" panose="02000600000000000000" pitchFamily="2" charset="0"/>
-                </a:rPr>
-                <a:t>నన్ను కాపాడు కేడెము నీవే</a:t>
-              </a:r>
-              <a:br>
-                <a:rPr lang="te-IN" dirty="0">
-                  <a:latin typeface="Ramabhadra" panose="02000600000000000000" pitchFamily="2" charset="0"/>
-                  <a:cs typeface="Ramabhadra" panose="02000600000000000000" pitchFamily="2" charset="0"/>
-                </a:rPr>
-              </a:br>
-              <a:r>
-                <a:rPr lang="te-IN" dirty="0">
-                  <a:latin typeface="Ramabhadra" panose="02000600000000000000" pitchFamily="2" charset="0"/>
-                  <a:cs typeface="Ramabhadra" panose="02000600000000000000" pitchFamily="2" charset="0"/>
-                </a:rPr>
-                <a:t>ఆశ్రయమైన బండవు నీవే –</a:t>
-              </a:r>
-              <a:endParaRPr lang="en-IN" dirty="0">
-                <a:latin typeface="Ramabhadra" panose="02000600000000000000" pitchFamily="2" charset="0"/>
-                <a:cs typeface="Ramabhadra" panose="02000600000000000000" pitchFamily="2" charset="0"/>
-              </a:endParaRPr>
-            </a:p>
-            <a:p>
-              <a:r>
-                <a:rPr lang="te-IN" dirty="0">
-                  <a:latin typeface="Ramabhadra" panose="02000600000000000000" pitchFamily="2" charset="0"/>
-                  <a:cs typeface="Ramabhadra" panose="02000600000000000000" pitchFamily="2" charset="0"/>
-                </a:rPr>
-                <a:t>శాశ్వత కృపకాధారము నీవే (2)</a:t>
-              </a:r>
-              <a:br>
-                <a:rPr lang="te-IN" dirty="0">
-                  <a:latin typeface="Ramabhadra" panose="02000600000000000000" pitchFamily="2" charset="0"/>
-                  <a:cs typeface="Ramabhadra" panose="02000600000000000000" pitchFamily="2" charset="0"/>
-                </a:rPr>
-              </a:br>
-              <a:r>
-                <a:rPr lang="te-IN" dirty="0">
-                  <a:latin typeface="Ramabhadra" panose="02000600000000000000" pitchFamily="2" charset="0"/>
-                  <a:cs typeface="Ramabhadra" panose="02000600000000000000" pitchFamily="2" charset="0"/>
-                </a:rPr>
-                <a:t>నా ప్రతిక్షణమును నీవు –దీవెనగా మార్చి–నడిపించుచున్నావు</a:t>
-              </a:r>
-              <a:br>
-                <a:rPr lang="te-IN" dirty="0">
-                  <a:latin typeface="Ramabhadra" panose="02000600000000000000" pitchFamily="2" charset="0"/>
-                  <a:cs typeface="Ramabhadra" panose="02000600000000000000" pitchFamily="2" charset="0"/>
-                </a:rPr>
-              </a:br>
-              <a:r>
-                <a:rPr lang="te-IN" dirty="0">
-                  <a:latin typeface="Ramabhadra" panose="02000600000000000000" pitchFamily="2" charset="0"/>
-                  <a:cs typeface="Ramabhadra" panose="02000600000000000000" pitchFamily="2" charset="0"/>
-                </a:rPr>
-                <a:t>ఈ స్తుతి మహిమలు నీకే – చెల్లించెదను – జీవితాంతము</a:t>
+                <a:rPr lang="te-IN" sz="2100" dirty="0">
+                  <a:latin typeface="Ramabhadra" panose="02000600000000000000" pitchFamily="2" charset="0"/>
+                  <a:cs typeface="Ramabhadra" panose="02000600000000000000" pitchFamily="2" charset="0"/>
+                </a:rPr>
+                <a:t>గమ్యమే లేని ఓ బాటసారిని</a:t>
+              </a:r>
+            </a:p>
+            <a:p>
+              <a:r>
+                <a:rPr lang="te-IN" sz="2100" dirty="0">
+                  <a:latin typeface="Ramabhadra" panose="02000600000000000000" pitchFamily="2" charset="0"/>
+                  <a:cs typeface="Ramabhadra" panose="02000600000000000000" pitchFamily="2" charset="0"/>
+                </a:rPr>
+                <a:t>నీతో ఉన్నాను భయము లేదన్నావు (2)</a:t>
+              </a:r>
+            </a:p>
+            <a:p>
+              <a:r>
+                <a:rPr lang="te-IN" sz="2100" dirty="0">
+                  <a:latin typeface="Ramabhadra" panose="02000600000000000000" pitchFamily="2" charset="0"/>
+                  <a:cs typeface="Ramabhadra" panose="02000600000000000000" pitchFamily="2" charset="0"/>
+                </a:rPr>
+                <a:t>నా శక్తి చేత కాదు</a:t>
+              </a:r>
+            </a:p>
+            <a:p>
+              <a:r>
+                <a:rPr lang="te-IN" sz="2100" dirty="0">
+                  <a:latin typeface="Ramabhadra" panose="02000600000000000000" pitchFamily="2" charset="0"/>
+                  <a:cs typeface="Ramabhadra" panose="02000600000000000000" pitchFamily="2" charset="0"/>
+                </a:rPr>
+                <a:t>నీ ఆత్మ ద్వారానే (2)</a:t>
+              </a:r>
+            </a:p>
+            <a:p>
+              <a:r>
+                <a:rPr lang="te-IN" sz="2100" dirty="0">
+                  <a:latin typeface="Ramabhadra" panose="02000600000000000000" pitchFamily="2" charset="0"/>
+                  <a:cs typeface="Ramabhadra" panose="02000600000000000000" pitchFamily="2" charset="0"/>
+                </a:rPr>
+                <a:t>వాగ్ధానము నెరవేర్చి</a:t>
+              </a:r>
+            </a:p>
+            <a:p>
+              <a:r>
+                <a:rPr lang="te-IN" sz="2100" dirty="0">
+                  <a:latin typeface="Ramabhadra" panose="02000600000000000000" pitchFamily="2" charset="0"/>
+                  <a:cs typeface="Ramabhadra" panose="02000600000000000000" pitchFamily="2" charset="0"/>
+                </a:rPr>
+                <a:t>వారసుని చేసావు (2)</a:t>
               </a:r>
             </a:p>
           </p:txBody>
@@ -3806,9 +3729,9 @@
         <p:grpSpPr>
           <a:xfrm>
             <a:off x="160868" y="182032"/>
-            <a:ext cx="4936066" cy="6493935"/>
+            <a:ext cx="4795835" cy="6493935"/>
             <a:chOff x="160868" y="182032"/>
-            <a:chExt cx="4936066" cy="6493935"/>
+            <a:chExt cx="4795835" cy="6493935"/>
           </a:xfrm>
         </p:grpSpPr>
         <p:sp>
@@ -3880,8 +3803,8 @@
           </p:nvSpPr>
           <p:spPr>
             <a:xfrm>
-              <a:off x="448734" y="799863"/>
-              <a:ext cx="4648200" cy="5262979"/>
+              <a:off x="308503" y="768683"/>
+              <a:ext cx="4648200" cy="4154984"/>
             </a:xfrm>
             <a:prstGeom prst="rect">
               <a:avLst/>
@@ -3898,54 +3821,30 @@
                 <a:defRPr/>
               </a:pPr>
               <a:r>
-                <a:rPr lang="te-IN" sz="2400" dirty="0">
-                  <a:latin typeface="Ramabhadra" panose="02000600000000000000" pitchFamily="2" charset="0"/>
-                  <a:cs typeface="Ramabhadra" panose="02000600000000000000" pitchFamily="2" charset="0"/>
-                </a:rPr>
-                <a:t>స్తుతియించెదా నీ నామం</a:t>
-              </a:r>
-            </a:p>
-            <a:p>
-              <a:pPr defTabSz="439781">
-                <a:defRPr/>
-              </a:pPr>
-              <a:r>
-                <a:rPr lang="te-IN" sz="2400" dirty="0">
-                  <a:latin typeface="Ramabhadra" panose="02000600000000000000" pitchFamily="2" charset="0"/>
-                  <a:cs typeface="Ramabhadra" panose="02000600000000000000" pitchFamily="2" charset="0"/>
-                </a:rPr>
-                <a:t>దేవా అనుదినం </a:t>
-              </a:r>
-            </a:p>
-            <a:p>
-              <a:pPr defTabSz="439781">
-                <a:defRPr/>
-              </a:pPr>
-              <a:r>
-                <a:rPr lang="te-IN" sz="2400" dirty="0">
-                  <a:latin typeface="Ramabhadra" panose="02000600000000000000" pitchFamily="2" charset="0"/>
-                  <a:cs typeface="Ramabhadra" panose="02000600000000000000" pitchFamily="2" charset="0"/>
-                </a:rPr>
-                <a:t>స్తుతియించెదా నీ నామం</a:t>
-              </a:r>
-            </a:p>
-            <a:p>
-              <a:pPr defTabSz="439781">
-                <a:defRPr/>
-              </a:pPr>
-              <a:r>
-                <a:rPr lang="te-IN" sz="2400" dirty="0">
-                  <a:latin typeface="Ramabhadra" panose="02000600000000000000" pitchFamily="2" charset="0"/>
-                  <a:cs typeface="Ramabhadra" panose="02000600000000000000" pitchFamily="2" charset="0"/>
-                </a:rPr>
-                <a:t>దేవా అనుక్షణం</a:t>
-              </a:r>
-            </a:p>
-            <a:p>
-              <a:pPr defTabSz="439781">
-                <a:defRPr/>
-              </a:pPr>
-              <a:endParaRPr lang="te-IN" sz="2400" dirty="0">
+                <a:rPr lang="te-IN" sz="2200" dirty="0">
+                  <a:latin typeface="Ramabhadra" panose="02000600000000000000" pitchFamily="2" charset="0"/>
+                  <a:cs typeface="Ramabhadra" panose="02000600000000000000" pitchFamily="2" charset="0"/>
+                </a:rPr>
+                <a:t>స్తుతి సింహాసనాసీనుడా</a:t>
+              </a:r>
+            </a:p>
+            <a:p>
+              <a:pPr defTabSz="439781">
+                <a:defRPr/>
+              </a:pPr>
+              <a:r>
+                <a:rPr lang="te-IN" sz="2200" dirty="0">
+                  <a:latin typeface="Ramabhadra" panose="02000600000000000000" pitchFamily="2" charset="0"/>
+                  <a:cs typeface="Ramabhadra" panose="02000600000000000000" pitchFamily="2" charset="0"/>
+                </a:rPr>
+                <a:t>యేసు రాజా దివ్య తేజా (2)</a:t>
+              </a:r>
+            </a:p>
+            <a:p>
+              <a:pPr defTabSz="439781">
+                <a:defRPr/>
+              </a:pPr>
+              <a:endParaRPr lang="te-IN" sz="2200" dirty="0">
                 <a:latin typeface="Ramabhadra" panose="02000600000000000000" pitchFamily="2" charset="0"/>
                 <a:cs typeface="Ramabhadra" panose="02000600000000000000" pitchFamily="2" charset="0"/>
               </a:endParaRPr>
@@ -3955,107 +3854,104 @@
                 <a:defRPr/>
               </a:pPr>
               <a:r>
-                <a:rPr lang="te-IN" sz="2400" dirty="0">
-                  <a:latin typeface="Ramabhadra" panose="02000600000000000000" pitchFamily="2" charset="0"/>
-                  <a:cs typeface="Ramabhadra" panose="02000600000000000000" pitchFamily="2" charset="0"/>
-                </a:rPr>
-                <a:t>దయతో కాపాడినావు</a:t>
-              </a:r>
-            </a:p>
-            <a:p>
-              <a:pPr defTabSz="439781">
-                <a:defRPr/>
-              </a:pPr>
-              <a:r>
-                <a:rPr lang="te-IN" sz="2400" dirty="0">
-                  <a:latin typeface="Ramabhadra" panose="02000600000000000000" pitchFamily="2" charset="0"/>
-                  <a:cs typeface="Ramabhadra" panose="02000600000000000000" pitchFamily="2" charset="0"/>
-                </a:rPr>
-                <a:t>కృపనే చూపించినావు (2) </a:t>
-              </a:r>
-            </a:p>
-            <a:p>
-              <a:pPr defTabSz="439781">
-                <a:defRPr/>
-              </a:pPr>
-              <a:r>
-                <a:rPr lang="te-IN" sz="2400" dirty="0">
-                  <a:latin typeface="Ramabhadra" panose="02000600000000000000" pitchFamily="2" charset="0"/>
-                  <a:cs typeface="Ramabhadra" panose="02000600000000000000" pitchFamily="2" charset="0"/>
-                </a:rPr>
-                <a:t>నిను నే మరువనేసు</a:t>
-              </a:r>
-            </a:p>
-            <a:p>
-              <a:pPr defTabSz="439781">
-                <a:defRPr/>
-              </a:pPr>
-              <a:r>
-                <a:rPr lang="te-IN" sz="2400" dirty="0">
-                  <a:latin typeface="Ramabhadra" panose="02000600000000000000" pitchFamily="2" charset="0"/>
-                  <a:cs typeface="Ramabhadra" panose="02000600000000000000" pitchFamily="2" charset="0"/>
-                </a:rPr>
-                <a:t>నిను నే విడువనేసు</a:t>
-              </a:r>
-            </a:p>
-            <a:p>
-              <a:pPr defTabSz="439781">
-                <a:defRPr/>
-              </a:pPr>
-              <a:r>
-                <a:rPr lang="te-IN" sz="2400" dirty="0">
-                  <a:latin typeface="Ramabhadra" panose="02000600000000000000" pitchFamily="2" charset="0"/>
-                  <a:cs typeface="Ramabhadra" panose="02000600000000000000" pitchFamily="2" charset="0"/>
-                </a:rPr>
-                <a:t> </a:t>
-              </a:r>
-            </a:p>
-            <a:p>
-              <a:pPr defTabSz="439781">
-                <a:defRPr/>
-              </a:pPr>
-              <a:r>
-                <a:rPr lang="te-IN" sz="2400" dirty="0">
-                  <a:latin typeface="Ramabhadra" panose="02000600000000000000" pitchFamily="2" charset="0"/>
-                  <a:cs typeface="Ramabhadra" panose="02000600000000000000" pitchFamily="2" charset="0"/>
-                </a:rPr>
-                <a:t>పాపినై యుండగ నేను</a:t>
-              </a:r>
-            </a:p>
-            <a:p>
-              <a:pPr defTabSz="439781">
-                <a:defRPr/>
-              </a:pPr>
-              <a:r>
-                <a:rPr lang="te-IN" sz="2400" dirty="0">
-                  <a:latin typeface="Ramabhadra" panose="02000600000000000000" pitchFamily="2" charset="0"/>
-                  <a:cs typeface="Ramabhadra" panose="02000600000000000000" pitchFamily="2" charset="0"/>
-                </a:rPr>
-                <a:t>రక్షించి దరి చేర్చినావు (2)  </a:t>
-              </a:r>
-            </a:p>
-            <a:p>
-              <a:pPr defTabSz="439781">
-                <a:defRPr/>
-              </a:pPr>
-              <a:r>
-                <a:rPr lang="te-IN" sz="2400" dirty="0">
-                  <a:latin typeface="Ramabhadra" panose="02000600000000000000" pitchFamily="2" charset="0"/>
-                  <a:cs typeface="Ramabhadra" panose="02000600000000000000" pitchFamily="2" charset="0"/>
-                </a:rPr>
-                <a:t>నిను నే మరువనేసు</a:t>
-              </a:r>
-            </a:p>
-            <a:p>
-              <a:pPr defTabSz="439781">
-                <a:defRPr/>
-              </a:pPr>
-              <a:r>
-                <a:rPr lang="te-IN" sz="2400" dirty="0">
-                  <a:latin typeface="Ramabhadra" panose="02000600000000000000" pitchFamily="2" charset="0"/>
-                  <a:cs typeface="Ramabhadra" panose="02000600000000000000" pitchFamily="2" charset="0"/>
-                </a:rPr>
-                <a:t>నిను నే విడువనేసు</a:t>
+                <a:rPr lang="te-IN" sz="2200" dirty="0">
+                  <a:latin typeface="Ramabhadra" panose="02000600000000000000" pitchFamily="2" charset="0"/>
+                  <a:cs typeface="Ramabhadra" panose="02000600000000000000" pitchFamily="2" charset="0"/>
+                </a:rPr>
+                <a:t>అద్వితీయుడవు పరిశుద్ధుడవు</a:t>
+              </a:r>
+            </a:p>
+            <a:p>
+              <a:pPr defTabSz="439781">
+                <a:defRPr/>
+              </a:pPr>
+              <a:r>
+                <a:rPr lang="te-IN" sz="2200" dirty="0">
+                  <a:latin typeface="Ramabhadra" panose="02000600000000000000" pitchFamily="2" charset="0"/>
+                  <a:cs typeface="Ramabhadra" panose="02000600000000000000" pitchFamily="2" charset="0"/>
+                </a:rPr>
+                <a:t>అతి సుందరుడవు నీవే ప్రభూ (2)</a:t>
+              </a:r>
+            </a:p>
+            <a:p>
+              <a:pPr defTabSz="439781">
+                <a:defRPr/>
+              </a:pPr>
+              <a:r>
+                <a:rPr lang="te-IN" sz="2200" dirty="0">
+                  <a:latin typeface="Ramabhadra" panose="02000600000000000000" pitchFamily="2" charset="0"/>
+                  <a:cs typeface="Ramabhadra" panose="02000600000000000000" pitchFamily="2" charset="0"/>
+                </a:rPr>
+                <a:t>నీతి న్యాయములు నీ సింహాసనాధారం (2)</a:t>
+              </a:r>
+            </a:p>
+            <a:p>
+              <a:pPr defTabSz="439781">
+                <a:defRPr/>
+              </a:pPr>
+              <a:r>
+                <a:rPr lang="te-IN" sz="2200" dirty="0">
+                  <a:latin typeface="Ramabhadra" panose="02000600000000000000" pitchFamily="2" charset="0"/>
+                  <a:cs typeface="Ramabhadra" panose="02000600000000000000" pitchFamily="2" charset="0"/>
+                </a:rPr>
+                <a:t>కృపా సత్యములు నీ సన్నిధానవర్తులు (2)</a:t>
+              </a:r>
+            </a:p>
+            <a:p>
+              <a:pPr defTabSz="439781">
+                <a:defRPr/>
+              </a:pPr>
+              <a:endParaRPr lang="te-IN" sz="2200" dirty="0">
+                <a:latin typeface="Ramabhadra" panose="02000600000000000000" pitchFamily="2" charset="0"/>
+                <a:cs typeface="Ramabhadra" panose="02000600000000000000" pitchFamily="2" charset="0"/>
+              </a:endParaRPr>
+            </a:p>
+            <a:p>
+              <a:pPr defTabSz="439781">
+                <a:defRPr/>
+              </a:pPr>
+              <a:r>
+                <a:rPr lang="te-IN" sz="2200" dirty="0">
+                  <a:latin typeface="Ramabhadra" panose="02000600000000000000" pitchFamily="2" charset="0"/>
+                  <a:cs typeface="Ramabhadra" panose="02000600000000000000" pitchFamily="2" charset="0"/>
+                </a:rPr>
+                <a:t>బలియు అర్పణ కోరవు నీవు</a:t>
+              </a:r>
+            </a:p>
+            <a:p>
+              <a:pPr defTabSz="439781">
+                <a:defRPr/>
+              </a:pPr>
+              <a:r>
+                <a:rPr lang="te-IN" sz="2200" dirty="0">
+                  <a:latin typeface="Ramabhadra" panose="02000600000000000000" pitchFamily="2" charset="0"/>
+                  <a:cs typeface="Ramabhadra" panose="02000600000000000000" pitchFamily="2" charset="0"/>
+                </a:rPr>
+                <a:t>బలియైతివి నా దోషముకై (2)</a:t>
+              </a:r>
+            </a:p>
+            <a:p>
+              <a:pPr defTabSz="439781">
+                <a:defRPr/>
+              </a:pPr>
+              <a:r>
+                <a:rPr lang="te-IN" sz="2200" dirty="0">
+                  <a:latin typeface="Ramabhadra" panose="02000600000000000000" pitchFamily="2" charset="0"/>
+                  <a:cs typeface="Ramabhadra" panose="02000600000000000000" pitchFamily="2" charset="0"/>
+                </a:rPr>
+                <a:t>నా హృదయమే నీ ప్రియమగు ఆలయం (2)</a:t>
+              </a:r>
+            </a:p>
+            <a:p>
+              <a:pPr defTabSz="439781">
+                <a:defRPr/>
+              </a:pPr>
+              <a:r>
+                <a:rPr lang="te-IN" sz="2200" dirty="0">
+                  <a:latin typeface="Ramabhadra" panose="02000600000000000000" pitchFamily="2" charset="0"/>
+                  <a:cs typeface="Ramabhadra" panose="02000600000000000000" pitchFamily="2" charset="0"/>
+                </a:rPr>
+                <a:t>స్తుతియాగమునే చేసెద నిరతం (2)</a:t>
               </a:r>
             </a:p>
           </p:txBody>
@@ -4138,9 +4034,9 @@
         <p:grpSpPr>
           <a:xfrm>
             <a:off x="5104338" y="182031"/>
-            <a:ext cx="4801662" cy="6493935"/>
+            <a:ext cx="4828492" cy="6538635"/>
             <a:chOff x="160868" y="182032"/>
-            <a:chExt cx="4801662" cy="6493935"/>
+            <a:chExt cx="4828492" cy="6538635"/>
           </a:xfrm>
         </p:grpSpPr>
         <p:sp>
@@ -4212,8 +4108,8 @@
           </p:nvSpPr>
           <p:spPr>
             <a:xfrm>
-              <a:off x="212729" y="286334"/>
-              <a:ext cx="4749801" cy="5940088"/>
+              <a:off x="239559" y="195804"/>
+              <a:ext cx="4749801" cy="6524863"/>
             </a:xfrm>
             <a:prstGeom prst="rect">
               <a:avLst/>
@@ -4230,13 +4126,66 @@
                 <a:defRPr/>
               </a:pPr>
               <a:r>
-                <a:rPr lang="te-IN" sz="2000" dirty="0">
-                  <a:latin typeface="Ramabhadra" panose="02000600000000000000" pitchFamily="2" charset="0"/>
-                  <a:cs typeface="Ramabhadra" panose="02000600000000000000" pitchFamily="2" charset="0"/>
-                </a:rPr>
-                <a:t>సుమధుర స్వరముల గానాలతో –</a:t>
-              </a:r>
-              <a:endParaRPr lang="en-IN" sz="2000" dirty="0">
+                <a:rPr lang="te-IN" sz="2200" dirty="0">
+                  <a:latin typeface="Ramabhadra" panose="02000600000000000000" pitchFamily="2" charset="0"/>
+                  <a:cs typeface="Ramabhadra" panose="02000600000000000000" pitchFamily="2" charset="0"/>
+                </a:rPr>
+                <a:t>అపారమైనది నీ కృప  </a:t>
+              </a:r>
+            </a:p>
+            <a:p>
+              <a:pPr defTabSz="439781">
+                <a:defRPr/>
+              </a:pPr>
+              <a:r>
+                <a:rPr lang="te-IN" sz="2200" dirty="0">
+                  <a:latin typeface="Ramabhadra" panose="02000600000000000000" pitchFamily="2" charset="0"/>
+                  <a:cs typeface="Ramabhadra" panose="02000600000000000000" pitchFamily="2" charset="0"/>
+                </a:rPr>
+                <a:t>అమూల్యమైనది నీ కృప</a:t>
+              </a:r>
+            </a:p>
+            <a:p>
+              <a:pPr defTabSz="439781">
+                <a:defRPr/>
+              </a:pPr>
+              <a:r>
+                <a:rPr lang="te-IN" sz="2200" dirty="0">
+                  <a:latin typeface="Ramabhadra" panose="02000600000000000000" pitchFamily="2" charset="0"/>
+                  <a:cs typeface="Ramabhadra" panose="02000600000000000000" pitchFamily="2" charset="0"/>
+                </a:rPr>
+                <a:t>జీవము కంటె ఉత్తమమైనది  </a:t>
+              </a:r>
+            </a:p>
+            <a:p>
+              <a:pPr defTabSz="439781">
+                <a:defRPr/>
+              </a:pPr>
+              <a:r>
+                <a:rPr lang="te-IN" sz="2200" dirty="0">
+                  <a:latin typeface="Ramabhadra" panose="02000600000000000000" pitchFamily="2" charset="0"/>
+                  <a:cs typeface="Ramabhadra" panose="02000600000000000000" pitchFamily="2" charset="0"/>
+                </a:rPr>
+                <a:t>పర్వత శిఖరము కన్న ఎతైనది</a:t>
+              </a:r>
+            </a:p>
+            <a:p>
+              <a:pPr defTabSz="439781">
+                <a:defRPr/>
+              </a:pPr>
+              <a:r>
+                <a:rPr lang="te-IN" sz="2200" dirty="0">
+                  <a:latin typeface="Ramabhadra" panose="02000600000000000000" pitchFamily="2" charset="0"/>
+                  <a:cs typeface="Ramabhadra" panose="02000600000000000000" pitchFamily="2" charset="0"/>
+                </a:rPr>
+                <a:t>కృప కృప కృప కృప నీకృప   ॥2॥</a:t>
+              </a:r>
+            </a:p>
+            <a:p>
+              <a:pPr defTabSz="439781">
+                <a:defRPr/>
+              </a:pPr>
+              <a:endParaRPr lang="te-IN" sz="2200" dirty="0">
                 <a:latin typeface="Ramabhadra" panose="02000600000000000000" pitchFamily="2" charset="0"/>
                 <a:cs typeface="Ramabhadra" panose="02000600000000000000" pitchFamily="2" charset="0"/>
               </a:endParaRPr>
@@ -4246,25 +4195,78 @@
                 <a:defRPr/>
               </a:pPr>
               <a:r>
-                <a:rPr lang="te-IN" sz="2000" dirty="0">
-                  <a:latin typeface="Ramabhadra" panose="02000600000000000000" pitchFamily="2" charset="0"/>
-                  <a:cs typeface="Ramabhadra" panose="02000600000000000000" pitchFamily="2" charset="0"/>
-                </a:rPr>
-                <a:t>వేలాది దూతల గళములతో</a:t>
-              </a:r>
-            </a:p>
-            <a:p>
-              <a:pPr defTabSz="439781">
-                <a:defRPr/>
-              </a:pPr>
-              <a:r>
-                <a:rPr lang="te-IN" sz="2000" dirty="0">
-                  <a:latin typeface="Ramabhadra" panose="02000600000000000000" pitchFamily="2" charset="0"/>
-                  <a:cs typeface="Ramabhadra" panose="02000600000000000000" pitchFamily="2" charset="0"/>
-                </a:rPr>
-                <a:t>కొనియాడబడుచున్న నా యేసయ్యా –</a:t>
-              </a:r>
-              <a:endParaRPr lang="en-IN" sz="2000" dirty="0">
+                <a:rPr lang="te-IN" sz="2200" dirty="0">
+                  <a:latin typeface="Ramabhadra" panose="02000600000000000000" pitchFamily="2" charset="0"/>
+                  <a:cs typeface="Ramabhadra" panose="02000600000000000000" pitchFamily="2" charset="0"/>
+                </a:rPr>
+                <a:t>పాప దాస్యములో చిక్కబడి యుండగా </a:t>
+              </a:r>
+            </a:p>
+            <a:p>
+              <a:pPr defTabSz="439781">
+                <a:defRPr/>
+              </a:pPr>
+              <a:r>
+                <a:rPr lang="te-IN" sz="2200" dirty="0">
+                  <a:latin typeface="Ramabhadra" panose="02000600000000000000" pitchFamily="2" charset="0"/>
+                  <a:cs typeface="Ramabhadra" panose="02000600000000000000" pitchFamily="2" charset="0"/>
+                </a:rPr>
+                <a:t>నను రక్షించెను నీకృప</a:t>
+              </a:r>
+            </a:p>
+            <a:p>
+              <a:pPr defTabSz="439781">
+                <a:defRPr/>
+              </a:pPr>
+              <a:r>
+                <a:rPr lang="te-IN" sz="2200" dirty="0">
+                  <a:latin typeface="Ramabhadra" panose="02000600000000000000" pitchFamily="2" charset="0"/>
+                  <a:cs typeface="Ramabhadra" panose="02000600000000000000" pitchFamily="2" charset="0"/>
+                </a:rPr>
+                <a:t>రోగబలహీనతందునే కృంగి యుండగా</a:t>
+              </a:r>
+            </a:p>
+            <a:p>
+              <a:pPr defTabSz="439781">
+                <a:defRPr/>
+              </a:pPr>
+              <a:r>
+                <a:rPr lang="te-IN" sz="2200" dirty="0">
+                  <a:latin typeface="Ramabhadra" panose="02000600000000000000" pitchFamily="2" charset="0"/>
+                  <a:cs typeface="Ramabhadra" panose="02000600000000000000" pitchFamily="2" charset="0"/>
+                </a:rPr>
+                <a:t>నను స్వస్థపరచును నీకృప</a:t>
+              </a:r>
+            </a:p>
+            <a:p>
+              <a:pPr defTabSz="439781">
+                <a:defRPr/>
+              </a:pPr>
+              <a:r>
+                <a:rPr lang="te-IN" sz="2200" dirty="0">
+                  <a:latin typeface="Ramabhadra" panose="02000600000000000000" pitchFamily="2" charset="0"/>
+                  <a:cs typeface="Ramabhadra" panose="02000600000000000000" pitchFamily="2" charset="0"/>
+                </a:rPr>
+                <a:t>మారా వంటి జీవితం </a:t>
+              </a:r>
+            </a:p>
+            <a:p>
+              <a:pPr defTabSz="439781">
+                <a:defRPr/>
+              </a:pPr>
+              <a:r>
+                <a:rPr lang="te-IN" sz="2200" dirty="0">
+                  <a:latin typeface="Ramabhadra" panose="02000600000000000000" pitchFamily="2" charset="0"/>
+                  <a:cs typeface="Ramabhadra" panose="02000600000000000000" pitchFamily="2" charset="0"/>
+                </a:rPr>
+                <a:t>మధురముగా మార్చెను నీ కృప</a:t>
+              </a:r>
+            </a:p>
+            <a:p>
+              <a:pPr defTabSz="439781">
+                <a:defRPr/>
+              </a:pPr>
+              <a:endParaRPr lang="te-IN" sz="2200" dirty="0">
                 <a:latin typeface="Ramabhadra" panose="02000600000000000000" pitchFamily="2" charset="0"/>
                 <a:cs typeface="Ramabhadra" panose="02000600000000000000" pitchFamily="2" charset="0"/>
               </a:endParaRPr>
@@ -4274,197 +4276,71 @@
                 <a:defRPr/>
               </a:pPr>
               <a:r>
-                <a:rPr lang="te-IN" sz="2000" dirty="0">
-                  <a:latin typeface="Ramabhadra" panose="02000600000000000000" pitchFamily="2" charset="0"/>
-                  <a:cs typeface="Ramabhadra" panose="02000600000000000000" pitchFamily="2" charset="0"/>
-                </a:rPr>
-                <a:t>నీకే నా ఆరాధన (2)</a:t>
-              </a:r>
-            </a:p>
-            <a:p>
-              <a:pPr defTabSz="439781">
-                <a:defRPr/>
-              </a:pPr>
-              <a:r>
-                <a:rPr lang="te-IN" sz="2000" dirty="0">
-                  <a:latin typeface="Ramabhadra" panose="02000600000000000000" pitchFamily="2" charset="0"/>
-                  <a:cs typeface="Ramabhadra" panose="02000600000000000000" pitchFamily="2" charset="0"/>
-                </a:rPr>
-                <a:t>మహదానందమే నాలో పరవశమే</a:t>
-              </a:r>
-            </a:p>
-            <a:p>
-              <a:pPr defTabSz="439781">
-                <a:defRPr/>
-              </a:pPr>
-              <a:r>
-                <a:rPr lang="te-IN" sz="2000" dirty="0">
-                  <a:latin typeface="Ramabhadra" panose="02000600000000000000" pitchFamily="2" charset="0"/>
-                  <a:cs typeface="Ramabhadra" panose="02000600000000000000" pitchFamily="2" charset="0"/>
-                </a:rPr>
-                <a:t>నిన్ను స్తుతించిన ప్రతీక్షణం (2)</a:t>
-              </a:r>
-            </a:p>
-            <a:p>
-              <a:pPr defTabSz="439781">
-                <a:defRPr/>
-              </a:pPr>
-              <a:endParaRPr lang="te-IN" sz="2000" dirty="0">
-                <a:latin typeface="Ramabhadra" panose="02000600000000000000" pitchFamily="2" charset="0"/>
-                <a:cs typeface="Ramabhadra" panose="02000600000000000000" pitchFamily="2" charset="0"/>
-              </a:endParaRPr>
-            </a:p>
-            <a:p>
-              <a:pPr defTabSz="439781">
-                <a:defRPr/>
-              </a:pPr>
-              <a:r>
-                <a:rPr lang="te-IN" sz="2000" dirty="0">
-                  <a:latin typeface="Ramabhadra" panose="02000600000000000000" pitchFamily="2" charset="0"/>
-                  <a:cs typeface="Ramabhadra" panose="02000600000000000000" pitchFamily="2" charset="0"/>
-                </a:rPr>
-                <a:t>ఎడారి త్రోవలో నే నడిచినా –</a:t>
-              </a:r>
-              <a:endParaRPr lang="en-IN" sz="2000" dirty="0">
-                <a:latin typeface="Ramabhadra" panose="02000600000000000000" pitchFamily="2" charset="0"/>
-                <a:cs typeface="Ramabhadra" panose="02000600000000000000" pitchFamily="2" charset="0"/>
-              </a:endParaRPr>
-            </a:p>
-            <a:p>
-              <a:pPr defTabSz="439781">
-                <a:defRPr/>
-              </a:pPr>
-              <a:r>
-                <a:rPr lang="te-IN" sz="2000" dirty="0">
-                  <a:latin typeface="Ramabhadra" panose="02000600000000000000" pitchFamily="2" charset="0"/>
-                  <a:cs typeface="Ramabhadra" panose="02000600000000000000" pitchFamily="2" charset="0"/>
-                </a:rPr>
-                <a:t>ఎరుగని మార్గములో నను నడిపినా</a:t>
-              </a:r>
-            </a:p>
-            <a:p>
-              <a:pPr defTabSz="439781">
-                <a:defRPr/>
-              </a:pPr>
-              <a:r>
-                <a:rPr lang="te-IN" sz="2000" dirty="0">
-                  <a:latin typeface="Ramabhadra" panose="02000600000000000000" pitchFamily="2" charset="0"/>
-                  <a:cs typeface="Ramabhadra" panose="02000600000000000000" pitchFamily="2" charset="0"/>
-                </a:rPr>
-                <a:t>నా ముందు నడచిన జయవీరుడా –</a:t>
-              </a:r>
-              <a:endParaRPr lang="en-IN" sz="2000" dirty="0">
-                <a:latin typeface="Ramabhadra" panose="02000600000000000000" pitchFamily="2" charset="0"/>
-                <a:cs typeface="Ramabhadra" panose="02000600000000000000" pitchFamily="2" charset="0"/>
-              </a:endParaRPr>
-            </a:p>
-            <a:p>
-              <a:pPr defTabSz="439781">
-                <a:defRPr/>
-              </a:pPr>
-              <a:r>
-                <a:rPr lang="te-IN" sz="2000" dirty="0">
-                  <a:latin typeface="Ramabhadra" panose="02000600000000000000" pitchFamily="2" charset="0"/>
-                  <a:cs typeface="Ramabhadra" panose="02000600000000000000" pitchFamily="2" charset="0"/>
-                </a:rPr>
-                <a:t>నా విజయ సంకేతమా (2)</a:t>
-              </a:r>
-            </a:p>
-            <a:p>
-              <a:pPr defTabSz="439781">
-                <a:defRPr/>
-              </a:pPr>
-              <a:r>
-                <a:rPr lang="te-IN" sz="2000" dirty="0">
-                  <a:latin typeface="Ramabhadra" panose="02000600000000000000" pitchFamily="2" charset="0"/>
-                  <a:cs typeface="Ramabhadra" panose="02000600000000000000" pitchFamily="2" charset="0"/>
-                </a:rPr>
-                <a:t>నీవే నీవే – నా ఆనందము</a:t>
-              </a:r>
-            </a:p>
-            <a:p>
-              <a:pPr defTabSz="439781">
-                <a:defRPr/>
-              </a:pPr>
-              <a:r>
-                <a:rPr lang="te-IN" sz="2000" dirty="0">
-                  <a:latin typeface="Ramabhadra" panose="02000600000000000000" pitchFamily="2" charset="0"/>
-                  <a:cs typeface="Ramabhadra" panose="02000600000000000000" pitchFamily="2" charset="0"/>
-                </a:rPr>
-                <a:t>నీవే నీవే – నా ఆధారము (2)</a:t>
-              </a:r>
-            </a:p>
-            <a:p>
-              <a:pPr defTabSz="439781">
-                <a:defRPr/>
-              </a:pPr>
-              <a:endParaRPr lang="te-IN" sz="2000" dirty="0">
-                <a:latin typeface="Ramabhadra" panose="02000600000000000000" pitchFamily="2" charset="0"/>
-                <a:cs typeface="Ramabhadra" panose="02000600000000000000" pitchFamily="2" charset="0"/>
-              </a:endParaRPr>
-            </a:p>
-            <a:p>
-              <a:pPr defTabSz="439781">
-                <a:defRPr/>
-              </a:pPr>
-              <a:r>
-                <a:rPr lang="te-IN" sz="2000" dirty="0">
-                  <a:latin typeface="Ramabhadra" panose="02000600000000000000" pitchFamily="2" charset="0"/>
-                  <a:cs typeface="Ramabhadra" panose="02000600000000000000" pitchFamily="2" charset="0"/>
-                </a:rPr>
-                <a:t>సంపూర్ణమైన నీ చిత్తమే – అనుకూలమైన సంకల్పమే</a:t>
-              </a:r>
-            </a:p>
-            <a:p>
-              <a:pPr defTabSz="439781">
-                <a:defRPr/>
-              </a:pPr>
-              <a:r>
-                <a:rPr lang="te-IN" sz="2000" dirty="0">
-                  <a:latin typeface="Ramabhadra" panose="02000600000000000000" pitchFamily="2" charset="0"/>
-                  <a:cs typeface="Ramabhadra" panose="02000600000000000000" pitchFamily="2" charset="0"/>
-                </a:rPr>
-                <a:t>జరిగించుచున్నావు నను విడువక –</a:t>
-              </a:r>
-              <a:endParaRPr lang="en-IN" sz="2000" dirty="0">
-                <a:latin typeface="Ramabhadra" panose="02000600000000000000" pitchFamily="2" charset="0"/>
-                <a:cs typeface="Ramabhadra" panose="02000600000000000000" pitchFamily="2" charset="0"/>
-              </a:endParaRPr>
-            </a:p>
-            <a:p>
-              <a:pPr defTabSz="439781">
-                <a:defRPr/>
-              </a:pPr>
-              <a:r>
-                <a:rPr lang="te-IN" sz="2000" dirty="0">
-                  <a:latin typeface="Ramabhadra" panose="02000600000000000000" pitchFamily="2" charset="0"/>
-                  <a:cs typeface="Ramabhadra" panose="02000600000000000000" pitchFamily="2" charset="0"/>
-                </a:rPr>
-                <a:t>నా ధైర్యము నీవేగా (2)</a:t>
-              </a:r>
-            </a:p>
-            <a:p>
-              <a:pPr defTabSz="439781">
-                <a:defRPr/>
-              </a:pPr>
-              <a:r>
-                <a:rPr lang="te-IN" sz="2000" dirty="0">
-                  <a:latin typeface="Ramabhadra" panose="02000600000000000000" pitchFamily="2" charset="0"/>
-                  <a:cs typeface="Ramabhadra" panose="02000600000000000000" pitchFamily="2" charset="0"/>
-                </a:rPr>
-                <a:t>నీవే నీవే – నా జయగీతము</a:t>
-              </a:r>
-            </a:p>
-            <a:p>
-              <a:pPr defTabSz="439781">
-                <a:defRPr/>
-              </a:pPr>
-              <a:r>
-                <a:rPr lang="te-IN" sz="2000" dirty="0">
-                  <a:latin typeface="Ramabhadra" panose="02000600000000000000" pitchFamily="2" charset="0"/>
-                  <a:cs typeface="Ramabhadra" panose="02000600000000000000" pitchFamily="2" charset="0"/>
-                </a:rPr>
-                <a:t>నీవే నీవే – నా స్తుతిగీతము (2)</a:t>
+                <a:rPr lang="te-IN" sz="2200" dirty="0">
+                  <a:latin typeface="Ramabhadra" panose="02000600000000000000" pitchFamily="2" charset="0"/>
+                  <a:cs typeface="Ramabhadra" panose="02000600000000000000" pitchFamily="2" charset="0"/>
+                </a:rPr>
+                <a:t>నా హీన స్థితిలో పడిపోయి ఉండగా</a:t>
+              </a:r>
+            </a:p>
+            <a:p>
+              <a:pPr defTabSz="439781">
+                <a:defRPr/>
+              </a:pPr>
+              <a:r>
+                <a:rPr lang="te-IN" sz="2200" dirty="0">
+                  <a:latin typeface="Ramabhadra" panose="02000600000000000000" pitchFamily="2" charset="0"/>
+                  <a:cs typeface="Ramabhadra" panose="02000600000000000000" pitchFamily="2" charset="0"/>
+                </a:rPr>
+                <a:t>నను లేవనెత్తేను నీ కృప</a:t>
+              </a:r>
+            </a:p>
+            <a:p>
+              <a:pPr defTabSz="439781">
+                <a:defRPr/>
+              </a:pPr>
+              <a:r>
+                <a:rPr lang="te-IN" sz="2200" dirty="0">
+                  <a:latin typeface="Ramabhadra" panose="02000600000000000000" pitchFamily="2" charset="0"/>
+                  <a:cs typeface="Ramabhadra" panose="02000600000000000000" pitchFamily="2" charset="0"/>
+                </a:rPr>
+                <a:t>ఆదరించు వారు లేక అలసియున్న నన్ను </a:t>
+              </a:r>
+            </a:p>
+            <a:p>
+              <a:pPr defTabSz="439781">
+                <a:defRPr/>
+              </a:pPr>
+              <a:r>
+                <a:rPr lang="te-IN" sz="2200" dirty="0">
+                  <a:latin typeface="Ramabhadra" panose="02000600000000000000" pitchFamily="2" charset="0"/>
+                  <a:cs typeface="Ramabhadra" panose="02000600000000000000" pitchFamily="2" charset="0"/>
+                </a:rPr>
+                <a:t>ఆదరించెను నీ కృప</a:t>
+              </a:r>
+            </a:p>
+            <a:p>
+              <a:pPr defTabSz="439781">
+                <a:defRPr/>
+              </a:pPr>
+              <a:r>
+                <a:rPr lang="te-IN" sz="2200" dirty="0">
+                  <a:latin typeface="Ramabhadra" panose="02000600000000000000" pitchFamily="2" charset="0"/>
+                  <a:cs typeface="Ramabhadra" panose="02000600000000000000" pitchFamily="2" charset="0"/>
+                </a:rPr>
+                <a:t>మోడైన నా జీవితం </a:t>
+              </a:r>
+            </a:p>
+            <a:p>
+              <a:pPr defTabSz="439781">
+                <a:defRPr/>
+              </a:pPr>
+              <a:r>
+                <a:rPr lang="te-IN" sz="2200" dirty="0">
+                  <a:latin typeface="Ramabhadra" panose="02000600000000000000" pitchFamily="2" charset="0"/>
+                  <a:cs typeface="Ramabhadra" panose="02000600000000000000" pitchFamily="2" charset="0"/>
+                </a:rPr>
+                <a:t>చిగురింపజేసెను నీ కృప </a:t>
               </a:r>
             </a:p>
           </p:txBody>

--- a/songsTemplate.pptx
+++ b/songsTemplate.pptx
@@ -255,7 +255,7 @@
           <a:p>
             <a:fld id="{F1102B08-ED9E-409F-B95F-09CAA1DAF6E0}" type="datetimeFigureOut">
               <a:rPr lang="en-IN" smtClean="0"/>
-              <a:t>21-12-2024</a:t>
+              <a:t>28-12-2024</a:t>
             </a:fld>
             <a:endParaRPr lang="en-IN"/>
           </a:p>
@@ -425,7 +425,7 @@
           <a:p>
             <a:fld id="{F1102B08-ED9E-409F-B95F-09CAA1DAF6E0}" type="datetimeFigureOut">
               <a:rPr lang="en-IN" smtClean="0"/>
-              <a:t>21-12-2024</a:t>
+              <a:t>28-12-2024</a:t>
             </a:fld>
             <a:endParaRPr lang="en-IN"/>
           </a:p>
@@ -605,7 +605,7 @@
           <a:p>
             <a:fld id="{F1102B08-ED9E-409F-B95F-09CAA1DAF6E0}" type="datetimeFigureOut">
               <a:rPr lang="en-IN" smtClean="0"/>
-              <a:t>21-12-2024</a:t>
+              <a:t>28-12-2024</a:t>
             </a:fld>
             <a:endParaRPr lang="en-IN"/>
           </a:p>
@@ -775,7 +775,7 @@
           <a:p>
             <a:fld id="{F1102B08-ED9E-409F-B95F-09CAA1DAF6E0}" type="datetimeFigureOut">
               <a:rPr lang="en-IN" smtClean="0"/>
-              <a:t>21-12-2024</a:t>
+              <a:t>28-12-2024</a:t>
             </a:fld>
             <a:endParaRPr lang="en-IN"/>
           </a:p>
@@ -1019,7 +1019,7 @@
           <a:p>
             <a:fld id="{F1102B08-ED9E-409F-B95F-09CAA1DAF6E0}" type="datetimeFigureOut">
               <a:rPr lang="en-IN" smtClean="0"/>
-              <a:t>21-12-2024</a:t>
+              <a:t>28-12-2024</a:t>
             </a:fld>
             <a:endParaRPr lang="en-IN"/>
           </a:p>
@@ -1251,7 +1251,7 @@
           <a:p>
             <a:fld id="{F1102B08-ED9E-409F-B95F-09CAA1DAF6E0}" type="datetimeFigureOut">
               <a:rPr lang="en-IN" smtClean="0"/>
-              <a:t>21-12-2024</a:t>
+              <a:t>28-12-2024</a:t>
             </a:fld>
             <a:endParaRPr lang="en-IN"/>
           </a:p>
@@ -1618,7 +1618,7 @@
           <a:p>
             <a:fld id="{F1102B08-ED9E-409F-B95F-09CAA1DAF6E0}" type="datetimeFigureOut">
               <a:rPr lang="en-IN" smtClean="0"/>
-              <a:t>21-12-2024</a:t>
+              <a:t>28-12-2024</a:t>
             </a:fld>
             <a:endParaRPr lang="en-IN"/>
           </a:p>
@@ -1736,7 +1736,7 @@
           <a:p>
             <a:fld id="{F1102B08-ED9E-409F-B95F-09CAA1DAF6E0}" type="datetimeFigureOut">
               <a:rPr lang="en-IN" smtClean="0"/>
-              <a:t>21-12-2024</a:t>
+              <a:t>28-12-2024</a:t>
             </a:fld>
             <a:endParaRPr lang="en-IN"/>
           </a:p>
@@ -1831,7 +1831,7 @@
           <a:p>
             <a:fld id="{F1102B08-ED9E-409F-B95F-09CAA1DAF6E0}" type="datetimeFigureOut">
               <a:rPr lang="en-IN" smtClean="0"/>
-              <a:t>21-12-2024</a:t>
+              <a:t>28-12-2024</a:t>
             </a:fld>
             <a:endParaRPr lang="en-IN"/>
           </a:p>
@@ -2108,7 +2108,7 @@
           <a:p>
             <a:fld id="{F1102B08-ED9E-409F-B95F-09CAA1DAF6E0}" type="datetimeFigureOut">
               <a:rPr lang="en-IN" smtClean="0"/>
-              <a:t>21-12-2024</a:t>
+              <a:t>28-12-2024</a:t>
             </a:fld>
             <a:endParaRPr lang="en-IN"/>
           </a:p>
@@ -2365,7 +2365,7 @@
           <a:p>
             <a:fld id="{F1102B08-ED9E-409F-B95F-09CAA1DAF6E0}" type="datetimeFigureOut">
               <a:rPr lang="en-IN" smtClean="0"/>
-              <a:t>21-12-2024</a:t>
+              <a:t>28-12-2024</a:t>
             </a:fld>
             <a:endParaRPr lang="en-IN"/>
           </a:p>
@@ -2578,7 +2578,7 @@
           <a:p>
             <a:fld id="{F1102B08-ED9E-409F-B95F-09CAA1DAF6E0}" type="datetimeFigureOut">
               <a:rPr lang="en-IN" smtClean="0"/>
-              <a:t>21-12-2024</a:t>
+              <a:t>28-12-2024</a:t>
             </a:fld>
             <a:endParaRPr lang="en-IN"/>
           </a:p>
@@ -3072,8 +3072,8 @@
           </p:nvSpPr>
           <p:spPr>
             <a:xfrm>
-              <a:off x="272140" y="309857"/>
-              <a:ext cx="4483140" cy="5847755"/>
+              <a:off x="318523" y="331486"/>
+              <a:ext cx="4483140" cy="5170646"/>
             </a:xfrm>
             <a:prstGeom prst="rect">
               <a:avLst/>
@@ -3094,7 +3094,7 @@
                   <a:latin typeface="Ramabhadra" panose="02000600000000000000" pitchFamily="2" charset="0"/>
                   <a:cs typeface="Ramabhadra" panose="02000600000000000000" pitchFamily="2" charset="0"/>
                 </a:rPr>
-                <a:t>చాలిన దేవుడవు యేసు </a:t>
+                <a:t>నా స్తుతుల పైన నివసించువాడా</a:t>
               </a:r>
             </a:p>
             <a:p>
@@ -3106,7 +3106,7 @@
                   <a:latin typeface="Ramabhadra" panose="02000600000000000000" pitchFamily="2" charset="0"/>
                   <a:cs typeface="Ramabhadra" panose="02000600000000000000" pitchFamily="2" charset="0"/>
                 </a:rPr>
-                <a:t>చాలిన దేవుడ నీవు</a:t>
+                <a:t>నా అంతరంగికుడా యేసయ్యా (2)</a:t>
               </a:r>
             </a:p>
             <a:p>
@@ -3118,7 +3118,7 @@
                   <a:latin typeface="Ramabhadra" panose="02000600000000000000" pitchFamily="2" charset="0"/>
                   <a:cs typeface="Ramabhadra" panose="02000600000000000000" pitchFamily="2" charset="0"/>
                 </a:rPr>
-                <a:t>వ్యాధి బాధ సమయములో</a:t>
+                <a:t>నీవు నా పక్షమై యున్నావు గనుకే</a:t>
               </a:r>
             </a:p>
             <a:p>
@@ -3130,31 +3130,7 @@
                   <a:latin typeface="Ramabhadra" panose="02000600000000000000" pitchFamily="2" charset="0"/>
                   <a:cs typeface="Ramabhadra" panose="02000600000000000000" pitchFamily="2" charset="0"/>
                 </a:rPr>
-                <a:t>కష్టసుడుల తరంగములో</a:t>
-              </a:r>
-            </a:p>
-            <a:p>
-              <a:pPr defTabSz="439781">
-                <a:defRPr/>
-              </a:pPr>
-              <a:r>
-                <a:rPr lang="te-IN" sz="2200" dirty="0">
-                  <a:latin typeface="Ramabhadra" panose="02000600000000000000" pitchFamily="2" charset="0"/>
-                  <a:cs typeface="Ramabhadra" panose="02000600000000000000" pitchFamily="2" charset="0"/>
-                </a:rPr>
-                <a:t>ఏమున్నా లేకున్నా ఏ స్ధితికైనా</a:t>
-              </a:r>
-            </a:p>
-            <a:p>
-              <a:pPr defTabSz="439781">
-                <a:defRPr/>
-              </a:pPr>
-              <a:r>
-                <a:rPr lang="te-IN" sz="2200" dirty="0">
-                  <a:latin typeface="Ramabhadra" panose="02000600000000000000" pitchFamily="2" charset="0"/>
-                  <a:cs typeface="Ramabhadra" panose="02000600000000000000" pitchFamily="2" charset="0"/>
-                </a:rPr>
-                <a:t>చాలిన దేవుడ నీవు</a:t>
+                <a:t>జయమే జయమే ఎల్లవేళలా జయమే (2)</a:t>
               </a:r>
             </a:p>
             <a:p>
@@ -3175,8 +3151,12 @@
                   <a:latin typeface="Ramabhadra" panose="02000600000000000000" pitchFamily="2" charset="0"/>
                   <a:cs typeface="Ramabhadra" panose="02000600000000000000" pitchFamily="2" charset="0"/>
                 </a:rPr>
-                <a:t>అంజూర చెట్లు పూయకున్నను</a:t>
-              </a:r>
+                <a:t>నన్ను నిర్మించిన రీతి తలచగా –</a:t>
+              </a:r>
+              <a:endParaRPr lang="en-IN" sz="2200" dirty="0">
+                <a:latin typeface="Ramabhadra" panose="02000600000000000000" pitchFamily="2" charset="0"/>
+                <a:cs typeface="Ramabhadra" panose="02000600000000000000" pitchFamily="2" charset="0"/>
+              </a:endParaRPr>
             </a:p>
             <a:p>
               <a:pPr defTabSz="439781">
@@ -3187,7 +3167,7 @@
                   <a:latin typeface="Ramabhadra" panose="02000600000000000000" pitchFamily="2" charset="0"/>
                   <a:cs typeface="Ramabhadra" panose="02000600000000000000" pitchFamily="2" charset="0"/>
                 </a:rPr>
-                <a:t>ద్రాక్ష చెట్లు ఫలింపకున్నను</a:t>
+                <a:t>ఎంతో ఆశ్చర్యమే</a:t>
               </a:r>
             </a:p>
             <a:p>
@@ -3199,7 +3179,7 @@
                   <a:latin typeface="Ramabhadra" panose="02000600000000000000" pitchFamily="2" charset="0"/>
                   <a:cs typeface="Ramabhadra" panose="02000600000000000000" pitchFamily="2" charset="0"/>
                 </a:rPr>
-                <a:t>చేనులోని పైరు పండకపోయినను</a:t>
+                <a:t>అది నా ఊహకే వింతైనది (2)</a:t>
               </a:r>
             </a:p>
             <a:p>
@@ -3211,7 +3191,19 @@
                   <a:latin typeface="Ramabhadra" panose="02000600000000000000" pitchFamily="2" charset="0"/>
                   <a:cs typeface="Ramabhadra" panose="02000600000000000000" pitchFamily="2" charset="0"/>
                 </a:rPr>
-                <a:t>శాలలోని పశువులు లేక పోయినను</a:t>
+                <a:t>ఎరుపెక్కిన శత్రువుల చూపు నుండి తప్పించి</a:t>
+              </a:r>
+            </a:p>
+            <a:p>
+              <a:pPr defTabSz="439781">
+                <a:defRPr/>
+              </a:pPr>
+              <a:r>
+                <a:rPr lang="te-IN" sz="2200" dirty="0">
+                  <a:latin typeface="Ramabhadra" panose="02000600000000000000" pitchFamily="2" charset="0"/>
+                  <a:cs typeface="Ramabhadra" panose="02000600000000000000" pitchFamily="2" charset="0"/>
+                </a:rPr>
+                <a:t>ఎనలేని ప్రేమను నాపై కురిపించావు (2)</a:t>
               </a:r>
             </a:p>
             <a:p>
@@ -3232,7 +3224,7 @@
                   <a:latin typeface="Ramabhadra" panose="02000600000000000000" pitchFamily="2" charset="0"/>
                   <a:cs typeface="Ramabhadra" panose="02000600000000000000" pitchFamily="2" charset="0"/>
                 </a:rPr>
-                <a:t>గాఢాంధకారాన పయనించిన </a:t>
+                <a:t>ద్రాక్షావల్లి అయిన నీలోనే - బహుగా వేరు పారగా</a:t>
               </a:r>
             </a:p>
             <a:p>
@@ -3244,7 +3236,7 @@
                   <a:latin typeface="Ramabhadra" panose="02000600000000000000" pitchFamily="2" charset="0"/>
                   <a:cs typeface="Ramabhadra" panose="02000600000000000000" pitchFamily="2" charset="0"/>
                 </a:rPr>
-                <a:t>పొంగు సాగరా లెదురైన</a:t>
+                <a:t>నీతో మధురమైన ఫలములీయనా (2)</a:t>
               </a:r>
             </a:p>
             <a:p>
@@ -3256,12 +3248,8 @@
                   <a:latin typeface="Ramabhadra" panose="02000600000000000000" pitchFamily="2" charset="0"/>
                   <a:cs typeface="Ramabhadra" panose="02000600000000000000" pitchFamily="2" charset="0"/>
                 </a:rPr>
-                <a:t>లోకమంత ఒకటైన</a:t>
-              </a:r>
-              <a:endParaRPr lang="en-IN" sz="2200" dirty="0">
-                <a:latin typeface="Ramabhadra" panose="02000600000000000000" pitchFamily="2" charset="0"/>
-                <a:cs typeface="Ramabhadra" panose="02000600000000000000" pitchFamily="2" charset="0"/>
-              </a:endParaRPr>
+                <a:t>ఉన్నత స్థలములపై నాకు స్థానమిచ్చితివే</a:t>
+              </a:r>
             </a:p>
             <a:p>
               <a:pPr defTabSz="439781">
@@ -3272,19 +3260,7 @@
                   <a:latin typeface="Ramabhadra" panose="02000600000000000000" pitchFamily="2" charset="0"/>
                   <a:cs typeface="Ramabhadra" panose="02000600000000000000" pitchFamily="2" charset="0"/>
                 </a:rPr>
-                <a:t>అన్యాయ తీర్పుకు గురిచేసిన</a:t>
-              </a:r>
-            </a:p>
-            <a:p>
-              <a:pPr defTabSz="439781">
-                <a:defRPr/>
-              </a:pPr>
-              <a:r>
-                <a:rPr lang="te-IN" sz="2200" dirty="0">
-                  <a:latin typeface="Ramabhadra" panose="02000600000000000000" pitchFamily="2" charset="0"/>
-                  <a:cs typeface="Ramabhadra" panose="02000600000000000000" pitchFamily="2" charset="0"/>
-                </a:rPr>
-                <a:t>సత్యము పలుకుటచే నష్టము కలిగినను</a:t>
+                <a:t>విజయుడా నీ కృప చాలును నా జీవితాన (2)</a:t>
               </a:r>
             </a:p>
           </p:txBody>
@@ -3442,7 +3418,7 @@
           <p:spPr>
             <a:xfrm>
               <a:off x="240243" y="276251"/>
-              <a:ext cx="5614462" cy="6232475"/>
+              <a:ext cx="5614462" cy="6247864"/>
             </a:xfrm>
             <a:prstGeom prst="rect">
               <a:avLst/>
@@ -3456,167 +3432,176 @@
             <a:lstStyle/>
             <a:p>
               <a:r>
-                <a:rPr lang="te-IN" sz="2100" dirty="0">
-                  <a:latin typeface="Ramabhadra" panose="02000600000000000000" pitchFamily="2" charset="0"/>
-                  <a:cs typeface="Ramabhadra" panose="02000600000000000000" pitchFamily="2" charset="0"/>
-                </a:rPr>
-                <a:t>నీతో గడిపే ప్రతి క్షణము</a:t>
-              </a:r>
-            </a:p>
-            <a:p>
-              <a:r>
-                <a:rPr lang="te-IN" sz="2100" dirty="0">
-                  <a:latin typeface="Ramabhadra" panose="02000600000000000000" pitchFamily="2" charset="0"/>
-                  <a:cs typeface="Ramabhadra" panose="02000600000000000000" pitchFamily="2" charset="0"/>
-                </a:rPr>
-                <a:t>ఆనంద బాష్పాలు ఆగవయ్యా (2)</a:t>
-              </a:r>
-            </a:p>
-            <a:p>
-              <a:r>
-                <a:rPr lang="te-IN" sz="2100" dirty="0">
-                  <a:latin typeface="Ramabhadra" panose="02000600000000000000" pitchFamily="2" charset="0"/>
-                  <a:cs typeface="Ramabhadra" panose="02000600000000000000" pitchFamily="2" charset="0"/>
-                </a:rPr>
-                <a:t>కృప తలంచగా మేళ్లు యోచించగా (2)</a:t>
-              </a:r>
-            </a:p>
-            <a:p>
-              <a:r>
-                <a:rPr lang="te-IN" sz="2100" dirty="0">
-                  <a:latin typeface="Ramabhadra" panose="02000600000000000000" pitchFamily="2" charset="0"/>
-                  <a:cs typeface="Ramabhadra" panose="02000600000000000000" pitchFamily="2" charset="0"/>
-                </a:rPr>
-                <a:t>నా గలమాగదు స్తుతించక – నిను కీర్తించక</a:t>
-              </a:r>
-            </a:p>
-            <a:p>
-              <a:r>
-                <a:rPr lang="te-IN" sz="2100" dirty="0">
-                  <a:latin typeface="Ramabhadra" panose="02000600000000000000" pitchFamily="2" charset="0"/>
-                  <a:cs typeface="Ramabhadra" panose="02000600000000000000" pitchFamily="2" charset="0"/>
-                </a:rPr>
-                <a:t>యేసయ్యా యేసయ్యా – నా యేసయ్యా (4)</a:t>
-              </a:r>
-            </a:p>
-            <a:p>
-              <a:endParaRPr lang="te-IN" sz="2100" dirty="0">
+                <a:rPr lang="te-IN" sz="2000" dirty="0">
+                  <a:latin typeface="Ramabhadra" panose="02000600000000000000" pitchFamily="2" charset="0"/>
+                  <a:cs typeface="Ramabhadra" panose="02000600000000000000" pitchFamily="2" charset="0"/>
+                </a:rPr>
+                <a:t>యేసయ్యా .. నీ కృప నాకు చాలయ్యా.. </a:t>
+              </a:r>
+            </a:p>
+            <a:p>
+              <a:r>
+                <a:rPr lang="te-IN" sz="2000" dirty="0">
+                  <a:latin typeface="Ramabhadra" panose="02000600000000000000" pitchFamily="2" charset="0"/>
+                  <a:cs typeface="Ramabhadra" panose="02000600000000000000" pitchFamily="2" charset="0"/>
+                </a:rPr>
+                <a:t>నీ కృప లేనిదే నే బ్రతుకలేనయ్యా … </a:t>
+              </a:r>
+            </a:p>
+            <a:p>
+              <a:r>
+                <a:rPr lang="te-IN" sz="2000" dirty="0">
+                  <a:latin typeface="Ramabhadra" panose="02000600000000000000" pitchFamily="2" charset="0"/>
+                  <a:cs typeface="Ramabhadra" panose="02000600000000000000" pitchFamily="2" charset="0"/>
+                </a:rPr>
+                <a:t>నీ కృప లేని క్షణము – నీ దయ లేని క్షణము </a:t>
+              </a:r>
+            </a:p>
+            <a:p>
+              <a:r>
+                <a:rPr lang="te-IN" sz="2000" dirty="0">
+                  <a:latin typeface="Ramabhadra" panose="02000600000000000000" pitchFamily="2" charset="0"/>
+                  <a:cs typeface="Ramabhadra" panose="02000600000000000000" pitchFamily="2" charset="0"/>
+                </a:rPr>
+                <a:t>నేనూహించలేను యేసయ్యా.. (2)</a:t>
+              </a:r>
+            </a:p>
+            <a:p>
+              <a:r>
+                <a:rPr lang="te-IN" sz="2000" dirty="0">
+                  <a:latin typeface="Ramabhadra" panose="02000600000000000000" pitchFamily="2" charset="0"/>
+                  <a:cs typeface="Ramabhadra" panose="02000600000000000000" pitchFamily="2" charset="0"/>
+                </a:rPr>
+                <a:t>యేసయ్యా నీ కృప నాకు చాలయ్యా –</a:t>
+              </a:r>
+            </a:p>
+            <a:p>
+              <a:r>
+                <a:rPr lang="te-IN" sz="2000" dirty="0">
+                  <a:latin typeface="Ramabhadra" panose="02000600000000000000" pitchFamily="2" charset="0"/>
+                  <a:cs typeface="Ramabhadra" panose="02000600000000000000" pitchFamily="2" charset="0"/>
+                </a:rPr>
+                <a:t>నీ కృప లేనిదే నేనుండలేనయ్యా (2) నీ కృప</a:t>
+              </a:r>
+            </a:p>
+            <a:p>
+              <a:endParaRPr lang="te-IN" sz="2000" dirty="0">
                 <a:latin typeface="Ramabhadra" panose="02000600000000000000" pitchFamily="2" charset="0"/>
                 <a:cs typeface="Ramabhadra" panose="02000600000000000000" pitchFamily="2" charset="0"/>
               </a:endParaRPr>
             </a:p>
             <a:p>
               <a:r>
-                <a:rPr lang="te-IN" sz="2100" dirty="0">
-                  <a:latin typeface="Ramabhadra" panose="02000600000000000000" pitchFamily="2" charset="0"/>
-                  <a:cs typeface="Ramabhadra" panose="02000600000000000000" pitchFamily="2" charset="0"/>
-                </a:rPr>
-                <a:t>మారా వంటి నా జీవితాన్ని</a:t>
-              </a:r>
-            </a:p>
-            <a:p>
-              <a:r>
-                <a:rPr lang="te-IN" sz="2100" dirty="0">
-                  <a:latin typeface="Ramabhadra" panose="02000600000000000000" pitchFamily="2" charset="0"/>
-                  <a:cs typeface="Ramabhadra" panose="02000600000000000000" pitchFamily="2" charset="0"/>
-                </a:rPr>
-                <a:t>మధురముగా మార్చి ఘనపరచినావు (2)</a:t>
-              </a:r>
-            </a:p>
-            <a:p>
-              <a:r>
-                <a:rPr lang="te-IN" sz="2100" dirty="0">
-                  <a:latin typeface="Ramabhadra" panose="02000600000000000000" pitchFamily="2" charset="0"/>
-                  <a:cs typeface="Ramabhadra" panose="02000600000000000000" pitchFamily="2" charset="0"/>
-                </a:rPr>
-                <a:t>నా ప్రేమ చేత కాదు</a:t>
-              </a:r>
-            </a:p>
-            <a:p>
-              <a:r>
-                <a:rPr lang="te-IN" sz="2100" dirty="0">
-                  <a:latin typeface="Ramabhadra" panose="02000600000000000000" pitchFamily="2" charset="0"/>
-                  <a:cs typeface="Ramabhadra" panose="02000600000000000000" pitchFamily="2" charset="0"/>
-                </a:rPr>
-                <a:t>నీవే నను ప్రేమించి (2)</a:t>
-              </a:r>
-            </a:p>
-            <a:p>
-              <a:r>
-                <a:rPr lang="te-IN" sz="2100" dirty="0">
-                  <a:latin typeface="Ramabhadra" panose="02000600000000000000" pitchFamily="2" charset="0"/>
-                  <a:cs typeface="Ramabhadra" panose="02000600000000000000" pitchFamily="2" charset="0"/>
-                </a:rPr>
-                <a:t>రక్తాన్ని చిందించి</a:t>
-              </a:r>
-            </a:p>
-            <a:p>
-              <a:r>
-                <a:rPr lang="te-IN" sz="2100" dirty="0">
-                  <a:latin typeface="Ramabhadra" panose="02000600000000000000" pitchFamily="2" charset="0"/>
-                  <a:cs typeface="Ramabhadra" panose="02000600000000000000" pitchFamily="2" charset="0"/>
-                </a:rPr>
-                <a:t>నన్ను రక్షించావు (2)</a:t>
-              </a:r>
-            </a:p>
-            <a:p>
-              <a:endParaRPr lang="te-IN" sz="2100" dirty="0">
+                <a:rPr lang="te-IN" sz="2000" dirty="0">
+                  <a:latin typeface="Ramabhadra" panose="02000600000000000000" pitchFamily="2" charset="0"/>
+                  <a:cs typeface="Ramabhadra" panose="02000600000000000000" pitchFamily="2" charset="0"/>
+                </a:rPr>
+                <a:t>మహిమను విడిచి – మహిలోకి దిగివచ్చి </a:t>
+              </a:r>
+            </a:p>
+            <a:p>
+              <a:r>
+                <a:rPr lang="te-IN" sz="2000" dirty="0">
+                  <a:latin typeface="Ramabhadra" panose="02000600000000000000" pitchFamily="2" charset="0"/>
+                  <a:cs typeface="Ramabhadra" panose="02000600000000000000" pitchFamily="2" charset="0"/>
+                </a:rPr>
+                <a:t>మార్గముగా మారి – మనిషిగ మార్చావు </a:t>
+              </a:r>
+            </a:p>
+            <a:p>
+              <a:r>
+                <a:rPr lang="te-IN" sz="2000" dirty="0">
+                  <a:latin typeface="Ramabhadra" panose="02000600000000000000" pitchFamily="2" charset="0"/>
+                  <a:cs typeface="Ramabhadra" panose="02000600000000000000" pitchFamily="2" charset="0"/>
+                </a:rPr>
+                <a:t>మహినే నీవు మాధుర్యముగ మార్చి </a:t>
+              </a:r>
+            </a:p>
+            <a:p>
+              <a:r>
+                <a:rPr lang="te-IN" sz="2000" dirty="0">
+                  <a:latin typeface="Ramabhadra" panose="02000600000000000000" pitchFamily="2" charset="0"/>
+                  <a:cs typeface="Ramabhadra" panose="02000600000000000000" pitchFamily="2" charset="0"/>
+                </a:rPr>
+                <a:t>మాదిరి చూపి మరు రూపమిచ్చావు(2)</a:t>
+              </a:r>
+            </a:p>
+            <a:p>
+              <a:r>
+                <a:rPr lang="te-IN" sz="2000" dirty="0">
+                  <a:latin typeface="Ramabhadra" panose="02000600000000000000" pitchFamily="2" charset="0"/>
+                  <a:cs typeface="Ramabhadra" panose="02000600000000000000" pitchFamily="2" charset="0"/>
+                </a:rPr>
+                <a:t>మహిమలో నేను మహిమను పొంద </a:t>
+              </a:r>
+            </a:p>
+            <a:p>
+              <a:r>
+                <a:rPr lang="te-IN" sz="2000" dirty="0">
+                  <a:latin typeface="Ramabhadra" panose="02000600000000000000" pitchFamily="2" charset="0"/>
+                  <a:cs typeface="Ramabhadra" panose="02000600000000000000" pitchFamily="2" charset="0"/>
+                </a:rPr>
+                <a:t>మహిమగ మార్చింది నీకృప (2) యేసయ్యా నీ కృప</a:t>
+              </a:r>
+            </a:p>
+            <a:p>
+              <a:endParaRPr lang="te-IN" sz="2000" dirty="0">
                 <a:latin typeface="Ramabhadra" panose="02000600000000000000" pitchFamily="2" charset="0"/>
                 <a:cs typeface="Ramabhadra" panose="02000600000000000000" pitchFamily="2" charset="0"/>
               </a:endParaRPr>
             </a:p>
             <a:p>
               <a:r>
-                <a:rPr lang="te-IN" sz="2100" dirty="0">
-                  <a:latin typeface="Ramabhadra" panose="02000600000000000000" pitchFamily="2" charset="0"/>
-                  <a:cs typeface="Ramabhadra" panose="02000600000000000000" pitchFamily="2" charset="0"/>
-                </a:rPr>
-                <a:t>గమ్యమే లేని ఓ బాటసారిని</a:t>
-              </a:r>
-            </a:p>
-            <a:p>
-              <a:r>
-                <a:rPr lang="te-IN" sz="2100" dirty="0">
-                  <a:latin typeface="Ramabhadra" panose="02000600000000000000" pitchFamily="2" charset="0"/>
-                  <a:cs typeface="Ramabhadra" panose="02000600000000000000" pitchFamily="2" charset="0"/>
-                </a:rPr>
-                <a:t>నీతో ఉన్నాను భయము లేదన్నావు (2)</a:t>
-              </a:r>
-            </a:p>
-            <a:p>
-              <a:r>
-                <a:rPr lang="te-IN" sz="2100" dirty="0">
-                  <a:latin typeface="Ramabhadra" panose="02000600000000000000" pitchFamily="2" charset="0"/>
-                  <a:cs typeface="Ramabhadra" panose="02000600000000000000" pitchFamily="2" charset="0"/>
-                </a:rPr>
-                <a:t>నా శక్తి చేత కాదు</a:t>
-              </a:r>
-            </a:p>
-            <a:p>
-              <a:r>
-                <a:rPr lang="te-IN" sz="2100" dirty="0">
-                  <a:latin typeface="Ramabhadra" panose="02000600000000000000" pitchFamily="2" charset="0"/>
-                  <a:cs typeface="Ramabhadra" panose="02000600000000000000" pitchFamily="2" charset="0"/>
-                </a:rPr>
-                <a:t>నీ ఆత్మ ద్వారానే (2)</a:t>
-              </a:r>
-            </a:p>
-            <a:p>
-              <a:r>
-                <a:rPr lang="te-IN" sz="2100" dirty="0">
-                  <a:latin typeface="Ramabhadra" panose="02000600000000000000" pitchFamily="2" charset="0"/>
-                  <a:cs typeface="Ramabhadra" panose="02000600000000000000" pitchFamily="2" charset="0"/>
-                </a:rPr>
-                <a:t>వాగ్ధానము నెరవేర్చి</a:t>
-              </a:r>
-            </a:p>
-            <a:p>
-              <a:r>
-                <a:rPr lang="te-IN" sz="2100" dirty="0">
-                  <a:latin typeface="Ramabhadra" panose="02000600000000000000" pitchFamily="2" charset="0"/>
-                  <a:cs typeface="Ramabhadra" panose="02000600000000000000" pitchFamily="2" charset="0"/>
-                </a:rPr>
-                <a:t>వారసుని చేసావు (2)</a:t>
+                <a:rPr lang="te-IN" sz="2000" dirty="0">
+                  <a:latin typeface="Ramabhadra" panose="02000600000000000000" pitchFamily="2" charset="0"/>
+                  <a:cs typeface="Ramabhadra" panose="02000600000000000000" pitchFamily="2" charset="0"/>
+                </a:rPr>
+                <a:t>ఆజ్ఞల మార్గమున ఆశ్రయమును ఇచ్చి </a:t>
+              </a:r>
+            </a:p>
+            <a:p>
+              <a:r>
+                <a:rPr lang="te-IN" sz="2000" dirty="0">
+                  <a:latin typeface="Ramabhadra" panose="02000600000000000000" pitchFamily="2" charset="0"/>
+                  <a:cs typeface="Ramabhadra" panose="02000600000000000000" pitchFamily="2" charset="0"/>
+                </a:rPr>
+                <a:t>ఆపత్కాలమున ఆదుకొన్నావు </a:t>
+              </a:r>
+            </a:p>
+            <a:p>
+              <a:r>
+                <a:rPr lang="te-IN" sz="2000" dirty="0">
+                  <a:latin typeface="Ramabhadra" panose="02000600000000000000" pitchFamily="2" charset="0"/>
+                  <a:cs typeface="Ramabhadra" panose="02000600000000000000" pitchFamily="2" charset="0"/>
+                </a:rPr>
+                <a:t>ఆత్మీయులతో – ఆనందింపజేసి </a:t>
+              </a:r>
+            </a:p>
+            <a:p>
+              <a:r>
+                <a:rPr lang="te-IN" sz="2000" dirty="0">
+                  <a:latin typeface="Ramabhadra" panose="02000600000000000000" pitchFamily="2" charset="0"/>
+                  <a:cs typeface="Ramabhadra" panose="02000600000000000000" pitchFamily="2" charset="0"/>
+                </a:rPr>
+                <a:t>ఆనంద తైలముతో – అభిషేకించావు  (2)</a:t>
+              </a:r>
+            </a:p>
+            <a:p>
+              <a:r>
+                <a:rPr lang="te-IN" sz="2000" dirty="0">
+                  <a:latin typeface="Ramabhadra" panose="02000600000000000000" pitchFamily="2" charset="0"/>
+                  <a:cs typeface="Ramabhadra" panose="02000600000000000000" pitchFamily="2" charset="0"/>
+                </a:rPr>
+                <a:t>నా ఆశతీర ఆరాధన చేసే </a:t>
+              </a:r>
+            </a:p>
+            <a:p>
+              <a:r>
+                <a:rPr lang="te-IN" sz="2000" dirty="0">
+                  <a:latin typeface="Ramabhadra" panose="02000600000000000000" pitchFamily="2" charset="0"/>
+                  <a:cs typeface="Ramabhadra" panose="02000600000000000000" pitchFamily="2" charset="0"/>
+                </a:rPr>
+                <a:t>అదృష్టమిచ్చింది నీ కృప (2)యేసయ్యా నీ కృప</a:t>
               </a:r>
             </a:p>
           </p:txBody>
@@ -3804,7 +3789,7 @@
           <p:spPr>
             <a:xfrm>
               <a:off x="308503" y="768683"/>
-              <a:ext cx="4648200" cy="4154984"/>
+              <a:ext cx="4648200" cy="5262979"/>
             </a:xfrm>
             <a:prstGeom prst="rect">
               <a:avLst/>
@@ -3821,11 +3806,11 @@
                 <a:defRPr/>
               </a:pPr>
               <a:r>
-                <a:rPr lang="te-IN" sz="2200" dirty="0">
-                  <a:latin typeface="Ramabhadra" panose="02000600000000000000" pitchFamily="2" charset="0"/>
-                  <a:cs typeface="Ramabhadra" panose="02000600000000000000" pitchFamily="2" charset="0"/>
-                </a:rPr>
-                <a:t>స్తుతి సింహాసనాసీనుడా</a:t>
+                <a:rPr lang="te-IN" sz="2400" dirty="0">
+                  <a:latin typeface="Ramabhadra" panose="02000600000000000000" pitchFamily="2" charset="0"/>
+                  <a:cs typeface="Ramabhadra" panose="02000600000000000000" pitchFamily="2" charset="0"/>
+                </a:rPr>
+                <a:t>నజరేయుడా నా యేసయ్య</a:t>
               </a:r>
             </a:p>
             <a:p>
@@ -3833,18 +3818,42 @@
                 <a:defRPr/>
               </a:pPr>
               <a:r>
-                <a:rPr lang="te-IN" sz="2200" dirty="0">
-                  <a:latin typeface="Ramabhadra" panose="02000600000000000000" pitchFamily="2" charset="0"/>
-                  <a:cs typeface="Ramabhadra" panose="02000600000000000000" pitchFamily="2" charset="0"/>
-                </a:rPr>
-                <a:t>యేసు రాజా దివ్య తేజా (2)</a:t>
+                <a:rPr lang="te-IN" sz="2400" dirty="0">
+                  <a:latin typeface="Ramabhadra" panose="02000600000000000000" pitchFamily="2" charset="0"/>
+                  <a:cs typeface="Ramabhadra" panose="02000600000000000000" pitchFamily="2" charset="0"/>
+                </a:rPr>
+                <a:t>ఎన్ని యుగాలకైనా</a:t>
               </a:r>
             </a:p>
             <a:p>
               <a:pPr defTabSz="439781">
                 <a:defRPr/>
               </a:pPr>
-              <a:endParaRPr lang="te-IN" sz="2200" dirty="0">
+              <a:r>
+                <a:rPr lang="te-IN" sz="2400" dirty="0">
+                  <a:latin typeface="Ramabhadra" panose="02000600000000000000" pitchFamily="2" charset="0"/>
+                  <a:cs typeface="Ramabhadra" panose="02000600000000000000" pitchFamily="2" charset="0"/>
+                </a:rPr>
+                <a:t>ఆరాధ్య దైవము నీవేనని</a:t>
+              </a:r>
+            </a:p>
+            <a:p>
+              <a:pPr defTabSz="439781">
+                <a:defRPr/>
+              </a:pPr>
+              <a:r>
+                <a:rPr lang="te-IN" sz="2400" dirty="0">
+                  <a:latin typeface="Ramabhadra" panose="02000600000000000000" pitchFamily="2" charset="0"/>
+                  <a:cs typeface="Ramabhadra" panose="02000600000000000000" pitchFamily="2" charset="0"/>
+                </a:rPr>
+                <a:t>గళమెత్తి నీ కీర్తి నే చాటెద</a:t>
+              </a:r>
+            </a:p>
+            <a:p>
+              <a:pPr defTabSz="439781">
+                <a:defRPr/>
+              </a:pPr>
+              <a:endParaRPr lang="te-IN" sz="2400" dirty="0">
                 <a:latin typeface="Ramabhadra" panose="02000600000000000000" pitchFamily="2" charset="0"/>
                 <a:cs typeface="Ramabhadra" panose="02000600000000000000" pitchFamily="2" charset="0"/>
               </a:endParaRPr>
@@ -3854,11 +3863,11 @@
                 <a:defRPr/>
               </a:pPr>
               <a:r>
-                <a:rPr lang="te-IN" sz="2200" dirty="0">
-                  <a:latin typeface="Ramabhadra" panose="02000600000000000000" pitchFamily="2" charset="0"/>
-                  <a:cs typeface="Ramabhadra" panose="02000600000000000000" pitchFamily="2" charset="0"/>
-                </a:rPr>
-                <a:t>అద్వితీయుడవు పరిశుద్ధుడవు</a:t>
+                <a:rPr lang="te-IN" sz="2400" dirty="0">
+                  <a:latin typeface="Ramabhadra" panose="02000600000000000000" pitchFamily="2" charset="0"/>
+                  <a:cs typeface="Ramabhadra" panose="02000600000000000000" pitchFamily="2" charset="0"/>
+                </a:rPr>
+                <a:t>ఆకాశ గగనాలను నీ జేనతో కొలిచితివి (2)</a:t>
               </a:r>
             </a:p>
             <a:p>
@@ -3866,11 +3875,11 @@
                 <a:defRPr/>
               </a:pPr>
               <a:r>
-                <a:rPr lang="te-IN" sz="2200" dirty="0">
-                  <a:latin typeface="Ramabhadra" panose="02000600000000000000" pitchFamily="2" charset="0"/>
-                  <a:cs typeface="Ramabhadra" panose="02000600000000000000" pitchFamily="2" charset="0"/>
-                </a:rPr>
-                <a:t>అతి సుందరుడవు నీవే ప్రభూ (2)</a:t>
+                <a:rPr lang="te-IN" sz="2400" dirty="0">
+                  <a:latin typeface="Ramabhadra" panose="02000600000000000000" pitchFamily="2" charset="0"/>
+                  <a:cs typeface="Ramabhadra" panose="02000600000000000000" pitchFamily="2" charset="0"/>
+                </a:rPr>
+                <a:t>శూన్యములో ఈ భూమిని</a:t>
               </a:r>
             </a:p>
             <a:p>
@@ -3878,11 +3887,11 @@
                 <a:defRPr/>
               </a:pPr>
               <a:r>
-                <a:rPr lang="te-IN" sz="2200" dirty="0">
-                  <a:latin typeface="Ramabhadra" panose="02000600000000000000" pitchFamily="2" charset="0"/>
-                  <a:cs typeface="Ramabhadra" panose="02000600000000000000" pitchFamily="2" charset="0"/>
-                </a:rPr>
-                <a:t>నీతి న్యాయములు నీ సింహాసనాధారం (2)</a:t>
+                <a:rPr lang="te-IN" sz="2400" dirty="0">
+                  <a:latin typeface="Ramabhadra" panose="02000600000000000000" pitchFamily="2" charset="0"/>
+                  <a:cs typeface="Ramabhadra" panose="02000600000000000000" pitchFamily="2" charset="0"/>
+                </a:rPr>
+                <a:t>వ్రేలాడదీసిన నా యేసయ్య (2)</a:t>
               </a:r>
             </a:p>
             <a:p>
@@ -3890,18 +3899,18 @@
                 <a:defRPr/>
               </a:pPr>
               <a:r>
-                <a:rPr lang="te-IN" sz="2200" dirty="0">
-                  <a:latin typeface="Ramabhadra" panose="02000600000000000000" pitchFamily="2" charset="0"/>
-                  <a:cs typeface="Ramabhadra" panose="02000600000000000000" pitchFamily="2" charset="0"/>
-                </a:rPr>
-                <a:t>కృపా సత్యములు నీ సన్నిధానవర్తులు (2)</a:t>
+                <a:rPr lang="te-IN" sz="2400" dirty="0">
+                  <a:latin typeface="Ramabhadra" panose="02000600000000000000" pitchFamily="2" charset="0"/>
+                  <a:cs typeface="Ramabhadra" panose="02000600000000000000" pitchFamily="2" charset="0"/>
+                </a:rPr>
+                <a:t>నీకే వందనం నీకే వందనం (2)</a:t>
               </a:r>
             </a:p>
             <a:p>
               <a:pPr defTabSz="439781">
                 <a:defRPr/>
               </a:pPr>
-              <a:endParaRPr lang="te-IN" sz="2200" dirty="0">
+              <a:endParaRPr lang="te-IN" sz="2400" dirty="0">
                 <a:latin typeface="Ramabhadra" panose="02000600000000000000" pitchFamily="2" charset="0"/>
                 <a:cs typeface="Ramabhadra" panose="02000600000000000000" pitchFamily="2" charset="0"/>
               </a:endParaRPr>
@@ -3911,11 +3920,11 @@
                 <a:defRPr/>
               </a:pPr>
               <a:r>
-                <a:rPr lang="te-IN" sz="2200" dirty="0">
-                  <a:latin typeface="Ramabhadra" panose="02000600000000000000" pitchFamily="2" charset="0"/>
-                  <a:cs typeface="Ramabhadra" panose="02000600000000000000" pitchFamily="2" charset="0"/>
-                </a:rPr>
-                <a:t>బలియు అర్పణ కోరవు నీవు</a:t>
+                <a:rPr lang="te-IN" sz="2400" dirty="0">
+                  <a:latin typeface="Ramabhadra" panose="02000600000000000000" pitchFamily="2" charset="0"/>
+                  <a:cs typeface="Ramabhadra" panose="02000600000000000000" pitchFamily="2" charset="0"/>
+                </a:rPr>
+                <a:t>అగాధ సముద్రాలకు నీవే ఎల్లలు వేసితివి (2)</a:t>
               </a:r>
             </a:p>
             <a:p>
@@ -3923,11 +3932,11 @@
                 <a:defRPr/>
               </a:pPr>
               <a:r>
-                <a:rPr lang="te-IN" sz="2200" dirty="0">
-                  <a:latin typeface="Ramabhadra" panose="02000600000000000000" pitchFamily="2" charset="0"/>
-                  <a:cs typeface="Ramabhadra" panose="02000600000000000000" pitchFamily="2" charset="0"/>
-                </a:rPr>
-                <a:t>బలియైతివి నా దోషముకై (2)</a:t>
+                <a:rPr lang="te-IN" sz="2400" dirty="0">
+                  <a:latin typeface="Ramabhadra" panose="02000600000000000000" pitchFamily="2" charset="0"/>
+                  <a:cs typeface="Ramabhadra" panose="02000600000000000000" pitchFamily="2" charset="0"/>
+                </a:rPr>
+                <a:t>జలములలోబడి నే వెళ్ళినా</a:t>
               </a:r>
             </a:p>
             <a:p>
@@ -3935,11 +3944,11 @@
                 <a:defRPr/>
               </a:pPr>
               <a:r>
-                <a:rPr lang="te-IN" sz="2200" dirty="0">
-                  <a:latin typeface="Ramabhadra" panose="02000600000000000000" pitchFamily="2" charset="0"/>
-                  <a:cs typeface="Ramabhadra" panose="02000600000000000000" pitchFamily="2" charset="0"/>
-                </a:rPr>
-                <a:t>నా హృదయమే నీ ప్రియమగు ఆలయం (2)</a:t>
+                <a:rPr lang="te-IN" sz="2400" dirty="0">
+                  <a:latin typeface="Ramabhadra" panose="02000600000000000000" pitchFamily="2" charset="0"/>
+                  <a:cs typeface="Ramabhadra" panose="02000600000000000000" pitchFamily="2" charset="0"/>
+                </a:rPr>
+                <a:t>నన్నేమి చేయవు నా యేసయ్యా (2)</a:t>
               </a:r>
             </a:p>
             <a:p>
@@ -3947,11 +3956,11 @@
                 <a:defRPr/>
               </a:pPr>
               <a:r>
-                <a:rPr lang="te-IN" sz="2200" dirty="0">
-                  <a:latin typeface="Ramabhadra" panose="02000600000000000000" pitchFamily="2" charset="0"/>
-                  <a:cs typeface="Ramabhadra" panose="02000600000000000000" pitchFamily="2" charset="0"/>
-                </a:rPr>
-                <a:t>స్తుతియాగమునే చేసెద నిరతం (2)</a:t>
+                <a:rPr lang="te-IN" sz="2400" dirty="0">
+                  <a:latin typeface="Ramabhadra" panose="02000600000000000000" pitchFamily="2" charset="0"/>
+                  <a:cs typeface="Ramabhadra" panose="02000600000000000000" pitchFamily="2" charset="0"/>
+                </a:rPr>
+                <a:t>నీకే వందనం నీకే వందనం (2) </a:t>
               </a:r>
             </a:p>
           </p:txBody>
@@ -4034,9 +4043,9 @@
         <p:grpSpPr>
           <a:xfrm>
             <a:off x="5104338" y="182031"/>
-            <a:ext cx="4828492" cy="6538635"/>
+            <a:ext cx="4897436" cy="6493935"/>
             <a:chOff x="160868" y="182032"/>
-            <a:chExt cx="4828492" cy="6538635"/>
+            <a:chExt cx="4897436" cy="6493935"/>
           </a:xfrm>
         </p:grpSpPr>
         <p:sp>
@@ -4108,8 +4117,8 @@
           </p:nvSpPr>
           <p:spPr>
             <a:xfrm>
-              <a:off x="239559" y="195804"/>
-              <a:ext cx="4749801" cy="6524863"/>
+              <a:off x="308503" y="521693"/>
+              <a:ext cx="4749801" cy="4693593"/>
             </a:xfrm>
             <a:prstGeom prst="rect">
               <a:avLst/>
@@ -4126,11 +4135,11 @@
                 <a:defRPr/>
               </a:pPr>
               <a:r>
-                <a:rPr lang="te-IN" sz="2200" dirty="0">
-                  <a:latin typeface="Ramabhadra" panose="02000600000000000000" pitchFamily="2" charset="0"/>
-                  <a:cs typeface="Ramabhadra" panose="02000600000000000000" pitchFamily="2" charset="0"/>
-                </a:rPr>
-                <a:t>అపారమైనది నీ కృప  </a:t>
+                <a:rPr lang="te-IN" sz="2300" dirty="0">
+                  <a:latin typeface="Ramabhadra" panose="02000600000000000000" pitchFamily="2" charset="0"/>
+                  <a:cs typeface="Ramabhadra" panose="02000600000000000000" pitchFamily="2" charset="0"/>
+                </a:rPr>
+                <a:t>నీవుంటే నాకు చాలు యేసయ్యా</a:t>
               </a:r>
             </a:p>
             <a:p>
@@ -4138,11 +4147,11 @@
                 <a:defRPr/>
               </a:pPr>
               <a:r>
-                <a:rPr lang="te-IN" sz="2200" dirty="0">
-                  <a:latin typeface="Ramabhadra" panose="02000600000000000000" pitchFamily="2" charset="0"/>
-                  <a:cs typeface="Ramabhadra" panose="02000600000000000000" pitchFamily="2" charset="0"/>
-                </a:rPr>
-                <a:t>అమూల్యమైనది నీ కృప</a:t>
+                <a:rPr lang="te-IN" sz="2300" dirty="0">
+                  <a:latin typeface="Ramabhadra" panose="02000600000000000000" pitchFamily="2" charset="0"/>
+                  <a:cs typeface="Ramabhadra" panose="02000600000000000000" pitchFamily="2" charset="0"/>
+                </a:rPr>
+                <a:t>నీవెంటే నేను ఉంటానేసయ్యా (2)</a:t>
               </a:r>
             </a:p>
             <a:p>
@@ -4150,11 +4159,11 @@
                 <a:defRPr/>
               </a:pPr>
               <a:r>
-                <a:rPr lang="te-IN" sz="2200" dirty="0">
-                  <a:latin typeface="Ramabhadra" panose="02000600000000000000" pitchFamily="2" charset="0"/>
-                  <a:cs typeface="Ramabhadra" panose="02000600000000000000" pitchFamily="2" charset="0"/>
-                </a:rPr>
-                <a:t>జీవము కంటె ఉత్తమమైనది  </a:t>
+                <a:rPr lang="te-IN" sz="2300" dirty="0">
+                  <a:latin typeface="Ramabhadra" panose="02000600000000000000" pitchFamily="2" charset="0"/>
+                  <a:cs typeface="Ramabhadra" panose="02000600000000000000" pitchFamily="2" charset="0"/>
+                </a:rPr>
+                <a:t>నీ మాట చాలయ్యా నీ చూపు చాలయ్యా</a:t>
               </a:r>
             </a:p>
             <a:p>
@@ -4162,30 +4171,50 @@
                 <a:defRPr/>
               </a:pPr>
               <a:r>
-                <a:rPr lang="te-IN" sz="2200" dirty="0">
-                  <a:latin typeface="Ramabhadra" panose="02000600000000000000" pitchFamily="2" charset="0"/>
-                  <a:cs typeface="Ramabhadra" panose="02000600000000000000" pitchFamily="2" charset="0"/>
-                </a:rPr>
-                <a:t>పర్వత శిఖరము కన్న ఎతైనది</a:t>
-              </a:r>
+                <a:rPr lang="te-IN" sz="2300" dirty="0">
+                  <a:latin typeface="Ramabhadra" panose="02000600000000000000" pitchFamily="2" charset="0"/>
+                  <a:cs typeface="Ramabhadra" panose="02000600000000000000" pitchFamily="2" charset="0"/>
+                </a:rPr>
+                <a:t>నీ తోడు చాలయ్యా నీ నీడ చాలయ్యా (2)</a:t>
+              </a:r>
+              <a:endParaRPr lang="en-IN" sz="2300" dirty="0">
+                <a:latin typeface="Ramabhadra" panose="02000600000000000000" pitchFamily="2" charset="0"/>
+                <a:cs typeface="Ramabhadra" panose="02000600000000000000" pitchFamily="2" charset="0"/>
+              </a:endParaRPr>
             </a:p>
             <a:p>
               <a:pPr defTabSz="439781">
                 <a:defRPr/>
               </a:pPr>
-              <a:r>
-                <a:rPr lang="te-IN" sz="2200" dirty="0">
-                  <a:latin typeface="Ramabhadra" panose="02000600000000000000" pitchFamily="2" charset="0"/>
-                  <a:cs typeface="Ramabhadra" panose="02000600000000000000" pitchFamily="2" charset="0"/>
-                </a:rPr>
-                <a:t>కృప కృప కృప కృప నీకృప   ॥2॥</a:t>
-              </a:r>
+              <a:endParaRPr lang="te-IN" sz="2300" dirty="0">
+                <a:latin typeface="Ramabhadra" panose="02000600000000000000" pitchFamily="2" charset="0"/>
+                <a:cs typeface="Ramabhadra" panose="02000600000000000000" pitchFamily="2" charset="0"/>
+              </a:endParaRPr>
             </a:p>
             <a:p>
               <a:pPr defTabSz="439781">
                 <a:defRPr/>
               </a:pPr>
-              <a:endParaRPr lang="te-IN" sz="2200" dirty="0">
+              <a:r>
+                <a:rPr lang="te-IN" sz="2300" dirty="0">
+                  <a:latin typeface="Ramabhadra" panose="02000600000000000000" pitchFamily="2" charset="0"/>
+                  <a:cs typeface="Ramabhadra" panose="02000600000000000000" pitchFamily="2" charset="0"/>
+                </a:rPr>
+                <a:t>ఎన్ని బాధలున్ననూ ఇబ్బందులైననూ</a:t>
+              </a:r>
+            </a:p>
+            <a:p>
+              <a:pPr defTabSz="439781">
+                <a:defRPr/>
+              </a:pPr>
+              <a:r>
+                <a:rPr lang="te-IN" sz="2300" dirty="0">
+                  <a:latin typeface="Ramabhadra" panose="02000600000000000000" pitchFamily="2" charset="0"/>
+                  <a:cs typeface="Ramabhadra" panose="02000600000000000000" pitchFamily="2" charset="0"/>
+                </a:rPr>
+                <a:t>ఎంత కష్టమొచ్చినా నిష్టూరమైననూ (2)</a:t>
+              </a:r>
+              <a:endParaRPr lang="en-IN" sz="2300" dirty="0">
                 <a:latin typeface="Ramabhadra" panose="02000600000000000000" pitchFamily="2" charset="0"/>
                 <a:cs typeface="Ramabhadra" panose="02000600000000000000" pitchFamily="2" charset="0"/>
               </a:endParaRPr>
@@ -4194,24 +4223,21 @@
               <a:pPr defTabSz="439781">
                 <a:defRPr/>
               </a:pPr>
-              <a:r>
-                <a:rPr lang="te-IN" sz="2200" dirty="0">
-                  <a:latin typeface="Ramabhadra" panose="02000600000000000000" pitchFamily="2" charset="0"/>
-                  <a:cs typeface="Ramabhadra" panose="02000600000000000000" pitchFamily="2" charset="0"/>
-                </a:rPr>
-                <a:t>పాప దాస్యములో చిక్కబడి యుండగా </a:t>
-              </a:r>
+              <a:endParaRPr lang="te-IN" sz="2300" dirty="0">
+                <a:latin typeface="Ramabhadra" panose="02000600000000000000" pitchFamily="2" charset="0"/>
+                <a:cs typeface="Ramabhadra" panose="02000600000000000000" pitchFamily="2" charset="0"/>
+              </a:endParaRPr>
             </a:p>
             <a:p>
               <a:pPr defTabSz="439781">
                 <a:defRPr/>
               </a:pPr>
               <a:r>
-                <a:rPr lang="te-IN" sz="2200" dirty="0">
-                  <a:latin typeface="Ramabhadra" panose="02000600000000000000" pitchFamily="2" charset="0"/>
-                  <a:cs typeface="Ramabhadra" panose="02000600000000000000" pitchFamily="2" charset="0"/>
-                </a:rPr>
-                <a:t>నను రక్షించెను నీకృప</a:t>
+                <a:rPr lang="te-IN" sz="2300" dirty="0">
+                  <a:latin typeface="Ramabhadra" panose="02000600000000000000" pitchFamily="2" charset="0"/>
+                  <a:cs typeface="Ramabhadra" panose="02000600000000000000" pitchFamily="2" charset="0"/>
+                </a:rPr>
+                <a:t>బ్రతుకు నావ పగిలినా కడలి పాలైననూ</a:t>
               </a:r>
             </a:p>
             <a:p>
@@ -4219,35 +4245,36 @@
                 <a:defRPr/>
               </a:pPr>
               <a:r>
-                <a:rPr lang="te-IN" sz="2200" dirty="0">
-                  <a:latin typeface="Ramabhadra" panose="02000600000000000000" pitchFamily="2" charset="0"/>
-                  <a:cs typeface="Ramabhadra" panose="02000600000000000000" pitchFamily="2" charset="0"/>
-                </a:rPr>
-                <a:t>రోగబలహీనతందునే కృంగి యుండగా</a:t>
-              </a:r>
+                <a:rPr lang="te-IN" sz="2300" dirty="0">
+                  <a:latin typeface="Ramabhadra" panose="02000600000000000000" pitchFamily="2" charset="0"/>
+                  <a:cs typeface="Ramabhadra" panose="02000600000000000000" pitchFamily="2" charset="0"/>
+                </a:rPr>
+                <a:t>అలలు ముంచి వేసినా ఆశలు అనగారినా (2)</a:t>
+              </a:r>
+              <a:endParaRPr lang="en-IN" sz="2300" dirty="0">
+                <a:latin typeface="Ramabhadra" panose="02000600000000000000" pitchFamily="2" charset="0"/>
+                <a:cs typeface="Ramabhadra" panose="02000600000000000000" pitchFamily="2" charset="0"/>
+              </a:endParaRPr>
             </a:p>
             <a:p>
               <a:pPr defTabSz="439781">
                 <a:defRPr/>
               </a:pPr>
-              <a:r>
-                <a:rPr lang="te-IN" sz="2200" dirty="0">
-                  <a:latin typeface="Ramabhadra" panose="02000600000000000000" pitchFamily="2" charset="0"/>
-                  <a:cs typeface="Ramabhadra" panose="02000600000000000000" pitchFamily="2" charset="0"/>
-                </a:rPr>
-                <a:t>నను స్వస్థపరచును నీకృప</a:t>
-              </a:r>
+              <a:endParaRPr lang="te-IN" sz="2300" dirty="0">
+                <a:latin typeface="Ramabhadra" panose="02000600000000000000" pitchFamily="2" charset="0"/>
+                <a:cs typeface="Ramabhadra" panose="02000600000000000000" pitchFamily="2" charset="0"/>
+              </a:endParaRPr>
             </a:p>
             <a:p>
               <a:pPr defTabSz="439781">
                 <a:defRPr/>
               </a:pPr>
               <a:r>
-                <a:rPr lang="te-IN" sz="2200" dirty="0">
-                  <a:latin typeface="Ramabhadra" panose="02000600000000000000" pitchFamily="2" charset="0"/>
-                  <a:cs typeface="Ramabhadra" panose="02000600000000000000" pitchFamily="2" charset="0"/>
-                </a:rPr>
-                <a:t>మారా వంటి జీవితం </a:t>
+                <a:rPr lang="te-IN" sz="2300" dirty="0">
+                  <a:latin typeface="Ramabhadra" panose="02000600000000000000" pitchFamily="2" charset="0"/>
+                  <a:cs typeface="Ramabhadra" panose="02000600000000000000" pitchFamily="2" charset="0"/>
+                </a:rPr>
+                <a:t>ఆస్తులన్నీ పోయినా అనాథగా మిగిలినా</a:t>
               </a:r>
             </a:p>
             <a:p>
@@ -4255,92 +4282,11 @@
                 <a:defRPr/>
               </a:pPr>
               <a:r>
-                <a:rPr lang="te-IN" sz="2200" dirty="0">
-                  <a:latin typeface="Ramabhadra" panose="02000600000000000000" pitchFamily="2" charset="0"/>
-                  <a:cs typeface="Ramabhadra" panose="02000600000000000000" pitchFamily="2" charset="0"/>
-                </a:rPr>
-                <a:t>మధురముగా మార్చెను నీ కృప</a:t>
-              </a:r>
-            </a:p>
-            <a:p>
-              <a:pPr defTabSz="439781">
-                <a:defRPr/>
-              </a:pPr>
-              <a:endParaRPr lang="te-IN" sz="2200" dirty="0">
-                <a:latin typeface="Ramabhadra" panose="02000600000000000000" pitchFamily="2" charset="0"/>
-                <a:cs typeface="Ramabhadra" panose="02000600000000000000" pitchFamily="2" charset="0"/>
-              </a:endParaRPr>
-            </a:p>
-            <a:p>
-              <a:pPr defTabSz="439781">
-                <a:defRPr/>
-              </a:pPr>
-              <a:r>
-                <a:rPr lang="te-IN" sz="2200" dirty="0">
-                  <a:latin typeface="Ramabhadra" panose="02000600000000000000" pitchFamily="2" charset="0"/>
-                  <a:cs typeface="Ramabhadra" panose="02000600000000000000" pitchFamily="2" charset="0"/>
-                </a:rPr>
-                <a:t>నా హీన స్థితిలో పడిపోయి ఉండగా</a:t>
-              </a:r>
-            </a:p>
-            <a:p>
-              <a:pPr defTabSz="439781">
-                <a:defRPr/>
-              </a:pPr>
-              <a:r>
-                <a:rPr lang="te-IN" sz="2200" dirty="0">
-                  <a:latin typeface="Ramabhadra" panose="02000600000000000000" pitchFamily="2" charset="0"/>
-                  <a:cs typeface="Ramabhadra" panose="02000600000000000000" pitchFamily="2" charset="0"/>
-                </a:rPr>
-                <a:t>నను లేవనెత్తేను నీ కృప</a:t>
-              </a:r>
-            </a:p>
-            <a:p>
-              <a:pPr defTabSz="439781">
-                <a:defRPr/>
-              </a:pPr>
-              <a:r>
-                <a:rPr lang="te-IN" sz="2200" dirty="0">
-                  <a:latin typeface="Ramabhadra" panose="02000600000000000000" pitchFamily="2" charset="0"/>
-                  <a:cs typeface="Ramabhadra" panose="02000600000000000000" pitchFamily="2" charset="0"/>
-                </a:rPr>
-                <a:t>ఆదరించు వారు లేక అలసియున్న నన్ను </a:t>
-              </a:r>
-            </a:p>
-            <a:p>
-              <a:pPr defTabSz="439781">
-                <a:defRPr/>
-              </a:pPr>
-              <a:r>
-                <a:rPr lang="te-IN" sz="2200" dirty="0">
-                  <a:latin typeface="Ramabhadra" panose="02000600000000000000" pitchFamily="2" charset="0"/>
-                  <a:cs typeface="Ramabhadra" panose="02000600000000000000" pitchFamily="2" charset="0"/>
-                </a:rPr>
-                <a:t>ఆదరించెను నీ కృప</a:t>
-              </a:r>
-            </a:p>
-            <a:p>
-              <a:pPr defTabSz="439781">
-                <a:defRPr/>
-              </a:pPr>
-              <a:r>
-                <a:rPr lang="te-IN" sz="2200" dirty="0">
-                  <a:latin typeface="Ramabhadra" panose="02000600000000000000" pitchFamily="2" charset="0"/>
-                  <a:cs typeface="Ramabhadra" panose="02000600000000000000" pitchFamily="2" charset="0"/>
-                </a:rPr>
-                <a:t>మోడైన నా జీవితం </a:t>
-              </a:r>
-            </a:p>
-            <a:p>
-              <a:pPr defTabSz="439781">
-                <a:defRPr/>
-              </a:pPr>
-              <a:r>
-                <a:rPr lang="te-IN" sz="2200" dirty="0">
-                  <a:latin typeface="Ramabhadra" panose="02000600000000000000" pitchFamily="2" charset="0"/>
-                  <a:cs typeface="Ramabhadra" panose="02000600000000000000" pitchFamily="2" charset="0"/>
-                </a:rPr>
-                <a:t>చిగురింపజేసెను నీ కృప </a:t>
+                <a:rPr lang="te-IN" sz="2300" dirty="0">
+                  <a:latin typeface="Ramabhadra" panose="02000600000000000000" pitchFamily="2" charset="0"/>
+                  <a:cs typeface="Ramabhadra" panose="02000600000000000000" pitchFamily="2" charset="0"/>
+                </a:rPr>
+                <a:t>ఆప్తులే విడనాడినా ఆరోగ్యం క్షీణించినా (2) </a:t>
               </a:r>
             </a:p>
           </p:txBody>

--- a/songsTemplate.pptx
+++ b/songsTemplate.pptx
@@ -255,7 +255,7 @@
           <a:p>
             <a:fld id="{F1102B08-ED9E-409F-B95F-09CAA1DAF6E0}" type="datetimeFigureOut">
               <a:rPr lang="en-IN" smtClean="0"/>
-              <a:t>28-12-2024</a:t>
+              <a:t>04-01-2025</a:t>
             </a:fld>
             <a:endParaRPr lang="en-IN"/>
           </a:p>
@@ -425,7 +425,7 @@
           <a:p>
             <a:fld id="{F1102B08-ED9E-409F-B95F-09CAA1DAF6E0}" type="datetimeFigureOut">
               <a:rPr lang="en-IN" smtClean="0"/>
-              <a:t>28-12-2024</a:t>
+              <a:t>04-01-2025</a:t>
             </a:fld>
             <a:endParaRPr lang="en-IN"/>
           </a:p>
@@ -605,7 +605,7 @@
           <a:p>
             <a:fld id="{F1102B08-ED9E-409F-B95F-09CAA1DAF6E0}" type="datetimeFigureOut">
               <a:rPr lang="en-IN" smtClean="0"/>
-              <a:t>28-12-2024</a:t>
+              <a:t>04-01-2025</a:t>
             </a:fld>
             <a:endParaRPr lang="en-IN"/>
           </a:p>
@@ -775,7 +775,7 @@
           <a:p>
             <a:fld id="{F1102B08-ED9E-409F-B95F-09CAA1DAF6E0}" type="datetimeFigureOut">
               <a:rPr lang="en-IN" smtClean="0"/>
-              <a:t>28-12-2024</a:t>
+              <a:t>04-01-2025</a:t>
             </a:fld>
             <a:endParaRPr lang="en-IN"/>
           </a:p>
@@ -1019,7 +1019,7 @@
           <a:p>
             <a:fld id="{F1102B08-ED9E-409F-B95F-09CAA1DAF6E0}" type="datetimeFigureOut">
               <a:rPr lang="en-IN" smtClean="0"/>
-              <a:t>28-12-2024</a:t>
+              <a:t>04-01-2025</a:t>
             </a:fld>
             <a:endParaRPr lang="en-IN"/>
           </a:p>
@@ -1251,7 +1251,7 @@
           <a:p>
             <a:fld id="{F1102B08-ED9E-409F-B95F-09CAA1DAF6E0}" type="datetimeFigureOut">
               <a:rPr lang="en-IN" smtClean="0"/>
-              <a:t>28-12-2024</a:t>
+              <a:t>04-01-2025</a:t>
             </a:fld>
             <a:endParaRPr lang="en-IN"/>
           </a:p>
@@ -1618,7 +1618,7 @@
           <a:p>
             <a:fld id="{F1102B08-ED9E-409F-B95F-09CAA1DAF6E0}" type="datetimeFigureOut">
               <a:rPr lang="en-IN" smtClean="0"/>
-              <a:t>28-12-2024</a:t>
+              <a:t>04-01-2025</a:t>
             </a:fld>
             <a:endParaRPr lang="en-IN"/>
           </a:p>
@@ -1736,7 +1736,7 @@
           <a:p>
             <a:fld id="{F1102B08-ED9E-409F-B95F-09CAA1DAF6E0}" type="datetimeFigureOut">
               <a:rPr lang="en-IN" smtClean="0"/>
-              <a:t>28-12-2024</a:t>
+              <a:t>04-01-2025</a:t>
             </a:fld>
             <a:endParaRPr lang="en-IN"/>
           </a:p>
@@ -1831,7 +1831,7 @@
           <a:p>
             <a:fld id="{F1102B08-ED9E-409F-B95F-09CAA1DAF6E0}" type="datetimeFigureOut">
               <a:rPr lang="en-IN" smtClean="0"/>
-              <a:t>28-12-2024</a:t>
+              <a:t>04-01-2025</a:t>
             </a:fld>
             <a:endParaRPr lang="en-IN"/>
           </a:p>
@@ -2108,7 +2108,7 @@
           <a:p>
             <a:fld id="{F1102B08-ED9E-409F-B95F-09CAA1DAF6E0}" type="datetimeFigureOut">
               <a:rPr lang="en-IN" smtClean="0"/>
-              <a:t>28-12-2024</a:t>
+              <a:t>04-01-2025</a:t>
             </a:fld>
             <a:endParaRPr lang="en-IN"/>
           </a:p>
@@ -2365,7 +2365,7 @@
           <a:p>
             <a:fld id="{F1102B08-ED9E-409F-B95F-09CAA1DAF6E0}" type="datetimeFigureOut">
               <a:rPr lang="en-IN" smtClean="0"/>
-              <a:t>28-12-2024</a:t>
+              <a:t>04-01-2025</a:t>
             </a:fld>
             <a:endParaRPr lang="en-IN"/>
           </a:p>
@@ -2578,7 +2578,7 @@
           <a:p>
             <a:fld id="{F1102B08-ED9E-409F-B95F-09CAA1DAF6E0}" type="datetimeFigureOut">
               <a:rPr lang="en-IN" smtClean="0"/>
-              <a:t>28-12-2024</a:t>
+              <a:t>04-01-2025</a:t>
             </a:fld>
             <a:endParaRPr lang="en-IN"/>
           </a:p>
@@ -3094,7 +3094,7 @@
                   <a:latin typeface="Ramabhadra" panose="02000600000000000000" pitchFamily="2" charset="0"/>
                   <a:cs typeface="Ramabhadra" panose="02000600000000000000" pitchFamily="2" charset="0"/>
                 </a:rPr>
-                <a:t>నా స్తుతుల పైన నివసించువాడా</a:t>
+                <a:t>ఈ దినం సదా నా యేసుకే సొంతం</a:t>
               </a:r>
             </a:p>
             <a:p>
@@ -3106,7 +3106,7 @@
                   <a:latin typeface="Ramabhadra" panose="02000600000000000000" pitchFamily="2" charset="0"/>
                   <a:cs typeface="Ramabhadra" panose="02000600000000000000" pitchFamily="2" charset="0"/>
                 </a:rPr>
-                <a:t>నా అంతరంగికుడా యేసయ్యా (2)</a:t>
+                <a:t>నా నాధుని ప్రసన్నత</a:t>
               </a:r>
             </a:p>
             <a:p>
@@ -3118,7 +3118,7 @@
                   <a:latin typeface="Ramabhadra" panose="02000600000000000000" pitchFamily="2" charset="0"/>
                   <a:cs typeface="Ramabhadra" panose="02000600000000000000" pitchFamily="2" charset="0"/>
                 </a:rPr>
-                <a:t>నీవు నా పక్షమై యున్నావు గనుకే</a:t>
+                <a:t>నా తోడ నడచును (2)</a:t>
               </a:r>
             </a:p>
             <a:p>
@@ -3130,7 +3130,19 @@
                   <a:latin typeface="Ramabhadra" panose="02000600000000000000" pitchFamily="2" charset="0"/>
                   <a:cs typeface="Ramabhadra" panose="02000600000000000000" pitchFamily="2" charset="0"/>
                 </a:rPr>
-                <a:t>జయమే జయమే ఎల్లవేళలా జయమే (2)</a:t>
+                <a:t>రానున్న కాలము – కలత నివ్వదు (2)</a:t>
+              </a:r>
+            </a:p>
+            <a:p>
+              <a:pPr defTabSz="439781">
+                <a:defRPr/>
+              </a:pPr>
+              <a:r>
+                <a:rPr lang="te-IN" sz="2200" dirty="0">
+                  <a:latin typeface="Ramabhadra" panose="02000600000000000000" pitchFamily="2" charset="0"/>
+                  <a:cs typeface="Ramabhadra" panose="02000600000000000000" pitchFamily="2" charset="0"/>
+                </a:rPr>
+                <a:t>నా మంచి కాపరీ సదా – నన్ను నడుపును</a:t>
               </a:r>
             </a:p>
             <a:p>
@@ -3151,12 +3163,8 @@
                   <a:latin typeface="Ramabhadra" panose="02000600000000000000" pitchFamily="2" charset="0"/>
                   <a:cs typeface="Ramabhadra" panose="02000600000000000000" pitchFamily="2" charset="0"/>
                 </a:rPr>
-                <a:t>నన్ను నిర్మించిన రీతి తలచగా –</a:t>
-              </a:r>
-              <a:endParaRPr lang="en-IN" sz="2200" dirty="0">
-                <a:latin typeface="Ramabhadra" panose="02000600000000000000" pitchFamily="2" charset="0"/>
-                <a:cs typeface="Ramabhadra" panose="02000600000000000000" pitchFamily="2" charset="0"/>
-              </a:endParaRPr>
+                <a:t>ఎడారులు లోయలు ఎదురు నిలచినా</a:t>
+              </a:r>
             </a:p>
             <a:p>
               <a:pPr defTabSz="439781">
@@ -3167,7 +3175,7 @@
                   <a:latin typeface="Ramabhadra" panose="02000600000000000000" pitchFamily="2" charset="0"/>
                   <a:cs typeface="Ramabhadra" panose="02000600000000000000" pitchFamily="2" charset="0"/>
                 </a:rPr>
-                <a:t>ఎంతో ఆశ్చర్యమే</a:t>
+                <a:t>ఎన్నడెవరు నడువని బాటయైనను (2)</a:t>
               </a:r>
             </a:p>
             <a:p>
@@ -3179,7 +3187,7 @@
                   <a:latin typeface="Ramabhadra" panose="02000600000000000000" pitchFamily="2" charset="0"/>
                   <a:cs typeface="Ramabhadra" panose="02000600000000000000" pitchFamily="2" charset="0"/>
                 </a:rPr>
-                <a:t>అది నా ఊహకే వింతైనది (2)</a:t>
+                <a:t>వెరవదెన్నడైనను నాదు హృదయము (2)</a:t>
               </a:r>
             </a:p>
             <a:p>
@@ -3191,19 +3199,21 @@
                   <a:latin typeface="Ramabhadra" panose="02000600000000000000" pitchFamily="2" charset="0"/>
                   <a:cs typeface="Ramabhadra" panose="02000600000000000000" pitchFamily="2" charset="0"/>
                 </a:rPr>
-                <a:t>ఎరుపెక్కిన శత్రువుల చూపు నుండి తప్పించి</a:t>
-              </a:r>
-            </a:p>
-            <a:p>
-              <a:pPr defTabSz="439781">
-                <a:defRPr/>
-              </a:pPr>
+                <a:t>గాయపడిన యేసుపాదం</a:t>
+              </a:r>
+              <a:r>
+                <a:rPr lang="en-IN" sz="2200" dirty="0">
+                  <a:latin typeface="Ramabhadra" panose="02000600000000000000" pitchFamily="2" charset="0"/>
+                  <a:cs typeface="Ramabhadra" panose="02000600000000000000" pitchFamily="2" charset="0"/>
+                </a:rPr>
+                <a:t> </a:t>
+              </a:r>
               <a:r>
                 <a:rPr lang="te-IN" sz="2200" dirty="0">
                   <a:latin typeface="Ramabhadra" panose="02000600000000000000" pitchFamily="2" charset="0"/>
                   <a:cs typeface="Ramabhadra" panose="02000600000000000000" pitchFamily="2" charset="0"/>
                 </a:rPr>
-                <a:t>ఎనలేని ప్రేమను నాపై కురిపించావు (2)</a:t>
+                <a:t>అందు నడచెను (2)</a:t>
               </a:r>
             </a:p>
             <a:p>
@@ -3224,7 +3234,7 @@
                   <a:latin typeface="Ramabhadra" panose="02000600000000000000" pitchFamily="2" charset="0"/>
                   <a:cs typeface="Ramabhadra" panose="02000600000000000000" pitchFamily="2" charset="0"/>
                 </a:rPr>
-                <a:t>ద్రాక్షావల్లి అయిన నీలోనే - బహుగా వేరు పారగా</a:t>
+                <a:t>ప్రవాహం వోలె శోదకుండు ఎదురు వచ్చినా</a:t>
               </a:r>
             </a:p>
             <a:p>
@@ -3236,7 +3246,21 @@
                   <a:latin typeface="Ramabhadra" panose="02000600000000000000" pitchFamily="2" charset="0"/>
                   <a:cs typeface="Ramabhadra" panose="02000600000000000000" pitchFamily="2" charset="0"/>
                 </a:rPr>
-                <a:t>నీతో మధురమైన ఫలములీయనా (2)</a:t>
+                <a:t>యుద్ధకేక నా నోట యేసు నామమే</a:t>
+              </a:r>
+              <a:r>
+                <a:rPr lang="en-IN" sz="2200" dirty="0">
+                  <a:latin typeface="Ramabhadra" panose="02000600000000000000" pitchFamily="2" charset="0"/>
+                  <a:cs typeface="Ramabhadra" panose="02000600000000000000" pitchFamily="2" charset="0"/>
+                </a:rPr>
+                <a:t> </a:t>
+              </a:r>
+              <a:r>
+                <a:rPr lang="te-IN" sz="2200" dirty="0">
+                  <a:latin typeface="Ramabhadra" panose="02000600000000000000" pitchFamily="2" charset="0"/>
+                  <a:cs typeface="Ramabhadra" panose="02000600000000000000" pitchFamily="2" charset="0"/>
+                </a:rPr>
+                <a:t>(2)</a:t>
               </a:r>
             </a:p>
             <a:p>
@@ -3248,7 +3272,21 @@
                   <a:latin typeface="Ramabhadra" panose="02000600000000000000" pitchFamily="2" charset="0"/>
                   <a:cs typeface="Ramabhadra" panose="02000600000000000000" pitchFamily="2" charset="0"/>
                 </a:rPr>
-                <a:t>ఉన్నత స్థలములపై నాకు స్థానమిచ్చితివే</a:t>
+                <a:t>విరోదమైన ఆయుధాలు యేవి ఫలించవు</a:t>
+              </a:r>
+              <a:r>
+                <a:rPr lang="en-IN" sz="2200" dirty="0">
+                  <a:latin typeface="Ramabhadra" panose="02000600000000000000" pitchFamily="2" charset="0"/>
+                  <a:cs typeface="Ramabhadra" panose="02000600000000000000" pitchFamily="2" charset="0"/>
+                </a:rPr>
+                <a:t> </a:t>
+              </a:r>
+              <a:r>
+                <a:rPr lang="te-IN" sz="2200" dirty="0">
+                  <a:latin typeface="Ramabhadra" panose="02000600000000000000" pitchFamily="2" charset="0"/>
+                  <a:cs typeface="Ramabhadra" panose="02000600000000000000" pitchFamily="2" charset="0"/>
+                </a:rPr>
+                <a:t>(2)</a:t>
               </a:r>
             </a:p>
             <a:p>
@@ -3260,7 +3298,21 @@
                   <a:latin typeface="Ramabhadra" panose="02000600000000000000" pitchFamily="2" charset="0"/>
                   <a:cs typeface="Ramabhadra" panose="02000600000000000000" pitchFamily="2" charset="0"/>
                 </a:rPr>
-                <a:t>విజయుడా నీ కృప చాలును నా జీవితాన (2)</a:t>
+                <a:t>యెహోవా నిస్సియే నాదు విజయము</a:t>
+              </a:r>
+              <a:r>
+                <a:rPr lang="en-IN" sz="2200" dirty="0">
+                  <a:latin typeface="Ramabhadra" panose="02000600000000000000" pitchFamily="2" charset="0"/>
+                  <a:cs typeface="Ramabhadra" panose="02000600000000000000" pitchFamily="2" charset="0"/>
+                </a:rPr>
+                <a:t> </a:t>
+              </a:r>
+              <a:r>
+                <a:rPr lang="te-IN" sz="2200" dirty="0">
+                  <a:latin typeface="Ramabhadra" panose="02000600000000000000" pitchFamily="2" charset="0"/>
+                  <a:cs typeface="Ramabhadra" panose="02000600000000000000" pitchFamily="2" charset="0"/>
+                </a:rPr>
+                <a:t>(2)</a:t>
               </a:r>
             </a:p>
           </p:txBody>
@@ -3343,9 +3395,9 @@
         <p:grpSpPr>
           <a:xfrm>
             <a:off x="5104338" y="182031"/>
-            <a:ext cx="5693837" cy="6493935"/>
+            <a:ext cx="5650295" cy="6493935"/>
             <a:chOff x="160868" y="182032"/>
-            <a:chExt cx="5693837" cy="6493935"/>
+            <a:chExt cx="5650295" cy="6493935"/>
           </a:xfrm>
         </p:grpSpPr>
         <p:sp>
@@ -3417,8 +3469,8 @@
           </p:nvSpPr>
           <p:spPr>
             <a:xfrm>
-              <a:off x="240243" y="276251"/>
-              <a:ext cx="5614462" cy="6247864"/>
+              <a:off x="196701" y="276251"/>
+              <a:ext cx="5614462" cy="6001643"/>
             </a:xfrm>
             <a:prstGeom prst="rect">
               <a:avLst/>
@@ -3432,176 +3484,140 @@
             <a:lstStyle/>
             <a:p>
               <a:r>
-                <a:rPr lang="te-IN" sz="2000" dirty="0">
-                  <a:latin typeface="Ramabhadra" panose="02000600000000000000" pitchFamily="2" charset="0"/>
-                  <a:cs typeface="Ramabhadra" panose="02000600000000000000" pitchFamily="2" charset="0"/>
-                </a:rPr>
-                <a:t>యేసయ్యా .. నీ కృప నాకు చాలయ్యా.. </a:t>
-              </a:r>
-            </a:p>
-            <a:p>
-              <a:r>
-                <a:rPr lang="te-IN" sz="2000" dirty="0">
-                  <a:latin typeface="Ramabhadra" panose="02000600000000000000" pitchFamily="2" charset="0"/>
-                  <a:cs typeface="Ramabhadra" panose="02000600000000000000" pitchFamily="2" charset="0"/>
-                </a:rPr>
-                <a:t>నీ కృప లేనిదే నే బ్రతుకలేనయ్యా … </a:t>
-              </a:r>
-            </a:p>
-            <a:p>
-              <a:r>
-                <a:rPr lang="te-IN" sz="2000" dirty="0">
-                  <a:latin typeface="Ramabhadra" panose="02000600000000000000" pitchFamily="2" charset="0"/>
-                  <a:cs typeface="Ramabhadra" panose="02000600000000000000" pitchFamily="2" charset="0"/>
-                </a:rPr>
-                <a:t>నీ కృప లేని క్షణము – నీ దయ లేని క్షణము </a:t>
-              </a:r>
-            </a:p>
-            <a:p>
-              <a:r>
-                <a:rPr lang="te-IN" sz="2000" dirty="0">
-                  <a:latin typeface="Ramabhadra" panose="02000600000000000000" pitchFamily="2" charset="0"/>
-                  <a:cs typeface="Ramabhadra" panose="02000600000000000000" pitchFamily="2" charset="0"/>
-                </a:rPr>
-                <a:t>నేనూహించలేను యేసయ్యా.. (2)</a:t>
-              </a:r>
-            </a:p>
-            <a:p>
-              <a:r>
-                <a:rPr lang="te-IN" sz="2000" dirty="0">
-                  <a:latin typeface="Ramabhadra" panose="02000600000000000000" pitchFamily="2" charset="0"/>
-                  <a:cs typeface="Ramabhadra" panose="02000600000000000000" pitchFamily="2" charset="0"/>
-                </a:rPr>
-                <a:t>యేసయ్యా నీ కృప నాకు చాలయ్యా –</a:t>
-              </a:r>
-            </a:p>
-            <a:p>
-              <a:r>
-                <a:rPr lang="te-IN" sz="2000" dirty="0">
-                  <a:latin typeface="Ramabhadra" panose="02000600000000000000" pitchFamily="2" charset="0"/>
-                  <a:cs typeface="Ramabhadra" panose="02000600000000000000" pitchFamily="2" charset="0"/>
-                </a:rPr>
-                <a:t>నీ కృప లేనిదే నేనుండలేనయ్యా (2) నీ కృప</a:t>
-              </a:r>
-            </a:p>
-            <a:p>
-              <a:endParaRPr lang="te-IN" sz="2000" dirty="0">
+                <a:rPr lang="te-IN" sz="2400" dirty="0">
+                  <a:latin typeface="Ramabhadra" panose="02000600000000000000" pitchFamily="2" charset="0"/>
+                  <a:cs typeface="Ramabhadra" panose="02000600000000000000" pitchFamily="2" charset="0"/>
+                </a:rPr>
+                <a:t>సద్గుణ శీలుడా నీవే పూజ్యుడవు</a:t>
+              </a:r>
+            </a:p>
+            <a:p>
+              <a:r>
+                <a:rPr lang="te-IN" sz="2400" dirty="0">
+                  <a:latin typeface="Ramabhadra" panose="02000600000000000000" pitchFamily="2" charset="0"/>
+                  <a:cs typeface="Ramabhadra" panose="02000600000000000000" pitchFamily="2" charset="0"/>
+                </a:rPr>
+                <a:t>స్తుతి ఆరాధనకు నీవే యోగ్యుడవు</a:t>
+              </a:r>
+            </a:p>
+            <a:p>
+              <a:r>
+                <a:rPr lang="te-IN" sz="2400" dirty="0">
+                  <a:latin typeface="Ramabhadra" panose="02000600000000000000" pitchFamily="2" charset="0"/>
+                  <a:cs typeface="Ramabhadra" panose="02000600000000000000" pitchFamily="2" charset="0"/>
+                </a:rPr>
+                <a:t>సత్య ప్రమాణముతో శాశ్వత కృపనిచ్చి</a:t>
+              </a:r>
+            </a:p>
+            <a:p>
+              <a:r>
+                <a:rPr lang="te-IN" sz="2400" dirty="0">
+                  <a:latin typeface="Ramabhadra" panose="02000600000000000000" pitchFamily="2" charset="0"/>
+                  <a:cs typeface="Ramabhadra" panose="02000600000000000000" pitchFamily="2" charset="0"/>
+                </a:rPr>
+                <a:t>నీ ప్రియుని స్వాస్థ్యము నాకిచ్చితివి</a:t>
+              </a:r>
+            </a:p>
+            <a:p>
+              <a:r>
+                <a:rPr lang="te-IN" sz="2400" dirty="0">
+                  <a:latin typeface="Ramabhadra" panose="02000600000000000000" pitchFamily="2" charset="0"/>
+                  <a:cs typeface="Ramabhadra" panose="02000600000000000000" pitchFamily="2" charset="0"/>
+                </a:rPr>
+                <a:t>యేసయ్యా నీ సంకల్పమే</a:t>
+              </a:r>
+            </a:p>
+            <a:p>
+              <a:r>
+                <a:rPr lang="te-IN" sz="2400" dirty="0">
+                  <a:latin typeface="Ramabhadra" panose="02000600000000000000" pitchFamily="2" charset="0"/>
+                  <a:cs typeface="Ramabhadra" panose="02000600000000000000" pitchFamily="2" charset="0"/>
+                </a:rPr>
+                <a:t>ఇది నాపై నీకున్న అనురాగమే</a:t>
+              </a:r>
+            </a:p>
+            <a:p>
+              <a:endParaRPr lang="te-IN" sz="2400" dirty="0">
                 <a:latin typeface="Ramabhadra" panose="02000600000000000000" pitchFamily="2" charset="0"/>
                 <a:cs typeface="Ramabhadra" panose="02000600000000000000" pitchFamily="2" charset="0"/>
               </a:endParaRPr>
             </a:p>
             <a:p>
               <a:r>
-                <a:rPr lang="te-IN" sz="2000" dirty="0">
-                  <a:latin typeface="Ramabhadra" panose="02000600000000000000" pitchFamily="2" charset="0"/>
-                  <a:cs typeface="Ramabhadra" panose="02000600000000000000" pitchFamily="2" charset="0"/>
-                </a:rPr>
-                <a:t>మహిమను విడిచి – మహిలోకి దిగివచ్చి </a:t>
-              </a:r>
-            </a:p>
-            <a:p>
-              <a:r>
-                <a:rPr lang="te-IN" sz="2000" dirty="0">
-                  <a:latin typeface="Ramabhadra" panose="02000600000000000000" pitchFamily="2" charset="0"/>
-                  <a:cs typeface="Ramabhadra" panose="02000600000000000000" pitchFamily="2" charset="0"/>
-                </a:rPr>
-                <a:t>మార్గముగా మారి – మనిషిగ మార్చావు </a:t>
-              </a:r>
-            </a:p>
-            <a:p>
-              <a:r>
-                <a:rPr lang="te-IN" sz="2000" dirty="0">
-                  <a:latin typeface="Ramabhadra" panose="02000600000000000000" pitchFamily="2" charset="0"/>
-                  <a:cs typeface="Ramabhadra" panose="02000600000000000000" pitchFamily="2" charset="0"/>
-                </a:rPr>
-                <a:t>మహినే నీవు మాధుర్యముగ మార్చి </a:t>
-              </a:r>
-            </a:p>
-            <a:p>
-              <a:r>
-                <a:rPr lang="te-IN" sz="2000" dirty="0">
-                  <a:latin typeface="Ramabhadra" panose="02000600000000000000" pitchFamily="2" charset="0"/>
-                  <a:cs typeface="Ramabhadra" panose="02000600000000000000" pitchFamily="2" charset="0"/>
-                </a:rPr>
-                <a:t>మాదిరి చూపి మరు రూపమిచ్చావు(2)</a:t>
-              </a:r>
-            </a:p>
-            <a:p>
-              <a:r>
-                <a:rPr lang="te-IN" sz="2000" dirty="0">
-                  <a:latin typeface="Ramabhadra" panose="02000600000000000000" pitchFamily="2" charset="0"/>
-                  <a:cs typeface="Ramabhadra" panose="02000600000000000000" pitchFamily="2" charset="0"/>
-                </a:rPr>
-                <a:t>మహిమలో నేను మహిమను పొంద </a:t>
-              </a:r>
-            </a:p>
-            <a:p>
-              <a:r>
-                <a:rPr lang="te-IN" sz="2000" dirty="0">
-                  <a:latin typeface="Ramabhadra" panose="02000600000000000000" pitchFamily="2" charset="0"/>
-                  <a:cs typeface="Ramabhadra" panose="02000600000000000000" pitchFamily="2" charset="0"/>
-                </a:rPr>
-                <a:t>మహిమగ మార్చింది నీకృప (2) యేసయ్యా నీ కృప</a:t>
-              </a:r>
-            </a:p>
-            <a:p>
-              <a:endParaRPr lang="te-IN" sz="2000" dirty="0">
+                <a:rPr lang="te-IN" sz="2400" dirty="0">
+                  <a:latin typeface="Ramabhadra" panose="02000600000000000000" pitchFamily="2" charset="0"/>
+                  <a:cs typeface="Ramabhadra" panose="02000600000000000000" pitchFamily="2" charset="0"/>
+                </a:rPr>
+                <a:t>సిలువ సునాదమును నా శ్రమదినమున</a:t>
+              </a:r>
+            </a:p>
+            <a:p>
+              <a:r>
+                <a:rPr lang="te-IN" sz="2400" dirty="0">
+                  <a:latin typeface="Ramabhadra" panose="02000600000000000000" pitchFamily="2" charset="0"/>
+                  <a:cs typeface="Ramabhadra" panose="02000600000000000000" pitchFamily="2" charset="0"/>
+                </a:rPr>
+                <a:t>మధుర గీతికగా మదిలో వినిపించి</a:t>
+              </a:r>
+            </a:p>
+            <a:p>
+              <a:r>
+                <a:rPr lang="te-IN" sz="2400" dirty="0">
+                  <a:latin typeface="Ramabhadra" panose="02000600000000000000" pitchFamily="2" charset="0"/>
+                  <a:cs typeface="Ramabhadra" panose="02000600000000000000" pitchFamily="2" charset="0"/>
+                </a:rPr>
+                <a:t>సిలువలో దాగిన సర్వసంపదలిచ్చి</a:t>
+              </a:r>
+            </a:p>
+            <a:p>
+              <a:r>
+                <a:rPr lang="te-IN" sz="2400" dirty="0">
+                  <a:latin typeface="Ramabhadra" panose="02000600000000000000" pitchFamily="2" charset="0"/>
+                  <a:cs typeface="Ramabhadra" panose="02000600000000000000" pitchFamily="2" charset="0"/>
+                </a:rPr>
+                <a:t>కాంతిమయముగా కనపరచితివే నీ ఆత్మ శక్తితో</a:t>
+              </a:r>
+            </a:p>
+            <a:p>
+              <a:endParaRPr lang="te-IN" sz="2400" dirty="0">
                 <a:latin typeface="Ramabhadra" panose="02000600000000000000" pitchFamily="2" charset="0"/>
                 <a:cs typeface="Ramabhadra" panose="02000600000000000000" pitchFamily="2" charset="0"/>
               </a:endParaRPr>
             </a:p>
             <a:p>
               <a:r>
-                <a:rPr lang="te-IN" sz="2000" dirty="0">
-                  <a:latin typeface="Ramabhadra" panose="02000600000000000000" pitchFamily="2" charset="0"/>
-                  <a:cs typeface="Ramabhadra" panose="02000600000000000000" pitchFamily="2" charset="0"/>
-                </a:rPr>
-                <a:t>ఆజ్ఞల మార్గమున ఆశ్రయమును ఇచ్చి </a:t>
-              </a:r>
-            </a:p>
-            <a:p>
-              <a:r>
-                <a:rPr lang="te-IN" sz="2000" dirty="0">
-                  <a:latin typeface="Ramabhadra" panose="02000600000000000000" pitchFamily="2" charset="0"/>
-                  <a:cs typeface="Ramabhadra" panose="02000600000000000000" pitchFamily="2" charset="0"/>
-                </a:rPr>
-                <a:t>ఆపత్కాలమున ఆదుకొన్నావు </a:t>
-              </a:r>
-            </a:p>
-            <a:p>
-              <a:r>
-                <a:rPr lang="te-IN" sz="2000" dirty="0">
-                  <a:latin typeface="Ramabhadra" panose="02000600000000000000" pitchFamily="2" charset="0"/>
-                  <a:cs typeface="Ramabhadra" panose="02000600000000000000" pitchFamily="2" charset="0"/>
-                </a:rPr>
-                <a:t>ఆత్మీయులతో – ఆనందింపజేసి </a:t>
-              </a:r>
-            </a:p>
-            <a:p>
-              <a:r>
-                <a:rPr lang="te-IN" sz="2000" dirty="0">
-                  <a:latin typeface="Ramabhadra" panose="02000600000000000000" pitchFamily="2" charset="0"/>
-                  <a:cs typeface="Ramabhadra" panose="02000600000000000000" pitchFamily="2" charset="0"/>
-                </a:rPr>
-                <a:t>ఆనంద తైలముతో – అభిషేకించావు  (2)</a:t>
-              </a:r>
-            </a:p>
-            <a:p>
-              <a:r>
-                <a:rPr lang="te-IN" sz="2000" dirty="0">
-                  <a:latin typeface="Ramabhadra" panose="02000600000000000000" pitchFamily="2" charset="0"/>
-                  <a:cs typeface="Ramabhadra" panose="02000600000000000000" pitchFamily="2" charset="0"/>
-                </a:rPr>
-                <a:t>నా ఆశతీర ఆరాధన చేసే </a:t>
-              </a:r>
-            </a:p>
-            <a:p>
-              <a:r>
-                <a:rPr lang="te-IN" sz="2000" dirty="0">
-                  <a:latin typeface="Ramabhadra" panose="02000600000000000000" pitchFamily="2" charset="0"/>
-                  <a:cs typeface="Ramabhadra" panose="02000600000000000000" pitchFamily="2" charset="0"/>
-                </a:rPr>
-                <a:t>అదృష్టమిచ్చింది నీ కృప (2)యేసయ్యా నీ కృప</a:t>
+                <a:rPr lang="te-IN" sz="2400" dirty="0">
+                  <a:latin typeface="Ramabhadra" panose="02000600000000000000" pitchFamily="2" charset="0"/>
+                  <a:cs typeface="Ramabhadra" panose="02000600000000000000" pitchFamily="2" charset="0"/>
+                </a:rPr>
+                <a:t>నాతోడు నీడవై మరపురాని</a:t>
+              </a:r>
+            </a:p>
+            <a:p>
+              <a:r>
+                <a:rPr lang="te-IN" sz="2400" dirty="0">
+                  <a:latin typeface="Ramabhadra" panose="02000600000000000000" pitchFamily="2" charset="0"/>
+                  <a:cs typeface="Ramabhadra" panose="02000600000000000000" pitchFamily="2" charset="0"/>
+                </a:rPr>
+                <a:t>మహోప కార్యములు నాకై చేసి</a:t>
+              </a:r>
+            </a:p>
+            <a:p>
+              <a:r>
+                <a:rPr lang="te-IN" sz="2400" dirty="0">
+                  <a:latin typeface="Ramabhadra" panose="02000600000000000000" pitchFamily="2" charset="0"/>
+                  <a:cs typeface="Ramabhadra" panose="02000600000000000000" pitchFamily="2" charset="0"/>
+                </a:rPr>
+                <a:t>చీకటి దాచిన -వేకువగా మార్చి</a:t>
+              </a:r>
+            </a:p>
+            <a:p>
+              <a:r>
+                <a:rPr lang="te-IN" sz="2400" dirty="0">
+                  <a:latin typeface="Ramabhadra" panose="02000600000000000000" pitchFamily="2" charset="0"/>
+                  <a:cs typeface="Ramabhadra" panose="02000600000000000000" pitchFamily="2" charset="0"/>
+                </a:rPr>
+                <a:t>బలమైన జనముగా నిర్దారించితివి నీ కీర్తి కొరకే</a:t>
               </a:r>
             </a:p>
           </p:txBody>
@@ -3714,9 +3730,9 @@
         <p:grpSpPr>
           <a:xfrm>
             <a:off x="160868" y="182032"/>
-            <a:ext cx="4795835" cy="6493935"/>
+            <a:ext cx="5506736" cy="6493935"/>
             <a:chOff x="160868" y="182032"/>
-            <a:chExt cx="4795835" cy="6493935"/>
+            <a:chExt cx="5506736" cy="6493935"/>
           </a:xfrm>
         </p:grpSpPr>
         <p:sp>
@@ -3788,8 +3804,8 @@
           </p:nvSpPr>
           <p:spPr>
             <a:xfrm>
-              <a:off x="308503" y="768683"/>
-              <a:ext cx="4648200" cy="5262979"/>
+              <a:off x="271993" y="352014"/>
+              <a:ext cx="5395611" cy="5755422"/>
             </a:xfrm>
             <a:prstGeom prst="rect">
               <a:avLst/>
@@ -3806,11 +3822,11 @@
                 <a:defRPr/>
               </a:pPr>
               <a:r>
-                <a:rPr lang="te-IN" sz="2400" dirty="0">
-                  <a:latin typeface="Ramabhadra" panose="02000600000000000000" pitchFamily="2" charset="0"/>
-                  <a:cs typeface="Ramabhadra" panose="02000600000000000000" pitchFamily="2" charset="0"/>
-                </a:rPr>
-                <a:t>నజరేయుడా నా యేసయ్య</a:t>
+                <a:rPr lang="te-IN" sz="2300" dirty="0">
+                  <a:latin typeface="Ramabhadra" panose="02000600000000000000" pitchFamily="2" charset="0"/>
+                  <a:cs typeface="Ramabhadra" panose="02000600000000000000" pitchFamily="2" charset="0"/>
+                </a:rPr>
+                <a:t>కృపా సత్య సంపూర్ణుడా</a:t>
               </a:r>
             </a:p>
             <a:p>
@@ -3818,11 +3834,11 @@
                 <a:defRPr/>
               </a:pPr>
               <a:r>
-                <a:rPr lang="te-IN" sz="2400" dirty="0">
-                  <a:latin typeface="Ramabhadra" panose="02000600000000000000" pitchFamily="2" charset="0"/>
-                  <a:cs typeface="Ramabhadra" panose="02000600000000000000" pitchFamily="2" charset="0"/>
-                </a:rPr>
-                <a:t>ఎన్ని యుగాలకైనా</a:t>
+                <a:rPr lang="te-IN" sz="2300" dirty="0">
+                  <a:latin typeface="Ramabhadra" panose="02000600000000000000" pitchFamily="2" charset="0"/>
+                  <a:cs typeface="Ramabhadra" panose="02000600000000000000" pitchFamily="2" charset="0"/>
+                </a:rPr>
+                <a:t>సర్వలోకానికే చక్రవర్తివి నీవే యేసయ్యా -2</a:t>
               </a:r>
             </a:p>
             <a:p>
@@ -3830,11 +3846,11 @@
                 <a:defRPr/>
               </a:pPr>
               <a:r>
-                <a:rPr lang="te-IN" sz="2400" dirty="0">
-                  <a:latin typeface="Ramabhadra" panose="02000600000000000000" pitchFamily="2" charset="0"/>
-                  <a:cs typeface="Ramabhadra" panose="02000600000000000000" pitchFamily="2" charset="0"/>
-                </a:rPr>
-                <a:t>ఆరాధ్య దైవము నీవేనని</a:t>
+                <a:rPr lang="te-IN" sz="2300" dirty="0">
+                  <a:latin typeface="Ramabhadra" panose="02000600000000000000" pitchFamily="2" charset="0"/>
+                  <a:cs typeface="Ramabhadra" panose="02000600000000000000" pitchFamily="2" charset="0"/>
+                </a:rPr>
+                <a:t>నా సన్మానానికే మహనీయుడవు నీవేనయా ... </a:t>
               </a:r>
             </a:p>
             <a:p>
@@ -3842,18 +3858,31 @@
                 <a:defRPr/>
               </a:pPr>
               <a:r>
-                <a:rPr lang="te-IN" sz="2400" dirty="0">
-                  <a:latin typeface="Ramabhadra" panose="02000600000000000000" pitchFamily="2" charset="0"/>
-                  <a:cs typeface="Ramabhadra" panose="02000600000000000000" pitchFamily="2" charset="0"/>
-                </a:rPr>
-                <a:t>గళమెత్తి నీ కీర్తి నే చాటెద</a:t>
+                <a:rPr lang="te-IN" sz="2300" dirty="0">
+                  <a:latin typeface="Ramabhadra" panose="02000600000000000000" pitchFamily="2" charset="0"/>
+                  <a:cs typeface="Ramabhadra" panose="02000600000000000000" pitchFamily="2" charset="0"/>
+                </a:rPr>
+                <a:t>మహనీయుడవు నీవేనయా ... </a:t>
               </a:r>
             </a:p>
             <a:p>
               <a:pPr defTabSz="439781">
                 <a:defRPr/>
               </a:pPr>
-              <a:endParaRPr lang="te-IN" sz="2400" dirty="0">
+              <a:br>
+                <a:rPr lang="te-IN" sz="2300" dirty="0">
+                  <a:latin typeface="Ramabhadra" panose="02000600000000000000" pitchFamily="2" charset="0"/>
+                  <a:cs typeface="Ramabhadra" panose="02000600000000000000" pitchFamily="2" charset="0"/>
+                </a:rPr>
+              </a:br>
+              <a:r>
+                <a:rPr lang="te-IN" sz="2300" dirty="0">
+                  <a:latin typeface="Ramabhadra" panose="02000600000000000000" pitchFamily="2" charset="0"/>
+                  <a:cs typeface="Ramabhadra" panose="02000600000000000000" pitchFamily="2" charset="0"/>
+                </a:rPr>
+                <a:t>ఎర్ర సముద్రము నీ ఆజ్ఞ మేరకు</a:t>
+              </a:r>
+              <a:endParaRPr lang="en-IN" sz="2300" dirty="0">
                 <a:latin typeface="Ramabhadra" panose="02000600000000000000" pitchFamily="2" charset="0"/>
                 <a:cs typeface="Ramabhadra" panose="02000600000000000000" pitchFamily="2" charset="0"/>
               </a:endParaRPr>
@@ -3863,11 +3892,11 @@
                 <a:defRPr/>
               </a:pPr>
               <a:r>
-                <a:rPr lang="te-IN" sz="2400" dirty="0">
-                  <a:latin typeface="Ramabhadra" panose="02000600000000000000" pitchFamily="2" charset="0"/>
-                  <a:cs typeface="Ramabhadra" panose="02000600000000000000" pitchFamily="2" charset="0"/>
-                </a:rPr>
-                <a:t>ఆకాశ గగనాలను నీ జేనతో కొలిచితివి (2)</a:t>
+                <a:rPr lang="te-IN" sz="2300" dirty="0">
+                  <a:latin typeface="Ramabhadra" panose="02000600000000000000" pitchFamily="2" charset="0"/>
+                  <a:cs typeface="Ramabhadra" panose="02000600000000000000" pitchFamily="2" charset="0"/>
+                </a:rPr>
+                <a:t>రహదారిగా మారగా </a:t>
               </a:r>
             </a:p>
             <a:p>
@@ -3875,11 +3904,11 @@
                 <a:defRPr/>
               </a:pPr>
               <a:r>
-                <a:rPr lang="te-IN" sz="2400" dirty="0">
-                  <a:latin typeface="Ramabhadra" panose="02000600000000000000" pitchFamily="2" charset="0"/>
-                  <a:cs typeface="Ramabhadra" panose="02000600000000000000" pitchFamily="2" charset="0"/>
-                </a:rPr>
-                <a:t>శూన్యములో ఈ భూమిని</a:t>
+                <a:rPr lang="te-IN" sz="2300" dirty="0">
+                  <a:latin typeface="Ramabhadra" panose="02000600000000000000" pitchFamily="2" charset="0"/>
+                  <a:cs typeface="Ramabhadra" panose="02000600000000000000" pitchFamily="2" charset="0"/>
+                </a:rPr>
+                <a:t>దాటిరే నీ జనులు బహు క్షేమముగా -2</a:t>
               </a:r>
             </a:p>
             <a:p>
@@ -3887,30 +3916,61 @@
                 <a:defRPr/>
               </a:pPr>
               <a:r>
-                <a:rPr lang="te-IN" sz="2400" dirty="0">
-                  <a:latin typeface="Ramabhadra" panose="02000600000000000000" pitchFamily="2" charset="0"/>
-                  <a:cs typeface="Ramabhadra" panose="02000600000000000000" pitchFamily="2" charset="0"/>
-                </a:rPr>
-                <a:t>వ్రేలాడదీసిన నా యేసయ్య (2)</a:t>
-              </a:r>
+                <a:rPr lang="te-IN" sz="2300" dirty="0">
+                  <a:latin typeface="Ramabhadra" panose="02000600000000000000" pitchFamily="2" charset="0"/>
+                  <a:cs typeface="Ramabhadra" panose="02000600000000000000" pitchFamily="2" charset="0"/>
+                </a:rPr>
+                <a:t>ఆ జలములలోనే</a:t>
+              </a:r>
+              <a:endParaRPr lang="en-IN" sz="2300" dirty="0">
+                <a:latin typeface="Ramabhadra" panose="02000600000000000000" pitchFamily="2" charset="0"/>
+                <a:cs typeface="Ramabhadra" panose="02000600000000000000" pitchFamily="2" charset="0"/>
+              </a:endParaRPr>
             </a:p>
             <a:p>
               <a:pPr defTabSz="439781">
                 <a:defRPr/>
               </a:pPr>
               <a:r>
-                <a:rPr lang="te-IN" sz="2400" dirty="0">
-                  <a:latin typeface="Ramabhadra" panose="02000600000000000000" pitchFamily="2" charset="0"/>
-                  <a:cs typeface="Ramabhadra" panose="02000600000000000000" pitchFamily="2" charset="0"/>
-                </a:rPr>
-                <a:t>నీకే వందనం నీకే వందనం (2)</a:t>
+                <a:rPr lang="te-IN" sz="2300" dirty="0">
+                  <a:latin typeface="Ramabhadra" panose="02000600000000000000" pitchFamily="2" charset="0"/>
+                  <a:cs typeface="Ramabhadra" panose="02000600000000000000" pitchFamily="2" charset="0"/>
+                </a:rPr>
+                <a:t>శత్రు సైన్యము</a:t>
+              </a:r>
+              <a:r>
+                <a:rPr lang="en-IN" sz="2300" dirty="0">
+                  <a:latin typeface="Ramabhadra" panose="02000600000000000000" pitchFamily="2" charset="0"/>
+                  <a:cs typeface="Ramabhadra" panose="02000600000000000000" pitchFamily="2" charset="0"/>
+                </a:rPr>
+                <a:t> </a:t>
+              </a:r>
+              <a:r>
+                <a:rPr lang="te-IN" sz="2300" dirty="0">
+                  <a:latin typeface="Ramabhadra" panose="02000600000000000000" pitchFamily="2" charset="0"/>
+                  <a:cs typeface="Ramabhadra" panose="02000600000000000000" pitchFamily="2" charset="0"/>
+                </a:rPr>
+                <a:t>మునిగిపోయెనే - 2            </a:t>
               </a:r>
             </a:p>
             <a:p>
               <a:pPr defTabSz="439781">
                 <a:defRPr/>
               </a:pPr>
-              <a:endParaRPr lang="te-IN" sz="2400" dirty="0">
+              <a:br>
+                <a:rPr lang="te-IN" sz="2300" dirty="0">
+                  <a:latin typeface="Ramabhadra" panose="02000600000000000000" pitchFamily="2" charset="0"/>
+                  <a:cs typeface="Ramabhadra" panose="02000600000000000000" pitchFamily="2" charset="0"/>
+                </a:rPr>
+              </a:br>
+              <a:r>
+                <a:rPr lang="te-IN" sz="2300" dirty="0">
+                  <a:latin typeface="Ramabhadra" panose="02000600000000000000" pitchFamily="2" charset="0"/>
+                  <a:cs typeface="Ramabhadra" panose="02000600000000000000" pitchFamily="2" charset="0"/>
+                </a:rPr>
+                <a:t>నూతన క్రియను చేయుచున్నానని</a:t>
+              </a:r>
+              <a:endParaRPr lang="en-IN" sz="2300" dirty="0">
                 <a:latin typeface="Ramabhadra" panose="02000600000000000000" pitchFamily="2" charset="0"/>
                 <a:cs typeface="Ramabhadra" panose="02000600000000000000" pitchFamily="2" charset="0"/>
               </a:endParaRPr>
@@ -3920,11 +3980,11 @@
                 <a:defRPr/>
               </a:pPr>
               <a:r>
-                <a:rPr lang="te-IN" sz="2400" dirty="0">
-                  <a:latin typeface="Ramabhadra" panose="02000600000000000000" pitchFamily="2" charset="0"/>
-                  <a:cs typeface="Ramabhadra" panose="02000600000000000000" pitchFamily="2" charset="0"/>
-                </a:rPr>
-                <a:t>అగాధ సముద్రాలకు నీవే ఎల్లలు వేసితివి (2)</a:t>
+                <a:rPr lang="te-IN" sz="2300" dirty="0">
+                  <a:latin typeface="Ramabhadra" panose="02000600000000000000" pitchFamily="2" charset="0"/>
+                  <a:cs typeface="Ramabhadra" panose="02000600000000000000" pitchFamily="2" charset="0"/>
+                </a:rPr>
+                <a:t>నీవు సెలవీయ్యగా </a:t>
               </a:r>
             </a:p>
             <a:p>
@@ -3932,11 +3992,11 @@
                 <a:defRPr/>
               </a:pPr>
               <a:r>
-                <a:rPr lang="te-IN" sz="2400" dirty="0">
-                  <a:latin typeface="Ramabhadra" panose="02000600000000000000" pitchFamily="2" charset="0"/>
-                  <a:cs typeface="Ramabhadra" panose="02000600000000000000" pitchFamily="2" charset="0"/>
-                </a:rPr>
-                <a:t>జలములలోబడి నే వెళ్ళినా</a:t>
+                <a:rPr lang="te-IN" sz="2300" dirty="0">
+                  <a:latin typeface="Ramabhadra" panose="02000600000000000000" pitchFamily="2" charset="0"/>
+                  <a:cs typeface="Ramabhadra" panose="02000600000000000000" pitchFamily="2" charset="0"/>
+                </a:rPr>
+                <a:t>నా ఎడారి జీవితమే సుఖ సౌఖ్యము కాగా -2</a:t>
               </a:r>
             </a:p>
             <a:p>
@@ -3944,23 +4004,27 @@
                 <a:defRPr/>
               </a:pPr>
               <a:r>
-                <a:rPr lang="te-IN" sz="2400" dirty="0">
-                  <a:latin typeface="Ramabhadra" panose="02000600000000000000" pitchFamily="2" charset="0"/>
-                  <a:cs typeface="Ramabhadra" panose="02000600000000000000" pitchFamily="2" charset="0"/>
-                </a:rPr>
-                <a:t>నన్నేమి చేయవు నా యేసయ్యా (2)</a:t>
-              </a:r>
+                <a:rPr lang="te-IN" sz="2300" dirty="0">
+                  <a:latin typeface="Ramabhadra" panose="02000600000000000000" pitchFamily="2" charset="0"/>
+                  <a:cs typeface="Ramabhadra" panose="02000600000000000000" pitchFamily="2" charset="0"/>
+                </a:rPr>
+                <a:t>నా అరణ్య రోదన</a:t>
+              </a:r>
+              <a:endParaRPr lang="en-IN" sz="2300" dirty="0">
+                <a:latin typeface="Ramabhadra" panose="02000600000000000000" pitchFamily="2" charset="0"/>
+                <a:cs typeface="Ramabhadra" panose="02000600000000000000" pitchFamily="2" charset="0"/>
+              </a:endParaRPr>
             </a:p>
             <a:p>
               <a:pPr defTabSz="439781">
                 <a:defRPr/>
               </a:pPr>
               <a:r>
-                <a:rPr lang="te-IN" sz="2400" dirty="0">
-                  <a:latin typeface="Ramabhadra" panose="02000600000000000000" pitchFamily="2" charset="0"/>
-                  <a:cs typeface="Ramabhadra" panose="02000600000000000000" pitchFamily="2" charset="0"/>
-                </a:rPr>
-                <a:t>నీకే వందనం నీకే వందనం (2) </a:t>
+                <a:rPr lang="te-IN" sz="2300" dirty="0">
+                  <a:latin typeface="Ramabhadra" panose="02000600000000000000" pitchFamily="2" charset="0"/>
+                  <a:cs typeface="Ramabhadra" panose="02000600000000000000" pitchFamily="2" charset="0"/>
+                </a:rPr>
+                <a:t>ఉల్లాసముగా మారిపోయెనే - 2                    </a:t>
               </a:r>
             </a:p>
           </p:txBody>
@@ -3979,7 +4043,7 @@
           </p:nvSpPr>
           <p:spPr>
             <a:xfrm>
-              <a:off x="343961" y="326430"/>
+              <a:off x="4282546" y="320167"/>
               <a:ext cx="390525" cy="390525"/>
             </a:xfrm>
             <a:prstGeom prst="ellipse">
@@ -4043,9 +4107,9 @@
         <p:grpSpPr>
           <a:xfrm>
             <a:off x="5104338" y="182031"/>
-            <a:ext cx="4897436" cy="6493935"/>
+            <a:ext cx="4801662" cy="6493935"/>
             <a:chOff x="160868" y="182032"/>
-            <a:chExt cx="4897436" cy="6493935"/>
+            <a:chExt cx="4801662" cy="6493935"/>
           </a:xfrm>
         </p:grpSpPr>
         <p:sp>
@@ -4117,8 +4181,8 @@
           </p:nvSpPr>
           <p:spPr>
             <a:xfrm>
-              <a:off x="308503" y="521693"/>
-              <a:ext cx="4749801" cy="4693593"/>
+              <a:off x="212729" y="286334"/>
+              <a:ext cx="4749801" cy="5755422"/>
             </a:xfrm>
             <a:prstGeom prst="rect">
               <a:avLst/>
@@ -4139,154 +4203,175 @@
                   <a:latin typeface="Ramabhadra" panose="02000600000000000000" pitchFamily="2" charset="0"/>
                   <a:cs typeface="Ramabhadra" panose="02000600000000000000" pitchFamily="2" charset="0"/>
                 </a:rPr>
-                <a:t>నీవుంటే నాకు చాలు యేసయ్యా</a:t>
-              </a:r>
-            </a:p>
-            <a:p>
-              <a:pPr defTabSz="439781">
-                <a:defRPr/>
-              </a:pPr>
-              <a:r>
+                <a:t>నమ్మదగిన వాడవు సహయుడవు యెసయ్యా</a:t>
+              </a:r>
+              <a:br>
                 <a:rPr lang="te-IN" sz="2300" dirty="0">
                   <a:latin typeface="Ramabhadra" panose="02000600000000000000" pitchFamily="2" charset="0"/>
                   <a:cs typeface="Ramabhadra" panose="02000600000000000000" pitchFamily="2" charset="0"/>
                 </a:rPr>
-                <a:t>నీవెంటే నేను ఉంటానేసయ్యా (2)</a:t>
-              </a:r>
-            </a:p>
-            <a:p>
-              <a:pPr defTabSz="439781">
-                <a:defRPr/>
-              </a:pPr>
+              </a:br>
               <a:r>
                 <a:rPr lang="te-IN" sz="2300" dirty="0">
                   <a:latin typeface="Ramabhadra" panose="02000600000000000000" pitchFamily="2" charset="0"/>
                   <a:cs typeface="Ramabhadra" panose="02000600000000000000" pitchFamily="2" charset="0"/>
                 </a:rPr>
-                <a:t>నీ మాట చాలయ్యా నీ చూపు చాలయ్యా</a:t>
-              </a:r>
-            </a:p>
-            <a:p>
-              <a:pPr defTabSz="439781">
-                <a:defRPr/>
-              </a:pPr>
-              <a:r>
+                <a:t>ఆపత్కలములో ఆశ్రయమైనది నీవేనయ్యా</a:t>
+              </a:r>
+              <a:br>
                 <a:rPr lang="te-IN" sz="2300" dirty="0">
                   <a:latin typeface="Ramabhadra" panose="02000600000000000000" pitchFamily="2" charset="0"/>
                   <a:cs typeface="Ramabhadra" panose="02000600000000000000" pitchFamily="2" charset="0"/>
                 </a:rPr>
-                <a:t>నీ తోడు చాలయ్యా నీ నీడ చాలయ్యా (2)</a:t>
-              </a:r>
-              <a:endParaRPr lang="en-IN" sz="2300" dirty="0">
-                <a:latin typeface="Ramabhadra" panose="02000600000000000000" pitchFamily="2" charset="0"/>
-                <a:cs typeface="Ramabhadra" panose="02000600000000000000" pitchFamily="2" charset="0"/>
-              </a:endParaRPr>
-            </a:p>
-            <a:p>
-              <a:pPr defTabSz="439781">
-                <a:defRPr/>
-              </a:pPr>
-              <a:endParaRPr lang="te-IN" sz="2300" dirty="0">
-                <a:latin typeface="Ramabhadra" panose="02000600000000000000" pitchFamily="2" charset="0"/>
-                <a:cs typeface="Ramabhadra" panose="02000600000000000000" pitchFamily="2" charset="0"/>
-              </a:endParaRPr>
-            </a:p>
-            <a:p>
-              <a:pPr defTabSz="439781">
-                <a:defRPr/>
-              </a:pPr>
+              </a:br>
               <a:r>
                 <a:rPr lang="te-IN" sz="2300" dirty="0">
                   <a:latin typeface="Ramabhadra" panose="02000600000000000000" pitchFamily="2" charset="0"/>
                   <a:cs typeface="Ramabhadra" panose="02000600000000000000" pitchFamily="2" charset="0"/>
                 </a:rPr>
-                <a:t>ఎన్ని బాధలున్ననూ ఇబ్బందులైననూ</a:t>
-              </a:r>
-            </a:p>
-            <a:p>
-              <a:pPr defTabSz="439781">
-                <a:defRPr/>
-              </a:pPr>
-              <a:r>
+                <a:t>చెర నుండి విడిపించి చెలిమితో మంధించి</a:t>
+              </a:r>
+              <a:br>
                 <a:rPr lang="te-IN" sz="2300" dirty="0">
                   <a:latin typeface="Ramabhadra" panose="02000600000000000000" pitchFamily="2" charset="0"/>
                   <a:cs typeface="Ramabhadra" panose="02000600000000000000" pitchFamily="2" charset="0"/>
                 </a:rPr>
-                <a:t>ఎంత కష్టమొచ్చినా నిష్టూరమైననూ (2)</a:t>
-              </a:r>
-              <a:endParaRPr lang="en-IN" sz="2300" dirty="0">
-                <a:latin typeface="Ramabhadra" panose="02000600000000000000" pitchFamily="2" charset="0"/>
-                <a:cs typeface="Ramabhadra" panose="02000600000000000000" pitchFamily="2" charset="0"/>
-              </a:endParaRPr>
-            </a:p>
-            <a:p>
-              <a:pPr defTabSz="439781">
-                <a:defRPr/>
-              </a:pPr>
-              <a:endParaRPr lang="te-IN" sz="2300" dirty="0">
-                <a:latin typeface="Ramabhadra" panose="02000600000000000000" pitchFamily="2" charset="0"/>
-                <a:cs typeface="Ramabhadra" panose="02000600000000000000" pitchFamily="2" charset="0"/>
-              </a:endParaRPr>
-            </a:p>
-            <a:p>
-              <a:pPr defTabSz="439781">
-                <a:defRPr/>
-              </a:pPr>
+              </a:br>
               <a:r>
                 <a:rPr lang="te-IN" sz="2300" dirty="0">
                   <a:latin typeface="Ramabhadra" panose="02000600000000000000" pitchFamily="2" charset="0"/>
                   <a:cs typeface="Ramabhadra" panose="02000600000000000000" pitchFamily="2" charset="0"/>
                 </a:rPr>
-                <a:t>బ్రతుకు నావ పగిలినా కడలి పాలైననూ</a:t>
-              </a:r>
-            </a:p>
-            <a:p>
-              <a:pPr defTabSz="439781">
-                <a:defRPr/>
-              </a:pPr>
-              <a:r>
+                <a:t>నడిపించినావే మందవలె నీ స్వాస్ధ్యమును</a:t>
+              </a:r>
+              <a:br>
                 <a:rPr lang="te-IN" sz="2300" dirty="0">
                   <a:latin typeface="Ramabhadra" panose="02000600000000000000" pitchFamily="2" charset="0"/>
                   <a:cs typeface="Ramabhadra" panose="02000600000000000000" pitchFamily="2" charset="0"/>
                 </a:rPr>
-                <a:t>అలలు ముంచి వేసినా ఆశలు అనగారినా (2)</a:t>
-              </a:r>
-              <a:endParaRPr lang="en-IN" sz="2300" dirty="0">
-                <a:latin typeface="Ramabhadra" panose="02000600000000000000" pitchFamily="2" charset="0"/>
-                <a:cs typeface="Ramabhadra" panose="02000600000000000000" pitchFamily="2" charset="0"/>
-              </a:endParaRPr>
-            </a:p>
-            <a:p>
-              <a:pPr defTabSz="439781">
-                <a:defRPr/>
-              </a:pPr>
-              <a:endParaRPr lang="te-IN" sz="2300" dirty="0">
-                <a:latin typeface="Ramabhadra" panose="02000600000000000000" pitchFamily="2" charset="0"/>
-                <a:cs typeface="Ramabhadra" panose="02000600000000000000" pitchFamily="2" charset="0"/>
-              </a:endParaRPr>
-            </a:p>
-            <a:p>
-              <a:pPr defTabSz="439781">
-                <a:defRPr/>
-              </a:pPr>
-              <a:r>
+              </a:br>
+              <a:br>
                 <a:rPr lang="te-IN" sz="2300" dirty="0">
                   <a:latin typeface="Ramabhadra" panose="02000600000000000000" pitchFamily="2" charset="0"/>
                   <a:cs typeface="Ramabhadra" panose="02000600000000000000" pitchFamily="2" charset="0"/>
                 </a:rPr>
-                <a:t>ఆస్తులన్నీ పోయినా అనాథగా మిగిలినా</a:t>
-              </a:r>
-            </a:p>
-            <a:p>
-              <a:pPr defTabSz="439781">
-                <a:defRPr/>
-              </a:pPr>
+              </a:br>
               <a:r>
                 <a:rPr lang="te-IN" sz="2300" dirty="0">
                   <a:latin typeface="Ramabhadra" panose="02000600000000000000" pitchFamily="2" charset="0"/>
                   <a:cs typeface="Ramabhadra" panose="02000600000000000000" pitchFamily="2" charset="0"/>
                 </a:rPr>
-                <a:t>ఆప్తులే విడనాడినా ఆరోగ్యం క్షీణించినా (2) </a:t>
+                <a:t>నీ జనులకు నీవు న్యయాధిపతివైతివే శత్రువుల కోటలన్ని కూలిపొయెను</a:t>
+              </a:r>
+              <a:br>
+                <a:rPr lang="te-IN" sz="2300" dirty="0">
+                  <a:latin typeface="Ramabhadra" panose="02000600000000000000" pitchFamily="2" charset="0"/>
+                  <a:cs typeface="Ramabhadra" panose="02000600000000000000" pitchFamily="2" charset="0"/>
+                </a:rPr>
+              </a:br>
+              <a:r>
+                <a:rPr lang="te-IN" sz="2300" dirty="0">
+                  <a:latin typeface="Ramabhadra" panose="02000600000000000000" pitchFamily="2" charset="0"/>
+                  <a:cs typeface="Ramabhadra" panose="02000600000000000000" pitchFamily="2" charset="0"/>
+                </a:rPr>
+                <a:t>సంకెళ్ళ సంబరాలు మూగబోయెను</a:t>
+              </a:r>
+              <a:br>
+                <a:rPr lang="te-IN" sz="2300" dirty="0">
+                  <a:latin typeface="Ramabhadra" panose="02000600000000000000" pitchFamily="2" charset="0"/>
+                  <a:cs typeface="Ramabhadra" panose="02000600000000000000" pitchFamily="2" charset="0"/>
+                </a:rPr>
+              </a:br>
+              <a:r>
+                <a:rPr lang="te-IN" sz="2300" dirty="0">
+                  <a:latin typeface="Ramabhadra" panose="02000600000000000000" pitchFamily="2" charset="0"/>
+                  <a:cs typeface="Ramabhadra" panose="02000600000000000000" pitchFamily="2" charset="0"/>
+                </a:rPr>
+                <a:t>నీరిక్షణ కర్తవైన నిన్నే నమ్మిన ప్రజలు</a:t>
+              </a:r>
+              <a:br>
+                <a:rPr lang="te-IN" sz="2300" dirty="0">
+                  <a:latin typeface="Ramabhadra" panose="02000600000000000000" pitchFamily="2" charset="0"/>
+                  <a:cs typeface="Ramabhadra" panose="02000600000000000000" pitchFamily="2" charset="0"/>
+                </a:rPr>
+              </a:br>
+              <a:r>
+                <a:rPr lang="te-IN" sz="2300" dirty="0">
+                  <a:latin typeface="Ramabhadra" panose="02000600000000000000" pitchFamily="2" charset="0"/>
+                  <a:cs typeface="Ramabhadra" panose="02000600000000000000" pitchFamily="2" charset="0"/>
+                </a:rPr>
+                <a:t>నిత్యనంద భరితులై సీయోను కు తిరిగి వచ్చెను</a:t>
+              </a:r>
+              <a:br>
+                <a:rPr lang="te-IN" sz="2300" dirty="0">
+                  <a:latin typeface="Ramabhadra" panose="02000600000000000000" pitchFamily="2" charset="0"/>
+                  <a:cs typeface="Ramabhadra" panose="02000600000000000000" pitchFamily="2" charset="0"/>
+                </a:rPr>
+              </a:br>
+              <a:br>
+                <a:rPr lang="te-IN" sz="2300" dirty="0">
+                  <a:latin typeface="Ramabhadra" panose="02000600000000000000" pitchFamily="2" charset="0"/>
+                  <a:cs typeface="Ramabhadra" panose="02000600000000000000" pitchFamily="2" charset="0"/>
+                </a:rPr>
+              </a:br>
+              <a:r>
+                <a:rPr lang="te-IN" sz="2300" dirty="0">
+                  <a:latin typeface="Ramabhadra" panose="02000600000000000000" pitchFamily="2" charset="0"/>
+                  <a:cs typeface="Ramabhadra" panose="02000600000000000000" pitchFamily="2" charset="0"/>
+                </a:rPr>
+                <a:t>నీ ప్రియులను నీవు కాపాడే మంచి కాపరి</a:t>
+              </a:r>
+              <a:br>
+                <a:rPr lang="te-IN" sz="2300" dirty="0">
+                  <a:latin typeface="Ramabhadra" panose="02000600000000000000" pitchFamily="2" charset="0"/>
+                  <a:cs typeface="Ramabhadra" panose="02000600000000000000" pitchFamily="2" charset="0"/>
+                </a:rPr>
+              </a:br>
+              <a:r>
+                <a:rPr lang="te-IN" sz="2300" dirty="0">
+                  <a:latin typeface="Ramabhadra" panose="02000600000000000000" pitchFamily="2" charset="0"/>
+                  <a:cs typeface="Ramabhadra" panose="02000600000000000000" pitchFamily="2" charset="0"/>
+                </a:rPr>
+                <a:t>జఠిలమైన త్రోవలన్ని దాటించితివి</a:t>
+              </a:r>
+              <a:br>
+                <a:rPr lang="te-IN" sz="2300" dirty="0">
+                  <a:latin typeface="Ramabhadra" panose="02000600000000000000" pitchFamily="2" charset="0"/>
+                  <a:cs typeface="Ramabhadra" panose="02000600000000000000" pitchFamily="2" charset="0"/>
+                </a:rPr>
+              </a:br>
+              <a:r>
+                <a:rPr lang="te-IN" sz="2300" dirty="0">
+                  <a:latin typeface="Ramabhadra" panose="02000600000000000000" pitchFamily="2" charset="0"/>
+                  <a:cs typeface="Ramabhadra" panose="02000600000000000000" pitchFamily="2" charset="0"/>
+                </a:rPr>
+                <a:t>సమృద్ధి జీవముతో పోషించితివి</a:t>
+              </a:r>
+              <a:br>
+                <a:rPr lang="te-IN" sz="2300" dirty="0">
+                  <a:latin typeface="Ramabhadra" panose="02000600000000000000" pitchFamily="2" charset="0"/>
+                  <a:cs typeface="Ramabhadra" panose="02000600000000000000" pitchFamily="2" charset="0"/>
+                </a:rPr>
+              </a:br>
+              <a:r>
+                <a:rPr lang="te-IN" sz="2300" dirty="0">
+                  <a:latin typeface="Ramabhadra" panose="02000600000000000000" pitchFamily="2" charset="0"/>
+                  <a:cs typeface="Ramabhadra" panose="02000600000000000000" pitchFamily="2" charset="0"/>
+                </a:rPr>
+                <a:t>ఆలోచన కర్తవైన నీ స్వరమే వినగా</a:t>
+              </a:r>
+              <a:br>
+                <a:rPr lang="te-IN" sz="2300" dirty="0">
+                  <a:latin typeface="Ramabhadra" panose="02000600000000000000" pitchFamily="2" charset="0"/>
+                  <a:cs typeface="Ramabhadra" panose="02000600000000000000" pitchFamily="2" charset="0"/>
+                </a:rPr>
+              </a:br>
+              <a:r>
+                <a:rPr lang="te-IN" sz="2300" dirty="0">
+                  <a:latin typeface="Ramabhadra" panose="02000600000000000000" pitchFamily="2" charset="0"/>
+                  <a:cs typeface="Ramabhadra" panose="02000600000000000000" pitchFamily="2" charset="0"/>
+                </a:rPr>
+                <a:t>నిత్యాదరణను పొంది నీ క్రియలను వివరించెను</a:t>
               </a:r>
             </a:p>
           </p:txBody>

--- a/songsTemplate.pptx
+++ b/songsTemplate.pptx
@@ -4203,176 +4203,226 @@
                   <a:latin typeface="Ramabhadra" panose="02000600000000000000" pitchFamily="2" charset="0"/>
                   <a:cs typeface="Ramabhadra" panose="02000600000000000000" pitchFamily="2" charset="0"/>
                 </a:rPr>
-                <a:t>నమ్మదగిన వాడవు సహయుడవు యెసయ్యా</a:t>
-              </a:r>
-              <a:br>
+                <a:t>నమ్మదగిన వాడవు సహాయుడవు యేసయ్య</a:t>
+              </a:r>
+              <a:endParaRPr lang="en-IN" sz="2300" dirty="0">
+                <a:latin typeface="Ramabhadra" panose="02000600000000000000" pitchFamily="2" charset="0"/>
+                <a:cs typeface="Ramabhadra" panose="02000600000000000000" pitchFamily="2" charset="0"/>
+              </a:endParaRPr>
+            </a:p>
+            <a:p>
+              <a:pPr defTabSz="439781">
+                <a:defRPr/>
+              </a:pPr>
+              <a:r>
                 <a:rPr lang="te-IN" sz="2300" dirty="0">
                   <a:latin typeface="Ramabhadra" panose="02000600000000000000" pitchFamily="2" charset="0"/>
                   <a:cs typeface="Ramabhadra" panose="02000600000000000000" pitchFamily="2" charset="0"/>
                 </a:rPr>
-              </a:br>
+                <a:t>అపత్కాలములో ఆశ్రయమైనది నీవేనయ్యా</a:t>
+              </a:r>
+              <a:endParaRPr lang="en-IN" sz="2300" dirty="0">
+                <a:latin typeface="Ramabhadra" panose="02000600000000000000" pitchFamily="2" charset="0"/>
+                <a:cs typeface="Ramabhadra" panose="02000600000000000000" pitchFamily="2" charset="0"/>
+              </a:endParaRPr>
+            </a:p>
+            <a:p>
+              <a:pPr defTabSz="439781">
+                <a:defRPr/>
+              </a:pPr>
               <a:r>
                 <a:rPr lang="te-IN" sz="2300" dirty="0">
                   <a:latin typeface="Ramabhadra" panose="02000600000000000000" pitchFamily="2" charset="0"/>
                   <a:cs typeface="Ramabhadra" panose="02000600000000000000" pitchFamily="2" charset="0"/>
                 </a:rPr>
-                <a:t>ఆపత్కలములో ఆశ్రయమైనది నీవేనయ్యా</a:t>
-              </a:r>
-              <a:br>
+                <a:t>చెరనుండి విడిపించి చెలిమితో బంధించి</a:t>
+              </a:r>
+              <a:endParaRPr lang="en-IN" sz="2300" dirty="0">
+                <a:latin typeface="Ramabhadra" panose="02000600000000000000" pitchFamily="2" charset="0"/>
+                <a:cs typeface="Ramabhadra" panose="02000600000000000000" pitchFamily="2" charset="0"/>
+              </a:endParaRPr>
+            </a:p>
+            <a:p>
+              <a:pPr defTabSz="439781">
+                <a:defRPr/>
+              </a:pPr>
+              <a:r>
                 <a:rPr lang="te-IN" sz="2300" dirty="0">
                   <a:latin typeface="Ramabhadra" panose="02000600000000000000" pitchFamily="2" charset="0"/>
                   <a:cs typeface="Ramabhadra" panose="02000600000000000000" pitchFamily="2" charset="0"/>
                 </a:rPr>
-              </a:br>
+                <a:t>నడిపించినావే మందవలె నీ స్వాస్థ్యమును</a:t>
+              </a:r>
+              <a:endParaRPr lang="en-IN" sz="2300" dirty="0">
+                <a:latin typeface="Ramabhadra" panose="02000600000000000000" pitchFamily="2" charset="0"/>
+                <a:cs typeface="Ramabhadra" panose="02000600000000000000" pitchFamily="2" charset="0"/>
+              </a:endParaRPr>
+            </a:p>
+            <a:p>
+              <a:pPr defTabSz="439781">
+                <a:defRPr/>
+              </a:pPr>
+              <a:endParaRPr lang="en-IN" sz="2300" dirty="0">
+                <a:latin typeface="Ramabhadra" panose="02000600000000000000" pitchFamily="2" charset="0"/>
+                <a:cs typeface="Ramabhadra" panose="02000600000000000000" pitchFamily="2" charset="0"/>
+              </a:endParaRPr>
+            </a:p>
+            <a:p>
+              <a:pPr defTabSz="439781">
+                <a:defRPr/>
+              </a:pPr>
               <a:r>
                 <a:rPr lang="te-IN" sz="2300" dirty="0">
                   <a:latin typeface="Ramabhadra" panose="02000600000000000000" pitchFamily="2" charset="0"/>
                   <a:cs typeface="Ramabhadra" panose="02000600000000000000" pitchFamily="2" charset="0"/>
                 </a:rPr>
-                <a:t>చెర నుండి విడిపించి చెలిమితో మంధించి</a:t>
-              </a:r>
-              <a:br>
+                <a:t>నీ జనులకు నీవు న్యాయాధిపతివైతివే</a:t>
+              </a:r>
+              <a:endParaRPr lang="en-IN" sz="2300" dirty="0">
+                <a:latin typeface="Ramabhadra" panose="02000600000000000000" pitchFamily="2" charset="0"/>
+                <a:cs typeface="Ramabhadra" panose="02000600000000000000" pitchFamily="2" charset="0"/>
+              </a:endParaRPr>
+            </a:p>
+            <a:p>
+              <a:pPr defTabSz="439781">
+                <a:defRPr/>
+              </a:pPr>
+              <a:r>
                 <a:rPr lang="te-IN" sz="2300" dirty="0">
                   <a:latin typeface="Ramabhadra" panose="02000600000000000000" pitchFamily="2" charset="0"/>
                   <a:cs typeface="Ramabhadra" panose="02000600000000000000" pitchFamily="2" charset="0"/>
                 </a:rPr>
-              </a:br>
+                <a:t>శత్రువుల కోటలన్ని కూలిపోయెను</a:t>
+              </a:r>
+              <a:endParaRPr lang="en-IN" sz="2300" dirty="0">
+                <a:latin typeface="Ramabhadra" panose="02000600000000000000" pitchFamily="2" charset="0"/>
+                <a:cs typeface="Ramabhadra" panose="02000600000000000000" pitchFamily="2" charset="0"/>
+              </a:endParaRPr>
+            </a:p>
+            <a:p>
+              <a:pPr defTabSz="439781">
+                <a:defRPr/>
+              </a:pPr>
               <a:r>
                 <a:rPr lang="te-IN" sz="2300" dirty="0">
                   <a:latin typeface="Ramabhadra" panose="02000600000000000000" pitchFamily="2" charset="0"/>
                   <a:cs typeface="Ramabhadra" panose="02000600000000000000" pitchFamily="2" charset="0"/>
                 </a:rPr>
-                <a:t>నడిపించినావే మందవలె నీ స్వాస్ధ్యమును</a:t>
-              </a:r>
-              <a:br>
+                <a:t>సంకెళ్ళ సంబరాలు మూగబోయెను</a:t>
+              </a:r>
+              <a:endParaRPr lang="en-IN" sz="2300" dirty="0">
+                <a:latin typeface="Ramabhadra" panose="02000600000000000000" pitchFamily="2" charset="0"/>
+                <a:cs typeface="Ramabhadra" panose="02000600000000000000" pitchFamily="2" charset="0"/>
+              </a:endParaRPr>
+            </a:p>
+            <a:p>
+              <a:pPr defTabSz="439781">
+                <a:defRPr/>
+              </a:pPr>
+              <a:r>
                 <a:rPr lang="te-IN" sz="2300" dirty="0">
                   <a:latin typeface="Ramabhadra" panose="02000600000000000000" pitchFamily="2" charset="0"/>
                   <a:cs typeface="Ramabhadra" panose="02000600000000000000" pitchFamily="2" charset="0"/>
                 </a:rPr>
-              </a:br>
-              <a:br>
+                <a:t>నిరీక్షణ కర్తవైన నిన్నే నమ్మిన ప్రజలు</a:t>
+              </a:r>
+              <a:endParaRPr lang="en-IN" sz="2300" dirty="0">
+                <a:latin typeface="Ramabhadra" panose="02000600000000000000" pitchFamily="2" charset="0"/>
+                <a:cs typeface="Ramabhadra" panose="02000600000000000000" pitchFamily="2" charset="0"/>
+              </a:endParaRPr>
+            </a:p>
+            <a:p>
+              <a:pPr defTabSz="439781">
+                <a:defRPr/>
+              </a:pPr>
+              <a:r>
                 <a:rPr lang="te-IN" sz="2300" dirty="0">
                   <a:latin typeface="Ramabhadra" panose="02000600000000000000" pitchFamily="2" charset="0"/>
                   <a:cs typeface="Ramabhadra" panose="02000600000000000000" pitchFamily="2" charset="0"/>
                 </a:rPr>
-              </a:br>
+                <a:t>నిత్యానందబారితులై సీయోనుకు తిరిగివచ్చెను</a:t>
+              </a:r>
+              <a:endParaRPr lang="en-IN" sz="2300" dirty="0">
+                <a:latin typeface="Ramabhadra" panose="02000600000000000000" pitchFamily="2" charset="0"/>
+                <a:cs typeface="Ramabhadra" panose="02000600000000000000" pitchFamily="2" charset="0"/>
+              </a:endParaRPr>
+            </a:p>
+            <a:p>
+              <a:pPr defTabSz="439781">
+                <a:defRPr/>
+              </a:pPr>
+              <a:endParaRPr lang="en-IN" sz="2300" dirty="0">
+                <a:latin typeface="Ramabhadra" panose="02000600000000000000" pitchFamily="2" charset="0"/>
+                <a:cs typeface="Ramabhadra" panose="02000600000000000000" pitchFamily="2" charset="0"/>
+              </a:endParaRPr>
+            </a:p>
+            <a:p>
+              <a:pPr defTabSz="439781">
+                <a:defRPr/>
+              </a:pPr>
               <a:r>
                 <a:rPr lang="te-IN" sz="2300" dirty="0">
                   <a:latin typeface="Ramabhadra" panose="02000600000000000000" pitchFamily="2" charset="0"/>
                   <a:cs typeface="Ramabhadra" panose="02000600000000000000" pitchFamily="2" charset="0"/>
                 </a:rPr>
-                <a:t>నీ జనులకు నీవు న్యయాధిపతివైతివే శత్రువుల కోటలన్ని కూలిపొయెను</a:t>
-              </a:r>
-              <a:br>
+                <a:t>నీ ప్రియులను నీవు కాపాడే మంచి కాపరి</a:t>
+              </a:r>
+              <a:endParaRPr lang="en-IN" sz="2300" dirty="0">
+                <a:latin typeface="Ramabhadra" panose="02000600000000000000" pitchFamily="2" charset="0"/>
+                <a:cs typeface="Ramabhadra" panose="02000600000000000000" pitchFamily="2" charset="0"/>
+              </a:endParaRPr>
+            </a:p>
+            <a:p>
+              <a:pPr defTabSz="439781">
+                <a:defRPr/>
+              </a:pPr>
+              <a:r>
                 <a:rPr lang="te-IN" sz="2300" dirty="0">
                   <a:latin typeface="Ramabhadra" panose="02000600000000000000" pitchFamily="2" charset="0"/>
                   <a:cs typeface="Ramabhadra" panose="02000600000000000000" pitchFamily="2" charset="0"/>
                 </a:rPr>
-              </a:br>
+                <a:t>జఠిలమైన త్రోవలన్ని దాటించితివి</a:t>
+              </a:r>
+            </a:p>
+            <a:p>
+              <a:pPr defTabSz="439781">
+                <a:defRPr/>
+              </a:pPr>
               <a:r>
                 <a:rPr lang="te-IN" sz="2300" dirty="0">
                   <a:latin typeface="Ramabhadra" panose="02000600000000000000" pitchFamily="2" charset="0"/>
                   <a:cs typeface="Ramabhadra" panose="02000600000000000000" pitchFamily="2" charset="0"/>
                 </a:rPr>
-                <a:t>సంకెళ్ళ సంబరాలు మూగబోయెను</a:t>
-              </a:r>
-              <a:br>
+                <a:t>సంమృద్ది జీవముతో పొషించితివి</a:t>
+              </a:r>
+            </a:p>
+            <a:p>
+              <a:pPr defTabSz="439781">
+                <a:defRPr/>
+              </a:pPr>
+              <a:r>
                 <a:rPr lang="te-IN" sz="2300" dirty="0">
                   <a:latin typeface="Ramabhadra" panose="02000600000000000000" pitchFamily="2" charset="0"/>
                   <a:cs typeface="Ramabhadra" panose="02000600000000000000" pitchFamily="2" charset="0"/>
                 </a:rPr>
-              </a:br>
+                <a:t>ఆలోచన కర్తవైన నీ స్వరమే వినగా</a:t>
+              </a:r>
+            </a:p>
+            <a:p>
+              <a:pPr defTabSz="439781">
+                <a:defRPr/>
+              </a:pPr>
               <a:r>
                 <a:rPr lang="te-IN" sz="2300" dirty="0">
                   <a:latin typeface="Ramabhadra" panose="02000600000000000000" pitchFamily="2" charset="0"/>
                   <a:cs typeface="Ramabhadra" panose="02000600000000000000" pitchFamily="2" charset="0"/>
                 </a:rPr>
-                <a:t>నీరిక్షణ కర్తవైన నిన్నే నమ్మిన ప్రజలు</a:t>
-              </a:r>
-              <a:br>
-                <a:rPr lang="te-IN" sz="2300" dirty="0">
-                  <a:latin typeface="Ramabhadra" panose="02000600000000000000" pitchFamily="2" charset="0"/>
-                  <a:cs typeface="Ramabhadra" panose="02000600000000000000" pitchFamily="2" charset="0"/>
-                </a:rPr>
-              </a:br>
-              <a:r>
-                <a:rPr lang="te-IN" sz="2300" dirty="0">
-                  <a:latin typeface="Ramabhadra" panose="02000600000000000000" pitchFamily="2" charset="0"/>
-                  <a:cs typeface="Ramabhadra" panose="02000600000000000000" pitchFamily="2" charset="0"/>
-                </a:rPr>
-                <a:t>నిత్యనంద భరితులై సీయోను కు తిరిగి వచ్చెను</a:t>
-              </a:r>
-              <a:br>
-                <a:rPr lang="te-IN" sz="2300" dirty="0">
-                  <a:latin typeface="Ramabhadra" panose="02000600000000000000" pitchFamily="2" charset="0"/>
-                  <a:cs typeface="Ramabhadra" panose="02000600000000000000" pitchFamily="2" charset="0"/>
-                </a:rPr>
-              </a:br>
-              <a:br>
-                <a:rPr lang="te-IN" sz="2300" dirty="0">
-                  <a:latin typeface="Ramabhadra" panose="02000600000000000000" pitchFamily="2" charset="0"/>
-                  <a:cs typeface="Ramabhadra" panose="02000600000000000000" pitchFamily="2" charset="0"/>
-                </a:rPr>
-              </a:br>
-              <a:r>
-                <a:rPr lang="te-IN" sz="2300" dirty="0">
-                  <a:latin typeface="Ramabhadra" panose="02000600000000000000" pitchFamily="2" charset="0"/>
-                  <a:cs typeface="Ramabhadra" panose="02000600000000000000" pitchFamily="2" charset="0"/>
-                </a:rPr>
-                <a:t>నీ ప్రియులను నీవు కాపాడే మంచి కాపరి</a:t>
-              </a:r>
-              <a:br>
-                <a:rPr lang="te-IN" sz="2300" dirty="0">
-                  <a:latin typeface="Ramabhadra" panose="02000600000000000000" pitchFamily="2" charset="0"/>
-                  <a:cs typeface="Ramabhadra" panose="02000600000000000000" pitchFamily="2" charset="0"/>
-                </a:rPr>
-              </a:br>
-              <a:r>
-                <a:rPr lang="te-IN" sz="2300" dirty="0">
-                  <a:latin typeface="Ramabhadra" panose="02000600000000000000" pitchFamily="2" charset="0"/>
-                  <a:cs typeface="Ramabhadra" panose="02000600000000000000" pitchFamily="2" charset="0"/>
-                </a:rPr>
-                <a:t>జఠిలమైన త్రోవలన్ని దాటించితివి</a:t>
-              </a:r>
-              <a:br>
-                <a:rPr lang="te-IN" sz="2300" dirty="0">
-                  <a:latin typeface="Ramabhadra" panose="02000600000000000000" pitchFamily="2" charset="0"/>
-                  <a:cs typeface="Ramabhadra" panose="02000600000000000000" pitchFamily="2" charset="0"/>
-                </a:rPr>
-              </a:br>
-              <a:r>
-                <a:rPr lang="te-IN" sz="2300" dirty="0">
-                  <a:latin typeface="Ramabhadra" panose="02000600000000000000" pitchFamily="2" charset="0"/>
-                  <a:cs typeface="Ramabhadra" panose="02000600000000000000" pitchFamily="2" charset="0"/>
-                </a:rPr>
-                <a:t>సమృద్ధి జీవముతో పోషించితివి</a:t>
-              </a:r>
-              <a:br>
-                <a:rPr lang="te-IN" sz="2300" dirty="0">
-                  <a:latin typeface="Ramabhadra" panose="02000600000000000000" pitchFamily="2" charset="0"/>
-                  <a:cs typeface="Ramabhadra" panose="02000600000000000000" pitchFamily="2" charset="0"/>
-                </a:rPr>
-              </a:br>
-              <a:r>
-                <a:rPr lang="te-IN" sz="2300" dirty="0">
-                  <a:latin typeface="Ramabhadra" panose="02000600000000000000" pitchFamily="2" charset="0"/>
-                  <a:cs typeface="Ramabhadra" panose="02000600000000000000" pitchFamily="2" charset="0"/>
-                </a:rPr>
-                <a:t>ఆలోచన కర్తవైన నీ స్వరమే వినగా</a:t>
-              </a:r>
-              <a:br>
-                <a:rPr lang="te-IN" sz="2300" dirty="0">
-                  <a:latin typeface="Ramabhadra" panose="02000600000000000000" pitchFamily="2" charset="0"/>
-                  <a:cs typeface="Ramabhadra" panose="02000600000000000000" pitchFamily="2" charset="0"/>
-                </a:rPr>
-              </a:br>
-              <a:r>
-                <a:rPr lang="te-IN" sz="2300" dirty="0">
-                  <a:latin typeface="Ramabhadra" panose="02000600000000000000" pitchFamily="2" charset="0"/>
-                  <a:cs typeface="Ramabhadra" panose="02000600000000000000" pitchFamily="2" charset="0"/>
-                </a:rPr>
-                <a:t>నిత్యాదరణను పొంది నీ క్రియలను వివరించెను</a:t>
-              </a:r>
+                <a:t>నిత్యాఆదరణను పొంది నీ క్రియలను వివరించగా</a:t>
+              </a:r>
+              <a:endParaRPr lang="en-IN" sz="2300" dirty="0">
+                <a:latin typeface="Ramabhadra" panose="02000600000000000000" pitchFamily="2" charset="0"/>
+                <a:cs typeface="Ramabhadra" panose="02000600000000000000" pitchFamily="2" charset="0"/>
+              </a:endParaRPr>
             </a:p>
           </p:txBody>
         </p:sp>

--- a/songsTemplate.pptx
+++ b/songsTemplate.pptx
@@ -255,7 +255,7 @@
           <a:p>
             <a:fld id="{F1102B08-ED9E-409F-B95F-09CAA1DAF6E0}" type="datetimeFigureOut">
               <a:rPr lang="en-IN" smtClean="0"/>
-              <a:t>04-01-2025</a:t>
+              <a:t>11-01-2025</a:t>
             </a:fld>
             <a:endParaRPr lang="en-IN"/>
           </a:p>
@@ -425,7 +425,7 @@
           <a:p>
             <a:fld id="{F1102B08-ED9E-409F-B95F-09CAA1DAF6E0}" type="datetimeFigureOut">
               <a:rPr lang="en-IN" smtClean="0"/>
-              <a:t>04-01-2025</a:t>
+              <a:t>11-01-2025</a:t>
             </a:fld>
             <a:endParaRPr lang="en-IN"/>
           </a:p>
@@ -605,7 +605,7 @@
           <a:p>
             <a:fld id="{F1102B08-ED9E-409F-B95F-09CAA1DAF6E0}" type="datetimeFigureOut">
               <a:rPr lang="en-IN" smtClean="0"/>
-              <a:t>04-01-2025</a:t>
+              <a:t>11-01-2025</a:t>
             </a:fld>
             <a:endParaRPr lang="en-IN"/>
           </a:p>
@@ -775,7 +775,7 @@
           <a:p>
             <a:fld id="{F1102B08-ED9E-409F-B95F-09CAA1DAF6E0}" type="datetimeFigureOut">
               <a:rPr lang="en-IN" smtClean="0"/>
-              <a:t>04-01-2025</a:t>
+              <a:t>11-01-2025</a:t>
             </a:fld>
             <a:endParaRPr lang="en-IN"/>
           </a:p>
@@ -1019,7 +1019,7 @@
           <a:p>
             <a:fld id="{F1102B08-ED9E-409F-B95F-09CAA1DAF6E0}" type="datetimeFigureOut">
               <a:rPr lang="en-IN" smtClean="0"/>
-              <a:t>04-01-2025</a:t>
+              <a:t>11-01-2025</a:t>
             </a:fld>
             <a:endParaRPr lang="en-IN"/>
           </a:p>
@@ -1251,7 +1251,7 @@
           <a:p>
             <a:fld id="{F1102B08-ED9E-409F-B95F-09CAA1DAF6E0}" type="datetimeFigureOut">
               <a:rPr lang="en-IN" smtClean="0"/>
-              <a:t>04-01-2025</a:t>
+              <a:t>11-01-2025</a:t>
             </a:fld>
             <a:endParaRPr lang="en-IN"/>
           </a:p>
@@ -1618,7 +1618,7 @@
           <a:p>
             <a:fld id="{F1102B08-ED9E-409F-B95F-09CAA1DAF6E0}" type="datetimeFigureOut">
               <a:rPr lang="en-IN" smtClean="0"/>
-              <a:t>04-01-2025</a:t>
+              <a:t>11-01-2025</a:t>
             </a:fld>
             <a:endParaRPr lang="en-IN"/>
           </a:p>
@@ -1736,7 +1736,7 @@
           <a:p>
             <a:fld id="{F1102B08-ED9E-409F-B95F-09CAA1DAF6E0}" type="datetimeFigureOut">
               <a:rPr lang="en-IN" smtClean="0"/>
-              <a:t>04-01-2025</a:t>
+              <a:t>11-01-2025</a:t>
             </a:fld>
             <a:endParaRPr lang="en-IN"/>
           </a:p>
@@ -1831,7 +1831,7 @@
           <a:p>
             <a:fld id="{F1102B08-ED9E-409F-B95F-09CAA1DAF6E0}" type="datetimeFigureOut">
               <a:rPr lang="en-IN" smtClean="0"/>
-              <a:t>04-01-2025</a:t>
+              <a:t>11-01-2025</a:t>
             </a:fld>
             <a:endParaRPr lang="en-IN"/>
           </a:p>
@@ -2108,7 +2108,7 @@
           <a:p>
             <a:fld id="{F1102B08-ED9E-409F-B95F-09CAA1DAF6E0}" type="datetimeFigureOut">
               <a:rPr lang="en-IN" smtClean="0"/>
-              <a:t>04-01-2025</a:t>
+              <a:t>11-01-2025</a:t>
             </a:fld>
             <a:endParaRPr lang="en-IN"/>
           </a:p>
@@ -2365,7 +2365,7 @@
           <a:p>
             <a:fld id="{F1102B08-ED9E-409F-B95F-09CAA1DAF6E0}" type="datetimeFigureOut">
               <a:rPr lang="en-IN" smtClean="0"/>
-              <a:t>04-01-2025</a:t>
+              <a:t>11-01-2025</a:t>
             </a:fld>
             <a:endParaRPr lang="en-IN"/>
           </a:p>
@@ -2578,7 +2578,7 @@
           <a:p>
             <a:fld id="{F1102B08-ED9E-409F-B95F-09CAA1DAF6E0}" type="datetimeFigureOut">
               <a:rPr lang="en-IN" smtClean="0"/>
-              <a:t>04-01-2025</a:t>
+              <a:t>11-01-2025</a:t>
             </a:fld>
             <a:endParaRPr lang="en-IN"/>
           </a:p>
@@ -2997,10 +2997,10 @@
         </p:nvGrpSpPr>
         <p:grpSpPr>
           <a:xfrm>
-            <a:off x="160868" y="182032"/>
-            <a:ext cx="4648200" cy="6493935"/>
-            <a:chOff x="160868" y="182032"/>
-            <a:chExt cx="4648200" cy="6493935"/>
+            <a:off x="160868" y="182031"/>
+            <a:ext cx="4648200" cy="6863417"/>
+            <a:chOff x="160868" y="182031"/>
+            <a:chExt cx="4648200" cy="6863417"/>
           </a:xfrm>
         </p:grpSpPr>
         <p:sp>
@@ -3072,8 +3072,8 @@
           </p:nvSpPr>
           <p:spPr>
             <a:xfrm>
-              <a:off x="318523" y="331486"/>
-              <a:ext cx="4483140" cy="5170646"/>
+              <a:off x="243398" y="182031"/>
+              <a:ext cx="4483140" cy="6863417"/>
             </a:xfrm>
             <a:prstGeom prst="rect">
               <a:avLst/>
@@ -3094,7 +3094,33 @@
                   <a:latin typeface="Ramabhadra" panose="02000600000000000000" pitchFamily="2" charset="0"/>
                   <a:cs typeface="Ramabhadra" panose="02000600000000000000" pitchFamily="2" charset="0"/>
                 </a:rPr>
-                <a:t>ఈ దినం సదా నా యేసుకే సొంతం</a:t>
+                <a:t>నిజమైన ద్రాక్షావల్లి నీవే</a:t>
+              </a:r>
+              <a:br>
+                <a:rPr lang="te-IN" sz="2200" dirty="0">
+                  <a:latin typeface="Ramabhadra" panose="02000600000000000000" pitchFamily="2" charset="0"/>
+                  <a:cs typeface="Ramabhadra" panose="02000600000000000000" pitchFamily="2" charset="0"/>
+                </a:rPr>
+              </a:br>
+              <a:r>
+                <a:rPr lang="te-IN" sz="2200" dirty="0">
+                  <a:latin typeface="Ramabhadra" panose="02000600000000000000" pitchFamily="2" charset="0"/>
+                  <a:cs typeface="Ramabhadra" panose="02000600000000000000" pitchFamily="2" charset="0"/>
+                </a:rPr>
+                <a:t>నిత్యమైన సంతోషము నీలోనే </a:t>
+              </a:r>
+              <a:br>
+                <a:rPr lang="te-IN" sz="2200" dirty="0">
+                  <a:latin typeface="Ramabhadra" panose="02000600000000000000" pitchFamily="2" charset="0"/>
+                  <a:cs typeface="Ramabhadra" panose="02000600000000000000" pitchFamily="2" charset="0"/>
+                </a:rPr>
+              </a:br>
+              <a:r>
+                <a:rPr lang="te-IN" sz="2200" dirty="0">
+                  <a:latin typeface="Ramabhadra" panose="02000600000000000000" pitchFamily="2" charset="0"/>
+                  <a:cs typeface="Ramabhadra" panose="02000600000000000000" pitchFamily="2" charset="0"/>
+                </a:rPr>
+                <a:t>శాశ్వతమైనది ఎంతో మధురమైనది</a:t>
               </a:r>
             </a:p>
             <a:p>
@@ -3106,43 +3132,7 @@
                   <a:latin typeface="Ramabhadra" panose="02000600000000000000" pitchFamily="2" charset="0"/>
                   <a:cs typeface="Ramabhadra" panose="02000600000000000000" pitchFamily="2" charset="0"/>
                 </a:rPr>
-                <a:t>నా నాధుని ప్రసన్నత</a:t>
-              </a:r>
-            </a:p>
-            <a:p>
-              <a:pPr defTabSz="439781">
-                <a:defRPr/>
-              </a:pPr>
-              <a:r>
-                <a:rPr lang="te-IN" sz="2200" dirty="0">
-                  <a:latin typeface="Ramabhadra" panose="02000600000000000000" pitchFamily="2" charset="0"/>
-                  <a:cs typeface="Ramabhadra" panose="02000600000000000000" pitchFamily="2" charset="0"/>
-                </a:rPr>
-                <a:t>నా తోడ నడచును (2)</a:t>
-              </a:r>
-            </a:p>
-            <a:p>
-              <a:pPr defTabSz="439781">
-                <a:defRPr/>
-              </a:pPr>
-              <a:r>
-                <a:rPr lang="te-IN" sz="2200" dirty="0">
-                  <a:latin typeface="Ramabhadra" panose="02000600000000000000" pitchFamily="2" charset="0"/>
-                  <a:cs typeface="Ramabhadra" panose="02000600000000000000" pitchFamily="2" charset="0"/>
-                </a:rPr>
-                <a:t>రానున్న కాలము – కలత నివ్వదు (2)</a:t>
-              </a:r>
-            </a:p>
-            <a:p>
-              <a:pPr defTabSz="439781">
-                <a:defRPr/>
-              </a:pPr>
-              <a:r>
-                <a:rPr lang="te-IN" sz="2200" dirty="0">
-                  <a:latin typeface="Ramabhadra" panose="02000600000000000000" pitchFamily="2" charset="0"/>
-                  <a:cs typeface="Ramabhadra" panose="02000600000000000000" pitchFamily="2" charset="0"/>
-                </a:rPr>
-                <a:t>నా మంచి కాపరీ సదా – నన్ను నడుపును</a:t>
+                <a:t>నాపైన నీకున్న ప్రేమ ఎనలేని నీ ప్రేమ    </a:t>
               </a:r>
             </a:p>
             <a:p>
@@ -3163,57 +3153,46 @@
                   <a:latin typeface="Ramabhadra" panose="02000600000000000000" pitchFamily="2" charset="0"/>
                   <a:cs typeface="Ramabhadra" panose="02000600000000000000" pitchFamily="2" charset="0"/>
                 </a:rPr>
-                <a:t>ఎడారులు లోయలు ఎదురు నిలచినా</a:t>
-              </a:r>
-            </a:p>
-            <a:p>
-              <a:pPr defTabSz="439781">
-                <a:defRPr/>
-              </a:pPr>
-              <a:r>
+                <a:t>అతి కాంక్షనీయుడా దివ్యమైన నీ రూపులో</a:t>
+              </a:r>
+              <a:br>
                 <a:rPr lang="te-IN" sz="2200" dirty="0">
                   <a:latin typeface="Ramabhadra" panose="02000600000000000000" pitchFamily="2" charset="0"/>
                   <a:cs typeface="Ramabhadra" panose="02000600000000000000" pitchFamily="2" charset="0"/>
                 </a:rPr>
-                <a:t>ఎన్నడెవరు నడువని బాటయైనను (2)</a:t>
-              </a:r>
-            </a:p>
-            <a:p>
-              <a:pPr defTabSz="439781">
-                <a:defRPr/>
-              </a:pPr>
+              </a:br>
               <a:r>
                 <a:rPr lang="te-IN" sz="2200" dirty="0">
                   <a:latin typeface="Ramabhadra" panose="02000600000000000000" pitchFamily="2" charset="0"/>
                   <a:cs typeface="Ramabhadra" panose="02000600000000000000" pitchFamily="2" charset="0"/>
                 </a:rPr>
-                <a:t>వెరవదెన్నడైనను నాదు హృదయము (2)</a:t>
-              </a:r>
-            </a:p>
-            <a:p>
-              <a:pPr defTabSz="439781">
-                <a:defRPr/>
-              </a:pPr>
-              <a:r>
+                <a:t>జీవించున్నాను నీ ప్రేమకు నే పత్రికగా </a:t>
+              </a:r>
+              <a:br>
                 <a:rPr lang="te-IN" sz="2200" dirty="0">
                   <a:latin typeface="Ramabhadra" panose="02000600000000000000" pitchFamily="2" charset="0"/>
                   <a:cs typeface="Ramabhadra" panose="02000600000000000000" pitchFamily="2" charset="0"/>
                 </a:rPr>
-                <a:t>గాయపడిన యేసుపాదం</a:t>
-              </a:r>
-              <a:r>
-                <a:rPr lang="en-IN" sz="2200" dirty="0">
-                  <a:latin typeface="Ramabhadra" panose="02000600000000000000" pitchFamily="2" charset="0"/>
-                  <a:cs typeface="Ramabhadra" panose="02000600000000000000" pitchFamily="2" charset="0"/>
-                </a:rPr>
-                <a:t> </a:t>
-              </a:r>
+              </a:br>
               <a:r>
                 <a:rPr lang="te-IN" sz="2200" dirty="0">
                   <a:latin typeface="Ramabhadra" panose="02000600000000000000" pitchFamily="2" charset="0"/>
                   <a:cs typeface="Ramabhadra" panose="02000600000000000000" pitchFamily="2" charset="0"/>
                 </a:rPr>
-                <a:t>అందు నడచెను (2)</a:t>
+                <a:t>శిధిలమై యుండగా నన్ను నీదు రక్తముతో కడిగి</a:t>
+              </a:r>
+              <a:br>
+                <a:rPr lang="te-IN" sz="2200" dirty="0">
+                  <a:latin typeface="Ramabhadra" panose="02000600000000000000" pitchFamily="2" charset="0"/>
+                  <a:cs typeface="Ramabhadra" panose="02000600000000000000" pitchFamily="2" charset="0"/>
+                </a:rPr>
+              </a:br>
+              <a:r>
+                <a:rPr lang="te-IN" sz="2200" dirty="0">
+                  <a:latin typeface="Ramabhadra" panose="02000600000000000000" pitchFamily="2" charset="0"/>
+                  <a:cs typeface="Ramabhadra" panose="02000600000000000000" pitchFamily="2" charset="0"/>
+                </a:rPr>
+                <a:t>నీ పోలికగా మార్చినావే నా యేసయ్యా      </a:t>
               </a:r>
             </a:p>
             <a:p>
@@ -3234,34 +3213,60 @@
                   <a:latin typeface="Ramabhadra" panose="02000600000000000000" pitchFamily="2" charset="0"/>
                   <a:cs typeface="Ramabhadra" panose="02000600000000000000" pitchFamily="2" charset="0"/>
                 </a:rPr>
-                <a:t>ప్రవాహం వోలె శోదకుండు ఎదురు వచ్చినా</a:t>
-              </a:r>
+                <a:t>నా ప్రాణ ప్రియుడా శ్రేష్టమైన ఫలములతో</a:t>
+              </a:r>
+              <a:br>
+                <a:rPr lang="te-IN" sz="2200" dirty="0">
+                  <a:latin typeface="Ramabhadra" panose="02000600000000000000" pitchFamily="2" charset="0"/>
+                  <a:cs typeface="Ramabhadra" panose="02000600000000000000" pitchFamily="2" charset="0"/>
+                </a:rPr>
+              </a:br>
+              <a:r>
+                <a:rPr lang="te-IN" sz="2200" dirty="0">
+                  <a:latin typeface="Ramabhadra" panose="02000600000000000000" pitchFamily="2" charset="0"/>
+                  <a:cs typeface="Ramabhadra" panose="02000600000000000000" pitchFamily="2" charset="0"/>
+                </a:rPr>
+                <a:t>అర్పించుచున్నాను సర్వము నీకే అర్పణగా </a:t>
+              </a:r>
+              <a:br>
+                <a:rPr lang="te-IN" sz="2200" dirty="0">
+                  <a:latin typeface="Ramabhadra" panose="02000600000000000000" pitchFamily="2" charset="0"/>
+                  <a:cs typeface="Ramabhadra" panose="02000600000000000000" pitchFamily="2" charset="0"/>
+                </a:rPr>
+              </a:br>
+              <a:r>
+                <a:rPr lang="te-IN" sz="2200" dirty="0">
+                  <a:latin typeface="Ramabhadra" panose="02000600000000000000" pitchFamily="2" charset="0"/>
+                  <a:cs typeface="Ramabhadra" panose="02000600000000000000" pitchFamily="2" charset="0"/>
+                </a:rPr>
+                <a:t>వాడిపోనివ్వక నాకు ఆశ్రయమైతివి నీవు</a:t>
+              </a:r>
+              <a:br>
+                <a:rPr lang="te-IN" sz="2200" dirty="0">
+                  <a:latin typeface="Ramabhadra" panose="02000600000000000000" pitchFamily="2" charset="0"/>
+                  <a:cs typeface="Ramabhadra" panose="02000600000000000000" pitchFamily="2" charset="0"/>
+                </a:rPr>
+              </a:br>
+              <a:r>
+                <a:rPr lang="te-IN" sz="2200" dirty="0">
+                  <a:latin typeface="Ramabhadra" panose="02000600000000000000" pitchFamily="2" charset="0"/>
+                  <a:cs typeface="Ramabhadra" panose="02000600000000000000" pitchFamily="2" charset="0"/>
+                </a:rPr>
+                <a:t>జీవపు ఊటవై బలపరచితివి నా యేసయ్యా </a:t>
+              </a:r>
+              <a:endParaRPr lang="en-US" sz="2200" dirty="0">
+                <a:latin typeface="Ramabhadra" panose="02000600000000000000" pitchFamily="2" charset="0"/>
+                <a:cs typeface="Ramabhadra" panose="02000600000000000000" pitchFamily="2" charset="0"/>
+              </a:endParaRPr>
             </a:p>
             <a:p>
               <a:pPr defTabSz="439781">
                 <a:defRPr/>
               </a:pPr>
-              <a:r>
-                <a:rPr lang="te-IN" sz="2200" dirty="0">
-                  <a:latin typeface="Ramabhadra" panose="02000600000000000000" pitchFamily="2" charset="0"/>
-                  <a:cs typeface="Ramabhadra" panose="02000600000000000000" pitchFamily="2" charset="0"/>
-                </a:rPr>
-                <a:t>యుద్ధకేక నా నోట యేసు నామమే</a:t>
-              </a:r>
-              <a:r>
-                <a:rPr lang="en-IN" sz="2200" dirty="0">
-                  <a:latin typeface="Ramabhadra" panose="02000600000000000000" pitchFamily="2" charset="0"/>
-                  <a:cs typeface="Ramabhadra" panose="02000600000000000000" pitchFamily="2" charset="0"/>
-                </a:rPr>
-                <a:t> </a:t>
-              </a:r>
-              <a:r>
-                <a:rPr lang="te-IN" sz="2200" dirty="0">
-                  <a:latin typeface="Ramabhadra" panose="02000600000000000000" pitchFamily="2" charset="0"/>
-                  <a:cs typeface="Ramabhadra" panose="02000600000000000000" pitchFamily="2" charset="0"/>
-                </a:rPr>
-                <a:t>(2)</a:t>
-              </a:r>
+              <a:endParaRPr lang="en-US" sz="2200" dirty="0">
+                <a:latin typeface="Ramabhadra" panose="02000600000000000000" pitchFamily="2" charset="0"/>
+                <a:cs typeface="Ramabhadra" panose="02000600000000000000" pitchFamily="2" charset="0"/>
+              </a:endParaRPr>
             </a:p>
             <a:p>
               <a:pPr defTabSz="439781">
@@ -3272,48 +3277,56 @@
                   <a:latin typeface="Ramabhadra" panose="02000600000000000000" pitchFamily="2" charset="0"/>
                   <a:cs typeface="Ramabhadra" panose="02000600000000000000" pitchFamily="2" charset="0"/>
                 </a:rPr>
-                <a:t>విరోదమైన ఆయుధాలు యేవి ఫలించవు</a:t>
-              </a:r>
-              <a:r>
-                <a:rPr lang="en-IN" sz="2200" dirty="0">
-                  <a:latin typeface="Ramabhadra" panose="02000600000000000000" pitchFamily="2" charset="0"/>
-                  <a:cs typeface="Ramabhadra" panose="02000600000000000000" pitchFamily="2" charset="0"/>
-                </a:rPr>
-                <a:t> </a:t>
-              </a:r>
-              <a:r>
+                <a:t>షాలేము రాజా రమ్యమైన సీయోనుకే</a:t>
+              </a:r>
+              <a:br>
                 <a:rPr lang="te-IN" sz="2200" dirty="0">
                   <a:latin typeface="Ramabhadra" panose="02000600000000000000" pitchFamily="2" charset="0"/>
                   <a:cs typeface="Ramabhadra" panose="02000600000000000000" pitchFamily="2" charset="0"/>
                 </a:rPr>
-                <a:t>(2)</a:t>
+              </a:br>
+              <a:r>
+                <a:rPr lang="te-IN" sz="2200" dirty="0">
+                  <a:latin typeface="Ramabhadra" panose="02000600000000000000" pitchFamily="2" charset="0"/>
+                  <a:cs typeface="Ramabhadra" panose="02000600000000000000" pitchFamily="2" charset="0"/>
+                </a:rPr>
+                <a:t>నను నడిపించుము నీ చిత్తమైన మార్గములో </a:t>
+              </a:r>
+              <a:br>
+                <a:rPr lang="te-IN" sz="2200" dirty="0">
+                  <a:latin typeface="Ramabhadra" panose="02000600000000000000" pitchFamily="2" charset="0"/>
+                  <a:cs typeface="Ramabhadra" panose="02000600000000000000" pitchFamily="2" charset="0"/>
+                </a:rPr>
+              </a:br>
+              <a:r>
+                <a:rPr lang="te-IN" sz="2200" dirty="0">
+                  <a:latin typeface="Ramabhadra" panose="02000600000000000000" pitchFamily="2" charset="0"/>
+                  <a:cs typeface="Ramabhadra" panose="02000600000000000000" pitchFamily="2" charset="0"/>
+                </a:rPr>
+                <a:t>అలసి పోనివ్వక నన్ను నీదు ఆత్మతో నింపి</a:t>
+              </a:r>
+              <a:br>
+                <a:rPr lang="te-IN" sz="2200" dirty="0">
+                  <a:latin typeface="Ramabhadra" panose="02000600000000000000" pitchFamily="2" charset="0"/>
+                  <a:cs typeface="Ramabhadra" panose="02000600000000000000" pitchFamily="2" charset="0"/>
+                </a:rPr>
+              </a:br>
+              <a:r>
+                <a:rPr lang="te-IN" sz="2200" dirty="0">
+                  <a:latin typeface="Ramabhadra" panose="02000600000000000000" pitchFamily="2" charset="0"/>
+                  <a:cs typeface="Ramabhadra" panose="02000600000000000000" pitchFamily="2" charset="0"/>
+                </a:rPr>
+                <a:t>ఆదరణ కర్తవై నను చేర్చుము నీ రాజ్యములో</a:t>
               </a:r>
             </a:p>
             <a:p>
               <a:pPr defTabSz="439781">
                 <a:defRPr/>
               </a:pPr>
-              <a:r>
-                <a:rPr lang="te-IN" sz="2200" dirty="0">
-                  <a:latin typeface="Ramabhadra" panose="02000600000000000000" pitchFamily="2" charset="0"/>
-                  <a:cs typeface="Ramabhadra" panose="02000600000000000000" pitchFamily="2" charset="0"/>
-                </a:rPr>
-                <a:t>యెహోవా నిస్సియే నాదు విజయము</a:t>
-              </a:r>
-              <a:r>
-                <a:rPr lang="en-IN" sz="2200" dirty="0">
-                  <a:latin typeface="Ramabhadra" panose="02000600000000000000" pitchFamily="2" charset="0"/>
-                  <a:cs typeface="Ramabhadra" panose="02000600000000000000" pitchFamily="2" charset="0"/>
-                </a:rPr>
-                <a:t> </a:t>
-              </a:r>
-              <a:r>
-                <a:rPr lang="te-IN" sz="2200" dirty="0">
-                  <a:latin typeface="Ramabhadra" panose="02000600000000000000" pitchFamily="2" charset="0"/>
-                  <a:cs typeface="Ramabhadra" panose="02000600000000000000" pitchFamily="2" charset="0"/>
-                </a:rPr>
-                <a:t>(2)</a:t>
-              </a:r>
+              <a:endParaRPr lang="te-IN" sz="2200" dirty="0">
+                <a:latin typeface="Ramabhadra" panose="02000600000000000000" pitchFamily="2" charset="0"/>
+                <a:cs typeface="Ramabhadra" panose="02000600000000000000" pitchFamily="2" charset="0"/>
+              </a:endParaRPr>
             </a:p>
           </p:txBody>
         </p:sp>
@@ -3395,9 +3408,9 @@
         <p:grpSpPr>
           <a:xfrm>
             <a:off x="5104338" y="182031"/>
-            <a:ext cx="5650295" cy="6493935"/>
+            <a:ext cx="5718029" cy="6524392"/>
             <a:chOff x="160868" y="182032"/>
-            <a:chExt cx="5650295" cy="6493935"/>
+            <a:chExt cx="5718029" cy="6524392"/>
           </a:xfrm>
         </p:grpSpPr>
         <p:sp>
@@ -3469,8 +3482,8 @@
           </p:nvSpPr>
           <p:spPr>
             <a:xfrm>
-              <a:off x="196701" y="276251"/>
-              <a:ext cx="5614462" cy="6001643"/>
+              <a:off x="264435" y="243116"/>
+              <a:ext cx="5614462" cy="6463308"/>
             </a:xfrm>
             <a:prstGeom prst="rect">
               <a:avLst/>
@@ -3484,140 +3497,158 @@
             <a:lstStyle/>
             <a:p>
               <a:r>
-                <a:rPr lang="te-IN" sz="2400" dirty="0">
-                  <a:latin typeface="Ramabhadra" panose="02000600000000000000" pitchFamily="2" charset="0"/>
-                  <a:cs typeface="Ramabhadra" panose="02000600000000000000" pitchFamily="2" charset="0"/>
-                </a:rPr>
-                <a:t>సద్గుణ శీలుడా నీవే పూజ్యుడవు</a:t>
-              </a:r>
-            </a:p>
-            <a:p>
-              <a:r>
-                <a:rPr lang="te-IN" sz="2400" dirty="0">
-                  <a:latin typeface="Ramabhadra" panose="02000600000000000000" pitchFamily="2" charset="0"/>
-                  <a:cs typeface="Ramabhadra" panose="02000600000000000000" pitchFamily="2" charset="0"/>
-                </a:rPr>
-                <a:t>స్తుతి ఆరాధనకు నీవే యోగ్యుడవు</a:t>
-              </a:r>
-            </a:p>
-            <a:p>
-              <a:r>
-                <a:rPr lang="te-IN" sz="2400" dirty="0">
-                  <a:latin typeface="Ramabhadra" panose="02000600000000000000" pitchFamily="2" charset="0"/>
-                  <a:cs typeface="Ramabhadra" panose="02000600000000000000" pitchFamily="2" charset="0"/>
-                </a:rPr>
-                <a:t>సత్య ప్రమాణముతో శాశ్వత కృపనిచ్చి</a:t>
-              </a:r>
-            </a:p>
-            <a:p>
-              <a:r>
-                <a:rPr lang="te-IN" sz="2400" dirty="0">
-                  <a:latin typeface="Ramabhadra" panose="02000600000000000000" pitchFamily="2" charset="0"/>
-                  <a:cs typeface="Ramabhadra" panose="02000600000000000000" pitchFamily="2" charset="0"/>
-                </a:rPr>
-                <a:t>నీ ప్రియుని స్వాస్థ్యము నాకిచ్చితివి</a:t>
-              </a:r>
-            </a:p>
-            <a:p>
-              <a:r>
-                <a:rPr lang="te-IN" sz="2400" dirty="0">
-                  <a:latin typeface="Ramabhadra" panose="02000600000000000000" pitchFamily="2" charset="0"/>
-                  <a:cs typeface="Ramabhadra" panose="02000600000000000000" pitchFamily="2" charset="0"/>
-                </a:rPr>
-                <a:t>యేసయ్యా నీ సంకల్పమే</a:t>
-              </a:r>
-            </a:p>
-            <a:p>
-              <a:r>
-                <a:rPr lang="te-IN" sz="2400" dirty="0">
-                  <a:latin typeface="Ramabhadra" panose="02000600000000000000" pitchFamily="2" charset="0"/>
-                  <a:cs typeface="Ramabhadra" panose="02000600000000000000" pitchFamily="2" charset="0"/>
-                </a:rPr>
-                <a:t>ఇది నాపై నీకున్న అనురాగమే</a:t>
-              </a:r>
-            </a:p>
-            <a:p>
-              <a:endParaRPr lang="te-IN" sz="2400" dirty="0">
+                <a:rPr lang="te-IN" sz="2300" dirty="0">
+                  <a:latin typeface="Ramabhadra" panose="02000600000000000000" pitchFamily="2" charset="0"/>
+                  <a:cs typeface="Ramabhadra" panose="02000600000000000000" pitchFamily="2" charset="0"/>
+                </a:rPr>
+                <a:t>నీ ప్రేమ ఎంతో అపారము</a:t>
+              </a:r>
+            </a:p>
+            <a:p>
+              <a:r>
+                <a:rPr lang="te-IN" sz="2300" dirty="0">
+                  <a:latin typeface="Ramabhadra" panose="02000600000000000000" pitchFamily="2" charset="0"/>
+                  <a:cs typeface="Ramabhadra" panose="02000600000000000000" pitchFamily="2" charset="0"/>
+                </a:rPr>
+                <a:t>వర్ణింపతరమా నా ప్రభూ</a:t>
+              </a:r>
+            </a:p>
+            <a:p>
+              <a:r>
+                <a:rPr lang="te-IN" sz="2300" dirty="0">
+                  <a:latin typeface="Ramabhadra" panose="02000600000000000000" pitchFamily="2" charset="0"/>
+                  <a:cs typeface="Ramabhadra" panose="02000600000000000000" pitchFamily="2" charset="0"/>
+                </a:rPr>
+                <a:t>పులకింప చేసెను నా హృది</a:t>
+              </a:r>
+            </a:p>
+            <a:p>
+              <a:r>
+                <a:rPr lang="te-IN" sz="2300" dirty="0">
+                  <a:latin typeface="Ramabhadra" panose="02000600000000000000" pitchFamily="2" charset="0"/>
+                  <a:cs typeface="Ramabhadra" panose="02000600000000000000" pitchFamily="2" charset="0"/>
+                </a:rPr>
+                <a:t>హృదయేశ్వరా నా యేసువా</a:t>
+              </a:r>
+            </a:p>
+            <a:p>
+              <a:endParaRPr lang="te-IN" sz="2300" dirty="0">
                 <a:latin typeface="Ramabhadra" panose="02000600000000000000" pitchFamily="2" charset="0"/>
                 <a:cs typeface="Ramabhadra" panose="02000600000000000000" pitchFamily="2" charset="0"/>
               </a:endParaRPr>
             </a:p>
             <a:p>
               <a:r>
-                <a:rPr lang="te-IN" sz="2400" dirty="0">
-                  <a:latin typeface="Ramabhadra" panose="02000600000000000000" pitchFamily="2" charset="0"/>
-                  <a:cs typeface="Ramabhadra" panose="02000600000000000000" pitchFamily="2" charset="0"/>
-                </a:rPr>
-                <a:t>సిలువ సునాదమును నా శ్రమదినమున</a:t>
-              </a:r>
-            </a:p>
-            <a:p>
-              <a:r>
-                <a:rPr lang="te-IN" sz="2400" dirty="0">
-                  <a:latin typeface="Ramabhadra" panose="02000600000000000000" pitchFamily="2" charset="0"/>
-                  <a:cs typeface="Ramabhadra" panose="02000600000000000000" pitchFamily="2" charset="0"/>
-                </a:rPr>
-                <a:t>మధుర గీతికగా మదిలో వినిపించి</a:t>
-              </a:r>
-            </a:p>
-            <a:p>
-              <a:r>
-                <a:rPr lang="te-IN" sz="2400" dirty="0">
-                  <a:latin typeface="Ramabhadra" panose="02000600000000000000" pitchFamily="2" charset="0"/>
-                  <a:cs typeface="Ramabhadra" panose="02000600000000000000" pitchFamily="2" charset="0"/>
-                </a:rPr>
-                <a:t>సిలువలో దాగిన సర్వసంపదలిచ్చి</a:t>
-              </a:r>
-            </a:p>
-            <a:p>
-              <a:r>
-                <a:rPr lang="te-IN" sz="2400" dirty="0">
-                  <a:latin typeface="Ramabhadra" panose="02000600000000000000" pitchFamily="2" charset="0"/>
-                  <a:cs typeface="Ramabhadra" panose="02000600000000000000" pitchFamily="2" charset="0"/>
-                </a:rPr>
-                <a:t>కాంతిమయముగా కనపరచితివే నీ ఆత్మ శక్తితో</a:t>
-              </a:r>
-            </a:p>
-            <a:p>
-              <a:endParaRPr lang="te-IN" sz="2400" dirty="0">
+                <a:rPr lang="te-IN" sz="2300" dirty="0">
+                  <a:latin typeface="Ramabhadra" panose="02000600000000000000" pitchFamily="2" charset="0"/>
+                  <a:cs typeface="Ramabhadra" panose="02000600000000000000" pitchFamily="2" charset="0"/>
+                </a:rPr>
+                <a:t>నన్ను ఎంతో ప్రేమించి</a:t>
+              </a:r>
+            </a:p>
+            <a:p>
+              <a:r>
+                <a:rPr lang="te-IN" sz="2300" dirty="0">
+                  <a:latin typeface="Ramabhadra" panose="02000600000000000000" pitchFamily="2" charset="0"/>
+                  <a:cs typeface="Ramabhadra" panose="02000600000000000000" pitchFamily="2" charset="0"/>
+                </a:rPr>
+                <a:t>నాదు పాపమె క్షమియించి</a:t>
+              </a:r>
+            </a:p>
+            <a:p>
+              <a:r>
+                <a:rPr lang="te-IN" sz="2300" dirty="0">
+                  <a:latin typeface="Ramabhadra" panose="02000600000000000000" pitchFamily="2" charset="0"/>
+                  <a:cs typeface="Ramabhadra" panose="02000600000000000000" pitchFamily="2" charset="0"/>
+                </a:rPr>
+                <a:t>కృప కనికరముల నీడలో</a:t>
+              </a:r>
+            </a:p>
+            <a:p>
+              <a:r>
+                <a:rPr lang="te-IN" sz="2300" dirty="0">
+                  <a:latin typeface="Ramabhadra" panose="02000600000000000000" pitchFamily="2" charset="0"/>
+                  <a:cs typeface="Ramabhadra" panose="02000600000000000000" pitchFamily="2" charset="0"/>
+                </a:rPr>
+                <a:t>నన్ను చేర్చిన నా ప్రభూ</a:t>
+              </a:r>
+            </a:p>
+            <a:p>
+              <a:r>
+                <a:rPr lang="te-IN" sz="2300" dirty="0">
+                  <a:latin typeface="Ramabhadra" panose="02000600000000000000" pitchFamily="2" charset="0"/>
+                  <a:cs typeface="Ramabhadra" panose="02000600000000000000" pitchFamily="2" charset="0"/>
+                </a:rPr>
+                <a:t>జీవితమంతా స్తుతియించినా</a:t>
+              </a:r>
+            </a:p>
+            <a:p>
+              <a:r>
+                <a:rPr lang="te-IN" sz="2300" dirty="0">
+                  <a:latin typeface="Ramabhadra" panose="02000600000000000000" pitchFamily="2" charset="0"/>
+                  <a:cs typeface="Ramabhadra" panose="02000600000000000000" pitchFamily="2" charset="0"/>
+                </a:rPr>
+                <a:t>తీరునా నీ ఋణం</a:t>
+              </a:r>
+            </a:p>
+            <a:p>
+              <a:endParaRPr lang="te-IN" sz="2300" dirty="0">
                 <a:latin typeface="Ramabhadra" panose="02000600000000000000" pitchFamily="2" charset="0"/>
                 <a:cs typeface="Ramabhadra" panose="02000600000000000000" pitchFamily="2" charset="0"/>
               </a:endParaRPr>
             </a:p>
             <a:p>
               <a:r>
-                <a:rPr lang="te-IN" sz="2400" dirty="0">
-                  <a:latin typeface="Ramabhadra" panose="02000600000000000000" pitchFamily="2" charset="0"/>
-                  <a:cs typeface="Ramabhadra" panose="02000600000000000000" pitchFamily="2" charset="0"/>
-                </a:rPr>
-                <a:t>నాతోడు నీడవై మరపురాని</a:t>
-              </a:r>
-            </a:p>
-            <a:p>
-              <a:r>
-                <a:rPr lang="te-IN" sz="2400" dirty="0">
-                  <a:latin typeface="Ramabhadra" panose="02000600000000000000" pitchFamily="2" charset="0"/>
-                  <a:cs typeface="Ramabhadra" panose="02000600000000000000" pitchFamily="2" charset="0"/>
-                </a:rPr>
-                <a:t>మహోప కార్యములు నాకై చేసి</a:t>
-              </a:r>
-            </a:p>
-            <a:p>
-              <a:r>
-                <a:rPr lang="te-IN" sz="2400" dirty="0">
-                  <a:latin typeface="Ramabhadra" panose="02000600000000000000" pitchFamily="2" charset="0"/>
-                  <a:cs typeface="Ramabhadra" panose="02000600000000000000" pitchFamily="2" charset="0"/>
-                </a:rPr>
-                <a:t>చీకటి దాచిన -వేకువగా మార్చి</a:t>
-              </a:r>
-            </a:p>
-            <a:p>
-              <a:r>
-                <a:rPr lang="te-IN" sz="2400" dirty="0">
-                  <a:latin typeface="Ramabhadra" panose="02000600000000000000" pitchFamily="2" charset="0"/>
-                  <a:cs typeface="Ramabhadra" panose="02000600000000000000" pitchFamily="2" charset="0"/>
-                </a:rPr>
-                <a:t>బలమైన జనముగా నిర్దారించితివి నీ కీర్తి కొరకే</a:t>
+                <a:rPr lang="te-IN" sz="2300" dirty="0">
+                  <a:latin typeface="Ramabhadra" panose="02000600000000000000" pitchFamily="2" charset="0"/>
+                  <a:cs typeface="Ramabhadra" panose="02000600000000000000" pitchFamily="2" charset="0"/>
+                </a:rPr>
+                <a:t>నీదు సన్నిధిలో కాంక్షించి</a:t>
+              </a:r>
+            </a:p>
+            <a:p>
+              <a:r>
+                <a:rPr lang="te-IN" sz="2300" dirty="0">
+                  <a:latin typeface="Ramabhadra" panose="02000600000000000000" pitchFamily="2" charset="0"/>
+                  <a:cs typeface="Ramabhadra" panose="02000600000000000000" pitchFamily="2" charset="0"/>
+                </a:rPr>
+                <a:t>పాప బ్రతుకే వీడితిని</a:t>
+              </a:r>
+            </a:p>
+            <a:p>
+              <a:r>
+                <a:rPr lang="te-IN" sz="2300" dirty="0">
+                  <a:latin typeface="Ramabhadra" panose="02000600000000000000" pitchFamily="2" charset="0"/>
+                  <a:cs typeface="Ramabhadra" panose="02000600000000000000" pitchFamily="2" charset="0"/>
+                </a:rPr>
+                <a:t>నీదు జీవమె నిండుగ</a:t>
+              </a:r>
+            </a:p>
+            <a:p>
+              <a:r>
+                <a:rPr lang="te-IN" sz="2300" dirty="0">
+                  <a:latin typeface="Ramabhadra" panose="02000600000000000000" pitchFamily="2" charset="0"/>
+                  <a:cs typeface="Ramabhadra" panose="02000600000000000000" pitchFamily="2" charset="0"/>
+                </a:rPr>
+                <a:t>నాలో నింపుము నా ప్రభు</a:t>
+              </a:r>
+            </a:p>
+            <a:p>
+              <a:r>
+                <a:rPr lang="te-IN" sz="2300" dirty="0">
+                  <a:latin typeface="Ramabhadra" panose="02000600000000000000" pitchFamily="2" charset="0"/>
+                  <a:cs typeface="Ramabhadra" panose="02000600000000000000" pitchFamily="2" charset="0"/>
+                </a:rPr>
+                <a:t>జీవితమంతా నీ ప్రేమనూ</a:t>
+              </a:r>
+            </a:p>
+            <a:p>
+              <a:r>
+                <a:rPr lang="te-IN" sz="2300" dirty="0">
+                  <a:latin typeface="Ramabhadra" panose="02000600000000000000" pitchFamily="2" charset="0"/>
+                  <a:cs typeface="Ramabhadra" panose="02000600000000000000" pitchFamily="2" charset="0"/>
+                </a:rPr>
+                <a:t>చాటుచు నుందును</a:t>
               </a:r>
             </a:p>
           </p:txBody>
@@ -3730,9 +3761,9 @@
         <p:grpSpPr>
           <a:xfrm>
             <a:off x="160868" y="182032"/>
-            <a:ext cx="5506736" cy="6493935"/>
+            <a:ext cx="5472868" cy="6551396"/>
             <a:chOff x="160868" y="182032"/>
-            <a:chExt cx="5506736" cy="6493935"/>
+            <a:chExt cx="5472868" cy="6551396"/>
           </a:xfrm>
         </p:grpSpPr>
         <p:sp>
@@ -3804,8 +3835,8 @@
           </p:nvSpPr>
           <p:spPr>
             <a:xfrm>
-              <a:off x="271993" y="352014"/>
-              <a:ext cx="5395611" cy="5755422"/>
+              <a:off x="238125" y="208565"/>
+              <a:ext cx="5395611" cy="6524863"/>
             </a:xfrm>
             <a:prstGeom prst="rect">
               <a:avLst/>
@@ -3822,11 +3853,11 @@
                 <a:defRPr/>
               </a:pPr>
               <a:r>
-                <a:rPr lang="te-IN" sz="2300" dirty="0">
-                  <a:latin typeface="Ramabhadra" panose="02000600000000000000" pitchFamily="2" charset="0"/>
-                  <a:cs typeface="Ramabhadra" panose="02000600000000000000" pitchFamily="2" charset="0"/>
-                </a:rPr>
-                <a:t>కృపా సత్య సంపూర్ణుడా</a:t>
+                <a:rPr lang="te-IN" sz="2200" dirty="0">
+                  <a:latin typeface="Ramabhadra" panose="02000600000000000000" pitchFamily="2" charset="0"/>
+                  <a:cs typeface="Ramabhadra" panose="02000600000000000000" pitchFamily="2" charset="0"/>
+                </a:rPr>
+                <a:t>సంవత్సరములు గతియించు చుండ –</a:t>
               </a:r>
             </a:p>
             <a:p>
@@ -3834,11 +3865,11 @@
                 <a:defRPr/>
               </a:pPr>
               <a:r>
-                <a:rPr lang="te-IN" sz="2300" dirty="0">
-                  <a:latin typeface="Ramabhadra" panose="02000600000000000000" pitchFamily="2" charset="0"/>
-                  <a:cs typeface="Ramabhadra" panose="02000600000000000000" pitchFamily="2" charset="0"/>
-                </a:rPr>
-                <a:t>సర్వలోకానికే చక్రవర్తివి నీవే యేసయ్యా -2</a:t>
+                <a:rPr lang="te-IN" sz="2200" dirty="0">
+                  <a:latin typeface="Ramabhadra" panose="02000600000000000000" pitchFamily="2" charset="0"/>
+                  <a:cs typeface="Ramabhadra" panose="02000600000000000000" pitchFamily="2" charset="0"/>
+                </a:rPr>
+                <a:t>నను నూతన పరుచుము</a:t>
               </a:r>
             </a:p>
             <a:p>
@@ -3846,43 +3877,67 @@
                 <a:defRPr/>
               </a:pPr>
               <a:r>
-                <a:rPr lang="te-IN" sz="2300" dirty="0">
-                  <a:latin typeface="Ramabhadra" panose="02000600000000000000" pitchFamily="2" charset="0"/>
-                  <a:cs typeface="Ramabhadra" panose="02000600000000000000" pitchFamily="2" charset="0"/>
-                </a:rPr>
-                <a:t>నా సన్మానానికే మహనీయుడవు నీవేనయా ... </a:t>
-              </a:r>
+                <a:rPr lang="te-IN" sz="2200" dirty="0">
+                  <a:latin typeface="Ramabhadra" panose="02000600000000000000" pitchFamily="2" charset="0"/>
+                  <a:cs typeface="Ramabhadra" panose="02000600000000000000" pitchFamily="2" charset="0"/>
+                </a:rPr>
+                <a:t>యేసయ్యా నీ రూపముకు మార్చుము </a:t>
+              </a:r>
+              <a:r>
+                <a:rPr lang="en-US" sz="2200" dirty="0">
+                  <a:latin typeface="Ramabhadra" panose="02000600000000000000" pitchFamily="2" charset="0"/>
+                  <a:cs typeface="Ramabhadra" panose="02000600000000000000" pitchFamily="2" charset="0"/>
+                </a:rPr>
+                <a:t>(2)</a:t>
+              </a:r>
+              <a:endParaRPr lang="te-IN" sz="2200" dirty="0">
+                <a:latin typeface="Ramabhadra" panose="02000600000000000000" pitchFamily="2" charset="0"/>
+                <a:cs typeface="Ramabhadra" panose="02000600000000000000" pitchFamily="2" charset="0"/>
+              </a:endParaRPr>
             </a:p>
             <a:p>
               <a:pPr defTabSz="439781">
                 <a:defRPr/>
               </a:pPr>
               <a:r>
-                <a:rPr lang="te-IN" sz="2300" dirty="0">
-                  <a:latin typeface="Ramabhadra" panose="02000600000000000000" pitchFamily="2" charset="0"/>
-                  <a:cs typeface="Ramabhadra" panose="02000600000000000000" pitchFamily="2" charset="0"/>
-                </a:rPr>
-                <a:t>మహనీయుడవు నీవేనయా ... </a:t>
+                <a:rPr lang="te-IN" sz="2200" dirty="0">
+                  <a:latin typeface="Ramabhadra" panose="02000600000000000000" pitchFamily="2" charset="0"/>
+                  <a:cs typeface="Ramabhadra" panose="02000600000000000000" pitchFamily="2" charset="0"/>
+                </a:rPr>
+                <a:t>హిమము కంటే తెల్లగా –</a:t>
               </a:r>
             </a:p>
             <a:p>
               <a:pPr defTabSz="439781">
                 <a:defRPr/>
               </a:pPr>
-              <a:br>
-                <a:rPr lang="te-IN" sz="2300" dirty="0">
-                  <a:latin typeface="Ramabhadra" panose="02000600000000000000" pitchFamily="2" charset="0"/>
-                  <a:cs typeface="Ramabhadra" panose="02000600000000000000" pitchFamily="2" charset="0"/>
-                </a:rPr>
-              </a:br>
-              <a:r>
-                <a:rPr lang="te-IN" sz="2300" dirty="0">
-                  <a:latin typeface="Ramabhadra" panose="02000600000000000000" pitchFamily="2" charset="0"/>
-                  <a:cs typeface="Ramabhadra" panose="02000600000000000000" pitchFamily="2" charset="0"/>
-                </a:rPr>
-                <a:t>ఎర్ర సముద్రము నీ ఆజ్ఞ మేరకు</a:t>
-              </a:r>
-              <a:endParaRPr lang="en-IN" sz="2300" dirty="0">
+              <a:r>
+                <a:rPr lang="te-IN" sz="2200" dirty="0">
+                  <a:latin typeface="Ramabhadra" panose="02000600000000000000" pitchFamily="2" charset="0"/>
+                  <a:cs typeface="Ramabhadra" panose="02000600000000000000" pitchFamily="2" charset="0"/>
+                </a:rPr>
+                <a:t>పరిశుద్ధపరుచుము నా రక్షకా </a:t>
+              </a:r>
+              <a:r>
+                <a:rPr lang="en-US" sz="2200" dirty="0">
+                  <a:latin typeface="Ramabhadra" panose="02000600000000000000" pitchFamily="2" charset="0"/>
+                  <a:cs typeface="Ramabhadra" panose="02000600000000000000" pitchFamily="2" charset="0"/>
+                </a:rPr>
+                <a:t>(2)</a:t>
+              </a:r>
+              <a:r>
+                <a:rPr lang="te-IN" sz="2200" dirty="0">
+                  <a:latin typeface="Ramabhadra" panose="02000600000000000000" pitchFamily="2" charset="0"/>
+                  <a:cs typeface="Ramabhadra" panose="02000600000000000000" pitchFamily="2" charset="0"/>
+                </a:rPr>
+                <a:t> </a:t>
+              </a:r>
+            </a:p>
+            <a:p>
+              <a:pPr defTabSz="439781">
+                <a:defRPr/>
+              </a:pPr>
+              <a:endParaRPr lang="te-IN" sz="2200" dirty="0">
                 <a:latin typeface="Ramabhadra" panose="02000600000000000000" pitchFamily="2" charset="0"/>
                 <a:cs typeface="Ramabhadra" panose="02000600000000000000" pitchFamily="2" charset="0"/>
               </a:endParaRPr>
@@ -3892,11 +3947,11 @@
                 <a:defRPr/>
               </a:pPr>
               <a:r>
-                <a:rPr lang="te-IN" sz="2300" dirty="0">
-                  <a:latin typeface="Ramabhadra" panose="02000600000000000000" pitchFamily="2" charset="0"/>
-                  <a:cs typeface="Ramabhadra" panose="02000600000000000000" pitchFamily="2" charset="0"/>
-                </a:rPr>
-                <a:t>రహదారిగా మారగా </a:t>
+                <a:rPr lang="te-IN" sz="2200" dirty="0">
+                  <a:latin typeface="Ramabhadra" panose="02000600000000000000" pitchFamily="2" charset="0"/>
+                  <a:cs typeface="Ramabhadra" panose="02000600000000000000" pitchFamily="2" charset="0"/>
+                </a:rPr>
+                <a:t>దినదినంబు నీకు సమీపమై –</a:t>
               </a:r>
             </a:p>
             <a:p>
@@ -3904,11 +3959,11 @@
                 <a:defRPr/>
               </a:pPr>
               <a:r>
-                <a:rPr lang="te-IN" sz="2300" dirty="0">
-                  <a:latin typeface="Ramabhadra" panose="02000600000000000000" pitchFamily="2" charset="0"/>
-                  <a:cs typeface="Ramabhadra" panose="02000600000000000000" pitchFamily="2" charset="0"/>
-                </a:rPr>
-                <a:t>దాటిరే నీ జనులు బహు క్షేమముగా -2</a:t>
+                <a:rPr lang="te-IN" sz="2200" dirty="0">
+                  <a:latin typeface="Ramabhadra" panose="02000600000000000000" pitchFamily="2" charset="0"/>
+                  <a:cs typeface="Ramabhadra" panose="02000600000000000000" pitchFamily="2" charset="0"/>
+                </a:rPr>
+                <a:t>ప్రతి క్షణం నా సిలువను మోయుచు</a:t>
               </a:r>
             </a:p>
             <a:p>
@@ -3916,13 +3971,56 @@
                 <a:defRPr/>
               </a:pPr>
               <a:r>
-                <a:rPr lang="te-IN" sz="2300" dirty="0">
-                  <a:latin typeface="Ramabhadra" panose="02000600000000000000" pitchFamily="2" charset="0"/>
-                  <a:cs typeface="Ramabhadra" panose="02000600000000000000" pitchFamily="2" charset="0"/>
-                </a:rPr>
-                <a:t>ఆ జలములలోనే</a:t>
-              </a:r>
-              <a:endParaRPr lang="en-IN" sz="2300" dirty="0">
+                <a:rPr lang="te-IN" sz="2200" dirty="0">
+                  <a:latin typeface="Ramabhadra" panose="02000600000000000000" pitchFamily="2" charset="0"/>
+                  <a:cs typeface="Ramabhadra" panose="02000600000000000000" pitchFamily="2" charset="0"/>
+                </a:rPr>
+                <a:t>వెనుకకు  చూడకనే నేను సాగెదను-</a:t>
+              </a:r>
+            </a:p>
+            <a:p>
+              <a:pPr defTabSz="439781">
+                <a:defRPr/>
+              </a:pPr>
+              <a:r>
+                <a:rPr lang="te-IN" sz="2200" dirty="0">
+                  <a:latin typeface="Ramabhadra" panose="02000600000000000000" pitchFamily="2" charset="0"/>
+                  <a:cs typeface="Ramabhadra" panose="02000600000000000000" pitchFamily="2" charset="0"/>
+                </a:rPr>
+                <a:t>శిలువను చూచుచునే గురిని చేరెదను</a:t>
+              </a:r>
+            </a:p>
+            <a:p>
+              <a:pPr defTabSz="439781">
+                <a:defRPr/>
+              </a:pPr>
+              <a:r>
+                <a:rPr lang="te-IN" sz="2200" dirty="0">
+                  <a:latin typeface="Ramabhadra" panose="02000600000000000000" pitchFamily="2" charset="0"/>
+                  <a:cs typeface="Ramabhadra" panose="02000600000000000000" pitchFamily="2" charset="0"/>
+                </a:rPr>
+                <a:t>నీ ఆత్మతో నను నింపుమా –</a:t>
+              </a:r>
+            </a:p>
+            <a:p>
+              <a:pPr defTabSz="439781">
+                <a:defRPr/>
+              </a:pPr>
+              <a:r>
+                <a:rPr lang="te-IN" sz="2200" dirty="0">
+                  <a:latin typeface="Ramabhadra" panose="02000600000000000000" pitchFamily="2" charset="0"/>
+                  <a:cs typeface="Ramabhadra" panose="02000600000000000000" pitchFamily="2" charset="0"/>
+                </a:rPr>
+                <a:t>నీ సేవజేతును స్థిరపరచుమా</a:t>
+              </a:r>
+              <a:r>
+                <a:rPr lang="en-US" sz="2200" dirty="0">
+                  <a:latin typeface="Ramabhadra" panose="02000600000000000000" pitchFamily="2" charset="0"/>
+                  <a:cs typeface="Ramabhadra" panose="02000600000000000000" pitchFamily="2" charset="0"/>
+                </a:rPr>
+                <a:t> (2)</a:t>
+              </a:r>
+              <a:endParaRPr lang="te-IN" sz="2200" dirty="0">
                 <a:latin typeface="Ramabhadra" panose="02000600000000000000" pitchFamily="2" charset="0"/>
                 <a:cs typeface="Ramabhadra" panose="02000600000000000000" pitchFamily="2" charset="0"/>
               </a:endParaRPr>
@@ -3931,101 +4029,107 @@
               <a:pPr defTabSz="439781">
                 <a:defRPr/>
               </a:pPr>
-              <a:r>
-                <a:rPr lang="te-IN" sz="2300" dirty="0">
-                  <a:latin typeface="Ramabhadra" panose="02000600000000000000" pitchFamily="2" charset="0"/>
-                  <a:cs typeface="Ramabhadra" panose="02000600000000000000" pitchFamily="2" charset="0"/>
-                </a:rPr>
-                <a:t>శత్రు సైన్యము</a:t>
-              </a:r>
-              <a:r>
-                <a:rPr lang="en-IN" sz="2300" dirty="0">
-                  <a:latin typeface="Ramabhadra" panose="02000600000000000000" pitchFamily="2" charset="0"/>
-                  <a:cs typeface="Ramabhadra" panose="02000600000000000000" pitchFamily="2" charset="0"/>
-                </a:rPr>
-                <a:t> </a:t>
-              </a:r>
-              <a:r>
-                <a:rPr lang="te-IN" sz="2300" dirty="0">
-                  <a:latin typeface="Ramabhadra" panose="02000600000000000000" pitchFamily="2" charset="0"/>
-                  <a:cs typeface="Ramabhadra" panose="02000600000000000000" pitchFamily="2" charset="0"/>
-                </a:rPr>
-                <a:t>మునిగిపోయెనే - 2            </a:t>
-              </a:r>
+              <a:endParaRPr lang="te-IN" sz="2200" dirty="0">
+                <a:latin typeface="Ramabhadra" panose="02000600000000000000" pitchFamily="2" charset="0"/>
+                <a:cs typeface="Ramabhadra" panose="02000600000000000000" pitchFamily="2" charset="0"/>
+              </a:endParaRPr>
             </a:p>
             <a:p>
               <a:pPr defTabSz="439781">
                 <a:defRPr/>
               </a:pPr>
-              <a:br>
-                <a:rPr lang="te-IN" sz="2300" dirty="0">
-                  <a:latin typeface="Ramabhadra" panose="02000600000000000000" pitchFamily="2" charset="0"/>
-                  <a:cs typeface="Ramabhadra" panose="02000600000000000000" pitchFamily="2" charset="0"/>
-                </a:rPr>
-              </a:br>
-              <a:r>
-                <a:rPr lang="te-IN" sz="2300" dirty="0">
-                  <a:latin typeface="Ramabhadra" panose="02000600000000000000" pitchFamily="2" charset="0"/>
-                  <a:cs typeface="Ramabhadra" panose="02000600000000000000" pitchFamily="2" charset="0"/>
-                </a:rPr>
-                <a:t>నూతన క్రియను చేయుచున్నానని</a:t>
-              </a:r>
-              <a:endParaRPr lang="en-IN" sz="2300" dirty="0">
+              <a:r>
+                <a:rPr lang="te-IN" sz="2200" dirty="0">
+                  <a:latin typeface="Ramabhadra" panose="02000600000000000000" pitchFamily="2" charset="0"/>
+                  <a:cs typeface="Ramabhadra" panose="02000600000000000000" pitchFamily="2" charset="0"/>
+                </a:rPr>
+                <a:t>నూత్న మనస్సు </a:t>
+              </a:r>
+              <a:r>
+                <a:rPr lang="en-US" sz="2200" dirty="0">
+                  <a:latin typeface="Ramabhadra" panose="02000600000000000000" pitchFamily="2" charset="0"/>
+                  <a:cs typeface="Ramabhadra" panose="02000600000000000000" pitchFamily="2" charset="0"/>
+                </a:rPr>
+                <a:t>-</a:t>
+              </a:r>
+              <a:r>
+                <a:rPr lang="te-IN" sz="2200" dirty="0">
+                  <a:latin typeface="Ramabhadra" panose="02000600000000000000" pitchFamily="2" charset="0"/>
+                  <a:cs typeface="Ramabhadra" panose="02000600000000000000" pitchFamily="2" charset="0"/>
+                </a:rPr>
+                <a:t> నూత్న ఆత్మను</a:t>
+              </a:r>
+            </a:p>
+            <a:p>
+              <a:pPr defTabSz="439781">
+                <a:defRPr/>
+              </a:pPr>
+              <a:r>
+                <a:rPr lang="te-IN" sz="2200" dirty="0">
+                  <a:latin typeface="Ramabhadra" panose="02000600000000000000" pitchFamily="2" charset="0"/>
+                  <a:cs typeface="Ramabhadra" panose="02000600000000000000" pitchFamily="2" charset="0"/>
+                </a:rPr>
+                <a:t>- నూత్నజీవమును నింపుము దేవా</a:t>
+              </a:r>
+            </a:p>
+            <a:p>
+              <a:pPr defTabSz="439781">
+                <a:defRPr/>
+              </a:pPr>
+              <a:r>
+                <a:rPr lang="te-IN" sz="2200" dirty="0">
+                  <a:latin typeface="Ramabhadra" panose="02000600000000000000" pitchFamily="2" charset="0"/>
+                  <a:cs typeface="Ramabhadra" panose="02000600000000000000" pitchFamily="2" charset="0"/>
+                </a:rPr>
+                <a:t>రాతిగుండెనే మార్చు యేసయ్యా –</a:t>
+              </a:r>
+            </a:p>
+            <a:p>
+              <a:pPr defTabSz="439781">
+                <a:defRPr/>
+              </a:pPr>
+              <a:r>
+                <a:rPr lang="te-IN" sz="2200" dirty="0">
+                  <a:latin typeface="Ramabhadra" panose="02000600000000000000" pitchFamily="2" charset="0"/>
+                  <a:cs typeface="Ramabhadra" panose="02000600000000000000" pitchFamily="2" charset="0"/>
+                </a:rPr>
+                <a:t>మాంసపు గుండెనే అమర్చుమో దేవా</a:t>
+              </a:r>
+            </a:p>
+            <a:p>
+              <a:pPr defTabSz="439781">
+                <a:defRPr/>
+              </a:pPr>
+              <a:r>
+                <a:rPr lang="te-IN" sz="2200" dirty="0">
+                  <a:latin typeface="Ramabhadra" panose="02000600000000000000" pitchFamily="2" charset="0"/>
+                  <a:cs typeface="Ramabhadra" panose="02000600000000000000" pitchFamily="2" charset="0"/>
+                </a:rPr>
+                <a:t>నీ హృదయము నాకిమ్మయ్యా –</a:t>
+              </a:r>
+            </a:p>
+            <a:p>
+              <a:pPr defTabSz="439781">
+                <a:defRPr/>
+              </a:pPr>
+              <a:r>
+                <a:rPr lang="te-IN" sz="2200" dirty="0">
+                  <a:latin typeface="Ramabhadra" panose="02000600000000000000" pitchFamily="2" charset="0"/>
+                  <a:cs typeface="Ramabhadra" panose="02000600000000000000" pitchFamily="2" charset="0"/>
+                </a:rPr>
+                <a:t>లోకాన్ని నీకై సంపాదించెదా</a:t>
+              </a:r>
+              <a:r>
+                <a:rPr lang="en-US" sz="2200" dirty="0">
+                  <a:latin typeface="Ramabhadra" panose="02000600000000000000" pitchFamily="2" charset="0"/>
+                  <a:cs typeface="Ramabhadra" panose="02000600000000000000" pitchFamily="2" charset="0"/>
+                </a:rPr>
+                <a:t> (2)</a:t>
+              </a:r>
+              <a:endParaRPr lang="te-IN" sz="2200" dirty="0">
                 <a:latin typeface="Ramabhadra" panose="02000600000000000000" pitchFamily="2" charset="0"/>
                 <a:cs typeface="Ramabhadra" panose="02000600000000000000" pitchFamily="2" charset="0"/>
               </a:endParaRPr>
-            </a:p>
-            <a:p>
-              <a:pPr defTabSz="439781">
-                <a:defRPr/>
-              </a:pPr>
-              <a:r>
-                <a:rPr lang="te-IN" sz="2300" dirty="0">
-                  <a:latin typeface="Ramabhadra" panose="02000600000000000000" pitchFamily="2" charset="0"/>
-                  <a:cs typeface="Ramabhadra" panose="02000600000000000000" pitchFamily="2" charset="0"/>
-                </a:rPr>
-                <a:t>నీవు సెలవీయ్యగా </a:t>
-              </a:r>
-            </a:p>
-            <a:p>
-              <a:pPr defTabSz="439781">
-                <a:defRPr/>
-              </a:pPr>
-              <a:r>
-                <a:rPr lang="te-IN" sz="2300" dirty="0">
-                  <a:latin typeface="Ramabhadra" panose="02000600000000000000" pitchFamily="2" charset="0"/>
-                  <a:cs typeface="Ramabhadra" panose="02000600000000000000" pitchFamily="2" charset="0"/>
-                </a:rPr>
-                <a:t>నా ఎడారి జీవితమే సుఖ సౌఖ్యము కాగా -2</a:t>
-              </a:r>
-            </a:p>
-            <a:p>
-              <a:pPr defTabSz="439781">
-                <a:defRPr/>
-              </a:pPr>
-              <a:r>
-                <a:rPr lang="te-IN" sz="2300" dirty="0">
-                  <a:latin typeface="Ramabhadra" panose="02000600000000000000" pitchFamily="2" charset="0"/>
-                  <a:cs typeface="Ramabhadra" panose="02000600000000000000" pitchFamily="2" charset="0"/>
-                </a:rPr>
-                <a:t>నా అరణ్య రోదన</a:t>
-              </a:r>
-              <a:endParaRPr lang="en-IN" sz="2300" dirty="0">
-                <a:latin typeface="Ramabhadra" panose="02000600000000000000" pitchFamily="2" charset="0"/>
-                <a:cs typeface="Ramabhadra" panose="02000600000000000000" pitchFamily="2" charset="0"/>
-              </a:endParaRPr>
-            </a:p>
-            <a:p>
-              <a:pPr defTabSz="439781">
-                <a:defRPr/>
-              </a:pPr>
-              <a:r>
-                <a:rPr lang="te-IN" sz="2300" dirty="0">
-                  <a:latin typeface="Ramabhadra" panose="02000600000000000000" pitchFamily="2" charset="0"/>
-                  <a:cs typeface="Ramabhadra" panose="02000600000000000000" pitchFamily="2" charset="0"/>
-                </a:rPr>
-                <a:t>ఉల్లాసముగా మారిపోయెనే - 2                    </a:t>
-              </a:r>
             </a:p>
           </p:txBody>
         </p:sp>
@@ -4107,9 +4211,9 @@
         <p:grpSpPr>
           <a:xfrm>
             <a:off x="5104338" y="182031"/>
-            <a:ext cx="4801662" cy="6493935"/>
+            <a:ext cx="4930770" cy="6493935"/>
             <a:chOff x="160868" y="182032"/>
-            <a:chExt cx="4801662" cy="6493935"/>
+            <a:chExt cx="4930770" cy="6493935"/>
           </a:xfrm>
         </p:grpSpPr>
         <p:sp>
@@ -4181,8 +4285,8 @@
           </p:nvSpPr>
           <p:spPr>
             <a:xfrm>
-              <a:off x="212729" y="286334"/>
-              <a:ext cx="4749801" cy="5755422"/>
+              <a:off x="341837" y="324434"/>
+              <a:ext cx="4749801" cy="6232475"/>
             </a:xfrm>
             <a:prstGeom prst="rect">
               <a:avLst/>
@@ -4199,13 +4303,54 @@
                 <a:defRPr/>
               </a:pPr>
               <a:r>
-                <a:rPr lang="te-IN" sz="2300" dirty="0">
-                  <a:latin typeface="Ramabhadra" panose="02000600000000000000" pitchFamily="2" charset="0"/>
-                  <a:cs typeface="Ramabhadra" panose="02000600000000000000" pitchFamily="2" charset="0"/>
-                </a:rPr>
-                <a:t>నమ్మదగిన వాడవు సహాయుడవు యేసయ్య</a:t>
-              </a:r>
-              <a:endParaRPr lang="en-IN" sz="2300" dirty="0">
+                <a:rPr lang="te-IN" sz="2100" dirty="0">
+                  <a:latin typeface="Ramabhadra" panose="02000600000000000000" pitchFamily="2" charset="0"/>
+                  <a:cs typeface="Ramabhadra" panose="02000600000000000000" pitchFamily="2" charset="0"/>
+                </a:rPr>
+                <a:t>స్తుతులన్ గైకొనుమా</a:t>
+              </a:r>
+            </a:p>
+            <a:p>
+              <a:pPr defTabSz="439781">
+                <a:defRPr/>
+              </a:pPr>
+              <a:r>
+                <a:rPr lang="te-IN" sz="2100" dirty="0">
+                  <a:latin typeface="Ramabhadra" panose="02000600000000000000" pitchFamily="2" charset="0"/>
+                  <a:cs typeface="Ramabhadra" panose="02000600000000000000" pitchFamily="2" charset="0"/>
+                </a:rPr>
+                <a:t>సుత యేసు క్రీస్తువా</a:t>
+              </a:r>
+            </a:p>
+            <a:p>
+              <a:pPr defTabSz="439781">
+                <a:defRPr/>
+              </a:pPr>
+              <a:r>
+                <a:rPr lang="te-IN" sz="2100" dirty="0">
+                  <a:latin typeface="Ramabhadra" panose="02000600000000000000" pitchFamily="2" charset="0"/>
+                  <a:cs typeface="Ramabhadra" panose="02000600000000000000" pitchFamily="2" charset="0"/>
+                </a:rPr>
+                <a:t>సతతము మమ్ములను </a:t>
+              </a:r>
+            </a:p>
+            <a:p>
+              <a:pPr defTabSz="439781">
+                <a:defRPr/>
+              </a:pPr>
+              <a:r>
+                <a:rPr lang="te-IN" sz="2100" dirty="0">
+                  <a:latin typeface="Ramabhadra" panose="02000600000000000000" pitchFamily="2" charset="0"/>
+                  <a:cs typeface="Ramabhadra" panose="02000600000000000000" pitchFamily="2" charset="0"/>
+                </a:rPr>
+                <a:t>కృపనిడి కావుమా</a:t>
+              </a:r>
+            </a:p>
+            <a:p>
+              <a:pPr defTabSz="439781">
+                <a:defRPr/>
+              </a:pPr>
+              <a:endParaRPr lang="te-IN" sz="2100" dirty="0">
                 <a:latin typeface="Ramabhadra" panose="02000600000000000000" pitchFamily="2" charset="0"/>
                 <a:cs typeface="Ramabhadra" panose="02000600000000000000" pitchFamily="2" charset="0"/>
               </a:endParaRPr>
@@ -4215,13 +4360,54 @@
                 <a:defRPr/>
               </a:pPr>
               <a:r>
-                <a:rPr lang="te-IN" sz="2300" dirty="0">
-                  <a:latin typeface="Ramabhadra" panose="02000600000000000000" pitchFamily="2" charset="0"/>
-                  <a:cs typeface="Ramabhadra" panose="02000600000000000000" pitchFamily="2" charset="0"/>
-                </a:rPr>
-                <a:t>అపత్కాలములో ఆశ్రయమైనది నీవేనయ్యా</a:t>
-              </a:r>
-              <a:endParaRPr lang="en-IN" sz="2300" dirty="0">
+                <a:rPr lang="te-IN" sz="2100" dirty="0">
+                  <a:latin typeface="Ramabhadra" panose="02000600000000000000" pitchFamily="2" charset="0"/>
+                  <a:cs typeface="Ramabhadra" panose="02000600000000000000" pitchFamily="2" charset="0"/>
+                </a:rPr>
+                <a:t>మా పెదవులతో ఎప్పుడు నీ</a:t>
+              </a:r>
+            </a:p>
+            <a:p>
+              <a:pPr defTabSz="439781">
+                <a:defRPr/>
+              </a:pPr>
+              <a:r>
+                <a:rPr lang="te-IN" sz="2100" dirty="0">
+                  <a:latin typeface="Ramabhadra" panose="02000600000000000000" pitchFamily="2" charset="0"/>
+                  <a:cs typeface="Ramabhadra" panose="02000600000000000000" pitchFamily="2" charset="0"/>
+                </a:rPr>
+                <a:t>వాక్యమును పఠింప నిమ్ము</a:t>
+              </a:r>
+            </a:p>
+            <a:p>
+              <a:pPr defTabSz="439781">
+                <a:defRPr/>
+              </a:pPr>
+              <a:r>
+                <a:rPr lang="te-IN" sz="2100" dirty="0">
+                  <a:latin typeface="Ramabhadra" panose="02000600000000000000" pitchFamily="2" charset="0"/>
+                  <a:cs typeface="Ramabhadra" panose="02000600000000000000" pitchFamily="2" charset="0"/>
+                </a:rPr>
+                <a:t>మా కాలు చేతులు ఎప్పుడు నీ </a:t>
+              </a:r>
+            </a:p>
+            <a:p>
+              <a:pPr defTabSz="439781">
+                <a:defRPr/>
+              </a:pPr>
+              <a:r>
+                <a:rPr lang="te-IN" sz="2100" dirty="0">
+                  <a:latin typeface="Ramabhadra" panose="02000600000000000000" pitchFamily="2" charset="0"/>
+                  <a:cs typeface="Ramabhadra" panose="02000600000000000000" pitchFamily="2" charset="0"/>
+                </a:rPr>
+                <a:t>సేవను చేయను వాడనిమ్ము </a:t>
+              </a:r>
+            </a:p>
+            <a:p>
+              <a:pPr defTabSz="439781">
+                <a:defRPr/>
+              </a:pPr>
+              <a:endParaRPr lang="te-IN" sz="2100" dirty="0">
                 <a:latin typeface="Ramabhadra" panose="02000600000000000000" pitchFamily="2" charset="0"/>
                 <a:cs typeface="Ramabhadra" panose="02000600000000000000" pitchFamily="2" charset="0"/>
               </a:endParaRPr>
@@ -4231,13 +4417,54 @@
                 <a:defRPr/>
               </a:pPr>
               <a:r>
-                <a:rPr lang="te-IN" sz="2300" dirty="0">
-                  <a:latin typeface="Ramabhadra" panose="02000600000000000000" pitchFamily="2" charset="0"/>
-                  <a:cs typeface="Ramabhadra" panose="02000600000000000000" pitchFamily="2" charset="0"/>
-                </a:rPr>
-                <a:t>చెరనుండి విడిపించి చెలిమితో బంధించి</a:t>
-              </a:r>
-              <a:endParaRPr lang="en-IN" sz="2300" dirty="0">
+                <a:rPr lang="te-IN" sz="2100" dirty="0">
+                  <a:latin typeface="Ramabhadra" panose="02000600000000000000" pitchFamily="2" charset="0"/>
+                  <a:cs typeface="Ramabhadra" panose="02000600000000000000" pitchFamily="2" charset="0"/>
+                </a:rPr>
+                <a:t>మా కలిమియు పదవుల నెల్ల </a:t>
+              </a:r>
+            </a:p>
+            <a:p>
+              <a:pPr defTabSz="439781">
+                <a:defRPr/>
+              </a:pPr>
+              <a:r>
+                <a:rPr lang="te-IN" sz="2100" dirty="0">
+                  <a:latin typeface="Ramabhadra" panose="02000600000000000000" pitchFamily="2" charset="0"/>
+                  <a:cs typeface="Ramabhadra" panose="02000600000000000000" pitchFamily="2" charset="0"/>
+                </a:rPr>
+                <a:t>నీ శుద్ధ కృపచే పొందితిమి </a:t>
+              </a:r>
+            </a:p>
+            <a:p>
+              <a:pPr defTabSz="439781">
+                <a:defRPr/>
+              </a:pPr>
+              <a:r>
+                <a:rPr lang="te-IN" sz="2100" dirty="0">
+                  <a:latin typeface="Ramabhadra" panose="02000600000000000000" pitchFamily="2" charset="0"/>
+                  <a:cs typeface="Ramabhadra" panose="02000600000000000000" pitchFamily="2" charset="0"/>
+                </a:rPr>
+                <a:t>మా కాలమంతయు జీవింప </a:t>
+              </a:r>
+            </a:p>
+            <a:p>
+              <a:pPr defTabSz="439781">
+                <a:defRPr/>
+              </a:pPr>
+              <a:r>
+                <a:rPr lang="te-IN" sz="2100" dirty="0">
+                  <a:latin typeface="Ramabhadra" panose="02000600000000000000" pitchFamily="2" charset="0"/>
+                  <a:cs typeface="Ramabhadra" panose="02000600000000000000" pitchFamily="2" charset="0"/>
+                </a:rPr>
+                <a:t>నిలకడగ నుండ దీవించుము</a:t>
+              </a:r>
+            </a:p>
+            <a:p>
+              <a:pPr defTabSz="439781">
+                <a:defRPr/>
+              </a:pPr>
+              <a:endParaRPr lang="te-IN" sz="2100" dirty="0">
                 <a:latin typeface="Ramabhadra" panose="02000600000000000000" pitchFamily="2" charset="0"/>
                 <a:cs typeface="Ramabhadra" panose="02000600000000000000" pitchFamily="2" charset="0"/>
               </a:endParaRPr>
@@ -4247,182 +4474,48 @@
                 <a:defRPr/>
               </a:pPr>
               <a:r>
-                <a:rPr lang="te-IN" sz="2300" dirty="0">
-                  <a:latin typeface="Ramabhadra" panose="02000600000000000000" pitchFamily="2" charset="0"/>
-                  <a:cs typeface="Ramabhadra" panose="02000600000000000000" pitchFamily="2" charset="0"/>
-                </a:rPr>
-                <a:t>నడిపించినావే మందవలె నీ స్వాస్థ్యమును</a:t>
-              </a:r>
-              <a:endParaRPr lang="en-IN" sz="2300" dirty="0">
-                <a:latin typeface="Ramabhadra" panose="02000600000000000000" pitchFamily="2" charset="0"/>
-                <a:cs typeface="Ramabhadra" panose="02000600000000000000" pitchFamily="2" charset="0"/>
-              </a:endParaRPr>
+                <a:rPr lang="te-IN" sz="2100" dirty="0">
+                  <a:latin typeface="Ramabhadra" panose="02000600000000000000" pitchFamily="2" charset="0"/>
+                  <a:cs typeface="Ramabhadra" panose="02000600000000000000" pitchFamily="2" charset="0"/>
+                </a:rPr>
+                <a:t>నిజ విశ్వాసములో నెదుగ</a:t>
+              </a:r>
             </a:p>
             <a:p>
               <a:pPr defTabSz="439781">
                 <a:defRPr/>
               </a:pPr>
-              <a:endParaRPr lang="en-IN" sz="2300" dirty="0">
-                <a:latin typeface="Ramabhadra" panose="02000600000000000000" pitchFamily="2" charset="0"/>
-                <a:cs typeface="Ramabhadra" panose="02000600000000000000" pitchFamily="2" charset="0"/>
-              </a:endParaRPr>
+              <a:r>
+                <a:rPr lang="te-IN" sz="2100" dirty="0">
+                  <a:latin typeface="Ramabhadra" panose="02000600000000000000" pitchFamily="2" charset="0"/>
+                  <a:cs typeface="Ramabhadra" panose="02000600000000000000" pitchFamily="2" charset="0"/>
+                </a:rPr>
+                <a:t>నిశ్భల బుద్దిని మా కొసగి</a:t>
+              </a:r>
             </a:p>
             <a:p>
               <a:pPr defTabSz="439781">
                 <a:defRPr/>
               </a:pPr>
               <a:r>
-                <a:rPr lang="te-IN" sz="2300" dirty="0">
-                  <a:latin typeface="Ramabhadra" panose="02000600000000000000" pitchFamily="2" charset="0"/>
-                  <a:cs typeface="Ramabhadra" panose="02000600000000000000" pitchFamily="2" charset="0"/>
-                </a:rPr>
-                <a:t>నీ జనులకు నీవు న్యాయాధిపతివైతివే</a:t>
-              </a:r>
-              <a:endParaRPr lang="en-IN" sz="2300" dirty="0">
-                <a:latin typeface="Ramabhadra" panose="02000600000000000000" pitchFamily="2" charset="0"/>
-                <a:cs typeface="Ramabhadra" panose="02000600000000000000" pitchFamily="2" charset="0"/>
-              </a:endParaRPr>
+                <a:rPr lang="te-IN" sz="2100" dirty="0">
+                  <a:latin typeface="Ramabhadra" panose="02000600000000000000" pitchFamily="2" charset="0"/>
+                  <a:cs typeface="Ramabhadra" panose="02000600000000000000" pitchFamily="2" charset="0"/>
+                </a:rPr>
+                <a:t>నిరతము నీ సేవ చేయుటకు</a:t>
+              </a:r>
             </a:p>
             <a:p>
               <a:pPr defTabSz="439781">
                 <a:defRPr/>
               </a:pPr>
               <a:r>
-                <a:rPr lang="te-IN" sz="2300" dirty="0">
-                  <a:latin typeface="Ramabhadra" panose="02000600000000000000" pitchFamily="2" charset="0"/>
-                  <a:cs typeface="Ramabhadra" panose="02000600000000000000" pitchFamily="2" charset="0"/>
-                </a:rPr>
-                <a:t>శత్రువుల కోటలన్ని కూలిపోయెను</a:t>
-              </a:r>
-              <a:endParaRPr lang="en-IN" sz="2300" dirty="0">
-                <a:latin typeface="Ramabhadra" panose="02000600000000000000" pitchFamily="2" charset="0"/>
-                <a:cs typeface="Ramabhadra" panose="02000600000000000000" pitchFamily="2" charset="0"/>
-              </a:endParaRPr>
-            </a:p>
-            <a:p>
-              <a:pPr defTabSz="439781">
-                <a:defRPr/>
-              </a:pPr>
-              <a:r>
-                <a:rPr lang="te-IN" sz="2300" dirty="0">
-                  <a:latin typeface="Ramabhadra" panose="02000600000000000000" pitchFamily="2" charset="0"/>
-                  <a:cs typeface="Ramabhadra" panose="02000600000000000000" pitchFamily="2" charset="0"/>
-                </a:rPr>
-                <a:t>సంకెళ్ళ సంబరాలు మూగబోయెను</a:t>
-              </a:r>
-              <a:endParaRPr lang="en-IN" sz="2300" dirty="0">
-                <a:latin typeface="Ramabhadra" panose="02000600000000000000" pitchFamily="2" charset="0"/>
-                <a:cs typeface="Ramabhadra" panose="02000600000000000000" pitchFamily="2" charset="0"/>
-              </a:endParaRPr>
-            </a:p>
-            <a:p>
-              <a:pPr defTabSz="439781">
-                <a:defRPr/>
-              </a:pPr>
-              <a:r>
-                <a:rPr lang="te-IN" sz="2300" dirty="0">
-                  <a:latin typeface="Ramabhadra" panose="02000600000000000000" pitchFamily="2" charset="0"/>
-                  <a:cs typeface="Ramabhadra" panose="02000600000000000000" pitchFamily="2" charset="0"/>
-                </a:rPr>
-                <a:t>నిరీక్షణ కర్తవైన నిన్నే నమ్మిన ప్రజలు</a:t>
-              </a:r>
-              <a:endParaRPr lang="en-IN" sz="2300" dirty="0">
-                <a:latin typeface="Ramabhadra" panose="02000600000000000000" pitchFamily="2" charset="0"/>
-                <a:cs typeface="Ramabhadra" panose="02000600000000000000" pitchFamily="2" charset="0"/>
-              </a:endParaRPr>
-            </a:p>
-            <a:p>
-              <a:pPr defTabSz="439781">
-                <a:defRPr/>
-              </a:pPr>
-              <a:r>
-                <a:rPr lang="te-IN" sz="2300" dirty="0">
-                  <a:latin typeface="Ramabhadra" panose="02000600000000000000" pitchFamily="2" charset="0"/>
-                  <a:cs typeface="Ramabhadra" panose="02000600000000000000" pitchFamily="2" charset="0"/>
-                </a:rPr>
-                <a:t>నిత్యానందబారితులై సీయోనుకు తిరిగివచ్చెను</a:t>
-              </a:r>
-              <a:endParaRPr lang="en-IN" sz="2300" dirty="0">
-                <a:latin typeface="Ramabhadra" panose="02000600000000000000" pitchFamily="2" charset="0"/>
-                <a:cs typeface="Ramabhadra" panose="02000600000000000000" pitchFamily="2" charset="0"/>
-              </a:endParaRPr>
-            </a:p>
-            <a:p>
-              <a:pPr defTabSz="439781">
-                <a:defRPr/>
-              </a:pPr>
-              <a:endParaRPr lang="en-IN" sz="2300" dirty="0">
-                <a:latin typeface="Ramabhadra" panose="02000600000000000000" pitchFamily="2" charset="0"/>
-                <a:cs typeface="Ramabhadra" panose="02000600000000000000" pitchFamily="2" charset="0"/>
-              </a:endParaRPr>
-            </a:p>
-            <a:p>
-              <a:pPr defTabSz="439781">
-                <a:defRPr/>
-              </a:pPr>
-              <a:r>
-                <a:rPr lang="te-IN" sz="2300" dirty="0">
-                  <a:latin typeface="Ramabhadra" panose="02000600000000000000" pitchFamily="2" charset="0"/>
-                  <a:cs typeface="Ramabhadra" panose="02000600000000000000" pitchFamily="2" charset="0"/>
-                </a:rPr>
-                <a:t>నీ ప్రియులను నీవు కాపాడే మంచి కాపరి</a:t>
-              </a:r>
-              <a:endParaRPr lang="en-IN" sz="2300" dirty="0">
-                <a:latin typeface="Ramabhadra" panose="02000600000000000000" pitchFamily="2" charset="0"/>
-                <a:cs typeface="Ramabhadra" panose="02000600000000000000" pitchFamily="2" charset="0"/>
-              </a:endParaRPr>
-            </a:p>
-            <a:p>
-              <a:pPr defTabSz="439781">
-                <a:defRPr/>
-              </a:pPr>
-              <a:r>
-                <a:rPr lang="te-IN" sz="2300" dirty="0">
-                  <a:latin typeface="Ramabhadra" panose="02000600000000000000" pitchFamily="2" charset="0"/>
-                  <a:cs typeface="Ramabhadra" panose="02000600000000000000" pitchFamily="2" charset="0"/>
-                </a:rPr>
-                <a:t>జఠిలమైన త్రోవలన్ని దాటించితివి</a:t>
-              </a:r>
-            </a:p>
-            <a:p>
-              <a:pPr defTabSz="439781">
-                <a:defRPr/>
-              </a:pPr>
-              <a:r>
-                <a:rPr lang="te-IN" sz="2300" dirty="0">
-                  <a:latin typeface="Ramabhadra" panose="02000600000000000000" pitchFamily="2" charset="0"/>
-                  <a:cs typeface="Ramabhadra" panose="02000600000000000000" pitchFamily="2" charset="0"/>
-                </a:rPr>
-                <a:t>సంమృద్ది జీవముతో పొషించితివి</a:t>
-              </a:r>
-            </a:p>
-            <a:p>
-              <a:pPr defTabSz="439781">
-                <a:defRPr/>
-              </a:pPr>
-              <a:r>
-                <a:rPr lang="te-IN" sz="2300" dirty="0">
-                  <a:latin typeface="Ramabhadra" panose="02000600000000000000" pitchFamily="2" charset="0"/>
-                  <a:cs typeface="Ramabhadra" panose="02000600000000000000" pitchFamily="2" charset="0"/>
-                </a:rPr>
-                <a:t>ఆలోచన కర్తవైన నీ స్వరమే వినగా</a:t>
-              </a:r>
-            </a:p>
-            <a:p>
-              <a:pPr defTabSz="439781">
-                <a:defRPr/>
-              </a:pPr>
-              <a:r>
-                <a:rPr lang="te-IN" sz="2300" dirty="0">
-                  <a:latin typeface="Ramabhadra" panose="02000600000000000000" pitchFamily="2" charset="0"/>
-                  <a:cs typeface="Ramabhadra" panose="02000600000000000000" pitchFamily="2" charset="0"/>
-                </a:rPr>
-                <a:t>నిత్యాఆదరణను పొంది నీ క్రియలను వివరించగా</a:t>
-              </a:r>
-              <a:endParaRPr lang="en-IN" sz="2300" dirty="0">
-                <a:latin typeface="Ramabhadra" panose="02000600000000000000" pitchFamily="2" charset="0"/>
-                <a:cs typeface="Ramabhadra" panose="02000600000000000000" pitchFamily="2" charset="0"/>
-              </a:endParaRPr>
+                <a:rPr lang="te-IN" sz="2100" dirty="0">
+                  <a:latin typeface="Ramabhadra" panose="02000600000000000000" pitchFamily="2" charset="0"/>
+                  <a:cs typeface="Ramabhadra" panose="02000600000000000000" pitchFamily="2" charset="0"/>
+                </a:rPr>
+                <a:t>నీ ఆత్మ శక్తితో నింపుమయా </a:t>
+              </a:r>
             </a:p>
           </p:txBody>
         </p:sp>

--- a/songsTemplate.pptx
+++ b/songsTemplate.pptx
@@ -255,7 +255,7 @@
           <a:p>
             <a:fld id="{F1102B08-ED9E-409F-B95F-09CAA1DAF6E0}" type="datetimeFigureOut">
               <a:rPr lang="en-IN" smtClean="0"/>
-              <a:t>11-01-2025</a:t>
+              <a:t>18-01-2025</a:t>
             </a:fld>
             <a:endParaRPr lang="en-IN"/>
           </a:p>
@@ -425,7 +425,7 @@
           <a:p>
             <a:fld id="{F1102B08-ED9E-409F-B95F-09CAA1DAF6E0}" type="datetimeFigureOut">
               <a:rPr lang="en-IN" smtClean="0"/>
-              <a:t>11-01-2025</a:t>
+              <a:t>18-01-2025</a:t>
             </a:fld>
             <a:endParaRPr lang="en-IN"/>
           </a:p>
@@ -605,7 +605,7 @@
           <a:p>
             <a:fld id="{F1102B08-ED9E-409F-B95F-09CAA1DAF6E0}" type="datetimeFigureOut">
               <a:rPr lang="en-IN" smtClean="0"/>
-              <a:t>11-01-2025</a:t>
+              <a:t>18-01-2025</a:t>
             </a:fld>
             <a:endParaRPr lang="en-IN"/>
           </a:p>
@@ -775,7 +775,7 @@
           <a:p>
             <a:fld id="{F1102B08-ED9E-409F-B95F-09CAA1DAF6E0}" type="datetimeFigureOut">
               <a:rPr lang="en-IN" smtClean="0"/>
-              <a:t>11-01-2025</a:t>
+              <a:t>18-01-2025</a:t>
             </a:fld>
             <a:endParaRPr lang="en-IN"/>
           </a:p>
@@ -1019,7 +1019,7 @@
           <a:p>
             <a:fld id="{F1102B08-ED9E-409F-B95F-09CAA1DAF6E0}" type="datetimeFigureOut">
               <a:rPr lang="en-IN" smtClean="0"/>
-              <a:t>11-01-2025</a:t>
+              <a:t>18-01-2025</a:t>
             </a:fld>
             <a:endParaRPr lang="en-IN"/>
           </a:p>
@@ -1251,7 +1251,7 @@
           <a:p>
             <a:fld id="{F1102B08-ED9E-409F-B95F-09CAA1DAF6E0}" type="datetimeFigureOut">
               <a:rPr lang="en-IN" smtClean="0"/>
-              <a:t>11-01-2025</a:t>
+              <a:t>18-01-2025</a:t>
             </a:fld>
             <a:endParaRPr lang="en-IN"/>
           </a:p>
@@ -1618,7 +1618,7 @@
           <a:p>
             <a:fld id="{F1102B08-ED9E-409F-B95F-09CAA1DAF6E0}" type="datetimeFigureOut">
               <a:rPr lang="en-IN" smtClean="0"/>
-              <a:t>11-01-2025</a:t>
+              <a:t>18-01-2025</a:t>
             </a:fld>
             <a:endParaRPr lang="en-IN"/>
           </a:p>
@@ -1736,7 +1736,7 @@
           <a:p>
             <a:fld id="{F1102B08-ED9E-409F-B95F-09CAA1DAF6E0}" type="datetimeFigureOut">
               <a:rPr lang="en-IN" smtClean="0"/>
-              <a:t>11-01-2025</a:t>
+              <a:t>18-01-2025</a:t>
             </a:fld>
             <a:endParaRPr lang="en-IN"/>
           </a:p>
@@ -1831,7 +1831,7 @@
           <a:p>
             <a:fld id="{F1102B08-ED9E-409F-B95F-09CAA1DAF6E0}" type="datetimeFigureOut">
               <a:rPr lang="en-IN" smtClean="0"/>
-              <a:t>11-01-2025</a:t>
+              <a:t>18-01-2025</a:t>
             </a:fld>
             <a:endParaRPr lang="en-IN"/>
           </a:p>
@@ -2108,7 +2108,7 @@
           <a:p>
             <a:fld id="{F1102B08-ED9E-409F-B95F-09CAA1DAF6E0}" type="datetimeFigureOut">
               <a:rPr lang="en-IN" smtClean="0"/>
-              <a:t>11-01-2025</a:t>
+              <a:t>18-01-2025</a:t>
             </a:fld>
             <a:endParaRPr lang="en-IN"/>
           </a:p>
@@ -2365,7 +2365,7 @@
           <a:p>
             <a:fld id="{F1102B08-ED9E-409F-B95F-09CAA1DAF6E0}" type="datetimeFigureOut">
               <a:rPr lang="en-IN" smtClean="0"/>
-              <a:t>11-01-2025</a:t>
+              <a:t>18-01-2025</a:t>
             </a:fld>
             <a:endParaRPr lang="en-IN"/>
           </a:p>
@@ -2578,7 +2578,7 @@
           <a:p>
             <a:fld id="{F1102B08-ED9E-409F-B95F-09CAA1DAF6E0}" type="datetimeFigureOut">
               <a:rPr lang="en-IN" smtClean="0"/>
-              <a:t>11-01-2025</a:t>
+              <a:t>18-01-2025</a:t>
             </a:fld>
             <a:endParaRPr lang="en-IN"/>
           </a:p>
@@ -2998,9 +2998,9 @@
         <p:grpSpPr>
           <a:xfrm>
             <a:off x="160868" y="182031"/>
-            <a:ext cx="4648200" cy="6863417"/>
+            <a:ext cx="4648200" cy="6524863"/>
             <a:chOff x="160868" y="182031"/>
-            <a:chExt cx="4648200" cy="6863417"/>
+            <a:chExt cx="4648200" cy="6524863"/>
           </a:xfrm>
         </p:grpSpPr>
         <p:sp>
@@ -3073,7 +3073,7 @@
           <p:spPr>
             <a:xfrm>
               <a:off x="243398" y="182031"/>
-              <a:ext cx="4483140" cy="6863417"/>
+              <a:ext cx="4483140" cy="6524863"/>
             </a:xfrm>
             <a:prstGeom prst="rect">
               <a:avLst/>
@@ -3094,45 +3094,19 @@
                   <a:latin typeface="Ramabhadra" panose="02000600000000000000" pitchFamily="2" charset="0"/>
                   <a:cs typeface="Ramabhadra" panose="02000600000000000000" pitchFamily="2" charset="0"/>
                 </a:rPr>
-                <a:t>నిజమైన ద్రాక్షావల్లి నీవే</a:t>
-              </a:r>
-              <a:br>
+                <a:t>మంచి దేవుడు భలే మంచి దేవుడు</a:t>
+              </a:r>
+            </a:p>
+            <a:p>
+              <a:pPr defTabSz="439781">
+                <a:defRPr/>
+              </a:pPr>
+              <a:r>
                 <a:rPr lang="te-IN" sz="2200" dirty="0">
                   <a:latin typeface="Ramabhadra" panose="02000600000000000000" pitchFamily="2" charset="0"/>
                   <a:cs typeface="Ramabhadra" panose="02000600000000000000" pitchFamily="2" charset="0"/>
                 </a:rPr>
-              </a:br>
-              <a:r>
-                <a:rPr lang="te-IN" sz="2200" dirty="0">
-                  <a:latin typeface="Ramabhadra" panose="02000600000000000000" pitchFamily="2" charset="0"/>
-                  <a:cs typeface="Ramabhadra" panose="02000600000000000000" pitchFamily="2" charset="0"/>
-                </a:rPr>
-                <a:t>నిత్యమైన సంతోషము నీలోనే </a:t>
-              </a:r>
-              <a:br>
-                <a:rPr lang="te-IN" sz="2200" dirty="0">
-                  <a:latin typeface="Ramabhadra" panose="02000600000000000000" pitchFamily="2" charset="0"/>
-                  <a:cs typeface="Ramabhadra" panose="02000600000000000000" pitchFamily="2" charset="0"/>
-                </a:rPr>
-              </a:br>
-              <a:r>
-                <a:rPr lang="te-IN" sz="2200" dirty="0">
-                  <a:latin typeface="Ramabhadra" panose="02000600000000000000" pitchFamily="2" charset="0"/>
-                  <a:cs typeface="Ramabhadra" panose="02000600000000000000" pitchFamily="2" charset="0"/>
-                </a:rPr>
-                <a:t>శాశ్వతమైనది ఎంతో మధురమైనది</a:t>
-              </a:r>
-            </a:p>
-            <a:p>
-              <a:pPr defTabSz="439781">
-                <a:defRPr/>
-              </a:pPr>
-              <a:r>
-                <a:rPr lang="te-IN" sz="2200" dirty="0">
-                  <a:latin typeface="Ramabhadra" panose="02000600000000000000" pitchFamily="2" charset="0"/>
-                  <a:cs typeface="Ramabhadra" panose="02000600000000000000" pitchFamily="2" charset="0"/>
-                </a:rPr>
-                <a:t>నాపైన నీకున్న ప్రేమ ఎనలేని నీ ప్రేమ    </a:t>
+                <a:t>నిజ దైవం యేసు - అద్వితీయ దేవుడు</a:t>
               </a:r>
             </a:p>
             <a:p>
@@ -3153,47 +3127,60 @@
                   <a:latin typeface="Ramabhadra" panose="02000600000000000000" pitchFamily="2" charset="0"/>
                   <a:cs typeface="Ramabhadra" panose="02000600000000000000" pitchFamily="2" charset="0"/>
                 </a:rPr>
-                <a:t>అతి కాంక్షనీయుడా దివ్యమైన నీ రూపులో</a:t>
-              </a:r>
-              <a:br>
+                <a:t>మ్రొక్కులను కోరడు - మనసిస్తే చాలును</a:t>
+              </a:r>
+            </a:p>
+            <a:p>
+              <a:pPr defTabSz="439781">
+                <a:defRPr/>
+              </a:pPr>
+              <a:r>
                 <a:rPr lang="te-IN" sz="2200" dirty="0">
                   <a:latin typeface="Ramabhadra" panose="02000600000000000000" pitchFamily="2" charset="0"/>
                   <a:cs typeface="Ramabhadra" panose="02000600000000000000" pitchFamily="2" charset="0"/>
                 </a:rPr>
-              </a:br>
+                <a:t>కొండలెక్కి రమ్మనడు - మనలో కొలువుంటాడు</a:t>
+              </a:r>
+            </a:p>
+            <a:p>
+              <a:pPr defTabSz="439781">
+                <a:defRPr/>
+              </a:pPr>
               <a:r>
                 <a:rPr lang="te-IN" sz="2200" dirty="0">
                   <a:latin typeface="Ramabhadra" panose="02000600000000000000" pitchFamily="2" charset="0"/>
                   <a:cs typeface="Ramabhadra" panose="02000600000000000000" pitchFamily="2" charset="0"/>
                 </a:rPr>
-                <a:t>జీవించున్నాను నీ ప్రేమకు నే పత్రికగా </a:t>
-              </a:r>
-              <a:br>
+                <a:t>వెదికితే ప్రతి వారికి - దొరికేను యేసు</a:t>
+              </a:r>
+            </a:p>
+            <a:p>
+              <a:pPr defTabSz="439781">
+                <a:defRPr/>
+              </a:pPr>
+              <a:r>
                 <a:rPr lang="te-IN" sz="2200" dirty="0">
                   <a:latin typeface="Ramabhadra" panose="02000600000000000000" pitchFamily="2" charset="0"/>
                   <a:cs typeface="Ramabhadra" panose="02000600000000000000" pitchFamily="2" charset="0"/>
                 </a:rPr>
-              </a:br>
+                <a:t>పిలిచే ప్రతి వారికి - పలికేను యేసు</a:t>
+              </a:r>
+            </a:p>
+            <a:p>
+              <a:pPr defTabSz="439781">
+                <a:defRPr/>
+              </a:pPr>
               <a:r>
                 <a:rPr lang="te-IN" sz="2200" dirty="0">
                   <a:latin typeface="Ramabhadra" panose="02000600000000000000" pitchFamily="2" charset="0"/>
                   <a:cs typeface="Ramabhadra" panose="02000600000000000000" pitchFamily="2" charset="0"/>
                 </a:rPr>
-                <a:t>శిధిలమై యుండగా నన్ను నీదు రక్తముతో కడిగి</a:t>
-              </a:r>
-              <a:br>
-                <a:rPr lang="te-IN" sz="2200" dirty="0">
-                  <a:latin typeface="Ramabhadra" panose="02000600000000000000" pitchFamily="2" charset="0"/>
-                  <a:cs typeface="Ramabhadra" panose="02000600000000000000" pitchFamily="2" charset="0"/>
-                </a:rPr>
-              </a:br>
-              <a:r>
-                <a:rPr lang="te-IN" sz="2200" dirty="0">
-                  <a:latin typeface="Ramabhadra" panose="02000600000000000000" pitchFamily="2" charset="0"/>
-                  <a:cs typeface="Ramabhadra" panose="02000600000000000000" pitchFamily="2" charset="0"/>
-                </a:rPr>
-                <a:t>నీ పోలికగా మార్చినావే నా యేసయ్యా      </a:t>
-              </a:r>
+                <a:t>బొమ్మ కాదయ్యో - జీవమున్న దేవుడు</a:t>
+              </a:r>
+              <a:endParaRPr lang="en-IN" sz="2200" dirty="0">
+                <a:latin typeface="Ramabhadra" panose="02000600000000000000" pitchFamily="2" charset="0"/>
+                <a:cs typeface="Ramabhadra" panose="02000600000000000000" pitchFamily="2" charset="0"/>
+              </a:endParaRPr>
             </a:p>
             <a:p>
               <a:pPr defTabSz="439781">
@@ -3213,111 +3200,48 @@
                   <a:latin typeface="Ramabhadra" panose="02000600000000000000" pitchFamily="2" charset="0"/>
                   <a:cs typeface="Ramabhadra" panose="02000600000000000000" pitchFamily="2" charset="0"/>
                 </a:rPr>
-                <a:t>నా ప్రాణ ప్రియుడా శ్రేష్టమైన ఫలములతో</a:t>
-              </a:r>
-              <a:br>
+                <a:t>కుంటివాడు గంతులేయ - కాళ్ళ నొసగినాడు</a:t>
+              </a:r>
+            </a:p>
+            <a:p>
+              <a:pPr defTabSz="439781">
+                <a:defRPr/>
+              </a:pPr>
+              <a:r>
                 <a:rPr lang="te-IN" sz="2200" dirty="0">
                   <a:latin typeface="Ramabhadra" panose="02000600000000000000" pitchFamily="2" charset="0"/>
                   <a:cs typeface="Ramabhadra" panose="02000600000000000000" pitchFamily="2" charset="0"/>
                 </a:rPr>
-              </a:br>
+                <a:t>మూగవారు స్తుతిచేయ - నోటినిచ్చినాడు</a:t>
+              </a:r>
+            </a:p>
+            <a:p>
+              <a:pPr defTabSz="439781">
+                <a:defRPr/>
+              </a:pPr>
               <a:r>
                 <a:rPr lang="te-IN" sz="2200" dirty="0">
                   <a:latin typeface="Ramabhadra" panose="02000600000000000000" pitchFamily="2" charset="0"/>
                   <a:cs typeface="Ramabhadra" panose="02000600000000000000" pitchFamily="2" charset="0"/>
                 </a:rPr>
-                <a:t>అర్పించుచున్నాను సర్వము నీకే అర్పణగా </a:t>
-              </a:r>
-              <a:br>
+                <a:t>బధిరులు తన స్వరము విన - చెవులిచ్చినాడు</a:t>
+              </a:r>
+            </a:p>
+            <a:p>
+              <a:pPr defTabSz="439781">
+                <a:defRPr/>
+              </a:pPr>
+              <a:r>
                 <a:rPr lang="te-IN" sz="2200" dirty="0">
                   <a:latin typeface="Ramabhadra" panose="02000600000000000000" pitchFamily="2" charset="0"/>
                   <a:cs typeface="Ramabhadra" panose="02000600000000000000" pitchFamily="2" charset="0"/>
                 </a:rPr>
-              </a:br>
-              <a:r>
-                <a:rPr lang="te-IN" sz="2200" dirty="0">
-                  <a:latin typeface="Ramabhadra" panose="02000600000000000000" pitchFamily="2" charset="0"/>
-                  <a:cs typeface="Ramabhadra" panose="02000600000000000000" pitchFamily="2" charset="0"/>
-                </a:rPr>
-                <a:t>వాడిపోనివ్వక నాకు ఆశ్రయమైతివి నీవు</a:t>
-              </a:r>
-              <a:br>
-                <a:rPr lang="te-IN" sz="2200" dirty="0">
-                  <a:latin typeface="Ramabhadra" panose="02000600000000000000" pitchFamily="2" charset="0"/>
-                  <a:cs typeface="Ramabhadra" panose="02000600000000000000" pitchFamily="2" charset="0"/>
-                </a:rPr>
-              </a:br>
-              <a:r>
-                <a:rPr lang="te-IN" sz="2200" dirty="0">
-                  <a:latin typeface="Ramabhadra" panose="02000600000000000000" pitchFamily="2" charset="0"/>
-                  <a:cs typeface="Ramabhadra" panose="02000600000000000000" pitchFamily="2" charset="0"/>
-                </a:rPr>
-                <a:t>జీవపు ఊటవై బలపరచితివి నా యేసయ్యా </a:t>
-              </a:r>
-              <a:endParaRPr lang="en-US" sz="2200" dirty="0">
+                <a:t>ప్రేమా మయుడు - ఆశ్చర్య దేవుడు</a:t>
+              </a:r>
+              <a:endParaRPr lang="en-IN" sz="2200" dirty="0">
                 <a:latin typeface="Ramabhadra" panose="02000600000000000000" pitchFamily="2" charset="0"/>
                 <a:cs typeface="Ramabhadra" panose="02000600000000000000" pitchFamily="2" charset="0"/>
               </a:endParaRPr>
-            </a:p>
-            <a:p>
-              <a:pPr defTabSz="439781">
-                <a:defRPr/>
-              </a:pPr>
-              <a:endParaRPr lang="en-US" sz="2200" dirty="0">
-                <a:latin typeface="Ramabhadra" panose="02000600000000000000" pitchFamily="2" charset="0"/>
-                <a:cs typeface="Ramabhadra" panose="02000600000000000000" pitchFamily="2" charset="0"/>
-              </a:endParaRPr>
-            </a:p>
-            <a:p>
-              <a:pPr defTabSz="439781">
-                <a:defRPr/>
-              </a:pPr>
-              <a:r>
-                <a:rPr lang="te-IN" sz="2200" dirty="0">
-                  <a:latin typeface="Ramabhadra" panose="02000600000000000000" pitchFamily="2" charset="0"/>
-                  <a:cs typeface="Ramabhadra" panose="02000600000000000000" pitchFamily="2" charset="0"/>
-                </a:rPr>
-                <a:t>షాలేము రాజా రమ్యమైన సీయోనుకే</a:t>
-              </a:r>
-              <a:br>
-                <a:rPr lang="te-IN" sz="2200" dirty="0">
-                  <a:latin typeface="Ramabhadra" panose="02000600000000000000" pitchFamily="2" charset="0"/>
-                  <a:cs typeface="Ramabhadra" panose="02000600000000000000" pitchFamily="2" charset="0"/>
-                </a:rPr>
-              </a:br>
-              <a:r>
-                <a:rPr lang="te-IN" sz="2200" dirty="0">
-                  <a:latin typeface="Ramabhadra" panose="02000600000000000000" pitchFamily="2" charset="0"/>
-                  <a:cs typeface="Ramabhadra" panose="02000600000000000000" pitchFamily="2" charset="0"/>
-                </a:rPr>
-                <a:t>నను నడిపించుము నీ చిత్తమైన మార్గములో </a:t>
-              </a:r>
-              <a:br>
-                <a:rPr lang="te-IN" sz="2200" dirty="0">
-                  <a:latin typeface="Ramabhadra" panose="02000600000000000000" pitchFamily="2" charset="0"/>
-                  <a:cs typeface="Ramabhadra" panose="02000600000000000000" pitchFamily="2" charset="0"/>
-                </a:rPr>
-              </a:br>
-              <a:r>
-                <a:rPr lang="te-IN" sz="2200" dirty="0">
-                  <a:latin typeface="Ramabhadra" panose="02000600000000000000" pitchFamily="2" charset="0"/>
-                  <a:cs typeface="Ramabhadra" panose="02000600000000000000" pitchFamily="2" charset="0"/>
-                </a:rPr>
-                <a:t>అలసి పోనివ్వక నన్ను నీదు ఆత్మతో నింపి</a:t>
-              </a:r>
-              <a:br>
-                <a:rPr lang="te-IN" sz="2200" dirty="0">
-                  <a:latin typeface="Ramabhadra" panose="02000600000000000000" pitchFamily="2" charset="0"/>
-                  <a:cs typeface="Ramabhadra" panose="02000600000000000000" pitchFamily="2" charset="0"/>
-                </a:rPr>
-              </a:br>
-              <a:r>
-                <a:rPr lang="te-IN" sz="2200" dirty="0">
-                  <a:latin typeface="Ramabhadra" panose="02000600000000000000" pitchFamily="2" charset="0"/>
-                  <a:cs typeface="Ramabhadra" panose="02000600000000000000" pitchFamily="2" charset="0"/>
-                </a:rPr>
-                <a:t>ఆదరణ కర్తవై నను చేర్చుము నీ రాజ్యములో</a:t>
-              </a:r>
             </a:p>
             <a:p>
               <a:pPr defTabSz="439781">
@@ -3327,6 +3251,66 @@
                 <a:latin typeface="Ramabhadra" panose="02000600000000000000" pitchFamily="2" charset="0"/>
                 <a:cs typeface="Ramabhadra" panose="02000600000000000000" pitchFamily="2" charset="0"/>
               </a:endParaRPr>
+            </a:p>
+            <a:p>
+              <a:pPr defTabSz="439781">
+                <a:defRPr/>
+              </a:pPr>
+              <a:r>
+                <a:rPr lang="te-IN" sz="2200" dirty="0">
+                  <a:latin typeface="Ramabhadra" panose="02000600000000000000" pitchFamily="2" charset="0"/>
+                  <a:cs typeface="Ramabhadra" panose="02000600000000000000" pitchFamily="2" charset="0"/>
+                </a:rPr>
+                <a:t>చెప్పింది చేసెను - మాదిరుంచి వెళ్ళెను</a:t>
+              </a:r>
+            </a:p>
+            <a:p>
+              <a:pPr defTabSz="439781">
+                <a:defRPr/>
+              </a:pPr>
+              <a:r>
+                <a:rPr lang="te-IN" sz="2200" dirty="0">
+                  <a:latin typeface="Ramabhadra" panose="02000600000000000000" pitchFamily="2" charset="0"/>
+                  <a:cs typeface="Ramabhadra" panose="02000600000000000000" pitchFamily="2" charset="0"/>
+                </a:rPr>
+                <a:t>అడుగు జాడాలుంచెను - అనుసరించ కోరెను</a:t>
+              </a:r>
+            </a:p>
+            <a:p>
+              <a:pPr defTabSz="439781">
+                <a:defRPr/>
+              </a:pPr>
+              <a:r>
+                <a:rPr lang="te-IN" sz="2200" dirty="0">
+                  <a:latin typeface="Ramabhadra" panose="02000600000000000000" pitchFamily="2" charset="0"/>
+                  <a:cs typeface="Ramabhadra" panose="02000600000000000000" pitchFamily="2" charset="0"/>
+                </a:rPr>
+                <a:t>మరణాన్ని జీవాన్ని - మన ఎదుటే వుంచెను</a:t>
+              </a:r>
+            </a:p>
+            <a:p>
+              <a:pPr defTabSz="439781">
+                <a:defRPr/>
+              </a:pPr>
+              <a:r>
+                <a:rPr lang="te-IN" sz="2200" dirty="0">
+                  <a:latin typeface="Ramabhadra" panose="02000600000000000000" pitchFamily="2" charset="0"/>
+                  <a:cs typeface="Ramabhadra" panose="02000600000000000000" pitchFamily="2" charset="0"/>
+                </a:rPr>
+                <a:t>ఎంచుకొనే స్వేచ్చను - మన చేతికిచ్చెను</a:t>
+              </a:r>
+            </a:p>
+            <a:p>
+              <a:pPr defTabSz="439781">
+                <a:defRPr/>
+              </a:pPr>
+              <a:r>
+                <a:rPr lang="te-IN" sz="2200" dirty="0">
+                  <a:latin typeface="Ramabhadra" panose="02000600000000000000" pitchFamily="2" charset="0"/>
+                  <a:cs typeface="Ramabhadra" panose="02000600000000000000" pitchFamily="2" charset="0"/>
+                </a:rPr>
+                <a:t>ఏమి చేతువో - సృష్టికర్త యేసుని</a:t>
+              </a:r>
             </a:p>
           </p:txBody>
         </p:sp>
@@ -3408,9 +3392,9 @@
         <p:grpSpPr>
           <a:xfrm>
             <a:off x="5104338" y="182031"/>
-            <a:ext cx="5718029" cy="6524392"/>
+            <a:ext cx="5718029" cy="6493935"/>
             <a:chOff x="160868" y="182032"/>
-            <a:chExt cx="5718029" cy="6524392"/>
+            <a:chExt cx="5718029" cy="6493935"/>
           </a:xfrm>
         </p:grpSpPr>
         <p:sp>
@@ -3483,7 +3467,7 @@
           <p:spPr>
             <a:xfrm>
               <a:off x="264435" y="243116"/>
-              <a:ext cx="5614462" cy="6463308"/>
+              <a:ext cx="5614462" cy="6109365"/>
             </a:xfrm>
             <a:prstGeom prst="rect">
               <a:avLst/>
@@ -3501,16 +3485,21 @@
                   <a:latin typeface="Ramabhadra" panose="02000600000000000000" pitchFamily="2" charset="0"/>
                   <a:cs typeface="Ramabhadra" panose="02000600000000000000" pitchFamily="2" charset="0"/>
                 </a:rPr>
-                <a:t>నీ ప్రేమ ఎంతో అపారము</a:t>
-              </a:r>
-            </a:p>
-            <a:p>
+                <a:t>స్తుతి పాత్రుడా </a:t>
+              </a:r>
+              <a:r>
+                <a:rPr lang="en-IN" sz="2300" dirty="0">
+                  <a:latin typeface="Ramabhadra" panose="02000600000000000000" pitchFamily="2" charset="0"/>
+                  <a:cs typeface="Ramabhadra" panose="02000600000000000000" pitchFamily="2" charset="0"/>
+                </a:rPr>
+                <a:t>-</a:t>
+              </a:r>
               <a:r>
                 <a:rPr lang="te-IN" sz="2300" dirty="0">
                   <a:latin typeface="Ramabhadra" panose="02000600000000000000" pitchFamily="2" charset="0"/>
                   <a:cs typeface="Ramabhadra" panose="02000600000000000000" pitchFamily="2" charset="0"/>
                 </a:rPr>
-                <a:t>వర్ణింపతరమా నా ప్రభూ</a:t>
+                <a:t> స్తోత్రార్హుడా</a:t>
               </a:r>
             </a:p>
             <a:p>
@@ -3519,16 +3508,55 @@
                   <a:latin typeface="Ramabhadra" panose="02000600000000000000" pitchFamily="2" charset="0"/>
                   <a:cs typeface="Ramabhadra" panose="02000600000000000000" pitchFamily="2" charset="0"/>
                 </a:rPr>
-                <a:t>పులకింప చేసెను నా హృది</a:t>
-              </a:r>
-            </a:p>
-            <a:p>
+                <a:t>స్తుతులందుకో </a:t>
+              </a:r>
+              <a:r>
+                <a:rPr lang="en-IN" sz="2300" dirty="0">
+                  <a:latin typeface="Ramabhadra" panose="02000600000000000000" pitchFamily="2" charset="0"/>
+                  <a:cs typeface="Ramabhadra" panose="02000600000000000000" pitchFamily="2" charset="0"/>
+                </a:rPr>
+                <a:t>-</a:t>
+              </a:r>
               <a:r>
                 <a:rPr lang="te-IN" sz="2300" dirty="0">
                   <a:latin typeface="Ramabhadra" panose="02000600000000000000" pitchFamily="2" charset="0"/>
                   <a:cs typeface="Ramabhadra" panose="02000600000000000000" pitchFamily="2" charset="0"/>
                 </a:rPr>
-                <a:t>హృదయేశ్వరా నా యేసువా</a:t>
+                <a:t> పూజార్హుడా</a:t>
+              </a:r>
+            </a:p>
+            <a:p>
+              <a:r>
+                <a:rPr lang="te-IN" sz="2300" dirty="0">
+                  <a:latin typeface="Ramabhadra" panose="02000600000000000000" pitchFamily="2" charset="0"/>
+                  <a:cs typeface="Ramabhadra" panose="02000600000000000000" pitchFamily="2" charset="0"/>
+                </a:rPr>
+                <a:t>ఆకాశమందు నీవు తప్ప </a:t>
+              </a:r>
+              <a:r>
+                <a:rPr lang="en-IN" sz="2300" dirty="0">
+                  <a:latin typeface="Ramabhadra" panose="02000600000000000000" pitchFamily="2" charset="0"/>
+                  <a:cs typeface="Ramabhadra" panose="02000600000000000000" pitchFamily="2" charset="0"/>
+                </a:rPr>
+                <a:t>-</a:t>
+              </a:r>
+            </a:p>
+            <a:p>
+              <a:r>
+                <a:rPr lang="te-IN" sz="2300" dirty="0">
+                  <a:latin typeface="Ramabhadra" panose="02000600000000000000" pitchFamily="2" charset="0"/>
+                  <a:cs typeface="Ramabhadra" panose="02000600000000000000" pitchFamily="2" charset="0"/>
+                </a:rPr>
+                <a:t>నాకెవరున్నారు నా ప్రభు</a:t>
+              </a:r>
+            </a:p>
+            <a:p>
+              <a:r>
+                <a:rPr lang="te-IN" sz="2300" dirty="0">
+                  <a:latin typeface="Ramabhadra" panose="02000600000000000000" pitchFamily="2" charset="0"/>
+                  <a:cs typeface="Ramabhadra" panose="02000600000000000000" pitchFamily="2" charset="0"/>
+                </a:rPr>
+                <a:t>స్తుతి పాత్రుడా.... ఆఆఅ</a:t>
               </a:r>
             </a:p>
             <a:p>
@@ -3543,8 +3571,12 @@
                   <a:latin typeface="Ramabhadra" panose="02000600000000000000" pitchFamily="2" charset="0"/>
                   <a:cs typeface="Ramabhadra" panose="02000600000000000000" pitchFamily="2" charset="0"/>
                 </a:rPr>
-                <a:t>నన్ను ఎంతో ప్రేమించి</a:t>
-              </a:r>
+                <a:t>నా శత్రువులు నను తరుముచుండగా –</a:t>
+              </a:r>
+              <a:endParaRPr lang="en-IN" sz="2300" dirty="0">
+                <a:latin typeface="Ramabhadra" panose="02000600000000000000" pitchFamily="2" charset="0"/>
+                <a:cs typeface="Ramabhadra" panose="02000600000000000000" pitchFamily="2" charset="0"/>
+              </a:endParaRPr>
             </a:p>
             <a:p>
               <a:r>
@@ -3552,46 +3584,15 @@
                   <a:latin typeface="Ramabhadra" panose="02000600000000000000" pitchFamily="2" charset="0"/>
                   <a:cs typeface="Ramabhadra" panose="02000600000000000000" pitchFamily="2" charset="0"/>
                 </a:rPr>
-                <a:t>నాదు పాపమె క్షమియించి</a:t>
-              </a:r>
-            </a:p>
-            <a:p>
-              <a:r>
-                <a:rPr lang="te-IN" sz="2300" dirty="0">
-                  <a:latin typeface="Ramabhadra" panose="02000600000000000000" pitchFamily="2" charset="0"/>
-                  <a:cs typeface="Ramabhadra" panose="02000600000000000000" pitchFamily="2" charset="0"/>
-                </a:rPr>
-                <a:t>కృప కనికరముల నీడలో</a:t>
-              </a:r>
-            </a:p>
-            <a:p>
-              <a:r>
-                <a:rPr lang="te-IN" sz="2300" dirty="0">
-                  <a:latin typeface="Ramabhadra" panose="02000600000000000000" pitchFamily="2" charset="0"/>
-                  <a:cs typeface="Ramabhadra" panose="02000600000000000000" pitchFamily="2" charset="0"/>
-                </a:rPr>
-                <a:t>నన్ను చేర్చిన నా ప్రభూ</a:t>
-              </a:r>
-            </a:p>
-            <a:p>
-              <a:r>
-                <a:rPr lang="te-IN" sz="2300" dirty="0">
-                  <a:latin typeface="Ramabhadra" panose="02000600000000000000" pitchFamily="2" charset="0"/>
-                  <a:cs typeface="Ramabhadra" panose="02000600000000000000" pitchFamily="2" charset="0"/>
-                </a:rPr>
-                <a:t>జీవితమంతా స్తుతియించినా</a:t>
-              </a:r>
-            </a:p>
-            <a:p>
-              <a:r>
-                <a:rPr lang="te-IN" sz="2300" dirty="0">
-                  <a:latin typeface="Ramabhadra" panose="02000600000000000000" pitchFamily="2" charset="0"/>
-                  <a:cs typeface="Ramabhadra" panose="02000600000000000000" pitchFamily="2" charset="0"/>
-                </a:rPr>
-                <a:t>తీరునా నీ ఋణం</a:t>
-              </a:r>
-            </a:p>
-            <a:p>
+                <a:t>నా యాత్మ నాలో కృంగెనే ప్రభూ </a:t>
+              </a:r>
+              <a:r>
+                <a:rPr lang="en-IN" sz="2300" dirty="0">
+                  <a:latin typeface="Ramabhadra" panose="02000600000000000000" pitchFamily="2" charset="0"/>
+                  <a:cs typeface="Ramabhadra" panose="02000600000000000000" pitchFamily="2" charset="0"/>
+                </a:rPr>
+                <a:t>(2)</a:t>
+              </a:r>
               <a:endParaRPr lang="te-IN" sz="2300" dirty="0">
                 <a:latin typeface="Ramabhadra" panose="02000600000000000000" pitchFamily="2" charset="0"/>
                 <a:cs typeface="Ramabhadra" panose="02000600000000000000" pitchFamily="2" charset="0"/>
@@ -3603,8 +3604,12 @@
                   <a:latin typeface="Ramabhadra" panose="02000600000000000000" pitchFamily="2" charset="0"/>
                   <a:cs typeface="Ramabhadra" panose="02000600000000000000" pitchFamily="2" charset="0"/>
                 </a:rPr>
-                <a:t>నీదు సన్నిధిలో కాంక్షించి</a:t>
-              </a:r>
+                <a:t>నా మనస్సు నీ వైపు త్రిప్పిన వెంటనే –</a:t>
+              </a:r>
+              <a:endParaRPr lang="en-IN" sz="2300" dirty="0">
+                <a:latin typeface="Ramabhadra" panose="02000600000000000000" pitchFamily="2" charset="0"/>
+                <a:cs typeface="Ramabhadra" panose="02000600000000000000" pitchFamily="2" charset="0"/>
+              </a:endParaRPr>
             </a:p>
             <a:p>
               <a:r>
@@ -3612,17 +3617,26 @@
                   <a:latin typeface="Ramabhadra" panose="02000600000000000000" pitchFamily="2" charset="0"/>
                   <a:cs typeface="Ramabhadra" panose="02000600000000000000" pitchFamily="2" charset="0"/>
                 </a:rPr>
-                <a:t>పాప బ్రతుకే వీడితిని</a:t>
-              </a:r>
-            </a:p>
-            <a:p>
+                <a:t>శత్రుల చేతినుండి</a:t>
+              </a:r>
+              <a:r>
+                <a:rPr lang="en-IN" sz="2300" dirty="0">
+                  <a:latin typeface="Ramabhadra" panose="02000600000000000000" pitchFamily="2" charset="0"/>
+                  <a:cs typeface="Ramabhadra" panose="02000600000000000000" pitchFamily="2" charset="0"/>
+                </a:rPr>
+                <a:t> </a:t>
+              </a:r>
               <a:r>
                 <a:rPr lang="te-IN" sz="2300" dirty="0">
                   <a:latin typeface="Ramabhadra" panose="02000600000000000000" pitchFamily="2" charset="0"/>
                   <a:cs typeface="Ramabhadra" panose="02000600000000000000" pitchFamily="2" charset="0"/>
                 </a:rPr>
-                <a:t>నీదు జీవమె నిండుగ</a:t>
-              </a:r>
+                <a:t>విడిపించినావు –</a:t>
+              </a:r>
+              <a:endParaRPr lang="en-IN" sz="2300" dirty="0">
+                <a:latin typeface="Ramabhadra" panose="02000600000000000000" pitchFamily="2" charset="0"/>
+                <a:cs typeface="Ramabhadra" panose="02000600000000000000" pitchFamily="2" charset="0"/>
+              </a:endParaRPr>
             </a:p>
             <a:p>
               <a:r>
@@ -3630,8 +3644,25 @@
                   <a:latin typeface="Ramabhadra" panose="02000600000000000000" pitchFamily="2" charset="0"/>
                   <a:cs typeface="Ramabhadra" panose="02000600000000000000" pitchFamily="2" charset="0"/>
                 </a:rPr>
-                <a:t>నాలో నింపుము నా ప్రభు</a:t>
-              </a:r>
+                <a:t>కాపాడినావు </a:t>
+              </a:r>
+              <a:r>
+                <a:rPr lang="en-IN" sz="2300" dirty="0">
+                  <a:latin typeface="Ramabhadra" panose="02000600000000000000" pitchFamily="2" charset="0"/>
+                  <a:cs typeface="Ramabhadra" panose="02000600000000000000" pitchFamily="2" charset="0"/>
+                </a:rPr>
+                <a:t>(2)</a:t>
+              </a:r>
+              <a:endParaRPr lang="te-IN" sz="2300" dirty="0">
+                <a:latin typeface="Ramabhadra" panose="02000600000000000000" pitchFamily="2" charset="0"/>
+                <a:cs typeface="Ramabhadra" panose="02000600000000000000" pitchFamily="2" charset="0"/>
+              </a:endParaRPr>
+            </a:p>
+            <a:p>
+              <a:endParaRPr lang="te-IN" sz="2300" dirty="0">
+                <a:latin typeface="Ramabhadra" panose="02000600000000000000" pitchFamily="2" charset="0"/>
+                <a:cs typeface="Ramabhadra" panose="02000600000000000000" pitchFamily="2" charset="0"/>
+              </a:endParaRPr>
             </a:p>
             <a:p>
               <a:r>
@@ -3639,8 +3670,12 @@
                   <a:latin typeface="Ramabhadra" panose="02000600000000000000" pitchFamily="2" charset="0"/>
                   <a:cs typeface="Ramabhadra" panose="02000600000000000000" pitchFamily="2" charset="0"/>
                 </a:rPr>
-                <a:t>జీవితమంతా నీ ప్రేమనూ</a:t>
-              </a:r>
+                <a:t>నా ప్రాణ స్నేహితులు నన్ను చూచి</a:t>
+              </a:r>
+              <a:endParaRPr lang="en-IN" sz="2300" dirty="0">
+                <a:latin typeface="Ramabhadra" panose="02000600000000000000" pitchFamily="2" charset="0"/>
+                <a:cs typeface="Ramabhadra" panose="02000600000000000000" pitchFamily="2" charset="0"/>
+              </a:endParaRPr>
             </a:p>
             <a:p>
               <a:r>
@@ -3648,8 +3683,75 @@
                   <a:latin typeface="Ramabhadra" panose="02000600000000000000" pitchFamily="2" charset="0"/>
                   <a:cs typeface="Ramabhadra" panose="02000600000000000000" pitchFamily="2" charset="0"/>
                 </a:rPr>
-                <a:t>చాటుచు నుందును</a:t>
-              </a:r>
+                <a:t>దూరాన నిలిచేరు నా ప్రభూ </a:t>
+              </a:r>
+              <a:r>
+                <a:rPr lang="en-IN" sz="2300" dirty="0">
+                  <a:latin typeface="Ramabhadra" panose="02000600000000000000" pitchFamily="2" charset="0"/>
+                  <a:cs typeface="Ramabhadra" panose="02000600000000000000" pitchFamily="2" charset="0"/>
+                </a:rPr>
+                <a:t>(2)</a:t>
+              </a:r>
+              <a:endParaRPr lang="te-IN" sz="2300" dirty="0">
+                <a:latin typeface="Ramabhadra" panose="02000600000000000000" pitchFamily="2" charset="0"/>
+                <a:cs typeface="Ramabhadra" panose="02000600000000000000" pitchFamily="2" charset="0"/>
+              </a:endParaRPr>
+            </a:p>
+            <a:p>
+              <a:r>
+                <a:rPr lang="te-IN" sz="2300" dirty="0">
+                  <a:latin typeface="Ramabhadra" panose="02000600000000000000" pitchFamily="2" charset="0"/>
+                  <a:cs typeface="Ramabhadra" panose="02000600000000000000" pitchFamily="2" charset="0"/>
+                </a:rPr>
+                <a:t>నీ వాక్య ధ్యానమే నా త్రోవకు వెలుగై</a:t>
+              </a:r>
+              <a:r>
+                <a:rPr lang="en-IN" sz="2300" dirty="0">
+                  <a:latin typeface="Ramabhadra" panose="02000600000000000000" pitchFamily="2" charset="0"/>
+                  <a:cs typeface="Ramabhadra" panose="02000600000000000000" pitchFamily="2" charset="0"/>
+                </a:rPr>
+                <a:t> </a:t>
+              </a:r>
+              <a:r>
+                <a:rPr lang="te-IN" sz="2300" dirty="0">
+                  <a:latin typeface="Ramabhadra" panose="02000600000000000000" pitchFamily="2" charset="0"/>
+                  <a:cs typeface="Ramabhadra" panose="02000600000000000000" pitchFamily="2" charset="0"/>
+                </a:rPr>
+                <a:t>–</a:t>
+              </a:r>
+              <a:endParaRPr lang="en-IN" sz="2300" dirty="0">
+                <a:latin typeface="Ramabhadra" panose="02000600000000000000" pitchFamily="2" charset="0"/>
+                <a:cs typeface="Ramabhadra" panose="02000600000000000000" pitchFamily="2" charset="0"/>
+              </a:endParaRPr>
+            </a:p>
+            <a:p>
+              <a:r>
+                <a:rPr lang="te-IN" sz="2300" dirty="0">
+                  <a:latin typeface="Ramabhadra" panose="02000600000000000000" pitchFamily="2" charset="0"/>
+                  <a:cs typeface="Ramabhadra" panose="02000600000000000000" pitchFamily="2" charset="0"/>
+                </a:rPr>
+                <a:t>నను నిల్పెను</a:t>
+              </a:r>
+            </a:p>
+            <a:p>
+              <a:r>
+                <a:rPr lang="te-IN" sz="2300" dirty="0">
+                  <a:latin typeface="Ramabhadra" panose="02000600000000000000" pitchFamily="2" charset="0"/>
+                  <a:cs typeface="Ramabhadra" panose="02000600000000000000" pitchFamily="2" charset="0"/>
+                </a:rPr>
+                <a:t>నీ సన్నీధిలో - నీ సంఘములో </a:t>
+              </a:r>
+              <a:r>
+                <a:rPr lang="en-IN" sz="2300" dirty="0">
+                  <a:latin typeface="Ramabhadra" panose="02000600000000000000" pitchFamily="2" charset="0"/>
+                  <a:cs typeface="Ramabhadra" panose="02000600000000000000" pitchFamily="2" charset="0"/>
+                </a:rPr>
+                <a:t>(2)</a:t>
+              </a:r>
+              <a:endParaRPr lang="te-IN" sz="2300" dirty="0">
+                <a:latin typeface="Ramabhadra" panose="02000600000000000000" pitchFamily="2" charset="0"/>
+                <a:cs typeface="Ramabhadra" panose="02000600000000000000" pitchFamily="2" charset="0"/>
+              </a:endParaRPr>
             </a:p>
           </p:txBody>
         </p:sp>
@@ -3761,9 +3863,9 @@
         <p:grpSpPr>
           <a:xfrm>
             <a:off x="160868" y="182032"/>
-            <a:ext cx="5472868" cy="6551396"/>
+            <a:ext cx="5472868" cy="6493935"/>
             <a:chOff x="160868" y="182032"/>
-            <a:chExt cx="5472868" cy="6551396"/>
+            <a:chExt cx="5472868" cy="6493935"/>
           </a:xfrm>
         </p:grpSpPr>
         <p:sp>
@@ -3836,7 +3938,7 @@
           <p:spPr>
             <a:xfrm>
               <a:off x="238125" y="208565"/>
-              <a:ext cx="5395611" cy="6524863"/>
+              <a:ext cx="5395611" cy="6463308"/>
             </a:xfrm>
             <a:prstGeom prst="rect">
               <a:avLst/>
@@ -3853,44 +3955,54 @@
                 <a:defRPr/>
               </a:pPr>
               <a:r>
-                <a:rPr lang="te-IN" sz="2200" dirty="0">
-                  <a:latin typeface="Ramabhadra" panose="02000600000000000000" pitchFamily="2" charset="0"/>
-                  <a:cs typeface="Ramabhadra" panose="02000600000000000000" pitchFamily="2" charset="0"/>
-                </a:rPr>
-                <a:t>సంవత్సరములు గతియించు చుండ –</a:t>
-              </a:r>
-            </a:p>
-            <a:p>
-              <a:pPr defTabSz="439781">
-                <a:defRPr/>
-              </a:pPr>
-              <a:r>
-                <a:rPr lang="te-IN" sz="2200" dirty="0">
-                  <a:latin typeface="Ramabhadra" panose="02000600000000000000" pitchFamily="2" charset="0"/>
-                  <a:cs typeface="Ramabhadra" panose="02000600000000000000" pitchFamily="2" charset="0"/>
-                </a:rPr>
-                <a:t>నను నూతన పరుచుము</a:t>
-              </a:r>
-            </a:p>
-            <a:p>
-              <a:pPr defTabSz="439781">
-                <a:defRPr/>
-              </a:pPr>
-              <a:r>
-                <a:rPr lang="te-IN" sz="2200" dirty="0">
-                  <a:latin typeface="Ramabhadra" panose="02000600000000000000" pitchFamily="2" charset="0"/>
-                  <a:cs typeface="Ramabhadra" panose="02000600000000000000" pitchFamily="2" charset="0"/>
-                </a:rPr>
-                <a:t>యేసయ్యా నీ రూపముకు మార్చుము </a:t>
-              </a:r>
-              <a:r>
-                <a:rPr lang="en-US" sz="2200" dirty="0">
-                  <a:latin typeface="Ramabhadra" panose="02000600000000000000" pitchFamily="2" charset="0"/>
-                  <a:cs typeface="Ramabhadra" panose="02000600000000000000" pitchFamily="2" charset="0"/>
-                </a:rPr>
-                <a:t>(2)</a:t>
-              </a:r>
-              <a:endParaRPr lang="te-IN" sz="2200" dirty="0">
+                <a:rPr lang="te-IN" sz="2300" dirty="0">
+                  <a:latin typeface="Ramabhadra" panose="02000600000000000000" pitchFamily="2" charset="0"/>
+                  <a:cs typeface="Ramabhadra" panose="02000600000000000000" pitchFamily="2" charset="0"/>
+                </a:rPr>
+                <a:t>నీ ప్రేమ ఎంతో అపారము</a:t>
+              </a:r>
+            </a:p>
+            <a:p>
+              <a:pPr defTabSz="439781">
+                <a:defRPr/>
+              </a:pPr>
+              <a:r>
+                <a:rPr lang="te-IN" sz="2300" dirty="0">
+                  <a:latin typeface="Ramabhadra" panose="02000600000000000000" pitchFamily="2" charset="0"/>
+                  <a:cs typeface="Ramabhadra" panose="02000600000000000000" pitchFamily="2" charset="0"/>
+                </a:rPr>
+                <a:t>వర్ణింపతరమా నా ప్రభూ</a:t>
+              </a:r>
+            </a:p>
+            <a:p>
+              <a:pPr defTabSz="439781">
+                <a:defRPr/>
+              </a:pPr>
+              <a:r>
+                <a:rPr lang="te-IN" sz="2300" dirty="0">
+                  <a:latin typeface="Ramabhadra" panose="02000600000000000000" pitchFamily="2" charset="0"/>
+                  <a:cs typeface="Ramabhadra" panose="02000600000000000000" pitchFamily="2" charset="0"/>
+                </a:rPr>
+                <a:t>పులకింప చేసెను నా హృది</a:t>
+              </a:r>
+            </a:p>
+            <a:p>
+              <a:pPr defTabSz="439781">
+                <a:defRPr/>
+              </a:pPr>
+              <a:r>
+                <a:rPr lang="te-IN" sz="2300" dirty="0">
+                  <a:latin typeface="Ramabhadra" panose="02000600000000000000" pitchFamily="2" charset="0"/>
+                  <a:cs typeface="Ramabhadra" panose="02000600000000000000" pitchFamily="2" charset="0"/>
+                </a:rPr>
+                <a:t>హృదయేశ్వరా నా యేసువా</a:t>
+              </a:r>
+            </a:p>
+            <a:p>
+              <a:pPr defTabSz="439781">
+                <a:defRPr/>
+              </a:pPr>
+              <a:endParaRPr lang="te-IN" sz="2300" dirty="0">
                 <a:latin typeface="Ramabhadra" panose="02000600000000000000" pitchFamily="2" charset="0"/>
                 <a:cs typeface="Ramabhadra" panose="02000600000000000000" pitchFamily="2" charset="0"/>
               </a:endParaRPr>
@@ -3900,44 +4012,78 @@
                 <a:defRPr/>
               </a:pPr>
               <a:r>
-                <a:rPr lang="te-IN" sz="2200" dirty="0">
-                  <a:latin typeface="Ramabhadra" panose="02000600000000000000" pitchFamily="2" charset="0"/>
-                  <a:cs typeface="Ramabhadra" panose="02000600000000000000" pitchFamily="2" charset="0"/>
-                </a:rPr>
-                <a:t>హిమము కంటే తెల్లగా –</a:t>
-              </a:r>
-            </a:p>
-            <a:p>
-              <a:pPr defTabSz="439781">
-                <a:defRPr/>
-              </a:pPr>
-              <a:r>
-                <a:rPr lang="te-IN" sz="2200" dirty="0">
-                  <a:latin typeface="Ramabhadra" panose="02000600000000000000" pitchFamily="2" charset="0"/>
-                  <a:cs typeface="Ramabhadra" panose="02000600000000000000" pitchFamily="2" charset="0"/>
-                </a:rPr>
-                <a:t>పరిశుద్ధపరుచుము నా రక్షకా </a:t>
-              </a:r>
-              <a:r>
-                <a:rPr lang="en-US" sz="2200" dirty="0">
-                  <a:latin typeface="Ramabhadra" panose="02000600000000000000" pitchFamily="2" charset="0"/>
-                  <a:cs typeface="Ramabhadra" panose="02000600000000000000" pitchFamily="2" charset="0"/>
-                </a:rPr>
-                <a:t>(2)</a:t>
-              </a:r>
-              <a:r>
-                <a:rPr lang="te-IN" sz="2200" dirty="0">
-                  <a:latin typeface="Ramabhadra" panose="02000600000000000000" pitchFamily="2" charset="0"/>
-                  <a:cs typeface="Ramabhadra" panose="02000600000000000000" pitchFamily="2" charset="0"/>
-                </a:rPr>
-                <a:t> </a:t>
-              </a:r>
-            </a:p>
-            <a:p>
-              <a:pPr defTabSz="439781">
-                <a:defRPr/>
-              </a:pPr>
-              <a:endParaRPr lang="te-IN" sz="2200" dirty="0">
+                <a:rPr lang="te-IN" sz="2300" dirty="0">
+                  <a:latin typeface="Ramabhadra" panose="02000600000000000000" pitchFamily="2" charset="0"/>
+                  <a:cs typeface="Ramabhadra" panose="02000600000000000000" pitchFamily="2" charset="0"/>
+                </a:rPr>
+                <a:t>నన్ను ఎంతో ప్రేమించి</a:t>
+              </a:r>
+            </a:p>
+            <a:p>
+              <a:pPr defTabSz="439781">
+                <a:defRPr/>
+              </a:pPr>
+              <a:r>
+                <a:rPr lang="te-IN" sz="2300" dirty="0">
+                  <a:latin typeface="Ramabhadra" panose="02000600000000000000" pitchFamily="2" charset="0"/>
+                  <a:cs typeface="Ramabhadra" panose="02000600000000000000" pitchFamily="2" charset="0"/>
+                </a:rPr>
+                <a:t>నాదు పాపమె క్షమియించి</a:t>
+              </a:r>
+            </a:p>
+            <a:p>
+              <a:pPr defTabSz="439781">
+                <a:defRPr/>
+              </a:pPr>
+              <a:r>
+                <a:rPr lang="te-IN" sz="2300" dirty="0">
+                  <a:latin typeface="Ramabhadra" panose="02000600000000000000" pitchFamily="2" charset="0"/>
+                  <a:cs typeface="Ramabhadra" panose="02000600000000000000" pitchFamily="2" charset="0"/>
+                </a:rPr>
+                <a:t>కృప కనికరముల నీడలో</a:t>
+              </a:r>
+            </a:p>
+            <a:p>
+              <a:pPr defTabSz="439781">
+                <a:defRPr/>
+              </a:pPr>
+              <a:r>
+                <a:rPr lang="te-IN" sz="2300" dirty="0">
+                  <a:latin typeface="Ramabhadra" panose="02000600000000000000" pitchFamily="2" charset="0"/>
+                  <a:cs typeface="Ramabhadra" panose="02000600000000000000" pitchFamily="2" charset="0"/>
+                </a:rPr>
+                <a:t>నన్ను చేర్చిన నా ప్రభూ</a:t>
+              </a:r>
+            </a:p>
+            <a:p>
+              <a:pPr defTabSz="439781">
+                <a:defRPr/>
+              </a:pPr>
+              <a:r>
+                <a:rPr lang="te-IN" sz="2300" dirty="0">
+                  <a:latin typeface="Ramabhadra" panose="02000600000000000000" pitchFamily="2" charset="0"/>
+                  <a:cs typeface="Ramabhadra" panose="02000600000000000000" pitchFamily="2" charset="0"/>
+                </a:rPr>
+                <a:t>జీవితమంతా స్తుతియించినా</a:t>
+              </a:r>
+            </a:p>
+            <a:p>
+              <a:pPr defTabSz="439781">
+                <a:defRPr/>
+              </a:pPr>
+              <a:r>
+                <a:rPr lang="te-IN" sz="2300" dirty="0">
+                  <a:latin typeface="Ramabhadra" panose="02000600000000000000" pitchFamily="2" charset="0"/>
+                  <a:cs typeface="Ramabhadra" panose="02000600000000000000" pitchFamily="2" charset="0"/>
+                </a:rPr>
+                <a:t>తీరునా నీ ఋణం</a:t>
+              </a:r>
+            </a:p>
+            <a:p>
+              <a:pPr defTabSz="439781">
+                <a:defRPr/>
+              </a:pPr>
+              <a:endParaRPr lang="te-IN" sz="2300" dirty="0">
                 <a:latin typeface="Ramabhadra" panose="02000600000000000000" pitchFamily="2" charset="0"/>
                 <a:cs typeface="Ramabhadra" panose="02000600000000000000" pitchFamily="2" charset="0"/>
               </a:endParaRPr>
@@ -3947,189 +4093,72 @@
                 <a:defRPr/>
               </a:pPr>
               <a:r>
-                <a:rPr lang="te-IN" sz="2200" dirty="0">
-                  <a:latin typeface="Ramabhadra" panose="02000600000000000000" pitchFamily="2" charset="0"/>
-                  <a:cs typeface="Ramabhadra" panose="02000600000000000000" pitchFamily="2" charset="0"/>
-                </a:rPr>
-                <a:t>దినదినంబు నీకు సమీపమై –</a:t>
-              </a:r>
-            </a:p>
-            <a:p>
-              <a:pPr defTabSz="439781">
-                <a:defRPr/>
-              </a:pPr>
-              <a:r>
-                <a:rPr lang="te-IN" sz="2200" dirty="0">
-                  <a:latin typeface="Ramabhadra" panose="02000600000000000000" pitchFamily="2" charset="0"/>
-                  <a:cs typeface="Ramabhadra" panose="02000600000000000000" pitchFamily="2" charset="0"/>
-                </a:rPr>
-                <a:t>ప్రతి క్షణం నా సిలువను మోయుచు</a:t>
-              </a:r>
-            </a:p>
-            <a:p>
-              <a:pPr defTabSz="439781">
-                <a:defRPr/>
-              </a:pPr>
-              <a:r>
-                <a:rPr lang="te-IN" sz="2200" dirty="0">
-                  <a:latin typeface="Ramabhadra" panose="02000600000000000000" pitchFamily="2" charset="0"/>
-                  <a:cs typeface="Ramabhadra" panose="02000600000000000000" pitchFamily="2" charset="0"/>
-                </a:rPr>
-                <a:t>వెనుకకు  చూడకనే నేను సాగెదను-</a:t>
-              </a:r>
-            </a:p>
-            <a:p>
-              <a:pPr defTabSz="439781">
-                <a:defRPr/>
-              </a:pPr>
-              <a:r>
-                <a:rPr lang="te-IN" sz="2200" dirty="0">
-                  <a:latin typeface="Ramabhadra" panose="02000600000000000000" pitchFamily="2" charset="0"/>
-                  <a:cs typeface="Ramabhadra" panose="02000600000000000000" pitchFamily="2" charset="0"/>
-                </a:rPr>
-                <a:t>శిలువను చూచుచునే గురిని చేరెదను</a:t>
-              </a:r>
-            </a:p>
-            <a:p>
-              <a:pPr defTabSz="439781">
-                <a:defRPr/>
-              </a:pPr>
-              <a:r>
-                <a:rPr lang="te-IN" sz="2200" dirty="0">
-                  <a:latin typeface="Ramabhadra" panose="02000600000000000000" pitchFamily="2" charset="0"/>
-                  <a:cs typeface="Ramabhadra" panose="02000600000000000000" pitchFamily="2" charset="0"/>
-                </a:rPr>
-                <a:t>నీ ఆత్మతో నను నింపుమా –</a:t>
-              </a:r>
-            </a:p>
-            <a:p>
-              <a:pPr defTabSz="439781">
-                <a:defRPr/>
-              </a:pPr>
-              <a:r>
-                <a:rPr lang="te-IN" sz="2200" dirty="0">
-                  <a:latin typeface="Ramabhadra" panose="02000600000000000000" pitchFamily="2" charset="0"/>
-                  <a:cs typeface="Ramabhadra" panose="02000600000000000000" pitchFamily="2" charset="0"/>
-                </a:rPr>
-                <a:t>నీ సేవజేతును స్థిరపరచుమా</a:t>
-              </a:r>
-              <a:r>
-                <a:rPr lang="en-US" sz="2200" dirty="0">
-                  <a:latin typeface="Ramabhadra" panose="02000600000000000000" pitchFamily="2" charset="0"/>
-                  <a:cs typeface="Ramabhadra" panose="02000600000000000000" pitchFamily="2" charset="0"/>
-                </a:rPr>
-                <a:t> (2)</a:t>
-              </a:r>
-              <a:endParaRPr lang="te-IN" sz="2200" dirty="0">
-                <a:latin typeface="Ramabhadra" panose="02000600000000000000" pitchFamily="2" charset="0"/>
-                <a:cs typeface="Ramabhadra" panose="02000600000000000000" pitchFamily="2" charset="0"/>
-              </a:endParaRPr>
-            </a:p>
-            <a:p>
-              <a:pPr defTabSz="439781">
-                <a:defRPr/>
-              </a:pPr>
-              <a:endParaRPr lang="te-IN" sz="2200" dirty="0">
-                <a:latin typeface="Ramabhadra" panose="02000600000000000000" pitchFamily="2" charset="0"/>
-                <a:cs typeface="Ramabhadra" panose="02000600000000000000" pitchFamily="2" charset="0"/>
-              </a:endParaRPr>
-            </a:p>
-            <a:p>
-              <a:pPr defTabSz="439781">
-                <a:defRPr/>
-              </a:pPr>
-              <a:r>
-                <a:rPr lang="te-IN" sz="2200" dirty="0">
-                  <a:latin typeface="Ramabhadra" panose="02000600000000000000" pitchFamily="2" charset="0"/>
-                  <a:cs typeface="Ramabhadra" panose="02000600000000000000" pitchFamily="2" charset="0"/>
-                </a:rPr>
-                <a:t>నూత్న మనస్సు </a:t>
-              </a:r>
-              <a:r>
-                <a:rPr lang="en-US" sz="2200" dirty="0">
-                  <a:latin typeface="Ramabhadra" panose="02000600000000000000" pitchFamily="2" charset="0"/>
-                  <a:cs typeface="Ramabhadra" panose="02000600000000000000" pitchFamily="2" charset="0"/>
-                </a:rPr>
-                <a:t>-</a:t>
-              </a:r>
-              <a:r>
-                <a:rPr lang="te-IN" sz="2200" dirty="0">
-                  <a:latin typeface="Ramabhadra" panose="02000600000000000000" pitchFamily="2" charset="0"/>
-                  <a:cs typeface="Ramabhadra" panose="02000600000000000000" pitchFamily="2" charset="0"/>
-                </a:rPr>
-                <a:t> నూత్న ఆత్మను</a:t>
-              </a:r>
-            </a:p>
-            <a:p>
-              <a:pPr defTabSz="439781">
-                <a:defRPr/>
-              </a:pPr>
-              <a:r>
-                <a:rPr lang="te-IN" sz="2200" dirty="0">
-                  <a:latin typeface="Ramabhadra" panose="02000600000000000000" pitchFamily="2" charset="0"/>
-                  <a:cs typeface="Ramabhadra" panose="02000600000000000000" pitchFamily="2" charset="0"/>
-                </a:rPr>
-                <a:t>- నూత్నజీవమును నింపుము దేవా</a:t>
-              </a:r>
-            </a:p>
-            <a:p>
-              <a:pPr defTabSz="439781">
-                <a:defRPr/>
-              </a:pPr>
-              <a:r>
-                <a:rPr lang="te-IN" sz="2200" dirty="0">
-                  <a:latin typeface="Ramabhadra" panose="02000600000000000000" pitchFamily="2" charset="0"/>
-                  <a:cs typeface="Ramabhadra" panose="02000600000000000000" pitchFamily="2" charset="0"/>
-                </a:rPr>
-                <a:t>రాతిగుండెనే మార్చు యేసయ్యా –</a:t>
-              </a:r>
-            </a:p>
-            <a:p>
-              <a:pPr defTabSz="439781">
-                <a:defRPr/>
-              </a:pPr>
-              <a:r>
-                <a:rPr lang="te-IN" sz="2200" dirty="0">
-                  <a:latin typeface="Ramabhadra" panose="02000600000000000000" pitchFamily="2" charset="0"/>
-                  <a:cs typeface="Ramabhadra" panose="02000600000000000000" pitchFamily="2" charset="0"/>
-                </a:rPr>
-                <a:t>మాంసపు గుండెనే అమర్చుమో దేవా</a:t>
-              </a:r>
-            </a:p>
-            <a:p>
-              <a:pPr defTabSz="439781">
-                <a:defRPr/>
-              </a:pPr>
-              <a:r>
-                <a:rPr lang="te-IN" sz="2200" dirty="0">
-                  <a:latin typeface="Ramabhadra" panose="02000600000000000000" pitchFamily="2" charset="0"/>
-                  <a:cs typeface="Ramabhadra" panose="02000600000000000000" pitchFamily="2" charset="0"/>
-                </a:rPr>
-                <a:t>నీ హృదయము నాకిమ్మయ్యా –</a:t>
-              </a:r>
-            </a:p>
-            <a:p>
-              <a:pPr defTabSz="439781">
-                <a:defRPr/>
-              </a:pPr>
-              <a:r>
-                <a:rPr lang="te-IN" sz="2200" dirty="0">
-                  <a:latin typeface="Ramabhadra" panose="02000600000000000000" pitchFamily="2" charset="0"/>
-                  <a:cs typeface="Ramabhadra" panose="02000600000000000000" pitchFamily="2" charset="0"/>
-                </a:rPr>
-                <a:t>లోకాన్ని నీకై సంపాదించెదా</a:t>
-              </a:r>
-              <a:r>
-                <a:rPr lang="en-US" sz="2200" dirty="0">
-                  <a:latin typeface="Ramabhadra" panose="02000600000000000000" pitchFamily="2" charset="0"/>
-                  <a:cs typeface="Ramabhadra" panose="02000600000000000000" pitchFamily="2" charset="0"/>
-                </a:rPr>
-                <a:t> (2)</a:t>
-              </a:r>
-              <a:endParaRPr lang="te-IN" sz="2200" dirty="0">
-                <a:latin typeface="Ramabhadra" panose="02000600000000000000" pitchFamily="2" charset="0"/>
-                <a:cs typeface="Ramabhadra" panose="02000600000000000000" pitchFamily="2" charset="0"/>
-              </a:endParaRPr>
+                <a:rPr lang="te-IN" sz="2300" dirty="0">
+                  <a:latin typeface="Ramabhadra" panose="02000600000000000000" pitchFamily="2" charset="0"/>
+                  <a:cs typeface="Ramabhadra" panose="02000600000000000000" pitchFamily="2" charset="0"/>
+                </a:rPr>
+                <a:t>నీదు సన్నిధిలో కాంక్షించి</a:t>
+              </a:r>
+            </a:p>
+            <a:p>
+              <a:pPr defTabSz="439781">
+                <a:defRPr/>
+              </a:pPr>
+              <a:r>
+                <a:rPr lang="te-IN" sz="2300" dirty="0">
+                  <a:latin typeface="Ramabhadra" panose="02000600000000000000" pitchFamily="2" charset="0"/>
+                  <a:cs typeface="Ramabhadra" panose="02000600000000000000" pitchFamily="2" charset="0"/>
+                </a:rPr>
+                <a:t>పాప బ్రతుకే వీడితిని</a:t>
+              </a:r>
+            </a:p>
+            <a:p>
+              <a:pPr defTabSz="439781">
+                <a:defRPr/>
+              </a:pPr>
+              <a:r>
+                <a:rPr lang="te-IN" sz="2300" dirty="0">
+                  <a:latin typeface="Ramabhadra" panose="02000600000000000000" pitchFamily="2" charset="0"/>
+                  <a:cs typeface="Ramabhadra" panose="02000600000000000000" pitchFamily="2" charset="0"/>
+                </a:rPr>
+                <a:t>నీదు జీవమె నిండుగ</a:t>
+              </a:r>
+            </a:p>
+            <a:p>
+              <a:pPr defTabSz="439781">
+                <a:defRPr/>
+              </a:pPr>
+              <a:r>
+                <a:rPr lang="te-IN" sz="2300" dirty="0">
+                  <a:latin typeface="Ramabhadra" panose="02000600000000000000" pitchFamily="2" charset="0"/>
+                  <a:cs typeface="Ramabhadra" panose="02000600000000000000" pitchFamily="2" charset="0"/>
+                </a:rPr>
+                <a:t>నాలో నింపుము నా ప్రభు</a:t>
+              </a:r>
+            </a:p>
+            <a:p>
+              <a:pPr defTabSz="439781">
+                <a:defRPr/>
+              </a:pPr>
+              <a:r>
+                <a:rPr lang="te-IN" sz="2300" dirty="0">
+                  <a:latin typeface="Ramabhadra" panose="02000600000000000000" pitchFamily="2" charset="0"/>
+                  <a:cs typeface="Ramabhadra" panose="02000600000000000000" pitchFamily="2" charset="0"/>
+                </a:rPr>
+                <a:t>జీవితమంతా నీ ప్రేమనూ</a:t>
+              </a:r>
+            </a:p>
+            <a:p>
+              <a:pPr defTabSz="439781">
+                <a:defRPr/>
+              </a:pPr>
+              <a:r>
+                <a:rPr lang="te-IN" sz="2300" dirty="0">
+                  <a:latin typeface="Ramabhadra" panose="02000600000000000000" pitchFamily="2" charset="0"/>
+                  <a:cs typeface="Ramabhadra" panose="02000600000000000000" pitchFamily="2" charset="0"/>
+                </a:rPr>
+                <a:t>చాటుచు నుందును</a:t>
+              </a:r>
             </a:p>
           </p:txBody>
         </p:sp>
@@ -4307,7 +4336,7 @@
                   <a:latin typeface="Ramabhadra" panose="02000600000000000000" pitchFamily="2" charset="0"/>
                   <a:cs typeface="Ramabhadra" panose="02000600000000000000" pitchFamily="2" charset="0"/>
                 </a:rPr>
-                <a:t>స్తుతులన్ గైకొనుమా</a:t>
+                <a:t>సంఘమా - క్రైస్తవ సంఘమా</a:t>
               </a:r>
             </a:p>
             <a:p>
@@ -4319,7 +4348,7 @@
                   <a:latin typeface="Ramabhadra" panose="02000600000000000000" pitchFamily="2" charset="0"/>
                   <a:cs typeface="Ramabhadra" panose="02000600000000000000" pitchFamily="2" charset="0"/>
                 </a:rPr>
-                <a:t>సుత యేసు క్రీస్తువా</a:t>
+                <a:t>యేసునే పోలి నడువుమా –</a:t>
               </a:r>
             </a:p>
             <a:p>
@@ -4331,19 +4360,7 @@
                   <a:latin typeface="Ramabhadra" panose="02000600000000000000" pitchFamily="2" charset="0"/>
                   <a:cs typeface="Ramabhadra" panose="02000600000000000000" pitchFamily="2" charset="0"/>
                 </a:rPr>
-                <a:t>సతతము మమ్ములను </a:t>
-              </a:r>
-            </a:p>
-            <a:p>
-              <a:pPr defTabSz="439781">
-                <a:defRPr/>
-              </a:pPr>
-              <a:r>
-                <a:rPr lang="te-IN" sz="2100" dirty="0">
-                  <a:latin typeface="Ramabhadra" panose="02000600000000000000" pitchFamily="2" charset="0"/>
-                  <a:cs typeface="Ramabhadra" panose="02000600000000000000" pitchFamily="2" charset="0"/>
-                </a:rPr>
-                <a:t>కృపనిడి కావుమా</a:t>
+                <a:t>క్రీస్తు మనసు కలిగియుండుమా</a:t>
               </a:r>
             </a:p>
             <a:p>
@@ -4364,7 +4381,7 @@
                   <a:latin typeface="Ramabhadra" panose="02000600000000000000" pitchFamily="2" charset="0"/>
                   <a:cs typeface="Ramabhadra" panose="02000600000000000000" pitchFamily="2" charset="0"/>
                 </a:rPr>
-                <a:t>మా పెదవులతో ఎప్పుడు నీ</a:t>
+                <a:t>ఆది సంఘము మోకరిల్లగ</a:t>
               </a:r>
             </a:p>
             <a:p>
@@ -4376,7 +4393,7 @@
                   <a:latin typeface="Ramabhadra" panose="02000600000000000000" pitchFamily="2" charset="0"/>
                   <a:cs typeface="Ramabhadra" panose="02000600000000000000" pitchFamily="2" charset="0"/>
                 </a:rPr>
-                <a:t>వాక్యమును పఠింప నిమ్ము</a:t>
+                <a:t>చెరసాల తలుపులు - బ్రద్ధలాయెను</a:t>
               </a:r>
             </a:p>
             <a:p>
@@ -4388,7 +4405,7 @@
                   <a:latin typeface="Ramabhadra" panose="02000600000000000000" pitchFamily="2" charset="0"/>
                   <a:cs typeface="Ramabhadra" panose="02000600000000000000" pitchFamily="2" charset="0"/>
                 </a:rPr>
-                <a:t>మా కాలు చేతులు ఎప్పుడు నీ </a:t>
+                <a:t>ప్రధమ సంఘము - ప్రార్థింపగ</a:t>
               </a:r>
             </a:p>
             <a:p>
@@ -4400,7 +4417,43 @@
                   <a:latin typeface="Ramabhadra" panose="02000600000000000000" pitchFamily="2" charset="0"/>
                   <a:cs typeface="Ramabhadra" panose="02000600000000000000" pitchFamily="2" charset="0"/>
                 </a:rPr>
-                <a:t>సేవను చేయను వాడనిమ్ము </a:t>
+                <a:t>పరిశుద్ధ  ఆత్మయే – భువికేగెను (2)</a:t>
+              </a:r>
+            </a:p>
+            <a:p>
+              <a:pPr defTabSz="439781">
+                <a:defRPr/>
+              </a:pPr>
+              <a:r>
+                <a:rPr lang="te-IN" sz="2100" dirty="0">
+                  <a:latin typeface="Ramabhadra" panose="02000600000000000000" pitchFamily="2" charset="0"/>
+                  <a:cs typeface="Ramabhadra" panose="02000600000000000000" pitchFamily="2" charset="0"/>
+                </a:rPr>
+                <a:t>ఆనాటి విజ్ఞాపన - ఏమాయెను</a:t>
+              </a:r>
+            </a:p>
+            <a:p>
+              <a:pPr defTabSz="439781">
+                <a:defRPr/>
+              </a:pPr>
+              <a:r>
+                <a:rPr lang="te-IN" sz="2100" dirty="0">
+                  <a:latin typeface="Ramabhadra" panose="02000600000000000000" pitchFamily="2" charset="0"/>
+                  <a:cs typeface="Ramabhadra" panose="02000600000000000000" pitchFamily="2" charset="0"/>
+                </a:rPr>
+                <a:t>ఈనాడు అద్భుతాలు కొదువాయెను</a:t>
+              </a:r>
+            </a:p>
+            <a:p>
+              <a:pPr defTabSz="439781">
+                <a:defRPr/>
+              </a:pPr>
+              <a:r>
+                <a:rPr lang="te-IN" sz="2100" dirty="0">
+                  <a:latin typeface="Ramabhadra" panose="02000600000000000000" pitchFamily="2" charset="0"/>
+                  <a:cs typeface="Ramabhadra" panose="02000600000000000000" pitchFamily="2" charset="0"/>
+                </a:rPr>
+                <a:t>మేలుకో లెమ్ము తేజరిల్లుమా</a:t>
               </a:r>
             </a:p>
             <a:p>
@@ -4421,7 +4474,7 @@
                   <a:latin typeface="Ramabhadra" panose="02000600000000000000" pitchFamily="2" charset="0"/>
                   <a:cs typeface="Ramabhadra" panose="02000600000000000000" pitchFamily="2" charset="0"/>
                 </a:rPr>
-                <a:t>మా కలిమియు పదవుల నెల్ల </a:t>
+                <a:t>క్రియలు లేని నీ - విశ్వాసము</a:t>
               </a:r>
             </a:p>
             <a:p>
@@ -4433,7 +4486,7 @@
                   <a:latin typeface="Ramabhadra" panose="02000600000000000000" pitchFamily="2" charset="0"/>
                   <a:cs typeface="Ramabhadra" panose="02000600000000000000" pitchFamily="2" charset="0"/>
                 </a:rPr>
-                <a:t>నీ శుద్ధ కృపచే పొందితిమి </a:t>
+                <a:t>మ్రుతమైనది - అది కొరకానిది</a:t>
               </a:r>
             </a:p>
             <a:p>
@@ -4445,7 +4498,7 @@
                   <a:latin typeface="Ramabhadra" panose="02000600000000000000" pitchFamily="2" charset="0"/>
                   <a:cs typeface="Ramabhadra" panose="02000600000000000000" pitchFamily="2" charset="0"/>
                 </a:rPr>
-                <a:t>మా కాలమంతయు జీవింప </a:t>
+                <a:t>శక్తి లేని నీ - భక్తి మొత్తము</a:t>
               </a:r>
             </a:p>
             <a:p>
@@ -4457,17 +4510,8 @@
                   <a:latin typeface="Ramabhadra" panose="02000600000000000000" pitchFamily="2" charset="0"/>
                   <a:cs typeface="Ramabhadra" panose="02000600000000000000" pitchFamily="2" charset="0"/>
                 </a:rPr>
-                <a:t>నిలకడగ నుండ దీవించుము</a:t>
-              </a:r>
-            </a:p>
-            <a:p>
-              <a:pPr defTabSz="439781">
-                <a:defRPr/>
-              </a:pPr>
-              <a:endParaRPr lang="te-IN" sz="2100" dirty="0">
-                <a:latin typeface="Ramabhadra" panose="02000600000000000000" pitchFamily="2" charset="0"/>
-                <a:cs typeface="Ramabhadra" panose="02000600000000000000" pitchFamily="2" charset="0"/>
-              </a:endParaRPr>
+                <a:t>వ్యర్థమైనది అది మేలు చేయదు (2)</a:t>
+              </a:r>
             </a:p>
             <a:p>
               <a:pPr defTabSz="439781">
@@ -4478,7 +4522,7 @@
                   <a:latin typeface="Ramabhadra" panose="02000600000000000000" pitchFamily="2" charset="0"/>
                   <a:cs typeface="Ramabhadra" panose="02000600000000000000" pitchFamily="2" charset="0"/>
                 </a:rPr>
-                <a:t>నిజ విశ్వాసములో నెదుగ</a:t>
+                <a:t>నామకార్ధమును విడిచి నమ్మీ చూడుము</a:t>
               </a:r>
             </a:p>
             <a:p>
@@ -4490,7 +4534,7 @@
                   <a:latin typeface="Ramabhadra" panose="02000600000000000000" pitchFamily="2" charset="0"/>
                   <a:cs typeface="Ramabhadra" panose="02000600000000000000" pitchFamily="2" charset="0"/>
                 </a:rPr>
-                <a:t>నిశ్భల బుద్దిని మా కొసగి</a:t>
+                <a:t>యదార్థమైన మనసును ఆశించుము</a:t>
               </a:r>
             </a:p>
             <a:p>
@@ -4502,19 +4546,7 @@
                   <a:latin typeface="Ramabhadra" panose="02000600000000000000" pitchFamily="2" charset="0"/>
                   <a:cs typeface="Ramabhadra" panose="02000600000000000000" pitchFamily="2" charset="0"/>
                 </a:rPr>
-                <a:t>నిరతము నీ సేవ చేయుటకు</a:t>
-              </a:r>
-            </a:p>
-            <a:p>
-              <a:pPr defTabSz="439781">
-                <a:defRPr/>
-              </a:pPr>
-              <a:r>
-                <a:rPr lang="te-IN" sz="2100" dirty="0">
-                  <a:latin typeface="Ramabhadra" panose="02000600000000000000" pitchFamily="2" charset="0"/>
-                  <a:cs typeface="Ramabhadra" panose="02000600000000000000" pitchFamily="2" charset="0"/>
-                </a:rPr>
-                <a:t>నీ ఆత్మ శక్తితో నింపుమయా </a:t>
+                <a:t>మేలుకో లెమ్ము తేజరిల్లుమా</a:t>
               </a:r>
             </a:p>
           </p:txBody>

--- a/songsTemplate.pptx
+++ b/songsTemplate.pptx
@@ -255,7 +255,7 @@
           <a:p>
             <a:fld id="{F1102B08-ED9E-409F-B95F-09CAA1DAF6E0}" type="datetimeFigureOut">
               <a:rPr lang="en-IN" smtClean="0"/>
-              <a:t>18-01-2025</a:t>
+              <a:t>25-01-2025</a:t>
             </a:fld>
             <a:endParaRPr lang="en-IN"/>
           </a:p>
@@ -425,7 +425,7 @@
           <a:p>
             <a:fld id="{F1102B08-ED9E-409F-B95F-09CAA1DAF6E0}" type="datetimeFigureOut">
               <a:rPr lang="en-IN" smtClean="0"/>
-              <a:t>18-01-2025</a:t>
+              <a:t>25-01-2025</a:t>
             </a:fld>
             <a:endParaRPr lang="en-IN"/>
           </a:p>
@@ -605,7 +605,7 @@
           <a:p>
             <a:fld id="{F1102B08-ED9E-409F-B95F-09CAA1DAF6E0}" type="datetimeFigureOut">
               <a:rPr lang="en-IN" smtClean="0"/>
-              <a:t>18-01-2025</a:t>
+              <a:t>25-01-2025</a:t>
             </a:fld>
             <a:endParaRPr lang="en-IN"/>
           </a:p>
@@ -775,7 +775,7 @@
           <a:p>
             <a:fld id="{F1102B08-ED9E-409F-B95F-09CAA1DAF6E0}" type="datetimeFigureOut">
               <a:rPr lang="en-IN" smtClean="0"/>
-              <a:t>18-01-2025</a:t>
+              <a:t>25-01-2025</a:t>
             </a:fld>
             <a:endParaRPr lang="en-IN"/>
           </a:p>
@@ -1019,7 +1019,7 @@
           <a:p>
             <a:fld id="{F1102B08-ED9E-409F-B95F-09CAA1DAF6E0}" type="datetimeFigureOut">
               <a:rPr lang="en-IN" smtClean="0"/>
-              <a:t>18-01-2025</a:t>
+              <a:t>25-01-2025</a:t>
             </a:fld>
             <a:endParaRPr lang="en-IN"/>
           </a:p>
@@ -1251,7 +1251,7 @@
           <a:p>
             <a:fld id="{F1102B08-ED9E-409F-B95F-09CAA1DAF6E0}" type="datetimeFigureOut">
               <a:rPr lang="en-IN" smtClean="0"/>
-              <a:t>18-01-2025</a:t>
+              <a:t>25-01-2025</a:t>
             </a:fld>
             <a:endParaRPr lang="en-IN"/>
           </a:p>
@@ -1618,7 +1618,7 @@
           <a:p>
             <a:fld id="{F1102B08-ED9E-409F-B95F-09CAA1DAF6E0}" type="datetimeFigureOut">
               <a:rPr lang="en-IN" smtClean="0"/>
-              <a:t>18-01-2025</a:t>
+              <a:t>25-01-2025</a:t>
             </a:fld>
             <a:endParaRPr lang="en-IN"/>
           </a:p>
@@ -1736,7 +1736,7 @@
           <a:p>
             <a:fld id="{F1102B08-ED9E-409F-B95F-09CAA1DAF6E0}" type="datetimeFigureOut">
               <a:rPr lang="en-IN" smtClean="0"/>
-              <a:t>18-01-2025</a:t>
+              <a:t>25-01-2025</a:t>
             </a:fld>
             <a:endParaRPr lang="en-IN"/>
           </a:p>
@@ -1831,7 +1831,7 @@
           <a:p>
             <a:fld id="{F1102B08-ED9E-409F-B95F-09CAA1DAF6E0}" type="datetimeFigureOut">
               <a:rPr lang="en-IN" smtClean="0"/>
-              <a:t>18-01-2025</a:t>
+              <a:t>25-01-2025</a:t>
             </a:fld>
             <a:endParaRPr lang="en-IN"/>
           </a:p>
@@ -2108,7 +2108,7 @@
           <a:p>
             <a:fld id="{F1102B08-ED9E-409F-B95F-09CAA1DAF6E0}" type="datetimeFigureOut">
               <a:rPr lang="en-IN" smtClean="0"/>
-              <a:t>18-01-2025</a:t>
+              <a:t>25-01-2025</a:t>
             </a:fld>
             <a:endParaRPr lang="en-IN"/>
           </a:p>
@@ -2365,7 +2365,7 @@
           <a:p>
             <a:fld id="{F1102B08-ED9E-409F-B95F-09CAA1DAF6E0}" type="datetimeFigureOut">
               <a:rPr lang="en-IN" smtClean="0"/>
-              <a:t>18-01-2025</a:t>
+              <a:t>25-01-2025</a:t>
             </a:fld>
             <a:endParaRPr lang="en-IN"/>
           </a:p>
@@ -2578,7 +2578,7 @@
           <a:p>
             <a:fld id="{F1102B08-ED9E-409F-B95F-09CAA1DAF6E0}" type="datetimeFigureOut">
               <a:rPr lang="en-IN" smtClean="0"/>
-              <a:t>18-01-2025</a:t>
+              <a:t>25-01-2025</a:t>
             </a:fld>
             <a:endParaRPr lang="en-IN"/>
           </a:p>
@@ -2997,10 +2997,10 @@
         </p:nvGrpSpPr>
         <p:grpSpPr>
           <a:xfrm>
-            <a:off x="160868" y="182031"/>
-            <a:ext cx="4648200" cy="6524863"/>
-            <a:chOff x="160868" y="182031"/>
-            <a:chExt cx="4648200" cy="6524863"/>
+            <a:off x="160868" y="182032"/>
+            <a:ext cx="4648200" cy="6493935"/>
+            <a:chOff x="160868" y="182032"/>
+            <a:chExt cx="4648200" cy="6493935"/>
           </a:xfrm>
         </p:grpSpPr>
         <p:sp>
@@ -3072,8 +3072,8 @@
           </p:nvSpPr>
           <p:spPr>
             <a:xfrm>
-              <a:off x="243398" y="182031"/>
-              <a:ext cx="4483140" cy="6524863"/>
+              <a:off x="325928" y="716954"/>
+              <a:ext cx="4483140" cy="4893647"/>
             </a:xfrm>
             <a:prstGeom prst="rect">
               <a:avLst/>
@@ -3090,11 +3090,11 @@
                 <a:defRPr/>
               </a:pPr>
               <a:r>
-                <a:rPr lang="te-IN" sz="2200" dirty="0">
-                  <a:latin typeface="Ramabhadra" panose="02000600000000000000" pitchFamily="2" charset="0"/>
-                  <a:cs typeface="Ramabhadra" panose="02000600000000000000" pitchFamily="2" charset="0"/>
-                </a:rPr>
-                <a:t>మంచి దేవుడు భలే మంచి దేవుడు</a:t>
+                <a:rPr lang="te-IN" sz="2400" dirty="0">
+                  <a:latin typeface="Ramabhadra" panose="02000600000000000000" pitchFamily="2" charset="0"/>
+                  <a:cs typeface="Ramabhadra" panose="02000600000000000000" pitchFamily="2" charset="0"/>
+                </a:rPr>
+                <a:t>సన్నుతించెదను - దయాళుడవు నీవని</a:t>
               </a:r>
             </a:p>
             <a:p>
@@ -3102,18 +3102,18 @@
                 <a:defRPr/>
               </a:pPr>
               <a:r>
-                <a:rPr lang="te-IN" sz="2200" dirty="0">
-                  <a:latin typeface="Ramabhadra" panose="02000600000000000000" pitchFamily="2" charset="0"/>
-                  <a:cs typeface="Ramabhadra" panose="02000600000000000000" pitchFamily="2" charset="0"/>
-                </a:rPr>
-                <a:t>నిజ దైవం యేసు - అద్వితీయ దేవుడు</a:t>
+                <a:rPr lang="te-IN" sz="2400" dirty="0">
+                  <a:latin typeface="Ramabhadra" panose="02000600000000000000" pitchFamily="2" charset="0"/>
+                  <a:cs typeface="Ramabhadra" panose="02000600000000000000" pitchFamily="2" charset="0"/>
+                </a:rPr>
+                <a:t>యెహోవా నీవే దయాళుడవని నిను సన్నుతించెదను - 2</a:t>
               </a:r>
             </a:p>
             <a:p>
               <a:pPr defTabSz="439781">
                 <a:defRPr/>
               </a:pPr>
-              <a:endParaRPr lang="te-IN" sz="2200" dirty="0">
+              <a:endParaRPr lang="te-IN" sz="2400" dirty="0">
                 <a:latin typeface="Ramabhadra" panose="02000600000000000000" pitchFamily="2" charset="0"/>
                 <a:cs typeface="Ramabhadra" panose="02000600000000000000" pitchFamily="2" charset="0"/>
               </a:endParaRPr>
@@ -3123,61 +3123,27 @@
                 <a:defRPr/>
               </a:pPr>
               <a:r>
-                <a:rPr lang="te-IN" sz="2200" dirty="0">
-                  <a:latin typeface="Ramabhadra" panose="02000600000000000000" pitchFamily="2" charset="0"/>
-                  <a:cs typeface="Ramabhadra" panose="02000600000000000000" pitchFamily="2" charset="0"/>
-                </a:rPr>
-                <a:t>మ్రొక్కులను కోరడు - మనసిస్తే చాలును</a:t>
-              </a:r>
-            </a:p>
-            <a:p>
-              <a:pPr defTabSz="439781">
-                <a:defRPr/>
-              </a:pPr>
-              <a:r>
-                <a:rPr lang="te-IN" sz="2200" dirty="0">
-                  <a:latin typeface="Ramabhadra" panose="02000600000000000000" pitchFamily="2" charset="0"/>
-                  <a:cs typeface="Ramabhadra" panose="02000600000000000000" pitchFamily="2" charset="0"/>
-                </a:rPr>
-                <a:t>కొండలెక్కి రమ్మనడు - మనలో కొలువుంటాడు</a:t>
-              </a:r>
-            </a:p>
-            <a:p>
-              <a:pPr defTabSz="439781">
-                <a:defRPr/>
-              </a:pPr>
-              <a:r>
-                <a:rPr lang="te-IN" sz="2200" dirty="0">
-                  <a:latin typeface="Ramabhadra" panose="02000600000000000000" pitchFamily="2" charset="0"/>
-                  <a:cs typeface="Ramabhadra" panose="02000600000000000000" pitchFamily="2" charset="0"/>
-                </a:rPr>
-                <a:t>వెదికితే ప్రతి వారికి - దొరికేను యేసు</a:t>
-              </a:r>
-            </a:p>
-            <a:p>
-              <a:pPr defTabSz="439781">
-                <a:defRPr/>
-              </a:pPr>
-              <a:r>
-                <a:rPr lang="te-IN" sz="2200" dirty="0">
-                  <a:latin typeface="Ramabhadra" panose="02000600000000000000" pitchFamily="2" charset="0"/>
-                  <a:cs typeface="Ramabhadra" panose="02000600000000000000" pitchFamily="2" charset="0"/>
-                </a:rPr>
-                <a:t>పిలిచే ప్రతి వారికి - పలికేను యేసు</a:t>
-              </a:r>
-            </a:p>
-            <a:p>
-              <a:pPr defTabSz="439781">
-                <a:defRPr/>
-              </a:pPr>
-              <a:r>
-                <a:rPr lang="te-IN" sz="2200" dirty="0">
-                  <a:latin typeface="Ramabhadra" panose="02000600000000000000" pitchFamily="2" charset="0"/>
-                  <a:cs typeface="Ramabhadra" panose="02000600000000000000" pitchFamily="2" charset="0"/>
-                </a:rPr>
-                <a:t>బొమ్మ కాదయ్యో - జీవమున్న దేవుడు</a:t>
-              </a:r>
-              <a:endParaRPr lang="en-IN" sz="2200" dirty="0">
+                <a:rPr lang="te-IN" sz="2400" dirty="0">
+                  <a:latin typeface="Ramabhadra" panose="02000600000000000000" pitchFamily="2" charset="0"/>
+                  <a:cs typeface="Ramabhadra" panose="02000600000000000000" pitchFamily="2" charset="0"/>
+                </a:rPr>
+                <a:t>సర్వ సత్యములో నను నీవు నడిపి ఆదరించిన –</a:t>
+              </a:r>
+              <a:r>
+                <a:rPr lang="en-IN" sz="2400" dirty="0">
+                  <a:latin typeface="Ramabhadra" panose="02000600000000000000" pitchFamily="2" charset="0"/>
+                  <a:cs typeface="Ramabhadra" panose="02000600000000000000" pitchFamily="2" charset="0"/>
+                </a:rPr>
+                <a:t> </a:t>
+              </a:r>
+              <a:r>
+                <a:rPr lang="te-IN" sz="2400" dirty="0">
+                  <a:latin typeface="Ramabhadra" panose="02000600000000000000" pitchFamily="2" charset="0"/>
+                  <a:cs typeface="Ramabhadra" panose="02000600000000000000" pitchFamily="2" charset="0"/>
+                </a:rPr>
+                <a:t>పరిశుద్ధాత్ముడా</a:t>
+              </a:r>
+              <a:endParaRPr lang="en-IN" sz="2400" dirty="0">
                 <a:latin typeface="Ramabhadra" panose="02000600000000000000" pitchFamily="2" charset="0"/>
                 <a:cs typeface="Ramabhadra" panose="02000600000000000000" pitchFamily="2" charset="0"/>
               </a:endParaRPr>
@@ -3186,7 +3152,31 @@
               <a:pPr defTabSz="439781">
                 <a:defRPr/>
               </a:pPr>
-              <a:endParaRPr lang="te-IN" sz="2200" dirty="0">
+              <a:r>
+                <a:rPr lang="te-IN" sz="2400" dirty="0">
+                  <a:latin typeface="Ramabhadra" panose="02000600000000000000" pitchFamily="2" charset="0"/>
+                  <a:cs typeface="Ramabhadra" panose="02000600000000000000" pitchFamily="2" charset="0"/>
+                </a:rPr>
+                <a:t>కృపాధారము నీవెగా -</a:t>
+              </a:r>
+            </a:p>
+            <a:p>
+              <a:pPr defTabSz="439781">
+                <a:defRPr/>
+              </a:pPr>
+              <a:r>
+                <a:rPr lang="te-IN" sz="2400" dirty="0">
+                  <a:latin typeface="Ramabhadra" panose="02000600000000000000" pitchFamily="2" charset="0"/>
+                  <a:cs typeface="Ramabhadra" panose="02000600000000000000" pitchFamily="2" charset="0"/>
+                </a:rPr>
+                <a:t>షాలేమురాజా నిను సన్మానించెదను</a:t>
+              </a:r>
+            </a:p>
+            <a:p>
+              <a:pPr defTabSz="439781">
+                <a:defRPr/>
+              </a:pPr>
+              <a:endParaRPr lang="te-IN" sz="2400" dirty="0">
                 <a:latin typeface="Ramabhadra" panose="02000600000000000000" pitchFamily="2" charset="0"/>
                 <a:cs typeface="Ramabhadra" panose="02000600000000000000" pitchFamily="2" charset="0"/>
               </a:endParaRPr>
@@ -3196,11 +3186,25 @@
                 <a:defRPr/>
               </a:pPr>
               <a:r>
-                <a:rPr lang="te-IN" sz="2200" dirty="0">
-                  <a:latin typeface="Ramabhadra" panose="02000600000000000000" pitchFamily="2" charset="0"/>
-                  <a:cs typeface="Ramabhadra" panose="02000600000000000000" pitchFamily="2" charset="0"/>
-                </a:rPr>
-                <a:t>కుంటివాడు గంతులేయ - కాళ్ళ నొసగినాడు</a:t>
+                <a:rPr lang="te-IN" sz="2400" dirty="0">
+                  <a:latin typeface="Ramabhadra" panose="02000600000000000000" pitchFamily="2" charset="0"/>
+                  <a:cs typeface="Ramabhadra" panose="02000600000000000000" pitchFamily="2" charset="0"/>
+                </a:rPr>
+                <a:t>నీ కను చూపుల పరిధిలో</a:t>
+              </a:r>
+              <a:r>
+                <a:rPr lang="en-IN" sz="2400" dirty="0">
+                  <a:latin typeface="Ramabhadra" panose="02000600000000000000" pitchFamily="2" charset="0"/>
+                  <a:cs typeface="Ramabhadra" panose="02000600000000000000" pitchFamily="2" charset="0"/>
+                </a:rPr>
+                <a:t> </a:t>
+              </a:r>
+              <a:r>
+                <a:rPr lang="te-IN" sz="2400" dirty="0">
+                  <a:latin typeface="Ramabhadra" panose="02000600000000000000" pitchFamily="2" charset="0"/>
+                  <a:cs typeface="Ramabhadra" panose="02000600000000000000" pitchFamily="2" charset="0"/>
+                </a:rPr>
+                <a:t>నన్ను నిలిపి</a:t>
               </a:r>
             </a:p>
             <a:p>
@@ -3208,11 +3212,11 @@
                 <a:defRPr/>
               </a:pPr>
               <a:r>
-                <a:rPr lang="te-IN" sz="2200" dirty="0">
-                  <a:latin typeface="Ramabhadra" panose="02000600000000000000" pitchFamily="2" charset="0"/>
-                  <a:cs typeface="Ramabhadra" panose="02000600000000000000" pitchFamily="2" charset="0"/>
-                </a:rPr>
-                <a:t>మూగవారు స్తుతిచేయ - నోటినిచ్చినాడు</a:t>
+                <a:rPr lang="te-IN" sz="2400" dirty="0">
+                  <a:latin typeface="Ramabhadra" panose="02000600000000000000" pitchFamily="2" charset="0"/>
+                  <a:cs typeface="Ramabhadra" panose="02000600000000000000" pitchFamily="2" charset="0"/>
+                </a:rPr>
+                <a:t>చూపితివా నీ వాత్సల్యమును</a:t>
               </a:r>
             </a:p>
             <a:p>
@@ -3220,25 +3224,27 @@
                 <a:defRPr/>
               </a:pPr>
               <a:r>
-                <a:rPr lang="te-IN" sz="2200" dirty="0">
-                  <a:latin typeface="Ramabhadra" panose="02000600000000000000" pitchFamily="2" charset="0"/>
-                  <a:cs typeface="Ramabhadra" panose="02000600000000000000" pitchFamily="2" charset="0"/>
-                </a:rPr>
-                <a:t>బధిరులు తన స్వరము విన - చెవులిచ్చినాడు</a:t>
-              </a:r>
-            </a:p>
-            <a:p>
-              <a:pPr defTabSz="439781">
-                <a:defRPr/>
-              </a:pPr>
-              <a:r>
-                <a:rPr lang="te-IN" sz="2200" dirty="0">
-                  <a:latin typeface="Ramabhadra" panose="02000600000000000000" pitchFamily="2" charset="0"/>
-                  <a:cs typeface="Ramabhadra" panose="02000600000000000000" pitchFamily="2" charset="0"/>
-                </a:rPr>
-                <a:t>ప్రేమా మయుడు - ఆశ్చర్య దేవుడు</a:t>
-              </a:r>
-              <a:endParaRPr lang="en-IN" sz="2200" dirty="0">
+                <a:rPr lang="te-IN" sz="2400" dirty="0">
+                  <a:latin typeface="Ramabhadra" panose="02000600000000000000" pitchFamily="2" charset="0"/>
+                  <a:cs typeface="Ramabhadra" panose="02000600000000000000" pitchFamily="2" charset="0"/>
+                </a:rPr>
+                <a:t>కృపానిధివి నీవెగా –</a:t>
+              </a:r>
+              <a:r>
+                <a:rPr lang="en-IN" sz="2400" dirty="0">
+                  <a:latin typeface="Ramabhadra" panose="02000600000000000000" pitchFamily="2" charset="0"/>
+                  <a:cs typeface="Ramabhadra" panose="02000600000000000000" pitchFamily="2" charset="0"/>
+                </a:rPr>
+                <a:t> </a:t>
+              </a:r>
+              <a:r>
+                <a:rPr lang="te-IN" sz="2400" dirty="0">
+                  <a:latin typeface="Ramabhadra" panose="02000600000000000000" pitchFamily="2" charset="0"/>
+                  <a:cs typeface="Ramabhadra" panose="02000600000000000000" pitchFamily="2" charset="0"/>
+                </a:rPr>
+                <a:t>నా యేసురాజా</a:t>
+              </a:r>
+              <a:endParaRPr lang="en-IN" sz="2400" dirty="0">
                 <a:latin typeface="Ramabhadra" panose="02000600000000000000" pitchFamily="2" charset="0"/>
                 <a:cs typeface="Ramabhadra" panose="02000600000000000000" pitchFamily="2" charset="0"/>
               </a:endParaRPr>
@@ -3247,69 +3253,12 @@
               <a:pPr defTabSz="439781">
                 <a:defRPr/>
               </a:pPr>
-              <a:endParaRPr lang="te-IN" sz="2200" dirty="0">
-                <a:latin typeface="Ramabhadra" panose="02000600000000000000" pitchFamily="2" charset="0"/>
-                <a:cs typeface="Ramabhadra" panose="02000600000000000000" pitchFamily="2" charset="0"/>
-              </a:endParaRPr>
-            </a:p>
-            <a:p>
-              <a:pPr defTabSz="439781">
-                <a:defRPr/>
-              </a:pPr>
-              <a:r>
-                <a:rPr lang="te-IN" sz="2200" dirty="0">
-                  <a:latin typeface="Ramabhadra" panose="02000600000000000000" pitchFamily="2" charset="0"/>
-                  <a:cs typeface="Ramabhadra" panose="02000600000000000000" pitchFamily="2" charset="0"/>
-                </a:rPr>
-                <a:t>చెప్పింది చేసెను - మాదిరుంచి వెళ్ళెను</a:t>
-              </a:r>
-            </a:p>
-            <a:p>
-              <a:pPr defTabSz="439781">
-                <a:defRPr/>
-              </a:pPr>
-              <a:r>
-                <a:rPr lang="te-IN" sz="2200" dirty="0">
-                  <a:latin typeface="Ramabhadra" panose="02000600000000000000" pitchFamily="2" charset="0"/>
-                  <a:cs typeface="Ramabhadra" panose="02000600000000000000" pitchFamily="2" charset="0"/>
-                </a:rPr>
-                <a:t>అడుగు జాడాలుంచెను - అనుసరించ కోరెను</a:t>
-              </a:r>
-            </a:p>
-            <a:p>
-              <a:pPr defTabSz="439781">
-                <a:defRPr/>
-              </a:pPr>
-              <a:r>
-                <a:rPr lang="te-IN" sz="2200" dirty="0">
-                  <a:latin typeface="Ramabhadra" panose="02000600000000000000" pitchFamily="2" charset="0"/>
-                  <a:cs typeface="Ramabhadra" panose="02000600000000000000" pitchFamily="2" charset="0"/>
-                </a:rPr>
-                <a:t>మరణాన్ని జీవాన్ని - మన ఎదుటే వుంచెను</a:t>
-              </a:r>
-            </a:p>
-            <a:p>
-              <a:pPr defTabSz="439781">
-                <a:defRPr/>
-              </a:pPr>
-              <a:r>
-                <a:rPr lang="te-IN" sz="2200" dirty="0">
-                  <a:latin typeface="Ramabhadra" panose="02000600000000000000" pitchFamily="2" charset="0"/>
-                  <a:cs typeface="Ramabhadra" panose="02000600000000000000" pitchFamily="2" charset="0"/>
-                </a:rPr>
-                <a:t>ఎంచుకొనే స్వేచ్చను - మన చేతికిచ్చెను</a:t>
-              </a:r>
-            </a:p>
-            <a:p>
-              <a:pPr defTabSz="439781">
-                <a:defRPr/>
-              </a:pPr>
-              <a:r>
-                <a:rPr lang="te-IN" sz="2200" dirty="0">
-                  <a:latin typeface="Ramabhadra" panose="02000600000000000000" pitchFamily="2" charset="0"/>
-                  <a:cs typeface="Ramabhadra" panose="02000600000000000000" pitchFamily="2" charset="0"/>
-                </a:rPr>
-                <a:t>ఏమి చేతువో - సృష్టికర్త యేసుని</a:t>
+              <a:r>
+                <a:rPr lang="te-IN" sz="2400" dirty="0">
+                  <a:latin typeface="Ramabhadra" panose="02000600000000000000" pitchFamily="2" charset="0"/>
+                  <a:cs typeface="Ramabhadra" panose="02000600000000000000" pitchFamily="2" charset="0"/>
+                </a:rPr>
+                <a:t>నిను సన్మానించెదను</a:t>
               </a:r>
             </a:p>
           </p:txBody>
@@ -3392,9 +3341,9 @@
         <p:grpSpPr>
           <a:xfrm>
             <a:off x="5104338" y="182031"/>
-            <a:ext cx="5718029" cy="6493935"/>
+            <a:ext cx="5696992" cy="6493935"/>
             <a:chOff x="160868" y="182032"/>
-            <a:chExt cx="5718029" cy="6493935"/>
+            <a:chExt cx="5696992" cy="6493935"/>
           </a:xfrm>
         </p:grpSpPr>
         <p:sp>
@@ -3466,8 +3415,8 @@
           </p:nvSpPr>
           <p:spPr>
             <a:xfrm>
-              <a:off x="264435" y="243116"/>
-              <a:ext cx="5614462" cy="6109365"/>
+              <a:off x="243398" y="245146"/>
+              <a:ext cx="5614462" cy="6001643"/>
             </a:xfrm>
             <a:prstGeom prst="rect">
               <a:avLst/>
@@ -3481,277 +3430,181 @@
             <a:lstStyle/>
             <a:p>
               <a:r>
-                <a:rPr lang="te-IN" sz="2300" dirty="0">
-                  <a:latin typeface="Ramabhadra" panose="02000600000000000000" pitchFamily="2" charset="0"/>
-                  <a:cs typeface="Ramabhadra" panose="02000600000000000000" pitchFamily="2" charset="0"/>
-                </a:rPr>
-                <a:t>స్తుతి పాత్రుడా </a:t>
-              </a:r>
-              <a:r>
-                <a:rPr lang="en-IN" sz="2300" dirty="0">
-                  <a:latin typeface="Ramabhadra" panose="02000600000000000000" pitchFamily="2" charset="0"/>
-                  <a:cs typeface="Ramabhadra" panose="02000600000000000000" pitchFamily="2" charset="0"/>
-                </a:rPr>
-                <a:t>-</a:t>
-              </a:r>
-              <a:r>
-                <a:rPr lang="te-IN" sz="2300" dirty="0">
-                  <a:latin typeface="Ramabhadra" panose="02000600000000000000" pitchFamily="2" charset="0"/>
-                  <a:cs typeface="Ramabhadra" panose="02000600000000000000" pitchFamily="2" charset="0"/>
-                </a:rPr>
-                <a:t> స్తోత్రార్హుడా</a:t>
+                <a:rPr lang="te-IN" sz="2400" dirty="0">
+                  <a:latin typeface="Ramabhadra" panose="02000600000000000000" pitchFamily="2" charset="0"/>
+                  <a:cs typeface="Ramabhadra" panose="02000600000000000000" pitchFamily="2" charset="0"/>
+                </a:rPr>
+                <a:t>దేవా నా దేవా – నీవే నా కాపరి</a:t>
+              </a:r>
+              <a:br>
+                <a:rPr lang="te-IN" sz="2400" dirty="0">
+                  <a:latin typeface="Ramabhadra" panose="02000600000000000000" pitchFamily="2" charset="0"/>
+                  <a:cs typeface="Ramabhadra" panose="02000600000000000000" pitchFamily="2" charset="0"/>
+                </a:rPr>
+              </a:br>
+              <a:r>
+                <a:rPr lang="te-IN" sz="2400" dirty="0">
+                  <a:latin typeface="Ramabhadra" panose="02000600000000000000" pitchFamily="2" charset="0"/>
+                  <a:cs typeface="Ramabhadra" panose="02000600000000000000" pitchFamily="2" charset="0"/>
+                </a:rPr>
+                <a:t>నీ ప్రేమ నీ క్షమా – ఎంతో గొప్పది (2)</a:t>
+              </a:r>
+              <a:br>
+                <a:rPr lang="te-IN" sz="2400" dirty="0">
+                  <a:latin typeface="Ramabhadra" panose="02000600000000000000" pitchFamily="2" charset="0"/>
+                  <a:cs typeface="Ramabhadra" panose="02000600000000000000" pitchFamily="2" charset="0"/>
+                </a:rPr>
+              </a:br>
+              <a:r>
+                <a:rPr lang="te-IN" sz="2400" dirty="0">
+                  <a:latin typeface="Ramabhadra" panose="02000600000000000000" pitchFamily="2" charset="0"/>
+                  <a:cs typeface="Ramabhadra" panose="02000600000000000000" pitchFamily="2" charset="0"/>
+                </a:rPr>
+                <a:t>ఆరాధింతును హృదయాంతరంగములో</a:t>
+              </a:r>
+              <a:br>
+                <a:rPr lang="te-IN" sz="2400" dirty="0">
+                  <a:latin typeface="Ramabhadra" panose="02000600000000000000" pitchFamily="2" charset="0"/>
+                  <a:cs typeface="Ramabhadra" panose="02000600000000000000" pitchFamily="2" charset="0"/>
+                </a:rPr>
+              </a:br>
+              <a:r>
+                <a:rPr lang="te-IN" sz="2400" dirty="0">
+                  <a:latin typeface="Ramabhadra" panose="02000600000000000000" pitchFamily="2" charset="0"/>
+                  <a:cs typeface="Ramabhadra" panose="02000600000000000000" pitchFamily="2" charset="0"/>
+                </a:rPr>
+                <a:t>స్తుతించెదను నీ పాద సన్నిధిలో (2)</a:t>
+              </a:r>
+              <a:br>
+                <a:rPr lang="te-IN" sz="2400" dirty="0">
+                  <a:latin typeface="Ramabhadra" panose="02000600000000000000" pitchFamily="2" charset="0"/>
+                  <a:cs typeface="Ramabhadra" panose="02000600000000000000" pitchFamily="2" charset="0"/>
+                </a:rPr>
+              </a:br>
+              <a:r>
+                <a:rPr lang="te-IN" sz="2400" dirty="0">
+                  <a:latin typeface="Ramabhadra" panose="02000600000000000000" pitchFamily="2" charset="0"/>
+                  <a:cs typeface="Ramabhadra" panose="02000600000000000000" pitchFamily="2" charset="0"/>
+                </a:rPr>
+                <a:t>నీవే కదా దేవుడవు – (2)</a:t>
               </a:r>
             </a:p>
             <a:p>
               <a:r>
-                <a:rPr lang="te-IN" sz="2300" dirty="0">
-                  <a:latin typeface="Ramabhadra" panose="02000600000000000000" pitchFamily="2" charset="0"/>
-                  <a:cs typeface="Ramabhadra" panose="02000600000000000000" pitchFamily="2" charset="0"/>
-                </a:rPr>
-                <a:t>స్తుతులందుకో </a:t>
-              </a:r>
-              <a:r>
-                <a:rPr lang="en-IN" sz="2300" dirty="0">
-                  <a:latin typeface="Ramabhadra" panose="02000600000000000000" pitchFamily="2" charset="0"/>
-                  <a:cs typeface="Ramabhadra" panose="02000600000000000000" pitchFamily="2" charset="0"/>
-                </a:rPr>
-                <a:t>-</a:t>
-              </a:r>
-              <a:r>
-                <a:rPr lang="te-IN" sz="2300" dirty="0">
-                  <a:latin typeface="Ramabhadra" panose="02000600000000000000" pitchFamily="2" charset="0"/>
-                  <a:cs typeface="Ramabhadra" panose="02000600000000000000" pitchFamily="2" charset="0"/>
-                </a:rPr>
-                <a:t> పూజార్హుడా</a:t>
+                <a:rPr lang="te-IN" sz="2400" dirty="0">
+                  <a:latin typeface="Ramabhadra" panose="02000600000000000000" pitchFamily="2" charset="0"/>
+                  <a:cs typeface="Ramabhadra" panose="02000600000000000000" pitchFamily="2" charset="0"/>
+                </a:rPr>
+                <a:t>దేవా యేసు దేవా (4)     </a:t>
               </a:r>
             </a:p>
             <a:p>
-              <a:r>
-                <a:rPr lang="te-IN" sz="2300" dirty="0">
-                  <a:latin typeface="Ramabhadra" panose="02000600000000000000" pitchFamily="2" charset="0"/>
-                  <a:cs typeface="Ramabhadra" panose="02000600000000000000" pitchFamily="2" charset="0"/>
-                </a:rPr>
-                <a:t>ఆకాశమందు నీవు తప్ప </a:t>
-              </a:r>
-              <a:r>
-                <a:rPr lang="en-IN" sz="2300" dirty="0">
-                  <a:latin typeface="Ramabhadra" panose="02000600000000000000" pitchFamily="2" charset="0"/>
-                  <a:cs typeface="Ramabhadra" panose="02000600000000000000" pitchFamily="2" charset="0"/>
-                </a:rPr>
-                <a:t>-</a:t>
-              </a:r>
-            </a:p>
-            <a:p>
-              <a:r>
-                <a:rPr lang="te-IN" sz="2300" dirty="0">
-                  <a:latin typeface="Ramabhadra" panose="02000600000000000000" pitchFamily="2" charset="0"/>
-                  <a:cs typeface="Ramabhadra" panose="02000600000000000000" pitchFamily="2" charset="0"/>
-                </a:rPr>
-                <a:t>నాకెవరున్నారు నా ప్రభు</a:t>
-              </a:r>
-            </a:p>
-            <a:p>
-              <a:r>
-                <a:rPr lang="te-IN" sz="2300" dirty="0">
-                  <a:latin typeface="Ramabhadra" panose="02000600000000000000" pitchFamily="2" charset="0"/>
-                  <a:cs typeface="Ramabhadra" panose="02000600000000000000" pitchFamily="2" charset="0"/>
-                </a:rPr>
-                <a:t>స్తుతి పాత్రుడా.... ఆఆఅ</a:t>
-              </a:r>
-            </a:p>
-            <a:p>
-              <a:endParaRPr lang="te-IN" sz="2300" dirty="0">
+              <a:endParaRPr lang="te-IN" sz="2400" dirty="0">
                 <a:latin typeface="Ramabhadra" panose="02000600000000000000" pitchFamily="2" charset="0"/>
                 <a:cs typeface="Ramabhadra" panose="02000600000000000000" pitchFamily="2" charset="0"/>
               </a:endParaRPr>
             </a:p>
             <a:p>
               <a:r>
-                <a:rPr lang="te-IN" sz="2300" dirty="0">
-                  <a:latin typeface="Ramabhadra" panose="02000600000000000000" pitchFamily="2" charset="0"/>
-                  <a:cs typeface="Ramabhadra" panose="02000600000000000000" pitchFamily="2" charset="0"/>
-                </a:rPr>
-                <a:t>నా శత్రువులు నను తరుముచుండగా –</a:t>
-              </a:r>
-              <a:endParaRPr lang="en-IN" sz="2300" dirty="0">
+                <a:rPr lang="te-IN" sz="2400" dirty="0">
+                  <a:latin typeface="Ramabhadra" panose="02000600000000000000" pitchFamily="2" charset="0"/>
+                  <a:cs typeface="Ramabhadra" panose="02000600000000000000" pitchFamily="2" charset="0"/>
+                </a:rPr>
+                <a:t>పాపము నుండి విడిపించినావు</a:t>
+              </a:r>
+              <a:br>
+                <a:rPr lang="te-IN" sz="2400" dirty="0">
+                  <a:latin typeface="Ramabhadra" panose="02000600000000000000" pitchFamily="2" charset="0"/>
+                  <a:cs typeface="Ramabhadra" panose="02000600000000000000" pitchFamily="2" charset="0"/>
+                </a:rPr>
+              </a:br>
+              <a:r>
+                <a:rPr lang="te-IN" sz="2400" dirty="0">
+                  <a:latin typeface="Ramabhadra" panose="02000600000000000000" pitchFamily="2" charset="0"/>
+                  <a:cs typeface="Ramabhadra" panose="02000600000000000000" pitchFamily="2" charset="0"/>
+                </a:rPr>
+                <a:t>పరిశుద్ధుని చేసి ప్రేమించినావు (2)</a:t>
+              </a:r>
+              <a:br>
+                <a:rPr lang="te-IN" sz="2400" dirty="0">
+                  <a:latin typeface="Ramabhadra" panose="02000600000000000000" pitchFamily="2" charset="0"/>
+                  <a:cs typeface="Ramabhadra" panose="02000600000000000000" pitchFamily="2" charset="0"/>
+                </a:rPr>
+              </a:br>
+              <a:r>
+                <a:rPr lang="te-IN" sz="2400" dirty="0">
+                  <a:latin typeface="Ramabhadra" panose="02000600000000000000" pitchFamily="2" charset="0"/>
+                  <a:cs typeface="Ramabhadra" panose="02000600000000000000" pitchFamily="2" charset="0"/>
+                </a:rPr>
+                <a:t>నీవే కదా దేవుడవు – (2)</a:t>
+              </a:r>
+              <a:br>
+                <a:rPr lang="te-IN" sz="2400" dirty="0">
+                  <a:latin typeface="Ramabhadra" panose="02000600000000000000" pitchFamily="2" charset="0"/>
+                  <a:cs typeface="Ramabhadra" panose="02000600000000000000" pitchFamily="2" charset="0"/>
+                </a:rPr>
+              </a:br>
+              <a:r>
+                <a:rPr lang="te-IN" sz="2400" dirty="0">
+                  <a:latin typeface="Ramabhadra" panose="02000600000000000000" pitchFamily="2" charset="0"/>
+                  <a:cs typeface="Ramabhadra" panose="02000600000000000000" pitchFamily="2" charset="0"/>
+                </a:rPr>
+                <a:t>దేవా యేసు దేవా (4)       </a:t>
+              </a:r>
+            </a:p>
+            <a:p>
+              <a:endParaRPr lang="te-IN" sz="2400" dirty="0">
                 <a:latin typeface="Ramabhadra" panose="02000600000000000000" pitchFamily="2" charset="0"/>
                 <a:cs typeface="Ramabhadra" panose="02000600000000000000" pitchFamily="2" charset="0"/>
               </a:endParaRPr>
             </a:p>
             <a:p>
               <a:r>
-                <a:rPr lang="te-IN" sz="2300" dirty="0">
-                  <a:latin typeface="Ramabhadra" panose="02000600000000000000" pitchFamily="2" charset="0"/>
-                  <a:cs typeface="Ramabhadra" panose="02000600000000000000" pitchFamily="2" charset="0"/>
-                </a:rPr>
-                <a:t>నా యాత్మ నాలో కృంగెనే ప్రభూ </a:t>
-              </a:r>
-              <a:r>
-                <a:rPr lang="en-IN" sz="2300" dirty="0">
-                  <a:latin typeface="Ramabhadra" panose="02000600000000000000" pitchFamily="2" charset="0"/>
-                  <a:cs typeface="Ramabhadra" panose="02000600000000000000" pitchFamily="2" charset="0"/>
-                </a:rPr>
-                <a:t>(2)</a:t>
-              </a:r>
-              <a:endParaRPr lang="te-IN" sz="2300" dirty="0">
-                <a:latin typeface="Ramabhadra" panose="02000600000000000000" pitchFamily="2" charset="0"/>
-                <a:cs typeface="Ramabhadra" panose="02000600000000000000" pitchFamily="2" charset="0"/>
-              </a:endParaRPr>
-            </a:p>
-            <a:p>
-              <a:r>
-                <a:rPr lang="te-IN" sz="2300" dirty="0">
-                  <a:latin typeface="Ramabhadra" panose="02000600000000000000" pitchFamily="2" charset="0"/>
-                  <a:cs typeface="Ramabhadra" panose="02000600000000000000" pitchFamily="2" charset="0"/>
-                </a:rPr>
-                <a:t>నా మనస్సు నీ వైపు త్రిప్పిన వెంటనే –</a:t>
-              </a:r>
-              <a:endParaRPr lang="en-IN" sz="2300" dirty="0">
-                <a:latin typeface="Ramabhadra" panose="02000600000000000000" pitchFamily="2" charset="0"/>
-                <a:cs typeface="Ramabhadra" panose="02000600000000000000" pitchFamily="2" charset="0"/>
-              </a:endParaRPr>
-            </a:p>
-            <a:p>
-              <a:r>
-                <a:rPr lang="te-IN" sz="2300" dirty="0">
-                  <a:latin typeface="Ramabhadra" panose="02000600000000000000" pitchFamily="2" charset="0"/>
-                  <a:cs typeface="Ramabhadra" panose="02000600000000000000" pitchFamily="2" charset="0"/>
-                </a:rPr>
-                <a:t>శత్రుల చేతినుండి</a:t>
-              </a:r>
-              <a:r>
-                <a:rPr lang="en-IN" sz="2300" dirty="0">
-                  <a:latin typeface="Ramabhadra" panose="02000600000000000000" pitchFamily="2" charset="0"/>
-                  <a:cs typeface="Ramabhadra" panose="02000600000000000000" pitchFamily="2" charset="0"/>
-                </a:rPr>
-                <a:t> </a:t>
-              </a:r>
-              <a:r>
-                <a:rPr lang="te-IN" sz="2300" dirty="0">
-                  <a:latin typeface="Ramabhadra" panose="02000600000000000000" pitchFamily="2" charset="0"/>
-                  <a:cs typeface="Ramabhadra" panose="02000600000000000000" pitchFamily="2" charset="0"/>
-                </a:rPr>
-                <a:t>విడిపించినావు –</a:t>
-              </a:r>
-              <a:endParaRPr lang="en-IN" sz="2300" dirty="0">
-                <a:latin typeface="Ramabhadra" panose="02000600000000000000" pitchFamily="2" charset="0"/>
-                <a:cs typeface="Ramabhadra" panose="02000600000000000000" pitchFamily="2" charset="0"/>
-              </a:endParaRPr>
-            </a:p>
-            <a:p>
-              <a:r>
-                <a:rPr lang="te-IN" sz="2300" dirty="0">
-                  <a:latin typeface="Ramabhadra" panose="02000600000000000000" pitchFamily="2" charset="0"/>
-                  <a:cs typeface="Ramabhadra" panose="02000600000000000000" pitchFamily="2" charset="0"/>
-                </a:rPr>
-                <a:t>కాపాడినావు </a:t>
-              </a:r>
-              <a:r>
-                <a:rPr lang="en-IN" sz="2300" dirty="0">
-                  <a:latin typeface="Ramabhadra" panose="02000600000000000000" pitchFamily="2" charset="0"/>
-                  <a:cs typeface="Ramabhadra" panose="02000600000000000000" pitchFamily="2" charset="0"/>
-                </a:rPr>
-                <a:t>(2)</a:t>
-              </a:r>
-              <a:endParaRPr lang="te-IN" sz="2300" dirty="0">
-                <a:latin typeface="Ramabhadra" panose="02000600000000000000" pitchFamily="2" charset="0"/>
-                <a:cs typeface="Ramabhadra" panose="02000600000000000000" pitchFamily="2" charset="0"/>
-              </a:endParaRPr>
-            </a:p>
-            <a:p>
-              <a:endParaRPr lang="te-IN" sz="2300" dirty="0">
-                <a:latin typeface="Ramabhadra" panose="02000600000000000000" pitchFamily="2" charset="0"/>
-                <a:cs typeface="Ramabhadra" panose="02000600000000000000" pitchFamily="2" charset="0"/>
-              </a:endParaRPr>
-            </a:p>
-            <a:p>
-              <a:r>
-                <a:rPr lang="te-IN" sz="2300" dirty="0">
-                  <a:latin typeface="Ramabhadra" panose="02000600000000000000" pitchFamily="2" charset="0"/>
-                  <a:cs typeface="Ramabhadra" panose="02000600000000000000" pitchFamily="2" charset="0"/>
-                </a:rPr>
-                <a:t>నా ప్రాణ స్నేహితులు నన్ను చూచి</a:t>
-              </a:r>
-              <a:endParaRPr lang="en-IN" sz="2300" dirty="0">
-                <a:latin typeface="Ramabhadra" panose="02000600000000000000" pitchFamily="2" charset="0"/>
-                <a:cs typeface="Ramabhadra" panose="02000600000000000000" pitchFamily="2" charset="0"/>
-              </a:endParaRPr>
-            </a:p>
-            <a:p>
-              <a:r>
-                <a:rPr lang="te-IN" sz="2300" dirty="0">
-                  <a:latin typeface="Ramabhadra" panose="02000600000000000000" pitchFamily="2" charset="0"/>
-                  <a:cs typeface="Ramabhadra" panose="02000600000000000000" pitchFamily="2" charset="0"/>
-                </a:rPr>
-                <a:t>దూరాన నిలిచేరు నా ప్రభూ </a:t>
-              </a:r>
-              <a:r>
-                <a:rPr lang="en-IN" sz="2300" dirty="0">
-                  <a:latin typeface="Ramabhadra" panose="02000600000000000000" pitchFamily="2" charset="0"/>
-                  <a:cs typeface="Ramabhadra" panose="02000600000000000000" pitchFamily="2" charset="0"/>
-                </a:rPr>
-                <a:t>(2)</a:t>
-              </a:r>
-              <a:endParaRPr lang="te-IN" sz="2300" dirty="0">
-                <a:latin typeface="Ramabhadra" panose="02000600000000000000" pitchFamily="2" charset="0"/>
-                <a:cs typeface="Ramabhadra" panose="02000600000000000000" pitchFamily="2" charset="0"/>
-              </a:endParaRPr>
-            </a:p>
-            <a:p>
-              <a:r>
-                <a:rPr lang="te-IN" sz="2300" dirty="0">
-                  <a:latin typeface="Ramabhadra" panose="02000600000000000000" pitchFamily="2" charset="0"/>
-                  <a:cs typeface="Ramabhadra" panose="02000600000000000000" pitchFamily="2" charset="0"/>
-                </a:rPr>
-                <a:t>నీ వాక్య ధ్యానమే నా త్రోవకు వెలుగై</a:t>
-              </a:r>
-              <a:r>
-                <a:rPr lang="en-IN" sz="2300" dirty="0">
-                  <a:latin typeface="Ramabhadra" panose="02000600000000000000" pitchFamily="2" charset="0"/>
-                  <a:cs typeface="Ramabhadra" panose="02000600000000000000" pitchFamily="2" charset="0"/>
-                </a:rPr>
-                <a:t> </a:t>
-              </a:r>
-              <a:r>
-                <a:rPr lang="te-IN" sz="2300" dirty="0">
-                  <a:latin typeface="Ramabhadra" panose="02000600000000000000" pitchFamily="2" charset="0"/>
-                  <a:cs typeface="Ramabhadra" panose="02000600000000000000" pitchFamily="2" charset="0"/>
-                </a:rPr>
-                <a:t>–</a:t>
-              </a:r>
-              <a:endParaRPr lang="en-IN" sz="2300" dirty="0">
-                <a:latin typeface="Ramabhadra" panose="02000600000000000000" pitchFamily="2" charset="0"/>
-                <a:cs typeface="Ramabhadra" panose="02000600000000000000" pitchFamily="2" charset="0"/>
-              </a:endParaRPr>
-            </a:p>
-            <a:p>
-              <a:r>
-                <a:rPr lang="te-IN" sz="2300" dirty="0">
-                  <a:latin typeface="Ramabhadra" panose="02000600000000000000" pitchFamily="2" charset="0"/>
-                  <a:cs typeface="Ramabhadra" panose="02000600000000000000" pitchFamily="2" charset="0"/>
-                </a:rPr>
-                <a:t>నను నిల్పెను</a:t>
-              </a:r>
-            </a:p>
-            <a:p>
-              <a:r>
-                <a:rPr lang="te-IN" sz="2300" dirty="0">
-                  <a:latin typeface="Ramabhadra" panose="02000600000000000000" pitchFamily="2" charset="0"/>
-                  <a:cs typeface="Ramabhadra" panose="02000600000000000000" pitchFamily="2" charset="0"/>
-                </a:rPr>
-                <a:t>నీ సన్నీధిలో - నీ సంఘములో </a:t>
-              </a:r>
-              <a:r>
-                <a:rPr lang="en-IN" sz="2300" dirty="0">
-                  <a:latin typeface="Ramabhadra" panose="02000600000000000000" pitchFamily="2" charset="0"/>
-                  <a:cs typeface="Ramabhadra" panose="02000600000000000000" pitchFamily="2" charset="0"/>
-                </a:rPr>
-                <a:t>(2)</a:t>
-              </a:r>
-              <a:endParaRPr lang="te-IN" sz="2300" dirty="0">
-                <a:latin typeface="Ramabhadra" panose="02000600000000000000" pitchFamily="2" charset="0"/>
-                <a:cs typeface="Ramabhadra" panose="02000600000000000000" pitchFamily="2" charset="0"/>
-              </a:endParaRPr>
+                <a:rPr lang="te-IN" sz="2400" dirty="0">
+                  <a:latin typeface="Ramabhadra" panose="02000600000000000000" pitchFamily="2" charset="0"/>
+                  <a:cs typeface="Ramabhadra" panose="02000600000000000000" pitchFamily="2" charset="0"/>
+                </a:rPr>
+                <a:t>పరిశుద్ధాత్మను నాలో నింపావు</a:t>
+              </a:r>
+              <a:br>
+                <a:rPr lang="te-IN" sz="2400" dirty="0">
+                  <a:latin typeface="Ramabhadra" panose="02000600000000000000" pitchFamily="2" charset="0"/>
+                  <a:cs typeface="Ramabhadra" panose="02000600000000000000" pitchFamily="2" charset="0"/>
+                </a:rPr>
+              </a:br>
+              <a:r>
+                <a:rPr lang="te-IN" sz="2400" dirty="0">
+                  <a:latin typeface="Ramabhadra" panose="02000600000000000000" pitchFamily="2" charset="0"/>
+                  <a:cs typeface="Ramabhadra" panose="02000600000000000000" pitchFamily="2" charset="0"/>
+                </a:rPr>
+                <a:t>మట్టి దేహమును మహిమతో నింపావు (2)</a:t>
+              </a:r>
+              <a:br>
+                <a:rPr lang="te-IN" sz="2400" dirty="0">
+                  <a:latin typeface="Ramabhadra" panose="02000600000000000000" pitchFamily="2" charset="0"/>
+                  <a:cs typeface="Ramabhadra" panose="02000600000000000000" pitchFamily="2" charset="0"/>
+                </a:rPr>
+              </a:br>
+              <a:r>
+                <a:rPr lang="te-IN" sz="2400" dirty="0">
+                  <a:latin typeface="Ramabhadra" panose="02000600000000000000" pitchFamily="2" charset="0"/>
+                  <a:cs typeface="Ramabhadra" panose="02000600000000000000" pitchFamily="2" charset="0"/>
+                </a:rPr>
+                <a:t>నీవే కదా దేవుడవు – (2)</a:t>
+              </a:r>
+              <a:br>
+                <a:rPr lang="te-IN" sz="2400" dirty="0">
+                  <a:latin typeface="Ramabhadra" panose="02000600000000000000" pitchFamily="2" charset="0"/>
+                  <a:cs typeface="Ramabhadra" panose="02000600000000000000" pitchFamily="2" charset="0"/>
+                </a:rPr>
+              </a:br>
+              <a:r>
+                <a:rPr lang="te-IN" sz="2400" dirty="0">
+                  <a:latin typeface="Ramabhadra" panose="02000600000000000000" pitchFamily="2" charset="0"/>
+                  <a:cs typeface="Ramabhadra" panose="02000600000000000000" pitchFamily="2" charset="0"/>
+                </a:rPr>
+                <a:t>దేవా యేసు దేవా (4)       </a:t>
+              </a:r>
             </a:p>
           </p:txBody>
         </p:sp>
@@ -3863,9 +3716,9 @@
         <p:grpSpPr>
           <a:xfrm>
             <a:off x="160868" y="182032"/>
-            <a:ext cx="5472868" cy="6493935"/>
+            <a:ext cx="5472868" cy="6551396"/>
             <a:chOff x="160868" y="182032"/>
-            <a:chExt cx="5472868" cy="6493935"/>
+            <a:chExt cx="5472868" cy="6551396"/>
           </a:xfrm>
         </p:grpSpPr>
         <p:sp>
@@ -3938,7 +3791,7 @@
           <p:spPr>
             <a:xfrm>
               <a:off x="238125" y="208565"/>
-              <a:ext cx="5395611" cy="6463308"/>
+              <a:ext cx="5395611" cy="6524863"/>
             </a:xfrm>
             <a:prstGeom prst="rect">
               <a:avLst/>
@@ -3955,54 +3808,57 @@
                 <a:defRPr/>
               </a:pPr>
               <a:r>
-                <a:rPr lang="te-IN" sz="2300" dirty="0">
-                  <a:latin typeface="Ramabhadra" panose="02000600000000000000" pitchFamily="2" charset="0"/>
-                  <a:cs typeface="Ramabhadra" panose="02000600000000000000" pitchFamily="2" charset="0"/>
-                </a:rPr>
-                <a:t>నీ ప్రేమ ఎంతో అపారము</a:t>
+                <a:rPr lang="te-IN" sz="2200" dirty="0">
+                  <a:latin typeface="Ramabhadra" panose="02000600000000000000" pitchFamily="2" charset="0"/>
+                  <a:cs typeface="Ramabhadra" panose="02000600000000000000" pitchFamily="2" charset="0"/>
+                </a:rPr>
+                <a:t>ఎంత మంచి దేవుడవయ్యా</a:t>
+              </a:r>
+              <a:br>
+                <a:rPr lang="te-IN" sz="2200" dirty="0">
+                  <a:latin typeface="Ramabhadra" panose="02000600000000000000" pitchFamily="2" charset="0"/>
+                  <a:cs typeface="Ramabhadra" panose="02000600000000000000" pitchFamily="2" charset="0"/>
+                </a:rPr>
+              </a:br>
+              <a:r>
+                <a:rPr lang="te-IN" sz="2200" dirty="0">
+                  <a:latin typeface="Ramabhadra" panose="02000600000000000000" pitchFamily="2" charset="0"/>
+                  <a:cs typeface="Ramabhadra" panose="02000600000000000000" pitchFamily="2" charset="0"/>
+                </a:rPr>
+                <a:t>ఎంత మంచి దేవుడవేసయ్యా</a:t>
+              </a:r>
+              <a:br>
+                <a:rPr lang="te-IN" sz="2200" dirty="0">
+                  <a:latin typeface="Ramabhadra" panose="02000600000000000000" pitchFamily="2" charset="0"/>
+                  <a:cs typeface="Ramabhadra" panose="02000600000000000000" pitchFamily="2" charset="0"/>
+                </a:rPr>
+              </a:br>
+              <a:r>
+                <a:rPr lang="te-IN" sz="2200" dirty="0">
+                  <a:latin typeface="Ramabhadra" panose="02000600000000000000" pitchFamily="2" charset="0"/>
+                  <a:cs typeface="Ramabhadra" panose="02000600000000000000" pitchFamily="2" charset="0"/>
+                </a:rPr>
+                <a:t>చింతలన్ని తీరేనయ్యా నిను చేరగా</a:t>
+              </a:r>
+              <a:br>
+                <a:rPr lang="te-IN" sz="2200" dirty="0">
+                  <a:latin typeface="Ramabhadra" panose="02000600000000000000" pitchFamily="2" charset="0"/>
+                  <a:cs typeface="Ramabhadra" panose="02000600000000000000" pitchFamily="2" charset="0"/>
+                </a:rPr>
+              </a:br>
+              <a:r>
+                <a:rPr lang="te-IN" sz="2200" dirty="0">
+                  <a:latin typeface="Ramabhadra" panose="02000600000000000000" pitchFamily="2" charset="0"/>
+                  <a:cs typeface="Ramabhadra" panose="02000600000000000000" pitchFamily="2" charset="0"/>
+                </a:rPr>
+                <a:t>ఎంత మంచి దేవుడవేసయ్యా (2)        </a:t>
               </a:r>
             </a:p>
             <a:p>
               <a:pPr defTabSz="439781">
                 <a:defRPr/>
               </a:pPr>
-              <a:r>
-                <a:rPr lang="te-IN" sz="2300" dirty="0">
-                  <a:latin typeface="Ramabhadra" panose="02000600000000000000" pitchFamily="2" charset="0"/>
-                  <a:cs typeface="Ramabhadra" panose="02000600000000000000" pitchFamily="2" charset="0"/>
-                </a:rPr>
-                <a:t>వర్ణింపతరమా నా ప్రభూ</a:t>
-              </a:r>
-            </a:p>
-            <a:p>
-              <a:pPr defTabSz="439781">
-                <a:defRPr/>
-              </a:pPr>
-              <a:r>
-                <a:rPr lang="te-IN" sz="2300" dirty="0">
-                  <a:latin typeface="Ramabhadra" panose="02000600000000000000" pitchFamily="2" charset="0"/>
-                  <a:cs typeface="Ramabhadra" panose="02000600000000000000" pitchFamily="2" charset="0"/>
-                </a:rPr>
-                <a:t>పులకింప చేసెను నా హృది</a:t>
-              </a:r>
-            </a:p>
-            <a:p>
-              <a:pPr defTabSz="439781">
-                <a:defRPr/>
-              </a:pPr>
-              <a:r>
-                <a:rPr lang="te-IN" sz="2300" dirty="0">
-                  <a:latin typeface="Ramabhadra" panose="02000600000000000000" pitchFamily="2" charset="0"/>
-                  <a:cs typeface="Ramabhadra" panose="02000600000000000000" pitchFamily="2" charset="0"/>
-                </a:rPr>
-                <a:t>హృదయేశ్వరా నా యేసువా</a:t>
-              </a:r>
-            </a:p>
-            <a:p>
-              <a:pPr defTabSz="439781">
-                <a:defRPr/>
-              </a:pPr>
-              <a:endParaRPr lang="te-IN" sz="2300" dirty="0">
+              <a:endParaRPr lang="te-IN" sz="2200" dirty="0">
                 <a:latin typeface="Ramabhadra" panose="02000600000000000000" pitchFamily="2" charset="0"/>
                 <a:cs typeface="Ramabhadra" panose="02000600000000000000" pitchFamily="2" charset="0"/>
               </a:endParaRPr>
@@ -4012,11 +3868,11 @@
                 <a:defRPr/>
               </a:pPr>
               <a:r>
-                <a:rPr lang="te-IN" sz="2300" dirty="0">
-                  <a:latin typeface="Ramabhadra" panose="02000600000000000000" pitchFamily="2" charset="0"/>
-                  <a:cs typeface="Ramabhadra" panose="02000600000000000000" pitchFamily="2" charset="0"/>
-                </a:rPr>
-                <a:t>నన్ను ఎంతో ప్రేమించి</a:t>
+                <a:rPr lang="te-IN" sz="2200" dirty="0">
+                  <a:latin typeface="Ramabhadra" panose="02000600000000000000" pitchFamily="2" charset="0"/>
+                  <a:cs typeface="Ramabhadra" panose="02000600000000000000" pitchFamily="2" charset="0"/>
+                </a:rPr>
+                <a:t>ఘోరపాపినైన నేనూ </a:t>
               </a:r>
             </a:p>
             <a:p>
@@ -4024,66 +3880,44 @@
                 <a:defRPr/>
               </a:pPr>
               <a:r>
-                <a:rPr lang="te-IN" sz="2300" dirty="0">
-                  <a:latin typeface="Ramabhadra" panose="02000600000000000000" pitchFamily="2" charset="0"/>
-                  <a:cs typeface="Ramabhadra" panose="02000600000000000000" pitchFamily="2" charset="0"/>
-                </a:rPr>
-                <a:t>నాదు పాపమె క్షమియించి</a:t>
+                <a:rPr lang="te-IN" sz="2200" dirty="0">
+                  <a:latin typeface="Ramabhadra" panose="02000600000000000000" pitchFamily="2" charset="0"/>
+                  <a:cs typeface="Ramabhadra" panose="02000600000000000000" pitchFamily="2" charset="0"/>
+                </a:rPr>
+                <a:t>దూరంగా పారిపోగా (2)</a:t>
+              </a:r>
+              <a:br>
+                <a:rPr lang="te-IN" sz="2200" dirty="0">
+                  <a:latin typeface="Ramabhadra" panose="02000600000000000000" pitchFamily="2" charset="0"/>
+                  <a:cs typeface="Ramabhadra" panose="02000600000000000000" pitchFamily="2" charset="0"/>
+                </a:rPr>
+              </a:br>
+              <a:r>
+                <a:rPr lang="te-IN" sz="2200" dirty="0">
+                  <a:latin typeface="Ramabhadra" panose="02000600000000000000" pitchFamily="2" charset="0"/>
+                  <a:cs typeface="Ramabhadra" panose="02000600000000000000" pitchFamily="2" charset="0"/>
+                </a:rPr>
+                <a:t>నీ ప్రేమతో నను క్షమియించి</a:t>
+              </a:r>
+              <a:br>
+                <a:rPr lang="te-IN" sz="2200" dirty="0">
+                  <a:latin typeface="Ramabhadra" panose="02000600000000000000" pitchFamily="2" charset="0"/>
+                  <a:cs typeface="Ramabhadra" panose="02000600000000000000" pitchFamily="2" charset="0"/>
+                </a:rPr>
+              </a:br>
+              <a:r>
+                <a:rPr lang="te-IN" sz="2200" dirty="0">
+                  <a:latin typeface="Ramabhadra" panose="02000600000000000000" pitchFamily="2" charset="0"/>
+                  <a:cs typeface="Ramabhadra" panose="02000600000000000000" pitchFamily="2" charset="0"/>
+                </a:rPr>
+                <a:t>నను హత్తుకొన్నావయ్యా (2)       </a:t>
               </a:r>
             </a:p>
             <a:p>
               <a:pPr defTabSz="439781">
                 <a:defRPr/>
               </a:pPr>
-              <a:r>
-                <a:rPr lang="te-IN" sz="2300" dirty="0">
-                  <a:latin typeface="Ramabhadra" panose="02000600000000000000" pitchFamily="2" charset="0"/>
-                  <a:cs typeface="Ramabhadra" panose="02000600000000000000" pitchFamily="2" charset="0"/>
-                </a:rPr>
-                <a:t>కృప కనికరముల నీడలో</a:t>
-              </a:r>
-            </a:p>
-            <a:p>
-              <a:pPr defTabSz="439781">
-                <a:defRPr/>
-              </a:pPr>
-              <a:r>
-                <a:rPr lang="te-IN" sz="2300" dirty="0">
-                  <a:latin typeface="Ramabhadra" panose="02000600000000000000" pitchFamily="2" charset="0"/>
-                  <a:cs typeface="Ramabhadra" panose="02000600000000000000" pitchFamily="2" charset="0"/>
-                </a:rPr>
-                <a:t>నన్ను చేర్చిన నా ప్రభూ</a:t>
-              </a:r>
-            </a:p>
-            <a:p>
-              <a:pPr defTabSz="439781">
-                <a:defRPr/>
-              </a:pPr>
-              <a:r>
-                <a:rPr lang="te-IN" sz="2300" dirty="0">
-                  <a:latin typeface="Ramabhadra" panose="02000600000000000000" pitchFamily="2" charset="0"/>
-                  <a:cs typeface="Ramabhadra" panose="02000600000000000000" pitchFamily="2" charset="0"/>
-                </a:rPr>
-                <a:t>జీవితమంతా స్తుతియించినా</a:t>
-              </a:r>
-            </a:p>
-            <a:p>
-              <a:pPr defTabSz="439781">
-                <a:defRPr/>
-              </a:pPr>
-              <a:r>
-                <a:rPr lang="te-IN" sz="2300" dirty="0">
-                  <a:latin typeface="Ramabhadra" panose="02000600000000000000" pitchFamily="2" charset="0"/>
-                  <a:cs typeface="Ramabhadra" panose="02000600000000000000" pitchFamily="2" charset="0"/>
-                </a:rPr>
-                <a:t>తీరునా నీ ఋణం</a:t>
-              </a:r>
-            </a:p>
-            <a:p>
-              <a:pPr defTabSz="439781">
-                <a:defRPr/>
-              </a:pPr>
-              <a:endParaRPr lang="te-IN" sz="2300" dirty="0">
+              <a:endParaRPr lang="te-IN" sz="2200" dirty="0">
                 <a:latin typeface="Ramabhadra" panose="02000600000000000000" pitchFamily="2" charset="0"/>
                 <a:cs typeface="Ramabhadra" panose="02000600000000000000" pitchFamily="2" charset="0"/>
               </a:endParaRPr>
@@ -4093,11 +3927,11 @@
                 <a:defRPr/>
               </a:pPr>
               <a:r>
-                <a:rPr lang="te-IN" sz="2300" dirty="0">
-                  <a:latin typeface="Ramabhadra" panose="02000600000000000000" pitchFamily="2" charset="0"/>
-                  <a:cs typeface="Ramabhadra" panose="02000600000000000000" pitchFamily="2" charset="0"/>
-                </a:rPr>
-                <a:t>నీదు సన్నిధిలో కాంక్షించి</a:t>
+                <a:rPr lang="te-IN" sz="2200" dirty="0">
+                  <a:latin typeface="Ramabhadra" panose="02000600000000000000" pitchFamily="2" charset="0"/>
+                  <a:cs typeface="Ramabhadra" panose="02000600000000000000" pitchFamily="2" charset="0"/>
+                </a:rPr>
+                <a:t>నాకున్న వారందరూ –</a:t>
               </a:r>
             </a:p>
             <a:p>
@@ -4105,35 +3939,58 @@
                 <a:defRPr/>
               </a:pPr>
               <a:r>
-                <a:rPr lang="te-IN" sz="2300" dirty="0">
-                  <a:latin typeface="Ramabhadra" panose="02000600000000000000" pitchFamily="2" charset="0"/>
-                  <a:cs typeface="Ramabhadra" panose="02000600000000000000" pitchFamily="2" charset="0"/>
-                </a:rPr>
-                <a:t>పాప బ్రతుకే వీడితిని</a:t>
+                <a:rPr lang="te-IN" sz="2200" dirty="0">
+                  <a:latin typeface="Ramabhadra" panose="02000600000000000000" pitchFamily="2" charset="0"/>
+                  <a:cs typeface="Ramabhadra" panose="02000600000000000000" pitchFamily="2" charset="0"/>
+                </a:rPr>
+                <a:t>నను విడచిపోయిననూ (2)</a:t>
+              </a:r>
+              <a:br>
+                <a:rPr lang="te-IN" sz="2200" dirty="0">
+                  <a:latin typeface="Ramabhadra" panose="02000600000000000000" pitchFamily="2" charset="0"/>
+                  <a:cs typeface="Ramabhadra" panose="02000600000000000000" pitchFamily="2" charset="0"/>
+                </a:rPr>
+              </a:br>
+              <a:r>
+                <a:rPr lang="te-IN" sz="2200" dirty="0">
+                  <a:latin typeface="Ramabhadra" panose="02000600000000000000" pitchFamily="2" charset="0"/>
+                  <a:cs typeface="Ramabhadra" panose="02000600000000000000" pitchFamily="2" charset="0"/>
+                </a:rPr>
+                <a:t>ఎన్నెన్నో ఇబ్బందులకు గురి చేసిననూ</a:t>
+              </a:r>
+              <a:br>
+                <a:rPr lang="te-IN" sz="2200" dirty="0">
+                  <a:latin typeface="Ramabhadra" panose="02000600000000000000" pitchFamily="2" charset="0"/>
+                  <a:cs typeface="Ramabhadra" panose="02000600000000000000" pitchFamily="2" charset="0"/>
+                </a:rPr>
+              </a:br>
+              <a:r>
+                <a:rPr lang="te-IN" sz="2200" dirty="0">
+                  <a:latin typeface="Ramabhadra" panose="02000600000000000000" pitchFamily="2" charset="0"/>
+                  <a:cs typeface="Ramabhadra" panose="02000600000000000000" pitchFamily="2" charset="0"/>
+                </a:rPr>
+                <a:t>నను నీవు విడువలేదయ్యా (2)     </a:t>
               </a:r>
             </a:p>
             <a:p>
               <a:pPr defTabSz="439781">
                 <a:defRPr/>
               </a:pPr>
-              <a:r>
-                <a:rPr lang="te-IN" sz="2300" dirty="0">
-                  <a:latin typeface="Ramabhadra" panose="02000600000000000000" pitchFamily="2" charset="0"/>
-                  <a:cs typeface="Ramabhadra" panose="02000600000000000000" pitchFamily="2" charset="0"/>
-                </a:rPr>
-                <a:t>నీదు జీవమె నిండుగ</a:t>
-              </a:r>
+              <a:endParaRPr lang="te-IN" sz="2200" dirty="0">
+                <a:latin typeface="Ramabhadra" panose="02000600000000000000" pitchFamily="2" charset="0"/>
+                <a:cs typeface="Ramabhadra" panose="02000600000000000000" pitchFamily="2" charset="0"/>
+              </a:endParaRPr>
             </a:p>
             <a:p>
               <a:pPr defTabSz="439781">
                 <a:defRPr/>
               </a:pPr>
               <a:r>
-                <a:rPr lang="te-IN" sz="2300" dirty="0">
-                  <a:latin typeface="Ramabhadra" panose="02000600000000000000" pitchFamily="2" charset="0"/>
-                  <a:cs typeface="Ramabhadra" panose="02000600000000000000" pitchFamily="2" charset="0"/>
-                </a:rPr>
-                <a:t>నాలో నింపుము నా ప్రభు</a:t>
+                <a:rPr lang="te-IN" sz="2200" dirty="0">
+                  <a:latin typeface="Ramabhadra" panose="02000600000000000000" pitchFamily="2" charset="0"/>
+                  <a:cs typeface="Ramabhadra" panose="02000600000000000000" pitchFamily="2" charset="0"/>
+                </a:rPr>
+                <a:t>నీవు లేకుండ నేనూ –</a:t>
               </a:r>
             </a:p>
             <a:p>
@@ -4141,23 +3998,37 @@
                 <a:defRPr/>
               </a:pPr>
               <a:r>
-                <a:rPr lang="te-IN" sz="2300" dirty="0">
-                  <a:latin typeface="Ramabhadra" panose="02000600000000000000" pitchFamily="2" charset="0"/>
-                  <a:cs typeface="Ramabhadra" panose="02000600000000000000" pitchFamily="2" charset="0"/>
-                </a:rPr>
-                <a:t>జీవితమంతా నీ ప్రేమనూ</a:t>
-              </a:r>
-            </a:p>
-            <a:p>
-              <a:pPr defTabSz="439781">
-                <a:defRPr/>
-              </a:pPr>
-              <a:r>
-                <a:rPr lang="te-IN" sz="2300" dirty="0">
-                  <a:latin typeface="Ramabhadra" panose="02000600000000000000" pitchFamily="2" charset="0"/>
-                  <a:cs typeface="Ramabhadra" panose="02000600000000000000" pitchFamily="2" charset="0"/>
-                </a:rPr>
-                <a:t>చాటుచు నుందును</a:t>
+                <a:rPr lang="te-IN" sz="2200" dirty="0">
+                  <a:latin typeface="Ramabhadra" panose="02000600000000000000" pitchFamily="2" charset="0"/>
+                  <a:cs typeface="Ramabhadra" panose="02000600000000000000" pitchFamily="2" charset="0"/>
+                </a:rPr>
+                <a:t>ఈ లోకంలో బ్రతుకలేనయ్యా (2)</a:t>
+              </a:r>
+              <a:br>
+                <a:rPr lang="te-IN" sz="2200" dirty="0">
+                  <a:latin typeface="Ramabhadra" panose="02000600000000000000" pitchFamily="2" charset="0"/>
+                  <a:cs typeface="Ramabhadra" panose="02000600000000000000" pitchFamily="2" charset="0"/>
+                </a:rPr>
+              </a:br>
+              <a:r>
+                <a:rPr lang="te-IN" sz="2200" dirty="0">
+                  <a:latin typeface="Ramabhadra" panose="02000600000000000000" pitchFamily="2" charset="0"/>
+                  <a:cs typeface="Ramabhadra" panose="02000600000000000000" pitchFamily="2" charset="0"/>
+                </a:rPr>
+                <a:t>నీతో కూడా ఈ లోకం నుండీ</a:t>
+              </a:r>
+              <a:br>
+                <a:rPr lang="te-IN" sz="2200" dirty="0">
+                  <a:latin typeface="Ramabhadra" panose="02000600000000000000" pitchFamily="2" charset="0"/>
+                  <a:cs typeface="Ramabhadra" panose="02000600000000000000" pitchFamily="2" charset="0"/>
+                </a:rPr>
+              </a:br>
+              <a:r>
+                <a:rPr lang="te-IN" sz="2200" dirty="0">
+                  <a:latin typeface="Ramabhadra" panose="02000600000000000000" pitchFamily="2" charset="0"/>
+                  <a:cs typeface="Ramabhadra" panose="02000600000000000000" pitchFamily="2" charset="0"/>
+                </a:rPr>
+                <a:t>పరలోకం చేరెదనేసయ్యా (2)    </a:t>
               </a:r>
             </a:p>
           </p:txBody>
@@ -4240,9 +4111,9 @@
         <p:grpSpPr>
           <a:xfrm>
             <a:off x="5104338" y="182031"/>
-            <a:ext cx="4930770" cy="6493935"/>
+            <a:ext cx="4930770" cy="6513377"/>
             <a:chOff x="160868" y="182032"/>
-            <a:chExt cx="4930770" cy="6493935"/>
+            <a:chExt cx="4930770" cy="6513377"/>
           </a:xfrm>
         </p:grpSpPr>
         <p:sp>
@@ -4315,7 +4186,7 @@
           <p:spPr>
             <a:xfrm>
               <a:off x="341837" y="324434"/>
-              <a:ext cx="4749801" cy="6232475"/>
+              <a:ext cx="4749801" cy="6370975"/>
             </a:xfrm>
             <a:prstGeom prst="rect">
               <a:avLst/>
@@ -4332,42 +4203,70 @@
                 <a:defRPr/>
               </a:pPr>
               <a:r>
-                <a:rPr lang="te-IN" sz="2100" dirty="0">
-                  <a:latin typeface="Ramabhadra" panose="02000600000000000000" pitchFamily="2" charset="0"/>
-                  <a:cs typeface="Ramabhadra" panose="02000600000000000000" pitchFamily="2" charset="0"/>
-                </a:rPr>
-                <a:t>సంఘమా - క్రైస్తవ సంఘమా</a:t>
+                <a:rPr lang="te-IN" sz="2400" dirty="0">
+                  <a:latin typeface="Ramabhadra" panose="02000600000000000000" pitchFamily="2" charset="0"/>
+                  <a:cs typeface="Ramabhadra" panose="02000600000000000000" pitchFamily="2" charset="0"/>
+                </a:rPr>
+                <a:t>శృతిచేసి నే పాడనా స్తోత్ర గీతం</a:t>
+              </a:r>
+              <a:br>
+                <a:rPr lang="te-IN" sz="2400" dirty="0">
+                  <a:latin typeface="Ramabhadra" panose="02000600000000000000" pitchFamily="2" charset="0"/>
+                  <a:cs typeface="Ramabhadra" panose="02000600000000000000" pitchFamily="2" charset="0"/>
+                </a:rPr>
+              </a:br>
+              <a:r>
+                <a:rPr lang="te-IN" sz="2400" dirty="0">
+                  <a:latin typeface="Ramabhadra" panose="02000600000000000000" pitchFamily="2" charset="0"/>
+                  <a:cs typeface="Ramabhadra" panose="02000600000000000000" pitchFamily="2" charset="0"/>
+                </a:rPr>
+                <a:t>భజియించి నే పొగడనా స్వామీ (2)</a:t>
+              </a:r>
+              <a:br>
+                <a:rPr lang="te-IN" sz="2400" dirty="0">
+                  <a:latin typeface="Ramabhadra" panose="02000600000000000000" pitchFamily="2" charset="0"/>
+                  <a:cs typeface="Ramabhadra" panose="02000600000000000000" pitchFamily="2" charset="0"/>
+                </a:rPr>
+              </a:br>
+              <a:r>
+                <a:rPr lang="te-IN" sz="2400" dirty="0">
+                  <a:latin typeface="Ramabhadra" panose="02000600000000000000" pitchFamily="2" charset="0"/>
+                  <a:cs typeface="Ramabhadra" panose="02000600000000000000" pitchFamily="2" charset="0"/>
+                </a:rPr>
+                <a:t>శృతిచేసి నే పాడనా స్తోత్ర గీతం</a:t>
+              </a:r>
+              <a:br>
+                <a:rPr lang="te-IN" sz="2400" dirty="0">
+                  <a:latin typeface="Ramabhadra" panose="02000600000000000000" pitchFamily="2" charset="0"/>
+                  <a:cs typeface="Ramabhadra" panose="02000600000000000000" pitchFamily="2" charset="0"/>
+                </a:rPr>
+              </a:br>
+              <a:r>
+                <a:rPr lang="te-IN" sz="2400" dirty="0">
+                  <a:latin typeface="Ramabhadra" panose="02000600000000000000" pitchFamily="2" charset="0"/>
+                  <a:cs typeface="Ramabhadra" panose="02000600000000000000" pitchFamily="2" charset="0"/>
+                </a:rPr>
+                <a:t>హల్లేలూయా హల్లేలూయా</a:t>
+              </a:r>
+              <a:br>
+                <a:rPr lang="te-IN" sz="2400" dirty="0">
+                  <a:latin typeface="Ramabhadra" panose="02000600000000000000" pitchFamily="2" charset="0"/>
+                  <a:cs typeface="Ramabhadra" panose="02000600000000000000" pitchFamily="2" charset="0"/>
+                </a:rPr>
+              </a:br>
+              <a:r>
+                <a:rPr lang="te-IN" sz="2400" dirty="0">
+                  <a:latin typeface="Ramabhadra" panose="02000600000000000000" pitchFamily="2" charset="0"/>
+                  <a:cs typeface="Ramabhadra" panose="02000600000000000000" pitchFamily="2" charset="0"/>
+                </a:rPr>
+                <a:t>హల్లెలూయ హల్లెలూయ హల్లేలుయా (2)     </a:t>
               </a:r>
             </a:p>
             <a:p>
               <a:pPr defTabSz="439781">
                 <a:defRPr/>
               </a:pPr>
-              <a:r>
-                <a:rPr lang="te-IN" sz="2100" dirty="0">
-                  <a:latin typeface="Ramabhadra" panose="02000600000000000000" pitchFamily="2" charset="0"/>
-                  <a:cs typeface="Ramabhadra" panose="02000600000000000000" pitchFamily="2" charset="0"/>
-                </a:rPr>
-                <a:t>యేసునే పోలి నడువుమా –</a:t>
-              </a:r>
-            </a:p>
-            <a:p>
-              <a:pPr defTabSz="439781">
-                <a:defRPr/>
-              </a:pPr>
-              <a:r>
-                <a:rPr lang="te-IN" sz="2100" dirty="0">
-                  <a:latin typeface="Ramabhadra" panose="02000600000000000000" pitchFamily="2" charset="0"/>
-                  <a:cs typeface="Ramabhadra" panose="02000600000000000000" pitchFamily="2" charset="0"/>
-                </a:rPr>
-                <a:t>క్రీస్తు మనసు కలిగియుండుమా</a:t>
-              </a:r>
-            </a:p>
-            <a:p>
-              <a:pPr defTabSz="439781">
-                <a:defRPr/>
-              </a:pPr>
-              <a:endParaRPr lang="te-IN" sz="2100" dirty="0">
+              <a:endParaRPr lang="te-IN" sz="2400" dirty="0">
                 <a:latin typeface="Ramabhadra" panose="02000600000000000000" pitchFamily="2" charset="0"/>
                 <a:cs typeface="Ramabhadra" panose="02000600000000000000" pitchFamily="2" charset="0"/>
               </a:endParaRPr>
@@ -4377,90 +4276,70 @@
                 <a:defRPr/>
               </a:pPr>
               <a:r>
-                <a:rPr lang="te-IN" sz="2100" dirty="0">
-                  <a:latin typeface="Ramabhadra" panose="02000600000000000000" pitchFamily="2" charset="0"/>
-                  <a:cs typeface="Ramabhadra" panose="02000600000000000000" pitchFamily="2" charset="0"/>
-                </a:rPr>
-                <a:t>ఆది సంఘము మోకరిల్లగ</a:t>
+                <a:rPr lang="te-IN" sz="2400" dirty="0">
+                  <a:latin typeface="Ramabhadra" panose="02000600000000000000" pitchFamily="2" charset="0"/>
+                  <a:cs typeface="Ramabhadra" panose="02000600000000000000" pitchFamily="2" charset="0"/>
+                </a:rPr>
+                <a:t>దానియేలును సింహపు బోనులో</a:t>
+              </a:r>
+              <a:br>
+                <a:rPr lang="te-IN" sz="2400" dirty="0">
+                  <a:latin typeface="Ramabhadra" panose="02000600000000000000" pitchFamily="2" charset="0"/>
+                  <a:cs typeface="Ramabhadra" panose="02000600000000000000" pitchFamily="2" charset="0"/>
+                </a:rPr>
+              </a:br>
+              <a:r>
+                <a:rPr lang="te-IN" sz="2400" dirty="0">
+                  <a:latin typeface="Ramabhadra" panose="02000600000000000000" pitchFamily="2" charset="0"/>
+                  <a:cs typeface="Ramabhadra" panose="02000600000000000000" pitchFamily="2" charset="0"/>
+                </a:rPr>
+                <a:t>కాపాడినది నీవెకదా (2)</a:t>
+              </a:r>
+              <a:br>
+                <a:rPr lang="te-IN" sz="2400" dirty="0">
+                  <a:latin typeface="Ramabhadra" panose="02000600000000000000" pitchFamily="2" charset="0"/>
+                  <a:cs typeface="Ramabhadra" panose="02000600000000000000" pitchFamily="2" charset="0"/>
+                </a:rPr>
+              </a:br>
+              <a:r>
+                <a:rPr lang="te-IN" sz="2400" dirty="0">
+                  <a:latin typeface="Ramabhadra" panose="02000600000000000000" pitchFamily="2" charset="0"/>
+                  <a:cs typeface="Ramabhadra" panose="02000600000000000000" pitchFamily="2" charset="0"/>
+                </a:rPr>
+                <a:t>జలప్రళయములో నోవాహును గాచిన</a:t>
+              </a:r>
+              <a:br>
+                <a:rPr lang="te-IN" sz="2400" dirty="0">
+                  <a:latin typeface="Ramabhadra" panose="02000600000000000000" pitchFamily="2" charset="0"/>
+                  <a:cs typeface="Ramabhadra" panose="02000600000000000000" pitchFamily="2" charset="0"/>
+                </a:rPr>
+              </a:br>
+              <a:r>
+                <a:rPr lang="te-IN" sz="2400" dirty="0">
+                  <a:latin typeface="Ramabhadra" panose="02000600000000000000" pitchFamily="2" charset="0"/>
+                  <a:cs typeface="Ramabhadra" panose="02000600000000000000" pitchFamily="2" charset="0"/>
+                </a:rPr>
+                <a:t>బలవంతుడవు నీవెకదా (2)</a:t>
+              </a:r>
+              <a:br>
+                <a:rPr lang="te-IN" sz="2400" dirty="0">
+                  <a:latin typeface="Ramabhadra" panose="02000600000000000000" pitchFamily="2" charset="0"/>
+                  <a:cs typeface="Ramabhadra" panose="02000600000000000000" pitchFamily="2" charset="0"/>
+                </a:rPr>
+              </a:br>
+              <a:r>
+                <a:rPr lang="te-IN" sz="2400" dirty="0">
+                  <a:latin typeface="Ramabhadra" panose="02000600000000000000" pitchFamily="2" charset="0"/>
+                  <a:cs typeface="Ramabhadra" panose="02000600000000000000" pitchFamily="2" charset="0"/>
+                </a:rPr>
+                <a:t>నీవెకదా (3)          </a:t>
               </a:r>
             </a:p>
             <a:p>
               <a:pPr defTabSz="439781">
                 <a:defRPr/>
               </a:pPr>
-              <a:r>
-                <a:rPr lang="te-IN" sz="2100" dirty="0">
-                  <a:latin typeface="Ramabhadra" panose="02000600000000000000" pitchFamily="2" charset="0"/>
-                  <a:cs typeface="Ramabhadra" panose="02000600000000000000" pitchFamily="2" charset="0"/>
-                </a:rPr>
-                <a:t>చెరసాల తలుపులు - బ్రద్ధలాయెను</a:t>
-              </a:r>
-            </a:p>
-            <a:p>
-              <a:pPr defTabSz="439781">
-                <a:defRPr/>
-              </a:pPr>
-              <a:r>
-                <a:rPr lang="te-IN" sz="2100" dirty="0">
-                  <a:latin typeface="Ramabhadra" panose="02000600000000000000" pitchFamily="2" charset="0"/>
-                  <a:cs typeface="Ramabhadra" panose="02000600000000000000" pitchFamily="2" charset="0"/>
-                </a:rPr>
-                <a:t>ప్రధమ సంఘము - ప్రార్థింపగ</a:t>
-              </a:r>
-            </a:p>
-            <a:p>
-              <a:pPr defTabSz="439781">
-                <a:defRPr/>
-              </a:pPr>
-              <a:r>
-                <a:rPr lang="te-IN" sz="2100" dirty="0">
-                  <a:latin typeface="Ramabhadra" panose="02000600000000000000" pitchFamily="2" charset="0"/>
-                  <a:cs typeface="Ramabhadra" panose="02000600000000000000" pitchFamily="2" charset="0"/>
-                </a:rPr>
-                <a:t>పరిశుద్ధ  ఆత్మయే – భువికేగెను (2)</a:t>
-              </a:r>
-            </a:p>
-            <a:p>
-              <a:pPr defTabSz="439781">
-                <a:defRPr/>
-              </a:pPr>
-              <a:r>
-                <a:rPr lang="te-IN" sz="2100" dirty="0">
-                  <a:latin typeface="Ramabhadra" panose="02000600000000000000" pitchFamily="2" charset="0"/>
-                  <a:cs typeface="Ramabhadra" panose="02000600000000000000" pitchFamily="2" charset="0"/>
-                </a:rPr>
-                <a:t>ఆనాటి విజ్ఞాపన - ఏమాయెను</a:t>
-              </a:r>
-            </a:p>
-            <a:p>
-              <a:pPr defTabSz="439781">
-                <a:defRPr/>
-              </a:pPr>
-              <a:r>
-                <a:rPr lang="te-IN" sz="2100" dirty="0">
-                  <a:latin typeface="Ramabhadra" panose="02000600000000000000" pitchFamily="2" charset="0"/>
-                  <a:cs typeface="Ramabhadra" panose="02000600000000000000" pitchFamily="2" charset="0"/>
-                </a:rPr>
-                <a:t>ఈనాడు అద్భుతాలు కొదువాయెను</a:t>
-              </a:r>
-            </a:p>
-            <a:p>
-              <a:pPr defTabSz="439781">
-                <a:defRPr/>
-              </a:pPr>
-              <a:r>
-                <a:rPr lang="te-IN" sz="2100" dirty="0">
-                  <a:latin typeface="Ramabhadra" panose="02000600000000000000" pitchFamily="2" charset="0"/>
-                  <a:cs typeface="Ramabhadra" panose="02000600000000000000" pitchFamily="2" charset="0"/>
-                </a:rPr>
-                <a:t>మేలుకో లెమ్ము తేజరిల్లుమా</a:t>
-              </a:r>
-            </a:p>
-            <a:p>
-              <a:pPr defTabSz="439781">
-                <a:defRPr/>
-              </a:pPr>
-              <a:endParaRPr lang="te-IN" sz="2100" dirty="0">
+              <a:endParaRPr lang="te-IN" sz="2400" dirty="0">
                 <a:latin typeface="Ramabhadra" panose="02000600000000000000" pitchFamily="2" charset="0"/>
                 <a:cs typeface="Ramabhadra" panose="02000600000000000000" pitchFamily="2" charset="0"/>
               </a:endParaRPr>
@@ -4470,83 +4349,63 @@
                 <a:defRPr/>
               </a:pPr>
               <a:r>
-                <a:rPr lang="te-IN" sz="2100" dirty="0">
-                  <a:latin typeface="Ramabhadra" panose="02000600000000000000" pitchFamily="2" charset="0"/>
-                  <a:cs typeface="Ramabhadra" panose="02000600000000000000" pitchFamily="2" charset="0"/>
-                </a:rPr>
-                <a:t>క్రియలు లేని నీ - విశ్వాసము</a:t>
-              </a:r>
-            </a:p>
-            <a:p>
-              <a:pPr defTabSz="439781">
-                <a:defRPr/>
-              </a:pPr>
-              <a:r>
-                <a:rPr lang="te-IN" sz="2100" dirty="0">
-                  <a:latin typeface="Ramabhadra" panose="02000600000000000000" pitchFamily="2" charset="0"/>
-                  <a:cs typeface="Ramabhadra" panose="02000600000000000000" pitchFamily="2" charset="0"/>
-                </a:rPr>
-                <a:t>మ్రుతమైనది - అది కొరకానిది</a:t>
-              </a:r>
-            </a:p>
-            <a:p>
-              <a:pPr defTabSz="439781">
-                <a:defRPr/>
-              </a:pPr>
-              <a:r>
-                <a:rPr lang="te-IN" sz="2100" dirty="0">
-                  <a:latin typeface="Ramabhadra" panose="02000600000000000000" pitchFamily="2" charset="0"/>
-                  <a:cs typeface="Ramabhadra" panose="02000600000000000000" pitchFamily="2" charset="0"/>
-                </a:rPr>
-                <a:t>శక్తి లేని నీ - భక్తి మొత్తము</a:t>
-              </a:r>
-            </a:p>
-            <a:p>
-              <a:pPr defTabSz="439781">
-                <a:defRPr/>
-              </a:pPr>
-              <a:r>
-                <a:rPr lang="te-IN" sz="2100" dirty="0">
-                  <a:latin typeface="Ramabhadra" panose="02000600000000000000" pitchFamily="2" charset="0"/>
-                  <a:cs typeface="Ramabhadra" panose="02000600000000000000" pitchFamily="2" charset="0"/>
-                </a:rPr>
-                <a:t>వ్యర్థమైనది అది మేలు చేయదు (2)</a:t>
-              </a:r>
-            </a:p>
-            <a:p>
-              <a:pPr defTabSz="439781">
-                <a:defRPr/>
-              </a:pPr>
-              <a:r>
-                <a:rPr lang="te-IN" sz="2100" dirty="0">
-                  <a:latin typeface="Ramabhadra" panose="02000600000000000000" pitchFamily="2" charset="0"/>
-                  <a:cs typeface="Ramabhadra" panose="02000600000000000000" pitchFamily="2" charset="0"/>
-                </a:rPr>
-                <a:t>నామకార్ధమును విడిచి నమ్మీ చూడుము</a:t>
-              </a:r>
-            </a:p>
-            <a:p>
-              <a:pPr defTabSz="439781">
-                <a:defRPr/>
-              </a:pPr>
-              <a:r>
-                <a:rPr lang="te-IN" sz="2100" dirty="0">
-                  <a:latin typeface="Ramabhadra" panose="02000600000000000000" pitchFamily="2" charset="0"/>
-                  <a:cs typeface="Ramabhadra" panose="02000600000000000000" pitchFamily="2" charset="0"/>
-                </a:rPr>
-                <a:t>యదార్థమైన మనసును ఆశించుము</a:t>
-              </a:r>
-            </a:p>
-            <a:p>
-              <a:pPr defTabSz="439781">
-                <a:defRPr/>
-              </a:pPr>
-              <a:r>
-                <a:rPr lang="te-IN" sz="2100" dirty="0">
-                  <a:latin typeface="Ramabhadra" panose="02000600000000000000" pitchFamily="2" charset="0"/>
-                  <a:cs typeface="Ramabhadra" panose="02000600000000000000" pitchFamily="2" charset="0"/>
-                </a:rPr>
-                <a:t>మేలుకో లెమ్ము తేజరిల్లుమా</a:t>
+                <a:rPr lang="te-IN" sz="2400" dirty="0">
+                  <a:latin typeface="Ramabhadra" panose="02000600000000000000" pitchFamily="2" charset="0"/>
+                  <a:cs typeface="Ramabhadra" panose="02000600000000000000" pitchFamily="2" charset="0"/>
+                </a:rPr>
+                <a:t>సమరయ స్త్రీని కరుణతో బ్రోచిన</a:t>
+              </a:r>
+              <a:br>
+                <a:rPr lang="te-IN" sz="2400" dirty="0">
+                  <a:latin typeface="Ramabhadra" panose="02000600000000000000" pitchFamily="2" charset="0"/>
+                  <a:cs typeface="Ramabhadra" panose="02000600000000000000" pitchFamily="2" charset="0"/>
+                </a:rPr>
+              </a:br>
+              <a:r>
+                <a:rPr lang="te-IN" sz="2400" dirty="0">
+                  <a:latin typeface="Ramabhadra" panose="02000600000000000000" pitchFamily="2" charset="0"/>
+                  <a:cs typeface="Ramabhadra" panose="02000600000000000000" pitchFamily="2" charset="0"/>
+                </a:rPr>
+                <a:t>సత్య హితుడవు నీవెకదా (2)</a:t>
+              </a:r>
+              <a:br>
+                <a:rPr lang="te-IN" sz="2400" dirty="0">
+                  <a:latin typeface="Ramabhadra" panose="02000600000000000000" pitchFamily="2" charset="0"/>
+                  <a:cs typeface="Ramabhadra" panose="02000600000000000000" pitchFamily="2" charset="0"/>
+                </a:rPr>
+              </a:br>
+              <a:r>
+                <a:rPr lang="te-IN" sz="2400" dirty="0">
+                  <a:latin typeface="Ramabhadra" panose="02000600000000000000" pitchFamily="2" charset="0"/>
+                  <a:cs typeface="Ramabhadra" panose="02000600000000000000" pitchFamily="2" charset="0"/>
+                </a:rPr>
+                <a:t>పాపులకొరకై ప్రాణమునిచ్చిన</a:t>
+              </a:r>
+              <a:br>
+                <a:rPr lang="te-IN" sz="2400" dirty="0">
+                  <a:latin typeface="Ramabhadra" panose="02000600000000000000" pitchFamily="2" charset="0"/>
+                  <a:cs typeface="Ramabhadra" panose="02000600000000000000" pitchFamily="2" charset="0"/>
+                </a:rPr>
+              </a:br>
+              <a:r>
+                <a:rPr lang="te-IN" sz="2400" dirty="0">
+                  <a:latin typeface="Ramabhadra" panose="02000600000000000000" pitchFamily="2" charset="0"/>
+                  <a:cs typeface="Ramabhadra" panose="02000600000000000000" pitchFamily="2" charset="0"/>
+                </a:rPr>
+                <a:t>కరుణామయుడవు నీవెకదా (2)</a:t>
+              </a:r>
+              <a:br>
+                <a:rPr lang="te-IN" sz="2400" dirty="0">
+                  <a:latin typeface="Ramabhadra" panose="02000600000000000000" pitchFamily="2" charset="0"/>
+                  <a:cs typeface="Ramabhadra" panose="02000600000000000000" pitchFamily="2" charset="0"/>
+                </a:rPr>
+              </a:br>
+              <a:r>
+                <a:rPr lang="te-IN" sz="2400" dirty="0">
+                  <a:latin typeface="Ramabhadra" panose="02000600000000000000" pitchFamily="2" charset="0"/>
+                  <a:cs typeface="Ramabhadra" panose="02000600000000000000" pitchFamily="2" charset="0"/>
+                </a:rPr>
+                <a:t>నీవెకదా (3)          </a:t>
               </a:r>
             </a:p>
           </p:txBody>

--- a/songsTemplate.pptx
+++ b/songsTemplate.pptx
@@ -255,7 +255,7 @@
           <a:p>
             <a:fld id="{F1102B08-ED9E-409F-B95F-09CAA1DAF6E0}" type="datetimeFigureOut">
               <a:rPr lang="en-IN" smtClean="0"/>
-              <a:t>25-01-2025</a:t>
+              <a:t>01-02-2025</a:t>
             </a:fld>
             <a:endParaRPr lang="en-IN"/>
           </a:p>
@@ -425,7 +425,7 @@
           <a:p>
             <a:fld id="{F1102B08-ED9E-409F-B95F-09CAA1DAF6E0}" type="datetimeFigureOut">
               <a:rPr lang="en-IN" smtClean="0"/>
-              <a:t>25-01-2025</a:t>
+              <a:t>01-02-2025</a:t>
             </a:fld>
             <a:endParaRPr lang="en-IN"/>
           </a:p>
@@ -605,7 +605,7 @@
           <a:p>
             <a:fld id="{F1102B08-ED9E-409F-B95F-09CAA1DAF6E0}" type="datetimeFigureOut">
               <a:rPr lang="en-IN" smtClean="0"/>
-              <a:t>25-01-2025</a:t>
+              <a:t>01-02-2025</a:t>
             </a:fld>
             <a:endParaRPr lang="en-IN"/>
           </a:p>
@@ -775,7 +775,7 @@
           <a:p>
             <a:fld id="{F1102B08-ED9E-409F-B95F-09CAA1DAF6E0}" type="datetimeFigureOut">
               <a:rPr lang="en-IN" smtClean="0"/>
-              <a:t>25-01-2025</a:t>
+              <a:t>01-02-2025</a:t>
             </a:fld>
             <a:endParaRPr lang="en-IN"/>
           </a:p>
@@ -1019,7 +1019,7 @@
           <a:p>
             <a:fld id="{F1102B08-ED9E-409F-B95F-09CAA1DAF6E0}" type="datetimeFigureOut">
               <a:rPr lang="en-IN" smtClean="0"/>
-              <a:t>25-01-2025</a:t>
+              <a:t>01-02-2025</a:t>
             </a:fld>
             <a:endParaRPr lang="en-IN"/>
           </a:p>
@@ -1251,7 +1251,7 @@
           <a:p>
             <a:fld id="{F1102B08-ED9E-409F-B95F-09CAA1DAF6E0}" type="datetimeFigureOut">
               <a:rPr lang="en-IN" smtClean="0"/>
-              <a:t>25-01-2025</a:t>
+              <a:t>01-02-2025</a:t>
             </a:fld>
             <a:endParaRPr lang="en-IN"/>
           </a:p>
@@ -1618,7 +1618,7 @@
           <a:p>
             <a:fld id="{F1102B08-ED9E-409F-B95F-09CAA1DAF6E0}" type="datetimeFigureOut">
               <a:rPr lang="en-IN" smtClean="0"/>
-              <a:t>25-01-2025</a:t>
+              <a:t>01-02-2025</a:t>
             </a:fld>
             <a:endParaRPr lang="en-IN"/>
           </a:p>
@@ -1736,7 +1736,7 @@
           <a:p>
             <a:fld id="{F1102B08-ED9E-409F-B95F-09CAA1DAF6E0}" type="datetimeFigureOut">
               <a:rPr lang="en-IN" smtClean="0"/>
-              <a:t>25-01-2025</a:t>
+              <a:t>01-02-2025</a:t>
             </a:fld>
             <a:endParaRPr lang="en-IN"/>
           </a:p>
@@ -1831,7 +1831,7 @@
           <a:p>
             <a:fld id="{F1102B08-ED9E-409F-B95F-09CAA1DAF6E0}" type="datetimeFigureOut">
               <a:rPr lang="en-IN" smtClean="0"/>
-              <a:t>25-01-2025</a:t>
+              <a:t>01-02-2025</a:t>
             </a:fld>
             <a:endParaRPr lang="en-IN"/>
           </a:p>
@@ -2108,7 +2108,7 @@
           <a:p>
             <a:fld id="{F1102B08-ED9E-409F-B95F-09CAA1DAF6E0}" type="datetimeFigureOut">
               <a:rPr lang="en-IN" smtClean="0"/>
-              <a:t>25-01-2025</a:t>
+              <a:t>01-02-2025</a:t>
             </a:fld>
             <a:endParaRPr lang="en-IN"/>
           </a:p>
@@ -2365,7 +2365,7 @@
           <a:p>
             <a:fld id="{F1102B08-ED9E-409F-B95F-09CAA1DAF6E0}" type="datetimeFigureOut">
               <a:rPr lang="en-IN" smtClean="0"/>
-              <a:t>25-01-2025</a:t>
+              <a:t>01-02-2025</a:t>
             </a:fld>
             <a:endParaRPr lang="en-IN"/>
           </a:p>
@@ -2578,7 +2578,7 @@
           <a:p>
             <a:fld id="{F1102B08-ED9E-409F-B95F-09CAA1DAF6E0}" type="datetimeFigureOut">
               <a:rPr lang="en-IN" smtClean="0"/>
-              <a:t>25-01-2025</a:t>
+              <a:t>01-02-2025</a:t>
             </a:fld>
             <a:endParaRPr lang="en-IN"/>
           </a:p>
@@ -2998,9 +2998,9 @@
         <p:grpSpPr>
           <a:xfrm>
             <a:off x="160868" y="182032"/>
-            <a:ext cx="4648200" cy="6493935"/>
+            <a:ext cx="4669370" cy="6493935"/>
             <a:chOff x="160868" y="182032"/>
-            <a:chExt cx="4648200" cy="6493935"/>
+            <a:chExt cx="4669370" cy="6493935"/>
           </a:xfrm>
         </p:grpSpPr>
         <p:sp>
@@ -3072,8 +3072,8 @@
           </p:nvSpPr>
           <p:spPr>
             <a:xfrm>
-              <a:off x="325928" y="716954"/>
-              <a:ext cx="4483140" cy="4893647"/>
+              <a:off x="347098" y="328311"/>
+              <a:ext cx="4483140" cy="5262979"/>
             </a:xfrm>
             <a:prstGeom prst="rect">
               <a:avLst/>
@@ -3094,7 +3094,7 @@
                   <a:latin typeface="Ramabhadra" panose="02000600000000000000" pitchFamily="2" charset="0"/>
                   <a:cs typeface="Ramabhadra" panose="02000600000000000000" pitchFamily="2" charset="0"/>
                 </a:rPr>
-                <a:t>సన్నుతించెదను - దయాళుడవు నీవని</a:t>
+                <a:t>సదాకాలము నీతో నేను </a:t>
               </a:r>
             </a:p>
             <a:p>
@@ -3106,17 +3106,20 @@
                   <a:latin typeface="Ramabhadra" panose="02000600000000000000" pitchFamily="2" charset="0"/>
                   <a:cs typeface="Ramabhadra" panose="02000600000000000000" pitchFamily="2" charset="0"/>
                 </a:rPr>
-                <a:t>యెహోవా నీవే దయాళుడవని నిను సన్నుతించెదను - 2</a:t>
+                <a:t>జీవించెదను యేసయ్య</a:t>
               </a:r>
             </a:p>
             <a:p>
               <a:pPr defTabSz="439781">
                 <a:defRPr/>
               </a:pPr>
-              <a:endParaRPr lang="te-IN" sz="2400" dirty="0">
-                <a:latin typeface="Ramabhadra" panose="02000600000000000000" pitchFamily="2" charset="0"/>
-                <a:cs typeface="Ramabhadra" panose="02000600000000000000" pitchFamily="2" charset="0"/>
-              </a:endParaRPr>
+              <a:r>
+                <a:rPr lang="te-IN" sz="2400" dirty="0">
+                  <a:latin typeface="Ramabhadra" panose="02000600000000000000" pitchFamily="2" charset="0"/>
+                  <a:cs typeface="Ramabhadra" panose="02000600000000000000" pitchFamily="2" charset="0"/>
+                </a:rPr>
+                <a:t>యేసయ్యా యేసయ్యా</a:t>
+              </a:r>
             </a:p>
             <a:p>
               <a:pPr defTabSz="439781">
@@ -3127,26 +3130,8 @@
                   <a:latin typeface="Ramabhadra" panose="02000600000000000000" pitchFamily="2" charset="0"/>
                   <a:cs typeface="Ramabhadra" panose="02000600000000000000" pitchFamily="2" charset="0"/>
                 </a:rPr>
-                <a:t>సర్వ సత్యములో నను నీవు నడిపి ఆదరించిన –</a:t>
-              </a:r>
-              <a:r>
-                <a:rPr lang="en-IN" sz="2400" dirty="0">
-                  <a:latin typeface="Ramabhadra" panose="02000600000000000000" pitchFamily="2" charset="0"/>
-                  <a:cs typeface="Ramabhadra" panose="02000600000000000000" pitchFamily="2" charset="0"/>
-                </a:rPr>
-                <a:t> </a:t>
-              </a:r>
-              <a:r>
-                <a:rPr lang="te-IN" sz="2400" dirty="0">
-                  <a:latin typeface="Ramabhadra" panose="02000600000000000000" pitchFamily="2" charset="0"/>
-                  <a:cs typeface="Ramabhadra" panose="02000600000000000000" pitchFamily="2" charset="0"/>
-                </a:rPr>
-                <a:t>పరిశుద్ధాత్ముడా</a:t>
-              </a:r>
-              <a:endParaRPr lang="en-IN" sz="2400" dirty="0">
-                <a:latin typeface="Ramabhadra" panose="02000600000000000000" pitchFamily="2" charset="0"/>
-                <a:cs typeface="Ramabhadra" panose="02000600000000000000" pitchFamily="2" charset="0"/>
-              </a:endParaRPr>
+                <a:t>యేసయ్యా యేసయ్యా (2)</a:t>
+              </a:r>
             </a:p>
             <a:p>
               <a:pPr defTabSz="439781">
@@ -3157,7 +3142,7 @@
                   <a:latin typeface="Ramabhadra" panose="02000600000000000000" pitchFamily="2" charset="0"/>
                   <a:cs typeface="Ramabhadra" panose="02000600000000000000" pitchFamily="2" charset="0"/>
                 </a:rPr>
-                <a:t>కృపాధారము నీవెగా -</a:t>
+                <a:t>        </a:t>
               </a:r>
             </a:p>
             <a:p>
@@ -3169,17 +3154,33 @@
                   <a:latin typeface="Ramabhadra" panose="02000600000000000000" pitchFamily="2" charset="0"/>
                   <a:cs typeface="Ramabhadra" panose="02000600000000000000" pitchFamily="2" charset="0"/>
                 </a:rPr>
-                <a:t>షాలేమురాజా నిను సన్మానించెదను</a:t>
+                <a:t>పాపాల ఊభిలో పడియున్న నన్ను</a:t>
               </a:r>
             </a:p>
             <a:p>
               <a:pPr defTabSz="439781">
                 <a:defRPr/>
               </a:pPr>
-              <a:endParaRPr lang="te-IN" sz="2400" dirty="0">
-                <a:latin typeface="Ramabhadra" panose="02000600000000000000" pitchFamily="2" charset="0"/>
-                <a:cs typeface="Ramabhadra" panose="02000600000000000000" pitchFamily="2" charset="0"/>
-              </a:endParaRPr>
+              <a:r>
+                <a:rPr lang="te-IN" sz="2400" dirty="0">
+                  <a:latin typeface="Ramabhadra" panose="02000600000000000000" pitchFamily="2" charset="0"/>
+                  <a:cs typeface="Ramabhadra" panose="02000600000000000000" pitchFamily="2" charset="0"/>
+                </a:rPr>
+                <a:t>నీ ప్రేమతో పైకి లేపావయ్యా (2)</a:t>
+              </a:r>
+              <a:br>
+                <a:rPr lang="te-IN" sz="2400" dirty="0">
+                  <a:latin typeface="Ramabhadra" panose="02000600000000000000" pitchFamily="2" charset="0"/>
+                  <a:cs typeface="Ramabhadra" panose="02000600000000000000" pitchFamily="2" charset="0"/>
+                </a:rPr>
+              </a:br>
+              <a:r>
+                <a:rPr lang="te-IN" sz="2400" dirty="0">
+                  <a:latin typeface="Ramabhadra" panose="02000600000000000000" pitchFamily="2" charset="0"/>
+                  <a:cs typeface="Ramabhadra" panose="02000600000000000000" pitchFamily="2" charset="0"/>
+                </a:rPr>
+                <a:t>ఏ తోడులేని నాకు నా తోడుగా</a:t>
+              </a:r>
             </a:p>
             <a:p>
               <a:pPr defTabSz="439781">
@@ -3190,21 +3191,7 @@
                   <a:latin typeface="Ramabhadra" panose="02000600000000000000" pitchFamily="2" charset="0"/>
                   <a:cs typeface="Ramabhadra" panose="02000600000000000000" pitchFamily="2" charset="0"/>
                 </a:rPr>
-                <a:t>నీ కను చూపుల పరిధిలో</a:t>
-              </a:r>
-              <a:r>
-                <a:rPr lang="en-IN" sz="2400" dirty="0">
-                  <a:latin typeface="Ramabhadra" panose="02000600000000000000" pitchFamily="2" charset="0"/>
-                  <a:cs typeface="Ramabhadra" panose="02000600000000000000" pitchFamily="2" charset="0"/>
-                </a:rPr>
-                <a:t> </a:t>
-              </a:r>
-              <a:r>
-                <a:rPr lang="te-IN" sz="2400" dirty="0">
-                  <a:latin typeface="Ramabhadra" panose="02000600000000000000" pitchFamily="2" charset="0"/>
-                  <a:cs typeface="Ramabhadra" panose="02000600000000000000" pitchFamily="2" charset="0"/>
-                </a:rPr>
-                <a:t>నన్ను నిలిపి</a:t>
+                <a:t>నాఅండగా నీవు  నిలిచావయ్యా (2)</a:t>
               </a:r>
             </a:p>
             <a:p>
@@ -3216,7 +3203,7 @@
                   <a:latin typeface="Ramabhadra" panose="02000600000000000000" pitchFamily="2" charset="0"/>
                   <a:cs typeface="Ramabhadra" panose="02000600000000000000" pitchFamily="2" charset="0"/>
                 </a:rPr>
-                <a:t>చూపితివా నీ వాత్సల్యమును</a:t>
+                <a:t>         </a:t>
               </a:r>
             </a:p>
             <a:p>
@@ -3228,37 +3215,46 @@
                   <a:latin typeface="Ramabhadra" panose="02000600000000000000" pitchFamily="2" charset="0"/>
                   <a:cs typeface="Ramabhadra" panose="02000600000000000000" pitchFamily="2" charset="0"/>
                 </a:rPr>
-                <a:t>కృపానిధివి నీవెగా –</a:t>
-              </a:r>
-              <a:r>
-                <a:rPr lang="en-IN" sz="2400" dirty="0">
-                  <a:latin typeface="Ramabhadra" panose="02000600000000000000" pitchFamily="2" charset="0"/>
-                  <a:cs typeface="Ramabhadra" panose="02000600000000000000" pitchFamily="2" charset="0"/>
-                </a:rPr>
-                <a:t> </a:t>
-              </a:r>
-              <a:r>
-                <a:rPr lang="te-IN" sz="2400" dirty="0">
-                  <a:latin typeface="Ramabhadra" panose="02000600000000000000" pitchFamily="2" charset="0"/>
-                  <a:cs typeface="Ramabhadra" panose="02000600000000000000" pitchFamily="2" charset="0"/>
-                </a:rPr>
-                <a:t>నా యేసురాజా</a:t>
-              </a:r>
-              <a:endParaRPr lang="en-IN" sz="2400" dirty="0">
-                <a:latin typeface="Ramabhadra" panose="02000600000000000000" pitchFamily="2" charset="0"/>
-                <a:cs typeface="Ramabhadra" panose="02000600000000000000" pitchFamily="2" charset="0"/>
-              </a:endParaRPr>
-            </a:p>
-            <a:p>
-              <a:pPr defTabSz="439781">
-                <a:defRPr/>
-              </a:pPr>
-              <a:r>
-                <a:rPr lang="te-IN" sz="2400" dirty="0">
-                  <a:latin typeface="Ramabhadra" panose="02000600000000000000" pitchFamily="2" charset="0"/>
-                  <a:cs typeface="Ramabhadra" panose="02000600000000000000" pitchFamily="2" charset="0"/>
-                </a:rPr>
-                <a:t>నిను సన్మానించెదను</a:t>
+                <a:t>నీ వాత్సల్యమును నాపై చూపించి</a:t>
+              </a:r>
+              <a:br>
+                <a:rPr lang="te-IN" sz="2400" dirty="0">
+                  <a:latin typeface="Ramabhadra" panose="02000600000000000000" pitchFamily="2" charset="0"/>
+                  <a:cs typeface="Ramabhadra" panose="02000600000000000000" pitchFamily="2" charset="0"/>
+                </a:rPr>
+              </a:br>
+              <a:r>
+                <a:rPr lang="te-IN" sz="2400" dirty="0">
+                  <a:latin typeface="Ramabhadra" panose="02000600000000000000" pitchFamily="2" charset="0"/>
+                  <a:cs typeface="Ramabhadra" panose="02000600000000000000" pitchFamily="2" charset="0"/>
+                </a:rPr>
+                <a:t>నీ సాక్షిగా నన్ను నిలిపావయ్యా (2)</a:t>
+              </a:r>
+              <a:br>
+                <a:rPr lang="te-IN" sz="2400" dirty="0">
+                  <a:latin typeface="Ramabhadra" panose="02000600000000000000" pitchFamily="2" charset="0"/>
+                  <a:cs typeface="Ramabhadra" panose="02000600000000000000" pitchFamily="2" charset="0"/>
+                </a:rPr>
+              </a:br>
+              <a:r>
+                <a:rPr lang="te-IN" sz="2400" dirty="0">
+                  <a:latin typeface="Ramabhadra" panose="02000600000000000000" pitchFamily="2" charset="0"/>
+                  <a:cs typeface="Ramabhadra" panose="02000600000000000000" pitchFamily="2" charset="0"/>
+                </a:rPr>
+                <a:t>ఆశ్చర్యకార్యములు ఎన్నో చేసి</a:t>
+              </a:r>
+              <a:br>
+                <a:rPr lang="te-IN" sz="2400" dirty="0">
+                  <a:latin typeface="Ramabhadra" panose="02000600000000000000" pitchFamily="2" charset="0"/>
+                  <a:cs typeface="Ramabhadra" panose="02000600000000000000" pitchFamily="2" charset="0"/>
+                </a:rPr>
+              </a:br>
+              <a:r>
+                <a:rPr lang="te-IN" sz="2400" dirty="0">
+                  <a:latin typeface="Ramabhadra" panose="02000600000000000000" pitchFamily="2" charset="0"/>
+                  <a:cs typeface="Ramabhadra" panose="02000600000000000000" pitchFamily="2" charset="0"/>
+                </a:rPr>
+                <a:t>నీ పాత్రగా నన్ను మలిచావయ్యా (2)</a:t>
               </a:r>
             </a:p>
           </p:txBody>
@@ -3341,9 +3337,9 @@
         <p:grpSpPr>
           <a:xfrm>
             <a:off x="5104338" y="182031"/>
-            <a:ext cx="5696992" cy="6493935"/>
+            <a:ext cx="4922300" cy="6493935"/>
             <a:chOff x="160868" y="182032"/>
-            <a:chExt cx="5696992" cy="6493935"/>
+            <a:chExt cx="4922300" cy="6493935"/>
           </a:xfrm>
         </p:grpSpPr>
         <p:sp>
@@ -3415,8 +3411,8 @@
           </p:nvSpPr>
           <p:spPr>
             <a:xfrm>
-              <a:off x="243398" y="245146"/>
-              <a:ext cx="5614462" cy="6001643"/>
+              <a:off x="402136" y="332377"/>
+              <a:ext cx="4681032" cy="6001643"/>
             </a:xfrm>
             <a:prstGeom prst="rect">
               <a:avLst/>
@@ -3434,7 +3430,20 @@
                   <a:latin typeface="Ramabhadra" panose="02000600000000000000" pitchFamily="2" charset="0"/>
                   <a:cs typeface="Ramabhadra" panose="02000600000000000000" pitchFamily="2" charset="0"/>
                 </a:rPr>
-                <a:t>దేవా నా దేవా – నీవే నా కాపరి</a:t>
+                <a:t>స్తోత్రబలి స్తోత్రబలి</a:t>
+              </a:r>
+              <a:endParaRPr lang="en-IN" sz="2400" dirty="0">
+                <a:latin typeface="Ramabhadra" panose="02000600000000000000" pitchFamily="2" charset="0"/>
+                <a:cs typeface="Ramabhadra" panose="02000600000000000000" pitchFamily="2" charset="0"/>
+              </a:endParaRPr>
+            </a:p>
+            <a:p>
+              <a:r>
+                <a:rPr lang="te-IN" sz="2400" dirty="0">
+                  <a:latin typeface="Ramabhadra" panose="02000600000000000000" pitchFamily="2" charset="0"/>
+                  <a:cs typeface="Ramabhadra" panose="02000600000000000000" pitchFamily="2" charset="0"/>
+                </a:rPr>
+                <a:t>మంచిదేవా నీకేనయ్యా</a:t>
               </a:r>
               <a:br>
                 <a:rPr lang="te-IN" sz="2400" dirty="0">
@@ -3447,55 +3456,20 @@
                   <a:latin typeface="Ramabhadra" panose="02000600000000000000" pitchFamily="2" charset="0"/>
                   <a:cs typeface="Ramabhadra" panose="02000600000000000000" pitchFamily="2" charset="0"/>
                 </a:rPr>
-                <a:t>నీ ప్రేమ నీ క్షమా – ఎంతో గొప్పది (2)</a:t>
-              </a:r>
-              <a:br>
-                <a:rPr lang="te-IN" sz="2400" dirty="0">
-                  <a:latin typeface="Ramabhadra" panose="02000600000000000000" pitchFamily="2" charset="0"/>
-                  <a:cs typeface="Ramabhadra" panose="02000600000000000000" pitchFamily="2" charset="0"/>
-                </a:rPr>
-              </a:br>
-              <a:r>
-                <a:rPr lang="te-IN" sz="2400" dirty="0">
-                  <a:latin typeface="Ramabhadra" panose="02000600000000000000" pitchFamily="2" charset="0"/>
-                  <a:cs typeface="Ramabhadra" panose="02000600000000000000" pitchFamily="2" charset="0"/>
-                </a:rPr>
-                <a:t>ఆరాధింతును హృదయాంతరంగములో</a:t>
-              </a:r>
-              <a:br>
-                <a:rPr lang="te-IN" sz="2400" dirty="0">
-                  <a:latin typeface="Ramabhadra" panose="02000600000000000000" pitchFamily="2" charset="0"/>
-                  <a:cs typeface="Ramabhadra" panose="02000600000000000000" pitchFamily="2" charset="0"/>
-                </a:rPr>
-              </a:br>
-              <a:r>
-                <a:rPr lang="te-IN" sz="2400" dirty="0">
-                  <a:latin typeface="Ramabhadra" panose="02000600000000000000" pitchFamily="2" charset="0"/>
-                  <a:cs typeface="Ramabhadra" panose="02000600000000000000" pitchFamily="2" charset="0"/>
-                </a:rPr>
-                <a:t>స్తుతించెదను నీ పాద సన్నిధిలో (2)</a:t>
-              </a:r>
-              <a:br>
-                <a:rPr lang="te-IN" sz="2400" dirty="0">
-                  <a:latin typeface="Ramabhadra" panose="02000600000000000000" pitchFamily="2" charset="0"/>
-                  <a:cs typeface="Ramabhadra" panose="02000600000000000000" pitchFamily="2" charset="0"/>
-                </a:rPr>
-              </a:br>
-              <a:r>
-                <a:rPr lang="te-IN" sz="2400" dirty="0">
-                  <a:latin typeface="Ramabhadra" panose="02000600000000000000" pitchFamily="2" charset="0"/>
-                  <a:cs typeface="Ramabhadra" panose="02000600000000000000" pitchFamily="2" charset="0"/>
-                </a:rPr>
-                <a:t>నీవే కదా దేవుడవు – (2)</a:t>
-              </a:r>
-            </a:p>
-            <a:p>
-              <a:r>
-                <a:rPr lang="te-IN" sz="2400" dirty="0">
-                  <a:latin typeface="Ramabhadra" panose="02000600000000000000" pitchFamily="2" charset="0"/>
-                  <a:cs typeface="Ramabhadra" panose="02000600000000000000" pitchFamily="2" charset="0"/>
-                </a:rPr>
-                <a:t>దేవా యేసు దేవా (4)     </a:t>
+                <a:t>శుభవేళ ఆనందమే</a:t>
+              </a:r>
+              <a:endParaRPr lang="en-IN" sz="2400" dirty="0">
+                <a:latin typeface="Ramabhadra" panose="02000600000000000000" pitchFamily="2" charset="0"/>
+                <a:cs typeface="Ramabhadra" panose="02000600000000000000" pitchFamily="2" charset="0"/>
+              </a:endParaRPr>
+            </a:p>
+            <a:p>
+              <a:r>
+                <a:rPr lang="te-IN" sz="2400" dirty="0">
+                  <a:latin typeface="Ramabhadra" panose="02000600000000000000" pitchFamily="2" charset="0"/>
+                  <a:cs typeface="Ramabhadra" panose="02000600000000000000" pitchFamily="2" charset="0"/>
+                </a:rPr>
+                <a:t>నా తండ్రి నీ చిరుపాదమే (2)</a:t>
               </a:r>
             </a:p>
             <a:p>
@@ -3510,7 +3484,20 @@
                   <a:latin typeface="Ramabhadra" panose="02000600000000000000" pitchFamily="2" charset="0"/>
                   <a:cs typeface="Ramabhadra" panose="02000600000000000000" pitchFamily="2" charset="0"/>
                 </a:rPr>
-                <a:t>పాపము నుండి విడిపించినావు</a:t>
+                <a:t>నిన్నటి బాధలంతా</a:t>
+              </a:r>
+              <a:endParaRPr lang="en-IN" sz="2400" dirty="0">
+                <a:latin typeface="Ramabhadra" panose="02000600000000000000" pitchFamily="2" charset="0"/>
+                <a:cs typeface="Ramabhadra" panose="02000600000000000000" pitchFamily="2" charset="0"/>
+              </a:endParaRPr>
+            </a:p>
+            <a:p>
+              <a:r>
+                <a:rPr lang="te-IN" sz="2400" dirty="0">
+                  <a:latin typeface="Ramabhadra" panose="02000600000000000000" pitchFamily="2" charset="0"/>
+                  <a:cs typeface="Ramabhadra" panose="02000600000000000000" pitchFamily="2" charset="0"/>
+                </a:rPr>
+                <a:t>నేటికి మాయమయ్యే (2)</a:t>
               </a:r>
               <a:br>
                 <a:rPr lang="te-IN" sz="2400" dirty="0">
@@ -3523,7 +3510,20 @@
                   <a:latin typeface="Ramabhadra" panose="02000600000000000000" pitchFamily="2" charset="0"/>
                   <a:cs typeface="Ramabhadra" panose="02000600000000000000" pitchFamily="2" charset="0"/>
                 </a:rPr>
-                <a:t>పరిశుద్ధుని చేసి ప్రేమించినావు (2)</a:t>
+                <a:t>నెమ్మది ఉదయించె</a:t>
+              </a:r>
+              <a:endParaRPr lang="en-IN" sz="2400" dirty="0">
+                <a:latin typeface="Ramabhadra" panose="02000600000000000000" pitchFamily="2" charset="0"/>
+                <a:cs typeface="Ramabhadra" panose="02000600000000000000" pitchFamily="2" charset="0"/>
+              </a:endParaRPr>
+            </a:p>
+            <a:p>
+              <a:r>
+                <a:rPr lang="te-IN" sz="2400" dirty="0">
+                  <a:latin typeface="Ramabhadra" panose="02000600000000000000" pitchFamily="2" charset="0"/>
+                  <a:cs typeface="Ramabhadra" panose="02000600000000000000" pitchFamily="2" charset="0"/>
+                </a:rPr>
+                <a:t>అది శాశ్వతమైనదయ్యా (2)</a:t>
               </a:r>
               <a:br>
                 <a:rPr lang="te-IN" sz="2400" dirty="0">
@@ -3536,23 +3536,15 @@
                   <a:latin typeface="Ramabhadra" panose="02000600000000000000" pitchFamily="2" charset="0"/>
                   <a:cs typeface="Ramabhadra" panose="02000600000000000000" pitchFamily="2" charset="0"/>
                 </a:rPr>
-                <a:t>నీవే కదా దేవుడవు – (2)</a:t>
-              </a:r>
-              <a:br>
-                <a:rPr lang="te-IN" sz="2400" dirty="0">
-                  <a:latin typeface="Ramabhadra" panose="02000600000000000000" pitchFamily="2" charset="0"/>
-                  <a:cs typeface="Ramabhadra" panose="02000600000000000000" pitchFamily="2" charset="0"/>
-                </a:rPr>
-              </a:br>
-              <a:r>
-                <a:rPr lang="te-IN" sz="2400" dirty="0">
-                  <a:latin typeface="Ramabhadra" panose="02000600000000000000" pitchFamily="2" charset="0"/>
-                  <a:cs typeface="Ramabhadra" panose="02000600000000000000" pitchFamily="2" charset="0"/>
-                </a:rPr>
-                <a:t>దేవా యేసు దేవా (4)       </a:t>
-              </a:r>
-            </a:p>
-            <a:p>
+                <a:t>కోటి కోటి స్తోత్రం డాడి (3</a:t>
+              </a:r>
+              <a:r>
+                <a:rPr lang="en-IN" sz="2400" dirty="0">
+                  <a:latin typeface="Ramabhadra" panose="02000600000000000000" pitchFamily="2" charset="0"/>
+                  <a:cs typeface="Ramabhadra" panose="02000600000000000000" pitchFamily="2" charset="0"/>
+                </a:rPr>
+                <a:t>)</a:t>
+              </a:r>
               <a:endParaRPr lang="te-IN" sz="2400" dirty="0">
                 <a:latin typeface="Ramabhadra" panose="02000600000000000000" pitchFamily="2" charset="0"/>
                 <a:cs typeface="Ramabhadra" panose="02000600000000000000" pitchFamily="2" charset="0"/>
@@ -3564,7 +3556,29 @@
                   <a:latin typeface="Ramabhadra" panose="02000600000000000000" pitchFamily="2" charset="0"/>
                   <a:cs typeface="Ramabhadra" panose="02000600000000000000" pitchFamily="2" charset="0"/>
                 </a:rPr>
-                <a:t>పరిశుద్ధాత్మను నాలో నింపావు</a:t>
+                <a:t>   </a:t>
+              </a:r>
+            </a:p>
+            <a:p>
+              <a:r>
+                <a:rPr lang="te-IN" sz="2400" dirty="0">
+                  <a:latin typeface="Ramabhadra" panose="02000600000000000000" pitchFamily="2" charset="0"/>
+                  <a:cs typeface="Ramabhadra" panose="02000600000000000000" pitchFamily="2" charset="0"/>
+                </a:rPr>
+                <a:t>రేయంతా కాచితివి</a:t>
+              </a:r>
+              <a:endParaRPr lang="en-IN" sz="2400" dirty="0">
+                <a:latin typeface="Ramabhadra" panose="02000600000000000000" pitchFamily="2" charset="0"/>
+                <a:cs typeface="Ramabhadra" panose="02000600000000000000" pitchFamily="2" charset="0"/>
+              </a:endParaRPr>
+            </a:p>
+            <a:p>
+              <a:r>
+                <a:rPr lang="te-IN" sz="2400" dirty="0">
+                  <a:latin typeface="Ramabhadra" panose="02000600000000000000" pitchFamily="2" charset="0"/>
+                  <a:cs typeface="Ramabhadra" panose="02000600000000000000" pitchFamily="2" charset="0"/>
+                </a:rPr>
+                <a:t>మరు దినమిచ్చితివి (2)</a:t>
               </a:r>
               <a:br>
                 <a:rPr lang="te-IN" sz="2400" dirty="0">
@@ -3577,7 +3591,20 @@
                   <a:latin typeface="Ramabhadra" panose="02000600000000000000" pitchFamily="2" charset="0"/>
                   <a:cs typeface="Ramabhadra" panose="02000600000000000000" pitchFamily="2" charset="0"/>
                 </a:rPr>
-                <a:t>మట్టి దేహమును మహిమతో నింపావు (2)</a:t>
+                <a:t>మరువని నా స్నేహమా</a:t>
+              </a:r>
+              <a:endParaRPr lang="en-IN" sz="2400" dirty="0">
+                <a:latin typeface="Ramabhadra" panose="02000600000000000000" pitchFamily="2" charset="0"/>
+                <a:cs typeface="Ramabhadra" panose="02000600000000000000" pitchFamily="2" charset="0"/>
+              </a:endParaRPr>
+            </a:p>
+            <a:p>
+              <a:r>
+                <a:rPr lang="te-IN" sz="2400" dirty="0">
+                  <a:latin typeface="Ramabhadra" panose="02000600000000000000" pitchFamily="2" charset="0"/>
+                  <a:cs typeface="Ramabhadra" panose="02000600000000000000" pitchFamily="2" charset="0"/>
+                </a:rPr>
+                <a:t>నీతో కలసి సంతోషింతును (2)</a:t>
               </a:r>
               <a:br>
                 <a:rPr lang="te-IN" sz="2400" dirty="0">
@@ -3590,20 +3617,7 @@
                   <a:latin typeface="Ramabhadra" panose="02000600000000000000" pitchFamily="2" charset="0"/>
                   <a:cs typeface="Ramabhadra" panose="02000600000000000000" pitchFamily="2" charset="0"/>
                 </a:rPr>
-                <a:t>నీవే కదా దేవుడవు – (2)</a:t>
-              </a:r>
-              <a:br>
-                <a:rPr lang="te-IN" sz="2400" dirty="0">
-                  <a:latin typeface="Ramabhadra" panose="02000600000000000000" pitchFamily="2" charset="0"/>
-                  <a:cs typeface="Ramabhadra" panose="02000600000000000000" pitchFamily="2" charset="0"/>
-                </a:rPr>
-              </a:br>
-              <a:r>
-                <a:rPr lang="te-IN" sz="2400" dirty="0">
-                  <a:latin typeface="Ramabhadra" panose="02000600000000000000" pitchFamily="2" charset="0"/>
-                  <a:cs typeface="Ramabhadra" panose="02000600000000000000" pitchFamily="2" charset="0"/>
-                </a:rPr>
-                <a:t>దేవా యేసు దేవా (4)       </a:t>
+                <a:t>కోటి కోటి స్తోత్రం డాడి (3)</a:t>
               </a:r>
             </a:p>
           </p:txBody>
@@ -3716,9 +3730,9 @@
         <p:grpSpPr>
           <a:xfrm>
             <a:off x="160868" y="182032"/>
-            <a:ext cx="5472868" cy="6551396"/>
+            <a:ext cx="5726868" cy="6703968"/>
             <a:chOff x="160868" y="182032"/>
-            <a:chExt cx="5472868" cy="6551396"/>
+            <a:chExt cx="5726868" cy="6703968"/>
           </a:xfrm>
         </p:grpSpPr>
         <p:sp>
@@ -3790,8 +3804,8 @@
           </p:nvSpPr>
           <p:spPr>
             <a:xfrm>
-              <a:off x="238125" y="208565"/>
-              <a:ext cx="5395611" cy="6524863"/>
+              <a:off x="492125" y="330359"/>
+              <a:ext cx="5395611" cy="6555641"/>
             </a:xfrm>
             <a:prstGeom prst="rect">
               <a:avLst/>
@@ -3808,57 +3822,42 @@
                 <a:defRPr/>
               </a:pPr>
               <a:r>
-                <a:rPr lang="te-IN" sz="2200" dirty="0">
-                  <a:latin typeface="Ramabhadra" panose="02000600000000000000" pitchFamily="2" charset="0"/>
-                  <a:cs typeface="Ramabhadra" panose="02000600000000000000" pitchFamily="2" charset="0"/>
-                </a:rPr>
-                <a:t>ఎంత మంచి దేవుడవయ్యా</a:t>
-              </a:r>
-              <a:br>
-                <a:rPr lang="te-IN" sz="2200" dirty="0">
-                  <a:latin typeface="Ramabhadra" panose="02000600000000000000" pitchFamily="2" charset="0"/>
-                  <a:cs typeface="Ramabhadra" panose="02000600000000000000" pitchFamily="2" charset="0"/>
-                </a:rPr>
-              </a:br>
-              <a:r>
-                <a:rPr lang="te-IN" sz="2200" dirty="0">
-                  <a:latin typeface="Ramabhadra" panose="02000600000000000000" pitchFamily="2" charset="0"/>
-                  <a:cs typeface="Ramabhadra" panose="02000600000000000000" pitchFamily="2" charset="0"/>
-                </a:rPr>
-                <a:t>ఎంత మంచి దేవుడవేసయ్యా</a:t>
-              </a:r>
-              <a:br>
-                <a:rPr lang="te-IN" sz="2200" dirty="0">
-                  <a:latin typeface="Ramabhadra" panose="02000600000000000000" pitchFamily="2" charset="0"/>
-                  <a:cs typeface="Ramabhadra" panose="02000600000000000000" pitchFamily="2" charset="0"/>
-                </a:rPr>
-              </a:br>
-              <a:r>
-                <a:rPr lang="te-IN" sz="2200" dirty="0">
-                  <a:latin typeface="Ramabhadra" panose="02000600000000000000" pitchFamily="2" charset="0"/>
-                  <a:cs typeface="Ramabhadra" panose="02000600000000000000" pitchFamily="2" charset="0"/>
-                </a:rPr>
-                <a:t>చింతలన్ని తీరేనయ్యా నిను చేరగా</a:t>
-              </a:r>
-              <a:br>
-                <a:rPr lang="te-IN" sz="2200" dirty="0">
-                  <a:latin typeface="Ramabhadra" panose="02000600000000000000" pitchFamily="2" charset="0"/>
-                  <a:cs typeface="Ramabhadra" panose="02000600000000000000" pitchFamily="2" charset="0"/>
-                </a:rPr>
-              </a:br>
-              <a:r>
-                <a:rPr lang="te-IN" sz="2200" dirty="0">
-                  <a:latin typeface="Ramabhadra" panose="02000600000000000000" pitchFamily="2" charset="0"/>
-                  <a:cs typeface="Ramabhadra" panose="02000600000000000000" pitchFamily="2" charset="0"/>
-                </a:rPr>
-                <a:t>ఎంత మంచి దేవుడవేసయ్యా (2)        </a:t>
-              </a:r>
+                <a:rPr lang="te-IN" sz="2100" dirty="0">
+                  <a:latin typeface="Ramabhadra" panose="02000600000000000000" pitchFamily="2" charset="0"/>
+                  <a:cs typeface="Ramabhadra" panose="02000600000000000000" pitchFamily="2" charset="0"/>
+                </a:rPr>
+                <a:t>యేసే నా పరిహారి</a:t>
+              </a:r>
+              <a:endParaRPr lang="en-IN" sz="2100" dirty="0">
+                <a:latin typeface="Ramabhadra" panose="02000600000000000000" pitchFamily="2" charset="0"/>
+                <a:cs typeface="Ramabhadra" panose="02000600000000000000" pitchFamily="2" charset="0"/>
+              </a:endParaRPr>
             </a:p>
             <a:p>
               <a:pPr defTabSz="439781">
                 <a:defRPr/>
               </a:pPr>
-              <a:endParaRPr lang="te-IN" sz="2200" dirty="0">
+              <a:r>
+                <a:rPr lang="te-IN" sz="2100" dirty="0">
+                  <a:latin typeface="Ramabhadra" panose="02000600000000000000" pitchFamily="2" charset="0"/>
+                  <a:cs typeface="Ramabhadra" panose="02000600000000000000" pitchFamily="2" charset="0"/>
+                </a:rPr>
+                <a:t>ప్రియ యేసే నా పరిహారి</a:t>
+              </a:r>
+              <a:br>
+                <a:rPr lang="te-IN" sz="2100" dirty="0">
+                  <a:latin typeface="Ramabhadra" panose="02000600000000000000" pitchFamily="2" charset="0"/>
+                  <a:cs typeface="Ramabhadra" panose="02000600000000000000" pitchFamily="2" charset="0"/>
+                </a:rPr>
+              </a:br>
+              <a:r>
+                <a:rPr lang="te-IN" sz="2100" dirty="0">
+                  <a:latin typeface="Ramabhadra" panose="02000600000000000000" pitchFamily="2" charset="0"/>
+                  <a:cs typeface="Ramabhadra" panose="02000600000000000000" pitchFamily="2" charset="0"/>
+                </a:rPr>
+                <a:t>నా జీవిత కాలమెల్ల</a:t>
+              </a:r>
+              <a:endParaRPr lang="en-IN" sz="2100" dirty="0">
                 <a:latin typeface="Ramabhadra" panose="02000600000000000000" pitchFamily="2" charset="0"/>
                 <a:cs typeface="Ramabhadra" panose="02000600000000000000" pitchFamily="2" charset="0"/>
               </a:endParaRPr>
@@ -3868,56 +3867,75 @@
                 <a:defRPr/>
               </a:pPr>
               <a:r>
-                <a:rPr lang="te-IN" sz="2200" dirty="0">
-                  <a:latin typeface="Ramabhadra" panose="02000600000000000000" pitchFamily="2" charset="0"/>
-                  <a:cs typeface="Ramabhadra" panose="02000600000000000000" pitchFamily="2" charset="0"/>
-                </a:rPr>
-                <a:t>ఘోరపాపినైన నేనూ </a:t>
+                <a:rPr lang="te-IN" sz="2100" dirty="0">
+                  <a:latin typeface="Ramabhadra" panose="02000600000000000000" pitchFamily="2" charset="0"/>
+                  <a:cs typeface="Ramabhadra" panose="02000600000000000000" pitchFamily="2" charset="0"/>
+                </a:rPr>
+                <a:t>ప్రియ ప్రభువే నా పరిహారి (2)         </a:t>
               </a:r>
             </a:p>
             <a:p>
               <a:pPr defTabSz="439781">
                 <a:defRPr/>
               </a:pPr>
-              <a:r>
-                <a:rPr lang="te-IN" sz="2200" dirty="0">
-                  <a:latin typeface="Ramabhadra" panose="02000600000000000000" pitchFamily="2" charset="0"/>
-                  <a:cs typeface="Ramabhadra" panose="02000600000000000000" pitchFamily="2" charset="0"/>
-                </a:rPr>
-                <a:t>దూరంగా పారిపోగా (2)</a:t>
-              </a:r>
-              <a:br>
-                <a:rPr lang="te-IN" sz="2200" dirty="0">
-                  <a:latin typeface="Ramabhadra" panose="02000600000000000000" pitchFamily="2" charset="0"/>
-                  <a:cs typeface="Ramabhadra" panose="02000600000000000000" pitchFamily="2" charset="0"/>
-                </a:rPr>
-              </a:br>
-              <a:r>
-                <a:rPr lang="te-IN" sz="2200" dirty="0">
-                  <a:latin typeface="Ramabhadra" panose="02000600000000000000" pitchFamily="2" charset="0"/>
-                  <a:cs typeface="Ramabhadra" panose="02000600000000000000" pitchFamily="2" charset="0"/>
-                </a:rPr>
-                <a:t>నీ ప్రేమతో నను క్షమియించి</a:t>
-              </a:r>
-              <a:br>
-                <a:rPr lang="te-IN" sz="2200" dirty="0">
-                  <a:latin typeface="Ramabhadra" panose="02000600000000000000" pitchFamily="2" charset="0"/>
-                  <a:cs typeface="Ramabhadra" panose="02000600000000000000" pitchFamily="2" charset="0"/>
-                </a:rPr>
-              </a:br>
-              <a:r>
-                <a:rPr lang="te-IN" sz="2200" dirty="0">
-                  <a:latin typeface="Ramabhadra" panose="02000600000000000000" pitchFamily="2" charset="0"/>
-                  <a:cs typeface="Ramabhadra" panose="02000600000000000000" pitchFamily="2" charset="0"/>
-                </a:rPr>
-                <a:t>నను హత్తుకొన్నావయ్యా (2)       </a:t>
-              </a:r>
+              <a:endParaRPr lang="te-IN" sz="2100" dirty="0">
+                <a:latin typeface="Ramabhadra" panose="02000600000000000000" pitchFamily="2" charset="0"/>
+                <a:cs typeface="Ramabhadra" panose="02000600000000000000" pitchFamily="2" charset="0"/>
+              </a:endParaRPr>
             </a:p>
             <a:p>
               <a:pPr defTabSz="439781">
                 <a:defRPr/>
               </a:pPr>
-              <a:endParaRPr lang="te-IN" sz="2200" dirty="0">
+              <a:r>
+                <a:rPr lang="te-IN" sz="2100" dirty="0">
+                  <a:latin typeface="Ramabhadra" panose="02000600000000000000" pitchFamily="2" charset="0"/>
+                  <a:cs typeface="Ramabhadra" panose="02000600000000000000" pitchFamily="2" charset="0"/>
+                </a:rPr>
+                <a:t>ఎన్ని కష్టాలు కలిగిననూ</a:t>
+              </a:r>
+            </a:p>
+            <a:p>
+              <a:pPr defTabSz="439781">
+                <a:defRPr/>
+              </a:pPr>
+              <a:r>
+                <a:rPr lang="te-IN" sz="2100" dirty="0">
+                  <a:latin typeface="Ramabhadra" panose="02000600000000000000" pitchFamily="2" charset="0"/>
+                  <a:cs typeface="Ramabhadra" panose="02000600000000000000" pitchFamily="2" charset="0"/>
+                </a:rPr>
+                <a:t>నన్ను కృంగించె భాదలెన్నో</a:t>
+              </a:r>
+            </a:p>
+            <a:p>
+              <a:pPr defTabSz="439781">
+                <a:defRPr/>
+              </a:pPr>
+              <a:r>
+                <a:rPr lang="te-IN" sz="2100" dirty="0">
+                  <a:latin typeface="Ramabhadra" panose="02000600000000000000" pitchFamily="2" charset="0"/>
+                  <a:cs typeface="Ramabhadra" panose="02000600000000000000" pitchFamily="2" charset="0"/>
+                </a:rPr>
+                <a:t>ఎన్ని నష్టాలు వాటిల్లినా </a:t>
+              </a:r>
+            </a:p>
+            <a:p>
+              <a:pPr defTabSz="439781">
+                <a:defRPr/>
+              </a:pPr>
+              <a:r>
+                <a:rPr lang="te-IN" sz="2100" dirty="0">
+                  <a:latin typeface="Ramabhadra" panose="02000600000000000000" pitchFamily="2" charset="0"/>
+                  <a:cs typeface="Ramabhadra" panose="02000600000000000000" pitchFamily="2" charset="0"/>
+                </a:rPr>
+                <a:t>ప్రియ ప్రభువే నా పరిహారి (2)        </a:t>
+              </a:r>
+            </a:p>
+            <a:p>
+              <a:pPr defTabSz="439781">
+                <a:defRPr/>
+              </a:pPr>
+              <a:endParaRPr lang="te-IN" sz="2100" dirty="0">
                 <a:latin typeface="Ramabhadra" panose="02000600000000000000" pitchFamily="2" charset="0"/>
                 <a:cs typeface="Ramabhadra" panose="02000600000000000000" pitchFamily="2" charset="0"/>
               </a:endParaRPr>
@@ -3927,11 +3945,11 @@
                 <a:defRPr/>
               </a:pPr>
               <a:r>
-                <a:rPr lang="te-IN" sz="2200" dirty="0">
-                  <a:latin typeface="Ramabhadra" panose="02000600000000000000" pitchFamily="2" charset="0"/>
-                  <a:cs typeface="Ramabhadra" panose="02000600000000000000" pitchFamily="2" charset="0"/>
-                </a:rPr>
-                <a:t>నాకున్న వారందరూ –</a:t>
+                <a:rPr lang="te-IN" sz="2100" dirty="0">
+                  <a:latin typeface="Ramabhadra" panose="02000600000000000000" pitchFamily="2" charset="0"/>
+                  <a:cs typeface="Ramabhadra" panose="02000600000000000000" pitchFamily="2" charset="0"/>
+                </a:rPr>
+                <a:t>నన్ను సాతాను వెంబడించినా</a:t>
               </a:r>
             </a:p>
             <a:p>
@@ -3939,44 +3957,38 @@
                 <a:defRPr/>
               </a:pPr>
               <a:r>
-                <a:rPr lang="te-IN" sz="2200" dirty="0">
-                  <a:latin typeface="Ramabhadra" panose="02000600000000000000" pitchFamily="2" charset="0"/>
-                  <a:cs typeface="Ramabhadra" panose="02000600000000000000" pitchFamily="2" charset="0"/>
-                </a:rPr>
-                <a:t>నను విడచిపోయిననూ (2)</a:t>
+                <a:rPr lang="te-IN" sz="2100" dirty="0">
+                  <a:latin typeface="Ramabhadra" panose="02000600000000000000" pitchFamily="2" charset="0"/>
+                  <a:cs typeface="Ramabhadra" panose="02000600000000000000" pitchFamily="2" charset="0"/>
+                </a:rPr>
+                <a:t>నన్ను శత్రువు ఎదిరించినా (2)</a:t>
               </a:r>
               <a:br>
-                <a:rPr lang="te-IN" sz="2200" dirty="0">
+                <a:rPr lang="te-IN" sz="2100" dirty="0">
                   <a:latin typeface="Ramabhadra" panose="02000600000000000000" pitchFamily="2" charset="0"/>
                   <a:cs typeface="Ramabhadra" panose="02000600000000000000" pitchFamily="2" charset="0"/>
                 </a:rPr>
               </a:br>
               <a:r>
-                <a:rPr lang="te-IN" sz="2200" dirty="0">
-                  <a:latin typeface="Ramabhadra" panose="02000600000000000000" pitchFamily="2" charset="0"/>
-                  <a:cs typeface="Ramabhadra" panose="02000600000000000000" pitchFamily="2" charset="0"/>
-                </a:rPr>
-                <a:t>ఎన్నెన్నో ఇబ్బందులకు గురి చేసిననూ</a:t>
-              </a:r>
-              <a:br>
-                <a:rPr lang="te-IN" sz="2200" dirty="0">
-                  <a:latin typeface="Ramabhadra" panose="02000600000000000000" pitchFamily="2" charset="0"/>
-                  <a:cs typeface="Ramabhadra" panose="02000600000000000000" pitchFamily="2" charset="0"/>
-                </a:rPr>
-              </a:br>
-              <a:r>
-                <a:rPr lang="te-IN" sz="2200" dirty="0">
-                  <a:latin typeface="Ramabhadra" panose="02000600000000000000" pitchFamily="2" charset="0"/>
-                  <a:cs typeface="Ramabhadra" panose="02000600000000000000" pitchFamily="2" charset="0"/>
-                </a:rPr>
-                <a:t>నను నీవు విడువలేదయ్యా (2)     </a:t>
+                <a:rPr lang="te-IN" sz="2100" dirty="0">
+                  <a:latin typeface="Ramabhadra" panose="02000600000000000000" pitchFamily="2" charset="0"/>
+                  <a:cs typeface="Ramabhadra" panose="02000600000000000000" pitchFamily="2" charset="0"/>
+                </a:rPr>
+                <a:t>పలు నిందలు నను చుట్టినా</a:t>
               </a:r>
             </a:p>
             <a:p>
               <a:pPr defTabSz="439781">
                 <a:defRPr/>
               </a:pPr>
-              <a:endParaRPr lang="te-IN" sz="2200" dirty="0">
+              <a:r>
+                <a:rPr lang="te-IN" sz="2100" dirty="0">
+                  <a:latin typeface="Ramabhadra" panose="02000600000000000000" pitchFamily="2" charset="0"/>
+                  <a:cs typeface="Ramabhadra" panose="02000600000000000000" pitchFamily="2" charset="0"/>
+                </a:rPr>
+                <a:t>ప్రియ ప్రభువే నా పరిహారి (2)</a:t>
+              </a:r>
+              <a:endParaRPr lang="en-IN" sz="2100" dirty="0">
                 <a:latin typeface="Ramabhadra" panose="02000600000000000000" pitchFamily="2" charset="0"/>
                 <a:cs typeface="Ramabhadra" panose="02000600000000000000" pitchFamily="2" charset="0"/>
               </a:endParaRPr>
@@ -3985,50 +3997,71 @@
               <a:pPr defTabSz="439781">
                 <a:defRPr/>
               </a:pPr>
-              <a:r>
-                <a:rPr lang="te-IN" sz="2200" dirty="0">
-                  <a:latin typeface="Ramabhadra" panose="02000600000000000000" pitchFamily="2" charset="0"/>
-                  <a:cs typeface="Ramabhadra" panose="02000600000000000000" pitchFamily="2" charset="0"/>
-                </a:rPr>
-                <a:t>నీవు లేకుండ నేనూ –</a:t>
-              </a:r>
+              <a:endParaRPr lang="en-IN" sz="2100" dirty="0">
+                <a:latin typeface="Ramabhadra" panose="02000600000000000000" pitchFamily="2" charset="0"/>
+                <a:cs typeface="Ramabhadra" panose="02000600000000000000" pitchFamily="2" charset="0"/>
+              </a:endParaRPr>
             </a:p>
             <a:p>
               <a:pPr defTabSz="439781">
                 <a:defRPr/>
               </a:pPr>
               <a:r>
-                <a:rPr lang="te-IN" sz="2200" dirty="0">
-                  <a:latin typeface="Ramabhadra" panose="02000600000000000000" pitchFamily="2" charset="0"/>
-                  <a:cs typeface="Ramabhadra" panose="02000600000000000000" pitchFamily="2" charset="0"/>
-                </a:rPr>
-                <a:t>ఈ లోకంలో బ్రతుకలేనయ్యా (2)</a:t>
+                <a:rPr lang="te-IN" sz="2100" dirty="0">
+                  <a:latin typeface="Ramabhadra" panose="02000600000000000000" pitchFamily="2" charset="0"/>
+                  <a:cs typeface="Ramabhadra" panose="02000600000000000000" pitchFamily="2" charset="0"/>
+                </a:rPr>
+                <a:t>మణి మాన్యాలు లేకున్ననూ</a:t>
+              </a:r>
+            </a:p>
+            <a:p>
+              <a:pPr defTabSz="439781">
+                <a:defRPr/>
+              </a:pPr>
+              <a:r>
+                <a:rPr lang="te-IN" sz="2100" dirty="0">
+                  <a:latin typeface="Ramabhadra" panose="02000600000000000000" pitchFamily="2" charset="0"/>
+                  <a:cs typeface="Ramabhadra" panose="02000600000000000000" pitchFamily="2" charset="0"/>
+                </a:rPr>
+                <a:t>పలు వేదనలు వేధించినా (2)</a:t>
               </a:r>
               <a:br>
-                <a:rPr lang="te-IN" sz="2200" dirty="0">
+                <a:rPr lang="te-IN" sz="2100" dirty="0">
                   <a:latin typeface="Ramabhadra" panose="02000600000000000000" pitchFamily="2" charset="0"/>
                   <a:cs typeface="Ramabhadra" panose="02000600000000000000" pitchFamily="2" charset="0"/>
                 </a:rPr>
               </a:br>
               <a:r>
-                <a:rPr lang="te-IN" sz="2200" dirty="0">
-                  <a:latin typeface="Ramabhadra" panose="02000600000000000000" pitchFamily="2" charset="0"/>
-                  <a:cs typeface="Ramabhadra" panose="02000600000000000000" pitchFamily="2" charset="0"/>
-                </a:rPr>
-                <a:t>నీతో కూడా ఈ లోకం నుండీ</a:t>
+                <a:rPr lang="te-IN" sz="2100" dirty="0">
+                  <a:latin typeface="Ramabhadra" panose="02000600000000000000" pitchFamily="2" charset="0"/>
+                  <a:cs typeface="Ramabhadra" panose="02000600000000000000" pitchFamily="2" charset="0"/>
+                </a:rPr>
+                <a:t>నరులెల్లరు నను విడచినా</a:t>
               </a:r>
               <a:br>
-                <a:rPr lang="te-IN" sz="2200" dirty="0">
+                <a:rPr lang="te-IN" sz="2100" dirty="0">
                   <a:latin typeface="Ramabhadra" panose="02000600000000000000" pitchFamily="2" charset="0"/>
                   <a:cs typeface="Ramabhadra" panose="02000600000000000000" pitchFamily="2" charset="0"/>
                 </a:rPr>
               </a:br>
               <a:r>
-                <a:rPr lang="te-IN" sz="2200" dirty="0">
-                  <a:latin typeface="Ramabhadra" panose="02000600000000000000" pitchFamily="2" charset="0"/>
-                  <a:cs typeface="Ramabhadra" panose="02000600000000000000" pitchFamily="2" charset="0"/>
-                </a:rPr>
-                <a:t>పరలోకం చేరెదనేసయ్యా (2)    </a:t>
+                <a:rPr lang="te-IN" sz="2100" dirty="0">
+                  <a:latin typeface="Ramabhadra" panose="02000600000000000000" pitchFamily="2" charset="0"/>
+                  <a:cs typeface="Ramabhadra" panose="02000600000000000000" pitchFamily="2" charset="0"/>
+                </a:rPr>
+                <a:t>ప్రియ ప్రభువే నా పరిహారి (2)         </a:t>
+              </a:r>
+            </a:p>
+            <a:p>
+              <a:pPr defTabSz="439781">
+                <a:defRPr/>
+              </a:pPr>
+              <a:r>
+                <a:rPr lang="te-IN" sz="2100" dirty="0">
+                  <a:latin typeface="Ramabhadra" panose="02000600000000000000" pitchFamily="2" charset="0"/>
+                  <a:cs typeface="Ramabhadra" panose="02000600000000000000" pitchFamily="2" charset="0"/>
+                </a:rPr>
+                <a:t>     </a:t>
               </a:r>
             </a:p>
           </p:txBody>
@@ -4111,9 +4144,9 @@
         <p:grpSpPr>
           <a:xfrm>
             <a:off x="5104338" y="182031"/>
-            <a:ext cx="4930770" cy="6513377"/>
+            <a:ext cx="4943470" cy="6493935"/>
             <a:chOff x="160868" y="182032"/>
-            <a:chExt cx="4930770" cy="6513377"/>
+            <a:chExt cx="4943470" cy="6493935"/>
           </a:xfrm>
         </p:grpSpPr>
         <p:sp>
@@ -4185,8 +4218,8 @@
           </p:nvSpPr>
           <p:spPr>
             <a:xfrm>
-              <a:off x="341837" y="324434"/>
-              <a:ext cx="4749801" cy="6370975"/>
+              <a:off x="354537" y="481596"/>
+              <a:ext cx="4749801" cy="5632311"/>
             </a:xfrm>
             <a:prstGeom prst="rect">
               <a:avLst/>
@@ -4207,59 +4240,31 @@
                   <a:latin typeface="Ramabhadra" panose="02000600000000000000" pitchFamily="2" charset="0"/>
                   <a:cs typeface="Ramabhadra" panose="02000600000000000000" pitchFamily="2" charset="0"/>
                 </a:rPr>
-                <a:t>శృతిచేసి నే పాడనా స్తోత్ర గీతం</a:t>
-              </a:r>
-              <a:br>
-                <a:rPr lang="te-IN" sz="2400" dirty="0">
-                  <a:latin typeface="Ramabhadra" panose="02000600000000000000" pitchFamily="2" charset="0"/>
-                  <a:cs typeface="Ramabhadra" panose="02000600000000000000" pitchFamily="2" charset="0"/>
-                </a:rPr>
-              </a:br>
-              <a:r>
-                <a:rPr lang="te-IN" sz="2400" dirty="0">
-                  <a:latin typeface="Ramabhadra" panose="02000600000000000000" pitchFamily="2" charset="0"/>
-                  <a:cs typeface="Ramabhadra" panose="02000600000000000000" pitchFamily="2" charset="0"/>
-                </a:rPr>
-                <a:t>భజియించి నే పొగడనా స్వామీ (2)</a:t>
-              </a:r>
-              <a:br>
-                <a:rPr lang="te-IN" sz="2400" dirty="0">
-                  <a:latin typeface="Ramabhadra" panose="02000600000000000000" pitchFamily="2" charset="0"/>
-                  <a:cs typeface="Ramabhadra" panose="02000600000000000000" pitchFamily="2" charset="0"/>
-                </a:rPr>
-              </a:br>
-              <a:r>
-                <a:rPr lang="te-IN" sz="2400" dirty="0">
-                  <a:latin typeface="Ramabhadra" panose="02000600000000000000" pitchFamily="2" charset="0"/>
-                  <a:cs typeface="Ramabhadra" panose="02000600000000000000" pitchFamily="2" charset="0"/>
-                </a:rPr>
-                <a:t>శృతిచేసి నే పాడనా స్తోత్ర గీతం</a:t>
-              </a:r>
-              <a:br>
-                <a:rPr lang="te-IN" sz="2400" dirty="0">
-                  <a:latin typeface="Ramabhadra" panose="02000600000000000000" pitchFamily="2" charset="0"/>
-                  <a:cs typeface="Ramabhadra" panose="02000600000000000000" pitchFamily="2" charset="0"/>
-                </a:rPr>
-              </a:br>
-              <a:r>
-                <a:rPr lang="te-IN" sz="2400" dirty="0">
-                  <a:latin typeface="Ramabhadra" panose="02000600000000000000" pitchFamily="2" charset="0"/>
-                  <a:cs typeface="Ramabhadra" panose="02000600000000000000" pitchFamily="2" charset="0"/>
-                </a:rPr>
-                <a:t>హల్లేలూయా హల్లేలూయా</a:t>
-              </a:r>
-              <a:br>
-                <a:rPr lang="te-IN" sz="2400" dirty="0">
-                  <a:latin typeface="Ramabhadra" panose="02000600000000000000" pitchFamily="2" charset="0"/>
-                  <a:cs typeface="Ramabhadra" panose="02000600000000000000" pitchFamily="2" charset="0"/>
-                </a:rPr>
-              </a:br>
-              <a:r>
-                <a:rPr lang="te-IN" sz="2400" dirty="0">
-                  <a:latin typeface="Ramabhadra" panose="02000600000000000000" pitchFamily="2" charset="0"/>
-                  <a:cs typeface="Ramabhadra" panose="02000600000000000000" pitchFamily="2" charset="0"/>
-                </a:rPr>
-                <a:t>హల్లెలూయ హల్లెలూయ హల్లేలుయా (2)     </a:t>
+                <a:t>శాశ్వతమైనది నా యేసుని ప్రేమ </a:t>
+              </a:r>
+            </a:p>
+            <a:p>
+              <a:pPr defTabSz="439781">
+                <a:defRPr/>
+              </a:pPr>
+              <a:r>
+                <a:rPr lang="te-IN" sz="2400" dirty="0">
+                  <a:latin typeface="Ramabhadra" panose="02000600000000000000" pitchFamily="2" charset="0"/>
+                  <a:cs typeface="Ramabhadra" panose="02000600000000000000" pitchFamily="2" charset="0"/>
+                </a:rPr>
+                <a:t>నిరంతరం ఉండునది నిజ దేవుని ప్రేమ </a:t>
+              </a:r>
+            </a:p>
+            <a:p>
+              <a:pPr defTabSz="439781">
+                <a:defRPr/>
+              </a:pPr>
+              <a:r>
+                <a:rPr lang="te-IN" sz="2400" dirty="0">
+                  <a:latin typeface="Ramabhadra" panose="02000600000000000000" pitchFamily="2" charset="0"/>
+                  <a:cs typeface="Ramabhadra" panose="02000600000000000000" pitchFamily="2" charset="0"/>
+                </a:rPr>
+                <a:t>యేసుని ప్రేమ  నా యేసుని ప్రేమ </a:t>
               </a:r>
             </a:p>
             <a:p>
@@ -4280,59 +4285,55 @@
                   <a:latin typeface="Ramabhadra" panose="02000600000000000000" pitchFamily="2" charset="0"/>
                   <a:cs typeface="Ramabhadra" panose="02000600000000000000" pitchFamily="2" charset="0"/>
                 </a:rPr>
-                <a:t>దానియేలును సింహపు బోనులో</a:t>
-              </a:r>
-              <a:br>
-                <a:rPr lang="te-IN" sz="2400" dirty="0">
-                  <a:latin typeface="Ramabhadra" panose="02000600000000000000" pitchFamily="2" charset="0"/>
-                  <a:cs typeface="Ramabhadra" panose="02000600000000000000" pitchFamily="2" charset="0"/>
-                </a:rPr>
-              </a:br>
-              <a:r>
-                <a:rPr lang="te-IN" sz="2400" dirty="0">
-                  <a:latin typeface="Ramabhadra" panose="02000600000000000000" pitchFamily="2" charset="0"/>
-                  <a:cs typeface="Ramabhadra" panose="02000600000000000000" pitchFamily="2" charset="0"/>
-                </a:rPr>
-                <a:t>కాపాడినది నీవెకదా (2)</a:t>
-              </a:r>
-              <a:br>
-                <a:rPr lang="te-IN" sz="2400" dirty="0">
-                  <a:latin typeface="Ramabhadra" panose="02000600000000000000" pitchFamily="2" charset="0"/>
-                  <a:cs typeface="Ramabhadra" panose="02000600000000000000" pitchFamily="2" charset="0"/>
-                </a:rPr>
-              </a:br>
-              <a:r>
-                <a:rPr lang="te-IN" sz="2400" dirty="0">
-                  <a:latin typeface="Ramabhadra" panose="02000600000000000000" pitchFamily="2" charset="0"/>
-                  <a:cs typeface="Ramabhadra" panose="02000600000000000000" pitchFamily="2" charset="0"/>
-                </a:rPr>
-                <a:t>జలప్రళయములో నోవాహును గాచిన</a:t>
-              </a:r>
-              <a:br>
-                <a:rPr lang="te-IN" sz="2400" dirty="0">
-                  <a:latin typeface="Ramabhadra" panose="02000600000000000000" pitchFamily="2" charset="0"/>
-                  <a:cs typeface="Ramabhadra" panose="02000600000000000000" pitchFamily="2" charset="0"/>
-                </a:rPr>
-              </a:br>
-              <a:r>
-                <a:rPr lang="te-IN" sz="2400" dirty="0">
-                  <a:latin typeface="Ramabhadra" panose="02000600000000000000" pitchFamily="2" charset="0"/>
-                  <a:cs typeface="Ramabhadra" panose="02000600000000000000" pitchFamily="2" charset="0"/>
-                </a:rPr>
-                <a:t>బలవంతుడవు నీవెకదా (2)</a:t>
-              </a:r>
-              <a:br>
-                <a:rPr lang="te-IN" sz="2400" dirty="0">
-                  <a:latin typeface="Ramabhadra" panose="02000600000000000000" pitchFamily="2" charset="0"/>
-                  <a:cs typeface="Ramabhadra" panose="02000600000000000000" pitchFamily="2" charset="0"/>
-                </a:rPr>
-              </a:br>
-              <a:r>
-                <a:rPr lang="te-IN" sz="2400" dirty="0">
-                  <a:latin typeface="Ramabhadra" panose="02000600000000000000" pitchFamily="2" charset="0"/>
-                  <a:cs typeface="Ramabhadra" panose="02000600000000000000" pitchFamily="2" charset="0"/>
-                </a:rPr>
-                <a:t>నీవెకదా (3)          </a:t>
+                <a:t>నా పాపములను భరియించినది  </a:t>
+              </a:r>
+            </a:p>
+            <a:p>
+              <a:pPr defTabSz="439781">
+                <a:defRPr/>
+              </a:pPr>
+              <a:r>
+                <a:rPr lang="te-IN" sz="2400" dirty="0">
+                  <a:latin typeface="Ramabhadra" panose="02000600000000000000" pitchFamily="2" charset="0"/>
+                  <a:cs typeface="Ramabhadra" panose="02000600000000000000" pitchFamily="2" charset="0"/>
+                </a:rPr>
+                <a:t>నాకై శ్రమలను సహియించినది </a:t>
+              </a:r>
+            </a:p>
+            <a:p>
+              <a:pPr defTabSz="439781">
+                <a:defRPr/>
+              </a:pPr>
+              <a:r>
+                <a:rPr lang="te-IN" sz="2400" dirty="0">
+                  <a:latin typeface="Ramabhadra" panose="02000600000000000000" pitchFamily="2" charset="0"/>
+                  <a:cs typeface="Ramabhadra" panose="02000600000000000000" pitchFamily="2" charset="0"/>
+                </a:rPr>
+                <a:t>నాకు మారుగా మరణించినది </a:t>
+              </a:r>
+            </a:p>
+            <a:p>
+              <a:pPr defTabSz="439781">
+                <a:defRPr/>
+              </a:pPr>
+              <a:r>
+                <a:rPr lang="te-IN" sz="2400" dirty="0">
+                  <a:latin typeface="Ramabhadra" panose="02000600000000000000" pitchFamily="2" charset="0"/>
+                  <a:cs typeface="Ramabhadra" panose="02000600000000000000" pitchFamily="2" charset="0"/>
+                </a:rPr>
+                <a:t>నను జీవముతో బ్రతికించునది  </a:t>
+              </a:r>
+            </a:p>
+            <a:p>
+              <a:pPr defTabSz="439781">
+                <a:defRPr/>
+              </a:pPr>
+              <a:r>
+                <a:rPr lang="te-IN" sz="2400" dirty="0">
+                  <a:latin typeface="Ramabhadra" panose="02000600000000000000" pitchFamily="2" charset="0"/>
+                  <a:cs typeface="Ramabhadra" panose="02000600000000000000" pitchFamily="2" charset="0"/>
+                </a:rPr>
+                <a:t>యేసుని ప్రేమ  నా యేసుని ప్రేమ</a:t>
               </a:r>
             </a:p>
             <a:p>
@@ -4353,59 +4354,55 @@
                   <a:latin typeface="Ramabhadra" panose="02000600000000000000" pitchFamily="2" charset="0"/>
                   <a:cs typeface="Ramabhadra" panose="02000600000000000000" pitchFamily="2" charset="0"/>
                 </a:rPr>
-                <a:t>సమరయ స్త్రీని కరుణతో బ్రోచిన</a:t>
-              </a:r>
-              <a:br>
-                <a:rPr lang="te-IN" sz="2400" dirty="0">
-                  <a:latin typeface="Ramabhadra" panose="02000600000000000000" pitchFamily="2" charset="0"/>
-                  <a:cs typeface="Ramabhadra" panose="02000600000000000000" pitchFamily="2" charset="0"/>
-                </a:rPr>
-              </a:br>
-              <a:r>
-                <a:rPr lang="te-IN" sz="2400" dirty="0">
-                  <a:latin typeface="Ramabhadra" panose="02000600000000000000" pitchFamily="2" charset="0"/>
-                  <a:cs typeface="Ramabhadra" panose="02000600000000000000" pitchFamily="2" charset="0"/>
-                </a:rPr>
-                <a:t>సత్య హితుడవు నీవెకదా (2)</a:t>
-              </a:r>
-              <a:br>
-                <a:rPr lang="te-IN" sz="2400" dirty="0">
-                  <a:latin typeface="Ramabhadra" panose="02000600000000000000" pitchFamily="2" charset="0"/>
-                  <a:cs typeface="Ramabhadra" panose="02000600000000000000" pitchFamily="2" charset="0"/>
-                </a:rPr>
-              </a:br>
-              <a:r>
-                <a:rPr lang="te-IN" sz="2400" dirty="0">
-                  <a:latin typeface="Ramabhadra" panose="02000600000000000000" pitchFamily="2" charset="0"/>
-                  <a:cs typeface="Ramabhadra" panose="02000600000000000000" pitchFamily="2" charset="0"/>
-                </a:rPr>
-                <a:t>పాపులకొరకై ప్రాణమునిచ్చిన</a:t>
-              </a:r>
-              <a:br>
-                <a:rPr lang="te-IN" sz="2400" dirty="0">
-                  <a:latin typeface="Ramabhadra" panose="02000600000000000000" pitchFamily="2" charset="0"/>
-                  <a:cs typeface="Ramabhadra" panose="02000600000000000000" pitchFamily="2" charset="0"/>
-                </a:rPr>
-              </a:br>
-              <a:r>
-                <a:rPr lang="te-IN" sz="2400" dirty="0">
-                  <a:latin typeface="Ramabhadra" panose="02000600000000000000" pitchFamily="2" charset="0"/>
-                  <a:cs typeface="Ramabhadra" panose="02000600000000000000" pitchFamily="2" charset="0"/>
-                </a:rPr>
-                <a:t>కరుణామయుడవు నీవెకదా (2)</a:t>
-              </a:r>
-              <a:br>
-                <a:rPr lang="te-IN" sz="2400" dirty="0">
-                  <a:latin typeface="Ramabhadra" panose="02000600000000000000" pitchFamily="2" charset="0"/>
-                  <a:cs typeface="Ramabhadra" panose="02000600000000000000" pitchFamily="2" charset="0"/>
-                </a:rPr>
-              </a:br>
-              <a:r>
-                <a:rPr lang="te-IN" sz="2400" dirty="0">
-                  <a:latin typeface="Ramabhadra" panose="02000600000000000000" pitchFamily="2" charset="0"/>
-                  <a:cs typeface="Ramabhadra" panose="02000600000000000000" pitchFamily="2" charset="0"/>
-                </a:rPr>
-                <a:t>నీవెకదా (3)          </a:t>
+                <a:t>మరణపులోయలో నను కాచినది </a:t>
+              </a:r>
+            </a:p>
+            <a:p>
+              <a:pPr defTabSz="439781">
+                <a:defRPr/>
+              </a:pPr>
+              <a:r>
+                <a:rPr lang="te-IN" sz="2400" dirty="0">
+                  <a:latin typeface="Ramabhadra" panose="02000600000000000000" pitchFamily="2" charset="0"/>
+                  <a:cs typeface="Ramabhadra" panose="02000600000000000000" pitchFamily="2" charset="0"/>
+                </a:rPr>
+                <a:t>నా శ్రమలో నను ఓదార్చినది </a:t>
+              </a:r>
+            </a:p>
+            <a:p>
+              <a:pPr defTabSz="439781">
+                <a:defRPr/>
+              </a:pPr>
+              <a:r>
+                <a:rPr lang="te-IN" sz="2400" dirty="0">
+                  <a:latin typeface="Ramabhadra" panose="02000600000000000000" pitchFamily="2" charset="0"/>
+                  <a:cs typeface="Ramabhadra" panose="02000600000000000000" pitchFamily="2" charset="0"/>
+                </a:rPr>
+                <a:t>నను వీడనిది ఎడబాయనిది</a:t>
+              </a:r>
+            </a:p>
+            <a:p>
+              <a:pPr defTabSz="439781">
+                <a:defRPr/>
+              </a:pPr>
+              <a:r>
+                <a:rPr lang="te-IN" sz="2400" dirty="0">
+                  <a:latin typeface="Ramabhadra" panose="02000600000000000000" pitchFamily="2" charset="0"/>
+                  <a:cs typeface="Ramabhadra" panose="02000600000000000000" pitchFamily="2" charset="0"/>
+                </a:rPr>
+                <a:t>మారనిది  మధురమైనది </a:t>
+              </a:r>
+            </a:p>
+            <a:p>
+              <a:pPr defTabSz="439781">
+                <a:defRPr/>
+              </a:pPr>
+              <a:r>
+                <a:rPr lang="te-IN" sz="2400" dirty="0">
+                  <a:latin typeface="Ramabhadra" panose="02000600000000000000" pitchFamily="2" charset="0"/>
+                  <a:cs typeface="Ramabhadra" panose="02000600000000000000" pitchFamily="2" charset="0"/>
+                </a:rPr>
+                <a:t>యేసుని ప్రేమ  నా యేసుని ప్రేమ</a:t>
               </a:r>
             </a:p>
           </p:txBody>

--- a/songsTemplate.pptx
+++ b/songsTemplate.pptx
@@ -255,7 +255,7 @@
           <a:p>
             <a:fld id="{F1102B08-ED9E-409F-B95F-09CAA1DAF6E0}" type="datetimeFigureOut">
               <a:rPr lang="en-IN" smtClean="0"/>
-              <a:t>01-02-2025</a:t>
+              <a:t>12-02-2025</a:t>
             </a:fld>
             <a:endParaRPr lang="en-IN"/>
           </a:p>
@@ -425,7 +425,7 @@
           <a:p>
             <a:fld id="{F1102B08-ED9E-409F-B95F-09CAA1DAF6E0}" type="datetimeFigureOut">
               <a:rPr lang="en-IN" smtClean="0"/>
-              <a:t>01-02-2025</a:t>
+              <a:t>12-02-2025</a:t>
             </a:fld>
             <a:endParaRPr lang="en-IN"/>
           </a:p>
@@ -605,7 +605,7 @@
           <a:p>
             <a:fld id="{F1102B08-ED9E-409F-B95F-09CAA1DAF6E0}" type="datetimeFigureOut">
               <a:rPr lang="en-IN" smtClean="0"/>
-              <a:t>01-02-2025</a:t>
+              <a:t>12-02-2025</a:t>
             </a:fld>
             <a:endParaRPr lang="en-IN"/>
           </a:p>
@@ -775,7 +775,7 @@
           <a:p>
             <a:fld id="{F1102B08-ED9E-409F-B95F-09CAA1DAF6E0}" type="datetimeFigureOut">
               <a:rPr lang="en-IN" smtClean="0"/>
-              <a:t>01-02-2025</a:t>
+              <a:t>12-02-2025</a:t>
             </a:fld>
             <a:endParaRPr lang="en-IN"/>
           </a:p>
@@ -1019,7 +1019,7 @@
           <a:p>
             <a:fld id="{F1102B08-ED9E-409F-B95F-09CAA1DAF6E0}" type="datetimeFigureOut">
               <a:rPr lang="en-IN" smtClean="0"/>
-              <a:t>01-02-2025</a:t>
+              <a:t>12-02-2025</a:t>
             </a:fld>
             <a:endParaRPr lang="en-IN"/>
           </a:p>
@@ -1251,7 +1251,7 @@
           <a:p>
             <a:fld id="{F1102B08-ED9E-409F-B95F-09CAA1DAF6E0}" type="datetimeFigureOut">
               <a:rPr lang="en-IN" smtClean="0"/>
-              <a:t>01-02-2025</a:t>
+              <a:t>12-02-2025</a:t>
             </a:fld>
             <a:endParaRPr lang="en-IN"/>
           </a:p>
@@ -1618,7 +1618,7 @@
           <a:p>
             <a:fld id="{F1102B08-ED9E-409F-B95F-09CAA1DAF6E0}" type="datetimeFigureOut">
               <a:rPr lang="en-IN" smtClean="0"/>
-              <a:t>01-02-2025</a:t>
+              <a:t>12-02-2025</a:t>
             </a:fld>
             <a:endParaRPr lang="en-IN"/>
           </a:p>
@@ -1736,7 +1736,7 @@
           <a:p>
             <a:fld id="{F1102B08-ED9E-409F-B95F-09CAA1DAF6E0}" type="datetimeFigureOut">
               <a:rPr lang="en-IN" smtClean="0"/>
-              <a:t>01-02-2025</a:t>
+              <a:t>12-02-2025</a:t>
             </a:fld>
             <a:endParaRPr lang="en-IN"/>
           </a:p>
@@ -1831,7 +1831,7 @@
           <a:p>
             <a:fld id="{F1102B08-ED9E-409F-B95F-09CAA1DAF6E0}" type="datetimeFigureOut">
               <a:rPr lang="en-IN" smtClean="0"/>
-              <a:t>01-02-2025</a:t>
+              <a:t>12-02-2025</a:t>
             </a:fld>
             <a:endParaRPr lang="en-IN"/>
           </a:p>
@@ -2108,7 +2108,7 @@
           <a:p>
             <a:fld id="{F1102B08-ED9E-409F-B95F-09CAA1DAF6E0}" type="datetimeFigureOut">
               <a:rPr lang="en-IN" smtClean="0"/>
-              <a:t>01-02-2025</a:t>
+              <a:t>12-02-2025</a:t>
             </a:fld>
             <a:endParaRPr lang="en-IN"/>
           </a:p>
@@ -2365,7 +2365,7 @@
           <a:p>
             <a:fld id="{F1102B08-ED9E-409F-B95F-09CAA1DAF6E0}" type="datetimeFigureOut">
               <a:rPr lang="en-IN" smtClean="0"/>
-              <a:t>01-02-2025</a:t>
+              <a:t>12-02-2025</a:t>
             </a:fld>
             <a:endParaRPr lang="en-IN"/>
           </a:p>
@@ -2578,7 +2578,7 @@
           <a:p>
             <a:fld id="{F1102B08-ED9E-409F-B95F-09CAA1DAF6E0}" type="datetimeFigureOut">
               <a:rPr lang="en-IN" smtClean="0"/>
-              <a:t>01-02-2025</a:t>
+              <a:t>12-02-2025</a:t>
             </a:fld>
             <a:endParaRPr lang="en-IN"/>
           </a:p>
@@ -3072,8 +3072,8 @@
           </p:nvSpPr>
           <p:spPr>
             <a:xfrm>
-              <a:off x="347098" y="328311"/>
-              <a:ext cx="4483140" cy="5262979"/>
+              <a:off x="347098" y="383791"/>
+              <a:ext cx="4483140" cy="4832092"/>
             </a:xfrm>
             <a:prstGeom prst="rect">
               <a:avLst/>
@@ -3090,11 +3090,11 @@
                 <a:defRPr/>
               </a:pPr>
               <a:r>
-                <a:rPr lang="te-IN" sz="2400" dirty="0">
-                  <a:latin typeface="Ramabhadra" panose="02000600000000000000" pitchFamily="2" charset="0"/>
-                  <a:cs typeface="Ramabhadra" panose="02000600000000000000" pitchFamily="2" charset="0"/>
-                </a:rPr>
-                <a:t>సదాకాలము నీతో నేను </a:t>
+                <a:rPr lang="te-IN" sz="2200" dirty="0">
+                  <a:latin typeface="Ramabhadra" panose="02000600000000000000" pitchFamily="2" charset="0"/>
+                  <a:cs typeface="Ramabhadra" panose="02000600000000000000" pitchFamily="2" charset="0"/>
+                </a:rPr>
+                <a:t>నీ వాక్యమే నన్ను బ్రతికించెను</a:t>
               </a:r>
             </a:p>
             <a:p>
@@ -3102,11 +3102,11 @@
                 <a:defRPr/>
               </a:pPr>
               <a:r>
-                <a:rPr lang="te-IN" sz="2400" dirty="0">
-                  <a:latin typeface="Ramabhadra" panose="02000600000000000000" pitchFamily="2" charset="0"/>
-                  <a:cs typeface="Ramabhadra" panose="02000600000000000000" pitchFamily="2" charset="0"/>
-                </a:rPr>
-                <a:t>జీవించెదను యేసయ్య</a:t>
+                <a:rPr lang="te-IN" sz="2200" dirty="0">
+                  <a:latin typeface="Ramabhadra" panose="02000600000000000000" pitchFamily="2" charset="0"/>
+                  <a:cs typeface="Ramabhadra" panose="02000600000000000000" pitchFamily="2" charset="0"/>
+                </a:rPr>
+                <a:t>బాధలలో నెమ్మదినిచ్చెను (2)</a:t>
               </a:r>
             </a:p>
             <a:p>
@@ -3114,11 +3114,11 @@
                 <a:defRPr/>
               </a:pPr>
               <a:r>
-                <a:rPr lang="te-IN" sz="2400" dirty="0">
-                  <a:latin typeface="Ramabhadra" panose="02000600000000000000" pitchFamily="2" charset="0"/>
-                  <a:cs typeface="Ramabhadra" panose="02000600000000000000" pitchFamily="2" charset="0"/>
-                </a:rPr>
-                <a:t>యేసయ్యా యేసయ్యా</a:t>
+                <a:rPr lang="te-IN" sz="2200" dirty="0">
+                  <a:latin typeface="Ramabhadra" panose="02000600000000000000" pitchFamily="2" charset="0"/>
+                  <a:cs typeface="Ramabhadra" panose="02000600000000000000" pitchFamily="2" charset="0"/>
+                </a:rPr>
+                <a:t>కృపా శక్తి దయా సత్య సంపూర్ణుడా</a:t>
               </a:r>
             </a:p>
             <a:p>
@@ -3126,35 +3126,36 @@
                 <a:defRPr/>
               </a:pPr>
               <a:r>
-                <a:rPr lang="te-IN" sz="2400" dirty="0">
-                  <a:latin typeface="Ramabhadra" panose="02000600000000000000" pitchFamily="2" charset="0"/>
-                  <a:cs typeface="Ramabhadra" panose="02000600000000000000" pitchFamily="2" charset="0"/>
-                </a:rPr>
-                <a:t>యేసయ్యా యేసయ్యా (2)</a:t>
-              </a:r>
+                <a:rPr lang="te-IN" sz="2200" dirty="0">
+                  <a:latin typeface="Ramabhadra" panose="02000600000000000000" pitchFamily="2" charset="0"/>
+                  <a:cs typeface="Ramabhadra" panose="02000600000000000000" pitchFamily="2" charset="0"/>
+                </a:rPr>
+                <a:t>వాక్యమై ఉన్న యేసు వందనమయ్యా (2)</a:t>
+              </a:r>
+              <a:endParaRPr lang="en-US" sz="2200" dirty="0">
+                <a:latin typeface="Ramabhadra" panose="02000600000000000000" pitchFamily="2" charset="0"/>
+                <a:cs typeface="Ramabhadra" panose="02000600000000000000" pitchFamily="2" charset="0"/>
+              </a:endParaRPr>
             </a:p>
             <a:p>
               <a:pPr defTabSz="439781">
                 <a:defRPr/>
               </a:pPr>
-              <a:r>
-                <a:rPr lang="te-IN" sz="2400" dirty="0">
-                  <a:latin typeface="Ramabhadra" panose="02000600000000000000" pitchFamily="2" charset="0"/>
-                  <a:cs typeface="Ramabhadra" panose="02000600000000000000" pitchFamily="2" charset="0"/>
-                </a:rPr>
-                <a:t>        </a:t>
-              </a:r>
+              <a:endParaRPr lang="te-IN" sz="2200" dirty="0">
+                <a:latin typeface="Ramabhadra" panose="02000600000000000000" pitchFamily="2" charset="0"/>
+                <a:cs typeface="Ramabhadra" panose="02000600000000000000" pitchFamily="2" charset="0"/>
+              </a:endParaRPr>
             </a:p>
             <a:p>
               <a:pPr defTabSz="439781">
                 <a:defRPr/>
               </a:pPr>
               <a:r>
-                <a:rPr lang="te-IN" sz="2400" dirty="0">
-                  <a:latin typeface="Ramabhadra" panose="02000600000000000000" pitchFamily="2" charset="0"/>
-                  <a:cs typeface="Ramabhadra" panose="02000600000000000000" pitchFamily="2" charset="0"/>
-                </a:rPr>
-                <a:t>పాపాల ఊభిలో పడియున్న నన్ను</a:t>
+                <a:rPr lang="te-IN" sz="2200" dirty="0">
+                  <a:latin typeface="Ramabhadra" panose="02000600000000000000" pitchFamily="2" charset="0"/>
+                  <a:cs typeface="Ramabhadra" panose="02000600000000000000" pitchFamily="2" charset="0"/>
+                </a:rPr>
+                <a:t>జిగటగల ఊభినుండి లేవనెత్తెను</a:t>
               </a:r>
             </a:p>
             <a:p>
@@ -3162,24 +3163,11 @@
                 <a:defRPr/>
               </a:pPr>
               <a:r>
-                <a:rPr lang="te-IN" sz="2400" dirty="0">
-                  <a:latin typeface="Ramabhadra" panose="02000600000000000000" pitchFamily="2" charset="0"/>
-                  <a:cs typeface="Ramabhadra" panose="02000600000000000000" pitchFamily="2" charset="0"/>
-                </a:rPr>
-                <a:t>నీ ప్రేమతో పైకి లేపావయ్యా (2)</a:t>
-              </a:r>
-              <a:br>
-                <a:rPr lang="te-IN" sz="2400" dirty="0">
-                  <a:latin typeface="Ramabhadra" panose="02000600000000000000" pitchFamily="2" charset="0"/>
-                  <a:cs typeface="Ramabhadra" panose="02000600000000000000" pitchFamily="2" charset="0"/>
-                </a:rPr>
-              </a:br>
-              <a:r>
-                <a:rPr lang="te-IN" sz="2400" dirty="0">
-                  <a:latin typeface="Ramabhadra" panose="02000600000000000000" pitchFamily="2" charset="0"/>
-                  <a:cs typeface="Ramabhadra" panose="02000600000000000000" pitchFamily="2" charset="0"/>
-                </a:rPr>
-                <a:t>ఏ తోడులేని నాకు నా తోడుగా</a:t>
+                <a:rPr lang="te-IN" sz="2200" dirty="0">
+                  <a:latin typeface="Ramabhadra" panose="02000600000000000000" pitchFamily="2" charset="0"/>
+                  <a:cs typeface="Ramabhadra" panose="02000600000000000000" pitchFamily="2" charset="0"/>
+                </a:rPr>
+                <a:t>సమతలమగు భూమిపై నన్ను నిలిపెను (2)</a:t>
               </a:r>
             </a:p>
             <a:p>
@@ -3187,11 +3175,11 @@
                 <a:defRPr/>
               </a:pPr>
               <a:r>
-                <a:rPr lang="te-IN" sz="2400" dirty="0">
-                  <a:latin typeface="Ramabhadra" panose="02000600000000000000" pitchFamily="2" charset="0"/>
-                  <a:cs typeface="Ramabhadra" panose="02000600000000000000" pitchFamily="2" charset="0"/>
-                </a:rPr>
-                <a:t>నాఅండగా నీవు  నిలిచావయ్యా (2)</a:t>
+                <a:rPr lang="te-IN" sz="2200" dirty="0">
+                  <a:latin typeface="Ramabhadra" panose="02000600000000000000" pitchFamily="2" charset="0"/>
+                  <a:cs typeface="Ramabhadra" panose="02000600000000000000" pitchFamily="2" charset="0"/>
+                </a:rPr>
+                <a:t>నా పాదములకు దీపమాయెను (2)</a:t>
               </a:r>
             </a:p>
             <a:p>
@@ -3199,62 +3187,72 @@
                 <a:defRPr/>
               </a:pPr>
               <a:r>
-                <a:rPr lang="te-IN" sz="2400" dirty="0">
-                  <a:latin typeface="Ramabhadra" panose="02000600000000000000" pitchFamily="2" charset="0"/>
-                  <a:cs typeface="Ramabhadra" panose="02000600000000000000" pitchFamily="2" charset="0"/>
-                </a:rPr>
-                <a:t>         </a:t>
-              </a:r>
+                <a:rPr lang="te-IN" sz="2200" dirty="0">
+                  <a:latin typeface="Ramabhadra" panose="02000600000000000000" pitchFamily="2" charset="0"/>
+                  <a:cs typeface="Ramabhadra" panose="02000600000000000000" pitchFamily="2" charset="0"/>
+                </a:rPr>
+                <a:t>సత్యమైన మార్గములో నడుపుచుండెను (2)</a:t>
+              </a:r>
+              <a:endParaRPr lang="en-US" sz="2200" dirty="0">
+                <a:latin typeface="Ramabhadra" panose="02000600000000000000" pitchFamily="2" charset="0"/>
+                <a:cs typeface="Ramabhadra" panose="02000600000000000000" pitchFamily="2" charset="0"/>
+              </a:endParaRPr>
             </a:p>
             <a:p>
               <a:pPr defTabSz="439781">
                 <a:defRPr/>
               </a:pPr>
-              <a:r>
-                <a:rPr lang="te-IN" sz="2400" dirty="0">
-                  <a:latin typeface="Ramabhadra" panose="02000600000000000000" pitchFamily="2" charset="0"/>
-                  <a:cs typeface="Ramabhadra" panose="02000600000000000000" pitchFamily="2" charset="0"/>
-                </a:rPr>
-                <a:t>నీ వాత్సల్యమును నాపై చూపించి</a:t>
-              </a:r>
-              <a:br>
-                <a:rPr lang="te-IN" sz="2400" dirty="0">
-                  <a:latin typeface="Ramabhadra" panose="02000600000000000000" pitchFamily="2" charset="0"/>
-                  <a:cs typeface="Ramabhadra" panose="02000600000000000000" pitchFamily="2" charset="0"/>
-                </a:rPr>
-              </a:br>
-              <a:r>
-                <a:rPr lang="te-IN" sz="2400" dirty="0">
-                  <a:latin typeface="Ramabhadra" panose="02000600000000000000" pitchFamily="2" charset="0"/>
-                  <a:cs typeface="Ramabhadra" panose="02000600000000000000" pitchFamily="2" charset="0"/>
-                </a:rPr>
-                <a:t>నీ సాక్షిగా నన్ను నిలిపావయ్యా (2)</a:t>
-              </a:r>
-              <a:br>
-                <a:rPr lang="te-IN" sz="2400" dirty="0">
-                  <a:latin typeface="Ramabhadra" panose="02000600000000000000" pitchFamily="2" charset="0"/>
-                  <a:cs typeface="Ramabhadra" panose="02000600000000000000" pitchFamily="2" charset="0"/>
-                </a:rPr>
-              </a:br>
-              <a:r>
-                <a:rPr lang="te-IN" sz="2400" dirty="0">
-                  <a:latin typeface="Ramabhadra" panose="02000600000000000000" pitchFamily="2" charset="0"/>
-                  <a:cs typeface="Ramabhadra" panose="02000600000000000000" pitchFamily="2" charset="0"/>
-                </a:rPr>
-                <a:t>ఆశ్చర్యకార్యములు ఎన్నో చేసి</a:t>
-              </a:r>
-              <a:br>
-                <a:rPr lang="te-IN" sz="2400" dirty="0">
-                  <a:latin typeface="Ramabhadra" panose="02000600000000000000" pitchFamily="2" charset="0"/>
-                  <a:cs typeface="Ramabhadra" panose="02000600000000000000" pitchFamily="2" charset="0"/>
-                </a:rPr>
-              </a:br>
-              <a:r>
-                <a:rPr lang="te-IN" sz="2400" dirty="0">
-                  <a:latin typeface="Ramabhadra" panose="02000600000000000000" pitchFamily="2" charset="0"/>
-                  <a:cs typeface="Ramabhadra" panose="02000600000000000000" pitchFamily="2" charset="0"/>
-                </a:rPr>
-                <a:t>నీ పాత్రగా నన్ను మలిచావయ్యా (2)</a:t>
+              <a:endParaRPr lang="te-IN" sz="2200" dirty="0">
+                <a:latin typeface="Ramabhadra" panose="02000600000000000000" pitchFamily="2" charset="0"/>
+                <a:cs typeface="Ramabhadra" panose="02000600000000000000" pitchFamily="2" charset="0"/>
+              </a:endParaRPr>
+            </a:p>
+            <a:p>
+              <a:pPr defTabSz="439781">
+                <a:defRPr/>
+              </a:pPr>
+              <a:r>
+                <a:rPr lang="te-IN" sz="2200" dirty="0">
+                  <a:latin typeface="Ramabhadra" panose="02000600000000000000" pitchFamily="2" charset="0"/>
+                  <a:cs typeface="Ramabhadra" panose="02000600000000000000" pitchFamily="2" charset="0"/>
+                </a:rPr>
+                <a:t>శత్రువులను ఎదుర్కొనే సర్వాంగ కవచమై</a:t>
+              </a:r>
+            </a:p>
+            <a:p>
+              <a:pPr defTabSz="439781">
+                <a:defRPr/>
+              </a:pPr>
+              <a:r>
+                <a:rPr lang="te-IN" sz="2200" dirty="0">
+                  <a:latin typeface="Ramabhadra" panose="02000600000000000000" pitchFamily="2" charset="0"/>
+                  <a:cs typeface="Ramabhadra" panose="02000600000000000000" pitchFamily="2" charset="0"/>
+                </a:rPr>
+                <a:t>యుద్ధమునకు సిద్ధ మనసు ఇచ్చుచున్నది (2)</a:t>
+              </a:r>
+            </a:p>
+            <a:p>
+              <a:pPr defTabSz="439781">
+                <a:defRPr/>
+              </a:pPr>
+              <a:r>
+                <a:rPr lang="te-IN" sz="2200" dirty="0">
+                  <a:latin typeface="Ramabhadra" panose="02000600000000000000" pitchFamily="2" charset="0"/>
+                  <a:cs typeface="Ramabhadra" panose="02000600000000000000" pitchFamily="2" charset="0"/>
+                </a:rPr>
+                <a:t>అపవాది వేయుచున్న అగ్ని బాణములను (2)</a:t>
+              </a:r>
+            </a:p>
+            <a:p>
+              <a:pPr defTabSz="439781">
+                <a:defRPr/>
+              </a:pPr>
+              <a:r>
+                <a:rPr lang="te-IN" sz="2200" dirty="0">
+                  <a:latin typeface="Ramabhadra" panose="02000600000000000000" pitchFamily="2" charset="0"/>
+                  <a:cs typeface="Ramabhadra" panose="02000600000000000000" pitchFamily="2" charset="0"/>
+                </a:rPr>
+                <a:t>ఖడ్గము వలె అడ్డుకొని ఆర్పి వేయుచున్నది (2)</a:t>
               </a:r>
             </a:p>
           </p:txBody>
@@ -3337,9 +3335,9 @@
         <p:grpSpPr>
           <a:xfrm>
             <a:off x="5104338" y="182031"/>
-            <a:ext cx="4922300" cy="6493935"/>
+            <a:ext cx="4777157" cy="6493935"/>
             <a:chOff x="160868" y="182032"/>
-            <a:chExt cx="4922300" cy="6493935"/>
+            <a:chExt cx="4777157" cy="6493935"/>
           </a:xfrm>
         </p:grpSpPr>
         <p:sp>
@@ -3411,8 +3409,8 @@
           </p:nvSpPr>
           <p:spPr>
             <a:xfrm>
-              <a:off x="402136" y="332377"/>
-              <a:ext cx="4681032" cy="6001643"/>
+              <a:off x="256993" y="245293"/>
+              <a:ext cx="4681032" cy="6232475"/>
             </a:xfrm>
             <a:prstGeom prst="rect">
               <a:avLst/>
@@ -3426,198 +3424,190 @@
             <a:lstStyle/>
             <a:p>
               <a:r>
-                <a:rPr lang="te-IN" sz="2400" dirty="0">
-                  <a:latin typeface="Ramabhadra" panose="02000600000000000000" pitchFamily="2" charset="0"/>
-                  <a:cs typeface="Ramabhadra" panose="02000600000000000000" pitchFamily="2" charset="0"/>
-                </a:rPr>
-                <a:t>స్తోత్రబలి స్తోత్రబలి</a:t>
-              </a:r>
-              <a:endParaRPr lang="en-IN" sz="2400" dirty="0">
+                <a:rPr lang="te-IN" sz="1900" dirty="0">
+                  <a:latin typeface="Ramabhadra" panose="02000600000000000000" pitchFamily="2" charset="0"/>
+                  <a:cs typeface="Ramabhadra" panose="02000600000000000000" pitchFamily="2" charset="0"/>
+                </a:rPr>
+                <a:t>అత్యున్నత సింహాసనముపై ఆసీనుడా</a:t>
+              </a:r>
+            </a:p>
+            <a:p>
+              <a:r>
+                <a:rPr lang="te-IN" sz="1900" dirty="0">
+                  <a:latin typeface="Ramabhadra" panose="02000600000000000000" pitchFamily="2" charset="0"/>
+                  <a:cs typeface="Ramabhadra" panose="02000600000000000000" pitchFamily="2" charset="0"/>
+                </a:rPr>
+                <a:t>దేవ దూతలు ఆరాధించు పరిశుద్ధుడా</a:t>
+              </a:r>
+            </a:p>
+            <a:p>
+              <a:r>
+                <a:rPr lang="te-IN" sz="1900" dirty="0">
+                  <a:latin typeface="Ramabhadra" panose="02000600000000000000" pitchFamily="2" charset="0"/>
+                  <a:cs typeface="Ramabhadra" panose="02000600000000000000" pitchFamily="2" charset="0"/>
+                </a:rPr>
+                <a:t>యేసయ్యా నా నిలువెల్ల నిండియున్నావు</a:t>
+              </a:r>
+            </a:p>
+            <a:p>
+              <a:r>
+                <a:rPr lang="te-IN" sz="1900" dirty="0">
+                  <a:latin typeface="Ramabhadra" panose="02000600000000000000" pitchFamily="2" charset="0"/>
+                  <a:cs typeface="Ramabhadra" panose="02000600000000000000" pitchFamily="2" charset="0"/>
+                </a:rPr>
+                <a:t>నా మనసార నీ సన్నిధిలో</a:t>
+              </a:r>
+            </a:p>
+            <a:p>
+              <a:r>
+                <a:rPr lang="te-IN" sz="1900" dirty="0">
+                  <a:latin typeface="Ramabhadra" panose="02000600000000000000" pitchFamily="2" charset="0"/>
+                  <a:cs typeface="Ramabhadra" panose="02000600000000000000" pitchFamily="2" charset="0"/>
+                </a:rPr>
+                <a:t>సాగిలపడి నమస్కారము చేసేదా</a:t>
+              </a:r>
+            </a:p>
+            <a:p>
+              <a:r>
+                <a:rPr lang="te-IN" sz="1900" dirty="0">
+                  <a:latin typeface="Ramabhadra" panose="02000600000000000000" pitchFamily="2" charset="0"/>
+                  <a:cs typeface="Ramabhadra" panose="02000600000000000000" pitchFamily="2" charset="0"/>
+                </a:rPr>
+                <a:t>సాగిలపడి నమస్కారము చేసేదా (2)</a:t>
+              </a:r>
+            </a:p>
+            <a:p>
+              <a:endParaRPr lang="te-IN" sz="1900" dirty="0">
                 <a:latin typeface="Ramabhadra" panose="02000600000000000000" pitchFamily="2" charset="0"/>
                 <a:cs typeface="Ramabhadra" panose="02000600000000000000" pitchFamily="2" charset="0"/>
               </a:endParaRPr>
             </a:p>
             <a:p>
               <a:r>
-                <a:rPr lang="te-IN" sz="2400" dirty="0">
-                  <a:latin typeface="Ramabhadra" panose="02000600000000000000" pitchFamily="2" charset="0"/>
-                  <a:cs typeface="Ramabhadra" panose="02000600000000000000" pitchFamily="2" charset="0"/>
-                </a:rPr>
-                <a:t>మంచిదేవా నీకేనయ్యా</a:t>
-              </a:r>
-              <a:br>
-                <a:rPr lang="te-IN" sz="2400" dirty="0">
-                  <a:latin typeface="Ramabhadra" panose="02000600000000000000" pitchFamily="2" charset="0"/>
-                  <a:cs typeface="Ramabhadra" panose="02000600000000000000" pitchFamily="2" charset="0"/>
-                </a:rPr>
-              </a:br>
-              <a:r>
-                <a:rPr lang="te-IN" sz="2400" dirty="0">
-                  <a:latin typeface="Ramabhadra" panose="02000600000000000000" pitchFamily="2" charset="0"/>
-                  <a:cs typeface="Ramabhadra" panose="02000600000000000000" pitchFamily="2" charset="0"/>
-                </a:rPr>
-                <a:t>శుభవేళ ఆనందమే</a:t>
-              </a:r>
-              <a:endParaRPr lang="en-IN" sz="2400" dirty="0">
+                <a:rPr lang="te-IN" sz="1900" dirty="0">
+                  <a:latin typeface="Ramabhadra" panose="02000600000000000000" pitchFamily="2" charset="0"/>
+                  <a:cs typeface="Ramabhadra" panose="02000600000000000000" pitchFamily="2" charset="0"/>
+                </a:rPr>
+                <a:t>ప్రతి వసంతము నీ దయా కిరీటమే</a:t>
+              </a:r>
+            </a:p>
+            <a:p>
+              <a:r>
+                <a:rPr lang="te-IN" sz="1900" dirty="0">
+                  <a:latin typeface="Ramabhadra" panose="02000600000000000000" pitchFamily="2" charset="0"/>
+                  <a:cs typeface="Ramabhadra" panose="02000600000000000000" pitchFamily="2" charset="0"/>
+                </a:rPr>
+                <a:t>ప్రకృతి కలలన్నియు నీ మహిమను వివరించునే (2)</a:t>
+              </a:r>
+            </a:p>
+            <a:p>
+              <a:r>
+                <a:rPr lang="te-IN" sz="1900" dirty="0">
+                  <a:latin typeface="Ramabhadra" panose="02000600000000000000" pitchFamily="2" charset="0"/>
+                  <a:cs typeface="Ramabhadra" panose="02000600000000000000" pitchFamily="2" charset="0"/>
+                </a:rPr>
+                <a:t>ప్రభువా నిన్నే ఆరాధించెద</a:t>
+              </a:r>
+            </a:p>
+            <a:p>
+              <a:r>
+                <a:rPr lang="te-IN" sz="1900" dirty="0">
+                  <a:latin typeface="Ramabhadra" panose="02000600000000000000" pitchFamily="2" charset="0"/>
+                  <a:cs typeface="Ramabhadra" panose="02000600000000000000" pitchFamily="2" charset="0"/>
+                </a:rPr>
+                <a:t>కృతజ్ఞాతార్పణలతో – కృతజ్ఞాతార్పణలతో (2)</a:t>
+              </a:r>
+              <a:endParaRPr lang="en-US" sz="1900" dirty="0">
                 <a:latin typeface="Ramabhadra" panose="02000600000000000000" pitchFamily="2" charset="0"/>
                 <a:cs typeface="Ramabhadra" panose="02000600000000000000" pitchFamily="2" charset="0"/>
               </a:endParaRPr>
             </a:p>
             <a:p>
-              <a:r>
-                <a:rPr lang="te-IN" sz="2400" dirty="0">
-                  <a:latin typeface="Ramabhadra" panose="02000600000000000000" pitchFamily="2" charset="0"/>
-                  <a:cs typeface="Ramabhadra" panose="02000600000000000000" pitchFamily="2" charset="0"/>
-                </a:rPr>
-                <a:t>నా తండ్రి నీ చిరుపాదమే (2)</a:t>
-              </a:r>
-            </a:p>
-            <a:p>
-              <a:endParaRPr lang="te-IN" sz="2400" dirty="0">
+              <a:endParaRPr lang="te-IN" sz="1900" dirty="0">
                 <a:latin typeface="Ramabhadra" panose="02000600000000000000" pitchFamily="2" charset="0"/>
                 <a:cs typeface="Ramabhadra" panose="02000600000000000000" pitchFamily="2" charset="0"/>
               </a:endParaRPr>
             </a:p>
             <a:p>
               <a:r>
-                <a:rPr lang="te-IN" sz="2400" dirty="0">
-                  <a:latin typeface="Ramabhadra" panose="02000600000000000000" pitchFamily="2" charset="0"/>
-                  <a:cs typeface="Ramabhadra" panose="02000600000000000000" pitchFamily="2" charset="0"/>
-                </a:rPr>
-                <a:t>నిన్నటి బాధలంతా</a:t>
-              </a:r>
-              <a:endParaRPr lang="en-IN" sz="2400" dirty="0">
+                <a:rPr lang="te-IN" sz="1900" dirty="0">
+                  <a:latin typeface="Ramabhadra" panose="02000600000000000000" pitchFamily="2" charset="0"/>
+                  <a:cs typeface="Ramabhadra" panose="02000600000000000000" pitchFamily="2" charset="0"/>
+                </a:rPr>
+                <a:t>పరిమలించునే నా సాక్ష్య జీవితమే</a:t>
+              </a:r>
+            </a:p>
+            <a:p>
+              <a:r>
+                <a:rPr lang="te-IN" sz="1900" dirty="0">
+                  <a:latin typeface="Ramabhadra" panose="02000600000000000000" pitchFamily="2" charset="0"/>
+                  <a:cs typeface="Ramabhadra" panose="02000600000000000000" pitchFamily="2" charset="0"/>
+                </a:rPr>
+                <a:t>పరిశుద్ధాత్ముడు నన్ను నడిపించుచున్నందునే (2)</a:t>
+              </a:r>
+            </a:p>
+            <a:p>
+              <a:r>
+                <a:rPr lang="te-IN" sz="1900" dirty="0">
+                  <a:latin typeface="Ramabhadra" panose="02000600000000000000" pitchFamily="2" charset="0"/>
+                  <a:cs typeface="Ramabhadra" panose="02000600000000000000" pitchFamily="2" charset="0"/>
+                </a:rPr>
+                <a:t>పరిశుద్ధాత్మలో ఆనందించెద</a:t>
+              </a:r>
+            </a:p>
+            <a:p>
+              <a:r>
+                <a:rPr lang="te-IN" sz="1900" dirty="0">
+                  <a:latin typeface="Ramabhadra" panose="02000600000000000000" pitchFamily="2" charset="0"/>
+                  <a:cs typeface="Ramabhadra" panose="02000600000000000000" pitchFamily="2" charset="0"/>
+                </a:rPr>
+                <a:t>హర్ష ధ్వనులతో – హర్ష ధ్వనులతో (2)</a:t>
+              </a:r>
+              <a:endParaRPr lang="en-US" sz="1900" dirty="0">
                 <a:latin typeface="Ramabhadra" panose="02000600000000000000" pitchFamily="2" charset="0"/>
                 <a:cs typeface="Ramabhadra" panose="02000600000000000000" pitchFamily="2" charset="0"/>
               </a:endParaRPr>
             </a:p>
             <a:p>
-              <a:r>
-                <a:rPr lang="te-IN" sz="2400" dirty="0">
-                  <a:latin typeface="Ramabhadra" panose="02000600000000000000" pitchFamily="2" charset="0"/>
-                  <a:cs typeface="Ramabhadra" panose="02000600000000000000" pitchFamily="2" charset="0"/>
-                </a:rPr>
-                <a:t>నేటికి మాయమయ్యే (2)</a:t>
-              </a:r>
-              <a:br>
-                <a:rPr lang="te-IN" sz="2400" dirty="0">
-                  <a:latin typeface="Ramabhadra" panose="02000600000000000000" pitchFamily="2" charset="0"/>
-                  <a:cs typeface="Ramabhadra" panose="02000600000000000000" pitchFamily="2" charset="0"/>
-                </a:rPr>
-              </a:br>
-              <a:r>
-                <a:rPr lang="te-IN" sz="2400" dirty="0">
-                  <a:latin typeface="Ramabhadra" panose="02000600000000000000" pitchFamily="2" charset="0"/>
-                  <a:cs typeface="Ramabhadra" panose="02000600000000000000" pitchFamily="2" charset="0"/>
-                </a:rPr>
-                <a:t>నెమ్మది ఉదయించె</a:t>
-              </a:r>
-              <a:endParaRPr lang="en-IN" sz="2400" dirty="0">
+              <a:endParaRPr lang="te-IN" sz="1900" dirty="0">
                 <a:latin typeface="Ramabhadra" panose="02000600000000000000" pitchFamily="2" charset="0"/>
                 <a:cs typeface="Ramabhadra" panose="02000600000000000000" pitchFamily="2" charset="0"/>
               </a:endParaRPr>
             </a:p>
             <a:p>
               <a:r>
-                <a:rPr lang="te-IN" sz="2400" dirty="0">
-                  <a:latin typeface="Ramabhadra" panose="02000600000000000000" pitchFamily="2" charset="0"/>
-                  <a:cs typeface="Ramabhadra" panose="02000600000000000000" pitchFamily="2" charset="0"/>
-                </a:rPr>
-                <a:t>అది శాశ్వతమైనదయ్యా (2)</a:t>
-              </a:r>
-              <a:br>
-                <a:rPr lang="te-IN" sz="2400" dirty="0">
-                  <a:latin typeface="Ramabhadra" panose="02000600000000000000" pitchFamily="2" charset="0"/>
-                  <a:cs typeface="Ramabhadra" panose="02000600000000000000" pitchFamily="2" charset="0"/>
-                </a:rPr>
-              </a:br>
-              <a:r>
-                <a:rPr lang="te-IN" sz="2400" dirty="0">
-                  <a:latin typeface="Ramabhadra" panose="02000600000000000000" pitchFamily="2" charset="0"/>
-                  <a:cs typeface="Ramabhadra" panose="02000600000000000000" pitchFamily="2" charset="0"/>
-                </a:rPr>
-                <a:t>కోటి కోటి స్తోత్రం డాడి (3</a:t>
-              </a:r>
-              <a:r>
-                <a:rPr lang="en-IN" sz="2400" dirty="0">
-                  <a:latin typeface="Ramabhadra" panose="02000600000000000000" pitchFamily="2" charset="0"/>
-                  <a:cs typeface="Ramabhadra" panose="02000600000000000000" pitchFamily="2" charset="0"/>
-                </a:rPr>
-                <a:t>)</a:t>
-              </a:r>
-              <a:endParaRPr lang="te-IN" sz="2400" dirty="0">
-                <a:latin typeface="Ramabhadra" panose="02000600000000000000" pitchFamily="2" charset="0"/>
-                <a:cs typeface="Ramabhadra" panose="02000600000000000000" pitchFamily="2" charset="0"/>
-              </a:endParaRPr>
-            </a:p>
-            <a:p>
-              <a:r>
-                <a:rPr lang="te-IN" sz="2400" dirty="0">
-                  <a:latin typeface="Ramabhadra" panose="02000600000000000000" pitchFamily="2" charset="0"/>
-                  <a:cs typeface="Ramabhadra" panose="02000600000000000000" pitchFamily="2" charset="0"/>
-                </a:rPr>
-                <a:t>   </a:t>
-              </a:r>
-            </a:p>
-            <a:p>
-              <a:r>
-                <a:rPr lang="te-IN" sz="2400" dirty="0">
-                  <a:latin typeface="Ramabhadra" panose="02000600000000000000" pitchFamily="2" charset="0"/>
-                  <a:cs typeface="Ramabhadra" panose="02000600000000000000" pitchFamily="2" charset="0"/>
-                </a:rPr>
-                <a:t>రేయంతా కాచితివి</a:t>
-              </a:r>
-              <a:endParaRPr lang="en-IN" sz="2400" dirty="0">
-                <a:latin typeface="Ramabhadra" panose="02000600000000000000" pitchFamily="2" charset="0"/>
-                <a:cs typeface="Ramabhadra" panose="02000600000000000000" pitchFamily="2" charset="0"/>
-              </a:endParaRPr>
-            </a:p>
-            <a:p>
-              <a:r>
-                <a:rPr lang="te-IN" sz="2400" dirty="0">
-                  <a:latin typeface="Ramabhadra" panose="02000600000000000000" pitchFamily="2" charset="0"/>
-                  <a:cs typeface="Ramabhadra" panose="02000600000000000000" pitchFamily="2" charset="0"/>
-                </a:rPr>
-                <a:t>మరు దినమిచ్చితివి (2)</a:t>
-              </a:r>
-              <a:br>
-                <a:rPr lang="te-IN" sz="2400" dirty="0">
-                  <a:latin typeface="Ramabhadra" panose="02000600000000000000" pitchFamily="2" charset="0"/>
-                  <a:cs typeface="Ramabhadra" panose="02000600000000000000" pitchFamily="2" charset="0"/>
-                </a:rPr>
-              </a:br>
-              <a:r>
-                <a:rPr lang="te-IN" sz="2400" dirty="0">
-                  <a:latin typeface="Ramabhadra" panose="02000600000000000000" pitchFamily="2" charset="0"/>
-                  <a:cs typeface="Ramabhadra" panose="02000600000000000000" pitchFamily="2" charset="0"/>
-                </a:rPr>
-                <a:t>మరువని నా స్నేహమా</a:t>
-              </a:r>
-              <a:endParaRPr lang="en-IN" sz="2400" dirty="0">
-                <a:latin typeface="Ramabhadra" panose="02000600000000000000" pitchFamily="2" charset="0"/>
-                <a:cs typeface="Ramabhadra" panose="02000600000000000000" pitchFamily="2" charset="0"/>
-              </a:endParaRPr>
-            </a:p>
-            <a:p>
-              <a:r>
-                <a:rPr lang="te-IN" sz="2400" dirty="0">
-                  <a:latin typeface="Ramabhadra" panose="02000600000000000000" pitchFamily="2" charset="0"/>
-                  <a:cs typeface="Ramabhadra" panose="02000600000000000000" pitchFamily="2" charset="0"/>
-                </a:rPr>
-                <a:t>నీతో కలసి సంతోషింతును (2)</a:t>
-              </a:r>
-              <a:br>
-                <a:rPr lang="te-IN" sz="2400" dirty="0">
-                  <a:latin typeface="Ramabhadra" panose="02000600000000000000" pitchFamily="2" charset="0"/>
-                  <a:cs typeface="Ramabhadra" panose="02000600000000000000" pitchFamily="2" charset="0"/>
-                </a:rPr>
-              </a:br>
-              <a:r>
-                <a:rPr lang="te-IN" sz="2400" dirty="0">
-                  <a:latin typeface="Ramabhadra" panose="02000600000000000000" pitchFamily="2" charset="0"/>
-                  <a:cs typeface="Ramabhadra" panose="02000600000000000000" pitchFamily="2" charset="0"/>
-                </a:rPr>
-                <a:t>కోటి కోటి స్తోత్రం డాడి (3)</a:t>
+                <a:rPr lang="te-IN" sz="1900" dirty="0">
+                  <a:latin typeface="Ramabhadra" panose="02000600000000000000" pitchFamily="2" charset="0"/>
+                  <a:cs typeface="Ramabhadra" panose="02000600000000000000" pitchFamily="2" charset="0"/>
+                </a:rPr>
+                <a:t>పక్షి రాజువై నీ రెక్కలపై మోసితివే</a:t>
+              </a:r>
+            </a:p>
+            <a:p>
+              <a:r>
+                <a:rPr lang="te-IN" sz="1900" dirty="0">
+                  <a:latin typeface="Ramabhadra" panose="02000600000000000000" pitchFamily="2" charset="0"/>
+                  <a:cs typeface="Ramabhadra" panose="02000600000000000000" pitchFamily="2" charset="0"/>
+                </a:rPr>
+                <a:t>నీవే నా తండ్రివే నా బాధ్యతలు భరించితివే (2)</a:t>
+              </a:r>
+            </a:p>
+            <a:p>
+              <a:r>
+                <a:rPr lang="te-IN" sz="1900" dirty="0">
+                  <a:latin typeface="Ramabhadra" panose="02000600000000000000" pitchFamily="2" charset="0"/>
+                  <a:cs typeface="Ramabhadra" panose="02000600000000000000" pitchFamily="2" charset="0"/>
+                </a:rPr>
+                <a:t>యెహోవ నిన్నే మహిమ పరచెద</a:t>
+              </a:r>
+            </a:p>
+            <a:p>
+              <a:r>
+                <a:rPr lang="te-IN" sz="1900" dirty="0">
+                  <a:latin typeface="Ramabhadra" panose="02000600000000000000" pitchFamily="2" charset="0"/>
+                  <a:cs typeface="Ramabhadra" panose="02000600000000000000" pitchFamily="2" charset="0"/>
+                </a:rPr>
+                <a:t>స్తుతి గీతాలతో – స్తుతి గీతాలతో (2)</a:t>
               </a:r>
             </a:p>
           </p:txBody>
@@ -3730,9 +3720,9 @@
         <p:grpSpPr>
           <a:xfrm>
             <a:off x="160868" y="182032"/>
-            <a:ext cx="5726868" cy="6703968"/>
+            <a:ext cx="5680907" cy="6493935"/>
             <a:chOff x="160868" y="182032"/>
-            <a:chExt cx="5726868" cy="6703968"/>
+            <a:chExt cx="5680907" cy="6493935"/>
           </a:xfrm>
         </p:grpSpPr>
         <p:sp>
@@ -3804,8 +3794,8 @@
           </p:nvSpPr>
           <p:spPr>
             <a:xfrm>
-              <a:off x="492125" y="330359"/>
-              <a:ext cx="5395611" cy="6555641"/>
+              <a:off x="446164" y="481595"/>
+              <a:ext cx="5395611" cy="5262979"/>
             </a:xfrm>
             <a:prstGeom prst="rect">
               <a:avLst/>
@@ -3822,13 +3812,13 @@
                 <a:defRPr/>
               </a:pPr>
               <a:r>
-                <a:rPr lang="te-IN" sz="2100" dirty="0">
-                  <a:latin typeface="Ramabhadra" panose="02000600000000000000" pitchFamily="2" charset="0"/>
-                  <a:cs typeface="Ramabhadra" panose="02000600000000000000" pitchFamily="2" charset="0"/>
-                </a:rPr>
-                <a:t>యేసే నా పరిహారి</a:t>
-              </a:r>
-              <a:endParaRPr lang="en-IN" sz="2100" dirty="0">
+                <a:rPr lang="te-IN" sz="2400" dirty="0">
+                  <a:latin typeface="Ramabhadra" panose="02000600000000000000" pitchFamily="2" charset="0"/>
+                  <a:cs typeface="Ramabhadra" panose="02000600000000000000" pitchFamily="2" charset="0"/>
+                </a:rPr>
+                <a:t>తరతరాలలో యుగయుగాలలో</a:t>
+              </a:r>
+              <a:endParaRPr lang="en-US" sz="2400" dirty="0">
                 <a:latin typeface="Ramabhadra" panose="02000600000000000000" pitchFamily="2" charset="0"/>
                 <a:cs typeface="Ramabhadra" panose="02000600000000000000" pitchFamily="2" charset="0"/>
               </a:endParaRPr>
@@ -3838,26 +3828,37 @@
                 <a:defRPr/>
               </a:pPr>
               <a:r>
-                <a:rPr lang="te-IN" sz="2100" dirty="0">
-                  <a:latin typeface="Ramabhadra" panose="02000600000000000000" pitchFamily="2" charset="0"/>
-                  <a:cs typeface="Ramabhadra" panose="02000600000000000000" pitchFamily="2" charset="0"/>
-                </a:rPr>
-                <a:t>ప్రియ యేసే నా పరిహారి</a:t>
-              </a:r>
-              <a:br>
-                <a:rPr lang="te-IN" sz="2100" dirty="0">
-                  <a:latin typeface="Ramabhadra" panose="02000600000000000000" pitchFamily="2" charset="0"/>
-                  <a:cs typeface="Ramabhadra" panose="02000600000000000000" pitchFamily="2" charset="0"/>
-                </a:rPr>
-              </a:br>
-              <a:r>
-                <a:rPr lang="te-IN" sz="2100" dirty="0">
-                  <a:latin typeface="Ramabhadra" panose="02000600000000000000" pitchFamily="2" charset="0"/>
-                  <a:cs typeface="Ramabhadra" panose="02000600000000000000" pitchFamily="2" charset="0"/>
-                </a:rPr>
-                <a:t>నా జీవిత కాలమెల్ల</a:t>
-              </a:r>
-              <a:endParaRPr lang="en-IN" sz="2100" dirty="0">
+                <a:rPr lang="te-IN" sz="2400" dirty="0">
+                  <a:latin typeface="Ramabhadra" panose="02000600000000000000" pitchFamily="2" charset="0"/>
+                  <a:cs typeface="Ramabhadra" panose="02000600000000000000" pitchFamily="2" charset="0"/>
+                </a:rPr>
+                <a:t>జగజగాలలో</a:t>
+              </a:r>
+            </a:p>
+            <a:p>
+              <a:pPr defTabSz="439781">
+                <a:defRPr/>
+              </a:pPr>
+              <a:r>
+                <a:rPr lang="te-IN" sz="2400" dirty="0">
+                  <a:latin typeface="Ramabhadra" panose="02000600000000000000" pitchFamily="2" charset="0"/>
+                  <a:cs typeface="Ramabhadra" panose="02000600000000000000" pitchFamily="2" charset="0"/>
+                </a:rPr>
+                <a:t>దేవుడు దేవుడు యేసే దేవుడు</a:t>
+              </a:r>
+            </a:p>
+            <a:p>
+              <a:pPr defTabSz="439781">
+                <a:defRPr/>
+              </a:pPr>
+              <a:r>
+                <a:rPr lang="te-IN" sz="2400" dirty="0">
+                  <a:latin typeface="Ramabhadra" panose="02000600000000000000" pitchFamily="2" charset="0"/>
+                  <a:cs typeface="Ramabhadra" panose="02000600000000000000" pitchFamily="2" charset="0"/>
+                </a:rPr>
+                <a:t>హల్లెలూయా హల్లెలూయా</a:t>
+              </a:r>
+              <a:endParaRPr lang="en-US" sz="2400" dirty="0">
                 <a:latin typeface="Ramabhadra" panose="02000600000000000000" pitchFamily="2" charset="0"/>
                 <a:cs typeface="Ramabhadra" panose="02000600000000000000" pitchFamily="2" charset="0"/>
               </a:endParaRPr>
@@ -3867,18 +3868,18 @@
                 <a:defRPr/>
               </a:pPr>
               <a:r>
-                <a:rPr lang="te-IN" sz="2100" dirty="0">
-                  <a:latin typeface="Ramabhadra" panose="02000600000000000000" pitchFamily="2" charset="0"/>
-                  <a:cs typeface="Ramabhadra" panose="02000600000000000000" pitchFamily="2" charset="0"/>
-                </a:rPr>
-                <a:t>ప్రియ ప్రభువే నా పరిహారి (2)         </a:t>
+                <a:rPr lang="te-IN" sz="2400" dirty="0">
+                  <a:latin typeface="Ramabhadra" panose="02000600000000000000" pitchFamily="2" charset="0"/>
+                  <a:cs typeface="Ramabhadra" panose="02000600000000000000" pitchFamily="2" charset="0"/>
+                </a:rPr>
+                <a:t>హల్లెలూయా హల్లెలూయా</a:t>
               </a:r>
             </a:p>
             <a:p>
               <a:pPr defTabSz="439781">
                 <a:defRPr/>
               </a:pPr>
-              <a:endParaRPr lang="te-IN" sz="2100" dirty="0">
+              <a:endParaRPr lang="te-IN" sz="2400" dirty="0">
                 <a:latin typeface="Ramabhadra" panose="02000600000000000000" pitchFamily="2" charset="0"/>
                 <a:cs typeface="Ramabhadra" panose="02000600000000000000" pitchFamily="2" charset="0"/>
               </a:endParaRPr>
@@ -3888,11 +3889,11 @@
                 <a:defRPr/>
               </a:pPr>
               <a:r>
-                <a:rPr lang="te-IN" sz="2100" dirty="0">
-                  <a:latin typeface="Ramabhadra" panose="02000600000000000000" pitchFamily="2" charset="0"/>
-                  <a:cs typeface="Ramabhadra" panose="02000600000000000000" pitchFamily="2" charset="0"/>
-                </a:rPr>
-                <a:t>ఎన్ని కష్టాలు కలిగిననూ</a:t>
+                <a:rPr lang="te-IN" sz="2400" dirty="0">
+                  <a:latin typeface="Ramabhadra" panose="02000600000000000000" pitchFamily="2" charset="0"/>
+                  <a:cs typeface="Ramabhadra" panose="02000600000000000000" pitchFamily="2" charset="0"/>
+                </a:rPr>
+                <a:t>భూమిని పుట్టించకమునుపు</a:t>
               </a:r>
             </a:p>
             <a:p>
@@ -3900,42 +3901,51 @@
                 <a:defRPr/>
               </a:pPr>
               <a:r>
-                <a:rPr lang="te-IN" sz="2100" dirty="0">
-                  <a:latin typeface="Ramabhadra" panose="02000600000000000000" pitchFamily="2" charset="0"/>
-                  <a:cs typeface="Ramabhadra" panose="02000600000000000000" pitchFamily="2" charset="0"/>
-                </a:rPr>
-                <a:t>నన్ను కృంగించె భాదలెన్నో</a:t>
+                <a:rPr lang="te-IN" sz="2400" dirty="0">
+                  <a:latin typeface="Ramabhadra" panose="02000600000000000000" pitchFamily="2" charset="0"/>
+                  <a:cs typeface="Ramabhadra" panose="02000600000000000000" pitchFamily="2" charset="0"/>
+                </a:rPr>
+                <a:t>లోకము పునాది లేనపుడు</a:t>
               </a:r>
             </a:p>
             <a:p>
               <a:pPr defTabSz="439781">
                 <a:defRPr/>
               </a:pPr>
-              <a:r>
-                <a:rPr lang="te-IN" sz="2100" dirty="0">
-                  <a:latin typeface="Ramabhadra" panose="02000600000000000000" pitchFamily="2" charset="0"/>
-                  <a:cs typeface="Ramabhadra" panose="02000600000000000000" pitchFamily="2" charset="0"/>
-                </a:rPr>
-                <a:t>ఎన్ని నష్టాలు వాటిల్లినా </a:t>
-              </a:r>
+              <a:endParaRPr lang="te-IN" sz="2400" dirty="0">
+                <a:latin typeface="Ramabhadra" panose="02000600000000000000" pitchFamily="2" charset="0"/>
+                <a:cs typeface="Ramabhadra" panose="02000600000000000000" pitchFamily="2" charset="0"/>
+              </a:endParaRPr>
             </a:p>
             <a:p>
               <a:pPr defTabSz="439781">
                 <a:defRPr/>
               </a:pPr>
               <a:r>
-                <a:rPr lang="te-IN" sz="2100" dirty="0">
-                  <a:latin typeface="Ramabhadra" panose="02000600000000000000" pitchFamily="2" charset="0"/>
-                  <a:cs typeface="Ramabhadra" panose="02000600000000000000" pitchFamily="2" charset="0"/>
-                </a:rPr>
-                <a:t>ప్రియ ప్రభువే నా పరిహారి (2)        </a:t>
+                <a:rPr lang="te-IN" sz="2400" dirty="0">
+                  <a:latin typeface="Ramabhadra" panose="02000600000000000000" pitchFamily="2" charset="0"/>
+                  <a:cs typeface="Ramabhadra" panose="02000600000000000000" pitchFamily="2" charset="0"/>
+                </a:rPr>
+                <a:t>సృష్టికి శిల్పకారుడు</a:t>
               </a:r>
             </a:p>
             <a:p>
               <a:pPr defTabSz="439781">
                 <a:defRPr/>
               </a:pPr>
-              <a:endParaRPr lang="te-IN" sz="2100" dirty="0">
+              <a:r>
+                <a:rPr lang="te-IN" sz="2400" dirty="0">
+                  <a:latin typeface="Ramabhadra" panose="02000600000000000000" pitchFamily="2" charset="0"/>
+                  <a:cs typeface="Ramabhadra" panose="02000600000000000000" pitchFamily="2" charset="0"/>
+                </a:rPr>
+                <a:t>జగతికి ఆదిసంభూతుడు</a:t>
+              </a:r>
+            </a:p>
+            <a:p>
+              <a:pPr defTabSz="439781">
+                <a:defRPr/>
+              </a:pPr>
+              <a:endParaRPr lang="te-IN" sz="2400" dirty="0">
                 <a:latin typeface="Ramabhadra" panose="02000600000000000000" pitchFamily="2" charset="0"/>
                 <a:cs typeface="Ramabhadra" panose="02000600000000000000" pitchFamily="2" charset="0"/>
               </a:endParaRPr>
@@ -3945,11 +3955,11 @@
                 <a:defRPr/>
               </a:pPr>
               <a:r>
-                <a:rPr lang="te-IN" sz="2100" dirty="0">
-                  <a:latin typeface="Ramabhadra" panose="02000600000000000000" pitchFamily="2" charset="0"/>
-                  <a:cs typeface="Ramabhadra" panose="02000600000000000000" pitchFamily="2" charset="0"/>
-                </a:rPr>
-                <a:t>నన్ను సాతాను వెంబడించినా</a:t>
+                <a:rPr lang="te-IN" sz="2400" dirty="0">
+                  <a:latin typeface="Ramabhadra" panose="02000600000000000000" pitchFamily="2" charset="0"/>
+                  <a:cs typeface="Ramabhadra" panose="02000600000000000000" pitchFamily="2" charset="0"/>
+                </a:rPr>
+                <a:t>తండ్రి కుమార ఆత్మయు</a:t>
               </a:r>
             </a:p>
             <a:p>
@@ -3957,111 +3967,11 @@
                 <a:defRPr/>
               </a:pPr>
               <a:r>
-                <a:rPr lang="te-IN" sz="2100" dirty="0">
-                  <a:latin typeface="Ramabhadra" panose="02000600000000000000" pitchFamily="2" charset="0"/>
-                  <a:cs typeface="Ramabhadra" panose="02000600000000000000" pitchFamily="2" charset="0"/>
-                </a:rPr>
-                <a:t>నన్ను శత్రువు ఎదిరించినా (2)</a:t>
-              </a:r>
-              <a:br>
-                <a:rPr lang="te-IN" sz="2100" dirty="0">
-                  <a:latin typeface="Ramabhadra" panose="02000600000000000000" pitchFamily="2" charset="0"/>
-                  <a:cs typeface="Ramabhadra" panose="02000600000000000000" pitchFamily="2" charset="0"/>
-                </a:rPr>
-              </a:br>
-              <a:r>
-                <a:rPr lang="te-IN" sz="2100" dirty="0">
-                  <a:latin typeface="Ramabhadra" panose="02000600000000000000" pitchFamily="2" charset="0"/>
-                  <a:cs typeface="Ramabhadra" panose="02000600000000000000" pitchFamily="2" charset="0"/>
-                </a:rPr>
-                <a:t>పలు నిందలు నను చుట్టినా</a:t>
-              </a:r>
-            </a:p>
-            <a:p>
-              <a:pPr defTabSz="439781">
-                <a:defRPr/>
-              </a:pPr>
-              <a:r>
-                <a:rPr lang="te-IN" sz="2100" dirty="0">
-                  <a:latin typeface="Ramabhadra" panose="02000600000000000000" pitchFamily="2" charset="0"/>
-                  <a:cs typeface="Ramabhadra" panose="02000600000000000000" pitchFamily="2" charset="0"/>
-                </a:rPr>
-                <a:t>ప్రియ ప్రభువే నా పరిహారి (2)</a:t>
-              </a:r>
-              <a:endParaRPr lang="en-IN" sz="2100" dirty="0">
-                <a:latin typeface="Ramabhadra" panose="02000600000000000000" pitchFamily="2" charset="0"/>
-                <a:cs typeface="Ramabhadra" panose="02000600000000000000" pitchFamily="2" charset="0"/>
-              </a:endParaRPr>
-            </a:p>
-            <a:p>
-              <a:pPr defTabSz="439781">
-                <a:defRPr/>
-              </a:pPr>
-              <a:endParaRPr lang="en-IN" sz="2100" dirty="0">
-                <a:latin typeface="Ramabhadra" panose="02000600000000000000" pitchFamily="2" charset="0"/>
-                <a:cs typeface="Ramabhadra" panose="02000600000000000000" pitchFamily="2" charset="0"/>
-              </a:endParaRPr>
-            </a:p>
-            <a:p>
-              <a:pPr defTabSz="439781">
-                <a:defRPr/>
-              </a:pPr>
-              <a:r>
-                <a:rPr lang="te-IN" sz="2100" dirty="0">
-                  <a:latin typeface="Ramabhadra" panose="02000600000000000000" pitchFamily="2" charset="0"/>
-                  <a:cs typeface="Ramabhadra" panose="02000600000000000000" pitchFamily="2" charset="0"/>
-                </a:rPr>
-                <a:t>మణి మాన్యాలు లేకున్ననూ</a:t>
-              </a:r>
-            </a:p>
-            <a:p>
-              <a:pPr defTabSz="439781">
-                <a:defRPr/>
-              </a:pPr>
-              <a:r>
-                <a:rPr lang="te-IN" sz="2100" dirty="0">
-                  <a:latin typeface="Ramabhadra" panose="02000600000000000000" pitchFamily="2" charset="0"/>
-                  <a:cs typeface="Ramabhadra" panose="02000600000000000000" pitchFamily="2" charset="0"/>
-                </a:rPr>
-                <a:t>పలు వేదనలు వేధించినా (2)</a:t>
-              </a:r>
-              <a:br>
-                <a:rPr lang="te-IN" sz="2100" dirty="0">
-                  <a:latin typeface="Ramabhadra" panose="02000600000000000000" pitchFamily="2" charset="0"/>
-                  <a:cs typeface="Ramabhadra" panose="02000600000000000000" pitchFamily="2" charset="0"/>
-                </a:rPr>
-              </a:br>
-              <a:r>
-                <a:rPr lang="te-IN" sz="2100" dirty="0">
-                  <a:latin typeface="Ramabhadra" panose="02000600000000000000" pitchFamily="2" charset="0"/>
-                  <a:cs typeface="Ramabhadra" panose="02000600000000000000" pitchFamily="2" charset="0"/>
-                </a:rPr>
-                <a:t>నరులెల్లరు నను విడచినా</a:t>
-              </a:r>
-              <a:br>
-                <a:rPr lang="te-IN" sz="2100" dirty="0">
-                  <a:latin typeface="Ramabhadra" panose="02000600000000000000" pitchFamily="2" charset="0"/>
-                  <a:cs typeface="Ramabhadra" panose="02000600000000000000" pitchFamily="2" charset="0"/>
-                </a:rPr>
-              </a:br>
-              <a:r>
-                <a:rPr lang="te-IN" sz="2100" dirty="0">
-                  <a:latin typeface="Ramabhadra" panose="02000600000000000000" pitchFamily="2" charset="0"/>
-                  <a:cs typeface="Ramabhadra" panose="02000600000000000000" pitchFamily="2" charset="0"/>
-                </a:rPr>
-                <a:t>ప్రియ ప్రభువే నా పరిహారి (2)         </a:t>
-              </a:r>
-            </a:p>
-            <a:p>
-              <a:pPr defTabSz="439781">
-                <a:defRPr/>
-              </a:pPr>
-              <a:r>
-                <a:rPr lang="te-IN" sz="2100" dirty="0">
-                  <a:latin typeface="Ramabhadra" panose="02000600000000000000" pitchFamily="2" charset="0"/>
-                  <a:cs typeface="Ramabhadra" panose="02000600000000000000" pitchFamily="2" charset="0"/>
-                </a:rPr>
-                <a:t>     </a:t>
+                <a:rPr lang="te-IN" sz="2400" dirty="0">
+                  <a:latin typeface="Ramabhadra" panose="02000600000000000000" pitchFamily="2" charset="0"/>
+                  <a:cs typeface="Ramabhadra" panose="02000600000000000000" pitchFamily="2" charset="0"/>
+                </a:rPr>
+                <a:t>ఒకడైయున్న రూపము</a:t>
               </a:r>
             </a:p>
           </p:txBody>
@@ -4144,9 +4054,9 @@
         <p:grpSpPr>
           <a:xfrm>
             <a:off x="5104338" y="182031"/>
-            <a:ext cx="4943470" cy="6493935"/>
+            <a:ext cx="4909271" cy="6493935"/>
             <a:chOff x="160868" y="182032"/>
-            <a:chExt cx="4943470" cy="6493935"/>
+            <a:chExt cx="4909271" cy="6493935"/>
           </a:xfrm>
         </p:grpSpPr>
         <p:sp>
@@ -4218,8 +4128,8 @@
           </p:nvSpPr>
           <p:spPr>
             <a:xfrm>
-              <a:off x="354537" y="481596"/>
-              <a:ext cx="4749801" cy="5632311"/>
+              <a:off x="320338" y="339801"/>
+              <a:ext cx="4749801" cy="6186309"/>
             </a:xfrm>
             <a:prstGeom prst="rect">
               <a:avLst/>
@@ -4236,42 +4146,63 @@
                 <a:defRPr/>
               </a:pPr>
               <a:r>
-                <a:rPr lang="te-IN" sz="2400" dirty="0">
-                  <a:latin typeface="Ramabhadra" panose="02000600000000000000" pitchFamily="2" charset="0"/>
-                  <a:cs typeface="Ramabhadra" panose="02000600000000000000" pitchFamily="2" charset="0"/>
-                </a:rPr>
-                <a:t>శాశ్వతమైనది నా యేసుని ప్రేమ </a:t>
-              </a:r>
+                <a:rPr lang="te-IN" sz="2200" dirty="0">
+                  <a:latin typeface="Ramabhadra" panose="02000600000000000000" pitchFamily="2" charset="0"/>
+                  <a:cs typeface="Ramabhadra" panose="02000600000000000000" pitchFamily="2" charset="0"/>
+                </a:rPr>
+                <a:t>స్తోత్రం చెల్లింతుము</a:t>
+              </a:r>
+              <a:endParaRPr lang="en-US" sz="2200" dirty="0">
+                <a:latin typeface="Ramabhadra" panose="02000600000000000000" pitchFamily="2" charset="0"/>
+                <a:cs typeface="Ramabhadra" panose="02000600000000000000" pitchFamily="2" charset="0"/>
+              </a:endParaRPr>
             </a:p>
             <a:p>
               <a:pPr defTabSz="439781">
                 <a:defRPr/>
               </a:pPr>
               <a:r>
-                <a:rPr lang="te-IN" sz="2400" dirty="0">
-                  <a:latin typeface="Ramabhadra" panose="02000600000000000000" pitchFamily="2" charset="0"/>
-                  <a:cs typeface="Ramabhadra" panose="02000600000000000000" pitchFamily="2" charset="0"/>
-                </a:rPr>
-                <a:t>నిరంతరం ఉండునది నిజ దేవుని ప్రేమ </a:t>
+                <a:rPr lang="te-IN" sz="2200" dirty="0">
+                  <a:latin typeface="Ramabhadra" panose="02000600000000000000" pitchFamily="2" charset="0"/>
+                  <a:cs typeface="Ramabhadra" panose="02000600000000000000" pitchFamily="2" charset="0"/>
+                </a:rPr>
+                <a:t>స్తుతి స్తోత్రం చెల్లింతుము</a:t>
+              </a:r>
+              <a:br>
+                <a:rPr lang="te-IN" sz="2200" dirty="0">
+                  <a:latin typeface="Ramabhadra" panose="02000600000000000000" pitchFamily="2" charset="0"/>
+                  <a:cs typeface="Ramabhadra" panose="02000600000000000000" pitchFamily="2" charset="0"/>
+                </a:rPr>
+              </a:br>
+              <a:r>
+                <a:rPr lang="te-IN" sz="2200" dirty="0">
+                  <a:latin typeface="Ramabhadra" panose="02000600000000000000" pitchFamily="2" charset="0"/>
+                  <a:cs typeface="Ramabhadra" panose="02000600000000000000" pitchFamily="2" charset="0"/>
+                </a:rPr>
+                <a:t>యేసు నాథుని మేలులు తలంచి</a:t>
               </a:r>
             </a:p>
             <a:p>
               <a:pPr defTabSz="439781">
                 <a:defRPr/>
               </a:pPr>
-              <a:r>
-                <a:rPr lang="te-IN" sz="2400" dirty="0">
-                  <a:latin typeface="Ramabhadra" panose="02000600000000000000" pitchFamily="2" charset="0"/>
-                  <a:cs typeface="Ramabhadra" panose="02000600000000000000" pitchFamily="2" charset="0"/>
-                </a:rPr>
-                <a:t>యేసుని ప్రేమ  నా యేసుని ప్రేమ </a:t>
-              </a:r>
+              <a:endParaRPr lang="te-IN" sz="2200" dirty="0">
+                <a:latin typeface="Ramabhadra" panose="02000600000000000000" pitchFamily="2" charset="0"/>
+                <a:cs typeface="Ramabhadra" panose="02000600000000000000" pitchFamily="2" charset="0"/>
+              </a:endParaRPr>
             </a:p>
             <a:p>
               <a:pPr defTabSz="439781">
                 <a:defRPr/>
               </a:pPr>
-              <a:endParaRPr lang="te-IN" sz="2400" dirty="0">
+              <a:r>
+                <a:rPr lang="te-IN" sz="2200" dirty="0">
+                  <a:latin typeface="Ramabhadra" panose="02000600000000000000" pitchFamily="2" charset="0"/>
+                  <a:cs typeface="Ramabhadra" panose="02000600000000000000" pitchFamily="2" charset="0"/>
+                </a:rPr>
+                <a:t>దివారాత్రములు</a:t>
+              </a:r>
+              <a:endParaRPr lang="en-US" sz="2200" dirty="0">
                 <a:latin typeface="Ramabhadra" panose="02000600000000000000" pitchFamily="2" charset="0"/>
                 <a:cs typeface="Ramabhadra" panose="02000600000000000000" pitchFamily="2" charset="0"/>
               </a:endParaRPr>
@@ -4281,66 +4212,122 @@
                 <a:defRPr/>
               </a:pPr>
               <a:r>
-                <a:rPr lang="te-IN" sz="2400" dirty="0">
-                  <a:latin typeface="Ramabhadra" panose="02000600000000000000" pitchFamily="2" charset="0"/>
-                  <a:cs typeface="Ramabhadra" panose="02000600000000000000" pitchFamily="2" charset="0"/>
-                </a:rPr>
-                <a:t>నా పాపములను భరియించినది  </a:t>
-              </a:r>
+                <a:rPr lang="te-IN" sz="2200" dirty="0">
+                  <a:latin typeface="Ramabhadra" panose="02000600000000000000" pitchFamily="2" charset="0"/>
+                  <a:cs typeface="Ramabhadra" panose="02000600000000000000" pitchFamily="2" charset="0"/>
+                </a:rPr>
+                <a:t>కంటిపాపవలె కాచి (2)</a:t>
+              </a:r>
+              <a:br>
+                <a:rPr lang="te-IN" sz="2200" dirty="0">
+                  <a:latin typeface="Ramabhadra" panose="02000600000000000000" pitchFamily="2" charset="0"/>
+                  <a:cs typeface="Ramabhadra" panose="02000600000000000000" pitchFamily="2" charset="0"/>
+                </a:rPr>
+              </a:br>
+              <a:r>
+                <a:rPr lang="te-IN" sz="2200" dirty="0">
+                  <a:latin typeface="Ramabhadra" panose="02000600000000000000" pitchFamily="2" charset="0"/>
+                  <a:cs typeface="Ramabhadra" panose="02000600000000000000" pitchFamily="2" charset="0"/>
+                </a:rPr>
+                <a:t>దయగల హస్తముతో</a:t>
+              </a:r>
+              <a:endParaRPr lang="en-US" sz="2200" dirty="0">
+                <a:latin typeface="Ramabhadra" panose="02000600000000000000" pitchFamily="2" charset="0"/>
+                <a:cs typeface="Ramabhadra" panose="02000600000000000000" pitchFamily="2" charset="0"/>
+              </a:endParaRPr>
             </a:p>
             <a:p>
               <a:pPr defTabSz="439781">
                 <a:defRPr/>
               </a:pPr>
               <a:r>
-                <a:rPr lang="te-IN" sz="2400" dirty="0">
-                  <a:latin typeface="Ramabhadra" panose="02000600000000000000" pitchFamily="2" charset="0"/>
-                  <a:cs typeface="Ramabhadra" panose="02000600000000000000" pitchFamily="2" charset="0"/>
-                </a:rPr>
-                <a:t>నాకై శ్రమలను సహియించినది </a:t>
+                <a:rPr lang="te-IN" sz="2200" dirty="0">
+                  <a:latin typeface="Ramabhadra" panose="02000600000000000000" pitchFamily="2" charset="0"/>
+                  <a:cs typeface="Ramabhadra" panose="02000600000000000000" pitchFamily="2" charset="0"/>
+                </a:rPr>
+                <a:t>బ్రోచి నడిపించితివి (2)</a:t>
               </a:r>
             </a:p>
             <a:p>
               <a:pPr defTabSz="439781">
                 <a:defRPr/>
               </a:pPr>
-              <a:r>
-                <a:rPr lang="te-IN" sz="2400" dirty="0">
-                  <a:latin typeface="Ramabhadra" panose="02000600000000000000" pitchFamily="2" charset="0"/>
-                  <a:cs typeface="Ramabhadra" panose="02000600000000000000" pitchFamily="2" charset="0"/>
-                </a:rPr>
-                <a:t>నాకు మారుగా మరణించినది </a:t>
-              </a:r>
+              <a:endParaRPr lang="te-IN" sz="2200" dirty="0">
+                <a:latin typeface="Ramabhadra" panose="02000600000000000000" pitchFamily="2" charset="0"/>
+                <a:cs typeface="Ramabhadra" panose="02000600000000000000" pitchFamily="2" charset="0"/>
+              </a:endParaRPr>
             </a:p>
             <a:p>
               <a:pPr defTabSz="439781">
                 <a:defRPr/>
               </a:pPr>
               <a:r>
-                <a:rPr lang="te-IN" sz="2400" dirty="0">
-                  <a:latin typeface="Ramabhadra" panose="02000600000000000000" pitchFamily="2" charset="0"/>
-                  <a:cs typeface="Ramabhadra" panose="02000600000000000000" pitchFamily="2" charset="0"/>
-                </a:rPr>
-                <a:t>నను జీవముతో బ్రతికించునది  </a:t>
-              </a:r>
+                <a:rPr lang="te-IN" sz="2200" dirty="0">
+                  <a:latin typeface="Ramabhadra" panose="02000600000000000000" pitchFamily="2" charset="0"/>
+                  <a:cs typeface="Ramabhadra" panose="02000600000000000000" pitchFamily="2" charset="0"/>
+                </a:rPr>
+                <a:t>గాడాంధకారములో</a:t>
+              </a:r>
+              <a:endParaRPr lang="en-US" sz="2200" dirty="0">
+                <a:latin typeface="Ramabhadra" panose="02000600000000000000" pitchFamily="2" charset="0"/>
+                <a:cs typeface="Ramabhadra" panose="02000600000000000000" pitchFamily="2" charset="0"/>
+              </a:endParaRPr>
             </a:p>
             <a:p>
               <a:pPr defTabSz="439781">
                 <a:defRPr/>
               </a:pPr>
               <a:r>
-                <a:rPr lang="te-IN" sz="2400" dirty="0">
-                  <a:latin typeface="Ramabhadra" panose="02000600000000000000" pitchFamily="2" charset="0"/>
-                  <a:cs typeface="Ramabhadra" panose="02000600000000000000" pitchFamily="2" charset="0"/>
-                </a:rPr>
-                <a:t>యేసుని ప్రేమ  నా యేసుని ప్రేమ</a:t>
-              </a:r>
+                <a:rPr lang="te-IN" sz="2200" dirty="0">
+                  <a:latin typeface="Ramabhadra" panose="02000600000000000000" pitchFamily="2" charset="0"/>
+                  <a:cs typeface="Ramabhadra" panose="02000600000000000000" pitchFamily="2" charset="0"/>
+                </a:rPr>
+                <a:t>కన్నీటి లోయలలో (2)</a:t>
+              </a:r>
+              <a:br>
+                <a:rPr lang="te-IN" sz="2200" dirty="0">
+                  <a:latin typeface="Ramabhadra" panose="02000600000000000000" pitchFamily="2" charset="0"/>
+                  <a:cs typeface="Ramabhadra" panose="02000600000000000000" pitchFamily="2" charset="0"/>
+                </a:rPr>
+              </a:br>
+              <a:r>
+                <a:rPr lang="te-IN" sz="2200" dirty="0">
+                  <a:latin typeface="Ramabhadra" panose="02000600000000000000" pitchFamily="2" charset="0"/>
+                  <a:cs typeface="Ramabhadra" panose="02000600000000000000" pitchFamily="2" charset="0"/>
+                </a:rPr>
+                <a:t>కృశించి</a:t>
+              </a:r>
+              <a:r>
+                <a:rPr lang="en-US" sz="2200" dirty="0">
+                  <a:latin typeface="Ramabhadra" panose="02000600000000000000" pitchFamily="2" charset="0"/>
+                  <a:cs typeface="Ramabhadra" panose="02000600000000000000" pitchFamily="2" charset="0"/>
+                </a:rPr>
+                <a:t> </a:t>
+              </a:r>
+              <a:r>
+                <a:rPr lang="te-IN" sz="2200" dirty="0">
+                  <a:latin typeface="Ramabhadra" panose="02000600000000000000" pitchFamily="2" charset="0"/>
+                  <a:cs typeface="Ramabhadra" panose="02000600000000000000" pitchFamily="2" charset="0"/>
+                </a:rPr>
+                <a:t>పోనీయక</a:t>
+              </a:r>
+              <a:endParaRPr lang="en-US" sz="2200" dirty="0">
+                <a:latin typeface="Ramabhadra" panose="02000600000000000000" pitchFamily="2" charset="0"/>
+                <a:cs typeface="Ramabhadra" panose="02000600000000000000" pitchFamily="2" charset="0"/>
+              </a:endParaRPr>
             </a:p>
             <a:p>
               <a:pPr defTabSz="439781">
                 <a:defRPr/>
               </a:pPr>
-              <a:endParaRPr lang="te-IN" sz="2400" dirty="0">
+              <a:r>
+                <a:rPr lang="te-IN" sz="2200" dirty="0">
+                  <a:latin typeface="Ramabhadra" panose="02000600000000000000" pitchFamily="2" charset="0"/>
+                  <a:cs typeface="Ramabhadra" panose="02000600000000000000" pitchFamily="2" charset="0"/>
+                </a:rPr>
+                <a:t>కృపలతో బలపరచితివి (2)</a:t>
+              </a:r>
+              <a:endParaRPr lang="en-US" sz="2200" dirty="0">
                 <a:latin typeface="Ramabhadra" panose="02000600000000000000" pitchFamily="2" charset="0"/>
                 <a:cs typeface="Ramabhadra" panose="02000600000000000000" pitchFamily="2" charset="0"/>
               </a:endParaRPr>
@@ -4349,60 +4336,66 @@
               <a:pPr defTabSz="439781">
                 <a:defRPr/>
               </a:pPr>
-              <a:r>
-                <a:rPr lang="te-IN" sz="2400" dirty="0">
-                  <a:latin typeface="Ramabhadra" panose="02000600000000000000" pitchFamily="2" charset="0"/>
-                  <a:cs typeface="Ramabhadra" panose="02000600000000000000" pitchFamily="2" charset="0"/>
-                </a:rPr>
-                <a:t>మరణపులోయలో నను కాచినది </a:t>
-              </a:r>
+              <a:endParaRPr lang="te-IN" sz="2200" dirty="0">
+                <a:latin typeface="Ramabhadra" panose="02000600000000000000" pitchFamily="2" charset="0"/>
+                <a:cs typeface="Ramabhadra" panose="02000600000000000000" pitchFamily="2" charset="0"/>
+              </a:endParaRPr>
             </a:p>
             <a:p>
               <a:pPr defTabSz="439781">
                 <a:defRPr/>
               </a:pPr>
               <a:r>
-                <a:rPr lang="te-IN" sz="2400" dirty="0">
-                  <a:latin typeface="Ramabhadra" panose="02000600000000000000" pitchFamily="2" charset="0"/>
-                  <a:cs typeface="Ramabhadra" panose="02000600000000000000" pitchFamily="2" charset="0"/>
-                </a:rPr>
-                <a:t>నా శ్రమలో నను ఓదార్చినది </a:t>
-              </a:r>
+                <a:rPr lang="te-IN" sz="2200" dirty="0">
+                  <a:latin typeface="Ramabhadra" panose="02000600000000000000" pitchFamily="2" charset="0"/>
+                  <a:cs typeface="Ramabhadra" panose="02000600000000000000" pitchFamily="2" charset="0"/>
+                </a:rPr>
+                <a:t>సజీవ యాగముగా</a:t>
+              </a:r>
+              <a:endParaRPr lang="en-US" sz="2200" dirty="0">
+                <a:latin typeface="Ramabhadra" panose="02000600000000000000" pitchFamily="2" charset="0"/>
+                <a:cs typeface="Ramabhadra" panose="02000600000000000000" pitchFamily="2" charset="0"/>
+              </a:endParaRPr>
             </a:p>
             <a:p>
               <a:pPr defTabSz="439781">
                 <a:defRPr/>
               </a:pPr>
               <a:r>
-                <a:rPr lang="te-IN" sz="2400" dirty="0">
-                  <a:latin typeface="Ramabhadra" panose="02000600000000000000" pitchFamily="2" charset="0"/>
-                  <a:cs typeface="Ramabhadra" panose="02000600000000000000" pitchFamily="2" charset="0"/>
-                </a:rPr>
-                <a:t>నను వీడనిది ఎడబాయనిది</a:t>
-              </a:r>
+                <a:rPr lang="te-IN" sz="2200" dirty="0">
+                  <a:latin typeface="Ramabhadra" panose="02000600000000000000" pitchFamily="2" charset="0"/>
+                  <a:cs typeface="Ramabhadra" panose="02000600000000000000" pitchFamily="2" charset="0"/>
+                </a:rPr>
+                <a:t>మా శరీరము సమర్పించి (2)</a:t>
+              </a:r>
+              <a:br>
+                <a:rPr lang="te-IN" sz="2200" dirty="0">
+                  <a:latin typeface="Ramabhadra" panose="02000600000000000000" pitchFamily="2" charset="0"/>
+                  <a:cs typeface="Ramabhadra" panose="02000600000000000000" pitchFamily="2" charset="0"/>
+                </a:rPr>
+              </a:br>
+              <a:r>
+                <a:rPr lang="te-IN" sz="2200" dirty="0">
+                  <a:latin typeface="Ramabhadra" panose="02000600000000000000" pitchFamily="2" charset="0"/>
+                  <a:cs typeface="Ramabhadra" panose="02000600000000000000" pitchFamily="2" charset="0"/>
+                </a:rPr>
+                <a:t>సంపూర్ణ సిద్దినొంద</a:t>
+              </a:r>
+              <a:endParaRPr lang="en-US" sz="2200" dirty="0">
+                <a:latin typeface="Ramabhadra" panose="02000600000000000000" pitchFamily="2" charset="0"/>
+                <a:cs typeface="Ramabhadra" panose="02000600000000000000" pitchFamily="2" charset="0"/>
+              </a:endParaRPr>
             </a:p>
             <a:p>
               <a:pPr defTabSz="439781">
                 <a:defRPr/>
               </a:pPr>
               <a:r>
-                <a:rPr lang="te-IN" sz="2400" dirty="0">
-                  <a:latin typeface="Ramabhadra" panose="02000600000000000000" pitchFamily="2" charset="0"/>
-                  <a:cs typeface="Ramabhadra" panose="02000600000000000000" pitchFamily="2" charset="0"/>
-                </a:rPr>
-                <a:t>మారనిది  మధురమైనది </a:t>
-              </a:r>
-            </a:p>
-            <a:p>
-              <a:pPr defTabSz="439781">
-                <a:defRPr/>
-              </a:pPr>
-              <a:r>
-                <a:rPr lang="te-IN" sz="2400" dirty="0">
-                  <a:latin typeface="Ramabhadra" panose="02000600000000000000" pitchFamily="2" charset="0"/>
-                  <a:cs typeface="Ramabhadra" panose="02000600000000000000" pitchFamily="2" charset="0"/>
-                </a:rPr>
-                <a:t>యేసుని ప్రేమ  నా యేసుని ప్రేమ</a:t>
+                <a:rPr lang="te-IN" sz="2200" dirty="0">
+                  <a:latin typeface="Ramabhadra" panose="02000600000000000000" pitchFamily="2" charset="0"/>
+                  <a:cs typeface="Ramabhadra" panose="02000600000000000000" pitchFamily="2" charset="0"/>
+                </a:rPr>
+                <a:t>శుద్ధాత్మను నొసగితివి (2)      </a:t>
               </a:r>
             </a:p>
           </p:txBody>

--- a/songsTemplate.pptx
+++ b/songsTemplate.pptx
@@ -255,7 +255,7 @@
           <a:p>
             <a:fld id="{F1102B08-ED9E-409F-B95F-09CAA1DAF6E0}" type="datetimeFigureOut">
               <a:rPr lang="en-IN" smtClean="0"/>
-              <a:t>12-02-2025</a:t>
+              <a:t>21-02-2025</a:t>
             </a:fld>
             <a:endParaRPr lang="en-IN"/>
           </a:p>
@@ -425,7 +425,7 @@
           <a:p>
             <a:fld id="{F1102B08-ED9E-409F-B95F-09CAA1DAF6E0}" type="datetimeFigureOut">
               <a:rPr lang="en-IN" smtClean="0"/>
-              <a:t>12-02-2025</a:t>
+              <a:t>21-02-2025</a:t>
             </a:fld>
             <a:endParaRPr lang="en-IN"/>
           </a:p>
@@ -605,7 +605,7 @@
           <a:p>
             <a:fld id="{F1102B08-ED9E-409F-B95F-09CAA1DAF6E0}" type="datetimeFigureOut">
               <a:rPr lang="en-IN" smtClean="0"/>
-              <a:t>12-02-2025</a:t>
+              <a:t>21-02-2025</a:t>
             </a:fld>
             <a:endParaRPr lang="en-IN"/>
           </a:p>
@@ -775,7 +775,7 @@
           <a:p>
             <a:fld id="{F1102B08-ED9E-409F-B95F-09CAA1DAF6E0}" type="datetimeFigureOut">
               <a:rPr lang="en-IN" smtClean="0"/>
-              <a:t>12-02-2025</a:t>
+              <a:t>21-02-2025</a:t>
             </a:fld>
             <a:endParaRPr lang="en-IN"/>
           </a:p>
@@ -1019,7 +1019,7 @@
           <a:p>
             <a:fld id="{F1102B08-ED9E-409F-B95F-09CAA1DAF6E0}" type="datetimeFigureOut">
               <a:rPr lang="en-IN" smtClean="0"/>
-              <a:t>12-02-2025</a:t>
+              <a:t>21-02-2025</a:t>
             </a:fld>
             <a:endParaRPr lang="en-IN"/>
           </a:p>
@@ -1251,7 +1251,7 @@
           <a:p>
             <a:fld id="{F1102B08-ED9E-409F-B95F-09CAA1DAF6E0}" type="datetimeFigureOut">
               <a:rPr lang="en-IN" smtClean="0"/>
-              <a:t>12-02-2025</a:t>
+              <a:t>21-02-2025</a:t>
             </a:fld>
             <a:endParaRPr lang="en-IN"/>
           </a:p>
@@ -1618,7 +1618,7 @@
           <a:p>
             <a:fld id="{F1102B08-ED9E-409F-B95F-09CAA1DAF6E0}" type="datetimeFigureOut">
               <a:rPr lang="en-IN" smtClean="0"/>
-              <a:t>12-02-2025</a:t>
+              <a:t>21-02-2025</a:t>
             </a:fld>
             <a:endParaRPr lang="en-IN"/>
           </a:p>
@@ -1736,7 +1736,7 @@
           <a:p>
             <a:fld id="{F1102B08-ED9E-409F-B95F-09CAA1DAF6E0}" type="datetimeFigureOut">
               <a:rPr lang="en-IN" smtClean="0"/>
-              <a:t>12-02-2025</a:t>
+              <a:t>21-02-2025</a:t>
             </a:fld>
             <a:endParaRPr lang="en-IN"/>
           </a:p>
@@ -1831,7 +1831,7 @@
           <a:p>
             <a:fld id="{F1102B08-ED9E-409F-B95F-09CAA1DAF6E0}" type="datetimeFigureOut">
               <a:rPr lang="en-IN" smtClean="0"/>
-              <a:t>12-02-2025</a:t>
+              <a:t>21-02-2025</a:t>
             </a:fld>
             <a:endParaRPr lang="en-IN"/>
           </a:p>
@@ -2108,7 +2108,7 @@
           <a:p>
             <a:fld id="{F1102B08-ED9E-409F-B95F-09CAA1DAF6E0}" type="datetimeFigureOut">
               <a:rPr lang="en-IN" smtClean="0"/>
-              <a:t>12-02-2025</a:t>
+              <a:t>21-02-2025</a:t>
             </a:fld>
             <a:endParaRPr lang="en-IN"/>
           </a:p>
@@ -2365,7 +2365,7 @@
           <a:p>
             <a:fld id="{F1102B08-ED9E-409F-B95F-09CAA1DAF6E0}" type="datetimeFigureOut">
               <a:rPr lang="en-IN" smtClean="0"/>
-              <a:t>12-02-2025</a:t>
+              <a:t>21-02-2025</a:t>
             </a:fld>
             <a:endParaRPr lang="en-IN"/>
           </a:p>
@@ -2578,7 +2578,7 @@
           <a:p>
             <a:fld id="{F1102B08-ED9E-409F-B95F-09CAA1DAF6E0}" type="datetimeFigureOut">
               <a:rPr lang="en-IN" smtClean="0"/>
-              <a:t>12-02-2025</a:t>
+              <a:t>21-02-2025</a:t>
             </a:fld>
             <a:endParaRPr lang="en-IN"/>
           </a:p>
@@ -2998,9 +2998,9 @@
         <p:grpSpPr>
           <a:xfrm>
             <a:off x="160868" y="182032"/>
-            <a:ext cx="4669370" cy="6493935"/>
+            <a:ext cx="4648200" cy="6493935"/>
             <a:chOff x="160868" y="182032"/>
-            <a:chExt cx="4669370" cy="6493935"/>
+            <a:chExt cx="4648200" cy="6493935"/>
           </a:xfrm>
         </p:grpSpPr>
         <p:sp>
@@ -3072,8 +3072,8 @@
           </p:nvSpPr>
           <p:spPr>
             <a:xfrm>
-              <a:off x="347098" y="383791"/>
-              <a:ext cx="4483140" cy="4832092"/>
+              <a:off x="220079" y="241178"/>
+              <a:ext cx="4483140" cy="6186309"/>
             </a:xfrm>
             <a:prstGeom prst="rect">
               <a:avLst/>
@@ -3086,173 +3086,290 @@
             </a:bodyPr>
             <a:lstStyle/>
             <a:p>
-              <a:pPr defTabSz="439781">
-                <a:defRPr/>
-              </a:pPr>
-              <a:r>
-                <a:rPr lang="te-IN" sz="2200" dirty="0">
-                  <a:latin typeface="Ramabhadra" panose="02000600000000000000" pitchFamily="2" charset="0"/>
-                  <a:cs typeface="Ramabhadra" panose="02000600000000000000" pitchFamily="2" charset="0"/>
-                </a:rPr>
-                <a:t>నీ వాక్యమే నన్ను బ్రతికించెను</a:t>
-              </a:r>
-            </a:p>
-            <a:p>
-              <a:pPr defTabSz="439781">
-                <a:defRPr/>
-              </a:pPr>
-              <a:r>
-                <a:rPr lang="te-IN" sz="2200" dirty="0">
-                  <a:latin typeface="Ramabhadra" panose="02000600000000000000" pitchFamily="2" charset="0"/>
-                  <a:cs typeface="Ramabhadra" panose="02000600000000000000" pitchFamily="2" charset="0"/>
-                </a:rPr>
-                <a:t>బాధలలో నెమ్మదినిచ్చెను (2)</a:t>
-              </a:r>
-            </a:p>
-            <a:p>
-              <a:pPr defTabSz="439781">
-                <a:defRPr/>
-              </a:pPr>
-              <a:r>
-                <a:rPr lang="te-IN" sz="2200" dirty="0">
-                  <a:latin typeface="Ramabhadra" panose="02000600000000000000" pitchFamily="2" charset="0"/>
-                  <a:cs typeface="Ramabhadra" panose="02000600000000000000" pitchFamily="2" charset="0"/>
-                </a:rPr>
-                <a:t>కృపా శక్తి దయా సత్య సంపూర్ణుడా</a:t>
-              </a:r>
-            </a:p>
-            <a:p>
-              <a:pPr defTabSz="439781">
-                <a:defRPr/>
-              </a:pPr>
-              <a:r>
-                <a:rPr lang="te-IN" sz="2200" dirty="0">
-                  <a:latin typeface="Ramabhadra" panose="02000600000000000000" pitchFamily="2" charset="0"/>
-                  <a:cs typeface="Ramabhadra" panose="02000600000000000000" pitchFamily="2" charset="0"/>
-                </a:rPr>
-                <a:t>వాక్యమై ఉన్న యేసు వందనమయ్యా (2)</a:t>
-              </a:r>
-              <a:endParaRPr lang="en-US" sz="2200" dirty="0">
+              <a:r>
+                <a:rPr lang="te-IN" sz="1650" dirty="0">
+                  <a:latin typeface="Ramabhadra" panose="02000600000000000000" pitchFamily="2" charset="0"/>
+                  <a:cs typeface="Ramabhadra" panose="02000600000000000000" pitchFamily="2" charset="0"/>
+                </a:rPr>
+                <a:t>ఘనమైనవి నీ కార్యములు నా యెడల</a:t>
+              </a:r>
+              <a:br>
+                <a:rPr lang="te-IN" sz="1650" dirty="0">
+                  <a:latin typeface="Ramabhadra" panose="02000600000000000000" pitchFamily="2" charset="0"/>
+                  <a:cs typeface="Ramabhadra" panose="02000600000000000000" pitchFamily="2" charset="0"/>
+                </a:rPr>
+              </a:br>
+              <a:r>
+                <a:rPr lang="te-IN" sz="1650" dirty="0">
+                  <a:latin typeface="Ramabhadra" panose="02000600000000000000" pitchFamily="2" charset="0"/>
+                  <a:cs typeface="Ramabhadra" panose="02000600000000000000" pitchFamily="2" charset="0"/>
+                </a:rPr>
+                <a:t>స్థిరమైనవి నీ ఆలోచనలు నా యేసయ్యా (2)</a:t>
+              </a:r>
+              <a:br>
+                <a:rPr lang="te-IN" sz="1650" dirty="0">
+                  <a:latin typeface="Ramabhadra" panose="02000600000000000000" pitchFamily="2" charset="0"/>
+                  <a:cs typeface="Ramabhadra" panose="02000600000000000000" pitchFamily="2" charset="0"/>
+                </a:rPr>
+              </a:br>
+              <a:r>
+                <a:rPr lang="te-IN" sz="1650" dirty="0">
+                  <a:latin typeface="Ramabhadra" panose="02000600000000000000" pitchFamily="2" charset="0"/>
+                  <a:cs typeface="Ramabhadra" panose="02000600000000000000" pitchFamily="2" charset="0"/>
+                </a:rPr>
+                <a:t>కృపలను పొందుచు కృతజ్ఞత కలిగి</a:t>
+              </a:r>
+              <a:br>
+                <a:rPr lang="te-IN" sz="1650" dirty="0">
+                  <a:latin typeface="Ramabhadra" panose="02000600000000000000" pitchFamily="2" charset="0"/>
+                  <a:cs typeface="Ramabhadra" panose="02000600000000000000" pitchFamily="2" charset="0"/>
+                </a:rPr>
+              </a:br>
+              <a:r>
+                <a:rPr lang="te-IN" sz="1650" dirty="0">
+                  <a:latin typeface="Ramabhadra" panose="02000600000000000000" pitchFamily="2" charset="0"/>
+                  <a:cs typeface="Ramabhadra" panose="02000600000000000000" pitchFamily="2" charset="0"/>
+                </a:rPr>
+                <a:t>స్తుతులర్పించెదను అన్నివేళలా (2)</a:t>
+              </a:r>
+              <a:br>
+                <a:rPr lang="te-IN" sz="1650" dirty="0">
+                  <a:latin typeface="Ramabhadra" panose="02000600000000000000" pitchFamily="2" charset="0"/>
+                  <a:cs typeface="Ramabhadra" panose="02000600000000000000" pitchFamily="2" charset="0"/>
+                </a:rPr>
+              </a:br>
+              <a:r>
+                <a:rPr lang="te-IN" sz="1650" dirty="0">
+                  <a:latin typeface="Ramabhadra" panose="02000600000000000000" pitchFamily="2" charset="0"/>
+                  <a:cs typeface="Ramabhadra" panose="02000600000000000000" pitchFamily="2" charset="0"/>
+                </a:rPr>
+                <a:t>అనుదినము నీ అనుగ్రహమే</a:t>
+              </a:r>
+              <a:br>
+                <a:rPr lang="te-IN" sz="1650" dirty="0">
+                  <a:latin typeface="Ramabhadra" panose="02000600000000000000" pitchFamily="2" charset="0"/>
+                  <a:cs typeface="Ramabhadra" panose="02000600000000000000" pitchFamily="2" charset="0"/>
+                </a:rPr>
+              </a:br>
+              <a:r>
+                <a:rPr lang="te-IN" sz="1650" dirty="0">
+                  <a:latin typeface="Ramabhadra" panose="02000600000000000000" pitchFamily="2" charset="0"/>
+                  <a:cs typeface="Ramabhadra" panose="02000600000000000000" pitchFamily="2" charset="0"/>
+                </a:rPr>
+                <a:t>ఆయుష్కాలము నీ వరమే (2)</a:t>
+              </a:r>
+              <a:endParaRPr lang="en-IN" sz="1650" dirty="0">
                 <a:latin typeface="Ramabhadra" panose="02000600000000000000" pitchFamily="2" charset="0"/>
                 <a:cs typeface="Ramabhadra" panose="02000600000000000000" pitchFamily="2" charset="0"/>
               </a:endParaRPr>
             </a:p>
             <a:p>
-              <a:pPr defTabSz="439781">
-                <a:defRPr/>
-              </a:pPr>
-              <a:endParaRPr lang="te-IN" sz="2200" dirty="0">
+              <a:endParaRPr lang="te-IN" sz="1650" dirty="0">
                 <a:latin typeface="Ramabhadra" panose="02000600000000000000" pitchFamily="2" charset="0"/>
                 <a:cs typeface="Ramabhadra" panose="02000600000000000000" pitchFamily="2" charset="0"/>
               </a:endParaRPr>
             </a:p>
             <a:p>
-              <a:pPr defTabSz="439781">
-                <a:defRPr/>
-              </a:pPr>
-              <a:r>
-                <a:rPr lang="te-IN" sz="2200" dirty="0">
-                  <a:latin typeface="Ramabhadra" panose="02000600000000000000" pitchFamily="2" charset="0"/>
-                  <a:cs typeface="Ramabhadra" panose="02000600000000000000" pitchFamily="2" charset="0"/>
-                </a:rPr>
-                <a:t>జిగటగల ఊభినుండి లేవనెత్తెను</a:t>
-              </a:r>
-            </a:p>
-            <a:p>
-              <a:pPr defTabSz="439781">
-                <a:defRPr/>
-              </a:pPr>
-              <a:r>
-                <a:rPr lang="te-IN" sz="2200" dirty="0">
-                  <a:latin typeface="Ramabhadra" panose="02000600000000000000" pitchFamily="2" charset="0"/>
-                  <a:cs typeface="Ramabhadra" panose="02000600000000000000" pitchFamily="2" charset="0"/>
-                </a:rPr>
-                <a:t>సమతలమగు భూమిపై నన్ను నిలిపెను (2)</a:t>
-              </a:r>
-            </a:p>
-            <a:p>
-              <a:pPr defTabSz="439781">
-                <a:defRPr/>
-              </a:pPr>
-              <a:r>
-                <a:rPr lang="te-IN" sz="2200" dirty="0">
-                  <a:latin typeface="Ramabhadra" panose="02000600000000000000" pitchFamily="2" charset="0"/>
-                  <a:cs typeface="Ramabhadra" panose="02000600000000000000" pitchFamily="2" charset="0"/>
-                </a:rPr>
-                <a:t>నా పాదములకు దీపమాయెను (2)</a:t>
-              </a:r>
-            </a:p>
-            <a:p>
-              <a:pPr defTabSz="439781">
-                <a:defRPr/>
-              </a:pPr>
-              <a:r>
-                <a:rPr lang="te-IN" sz="2200" dirty="0">
-                  <a:latin typeface="Ramabhadra" panose="02000600000000000000" pitchFamily="2" charset="0"/>
-                  <a:cs typeface="Ramabhadra" panose="02000600000000000000" pitchFamily="2" charset="0"/>
-                </a:rPr>
-                <a:t>సత్యమైన మార్గములో నడుపుచుండెను (2)</a:t>
-              </a:r>
-              <a:endParaRPr lang="en-US" sz="2200" dirty="0">
+              <a:r>
+                <a:rPr lang="te-IN" sz="1650" dirty="0">
+                  <a:latin typeface="Ramabhadra" panose="02000600000000000000" pitchFamily="2" charset="0"/>
+                  <a:cs typeface="Ramabhadra" panose="02000600000000000000" pitchFamily="2" charset="0"/>
+                </a:rPr>
+                <a:t>యే తెగులు సమీపించనీయక – యే కీడైన దరిచేరనీయక</a:t>
+              </a:r>
+              <a:br>
+                <a:rPr lang="te-IN" sz="1650" dirty="0">
+                  <a:latin typeface="Ramabhadra" panose="02000600000000000000" pitchFamily="2" charset="0"/>
+                  <a:cs typeface="Ramabhadra" panose="02000600000000000000" pitchFamily="2" charset="0"/>
+                </a:rPr>
+              </a:br>
+              <a:r>
+                <a:rPr lang="te-IN" sz="1650" dirty="0">
+                  <a:latin typeface="Ramabhadra" panose="02000600000000000000" pitchFamily="2" charset="0"/>
+                  <a:cs typeface="Ramabhadra" panose="02000600000000000000" pitchFamily="2" charset="0"/>
+                </a:rPr>
+                <a:t>ఆపదలన్ని తొలగే వరకు – ఆత్మలో నెమ్మది కలిగే వరకు (2)</a:t>
+              </a:r>
+              <a:br>
+                <a:rPr lang="te-IN" sz="1650" dirty="0">
+                  <a:latin typeface="Ramabhadra" panose="02000600000000000000" pitchFamily="2" charset="0"/>
+                  <a:cs typeface="Ramabhadra" panose="02000600000000000000" pitchFamily="2" charset="0"/>
+                </a:rPr>
+              </a:br>
+              <a:r>
+                <a:rPr lang="te-IN" sz="1650" dirty="0">
+                  <a:latin typeface="Ramabhadra" panose="02000600000000000000" pitchFamily="2" charset="0"/>
+                  <a:cs typeface="Ramabhadra" panose="02000600000000000000" pitchFamily="2" charset="0"/>
+                </a:rPr>
+                <a:t>నా భారము మోసి – బాసటగా నిలిచి – ఆదరించితివి</a:t>
+              </a:r>
+              <a:br>
+                <a:rPr lang="te-IN" sz="1650" dirty="0">
+                  <a:latin typeface="Ramabhadra" panose="02000600000000000000" pitchFamily="2" charset="0"/>
+                  <a:cs typeface="Ramabhadra" panose="02000600000000000000" pitchFamily="2" charset="0"/>
+                </a:rPr>
+              </a:br>
+              <a:r>
+                <a:rPr lang="te-IN" sz="1650" dirty="0">
+                  <a:latin typeface="Ramabhadra" panose="02000600000000000000" pitchFamily="2" charset="0"/>
+                  <a:cs typeface="Ramabhadra" panose="02000600000000000000" pitchFamily="2" charset="0"/>
+                </a:rPr>
+                <a:t>ఈ స్తుతి మహిమలు నీకే – చెల్లించెదను – జీవితాంతము</a:t>
+              </a:r>
+              <a:endParaRPr lang="en-IN" sz="1650" dirty="0">
                 <a:latin typeface="Ramabhadra" panose="02000600000000000000" pitchFamily="2" charset="0"/>
                 <a:cs typeface="Ramabhadra" panose="02000600000000000000" pitchFamily="2" charset="0"/>
               </a:endParaRPr>
             </a:p>
             <a:p>
-              <a:pPr defTabSz="439781">
-                <a:defRPr/>
-              </a:pPr>
-              <a:endParaRPr lang="te-IN" sz="2200" dirty="0">
+              <a:endParaRPr lang="te-IN" sz="1650" dirty="0">
                 <a:latin typeface="Ramabhadra" panose="02000600000000000000" pitchFamily="2" charset="0"/>
                 <a:cs typeface="Ramabhadra" panose="02000600000000000000" pitchFamily="2" charset="0"/>
               </a:endParaRPr>
             </a:p>
             <a:p>
-              <a:pPr defTabSz="439781">
-                <a:defRPr/>
-              </a:pPr>
-              <a:r>
-                <a:rPr lang="te-IN" sz="2200" dirty="0">
-                  <a:latin typeface="Ramabhadra" panose="02000600000000000000" pitchFamily="2" charset="0"/>
-                  <a:cs typeface="Ramabhadra" panose="02000600000000000000" pitchFamily="2" charset="0"/>
-                </a:rPr>
-                <a:t>శత్రువులను ఎదుర్కొనే సర్వాంగ కవచమై</a:t>
-              </a:r>
-            </a:p>
-            <a:p>
-              <a:pPr defTabSz="439781">
-                <a:defRPr/>
-              </a:pPr>
-              <a:r>
-                <a:rPr lang="te-IN" sz="2200" dirty="0">
-                  <a:latin typeface="Ramabhadra" panose="02000600000000000000" pitchFamily="2" charset="0"/>
-                  <a:cs typeface="Ramabhadra" panose="02000600000000000000" pitchFamily="2" charset="0"/>
-                </a:rPr>
-                <a:t>యుద్ధమునకు సిద్ధ మనసు ఇచ్చుచున్నది (2)</a:t>
-              </a:r>
-            </a:p>
-            <a:p>
-              <a:pPr defTabSz="439781">
-                <a:defRPr/>
-              </a:pPr>
-              <a:r>
-                <a:rPr lang="te-IN" sz="2200" dirty="0">
-                  <a:latin typeface="Ramabhadra" panose="02000600000000000000" pitchFamily="2" charset="0"/>
-                  <a:cs typeface="Ramabhadra" panose="02000600000000000000" pitchFamily="2" charset="0"/>
-                </a:rPr>
-                <a:t>అపవాది వేయుచున్న అగ్ని బాణములను (2)</a:t>
-              </a:r>
-            </a:p>
-            <a:p>
-              <a:pPr defTabSz="439781">
-                <a:defRPr/>
-              </a:pPr>
-              <a:r>
-                <a:rPr lang="te-IN" sz="2200" dirty="0">
-                  <a:latin typeface="Ramabhadra" panose="02000600000000000000" pitchFamily="2" charset="0"/>
-                  <a:cs typeface="Ramabhadra" panose="02000600000000000000" pitchFamily="2" charset="0"/>
-                </a:rPr>
-                <a:t>ఖడ్గము వలె అడ్డుకొని ఆర్పి వేయుచున్నది (2)</a:t>
+              <a:r>
+                <a:rPr lang="te-IN" sz="1650" dirty="0">
+                  <a:latin typeface="Ramabhadra" panose="02000600000000000000" pitchFamily="2" charset="0"/>
+                  <a:cs typeface="Ramabhadra" panose="02000600000000000000" pitchFamily="2" charset="0"/>
+                </a:rPr>
+                <a:t>నాకు ఎత్తైన కోటవు నీవే – నన్ను కాపాడు కేడెము నీవే</a:t>
+              </a:r>
+              <a:br>
+                <a:rPr lang="te-IN" sz="1650" dirty="0">
+                  <a:latin typeface="Ramabhadra" panose="02000600000000000000" pitchFamily="2" charset="0"/>
+                  <a:cs typeface="Ramabhadra" panose="02000600000000000000" pitchFamily="2" charset="0"/>
+                </a:rPr>
+              </a:br>
+              <a:r>
+                <a:rPr lang="te-IN" sz="1650" dirty="0">
+                  <a:latin typeface="Ramabhadra" panose="02000600000000000000" pitchFamily="2" charset="0"/>
+                  <a:cs typeface="Ramabhadra" panose="02000600000000000000" pitchFamily="2" charset="0"/>
+                </a:rPr>
+                <a:t>ఆశ్రయమైన బండవు నీవే –</a:t>
+              </a:r>
+              <a:endParaRPr lang="en-US" sz="1650" dirty="0">
+                <a:latin typeface="Ramabhadra" panose="02000600000000000000" pitchFamily="2" charset="0"/>
+                <a:cs typeface="Ramabhadra" panose="02000600000000000000" pitchFamily="2" charset="0"/>
+              </a:endParaRPr>
+            </a:p>
+            <a:p>
+              <a:r>
+                <a:rPr lang="te-IN" sz="1650" dirty="0">
+                  <a:latin typeface="Ramabhadra" panose="02000600000000000000" pitchFamily="2" charset="0"/>
+                  <a:cs typeface="Ramabhadra" panose="02000600000000000000" pitchFamily="2" charset="0"/>
+                </a:rPr>
+                <a:t>శాశ్వత కృపకాధారము నీవే (2)</a:t>
+              </a:r>
+              <a:br>
+                <a:rPr lang="te-IN" sz="1650" dirty="0">
+                  <a:latin typeface="Ramabhadra" panose="02000600000000000000" pitchFamily="2" charset="0"/>
+                  <a:cs typeface="Ramabhadra" panose="02000600000000000000" pitchFamily="2" charset="0"/>
+                </a:rPr>
+              </a:br>
+              <a:r>
+                <a:rPr lang="te-IN" sz="1650" dirty="0">
+                  <a:latin typeface="Ramabhadra" panose="02000600000000000000" pitchFamily="2" charset="0"/>
+                  <a:cs typeface="Ramabhadra" panose="02000600000000000000" pitchFamily="2" charset="0"/>
+                </a:rPr>
+                <a:t>నా ప్రతిక్షణమును నీవు – దీవెనగా మార్చి – నడిపించుచున్నావు</a:t>
+              </a:r>
+              <a:br>
+                <a:rPr lang="te-IN" sz="1650" dirty="0">
+                  <a:latin typeface="Ramabhadra" panose="02000600000000000000" pitchFamily="2" charset="0"/>
+                  <a:cs typeface="Ramabhadra" panose="02000600000000000000" pitchFamily="2" charset="0"/>
+                </a:rPr>
+              </a:br>
+              <a:r>
+                <a:rPr lang="te-IN" sz="1650" dirty="0">
+                  <a:latin typeface="Ramabhadra" panose="02000600000000000000" pitchFamily="2" charset="0"/>
+                  <a:cs typeface="Ramabhadra" panose="02000600000000000000" pitchFamily="2" charset="0"/>
+                </a:rPr>
+                <a:t>ఈ స్తుతి మహిమలు నీకే – చెల్లించెదను – జీవితాంతము</a:t>
+              </a:r>
+              <a:endParaRPr lang="en-IN" sz="1650" dirty="0">
+                <a:latin typeface="Ramabhadra" panose="02000600000000000000" pitchFamily="2" charset="0"/>
+                <a:cs typeface="Ramabhadra" panose="02000600000000000000" pitchFamily="2" charset="0"/>
+              </a:endParaRPr>
+            </a:p>
+            <a:p>
+              <a:endParaRPr lang="te-IN" sz="1650" dirty="0">
+                <a:latin typeface="Ramabhadra" panose="02000600000000000000" pitchFamily="2" charset="0"/>
+                <a:cs typeface="Ramabhadra" panose="02000600000000000000" pitchFamily="2" charset="0"/>
+              </a:endParaRPr>
+            </a:p>
+            <a:p>
+              <a:r>
+                <a:rPr lang="te-IN" sz="1650" dirty="0">
+                  <a:latin typeface="Ramabhadra" panose="02000600000000000000" pitchFamily="2" charset="0"/>
+                  <a:cs typeface="Ramabhadra" panose="02000600000000000000" pitchFamily="2" charset="0"/>
+                </a:rPr>
+                <a:t>నీ కృప తప్ప వేరొకటి లేదయా –</a:t>
+              </a:r>
+              <a:endParaRPr lang="en-US" sz="1650" dirty="0">
+                <a:latin typeface="Ramabhadra" panose="02000600000000000000" pitchFamily="2" charset="0"/>
+                <a:cs typeface="Ramabhadra" panose="02000600000000000000" pitchFamily="2" charset="0"/>
+              </a:endParaRPr>
+            </a:p>
+            <a:p>
+              <a:r>
+                <a:rPr lang="te-IN" sz="1650" dirty="0">
+                  <a:latin typeface="Ramabhadra" panose="02000600000000000000" pitchFamily="2" charset="0"/>
+                  <a:cs typeface="Ramabhadra" panose="02000600000000000000" pitchFamily="2" charset="0"/>
+                </a:rPr>
+                <a:t>నీ మనసులో నేనుంటే చాలయా</a:t>
+              </a:r>
+              <a:br>
+                <a:rPr lang="te-IN" sz="1650" dirty="0">
+                  <a:latin typeface="Ramabhadra" panose="02000600000000000000" pitchFamily="2" charset="0"/>
+                  <a:cs typeface="Ramabhadra" panose="02000600000000000000" pitchFamily="2" charset="0"/>
+                </a:rPr>
+              </a:br>
+              <a:r>
+                <a:rPr lang="te-IN" sz="1650" dirty="0">
+                  <a:latin typeface="Ramabhadra" panose="02000600000000000000" pitchFamily="2" charset="0"/>
+                  <a:cs typeface="Ramabhadra" panose="02000600000000000000" pitchFamily="2" charset="0"/>
+                </a:rPr>
+                <a:t>బహు కాలముగా నేనున్న స్థితిలో –</a:t>
+              </a:r>
+              <a:endParaRPr lang="en-US" sz="1650" dirty="0">
+                <a:latin typeface="Ramabhadra" panose="02000600000000000000" pitchFamily="2" charset="0"/>
+                <a:cs typeface="Ramabhadra" panose="02000600000000000000" pitchFamily="2" charset="0"/>
+              </a:endParaRPr>
+            </a:p>
+            <a:p>
+              <a:r>
+                <a:rPr lang="te-IN" sz="1650" dirty="0">
+                  <a:latin typeface="Ramabhadra" panose="02000600000000000000" pitchFamily="2" charset="0"/>
+                  <a:cs typeface="Ramabhadra" panose="02000600000000000000" pitchFamily="2" charset="0"/>
+                </a:rPr>
+                <a:t>నీ కృప నా యెడ చాలునంటివే (2)</a:t>
+              </a:r>
+              <a:br>
+                <a:rPr lang="te-IN" sz="1650" dirty="0">
+                  <a:latin typeface="Ramabhadra" panose="02000600000000000000" pitchFamily="2" charset="0"/>
+                  <a:cs typeface="Ramabhadra" panose="02000600000000000000" pitchFamily="2" charset="0"/>
+                </a:rPr>
+              </a:br>
+              <a:r>
+                <a:rPr lang="te-IN" sz="1650" dirty="0">
+                  <a:latin typeface="Ramabhadra" panose="02000600000000000000" pitchFamily="2" charset="0"/>
+                  <a:cs typeface="Ramabhadra" panose="02000600000000000000" pitchFamily="2" charset="0"/>
+                </a:rPr>
+                <a:t>నీ అరచేతిలో నను – చెక్కుకుంటివి – నాకేమి కొదువ</a:t>
+              </a:r>
+              <a:br>
+                <a:rPr lang="te-IN" sz="1650" dirty="0">
+                  <a:latin typeface="Ramabhadra" panose="02000600000000000000" pitchFamily="2" charset="0"/>
+                  <a:cs typeface="Ramabhadra" panose="02000600000000000000" pitchFamily="2" charset="0"/>
+                </a:rPr>
+              </a:br>
+              <a:r>
+                <a:rPr lang="te-IN" sz="1650" dirty="0">
+                  <a:latin typeface="Ramabhadra" panose="02000600000000000000" pitchFamily="2" charset="0"/>
+                  <a:cs typeface="Ramabhadra" panose="02000600000000000000" pitchFamily="2" charset="0"/>
+                </a:rPr>
+                <a:t>ఈ స్తుతి మహిమలు నీకే చెల్లించెదను జీవితాంతము</a:t>
               </a:r>
             </a:p>
           </p:txBody>
@@ -3335,9 +3452,9 @@
         <p:grpSpPr>
           <a:xfrm>
             <a:off x="5104338" y="182031"/>
-            <a:ext cx="4777157" cy="6493935"/>
+            <a:ext cx="4648200" cy="6493935"/>
             <a:chOff x="160868" y="182032"/>
-            <a:chExt cx="4777157" cy="6493935"/>
+            <a:chExt cx="4648200" cy="6493935"/>
           </a:xfrm>
         </p:grpSpPr>
         <p:sp>
@@ -3409,8 +3526,8 @@
           </p:nvSpPr>
           <p:spPr>
             <a:xfrm>
-              <a:off x="256993" y="245293"/>
-              <a:ext cx="4681032" cy="6232475"/>
+              <a:off x="264399" y="749975"/>
+              <a:ext cx="4544669" cy="4451219"/>
             </a:xfrm>
             <a:prstGeom prst="rect">
               <a:avLst/>
@@ -3423,191 +3540,241 @@
             </a:bodyPr>
             <a:lstStyle/>
             <a:p>
-              <a:r>
-                <a:rPr lang="te-IN" sz="1900" dirty="0">
-                  <a:latin typeface="Ramabhadra" panose="02000600000000000000" pitchFamily="2" charset="0"/>
-                  <a:cs typeface="Ramabhadra" panose="02000600000000000000" pitchFamily="2" charset="0"/>
-                </a:rPr>
-                <a:t>అత్యున్నత సింహాసనముపై ఆసీనుడా</a:t>
-              </a:r>
-            </a:p>
-            <a:p>
-              <a:r>
-                <a:rPr lang="te-IN" sz="1900" dirty="0">
-                  <a:latin typeface="Ramabhadra" panose="02000600000000000000" pitchFamily="2" charset="0"/>
-                  <a:cs typeface="Ramabhadra" panose="02000600000000000000" pitchFamily="2" charset="0"/>
-                </a:rPr>
-                <a:t>దేవ దూతలు ఆరాధించు పరిశుద్ధుడా</a:t>
-              </a:r>
-            </a:p>
-            <a:p>
-              <a:r>
-                <a:rPr lang="te-IN" sz="1900" dirty="0">
-                  <a:latin typeface="Ramabhadra" panose="02000600000000000000" pitchFamily="2" charset="0"/>
-                  <a:cs typeface="Ramabhadra" panose="02000600000000000000" pitchFamily="2" charset="0"/>
-                </a:rPr>
-                <a:t>యేసయ్యా నా నిలువెల్ల నిండియున్నావు</a:t>
-              </a:r>
-            </a:p>
-            <a:p>
-              <a:r>
-                <a:rPr lang="te-IN" sz="1900" dirty="0">
-                  <a:latin typeface="Ramabhadra" panose="02000600000000000000" pitchFamily="2" charset="0"/>
-                  <a:cs typeface="Ramabhadra" panose="02000600000000000000" pitchFamily="2" charset="0"/>
-                </a:rPr>
-                <a:t>నా మనసార నీ సన్నిధిలో</a:t>
-              </a:r>
-            </a:p>
-            <a:p>
-              <a:r>
-                <a:rPr lang="te-IN" sz="1900" dirty="0">
-                  <a:latin typeface="Ramabhadra" panose="02000600000000000000" pitchFamily="2" charset="0"/>
-                  <a:cs typeface="Ramabhadra" panose="02000600000000000000" pitchFamily="2" charset="0"/>
-                </a:rPr>
-                <a:t>సాగిలపడి నమస్కారము చేసేదా</a:t>
-              </a:r>
-            </a:p>
-            <a:p>
-              <a:r>
-                <a:rPr lang="te-IN" sz="1900" dirty="0">
-                  <a:latin typeface="Ramabhadra" panose="02000600000000000000" pitchFamily="2" charset="0"/>
-                  <a:cs typeface="Ramabhadra" panose="02000600000000000000" pitchFamily="2" charset="0"/>
-                </a:rPr>
-                <a:t>సాగిలపడి నమస్కారము చేసేదా (2)</a:t>
-              </a:r>
-            </a:p>
-            <a:p>
-              <a:endParaRPr lang="te-IN" sz="1900" dirty="0">
+              <a:pPr>
+                <a:lnSpc>
+                  <a:spcPts val="2600"/>
+                </a:lnSpc>
+              </a:pPr>
+              <a:r>
+                <a:rPr lang="te-IN" sz="2400" dirty="0">
+                  <a:latin typeface="Ramabhadra" panose="02000600000000000000" pitchFamily="2" charset="0"/>
+                  <a:cs typeface="Ramabhadra" panose="02000600000000000000" pitchFamily="2" charset="0"/>
+                </a:rPr>
+                <a:t>సన్నుతించెదను – దయాళుడవు నీవని</a:t>
+              </a:r>
+            </a:p>
+            <a:p>
+              <a:pPr>
+                <a:lnSpc>
+                  <a:spcPts val="2600"/>
+                </a:lnSpc>
+              </a:pPr>
+              <a:r>
+                <a:rPr lang="te-IN" sz="2400" dirty="0">
+                  <a:latin typeface="Ramabhadra" panose="02000600000000000000" pitchFamily="2" charset="0"/>
+                  <a:cs typeface="Ramabhadra" panose="02000600000000000000" pitchFamily="2" charset="0"/>
+                </a:rPr>
+                <a:t>యెహోవా నీవే – </a:t>
+              </a:r>
+              <a:r>
+                <a:rPr lang="en-US" sz="2400" dirty="0">
+                  <a:latin typeface="Ramabhadra" panose="02000600000000000000" pitchFamily="2" charset="0"/>
+                  <a:cs typeface="Ramabhadra" panose="02000600000000000000" pitchFamily="2" charset="0"/>
+                </a:rPr>
+                <a:t> </a:t>
+              </a:r>
+              <a:r>
+                <a:rPr lang="te-IN" sz="2400" dirty="0">
+                  <a:latin typeface="Ramabhadra" panose="02000600000000000000" pitchFamily="2" charset="0"/>
+                  <a:cs typeface="Ramabhadra" panose="02000600000000000000" pitchFamily="2" charset="0"/>
+                </a:rPr>
+                <a:t>దయాళుడవని</a:t>
+              </a:r>
+              <a:endParaRPr lang="en-US" sz="2400" dirty="0">
                 <a:latin typeface="Ramabhadra" panose="02000600000000000000" pitchFamily="2" charset="0"/>
                 <a:cs typeface="Ramabhadra" panose="02000600000000000000" pitchFamily="2" charset="0"/>
               </a:endParaRPr>
             </a:p>
             <a:p>
-              <a:r>
-                <a:rPr lang="te-IN" sz="1900" dirty="0">
-                  <a:latin typeface="Ramabhadra" panose="02000600000000000000" pitchFamily="2" charset="0"/>
-                  <a:cs typeface="Ramabhadra" panose="02000600000000000000" pitchFamily="2" charset="0"/>
-                </a:rPr>
-                <a:t>ప్రతి వసంతము నీ దయా కిరీటమే</a:t>
-              </a:r>
-            </a:p>
-            <a:p>
-              <a:r>
-                <a:rPr lang="te-IN" sz="1900" dirty="0">
-                  <a:latin typeface="Ramabhadra" panose="02000600000000000000" pitchFamily="2" charset="0"/>
-                  <a:cs typeface="Ramabhadra" panose="02000600000000000000" pitchFamily="2" charset="0"/>
-                </a:rPr>
-                <a:t>ప్రకృతి కలలన్నియు నీ మహిమను వివరించునే (2)</a:t>
-              </a:r>
-            </a:p>
-            <a:p>
-              <a:r>
-                <a:rPr lang="te-IN" sz="1900" dirty="0">
-                  <a:latin typeface="Ramabhadra" panose="02000600000000000000" pitchFamily="2" charset="0"/>
-                  <a:cs typeface="Ramabhadra" panose="02000600000000000000" pitchFamily="2" charset="0"/>
-                </a:rPr>
-                <a:t>ప్రభువా నిన్నే ఆరాధించెద</a:t>
-              </a:r>
-            </a:p>
-            <a:p>
-              <a:r>
-                <a:rPr lang="te-IN" sz="1900" dirty="0">
-                  <a:latin typeface="Ramabhadra" panose="02000600000000000000" pitchFamily="2" charset="0"/>
-                  <a:cs typeface="Ramabhadra" panose="02000600000000000000" pitchFamily="2" charset="0"/>
-                </a:rPr>
-                <a:t>కృతజ్ఞాతార్పణలతో – కృతజ్ఞాతార్పణలతో (2)</a:t>
-              </a:r>
-              <a:endParaRPr lang="en-US" sz="1900" dirty="0">
+              <a:pPr>
+                <a:lnSpc>
+                  <a:spcPts val="2600"/>
+                </a:lnSpc>
+              </a:pPr>
+              <a:r>
+                <a:rPr lang="te-IN" sz="2400" dirty="0">
+                  <a:latin typeface="Ramabhadra" panose="02000600000000000000" pitchFamily="2" charset="0"/>
+                  <a:cs typeface="Ramabhadra" panose="02000600000000000000" pitchFamily="2" charset="0"/>
+                </a:rPr>
+                <a:t>నిను సన్నుతించెదను - 2</a:t>
+              </a:r>
+            </a:p>
+            <a:p>
+              <a:pPr>
+                <a:lnSpc>
+                  <a:spcPts val="2600"/>
+                </a:lnSpc>
+              </a:pPr>
+              <a:endParaRPr lang="te-IN" sz="2400" dirty="0">
                 <a:latin typeface="Ramabhadra" panose="02000600000000000000" pitchFamily="2" charset="0"/>
                 <a:cs typeface="Ramabhadra" panose="02000600000000000000" pitchFamily="2" charset="0"/>
               </a:endParaRPr>
             </a:p>
             <a:p>
-              <a:endParaRPr lang="te-IN" sz="1900" dirty="0">
+              <a:pPr>
+                <a:lnSpc>
+                  <a:spcPts val="2600"/>
+                </a:lnSpc>
+              </a:pPr>
+              <a:r>
+                <a:rPr lang="te-IN" sz="2400" dirty="0">
+                  <a:latin typeface="Ramabhadra" panose="02000600000000000000" pitchFamily="2" charset="0"/>
+                  <a:cs typeface="Ramabhadra" panose="02000600000000000000" pitchFamily="2" charset="0"/>
+                </a:rPr>
+                <a:t>సర్వ సత్యములో నను నీవు నడిపి</a:t>
+              </a:r>
+              <a:endParaRPr lang="en-US" sz="2400" dirty="0">
                 <a:latin typeface="Ramabhadra" panose="02000600000000000000" pitchFamily="2" charset="0"/>
                 <a:cs typeface="Ramabhadra" panose="02000600000000000000" pitchFamily="2" charset="0"/>
               </a:endParaRPr>
             </a:p>
             <a:p>
-              <a:r>
-                <a:rPr lang="te-IN" sz="1900" dirty="0">
-                  <a:latin typeface="Ramabhadra" panose="02000600000000000000" pitchFamily="2" charset="0"/>
-                  <a:cs typeface="Ramabhadra" panose="02000600000000000000" pitchFamily="2" charset="0"/>
-                </a:rPr>
-                <a:t>పరిమలించునే నా సాక్ష్య జీవితమే</a:t>
-              </a:r>
-            </a:p>
-            <a:p>
-              <a:r>
-                <a:rPr lang="te-IN" sz="1900" dirty="0">
-                  <a:latin typeface="Ramabhadra" panose="02000600000000000000" pitchFamily="2" charset="0"/>
-                  <a:cs typeface="Ramabhadra" panose="02000600000000000000" pitchFamily="2" charset="0"/>
-                </a:rPr>
-                <a:t>పరిశుద్ధాత్ముడు నన్ను నడిపించుచున్నందునే (2)</a:t>
-              </a:r>
-            </a:p>
-            <a:p>
-              <a:r>
-                <a:rPr lang="te-IN" sz="1900" dirty="0">
-                  <a:latin typeface="Ramabhadra" panose="02000600000000000000" pitchFamily="2" charset="0"/>
-                  <a:cs typeface="Ramabhadra" panose="02000600000000000000" pitchFamily="2" charset="0"/>
-                </a:rPr>
-                <a:t>పరిశుద్ధాత్మలో ఆనందించెద</a:t>
-              </a:r>
-            </a:p>
-            <a:p>
-              <a:r>
-                <a:rPr lang="te-IN" sz="1900" dirty="0">
-                  <a:latin typeface="Ramabhadra" panose="02000600000000000000" pitchFamily="2" charset="0"/>
-                  <a:cs typeface="Ramabhadra" panose="02000600000000000000" pitchFamily="2" charset="0"/>
-                </a:rPr>
-                <a:t>హర్ష ధ్వనులతో – హర్ష ధ్వనులతో (2)</a:t>
-              </a:r>
-              <a:endParaRPr lang="en-US" sz="1900" dirty="0">
+              <a:pPr>
+                <a:lnSpc>
+                  <a:spcPts val="2600"/>
+                </a:lnSpc>
+              </a:pPr>
+              <a:r>
+                <a:rPr lang="te-IN" sz="2400" dirty="0">
+                  <a:latin typeface="Ramabhadra" panose="02000600000000000000" pitchFamily="2" charset="0"/>
+                  <a:cs typeface="Ramabhadra" panose="02000600000000000000" pitchFamily="2" charset="0"/>
+                </a:rPr>
+                <a:t>ఆదరించిన –</a:t>
+              </a:r>
+              <a:r>
+                <a:rPr lang="en-US" sz="2400" dirty="0">
+                  <a:latin typeface="Ramabhadra" panose="02000600000000000000" pitchFamily="2" charset="0"/>
+                  <a:cs typeface="Ramabhadra" panose="02000600000000000000" pitchFamily="2" charset="0"/>
+                </a:rPr>
+                <a:t> </a:t>
+              </a:r>
+              <a:r>
+                <a:rPr lang="te-IN" sz="2400" dirty="0">
+                  <a:latin typeface="Ramabhadra" panose="02000600000000000000" pitchFamily="2" charset="0"/>
+                  <a:cs typeface="Ramabhadra" panose="02000600000000000000" pitchFamily="2" charset="0"/>
+                </a:rPr>
+                <a:t>పరిశుద్ధాత్ముడా</a:t>
+              </a:r>
+              <a:endParaRPr lang="en-US" sz="2400" dirty="0">
                 <a:latin typeface="Ramabhadra" panose="02000600000000000000" pitchFamily="2" charset="0"/>
                 <a:cs typeface="Ramabhadra" panose="02000600000000000000" pitchFamily="2" charset="0"/>
               </a:endParaRPr>
             </a:p>
             <a:p>
-              <a:endParaRPr lang="te-IN" sz="1900" dirty="0">
+              <a:pPr>
+                <a:lnSpc>
+                  <a:spcPts val="2600"/>
+                </a:lnSpc>
+              </a:pPr>
+              <a:r>
+                <a:rPr lang="te-IN" sz="2400" dirty="0">
+                  <a:latin typeface="Ramabhadra" panose="02000600000000000000" pitchFamily="2" charset="0"/>
+                  <a:cs typeface="Ramabhadra" panose="02000600000000000000" pitchFamily="2" charset="0"/>
+                </a:rPr>
+                <a:t>కృపాధారము నీవెగా –</a:t>
+              </a:r>
+              <a:r>
+                <a:rPr lang="en-US" sz="2400" dirty="0">
+                  <a:latin typeface="Ramabhadra" panose="02000600000000000000" pitchFamily="2" charset="0"/>
+                  <a:cs typeface="Ramabhadra" panose="02000600000000000000" pitchFamily="2" charset="0"/>
+                </a:rPr>
+                <a:t> </a:t>
+              </a:r>
+              <a:r>
+                <a:rPr lang="te-IN" sz="2400" dirty="0">
+                  <a:latin typeface="Ramabhadra" panose="02000600000000000000" pitchFamily="2" charset="0"/>
+                  <a:cs typeface="Ramabhadra" panose="02000600000000000000" pitchFamily="2" charset="0"/>
+                </a:rPr>
+                <a:t>షాలేమురాజా</a:t>
+              </a:r>
+              <a:endParaRPr lang="en-US" sz="2400" dirty="0">
                 <a:latin typeface="Ramabhadra" panose="02000600000000000000" pitchFamily="2" charset="0"/>
                 <a:cs typeface="Ramabhadra" panose="02000600000000000000" pitchFamily="2" charset="0"/>
               </a:endParaRPr>
             </a:p>
             <a:p>
-              <a:r>
-                <a:rPr lang="te-IN" sz="1900" dirty="0">
-                  <a:latin typeface="Ramabhadra" panose="02000600000000000000" pitchFamily="2" charset="0"/>
-                  <a:cs typeface="Ramabhadra" panose="02000600000000000000" pitchFamily="2" charset="0"/>
-                </a:rPr>
-                <a:t>పక్షి రాజువై నీ రెక్కలపై మోసితివే</a:t>
-              </a:r>
-            </a:p>
-            <a:p>
-              <a:r>
-                <a:rPr lang="te-IN" sz="1900" dirty="0">
-                  <a:latin typeface="Ramabhadra" panose="02000600000000000000" pitchFamily="2" charset="0"/>
-                  <a:cs typeface="Ramabhadra" panose="02000600000000000000" pitchFamily="2" charset="0"/>
-                </a:rPr>
-                <a:t>నీవే నా తండ్రివే నా బాధ్యతలు భరించితివే (2)</a:t>
-              </a:r>
-            </a:p>
-            <a:p>
-              <a:r>
-                <a:rPr lang="te-IN" sz="1900" dirty="0">
-                  <a:latin typeface="Ramabhadra" panose="02000600000000000000" pitchFamily="2" charset="0"/>
-                  <a:cs typeface="Ramabhadra" panose="02000600000000000000" pitchFamily="2" charset="0"/>
-                </a:rPr>
-                <a:t>యెహోవ నిన్నే మహిమ పరచెద</a:t>
-              </a:r>
-            </a:p>
-            <a:p>
-              <a:r>
-                <a:rPr lang="te-IN" sz="1900" dirty="0">
-                  <a:latin typeface="Ramabhadra" panose="02000600000000000000" pitchFamily="2" charset="0"/>
-                  <a:cs typeface="Ramabhadra" panose="02000600000000000000" pitchFamily="2" charset="0"/>
-                </a:rPr>
-                <a:t>స్తుతి గీతాలతో – స్తుతి గీతాలతో (2)</a:t>
+              <a:pPr>
+                <a:lnSpc>
+                  <a:spcPts val="2600"/>
+                </a:lnSpc>
+              </a:pPr>
+              <a:r>
+                <a:rPr lang="te-IN" sz="2400" dirty="0">
+                  <a:latin typeface="Ramabhadra" panose="02000600000000000000" pitchFamily="2" charset="0"/>
+                  <a:cs typeface="Ramabhadra" panose="02000600000000000000" pitchFamily="2" charset="0"/>
+                </a:rPr>
+                <a:t>నిను సన్మానించెదను</a:t>
+              </a:r>
+            </a:p>
+            <a:p>
+              <a:pPr>
+                <a:lnSpc>
+                  <a:spcPts val="2600"/>
+                </a:lnSpc>
+              </a:pPr>
+              <a:endParaRPr lang="te-IN" sz="2400" dirty="0">
+                <a:latin typeface="Ramabhadra" panose="02000600000000000000" pitchFamily="2" charset="0"/>
+                <a:cs typeface="Ramabhadra" panose="02000600000000000000" pitchFamily="2" charset="0"/>
+              </a:endParaRPr>
+            </a:p>
+            <a:p>
+              <a:pPr>
+                <a:lnSpc>
+                  <a:spcPts val="2600"/>
+                </a:lnSpc>
+              </a:pPr>
+              <a:r>
+                <a:rPr lang="te-IN" sz="2400" dirty="0">
+                  <a:latin typeface="Ramabhadra" panose="02000600000000000000" pitchFamily="2" charset="0"/>
+                  <a:cs typeface="Ramabhadra" panose="02000600000000000000" pitchFamily="2" charset="0"/>
+                </a:rPr>
+                <a:t>నీ కను చూపుల పరిధిలోనన్ను నిలిపి</a:t>
+              </a:r>
+            </a:p>
+            <a:p>
+              <a:pPr>
+                <a:lnSpc>
+                  <a:spcPts val="2600"/>
+                </a:lnSpc>
+              </a:pPr>
+              <a:r>
+                <a:rPr lang="te-IN" sz="2400" dirty="0">
+                  <a:latin typeface="Ramabhadra" panose="02000600000000000000" pitchFamily="2" charset="0"/>
+                  <a:cs typeface="Ramabhadra" panose="02000600000000000000" pitchFamily="2" charset="0"/>
+                </a:rPr>
+                <a:t>చూపితివా నీ వాత్సల్యమును</a:t>
+              </a:r>
+            </a:p>
+            <a:p>
+              <a:pPr>
+                <a:lnSpc>
+                  <a:spcPts val="2600"/>
+                </a:lnSpc>
+              </a:pPr>
+              <a:r>
+                <a:rPr lang="te-IN" sz="2400" dirty="0">
+                  <a:latin typeface="Ramabhadra" panose="02000600000000000000" pitchFamily="2" charset="0"/>
+                  <a:cs typeface="Ramabhadra" panose="02000600000000000000" pitchFamily="2" charset="0"/>
+                </a:rPr>
+                <a:t>కృపానిధివి నీవెగా - నా యేసురాజా</a:t>
+              </a:r>
+              <a:endParaRPr lang="en-US" sz="2400" dirty="0">
+                <a:latin typeface="Ramabhadra" panose="02000600000000000000" pitchFamily="2" charset="0"/>
+                <a:cs typeface="Ramabhadra" panose="02000600000000000000" pitchFamily="2" charset="0"/>
+              </a:endParaRPr>
+            </a:p>
+            <a:p>
+              <a:pPr>
+                <a:lnSpc>
+                  <a:spcPts val="2600"/>
+                </a:lnSpc>
+              </a:pPr>
+              <a:r>
+                <a:rPr lang="te-IN" sz="2400" dirty="0">
+                  <a:latin typeface="Ramabhadra" panose="02000600000000000000" pitchFamily="2" charset="0"/>
+                  <a:cs typeface="Ramabhadra" panose="02000600000000000000" pitchFamily="2" charset="0"/>
+                </a:rPr>
+                <a:t>నిను సన్మానించెదను</a:t>
               </a:r>
             </a:p>
           </p:txBody>
@@ -3720,9 +3887,9 @@
         <p:grpSpPr>
           <a:xfrm>
             <a:off x="160868" y="182032"/>
-            <a:ext cx="5680907" cy="6493935"/>
+            <a:ext cx="5506736" cy="6493935"/>
             <a:chOff x="160868" y="182032"/>
-            <a:chExt cx="5680907" cy="6493935"/>
+            <a:chExt cx="5506736" cy="6493935"/>
           </a:xfrm>
         </p:grpSpPr>
         <p:sp>
@@ -3794,8 +3961,8 @@
           </p:nvSpPr>
           <p:spPr>
             <a:xfrm>
-              <a:off x="446164" y="481595"/>
-              <a:ext cx="5395611" cy="5262979"/>
+              <a:off x="271993" y="339800"/>
+              <a:ext cx="5395611" cy="5909310"/>
             </a:xfrm>
             <a:prstGeom prst="rect">
               <a:avLst/>
@@ -3812,13 +3979,78 @@
                 <a:defRPr/>
               </a:pPr>
               <a:r>
-                <a:rPr lang="te-IN" sz="2400" dirty="0">
-                  <a:latin typeface="Ramabhadra" panose="02000600000000000000" pitchFamily="2" charset="0"/>
-                  <a:cs typeface="Ramabhadra" panose="02000600000000000000" pitchFamily="2" charset="0"/>
-                </a:rPr>
-                <a:t>తరతరాలలో యుగయుగాలలో</a:t>
-              </a:r>
-              <a:endParaRPr lang="en-US" sz="2400" dirty="0">
+                <a:rPr lang="te-IN" dirty="0">
+                  <a:latin typeface="Ramabhadra" panose="02000600000000000000" pitchFamily="2" charset="0"/>
+                  <a:cs typeface="Ramabhadra" panose="02000600000000000000" pitchFamily="2" charset="0"/>
+                </a:rPr>
+                <a:t>నీతో నా జీవితం సంతోషమే</a:t>
+              </a:r>
+            </a:p>
+            <a:p>
+              <a:pPr defTabSz="439781">
+                <a:defRPr/>
+              </a:pPr>
+              <a:r>
+                <a:rPr lang="te-IN" dirty="0">
+                  <a:latin typeface="Ramabhadra" panose="02000600000000000000" pitchFamily="2" charset="0"/>
+                  <a:cs typeface="Ramabhadra" panose="02000600000000000000" pitchFamily="2" charset="0"/>
+                </a:rPr>
+                <a:t>నీతో నా అనుబంధం మాధుర్యమే (2)</a:t>
+              </a:r>
+            </a:p>
+            <a:p>
+              <a:pPr defTabSz="439781">
+                <a:defRPr/>
+              </a:pPr>
+              <a:r>
+                <a:rPr lang="te-IN" dirty="0">
+                  <a:latin typeface="Ramabhadra" panose="02000600000000000000" pitchFamily="2" charset="0"/>
+                  <a:cs typeface="Ramabhadra" panose="02000600000000000000" pitchFamily="2" charset="0"/>
+                </a:rPr>
+                <a:t>నా యేసయ్యా కృప చూపుచున్నావు – వాత్సల్యపూర్ణుడవై</a:t>
+              </a:r>
+            </a:p>
+            <a:p>
+              <a:pPr defTabSz="439781">
+                <a:defRPr/>
+              </a:pPr>
+              <a:r>
+                <a:rPr lang="te-IN" dirty="0">
+                  <a:latin typeface="Ramabhadra" panose="02000600000000000000" pitchFamily="2" charset="0"/>
+                  <a:cs typeface="Ramabhadra" panose="02000600000000000000" pitchFamily="2" charset="0"/>
+                </a:rPr>
+                <a:t>నా యేసయ్యా నడిపించుచున్నావు – స్ఫూర్తిప్రదాతవై</a:t>
+              </a:r>
+            </a:p>
+            <a:p>
+              <a:pPr defTabSz="439781">
+                <a:defRPr/>
+              </a:pPr>
+              <a:r>
+                <a:rPr lang="te-IN" dirty="0">
+                  <a:latin typeface="Ramabhadra" panose="02000600000000000000" pitchFamily="2" charset="0"/>
+                  <a:cs typeface="Ramabhadra" panose="02000600000000000000" pitchFamily="2" charset="0"/>
+                </a:rPr>
+                <a:t>ఆరాధ్యుడా యేసయ్యా...</a:t>
+              </a:r>
+            </a:p>
+            <a:p>
+              <a:pPr defTabSz="439781">
+                <a:defRPr/>
+              </a:pPr>
+              <a:r>
+                <a:rPr lang="te-IN" dirty="0">
+                  <a:latin typeface="Ramabhadra" panose="02000600000000000000" pitchFamily="2" charset="0"/>
+                  <a:cs typeface="Ramabhadra" panose="02000600000000000000" pitchFamily="2" charset="0"/>
+                </a:rPr>
+                <a:t>నీతో నా అనుబంధం మాధుర్యమే</a:t>
+              </a:r>
+            </a:p>
+            <a:p>
+              <a:pPr defTabSz="439781">
+                <a:defRPr/>
+              </a:pPr>
+              <a:endParaRPr lang="te-IN" dirty="0">
                 <a:latin typeface="Ramabhadra" panose="02000600000000000000" pitchFamily="2" charset="0"/>
                 <a:cs typeface="Ramabhadra" panose="02000600000000000000" pitchFamily="2" charset="0"/>
               </a:endParaRPr>
@@ -3828,11 +4060,11 @@
                 <a:defRPr/>
               </a:pPr>
               <a:r>
-                <a:rPr lang="te-IN" sz="2400" dirty="0">
-                  <a:latin typeface="Ramabhadra" panose="02000600000000000000" pitchFamily="2" charset="0"/>
-                  <a:cs typeface="Ramabhadra" panose="02000600000000000000" pitchFamily="2" charset="0"/>
-                </a:rPr>
-                <a:t>జగజగాలలో</a:t>
+                <a:rPr lang="te-IN" dirty="0">
+                  <a:latin typeface="Ramabhadra" panose="02000600000000000000" pitchFamily="2" charset="0"/>
+                  <a:cs typeface="Ramabhadra" panose="02000600000000000000" pitchFamily="2" charset="0"/>
+                </a:rPr>
+                <a:t>భీకర ధ్వనిగలా మార్గమునందు</a:t>
               </a:r>
             </a:p>
             <a:p>
@@ -3840,11 +4072,11 @@
                 <a:defRPr/>
               </a:pPr>
               <a:r>
-                <a:rPr lang="te-IN" sz="2400" dirty="0">
-                  <a:latin typeface="Ramabhadra" panose="02000600000000000000" pitchFamily="2" charset="0"/>
-                  <a:cs typeface="Ramabhadra" panose="02000600000000000000" pitchFamily="2" charset="0"/>
-                </a:rPr>
-                <a:t>దేవుడు దేవుడు యేసే దేవుడు</a:t>
+                <a:rPr lang="te-IN" dirty="0">
+                  <a:latin typeface="Ramabhadra" panose="02000600000000000000" pitchFamily="2" charset="0"/>
+                  <a:cs typeface="Ramabhadra" panose="02000600000000000000" pitchFamily="2" charset="0"/>
+                </a:rPr>
+                <a:t>నను స్నేహించిన నా ప్రియుడవు నీవు (2)</a:t>
               </a:r>
             </a:p>
             <a:p>
@@ -3852,13 +4084,30 @@
                 <a:defRPr/>
               </a:pPr>
               <a:r>
-                <a:rPr lang="te-IN" sz="2400" dirty="0">
-                  <a:latin typeface="Ramabhadra" panose="02000600000000000000" pitchFamily="2" charset="0"/>
-                  <a:cs typeface="Ramabhadra" panose="02000600000000000000" pitchFamily="2" charset="0"/>
-                </a:rPr>
-                <a:t>హల్లెలూయా హల్లెలూయా</a:t>
-              </a:r>
-              <a:endParaRPr lang="en-US" sz="2400" dirty="0">
+                <a:rPr lang="te-IN" dirty="0">
+                  <a:latin typeface="Ramabhadra" panose="02000600000000000000" pitchFamily="2" charset="0"/>
+                  <a:cs typeface="Ramabhadra" panose="02000600000000000000" pitchFamily="2" charset="0"/>
+                </a:rPr>
+                <a:t>కలనైన మరువను నీవు నడిపిన మార్గం</a:t>
+              </a:r>
+            </a:p>
+            <a:p>
+              <a:pPr defTabSz="439781">
+                <a:defRPr/>
+              </a:pPr>
+              <a:r>
+                <a:rPr lang="te-IN" dirty="0">
+                  <a:latin typeface="Ramabhadra" panose="02000600000000000000" pitchFamily="2" charset="0"/>
+                  <a:cs typeface="Ramabhadra" panose="02000600000000000000" pitchFamily="2" charset="0"/>
+                </a:rPr>
+                <a:t>క్షణమైన విడువను నీతో సహవాసం (2)</a:t>
+              </a:r>
+            </a:p>
+            <a:p>
+              <a:pPr defTabSz="439781">
+                <a:defRPr/>
+              </a:pPr>
+              <a:endParaRPr lang="te-IN" dirty="0">
                 <a:latin typeface="Ramabhadra" panose="02000600000000000000" pitchFamily="2" charset="0"/>
                 <a:cs typeface="Ramabhadra" panose="02000600000000000000" pitchFamily="2" charset="0"/>
               </a:endParaRPr>
@@ -3868,18 +4117,54 @@
                 <a:defRPr/>
               </a:pPr>
               <a:r>
-                <a:rPr lang="te-IN" sz="2400" dirty="0">
-                  <a:latin typeface="Ramabhadra" panose="02000600000000000000" pitchFamily="2" charset="0"/>
-                  <a:cs typeface="Ramabhadra" panose="02000600000000000000" pitchFamily="2" charset="0"/>
-                </a:rPr>
-                <a:t>హల్లెలూయా హల్లెలూయా</a:t>
+                <a:rPr lang="te-IN" dirty="0">
+                  <a:latin typeface="Ramabhadra" panose="02000600000000000000" pitchFamily="2" charset="0"/>
+                  <a:cs typeface="Ramabhadra" panose="02000600000000000000" pitchFamily="2" charset="0"/>
+                </a:rPr>
+                <a:t>సంతోషమందైనా శ్రమలయందైనను</a:t>
               </a:r>
             </a:p>
             <a:p>
               <a:pPr defTabSz="439781">
                 <a:defRPr/>
               </a:pPr>
-              <a:endParaRPr lang="te-IN" sz="2400" dirty="0">
+              <a:r>
+                <a:rPr lang="te-IN" dirty="0">
+                  <a:latin typeface="Ramabhadra" panose="02000600000000000000" pitchFamily="2" charset="0"/>
+                  <a:cs typeface="Ramabhadra" panose="02000600000000000000" pitchFamily="2" charset="0"/>
+                </a:rPr>
+                <a:t>నా స్తుతి కీర్తనకు ఆధారము నీవే (2)</a:t>
+              </a:r>
+            </a:p>
+            <a:p>
+              <a:pPr defTabSz="439781">
+                <a:defRPr/>
+              </a:pPr>
+              <a:r>
+                <a:rPr lang="te-IN" dirty="0">
+                  <a:latin typeface="Ramabhadra" panose="02000600000000000000" pitchFamily="2" charset="0"/>
+                  <a:cs typeface="Ramabhadra" panose="02000600000000000000" pitchFamily="2" charset="0"/>
+                </a:rPr>
+                <a:t>నిత్యమైన మహిమలో నను నిలుపుటకు</a:t>
+              </a:r>
+            </a:p>
+            <a:p>
+              <a:pPr defTabSz="439781">
+                <a:defRPr/>
+              </a:pPr>
+              <a:r>
+                <a:rPr lang="te-IN" dirty="0">
+                  <a:latin typeface="Ramabhadra" panose="02000600000000000000" pitchFamily="2" charset="0"/>
+                  <a:cs typeface="Ramabhadra" panose="02000600000000000000" pitchFamily="2" charset="0"/>
+                </a:rPr>
+                <a:t>శుద్ధ సువర్ణముగా నను మార్చుచున్నావు (2)</a:t>
+              </a:r>
+            </a:p>
+            <a:p>
+              <a:pPr defTabSz="439781">
+                <a:defRPr/>
+              </a:pPr>
+              <a:endParaRPr lang="te-IN" dirty="0">
                 <a:latin typeface="Ramabhadra" panose="02000600000000000000" pitchFamily="2" charset="0"/>
                 <a:cs typeface="Ramabhadra" panose="02000600000000000000" pitchFamily="2" charset="0"/>
               </a:endParaRPr>
@@ -3889,11 +4174,11 @@
                 <a:defRPr/>
               </a:pPr>
               <a:r>
-                <a:rPr lang="te-IN" sz="2400" dirty="0">
-                  <a:latin typeface="Ramabhadra" panose="02000600000000000000" pitchFamily="2" charset="0"/>
-                  <a:cs typeface="Ramabhadra" panose="02000600000000000000" pitchFamily="2" charset="0"/>
-                </a:rPr>
-                <a:t>భూమిని పుట్టించకమునుపు</a:t>
+                <a:rPr lang="te-IN" dirty="0">
+                  <a:latin typeface="Ramabhadra" panose="02000600000000000000" pitchFamily="2" charset="0"/>
+                  <a:cs typeface="Ramabhadra" panose="02000600000000000000" pitchFamily="2" charset="0"/>
+                </a:rPr>
+                <a:t>ఆకాశమందుండి ఆశీర్వదించితివి</a:t>
               </a:r>
             </a:p>
             <a:p>
@@ -3901,77 +4186,35 @@
                 <a:defRPr/>
               </a:pPr>
               <a:r>
-                <a:rPr lang="te-IN" sz="2400" dirty="0">
-                  <a:latin typeface="Ramabhadra" panose="02000600000000000000" pitchFamily="2" charset="0"/>
-                  <a:cs typeface="Ramabhadra" panose="02000600000000000000" pitchFamily="2" charset="0"/>
-                </a:rPr>
-                <a:t>లోకము పునాది లేనపుడు</a:t>
+                <a:rPr lang="te-IN" dirty="0">
+                  <a:latin typeface="Ramabhadra" panose="02000600000000000000" pitchFamily="2" charset="0"/>
+                  <a:cs typeface="Ramabhadra" panose="02000600000000000000" pitchFamily="2" charset="0"/>
+                </a:rPr>
+                <a:t>అభాగ్యుడనైన నేను కనికరింపబడితిని (2)</a:t>
               </a:r>
             </a:p>
             <a:p>
               <a:pPr defTabSz="439781">
                 <a:defRPr/>
               </a:pPr>
-              <a:endParaRPr lang="te-IN" sz="2400" dirty="0">
-                <a:latin typeface="Ramabhadra" panose="02000600000000000000" pitchFamily="2" charset="0"/>
-                <a:cs typeface="Ramabhadra" panose="02000600000000000000" pitchFamily="2" charset="0"/>
-              </a:endParaRPr>
+              <a:r>
+                <a:rPr lang="te-IN" dirty="0">
+                  <a:latin typeface="Ramabhadra" panose="02000600000000000000" pitchFamily="2" charset="0"/>
+                  <a:cs typeface="Ramabhadra" panose="02000600000000000000" pitchFamily="2" charset="0"/>
+                </a:rPr>
+                <a:t>నీలో నిలుచుటకు బహుగా ఫలించుటకు</a:t>
+              </a:r>
             </a:p>
             <a:p>
               <a:pPr defTabSz="439781">
                 <a:defRPr/>
               </a:pPr>
               <a:r>
-                <a:rPr lang="te-IN" sz="2400" dirty="0">
-                  <a:latin typeface="Ramabhadra" panose="02000600000000000000" pitchFamily="2" charset="0"/>
-                  <a:cs typeface="Ramabhadra" panose="02000600000000000000" pitchFamily="2" charset="0"/>
-                </a:rPr>
-                <a:t>సృష్టికి శిల్పకారుడు</a:t>
-              </a:r>
-            </a:p>
-            <a:p>
-              <a:pPr defTabSz="439781">
-                <a:defRPr/>
-              </a:pPr>
-              <a:r>
-                <a:rPr lang="te-IN" sz="2400" dirty="0">
-                  <a:latin typeface="Ramabhadra" panose="02000600000000000000" pitchFamily="2" charset="0"/>
-                  <a:cs typeface="Ramabhadra" panose="02000600000000000000" pitchFamily="2" charset="0"/>
-                </a:rPr>
-                <a:t>జగతికి ఆదిసంభూతుడు</a:t>
-              </a:r>
-            </a:p>
-            <a:p>
-              <a:pPr defTabSz="439781">
-                <a:defRPr/>
-              </a:pPr>
-              <a:endParaRPr lang="te-IN" sz="2400" dirty="0">
-                <a:latin typeface="Ramabhadra" panose="02000600000000000000" pitchFamily="2" charset="0"/>
-                <a:cs typeface="Ramabhadra" panose="02000600000000000000" pitchFamily="2" charset="0"/>
-              </a:endParaRPr>
-            </a:p>
-            <a:p>
-              <a:pPr defTabSz="439781">
-                <a:defRPr/>
-              </a:pPr>
-              <a:r>
-                <a:rPr lang="te-IN" sz="2400" dirty="0">
-                  <a:latin typeface="Ramabhadra" panose="02000600000000000000" pitchFamily="2" charset="0"/>
-                  <a:cs typeface="Ramabhadra" panose="02000600000000000000" pitchFamily="2" charset="0"/>
-                </a:rPr>
-                <a:t>తండ్రి కుమార ఆత్మయు</a:t>
-              </a:r>
-            </a:p>
-            <a:p>
-              <a:pPr defTabSz="439781">
-                <a:defRPr/>
-              </a:pPr>
-              <a:r>
-                <a:rPr lang="te-IN" sz="2400" dirty="0">
-                  <a:latin typeface="Ramabhadra" panose="02000600000000000000" pitchFamily="2" charset="0"/>
-                  <a:cs typeface="Ramabhadra" panose="02000600000000000000" pitchFamily="2" charset="0"/>
-                </a:rPr>
-                <a:t>ఒకడైయున్న రూపము</a:t>
+                <a:rPr lang="te-IN" dirty="0">
+                  <a:latin typeface="Ramabhadra" panose="02000600000000000000" pitchFamily="2" charset="0"/>
+                  <a:cs typeface="Ramabhadra" panose="02000600000000000000" pitchFamily="2" charset="0"/>
+                </a:rPr>
+                <a:t>నూతన కృపలతో నను నింపుచున్నావు (2) </a:t>
               </a:r>
             </a:p>
           </p:txBody>
@@ -4054,9 +4297,9 @@
         <p:grpSpPr>
           <a:xfrm>
             <a:off x="5104338" y="182031"/>
-            <a:ext cx="4909271" cy="6493935"/>
+            <a:ext cx="4858937" cy="6493935"/>
             <a:chOff x="160868" y="182032"/>
-            <a:chExt cx="4909271" cy="6493935"/>
+            <a:chExt cx="4858937" cy="6493935"/>
           </a:xfrm>
         </p:grpSpPr>
         <p:sp>
@@ -4128,8 +4371,8 @@
           </p:nvSpPr>
           <p:spPr>
             <a:xfrm>
-              <a:off x="320338" y="339801"/>
-              <a:ext cx="4749801" cy="6186309"/>
+              <a:off x="270004" y="281078"/>
+              <a:ext cx="4749801" cy="6232475"/>
             </a:xfrm>
             <a:prstGeom prst="rect">
               <a:avLst/>
@@ -4142,260 +4385,184 @@
             </a:bodyPr>
             <a:lstStyle/>
             <a:p>
-              <a:pPr defTabSz="439781">
-                <a:defRPr/>
-              </a:pPr>
-              <a:r>
-                <a:rPr lang="te-IN" sz="2200" dirty="0">
-                  <a:latin typeface="Ramabhadra" panose="02000600000000000000" pitchFamily="2" charset="0"/>
-                  <a:cs typeface="Ramabhadra" panose="02000600000000000000" pitchFamily="2" charset="0"/>
-                </a:rPr>
-                <a:t>స్తోత్రం చెల్లింతుము</a:t>
-              </a:r>
-              <a:endParaRPr lang="en-US" sz="2200" dirty="0">
+              <a:pPr defTabSz="439781"/>
+              <a:r>
+                <a:rPr lang="te-IN" sz="2100" dirty="0">
+                  <a:latin typeface="Ramabhadra" panose="02000600000000000000" pitchFamily="2" charset="0"/>
+                  <a:cs typeface="Ramabhadra" panose="02000600000000000000" pitchFamily="2" charset="0"/>
+                </a:rPr>
+                <a:t>నజరేయుడా నా యేసయ్య</a:t>
+              </a:r>
+            </a:p>
+            <a:p>
+              <a:pPr defTabSz="439781"/>
+              <a:r>
+                <a:rPr lang="te-IN" sz="2100" dirty="0">
+                  <a:latin typeface="Ramabhadra" panose="02000600000000000000" pitchFamily="2" charset="0"/>
+                  <a:cs typeface="Ramabhadra" panose="02000600000000000000" pitchFamily="2" charset="0"/>
+                </a:rPr>
+                <a:t>ఎన్ని యుగాలకైనా</a:t>
+              </a:r>
+            </a:p>
+            <a:p>
+              <a:pPr defTabSz="439781"/>
+              <a:r>
+                <a:rPr lang="te-IN" sz="2100" dirty="0">
+                  <a:latin typeface="Ramabhadra" panose="02000600000000000000" pitchFamily="2" charset="0"/>
+                  <a:cs typeface="Ramabhadra" panose="02000600000000000000" pitchFamily="2" charset="0"/>
+                </a:rPr>
+                <a:t>ఆరాధ్య దైవము నీవేనని</a:t>
+              </a:r>
+            </a:p>
+            <a:p>
+              <a:pPr defTabSz="439781"/>
+              <a:r>
+                <a:rPr lang="te-IN" sz="2100" dirty="0">
+                  <a:latin typeface="Ramabhadra" panose="02000600000000000000" pitchFamily="2" charset="0"/>
+                  <a:cs typeface="Ramabhadra" panose="02000600000000000000" pitchFamily="2" charset="0"/>
+                </a:rPr>
+                <a:t>గళమెత్తి నీ కీర్తి నే చాటెద</a:t>
+              </a:r>
+            </a:p>
+            <a:p>
+              <a:pPr defTabSz="439781"/>
+              <a:endParaRPr lang="te-IN" sz="2100" dirty="0">
                 <a:latin typeface="Ramabhadra" panose="02000600000000000000" pitchFamily="2" charset="0"/>
                 <a:cs typeface="Ramabhadra" panose="02000600000000000000" pitchFamily="2" charset="0"/>
               </a:endParaRPr>
             </a:p>
             <a:p>
-              <a:pPr defTabSz="439781">
-                <a:defRPr/>
-              </a:pPr>
-              <a:r>
-                <a:rPr lang="te-IN" sz="2200" dirty="0">
-                  <a:latin typeface="Ramabhadra" panose="02000600000000000000" pitchFamily="2" charset="0"/>
-                  <a:cs typeface="Ramabhadra" panose="02000600000000000000" pitchFamily="2" charset="0"/>
-                </a:rPr>
-                <a:t>స్తుతి స్తోత్రం చెల్లింతుము</a:t>
-              </a:r>
-              <a:br>
-                <a:rPr lang="te-IN" sz="2200" dirty="0">
-                  <a:latin typeface="Ramabhadra" panose="02000600000000000000" pitchFamily="2" charset="0"/>
-                  <a:cs typeface="Ramabhadra" panose="02000600000000000000" pitchFamily="2" charset="0"/>
-                </a:rPr>
-              </a:br>
-              <a:r>
-                <a:rPr lang="te-IN" sz="2200" dirty="0">
-                  <a:latin typeface="Ramabhadra" panose="02000600000000000000" pitchFamily="2" charset="0"/>
-                  <a:cs typeface="Ramabhadra" panose="02000600000000000000" pitchFamily="2" charset="0"/>
-                </a:rPr>
-                <a:t>యేసు నాథుని మేలులు తలంచి</a:t>
-              </a:r>
-            </a:p>
-            <a:p>
-              <a:pPr defTabSz="439781">
-                <a:defRPr/>
-              </a:pPr>
-              <a:endParaRPr lang="te-IN" sz="2200" dirty="0">
+              <a:pPr defTabSz="439781"/>
+              <a:r>
+                <a:rPr lang="te-IN" sz="2100" dirty="0">
+                  <a:latin typeface="Ramabhadra" panose="02000600000000000000" pitchFamily="2" charset="0"/>
+                  <a:cs typeface="Ramabhadra" panose="02000600000000000000" pitchFamily="2" charset="0"/>
+                </a:rPr>
+                <a:t>ఆకాశ గగనాలను నీ జేనతో కొలిచితివి (2)</a:t>
+              </a:r>
+            </a:p>
+            <a:p>
+              <a:pPr defTabSz="439781"/>
+              <a:r>
+                <a:rPr lang="te-IN" sz="2100" dirty="0">
+                  <a:latin typeface="Ramabhadra" panose="02000600000000000000" pitchFamily="2" charset="0"/>
+                  <a:cs typeface="Ramabhadra" panose="02000600000000000000" pitchFamily="2" charset="0"/>
+                </a:rPr>
+                <a:t>శూన్యములో ఈ భూమిని</a:t>
+              </a:r>
+            </a:p>
+            <a:p>
+              <a:pPr defTabSz="439781"/>
+              <a:r>
+                <a:rPr lang="te-IN" sz="2100" dirty="0">
+                  <a:latin typeface="Ramabhadra" panose="02000600000000000000" pitchFamily="2" charset="0"/>
+                  <a:cs typeface="Ramabhadra" panose="02000600000000000000" pitchFamily="2" charset="0"/>
+                </a:rPr>
+                <a:t>వ్రేలాడదీసిన నా యేసయ్య (2)</a:t>
+              </a:r>
+            </a:p>
+            <a:p>
+              <a:pPr defTabSz="439781"/>
+              <a:r>
+                <a:rPr lang="te-IN" sz="2100" dirty="0">
+                  <a:latin typeface="Ramabhadra" panose="02000600000000000000" pitchFamily="2" charset="0"/>
+                  <a:cs typeface="Ramabhadra" panose="02000600000000000000" pitchFamily="2" charset="0"/>
+                </a:rPr>
+                <a:t>నీకే వందనం నీకే వందనం (2)</a:t>
+              </a:r>
+            </a:p>
+            <a:p>
+              <a:pPr defTabSz="439781"/>
+              <a:endParaRPr lang="te-IN" sz="2100" dirty="0">
                 <a:latin typeface="Ramabhadra" panose="02000600000000000000" pitchFamily="2" charset="0"/>
                 <a:cs typeface="Ramabhadra" panose="02000600000000000000" pitchFamily="2" charset="0"/>
               </a:endParaRPr>
             </a:p>
             <a:p>
-              <a:pPr defTabSz="439781">
-                <a:defRPr/>
-              </a:pPr>
-              <a:r>
-                <a:rPr lang="te-IN" sz="2200" dirty="0">
-                  <a:latin typeface="Ramabhadra" panose="02000600000000000000" pitchFamily="2" charset="0"/>
-                  <a:cs typeface="Ramabhadra" panose="02000600000000000000" pitchFamily="2" charset="0"/>
-                </a:rPr>
-                <a:t>దివారాత్రములు</a:t>
-              </a:r>
-              <a:endParaRPr lang="en-US" sz="2200" dirty="0">
+              <a:pPr defTabSz="439781"/>
+              <a:r>
+                <a:rPr lang="te-IN" sz="2100" dirty="0">
+                  <a:latin typeface="Ramabhadra" panose="02000600000000000000" pitchFamily="2" charset="0"/>
+                  <a:cs typeface="Ramabhadra" panose="02000600000000000000" pitchFamily="2" charset="0"/>
+                </a:rPr>
+                <a:t>అగాధ సముద్రాలకు నీవే ఎల్లలు వేసితివి (2)</a:t>
+              </a:r>
+            </a:p>
+            <a:p>
+              <a:pPr defTabSz="439781"/>
+              <a:r>
+                <a:rPr lang="te-IN" sz="2100" dirty="0">
+                  <a:latin typeface="Ramabhadra" panose="02000600000000000000" pitchFamily="2" charset="0"/>
+                  <a:cs typeface="Ramabhadra" panose="02000600000000000000" pitchFamily="2" charset="0"/>
+                </a:rPr>
+                <a:t>జలములలోబడి నే వెళ్ళినా</a:t>
+              </a:r>
+            </a:p>
+            <a:p>
+              <a:pPr defTabSz="439781"/>
+              <a:r>
+                <a:rPr lang="te-IN" sz="2100" dirty="0">
+                  <a:latin typeface="Ramabhadra" panose="02000600000000000000" pitchFamily="2" charset="0"/>
+                  <a:cs typeface="Ramabhadra" panose="02000600000000000000" pitchFamily="2" charset="0"/>
+                </a:rPr>
+                <a:t>నన్నేమి చేయవు నా యేసయ్యా (2)</a:t>
+              </a:r>
+            </a:p>
+            <a:p>
+              <a:pPr defTabSz="439781"/>
+              <a:r>
+                <a:rPr lang="te-IN" sz="2100" dirty="0">
+                  <a:latin typeface="Ramabhadra" panose="02000600000000000000" pitchFamily="2" charset="0"/>
+                  <a:cs typeface="Ramabhadra" panose="02000600000000000000" pitchFamily="2" charset="0"/>
+                </a:rPr>
+                <a:t>నీకే వందనం నీకే వందనం (2)</a:t>
+              </a:r>
+            </a:p>
+            <a:p>
+              <a:pPr defTabSz="439781"/>
+              <a:endParaRPr lang="te-IN" sz="2100" dirty="0">
                 <a:latin typeface="Ramabhadra" panose="02000600000000000000" pitchFamily="2" charset="0"/>
                 <a:cs typeface="Ramabhadra" panose="02000600000000000000" pitchFamily="2" charset="0"/>
               </a:endParaRPr>
             </a:p>
             <a:p>
-              <a:pPr defTabSz="439781">
-                <a:defRPr/>
-              </a:pPr>
-              <a:r>
-                <a:rPr lang="te-IN" sz="2200" dirty="0">
-                  <a:latin typeface="Ramabhadra" panose="02000600000000000000" pitchFamily="2" charset="0"/>
-                  <a:cs typeface="Ramabhadra" panose="02000600000000000000" pitchFamily="2" charset="0"/>
-                </a:rPr>
-                <a:t>కంటిపాపవలె కాచి (2)</a:t>
-              </a:r>
-              <a:br>
-                <a:rPr lang="te-IN" sz="2200" dirty="0">
-                  <a:latin typeface="Ramabhadra" panose="02000600000000000000" pitchFamily="2" charset="0"/>
-                  <a:cs typeface="Ramabhadra" panose="02000600000000000000" pitchFamily="2" charset="0"/>
-                </a:rPr>
-              </a:br>
-              <a:r>
-                <a:rPr lang="te-IN" sz="2200" dirty="0">
-                  <a:latin typeface="Ramabhadra" panose="02000600000000000000" pitchFamily="2" charset="0"/>
-                  <a:cs typeface="Ramabhadra" panose="02000600000000000000" pitchFamily="2" charset="0"/>
-                </a:rPr>
-                <a:t>దయగల హస్తముతో</a:t>
-              </a:r>
-              <a:endParaRPr lang="en-US" sz="2200" dirty="0">
-                <a:latin typeface="Ramabhadra" panose="02000600000000000000" pitchFamily="2" charset="0"/>
-                <a:cs typeface="Ramabhadra" panose="02000600000000000000" pitchFamily="2" charset="0"/>
-              </a:endParaRPr>
-            </a:p>
-            <a:p>
-              <a:pPr defTabSz="439781">
-                <a:defRPr/>
-              </a:pPr>
-              <a:r>
-                <a:rPr lang="te-IN" sz="2200" dirty="0">
-                  <a:latin typeface="Ramabhadra" panose="02000600000000000000" pitchFamily="2" charset="0"/>
-                  <a:cs typeface="Ramabhadra" panose="02000600000000000000" pitchFamily="2" charset="0"/>
-                </a:rPr>
-                <a:t>బ్రోచి నడిపించితివి (2)</a:t>
-              </a:r>
-            </a:p>
-            <a:p>
-              <a:pPr defTabSz="439781">
-                <a:defRPr/>
-              </a:pPr>
-              <a:endParaRPr lang="te-IN" sz="2200" dirty="0">
-                <a:latin typeface="Ramabhadra" panose="02000600000000000000" pitchFamily="2" charset="0"/>
-                <a:cs typeface="Ramabhadra" panose="02000600000000000000" pitchFamily="2" charset="0"/>
-              </a:endParaRPr>
-            </a:p>
-            <a:p>
-              <a:pPr defTabSz="439781">
-                <a:defRPr/>
-              </a:pPr>
-              <a:r>
-                <a:rPr lang="te-IN" sz="2200" dirty="0">
-                  <a:latin typeface="Ramabhadra" panose="02000600000000000000" pitchFamily="2" charset="0"/>
-                  <a:cs typeface="Ramabhadra" panose="02000600000000000000" pitchFamily="2" charset="0"/>
-                </a:rPr>
-                <a:t>గాడాంధకారములో</a:t>
-              </a:r>
-              <a:endParaRPr lang="en-US" sz="2200" dirty="0">
-                <a:latin typeface="Ramabhadra" panose="02000600000000000000" pitchFamily="2" charset="0"/>
-                <a:cs typeface="Ramabhadra" panose="02000600000000000000" pitchFamily="2" charset="0"/>
-              </a:endParaRPr>
-            </a:p>
-            <a:p>
-              <a:pPr defTabSz="439781">
-                <a:defRPr/>
-              </a:pPr>
-              <a:r>
-                <a:rPr lang="te-IN" sz="2200" dirty="0">
-                  <a:latin typeface="Ramabhadra" panose="02000600000000000000" pitchFamily="2" charset="0"/>
-                  <a:cs typeface="Ramabhadra" panose="02000600000000000000" pitchFamily="2" charset="0"/>
-                </a:rPr>
-                <a:t>కన్నీటి లోయలలో (2)</a:t>
-              </a:r>
-              <a:br>
-                <a:rPr lang="te-IN" sz="2200" dirty="0">
-                  <a:latin typeface="Ramabhadra" panose="02000600000000000000" pitchFamily="2" charset="0"/>
-                  <a:cs typeface="Ramabhadra" panose="02000600000000000000" pitchFamily="2" charset="0"/>
-                </a:rPr>
-              </a:br>
-              <a:r>
-                <a:rPr lang="te-IN" sz="2200" dirty="0">
-                  <a:latin typeface="Ramabhadra" panose="02000600000000000000" pitchFamily="2" charset="0"/>
-                  <a:cs typeface="Ramabhadra" panose="02000600000000000000" pitchFamily="2" charset="0"/>
-                </a:rPr>
-                <a:t>కృశించి</a:t>
-              </a:r>
-              <a:r>
-                <a:rPr lang="en-US" sz="2200" dirty="0">
-                  <a:latin typeface="Ramabhadra" panose="02000600000000000000" pitchFamily="2" charset="0"/>
-                  <a:cs typeface="Ramabhadra" panose="02000600000000000000" pitchFamily="2" charset="0"/>
-                </a:rPr>
-                <a:t> </a:t>
-              </a:r>
-              <a:r>
-                <a:rPr lang="te-IN" sz="2200" dirty="0">
-                  <a:latin typeface="Ramabhadra" panose="02000600000000000000" pitchFamily="2" charset="0"/>
-                  <a:cs typeface="Ramabhadra" panose="02000600000000000000" pitchFamily="2" charset="0"/>
-                </a:rPr>
-                <a:t>పోనీయక</a:t>
-              </a:r>
-              <a:endParaRPr lang="en-US" sz="2200" dirty="0">
-                <a:latin typeface="Ramabhadra" panose="02000600000000000000" pitchFamily="2" charset="0"/>
-                <a:cs typeface="Ramabhadra" panose="02000600000000000000" pitchFamily="2" charset="0"/>
-              </a:endParaRPr>
-            </a:p>
-            <a:p>
-              <a:pPr defTabSz="439781">
-                <a:defRPr/>
-              </a:pPr>
-              <a:r>
-                <a:rPr lang="te-IN" sz="2200" dirty="0">
-                  <a:latin typeface="Ramabhadra" panose="02000600000000000000" pitchFamily="2" charset="0"/>
-                  <a:cs typeface="Ramabhadra" panose="02000600000000000000" pitchFamily="2" charset="0"/>
-                </a:rPr>
-                <a:t>కృపలతో బలపరచితివి (2)</a:t>
-              </a:r>
-              <a:endParaRPr lang="en-US" sz="2200" dirty="0">
-                <a:latin typeface="Ramabhadra" panose="02000600000000000000" pitchFamily="2" charset="0"/>
-                <a:cs typeface="Ramabhadra" panose="02000600000000000000" pitchFamily="2" charset="0"/>
-              </a:endParaRPr>
-            </a:p>
-            <a:p>
-              <a:pPr defTabSz="439781">
-                <a:defRPr/>
-              </a:pPr>
-              <a:endParaRPr lang="te-IN" sz="2200" dirty="0">
-                <a:latin typeface="Ramabhadra" panose="02000600000000000000" pitchFamily="2" charset="0"/>
-                <a:cs typeface="Ramabhadra" panose="02000600000000000000" pitchFamily="2" charset="0"/>
-              </a:endParaRPr>
-            </a:p>
-            <a:p>
-              <a:pPr defTabSz="439781">
-                <a:defRPr/>
-              </a:pPr>
-              <a:r>
-                <a:rPr lang="te-IN" sz="2200" dirty="0">
-                  <a:latin typeface="Ramabhadra" panose="02000600000000000000" pitchFamily="2" charset="0"/>
-                  <a:cs typeface="Ramabhadra" panose="02000600000000000000" pitchFamily="2" charset="0"/>
-                </a:rPr>
-                <a:t>సజీవ యాగముగా</a:t>
-              </a:r>
-              <a:endParaRPr lang="en-US" sz="2200" dirty="0">
-                <a:latin typeface="Ramabhadra" panose="02000600000000000000" pitchFamily="2" charset="0"/>
-                <a:cs typeface="Ramabhadra" panose="02000600000000000000" pitchFamily="2" charset="0"/>
-              </a:endParaRPr>
-            </a:p>
-            <a:p>
-              <a:pPr defTabSz="439781">
-                <a:defRPr/>
-              </a:pPr>
-              <a:r>
-                <a:rPr lang="te-IN" sz="2200" dirty="0">
-                  <a:latin typeface="Ramabhadra" panose="02000600000000000000" pitchFamily="2" charset="0"/>
-                  <a:cs typeface="Ramabhadra" panose="02000600000000000000" pitchFamily="2" charset="0"/>
-                </a:rPr>
-                <a:t>మా శరీరము సమర్పించి (2)</a:t>
-              </a:r>
-              <a:br>
-                <a:rPr lang="te-IN" sz="2200" dirty="0">
-                  <a:latin typeface="Ramabhadra" panose="02000600000000000000" pitchFamily="2" charset="0"/>
-                  <a:cs typeface="Ramabhadra" panose="02000600000000000000" pitchFamily="2" charset="0"/>
-                </a:rPr>
-              </a:br>
-              <a:r>
-                <a:rPr lang="te-IN" sz="2200" dirty="0">
-                  <a:latin typeface="Ramabhadra" panose="02000600000000000000" pitchFamily="2" charset="0"/>
-                  <a:cs typeface="Ramabhadra" panose="02000600000000000000" pitchFamily="2" charset="0"/>
-                </a:rPr>
-                <a:t>సంపూర్ణ సిద్దినొంద</a:t>
-              </a:r>
-              <a:endParaRPr lang="en-US" sz="2200" dirty="0">
-                <a:latin typeface="Ramabhadra" panose="02000600000000000000" pitchFamily="2" charset="0"/>
-                <a:cs typeface="Ramabhadra" panose="02000600000000000000" pitchFamily="2" charset="0"/>
-              </a:endParaRPr>
-            </a:p>
-            <a:p>
-              <a:pPr defTabSz="439781">
-                <a:defRPr/>
-              </a:pPr>
-              <a:r>
-                <a:rPr lang="te-IN" sz="2200" dirty="0">
-                  <a:latin typeface="Ramabhadra" panose="02000600000000000000" pitchFamily="2" charset="0"/>
-                  <a:cs typeface="Ramabhadra" panose="02000600000000000000" pitchFamily="2" charset="0"/>
-                </a:rPr>
-                <a:t>శుద్ధాత్మను నొసగితివి (2)      </a:t>
+              <a:pPr defTabSz="439781"/>
+              <a:r>
+                <a:rPr lang="te-IN" sz="2100" dirty="0">
+                  <a:latin typeface="Ramabhadra" panose="02000600000000000000" pitchFamily="2" charset="0"/>
+                  <a:cs typeface="Ramabhadra" panose="02000600000000000000" pitchFamily="2" charset="0"/>
+                </a:rPr>
+                <a:t>సీయోను శిఖరాగ్రము నీ సింహాసనమాయెనా (2)</a:t>
+              </a:r>
+            </a:p>
+            <a:p>
+              <a:pPr defTabSz="439781"/>
+              <a:r>
+                <a:rPr lang="te-IN" sz="2100" dirty="0">
+                  <a:latin typeface="Ramabhadra" panose="02000600000000000000" pitchFamily="2" charset="0"/>
+                  <a:cs typeface="Ramabhadra" panose="02000600000000000000" pitchFamily="2" charset="0"/>
+                </a:rPr>
+                <a:t>సీయోనులో నిను చూడాలని</a:t>
+              </a:r>
+            </a:p>
+            <a:p>
+              <a:pPr defTabSz="439781"/>
+              <a:r>
+                <a:rPr lang="te-IN" sz="2100" dirty="0">
+                  <a:latin typeface="Ramabhadra" panose="02000600000000000000" pitchFamily="2" charset="0"/>
+                  <a:cs typeface="Ramabhadra" panose="02000600000000000000" pitchFamily="2" charset="0"/>
+                </a:rPr>
+                <a:t>ఆశతో ఉన్నాను నా యేసయ్యా (2)</a:t>
+              </a:r>
+            </a:p>
+            <a:p>
+              <a:pPr defTabSz="439781"/>
+              <a:r>
+                <a:rPr lang="te-IN" sz="2100" dirty="0">
+                  <a:latin typeface="Ramabhadra" panose="02000600000000000000" pitchFamily="2" charset="0"/>
+                  <a:cs typeface="Ramabhadra" panose="02000600000000000000" pitchFamily="2" charset="0"/>
+                </a:rPr>
+                <a:t>నీకే వందనం నీకే వందనం (2)</a:t>
               </a:r>
             </a:p>
           </p:txBody>

--- a/songsTemplate.pptx
+++ b/songsTemplate.pptx
@@ -255,7 +255,7 @@
           <a:p>
             <a:fld id="{F1102B08-ED9E-409F-B95F-09CAA1DAF6E0}" type="datetimeFigureOut">
               <a:rPr lang="en-IN" smtClean="0"/>
-              <a:t>21-02-2025</a:t>
+              <a:t>01-03-2025</a:t>
             </a:fld>
             <a:endParaRPr lang="en-IN"/>
           </a:p>
@@ -425,7 +425,7 @@
           <a:p>
             <a:fld id="{F1102B08-ED9E-409F-B95F-09CAA1DAF6E0}" type="datetimeFigureOut">
               <a:rPr lang="en-IN" smtClean="0"/>
-              <a:t>21-02-2025</a:t>
+              <a:t>01-03-2025</a:t>
             </a:fld>
             <a:endParaRPr lang="en-IN"/>
           </a:p>
@@ -605,7 +605,7 @@
           <a:p>
             <a:fld id="{F1102B08-ED9E-409F-B95F-09CAA1DAF6E0}" type="datetimeFigureOut">
               <a:rPr lang="en-IN" smtClean="0"/>
-              <a:t>21-02-2025</a:t>
+              <a:t>01-03-2025</a:t>
             </a:fld>
             <a:endParaRPr lang="en-IN"/>
           </a:p>
@@ -775,7 +775,7 @@
           <a:p>
             <a:fld id="{F1102B08-ED9E-409F-B95F-09CAA1DAF6E0}" type="datetimeFigureOut">
               <a:rPr lang="en-IN" smtClean="0"/>
-              <a:t>21-02-2025</a:t>
+              <a:t>01-03-2025</a:t>
             </a:fld>
             <a:endParaRPr lang="en-IN"/>
           </a:p>
@@ -1019,7 +1019,7 @@
           <a:p>
             <a:fld id="{F1102B08-ED9E-409F-B95F-09CAA1DAF6E0}" type="datetimeFigureOut">
               <a:rPr lang="en-IN" smtClean="0"/>
-              <a:t>21-02-2025</a:t>
+              <a:t>01-03-2025</a:t>
             </a:fld>
             <a:endParaRPr lang="en-IN"/>
           </a:p>
@@ -1251,7 +1251,7 @@
           <a:p>
             <a:fld id="{F1102B08-ED9E-409F-B95F-09CAA1DAF6E0}" type="datetimeFigureOut">
               <a:rPr lang="en-IN" smtClean="0"/>
-              <a:t>21-02-2025</a:t>
+              <a:t>01-03-2025</a:t>
             </a:fld>
             <a:endParaRPr lang="en-IN"/>
           </a:p>
@@ -1618,7 +1618,7 @@
           <a:p>
             <a:fld id="{F1102B08-ED9E-409F-B95F-09CAA1DAF6E0}" type="datetimeFigureOut">
               <a:rPr lang="en-IN" smtClean="0"/>
-              <a:t>21-02-2025</a:t>
+              <a:t>01-03-2025</a:t>
             </a:fld>
             <a:endParaRPr lang="en-IN"/>
           </a:p>
@@ -1736,7 +1736,7 @@
           <a:p>
             <a:fld id="{F1102B08-ED9E-409F-B95F-09CAA1DAF6E0}" type="datetimeFigureOut">
               <a:rPr lang="en-IN" smtClean="0"/>
-              <a:t>21-02-2025</a:t>
+              <a:t>01-03-2025</a:t>
             </a:fld>
             <a:endParaRPr lang="en-IN"/>
           </a:p>
@@ -1831,7 +1831,7 @@
           <a:p>
             <a:fld id="{F1102B08-ED9E-409F-B95F-09CAA1DAF6E0}" type="datetimeFigureOut">
               <a:rPr lang="en-IN" smtClean="0"/>
-              <a:t>21-02-2025</a:t>
+              <a:t>01-03-2025</a:t>
             </a:fld>
             <a:endParaRPr lang="en-IN"/>
           </a:p>
@@ -2108,7 +2108,7 @@
           <a:p>
             <a:fld id="{F1102B08-ED9E-409F-B95F-09CAA1DAF6E0}" type="datetimeFigureOut">
               <a:rPr lang="en-IN" smtClean="0"/>
-              <a:t>21-02-2025</a:t>
+              <a:t>01-03-2025</a:t>
             </a:fld>
             <a:endParaRPr lang="en-IN"/>
           </a:p>
@@ -2365,7 +2365,7 @@
           <a:p>
             <a:fld id="{F1102B08-ED9E-409F-B95F-09CAA1DAF6E0}" type="datetimeFigureOut">
               <a:rPr lang="en-IN" smtClean="0"/>
-              <a:t>21-02-2025</a:t>
+              <a:t>01-03-2025</a:t>
             </a:fld>
             <a:endParaRPr lang="en-IN"/>
           </a:p>
@@ -2578,7 +2578,7 @@
           <a:p>
             <a:fld id="{F1102B08-ED9E-409F-B95F-09CAA1DAF6E0}" type="datetimeFigureOut">
               <a:rPr lang="en-IN" smtClean="0"/>
-              <a:t>21-02-2025</a:t>
+              <a:t>01-03-2025</a:t>
             </a:fld>
             <a:endParaRPr lang="en-IN"/>
           </a:p>
@@ -3087,289 +3087,266 @@
             <a:lstStyle/>
             <a:p>
               <a:r>
-                <a:rPr lang="te-IN" sz="1650" dirty="0">
-                  <a:latin typeface="Ramabhadra" panose="02000600000000000000" pitchFamily="2" charset="0"/>
-                  <a:cs typeface="Ramabhadra" panose="02000600000000000000" pitchFamily="2" charset="0"/>
-                </a:rPr>
-                <a:t>ఘనమైనవి నీ కార్యములు నా యెడల</a:t>
-              </a:r>
-              <a:br>
-                <a:rPr lang="te-IN" sz="1650" dirty="0">
-                  <a:latin typeface="Ramabhadra" panose="02000600000000000000" pitchFamily="2" charset="0"/>
-                  <a:cs typeface="Ramabhadra" panose="02000600000000000000" pitchFamily="2" charset="0"/>
-                </a:rPr>
-              </a:br>
-              <a:r>
-                <a:rPr lang="te-IN" sz="1650" dirty="0">
-                  <a:latin typeface="Ramabhadra" panose="02000600000000000000" pitchFamily="2" charset="0"/>
-                  <a:cs typeface="Ramabhadra" panose="02000600000000000000" pitchFamily="2" charset="0"/>
-                </a:rPr>
-                <a:t>స్థిరమైనవి నీ ఆలోచనలు నా యేసయ్యా (2)</a:t>
-              </a:r>
-              <a:br>
-                <a:rPr lang="te-IN" sz="1650" dirty="0">
-                  <a:latin typeface="Ramabhadra" panose="02000600000000000000" pitchFamily="2" charset="0"/>
-                  <a:cs typeface="Ramabhadra" panose="02000600000000000000" pitchFamily="2" charset="0"/>
-                </a:rPr>
-              </a:br>
-              <a:r>
-                <a:rPr lang="te-IN" sz="1650" dirty="0">
-                  <a:latin typeface="Ramabhadra" panose="02000600000000000000" pitchFamily="2" charset="0"/>
-                  <a:cs typeface="Ramabhadra" panose="02000600000000000000" pitchFamily="2" charset="0"/>
-                </a:rPr>
-                <a:t>కృపలను పొందుచు కృతజ్ఞత కలిగి</a:t>
-              </a:r>
-              <a:br>
-                <a:rPr lang="te-IN" sz="1650" dirty="0">
-                  <a:latin typeface="Ramabhadra" panose="02000600000000000000" pitchFamily="2" charset="0"/>
-                  <a:cs typeface="Ramabhadra" panose="02000600000000000000" pitchFamily="2" charset="0"/>
-                </a:rPr>
-              </a:br>
-              <a:r>
-                <a:rPr lang="te-IN" sz="1650" dirty="0">
-                  <a:latin typeface="Ramabhadra" panose="02000600000000000000" pitchFamily="2" charset="0"/>
-                  <a:cs typeface="Ramabhadra" panose="02000600000000000000" pitchFamily="2" charset="0"/>
-                </a:rPr>
-                <a:t>స్తుతులర్పించెదను అన్నివేళలా (2)</a:t>
-              </a:r>
-              <a:br>
-                <a:rPr lang="te-IN" sz="1650" dirty="0">
-                  <a:latin typeface="Ramabhadra" panose="02000600000000000000" pitchFamily="2" charset="0"/>
-                  <a:cs typeface="Ramabhadra" panose="02000600000000000000" pitchFamily="2" charset="0"/>
-                </a:rPr>
-              </a:br>
-              <a:r>
-                <a:rPr lang="te-IN" sz="1650" dirty="0">
-                  <a:latin typeface="Ramabhadra" panose="02000600000000000000" pitchFamily="2" charset="0"/>
-                  <a:cs typeface="Ramabhadra" panose="02000600000000000000" pitchFamily="2" charset="0"/>
-                </a:rPr>
-                <a:t>అనుదినము నీ అనుగ్రహమే</a:t>
-              </a:r>
-              <a:br>
-                <a:rPr lang="te-IN" sz="1650" dirty="0">
-                  <a:latin typeface="Ramabhadra" panose="02000600000000000000" pitchFamily="2" charset="0"/>
-                  <a:cs typeface="Ramabhadra" panose="02000600000000000000" pitchFamily="2" charset="0"/>
-                </a:rPr>
-              </a:br>
-              <a:r>
-                <a:rPr lang="te-IN" sz="1650" dirty="0">
-                  <a:latin typeface="Ramabhadra" panose="02000600000000000000" pitchFamily="2" charset="0"/>
-                  <a:cs typeface="Ramabhadra" panose="02000600000000000000" pitchFamily="2" charset="0"/>
-                </a:rPr>
-                <a:t>ఆయుష్కాలము నీ వరమే (2)</a:t>
-              </a:r>
-              <a:endParaRPr lang="en-IN" sz="1650" dirty="0">
+                <a:rPr lang="te-IN" sz="2200" dirty="0">
+                  <a:latin typeface="Ramabhadra" panose="02000600000000000000" pitchFamily="2" charset="0"/>
+                  <a:cs typeface="Ramabhadra" panose="02000600000000000000" pitchFamily="2" charset="0"/>
+                </a:rPr>
+                <a:t>దేవ నడిపించుమా – అనుదినము</a:t>
+              </a:r>
+            </a:p>
+            <a:p>
+              <a:r>
+                <a:rPr lang="te-IN" sz="2200" dirty="0">
+                  <a:latin typeface="Ramabhadra" panose="02000600000000000000" pitchFamily="2" charset="0"/>
+                  <a:cs typeface="Ramabhadra" panose="02000600000000000000" pitchFamily="2" charset="0"/>
+                </a:rPr>
+                <a:t>పరిశుద్ధాత్మతో నడిపించుమా</a:t>
+              </a:r>
+            </a:p>
+            <a:p>
+              <a:r>
+                <a:rPr lang="te-IN" sz="2200" dirty="0">
+                  <a:latin typeface="Ramabhadra" panose="02000600000000000000" pitchFamily="2" charset="0"/>
+                  <a:cs typeface="Ramabhadra" panose="02000600000000000000" pitchFamily="2" charset="0"/>
+                </a:rPr>
+                <a:t>యేసయ్యా......</a:t>
+              </a:r>
+              <a:r>
+                <a:rPr lang="en-IN" sz="2200" dirty="0">
+                  <a:latin typeface="Ramabhadra" panose="02000600000000000000" pitchFamily="2" charset="0"/>
+                  <a:cs typeface="Ramabhadra" panose="02000600000000000000" pitchFamily="2" charset="0"/>
+                </a:rPr>
+                <a:t> </a:t>
+              </a:r>
+              <a:r>
+                <a:rPr lang="te-IN" sz="2200" dirty="0">
+                  <a:latin typeface="Ramabhadra" panose="02000600000000000000" pitchFamily="2" charset="0"/>
+                  <a:cs typeface="Ramabhadra" panose="02000600000000000000" pitchFamily="2" charset="0"/>
+                </a:rPr>
+                <a:t>యేసయ్యా.....</a:t>
+              </a:r>
+              <a:r>
+                <a:rPr lang="en-IN" sz="2200" dirty="0">
+                  <a:latin typeface="Ramabhadra" panose="02000600000000000000" pitchFamily="2" charset="0"/>
+                  <a:cs typeface="Ramabhadra" panose="02000600000000000000" pitchFamily="2" charset="0"/>
+                </a:rPr>
+                <a:t> </a:t>
+              </a:r>
+              <a:r>
+                <a:rPr lang="te-IN" sz="2200" dirty="0">
+                  <a:latin typeface="Ramabhadra" panose="02000600000000000000" pitchFamily="2" charset="0"/>
+                  <a:cs typeface="Ramabhadra" panose="02000600000000000000" pitchFamily="2" charset="0"/>
+                </a:rPr>
+                <a:t>హల్లెలూయా</a:t>
+              </a:r>
+            </a:p>
+            <a:p>
+              <a:endParaRPr lang="te-IN" sz="2200" dirty="0">
                 <a:latin typeface="Ramabhadra" panose="02000600000000000000" pitchFamily="2" charset="0"/>
                 <a:cs typeface="Ramabhadra" panose="02000600000000000000" pitchFamily="2" charset="0"/>
               </a:endParaRPr>
             </a:p>
             <a:p>
-              <a:endParaRPr lang="te-IN" sz="1650" dirty="0">
+              <a:r>
+                <a:rPr lang="te-IN" sz="2200" dirty="0">
+                  <a:latin typeface="Ramabhadra" panose="02000600000000000000" pitchFamily="2" charset="0"/>
+                  <a:cs typeface="Ramabhadra" panose="02000600000000000000" pitchFamily="2" charset="0"/>
+                </a:rPr>
+                <a:t>పాటలతో నడిపించుమా –</a:t>
+              </a:r>
+              <a:endParaRPr lang="en-IN" sz="2200" dirty="0">
                 <a:latin typeface="Ramabhadra" panose="02000600000000000000" pitchFamily="2" charset="0"/>
                 <a:cs typeface="Ramabhadra" panose="02000600000000000000" pitchFamily="2" charset="0"/>
               </a:endParaRPr>
             </a:p>
             <a:p>
               <a:r>
-                <a:rPr lang="te-IN" sz="1650" dirty="0">
-                  <a:latin typeface="Ramabhadra" panose="02000600000000000000" pitchFamily="2" charset="0"/>
-                  <a:cs typeface="Ramabhadra" panose="02000600000000000000" pitchFamily="2" charset="0"/>
-                </a:rPr>
-                <a:t>యే తెగులు సమీపించనీయక – యే కీడైన దరిచేరనీయక</a:t>
-              </a:r>
-              <a:br>
-                <a:rPr lang="te-IN" sz="1650" dirty="0">
-                  <a:latin typeface="Ramabhadra" panose="02000600000000000000" pitchFamily="2" charset="0"/>
-                  <a:cs typeface="Ramabhadra" panose="02000600000000000000" pitchFamily="2" charset="0"/>
-                </a:rPr>
-              </a:br>
-              <a:r>
-                <a:rPr lang="te-IN" sz="1650" dirty="0">
-                  <a:latin typeface="Ramabhadra" panose="02000600000000000000" pitchFamily="2" charset="0"/>
-                  <a:cs typeface="Ramabhadra" panose="02000600000000000000" pitchFamily="2" charset="0"/>
-                </a:rPr>
-                <a:t>ఆపదలన్ని తొలగే వరకు – ఆత్మలో నెమ్మది కలిగే వరకు (2)</a:t>
-              </a:r>
-              <a:br>
-                <a:rPr lang="te-IN" sz="1650" dirty="0">
-                  <a:latin typeface="Ramabhadra" panose="02000600000000000000" pitchFamily="2" charset="0"/>
-                  <a:cs typeface="Ramabhadra" panose="02000600000000000000" pitchFamily="2" charset="0"/>
-                </a:rPr>
-              </a:br>
-              <a:r>
-                <a:rPr lang="te-IN" sz="1650" dirty="0">
-                  <a:latin typeface="Ramabhadra" panose="02000600000000000000" pitchFamily="2" charset="0"/>
-                  <a:cs typeface="Ramabhadra" panose="02000600000000000000" pitchFamily="2" charset="0"/>
-                </a:rPr>
-                <a:t>నా భారము మోసి – బాసటగా నిలిచి – ఆదరించితివి</a:t>
-              </a:r>
-              <a:br>
-                <a:rPr lang="te-IN" sz="1650" dirty="0">
-                  <a:latin typeface="Ramabhadra" panose="02000600000000000000" pitchFamily="2" charset="0"/>
-                  <a:cs typeface="Ramabhadra" panose="02000600000000000000" pitchFamily="2" charset="0"/>
-                </a:rPr>
-              </a:br>
-              <a:r>
-                <a:rPr lang="te-IN" sz="1650" dirty="0">
-                  <a:latin typeface="Ramabhadra" panose="02000600000000000000" pitchFamily="2" charset="0"/>
-                  <a:cs typeface="Ramabhadra" panose="02000600000000000000" pitchFamily="2" charset="0"/>
-                </a:rPr>
-                <a:t>ఈ స్తుతి మహిమలు నీకే – చెల్లించెదను – జీవితాంతము</a:t>
-              </a:r>
-              <a:endParaRPr lang="en-IN" sz="1650" dirty="0">
+                <a:rPr lang="te-IN" sz="2200" dirty="0">
+                  <a:latin typeface="Ramabhadra" panose="02000600000000000000" pitchFamily="2" charset="0"/>
+                  <a:cs typeface="Ramabhadra" panose="02000600000000000000" pitchFamily="2" charset="0"/>
+                </a:rPr>
+                <a:t>ప్రార్థనతో నడిపించుమా</a:t>
+              </a:r>
+            </a:p>
+            <a:p>
+              <a:r>
+                <a:rPr lang="te-IN" sz="2200" dirty="0">
+                  <a:latin typeface="Ramabhadra" panose="02000600000000000000" pitchFamily="2" charset="0"/>
+                  <a:cs typeface="Ramabhadra" panose="02000600000000000000" pitchFamily="2" charset="0"/>
+                </a:rPr>
+                <a:t>వాక్యముతో నడిపించుమా</a:t>
+              </a:r>
+              <a:r>
+                <a:rPr lang="en-IN" sz="2200" dirty="0">
+                  <a:latin typeface="Ramabhadra" panose="02000600000000000000" pitchFamily="2" charset="0"/>
+                  <a:cs typeface="Ramabhadra" panose="02000600000000000000" pitchFamily="2" charset="0"/>
+                </a:rPr>
+                <a:t> - </a:t>
+              </a:r>
+            </a:p>
+            <a:p>
+              <a:r>
+                <a:rPr lang="te-IN" sz="2200" dirty="0">
+                  <a:latin typeface="Ramabhadra" panose="02000600000000000000" pitchFamily="2" charset="0"/>
+                  <a:cs typeface="Ramabhadra" panose="02000600000000000000" pitchFamily="2" charset="0"/>
+                </a:rPr>
+                <a:t>సాక్షముతో నడిపించుమా</a:t>
+              </a:r>
+              <a:r>
+                <a:rPr lang="en-IN" sz="2200" dirty="0">
+                  <a:latin typeface="Ramabhadra" panose="02000600000000000000" pitchFamily="2" charset="0"/>
+                  <a:cs typeface="Ramabhadra" panose="02000600000000000000" pitchFamily="2" charset="0"/>
+                </a:rPr>
+                <a:t> </a:t>
+              </a:r>
+              <a:r>
+                <a:rPr lang="te-IN" sz="2200" dirty="0">
+                  <a:latin typeface="Ramabhadra" panose="02000600000000000000" pitchFamily="2" charset="0"/>
+                  <a:cs typeface="Ramabhadra" panose="02000600000000000000" pitchFamily="2" charset="0"/>
+                </a:rPr>
+                <a:t>॥ దేవా</a:t>
+              </a:r>
+              <a:r>
+                <a:rPr lang="en-IN" sz="2200" dirty="0">
+                  <a:latin typeface="Ramabhadra" panose="02000600000000000000" pitchFamily="2" charset="0"/>
+                  <a:cs typeface="Ramabhadra" panose="02000600000000000000" pitchFamily="2" charset="0"/>
+                </a:rPr>
+                <a:t> </a:t>
+              </a:r>
+              <a:r>
+                <a:rPr lang="te-IN" sz="2200" dirty="0">
+                  <a:latin typeface="Ramabhadra" panose="02000600000000000000" pitchFamily="2" charset="0"/>
+                  <a:cs typeface="Ramabhadra" panose="02000600000000000000" pitchFamily="2" charset="0"/>
+                </a:rPr>
+                <a:t>॥</a:t>
+              </a:r>
+            </a:p>
+            <a:p>
+              <a:endParaRPr lang="te-IN" sz="2200" dirty="0">
                 <a:latin typeface="Ramabhadra" panose="02000600000000000000" pitchFamily="2" charset="0"/>
                 <a:cs typeface="Ramabhadra" panose="02000600000000000000" pitchFamily="2" charset="0"/>
               </a:endParaRPr>
             </a:p>
             <a:p>
-              <a:endParaRPr lang="te-IN" sz="1650" dirty="0">
+              <a:r>
+                <a:rPr lang="te-IN" sz="2200" dirty="0">
+                  <a:latin typeface="Ramabhadra" panose="02000600000000000000" pitchFamily="2" charset="0"/>
+                  <a:cs typeface="Ramabhadra" panose="02000600000000000000" pitchFamily="2" charset="0"/>
+                </a:rPr>
+                <a:t>కాపరియై నడిపించుమా –</a:t>
+              </a:r>
+              <a:endParaRPr lang="en-IN" sz="2200" dirty="0">
                 <a:latin typeface="Ramabhadra" panose="02000600000000000000" pitchFamily="2" charset="0"/>
                 <a:cs typeface="Ramabhadra" panose="02000600000000000000" pitchFamily="2" charset="0"/>
               </a:endParaRPr>
             </a:p>
             <a:p>
               <a:r>
-                <a:rPr lang="te-IN" sz="1650" dirty="0">
-                  <a:latin typeface="Ramabhadra" panose="02000600000000000000" pitchFamily="2" charset="0"/>
-                  <a:cs typeface="Ramabhadra" panose="02000600000000000000" pitchFamily="2" charset="0"/>
-                </a:rPr>
-                <a:t>నాకు ఎత్తైన కోటవు నీవే – నన్ను కాపాడు కేడెము నీవే</a:t>
-              </a:r>
-              <a:br>
-                <a:rPr lang="te-IN" sz="1650" dirty="0">
-                  <a:latin typeface="Ramabhadra" panose="02000600000000000000" pitchFamily="2" charset="0"/>
-                  <a:cs typeface="Ramabhadra" panose="02000600000000000000" pitchFamily="2" charset="0"/>
-                </a:rPr>
-              </a:br>
-              <a:r>
-                <a:rPr lang="te-IN" sz="1650" dirty="0">
-                  <a:latin typeface="Ramabhadra" panose="02000600000000000000" pitchFamily="2" charset="0"/>
-                  <a:cs typeface="Ramabhadra" panose="02000600000000000000" pitchFamily="2" charset="0"/>
-                </a:rPr>
-                <a:t>ఆశ్రయమైన బండవు నీవే –</a:t>
-              </a:r>
-              <a:endParaRPr lang="en-US" sz="1650" dirty="0">
+                <a:rPr lang="te-IN" sz="2200" dirty="0">
+                  <a:latin typeface="Ramabhadra" panose="02000600000000000000" pitchFamily="2" charset="0"/>
+                  <a:cs typeface="Ramabhadra" panose="02000600000000000000" pitchFamily="2" charset="0"/>
+                </a:rPr>
+                <a:t>ఊపిరి నీవై నడిపించుమా</a:t>
+              </a:r>
+            </a:p>
+            <a:p>
+              <a:r>
+                <a:rPr lang="te-IN" sz="2200" dirty="0">
+                  <a:latin typeface="Ramabhadra" panose="02000600000000000000" pitchFamily="2" charset="0"/>
+                  <a:cs typeface="Ramabhadra" panose="02000600000000000000" pitchFamily="2" charset="0"/>
+                </a:rPr>
+                <a:t>యాజకుడావై నడిపించుమా –</a:t>
+              </a:r>
+              <a:endParaRPr lang="en-IN" sz="2200" dirty="0">
                 <a:latin typeface="Ramabhadra" panose="02000600000000000000" pitchFamily="2" charset="0"/>
                 <a:cs typeface="Ramabhadra" panose="02000600000000000000" pitchFamily="2" charset="0"/>
               </a:endParaRPr>
             </a:p>
             <a:p>
               <a:r>
-                <a:rPr lang="te-IN" sz="1650" dirty="0">
-                  <a:latin typeface="Ramabhadra" panose="02000600000000000000" pitchFamily="2" charset="0"/>
-                  <a:cs typeface="Ramabhadra" panose="02000600000000000000" pitchFamily="2" charset="0"/>
-                </a:rPr>
-                <a:t>శాశ్వత కృపకాధారము నీవే (2)</a:t>
-              </a:r>
-              <a:br>
-                <a:rPr lang="te-IN" sz="1650" dirty="0">
-                  <a:latin typeface="Ramabhadra" panose="02000600000000000000" pitchFamily="2" charset="0"/>
-                  <a:cs typeface="Ramabhadra" panose="02000600000000000000" pitchFamily="2" charset="0"/>
-                </a:rPr>
-              </a:br>
-              <a:r>
-                <a:rPr lang="te-IN" sz="1650" dirty="0">
-                  <a:latin typeface="Ramabhadra" panose="02000600000000000000" pitchFamily="2" charset="0"/>
-                  <a:cs typeface="Ramabhadra" panose="02000600000000000000" pitchFamily="2" charset="0"/>
-                </a:rPr>
-                <a:t>నా ప్రతిక్షణమును నీవు – దీవెనగా మార్చి – నడిపించుచున్నావు</a:t>
-              </a:r>
-              <a:br>
-                <a:rPr lang="te-IN" sz="1650" dirty="0">
-                  <a:latin typeface="Ramabhadra" panose="02000600000000000000" pitchFamily="2" charset="0"/>
-                  <a:cs typeface="Ramabhadra" panose="02000600000000000000" pitchFamily="2" charset="0"/>
-                </a:rPr>
-              </a:br>
-              <a:r>
-                <a:rPr lang="te-IN" sz="1650" dirty="0">
-                  <a:latin typeface="Ramabhadra" panose="02000600000000000000" pitchFamily="2" charset="0"/>
-                  <a:cs typeface="Ramabhadra" panose="02000600000000000000" pitchFamily="2" charset="0"/>
-                </a:rPr>
-                <a:t>ఈ స్తుతి మహిమలు నీకే – చెల్లించెదను – జీవితాంతము</a:t>
-              </a:r>
-              <a:endParaRPr lang="en-IN" sz="1650" dirty="0">
+                <a:rPr lang="te-IN" sz="2200" dirty="0">
+                  <a:latin typeface="Ramabhadra" panose="02000600000000000000" pitchFamily="2" charset="0"/>
+                  <a:cs typeface="Ramabhadra" panose="02000600000000000000" pitchFamily="2" charset="0"/>
+                </a:rPr>
+                <a:t>భోదకుడావై భోదించుమా ॥ దేవా</a:t>
+              </a:r>
+              <a:r>
+                <a:rPr lang="en-IN" sz="2200" dirty="0">
+                  <a:latin typeface="Ramabhadra" panose="02000600000000000000" pitchFamily="2" charset="0"/>
+                  <a:cs typeface="Ramabhadra" panose="02000600000000000000" pitchFamily="2" charset="0"/>
+                </a:rPr>
+                <a:t> </a:t>
+              </a:r>
+              <a:r>
+                <a:rPr lang="te-IN" sz="2200" dirty="0">
+                  <a:latin typeface="Ramabhadra" panose="02000600000000000000" pitchFamily="2" charset="0"/>
+                  <a:cs typeface="Ramabhadra" panose="02000600000000000000" pitchFamily="2" charset="0"/>
+                </a:rPr>
+                <a:t>॥</a:t>
+              </a:r>
+            </a:p>
+            <a:p>
+              <a:endParaRPr lang="te-IN" sz="2200" dirty="0">
                 <a:latin typeface="Ramabhadra" panose="02000600000000000000" pitchFamily="2" charset="0"/>
                 <a:cs typeface="Ramabhadra" panose="02000600000000000000" pitchFamily="2" charset="0"/>
               </a:endParaRPr>
             </a:p>
             <a:p>
-              <a:endParaRPr lang="te-IN" sz="1650" dirty="0">
+              <a:r>
+                <a:rPr lang="te-IN" sz="2200" dirty="0">
+                  <a:latin typeface="Ramabhadra" panose="02000600000000000000" pitchFamily="2" charset="0"/>
+                  <a:cs typeface="Ramabhadra" panose="02000600000000000000" pitchFamily="2" charset="0"/>
+                </a:rPr>
+                <a:t>మార్గము నీవై నడిపించుమా –</a:t>
+              </a:r>
+              <a:endParaRPr lang="en-IN" sz="2200" dirty="0">
                 <a:latin typeface="Ramabhadra" panose="02000600000000000000" pitchFamily="2" charset="0"/>
                 <a:cs typeface="Ramabhadra" panose="02000600000000000000" pitchFamily="2" charset="0"/>
               </a:endParaRPr>
             </a:p>
             <a:p>
               <a:r>
-                <a:rPr lang="te-IN" sz="1650" dirty="0">
-                  <a:latin typeface="Ramabhadra" panose="02000600000000000000" pitchFamily="2" charset="0"/>
-                  <a:cs typeface="Ramabhadra" panose="02000600000000000000" pitchFamily="2" charset="0"/>
-                </a:rPr>
-                <a:t>నీ కృప తప్ప వేరొకటి లేదయా –</a:t>
-              </a:r>
-              <a:endParaRPr lang="en-US" sz="1650" dirty="0">
+                <a:rPr lang="te-IN" sz="2200" dirty="0">
+                  <a:latin typeface="Ramabhadra" panose="02000600000000000000" pitchFamily="2" charset="0"/>
+                  <a:cs typeface="Ramabhadra" panose="02000600000000000000" pitchFamily="2" charset="0"/>
+                </a:rPr>
+                <a:t>సత్యమునీవై నడిపించుమా</a:t>
+              </a:r>
+            </a:p>
+            <a:p>
+              <a:r>
+                <a:rPr lang="te-IN" sz="2200" dirty="0">
+                  <a:latin typeface="Ramabhadra" panose="02000600000000000000" pitchFamily="2" charset="0"/>
+                  <a:cs typeface="Ramabhadra" panose="02000600000000000000" pitchFamily="2" charset="0"/>
+                </a:rPr>
+                <a:t>జీవము నీవై నడిపించుమా –</a:t>
+              </a:r>
+              <a:endParaRPr lang="en-IN" sz="2200" dirty="0">
                 <a:latin typeface="Ramabhadra" panose="02000600000000000000" pitchFamily="2" charset="0"/>
                 <a:cs typeface="Ramabhadra" panose="02000600000000000000" pitchFamily="2" charset="0"/>
               </a:endParaRPr>
             </a:p>
             <a:p>
               <a:r>
-                <a:rPr lang="te-IN" sz="1650" dirty="0">
-                  <a:latin typeface="Ramabhadra" panose="02000600000000000000" pitchFamily="2" charset="0"/>
-                  <a:cs typeface="Ramabhadra" panose="02000600000000000000" pitchFamily="2" charset="0"/>
-                </a:rPr>
-                <a:t>నీ మనసులో నేనుంటే చాలయా</a:t>
-              </a:r>
-              <a:br>
-                <a:rPr lang="te-IN" sz="1650" dirty="0">
-                  <a:latin typeface="Ramabhadra" panose="02000600000000000000" pitchFamily="2" charset="0"/>
-                  <a:cs typeface="Ramabhadra" panose="02000600000000000000" pitchFamily="2" charset="0"/>
-                </a:rPr>
-              </a:br>
-              <a:r>
-                <a:rPr lang="te-IN" sz="1650" dirty="0">
-                  <a:latin typeface="Ramabhadra" panose="02000600000000000000" pitchFamily="2" charset="0"/>
-                  <a:cs typeface="Ramabhadra" panose="02000600000000000000" pitchFamily="2" charset="0"/>
-                </a:rPr>
-                <a:t>బహు కాలముగా నేనున్న స్థితిలో –</a:t>
-              </a:r>
-              <a:endParaRPr lang="en-US" sz="1650" dirty="0">
-                <a:latin typeface="Ramabhadra" panose="02000600000000000000" pitchFamily="2" charset="0"/>
-                <a:cs typeface="Ramabhadra" panose="02000600000000000000" pitchFamily="2" charset="0"/>
-              </a:endParaRPr>
-            </a:p>
-            <a:p>
-              <a:r>
-                <a:rPr lang="te-IN" sz="1650" dirty="0">
-                  <a:latin typeface="Ramabhadra" panose="02000600000000000000" pitchFamily="2" charset="0"/>
-                  <a:cs typeface="Ramabhadra" panose="02000600000000000000" pitchFamily="2" charset="0"/>
-                </a:rPr>
-                <a:t>నీ కృప నా యెడ చాలునంటివే (2)</a:t>
-              </a:r>
-              <a:br>
-                <a:rPr lang="te-IN" sz="1650" dirty="0">
-                  <a:latin typeface="Ramabhadra" panose="02000600000000000000" pitchFamily="2" charset="0"/>
-                  <a:cs typeface="Ramabhadra" panose="02000600000000000000" pitchFamily="2" charset="0"/>
-                </a:rPr>
-              </a:br>
-              <a:r>
-                <a:rPr lang="te-IN" sz="1650" dirty="0">
-                  <a:latin typeface="Ramabhadra" panose="02000600000000000000" pitchFamily="2" charset="0"/>
-                  <a:cs typeface="Ramabhadra" panose="02000600000000000000" pitchFamily="2" charset="0"/>
-                </a:rPr>
-                <a:t>నీ అరచేతిలో నను – చెక్కుకుంటివి – నాకేమి కొదువ</a:t>
-              </a:r>
-              <a:br>
-                <a:rPr lang="te-IN" sz="1650" dirty="0">
-                  <a:latin typeface="Ramabhadra" panose="02000600000000000000" pitchFamily="2" charset="0"/>
-                  <a:cs typeface="Ramabhadra" panose="02000600000000000000" pitchFamily="2" charset="0"/>
-                </a:rPr>
-              </a:br>
-              <a:r>
-                <a:rPr lang="te-IN" sz="1650" dirty="0">
-                  <a:latin typeface="Ramabhadra" panose="02000600000000000000" pitchFamily="2" charset="0"/>
-                  <a:cs typeface="Ramabhadra" panose="02000600000000000000" pitchFamily="2" charset="0"/>
-                </a:rPr>
-                <a:t>ఈ స్తుతి మహిమలు నీకే చెల్లించెదను జీవితాంతము</a:t>
+                <a:rPr lang="te-IN" sz="2200" dirty="0">
+                  <a:latin typeface="Ramabhadra" panose="02000600000000000000" pitchFamily="2" charset="0"/>
+                  <a:cs typeface="Ramabhadra" panose="02000600000000000000" pitchFamily="2" charset="0"/>
+                </a:rPr>
+                <a:t>నిత్యత్వముతో నడిపించుమా ॥ దేవా</a:t>
+              </a:r>
+              <a:r>
+                <a:rPr lang="en-IN" sz="2200" dirty="0">
+                  <a:latin typeface="Ramabhadra" panose="02000600000000000000" pitchFamily="2" charset="0"/>
+                  <a:cs typeface="Ramabhadra" panose="02000600000000000000" pitchFamily="2" charset="0"/>
+                </a:rPr>
+                <a:t> </a:t>
+              </a:r>
+              <a:r>
+                <a:rPr lang="te-IN" sz="2200" dirty="0">
+                  <a:latin typeface="Ramabhadra" panose="02000600000000000000" pitchFamily="2" charset="0"/>
+                  <a:cs typeface="Ramabhadra" panose="02000600000000000000" pitchFamily="2" charset="0"/>
+                </a:rPr>
+                <a:t>॥</a:t>
               </a:r>
             </a:p>
           </p:txBody>
@@ -3526,8 +3503,8 @@
           </p:nvSpPr>
           <p:spPr>
             <a:xfrm>
-              <a:off x="264399" y="749975"/>
-              <a:ext cx="4544669" cy="4451219"/>
+              <a:off x="256993" y="716955"/>
+              <a:ext cx="4544669" cy="5436104"/>
             </a:xfrm>
             <a:prstGeom prst="rect">
               <a:avLst/>
@@ -3550,7 +3527,7 @@
                   <a:latin typeface="Ramabhadra" panose="02000600000000000000" pitchFamily="2" charset="0"/>
                   <a:cs typeface="Ramabhadra" panose="02000600000000000000" pitchFamily="2" charset="0"/>
                 </a:rPr>
-                <a:t>సన్నుతించెదను – దయాళుడవు నీవని</a:t>
+                <a:t>నీతోనే ఉండుటయే</a:t>
               </a:r>
             </a:p>
             <a:p>
@@ -3564,26 +3541,8 @@
                   <a:latin typeface="Ramabhadra" panose="02000600000000000000" pitchFamily="2" charset="0"/>
                   <a:cs typeface="Ramabhadra" panose="02000600000000000000" pitchFamily="2" charset="0"/>
                 </a:rPr>
-                <a:t>యెహోవా నీవే – </a:t>
-              </a:r>
-              <a:r>
-                <a:rPr lang="en-US" sz="2400" dirty="0">
-                  <a:latin typeface="Ramabhadra" panose="02000600000000000000" pitchFamily="2" charset="0"/>
-                  <a:cs typeface="Ramabhadra" panose="02000600000000000000" pitchFamily="2" charset="0"/>
-                </a:rPr>
-                <a:t> </a:t>
-              </a:r>
-              <a:r>
-                <a:rPr lang="te-IN" sz="2400" dirty="0">
-                  <a:latin typeface="Ramabhadra" panose="02000600000000000000" pitchFamily="2" charset="0"/>
-                  <a:cs typeface="Ramabhadra" panose="02000600000000000000" pitchFamily="2" charset="0"/>
-                </a:rPr>
-                <a:t>దయాళుడవని</a:t>
-              </a:r>
-              <a:endParaRPr lang="en-US" sz="2400" dirty="0">
-                <a:latin typeface="Ramabhadra" panose="02000600000000000000" pitchFamily="2" charset="0"/>
-                <a:cs typeface="Ramabhadra" panose="02000600000000000000" pitchFamily="2" charset="0"/>
-              </a:endParaRPr>
+                <a:t>నా జీవిత వాంచయ్యా</a:t>
+              </a:r>
             </a:p>
             <a:p>
               <a:pPr>
@@ -3596,7 +3555,49 @@
                   <a:latin typeface="Ramabhadra" panose="02000600000000000000" pitchFamily="2" charset="0"/>
                   <a:cs typeface="Ramabhadra" panose="02000600000000000000" pitchFamily="2" charset="0"/>
                 </a:rPr>
-                <a:t>నిను సన్నుతించెదను - 2</a:t>
+                <a:t>నీ చిత్తం నెరవేర్చుటయే</a:t>
+              </a:r>
+            </a:p>
+            <a:p>
+              <a:pPr>
+                <a:lnSpc>
+                  <a:spcPts val="2600"/>
+                </a:lnSpc>
+              </a:pPr>
+              <a:r>
+                <a:rPr lang="te-IN" sz="2400" dirty="0">
+                  <a:latin typeface="Ramabhadra" panose="02000600000000000000" pitchFamily="2" charset="0"/>
+                  <a:cs typeface="Ramabhadra" panose="02000600000000000000" pitchFamily="2" charset="0"/>
+                </a:rPr>
+                <a:t>నా హృదయ తపనయ్యా (2)</a:t>
+              </a:r>
+            </a:p>
+            <a:p>
+              <a:pPr>
+                <a:lnSpc>
+                  <a:spcPts val="2600"/>
+                </a:lnSpc>
+              </a:pPr>
+              <a:r>
+                <a:rPr lang="te-IN" sz="2400" dirty="0">
+                  <a:latin typeface="Ramabhadra" panose="02000600000000000000" pitchFamily="2" charset="0"/>
+                  <a:cs typeface="Ramabhadra" panose="02000600000000000000" pitchFamily="2" charset="0"/>
+                </a:rPr>
+                <a:t>యేసయ్యా నిన్నే కదా</a:t>
+              </a:r>
+            </a:p>
+            <a:p>
+              <a:pPr>
+                <a:lnSpc>
+                  <a:spcPts val="2600"/>
+                </a:lnSpc>
+              </a:pPr>
+              <a:r>
+                <a:rPr lang="te-IN" sz="2400" dirty="0">
+                  <a:latin typeface="Ramabhadra" panose="02000600000000000000" pitchFamily="2" charset="0"/>
+                  <a:cs typeface="Ramabhadra" panose="02000600000000000000" pitchFamily="2" charset="0"/>
+                </a:rPr>
+                <a:t>నా ముందు నిలిపేను (2)</a:t>
               </a:r>
             </a:p>
             <a:p>
@@ -3621,12 +3622,8 @@
                   <a:latin typeface="Ramabhadra" panose="02000600000000000000" pitchFamily="2" charset="0"/>
                   <a:cs typeface="Ramabhadra" panose="02000600000000000000" pitchFamily="2" charset="0"/>
                 </a:rPr>
-                <a:t>సర్వ సత్యములో నను నీవు నడిపి</a:t>
-              </a:r>
-              <a:endParaRPr lang="en-US" sz="2400" dirty="0">
-                <a:latin typeface="Ramabhadra" panose="02000600000000000000" pitchFamily="2" charset="0"/>
-                <a:cs typeface="Ramabhadra" panose="02000600000000000000" pitchFamily="2" charset="0"/>
-              </a:endParaRPr>
+                <a:t>కరుణయు కృపయు నిరంతర శాంతి</a:t>
+              </a:r>
             </a:p>
             <a:p>
               <a:pPr>
@@ -3639,26 +3636,8 @@
                   <a:latin typeface="Ramabhadra" panose="02000600000000000000" pitchFamily="2" charset="0"/>
                   <a:cs typeface="Ramabhadra" panose="02000600000000000000" pitchFamily="2" charset="0"/>
                 </a:rPr>
-                <a:t>ఆదరించిన –</a:t>
-              </a:r>
-              <a:r>
-                <a:rPr lang="en-US" sz="2400" dirty="0">
-                  <a:latin typeface="Ramabhadra" panose="02000600000000000000" pitchFamily="2" charset="0"/>
-                  <a:cs typeface="Ramabhadra" panose="02000600000000000000" pitchFamily="2" charset="0"/>
-                </a:rPr>
-                <a:t> </a:t>
-              </a:r>
-              <a:r>
-                <a:rPr lang="te-IN" sz="2400" dirty="0">
-                  <a:latin typeface="Ramabhadra" panose="02000600000000000000" pitchFamily="2" charset="0"/>
-                  <a:cs typeface="Ramabhadra" panose="02000600000000000000" pitchFamily="2" charset="0"/>
-                </a:rPr>
-                <a:t>పరిశుద్ధాత్ముడా</a:t>
-              </a:r>
-              <a:endParaRPr lang="en-US" sz="2400" dirty="0">
-                <a:latin typeface="Ramabhadra" panose="02000600000000000000" pitchFamily="2" charset="0"/>
-                <a:cs typeface="Ramabhadra" panose="02000600000000000000" pitchFamily="2" charset="0"/>
-              </a:endParaRPr>
+                <a:t>వినయము ఉన్నవాడా(2)</a:t>
+              </a:r>
             </a:p>
             <a:p>
               <a:pPr>
@@ -3671,26 +3650,8 @@
                   <a:latin typeface="Ramabhadra" panose="02000600000000000000" pitchFamily="2" charset="0"/>
                   <a:cs typeface="Ramabhadra" panose="02000600000000000000" pitchFamily="2" charset="0"/>
                 </a:rPr>
-                <a:t>కృపాధారము నీవెగా –</a:t>
-              </a:r>
-              <a:r>
-                <a:rPr lang="en-US" sz="2400" dirty="0">
-                  <a:latin typeface="Ramabhadra" panose="02000600000000000000" pitchFamily="2" charset="0"/>
-                  <a:cs typeface="Ramabhadra" panose="02000600000000000000" pitchFamily="2" charset="0"/>
-                </a:rPr>
-                <a:t> </a:t>
-              </a:r>
-              <a:r>
-                <a:rPr lang="te-IN" sz="2400" dirty="0">
-                  <a:latin typeface="Ramabhadra" panose="02000600000000000000" pitchFamily="2" charset="0"/>
-                  <a:cs typeface="Ramabhadra" panose="02000600000000000000" pitchFamily="2" charset="0"/>
-                </a:rPr>
-                <a:t>షాలేమురాజా</a:t>
-              </a:r>
-              <a:endParaRPr lang="en-US" sz="2400" dirty="0">
-                <a:latin typeface="Ramabhadra" panose="02000600000000000000" pitchFamily="2" charset="0"/>
-                <a:cs typeface="Ramabhadra" panose="02000600000000000000" pitchFamily="2" charset="0"/>
-              </a:endParaRPr>
+                <a:t>నా జీవితం.. నశియింపక.. (2)</a:t>
+              </a:r>
             </a:p>
             <a:p>
               <a:pPr>
@@ -3703,7 +3664,7 @@
                   <a:latin typeface="Ramabhadra" panose="02000600000000000000" pitchFamily="2" charset="0"/>
                   <a:cs typeface="Ramabhadra" panose="02000600000000000000" pitchFamily="2" charset="0"/>
                 </a:rPr>
-                <a:t>నిను సన్మానించెదను</a:t>
+                <a:t>కాపాడువాడా... నా కాపరి... (2)</a:t>
               </a:r>
             </a:p>
             <a:p>
@@ -3728,7 +3689,7 @@
                   <a:latin typeface="Ramabhadra" panose="02000600000000000000" pitchFamily="2" charset="0"/>
                   <a:cs typeface="Ramabhadra" panose="02000600000000000000" pitchFamily="2" charset="0"/>
                 </a:rPr>
-                <a:t>నీ కను చూపుల పరిధిలోనన్ను నిలిపి</a:t>
+                <a:t>నా కొరకు అన్నియు చేయువాడా</a:t>
               </a:r>
             </a:p>
             <a:p>
@@ -3742,7 +3703,7 @@
                   <a:latin typeface="Ramabhadra" panose="02000600000000000000" pitchFamily="2" charset="0"/>
                   <a:cs typeface="Ramabhadra" panose="02000600000000000000" pitchFamily="2" charset="0"/>
                 </a:rPr>
-                <a:t>చూపితివా నీ వాత్సల్యమును</a:t>
+                <a:t>చేసి ముగించువాడా (2)</a:t>
               </a:r>
             </a:p>
             <a:p>
@@ -3756,12 +3717,8 @@
                   <a:latin typeface="Ramabhadra" panose="02000600000000000000" pitchFamily="2" charset="0"/>
                   <a:cs typeface="Ramabhadra" panose="02000600000000000000" pitchFamily="2" charset="0"/>
                 </a:rPr>
-                <a:t>కృపానిధివి నీవెగా - నా యేసురాజా</a:t>
-              </a:r>
-              <a:endParaRPr lang="en-US" sz="2400" dirty="0">
-                <a:latin typeface="Ramabhadra" panose="02000600000000000000" pitchFamily="2" charset="0"/>
-                <a:cs typeface="Ramabhadra" panose="02000600000000000000" pitchFamily="2" charset="0"/>
-              </a:endParaRPr>
+                <a:t>నా బరువు.. నా బాధ్యత.. (2)</a:t>
+              </a:r>
             </a:p>
             <a:p>
               <a:pPr>
@@ -3774,7 +3731,7 @@
                   <a:latin typeface="Ramabhadra" panose="02000600000000000000" pitchFamily="2" charset="0"/>
                   <a:cs typeface="Ramabhadra" panose="02000600000000000000" pitchFamily="2" charset="0"/>
                 </a:rPr>
-                <a:t>నిను సన్మానించెదను</a:t>
+                <a:t>నీ పాద చెంత... నుంచితివి... (2)</a:t>
               </a:r>
             </a:p>
           </p:txBody>
@@ -3887,9 +3844,9 @@
         <p:grpSpPr>
           <a:xfrm>
             <a:off x="160868" y="182032"/>
-            <a:ext cx="5506736" cy="6493935"/>
+            <a:ext cx="5506736" cy="6557188"/>
             <a:chOff x="160868" y="182032"/>
-            <a:chExt cx="5506736" cy="6493935"/>
+            <a:chExt cx="5506736" cy="6557188"/>
           </a:xfrm>
         </p:grpSpPr>
         <p:sp>
@@ -3961,8 +3918,8 @@
           </p:nvSpPr>
           <p:spPr>
             <a:xfrm>
-              <a:off x="271993" y="339800"/>
-              <a:ext cx="5395611" cy="5909310"/>
+              <a:off x="271993" y="183579"/>
+              <a:ext cx="5395611" cy="6555641"/>
             </a:xfrm>
             <a:prstGeom prst="rect">
               <a:avLst/>
@@ -3979,23 +3936,27 @@
                 <a:defRPr/>
               </a:pPr>
               <a:r>
-                <a:rPr lang="te-IN" dirty="0">
-                  <a:latin typeface="Ramabhadra" panose="02000600000000000000" pitchFamily="2" charset="0"/>
-                  <a:cs typeface="Ramabhadra" panose="02000600000000000000" pitchFamily="2" charset="0"/>
-                </a:rPr>
-                <a:t>నీతో నా జీవితం సంతోషమే</a:t>
-              </a:r>
+                <a:rPr lang="te-IN" sz="2000" dirty="0">
+                  <a:latin typeface="Ramabhadra" panose="02000600000000000000" pitchFamily="2" charset="0"/>
+                  <a:cs typeface="Ramabhadra" panose="02000600000000000000" pitchFamily="2" charset="0"/>
+                </a:rPr>
+                <a:t>బహు సౌందర్య సీయోనులో</a:t>
+              </a:r>
+              <a:endParaRPr lang="en-IN" sz="2000" dirty="0">
+                <a:latin typeface="Ramabhadra" panose="02000600000000000000" pitchFamily="2" charset="0"/>
+                <a:cs typeface="Ramabhadra" panose="02000600000000000000" pitchFamily="2" charset="0"/>
+              </a:endParaRPr>
             </a:p>
             <a:p>
               <a:pPr defTabSz="439781">
                 <a:defRPr/>
               </a:pPr>
               <a:r>
-                <a:rPr lang="te-IN" dirty="0">
-                  <a:latin typeface="Ramabhadra" panose="02000600000000000000" pitchFamily="2" charset="0"/>
-                  <a:cs typeface="Ramabhadra" panose="02000600000000000000" pitchFamily="2" charset="0"/>
-                </a:rPr>
-                <a:t>నీతో నా అనుబంధం మాధుర్యమే (2)</a:t>
+                <a:rPr lang="te-IN" sz="2000" dirty="0">
+                  <a:latin typeface="Ramabhadra" panose="02000600000000000000" pitchFamily="2" charset="0"/>
+                  <a:cs typeface="Ramabhadra" panose="02000600000000000000" pitchFamily="2" charset="0"/>
+                </a:rPr>
+                <a:t>స్తుతిసింహాసనాసీనుడా</a:t>
               </a:r>
             </a:p>
             <a:p>
@@ -4003,11 +3964,11 @@
                 <a:defRPr/>
               </a:pPr>
               <a:r>
-                <a:rPr lang="te-IN" dirty="0">
-                  <a:latin typeface="Ramabhadra" panose="02000600000000000000" pitchFamily="2" charset="0"/>
-                  <a:cs typeface="Ramabhadra" panose="02000600000000000000" pitchFamily="2" charset="0"/>
-                </a:rPr>
-                <a:t>నా యేసయ్యా కృప చూపుచున్నావు – వాత్సల్యపూర్ణుడవై</a:t>
+                <a:rPr lang="te-IN" sz="2000" dirty="0">
+                  <a:latin typeface="Ramabhadra" panose="02000600000000000000" pitchFamily="2" charset="0"/>
+                  <a:cs typeface="Ramabhadra" panose="02000600000000000000" pitchFamily="2" charset="0"/>
+                </a:rPr>
+                <a:t>నాయేసయ్య నీ ప్రేమ పరిపూర్ణమై</a:t>
               </a:r>
             </a:p>
             <a:p>
@@ -4015,11 +3976,11 @@
                 <a:defRPr/>
               </a:pPr>
               <a:r>
-                <a:rPr lang="te-IN" dirty="0">
-                  <a:latin typeface="Ramabhadra" panose="02000600000000000000" pitchFamily="2" charset="0"/>
-                  <a:cs typeface="Ramabhadra" panose="02000600000000000000" pitchFamily="2" charset="0"/>
-                </a:rPr>
-                <a:t>నా యేసయ్యా నడిపించుచున్నావు – స్ఫూర్తిప్రదాతవై</a:t>
+                <a:rPr lang="te-IN" sz="2000" dirty="0">
+                  <a:latin typeface="Ramabhadra" panose="02000600000000000000" pitchFamily="2" charset="0"/>
+                  <a:cs typeface="Ramabhadra" panose="02000600000000000000" pitchFamily="2" charset="0"/>
+                </a:rPr>
+                <a:t>నా హృదయాన కొలువాయెనే</a:t>
               </a:r>
             </a:p>
             <a:p>
@@ -4027,11 +3988,25 @@
                 <a:defRPr/>
               </a:pPr>
               <a:r>
-                <a:rPr lang="te-IN" dirty="0">
-                  <a:latin typeface="Ramabhadra" panose="02000600000000000000" pitchFamily="2" charset="0"/>
-                  <a:cs typeface="Ramabhadra" panose="02000600000000000000" pitchFamily="2" charset="0"/>
-                </a:rPr>
-                <a:t>ఆరాధ్యుడా యేసయ్యా...</a:t>
+                <a:rPr lang="te-IN" sz="2000" dirty="0">
+                  <a:latin typeface="Ramabhadra" panose="02000600000000000000" pitchFamily="2" charset="0"/>
+                  <a:cs typeface="Ramabhadra" panose="02000600000000000000" pitchFamily="2" charset="0"/>
+                </a:rPr>
+                <a:t>నను</a:t>
+              </a:r>
+              <a:r>
+                <a:rPr lang="en-IN" sz="2000" dirty="0">
+                  <a:latin typeface="Ramabhadra" panose="02000600000000000000" pitchFamily="2" charset="0"/>
+                  <a:cs typeface="Ramabhadra" panose="02000600000000000000" pitchFamily="2" charset="0"/>
+                </a:rPr>
+                <a:t> </a:t>
+              </a:r>
+              <a:r>
+                <a:rPr lang="te-IN" sz="2000" dirty="0">
+                  <a:latin typeface="Ramabhadra" panose="02000600000000000000" pitchFamily="2" charset="0"/>
+                  <a:cs typeface="Ramabhadra" panose="02000600000000000000" pitchFamily="2" charset="0"/>
+                </a:rPr>
+                <a:t>జీవింపజేసే నీవాక్యమే</a:t>
               </a:r>
             </a:p>
             <a:p>
@@ -4039,18 +4014,18 @@
                 <a:defRPr/>
               </a:pPr>
               <a:r>
-                <a:rPr lang="te-IN" dirty="0">
-                  <a:latin typeface="Ramabhadra" panose="02000600000000000000" pitchFamily="2" charset="0"/>
-                  <a:cs typeface="Ramabhadra" panose="02000600000000000000" pitchFamily="2" charset="0"/>
-                </a:rPr>
-                <a:t>నీతో నా అనుబంధం మాధుర్యమే</a:t>
+                <a:rPr lang="te-IN" sz="2000" dirty="0">
+                  <a:latin typeface="Ramabhadra" panose="02000600000000000000" pitchFamily="2" charset="0"/>
+                  <a:cs typeface="Ramabhadra" panose="02000600000000000000" pitchFamily="2" charset="0"/>
+                </a:rPr>
+                <a:t>నాకిలలోన సంతోషమే</a:t>
               </a:r>
             </a:p>
             <a:p>
               <a:pPr defTabSz="439781">
                 <a:defRPr/>
               </a:pPr>
-              <a:endParaRPr lang="te-IN" dirty="0">
+              <a:endParaRPr lang="te-IN" sz="2000" dirty="0">
                 <a:latin typeface="Ramabhadra" panose="02000600000000000000" pitchFamily="2" charset="0"/>
                 <a:cs typeface="Ramabhadra" panose="02000600000000000000" pitchFamily="2" charset="0"/>
               </a:endParaRPr>
@@ -4060,11 +4035,11 @@
                 <a:defRPr/>
               </a:pPr>
               <a:r>
-                <a:rPr lang="te-IN" dirty="0">
-                  <a:latin typeface="Ramabhadra" panose="02000600000000000000" pitchFamily="2" charset="0"/>
-                  <a:cs typeface="Ramabhadra" panose="02000600000000000000" pitchFamily="2" charset="0"/>
-                </a:rPr>
-                <a:t>భీకర ధ్వనిగలా మార్గమునందు</a:t>
+                <a:rPr lang="te-IN" sz="2000" dirty="0">
+                  <a:latin typeface="Ramabhadra" panose="02000600000000000000" pitchFamily="2" charset="0"/>
+                  <a:cs typeface="Ramabhadra" panose="02000600000000000000" pitchFamily="2" charset="0"/>
+                </a:rPr>
+                <a:t>పరిశుద్ధతలో మహనీయుడవు</a:t>
               </a:r>
             </a:p>
             <a:p>
@@ -4072,11 +4047,11 @@
                 <a:defRPr/>
               </a:pPr>
               <a:r>
-                <a:rPr lang="te-IN" dirty="0">
-                  <a:latin typeface="Ramabhadra" panose="02000600000000000000" pitchFamily="2" charset="0"/>
-                  <a:cs typeface="Ramabhadra" panose="02000600000000000000" pitchFamily="2" charset="0"/>
-                </a:rPr>
-                <a:t>నను స్నేహించిన నా ప్రియుడవు నీవు (2)</a:t>
+                <a:rPr lang="te-IN" sz="2000" dirty="0">
+                  <a:latin typeface="Ramabhadra" panose="02000600000000000000" pitchFamily="2" charset="0"/>
+                  <a:cs typeface="Ramabhadra" panose="02000600000000000000" pitchFamily="2" charset="0"/>
+                </a:rPr>
+                <a:t>నీవంటిదేవుడు జగమునలేడు</a:t>
               </a:r>
             </a:p>
             <a:p>
@@ -4084,30 +4059,48 @@
                 <a:defRPr/>
               </a:pPr>
               <a:r>
-                <a:rPr lang="te-IN" dirty="0">
-                  <a:latin typeface="Ramabhadra" panose="02000600000000000000" pitchFamily="2" charset="0"/>
-                  <a:cs typeface="Ramabhadra" panose="02000600000000000000" pitchFamily="2" charset="0"/>
-                </a:rPr>
-                <a:t>కలనైన మరువను నీవు నడిపిన మార్గం</a:t>
-              </a:r>
+                <a:rPr lang="te-IN" sz="2000" dirty="0">
+                  <a:latin typeface="Ramabhadra" panose="02000600000000000000" pitchFamily="2" charset="0"/>
+                  <a:cs typeface="Ramabhadra" panose="02000600000000000000" pitchFamily="2" charset="0"/>
+                </a:rPr>
+                <a:t>నాలోనిరీక్షణ</a:t>
+              </a:r>
+              <a:r>
+                <a:rPr lang="en-IN" sz="2000" dirty="0">
+                  <a:latin typeface="Ramabhadra" panose="02000600000000000000" pitchFamily="2" charset="0"/>
+                  <a:cs typeface="Ramabhadra" panose="02000600000000000000" pitchFamily="2" charset="0"/>
+                </a:rPr>
+                <a:t> </a:t>
+              </a:r>
+              <a:r>
+                <a:rPr lang="te-IN" sz="2000" dirty="0">
+                  <a:latin typeface="Ramabhadra" panose="02000600000000000000" pitchFamily="2" charset="0"/>
+                  <a:cs typeface="Ramabhadra" panose="02000600000000000000" pitchFamily="2" charset="0"/>
+                </a:rPr>
+                <a:t>నీలో సంరక్షణ</a:t>
+              </a:r>
+              <a:endParaRPr lang="en-IN" sz="2000" dirty="0">
+                <a:latin typeface="Ramabhadra" panose="02000600000000000000" pitchFamily="2" charset="0"/>
+                <a:cs typeface="Ramabhadra" panose="02000600000000000000" pitchFamily="2" charset="0"/>
+              </a:endParaRPr>
             </a:p>
             <a:p>
               <a:pPr defTabSz="439781">
                 <a:defRPr/>
               </a:pPr>
               <a:r>
-                <a:rPr lang="te-IN" dirty="0">
-                  <a:latin typeface="Ramabhadra" panose="02000600000000000000" pitchFamily="2" charset="0"/>
-                  <a:cs typeface="Ramabhadra" panose="02000600000000000000" pitchFamily="2" charset="0"/>
-                </a:rPr>
-                <a:t>క్షణమైన విడువను నీతో సహవాసం (2)</a:t>
+                <a:rPr lang="te-IN" sz="2000" dirty="0">
+                  <a:latin typeface="Ramabhadra" panose="02000600000000000000" pitchFamily="2" charset="0"/>
+                  <a:cs typeface="Ramabhadra" panose="02000600000000000000" pitchFamily="2" charset="0"/>
+                </a:rPr>
+                <a:t>నీకే నాహృదయార్పణ</a:t>
               </a:r>
             </a:p>
             <a:p>
               <a:pPr defTabSz="439781">
                 <a:defRPr/>
               </a:pPr>
-              <a:endParaRPr lang="te-IN" dirty="0">
+              <a:endParaRPr lang="te-IN" sz="2000" dirty="0">
                 <a:latin typeface="Ramabhadra" panose="02000600000000000000" pitchFamily="2" charset="0"/>
                 <a:cs typeface="Ramabhadra" panose="02000600000000000000" pitchFamily="2" charset="0"/>
               </a:endParaRPr>
@@ -4117,11 +4110,11 @@
                 <a:defRPr/>
               </a:pPr>
               <a:r>
-                <a:rPr lang="te-IN" dirty="0">
-                  <a:latin typeface="Ramabhadra" panose="02000600000000000000" pitchFamily="2" charset="0"/>
-                  <a:cs typeface="Ramabhadra" panose="02000600000000000000" pitchFamily="2" charset="0"/>
-                </a:rPr>
-                <a:t>సంతోషమందైనా శ్రమలయందైనను</a:t>
+                <a:rPr lang="te-IN" sz="2000" dirty="0">
+                  <a:latin typeface="Ramabhadra" panose="02000600000000000000" pitchFamily="2" charset="0"/>
+                  <a:cs typeface="Ramabhadra" panose="02000600000000000000" pitchFamily="2" charset="0"/>
+                </a:rPr>
+                <a:t>ఓటమినీడలో క్షేమములేక</a:t>
               </a:r>
             </a:p>
             <a:p>
@@ -4129,11 +4122,11 @@
                 <a:defRPr/>
               </a:pPr>
               <a:r>
-                <a:rPr lang="te-IN" dirty="0">
-                  <a:latin typeface="Ramabhadra" panose="02000600000000000000" pitchFamily="2" charset="0"/>
-                  <a:cs typeface="Ramabhadra" panose="02000600000000000000" pitchFamily="2" charset="0"/>
-                </a:rPr>
-                <a:t>నా స్తుతి కీర్తనకు ఆధారము నీవే (2)</a:t>
+                <a:rPr lang="te-IN" sz="2000" dirty="0">
+                  <a:latin typeface="Ramabhadra" panose="02000600000000000000" pitchFamily="2" charset="0"/>
+                  <a:cs typeface="Ramabhadra" panose="02000600000000000000" pitchFamily="2" charset="0"/>
+                </a:rPr>
+                <a:t>వేదనకలిగిన వేళలయందు</a:t>
               </a:r>
             </a:p>
             <a:p>
@@ -4141,30 +4134,48 @@
                 <a:defRPr/>
               </a:pPr>
               <a:r>
-                <a:rPr lang="te-IN" dirty="0">
-                  <a:latin typeface="Ramabhadra" panose="02000600000000000000" pitchFamily="2" charset="0"/>
-                  <a:cs typeface="Ramabhadra" panose="02000600000000000000" pitchFamily="2" charset="0"/>
-                </a:rPr>
-                <a:t>నిత్యమైన మహిమలో నను నిలుపుటకు</a:t>
-              </a:r>
+                <a:rPr lang="te-IN" sz="2000" dirty="0">
+                  <a:latin typeface="Ramabhadra" panose="02000600000000000000" pitchFamily="2" charset="0"/>
+                  <a:cs typeface="Ramabhadra" panose="02000600000000000000" pitchFamily="2" charset="0"/>
+                </a:rPr>
+                <a:t>నీవు చూపించిన</a:t>
+              </a:r>
+              <a:r>
+                <a:rPr lang="en-IN" sz="2000" dirty="0">
+                  <a:latin typeface="Ramabhadra" panose="02000600000000000000" pitchFamily="2" charset="0"/>
+                  <a:cs typeface="Ramabhadra" panose="02000600000000000000" pitchFamily="2" charset="0"/>
+                </a:rPr>
+                <a:t> </a:t>
+              </a:r>
+              <a:r>
+                <a:rPr lang="te-IN" sz="2000" dirty="0">
+                  <a:latin typeface="Ramabhadra" panose="02000600000000000000" pitchFamily="2" charset="0"/>
+                  <a:cs typeface="Ramabhadra" panose="02000600000000000000" pitchFamily="2" charset="0"/>
+                </a:rPr>
+                <a:t>నీవాత్సల్యమే</a:t>
+              </a:r>
+              <a:endParaRPr lang="en-IN" sz="2000" dirty="0">
+                <a:latin typeface="Ramabhadra" panose="02000600000000000000" pitchFamily="2" charset="0"/>
+                <a:cs typeface="Ramabhadra" panose="02000600000000000000" pitchFamily="2" charset="0"/>
+              </a:endParaRPr>
             </a:p>
             <a:p>
               <a:pPr defTabSz="439781">
                 <a:defRPr/>
               </a:pPr>
               <a:r>
-                <a:rPr lang="te-IN" dirty="0">
-                  <a:latin typeface="Ramabhadra" panose="02000600000000000000" pitchFamily="2" charset="0"/>
-                  <a:cs typeface="Ramabhadra" panose="02000600000000000000" pitchFamily="2" charset="0"/>
-                </a:rPr>
-                <a:t>శుద్ధ సువర్ణముగా నను మార్చుచున్నావు (2)</a:t>
+                <a:rPr lang="te-IN" sz="2000" dirty="0">
+                  <a:latin typeface="Ramabhadra" panose="02000600000000000000" pitchFamily="2" charset="0"/>
+                  <a:cs typeface="Ramabhadra" panose="02000600000000000000" pitchFamily="2" charset="0"/>
+                </a:rPr>
+                <a:t>నాహృదయాన నవజ్ఞాపిక</a:t>
               </a:r>
             </a:p>
             <a:p>
               <a:pPr defTabSz="439781">
                 <a:defRPr/>
               </a:pPr>
-              <a:endParaRPr lang="te-IN" dirty="0">
+              <a:endParaRPr lang="te-IN" sz="2000" dirty="0">
                 <a:latin typeface="Ramabhadra" panose="02000600000000000000" pitchFamily="2" charset="0"/>
                 <a:cs typeface="Ramabhadra" panose="02000600000000000000" pitchFamily="2" charset="0"/>
               </a:endParaRPr>
@@ -4174,11 +4185,25 @@
                 <a:defRPr/>
               </a:pPr>
               <a:r>
-                <a:rPr lang="te-IN" dirty="0">
-                  <a:latin typeface="Ramabhadra" panose="02000600000000000000" pitchFamily="2" charset="0"/>
-                  <a:cs typeface="Ramabhadra" panose="02000600000000000000" pitchFamily="2" charset="0"/>
-                </a:rPr>
-                <a:t>ఆకాశమందుండి ఆశీర్వదించితివి</a:t>
+                <a:rPr lang="te-IN" sz="2000" dirty="0">
+                  <a:latin typeface="Ramabhadra" panose="02000600000000000000" pitchFamily="2" charset="0"/>
+                  <a:cs typeface="Ramabhadra" panose="02000600000000000000" pitchFamily="2" charset="0"/>
+                </a:rPr>
+                <a:t>ఒంటరి</a:t>
+              </a:r>
+              <a:r>
+                <a:rPr lang="en-IN" sz="2000" dirty="0">
+                  <a:latin typeface="Ramabhadra" panose="02000600000000000000" pitchFamily="2" charset="0"/>
+                  <a:cs typeface="Ramabhadra" panose="02000600000000000000" pitchFamily="2" charset="0"/>
+                </a:rPr>
+                <a:t> </a:t>
+              </a:r>
+              <a:r>
+                <a:rPr lang="te-IN" sz="2000" dirty="0">
+                  <a:latin typeface="Ramabhadra" panose="02000600000000000000" pitchFamily="2" charset="0"/>
+                  <a:cs typeface="Ramabhadra" panose="02000600000000000000" pitchFamily="2" charset="0"/>
+                </a:rPr>
+                <a:t>బ్రతుకులో కృంగిన మనసుకు</a:t>
               </a:r>
             </a:p>
             <a:p>
@@ -4186,11 +4211,11 @@
                 <a:defRPr/>
               </a:pPr>
               <a:r>
-                <a:rPr lang="te-IN" dirty="0">
-                  <a:latin typeface="Ramabhadra" panose="02000600000000000000" pitchFamily="2" charset="0"/>
-                  <a:cs typeface="Ramabhadra" panose="02000600000000000000" pitchFamily="2" charset="0"/>
-                </a:rPr>
-                <a:t>అభాగ్యుడనైన నేను కనికరింపబడితిని (2)</a:t>
+                <a:rPr lang="te-IN" sz="2000" dirty="0">
+                  <a:latin typeface="Ramabhadra" panose="02000600000000000000" pitchFamily="2" charset="0"/>
+                  <a:cs typeface="Ramabhadra" panose="02000600000000000000" pitchFamily="2" charset="0"/>
+                </a:rPr>
+                <a:t>చల్లని నీచూపే ఔషధమే</a:t>
               </a:r>
             </a:p>
             <a:p>
@@ -4198,23 +4223,41 @@
                 <a:defRPr/>
               </a:pPr>
               <a:r>
-                <a:rPr lang="te-IN" dirty="0">
-                  <a:latin typeface="Ramabhadra" panose="02000600000000000000" pitchFamily="2" charset="0"/>
-                  <a:cs typeface="Ramabhadra" panose="02000600000000000000" pitchFamily="2" charset="0"/>
-                </a:rPr>
-                <a:t>నీలో నిలుచుటకు బహుగా ఫలించుటకు</a:t>
-              </a:r>
+                <a:rPr lang="te-IN" sz="2000" dirty="0">
+                  <a:latin typeface="Ramabhadra" panose="02000600000000000000" pitchFamily="2" charset="0"/>
+                  <a:cs typeface="Ramabhadra" panose="02000600000000000000" pitchFamily="2" charset="0"/>
+                </a:rPr>
+                <a:t>ప్రతి అరుణోదయం</a:t>
+              </a:r>
+              <a:r>
+                <a:rPr lang="en-IN" sz="2000" dirty="0">
+                  <a:latin typeface="Ramabhadra" panose="02000600000000000000" pitchFamily="2" charset="0"/>
+                  <a:cs typeface="Ramabhadra" panose="02000600000000000000" pitchFamily="2" charset="0"/>
+                </a:rPr>
+                <a:t> </a:t>
+              </a:r>
+              <a:r>
+                <a:rPr lang="te-IN" sz="2000" dirty="0">
+                  <a:latin typeface="Ramabhadra" panose="02000600000000000000" pitchFamily="2" charset="0"/>
+                  <a:cs typeface="Ramabhadra" panose="02000600000000000000" pitchFamily="2" charset="0"/>
+                </a:rPr>
+                <a:t>నీముఖదర్శనం</a:t>
+              </a:r>
+              <a:endParaRPr lang="en-IN" sz="2000" dirty="0">
+                <a:latin typeface="Ramabhadra" panose="02000600000000000000" pitchFamily="2" charset="0"/>
+                <a:cs typeface="Ramabhadra" panose="02000600000000000000" pitchFamily="2" charset="0"/>
+              </a:endParaRPr>
             </a:p>
             <a:p>
               <a:pPr defTabSz="439781">
                 <a:defRPr/>
               </a:pPr>
               <a:r>
-                <a:rPr lang="te-IN" dirty="0">
-                  <a:latin typeface="Ramabhadra" panose="02000600000000000000" pitchFamily="2" charset="0"/>
-                  <a:cs typeface="Ramabhadra" panose="02000600000000000000" pitchFamily="2" charset="0"/>
-                </a:rPr>
-                <a:t>నూతన కృపలతో నను నింపుచున్నావు (2) </a:t>
+                <a:rPr lang="te-IN" sz="2000" dirty="0">
+                  <a:latin typeface="Ramabhadra" panose="02000600000000000000" pitchFamily="2" charset="0"/>
+                  <a:cs typeface="Ramabhadra" panose="02000600000000000000" pitchFamily="2" charset="0"/>
+                </a:rPr>
+                <a:t>నాలోనింపెను ఉల్లాసమే</a:t>
               </a:r>
             </a:p>
           </p:txBody>
@@ -4297,9 +4340,9 @@
         <p:grpSpPr>
           <a:xfrm>
             <a:off x="5104338" y="182031"/>
-            <a:ext cx="4858937" cy="6493935"/>
+            <a:ext cx="4858937" cy="6654687"/>
             <a:chOff x="160868" y="182032"/>
-            <a:chExt cx="4858937" cy="6493935"/>
+            <a:chExt cx="4858937" cy="6654687"/>
           </a:xfrm>
         </p:grpSpPr>
         <p:sp>
@@ -4372,7 +4415,7 @@
           <p:spPr>
             <a:xfrm>
               <a:off x="270004" y="281078"/>
-              <a:ext cx="4749801" cy="6232475"/>
+              <a:ext cx="4749801" cy="6555641"/>
             </a:xfrm>
             <a:prstGeom prst="rect">
               <a:avLst/>
@@ -4391,7 +4434,33 @@
                   <a:latin typeface="Ramabhadra" panose="02000600000000000000" pitchFamily="2" charset="0"/>
                   <a:cs typeface="Ramabhadra" panose="02000600000000000000" pitchFamily="2" charset="0"/>
                 </a:rPr>
-                <a:t>నజరేయుడా నా యేసయ్య</a:t>
+                <a:t>నిజమైన ద్రాక్షావల్లి నీవే</a:t>
+              </a:r>
+              <a:br>
+                <a:rPr lang="te-IN" sz="2100" dirty="0">
+                  <a:latin typeface="Ramabhadra" panose="02000600000000000000" pitchFamily="2" charset="0"/>
+                  <a:cs typeface="Ramabhadra" panose="02000600000000000000" pitchFamily="2" charset="0"/>
+                </a:rPr>
+              </a:br>
+              <a:r>
+                <a:rPr lang="te-IN" sz="2100" dirty="0">
+                  <a:latin typeface="Ramabhadra" panose="02000600000000000000" pitchFamily="2" charset="0"/>
+                  <a:cs typeface="Ramabhadra" panose="02000600000000000000" pitchFamily="2" charset="0"/>
+                </a:rPr>
+                <a:t>నిత్యమైన సంతోషము నీలోనే </a:t>
+              </a:r>
+              <a:br>
+                <a:rPr lang="te-IN" sz="2100" dirty="0">
+                  <a:latin typeface="Ramabhadra" panose="02000600000000000000" pitchFamily="2" charset="0"/>
+                  <a:cs typeface="Ramabhadra" panose="02000600000000000000" pitchFamily="2" charset="0"/>
+                </a:rPr>
+              </a:br>
+              <a:r>
+                <a:rPr lang="te-IN" sz="2100" dirty="0">
+                  <a:latin typeface="Ramabhadra" panose="02000600000000000000" pitchFamily="2" charset="0"/>
+                  <a:cs typeface="Ramabhadra" panose="02000600000000000000" pitchFamily="2" charset="0"/>
+                </a:rPr>
+                <a:t>శాశ్వతమైనది ఎంతో మధురమైనది</a:t>
               </a:r>
             </a:p>
             <a:p>
@@ -4401,27 +4470,7 @@
                   <a:latin typeface="Ramabhadra" panose="02000600000000000000" pitchFamily="2" charset="0"/>
                   <a:cs typeface="Ramabhadra" panose="02000600000000000000" pitchFamily="2" charset="0"/>
                 </a:rPr>
-                <a:t>ఎన్ని యుగాలకైనా</a:t>
-              </a:r>
-            </a:p>
-            <a:p>
-              <a:pPr defTabSz="439781"/>
-              <a:r>
-                <a:rPr lang="te-IN" sz="2100" dirty="0">
-                  <a:latin typeface="Ramabhadra" panose="02000600000000000000" pitchFamily="2" charset="0"/>
-                  <a:cs typeface="Ramabhadra" panose="02000600000000000000" pitchFamily="2" charset="0"/>
-                </a:rPr>
-                <a:t>ఆరాధ్య దైవము నీవేనని</a:t>
-              </a:r>
-            </a:p>
-            <a:p>
-              <a:pPr defTabSz="439781"/>
-              <a:r>
-                <a:rPr lang="te-IN" sz="2100" dirty="0">
-                  <a:latin typeface="Ramabhadra" panose="02000600000000000000" pitchFamily="2" charset="0"/>
-                  <a:cs typeface="Ramabhadra" panose="02000600000000000000" pitchFamily="2" charset="0"/>
-                </a:rPr>
-                <a:t>గళమెత్తి నీ కీర్తి నే చాటెద</a:t>
+                <a:t>నాపైన నీకున్న ప్రేమ ఎనలేని నీ ప్రేమ    </a:t>
               </a:r>
             </a:p>
             <a:p>
@@ -4438,37 +4487,46 @@
                   <a:latin typeface="Ramabhadra" panose="02000600000000000000" pitchFamily="2" charset="0"/>
                   <a:cs typeface="Ramabhadra" panose="02000600000000000000" pitchFamily="2" charset="0"/>
                 </a:rPr>
-                <a:t>ఆకాశ గగనాలను నీ జేనతో కొలిచితివి (2)</a:t>
-              </a:r>
-            </a:p>
-            <a:p>
-              <a:pPr defTabSz="439781"/>
-              <a:r>
+                <a:t>అతి కాంక్షనీయుడా దివ్యమైన నీ రూపులో</a:t>
+              </a:r>
+              <a:br>
                 <a:rPr lang="te-IN" sz="2100" dirty="0">
                   <a:latin typeface="Ramabhadra" panose="02000600000000000000" pitchFamily="2" charset="0"/>
                   <a:cs typeface="Ramabhadra" panose="02000600000000000000" pitchFamily="2" charset="0"/>
                 </a:rPr>
-                <a:t>శూన్యములో ఈ భూమిని</a:t>
-              </a:r>
-            </a:p>
-            <a:p>
-              <a:pPr defTabSz="439781"/>
+              </a:br>
               <a:r>
                 <a:rPr lang="te-IN" sz="2100" dirty="0">
                   <a:latin typeface="Ramabhadra" panose="02000600000000000000" pitchFamily="2" charset="0"/>
                   <a:cs typeface="Ramabhadra" panose="02000600000000000000" pitchFamily="2" charset="0"/>
                 </a:rPr>
-                <a:t>వ్రేలాడదీసిన నా యేసయ్య (2)</a:t>
-              </a:r>
-            </a:p>
-            <a:p>
-              <a:pPr defTabSz="439781"/>
-              <a:r>
+                <a:t>జీవించున్నాను నీ ప్రేమకు నే పత్రికగా </a:t>
+              </a:r>
+              <a:br>
                 <a:rPr lang="te-IN" sz="2100" dirty="0">
                   <a:latin typeface="Ramabhadra" panose="02000600000000000000" pitchFamily="2" charset="0"/>
                   <a:cs typeface="Ramabhadra" panose="02000600000000000000" pitchFamily="2" charset="0"/>
                 </a:rPr>
-                <a:t>నీకే వందనం నీకే వందనం (2)</a:t>
+              </a:br>
+              <a:r>
+                <a:rPr lang="te-IN" sz="2100" dirty="0">
+                  <a:latin typeface="Ramabhadra" panose="02000600000000000000" pitchFamily="2" charset="0"/>
+                  <a:cs typeface="Ramabhadra" panose="02000600000000000000" pitchFamily="2" charset="0"/>
+                </a:rPr>
+                <a:t>శిధిలమై యుండగా నన్ను నీదు రక్తముతో కడిగి</a:t>
+              </a:r>
+              <a:br>
+                <a:rPr lang="te-IN" sz="2100" dirty="0">
+                  <a:latin typeface="Ramabhadra" panose="02000600000000000000" pitchFamily="2" charset="0"/>
+                  <a:cs typeface="Ramabhadra" panose="02000600000000000000" pitchFamily="2" charset="0"/>
+                </a:rPr>
+              </a:br>
+              <a:r>
+                <a:rPr lang="te-IN" sz="2100" dirty="0">
+                  <a:latin typeface="Ramabhadra" panose="02000600000000000000" pitchFamily="2" charset="0"/>
+                  <a:cs typeface="Ramabhadra" panose="02000600000000000000" pitchFamily="2" charset="0"/>
+                </a:rPr>
+                <a:t>నీ పోలికగా మార్చినావే నా యేసయ్యా      </a:t>
               </a:r>
             </a:p>
             <a:p>
@@ -4485,7 +4543,46 @@
                   <a:latin typeface="Ramabhadra" panose="02000600000000000000" pitchFamily="2" charset="0"/>
                   <a:cs typeface="Ramabhadra" panose="02000600000000000000" pitchFamily="2" charset="0"/>
                 </a:rPr>
-                <a:t>అగాధ సముద్రాలకు నీవే ఎల్లలు వేసితివి (2)</a:t>
+                <a:t>నా ప్రాణ ప్రియుడా శ్రేష్టమైన ఫలములతో</a:t>
+              </a:r>
+              <a:br>
+                <a:rPr lang="te-IN" sz="2100" dirty="0">
+                  <a:latin typeface="Ramabhadra" panose="02000600000000000000" pitchFamily="2" charset="0"/>
+                  <a:cs typeface="Ramabhadra" panose="02000600000000000000" pitchFamily="2" charset="0"/>
+                </a:rPr>
+              </a:br>
+              <a:r>
+                <a:rPr lang="te-IN" sz="2100" dirty="0">
+                  <a:latin typeface="Ramabhadra" panose="02000600000000000000" pitchFamily="2" charset="0"/>
+                  <a:cs typeface="Ramabhadra" panose="02000600000000000000" pitchFamily="2" charset="0"/>
+                </a:rPr>
+                <a:t>అర్పించుచున్నాను సర్వము నీకే అర్పణగా </a:t>
+              </a:r>
+              <a:br>
+                <a:rPr lang="te-IN" sz="2100" dirty="0">
+                  <a:latin typeface="Ramabhadra" panose="02000600000000000000" pitchFamily="2" charset="0"/>
+                  <a:cs typeface="Ramabhadra" panose="02000600000000000000" pitchFamily="2" charset="0"/>
+                </a:rPr>
+              </a:br>
+              <a:r>
+                <a:rPr lang="te-IN" sz="2100" dirty="0">
+                  <a:latin typeface="Ramabhadra" panose="02000600000000000000" pitchFamily="2" charset="0"/>
+                  <a:cs typeface="Ramabhadra" panose="02000600000000000000" pitchFamily="2" charset="0"/>
+                </a:rPr>
+                <a:t>వాడిపోనివ్వక నాకు ఆశ్రయమైతివి నీవు</a:t>
+              </a:r>
+              <a:br>
+                <a:rPr lang="te-IN" sz="2100" dirty="0">
+                  <a:latin typeface="Ramabhadra" panose="02000600000000000000" pitchFamily="2" charset="0"/>
+                  <a:cs typeface="Ramabhadra" panose="02000600000000000000" pitchFamily="2" charset="0"/>
+                </a:rPr>
+              </a:br>
+              <a:r>
+                <a:rPr lang="te-IN" sz="2100" dirty="0">
+                  <a:latin typeface="Ramabhadra" panose="02000600000000000000" pitchFamily="2" charset="0"/>
+                  <a:cs typeface="Ramabhadra" panose="02000600000000000000" pitchFamily="2" charset="0"/>
+                </a:rPr>
+                <a:t>జీవపు ఊటవై బలపరచితివి నా యేసయ్యా    </a:t>
               </a:r>
             </a:p>
             <a:p>
@@ -4495,7 +4592,7 @@
                   <a:latin typeface="Ramabhadra" panose="02000600000000000000" pitchFamily="2" charset="0"/>
                   <a:cs typeface="Ramabhadra" panose="02000600000000000000" pitchFamily="2" charset="0"/>
                 </a:rPr>
-                <a:t>జలములలోబడి నే వెళ్ళినా</a:t>
+                <a:t>      </a:t>
               </a:r>
             </a:p>
             <a:p>
@@ -4505,7 +4602,46 @@
                   <a:latin typeface="Ramabhadra" panose="02000600000000000000" pitchFamily="2" charset="0"/>
                   <a:cs typeface="Ramabhadra" panose="02000600000000000000" pitchFamily="2" charset="0"/>
                 </a:rPr>
-                <a:t>నన్నేమి చేయవు నా యేసయ్యా (2)</a:t>
+                <a:t>షాలేము రాజా రమ్యమైన సీయోనుకే</a:t>
+              </a:r>
+              <a:br>
+                <a:rPr lang="te-IN" sz="2100" dirty="0">
+                  <a:latin typeface="Ramabhadra" panose="02000600000000000000" pitchFamily="2" charset="0"/>
+                  <a:cs typeface="Ramabhadra" panose="02000600000000000000" pitchFamily="2" charset="0"/>
+                </a:rPr>
+              </a:br>
+              <a:r>
+                <a:rPr lang="te-IN" sz="2100" dirty="0">
+                  <a:latin typeface="Ramabhadra" panose="02000600000000000000" pitchFamily="2" charset="0"/>
+                  <a:cs typeface="Ramabhadra" panose="02000600000000000000" pitchFamily="2" charset="0"/>
+                </a:rPr>
+                <a:t>నను నడిపించుము నీ చిత్తమైన మార్గములో </a:t>
+              </a:r>
+              <a:br>
+                <a:rPr lang="te-IN" sz="2100" dirty="0">
+                  <a:latin typeface="Ramabhadra" panose="02000600000000000000" pitchFamily="2" charset="0"/>
+                  <a:cs typeface="Ramabhadra" panose="02000600000000000000" pitchFamily="2" charset="0"/>
+                </a:rPr>
+              </a:br>
+              <a:r>
+                <a:rPr lang="te-IN" sz="2100" dirty="0">
+                  <a:latin typeface="Ramabhadra" panose="02000600000000000000" pitchFamily="2" charset="0"/>
+                  <a:cs typeface="Ramabhadra" panose="02000600000000000000" pitchFamily="2" charset="0"/>
+                </a:rPr>
+                <a:t>అలసి పోనివ్వక నన్ను నీదు ఆత్మతో నింపి</a:t>
+              </a:r>
+              <a:br>
+                <a:rPr lang="te-IN" sz="2100" dirty="0">
+                  <a:latin typeface="Ramabhadra" panose="02000600000000000000" pitchFamily="2" charset="0"/>
+                  <a:cs typeface="Ramabhadra" panose="02000600000000000000" pitchFamily="2" charset="0"/>
+                </a:rPr>
+              </a:br>
+              <a:r>
+                <a:rPr lang="te-IN" sz="2100" dirty="0">
+                  <a:latin typeface="Ramabhadra" panose="02000600000000000000" pitchFamily="2" charset="0"/>
+                  <a:cs typeface="Ramabhadra" panose="02000600000000000000" pitchFamily="2" charset="0"/>
+                </a:rPr>
+                <a:t>ఆదరణ కర్తవై నను చేర్చుము నీ రాజ్యములో</a:t>
               </a:r>
             </a:p>
             <a:p>
@@ -4515,54 +4651,7 @@
                   <a:latin typeface="Ramabhadra" panose="02000600000000000000" pitchFamily="2" charset="0"/>
                   <a:cs typeface="Ramabhadra" panose="02000600000000000000" pitchFamily="2" charset="0"/>
                 </a:rPr>
-                <a:t>నీకే వందనం నీకే వందనం (2)</a:t>
-              </a:r>
-            </a:p>
-            <a:p>
-              <a:pPr defTabSz="439781"/>
-              <a:endParaRPr lang="te-IN" sz="2100" dirty="0">
-                <a:latin typeface="Ramabhadra" panose="02000600000000000000" pitchFamily="2" charset="0"/>
-                <a:cs typeface="Ramabhadra" panose="02000600000000000000" pitchFamily="2" charset="0"/>
-              </a:endParaRPr>
-            </a:p>
-            <a:p>
-              <a:pPr defTabSz="439781"/>
-              <a:r>
-                <a:rPr lang="te-IN" sz="2100" dirty="0">
-                  <a:latin typeface="Ramabhadra" panose="02000600000000000000" pitchFamily="2" charset="0"/>
-                  <a:cs typeface="Ramabhadra" panose="02000600000000000000" pitchFamily="2" charset="0"/>
-                </a:rPr>
-                <a:t>సీయోను శిఖరాగ్రము నీ సింహాసనమాయెనా (2)</a:t>
-              </a:r>
-            </a:p>
-            <a:p>
-              <a:pPr defTabSz="439781"/>
-              <a:r>
-                <a:rPr lang="te-IN" sz="2100" dirty="0">
-                  <a:latin typeface="Ramabhadra" panose="02000600000000000000" pitchFamily="2" charset="0"/>
-                  <a:cs typeface="Ramabhadra" panose="02000600000000000000" pitchFamily="2" charset="0"/>
-                </a:rPr>
-                <a:t>సీయోనులో నిను చూడాలని</a:t>
-              </a:r>
-            </a:p>
-            <a:p>
-              <a:pPr defTabSz="439781"/>
-              <a:r>
-                <a:rPr lang="te-IN" sz="2100" dirty="0">
-                  <a:latin typeface="Ramabhadra" panose="02000600000000000000" pitchFamily="2" charset="0"/>
-                  <a:cs typeface="Ramabhadra" panose="02000600000000000000" pitchFamily="2" charset="0"/>
-                </a:rPr>
-                <a:t>ఆశతో ఉన్నాను నా యేసయ్యా (2)</a:t>
-              </a:r>
-            </a:p>
-            <a:p>
-              <a:pPr defTabSz="439781"/>
-              <a:r>
-                <a:rPr lang="te-IN" sz="2100" dirty="0">
-                  <a:latin typeface="Ramabhadra" panose="02000600000000000000" pitchFamily="2" charset="0"/>
-                  <a:cs typeface="Ramabhadra" panose="02000600000000000000" pitchFamily="2" charset="0"/>
-                </a:rPr>
-                <a:t>నీకే వందనం నీకే వందనం (2)</a:t>
+                <a:t>     </a:t>
               </a:r>
             </a:p>
           </p:txBody>

--- a/songsTemplate.pptx
+++ b/songsTemplate.pptx
@@ -255,7 +255,7 @@
           <a:p>
             <a:fld id="{F1102B08-ED9E-409F-B95F-09CAA1DAF6E0}" type="datetimeFigureOut">
               <a:rPr lang="en-IN" smtClean="0"/>
-              <a:t>01-03-2025</a:t>
+              <a:t>07-03-2025</a:t>
             </a:fld>
             <a:endParaRPr lang="en-IN"/>
           </a:p>
@@ -425,7 +425,7 @@
           <a:p>
             <a:fld id="{F1102B08-ED9E-409F-B95F-09CAA1DAF6E0}" type="datetimeFigureOut">
               <a:rPr lang="en-IN" smtClean="0"/>
-              <a:t>01-03-2025</a:t>
+              <a:t>07-03-2025</a:t>
             </a:fld>
             <a:endParaRPr lang="en-IN"/>
           </a:p>
@@ -605,7 +605,7 @@
           <a:p>
             <a:fld id="{F1102B08-ED9E-409F-B95F-09CAA1DAF6E0}" type="datetimeFigureOut">
               <a:rPr lang="en-IN" smtClean="0"/>
-              <a:t>01-03-2025</a:t>
+              <a:t>07-03-2025</a:t>
             </a:fld>
             <a:endParaRPr lang="en-IN"/>
           </a:p>
@@ -775,7 +775,7 @@
           <a:p>
             <a:fld id="{F1102B08-ED9E-409F-B95F-09CAA1DAF6E0}" type="datetimeFigureOut">
               <a:rPr lang="en-IN" smtClean="0"/>
-              <a:t>01-03-2025</a:t>
+              <a:t>07-03-2025</a:t>
             </a:fld>
             <a:endParaRPr lang="en-IN"/>
           </a:p>
@@ -1019,7 +1019,7 @@
           <a:p>
             <a:fld id="{F1102B08-ED9E-409F-B95F-09CAA1DAF6E0}" type="datetimeFigureOut">
               <a:rPr lang="en-IN" smtClean="0"/>
-              <a:t>01-03-2025</a:t>
+              <a:t>07-03-2025</a:t>
             </a:fld>
             <a:endParaRPr lang="en-IN"/>
           </a:p>
@@ -1251,7 +1251,7 @@
           <a:p>
             <a:fld id="{F1102B08-ED9E-409F-B95F-09CAA1DAF6E0}" type="datetimeFigureOut">
               <a:rPr lang="en-IN" smtClean="0"/>
-              <a:t>01-03-2025</a:t>
+              <a:t>07-03-2025</a:t>
             </a:fld>
             <a:endParaRPr lang="en-IN"/>
           </a:p>
@@ -1618,7 +1618,7 @@
           <a:p>
             <a:fld id="{F1102B08-ED9E-409F-B95F-09CAA1DAF6E0}" type="datetimeFigureOut">
               <a:rPr lang="en-IN" smtClean="0"/>
-              <a:t>01-03-2025</a:t>
+              <a:t>07-03-2025</a:t>
             </a:fld>
             <a:endParaRPr lang="en-IN"/>
           </a:p>
@@ -1736,7 +1736,7 @@
           <a:p>
             <a:fld id="{F1102B08-ED9E-409F-B95F-09CAA1DAF6E0}" type="datetimeFigureOut">
               <a:rPr lang="en-IN" smtClean="0"/>
-              <a:t>01-03-2025</a:t>
+              <a:t>07-03-2025</a:t>
             </a:fld>
             <a:endParaRPr lang="en-IN"/>
           </a:p>
@@ -1831,7 +1831,7 @@
           <a:p>
             <a:fld id="{F1102B08-ED9E-409F-B95F-09CAA1DAF6E0}" type="datetimeFigureOut">
               <a:rPr lang="en-IN" smtClean="0"/>
-              <a:t>01-03-2025</a:t>
+              <a:t>07-03-2025</a:t>
             </a:fld>
             <a:endParaRPr lang="en-IN"/>
           </a:p>
@@ -2108,7 +2108,7 @@
           <a:p>
             <a:fld id="{F1102B08-ED9E-409F-B95F-09CAA1DAF6E0}" type="datetimeFigureOut">
               <a:rPr lang="en-IN" smtClean="0"/>
-              <a:t>01-03-2025</a:t>
+              <a:t>07-03-2025</a:t>
             </a:fld>
             <a:endParaRPr lang="en-IN"/>
           </a:p>
@@ -2365,7 +2365,7 @@
           <a:p>
             <a:fld id="{F1102B08-ED9E-409F-B95F-09CAA1DAF6E0}" type="datetimeFigureOut">
               <a:rPr lang="en-IN" smtClean="0"/>
-              <a:t>01-03-2025</a:t>
+              <a:t>07-03-2025</a:t>
             </a:fld>
             <a:endParaRPr lang="en-IN"/>
           </a:p>
@@ -2578,7 +2578,7 @@
           <a:p>
             <a:fld id="{F1102B08-ED9E-409F-B95F-09CAA1DAF6E0}" type="datetimeFigureOut">
               <a:rPr lang="en-IN" smtClean="0"/>
-              <a:t>01-03-2025</a:t>
+              <a:t>07-03-2025</a:t>
             </a:fld>
             <a:endParaRPr lang="en-IN"/>
           </a:p>
@@ -3091,7 +3091,7 @@
                   <a:latin typeface="Ramabhadra" panose="02000600000000000000" pitchFamily="2" charset="0"/>
                   <a:cs typeface="Ramabhadra" panose="02000600000000000000" pitchFamily="2" charset="0"/>
                 </a:rPr>
-                <a:t>దేవ నడిపించుమా – అనుదినము</a:t>
+                <a:t>స్తోత్రము స్తుతి స్తోత్రము  </a:t>
               </a:r>
             </a:p>
             <a:p>
@@ -3100,7 +3100,7 @@
                   <a:latin typeface="Ramabhadra" panose="02000600000000000000" pitchFamily="2" charset="0"/>
                   <a:cs typeface="Ramabhadra" panose="02000600000000000000" pitchFamily="2" charset="0"/>
                 </a:rPr>
-                <a:t>పరిశుద్ధాత్మతో నడిపించుమా</a:t>
+                <a:t>చెల్లించుడి యేసుకే (2)</a:t>
               </a:r>
             </a:p>
             <a:p>
@@ -3109,35 +3109,16 @@
                   <a:latin typeface="Ramabhadra" panose="02000600000000000000" pitchFamily="2" charset="0"/>
                   <a:cs typeface="Ramabhadra" panose="02000600000000000000" pitchFamily="2" charset="0"/>
                 </a:rPr>
-                <a:t>యేసయ్యా......</a:t>
-              </a:r>
-              <a:r>
-                <a:rPr lang="en-IN" sz="2200" dirty="0">
-                  <a:latin typeface="Ramabhadra" panose="02000600000000000000" pitchFamily="2" charset="0"/>
-                  <a:cs typeface="Ramabhadra" panose="02000600000000000000" pitchFamily="2" charset="0"/>
-                </a:rPr>
-                <a:t> </a:t>
-              </a:r>
+                <a:t>రాజాధిరాజు దేవాధిదేవుడు </a:t>
+              </a:r>
+            </a:p>
+            <a:p>
               <a:r>
                 <a:rPr lang="te-IN" sz="2200" dirty="0">
                   <a:latin typeface="Ramabhadra" panose="02000600000000000000" pitchFamily="2" charset="0"/>
                   <a:cs typeface="Ramabhadra" panose="02000600000000000000" pitchFamily="2" charset="0"/>
                 </a:rPr>
-                <a:t>యేసయ్యా.....</a:t>
-              </a:r>
-              <a:r>
-                <a:rPr lang="en-IN" sz="2200" dirty="0">
-                  <a:latin typeface="Ramabhadra" panose="02000600000000000000" pitchFamily="2" charset="0"/>
-                  <a:cs typeface="Ramabhadra" panose="02000600000000000000" pitchFamily="2" charset="0"/>
-                </a:rPr>
-                <a:t> </a:t>
-              </a:r>
-              <a:r>
-                <a:rPr lang="te-IN" sz="2200" dirty="0">
-                  <a:latin typeface="Ramabhadra" panose="02000600000000000000" pitchFamily="2" charset="0"/>
-                  <a:cs typeface="Ramabhadra" panose="02000600000000000000" pitchFamily="2" charset="0"/>
-                </a:rPr>
-                <a:t>హల్లెలూయా</a:t>
+                <a:t>స్తుతులకు పాత్రుడు</a:t>
               </a:r>
             </a:p>
             <a:p>
@@ -3152,12 +3133,8 @@
                   <a:latin typeface="Ramabhadra" panose="02000600000000000000" pitchFamily="2" charset="0"/>
                   <a:cs typeface="Ramabhadra" panose="02000600000000000000" pitchFamily="2" charset="0"/>
                 </a:rPr>
-                <a:t>పాటలతో నడిపించుమా –</a:t>
-              </a:r>
-              <a:endParaRPr lang="en-IN" sz="2200" dirty="0">
-                <a:latin typeface="Ramabhadra" panose="02000600000000000000" pitchFamily="2" charset="0"/>
-                <a:cs typeface="Ramabhadra" panose="02000600000000000000" pitchFamily="2" charset="0"/>
-              </a:endParaRPr>
+                <a:t>మనుష్య కుమారుడై </a:t>
+              </a:r>
             </a:p>
             <a:p>
               <a:r>
@@ -3165,7 +3142,7 @@
                   <a:latin typeface="Ramabhadra" panose="02000600000000000000" pitchFamily="2" charset="0"/>
                   <a:cs typeface="Ramabhadra" panose="02000600000000000000" pitchFamily="2" charset="0"/>
                 </a:rPr>
-                <a:t>ప్రార్థనతో నడిపించుమా</a:t>
+                <a:t>మనుజుల పాపముకై</a:t>
               </a:r>
             </a:p>
             <a:p>
@@ -3174,14 +3151,7 @@
                   <a:latin typeface="Ramabhadra" panose="02000600000000000000" pitchFamily="2" charset="0"/>
                   <a:cs typeface="Ramabhadra" panose="02000600000000000000" pitchFamily="2" charset="0"/>
                 </a:rPr>
-                <a:t>వాక్యముతో నడిపించుమా</a:t>
-              </a:r>
-              <a:r>
-                <a:rPr lang="en-IN" sz="2200" dirty="0">
-                  <a:latin typeface="Ramabhadra" panose="02000600000000000000" pitchFamily="2" charset="0"/>
-                  <a:cs typeface="Ramabhadra" panose="02000600000000000000" pitchFamily="2" charset="0"/>
-                </a:rPr>
-                <a:t> - </a:t>
+                <a:t>మహిలోన వెలసెను </a:t>
               </a:r>
             </a:p>
             <a:p>
@@ -3190,35 +3160,25 @@
                   <a:latin typeface="Ramabhadra" panose="02000600000000000000" pitchFamily="2" charset="0"/>
                   <a:cs typeface="Ramabhadra" panose="02000600000000000000" pitchFamily="2" charset="0"/>
                 </a:rPr>
-                <a:t>సాక్షముతో నడిపించుమా</a:t>
-              </a:r>
-              <a:r>
-                <a:rPr lang="en-IN" sz="2200" dirty="0">
-                  <a:latin typeface="Ramabhadra" panose="02000600000000000000" pitchFamily="2" charset="0"/>
-                  <a:cs typeface="Ramabhadra" panose="02000600000000000000" pitchFamily="2" charset="0"/>
-                </a:rPr>
-                <a:t> </a:t>
-              </a:r>
+                <a:t>మరణించి లెచేను (2)</a:t>
+              </a:r>
+            </a:p>
+            <a:p>
               <a:r>
                 <a:rPr lang="te-IN" sz="2200" dirty="0">
                   <a:latin typeface="Ramabhadra" panose="02000600000000000000" pitchFamily="2" charset="0"/>
                   <a:cs typeface="Ramabhadra" panose="02000600000000000000" pitchFamily="2" charset="0"/>
                 </a:rPr>
-                <a:t>॥ దేవా</a:t>
-              </a:r>
-              <a:r>
-                <a:rPr lang="en-IN" sz="2200" dirty="0">
-                  <a:latin typeface="Ramabhadra" panose="02000600000000000000" pitchFamily="2" charset="0"/>
-                  <a:cs typeface="Ramabhadra" panose="02000600000000000000" pitchFamily="2" charset="0"/>
-                </a:rPr>
-                <a:t> </a:t>
-              </a:r>
+                <a:t>మహిమ స్వరూపుడు </a:t>
+              </a:r>
+            </a:p>
+            <a:p>
               <a:r>
                 <a:rPr lang="te-IN" sz="2200" dirty="0">
                   <a:latin typeface="Ramabhadra" panose="02000600000000000000" pitchFamily="2" charset="0"/>
                   <a:cs typeface="Ramabhadra" panose="02000600000000000000" pitchFamily="2" charset="0"/>
                 </a:rPr>
-                <a:t>॥</a:t>
+                <a:t>మహిమ స్వరూపుడు</a:t>
               </a:r>
             </a:p>
             <a:p>
@@ -3233,12 +3193,8 @@
                   <a:latin typeface="Ramabhadra" panose="02000600000000000000" pitchFamily="2" charset="0"/>
                   <a:cs typeface="Ramabhadra" panose="02000600000000000000" pitchFamily="2" charset="0"/>
                 </a:rPr>
-                <a:t>కాపరియై నడిపించుమా –</a:t>
-              </a:r>
-              <a:endParaRPr lang="en-IN" sz="2200" dirty="0">
-                <a:latin typeface="Ramabhadra" panose="02000600000000000000" pitchFamily="2" charset="0"/>
-                <a:cs typeface="Ramabhadra" panose="02000600000000000000" pitchFamily="2" charset="0"/>
-              </a:endParaRPr>
+                <a:t>పాపపు వస్త్రము మార్చి </a:t>
+              </a:r>
             </a:p>
             <a:p>
               <a:r>
@@ -3246,7 +3202,7 @@
                   <a:latin typeface="Ramabhadra" panose="02000600000000000000" pitchFamily="2" charset="0"/>
                   <a:cs typeface="Ramabhadra" panose="02000600000000000000" pitchFamily="2" charset="0"/>
                 </a:rPr>
-                <a:t>ఊపిరి నీవై నడిపించుమా</a:t>
+                <a:t>నీతిమంతులుగ తీర్చి</a:t>
               </a:r>
             </a:p>
             <a:p>
@@ -3255,12 +3211,8 @@
                   <a:latin typeface="Ramabhadra" panose="02000600000000000000" pitchFamily="2" charset="0"/>
                   <a:cs typeface="Ramabhadra" panose="02000600000000000000" pitchFamily="2" charset="0"/>
                 </a:rPr>
-                <a:t>యాజకుడావై నడిపించుమా –</a:t>
-              </a:r>
-              <a:endParaRPr lang="en-IN" sz="2200" dirty="0">
-                <a:latin typeface="Ramabhadra" panose="02000600000000000000" pitchFamily="2" charset="0"/>
-                <a:cs typeface="Ramabhadra" panose="02000600000000000000" pitchFamily="2" charset="0"/>
-              </a:endParaRPr>
+                <a:t>పరిశుద్దులతో చేర్చి  </a:t>
+              </a:r>
             </a:p>
             <a:p>
               <a:r>
@@ -3268,28 +3220,17 @@
                   <a:latin typeface="Ramabhadra" panose="02000600000000000000" pitchFamily="2" charset="0"/>
                   <a:cs typeface="Ramabhadra" panose="02000600000000000000" pitchFamily="2" charset="0"/>
                 </a:rPr>
-                <a:t>భోదకుడావై భోదించుమా ॥ దేవా</a:t>
-              </a:r>
-              <a:r>
-                <a:rPr lang="en-IN" sz="2200" dirty="0">
-                  <a:latin typeface="Ramabhadra" panose="02000600000000000000" pitchFamily="2" charset="0"/>
-                  <a:cs typeface="Ramabhadra" panose="02000600000000000000" pitchFamily="2" charset="0"/>
-                </a:rPr>
-                <a:t> </a:t>
-              </a:r>
+                <a:t>పరమ సౌభాగ్యము నిచ్చి (2)</a:t>
+              </a:r>
+            </a:p>
+            <a:p>
               <a:r>
                 <a:rPr lang="te-IN" sz="2200" dirty="0">
                   <a:latin typeface="Ramabhadra" panose="02000600000000000000" pitchFamily="2" charset="0"/>
                   <a:cs typeface="Ramabhadra" panose="02000600000000000000" pitchFamily="2" charset="0"/>
                 </a:rPr>
-                <a:t>॥</a:t>
-              </a:r>
-            </a:p>
-            <a:p>
-              <a:endParaRPr lang="te-IN" sz="2200" dirty="0">
-                <a:latin typeface="Ramabhadra" panose="02000600000000000000" pitchFamily="2" charset="0"/>
-                <a:cs typeface="Ramabhadra" panose="02000600000000000000" pitchFamily="2" charset="0"/>
-              </a:endParaRPr>
+                <a:t>మహిమ స్వరూపుడు </a:t>
+              </a:r>
             </a:p>
             <a:p>
               <a:r>
@@ -3297,56 +3238,7 @@
                   <a:latin typeface="Ramabhadra" panose="02000600000000000000" pitchFamily="2" charset="0"/>
                   <a:cs typeface="Ramabhadra" panose="02000600000000000000" pitchFamily="2" charset="0"/>
                 </a:rPr>
-                <a:t>మార్గము నీవై నడిపించుమా –</a:t>
-              </a:r>
-              <a:endParaRPr lang="en-IN" sz="2200" dirty="0">
-                <a:latin typeface="Ramabhadra" panose="02000600000000000000" pitchFamily="2" charset="0"/>
-                <a:cs typeface="Ramabhadra" panose="02000600000000000000" pitchFamily="2" charset="0"/>
-              </a:endParaRPr>
-            </a:p>
-            <a:p>
-              <a:r>
-                <a:rPr lang="te-IN" sz="2200" dirty="0">
-                  <a:latin typeface="Ramabhadra" panose="02000600000000000000" pitchFamily="2" charset="0"/>
-                  <a:cs typeface="Ramabhadra" panose="02000600000000000000" pitchFamily="2" charset="0"/>
-                </a:rPr>
-                <a:t>సత్యమునీవై నడిపించుమా</a:t>
-              </a:r>
-            </a:p>
-            <a:p>
-              <a:r>
-                <a:rPr lang="te-IN" sz="2200" dirty="0">
-                  <a:latin typeface="Ramabhadra" panose="02000600000000000000" pitchFamily="2" charset="0"/>
-                  <a:cs typeface="Ramabhadra" panose="02000600000000000000" pitchFamily="2" charset="0"/>
-                </a:rPr>
-                <a:t>జీవము నీవై నడిపించుమా –</a:t>
-              </a:r>
-              <a:endParaRPr lang="en-IN" sz="2200" dirty="0">
-                <a:latin typeface="Ramabhadra" panose="02000600000000000000" pitchFamily="2" charset="0"/>
-                <a:cs typeface="Ramabhadra" panose="02000600000000000000" pitchFamily="2" charset="0"/>
-              </a:endParaRPr>
-            </a:p>
-            <a:p>
-              <a:r>
-                <a:rPr lang="te-IN" sz="2200" dirty="0">
-                  <a:latin typeface="Ramabhadra" panose="02000600000000000000" pitchFamily="2" charset="0"/>
-                  <a:cs typeface="Ramabhadra" panose="02000600000000000000" pitchFamily="2" charset="0"/>
-                </a:rPr>
-                <a:t>నిత్యత్వముతో నడిపించుమా ॥ దేవా</a:t>
-              </a:r>
-              <a:r>
-                <a:rPr lang="en-IN" sz="2200" dirty="0">
-                  <a:latin typeface="Ramabhadra" panose="02000600000000000000" pitchFamily="2" charset="0"/>
-                  <a:cs typeface="Ramabhadra" panose="02000600000000000000" pitchFamily="2" charset="0"/>
-                </a:rPr>
-                <a:t> </a:t>
-              </a:r>
-              <a:r>
-                <a:rPr lang="te-IN" sz="2200" dirty="0">
-                  <a:latin typeface="Ramabhadra" panose="02000600000000000000" pitchFamily="2" charset="0"/>
-                  <a:cs typeface="Ramabhadra" panose="02000600000000000000" pitchFamily="2" charset="0"/>
-                </a:rPr>
-                <a:t>॥</a:t>
+                <a:t>మహిమ స్వరూపుడు</a:t>
               </a:r>
             </a:p>
           </p:txBody>
@@ -3503,8 +3395,8 @@
           </p:nvSpPr>
           <p:spPr>
             <a:xfrm>
-              <a:off x="256993" y="716955"/>
-              <a:ext cx="4544669" cy="5436104"/>
+              <a:off x="256993" y="326430"/>
+              <a:ext cx="4544669" cy="4769254"/>
             </a:xfrm>
             <a:prstGeom prst="rect">
               <a:avLst/>
@@ -3527,7 +3419,7 @@
                   <a:latin typeface="Ramabhadra" panose="02000600000000000000" pitchFamily="2" charset="0"/>
                   <a:cs typeface="Ramabhadra" panose="02000600000000000000" pitchFamily="2" charset="0"/>
                 </a:rPr>
-                <a:t>నీతోనే ఉండుటయే</a:t>
+                <a:t>జీవించు చున్నవాడా –</a:t>
               </a:r>
             </a:p>
             <a:p>
@@ -3541,7 +3433,7 @@
                   <a:latin typeface="Ramabhadra" panose="02000600000000000000" pitchFamily="2" charset="0"/>
                   <a:cs typeface="Ramabhadra" panose="02000600000000000000" pitchFamily="2" charset="0"/>
                 </a:rPr>
-                <a:t>నా జీవిత వాంచయ్యా</a:t>
+                <a:t>సజీవుడవైన దేవా</a:t>
               </a:r>
             </a:p>
             <a:p>
@@ -3555,7 +3447,7 @@
                   <a:latin typeface="Ramabhadra" panose="02000600000000000000" pitchFamily="2" charset="0"/>
                   <a:cs typeface="Ramabhadra" panose="02000600000000000000" pitchFamily="2" charset="0"/>
                 </a:rPr>
-                <a:t>నీ చిత్తం నెరవేర్చుటయే</a:t>
+                <a:t>కొలుతుం నిరతం –</a:t>
               </a:r>
             </a:p>
             <a:p>
@@ -3569,35 +3461,7 @@
                   <a:latin typeface="Ramabhadra" panose="02000600000000000000" pitchFamily="2" charset="0"/>
                   <a:cs typeface="Ramabhadra" panose="02000600000000000000" pitchFamily="2" charset="0"/>
                 </a:rPr>
-                <a:t>నా హృదయ తపనయ్యా (2)</a:t>
-              </a:r>
-            </a:p>
-            <a:p>
-              <a:pPr>
-                <a:lnSpc>
-                  <a:spcPts val="2600"/>
-                </a:lnSpc>
-              </a:pPr>
-              <a:r>
-                <a:rPr lang="te-IN" sz="2400" dirty="0">
-                  <a:latin typeface="Ramabhadra" panose="02000600000000000000" pitchFamily="2" charset="0"/>
-                  <a:cs typeface="Ramabhadra" panose="02000600000000000000" pitchFamily="2" charset="0"/>
-                </a:rPr>
-                <a:t>యేసయ్యా నిన్నే కదా</a:t>
-              </a:r>
-            </a:p>
-            <a:p>
-              <a:pPr>
-                <a:lnSpc>
-                  <a:spcPts val="2600"/>
-                </a:lnSpc>
-              </a:pPr>
-              <a:r>
-                <a:rPr lang="te-IN" sz="2400" dirty="0">
-                  <a:latin typeface="Ramabhadra" panose="02000600000000000000" pitchFamily="2" charset="0"/>
-                  <a:cs typeface="Ramabhadra" panose="02000600000000000000" pitchFamily="2" charset="0"/>
-                </a:rPr>
-                <a:t>నా ముందు నిలిపేను (2)</a:t>
+                <a:t>మము జీవింప జేయుమయ్యా</a:t>
               </a:r>
             </a:p>
             <a:p>
@@ -3622,7 +3486,7 @@
                   <a:latin typeface="Ramabhadra" panose="02000600000000000000" pitchFamily="2" charset="0"/>
                   <a:cs typeface="Ramabhadra" panose="02000600000000000000" pitchFamily="2" charset="0"/>
                 </a:rPr>
-                <a:t>కరుణయు కృపయు నిరంతర శాంతి</a:t>
+                <a:t>ఐగుప్తు దాస్యం నుండి విడుదలనిచ్చిన దేవా</a:t>
               </a:r>
             </a:p>
             <a:p>
@@ -3636,7 +3500,7 @@
                   <a:latin typeface="Ramabhadra" panose="02000600000000000000" pitchFamily="2" charset="0"/>
                   <a:cs typeface="Ramabhadra" panose="02000600000000000000" pitchFamily="2" charset="0"/>
                 </a:rPr>
-                <a:t>వినయము ఉన్నవాడా(2)</a:t>
+                <a:t>ఎండిన బండనుండి జలముల నిచ్చిన దేవా</a:t>
               </a:r>
             </a:p>
             <a:p>
@@ -3650,7 +3514,7 @@
                   <a:latin typeface="Ramabhadra" panose="02000600000000000000" pitchFamily="2" charset="0"/>
                   <a:cs typeface="Ramabhadra" panose="02000600000000000000" pitchFamily="2" charset="0"/>
                 </a:rPr>
-                <a:t>నా జీవితం.. నశియింపక.. (2)</a:t>
+                <a:t>నీవే జీవదాత నీవే ముక్తి దాత</a:t>
               </a:r>
             </a:p>
             <a:p>
@@ -3664,7 +3528,7 @@
                   <a:latin typeface="Ramabhadra" panose="02000600000000000000" pitchFamily="2" charset="0"/>
                   <a:cs typeface="Ramabhadra" panose="02000600000000000000" pitchFamily="2" charset="0"/>
                 </a:rPr>
-                <a:t>కాపాడువాడా... నా కాపరి... (2)</a:t>
+                <a:t>నీవేసు దేవుడవు</a:t>
               </a:r>
             </a:p>
             <a:p>
@@ -3689,7 +3553,7 @@
                   <a:latin typeface="Ramabhadra" panose="02000600000000000000" pitchFamily="2" charset="0"/>
                   <a:cs typeface="Ramabhadra" panose="02000600000000000000" pitchFamily="2" charset="0"/>
                 </a:rPr>
-                <a:t>నా కొరకు అన్నియు చేయువాడా</a:t>
+                <a:t>సింహపు నోటినుండి అగ్ని గుండము నుండి</a:t>
               </a:r>
             </a:p>
             <a:p>
@@ -3703,7 +3567,7 @@
                   <a:latin typeface="Ramabhadra" panose="02000600000000000000" pitchFamily="2" charset="0"/>
                   <a:cs typeface="Ramabhadra" panose="02000600000000000000" pitchFamily="2" charset="0"/>
                 </a:rPr>
-                <a:t>చేసి ముగించువాడా (2)</a:t>
+                <a:t>రక్షించిన దేవా రక్షణ కారకుడా</a:t>
               </a:r>
             </a:p>
             <a:p>
@@ -3717,8 +3581,12 @@
                   <a:latin typeface="Ramabhadra" panose="02000600000000000000" pitchFamily="2" charset="0"/>
                   <a:cs typeface="Ramabhadra" panose="02000600000000000000" pitchFamily="2" charset="0"/>
                 </a:rPr>
-                <a:t>నా బరువు.. నా బాధ్యత.. (2)</a:t>
-              </a:r>
+                <a:t>నీవే జీవదాత నీవే ముక్తి దాత</a:t>
+              </a:r>
+              <a:endParaRPr lang="en-IN" sz="2400" dirty="0">
+                <a:latin typeface="Ramabhadra" panose="02000600000000000000" pitchFamily="2" charset="0"/>
+                <a:cs typeface="Ramabhadra" panose="02000600000000000000" pitchFamily="2" charset="0"/>
+              </a:endParaRPr>
             </a:p>
             <a:p>
               <a:pPr>
@@ -3731,7 +3599,7 @@
                   <a:latin typeface="Ramabhadra" panose="02000600000000000000" pitchFamily="2" charset="0"/>
                   <a:cs typeface="Ramabhadra" panose="02000600000000000000" pitchFamily="2" charset="0"/>
                 </a:rPr>
-                <a:t>నీ పాద చెంత... నుంచితివి... (2)</a:t>
+                <a:t>నీవేసు దేవుడవు</a:t>
               </a:r>
             </a:p>
           </p:txBody>
@@ -3799,6 +3667,120 @@
           </p:txBody>
         </p:sp>
       </p:grpSp>
+      <p:sp>
+        <p:nvSpPr>
+          <p:cNvPr id="2" name="Rectangle 1">
+            <a:extLst>
+              <a:ext uri="{FF2B5EF4-FFF2-40B4-BE49-F238E27FC236}">
+                <a16:creationId xmlns:a16="http://schemas.microsoft.com/office/drawing/2014/main" id="{CEBA6011-CA21-438F-B7D1-377168C5DA16}"/>
+              </a:ext>
+            </a:extLst>
+          </p:cNvPr>
+          <p:cNvSpPr/>
+          <p:nvPr/>
+        </p:nvSpPr>
+        <p:spPr>
+          <a:xfrm>
+            <a:off x="7021458" y="6672245"/>
+            <a:ext cx="902677" cy="182031"/>
+          </a:xfrm>
+          <a:prstGeom prst="rect">
+            <a:avLst/>
+          </a:prstGeom>
+          <a:noFill/>
+          <a:ln>
+            <a:noFill/>
+          </a:ln>
+        </p:spPr>
+        <p:style>
+          <a:lnRef idx="2">
+            <a:schemeClr val="accent1">
+              <a:shade val="50000"/>
+            </a:schemeClr>
+          </a:lnRef>
+          <a:fillRef idx="1">
+            <a:schemeClr val="accent1"/>
+          </a:fillRef>
+          <a:effectRef idx="0">
+            <a:schemeClr val="accent1"/>
+          </a:effectRef>
+          <a:fontRef idx="minor">
+            <a:schemeClr val="lt1"/>
+          </a:fontRef>
+        </p:style>
+        <p:txBody>
+          <a:bodyPr rtlCol="0" anchor="ctr"/>
+          <a:lstStyle/>
+          <a:p>
+            <a:pPr algn="ctr"/>
+            <a:r>
+              <a:rPr lang="en-IN" sz="1400" dirty="0">
+                <a:solidFill>
+                  <a:schemeClr val="tx1"/>
+                </a:solidFill>
+              </a:rPr>
+              <a:t>0001</a:t>
+            </a:r>
+          </a:p>
+        </p:txBody>
+      </p:sp>
+      <p:sp>
+        <p:nvSpPr>
+          <p:cNvPr id="14" name="Rectangle 13">
+            <a:extLst>
+              <a:ext uri="{FF2B5EF4-FFF2-40B4-BE49-F238E27FC236}">
+                <a16:creationId xmlns:a16="http://schemas.microsoft.com/office/drawing/2014/main" id="{AD044142-8A4B-48E2-8204-53A1EBC016D8}"/>
+              </a:ext>
+            </a:extLst>
+          </p:cNvPr>
+          <p:cNvSpPr/>
+          <p:nvPr/>
+        </p:nvSpPr>
+        <p:spPr>
+          <a:xfrm>
+            <a:off x="2010310" y="6667174"/>
+            <a:ext cx="902677" cy="182031"/>
+          </a:xfrm>
+          <a:prstGeom prst="rect">
+            <a:avLst/>
+          </a:prstGeom>
+          <a:noFill/>
+          <a:ln>
+            <a:noFill/>
+          </a:ln>
+        </p:spPr>
+        <p:style>
+          <a:lnRef idx="2">
+            <a:schemeClr val="accent1">
+              <a:shade val="50000"/>
+            </a:schemeClr>
+          </a:lnRef>
+          <a:fillRef idx="1">
+            <a:schemeClr val="accent1"/>
+          </a:fillRef>
+          <a:effectRef idx="0">
+            <a:schemeClr val="accent1"/>
+          </a:effectRef>
+          <a:fontRef idx="minor">
+            <a:schemeClr val="lt1"/>
+          </a:fontRef>
+        </p:style>
+        <p:txBody>
+          <a:bodyPr rtlCol="0" anchor="ctr"/>
+          <a:lstStyle/>
+          <a:p>
+            <a:pPr algn="ctr"/>
+            <a:r>
+              <a:rPr lang="en-IN" sz="1400" dirty="0">
+                <a:solidFill>
+                  <a:schemeClr val="tx1"/>
+                </a:solidFill>
+              </a:rPr>
+              <a:t>0001</a:t>
+            </a:r>
+          </a:p>
+        </p:txBody>
+      </p:sp>
     </p:spTree>
     <p:extLst>
       <p:ext uri="{BB962C8B-B14F-4D97-AF65-F5344CB8AC3E}">
@@ -3844,9 +3826,9 @@
         <p:grpSpPr>
           <a:xfrm>
             <a:off x="160868" y="182032"/>
-            <a:ext cx="5506736" cy="6557188"/>
+            <a:ext cx="5506736" cy="6493935"/>
             <a:chOff x="160868" y="182032"/>
-            <a:chExt cx="5506736" cy="6557188"/>
+            <a:chExt cx="5506736" cy="6493935"/>
           </a:xfrm>
         </p:grpSpPr>
         <p:sp>
@@ -3918,8 +3900,8 @@
           </p:nvSpPr>
           <p:spPr>
             <a:xfrm>
-              <a:off x="271993" y="183579"/>
-              <a:ext cx="5395611" cy="6555641"/>
+              <a:off x="271993" y="272608"/>
+              <a:ext cx="5395611" cy="6186309"/>
             </a:xfrm>
             <a:prstGeom prst="rect">
               <a:avLst/>
@@ -3936,13 +3918,78 @@
                 <a:defRPr/>
               </a:pPr>
               <a:r>
-                <a:rPr lang="te-IN" sz="2000" dirty="0">
-                  <a:latin typeface="Ramabhadra" panose="02000600000000000000" pitchFamily="2" charset="0"/>
-                  <a:cs typeface="Ramabhadra" panose="02000600000000000000" pitchFamily="2" charset="0"/>
-                </a:rPr>
-                <a:t>బహు సౌందర్య సీయోనులో</a:t>
-              </a:r>
-              <a:endParaRPr lang="en-IN" sz="2000" dirty="0">
+                <a:rPr lang="te-IN" sz="2200" dirty="0">
+                  <a:latin typeface="Ramabhadra" panose="02000600000000000000" pitchFamily="2" charset="0"/>
+                  <a:cs typeface="Ramabhadra" panose="02000600000000000000" pitchFamily="2" charset="0"/>
+                </a:rPr>
+                <a:t>ప్రేమించెదన్ అధికముగా</a:t>
+              </a:r>
+            </a:p>
+            <a:p>
+              <a:pPr defTabSz="439781">
+                <a:defRPr/>
+              </a:pPr>
+              <a:r>
+                <a:rPr lang="te-IN" sz="2200" dirty="0">
+                  <a:latin typeface="Ramabhadra" panose="02000600000000000000" pitchFamily="2" charset="0"/>
+                  <a:cs typeface="Ramabhadra" panose="02000600000000000000" pitchFamily="2" charset="0"/>
+                </a:rPr>
+                <a:t>ఆరాధింతున్ ఆసక్తితో (2)</a:t>
+              </a:r>
+            </a:p>
+            <a:p>
+              <a:pPr defTabSz="439781">
+                <a:defRPr/>
+              </a:pPr>
+              <a:r>
+                <a:rPr lang="te-IN" sz="2200" dirty="0">
+                  <a:latin typeface="Ramabhadra" panose="02000600000000000000" pitchFamily="2" charset="0"/>
+                  <a:cs typeface="Ramabhadra" panose="02000600000000000000" pitchFamily="2" charset="0"/>
+                </a:rPr>
+                <a:t>నిన్ను పూర్ణ మనసుతో ఆరాధింతున్</a:t>
+              </a:r>
+            </a:p>
+            <a:p>
+              <a:pPr defTabSz="439781">
+                <a:defRPr/>
+              </a:pPr>
+              <a:r>
+                <a:rPr lang="te-IN" sz="2200" dirty="0">
+                  <a:latin typeface="Ramabhadra" panose="02000600000000000000" pitchFamily="2" charset="0"/>
+                  <a:cs typeface="Ramabhadra" panose="02000600000000000000" pitchFamily="2" charset="0"/>
+                </a:rPr>
+                <a:t>పూర్ణ బలముతో ప్రేమించెదన్</a:t>
+              </a:r>
+            </a:p>
+            <a:p>
+              <a:pPr defTabSz="439781">
+                <a:defRPr/>
+              </a:pPr>
+              <a:r>
+                <a:rPr lang="te-IN" sz="2200" dirty="0">
+                  <a:latin typeface="Ramabhadra" panose="02000600000000000000" pitchFamily="2" charset="0"/>
+                  <a:cs typeface="Ramabhadra" panose="02000600000000000000" pitchFamily="2" charset="0"/>
+                </a:rPr>
+                <a:t>ఆరాధన ఆరాధనా ఆ.. ఆ.. </a:t>
+              </a:r>
+            </a:p>
+            <a:p>
+              <a:pPr defTabSz="439781">
+                <a:defRPr/>
+              </a:pPr>
+              <a:r>
+                <a:rPr lang="te-IN" sz="2200" dirty="0">
+                  <a:latin typeface="Ramabhadra" panose="02000600000000000000" pitchFamily="2" charset="0"/>
+                  <a:cs typeface="Ramabhadra" panose="02000600000000000000" pitchFamily="2" charset="0"/>
+                </a:rPr>
+                <a:t>ఆరాధన ఆరాధనా (2)</a:t>
+              </a:r>
+            </a:p>
+            <a:p>
+              <a:pPr defTabSz="439781">
+                <a:defRPr/>
+              </a:pPr>
+              <a:endParaRPr lang="te-IN" sz="2200" dirty="0">
                 <a:latin typeface="Ramabhadra" panose="02000600000000000000" pitchFamily="2" charset="0"/>
                 <a:cs typeface="Ramabhadra" panose="02000600000000000000" pitchFamily="2" charset="0"/>
               </a:endParaRPr>
@@ -3952,11 +3999,11 @@
                 <a:defRPr/>
               </a:pPr>
               <a:r>
-                <a:rPr lang="te-IN" sz="2000" dirty="0">
-                  <a:latin typeface="Ramabhadra" panose="02000600000000000000" pitchFamily="2" charset="0"/>
-                  <a:cs typeface="Ramabhadra" panose="02000600000000000000" pitchFamily="2" charset="0"/>
-                </a:rPr>
-                <a:t>స్తుతిసింహాసనాసీనుడా</a:t>
+                <a:rPr lang="te-IN" sz="2200" dirty="0">
+                  <a:latin typeface="Ramabhadra" panose="02000600000000000000" pitchFamily="2" charset="0"/>
+                  <a:cs typeface="Ramabhadra" panose="02000600000000000000" pitchFamily="2" charset="0"/>
+                </a:rPr>
+                <a:t>ఎబినేజరే ఎబినేజరే</a:t>
               </a:r>
             </a:p>
             <a:p>
@@ -3964,11 +4011,11 @@
                 <a:defRPr/>
               </a:pPr>
               <a:r>
-                <a:rPr lang="te-IN" sz="2000" dirty="0">
-                  <a:latin typeface="Ramabhadra" panose="02000600000000000000" pitchFamily="2" charset="0"/>
-                  <a:cs typeface="Ramabhadra" panose="02000600000000000000" pitchFamily="2" charset="0"/>
-                </a:rPr>
-                <a:t>నాయేసయ్య నీ ప్రేమ పరిపూర్ణమై</a:t>
+                <a:rPr lang="te-IN" sz="2200" dirty="0">
+                  <a:latin typeface="Ramabhadra" panose="02000600000000000000" pitchFamily="2" charset="0"/>
+                  <a:cs typeface="Ramabhadra" panose="02000600000000000000" pitchFamily="2" charset="0"/>
+                </a:rPr>
+                <a:t>ఇంత వరకు ఆదుకొన్నావే (2)</a:t>
               </a:r>
             </a:p>
             <a:p>
@@ -3976,56 +4023,63 @@
                 <a:defRPr/>
               </a:pPr>
               <a:r>
-                <a:rPr lang="te-IN" sz="2000" dirty="0">
-                  <a:latin typeface="Ramabhadra" panose="02000600000000000000" pitchFamily="2" charset="0"/>
-                  <a:cs typeface="Ramabhadra" panose="02000600000000000000" pitchFamily="2" charset="0"/>
-                </a:rPr>
-                <a:t>నా హృదయాన కొలువాయెనే</a:t>
+                <a:rPr lang="te-IN" sz="2200" dirty="0">
+                  <a:latin typeface="Ramabhadra" panose="02000600000000000000" pitchFamily="2" charset="0"/>
+                  <a:cs typeface="Ramabhadra" panose="02000600000000000000" pitchFamily="2" charset="0"/>
+                </a:rPr>
+                <a:t>నన్ను ఇంత వరకు ఆదుకొన్నావే</a:t>
               </a:r>
             </a:p>
             <a:p>
               <a:pPr defTabSz="439781">
                 <a:defRPr/>
               </a:pPr>
-              <a:r>
-                <a:rPr lang="te-IN" sz="2000" dirty="0">
-                  <a:latin typeface="Ramabhadra" panose="02000600000000000000" pitchFamily="2" charset="0"/>
-                  <a:cs typeface="Ramabhadra" panose="02000600000000000000" pitchFamily="2" charset="0"/>
-                </a:rPr>
-                <a:t>నను</a:t>
-              </a:r>
-              <a:r>
-                <a:rPr lang="en-IN" sz="2000" dirty="0">
-                  <a:latin typeface="Ramabhadra" panose="02000600000000000000" pitchFamily="2" charset="0"/>
-                  <a:cs typeface="Ramabhadra" panose="02000600000000000000" pitchFamily="2" charset="0"/>
-                </a:rPr>
-                <a:t> </a:t>
-              </a:r>
-              <a:r>
-                <a:rPr lang="te-IN" sz="2000" dirty="0">
-                  <a:latin typeface="Ramabhadra" panose="02000600000000000000" pitchFamily="2" charset="0"/>
-                  <a:cs typeface="Ramabhadra" panose="02000600000000000000" pitchFamily="2" charset="0"/>
-                </a:rPr>
-                <a:t>జీవింపజేసే నీవాక్యమే</a:t>
-              </a:r>
+              <a:endParaRPr lang="te-IN" sz="2200" dirty="0">
+                <a:latin typeface="Ramabhadra" panose="02000600000000000000" pitchFamily="2" charset="0"/>
+                <a:cs typeface="Ramabhadra" panose="02000600000000000000" pitchFamily="2" charset="0"/>
+              </a:endParaRPr>
             </a:p>
             <a:p>
               <a:pPr defTabSz="439781">
                 <a:defRPr/>
               </a:pPr>
               <a:r>
-                <a:rPr lang="te-IN" sz="2000" dirty="0">
-                  <a:latin typeface="Ramabhadra" panose="02000600000000000000" pitchFamily="2" charset="0"/>
-                  <a:cs typeface="Ramabhadra" panose="02000600000000000000" pitchFamily="2" charset="0"/>
-                </a:rPr>
-                <a:t>నాకిలలోన సంతోషమే</a:t>
+                <a:rPr lang="te-IN" sz="2200" dirty="0">
+                  <a:latin typeface="Ramabhadra" panose="02000600000000000000" pitchFamily="2" charset="0"/>
+                  <a:cs typeface="Ramabhadra" panose="02000600000000000000" pitchFamily="2" charset="0"/>
+                </a:rPr>
+                <a:t>ఎల్రోహి ఎల్రోహి</a:t>
               </a:r>
             </a:p>
             <a:p>
               <a:pPr defTabSz="439781">
                 <a:defRPr/>
               </a:pPr>
-              <a:endParaRPr lang="te-IN" sz="2000" dirty="0">
+              <a:r>
+                <a:rPr lang="te-IN" sz="2200" dirty="0">
+                  <a:latin typeface="Ramabhadra" panose="02000600000000000000" pitchFamily="2" charset="0"/>
+                  <a:cs typeface="Ramabhadra" panose="02000600000000000000" pitchFamily="2" charset="0"/>
+                </a:rPr>
+                <a:t>నన్ను చూచావే వందనమయ్యా (2)</a:t>
+              </a:r>
+            </a:p>
+            <a:p>
+              <a:pPr defTabSz="439781">
+                <a:defRPr/>
+              </a:pPr>
+              <a:r>
+                <a:rPr lang="te-IN" sz="2200" dirty="0">
+                  <a:latin typeface="Ramabhadra" panose="02000600000000000000" pitchFamily="2" charset="0"/>
+                  <a:cs typeface="Ramabhadra" panose="02000600000000000000" pitchFamily="2" charset="0"/>
+                </a:rPr>
+                <a:t>నన్ను చూచావే వందనమయ్యా</a:t>
+              </a:r>
+            </a:p>
+            <a:p>
+              <a:pPr defTabSz="439781">
+                <a:defRPr/>
+              </a:pPr>
+              <a:endParaRPr lang="te-IN" sz="2200" dirty="0">
                 <a:latin typeface="Ramabhadra" panose="02000600000000000000" pitchFamily="2" charset="0"/>
                 <a:cs typeface="Ramabhadra" panose="02000600000000000000" pitchFamily="2" charset="0"/>
               </a:endParaRPr>
@@ -4035,11 +4089,11 @@
                 <a:defRPr/>
               </a:pPr>
               <a:r>
-                <a:rPr lang="te-IN" sz="2000" dirty="0">
-                  <a:latin typeface="Ramabhadra" panose="02000600000000000000" pitchFamily="2" charset="0"/>
-                  <a:cs typeface="Ramabhadra" panose="02000600000000000000" pitchFamily="2" charset="0"/>
-                </a:rPr>
-                <a:t>పరిశుద్ధతలో మహనీయుడవు</a:t>
+                <a:rPr lang="te-IN" sz="2200" dirty="0">
+                  <a:latin typeface="Ramabhadra" panose="02000600000000000000" pitchFamily="2" charset="0"/>
+                  <a:cs typeface="Ramabhadra" panose="02000600000000000000" pitchFamily="2" charset="0"/>
+                </a:rPr>
+                <a:t>యెహోవా రాఫా యెహోవా రాఫా</a:t>
               </a:r>
             </a:p>
             <a:p>
@@ -4047,11 +4101,11 @@
                 <a:defRPr/>
               </a:pPr>
               <a:r>
-                <a:rPr lang="te-IN" sz="2000" dirty="0">
-                  <a:latin typeface="Ramabhadra" panose="02000600000000000000" pitchFamily="2" charset="0"/>
-                  <a:cs typeface="Ramabhadra" panose="02000600000000000000" pitchFamily="2" charset="0"/>
-                </a:rPr>
-                <a:t>నీవంటిదేవుడు జగమునలేడు</a:t>
+                <a:rPr lang="te-IN" sz="2200" dirty="0">
+                  <a:latin typeface="Ramabhadra" panose="02000600000000000000" pitchFamily="2" charset="0"/>
+                  <a:cs typeface="Ramabhadra" panose="02000600000000000000" pitchFamily="2" charset="0"/>
+                </a:rPr>
+                <a:t>స్వస్థపరిచావే వందనమయ్యా (2)</a:t>
               </a:r>
             </a:p>
             <a:p>
@@ -4059,205 +4113,11 @@
                 <a:defRPr/>
               </a:pPr>
               <a:r>
-                <a:rPr lang="te-IN" sz="2000" dirty="0">
-                  <a:latin typeface="Ramabhadra" panose="02000600000000000000" pitchFamily="2" charset="0"/>
-                  <a:cs typeface="Ramabhadra" panose="02000600000000000000" pitchFamily="2" charset="0"/>
-                </a:rPr>
-                <a:t>నాలోనిరీక్షణ</a:t>
-              </a:r>
-              <a:r>
-                <a:rPr lang="en-IN" sz="2000" dirty="0">
-                  <a:latin typeface="Ramabhadra" panose="02000600000000000000" pitchFamily="2" charset="0"/>
-                  <a:cs typeface="Ramabhadra" panose="02000600000000000000" pitchFamily="2" charset="0"/>
-                </a:rPr>
-                <a:t> </a:t>
-              </a:r>
-              <a:r>
-                <a:rPr lang="te-IN" sz="2000" dirty="0">
-                  <a:latin typeface="Ramabhadra" panose="02000600000000000000" pitchFamily="2" charset="0"/>
-                  <a:cs typeface="Ramabhadra" panose="02000600000000000000" pitchFamily="2" charset="0"/>
-                </a:rPr>
-                <a:t>నీలో సంరక్షణ</a:t>
-              </a:r>
-              <a:endParaRPr lang="en-IN" sz="2000" dirty="0">
-                <a:latin typeface="Ramabhadra" panose="02000600000000000000" pitchFamily="2" charset="0"/>
-                <a:cs typeface="Ramabhadra" panose="02000600000000000000" pitchFamily="2" charset="0"/>
-              </a:endParaRPr>
-            </a:p>
-            <a:p>
-              <a:pPr defTabSz="439781">
-                <a:defRPr/>
-              </a:pPr>
-              <a:r>
-                <a:rPr lang="te-IN" sz="2000" dirty="0">
-                  <a:latin typeface="Ramabhadra" panose="02000600000000000000" pitchFamily="2" charset="0"/>
-                  <a:cs typeface="Ramabhadra" panose="02000600000000000000" pitchFamily="2" charset="0"/>
-                </a:rPr>
-                <a:t>నీకే నాహృదయార్పణ</a:t>
-              </a:r>
-            </a:p>
-            <a:p>
-              <a:pPr defTabSz="439781">
-                <a:defRPr/>
-              </a:pPr>
-              <a:endParaRPr lang="te-IN" sz="2000" dirty="0">
-                <a:latin typeface="Ramabhadra" panose="02000600000000000000" pitchFamily="2" charset="0"/>
-                <a:cs typeface="Ramabhadra" panose="02000600000000000000" pitchFamily="2" charset="0"/>
-              </a:endParaRPr>
-            </a:p>
-            <a:p>
-              <a:pPr defTabSz="439781">
-                <a:defRPr/>
-              </a:pPr>
-              <a:r>
-                <a:rPr lang="te-IN" sz="2000" dirty="0">
-                  <a:latin typeface="Ramabhadra" panose="02000600000000000000" pitchFamily="2" charset="0"/>
-                  <a:cs typeface="Ramabhadra" panose="02000600000000000000" pitchFamily="2" charset="0"/>
-                </a:rPr>
-                <a:t>ఓటమినీడలో క్షేమములేక</a:t>
-              </a:r>
-            </a:p>
-            <a:p>
-              <a:pPr defTabSz="439781">
-                <a:defRPr/>
-              </a:pPr>
-              <a:r>
-                <a:rPr lang="te-IN" sz="2000" dirty="0">
-                  <a:latin typeface="Ramabhadra" panose="02000600000000000000" pitchFamily="2" charset="0"/>
-                  <a:cs typeface="Ramabhadra" panose="02000600000000000000" pitchFamily="2" charset="0"/>
-                </a:rPr>
-                <a:t>వేదనకలిగిన వేళలయందు</a:t>
-              </a:r>
-            </a:p>
-            <a:p>
-              <a:pPr defTabSz="439781">
-                <a:defRPr/>
-              </a:pPr>
-              <a:r>
-                <a:rPr lang="te-IN" sz="2000" dirty="0">
-                  <a:latin typeface="Ramabhadra" panose="02000600000000000000" pitchFamily="2" charset="0"/>
-                  <a:cs typeface="Ramabhadra" panose="02000600000000000000" pitchFamily="2" charset="0"/>
-                </a:rPr>
-                <a:t>నీవు చూపించిన</a:t>
-              </a:r>
-              <a:r>
-                <a:rPr lang="en-IN" sz="2000" dirty="0">
-                  <a:latin typeface="Ramabhadra" panose="02000600000000000000" pitchFamily="2" charset="0"/>
-                  <a:cs typeface="Ramabhadra" panose="02000600000000000000" pitchFamily="2" charset="0"/>
-                </a:rPr>
-                <a:t> </a:t>
-              </a:r>
-              <a:r>
-                <a:rPr lang="te-IN" sz="2000" dirty="0">
-                  <a:latin typeface="Ramabhadra" panose="02000600000000000000" pitchFamily="2" charset="0"/>
-                  <a:cs typeface="Ramabhadra" panose="02000600000000000000" pitchFamily="2" charset="0"/>
-                </a:rPr>
-                <a:t>నీవాత్సల్యమే</a:t>
-              </a:r>
-              <a:endParaRPr lang="en-IN" sz="2000" dirty="0">
-                <a:latin typeface="Ramabhadra" panose="02000600000000000000" pitchFamily="2" charset="0"/>
-                <a:cs typeface="Ramabhadra" panose="02000600000000000000" pitchFamily="2" charset="0"/>
-              </a:endParaRPr>
-            </a:p>
-            <a:p>
-              <a:pPr defTabSz="439781">
-                <a:defRPr/>
-              </a:pPr>
-              <a:r>
-                <a:rPr lang="te-IN" sz="2000" dirty="0">
-                  <a:latin typeface="Ramabhadra" panose="02000600000000000000" pitchFamily="2" charset="0"/>
-                  <a:cs typeface="Ramabhadra" panose="02000600000000000000" pitchFamily="2" charset="0"/>
-                </a:rPr>
-                <a:t>నాహృదయాన నవజ్ఞాపిక</a:t>
-              </a:r>
-            </a:p>
-            <a:p>
-              <a:pPr defTabSz="439781">
-                <a:defRPr/>
-              </a:pPr>
-              <a:endParaRPr lang="te-IN" sz="2000" dirty="0">
-                <a:latin typeface="Ramabhadra" panose="02000600000000000000" pitchFamily="2" charset="0"/>
-                <a:cs typeface="Ramabhadra" panose="02000600000000000000" pitchFamily="2" charset="0"/>
-              </a:endParaRPr>
-            </a:p>
-            <a:p>
-              <a:pPr defTabSz="439781">
-                <a:defRPr/>
-              </a:pPr>
-              <a:r>
-                <a:rPr lang="te-IN" sz="2000" dirty="0">
-                  <a:latin typeface="Ramabhadra" panose="02000600000000000000" pitchFamily="2" charset="0"/>
-                  <a:cs typeface="Ramabhadra" panose="02000600000000000000" pitchFamily="2" charset="0"/>
-                </a:rPr>
-                <a:t>ఒంటరి</a:t>
-              </a:r>
-              <a:r>
-                <a:rPr lang="en-IN" sz="2000" dirty="0">
-                  <a:latin typeface="Ramabhadra" panose="02000600000000000000" pitchFamily="2" charset="0"/>
-                  <a:cs typeface="Ramabhadra" panose="02000600000000000000" pitchFamily="2" charset="0"/>
-                </a:rPr>
-                <a:t> </a:t>
-              </a:r>
-              <a:r>
-                <a:rPr lang="te-IN" sz="2000" dirty="0">
-                  <a:latin typeface="Ramabhadra" panose="02000600000000000000" pitchFamily="2" charset="0"/>
-                  <a:cs typeface="Ramabhadra" panose="02000600000000000000" pitchFamily="2" charset="0"/>
-                </a:rPr>
-                <a:t>బ్రతుకులో కృంగిన మనసుకు</a:t>
-              </a:r>
-            </a:p>
-            <a:p>
-              <a:pPr defTabSz="439781">
-                <a:defRPr/>
-              </a:pPr>
-              <a:r>
-                <a:rPr lang="te-IN" sz="2000" dirty="0">
-                  <a:latin typeface="Ramabhadra" panose="02000600000000000000" pitchFamily="2" charset="0"/>
-                  <a:cs typeface="Ramabhadra" panose="02000600000000000000" pitchFamily="2" charset="0"/>
-                </a:rPr>
-                <a:t>చల్లని నీచూపే ఔషధమే</a:t>
-              </a:r>
-            </a:p>
-            <a:p>
-              <a:pPr defTabSz="439781">
-                <a:defRPr/>
-              </a:pPr>
-              <a:r>
-                <a:rPr lang="te-IN" sz="2000" dirty="0">
-                  <a:latin typeface="Ramabhadra" panose="02000600000000000000" pitchFamily="2" charset="0"/>
-                  <a:cs typeface="Ramabhadra" panose="02000600000000000000" pitchFamily="2" charset="0"/>
-                </a:rPr>
-                <a:t>ప్రతి అరుణోదయం</a:t>
-              </a:r>
-              <a:r>
-                <a:rPr lang="en-IN" sz="2000" dirty="0">
-                  <a:latin typeface="Ramabhadra" panose="02000600000000000000" pitchFamily="2" charset="0"/>
-                  <a:cs typeface="Ramabhadra" panose="02000600000000000000" pitchFamily="2" charset="0"/>
-                </a:rPr>
-                <a:t> </a:t>
-              </a:r>
-              <a:r>
-                <a:rPr lang="te-IN" sz="2000" dirty="0">
-                  <a:latin typeface="Ramabhadra" panose="02000600000000000000" pitchFamily="2" charset="0"/>
-                  <a:cs typeface="Ramabhadra" panose="02000600000000000000" pitchFamily="2" charset="0"/>
-                </a:rPr>
-                <a:t>నీముఖదర్శనం</a:t>
-              </a:r>
-              <a:endParaRPr lang="en-IN" sz="2000" dirty="0">
-                <a:latin typeface="Ramabhadra" panose="02000600000000000000" pitchFamily="2" charset="0"/>
-                <a:cs typeface="Ramabhadra" panose="02000600000000000000" pitchFamily="2" charset="0"/>
-              </a:endParaRPr>
-            </a:p>
-            <a:p>
-              <a:pPr defTabSz="439781">
-                <a:defRPr/>
-              </a:pPr>
-              <a:r>
-                <a:rPr lang="te-IN" sz="2000" dirty="0">
-                  <a:latin typeface="Ramabhadra" panose="02000600000000000000" pitchFamily="2" charset="0"/>
-                  <a:cs typeface="Ramabhadra" panose="02000600000000000000" pitchFamily="2" charset="0"/>
-                </a:rPr>
-                <a:t>నాలోనింపెను ఉల్లాసమే</a:t>
+                <a:rPr lang="te-IN" sz="2200" dirty="0">
+                  <a:latin typeface="Ramabhadra" panose="02000600000000000000" pitchFamily="2" charset="0"/>
+                  <a:cs typeface="Ramabhadra" panose="02000600000000000000" pitchFamily="2" charset="0"/>
+                </a:rPr>
+                <a:t>నన్ను స్వస్థపరిచావే వందనమయ్యా</a:t>
               </a:r>
             </a:p>
           </p:txBody>
@@ -4340,9 +4200,9 @@
         <p:grpSpPr>
           <a:xfrm>
             <a:off x="5104338" y="182031"/>
-            <a:ext cx="4858937" cy="6654687"/>
+            <a:ext cx="4801662" cy="6493935"/>
             <a:chOff x="160868" y="182032"/>
-            <a:chExt cx="4858937" cy="6654687"/>
+            <a:chExt cx="4801662" cy="6493935"/>
           </a:xfrm>
         </p:grpSpPr>
         <p:sp>
@@ -4414,8 +4274,8 @@
           </p:nvSpPr>
           <p:spPr>
             <a:xfrm>
-              <a:off x="270004" y="281078"/>
-              <a:ext cx="4749801" cy="6555641"/>
+              <a:off x="212729" y="206959"/>
+              <a:ext cx="4749801" cy="6232475"/>
             </a:xfrm>
             <a:prstGeom prst="rect">
               <a:avLst/>
@@ -4434,43 +4294,37 @@
                   <a:latin typeface="Ramabhadra" panose="02000600000000000000" pitchFamily="2" charset="0"/>
                   <a:cs typeface="Ramabhadra" panose="02000600000000000000" pitchFamily="2" charset="0"/>
                 </a:rPr>
-                <a:t>నిజమైన ద్రాక్షావల్లి నీవే</a:t>
-              </a:r>
-              <a:br>
+                <a:t>యేసయ్యా.. యేసయ్యా.. యేసయ్యా.. యేసయ్యా..</a:t>
+              </a:r>
+            </a:p>
+            <a:p>
+              <a:pPr defTabSz="439781"/>
+              <a:r>
                 <a:rPr lang="te-IN" sz="2100" dirty="0">
                   <a:latin typeface="Ramabhadra" panose="02000600000000000000" pitchFamily="2" charset="0"/>
                   <a:cs typeface="Ramabhadra" panose="02000600000000000000" pitchFamily="2" charset="0"/>
                 </a:rPr>
-              </a:br>
+                <a:t>నిన్నే నిన్నే నే కొలుతునయ్యా</a:t>
+              </a:r>
+            </a:p>
+            <a:p>
+              <a:pPr defTabSz="439781"/>
               <a:r>
                 <a:rPr lang="te-IN" sz="2100" dirty="0">
                   <a:latin typeface="Ramabhadra" panose="02000600000000000000" pitchFamily="2" charset="0"/>
                   <a:cs typeface="Ramabhadra" panose="02000600000000000000" pitchFamily="2" charset="0"/>
                 </a:rPr>
-                <a:t>నిత్యమైన సంతోషము నీలోనే </a:t>
-              </a:r>
-              <a:br>
+                <a:t>నీవే నీవే నా రాజువయ్యా (2)</a:t>
+              </a:r>
+            </a:p>
+            <a:p>
+              <a:pPr defTabSz="439781"/>
+              <a:r>
                 <a:rPr lang="te-IN" sz="2100" dirty="0">
                   <a:latin typeface="Ramabhadra" panose="02000600000000000000" pitchFamily="2" charset="0"/>
                   <a:cs typeface="Ramabhadra" panose="02000600000000000000" pitchFamily="2" charset="0"/>
                 </a:rPr>
-              </a:br>
-              <a:r>
-                <a:rPr lang="te-IN" sz="2100" dirty="0">
-                  <a:latin typeface="Ramabhadra" panose="02000600000000000000" pitchFamily="2" charset="0"/>
-                  <a:cs typeface="Ramabhadra" panose="02000600000000000000" pitchFamily="2" charset="0"/>
-                </a:rPr>
-                <a:t>శాశ్వతమైనది ఎంతో మధురమైనది</a:t>
-              </a:r>
-            </a:p>
-            <a:p>
-              <a:pPr defTabSz="439781"/>
-              <a:r>
-                <a:rPr lang="te-IN" sz="2100" dirty="0">
-                  <a:latin typeface="Ramabhadra" panose="02000600000000000000" pitchFamily="2" charset="0"/>
-                  <a:cs typeface="Ramabhadra" panose="02000600000000000000" pitchFamily="2" charset="0"/>
-                </a:rPr>
-                <a:t>నాపైన నీకున్న ప్రేమ ఎనలేని నీ ప్రేమ    </a:t>
+                <a:t>యేసయ్య యేసయ్య యేసయ్యా…</a:t>
               </a:r>
             </a:p>
             <a:p>
@@ -4487,46 +4341,37 @@
                   <a:latin typeface="Ramabhadra" panose="02000600000000000000" pitchFamily="2" charset="0"/>
                   <a:cs typeface="Ramabhadra" panose="02000600000000000000" pitchFamily="2" charset="0"/>
                 </a:rPr>
-                <a:t>అతి కాంక్షనీయుడా దివ్యమైన నీ రూపులో</a:t>
-              </a:r>
-              <a:br>
+                <a:t>కొండలలో లోయలలో</a:t>
+              </a:r>
+            </a:p>
+            <a:p>
+              <a:pPr defTabSz="439781"/>
+              <a:r>
                 <a:rPr lang="te-IN" sz="2100" dirty="0">
                   <a:latin typeface="Ramabhadra" panose="02000600000000000000" pitchFamily="2" charset="0"/>
                   <a:cs typeface="Ramabhadra" panose="02000600000000000000" pitchFamily="2" charset="0"/>
                 </a:rPr>
-              </a:br>
+                <a:t>అడవులలో ఎడారులలో (2)</a:t>
+              </a:r>
+            </a:p>
+            <a:p>
+              <a:pPr defTabSz="439781"/>
               <a:r>
                 <a:rPr lang="te-IN" sz="2100" dirty="0">
                   <a:latin typeface="Ramabhadra" panose="02000600000000000000" pitchFamily="2" charset="0"/>
                   <a:cs typeface="Ramabhadra" panose="02000600000000000000" pitchFamily="2" charset="0"/>
                 </a:rPr>
-                <a:t>జీవించున్నాను నీ ప్రేమకు నే పత్రికగా </a:t>
-              </a:r>
-              <a:br>
+                <a:t>నన్ను గమనించినావా</a:t>
+              </a:r>
+            </a:p>
+            <a:p>
+              <a:pPr defTabSz="439781"/>
+              <a:r>
                 <a:rPr lang="te-IN" sz="2100" dirty="0">
                   <a:latin typeface="Ramabhadra" panose="02000600000000000000" pitchFamily="2" charset="0"/>
                   <a:cs typeface="Ramabhadra" panose="02000600000000000000" pitchFamily="2" charset="0"/>
                 </a:rPr>
-              </a:br>
-              <a:r>
-                <a:rPr lang="te-IN" sz="2100" dirty="0">
-                  <a:latin typeface="Ramabhadra" panose="02000600000000000000" pitchFamily="2" charset="0"/>
-                  <a:cs typeface="Ramabhadra" panose="02000600000000000000" pitchFamily="2" charset="0"/>
-                </a:rPr>
-                <a:t>శిధిలమై యుండగా నన్ను నీదు రక్తముతో కడిగి</a:t>
-              </a:r>
-              <a:br>
-                <a:rPr lang="te-IN" sz="2100" dirty="0">
-                  <a:latin typeface="Ramabhadra" panose="02000600000000000000" pitchFamily="2" charset="0"/>
-                  <a:cs typeface="Ramabhadra" panose="02000600000000000000" pitchFamily="2" charset="0"/>
-                </a:rPr>
-              </a:br>
-              <a:r>
-                <a:rPr lang="te-IN" sz="2100" dirty="0">
-                  <a:latin typeface="Ramabhadra" panose="02000600000000000000" pitchFamily="2" charset="0"/>
-                  <a:cs typeface="Ramabhadra" panose="02000600000000000000" pitchFamily="2" charset="0"/>
-                </a:rPr>
-                <a:t>నీ పోలికగా మార్చినావే నా యేసయ్యా      </a:t>
+                <a:t>నన్ను నడిపించినావా (2)</a:t>
               </a:r>
             </a:p>
             <a:p>
@@ -4543,46 +4388,78 @@
                   <a:latin typeface="Ramabhadra" panose="02000600000000000000" pitchFamily="2" charset="0"/>
                   <a:cs typeface="Ramabhadra" panose="02000600000000000000" pitchFamily="2" charset="0"/>
                 </a:rPr>
-                <a:t>నా ప్రాణ ప్రియుడా శ్రేష్టమైన ఫలములతో</a:t>
-              </a:r>
-              <a:br>
+                <a:t>ఆత్మీయులే నన్ను అవమానించగా</a:t>
+              </a:r>
+            </a:p>
+            <a:p>
+              <a:pPr defTabSz="439781"/>
+              <a:r>
                 <a:rPr lang="te-IN" sz="2100" dirty="0">
                   <a:latin typeface="Ramabhadra" panose="02000600000000000000" pitchFamily="2" charset="0"/>
                   <a:cs typeface="Ramabhadra" panose="02000600000000000000" pitchFamily="2" charset="0"/>
                 </a:rPr>
-              </a:br>
+                <a:t>అన్యులే నన్ను అపహసించగా (2)</a:t>
+              </a:r>
+            </a:p>
+            <a:p>
+              <a:pPr defTabSz="439781"/>
               <a:r>
                 <a:rPr lang="te-IN" sz="2100" dirty="0">
                   <a:latin typeface="Ramabhadra" panose="02000600000000000000" pitchFamily="2" charset="0"/>
                   <a:cs typeface="Ramabhadra" panose="02000600000000000000" pitchFamily="2" charset="0"/>
                 </a:rPr>
-                <a:t>అర్పించుచున్నాను సర్వము నీకే అర్పణగా </a:t>
-              </a:r>
-              <a:br>
+                <a:t>అండ నీవైతివయ్యా</a:t>
+              </a:r>
+            </a:p>
+            <a:p>
+              <a:pPr defTabSz="439781"/>
+              <a:r>
                 <a:rPr lang="te-IN" sz="2100" dirty="0">
                   <a:latin typeface="Ramabhadra" panose="02000600000000000000" pitchFamily="2" charset="0"/>
                   <a:cs typeface="Ramabhadra" panose="02000600000000000000" pitchFamily="2" charset="0"/>
                 </a:rPr>
-              </a:br>
+                <a:t>నా.. కొండ నీవే యేసయ్యా (2)</a:t>
+              </a:r>
+              <a:endParaRPr lang="en-IN" sz="2100" dirty="0">
+                <a:latin typeface="Ramabhadra" panose="02000600000000000000" pitchFamily="2" charset="0"/>
+                <a:cs typeface="Ramabhadra" panose="02000600000000000000" pitchFamily="2" charset="0"/>
+              </a:endParaRPr>
+            </a:p>
+            <a:p>
+              <a:pPr defTabSz="439781"/>
+              <a:endParaRPr lang="en-IN" sz="2100" dirty="0">
+                <a:latin typeface="Ramabhadra" panose="02000600000000000000" pitchFamily="2" charset="0"/>
+                <a:cs typeface="Ramabhadra" panose="02000600000000000000" pitchFamily="2" charset="0"/>
+              </a:endParaRPr>
+            </a:p>
+            <a:p>
+              <a:pPr defTabSz="439781"/>
               <a:r>
                 <a:rPr lang="te-IN" sz="2100" dirty="0">
                   <a:latin typeface="Ramabhadra" panose="02000600000000000000" pitchFamily="2" charset="0"/>
                   <a:cs typeface="Ramabhadra" panose="02000600000000000000" pitchFamily="2" charset="0"/>
                 </a:rPr>
-                <a:t>వాడిపోనివ్వక నాకు ఆశ్రయమైతివి నీవు</a:t>
-              </a:r>
-              <a:br>
+                <a:t>మరణ ఛాయలో మెరిసిన నీ ప్రేమ</a:t>
+              </a:r>
+            </a:p>
+            <a:p>
+              <a:pPr defTabSz="439781"/>
+              <a:r>
                 <a:rPr lang="te-IN" sz="2100" dirty="0">
                   <a:latin typeface="Ramabhadra" panose="02000600000000000000" pitchFamily="2" charset="0"/>
                   <a:cs typeface="Ramabhadra" panose="02000600000000000000" pitchFamily="2" charset="0"/>
                 </a:rPr>
-              </a:br>
+                <a:t>నలిగిన బ్రతుకున కురిసిన నీ కృప (2)</a:t>
+              </a:r>
+            </a:p>
+            <a:p>
+              <a:pPr defTabSz="439781"/>
               <a:r>
                 <a:rPr lang="te-IN" sz="2100" dirty="0">
                   <a:latin typeface="Ramabhadra" panose="02000600000000000000" pitchFamily="2" charset="0"/>
                   <a:cs typeface="Ramabhadra" panose="02000600000000000000" pitchFamily="2" charset="0"/>
                 </a:rPr>
-                <a:t>జీవపు ఊటవై బలపరచితివి నా యేసయ్యా    </a:t>
+                <a:t>నన్ను బలపరచెనయ్యా</a:t>
               </a:r>
             </a:p>
             <a:p>
@@ -4592,66 +4469,7 @@
                   <a:latin typeface="Ramabhadra" panose="02000600000000000000" pitchFamily="2" charset="0"/>
                   <a:cs typeface="Ramabhadra" panose="02000600000000000000" pitchFamily="2" charset="0"/>
                 </a:rPr>
-                <a:t>      </a:t>
-              </a:r>
-            </a:p>
-            <a:p>
-              <a:pPr defTabSz="439781"/>
-              <a:r>
-                <a:rPr lang="te-IN" sz="2100" dirty="0">
-                  <a:latin typeface="Ramabhadra" panose="02000600000000000000" pitchFamily="2" charset="0"/>
-                  <a:cs typeface="Ramabhadra" panose="02000600000000000000" pitchFamily="2" charset="0"/>
-                </a:rPr>
-                <a:t>షాలేము రాజా రమ్యమైన సీయోనుకే</a:t>
-              </a:r>
-              <a:br>
-                <a:rPr lang="te-IN" sz="2100" dirty="0">
-                  <a:latin typeface="Ramabhadra" panose="02000600000000000000" pitchFamily="2" charset="0"/>
-                  <a:cs typeface="Ramabhadra" panose="02000600000000000000" pitchFamily="2" charset="0"/>
-                </a:rPr>
-              </a:br>
-              <a:r>
-                <a:rPr lang="te-IN" sz="2100" dirty="0">
-                  <a:latin typeface="Ramabhadra" panose="02000600000000000000" pitchFamily="2" charset="0"/>
-                  <a:cs typeface="Ramabhadra" panose="02000600000000000000" pitchFamily="2" charset="0"/>
-                </a:rPr>
-                <a:t>నను నడిపించుము నీ చిత్తమైన మార్గములో </a:t>
-              </a:r>
-              <a:br>
-                <a:rPr lang="te-IN" sz="2100" dirty="0">
-                  <a:latin typeface="Ramabhadra" panose="02000600000000000000" pitchFamily="2" charset="0"/>
-                  <a:cs typeface="Ramabhadra" panose="02000600000000000000" pitchFamily="2" charset="0"/>
-                </a:rPr>
-              </a:br>
-              <a:r>
-                <a:rPr lang="te-IN" sz="2100" dirty="0">
-                  <a:latin typeface="Ramabhadra" panose="02000600000000000000" pitchFamily="2" charset="0"/>
-                  <a:cs typeface="Ramabhadra" panose="02000600000000000000" pitchFamily="2" charset="0"/>
-                </a:rPr>
-                <a:t>అలసి పోనివ్వక నన్ను నీదు ఆత్మతో నింపి</a:t>
-              </a:r>
-              <a:br>
-                <a:rPr lang="te-IN" sz="2100" dirty="0">
-                  <a:latin typeface="Ramabhadra" panose="02000600000000000000" pitchFamily="2" charset="0"/>
-                  <a:cs typeface="Ramabhadra" panose="02000600000000000000" pitchFamily="2" charset="0"/>
-                </a:rPr>
-              </a:br>
-              <a:r>
-                <a:rPr lang="te-IN" sz="2100" dirty="0">
-                  <a:latin typeface="Ramabhadra" panose="02000600000000000000" pitchFamily="2" charset="0"/>
-                  <a:cs typeface="Ramabhadra" panose="02000600000000000000" pitchFamily="2" charset="0"/>
-                </a:rPr>
-                <a:t>ఆదరణ కర్తవై నను చేర్చుము నీ రాజ్యములో</a:t>
-              </a:r>
-            </a:p>
-            <a:p>
-              <a:pPr defTabSz="439781"/>
-              <a:r>
-                <a:rPr lang="te-IN" sz="2100" dirty="0">
-                  <a:latin typeface="Ramabhadra" panose="02000600000000000000" pitchFamily="2" charset="0"/>
-                  <a:cs typeface="Ramabhadra" panose="02000600000000000000" pitchFamily="2" charset="0"/>
-                </a:rPr>
-                <a:t>     </a:t>
+                <a:t>నిన్నే ఘనపరతునయ్యా (2)</a:t>
               </a:r>
             </a:p>
           </p:txBody>
@@ -4670,7 +4488,7 @@
           </p:nvSpPr>
           <p:spPr>
             <a:xfrm>
-              <a:off x="4300012" y="286334"/>
+              <a:off x="4300012" y="634493"/>
               <a:ext cx="390525" cy="390525"/>
             </a:xfrm>
             <a:prstGeom prst="ellipse">
@@ -4719,6 +4537,120 @@
           </p:txBody>
         </p:sp>
       </p:grpSp>
+      <p:sp>
+        <p:nvSpPr>
+          <p:cNvPr id="14" name="Rectangle 13">
+            <a:extLst>
+              <a:ext uri="{FF2B5EF4-FFF2-40B4-BE49-F238E27FC236}">
+                <a16:creationId xmlns:a16="http://schemas.microsoft.com/office/drawing/2014/main" id="{E95DE29B-C121-4EE2-96D2-B50349B9AEB6}"/>
+              </a:ext>
+            </a:extLst>
+          </p:cNvPr>
+          <p:cNvSpPr/>
+          <p:nvPr/>
+        </p:nvSpPr>
+        <p:spPr>
+          <a:xfrm>
+            <a:off x="7021458" y="6684761"/>
+            <a:ext cx="902677" cy="182031"/>
+          </a:xfrm>
+          <a:prstGeom prst="rect">
+            <a:avLst/>
+          </a:prstGeom>
+          <a:noFill/>
+          <a:ln>
+            <a:noFill/>
+          </a:ln>
+        </p:spPr>
+        <p:style>
+          <a:lnRef idx="2">
+            <a:schemeClr val="accent1">
+              <a:shade val="50000"/>
+            </a:schemeClr>
+          </a:lnRef>
+          <a:fillRef idx="1">
+            <a:schemeClr val="accent1"/>
+          </a:fillRef>
+          <a:effectRef idx="0">
+            <a:schemeClr val="accent1"/>
+          </a:effectRef>
+          <a:fontRef idx="minor">
+            <a:schemeClr val="lt1"/>
+          </a:fontRef>
+        </p:style>
+        <p:txBody>
+          <a:bodyPr rtlCol="0" anchor="ctr"/>
+          <a:lstStyle/>
+          <a:p>
+            <a:pPr algn="ctr"/>
+            <a:r>
+              <a:rPr lang="en-IN" sz="1400" dirty="0">
+                <a:solidFill>
+                  <a:schemeClr val="tx1"/>
+                </a:solidFill>
+              </a:rPr>
+              <a:t>0001</a:t>
+            </a:r>
+          </a:p>
+        </p:txBody>
+      </p:sp>
+      <p:sp>
+        <p:nvSpPr>
+          <p:cNvPr id="15" name="Rectangle 14">
+            <a:extLst>
+              <a:ext uri="{FF2B5EF4-FFF2-40B4-BE49-F238E27FC236}">
+                <a16:creationId xmlns:a16="http://schemas.microsoft.com/office/drawing/2014/main" id="{D968D772-32D4-45FD-A15D-744327419879}"/>
+              </a:ext>
+            </a:extLst>
+          </p:cNvPr>
+          <p:cNvSpPr/>
+          <p:nvPr/>
+        </p:nvSpPr>
+        <p:spPr>
+          <a:xfrm>
+            <a:off x="2010310" y="6679690"/>
+            <a:ext cx="902677" cy="182031"/>
+          </a:xfrm>
+          <a:prstGeom prst="rect">
+            <a:avLst/>
+          </a:prstGeom>
+          <a:noFill/>
+          <a:ln>
+            <a:noFill/>
+          </a:ln>
+        </p:spPr>
+        <p:style>
+          <a:lnRef idx="2">
+            <a:schemeClr val="accent1">
+              <a:shade val="50000"/>
+            </a:schemeClr>
+          </a:lnRef>
+          <a:fillRef idx="1">
+            <a:schemeClr val="accent1"/>
+          </a:fillRef>
+          <a:effectRef idx="0">
+            <a:schemeClr val="accent1"/>
+          </a:effectRef>
+          <a:fontRef idx="minor">
+            <a:schemeClr val="lt1"/>
+          </a:fontRef>
+        </p:style>
+        <p:txBody>
+          <a:bodyPr rtlCol="0" anchor="ctr"/>
+          <a:lstStyle/>
+          <a:p>
+            <a:pPr algn="ctr"/>
+            <a:r>
+              <a:rPr lang="en-IN" sz="1400" dirty="0">
+                <a:solidFill>
+                  <a:schemeClr val="tx1"/>
+                </a:solidFill>
+              </a:rPr>
+              <a:t>0001</a:t>
+            </a:r>
+          </a:p>
+        </p:txBody>
+      </p:sp>
     </p:spTree>
     <p:extLst>
       <p:ext uri="{BB962C8B-B14F-4D97-AF65-F5344CB8AC3E}">

--- a/songsTemplate.pptx
+++ b/songsTemplate.pptx
@@ -255,7 +255,7 @@
           <a:p>
             <a:fld id="{F1102B08-ED9E-409F-B95F-09CAA1DAF6E0}" type="datetimeFigureOut">
               <a:rPr lang="en-IN" smtClean="0"/>
-              <a:t>07-03-2025</a:t>
+              <a:t>22-03-2025</a:t>
             </a:fld>
             <a:endParaRPr lang="en-IN"/>
           </a:p>
@@ -425,7 +425,7 @@
           <a:p>
             <a:fld id="{F1102B08-ED9E-409F-B95F-09CAA1DAF6E0}" type="datetimeFigureOut">
               <a:rPr lang="en-IN" smtClean="0"/>
-              <a:t>07-03-2025</a:t>
+              <a:t>22-03-2025</a:t>
             </a:fld>
             <a:endParaRPr lang="en-IN"/>
           </a:p>
@@ -605,7 +605,7 @@
           <a:p>
             <a:fld id="{F1102B08-ED9E-409F-B95F-09CAA1DAF6E0}" type="datetimeFigureOut">
               <a:rPr lang="en-IN" smtClean="0"/>
-              <a:t>07-03-2025</a:t>
+              <a:t>22-03-2025</a:t>
             </a:fld>
             <a:endParaRPr lang="en-IN"/>
           </a:p>
@@ -775,7 +775,7 @@
           <a:p>
             <a:fld id="{F1102B08-ED9E-409F-B95F-09CAA1DAF6E0}" type="datetimeFigureOut">
               <a:rPr lang="en-IN" smtClean="0"/>
-              <a:t>07-03-2025</a:t>
+              <a:t>22-03-2025</a:t>
             </a:fld>
             <a:endParaRPr lang="en-IN"/>
           </a:p>
@@ -1019,7 +1019,7 @@
           <a:p>
             <a:fld id="{F1102B08-ED9E-409F-B95F-09CAA1DAF6E0}" type="datetimeFigureOut">
               <a:rPr lang="en-IN" smtClean="0"/>
-              <a:t>07-03-2025</a:t>
+              <a:t>22-03-2025</a:t>
             </a:fld>
             <a:endParaRPr lang="en-IN"/>
           </a:p>
@@ -1251,7 +1251,7 @@
           <a:p>
             <a:fld id="{F1102B08-ED9E-409F-B95F-09CAA1DAF6E0}" type="datetimeFigureOut">
               <a:rPr lang="en-IN" smtClean="0"/>
-              <a:t>07-03-2025</a:t>
+              <a:t>22-03-2025</a:t>
             </a:fld>
             <a:endParaRPr lang="en-IN"/>
           </a:p>
@@ -1618,7 +1618,7 @@
           <a:p>
             <a:fld id="{F1102B08-ED9E-409F-B95F-09CAA1DAF6E0}" type="datetimeFigureOut">
               <a:rPr lang="en-IN" smtClean="0"/>
-              <a:t>07-03-2025</a:t>
+              <a:t>22-03-2025</a:t>
             </a:fld>
             <a:endParaRPr lang="en-IN"/>
           </a:p>
@@ -1736,7 +1736,7 @@
           <a:p>
             <a:fld id="{F1102B08-ED9E-409F-B95F-09CAA1DAF6E0}" type="datetimeFigureOut">
               <a:rPr lang="en-IN" smtClean="0"/>
-              <a:t>07-03-2025</a:t>
+              <a:t>22-03-2025</a:t>
             </a:fld>
             <a:endParaRPr lang="en-IN"/>
           </a:p>
@@ -1831,7 +1831,7 @@
           <a:p>
             <a:fld id="{F1102B08-ED9E-409F-B95F-09CAA1DAF6E0}" type="datetimeFigureOut">
               <a:rPr lang="en-IN" smtClean="0"/>
-              <a:t>07-03-2025</a:t>
+              <a:t>22-03-2025</a:t>
             </a:fld>
             <a:endParaRPr lang="en-IN"/>
           </a:p>
@@ -2108,7 +2108,7 @@
           <a:p>
             <a:fld id="{F1102B08-ED9E-409F-B95F-09CAA1DAF6E0}" type="datetimeFigureOut">
               <a:rPr lang="en-IN" smtClean="0"/>
-              <a:t>07-03-2025</a:t>
+              <a:t>22-03-2025</a:t>
             </a:fld>
             <a:endParaRPr lang="en-IN"/>
           </a:p>
@@ -2365,7 +2365,7 @@
           <a:p>
             <a:fld id="{F1102B08-ED9E-409F-B95F-09CAA1DAF6E0}" type="datetimeFigureOut">
               <a:rPr lang="en-IN" smtClean="0"/>
-              <a:t>07-03-2025</a:t>
+              <a:t>22-03-2025</a:t>
             </a:fld>
             <a:endParaRPr lang="en-IN"/>
           </a:p>
@@ -2578,7 +2578,7 @@
           <a:p>
             <a:fld id="{F1102B08-ED9E-409F-B95F-09CAA1DAF6E0}" type="datetimeFigureOut">
               <a:rPr lang="en-IN" smtClean="0"/>
-              <a:t>07-03-2025</a:t>
+              <a:t>22-03-2025</a:t>
             </a:fld>
             <a:endParaRPr lang="en-IN"/>
           </a:p>
@@ -2997,10 +2997,10 @@
         </p:nvGrpSpPr>
         <p:grpSpPr>
           <a:xfrm>
-            <a:off x="160868" y="182032"/>
-            <a:ext cx="4648200" cy="6493935"/>
-            <a:chOff x="160868" y="182032"/>
-            <a:chExt cx="4648200" cy="6493935"/>
+            <a:off x="158534" y="182032"/>
+            <a:ext cx="4650534" cy="6493935"/>
+            <a:chOff x="158534" y="182032"/>
+            <a:chExt cx="4650534" cy="6493935"/>
           </a:xfrm>
         </p:grpSpPr>
         <p:sp>
@@ -3072,8 +3072,8 @@
           </p:nvSpPr>
           <p:spPr>
             <a:xfrm>
-              <a:off x="220079" y="241178"/>
-              <a:ext cx="4483140" cy="6186309"/>
+              <a:off x="158534" y="671398"/>
+              <a:ext cx="4648200" cy="5262979"/>
             </a:xfrm>
             <a:prstGeom prst="rect">
               <a:avLst/>
@@ -3087,158 +3087,173 @@
             <a:lstStyle/>
             <a:p>
               <a:r>
-                <a:rPr lang="te-IN" sz="2200" dirty="0">
-                  <a:latin typeface="Ramabhadra" panose="02000600000000000000" pitchFamily="2" charset="0"/>
-                  <a:cs typeface="Ramabhadra" panose="02000600000000000000" pitchFamily="2" charset="0"/>
-                </a:rPr>
-                <a:t>స్తోత్రము స్తుతి స్తోత్రము  </a:t>
-              </a:r>
-            </a:p>
-            <a:p>
-              <a:r>
-                <a:rPr lang="te-IN" sz="2200" dirty="0">
-                  <a:latin typeface="Ramabhadra" panose="02000600000000000000" pitchFamily="2" charset="0"/>
-                  <a:cs typeface="Ramabhadra" panose="02000600000000000000" pitchFamily="2" charset="0"/>
-                </a:rPr>
-                <a:t>చెల్లించుడి యేసుకే (2)</a:t>
-              </a:r>
-            </a:p>
-            <a:p>
-              <a:r>
-                <a:rPr lang="te-IN" sz="2200" dirty="0">
-                  <a:latin typeface="Ramabhadra" panose="02000600000000000000" pitchFamily="2" charset="0"/>
-                  <a:cs typeface="Ramabhadra" panose="02000600000000000000" pitchFamily="2" charset="0"/>
-                </a:rPr>
-                <a:t>రాజాధిరాజు దేవాధిదేవుడు </a:t>
-              </a:r>
-            </a:p>
-            <a:p>
-              <a:r>
-                <a:rPr lang="te-IN" sz="2200" dirty="0">
-                  <a:latin typeface="Ramabhadra" panose="02000600000000000000" pitchFamily="2" charset="0"/>
-                  <a:cs typeface="Ramabhadra" panose="02000600000000000000" pitchFamily="2" charset="0"/>
-                </a:rPr>
-                <a:t>స్తుతులకు పాత్రుడు</a:t>
-              </a:r>
-            </a:p>
-            <a:p>
-              <a:endParaRPr lang="te-IN" sz="2200" dirty="0">
+                <a:rPr lang="te-IN" sz="2100" dirty="0">
+                  <a:latin typeface="Ramabhadra" panose="02000600000000000000" pitchFamily="2" charset="0"/>
+                  <a:cs typeface="Ramabhadra" panose="02000600000000000000" pitchFamily="2" charset="0"/>
+                </a:rPr>
+                <a:t>సీయెను పుర మదిగో మహా దేవుని పట్టణ మదిగో రారాజు రానైయున్నాడు రయమున నినుగొని సిద్దపడుమా సంసిద్దమగుమా</a:t>
+              </a:r>
+              <a:endParaRPr lang="en-IN" sz="2100" dirty="0">
                 <a:latin typeface="Ramabhadra" panose="02000600000000000000" pitchFamily="2" charset="0"/>
                 <a:cs typeface="Ramabhadra" panose="02000600000000000000" pitchFamily="2" charset="0"/>
               </a:endParaRPr>
             </a:p>
             <a:p>
               <a:r>
-                <a:rPr lang="te-IN" sz="2200" dirty="0">
-                  <a:latin typeface="Ramabhadra" panose="02000600000000000000" pitchFamily="2" charset="0"/>
-                  <a:cs typeface="Ramabhadra" panose="02000600000000000000" pitchFamily="2" charset="0"/>
-                </a:rPr>
-                <a:t>మనుష్య కుమారుడై </a:t>
-              </a:r>
-            </a:p>
-            <a:p>
-              <a:r>
-                <a:rPr lang="te-IN" sz="2200" dirty="0">
-                  <a:latin typeface="Ramabhadra" panose="02000600000000000000" pitchFamily="2" charset="0"/>
-                  <a:cs typeface="Ramabhadra" panose="02000600000000000000" pitchFamily="2" charset="0"/>
-                </a:rPr>
-                <a:t>మనుజుల పాపముకై</a:t>
-              </a:r>
-            </a:p>
-            <a:p>
-              <a:r>
-                <a:rPr lang="te-IN" sz="2200" dirty="0">
-                  <a:latin typeface="Ramabhadra" panose="02000600000000000000" pitchFamily="2" charset="0"/>
-                  <a:cs typeface="Ramabhadra" panose="02000600000000000000" pitchFamily="2" charset="0"/>
-                </a:rPr>
-                <a:t>మహిలోన వెలసెను </a:t>
-              </a:r>
-            </a:p>
-            <a:p>
-              <a:r>
-                <a:rPr lang="te-IN" sz="2200" dirty="0">
-                  <a:latin typeface="Ramabhadra" panose="02000600000000000000" pitchFamily="2" charset="0"/>
-                  <a:cs typeface="Ramabhadra" panose="02000600000000000000" pitchFamily="2" charset="0"/>
-                </a:rPr>
-                <a:t>మరణించి లెచేను (2)</a:t>
-              </a:r>
-            </a:p>
-            <a:p>
-              <a:r>
-                <a:rPr lang="te-IN" sz="2200" dirty="0">
-                  <a:latin typeface="Ramabhadra" panose="02000600000000000000" pitchFamily="2" charset="0"/>
-                  <a:cs typeface="Ramabhadra" panose="02000600000000000000" pitchFamily="2" charset="0"/>
-                </a:rPr>
-                <a:t>మహిమ స్వరూపుడు </a:t>
-              </a:r>
-            </a:p>
-            <a:p>
-              <a:r>
-                <a:rPr lang="te-IN" sz="2200" dirty="0">
-                  <a:latin typeface="Ramabhadra" panose="02000600000000000000" pitchFamily="2" charset="0"/>
-                  <a:cs typeface="Ramabhadra" panose="02000600000000000000" pitchFamily="2" charset="0"/>
-                </a:rPr>
-                <a:t>మహిమ స్వరూపుడు</a:t>
-              </a:r>
-            </a:p>
-            <a:p>
-              <a:endParaRPr lang="te-IN" sz="2200" dirty="0">
+                <a:rPr lang="te-IN" sz="2100" dirty="0">
+                  <a:latin typeface="Ramabhadra" panose="02000600000000000000" pitchFamily="2" charset="0"/>
+                  <a:cs typeface="Ramabhadra" panose="02000600000000000000" pitchFamily="2" charset="0"/>
+                </a:rPr>
+                <a:t>సంఘవధువా సిద్దపడుమా</a:t>
+              </a:r>
+              <a:endParaRPr lang="en-IN" sz="2100" dirty="0">
                 <a:latin typeface="Ramabhadra" panose="02000600000000000000" pitchFamily="2" charset="0"/>
                 <a:cs typeface="Ramabhadra" panose="02000600000000000000" pitchFamily="2" charset="0"/>
               </a:endParaRPr>
             </a:p>
             <a:p>
-              <a:r>
-                <a:rPr lang="te-IN" sz="2200" dirty="0">
-                  <a:latin typeface="Ramabhadra" panose="02000600000000000000" pitchFamily="2" charset="0"/>
-                  <a:cs typeface="Ramabhadra" panose="02000600000000000000" pitchFamily="2" charset="0"/>
-                </a:rPr>
-                <a:t>పాపపు వస్త్రము మార్చి </a:t>
-              </a:r>
-            </a:p>
-            <a:p>
-              <a:r>
-                <a:rPr lang="te-IN" sz="2200" dirty="0">
-                  <a:latin typeface="Ramabhadra" panose="02000600000000000000" pitchFamily="2" charset="0"/>
-                  <a:cs typeface="Ramabhadra" panose="02000600000000000000" pitchFamily="2" charset="0"/>
-                </a:rPr>
-                <a:t>నీతిమంతులుగ తీర్చి</a:t>
-              </a:r>
-            </a:p>
-            <a:p>
-              <a:r>
-                <a:rPr lang="te-IN" sz="2200" dirty="0">
-                  <a:latin typeface="Ramabhadra" panose="02000600000000000000" pitchFamily="2" charset="0"/>
-                  <a:cs typeface="Ramabhadra" panose="02000600000000000000" pitchFamily="2" charset="0"/>
-                </a:rPr>
-                <a:t>పరిశుద్దులతో చేర్చి  </a:t>
-              </a:r>
-            </a:p>
-            <a:p>
-              <a:r>
-                <a:rPr lang="te-IN" sz="2200" dirty="0">
-                  <a:latin typeface="Ramabhadra" panose="02000600000000000000" pitchFamily="2" charset="0"/>
-                  <a:cs typeface="Ramabhadra" panose="02000600000000000000" pitchFamily="2" charset="0"/>
-                </a:rPr>
-                <a:t>పరమ సౌభాగ్యము నిచ్చి (2)</a:t>
-              </a:r>
-            </a:p>
-            <a:p>
-              <a:r>
-                <a:rPr lang="te-IN" sz="2200" dirty="0">
-                  <a:latin typeface="Ramabhadra" panose="02000600000000000000" pitchFamily="2" charset="0"/>
-                  <a:cs typeface="Ramabhadra" panose="02000600000000000000" pitchFamily="2" charset="0"/>
-                </a:rPr>
-                <a:t>మహిమ స్వరూపుడు </a:t>
-              </a:r>
-            </a:p>
-            <a:p>
-              <a:r>
-                <a:rPr lang="te-IN" sz="2200" dirty="0">
-                  <a:latin typeface="Ramabhadra" panose="02000600000000000000" pitchFamily="2" charset="0"/>
-                  <a:cs typeface="Ramabhadra" panose="02000600000000000000" pitchFamily="2" charset="0"/>
-                </a:rPr>
-                <a:t>మహిమ స్వరూపుడు</a:t>
+              <a:endParaRPr lang="en-IN" sz="2100" dirty="0">
+                <a:latin typeface="Ramabhadra" panose="02000600000000000000" pitchFamily="2" charset="0"/>
+                <a:cs typeface="Ramabhadra" panose="02000600000000000000" pitchFamily="2" charset="0"/>
+              </a:endParaRPr>
+            </a:p>
+            <a:p>
+              <a:r>
+                <a:rPr lang="te-IN" sz="2100" dirty="0">
+                  <a:latin typeface="Ramabhadra" panose="02000600000000000000" pitchFamily="2" charset="0"/>
+                  <a:cs typeface="Ramabhadra" panose="02000600000000000000" pitchFamily="2" charset="0"/>
+                </a:rPr>
+                <a:t>అధికారులలో ప్రధానుడ అందరిలో ఘననీయుడ</a:t>
+              </a:r>
+              <a:endParaRPr lang="en-IN" sz="2100" dirty="0">
+                <a:latin typeface="Ramabhadra" panose="02000600000000000000" pitchFamily="2" charset="0"/>
+                <a:cs typeface="Ramabhadra" panose="02000600000000000000" pitchFamily="2" charset="0"/>
+              </a:endParaRPr>
+            </a:p>
+            <a:p>
+              <a:r>
+                <a:rPr lang="te-IN" sz="2100" dirty="0">
+                  <a:latin typeface="Ramabhadra" panose="02000600000000000000" pitchFamily="2" charset="0"/>
+                  <a:cs typeface="Ramabhadra" panose="02000600000000000000" pitchFamily="2" charset="0"/>
+                </a:rPr>
+                <a:t>అతి సుందరుడ మనో హరుడు</a:t>
+              </a:r>
+              <a:r>
+                <a:rPr lang="en-IN" sz="2100" dirty="0">
+                  <a:latin typeface="Ramabhadra" panose="02000600000000000000" pitchFamily="2" charset="0"/>
+                  <a:cs typeface="Ramabhadra" panose="02000600000000000000" pitchFamily="2" charset="0"/>
+                </a:rPr>
+                <a:t> </a:t>
+              </a:r>
+              <a:r>
+                <a:rPr lang="te-IN" sz="2100" dirty="0">
+                  <a:latin typeface="Ramabhadra" panose="02000600000000000000" pitchFamily="2" charset="0"/>
+                  <a:cs typeface="Ramabhadra" panose="02000600000000000000" pitchFamily="2" charset="0"/>
+                </a:rPr>
+                <a:t>మనో వీరుడు</a:t>
+              </a:r>
+              <a:endParaRPr lang="en-IN" sz="2100" dirty="0">
+                <a:latin typeface="Ramabhadra" panose="02000600000000000000" pitchFamily="2" charset="0"/>
+                <a:cs typeface="Ramabhadra" panose="02000600000000000000" pitchFamily="2" charset="0"/>
+              </a:endParaRPr>
+            </a:p>
+            <a:p>
+              <a:r>
+                <a:rPr lang="te-IN" sz="2100" dirty="0">
+                  <a:latin typeface="Ramabhadra" panose="02000600000000000000" pitchFamily="2" charset="0"/>
+                  <a:cs typeface="Ramabhadra" panose="02000600000000000000" pitchFamily="2" charset="0"/>
+                </a:rPr>
+                <a:t>మన ప్రభు యేసు</a:t>
+              </a:r>
+              <a:endParaRPr lang="en-IN" sz="2100" dirty="0">
+                <a:latin typeface="Ramabhadra" panose="02000600000000000000" pitchFamily="2" charset="0"/>
+                <a:cs typeface="Ramabhadra" panose="02000600000000000000" pitchFamily="2" charset="0"/>
+              </a:endParaRPr>
+            </a:p>
+            <a:p>
+              <a:endParaRPr lang="en-IN" sz="2100" dirty="0">
+                <a:latin typeface="Ramabhadra" panose="02000600000000000000" pitchFamily="2" charset="0"/>
+                <a:cs typeface="Ramabhadra" panose="02000600000000000000" pitchFamily="2" charset="0"/>
+              </a:endParaRPr>
+            </a:p>
+            <a:p>
+              <a:r>
+                <a:rPr lang="te-IN" sz="2100" dirty="0">
+                  <a:latin typeface="Ramabhadra" panose="02000600000000000000" pitchFamily="2" charset="0"/>
+                  <a:cs typeface="Ramabhadra" panose="02000600000000000000" pitchFamily="2" charset="0"/>
+                </a:rPr>
+                <a:t>నిశ్చల రాజ్య స్థాపకుడు నిరంతం యేలు యువరాజు</a:t>
+              </a:r>
+              <a:endParaRPr lang="en-IN" sz="2100" dirty="0">
+                <a:latin typeface="Ramabhadra" panose="02000600000000000000" pitchFamily="2" charset="0"/>
+                <a:cs typeface="Ramabhadra" panose="02000600000000000000" pitchFamily="2" charset="0"/>
+              </a:endParaRPr>
+            </a:p>
+            <a:p>
+              <a:r>
+                <a:rPr lang="te-IN" sz="2100" dirty="0">
+                  <a:latin typeface="Ramabhadra" panose="02000600000000000000" pitchFamily="2" charset="0"/>
+                  <a:cs typeface="Ramabhadra" panose="02000600000000000000" pitchFamily="2" charset="0"/>
+                </a:rPr>
+                <a:t>ఆదియు అంతము లేని వాడు</a:t>
+              </a:r>
+              <a:endParaRPr lang="en-IN" sz="2100" dirty="0">
+                <a:latin typeface="Ramabhadra" panose="02000600000000000000" pitchFamily="2" charset="0"/>
+                <a:cs typeface="Ramabhadra" panose="02000600000000000000" pitchFamily="2" charset="0"/>
+              </a:endParaRPr>
+            </a:p>
+            <a:p>
+              <a:r>
+                <a:rPr lang="te-IN" sz="2100" dirty="0">
+                  <a:latin typeface="Ramabhadra" panose="02000600000000000000" pitchFamily="2" charset="0"/>
+                  <a:cs typeface="Ramabhadra" panose="02000600000000000000" pitchFamily="2" charset="0"/>
+                </a:rPr>
+                <a:t>తేజోమయుడు తేజోమంతుడు</a:t>
+              </a:r>
+              <a:endParaRPr lang="en-IN" sz="2100" dirty="0">
+                <a:latin typeface="Ramabhadra" panose="02000600000000000000" pitchFamily="2" charset="0"/>
+                <a:cs typeface="Ramabhadra" panose="02000600000000000000" pitchFamily="2" charset="0"/>
+              </a:endParaRPr>
+            </a:p>
+            <a:p>
+              <a:endParaRPr lang="en-IN" sz="2100" dirty="0">
+                <a:latin typeface="Ramabhadra" panose="02000600000000000000" pitchFamily="2" charset="0"/>
+                <a:cs typeface="Ramabhadra" panose="02000600000000000000" pitchFamily="2" charset="0"/>
+              </a:endParaRPr>
+            </a:p>
+            <a:p>
+              <a:r>
+                <a:rPr lang="te-IN" sz="2100" dirty="0">
+                  <a:latin typeface="Ramabhadra" panose="02000600000000000000" pitchFamily="2" charset="0"/>
+                  <a:cs typeface="Ramabhadra" panose="02000600000000000000" pitchFamily="2" charset="0"/>
+                </a:rPr>
+                <a:t>మృతులను లేవు సజీవుడు ముక్తినొసగు రక్షకుడేసు</a:t>
+              </a:r>
+              <a:endParaRPr lang="en-IN" sz="2100" dirty="0">
+                <a:latin typeface="Ramabhadra" panose="02000600000000000000" pitchFamily="2" charset="0"/>
+                <a:cs typeface="Ramabhadra" panose="02000600000000000000" pitchFamily="2" charset="0"/>
+              </a:endParaRPr>
+            </a:p>
+            <a:p>
+              <a:r>
+                <a:rPr lang="te-IN" sz="2100" dirty="0">
+                  <a:latin typeface="Ramabhadra" panose="02000600000000000000" pitchFamily="2" charset="0"/>
+                  <a:cs typeface="Ramabhadra" panose="02000600000000000000" pitchFamily="2" charset="0"/>
+                </a:rPr>
+                <a:t>ప్రధాన దూత శబ్దముతో</a:t>
+              </a:r>
+              <a:endParaRPr lang="en-IN" sz="2100" dirty="0">
+                <a:latin typeface="Ramabhadra" panose="02000600000000000000" pitchFamily="2" charset="0"/>
+                <a:cs typeface="Ramabhadra" panose="02000600000000000000" pitchFamily="2" charset="0"/>
+              </a:endParaRPr>
+            </a:p>
+            <a:p>
+              <a:r>
+                <a:rPr lang="te-IN" sz="2100" dirty="0">
+                  <a:latin typeface="Ramabhadra" panose="02000600000000000000" pitchFamily="2" charset="0"/>
+                  <a:cs typeface="Ramabhadra" panose="02000600000000000000" pitchFamily="2" charset="0"/>
+                </a:rPr>
+                <a:t>ఆర్భాటముతో ఆర్భాటముతో</a:t>
               </a:r>
             </a:p>
           </p:txBody>
@@ -3419,7 +3434,7 @@
                   <a:latin typeface="Ramabhadra" panose="02000600000000000000" pitchFamily="2" charset="0"/>
                   <a:cs typeface="Ramabhadra" panose="02000600000000000000" pitchFamily="2" charset="0"/>
                 </a:rPr>
-                <a:t>జీవించు చున్నవాడా –</a:t>
+                <a:t>యేసు నీవే కావాలయ్యా </a:t>
               </a:r>
             </a:p>
             <a:p>
@@ -3433,7 +3448,7 @@
                   <a:latin typeface="Ramabhadra" panose="02000600000000000000" pitchFamily="2" charset="0"/>
                   <a:cs typeface="Ramabhadra" panose="02000600000000000000" pitchFamily="2" charset="0"/>
                 </a:rPr>
-                <a:t>సజీవుడవైన దేవా</a:t>
+                <a:t>నాతో కూడ రావాలయ్యా</a:t>
               </a:r>
             </a:p>
             <a:p>
@@ -3447,7 +3462,7 @@
                   <a:latin typeface="Ramabhadra" panose="02000600000000000000" pitchFamily="2" charset="0"/>
                   <a:cs typeface="Ramabhadra" panose="02000600000000000000" pitchFamily="2" charset="0"/>
                 </a:rPr>
-                <a:t>కొలుతుం నిరతం –</a:t>
+                <a:t>ఘనుడ నీ దివ్య సన్నిధి</a:t>
               </a:r>
             </a:p>
             <a:p>
@@ -3461,7 +3476,21 @@
                   <a:latin typeface="Ramabhadra" panose="02000600000000000000" pitchFamily="2" charset="0"/>
                   <a:cs typeface="Ramabhadra" panose="02000600000000000000" pitchFamily="2" charset="0"/>
                 </a:rPr>
-                <a:t>మము జీవింప జేయుమయ్యా</a:t>
+                <a:t>నను ఆదుకునే నా పెన్నిధి</a:t>
+              </a:r>
+            </a:p>
+            <a:p>
+              <a:pPr>
+                <a:lnSpc>
+                  <a:spcPts val="2600"/>
+                </a:lnSpc>
+              </a:pPr>
+              <a:r>
+                <a:rPr lang="te-IN" sz="2400" dirty="0">
+                  <a:latin typeface="Ramabhadra" panose="02000600000000000000" pitchFamily="2" charset="0"/>
+                  <a:cs typeface="Ramabhadra" panose="02000600000000000000" pitchFamily="2" charset="0"/>
+                </a:rPr>
+                <a:t>నీవే కావాలయ్యా నాతో రావాలయ్యా </a:t>
               </a:r>
             </a:p>
             <a:p>
@@ -3486,7 +3515,7 @@
                   <a:latin typeface="Ramabhadra" panose="02000600000000000000" pitchFamily="2" charset="0"/>
                   <a:cs typeface="Ramabhadra" panose="02000600000000000000" pitchFamily="2" charset="0"/>
                 </a:rPr>
-                <a:t>ఐగుప్తు దాస్యం నుండి విడుదలనిచ్చిన దేవా</a:t>
+                <a:t>నీవే నాతో వస్తే దిగులు నాకుండదు</a:t>
               </a:r>
             </a:p>
             <a:p>
@@ -3500,35 +3529,7 @@
                   <a:latin typeface="Ramabhadra" panose="02000600000000000000" pitchFamily="2" charset="0"/>
                   <a:cs typeface="Ramabhadra" panose="02000600000000000000" pitchFamily="2" charset="0"/>
                 </a:rPr>
-                <a:t>ఎండిన బండనుండి జలముల నిచ్చిన దేవా</a:t>
-              </a:r>
-            </a:p>
-            <a:p>
-              <a:pPr>
-                <a:lnSpc>
-                  <a:spcPts val="2600"/>
-                </a:lnSpc>
-              </a:pPr>
-              <a:r>
-                <a:rPr lang="te-IN" sz="2400" dirty="0">
-                  <a:latin typeface="Ramabhadra" panose="02000600000000000000" pitchFamily="2" charset="0"/>
-                  <a:cs typeface="Ramabhadra" panose="02000600000000000000" pitchFamily="2" charset="0"/>
-                </a:rPr>
-                <a:t>నీవే జీవదాత నీవే ముక్తి దాత</a:t>
-              </a:r>
-            </a:p>
-            <a:p>
-              <a:pPr>
-                <a:lnSpc>
-                  <a:spcPts val="2600"/>
-                </a:lnSpc>
-              </a:pPr>
-              <a:r>
-                <a:rPr lang="te-IN" sz="2400" dirty="0">
-                  <a:latin typeface="Ramabhadra" panose="02000600000000000000" pitchFamily="2" charset="0"/>
-                  <a:cs typeface="Ramabhadra" panose="02000600000000000000" pitchFamily="2" charset="0"/>
-                </a:rPr>
-                <a:t>నీవేసు దేవుడవు</a:t>
+                <a:t>నీవే ఆజ్ఞాపిస్తే తెగులు నన్నంటదు  </a:t>
               </a:r>
             </a:p>
             <a:p>
@@ -3553,7 +3554,7 @@
                   <a:latin typeface="Ramabhadra" panose="02000600000000000000" pitchFamily="2" charset="0"/>
                   <a:cs typeface="Ramabhadra" panose="02000600000000000000" pitchFamily="2" charset="0"/>
                 </a:rPr>
-                <a:t>సింహపు నోటినుండి అగ్ని గుండము నుండి</a:t>
+                <a:t>నీవే నాతో వస్తే కొరత నాకుండదు</a:t>
               </a:r>
             </a:p>
             <a:p>
@@ -3567,7 +3568,7 @@
                   <a:latin typeface="Ramabhadra" panose="02000600000000000000" pitchFamily="2" charset="0"/>
                   <a:cs typeface="Ramabhadra" panose="02000600000000000000" pitchFamily="2" charset="0"/>
                 </a:rPr>
-                <a:t>రక్షించిన దేవా రక్షణ కారకుడా</a:t>
+                <a:t>నీవే ఆజ్ఞాపిస్తే క్షయత నన్నంటదు</a:t>
               </a:r>
             </a:p>
             <a:p>
@@ -3576,14 +3577,7 @@
                   <a:spcPts val="2600"/>
                 </a:lnSpc>
               </a:pPr>
-              <a:r>
-                <a:rPr lang="te-IN" sz="2400" dirty="0">
-                  <a:latin typeface="Ramabhadra" panose="02000600000000000000" pitchFamily="2" charset="0"/>
-                  <a:cs typeface="Ramabhadra" panose="02000600000000000000" pitchFamily="2" charset="0"/>
-                </a:rPr>
-                <a:t>నీవే జీవదాత నీవే ముక్తి దాత</a:t>
-              </a:r>
-              <a:endParaRPr lang="en-IN" sz="2400" dirty="0">
+              <a:endParaRPr lang="te-IN" sz="2400" dirty="0">
                 <a:latin typeface="Ramabhadra" panose="02000600000000000000" pitchFamily="2" charset="0"/>
                 <a:cs typeface="Ramabhadra" panose="02000600000000000000" pitchFamily="2" charset="0"/>
               </a:endParaRPr>
@@ -3599,7 +3593,21 @@
                   <a:latin typeface="Ramabhadra" panose="02000600000000000000" pitchFamily="2" charset="0"/>
                   <a:cs typeface="Ramabhadra" panose="02000600000000000000" pitchFamily="2" charset="0"/>
                 </a:rPr>
-                <a:t>నీవేసు దేవుడవు</a:t>
+                <a:t>నీవే నాతో వస్తే ఓటమి నాకుండదు</a:t>
+              </a:r>
+            </a:p>
+            <a:p>
+              <a:pPr>
+                <a:lnSpc>
+                  <a:spcPts val="2600"/>
+                </a:lnSpc>
+              </a:pPr>
+              <a:r>
+                <a:rPr lang="te-IN" sz="2400" dirty="0">
+                  <a:latin typeface="Ramabhadra" panose="02000600000000000000" pitchFamily="2" charset="0"/>
+                  <a:cs typeface="Ramabhadra" panose="02000600000000000000" pitchFamily="2" charset="0"/>
+                </a:rPr>
+                <a:t>నీవే ఆజ్ఞాపిస్తే చీకటి నన్నంటదు</a:t>
               </a:r>
             </a:p>
           </p:txBody>
@@ -3719,7 +3727,7 @@
                   <a:schemeClr val="tx1"/>
                 </a:solidFill>
               </a:rPr>
-              <a:t>0001</a:t>
+              <a:t>0002</a:t>
             </a:r>
           </a:p>
         </p:txBody>
@@ -3776,7 +3784,7 @@
                   <a:schemeClr val="tx1"/>
                 </a:solidFill>
               </a:rPr>
-              <a:t>0001</a:t>
+              <a:t>0002</a:t>
             </a:r>
           </a:p>
         </p:txBody>
@@ -3901,7 +3909,7 @@
           <p:spPr>
             <a:xfrm>
               <a:off x="271993" y="272608"/>
-              <a:ext cx="5395611" cy="6186309"/>
+              <a:ext cx="5395611" cy="6370975"/>
             </a:xfrm>
             <a:prstGeom prst="rect">
               <a:avLst/>
@@ -3918,11 +3926,11 @@
                 <a:defRPr/>
               </a:pPr>
               <a:r>
-                <a:rPr lang="te-IN" sz="2200" dirty="0">
-                  <a:latin typeface="Ramabhadra" panose="02000600000000000000" pitchFamily="2" charset="0"/>
-                  <a:cs typeface="Ramabhadra" panose="02000600000000000000" pitchFamily="2" charset="0"/>
-                </a:rPr>
-                <a:t>ప్రేమించెదన్ అధికముగా</a:t>
+                <a:rPr lang="te-IN" sz="2400" dirty="0">
+                  <a:latin typeface="Ramabhadra" panose="02000600000000000000" pitchFamily="2" charset="0"/>
+                  <a:cs typeface="Ramabhadra" panose="02000600000000000000" pitchFamily="2" charset="0"/>
+                </a:rPr>
+                <a:t>రాజా నీ సన్నిధిలోనే ఉంటానయ్య</a:t>
               </a:r>
             </a:p>
             <a:p>
@@ -3930,11 +3938,11 @@
                 <a:defRPr/>
               </a:pPr>
               <a:r>
-                <a:rPr lang="te-IN" sz="2200" dirty="0">
-                  <a:latin typeface="Ramabhadra" panose="02000600000000000000" pitchFamily="2" charset="0"/>
-                  <a:cs typeface="Ramabhadra" panose="02000600000000000000" pitchFamily="2" charset="0"/>
-                </a:rPr>
-                <a:t>ఆరాధింతున్ ఆసక్తితో (2)</a:t>
+                <a:rPr lang="te-IN" sz="2400" dirty="0">
+                  <a:latin typeface="Ramabhadra" panose="02000600000000000000" pitchFamily="2" charset="0"/>
+                  <a:cs typeface="Ramabhadra" panose="02000600000000000000" pitchFamily="2" charset="0"/>
+                </a:rPr>
+                <a:t>మనసారా ఆరాధిస్తు బ్రతికేస్తానయ్య</a:t>
               </a:r>
             </a:p>
             <a:p>
@@ -3942,11 +3950,11 @@
                 <a:defRPr/>
               </a:pPr>
               <a:r>
-                <a:rPr lang="te-IN" sz="2200" dirty="0">
-                  <a:latin typeface="Ramabhadra" panose="02000600000000000000" pitchFamily="2" charset="0"/>
-                  <a:cs typeface="Ramabhadra" panose="02000600000000000000" pitchFamily="2" charset="0"/>
-                </a:rPr>
-                <a:t>నిన్ను పూర్ణ మనసుతో ఆరాధింతున్</a:t>
+                <a:rPr lang="te-IN" sz="2400" dirty="0">
+                  <a:latin typeface="Ramabhadra" panose="02000600000000000000" pitchFamily="2" charset="0"/>
+                  <a:cs typeface="Ramabhadra" panose="02000600000000000000" pitchFamily="2" charset="0"/>
+                </a:rPr>
+                <a:t>నేనుండలేనయ్య నే బ్రతుకలేనయ్య</a:t>
               </a:r>
             </a:p>
             <a:p>
@@ -3954,11 +3962,11 @@
                 <a:defRPr/>
               </a:pPr>
               <a:r>
-                <a:rPr lang="te-IN" sz="2200" dirty="0">
-                  <a:latin typeface="Ramabhadra" panose="02000600000000000000" pitchFamily="2" charset="0"/>
-                  <a:cs typeface="Ramabhadra" panose="02000600000000000000" pitchFamily="2" charset="0"/>
-                </a:rPr>
-                <a:t>పూర్ణ బలముతో ప్రేమించెదన్</a:t>
+                <a:rPr lang="te-IN" sz="2400" dirty="0">
+                  <a:latin typeface="Ramabhadra" panose="02000600000000000000" pitchFamily="2" charset="0"/>
+                  <a:cs typeface="Ramabhadra" panose="02000600000000000000" pitchFamily="2" charset="0"/>
+                </a:rPr>
+                <a:t>నీవే లేకుండా నేనుండలేనయ్య</a:t>
               </a:r>
             </a:p>
             <a:p>
@@ -3966,30 +3974,87 @@
                 <a:defRPr/>
               </a:pPr>
               <a:r>
-                <a:rPr lang="te-IN" sz="2200" dirty="0">
-                  <a:latin typeface="Ramabhadra" panose="02000600000000000000" pitchFamily="2" charset="0"/>
-                  <a:cs typeface="Ramabhadra" panose="02000600000000000000" pitchFamily="2" charset="0"/>
-                </a:rPr>
-                <a:t>ఆరాధన ఆరాధనా ఆ.. ఆ.. </a:t>
+                <a:rPr lang="te-IN" sz="2400" dirty="0">
+                  <a:latin typeface="Ramabhadra" panose="02000600000000000000" pitchFamily="2" charset="0"/>
+                  <a:cs typeface="Ramabhadra" panose="02000600000000000000" pitchFamily="2" charset="0"/>
+                </a:rPr>
+                <a:t>నీ తోడే లేకుండా నే బ్రతుకలేనయ్య</a:t>
               </a:r>
             </a:p>
             <a:p>
               <a:pPr defTabSz="439781">
                 <a:defRPr/>
               </a:pPr>
-              <a:r>
-                <a:rPr lang="te-IN" sz="2200" dirty="0">
-                  <a:latin typeface="Ramabhadra" panose="02000600000000000000" pitchFamily="2" charset="0"/>
-                  <a:cs typeface="Ramabhadra" panose="02000600000000000000" pitchFamily="2" charset="0"/>
-                </a:rPr>
-                <a:t>ఆరాధన ఆరాధనా (2)</a:t>
-              </a:r>
+              <a:endParaRPr lang="te-IN" sz="2400" dirty="0">
+                <a:latin typeface="Ramabhadra" panose="02000600000000000000" pitchFamily="2" charset="0"/>
+                <a:cs typeface="Ramabhadra" panose="02000600000000000000" pitchFamily="2" charset="0"/>
+              </a:endParaRPr>
             </a:p>
             <a:p>
               <a:pPr defTabSz="439781">
                 <a:defRPr/>
               </a:pPr>
-              <a:endParaRPr lang="te-IN" sz="2200" dirty="0">
+              <a:r>
+                <a:rPr lang="te-IN" sz="2400" dirty="0">
+                  <a:latin typeface="Ramabhadra" panose="02000600000000000000" pitchFamily="2" charset="0"/>
+                  <a:cs typeface="Ramabhadra" panose="02000600000000000000" pitchFamily="2" charset="0"/>
+                </a:rPr>
+                <a:t>నీ సన్నిధానములో సంపూర్ణ సంతోషం</a:t>
+              </a:r>
+            </a:p>
+            <a:p>
+              <a:pPr defTabSz="439781">
+                <a:defRPr/>
+              </a:pPr>
+              <a:r>
+                <a:rPr lang="te-IN" sz="2400" dirty="0">
+                  <a:latin typeface="Ramabhadra" panose="02000600000000000000" pitchFamily="2" charset="0"/>
+                  <a:cs typeface="Ramabhadra" panose="02000600000000000000" pitchFamily="2" charset="0"/>
+                </a:rPr>
+                <a:t>ఆరాధించుకొనే విలువైన అవకాశం</a:t>
+              </a:r>
+            </a:p>
+            <a:p>
+              <a:pPr defTabSz="439781">
+                <a:defRPr/>
+              </a:pPr>
+              <a:r>
+                <a:rPr lang="te-IN" sz="2400" dirty="0">
+                  <a:latin typeface="Ramabhadra" panose="02000600000000000000" pitchFamily="2" charset="0"/>
+                  <a:cs typeface="Ramabhadra" panose="02000600000000000000" pitchFamily="2" charset="0"/>
+                </a:rPr>
+                <a:t>కోల్పోయినవన్ని నాకు ఇచ్చుటకును</a:t>
+              </a:r>
+            </a:p>
+            <a:p>
+              <a:pPr defTabSz="439781">
+                <a:defRPr/>
+              </a:pPr>
+              <a:r>
+                <a:rPr lang="te-IN" sz="2400" dirty="0">
+                  <a:latin typeface="Ramabhadra" panose="02000600000000000000" pitchFamily="2" charset="0"/>
+                  <a:cs typeface="Ramabhadra" panose="02000600000000000000" pitchFamily="2" charset="0"/>
+                </a:rPr>
+                <a:t>బాధల నుండి బ్రతికించుటకును</a:t>
+              </a:r>
+            </a:p>
+            <a:p>
+              <a:pPr defTabSz="439781">
+                <a:defRPr/>
+              </a:pPr>
+              <a:r>
+                <a:rPr lang="te-IN" sz="2400" dirty="0">
+                  <a:latin typeface="Ramabhadra" panose="02000600000000000000" pitchFamily="2" charset="0"/>
+                  <a:cs typeface="Ramabhadra" panose="02000600000000000000" pitchFamily="2" charset="0"/>
+                </a:rPr>
+                <a:t>నీవే రాకపోతే నేనేమైపోదునో</a:t>
+              </a:r>
+            </a:p>
+            <a:p>
+              <a:pPr defTabSz="439781">
+                <a:defRPr/>
+              </a:pPr>
+              <a:endParaRPr lang="te-IN" sz="2400" dirty="0">
                 <a:latin typeface="Ramabhadra" panose="02000600000000000000" pitchFamily="2" charset="0"/>
                 <a:cs typeface="Ramabhadra" panose="02000600000000000000" pitchFamily="2" charset="0"/>
               </a:endParaRPr>
@@ -3999,11 +4064,11 @@
                 <a:defRPr/>
               </a:pPr>
               <a:r>
-                <a:rPr lang="te-IN" sz="2200" dirty="0">
-                  <a:latin typeface="Ramabhadra" panose="02000600000000000000" pitchFamily="2" charset="0"/>
-                  <a:cs typeface="Ramabhadra" panose="02000600000000000000" pitchFamily="2" charset="0"/>
-                </a:rPr>
-                <a:t>ఎబినేజరే ఎబినేజరే</a:t>
+                <a:rPr lang="te-IN" sz="2400" dirty="0">
+                  <a:latin typeface="Ramabhadra" panose="02000600000000000000" pitchFamily="2" charset="0"/>
+                  <a:cs typeface="Ramabhadra" panose="02000600000000000000" pitchFamily="2" charset="0"/>
+                </a:rPr>
+                <a:t>ఒంటరి పోరు నన్ను విసిగించిన</a:t>
               </a:r>
             </a:p>
             <a:p>
@@ -4011,11 +4076,11 @@
                 <a:defRPr/>
               </a:pPr>
               <a:r>
-                <a:rPr lang="te-IN" sz="2200" dirty="0">
-                  <a:latin typeface="Ramabhadra" panose="02000600000000000000" pitchFamily="2" charset="0"/>
-                  <a:cs typeface="Ramabhadra" panose="02000600000000000000" pitchFamily="2" charset="0"/>
-                </a:rPr>
-                <a:t>ఇంత వరకు ఆదుకొన్నావే (2)</a:t>
+                <a:rPr lang="te-IN" sz="2400" dirty="0">
+                  <a:latin typeface="Ramabhadra" panose="02000600000000000000" pitchFamily="2" charset="0"/>
+                  <a:cs typeface="Ramabhadra" panose="02000600000000000000" pitchFamily="2" charset="0"/>
+                </a:rPr>
+                <a:t>మనుషులెల్లరు నన్ను తప్పుపట్టినా</a:t>
               </a:r>
             </a:p>
             <a:p>
@@ -4023,101 +4088,35 @@
                 <a:defRPr/>
               </a:pPr>
               <a:r>
-                <a:rPr lang="te-IN" sz="2200" dirty="0">
-                  <a:latin typeface="Ramabhadra" panose="02000600000000000000" pitchFamily="2" charset="0"/>
-                  <a:cs typeface="Ramabhadra" panose="02000600000000000000" pitchFamily="2" charset="0"/>
-                </a:rPr>
-                <a:t>నన్ను ఇంత వరకు ఆదుకొన్నావే</a:t>
+                <a:rPr lang="te-IN" sz="2400" dirty="0">
+                  <a:latin typeface="Ramabhadra" panose="02000600000000000000" pitchFamily="2" charset="0"/>
+                  <a:cs typeface="Ramabhadra" panose="02000600000000000000" pitchFamily="2" charset="0"/>
+                </a:rPr>
+                <a:t>ఒంటరివాడే వేయి మంది అన్నావు</a:t>
               </a:r>
             </a:p>
             <a:p>
               <a:pPr defTabSz="439781">
                 <a:defRPr/>
               </a:pPr>
-              <a:endParaRPr lang="te-IN" sz="2200" dirty="0">
-                <a:latin typeface="Ramabhadra" panose="02000600000000000000" pitchFamily="2" charset="0"/>
-                <a:cs typeface="Ramabhadra" panose="02000600000000000000" pitchFamily="2" charset="0"/>
-              </a:endParaRPr>
+              <a:r>
+                <a:rPr lang="te-IN" sz="2400" dirty="0">
+                  <a:latin typeface="Ramabhadra" panose="02000600000000000000" pitchFamily="2" charset="0"/>
+                  <a:cs typeface="Ramabhadra" panose="02000600000000000000" pitchFamily="2" charset="0"/>
+                </a:rPr>
+                <a:t>నేనున్నానులే భయపడకు అన్నావు</a:t>
+              </a:r>
             </a:p>
             <a:p>
               <a:pPr defTabSz="439781">
                 <a:defRPr/>
               </a:pPr>
               <a:r>
-                <a:rPr lang="te-IN" sz="2200" dirty="0">
-                  <a:latin typeface="Ramabhadra" panose="02000600000000000000" pitchFamily="2" charset="0"/>
-                  <a:cs typeface="Ramabhadra" panose="02000600000000000000" pitchFamily="2" charset="0"/>
-                </a:rPr>
-                <a:t>ఎల్రోహి ఎల్రోహి</a:t>
-              </a:r>
-            </a:p>
-            <a:p>
-              <a:pPr defTabSz="439781">
-                <a:defRPr/>
-              </a:pPr>
-              <a:r>
-                <a:rPr lang="te-IN" sz="2200" dirty="0">
-                  <a:latin typeface="Ramabhadra" panose="02000600000000000000" pitchFamily="2" charset="0"/>
-                  <a:cs typeface="Ramabhadra" panose="02000600000000000000" pitchFamily="2" charset="0"/>
-                </a:rPr>
-                <a:t>నన్ను చూచావే వందనమయ్యా (2)</a:t>
-              </a:r>
-            </a:p>
-            <a:p>
-              <a:pPr defTabSz="439781">
-                <a:defRPr/>
-              </a:pPr>
-              <a:r>
-                <a:rPr lang="te-IN" sz="2200" dirty="0">
-                  <a:latin typeface="Ramabhadra" panose="02000600000000000000" pitchFamily="2" charset="0"/>
-                  <a:cs typeface="Ramabhadra" panose="02000600000000000000" pitchFamily="2" charset="0"/>
-                </a:rPr>
-                <a:t>నన్ను చూచావే వందనమయ్యా</a:t>
-              </a:r>
-            </a:p>
-            <a:p>
-              <a:pPr defTabSz="439781">
-                <a:defRPr/>
-              </a:pPr>
-              <a:endParaRPr lang="te-IN" sz="2200" dirty="0">
-                <a:latin typeface="Ramabhadra" panose="02000600000000000000" pitchFamily="2" charset="0"/>
-                <a:cs typeface="Ramabhadra" panose="02000600000000000000" pitchFamily="2" charset="0"/>
-              </a:endParaRPr>
-            </a:p>
-            <a:p>
-              <a:pPr defTabSz="439781">
-                <a:defRPr/>
-              </a:pPr>
-              <a:r>
-                <a:rPr lang="te-IN" sz="2200" dirty="0">
-                  <a:latin typeface="Ramabhadra" panose="02000600000000000000" pitchFamily="2" charset="0"/>
-                  <a:cs typeface="Ramabhadra" panose="02000600000000000000" pitchFamily="2" charset="0"/>
-                </a:rPr>
-                <a:t>యెహోవా రాఫా యెహోవా రాఫా</a:t>
-              </a:r>
-            </a:p>
-            <a:p>
-              <a:pPr defTabSz="439781">
-                <a:defRPr/>
-              </a:pPr>
-              <a:r>
-                <a:rPr lang="te-IN" sz="2200" dirty="0">
-                  <a:latin typeface="Ramabhadra" panose="02000600000000000000" pitchFamily="2" charset="0"/>
-                  <a:cs typeface="Ramabhadra" panose="02000600000000000000" pitchFamily="2" charset="0"/>
-                </a:rPr>
-                <a:t>స్వస్థపరిచావే వందనమయ్యా (2)</a:t>
-              </a:r>
-            </a:p>
-            <a:p>
-              <a:pPr defTabSz="439781">
-                <a:defRPr/>
-              </a:pPr>
-              <a:r>
-                <a:rPr lang="te-IN" sz="2200" dirty="0">
-                  <a:latin typeface="Ramabhadra" panose="02000600000000000000" pitchFamily="2" charset="0"/>
-                  <a:cs typeface="Ramabhadra" panose="02000600000000000000" pitchFamily="2" charset="0"/>
-                </a:rPr>
-                <a:t>నన్ను స్వస్థపరిచావే వందనమయ్యా</a:t>
+                <a:rPr lang="te-IN" sz="2400" dirty="0">
+                  <a:latin typeface="Ramabhadra" panose="02000600000000000000" pitchFamily="2" charset="0"/>
+                  <a:cs typeface="Ramabhadra" panose="02000600000000000000" pitchFamily="2" charset="0"/>
+                </a:rPr>
+                <a:t>నేనంటే నీకు ఇంత ప్రేమ ఏంటయ్య</a:t>
               </a:r>
             </a:p>
           </p:txBody>
@@ -4275,7 +4274,7 @@
           <p:spPr>
             <a:xfrm>
               <a:off x="212729" y="206959"/>
-              <a:ext cx="4749801" cy="6232475"/>
+              <a:ext cx="4749801" cy="6186309"/>
             </a:xfrm>
             <a:prstGeom prst="rect">
               <a:avLst/>
@@ -4290,46 +4289,66 @@
             <a:p>
               <a:pPr defTabSz="439781"/>
               <a:r>
-                <a:rPr lang="te-IN" sz="2100" dirty="0">
-                  <a:latin typeface="Ramabhadra" panose="02000600000000000000" pitchFamily="2" charset="0"/>
-                  <a:cs typeface="Ramabhadra" panose="02000600000000000000" pitchFamily="2" charset="0"/>
-                </a:rPr>
-                <a:t>యేసయ్యా.. యేసయ్యా.. యేసయ్యా.. యేసయ్యా..</a:t>
+                <a:rPr lang="te-IN" sz="2200" dirty="0">
+                  <a:latin typeface="Ramabhadra" panose="02000600000000000000" pitchFamily="2" charset="0"/>
+                  <a:cs typeface="Ramabhadra" panose="02000600000000000000" pitchFamily="2" charset="0"/>
+                </a:rPr>
+                <a:t>ప్రేమించెదన్ అధికముగా</a:t>
               </a:r>
             </a:p>
             <a:p>
               <a:pPr defTabSz="439781"/>
               <a:r>
-                <a:rPr lang="te-IN" sz="2100" dirty="0">
-                  <a:latin typeface="Ramabhadra" panose="02000600000000000000" pitchFamily="2" charset="0"/>
-                  <a:cs typeface="Ramabhadra" panose="02000600000000000000" pitchFamily="2" charset="0"/>
-                </a:rPr>
-                <a:t>నిన్నే నిన్నే నే కొలుతునయ్యా</a:t>
+                <a:rPr lang="te-IN" sz="2200" dirty="0">
+                  <a:latin typeface="Ramabhadra" panose="02000600000000000000" pitchFamily="2" charset="0"/>
+                  <a:cs typeface="Ramabhadra" panose="02000600000000000000" pitchFamily="2" charset="0"/>
+                </a:rPr>
+                <a:t>ఆరాధింతున్ ఆసక్తితో (2)</a:t>
               </a:r>
             </a:p>
             <a:p>
               <a:pPr defTabSz="439781"/>
               <a:r>
-                <a:rPr lang="te-IN" sz="2100" dirty="0">
-                  <a:latin typeface="Ramabhadra" panose="02000600000000000000" pitchFamily="2" charset="0"/>
-                  <a:cs typeface="Ramabhadra" panose="02000600000000000000" pitchFamily="2" charset="0"/>
-                </a:rPr>
-                <a:t>నీవే నీవే నా రాజువయ్యా (2)</a:t>
+                <a:rPr lang="te-IN" sz="2200" dirty="0">
+                  <a:latin typeface="Ramabhadra" panose="02000600000000000000" pitchFamily="2" charset="0"/>
+                  <a:cs typeface="Ramabhadra" panose="02000600000000000000" pitchFamily="2" charset="0"/>
+                </a:rPr>
+                <a:t>నిన్ను పూర్ణ మనసుతో ఆరాధింతున్</a:t>
               </a:r>
             </a:p>
             <a:p>
               <a:pPr defTabSz="439781"/>
               <a:r>
-                <a:rPr lang="te-IN" sz="2100" dirty="0">
-                  <a:latin typeface="Ramabhadra" panose="02000600000000000000" pitchFamily="2" charset="0"/>
-                  <a:cs typeface="Ramabhadra" panose="02000600000000000000" pitchFamily="2" charset="0"/>
-                </a:rPr>
-                <a:t>యేసయ్య యేసయ్య యేసయ్యా…</a:t>
+                <a:rPr lang="te-IN" sz="2200" dirty="0">
+                  <a:latin typeface="Ramabhadra" panose="02000600000000000000" pitchFamily="2" charset="0"/>
+                  <a:cs typeface="Ramabhadra" panose="02000600000000000000" pitchFamily="2" charset="0"/>
+                </a:rPr>
+                <a:t>పూర్ణ బలముతో ప్రేమించెదన్</a:t>
               </a:r>
             </a:p>
             <a:p>
               <a:pPr defTabSz="439781"/>
-              <a:endParaRPr lang="te-IN" sz="2100" dirty="0">
+              <a:r>
+                <a:rPr lang="te-IN" sz="2200" dirty="0">
+                  <a:latin typeface="Ramabhadra" panose="02000600000000000000" pitchFamily="2" charset="0"/>
+                  <a:cs typeface="Ramabhadra" panose="02000600000000000000" pitchFamily="2" charset="0"/>
+                </a:rPr>
+                <a:t>ఆరాధన ఆరాధనా ఆ.. ఆ.. </a:t>
+              </a:r>
+            </a:p>
+            <a:p>
+              <a:pPr defTabSz="439781"/>
+              <a:r>
+                <a:rPr lang="te-IN" sz="2200" dirty="0">
+                  <a:latin typeface="Ramabhadra" panose="02000600000000000000" pitchFamily="2" charset="0"/>
+                  <a:cs typeface="Ramabhadra" panose="02000600000000000000" pitchFamily="2" charset="0"/>
+                </a:rPr>
+                <a:t>ఆరాధన ఆరాధనా (2)</a:t>
+              </a:r>
+            </a:p>
+            <a:p>
+              <a:pPr defTabSz="439781"/>
+              <a:endParaRPr lang="te-IN" sz="2200" dirty="0">
                 <a:latin typeface="Ramabhadra" panose="02000600000000000000" pitchFamily="2" charset="0"/>
                 <a:cs typeface="Ramabhadra" panose="02000600000000000000" pitchFamily="2" charset="0"/>
               </a:endParaRPr>
@@ -4337,46 +4356,36 @@
             <a:p>
               <a:pPr defTabSz="439781"/>
               <a:r>
-                <a:rPr lang="te-IN" sz="2100" dirty="0">
-                  <a:latin typeface="Ramabhadra" panose="02000600000000000000" pitchFamily="2" charset="0"/>
-                  <a:cs typeface="Ramabhadra" panose="02000600000000000000" pitchFamily="2" charset="0"/>
-                </a:rPr>
-                <a:t>కొండలలో లోయలలో</a:t>
+                <a:rPr lang="te-IN" sz="2200" dirty="0">
+                  <a:latin typeface="Ramabhadra" panose="02000600000000000000" pitchFamily="2" charset="0"/>
+                  <a:cs typeface="Ramabhadra" panose="02000600000000000000" pitchFamily="2" charset="0"/>
+                </a:rPr>
+                <a:t>ఎబినేజరే ఎబినేజరే</a:t>
               </a:r>
             </a:p>
             <a:p>
               <a:pPr defTabSz="439781"/>
               <a:r>
-                <a:rPr lang="te-IN" sz="2100" dirty="0">
-                  <a:latin typeface="Ramabhadra" panose="02000600000000000000" pitchFamily="2" charset="0"/>
-                  <a:cs typeface="Ramabhadra" panose="02000600000000000000" pitchFamily="2" charset="0"/>
-                </a:rPr>
-                <a:t>అడవులలో ఎడారులలో (2)</a:t>
+                <a:rPr lang="te-IN" sz="2200" dirty="0">
+                  <a:latin typeface="Ramabhadra" panose="02000600000000000000" pitchFamily="2" charset="0"/>
+                  <a:cs typeface="Ramabhadra" panose="02000600000000000000" pitchFamily="2" charset="0"/>
+                </a:rPr>
+                <a:t>ఇంత వరకు ఆదుకొన్నావే (2)</a:t>
               </a:r>
             </a:p>
             <a:p>
               <a:pPr defTabSz="439781"/>
               <a:r>
-                <a:rPr lang="te-IN" sz="2100" dirty="0">
-                  <a:latin typeface="Ramabhadra" panose="02000600000000000000" pitchFamily="2" charset="0"/>
-                  <a:cs typeface="Ramabhadra" panose="02000600000000000000" pitchFamily="2" charset="0"/>
-                </a:rPr>
-                <a:t>నన్ను గమనించినావా</a:t>
+                <a:rPr lang="te-IN" sz="2200" dirty="0">
+                  <a:latin typeface="Ramabhadra" panose="02000600000000000000" pitchFamily="2" charset="0"/>
+                  <a:cs typeface="Ramabhadra" panose="02000600000000000000" pitchFamily="2" charset="0"/>
+                </a:rPr>
+                <a:t>నన్ను ఇంత వరకు ఆదుకొన్నావే</a:t>
               </a:r>
             </a:p>
             <a:p>
               <a:pPr defTabSz="439781"/>
-              <a:r>
-                <a:rPr lang="te-IN" sz="2100" dirty="0">
-                  <a:latin typeface="Ramabhadra" panose="02000600000000000000" pitchFamily="2" charset="0"/>
-                  <a:cs typeface="Ramabhadra" panose="02000600000000000000" pitchFamily="2" charset="0"/>
-                </a:rPr>
-                <a:t>నన్ను నడిపించినావా (2)</a:t>
-              </a:r>
-            </a:p>
-            <a:p>
-              <a:pPr defTabSz="439781"/>
-              <a:endParaRPr lang="te-IN" sz="2100" dirty="0">
+              <a:endParaRPr lang="te-IN" sz="2200" dirty="0">
                 <a:latin typeface="Ramabhadra" panose="02000600000000000000" pitchFamily="2" charset="0"/>
                 <a:cs typeface="Ramabhadra" panose="02000600000000000000" pitchFamily="2" charset="0"/>
               </a:endParaRPr>
@@ -4384,92 +4393,68 @@
             <a:p>
               <a:pPr defTabSz="439781"/>
               <a:r>
-                <a:rPr lang="te-IN" sz="2100" dirty="0">
-                  <a:latin typeface="Ramabhadra" panose="02000600000000000000" pitchFamily="2" charset="0"/>
-                  <a:cs typeface="Ramabhadra" panose="02000600000000000000" pitchFamily="2" charset="0"/>
-                </a:rPr>
-                <a:t>ఆత్మీయులే నన్ను అవమానించగా</a:t>
+                <a:rPr lang="te-IN" sz="2200" dirty="0">
+                  <a:latin typeface="Ramabhadra" panose="02000600000000000000" pitchFamily="2" charset="0"/>
+                  <a:cs typeface="Ramabhadra" panose="02000600000000000000" pitchFamily="2" charset="0"/>
+                </a:rPr>
+                <a:t>ఎల్రోహి ఎల్రోహి</a:t>
               </a:r>
             </a:p>
             <a:p>
               <a:pPr defTabSz="439781"/>
               <a:r>
-                <a:rPr lang="te-IN" sz="2100" dirty="0">
-                  <a:latin typeface="Ramabhadra" panose="02000600000000000000" pitchFamily="2" charset="0"/>
-                  <a:cs typeface="Ramabhadra" panose="02000600000000000000" pitchFamily="2" charset="0"/>
-                </a:rPr>
-                <a:t>అన్యులే నన్ను అపహసించగా (2)</a:t>
+                <a:rPr lang="te-IN" sz="2200" dirty="0">
+                  <a:latin typeface="Ramabhadra" panose="02000600000000000000" pitchFamily="2" charset="0"/>
+                  <a:cs typeface="Ramabhadra" panose="02000600000000000000" pitchFamily="2" charset="0"/>
+                </a:rPr>
+                <a:t>నన్ను చూచావే వందనమయ్యా (2)</a:t>
               </a:r>
             </a:p>
             <a:p>
               <a:pPr defTabSz="439781"/>
               <a:r>
-                <a:rPr lang="te-IN" sz="2100" dirty="0">
-                  <a:latin typeface="Ramabhadra" panose="02000600000000000000" pitchFamily="2" charset="0"/>
-                  <a:cs typeface="Ramabhadra" panose="02000600000000000000" pitchFamily="2" charset="0"/>
-                </a:rPr>
-                <a:t>అండ నీవైతివయ్యా</a:t>
+                <a:rPr lang="te-IN" sz="2200" dirty="0">
+                  <a:latin typeface="Ramabhadra" panose="02000600000000000000" pitchFamily="2" charset="0"/>
+                  <a:cs typeface="Ramabhadra" panose="02000600000000000000" pitchFamily="2" charset="0"/>
+                </a:rPr>
+                <a:t>నన్ను చూచావే వందనమయ్యా</a:t>
               </a:r>
             </a:p>
             <a:p>
               <a:pPr defTabSz="439781"/>
-              <a:r>
-                <a:rPr lang="te-IN" sz="2100" dirty="0">
-                  <a:latin typeface="Ramabhadra" panose="02000600000000000000" pitchFamily="2" charset="0"/>
-                  <a:cs typeface="Ramabhadra" panose="02000600000000000000" pitchFamily="2" charset="0"/>
-                </a:rPr>
-                <a:t>నా.. కొండ నీవే యేసయ్యా (2)</a:t>
-              </a:r>
-              <a:endParaRPr lang="en-IN" sz="2100" dirty="0">
+              <a:endParaRPr lang="te-IN" sz="2200" dirty="0">
                 <a:latin typeface="Ramabhadra" panose="02000600000000000000" pitchFamily="2" charset="0"/>
                 <a:cs typeface="Ramabhadra" panose="02000600000000000000" pitchFamily="2" charset="0"/>
               </a:endParaRPr>
             </a:p>
             <a:p>
               <a:pPr defTabSz="439781"/>
-              <a:endParaRPr lang="en-IN" sz="2100" dirty="0">
-                <a:latin typeface="Ramabhadra" panose="02000600000000000000" pitchFamily="2" charset="0"/>
-                <a:cs typeface="Ramabhadra" panose="02000600000000000000" pitchFamily="2" charset="0"/>
-              </a:endParaRPr>
+              <a:r>
+                <a:rPr lang="te-IN" sz="2200" dirty="0">
+                  <a:latin typeface="Ramabhadra" panose="02000600000000000000" pitchFamily="2" charset="0"/>
+                  <a:cs typeface="Ramabhadra" panose="02000600000000000000" pitchFamily="2" charset="0"/>
+                </a:rPr>
+                <a:t>యెహోవా రాఫా యెహోవా రాఫా</a:t>
+              </a:r>
             </a:p>
             <a:p>
               <a:pPr defTabSz="439781"/>
               <a:r>
-                <a:rPr lang="te-IN" sz="2100" dirty="0">
-                  <a:latin typeface="Ramabhadra" panose="02000600000000000000" pitchFamily="2" charset="0"/>
-                  <a:cs typeface="Ramabhadra" panose="02000600000000000000" pitchFamily="2" charset="0"/>
-                </a:rPr>
-                <a:t>మరణ ఛాయలో మెరిసిన నీ ప్రేమ</a:t>
+                <a:rPr lang="te-IN" sz="2200" dirty="0">
+                  <a:latin typeface="Ramabhadra" panose="02000600000000000000" pitchFamily="2" charset="0"/>
+                  <a:cs typeface="Ramabhadra" panose="02000600000000000000" pitchFamily="2" charset="0"/>
+                </a:rPr>
+                <a:t>స్వస్థపరిచావే వందనమయ్యా (2)</a:t>
               </a:r>
             </a:p>
             <a:p>
               <a:pPr defTabSz="439781"/>
               <a:r>
-                <a:rPr lang="te-IN" sz="2100" dirty="0">
-                  <a:latin typeface="Ramabhadra" panose="02000600000000000000" pitchFamily="2" charset="0"/>
-                  <a:cs typeface="Ramabhadra" panose="02000600000000000000" pitchFamily="2" charset="0"/>
-                </a:rPr>
-                <a:t>నలిగిన బ్రతుకున కురిసిన నీ కృప (2)</a:t>
-              </a:r>
-            </a:p>
-            <a:p>
-              <a:pPr defTabSz="439781"/>
-              <a:r>
-                <a:rPr lang="te-IN" sz="2100" dirty="0">
-                  <a:latin typeface="Ramabhadra" panose="02000600000000000000" pitchFamily="2" charset="0"/>
-                  <a:cs typeface="Ramabhadra" panose="02000600000000000000" pitchFamily="2" charset="0"/>
-                </a:rPr>
-                <a:t>నన్ను బలపరచెనయ్యా</a:t>
-              </a:r>
-            </a:p>
-            <a:p>
-              <a:pPr defTabSz="439781"/>
-              <a:r>
-                <a:rPr lang="te-IN" sz="2100" dirty="0">
-                  <a:latin typeface="Ramabhadra" panose="02000600000000000000" pitchFamily="2" charset="0"/>
-                  <a:cs typeface="Ramabhadra" panose="02000600000000000000" pitchFamily="2" charset="0"/>
-                </a:rPr>
-                <a:t>నిన్నే ఘనపరతునయ్యా (2)</a:t>
+                <a:rPr lang="te-IN" sz="2200" dirty="0">
+                  <a:latin typeface="Ramabhadra" panose="02000600000000000000" pitchFamily="2" charset="0"/>
+                  <a:cs typeface="Ramabhadra" panose="02000600000000000000" pitchFamily="2" charset="0"/>
+                </a:rPr>
+                <a:t>నన్ను స్వస్థపరిచావే వందనమయ్యా</a:t>
               </a:r>
             </a:p>
           </p:txBody>
@@ -4589,7 +4574,7 @@
                   <a:schemeClr val="tx1"/>
                 </a:solidFill>
               </a:rPr>
-              <a:t>0001</a:t>
+              <a:t>0002</a:t>
             </a:r>
           </a:p>
         </p:txBody>
@@ -4646,7 +4631,7 @@
                   <a:schemeClr val="tx1"/>
                 </a:solidFill>
               </a:rPr>
-              <a:t>0001</a:t>
+              <a:t>0002</a:t>
             </a:r>
           </a:p>
         </p:txBody>

--- a/songsTemplate.pptx
+++ b/songsTemplate.pptx
@@ -255,7 +255,7 @@
           <a:p>
             <a:fld id="{F1102B08-ED9E-409F-B95F-09CAA1DAF6E0}" type="datetimeFigureOut">
               <a:rPr lang="en-IN" smtClean="0"/>
-              <a:t>22-03-2025</a:t>
+              <a:t>29-03-2025</a:t>
             </a:fld>
             <a:endParaRPr lang="en-IN"/>
           </a:p>
@@ -425,7 +425,7 @@
           <a:p>
             <a:fld id="{F1102B08-ED9E-409F-B95F-09CAA1DAF6E0}" type="datetimeFigureOut">
               <a:rPr lang="en-IN" smtClean="0"/>
-              <a:t>22-03-2025</a:t>
+              <a:t>29-03-2025</a:t>
             </a:fld>
             <a:endParaRPr lang="en-IN"/>
           </a:p>
@@ -605,7 +605,7 @@
           <a:p>
             <a:fld id="{F1102B08-ED9E-409F-B95F-09CAA1DAF6E0}" type="datetimeFigureOut">
               <a:rPr lang="en-IN" smtClean="0"/>
-              <a:t>22-03-2025</a:t>
+              <a:t>29-03-2025</a:t>
             </a:fld>
             <a:endParaRPr lang="en-IN"/>
           </a:p>
@@ -775,7 +775,7 @@
           <a:p>
             <a:fld id="{F1102B08-ED9E-409F-B95F-09CAA1DAF6E0}" type="datetimeFigureOut">
               <a:rPr lang="en-IN" smtClean="0"/>
-              <a:t>22-03-2025</a:t>
+              <a:t>29-03-2025</a:t>
             </a:fld>
             <a:endParaRPr lang="en-IN"/>
           </a:p>
@@ -1019,7 +1019,7 @@
           <a:p>
             <a:fld id="{F1102B08-ED9E-409F-B95F-09CAA1DAF6E0}" type="datetimeFigureOut">
               <a:rPr lang="en-IN" smtClean="0"/>
-              <a:t>22-03-2025</a:t>
+              <a:t>29-03-2025</a:t>
             </a:fld>
             <a:endParaRPr lang="en-IN"/>
           </a:p>
@@ -1251,7 +1251,7 @@
           <a:p>
             <a:fld id="{F1102B08-ED9E-409F-B95F-09CAA1DAF6E0}" type="datetimeFigureOut">
               <a:rPr lang="en-IN" smtClean="0"/>
-              <a:t>22-03-2025</a:t>
+              <a:t>29-03-2025</a:t>
             </a:fld>
             <a:endParaRPr lang="en-IN"/>
           </a:p>
@@ -1618,7 +1618,7 @@
           <a:p>
             <a:fld id="{F1102B08-ED9E-409F-B95F-09CAA1DAF6E0}" type="datetimeFigureOut">
               <a:rPr lang="en-IN" smtClean="0"/>
-              <a:t>22-03-2025</a:t>
+              <a:t>29-03-2025</a:t>
             </a:fld>
             <a:endParaRPr lang="en-IN"/>
           </a:p>
@@ -1736,7 +1736,7 @@
           <a:p>
             <a:fld id="{F1102B08-ED9E-409F-B95F-09CAA1DAF6E0}" type="datetimeFigureOut">
               <a:rPr lang="en-IN" smtClean="0"/>
-              <a:t>22-03-2025</a:t>
+              <a:t>29-03-2025</a:t>
             </a:fld>
             <a:endParaRPr lang="en-IN"/>
           </a:p>
@@ -1831,7 +1831,7 @@
           <a:p>
             <a:fld id="{F1102B08-ED9E-409F-B95F-09CAA1DAF6E0}" type="datetimeFigureOut">
               <a:rPr lang="en-IN" smtClean="0"/>
-              <a:t>22-03-2025</a:t>
+              <a:t>29-03-2025</a:t>
             </a:fld>
             <a:endParaRPr lang="en-IN"/>
           </a:p>
@@ -2108,7 +2108,7 @@
           <a:p>
             <a:fld id="{F1102B08-ED9E-409F-B95F-09CAA1DAF6E0}" type="datetimeFigureOut">
               <a:rPr lang="en-IN" smtClean="0"/>
-              <a:t>22-03-2025</a:t>
+              <a:t>29-03-2025</a:t>
             </a:fld>
             <a:endParaRPr lang="en-IN"/>
           </a:p>
@@ -2365,7 +2365,7 @@
           <a:p>
             <a:fld id="{F1102B08-ED9E-409F-B95F-09CAA1DAF6E0}" type="datetimeFigureOut">
               <a:rPr lang="en-IN" smtClean="0"/>
-              <a:t>22-03-2025</a:t>
+              <a:t>29-03-2025</a:t>
             </a:fld>
             <a:endParaRPr lang="en-IN"/>
           </a:p>
@@ -2578,7 +2578,7 @@
           <a:p>
             <a:fld id="{F1102B08-ED9E-409F-B95F-09CAA1DAF6E0}" type="datetimeFigureOut">
               <a:rPr lang="en-IN" smtClean="0"/>
-              <a:t>22-03-2025</a:t>
+              <a:t>29-03-2025</a:t>
             </a:fld>
             <a:endParaRPr lang="en-IN"/>
           </a:p>
@@ -2997,10 +2997,10 @@
         </p:nvGrpSpPr>
         <p:grpSpPr>
           <a:xfrm>
-            <a:off x="158534" y="182032"/>
-            <a:ext cx="4650534" cy="6493935"/>
-            <a:chOff x="158534" y="182032"/>
-            <a:chExt cx="4650534" cy="6493935"/>
+            <a:off x="160868" y="182032"/>
+            <a:ext cx="4749728" cy="6493935"/>
+            <a:chOff x="160868" y="182032"/>
+            <a:chExt cx="4749728" cy="6493935"/>
           </a:xfrm>
         </p:grpSpPr>
         <p:sp>
@@ -3072,7 +3072,7 @@
           </p:nvSpPr>
           <p:spPr>
             <a:xfrm>
-              <a:off x="158534" y="671398"/>
+              <a:off x="262396" y="505119"/>
               <a:ext cx="4648200" cy="5262979"/>
             </a:xfrm>
             <a:prstGeom prst="rect">
@@ -3091,7 +3091,79 @@
                   <a:latin typeface="Ramabhadra" panose="02000600000000000000" pitchFamily="2" charset="0"/>
                   <a:cs typeface="Ramabhadra" panose="02000600000000000000" pitchFamily="2" charset="0"/>
                 </a:rPr>
-                <a:t>సీయెను పుర మదిగో మహా దేవుని పట్టణ మదిగో రారాజు రానైయున్నాడు రయమున నినుగొని సిద్దపడుమా సంసిద్దమగుమా</a:t>
+                <a:t>ఇంత కాలం నీదు కృపలో కాచిన దేవా (2)</a:t>
+              </a:r>
+              <a:br>
+                <a:rPr lang="te-IN" sz="2100" dirty="0">
+                  <a:latin typeface="Ramabhadra" panose="02000600000000000000" pitchFamily="2" charset="0"/>
+                  <a:cs typeface="Ramabhadra" panose="02000600000000000000" pitchFamily="2" charset="0"/>
+                </a:rPr>
+              </a:br>
+              <a:r>
+                <a:rPr lang="te-IN" sz="2100" dirty="0">
+                  <a:latin typeface="Ramabhadra" panose="02000600000000000000" pitchFamily="2" charset="0"/>
+                  <a:cs typeface="Ramabhadra" panose="02000600000000000000" pitchFamily="2" charset="0"/>
+                </a:rPr>
+                <a:t>ఇకను కూడా మాకు తోడు నీడ నీవే కదా (2)        </a:t>
+              </a:r>
+            </a:p>
+            <a:p>
+              <a:endParaRPr lang="te-IN" sz="2100" dirty="0">
+                <a:latin typeface="Ramabhadra" panose="02000600000000000000" pitchFamily="2" charset="0"/>
+                <a:cs typeface="Ramabhadra" panose="02000600000000000000" pitchFamily="2" charset="0"/>
+              </a:endParaRPr>
+            </a:p>
+            <a:p>
+              <a:r>
+                <a:rPr lang="te-IN" sz="2100" dirty="0">
+                  <a:latin typeface="Ramabhadra" panose="02000600000000000000" pitchFamily="2" charset="0"/>
+                  <a:cs typeface="Ramabhadra" panose="02000600000000000000" pitchFamily="2" charset="0"/>
+                </a:rPr>
+                <a:t>ఎన్ని ఏళ్ళు గడచినా – ఎన్ని తరాలు మారినా (2)</a:t>
+              </a:r>
+              <a:br>
+                <a:rPr lang="te-IN" sz="2100" dirty="0">
+                  <a:latin typeface="Ramabhadra" panose="02000600000000000000" pitchFamily="2" charset="0"/>
+                  <a:cs typeface="Ramabhadra" panose="02000600000000000000" pitchFamily="2" charset="0"/>
+                </a:rPr>
+              </a:br>
+              <a:r>
+                <a:rPr lang="te-IN" sz="2100" dirty="0">
+                  <a:latin typeface="Ramabhadra" panose="02000600000000000000" pitchFamily="2" charset="0"/>
+                  <a:cs typeface="Ramabhadra" panose="02000600000000000000" pitchFamily="2" charset="0"/>
+                </a:rPr>
+                <a:t>మారని వీడని ప్రేమే నీదయ్యా</a:t>
+              </a:r>
+              <a:br>
+                <a:rPr lang="te-IN" sz="2100" dirty="0">
+                  <a:latin typeface="Ramabhadra" panose="02000600000000000000" pitchFamily="2" charset="0"/>
+                  <a:cs typeface="Ramabhadra" panose="02000600000000000000" pitchFamily="2" charset="0"/>
+                </a:rPr>
+              </a:br>
+              <a:r>
+                <a:rPr lang="te-IN" sz="2100" dirty="0">
+                  <a:latin typeface="Ramabhadra" panose="02000600000000000000" pitchFamily="2" charset="0"/>
+                  <a:cs typeface="Ramabhadra" panose="02000600000000000000" pitchFamily="2" charset="0"/>
+                </a:rPr>
+                <a:t>మార్చిన నా జీవితం నీకే యేసయ్యా (2)  </a:t>
+              </a:r>
+            </a:p>
+            <a:p>
+              <a:r>
+                <a:rPr lang="te-IN" sz="2100" dirty="0">
+                  <a:latin typeface="Ramabhadra" panose="02000600000000000000" pitchFamily="2" charset="0"/>
+                  <a:cs typeface="Ramabhadra" panose="02000600000000000000" pitchFamily="2" charset="0"/>
+                </a:rPr>
+                <a:t>       </a:t>
+              </a:r>
+            </a:p>
+            <a:p>
+              <a:r>
+                <a:rPr lang="te-IN" sz="2100" dirty="0">
+                  <a:latin typeface="Ramabhadra" panose="02000600000000000000" pitchFamily="2" charset="0"/>
+                  <a:cs typeface="Ramabhadra" panose="02000600000000000000" pitchFamily="2" charset="0"/>
+                </a:rPr>
+                <a:t>నీవు చేసిన మేలులు –</a:t>
               </a:r>
               <a:endParaRPr lang="en-IN" sz="2100" dirty="0">
                 <a:latin typeface="Ramabhadra" panose="02000600000000000000" pitchFamily="2" charset="0"/>
@@ -3104,7 +3176,51 @@
                   <a:latin typeface="Ramabhadra" panose="02000600000000000000" pitchFamily="2" charset="0"/>
                   <a:cs typeface="Ramabhadra" panose="02000600000000000000" pitchFamily="2" charset="0"/>
                 </a:rPr>
-                <a:t>సంఘవధువా సిద్దపడుమా</a:t>
+                <a:t>తలచుకుందును అనుదినం (2)</a:t>
+              </a:r>
+              <a:br>
+                <a:rPr lang="te-IN" sz="2100" dirty="0">
+                  <a:latin typeface="Ramabhadra" panose="02000600000000000000" pitchFamily="2" charset="0"/>
+                  <a:cs typeface="Ramabhadra" panose="02000600000000000000" pitchFamily="2" charset="0"/>
+                </a:rPr>
+              </a:br>
+              <a:r>
+                <a:rPr lang="te-IN" sz="2100" dirty="0">
+                  <a:latin typeface="Ramabhadra" panose="02000600000000000000" pitchFamily="2" charset="0"/>
+                  <a:cs typeface="Ramabhadra" panose="02000600000000000000" pitchFamily="2" charset="0"/>
+                </a:rPr>
+                <a:t>నా స్తుతి స్తోత్రము నీకే యేసయ్యా</a:t>
+              </a:r>
+              <a:br>
+                <a:rPr lang="te-IN" sz="2100" dirty="0">
+                  <a:latin typeface="Ramabhadra" panose="02000600000000000000" pitchFamily="2" charset="0"/>
+                  <a:cs typeface="Ramabhadra" panose="02000600000000000000" pitchFamily="2" charset="0"/>
+                </a:rPr>
+              </a:br>
+              <a:r>
+                <a:rPr lang="te-IN" sz="2100" dirty="0">
+                  <a:latin typeface="Ramabhadra" panose="02000600000000000000" pitchFamily="2" charset="0"/>
+                  <a:cs typeface="Ramabhadra" panose="02000600000000000000" pitchFamily="2" charset="0"/>
+                </a:rPr>
+                <a:t>వేరుగా ఏమియు చెల్లించలేనయ్యా (2) </a:t>
+              </a:r>
+            </a:p>
+            <a:p>
+              <a:r>
+                <a:rPr lang="te-IN" sz="2100" dirty="0">
+                  <a:latin typeface="Ramabhadra" panose="02000600000000000000" pitchFamily="2" charset="0"/>
+                  <a:cs typeface="Ramabhadra" panose="02000600000000000000" pitchFamily="2" charset="0"/>
+                </a:rPr>
+                <a:t>          </a:t>
+              </a:r>
+            </a:p>
+            <a:p>
+              <a:r>
+                <a:rPr lang="te-IN" sz="2100" dirty="0">
+                  <a:latin typeface="Ramabhadra" panose="02000600000000000000" pitchFamily="2" charset="0"/>
+                  <a:cs typeface="Ramabhadra" panose="02000600000000000000" pitchFamily="2" charset="0"/>
+                </a:rPr>
+                <a:t>దూరమైతిరి ఆప్తులు –</a:t>
               </a:r>
               <a:endParaRPr lang="en-IN" sz="2100" dirty="0">
                 <a:latin typeface="Ramabhadra" panose="02000600000000000000" pitchFamily="2" charset="0"/>
@@ -3112,148 +3228,38 @@
               </a:endParaRPr>
             </a:p>
             <a:p>
-              <a:endParaRPr lang="en-IN" sz="2100" dirty="0">
-                <a:latin typeface="Ramabhadra" panose="02000600000000000000" pitchFamily="2" charset="0"/>
-                <a:cs typeface="Ramabhadra" panose="02000600000000000000" pitchFamily="2" charset="0"/>
-              </a:endParaRPr>
-            </a:p>
-            <a:p>
               <a:r>
                 <a:rPr lang="te-IN" sz="2100" dirty="0">
                   <a:latin typeface="Ramabhadra" panose="02000600000000000000" pitchFamily="2" charset="0"/>
                   <a:cs typeface="Ramabhadra" panose="02000600000000000000" pitchFamily="2" charset="0"/>
                 </a:rPr>
-                <a:t>అధికారులలో ప్రధానుడ అందరిలో ఘననీయుడ</a:t>
-              </a:r>
-              <a:endParaRPr lang="en-IN" sz="2100" dirty="0">
-                <a:latin typeface="Ramabhadra" panose="02000600000000000000" pitchFamily="2" charset="0"/>
-                <a:cs typeface="Ramabhadra" panose="02000600000000000000" pitchFamily="2" charset="0"/>
-              </a:endParaRPr>
-            </a:p>
-            <a:p>
-              <a:r>
+                <a:t>విడచిపోతిరి నా హితులు (2)</a:t>
+              </a:r>
+              <a:br>
                 <a:rPr lang="te-IN" sz="2100" dirty="0">
                   <a:latin typeface="Ramabhadra" panose="02000600000000000000" pitchFamily="2" charset="0"/>
                   <a:cs typeface="Ramabhadra" panose="02000600000000000000" pitchFamily="2" charset="0"/>
                 </a:rPr>
-                <a:t>అతి సుందరుడ మనో హరుడు</a:t>
-              </a:r>
-              <a:r>
-                <a:rPr lang="en-IN" sz="2100" dirty="0">
-                  <a:latin typeface="Ramabhadra" panose="02000600000000000000" pitchFamily="2" charset="0"/>
-                  <a:cs typeface="Ramabhadra" panose="02000600000000000000" pitchFamily="2" charset="0"/>
-                </a:rPr>
-                <a:t> </a:t>
-              </a:r>
+              </a:br>
               <a:r>
                 <a:rPr lang="te-IN" sz="2100" dirty="0">
                   <a:latin typeface="Ramabhadra" panose="02000600000000000000" pitchFamily="2" charset="0"/>
                   <a:cs typeface="Ramabhadra" panose="02000600000000000000" pitchFamily="2" charset="0"/>
                 </a:rPr>
-                <a:t>మనో వీరుడు</a:t>
-              </a:r>
-              <a:endParaRPr lang="en-IN" sz="2100" dirty="0">
-                <a:latin typeface="Ramabhadra" panose="02000600000000000000" pitchFamily="2" charset="0"/>
-                <a:cs typeface="Ramabhadra" panose="02000600000000000000" pitchFamily="2" charset="0"/>
-              </a:endParaRPr>
-            </a:p>
-            <a:p>
-              <a:r>
+                <a:t>శోధన వేదన తీర్చిన యేసయ్యా</a:t>
+              </a:r>
+              <a:br>
                 <a:rPr lang="te-IN" sz="2100" dirty="0">
                   <a:latin typeface="Ramabhadra" panose="02000600000000000000" pitchFamily="2" charset="0"/>
                   <a:cs typeface="Ramabhadra" panose="02000600000000000000" pitchFamily="2" charset="0"/>
                 </a:rPr>
-                <a:t>మన ప్రభు యేసు</a:t>
-              </a:r>
-              <a:endParaRPr lang="en-IN" sz="2100" dirty="0">
-                <a:latin typeface="Ramabhadra" panose="02000600000000000000" pitchFamily="2" charset="0"/>
-                <a:cs typeface="Ramabhadra" panose="02000600000000000000" pitchFamily="2" charset="0"/>
-              </a:endParaRPr>
-            </a:p>
-            <a:p>
-              <a:endParaRPr lang="en-IN" sz="2100" dirty="0">
-                <a:latin typeface="Ramabhadra" panose="02000600000000000000" pitchFamily="2" charset="0"/>
-                <a:cs typeface="Ramabhadra" panose="02000600000000000000" pitchFamily="2" charset="0"/>
-              </a:endParaRPr>
-            </a:p>
-            <a:p>
+              </a:br>
               <a:r>
                 <a:rPr lang="te-IN" sz="2100" dirty="0">
                   <a:latin typeface="Ramabhadra" panose="02000600000000000000" pitchFamily="2" charset="0"/>
                   <a:cs typeface="Ramabhadra" panose="02000600000000000000" pitchFamily="2" charset="0"/>
                 </a:rPr>
-                <a:t>నిశ్చల రాజ్య స్థాపకుడు నిరంతం యేలు యువరాజు</a:t>
-              </a:r>
-              <a:endParaRPr lang="en-IN" sz="2100" dirty="0">
-                <a:latin typeface="Ramabhadra" panose="02000600000000000000" pitchFamily="2" charset="0"/>
-                <a:cs typeface="Ramabhadra" panose="02000600000000000000" pitchFamily="2" charset="0"/>
-              </a:endParaRPr>
-            </a:p>
-            <a:p>
-              <a:r>
-                <a:rPr lang="te-IN" sz="2100" dirty="0">
-                  <a:latin typeface="Ramabhadra" panose="02000600000000000000" pitchFamily="2" charset="0"/>
-                  <a:cs typeface="Ramabhadra" panose="02000600000000000000" pitchFamily="2" charset="0"/>
-                </a:rPr>
-                <a:t>ఆదియు అంతము లేని వాడు</a:t>
-              </a:r>
-              <a:endParaRPr lang="en-IN" sz="2100" dirty="0">
-                <a:latin typeface="Ramabhadra" panose="02000600000000000000" pitchFamily="2" charset="0"/>
-                <a:cs typeface="Ramabhadra" panose="02000600000000000000" pitchFamily="2" charset="0"/>
-              </a:endParaRPr>
-            </a:p>
-            <a:p>
-              <a:r>
-                <a:rPr lang="te-IN" sz="2100" dirty="0">
-                  <a:latin typeface="Ramabhadra" panose="02000600000000000000" pitchFamily="2" charset="0"/>
-                  <a:cs typeface="Ramabhadra" panose="02000600000000000000" pitchFamily="2" charset="0"/>
-                </a:rPr>
-                <a:t>తేజోమయుడు తేజోమంతుడు</a:t>
-              </a:r>
-              <a:endParaRPr lang="en-IN" sz="2100" dirty="0">
-                <a:latin typeface="Ramabhadra" panose="02000600000000000000" pitchFamily="2" charset="0"/>
-                <a:cs typeface="Ramabhadra" panose="02000600000000000000" pitchFamily="2" charset="0"/>
-              </a:endParaRPr>
-            </a:p>
-            <a:p>
-              <a:endParaRPr lang="en-IN" sz="2100" dirty="0">
-                <a:latin typeface="Ramabhadra" panose="02000600000000000000" pitchFamily="2" charset="0"/>
-                <a:cs typeface="Ramabhadra" panose="02000600000000000000" pitchFamily="2" charset="0"/>
-              </a:endParaRPr>
-            </a:p>
-            <a:p>
-              <a:r>
-                <a:rPr lang="te-IN" sz="2100" dirty="0">
-                  <a:latin typeface="Ramabhadra" panose="02000600000000000000" pitchFamily="2" charset="0"/>
-                  <a:cs typeface="Ramabhadra" panose="02000600000000000000" pitchFamily="2" charset="0"/>
-                </a:rPr>
-                <a:t>మృతులను లేవు సజీవుడు ముక్తినొసగు రక్షకుడేసు</a:t>
-              </a:r>
-              <a:endParaRPr lang="en-IN" sz="2100" dirty="0">
-                <a:latin typeface="Ramabhadra" panose="02000600000000000000" pitchFamily="2" charset="0"/>
-                <a:cs typeface="Ramabhadra" panose="02000600000000000000" pitchFamily="2" charset="0"/>
-              </a:endParaRPr>
-            </a:p>
-            <a:p>
-              <a:r>
-                <a:rPr lang="te-IN" sz="2100" dirty="0">
-                  <a:latin typeface="Ramabhadra" panose="02000600000000000000" pitchFamily="2" charset="0"/>
-                  <a:cs typeface="Ramabhadra" panose="02000600000000000000" pitchFamily="2" charset="0"/>
-                </a:rPr>
-                <a:t>ప్రధాన దూత శబ్దముతో</a:t>
-              </a:r>
-              <a:endParaRPr lang="en-IN" sz="2100" dirty="0">
-                <a:latin typeface="Ramabhadra" panose="02000600000000000000" pitchFamily="2" charset="0"/>
-                <a:cs typeface="Ramabhadra" panose="02000600000000000000" pitchFamily="2" charset="0"/>
-              </a:endParaRPr>
-            </a:p>
-            <a:p>
-              <a:r>
-                <a:rPr lang="te-IN" sz="2100" dirty="0">
-                  <a:latin typeface="Ramabhadra" panose="02000600000000000000" pitchFamily="2" charset="0"/>
-                  <a:cs typeface="Ramabhadra" panose="02000600000000000000" pitchFamily="2" charset="0"/>
-                </a:rPr>
-                <a:t>ఆర్భాటముతో ఆర్భాటముతో</a:t>
+                <a:t>తల్లిలా తండ్రిలా కాచిన యేసయ్యా (2) </a:t>
               </a:r>
             </a:p>
           </p:txBody>
@@ -3410,8 +3416,8 @@
           </p:nvSpPr>
           <p:spPr>
             <a:xfrm>
-              <a:off x="256993" y="326430"/>
-              <a:ext cx="4544669" cy="4769254"/>
+              <a:off x="264399" y="331487"/>
+              <a:ext cx="4544669" cy="5769528"/>
             </a:xfrm>
             <a:prstGeom prst="rect">
               <a:avLst/>
@@ -3434,7 +3440,7 @@
                   <a:latin typeface="Ramabhadra" panose="02000600000000000000" pitchFamily="2" charset="0"/>
                   <a:cs typeface="Ramabhadra" panose="02000600000000000000" pitchFamily="2" charset="0"/>
                 </a:rPr>
-                <a:t>యేసు నీవే కావాలయ్యా </a:t>
+                <a:t>స్తుతి సింహాసనాసీనుడా</a:t>
               </a:r>
             </a:p>
             <a:p>
@@ -3448,49 +3454,7 @@
                   <a:latin typeface="Ramabhadra" panose="02000600000000000000" pitchFamily="2" charset="0"/>
                   <a:cs typeface="Ramabhadra" panose="02000600000000000000" pitchFamily="2" charset="0"/>
                 </a:rPr>
-                <a:t>నాతో కూడ రావాలయ్యా</a:t>
-              </a:r>
-            </a:p>
-            <a:p>
-              <a:pPr>
-                <a:lnSpc>
-                  <a:spcPts val="2600"/>
-                </a:lnSpc>
-              </a:pPr>
-              <a:r>
-                <a:rPr lang="te-IN" sz="2400" dirty="0">
-                  <a:latin typeface="Ramabhadra" panose="02000600000000000000" pitchFamily="2" charset="0"/>
-                  <a:cs typeface="Ramabhadra" panose="02000600000000000000" pitchFamily="2" charset="0"/>
-                </a:rPr>
-                <a:t>ఘనుడ నీ దివ్య సన్నిధి</a:t>
-              </a:r>
-            </a:p>
-            <a:p>
-              <a:pPr>
-                <a:lnSpc>
-                  <a:spcPts val="2600"/>
-                </a:lnSpc>
-              </a:pPr>
-              <a:r>
-                <a:rPr lang="te-IN" sz="2400" dirty="0">
-                  <a:latin typeface="Ramabhadra" panose="02000600000000000000" pitchFamily="2" charset="0"/>
-                  <a:cs typeface="Ramabhadra" panose="02000600000000000000" pitchFamily="2" charset="0"/>
-                </a:rPr>
-                <a:t>నను ఆదుకునే నా పెన్నిధి</a:t>
-              </a:r>
-            </a:p>
-            <a:p>
-              <a:pPr>
-                <a:lnSpc>
-                  <a:spcPts val="2600"/>
-                </a:lnSpc>
-              </a:pPr>
-              <a:r>
-                <a:rPr lang="te-IN" sz="2400" dirty="0">
-                  <a:latin typeface="Ramabhadra" panose="02000600000000000000" pitchFamily="2" charset="0"/>
-                  <a:cs typeface="Ramabhadra" panose="02000600000000000000" pitchFamily="2" charset="0"/>
-                </a:rPr>
-                <a:t>నీవే కావాలయ్యా నాతో రావాలయ్యా </a:t>
+                <a:t>యేసు రాజా దివ్య తేజా (2)</a:t>
               </a:r>
             </a:p>
             <a:p>
@@ -3515,7 +3479,7 @@
                   <a:latin typeface="Ramabhadra" panose="02000600000000000000" pitchFamily="2" charset="0"/>
                   <a:cs typeface="Ramabhadra" panose="02000600000000000000" pitchFamily="2" charset="0"/>
                 </a:rPr>
-                <a:t>నీవే నాతో వస్తే దిగులు నాకుండదు</a:t>
+                <a:t>అద్వితీయుడవు పరిశుద్ధుడవు</a:t>
               </a:r>
             </a:p>
             <a:p>
@@ -3529,7 +3493,35 @@
                   <a:latin typeface="Ramabhadra" panose="02000600000000000000" pitchFamily="2" charset="0"/>
                   <a:cs typeface="Ramabhadra" panose="02000600000000000000" pitchFamily="2" charset="0"/>
                 </a:rPr>
-                <a:t>నీవే ఆజ్ఞాపిస్తే తెగులు నన్నంటదు  </a:t>
+                <a:t>అతి సుందరుడవు నీవే ప్రభూ (2)</a:t>
+              </a:r>
+            </a:p>
+            <a:p>
+              <a:pPr>
+                <a:lnSpc>
+                  <a:spcPts val="2600"/>
+                </a:lnSpc>
+              </a:pPr>
+              <a:r>
+                <a:rPr lang="te-IN" sz="2400" dirty="0">
+                  <a:latin typeface="Ramabhadra" panose="02000600000000000000" pitchFamily="2" charset="0"/>
+                  <a:cs typeface="Ramabhadra" panose="02000600000000000000" pitchFamily="2" charset="0"/>
+                </a:rPr>
+                <a:t>నీతి న్యాయములు నీ సింహాసనాధారం (2)</a:t>
+              </a:r>
+            </a:p>
+            <a:p>
+              <a:pPr>
+                <a:lnSpc>
+                  <a:spcPts val="2600"/>
+                </a:lnSpc>
+              </a:pPr>
+              <a:r>
+                <a:rPr lang="te-IN" sz="2400" dirty="0">
+                  <a:latin typeface="Ramabhadra" panose="02000600000000000000" pitchFamily="2" charset="0"/>
+                  <a:cs typeface="Ramabhadra" panose="02000600000000000000" pitchFamily="2" charset="0"/>
+                </a:rPr>
+                <a:t>కృపా సత్యములు నీ సన్నిధానవర్తులు (2)</a:t>
               </a:r>
             </a:p>
             <a:p>
@@ -3554,7 +3546,7 @@
                   <a:latin typeface="Ramabhadra" panose="02000600000000000000" pitchFamily="2" charset="0"/>
                   <a:cs typeface="Ramabhadra" panose="02000600000000000000" pitchFamily="2" charset="0"/>
                 </a:rPr>
-                <a:t>నీవే నాతో వస్తే కొరత నాకుండదు</a:t>
+                <a:t>బలియు అర్పణ కోరవు నీవు</a:t>
               </a:r>
             </a:p>
             <a:p>
@@ -3568,7 +3560,35 @@
                   <a:latin typeface="Ramabhadra" panose="02000600000000000000" pitchFamily="2" charset="0"/>
                   <a:cs typeface="Ramabhadra" panose="02000600000000000000" pitchFamily="2" charset="0"/>
                 </a:rPr>
-                <a:t>నీవే ఆజ్ఞాపిస్తే క్షయత నన్నంటదు</a:t>
+                <a:t>బలియైతివి నా దోషముకై (2)</a:t>
+              </a:r>
+            </a:p>
+            <a:p>
+              <a:pPr>
+                <a:lnSpc>
+                  <a:spcPts val="2600"/>
+                </a:lnSpc>
+              </a:pPr>
+              <a:r>
+                <a:rPr lang="te-IN" sz="2400" dirty="0">
+                  <a:latin typeface="Ramabhadra" panose="02000600000000000000" pitchFamily="2" charset="0"/>
+                  <a:cs typeface="Ramabhadra" panose="02000600000000000000" pitchFamily="2" charset="0"/>
+                </a:rPr>
+                <a:t>నా హృదయమే నీ ప్రియమగు ఆలయం (2)</a:t>
+              </a:r>
+            </a:p>
+            <a:p>
+              <a:pPr>
+                <a:lnSpc>
+                  <a:spcPts val="2600"/>
+                </a:lnSpc>
+              </a:pPr>
+              <a:r>
+                <a:rPr lang="te-IN" sz="2400" dirty="0">
+                  <a:latin typeface="Ramabhadra" panose="02000600000000000000" pitchFamily="2" charset="0"/>
+                  <a:cs typeface="Ramabhadra" panose="02000600000000000000" pitchFamily="2" charset="0"/>
+                </a:rPr>
+                <a:t>స్తుతియాగమునే చేసెద నిరతం (2)</a:t>
               </a:r>
             </a:p>
             <a:p>
@@ -3593,7 +3613,7 @@
                   <a:latin typeface="Ramabhadra" panose="02000600000000000000" pitchFamily="2" charset="0"/>
                   <a:cs typeface="Ramabhadra" panose="02000600000000000000" pitchFamily="2" charset="0"/>
                 </a:rPr>
-                <a:t>నీవే నాతో వస్తే ఓటమి నాకుండదు</a:t>
+                <a:t>బూరధ్వనులే నింగిలో మ్రోగగా</a:t>
               </a:r>
             </a:p>
             <a:p>
@@ -3607,7 +3627,35 @@
                   <a:latin typeface="Ramabhadra" panose="02000600000000000000" pitchFamily="2" charset="0"/>
                   <a:cs typeface="Ramabhadra" panose="02000600000000000000" pitchFamily="2" charset="0"/>
                 </a:rPr>
-                <a:t>నీవే ఆజ్ఞాపిస్తే చీకటి నన్నంటదు</a:t>
+                <a:t>రాజధిరాజ నీవే వచ్చువేళ (2)</a:t>
+              </a:r>
+            </a:p>
+            <a:p>
+              <a:pPr>
+                <a:lnSpc>
+                  <a:spcPts val="2600"/>
+                </a:lnSpc>
+              </a:pPr>
+              <a:r>
+                <a:rPr lang="te-IN" sz="2400" dirty="0">
+                  <a:latin typeface="Ramabhadra" panose="02000600000000000000" pitchFamily="2" charset="0"/>
+                  <a:cs typeface="Ramabhadra" panose="02000600000000000000" pitchFamily="2" charset="0"/>
+                </a:rPr>
+                <a:t>సంసిద్ధతతో వెలిగే సిద్దెతో (2)</a:t>
+              </a:r>
+            </a:p>
+            <a:p>
+              <a:pPr>
+                <a:lnSpc>
+                  <a:spcPts val="2600"/>
+                </a:lnSpc>
+              </a:pPr>
+              <a:r>
+                <a:rPr lang="te-IN" sz="2400" dirty="0">
+                  <a:latin typeface="Ramabhadra" panose="02000600000000000000" pitchFamily="2" charset="0"/>
+                  <a:cs typeface="Ramabhadra" panose="02000600000000000000" pitchFamily="2" charset="0"/>
+                </a:rPr>
+                <a:t>పెండ్లి కుమరుడా నిన్నెదుర్కొందును (2)</a:t>
               </a:r>
             </a:p>
           </p:txBody>
@@ -3834,9 +3882,9 @@
         <p:grpSpPr>
           <a:xfrm>
             <a:off x="160868" y="182032"/>
-            <a:ext cx="5506736" cy="6493935"/>
+            <a:ext cx="4700061" cy="6493935"/>
             <a:chOff x="160868" y="182032"/>
-            <a:chExt cx="5506736" cy="6493935"/>
+            <a:chExt cx="4700061" cy="6493935"/>
           </a:xfrm>
         </p:grpSpPr>
         <p:sp>
@@ -3908,8 +3956,8 @@
           </p:nvSpPr>
           <p:spPr>
             <a:xfrm>
-              <a:off x="271993" y="272608"/>
-              <a:ext cx="5395611" cy="6370975"/>
+              <a:off x="220133" y="211189"/>
+              <a:ext cx="4640796" cy="5940088"/>
             </a:xfrm>
             <a:prstGeom prst="rect">
               <a:avLst/>
@@ -3926,66 +3974,186 @@
                 <a:defRPr/>
               </a:pPr>
               <a:r>
-                <a:rPr lang="te-IN" sz="2400" dirty="0">
-                  <a:latin typeface="Ramabhadra" panose="02000600000000000000" pitchFamily="2" charset="0"/>
-                  <a:cs typeface="Ramabhadra" panose="02000600000000000000" pitchFamily="2" charset="0"/>
-                </a:rPr>
-                <a:t>రాజా నీ సన్నిధిలోనే ఉంటానయ్య</a:t>
-              </a:r>
+                <a:rPr lang="te-IN" sz="1900" dirty="0">
+                  <a:latin typeface="Ramabhadra" panose="02000600000000000000" pitchFamily="2" charset="0"/>
+                  <a:cs typeface="Ramabhadra" panose="02000600000000000000" pitchFamily="2" charset="0"/>
+                </a:rPr>
+                <a:t>ఘనమైనవి నీ కార్యములు నా యెడల</a:t>
+              </a:r>
+              <a:br>
+                <a:rPr lang="te-IN" sz="1900" dirty="0">
+                  <a:latin typeface="Ramabhadra" panose="02000600000000000000" pitchFamily="2" charset="0"/>
+                  <a:cs typeface="Ramabhadra" panose="02000600000000000000" pitchFamily="2" charset="0"/>
+                </a:rPr>
+              </a:br>
+              <a:r>
+                <a:rPr lang="te-IN" sz="1900" dirty="0">
+                  <a:latin typeface="Ramabhadra" panose="02000600000000000000" pitchFamily="2" charset="0"/>
+                  <a:cs typeface="Ramabhadra" panose="02000600000000000000" pitchFamily="2" charset="0"/>
+                </a:rPr>
+                <a:t>స్థిరమైనవి నీ ఆలోచనలు నా యేసయ్యా (2)</a:t>
+              </a:r>
+              <a:br>
+                <a:rPr lang="te-IN" sz="1900" dirty="0">
+                  <a:latin typeface="Ramabhadra" panose="02000600000000000000" pitchFamily="2" charset="0"/>
+                  <a:cs typeface="Ramabhadra" panose="02000600000000000000" pitchFamily="2" charset="0"/>
+                </a:rPr>
+              </a:br>
+              <a:r>
+                <a:rPr lang="te-IN" sz="1900" dirty="0">
+                  <a:latin typeface="Ramabhadra" panose="02000600000000000000" pitchFamily="2" charset="0"/>
+                  <a:cs typeface="Ramabhadra" panose="02000600000000000000" pitchFamily="2" charset="0"/>
+                </a:rPr>
+                <a:t>కృపలను పొందుచు కృతజ్ఞత కలిగి</a:t>
+              </a:r>
+              <a:br>
+                <a:rPr lang="te-IN" sz="1900" dirty="0">
+                  <a:latin typeface="Ramabhadra" panose="02000600000000000000" pitchFamily="2" charset="0"/>
+                  <a:cs typeface="Ramabhadra" panose="02000600000000000000" pitchFamily="2" charset="0"/>
+                </a:rPr>
+              </a:br>
+              <a:r>
+                <a:rPr lang="te-IN" sz="1900" dirty="0">
+                  <a:latin typeface="Ramabhadra" panose="02000600000000000000" pitchFamily="2" charset="0"/>
+                  <a:cs typeface="Ramabhadra" panose="02000600000000000000" pitchFamily="2" charset="0"/>
+                </a:rPr>
+                <a:t>స్తుతులర్పించెదను అన్నివేళలా (2)</a:t>
+              </a:r>
+              <a:br>
+                <a:rPr lang="te-IN" sz="1900" dirty="0">
+                  <a:latin typeface="Ramabhadra" panose="02000600000000000000" pitchFamily="2" charset="0"/>
+                  <a:cs typeface="Ramabhadra" panose="02000600000000000000" pitchFamily="2" charset="0"/>
+                </a:rPr>
+              </a:br>
+              <a:r>
+                <a:rPr lang="te-IN" sz="1900" dirty="0">
+                  <a:latin typeface="Ramabhadra" panose="02000600000000000000" pitchFamily="2" charset="0"/>
+                  <a:cs typeface="Ramabhadra" panose="02000600000000000000" pitchFamily="2" charset="0"/>
+                </a:rPr>
+                <a:t>అనుదినము నీ అనుగ్రహమే</a:t>
+              </a:r>
+              <a:br>
+                <a:rPr lang="te-IN" sz="1900" dirty="0">
+                  <a:latin typeface="Ramabhadra" panose="02000600000000000000" pitchFamily="2" charset="0"/>
+                  <a:cs typeface="Ramabhadra" panose="02000600000000000000" pitchFamily="2" charset="0"/>
+                </a:rPr>
+              </a:br>
+              <a:r>
+                <a:rPr lang="te-IN" sz="1900" dirty="0">
+                  <a:latin typeface="Ramabhadra" panose="02000600000000000000" pitchFamily="2" charset="0"/>
+                  <a:cs typeface="Ramabhadra" panose="02000600000000000000" pitchFamily="2" charset="0"/>
+                </a:rPr>
+                <a:t>ఆయుష్కాలము నీ వరమే (2</a:t>
+              </a:r>
+              <a:r>
+                <a:rPr lang="en-IN" sz="1900" dirty="0">
+                  <a:latin typeface="Ramabhadra" panose="02000600000000000000" pitchFamily="2" charset="0"/>
+                  <a:cs typeface="Ramabhadra" panose="02000600000000000000" pitchFamily="2" charset="0"/>
+                </a:rPr>
+                <a:t>)</a:t>
+              </a:r>
+              <a:endParaRPr lang="te-IN" sz="1900" dirty="0">
+                <a:latin typeface="Ramabhadra" panose="02000600000000000000" pitchFamily="2" charset="0"/>
+                <a:cs typeface="Ramabhadra" panose="02000600000000000000" pitchFamily="2" charset="0"/>
+              </a:endParaRPr>
             </a:p>
             <a:p>
               <a:pPr defTabSz="439781">
                 <a:defRPr/>
               </a:pPr>
-              <a:r>
-                <a:rPr lang="te-IN" sz="2400" dirty="0">
-                  <a:latin typeface="Ramabhadra" panose="02000600000000000000" pitchFamily="2" charset="0"/>
-                  <a:cs typeface="Ramabhadra" panose="02000600000000000000" pitchFamily="2" charset="0"/>
-                </a:rPr>
-                <a:t>మనసారా ఆరాధిస్తు బ్రతికేస్తానయ్య</a:t>
-              </a:r>
+              <a:endParaRPr lang="te-IN" sz="1900" dirty="0">
+                <a:latin typeface="Ramabhadra" panose="02000600000000000000" pitchFamily="2" charset="0"/>
+                <a:cs typeface="Ramabhadra" panose="02000600000000000000" pitchFamily="2" charset="0"/>
+              </a:endParaRPr>
             </a:p>
             <a:p>
               <a:pPr defTabSz="439781">
                 <a:defRPr/>
               </a:pPr>
               <a:r>
-                <a:rPr lang="te-IN" sz="2400" dirty="0">
-                  <a:latin typeface="Ramabhadra" panose="02000600000000000000" pitchFamily="2" charset="0"/>
-                  <a:cs typeface="Ramabhadra" panose="02000600000000000000" pitchFamily="2" charset="0"/>
-                </a:rPr>
-                <a:t>నేనుండలేనయ్య నే బ్రతుకలేనయ్య</a:t>
-              </a:r>
+                <a:rPr lang="te-IN" sz="1900" dirty="0">
+                  <a:latin typeface="Ramabhadra" panose="02000600000000000000" pitchFamily="2" charset="0"/>
+                  <a:cs typeface="Ramabhadra" panose="02000600000000000000" pitchFamily="2" charset="0"/>
+                </a:rPr>
+                <a:t>యే తెగులు సమీపించనీయక –</a:t>
+              </a:r>
+              <a:endParaRPr lang="en-IN" sz="1900" dirty="0">
+                <a:latin typeface="Ramabhadra" panose="02000600000000000000" pitchFamily="2" charset="0"/>
+                <a:cs typeface="Ramabhadra" panose="02000600000000000000" pitchFamily="2" charset="0"/>
+              </a:endParaRPr>
             </a:p>
             <a:p>
               <a:pPr defTabSz="439781">
                 <a:defRPr/>
               </a:pPr>
               <a:r>
-                <a:rPr lang="te-IN" sz="2400" dirty="0">
-                  <a:latin typeface="Ramabhadra" panose="02000600000000000000" pitchFamily="2" charset="0"/>
-                  <a:cs typeface="Ramabhadra" panose="02000600000000000000" pitchFamily="2" charset="0"/>
-                </a:rPr>
-                <a:t>నీవే లేకుండా నేనుండలేనయ్య</a:t>
-              </a:r>
+                <a:rPr lang="te-IN" sz="1900" dirty="0">
+                  <a:latin typeface="Ramabhadra" panose="02000600000000000000" pitchFamily="2" charset="0"/>
+                  <a:cs typeface="Ramabhadra" panose="02000600000000000000" pitchFamily="2" charset="0"/>
+                </a:rPr>
+                <a:t>యే కీడైన దరిచేరనీయక</a:t>
+              </a:r>
+              <a:br>
+                <a:rPr lang="te-IN" sz="1900" dirty="0">
+                  <a:latin typeface="Ramabhadra" panose="02000600000000000000" pitchFamily="2" charset="0"/>
+                  <a:cs typeface="Ramabhadra" panose="02000600000000000000" pitchFamily="2" charset="0"/>
+                </a:rPr>
+              </a:br>
+              <a:r>
+                <a:rPr lang="te-IN" sz="1900" dirty="0">
+                  <a:latin typeface="Ramabhadra" panose="02000600000000000000" pitchFamily="2" charset="0"/>
+                  <a:cs typeface="Ramabhadra" panose="02000600000000000000" pitchFamily="2" charset="0"/>
+                </a:rPr>
+                <a:t>ఆపదలన్ని తొలగే వరకు –</a:t>
+              </a:r>
+              <a:endParaRPr lang="en-IN" sz="1900" dirty="0">
+                <a:latin typeface="Ramabhadra" panose="02000600000000000000" pitchFamily="2" charset="0"/>
+                <a:cs typeface="Ramabhadra" panose="02000600000000000000" pitchFamily="2" charset="0"/>
+              </a:endParaRPr>
             </a:p>
             <a:p>
               <a:pPr defTabSz="439781">
                 <a:defRPr/>
               </a:pPr>
               <a:r>
-                <a:rPr lang="te-IN" sz="2400" dirty="0">
-                  <a:latin typeface="Ramabhadra" panose="02000600000000000000" pitchFamily="2" charset="0"/>
-                  <a:cs typeface="Ramabhadra" panose="02000600000000000000" pitchFamily="2" charset="0"/>
-                </a:rPr>
-                <a:t>నీ తోడే లేకుండా నే బ్రతుకలేనయ్య</a:t>
+                <a:rPr lang="te-IN" sz="1900" dirty="0">
+                  <a:latin typeface="Ramabhadra" panose="02000600000000000000" pitchFamily="2" charset="0"/>
+                  <a:cs typeface="Ramabhadra" panose="02000600000000000000" pitchFamily="2" charset="0"/>
+                </a:rPr>
+                <a:t>ఆత్మలో నెమ్మది కలిగే వరకు (2)</a:t>
+              </a:r>
+              <a:br>
+                <a:rPr lang="te-IN" sz="1900" dirty="0">
+                  <a:latin typeface="Ramabhadra" panose="02000600000000000000" pitchFamily="2" charset="0"/>
+                  <a:cs typeface="Ramabhadra" panose="02000600000000000000" pitchFamily="2" charset="0"/>
+                </a:rPr>
+              </a:br>
+              <a:r>
+                <a:rPr lang="te-IN" sz="1900" dirty="0">
+                  <a:latin typeface="Ramabhadra" panose="02000600000000000000" pitchFamily="2" charset="0"/>
+                  <a:cs typeface="Ramabhadra" panose="02000600000000000000" pitchFamily="2" charset="0"/>
+                </a:rPr>
+                <a:t>నా భారము మోసి – బాసటగా నిలిచి – ఆదరించితివి</a:t>
+              </a:r>
+              <a:br>
+                <a:rPr lang="te-IN" sz="1900" dirty="0">
+                  <a:latin typeface="Ramabhadra" panose="02000600000000000000" pitchFamily="2" charset="0"/>
+                  <a:cs typeface="Ramabhadra" panose="02000600000000000000" pitchFamily="2" charset="0"/>
+                </a:rPr>
+              </a:br>
+              <a:r>
+                <a:rPr lang="te-IN" sz="1900" dirty="0">
+                  <a:latin typeface="Ramabhadra" panose="02000600000000000000" pitchFamily="2" charset="0"/>
+                  <a:cs typeface="Ramabhadra" panose="02000600000000000000" pitchFamily="2" charset="0"/>
+                </a:rPr>
+                <a:t>ఈ స్తుతి మహిమలు నీకే – చెల్లించెదను – జీవితాంతము</a:t>
               </a:r>
             </a:p>
             <a:p>
               <a:pPr defTabSz="439781">
                 <a:defRPr/>
               </a:pPr>
-              <a:endParaRPr lang="te-IN" sz="2400" dirty="0">
+              <a:endParaRPr lang="te-IN" sz="1900" dirty="0">
                 <a:latin typeface="Ramabhadra" panose="02000600000000000000" pitchFamily="2" charset="0"/>
                 <a:cs typeface="Ramabhadra" panose="02000600000000000000" pitchFamily="2" charset="0"/>
               </a:endParaRPr>
@@ -3995,128 +4163,82 @@
                 <a:defRPr/>
               </a:pPr>
               <a:r>
-                <a:rPr lang="te-IN" sz="2400" dirty="0">
-                  <a:latin typeface="Ramabhadra" panose="02000600000000000000" pitchFamily="2" charset="0"/>
-                  <a:cs typeface="Ramabhadra" panose="02000600000000000000" pitchFamily="2" charset="0"/>
-                </a:rPr>
-                <a:t>నీ సన్నిధానములో సంపూర్ణ సంతోషం</a:t>
-              </a:r>
+                <a:rPr lang="te-IN" sz="1900" dirty="0">
+                  <a:latin typeface="Ramabhadra" panose="02000600000000000000" pitchFamily="2" charset="0"/>
+                  <a:cs typeface="Ramabhadra" panose="02000600000000000000" pitchFamily="2" charset="0"/>
+                </a:rPr>
+                <a:t>నాకు ఎత్తైన కోటవు నీవే – నన్ను కాపాడు కేడెము నీవే</a:t>
+              </a:r>
+              <a:br>
+                <a:rPr lang="te-IN" sz="1900" dirty="0">
+                  <a:latin typeface="Ramabhadra" panose="02000600000000000000" pitchFamily="2" charset="0"/>
+                  <a:cs typeface="Ramabhadra" panose="02000600000000000000" pitchFamily="2" charset="0"/>
+                </a:rPr>
+              </a:br>
+              <a:r>
+                <a:rPr lang="te-IN" sz="1900" dirty="0">
+                  <a:latin typeface="Ramabhadra" panose="02000600000000000000" pitchFamily="2" charset="0"/>
+                  <a:cs typeface="Ramabhadra" panose="02000600000000000000" pitchFamily="2" charset="0"/>
+                </a:rPr>
+                <a:t>ఆశ్రయమైన బండవు నీవే –</a:t>
+              </a:r>
+              <a:endParaRPr lang="en-IN" sz="1900" dirty="0">
+                <a:latin typeface="Ramabhadra" panose="02000600000000000000" pitchFamily="2" charset="0"/>
+                <a:cs typeface="Ramabhadra" panose="02000600000000000000" pitchFamily="2" charset="0"/>
+              </a:endParaRPr>
             </a:p>
             <a:p>
               <a:pPr defTabSz="439781">
                 <a:defRPr/>
               </a:pPr>
               <a:r>
-                <a:rPr lang="te-IN" sz="2400" dirty="0">
-                  <a:latin typeface="Ramabhadra" panose="02000600000000000000" pitchFamily="2" charset="0"/>
-                  <a:cs typeface="Ramabhadra" panose="02000600000000000000" pitchFamily="2" charset="0"/>
-                </a:rPr>
-                <a:t>ఆరాధించుకొనే విలువైన అవకాశం</a:t>
-              </a:r>
+                <a:rPr lang="te-IN" sz="1900" dirty="0">
+                  <a:latin typeface="Ramabhadra" panose="02000600000000000000" pitchFamily="2" charset="0"/>
+                  <a:cs typeface="Ramabhadra" panose="02000600000000000000" pitchFamily="2" charset="0"/>
+                </a:rPr>
+                <a:t>శాశ్వత కృపకాధారము నీవే (2)</a:t>
+              </a:r>
+              <a:br>
+                <a:rPr lang="te-IN" sz="1900" dirty="0">
+                  <a:latin typeface="Ramabhadra" panose="02000600000000000000" pitchFamily="2" charset="0"/>
+                  <a:cs typeface="Ramabhadra" panose="02000600000000000000" pitchFamily="2" charset="0"/>
+                </a:rPr>
+              </a:br>
+              <a:r>
+                <a:rPr lang="te-IN" sz="1900" dirty="0">
+                  <a:latin typeface="Ramabhadra" panose="02000600000000000000" pitchFamily="2" charset="0"/>
+                  <a:cs typeface="Ramabhadra" panose="02000600000000000000" pitchFamily="2" charset="0"/>
+                </a:rPr>
+                <a:t>నా ప్రతిక్షణమును నీవు –</a:t>
+              </a:r>
+              <a:endParaRPr lang="en-IN" sz="1900" dirty="0">
+                <a:latin typeface="Ramabhadra" panose="02000600000000000000" pitchFamily="2" charset="0"/>
+                <a:cs typeface="Ramabhadra" panose="02000600000000000000" pitchFamily="2" charset="0"/>
+              </a:endParaRPr>
             </a:p>
             <a:p>
               <a:pPr defTabSz="439781">
                 <a:defRPr/>
               </a:pPr>
               <a:r>
-                <a:rPr lang="te-IN" sz="2400" dirty="0">
-                  <a:latin typeface="Ramabhadra" panose="02000600000000000000" pitchFamily="2" charset="0"/>
-                  <a:cs typeface="Ramabhadra" panose="02000600000000000000" pitchFamily="2" charset="0"/>
-                </a:rPr>
-                <a:t>కోల్పోయినవన్ని నాకు ఇచ్చుటకును</a:t>
-              </a:r>
-            </a:p>
-            <a:p>
-              <a:pPr defTabSz="439781">
-                <a:defRPr/>
-              </a:pPr>
-              <a:r>
-                <a:rPr lang="te-IN" sz="2400" dirty="0">
-                  <a:latin typeface="Ramabhadra" panose="02000600000000000000" pitchFamily="2" charset="0"/>
-                  <a:cs typeface="Ramabhadra" panose="02000600000000000000" pitchFamily="2" charset="0"/>
-                </a:rPr>
-                <a:t>బాధల నుండి బ్రతికించుటకును</a:t>
-              </a:r>
-            </a:p>
-            <a:p>
-              <a:pPr defTabSz="439781">
-                <a:defRPr/>
-              </a:pPr>
-              <a:r>
-                <a:rPr lang="te-IN" sz="2400" dirty="0">
-                  <a:latin typeface="Ramabhadra" panose="02000600000000000000" pitchFamily="2" charset="0"/>
-                  <a:cs typeface="Ramabhadra" panose="02000600000000000000" pitchFamily="2" charset="0"/>
-                </a:rPr>
-                <a:t>నీవే రాకపోతే నేనేమైపోదునో</a:t>
-              </a:r>
-            </a:p>
-            <a:p>
-              <a:pPr defTabSz="439781">
-                <a:defRPr/>
-              </a:pPr>
-              <a:endParaRPr lang="te-IN" sz="2400" dirty="0">
-                <a:latin typeface="Ramabhadra" panose="02000600000000000000" pitchFamily="2" charset="0"/>
-                <a:cs typeface="Ramabhadra" panose="02000600000000000000" pitchFamily="2" charset="0"/>
-              </a:endParaRPr>
-            </a:p>
-            <a:p>
-              <a:pPr defTabSz="439781">
-                <a:defRPr/>
-              </a:pPr>
-              <a:r>
-                <a:rPr lang="te-IN" sz="2400" dirty="0">
-                  <a:latin typeface="Ramabhadra" panose="02000600000000000000" pitchFamily="2" charset="0"/>
-                  <a:cs typeface="Ramabhadra" panose="02000600000000000000" pitchFamily="2" charset="0"/>
-                </a:rPr>
-                <a:t>ఒంటరి పోరు నన్ను విసిగించిన</a:t>
-              </a:r>
-            </a:p>
-            <a:p>
-              <a:pPr defTabSz="439781">
-                <a:defRPr/>
-              </a:pPr>
-              <a:r>
-                <a:rPr lang="te-IN" sz="2400" dirty="0">
-                  <a:latin typeface="Ramabhadra" panose="02000600000000000000" pitchFamily="2" charset="0"/>
-                  <a:cs typeface="Ramabhadra" panose="02000600000000000000" pitchFamily="2" charset="0"/>
-                </a:rPr>
-                <a:t>మనుషులెల్లరు నన్ను తప్పుపట్టినా</a:t>
-              </a:r>
-            </a:p>
-            <a:p>
-              <a:pPr defTabSz="439781">
-                <a:defRPr/>
-              </a:pPr>
-              <a:r>
-                <a:rPr lang="te-IN" sz="2400" dirty="0">
-                  <a:latin typeface="Ramabhadra" panose="02000600000000000000" pitchFamily="2" charset="0"/>
-                  <a:cs typeface="Ramabhadra" panose="02000600000000000000" pitchFamily="2" charset="0"/>
-                </a:rPr>
-                <a:t>ఒంటరివాడే వేయి మంది అన్నావు</a:t>
-              </a:r>
-            </a:p>
-            <a:p>
-              <a:pPr defTabSz="439781">
-                <a:defRPr/>
-              </a:pPr>
-              <a:r>
-                <a:rPr lang="te-IN" sz="2400" dirty="0">
-                  <a:latin typeface="Ramabhadra" panose="02000600000000000000" pitchFamily="2" charset="0"/>
-                  <a:cs typeface="Ramabhadra" panose="02000600000000000000" pitchFamily="2" charset="0"/>
-                </a:rPr>
-                <a:t>నేనున్నానులే భయపడకు అన్నావు</a:t>
-              </a:r>
-            </a:p>
-            <a:p>
-              <a:pPr defTabSz="439781">
-                <a:defRPr/>
-              </a:pPr>
-              <a:r>
-                <a:rPr lang="te-IN" sz="2400" dirty="0">
-                  <a:latin typeface="Ramabhadra" panose="02000600000000000000" pitchFamily="2" charset="0"/>
-                  <a:cs typeface="Ramabhadra" panose="02000600000000000000" pitchFamily="2" charset="0"/>
-                </a:rPr>
-                <a:t>నేనంటే నీకు ఇంత ప్రేమ ఏంటయ్య</a:t>
+                <a:rPr lang="te-IN" sz="1900" dirty="0">
+                  <a:latin typeface="Ramabhadra" panose="02000600000000000000" pitchFamily="2" charset="0"/>
+                  <a:cs typeface="Ramabhadra" panose="02000600000000000000" pitchFamily="2" charset="0"/>
+                </a:rPr>
+                <a:t>దీవెనగా మార్చి – నడిపించుచున్నావు</a:t>
+              </a:r>
+              <a:br>
+                <a:rPr lang="te-IN" sz="1900" dirty="0">
+                  <a:latin typeface="Ramabhadra" panose="02000600000000000000" pitchFamily="2" charset="0"/>
+                  <a:cs typeface="Ramabhadra" panose="02000600000000000000" pitchFamily="2" charset="0"/>
+                </a:rPr>
+              </a:br>
+              <a:r>
+                <a:rPr lang="te-IN" sz="1900" dirty="0">
+                  <a:latin typeface="Ramabhadra" panose="02000600000000000000" pitchFamily="2" charset="0"/>
+                  <a:cs typeface="Ramabhadra" panose="02000600000000000000" pitchFamily="2" charset="0"/>
+                </a:rPr>
+                <a:t>ఈ స్తుతి మహిమలు నీకే – చెల్లించెదను – జీవితాంతము</a:t>
               </a:r>
             </a:p>
           </p:txBody>
@@ -4273,8 +4395,8 @@
           </p:nvSpPr>
           <p:spPr>
             <a:xfrm>
-              <a:off x="212729" y="206959"/>
-              <a:ext cx="4749801" cy="6186309"/>
+              <a:off x="212729" y="244019"/>
+              <a:ext cx="4749801" cy="6355586"/>
             </a:xfrm>
             <a:prstGeom prst="rect">
               <a:avLst/>
@@ -4289,66 +4411,66 @@
             <a:p>
               <a:pPr defTabSz="439781"/>
               <a:r>
-                <a:rPr lang="te-IN" sz="2200" dirty="0">
-                  <a:latin typeface="Ramabhadra" panose="02000600000000000000" pitchFamily="2" charset="0"/>
-                  <a:cs typeface="Ramabhadra" panose="02000600000000000000" pitchFamily="2" charset="0"/>
-                </a:rPr>
-                <a:t>ప్రేమించెదన్ అధికముగా</a:t>
+                <a:rPr lang="te-IN" sz="1850" dirty="0">
+                  <a:latin typeface="Ramabhadra" panose="02000600000000000000" pitchFamily="2" charset="0"/>
+                  <a:cs typeface="Ramabhadra" panose="02000600000000000000" pitchFamily="2" charset="0"/>
+                </a:rPr>
+                <a:t>నీ ప్రేమ నాలో మధురమైనది</a:t>
               </a:r>
             </a:p>
             <a:p>
               <a:pPr defTabSz="439781"/>
               <a:r>
-                <a:rPr lang="te-IN" sz="2200" dirty="0">
-                  <a:latin typeface="Ramabhadra" panose="02000600000000000000" pitchFamily="2" charset="0"/>
-                  <a:cs typeface="Ramabhadra" panose="02000600000000000000" pitchFamily="2" charset="0"/>
-                </a:rPr>
-                <a:t>ఆరాధింతున్ ఆసక్తితో (2)</a:t>
+                <a:rPr lang="te-IN" sz="1850" dirty="0">
+                  <a:latin typeface="Ramabhadra" panose="02000600000000000000" pitchFamily="2" charset="0"/>
+                  <a:cs typeface="Ramabhadra" panose="02000600000000000000" pitchFamily="2" charset="0"/>
+                </a:rPr>
+                <a:t>అది నా ఊహకందని క్షేమ శిఖరము (2)</a:t>
               </a:r>
             </a:p>
             <a:p>
               <a:pPr defTabSz="439781"/>
               <a:r>
-                <a:rPr lang="te-IN" sz="2200" dirty="0">
-                  <a:latin typeface="Ramabhadra" panose="02000600000000000000" pitchFamily="2" charset="0"/>
-                  <a:cs typeface="Ramabhadra" panose="02000600000000000000" pitchFamily="2" charset="0"/>
-                </a:rPr>
-                <a:t>నిన్ను పూర్ణ మనసుతో ఆరాధింతున్</a:t>
+                <a:rPr lang="te-IN" sz="1850" dirty="0">
+                  <a:latin typeface="Ramabhadra" panose="02000600000000000000" pitchFamily="2" charset="0"/>
+                  <a:cs typeface="Ramabhadra" panose="02000600000000000000" pitchFamily="2" charset="0"/>
+                </a:rPr>
+                <a:t>ఏరి కోరుకున్నావు ప్రేమ చూపి నన్ను</a:t>
               </a:r>
             </a:p>
             <a:p>
               <a:pPr defTabSz="439781"/>
               <a:r>
-                <a:rPr lang="te-IN" sz="2200" dirty="0">
-                  <a:latin typeface="Ramabhadra" panose="02000600000000000000" pitchFamily="2" charset="0"/>
-                  <a:cs typeface="Ramabhadra" panose="02000600000000000000" pitchFamily="2" charset="0"/>
-                </a:rPr>
-                <a:t>పూర్ణ బలముతో ప్రేమించెదన్</a:t>
+                <a:rPr lang="te-IN" sz="1850" dirty="0">
+                  <a:latin typeface="Ramabhadra" panose="02000600000000000000" pitchFamily="2" charset="0"/>
+                  <a:cs typeface="Ramabhadra" panose="02000600000000000000" pitchFamily="2" charset="0"/>
+                </a:rPr>
+                <a:t>పరవశించి నాలో మహిమపరతు నిన్నే</a:t>
               </a:r>
             </a:p>
             <a:p>
               <a:pPr defTabSz="439781"/>
               <a:r>
-                <a:rPr lang="te-IN" sz="2200" dirty="0">
-                  <a:latin typeface="Ramabhadra" panose="02000600000000000000" pitchFamily="2" charset="0"/>
-                  <a:cs typeface="Ramabhadra" panose="02000600000000000000" pitchFamily="2" charset="0"/>
-                </a:rPr>
-                <a:t>ఆరాధన ఆరాధనా ఆ.. ఆ.. </a:t>
+                <a:rPr lang="te-IN" sz="1850" dirty="0">
+                  <a:latin typeface="Ramabhadra" panose="02000600000000000000" pitchFamily="2" charset="0"/>
+                  <a:cs typeface="Ramabhadra" panose="02000600000000000000" pitchFamily="2" charset="0"/>
+                </a:rPr>
+                <a:t>సర్వకృపానిధి నీవు – సర్వాధికారివి నీవు</a:t>
               </a:r>
             </a:p>
             <a:p>
               <a:pPr defTabSz="439781"/>
               <a:r>
-                <a:rPr lang="te-IN" sz="2200" dirty="0">
-                  <a:latin typeface="Ramabhadra" panose="02000600000000000000" pitchFamily="2" charset="0"/>
-                  <a:cs typeface="Ramabhadra" panose="02000600000000000000" pitchFamily="2" charset="0"/>
-                </a:rPr>
-                <a:t>ఆరాధన ఆరాధనా (2)</a:t>
+                <a:rPr lang="te-IN" sz="1850" dirty="0">
+                  <a:latin typeface="Ramabhadra" panose="02000600000000000000" pitchFamily="2" charset="0"/>
+                  <a:cs typeface="Ramabhadra" panose="02000600000000000000" pitchFamily="2" charset="0"/>
+                </a:rPr>
+                <a:t>సత్య స్వరూపివి నీవు – ఆరాధింతును నిన్నే</a:t>
               </a:r>
             </a:p>
             <a:p>
               <a:pPr defTabSz="439781"/>
-              <a:endParaRPr lang="te-IN" sz="2200" dirty="0">
+              <a:endParaRPr lang="te-IN" sz="1850" dirty="0">
                 <a:latin typeface="Ramabhadra" panose="02000600000000000000" pitchFamily="2" charset="0"/>
                 <a:cs typeface="Ramabhadra" panose="02000600000000000000" pitchFamily="2" charset="0"/>
               </a:endParaRPr>
@@ -4356,73 +4478,80 @@
             <a:p>
               <a:pPr defTabSz="439781"/>
               <a:r>
-                <a:rPr lang="te-IN" sz="2200" dirty="0">
-                  <a:latin typeface="Ramabhadra" panose="02000600000000000000" pitchFamily="2" charset="0"/>
-                  <a:cs typeface="Ramabhadra" panose="02000600000000000000" pitchFamily="2" charset="0"/>
-                </a:rPr>
-                <a:t>ఎబినేజరే ఎబినేజరే</a:t>
+                <a:rPr lang="te-IN" sz="1850" dirty="0">
+                  <a:latin typeface="Ramabhadra" panose="02000600000000000000" pitchFamily="2" charset="0"/>
+                  <a:cs typeface="Ramabhadra" panose="02000600000000000000" pitchFamily="2" charset="0"/>
+                </a:rPr>
+                <a:t>చేరితి నిన్నే విరిగిన మనస్సుతో</a:t>
               </a:r>
             </a:p>
             <a:p>
               <a:pPr defTabSz="439781"/>
               <a:r>
-                <a:rPr lang="te-IN" sz="2200" dirty="0">
-                  <a:latin typeface="Ramabhadra" panose="02000600000000000000" pitchFamily="2" charset="0"/>
-                  <a:cs typeface="Ramabhadra" panose="02000600000000000000" pitchFamily="2" charset="0"/>
-                </a:rPr>
-                <a:t>ఇంత వరకు ఆదుకొన్నావే (2)</a:t>
+                <a:rPr lang="te-IN" sz="1850" dirty="0">
+                  <a:latin typeface="Ramabhadra" panose="02000600000000000000" pitchFamily="2" charset="0"/>
+                  <a:cs typeface="Ramabhadra" panose="02000600000000000000" pitchFamily="2" charset="0"/>
+                </a:rPr>
+                <a:t>కాదనలేదే నా మనవులు నీవు (2)</a:t>
               </a:r>
             </a:p>
             <a:p>
               <a:pPr defTabSz="439781"/>
               <a:r>
-                <a:rPr lang="te-IN" sz="2200" dirty="0">
-                  <a:latin typeface="Ramabhadra" panose="02000600000000000000" pitchFamily="2" charset="0"/>
-                  <a:cs typeface="Ramabhadra" panose="02000600000000000000" pitchFamily="2" charset="0"/>
-                </a:rPr>
-                <a:t>నన్ను ఇంత వరకు ఆదుకొన్నావే</a:t>
+                <a:rPr lang="te-IN" sz="1850" dirty="0">
+                  <a:latin typeface="Ramabhadra" panose="02000600000000000000" pitchFamily="2" charset="0"/>
+                  <a:cs typeface="Ramabhadra" panose="02000600000000000000" pitchFamily="2" charset="0"/>
+                </a:rPr>
+                <a:t>హృదయము నిండిన గానం – నను నడిపే ప్రేమ కావ్యం</a:t>
               </a:r>
             </a:p>
             <a:p>
               <a:pPr defTabSz="439781"/>
-              <a:endParaRPr lang="te-IN" sz="2200" dirty="0">
+              <a:r>
+                <a:rPr lang="te-IN" sz="1850" dirty="0">
+                  <a:latin typeface="Ramabhadra" panose="02000600000000000000" pitchFamily="2" charset="0"/>
+                  <a:cs typeface="Ramabhadra" panose="02000600000000000000" pitchFamily="2" charset="0"/>
+                </a:rPr>
+                <a:t>నిరతము నాలో నీవే – చెరగని దివ్య రూపం (2)</a:t>
+              </a:r>
+            </a:p>
+            <a:p>
+              <a:pPr defTabSz="439781"/>
+              <a:r>
+                <a:rPr lang="te-IN" sz="1850" dirty="0">
+                  <a:latin typeface="Ramabhadra" panose="02000600000000000000" pitchFamily="2" charset="0"/>
+                  <a:cs typeface="Ramabhadra" panose="02000600000000000000" pitchFamily="2" charset="0"/>
+                </a:rPr>
+                <a:t>ఇది నీ బాహు బంధాల అనుబంధమా</a:t>
+              </a:r>
+            </a:p>
+            <a:p>
+              <a:pPr defTabSz="439781"/>
+              <a:r>
+                <a:rPr lang="te-IN" sz="1850" dirty="0">
+                  <a:latin typeface="Ramabhadra" panose="02000600000000000000" pitchFamily="2" charset="0"/>
+                  <a:cs typeface="Ramabhadra" panose="02000600000000000000" pitchFamily="2" charset="0"/>
+                </a:rPr>
+                <a:t>తేజోవిరాజా స్తుతి మహిమలు నీకే</a:t>
+              </a:r>
+            </a:p>
+            <a:p>
+              <a:pPr defTabSz="439781"/>
+              <a:r>
+                <a:rPr lang="te-IN" sz="1850" dirty="0">
+                  <a:latin typeface="Ramabhadra" panose="02000600000000000000" pitchFamily="2" charset="0"/>
+                  <a:cs typeface="Ramabhadra" panose="02000600000000000000" pitchFamily="2" charset="0"/>
+                </a:rPr>
+                <a:t>నా యేసురాజా ఆరాధన నీకే (2)</a:t>
+              </a:r>
+              <a:endParaRPr lang="en-IN" sz="1850" dirty="0">
                 <a:latin typeface="Ramabhadra" panose="02000600000000000000" pitchFamily="2" charset="0"/>
                 <a:cs typeface="Ramabhadra" panose="02000600000000000000" pitchFamily="2" charset="0"/>
               </a:endParaRPr>
             </a:p>
             <a:p>
               <a:pPr defTabSz="439781"/>
-              <a:r>
-                <a:rPr lang="te-IN" sz="2200" dirty="0">
-                  <a:latin typeface="Ramabhadra" panose="02000600000000000000" pitchFamily="2" charset="0"/>
-                  <a:cs typeface="Ramabhadra" panose="02000600000000000000" pitchFamily="2" charset="0"/>
-                </a:rPr>
-                <a:t>ఎల్రోహి ఎల్రోహి</a:t>
-              </a:r>
-            </a:p>
-            <a:p>
-              <a:pPr defTabSz="439781"/>
-              <a:r>
-                <a:rPr lang="te-IN" sz="2200" dirty="0">
-                  <a:latin typeface="Ramabhadra" panose="02000600000000000000" pitchFamily="2" charset="0"/>
-                  <a:cs typeface="Ramabhadra" panose="02000600000000000000" pitchFamily="2" charset="0"/>
-                </a:rPr>
-                <a:t>నన్ను చూచావే వందనమయ్యా (2)</a:t>
-              </a:r>
-            </a:p>
-            <a:p>
-              <a:pPr defTabSz="439781"/>
-              <a:r>
-                <a:rPr lang="te-IN" sz="2200" dirty="0">
-                  <a:latin typeface="Ramabhadra" panose="02000600000000000000" pitchFamily="2" charset="0"/>
-                  <a:cs typeface="Ramabhadra" panose="02000600000000000000" pitchFamily="2" charset="0"/>
-                </a:rPr>
-                <a:t>నన్ను చూచావే వందనమయ్యా</a:t>
-              </a:r>
-            </a:p>
-            <a:p>
-              <a:pPr defTabSz="439781"/>
-              <a:endParaRPr lang="te-IN" sz="2200" dirty="0">
+              <a:endParaRPr lang="te-IN" sz="1850" dirty="0">
                 <a:latin typeface="Ramabhadra" panose="02000600000000000000" pitchFamily="2" charset="0"/>
                 <a:cs typeface="Ramabhadra" panose="02000600000000000000" pitchFamily="2" charset="0"/>
               </a:endParaRPr>
@@ -4430,32 +4559,83 @@
             <a:p>
               <a:pPr defTabSz="439781"/>
               <a:r>
-                <a:rPr lang="te-IN" sz="2200" dirty="0">
-                  <a:latin typeface="Ramabhadra" panose="02000600000000000000" pitchFamily="2" charset="0"/>
-                  <a:cs typeface="Ramabhadra" panose="02000600000000000000" pitchFamily="2" charset="0"/>
-                </a:rPr>
-                <a:t>యెహోవా రాఫా యెహోవా రాఫా</a:t>
+                <a:rPr lang="te-IN" sz="1850" dirty="0">
+                  <a:latin typeface="Ramabhadra" panose="02000600000000000000" pitchFamily="2" charset="0"/>
+                  <a:cs typeface="Ramabhadra" panose="02000600000000000000" pitchFamily="2" charset="0"/>
+                </a:rPr>
+                <a:t>నా ప్రతి పదములో జీవము నీవే</a:t>
               </a:r>
             </a:p>
             <a:p>
               <a:pPr defTabSz="439781"/>
               <a:r>
-                <a:rPr lang="te-IN" sz="2200" dirty="0">
-                  <a:latin typeface="Ramabhadra" panose="02000600000000000000" pitchFamily="2" charset="0"/>
-                  <a:cs typeface="Ramabhadra" panose="02000600000000000000" pitchFamily="2" charset="0"/>
-                </a:rPr>
-                <a:t>స్వస్థపరిచావే వందనమయ్యా (2)</a:t>
+                <a:rPr lang="te-IN" sz="1850" dirty="0">
+                  <a:latin typeface="Ramabhadra" panose="02000600000000000000" pitchFamily="2" charset="0"/>
+                  <a:cs typeface="Ramabhadra" panose="02000600000000000000" pitchFamily="2" charset="0"/>
+                </a:rPr>
+                <a:t>నా ప్రతి అడుగులో విజయము నీవే (2)</a:t>
               </a:r>
             </a:p>
             <a:p>
               <a:pPr defTabSz="439781"/>
               <a:r>
-                <a:rPr lang="te-IN" sz="2200" dirty="0">
-                  <a:latin typeface="Ramabhadra" panose="02000600000000000000" pitchFamily="2" charset="0"/>
-                  <a:cs typeface="Ramabhadra" panose="02000600000000000000" pitchFamily="2" charset="0"/>
-                </a:rPr>
-                <a:t>నన్ను స్వస్థపరిచావే వందనమయ్యా</a:t>
-              </a:r>
+                <a:rPr lang="te-IN" sz="1850" dirty="0">
+                  <a:latin typeface="Ramabhadra" panose="02000600000000000000" pitchFamily="2" charset="0"/>
+                  <a:cs typeface="Ramabhadra" panose="02000600000000000000" pitchFamily="2" charset="0"/>
+                </a:rPr>
+                <a:t>ఎన్నడు విడువని ప్రేమ – నిను చేరే క్షణము రాదా</a:t>
+              </a:r>
+            </a:p>
+            <a:p>
+              <a:pPr defTabSz="439781"/>
+              <a:r>
+                <a:rPr lang="te-IN" sz="1850" dirty="0">
+                  <a:latin typeface="Ramabhadra" panose="02000600000000000000" pitchFamily="2" charset="0"/>
+                  <a:cs typeface="Ramabhadra" panose="02000600000000000000" pitchFamily="2" charset="0"/>
+                </a:rPr>
+                <a:t>నీడగా నాతో నిలిచే – నీ కృపయే నాకు చాలును (2)</a:t>
+              </a:r>
+            </a:p>
+            <a:p>
+              <a:pPr defTabSz="439781"/>
+              <a:r>
+                <a:rPr lang="te-IN" sz="1850" dirty="0">
+                  <a:latin typeface="Ramabhadra" panose="02000600000000000000" pitchFamily="2" charset="0"/>
+                  <a:cs typeface="Ramabhadra" panose="02000600000000000000" pitchFamily="2" charset="0"/>
+                </a:rPr>
+                <a:t>ఇది నీ ప్రేమ కురిపించు హేమంతమా</a:t>
+              </a:r>
+            </a:p>
+            <a:p>
+              <a:pPr defTabSz="439781"/>
+              <a:r>
+                <a:rPr lang="te-IN" sz="1850" dirty="0">
+                  <a:latin typeface="Ramabhadra" panose="02000600000000000000" pitchFamily="2" charset="0"/>
+                  <a:cs typeface="Ramabhadra" panose="02000600000000000000" pitchFamily="2" charset="0"/>
+                </a:rPr>
+                <a:t>తేజోవిరాజా స్తుతి మహిమలు నీకే</a:t>
+              </a:r>
+            </a:p>
+            <a:p>
+              <a:pPr defTabSz="439781"/>
+              <a:r>
+                <a:rPr lang="te-IN" sz="1850" dirty="0">
+                  <a:latin typeface="Ramabhadra" panose="02000600000000000000" pitchFamily="2" charset="0"/>
+                  <a:cs typeface="Ramabhadra" panose="02000600000000000000" pitchFamily="2" charset="0"/>
+                </a:rPr>
+                <a:t>నా యేసురాజా ఆరాధన నీకే (2</a:t>
+              </a:r>
+              <a:r>
+                <a:rPr lang="en-IN" sz="1850" dirty="0">
+                  <a:latin typeface="Ramabhadra" panose="02000600000000000000" pitchFamily="2" charset="0"/>
+                  <a:cs typeface="Ramabhadra" panose="02000600000000000000" pitchFamily="2" charset="0"/>
+                </a:rPr>
+                <a:t>)</a:t>
+              </a:r>
+              <a:endParaRPr lang="te-IN" sz="1850" dirty="0">
+                <a:latin typeface="Ramabhadra" panose="02000600000000000000" pitchFamily="2" charset="0"/>
+                <a:cs typeface="Ramabhadra" panose="02000600000000000000" pitchFamily="2" charset="0"/>
+              </a:endParaRPr>
             </a:p>
           </p:txBody>
         </p:sp>
@@ -4473,7 +4653,7 @@
           </p:nvSpPr>
           <p:spPr>
             <a:xfrm>
-              <a:off x="4300012" y="634493"/>
+              <a:off x="4300012" y="357760"/>
               <a:ext cx="390525" cy="390525"/>
             </a:xfrm>
             <a:prstGeom prst="ellipse">

--- a/songsTemplate.pptx
+++ b/songsTemplate.pptx
@@ -255,7 +255,7 @@
           <a:p>
             <a:fld id="{F1102B08-ED9E-409F-B95F-09CAA1DAF6E0}" type="datetimeFigureOut">
               <a:rPr lang="en-IN" smtClean="0"/>
-              <a:t>29-03-2025</a:t>
+              <a:t>05-04-2025</a:t>
             </a:fld>
             <a:endParaRPr lang="en-IN"/>
           </a:p>
@@ -425,7 +425,7 @@
           <a:p>
             <a:fld id="{F1102B08-ED9E-409F-B95F-09CAA1DAF6E0}" type="datetimeFigureOut">
               <a:rPr lang="en-IN" smtClean="0"/>
-              <a:t>29-03-2025</a:t>
+              <a:t>05-04-2025</a:t>
             </a:fld>
             <a:endParaRPr lang="en-IN"/>
           </a:p>
@@ -605,7 +605,7 @@
           <a:p>
             <a:fld id="{F1102B08-ED9E-409F-B95F-09CAA1DAF6E0}" type="datetimeFigureOut">
               <a:rPr lang="en-IN" smtClean="0"/>
-              <a:t>29-03-2025</a:t>
+              <a:t>05-04-2025</a:t>
             </a:fld>
             <a:endParaRPr lang="en-IN"/>
           </a:p>
@@ -775,7 +775,7 @@
           <a:p>
             <a:fld id="{F1102B08-ED9E-409F-B95F-09CAA1DAF6E0}" type="datetimeFigureOut">
               <a:rPr lang="en-IN" smtClean="0"/>
-              <a:t>29-03-2025</a:t>
+              <a:t>05-04-2025</a:t>
             </a:fld>
             <a:endParaRPr lang="en-IN"/>
           </a:p>
@@ -1019,7 +1019,7 @@
           <a:p>
             <a:fld id="{F1102B08-ED9E-409F-B95F-09CAA1DAF6E0}" type="datetimeFigureOut">
               <a:rPr lang="en-IN" smtClean="0"/>
-              <a:t>29-03-2025</a:t>
+              <a:t>05-04-2025</a:t>
             </a:fld>
             <a:endParaRPr lang="en-IN"/>
           </a:p>
@@ -1251,7 +1251,7 @@
           <a:p>
             <a:fld id="{F1102B08-ED9E-409F-B95F-09CAA1DAF6E0}" type="datetimeFigureOut">
               <a:rPr lang="en-IN" smtClean="0"/>
-              <a:t>29-03-2025</a:t>
+              <a:t>05-04-2025</a:t>
             </a:fld>
             <a:endParaRPr lang="en-IN"/>
           </a:p>
@@ -1618,7 +1618,7 @@
           <a:p>
             <a:fld id="{F1102B08-ED9E-409F-B95F-09CAA1DAF6E0}" type="datetimeFigureOut">
               <a:rPr lang="en-IN" smtClean="0"/>
-              <a:t>29-03-2025</a:t>
+              <a:t>05-04-2025</a:t>
             </a:fld>
             <a:endParaRPr lang="en-IN"/>
           </a:p>
@@ -1736,7 +1736,7 @@
           <a:p>
             <a:fld id="{F1102B08-ED9E-409F-B95F-09CAA1DAF6E0}" type="datetimeFigureOut">
               <a:rPr lang="en-IN" smtClean="0"/>
-              <a:t>29-03-2025</a:t>
+              <a:t>05-04-2025</a:t>
             </a:fld>
             <a:endParaRPr lang="en-IN"/>
           </a:p>
@@ -1831,7 +1831,7 @@
           <a:p>
             <a:fld id="{F1102B08-ED9E-409F-B95F-09CAA1DAF6E0}" type="datetimeFigureOut">
               <a:rPr lang="en-IN" smtClean="0"/>
-              <a:t>29-03-2025</a:t>
+              <a:t>05-04-2025</a:t>
             </a:fld>
             <a:endParaRPr lang="en-IN"/>
           </a:p>
@@ -2108,7 +2108,7 @@
           <a:p>
             <a:fld id="{F1102B08-ED9E-409F-B95F-09CAA1DAF6E0}" type="datetimeFigureOut">
               <a:rPr lang="en-IN" smtClean="0"/>
-              <a:t>29-03-2025</a:t>
+              <a:t>05-04-2025</a:t>
             </a:fld>
             <a:endParaRPr lang="en-IN"/>
           </a:p>
@@ -2365,7 +2365,7 @@
           <a:p>
             <a:fld id="{F1102B08-ED9E-409F-B95F-09CAA1DAF6E0}" type="datetimeFigureOut">
               <a:rPr lang="en-IN" smtClean="0"/>
-              <a:t>29-03-2025</a:t>
+              <a:t>05-04-2025</a:t>
             </a:fld>
             <a:endParaRPr lang="en-IN"/>
           </a:p>
@@ -2578,7 +2578,7 @@
           <a:p>
             <a:fld id="{F1102B08-ED9E-409F-B95F-09CAA1DAF6E0}" type="datetimeFigureOut">
               <a:rPr lang="en-IN" smtClean="0"/>
-              <a:t>29-03-2025</a:t>
+              <a:t>05-04-2025</a:t>
             </a:fld>
             <a:endParaRPr lang="en-IN"/>
           </a:p>
@@ -3073,7 +3073,7 @@
           <p:spPr>
             <a:xfrm>
               <a:off x="262396" y="505119"/>
-              <a:ext cx="4648200" cy="5262979"/>
+              <a:ext cx="4648200" cy="5632311"/>
             </a:xfrm>
             <a:prstGeom prst="rect">
               <a:avLst/>
@@ -3087,179 +3087,128 @@
             <a:lstStyle/>
             <a:p>
               <a:r>
-                <a:rPr lang="te-IN" sz="2100" dirty="0">
-                  <a:latin typeface="Ramabhadra" panose="02000600000000000000" pitchFamily="2" charset="0"/>
-                  <a:cs typeface="Ramabhadra" panose="02000600000000000000" pitchFamily="2" charset="0"/>
-                </a:rPr>
-                <a:t>ఇంత కాలం నీదు కృపలో కాచిన దేవా (2)</a:t>
-              </a:r>
-              <a:br>
-                <a:rPr lang="te-IN" sz="2100" dirty="0">
-                  <a:latin typeface="Ramabhadra" panose="02000600000000000000" pitchFamily="2" charset="0"/>
-                  <a:cs typeface="Ramabhadra" panose="02000600000000000000" pitchFamily="2" charset="0"/>
-                </a:rPr>
-              </a:br>
-              <a:r>
-                <a:rPr lang="te-IN" sz="2100" dirty="0">
-                  <a:latin typeface="Ramabhadra" panose="02000600000000000000" pitchFamily="2" charset="0"/>
-                  <a:cs typeface="Ramabhadra" panose="02000600000000000000" pitchFamily="2" charset="0"/>
-                </a:rPr>
-                <a:t>ఇకను కూడా మాకు తోడు నీడ నీవే కదా (2)        </a:t>
-              </a:r>
-            </a:p>
-            <a:p>
-              <a:endParaRPr lang="te-IN" sz="2100" dirty="0">
+                <a:rPr lang="te-IN" sz="2400" dirty="0">
+                  <a:latin typeface="Ramabhadra" panose="02000600000000000000" pitchFamily="2" charset="0"/>
+                  <a:cs typeface="Ramabhadra" panose="02000600000000000000" pitchFamily="2" charset="0"/>
+                </a:rPr>
+                <a:t>విన్నపములు వినువాడా</a:t>
+              </a:r>
+            </a:p>
+            <a:p>
+              <a:r>
+                <a:rPr lang="te-IN" sz="2400" dirty="0">
+                  <a:latin typeface="Ramabhadra" panose="02000600000000000000" pitchFamily="2" charset="0"/>
+                  <a:cs typeface="Ramabhadra" panose="02000600000000000000" pitchFamily="2" charset="0"/>
+                </a:rPr>
+                <a:t>నా కన్నీరు తుడుచు వాడా </a:t>
+              </a:r>
+            </a:p>
+            <a:p>
+              <a:r>
+                <a:rPr lang="te-IN" sz="2400" dirty="0">
+                  <a:latin typeface="Ramabhadra" panose="02000600000000000000" pitchFamily="2" charset="0"/>
+                  <a:cs typeface="Ramabhadra" panose="02000600000000000000" pitchFamily="2" charset="0"/>
+                </a:rPr>
+                <a:t>సుఖములు ఇచ్చువాడా స్తోత్రము యేసయ్యా </a:t>
+              </a:r>
+            </a:p>
+            <a:p>
+              <a:endParaRPr lang="te-IN" sz="2400" dirty="0">
                 <a:latin typeface="Ramabhadra" panose="02000600000000000000" pitchFamily="2" charset="0"/>
                 <a:cs typeface="Ramabhadra" panose="02000600000000000000" pitchFamily="2" charset="0"/>
               </a:endParaRPr>
             </a:p>
             <a:p>
               <a:r>
-                <a:rPr lang="te-IN" sz="2100" dirty="0">
-                  <a:latin typeface="Ramabhadra" panose="02000600000000000000" pitchFamily="2" charset="0"/>
-                  <a:cs typeface="Ramabhadra" panose="02000600000000000000" pitchFamily="2" charset="0"/>
-                </a:rPr>
-                <a:t>ఎన్ని ఏళ్ళు గడచినా – ఎన్ని తరాలు మారినా (2)</a:t>
-              </a:r>
-              <a:br>
-                <a:rPr lang="te-IN" sz="2100" dirty="0">
-                  <a:latin typeface="Ramabhadra" panose="02000600000000000000" pitchFamily="2" charset="0"/>
-                  <a:cs typeface="Ramabhadra" panose="02000600000000000000" pitchFamily="2" charset="0"/>
-                </a:rPr>
-              </a:br>
-              <a:r>
-                <a:rPr lang="te-IN" sz="2100" dirty="0">
-                  <a:latin typeface="Ramabhadra" panose="02000600000000000000" pitchFamily="2" charset="0"/>
-                  <a:cs typeface="Ramabhadra" panose="02000600000000000000" pitchFamily="2" charset="0"/>
-                </a:rPr>
-                <a:t>మారని వీడని ప్రేమే నీదయ్యా</a:t>
-              </a:r>
-              <a:br>
-                <a:rPr lang="te-IN" sz="2100" dirty="0">
-                  <a:latin typeface="Ramabhadra" panose="02000600000000000000" pitchFamily="2" charset="0"/>
-                  <a:cs typeface="Ramabhadra" panose="02000600000000000000" pitchFamily="2" charset="0"/>
-                </a:rPr>
-              </a:br>
-              <a:r>
-                <a:rPr lang="te-IN" sz="2100" dirty="0">
-                  <a:latin typeface="Ramabhadra" panose="02000600000000000000" pitchFamily="2" charset="0"/>
-                  <a:cs typeface="Ramabhadra" panose="02000600000000000000" pitchFamily="2" charset="0"/>
-                </a:rPr>
-                <a:t>మార్చిన నా జీవితం నీకే యేసయ్యా (2)  </a:t>
-              </a:r>
-            </a:p>
-            <a:p>
-              <a:r>
-                <a:rPr lang="te-IN" sz="2100" dirty="0">
-                  <a:latin typeface="Ramabhadra" panose="02000600000000000000" pitchFamily="2" charset="0"/>
-                  <a:cs typeface="Ramabhadra" panose="02000600000000000000" pitchFamily="2" charset="0"/>
-                </a:rPr>
-                <a:t>       </a:t>
-              </a:r>
-            </a:p>
-            <a:p>
-              <a:r>
-                <a:rPr lang="te-IN" sz="2100" dirty="0">
-                  <a:latin typeface="Ramabhadra" panose="02000600000000000000" pitchFamily="2" charset="0"/>
-                  <a:cs typeface="Ramabhadra" panose="02000600000000000000" pitchFamily="2" charset="0"/>
-                </a:rPr>
-                <a:t>నీవు చేసిన మేలులు –</a:t>
-              </a:r>
-              <a:endParaRPr lang="en-IN" sz="2100" dirty="0">
+                <a:rPr lang="te-IN" sz="2400" dirty="0">
+                  <a:latin typeface="Ramabhadra" panose="02000600000000000000" pitchFamily="2" charset="0"/>
+                  <a:cs typeface="Ramabhadra" panose="02000600000000000000" pitchFamily="2" charset="0"/>
+                </a:rPr>
+                <a:t>నీ నుండియే అన్ని సాధ్యమయ్యా </a:t>
+              </a:r>
+            </a:p>
+            <a:p>
+              <a:r>
+                <a:rPr lang="te-IN" sz="2400" dirty="0">
+                  <a:latin typeface="Ramabhadra" panose="02000600000000000000" pitchFamily="2" charset="0"/>
+                  <a:cs typeface="Ramabhadra" panose="02000600000000000000" pitchFamily="2" charset="0"/>
+                </a:rPr>
+                <a:t>మాట ఒకటి చాలునయ్య</a:t>
+              </a:r>
+            </a:p>
+            <a:p>
+              <a:r>
+                <a:rPr lang="te-IN" sz="2400" dirty="0">
+                  <a:latin typeface="Ramabhadra" panose="02000600000000000000" pitchFamily="2" charset="0"/>
+                  <a:cs typeface="Ramabhadra" panose="02000600000000000000" pitchFamily="2" charset="0"/>
+                </a:rPr>
+                <a:t>నీ మాట ఒకటి చాలునయ్య </a:t>
+              </a:r>
+            </a:p>
+            <a:p>
+              <a:endParaRPr lang="te-IN" sz="2400" dirty="0">
                 <a:latin typeface="Ramabhadra" panose="02000600000000000000" pitchFamily="2" charset="0"/>
                 <a:cs typeface="Ramabhadra" panose="02000600000000000000" pitchFamily="2" charset="0"/>
               </a:endParaRPr>
             </a:p>
             <a:p>
               <a:r>
-                <a:rPr lang="te-IN" sz="2100" dirty="0">
-                  <a:latin typeface="Ramabhadra" panose="02000600000000000000" pitchFamily="2" charset="0"/>
-                  <a:cs typeface="Ramabhadra" panose="02000600000000000000" pitchFamily="2" charset="0"/>
-                </a:rPr>
-                <a:t>తలచుకుందును అనుదినం (2)</a:t>
-              </a:r>
-              <a:br>
-                <a:rPr lang="te-IN" sz="2100" dirty="0">
-                  <a:latin typeface="Ramabhadra" panose="02000600000000000000" pitchFamily="2" charset="0"/>
-                  <a:cs typeface="Ramabhadra" panose="02000600000000000000" pitchFamily="2" charset="0"/>
-                </a:rPr>
-              </a:br>
-              <a:r>
-                <a:rPr lang="te-IN" sz="2100" dirty="0">
-                  <a:latin typeface="Ramabhadra" panose="02000600000000000000" pitchFamily="2" charset="0"/>
-                  <a:cs typeface="Ramabhadra" panose="02000600000000000000" pitchFamily="2" charset="0"/>
-                </a:rPr>
-                <a:t>నా స్తుతి స్తోత్రము నీకే యేసయ్యా</a:t>
-              </a:r>
-              <a:br>
-                <a:rPr lang="te-IN" sz="2100" dirty="0">
-                  <a:latin typeface="Ramabhadra" panose="02000600000000000000" pitchFamily="2" charset="0"/>
-                  <a:cs typeface="Ramabhadra" panose="02000600000000000000" pitchFamily="2" charset="0"/>
-                </a:rPr>
-              </a:br>
-              <a:r>
-                <a:rPr lang="te-IN" sz="2100" dirty="0">
-                  <a:latin typeface="Ramabhadra" panose="02000600000000000000" pitchFamily="2" charset="0"/>
-                  <a:cs typeface="Ramabhadra" panose="02000600000000000000" pitchFamily="2" charset="0"/>
-                </a:rPr>
-                <a:t>వేరుగా ఏమియు చెల్లించలేనయ్యా (2) </a:t>
-              </a:r>
-            </a:p>
-            <a:p>
-              <a:r>
-                <a:rPr lang="te-IN" sz="2100" dirty="0">
-                  <a:latin typeface="Ramabhadra" panose="02000600000000000000" pitchFamily="2" charset="0"/>
-                  <a:cs typeface="Ramabhadra" panose="02000600000000000000" pitchFamily="2" charset="0"/>
-                </a:rPr>
-                <a:t>          </a:t>
-              </a:r>
-            </a:p>
-            <a:p>
-              <a:r>
-                <a:rPr lang="te-IN" sz="2100" dirty="0">
-                  <a:latin typeface="Ramabhadra" panose="02000600000000000000" pitchFamily="2" charset="0"/>
-                  <a:cs typeface="Ramabhadra" panose="02000600000000000000" pitchFamily="2" charset="0"/>
-                </a:rPr>
-                <a:t>దూరమైతిరి ఆప్తులు –</a:t>
-              </a:r>
-              <a:endParaRPr lang="en-IN" sz="2100" dirty="0">
+                <a:rPr lang="te-IN" sz="2400" dirty="0">
+                  <a:latin typeface="Ramabhadra" panose="02000600000000000000" pitchFamily="2" charset="0"/>
+                  <a:cs typeface="Ramabhadra" panose="02000600000000000000" pitchFamily="2" charset="0"/>
+                </a:rPr>
+                <a:t>నా చిత్తమే శుద్ధి పొందు </a:t>
+              </a:r>
+            </a:p>
+            <a:p>
+              <a:r>
+                <a:rPr lang="te-IN" sz="2400" dirty="0">
+                  <a:latin typeface="Ramabhadra" panose="02000600000000000000" pitchFamily="2" charset="0"/>
+                  <a:cs typeface="Ramabhadra" panose="02000600000000000000" pitchFamily="2" charset="0"/>
+                </a:rPr>
+                <a:t>అని చెప్పి తాకితివే</a:t>
+              </a:r>
+            </a:p>
+            <a:p>
+              <a:r>
+                <a:rPr lang="te-IN" sz="2400" dirty="0">
+                  <a:latin typeface="Ramabhadra" panose="02000600000000000000" pitchFamily="2" charset="0"/>
+                  <a:cs typeface="Ramabhadra" panose="02000600000000000000" pitchFamily="2" charset="0"/>
+                </a:rPr>
+                <a:t>అయ్యా అని చెప్పి తాకితివే </a:t>
+              </a:r>
+            </a:p>
+            <a:p>
+              <a:endParaRPr lang="te-IN" sz="2400" dirty="0">
                 <a:latin typeface="Ramabhadra" panose="02000600000000000000" pitchFamily="2" charset="0"/>
                 <a:cs typeface="Ramabhadra" panose="02000600000000000000" pitchFamily="2" charset="0"/>
               </a:endParaRPr>
             </a:p>
             <a:p>
               <a:r>
-                <a:rPr lang="te-IN" sz="2100" dirty="0">
-                  <a:latin typeface="Ramabhadra" panose="02000600000000000000" pitchFamily="2" charset="0"/>
-                  <a:cs typeface="Ramabhadra" panose="02000600000000000000" pitchFamily="2" charset="0"/>
-                </a:rPr>
-                <a:t>విడచిపోతిరి నా హితులు (2)</a:t>
-              </a:r>
-              <a:br>
-                <a:rPr lang="te-IN" sz="2100" dirty="0">
-                  <a:latin typeface="Ramabhadra" panose="02000600000000000000" pitchFamily="2" charset="0"/>
-                  <a:cs typeface="Ramabhadra" panose="02000600000000000000" pitchFamily="2" charset="0"/>
-                </a:rPr>
-              </a:br>
-              <a:r>
-                <a:rPr lang="te-IN" sz="2100" dirty="0">
-                  <a:latin typeface="Ramabhadra" panose="02000600000000000000" pitchFamily="2" charset="0"/>
-                  <a:cs typeface="Ramabhadra" panose="02000600000000000000" pitchFamily="2" charset="0"/>
-                </a:rPr>
-                <a:t>శోధన వేదన తీర్చిన యేసయ్యా</a:t>
-              </a:r>
-              <a:br>
-                <a:rPr lang="te-IN" sz="2100" dirty="0">
-                  <a:latin typeface="Ramabhadra" panose="02000600000000000000" pitchFamily="2" charset="0"/>
-                  <a:cs typeface="Ramabhadra" panose="02000600000000000000" pitchFamily="2" charset="0"/>
-                </a:rPr>
-              </a:br>
-              <a:r>
-                <a:rPr lang="te-IN" sz="2100" dirty="0">
-                  <a:latin typeface="Ramabhadra" panose="02000600000000000000" pitchFamily="2" charset="0"/>
-                  <a:cs typeface="Ramabhadra" panose="02000600000000000000" pitchFamily="2" charset="0"/>
-                </a:rPr>
-                <a:t>తల్లిలా తండ్రిలా కాచిన యేసయ్యా (2) </a:t>
+                <a:rPr lang="te-IN" sz="2400" dirty="0">
+                  <a:latin typeface="Ramabhadra" panose="02000600000000000000" pitchFamily="2" charset="0"/>
+                  <a:cs typeface="Ramabhadra" panose="02000600000000000000" pitchFamily="2" charset="0"/>
+                </a:rPr>
+                <a:t>నా వ్యాధిని సిలువ లోనా   </a:t>
+              </a:r>
+            </a:p>
+            <a:p>
+              <a:r>
+                <a:rPr lang="te-IN" sz="2400" dirty="0">
+                  <a:latin typeface="Ramabhadra" panose="02000600000000000000" pitchFamily="2" charset="0"/>
+                  <a:cs typeface="Ramabhadra" panose="02000600000000000000" pitchFamily="2" charset="0"/>
+                </a:rPr>
+                <a:t>నీవుపొంది తీర్చితివే</a:t>
+              </a:r>
+            </a:p>
+            <a:p>
+              <a:r>
+                <a:rPr lang="te-IN" sz="2400" dirty="0">
+                  <a:latin typeface="Ramabhadra" panose="02000600000000000000" pitchFamily="2" charset="0"/>
+                  <a:cs typeface="Ramabhadra" panose="02000600000000000000" pitchFamily="2" charset="0"/>
+                </a:rPr>
+                <a:t>అయ్యా నీవుపొంది తీర్చితివే</a:t>
               </a:r>
             </a:p>
           </p:txBody>
@@ -3342,9 +3291,9 @@
         <p:grpSpPr>
           <a:xfrm>
             <a:off x="5104338" y="182031"/>
-            <a:ext cx="4648200" cy="6493935"/>
+            <a:ext cx="4841942" cy="6493935"/>
             <a:chOff x="160868" y="182032"/>
-            <a:chExt cx="4648200" cy="6493935"/>
+            <a:chExt cx="4841942" cy="6493935"/>
           </a:xfrm>
         </p:grpSpPr>
         <p:sp>
@@ -3416,8 +3365,8 @@
           </p:nvSpPr>
           <p:spPr>
             <a:xfrm>
-              <a:off x="264399" y="331487"/>
-              <a:ext cx="4544669" cy="5769528"/>
+              <a:off x="458141" y="483206"/>
+              <a:ext cx="4544669" cy="4769254"/>
             </a:xfrm>
             <a:prstGeom prst="rect">
               <a:avLst/>
@@ -3440,7 +3389,7 @@
                   <a:latin typeface="Ramabhadra" panose="02000600000000000000" pitchFamily="2" charset="0"/>
                   <a:cs typeface="Ramabhadra" panose="02000600000000000000" pitchFamily="2" charset="0"/>
                 </a:rPr>
-                <a:t>స్తుతి సింహాసనాసీనుడా</a:t>
+                <a:t>నమ్మకమైన దేవుడవైన</a:t>
               </a:r>
             </a:p>
             <a:p>
@@ -3454,7 +3403,35 @@
                   <a:latin typeface="Ramabhadra" panose="02000600000000000000" pitchFamily="2" charset="0"/>
                   <a:cs typeface="Ramabhadra" panose="02000600000000000000" pitchFamily="2" charset="0"/>
                 </a:rPr>
-                <a:t>యేసు రాజా దివ్య తేజా (2)</a:t>
+                <a:t>నీవే చాలు యేసయ్యా (2)</a:t>
+              </a:r>
+            </a:p>
+            <a:p>
+              <a:pPr>
+                <a:lnSpc>
+                  <a:spcPts val="2600"/>
+                </a:lnSpc>
+              </a:pPr>
+              <a:r>
+                <a:rPr lang="te-IN" sz="2400" dirty="0">
+                  <a:latin typeface="Ramabhadra" panose="02000600000000000000" pitchFamily="2" charset="0"/>
+                  <a:cs typeface="Ramabhadra" panose="02000600000000000000" pitchFamily="2" charset="0"/>
+                </a:rPr>
+                <a:t>నేనేమైయున్నా ఏ స్థితిలో ఉన్నా (2)</a:t>
+              </a:r>
+            </a:p>
+            <a:p>
+              <a:pPr>
+                <a:lnSpc>
+                  <a:spcPts val="2600"/>
+                </a:lnSpc>
+              </a:pPr>
+              <a:r>
+                <a:rPr lang="te-IN" sz="2400" dirty="0">
+                  <a:latin typeface="Ramabhadra" panose="02000600000000000000" pitchFamily="2" charset="0"/>
+                  <a:cs typeface="Ramabhadra" panose="02000600000000000000" pitchFamily="2" charset="0"/>
+                </a:rPr>
+                <a:t>ఇంకేమి కోరుకోనయ్యా (2)</a:t>
               </a:r>
             </a:p>
             <a:p>
@@ -3479,7 +3456,7 @@
                   <a:latin typeface="Ramabhadra" panose="02000600000000000000" pitchFamily="2" charset="0"/>
                   <a:cs typeface="Ramabhadra" panose="02000600000000000000" pitchFamily="2" charset="0"/>
                 </a:rPr>
-                <a:t>అద్వితీయుడవు పరిశుద్ధుడవు</a:t>
+                <a:t>ఆప్తులైన వారే హాని చేయచూసినా</a:t>
               </a:r>
             </a:p>
             <a:p>
@@ -3493,7 +3470,7 @@
                   <a:latin typeface="Ramabhadra" panose="02000600000000000000" pitchFamily="2" charset="0"/>
                   <a:cs typeface="Ramabhadra" panose="02000600000000000000" pitchFamily="2" charset="0"/>
                 </a:rPr>
-                <a:t>అతి సుందరుడవు నీవే ప్రభూ (2)</a:t>
+                <a:t>మిత్రులే నిలువకుండినా (2)</a:t>
               </a:r>
             </a:p>
             <a:p>
@@ -3507,7 +3484,7 @@
                   <a:latin typeface="Ramabhadra" panose="02000600000000000000" pitchFamily="2" charset="0"/>
                   <a:cs typeface="Ramabhadra" panose="02000600000000000000" pitchFamily="2" charset="0"/>
                 </a:rPr>
-                <a:t>నీతి న్యాయములు నీ సింహాసనాధారం (2)</a:t>
+                <a:t>న్యాయము తీర్చే నీవు నాకుంటే (2)</a:t>
               </a:r>
             </a:p>
             <a:p>
@@ -3521,7 +3498,7 @@
                   <a:latin typeface="Ramabhadra" panose="02000600000000000000" pitchFamily="2" charset="0"/>
                   <a:cs typeface="Ramabhadra" panose="02000600000000000000" pitchFamily="2" charset="0"/>
                 </a:rPr>
-                <a:t>కృపా సత్యములు నీ సన్నిధానవర్తులు (2)</a:t>
+                <a:t>చాలు యేసయ్యా (2)</a:t>
               </a:r>
             </a:p>
             <a:p>
@@ -3546,7 +3523,7 @@
                   <a:latin typeface="Ramabhadra" panose="02000600000000000000" pitchFamily="2" charset="0"/>
                   <a:cs typeface="Ramabhadra" panose="02000600000000000000" pitchFamily="2" charset="0"/>
                 </a:rPr>
-                <a:t>బలియు అర్పణ కోరవు నీవు</a:t>
+                <a:t>జ్ఞానమంత చూపి శక్తి ధారపోసినా</a:t>
               </a:r>
             </a:p>
             <a:p>
@@ -3560,7 +3537,7 @@
                   <a:latin typeface="Ramabhadra" panose="02000600000000000000" pitchFamily="2" charset="0"/>
                   <a:cs typeface="Ramabhadra" panose="02000600000000000000" pitchFamily="2" charset="0"/>
                 </a:rPr>
-                <a:t>బలియైతివి నా దోషముకై (2)</a:t>
+                <a:t>నష్టమే మిగులుచుండినా (2)</a:t>
               </a:r>
             </a:p>
             <a:p>
@@ -3574,7 +3551,7 @@
                   <a:latin typeface="Ramabhadra" panose="02000600000000000000" pitchFamily="2" charset="0"/>
                   <a:cs typeface="Ramabhadra" panose="02000600000000000000" pitchFamily="2" charset="0"/>
                 </a:rPr>
-                <a:t>నా హృదయమే నీ ప్రియమగు ఆలయం (2)</a:t>
+                <a:t>శాపము బాపే నీవు నాకుంటే (2)</a:t>
               </a:r>
             </a:p>
             <a:p>
@@ -3588,74 +3565,7 @@
                   <a:latin typeface="Ramabhadra" panose="02000600000000000000" pitchFamily="2" charset="0"/>
                   <a:cs typeface="Ramabhadra" panose="02000600000000000000" pitchFamily="2" charset="0"/>
                 </a:rPr>
-                <a:t>స్తుతియాగమునే చేసెద నిరతం (2)</a:t>
-              </a:r>
-            </a:p>
-            <a:p>
-              <a:pPr>
-                <a:lnSpc>
-                  <a:spcPts val="2600"/>
-                </a:lnSpc>
-              </a:pPr>
-              <a:endParaRPr lang="te-IN" sz="2400" dirty="0">
-                <a:latin typeface="Ramabhadra" panose="02000600000000000000" pitchFamily="2" charset="0"/>
-                <a:cs typeface="Ramabhadra" panose="02000600000000000000" pitchFamily="2" charset="0"/>
-              </a:endParaRPr>
-            </a:p>
-            <a:p>
-              <a:pPr>
-                <a:lnSpc>
-                  <a:spcPts val="2600"/>
-                </a:lnSpc>
-              </a:pPr>
-              <a:r>
-                <a:rPr lang="te-IN" sz="2400" dirty="0">
-                  <a:latin typeface="Ramabhadra" panose="02000600000000000000" pitchFamily="2" charset="0"/>
-                  <a:cs typeface="Ramabhadra" panose="02000600000000000000" pitchFamily="2" charset="0"/>
-                </a:rPr>
-                <a:t>బూరధ్వనులే నింగిలో మ్రోగగా</a:t>
-              </a:r>
-            </a:p>
-            <a:p>
-              <a:pPr>
-                <a:lnSpc>
-                  <a:spcPts val="2600"/>
-                </a:lnSpc>
-              </a:pPr>
-              <a:r>
-                <a:rPr lang="te-IN" sz="2400" dirty="0">
-                  <a:latin typeface="Ramabhadra" panose="02000600000000000000" pitchFamily="2" charset="0"/>
-                  <a:cs typeface="Ramabhadra" panose="02000600000000000000" pitchFamily="2" charset="0"/>
-                </a:rPr>
-                <a:t>రాజధిరాజ నీవే వచ్చువేళ (2)</a:t>
-              </a:r>
-            </a:p>
-            <a:p>
-              <a:pPr>
-                <a:lnSpc>
-                  <a:spcPts val="2600"/>
-                </a:lnSpc>
-              </a:pPr>
-              <a:r>
-                <a:rPr lang="te-IN" sz="2400" dirty="0">
-                  <a:latin typeface="Ramabhadra" panose="02000600000000000000" pitchFamily="2" charset="0"/>
-                  <a:cs typeface="Ramabhadra" panose="02000600000000000000" pitchFamily="2" charset="0"/>
-                </a:rPr>
-                <a:t>సంసిద్ధతతో వెలిగే సిద్దెతో (2)</a:t>
-              </a:r>
-            </a:p>
-            <a:p>
-              <a:pPr>
-                <a:lnSpc>
-                  <a:spcPts val="2600"/>
-                </a:lnSpc>
-              </a:pPr>
-              <a:r>
-                <a:rPr lang="te-IN" sz="2400" dirty="0">
-                  <a:latin typeface="Ramabhadra" panose="02000600000000000000" pitchFamily="2" charset="0"/>
-                  <a:cs typeface="Ramabhadra" panose="02000600000000000000" pitchFamily="2" charset="0"/>
-                </a:rPr>
-                <a:t>పెండ్లి కుమరుడా నిన్నెదుర్కొందును (2)</a:t>
+                <a:t>చాలు యేసయ్యా (2)</a:t>
               </a:r>
             </a:p>
           </p:txBody>
@@ -3737,8 +3647,8 @@
         </p:nvSpPr>
         <p:spPr>
           <a:xfrm>
-            <a:off x="7021458" y="6672245"/>
-            <a:ext cx="902677" cy="182031"/>
+            <a:off x="7021458" y="6675966"/>
+            <a:ext cx="970017" cy="178310"/>
           </a:xfrm>
           <a:prstGeom prst="rect">
             <a:avLst/>
@@ -3775,7 +3685,7 @@
                   <a:schemeClr val="tx1"/>
                 </a:solidFill>
               </a:rPr>
-              <a:t>0002</a:t>
+              <a:t>05042025</a:t>
             </a:r>
           </a:p>
         </p:txBody>
@@ -3794,8 +3704,8 @@
         </p:nvSpPr>
         <p:spPr>
           <a:xfrm>
-            <a:off x="2010310" y="6667174"/>
-            <a:ext cx="902677" cy="182031"/>
+            <a:off x="2010310" y="6670895"/>
+            <a:ext cx="970017" cy="178310"/>
           </a:xfrm>
           <a:prstGeom prst="rect">
             <a:avLst/>
@@ -3832,7 +3742,7 @@
                   <a:schemeClr val="tx1"/>
                 </a:solidFill>
               </a:rPr>
-              <a:t>0002</a:t>
+              <a:t>05042025</a:t>
             </a:r>
           </a:p>
         </p:txBody>
@@ -3882,9 +3792,9 @@
         <p:grpSpPr>
           <a:xfrm>
             <a:off x="160868" y="182032"/>
-            <a:ext cx="4700061" cy="6493935"/>
+            <a:ext cx="4751921" cy="6493935"/>
             <a:chOff x="160868" y="182032"/>
-            <a:chExt cx="4700061" cy="6493935"/>
+            <a:chExt cx="4751921" cy="6493935"/>
           </a:xfrm>
         </p:grpSpPr>
         <p:sp>
@@ -3956,8 +3866,8 @@
           </p:nvSpPr>
           <p:spPr>
             <a:xfrm>
-              <a:off x="220133" y="211189"/>
-              <a:ext cx="4640796" cy="5940088"/>
+              <a:off x="271993" y="354076"/>
+              <a:ext cx="4640796" cy="5355312"/>
             </a:xfrm>
             <a:prstGeom prst="rect">
               <a:avLst/>
@@ -3978,84 +3888,110 @@
                   <a:latin typeface="Ramabhadra" panose="02000600000000000000" pitchFamily="2" charset="0"/>
                   <a:cs typeface="Ramabhadra" panose="02000600000000000000" pitchFamily="2" charset="0"/>
                 </a:rPr>
-                <a:t>ఘనమైనవి నీ కార్యములు నా యెడల</a:t>
-              </a:r>
-              <a:br>
-                <a:rPr lang="te-IN" sz="1900" dirty="0">
-                  <a:latin typeface="Ramabhadra" panose="02000600000000000000" pitchFamily="2" charset="0"/>
-                  <a:cs typeface="Ramabhadra" panose="02000600000000000000" pitchFamily="2" charset="0"/>
-                </a:rPr>
-              </a:br>
-              <a:r>
-                <a:rPr lang="te-IN" sz="1900" dirty="0">
-                  <a:latin typeface="Ramabhadra" panose="02000600000000000000" pitchFamily="2" charset="0"/>
-                  <a:cs typeface="Ramabhadra" panose="02000600000000000000" pitchFamily="2" charset="0"/>
-                </a:rPr>
-                <a:t>స్థిరమైనవి నీ ఆలోచనలు నా యేసయ్యా (2)</a:t>
-              </a:r>
-              <a:br>
-                <a:rPr lang="te-IN" sz="1900" dirty="0">
-                  <a:latin typeface="Ramabhadra" panose="02000600000000000000" pitchFamily="2" charset="0"/>
-                  <a:cs typeface="Ramabhadra" panose="02000600000000000000" pitchFamily="2" charset="0"/>
-                </a:rPr>
-              </a:br>
-              <a:r>
-                <a:rPr lang="te-IN" sz="1900" dirty="0">
-                  <a:latin typeface="Ramabhadra" panose="02000600000000000000" pitchFamily="2" charset="0"/>
-                  <a:cs typeface="Ramabhadra" panose="02000600000000000000" pitchFamily="2" charset="0"/>
-                </a:rPr>
-                <a:t>కృపలను పొందుచు కృతజ్ఞత కలిగి</a:t>
-              </a:r>
-              <a:br>
-                <a:rPr lang="te-IN" sz="1900" dirty="0">
-                  <a:latin typeface="Ramabhadra" panose="02000600000000000000" pitchFamily="2" charset="0"/>
-                  <a:cs typeface="Ramabhadra" panose="02000600000000000000" pitchFamily="2" charset="0"/>
-                </a:rPr>
-              </a:br>
-              <a:r>
-                <a:rPr lang="te-IN" sz="1900" dirty="0">
-                  <a:latin typeface="Ramabhadra" panose="02000600000000000000" pitchFamily="2" charset="0"/>
-                  <a:cs typeface="Ramabhadra" panose="02000600000000000000" pitchFamily="2" charset="0"/>
-                </a:rPr>
-                <a:t>స్తుతులర్పించెదను అన్నివేళలా (2)</a:t>
-              </a:r>
-              <a:br>
-                <a:rPr lang="te-IN" sz="1900" dirty="0">
-                  <a:latin typeface="Ramabhadra" panose="02000600000000000000" pitchFamily="2" charset="0"/>
-                  <a:cs typeface="Ramabhadra" panose="02000600000000000000" pitchFamily="2" charset="0"/>
-                </a:rPr>
-              </a:br>
-              <a:r>
-                <a:rPr lang="te-IN" sz="1900" dirty="0">
-                  <a:latin typeface="Ramabhadra" panose="02000600000000000000" pitchFamily="2" charset="0"/>
-                  <a:cs typeface="Ramabhadra" panose="02000600000000000000" pitchFamily="2" charset="0"/>
-                </a:rPr>
-                <a:t>అనుదినము నీ అనుగ్రహమే</a:t>
-              </a:r>
-              <a:br>
-                <a:rPr lang="te-IN" sz="1900" dirty="0">
-                  <a:latin typeface="Ramabhadra" panose="02000600000000000000" pitchFamily="2" charset="0"/>
-                  <a:cs typeface="Ramabhadra" panose="02000600000000000000" pitchFamily="2" charset="0"/>
-                </a:rPr>
-              </a:br>
-              <a:r>
-                <a:rPr lang="te-IN" sz="1900" dirty="0">
-                  <a:latin typeface="Ramabhadra" panose="02000600000000000000" pitchFamily="2" charset="0"/>
-                  <a:cs typeface="Ramabhadra" panose="02000600000000000000" pitchFamily="2" charset="0"/>
-                </a:rPr>
-                <a:t>ఆయుష్కాలము నీ వరమే (2</a:t>
-              </a:r>
-              <a:r>
-                <a:rPr lang="en-IN" sz="1900" dirty="0">
-                  <a:latin typeface="Ramabhadra" panose="02000600000000000000" pitchFamily="2" charset="0"/>
-                  <a:cs typeface="Ramabhadra" panose="02000600000000000000" pitchFamily="2" charset="0"/>
-                </a:rPr>
-                <a:t>)</a:t>
-              </a:r>
-              <a:endParaRPr lang="te-IN" sz="1900" dirty="0">
+                <a:t>అన్ని నామముల కన్న పై నామము</a:t>
+              </a:r>
+              <a:endParaRPr lang="en-IN" sz="1900" dirty="0">
                 <a:latin typeface="Ramabhadra" panose="02000600000000000000" pitchFamily="2" charset="0"/>
                 <a:cs typeface="Ramabhadra" panose="02000600000000000000" pitchFamily="2" charset="0"/>
               </a:endParaRPr>
+            </a:p>
+            <a:p>
+              <a:pPr defTabSz="439781">
+                <a:defRPr/>
+              </a:pPr>
+              <a:r>
+                <a:rPr lang="te-IN" sz="1900" dirty="0">
+                  <a:latin typeface="Ramabhadra" panose="02000600000000000000" pitchFamily="2" charset="0"/>
+                  <a:cs typeface="Ramabhadra" panose="02000600000000000000" pitchFamily="2" charset="0"/>
+                </a:rPr>
+                <a:t>యేసుని నామము</a:t>
+              </a:r>
+              <a:br>
+                <a:rPr lang="te-IN" sz="1900" dirty="0">
+                  <a:latin typeface="Ramabhadra" panose="02000600000000000000" pitchFamily="2" charset="0"/>
+                  <a:cs typeface="Ramabhadra" panose="02000600000000000000" pitchFamily="2" charset="0"/>
+                </a:rPr>
+              </a:br>
+              <a:r>
+                <a:rPr lang="te-IN" sz="1900" dirty="0">
+                  <a:latin typeface="Ramabhadra" panose="02000600000000000000" pitchFamily="2" charset="0"/>
+                  <a:cs typeface="Ramabhadra" panose="02000600000000000000" pitchFamily="2" charset="0"/>
+                </a:rPr>
+                <a:t>ఎన్ని తరములకైనా ఘనపరచ దగినది</a:t>
+              </a:r>
+              <a:endParaRPr lang="en-IN" sz="1900" dirty="0">
+                <a:latin typeface="Ramabhadra" panose="02000600000000000000" pitchFamily="2" charset="0"/>
+                <a:cs typeface="Ramabhadra" panose="02000600000000000000" pitchFamily="2" charset="0"/>
+              </a:endParaRPr>
+            </a:p>
+            <a:p>
+              <a:pPr defTabSz="439781">
+                <a:defRPr/>
+              </a:pPr>
+              <a:r>
+                <a:rPr lang="te-IN" sz="1900" dirty="0">
+                  <a:latin typeface="Ramabhadra" panose="02000600000000000000" pitchFamily="2" charset="0"/>
+                  <a:cs typeface="Ramabhadra" panose="02000600000000000000" pitchFamily="2" charset="0"/>
+                </a:rPr>
+                <a:t>క్రీస్తేసు నామము (2)</a:t>
+              </a:r>
+            </a:p>
+            <a:p>
+              <a:pPr defTabSz="439781">
+                <a:defRPr/>
+              </a:pPr>
+              <a:r>
+                <a:rPr lang="te-IN" sz="1900" dirty="0">
+                  <a:latin typeface="Ramabhadra" panose="02000600000000000000" pitchFamily="2" charset="0"/>
+                  <a:cs typeface="Ramabhadra" panose="02000600000000000000" pitchFamily="2" charset="0"/>
+                </a:rPr>
+                <a:t>యేసు నామము జయం జయము –</a:t>
+              </a:r>
+              <a:endParaRPr lang="en-IN" sz="1900" dirty="0">
+                <a:latin typeface="Ramabhadra" panose="02000600000000000000" pitchFamily="2" charset="0"/>
+                <a:cs typeface="Ramabhadra" panose="02000600000000000000" pitchFamily="2" charset="0"/>
+              </a:endParaRPr>
+            </a:p>
+            <a:p>
+              <a:pPr defTabSz="439781">
+                <a:defRPr/>
+              </a:pPr>
+              <a:r>
+                <a:rPr lang="te-IN" sz="1900" dirty="0">
+                  <a:latin typeface="Ramabhadra" panose="02000600000000000000" pitchFamily="2" charset="0"/>
+                  <a:cs typeface="Ramabhadra" panose="02000600000000000000" pitchFamily="2" charset="0"/>
+                </a:rPr>
+                <a:t>సాతాను శక్తుల్ లయం లయము (2)</a:t>
+              </a:r>
+              <a:br>
+                <a:rPr lang="te-IN" sz="1900" dirty="0">
+                  <a:latin typeface="Ramabhadra" panose="02000600000000000000" pitchFamily="2" charset="0"/>
+                  <a:cs typeface="Ramabhadra" panose="02000600000000000000" pitchFamily="2" charset="0"/>
+                </a:rPr>
+              </a:br>
+              <a:r>
+                <a:rPr lang="te-IN" sz="1900" dirty="0">
+                  <a:latin typeface="Ramabhadra" panose="02000600000000000000" pitchFamily="2" charset="0"/>
+                  <a:cs typeface="Ramabhadra" panose="02000600000000000000" pitchFamily="2" charset="0"/>
+                </a:rPr>
+                <a:t>హల్లెలూయ హోసన్న హల్లెలూయా -</a:t>
+              </a:r>
+              <a:endParaRPr lang="en-IN" sz="1900" dirty="0">
+                <a:latin typeface="Ramabhadra" panose="02000600000000000000" pitchFamily="2" charset="0"/>
+                <a:cs typeface="Ramabhadra" panose="02000600000000000000" pitchFamily="2" charset="0"/>
+              </a:endParaRPr>
+            </a:p>
+            <a:p>
+              <a:pPr defTabSz="439781">
+                <a:defRPr/>
+              </a:pPr>
+              <a:r>
+                <a:rPr lang="te-IN" sz="1900" dirty="0">
+                  <a:latin typeface="Ramabhadra" panose="02000600000000000000" pitchFamily="2" charset="0"/>
+                  <a:cs typeface="Ramabhadra" panose="02000600000000000000" pitchFamily="2" charset="0"/>
+                </a:rPr>
+                <a:t>హల్లెలూయా ఆమెన్ (2)</a:t>
+              </a:r>
             </a:p>
             <a:p>
               <a:pPr defTabSz="439781">
@@ -4075,12 +4011,8 @@
                   <a:latin typeface="Ramabhadra" panose="02000600000000000000" pitchFamily="2" charset="0"/>
                   <a:cs typeface="Ramabhadra" panose="02000600000000000000" pitchFamily="2" charset="0"/>
                 </a:rPr>
-                <a:t>యే తెగులు సమీపించనీయక –</a:t>
-              </a:r>
-              <a:endParaRPr lang="en-IN" sz="1900" dirty="0">
-                <a:latin typeface="Ramabhadra" panose="02000600000000000000" pitchFamily="2" charset="0"/>
-                <a:cs typeface="Ramabhadra" panose="02000600000000000000" pitchFamily="2" charset="0"/>
-              </a:endParaRPr>
+                <a:t>పాపముల నుండి విడిపించును </a:t>
+              </a:r>
             </a:p>
             <a:p>
               <a:pPr defTabSz="439781">
@@ -4091,7 +4023,7 @@
                   <a:latin typeface="Ramabhadra" panose="02000600000000000000" pitchFamily="2" charset="0"/>
                   <a:cs typeface="Ramabhadra" panose="02000600000000000000" pitchFamily="2" charset="0"/>
                 </a:rPr>
-                <a:t>యే కీడైన దరిచేరనీయక</a:t>
+                <a:t>యేసుని నామము (2)</a:t>
               </a:r>
               <a:br>
                 <a:rPr lang="te-IN" sz="1900" dirty="0">
@@ -4104,12 +4036,8 @@
                   <a:latin typeface="Ramabhadra" panose="02000600000000000000" pitchFamily="2" charset="0"/>
                   <a:cs typeface="Ramabhadra" panose="02000600000000000000" pitchFamily="2" charset="0"/>
                 </a:rPr>
-                <a:t>ఆపదలన్ని తొలగే వరకు –</a:t>
-              </a:r>
-              <a:endParaRPr lang="en-IN" sz="1900" dirty="0">
-                <a:latin typeface="Ramabhadra" panose="02000600000000000000" pitchFamily="2" charset="0"/>
-                <a:cs typeface="Ramabhadra" panose="02000600000000000000" pitchFamily="2" charset="0"/>
-              </a:endParaRPr>
+                <a:t>నిత్య నరకాగ్నిలో నుండి రక్షించును </a:t>
+              </a:r>
             </a:p>
             <a:p>
               <a:pPr defTabSz="439781">
@@ -4120,33 +4048,7 @@
                   <a:latin typeface="Ramabhadra" panose="02000600000000000000" pitchFamily="2" charset="0"/>
                   <a:cs typeface="Ramabhadra" panose="02000600000000000000" pitchFamily="2" charset="0"/>
                 </a:rPr>
-                <a:t>ఆత్మలో నెమ్మది కలిగే వరకు (2)</a:t>
-              </a:r>
-              <a:br>
-                <a:rPr lang="te-IN" sz="1900" dirty="0">
-                  <a:latin typeface="Ramabhadra" panose="02000600000000000000" pitchFamily="2" charset="0"/>
-                  <a:cs typeface="Ramabhadra" panose="02000600000000000000" pitchFamily="2" charset="0"/>
-                </a:rPr>
-              </a:br>
-              <a:r>
-                <a:rPr lang="te-IN" sz="1900" dirty="0">
-                  <a:latin typeface="Ramabhadra" panose="02000600000000000000" pitchFamily="2" charset="0"/>
-                  <a:cs typeface="Ramabhadra" panose="02000600000000000000" pitchFamily="2" charset="0"/>
-                </a:rPr>
-                <a:t>నా భారము మోసి – బాసటగా నిలిచి – ఆదరించితివి</a:t>
-              </a:r>
-              <a:br>
-                <a:rPr lang="te-IN" sz="1900" dirty="0">
-                  <a:latin typeface="Ramabhadra" panose="02000600000000000000" pitchFamily="2" charset="0"/>
-                  <a:cs typeface="Ramabhadra" panose="02000600000000000000" pitchFamily="2" charset="0"/>
-                </a:rPr>
-              </a:br>
-              <a:r>
-                <a:rPr lang="te-IN" sz="1900" dirty="0">
-                  <a:latin typeface="Ramabhadra" panose="02000600000000000000" pitchFamily="2" charset="0"/>
-                  <a:cs typeface="Ramabhadra" panose="02000600000000000000" pitchFamily="2" charset="0"/>
-                </a:rPr>
-                <a:t>ఈ స్తుతి మహిమలు నీకే – చెల్లించెదను – జీవితాంతము</a:t>
+                <a:t>క్రీస్తేసు నామము (2) </a:t>
               </a:r>
             </a:p>
             <a:p>
@@ -4167,7 +4069,7 @@
                   <a:latin typeface="Ramabhadra" panose="02000600000000000000" pitchFamily="2" charset="0"/>
                   <a:cs typeface="Ramabhadra" panose="02000600000000000000" pitchFamily="2" charset="0"/>
                 </a:rPr>
-                <a:t>నాకు ఎత్తైన కోటవు నీవే – నన్ను కాపాడు కేడెము నీవే</a:t>
+                <a:t>సాతాను పై అధికారమిచ్చును</a:t>
               </a:r>
               <a:br>
                 <a:rPr lang="te-IN" sz="1900" dirty="0">
@@ -4180,23 +4082,7 @@
                   <a:latin typeface="Ramabhadra" panose="02000600000000000000" pitchFamily="2" charset="0"/>
                   <a:cs typeface="Ramabhadra" panose="02000600000000000000" pitchFamily="2" charset="0"/>
                 </a:rPr>
-                <a:t>ఆశ్రయమైన బండవు నీవే –</a:t>
-              </a:r>
-              <a:endParaRPr lang="en-IN" sz="1900" dirty="0">
-                <a:latin typeface="Ramabhadra" panose="02000600000000000000" pitchFamily="2" charset="0"/>
-                <a:cs typeface="Ramabhadra" panose="02000600000000000000" pitchFamily="2" charset="0"/>
-              </a:endParaRPr>
-            </a:p>
-            <a:p>
-              <a:pPr defTabSz="439781">
-                <a:defRPr/>
-              </a:pPr>
-              <a:r>
-                <a:rPr lang="te-IN" sz="1900" dirty="0">
-                  <a:latin typeface="Ramabhadra" panose="02000600000000000000" pitchFamily="2" charset="0"/>
-                  <a:cs typeface="Ramabhadra" panose="02000600000000000000" pitchFamily="2" charset="0"/>
-                </a:rPr>
-                <a:t>శాశ్వత కృపకాధారము నీవే (2)</a:t>
+                <a:t>శక్తిగలిగిన యేసు నామము (2)</a:t>
               </a:r>
               <a:br>
                 <a:rPr lang="te-IN" sz="1900" dirty="0">
@@ -4209,23 +4095,7 @@
                   <a:latin typeface="Ramabhadra" panose="02000600000000000000" pitchFamily="2" charset="0"/>
                   <a:cs typeface="Ramabhadra" panose="02000600000000000000" pitchFamily="2" charset="0"/>
                 </a:rPr>
-                <a:t>నా ప్రతిక్షణమును నీవు –</a:t>
-              </a:r>
-              <a:endParaRPr lang="en-IN" sz="1900" dirty="0">
-                <a:latin typeface="Ramabhadra" panose="02000600000000000000" pitchFamily="2" charset="0"/>
-                <a:cs typeface="Ramabhadra" panose="02000600000000000000" pitchFamily="2" charset="0"/>
-              </a:endParaRPr>
-            </a:p>
-            <a:p>
-              <a:pPr defTabSz="439781">
-                <a:defRPr/>
-              </a:pPr>
-              <a:r>
-                <a:rPr lang="te-IN" sz="1900" dirty="0">
-                  <a:latin typeface="Ramabhadra" panose="02000600000000000000" pitchFamily="2" charset="0"/>
-                  <a:cs typeface="Ramabhadra" panose="02000600000000000000" pitchFamily="2" charset="0"/>
-                </a:rPr>
-                <a:t>దీవెనగా మార్చి – నడిపించుచున్నావు</a:t>
+                <a:t>శత్రు సమూహము పై జయమునిచ్చును</a:t>
               </a:r>
               <a:br>
                 <a:rPr lang="te-IN" sz="1900" dirty="0">
@@ -4238,7 +4108,7 @@
                   <a:latin typeface="Ramabhadra" panose="02000600000000000000" pitchFamily="2" charset="0"/>
                   <a:cs typeface="Ramabhadra" panose="02000600000000000000" pitchFamily="2" charset="0"/>
                 </a:rPr>
-                <a:t>ఈ స్తుతి మహిమలు నీకే – చెల్లించెదను – జీవితాంతము</a:t>
+                <a:t>జయశీలుడైన యేసు నామము (2) </a:t>
               </a:r>
             </a:p>
           </p:txBody>
@@ -4321,9 +4191,9 @@
         <p:grpSpPr>
           <a:xfrm>
             <a:off x="5104338" y="182031"/>
-            <a:ext cx="4801662" cy="6493935"/>
+            <a:ext cx="4853522" cy="6493935"/>
             <a:chOff x="160868" y="182032"/>
-            <a:chExt cx="4801662" cy="6493935"/>
+            <a:chExt cx="4853522" cy="6493935"/>
           </a:xfrm>
         </p:grpSpPr>
         <p:sp>
@@ -4395,8 +4265,8 @@
           </p:nvSpPr>
           <p:spPr>
             <a:xfrm>
-              <a:off x="212729" y="244019"/>
-              <a:ext cx="4749801" cy="6355586"/>
+              <a:off x="264589" y="710693"/>
+              <a:ext cx="4749801" cy="5501506"/>
             </a:xfrm>
             <a:prstGeom prst="rect">
               <a:avLst/>
@@ -4415,7 +4285,7 @@
                   <a:latin typeface="Ramabhadra" panose="02000600000000000000" pitchFamily="2" charset="0"/>
                   <a:cs typeface="Ramabhadra" panose="02000600000000000000" pitchFamily="2" charset="0"/>
                 </a:rPr>
-                <a:t>నీ ప్రేమ నాలో మధురమైనది</a:t>
+                <a:t>స్తుతి పాడుటకే బ్రతికించిన – జీవనదాతవు నీవేనయ్యా</a:t>
               </a:r>
             </a:p>
             <a:p>
@@ -4425,7 +4295,7 @@
                   <a:latin typeface="Ramabhadra" panose="02000600000000000000" pitchFamily="2" charset="0"/>
                   <a:cs typeface="Ramabhadra" panose="02000600000000000000" pitchFamily="2" charset="0"/>
                 </a:rPr>
-                <a:t>అది నా ఊహకందని క్షేమ శిఖరము (2)</a:t>
+                <a:t>ఇన్నాళ్లుగా నను పోషించిన – తల్లివలె నను ఓదార్చిన</a:t>
               </a:r>
             </a:p>
             <a:p>
@@ -4435,7 +4305,7 @@
                   <a:latin typeface="Ramabhadra" panose="02000600000000000000" pitchFamily="2" charset="0"/>
                   <a:cs typeface="Ramabhadra" panose="02000600000000000000" pitchFamily="2" charset="0"/>
                 </a:rPr>
-                <a:t>ఏరి కోరుకున్నావు ప్రేమ చూపి నన్ను</a:t>
+                <a:t>నీ ప్రేమ నాపై ఎన్నడు మారదు యేసయ్యా (2)</a:t>
               </a:r>
             </a:p>
             <a:p>
@@ -4445,7 +4315,7 @@
                   <a:latin typeface="Ramabhadra" panose="02000600000000000000" pitchFamily="2" charset="0"/>
                   <a:cs typeface="Ramabhadra" panose="02000600000000000000" pitchFamily="2" charset="0"/>
                 </a:rPr>
-                <a:t>పరవశించి నాలో మహిమపరతు నిన్నే</a:t>
+                <a:t>జీవితకాలమంతా ఆధారం నీవేనయ్యా</a:t>
               </a:r>
             </a:p>
             <a:p>
@@ -4455,17 +4325,7 @@
                   <a:latin typeface="Ramabhadra" panose="02000600000000000000" pitchFamily="2" charset="0"/>
                   <a:cs typeface="Ramabhadra" panose="02000600000000000000" pitchFamily="2" charset="0"/>
                 </a:rPr>
-                <a:t>సర్వకృపానిధి నీవు – సర్వాధికారివి నీవు</a:t>
-              </a:r>
-            </a:p>
-            <a:p>
-              <a:pPr defTabSz="439781"/>
-              <a:r>
-                <a:rPr lang="te-IN" sz="1850" dirty="0">
-                  <a:latin typeface="Ramabhadra" panose="02000600000000000000" pitchFamily="2" charset="0"/>
-                  <a:cs typeface="Ramabhadra" panose="02000600000000000000" pitchFamily="2" charset="0"/>
-                </a:rPr>
-                <a:t>సత్య స్వరూపివి నీవు – ఆరాధింతును నిన్నే</a:t>
+                <a:t>నా జీవితకాలమంతా ఆరాధించి ఘనపరతును</a:t>
               </a:r>
             </a:p>
             <a:p>
@@ -4482,72 +4342,66 @@
                   <a:latin typeface="Ramabhadra" panose="02000600000000000000" pitchFamily="2" charset="0"/>
                   <a:cs typeface="Ramabhadra" panose="02000600000000000000" pitchFamily="2" charset="0"/>
                 </a:rPr>
-                <a:t>చేరితి నిన్నే విరిగిన మనస్సుతో</a:t>
-              </a:r>
-            </a:p>
-            <a:p>
-              <a:pPr defTabSz="439781"/>
-              <a:r>
-                <a:rPr lang="te-IN" sz="1850" dirty="0">
-                  <a:latin typeface="Ramabhadra" panose="02000600000000000000" pitchFamily="2" charset="0"/>
-                  <a:cs typeface="Ramabhadra" panose="02000600000000000000" pitchFamily="2" charset="0"/>
-                </a:rPr>
-                <a:t>కాదనలేదే నా మనవులు నీవు (2)</a:t>
-              </a:r>
-            </a:p>
-            <a:p>
-              <a:pPr defTabSz="439781"/>
-              <a:r>
-                <a:rPr lang="te-IN" sz="1850" dirty="0">
-                  <a:latin typeface="Ramabhadra" panose="02000600000000000000" pitchFamily="2" charset="0"/>
-                  <a:cs typeface="Ramabhadra" panose="02000600000000000000" pitchFamily="2" charset="0"/>
-                </a:rPr>
-                <a:t>హృదయము నిండిన గానం – నను నడిపే ప్రేమ కావ్యం</a:t>
-              </a:r>
-            </a:p>
-            <a:p>
-              <a:pPr defTabSz="439781"/>
-              <a:r>
-                <a:rPr lang="te-IN" sz="1850" dirty="0">
-                  <a:latin typeface="Ramabhadra" panose="02000600000000000000" pitchFamily="2" charset="0"/>
-                  <a:cs typeface="Ramabhadra" panose="02000600000000000000" pitchFamily="2" charset="0"/>
-                </a:rPr>
-                <a:t>నిరతము నాలో నీవే – చెరగని దివ్య రూపం (2)</a:t>
-              </a:r>
-            </a:p>
-            <a:p>
-              <a:pPr defTabSz="439781"/>
-              <a:r>
-                <a:rPr lang="te-IN" sz="1850" dirty="0">
-                  <a:latin typeface="Ramabhadra" panose="02000600000000000000" pitchFamily="2" charset="0"/>
-                  <a:cs typeface="Ramabhadra" panose="02000600000000000000" pitchFamily="2" charset="0"/>
-                </a:rPr>
-                <a:t>ఇది నీ బాహు బంధాల అనుబంధమా</a:t>
-              </a:r>
-            </a:p>
-            <a:p>
-              <a:pPr defTabSz="439781"/>
-              <a:r>
-                <a:rPr lang="te-IN" sz="1850" dirty="0">
-                  <a:latin typeface="Ramabhadra" panose="02000600000000000000" pitchFamily="2" charset="0"/>
-                  <a:cs typeface="Ramabhadra" panose="02000600000000000000" pitchFamily="2" charset="0"/>
-                </a:rPr>
-                <a:t>తేజోవిరాజా స్తుతి మహిమలు నీకే</a:t>
-              </a:r>
-            </a:p>
-            <a:p>
-              <a:pPr defTabSz="439781"/>
-              <a:r>
-                <a:rPr lang="te-IN" sz="1850" dirty="0">
-                  <a:latin typeface="Ramabhadra" panose="02000600000000000000" pitchFamily="2" charset="0"/>
-                  <a:cs typeface="Ramabhadra" panose="02000600000000000000" pitchFamily="2" charset="0"/>
-                </a:rPr>
-                <a:t>నా యేసురాజా ఆరాధన నీకే (2)</a:t>
+                <a:t>ప్రాణభయమును తొలగించినావు –</a:t>
               </a:r>
               <a:endParaRPr lang="en-IN" sz="1850" dirty="0">
                 <a:latin typeface="Ramabhadra" panose="02000600000000000000" pitchFamily="2" charset="0"/>
                 <a:cs typeface="Ramabhadra" panose="02000600000000000000" pitchFamily="2" charset="0"/>
               </a:endParaRPr>
+            </a:p>
+            <a:p>
+              <a:pPr defTabSz="439781"/>
+              <a:r>
+                <a:rPr lang="te-IN" sz="1850" dirty="0">
+                  <a:latin typeface="Ramabhadra" panose="02000600000000000000" pitchFamily="2" charset="0"/>
+                  <a:cs typeface="Ramabhadra" panose="02000600000000000000" pitchFamily="2" charset="0"/>
+                </a:rPr>
+                <a:t>ప్రాకారములను స్థాపించినావు</a:t>
+              </a:r>
+            </a:p>
+            <a:p>
+              <a:pPr defTabSz="439781"/>
+              <a:r>
+                <a:rPr lang="te-IN" sz="1850" dirty="0">
+                  <a:latin typeface="Ramabhadra" panose="02000600000000000000" pitchFamily="2" charset="0"/>
+                  <a:cs typeface="Ramabhadra" panose="02000600000000000000" pitchFamily="2" charset="0"/>
+                </a:rPr>
+                <a:t>సర్వజనులలో నీ మహిమ వివరింప</a:t>
+              </a:r>
+              <a:endParaRPr lang="en-IN" sz="1850" dirty="0">
+                <a:latin typeface="Ramabhadra" panose="02000600000000000000" pitchFamily="2" charset="0"/>
+                <a:cs typeface="Ramabhadra" panose="02000600000000000000" pitchFamily="2" charset="0"/>
+              </a:endParaRPr>
+            </a:p>
+            <a:p>
+              <a:pPr defTabSz="439781"/>
+              <a:r>
+                <a:rPr lang="te-IN" sz="1850" dirty="0">
+                  <a:latin typeface="Ramabhadra" panose="02000600000000000000" pitchFamily="2" charset="0"/>
+                  <a:cs typeface="Ramabhadra" panose="02000600000000000000" pitchFamily="2" charset="0"/>
+                </a:rPr>
+                <a:t>దీర్ఘాయువుతో నను నింపినావు (2)</a:t>
+              </a:r>
+            </a:p>
+            <a:p>
+              <a:pPr defTabSz="439781"/>
+              <a:r>
+                <a:rPr lang="te-IN" sz="1850" dirty="0">
+                  <a:latin typeface="Ramabhadra" panose="02000600000000000000" pitchFamily="2" charset="0"/>
+                  <a:cs typeface="Ramabhadra" panose="02000600000000000000" pitchFamily="2" charset="0"/>
+                </a:rPr>
+                <a:t>నీ కృపా బాహుళ్యమే వీడని అనుబంధమై</a:t>
+              </a:r>
+            </a:p>
+            <a:p>
+              <a:pPr defTabSz="439781"/>
+              <a:r>
+                <a:rPr lang="te-IN" sz="1850" dirty="0">
+                  <a:latin typeface="Ramabhadra" panose="02000600000000000000" pitchFamily="2" charset="0"/>
+                  <a:cs typeface="Ramabhadra" panose="02000600000000000000" pitchFamily="2" charset="0"/>
+                </a:rPr>
+                <a:t>తలచిన ప్రతిక్షణమున నూతన బలమిచ్చెను</a:t>
+              </a:r>
             </a:p>
             <a:p>
               <a:pPr defTabSz="439781"/>
@@ -4563,79 +4417,66 @@
                   <a:latin typeface="Ramabhadra" panose="02000600000000000000" pitchFamily="2" charset="0"/>
                   <a:cs typeface="Ramabhadra" panose="02000600000000000000" pitchFamily="2" charset="0"/>
                 </a:rPr>
-                <a:t>నా ప్రతి పదములో జీవము నీవే</a:t>
-              </a:r>
-            </a:p>
-            <a:p>
-              <a:pPr defTabSz="439781"/>
-              <a:r>
-                <a:rPr lang="te-IN" sz="1850" dirty="0">
-                  <a:latin typeface="Ramabhadra" panose="02000600000000000000" pitchFamily="2" charset="0"/>
-                  <a:cs typeface="Ramabhadra" panose="02000600000000000000" pitchFamily="2" charset="0"/>
-                </a:rPr>
-                <a:t>నా ప్రతి అడుగులో విజయము నీవే (2)</a:t>
-              </a:r>
-            </a:p>
-            <a:p>
-              <a:pPr defTabSz="439781"/>
-              <a:r>
-                <a:rPr lang="te-IN" sz="1850" dirty="0">
-                  <a:latin typeface="Ramabhadra" panose="02000600000000000000" pitchFamily="2" charset="0"/>
-                  <a:cs typeface="Ramabhadra" panose="02000600000000000000" pitchFamily="2" charset="0"/>
-                </a:rPr>
-                <a:t>ఎన్నడు విడువని ప్రేమ – నిను చేరే క్షణము రాదా</a:t>
-              </a:r>
-            </a:p>
-            <a:p>
-              <a:pPr defTabSz="439781"/>
-              <a:r>
-                <a:rPr lang="te-IN" sz="1850" dirty="0">
-                  <a:latin typeface="Ramabhadra" panose="02000600000000000000" pitchFamily="2" charset="0"/>
-                  <a:cs typeface="Ramabhadra" panose="02000600000000000000" pitchFamily="2" charset="0"/>
-                </a:rPr>
-                <a:t>నీడగా నాతో నిలిచే – నీ కృపయే నాకు చాలును (2)</a:t>
-              </a:r>
-            </a:p>
-            <a:p>
-              <a:pPr defTabSz="439781"/>
-              <a:r>
-                <a:rPr lang="te-IN" sz="1850" dirty="0">
-                  <a:latin typeface="Ramabhadra" panose="02000600000000000000" pitchFamily="2" charset="0"/>
-                  <a:cs typeface="Ramabhadra" panose="02000600000000000000" pitchFamily="2" charset="0"/>
-                </a:rPr>
-                <a:t>ఇది నీ ప్రేమ కురిపించు హేమంతమా</a:t>
-              </a:r>
-            </a:p>
-            <a:p>
-              <a:pPr defTabSz="439781"/>
-              <a:r>
-                <a:rPr lang="te-IN" sz="1850" dirty="0">
-                  <a:latin typeface="Ramabhadra" panose="02000600000000000000" pitchFamily="2" charset="0"/>
-                  <a:cs typeface="Ramabhadra" panose="02000600000000000000" pitchFamily="2" charset="0"/>
-                </a:rPr>
-                <a:t>తేజోవిరాజా స్తుతి మహిమలు నీకే</a:t>
-              </a:r>
-            </a:p>
-            <a:p>
-              <a:pPr defTabSz="439781"/>
-              <a:r>
-                <a:rPr lang="te-IN" sz="1850" dirty="0">
-                  <a:latin typeface="Ramabhadra" panose="02000600000000000000" pitchFamily="2" charset="0"/>
-                  <a:cs typeface="Ramabhadra" panose="02000600000000000000" pitchFamily="2" charset="0"/>
-                </a:rPr>
-                <a:t>నా యేసురాజా ఆరాధన నీకే (2</a:t>
-              </a:r>
-              <a:r>
-                <a:rPr lang="en-IN" sz="1850" dirty="0">
-                  <a:latin typeface="Ramabhadra" panose="02000600000000000000" pitchFamily="2" charset="0"/>
-                  <a:cs typeface="Ramabhadra" panose="02000600000000000000" pitchFamily="2" charset="0"/>
-                </a:rPr>
-                <a:t>)</a:t>
-              </a:r>
-              <a:endParaRPr lang="te-IN" sz="1850" dirty="0">
+                <a:t>నాపై ఉదయించె నీ మహిమ కిరణాలు –</a:t>
+              </a:r>
+              <a:endParaRPr lang="en-IN" sz="1850" dirty="0">
                 <a:latin typeface="Ramabhadra" panose="02000600000000000000" pitchFamily="2" charset="0"/>
                 <a:cs typeface="Ramabhadra" panose="02000600000000000000" pitchFamily="2" charset="0"/>
               </a:endParaRPr>
+            </a:p>
+            <a:p>
+              <a:pPr defTabSz="439781"/>
+              <a:r>
+                <a:rPr lang="te-IN" sz="1850" dirty="0">
+                  <a:latin typeface="Ramabhadra" panose="02000600000000000000" pitchFamily="2" charset="0"/>
+                  <a:cs typeface="Ramabhadra" panose="02000600000000000000" pitchFamily="2" charset="0"/>
+                </a:rPr>
+                <a:t>కనుమరుగాయెను నా దుఖ:దినములు</a:t>
+              </a:r>
+            </a:p>
+            <a:p>
+              <a:pPr defTabSz="439781"/>
+              <a:r>
+                <a:rPr lang="te-IN" sz="1850" dirty="0">
+                  <a:latin typeface="Ramabhadra" panose="02000600000000000000" pitchFamily="2" charset="0"/>
+                  <a:cs typeface="Ramabhadra" panose="02000600000000000000" pitchFamily="2" charset="0"/>
+                </a:rPr>
+                <a:t>కృపలనుపొంది నీ కాడి మోయుటకు</a:t>
+              </a:r>
+              <a:endParaRPr lang="en-IN" sz="1850" dirty="0">
+                <a:latin typeface="Ramabhadra" panose="02000600000000000000" pitchFamily="2" charset="0"/>
+                <a:cs typeface="Ramabhadra" panose="02000600000000000000" pitchFamily="2" charset="0"/>
+              </a:endParaRPr>
+            </a:p>
+            <a:p>
+              <a:pPr defTabSz="439781"/>
+              <a:r>
+                <a:rPr lang="te-IN" sz="1850" dirty="0">
+                  <a:latin typeface="Ramabhadra" panose="02000600000000000000" pitchFamily="2" charset="0"/>
+                  <a:cs typeface="Ramabhadra" panose="02000600000000000000" pitchFamily="2" charset="0"/>
+                </a:rPr>
+                <a:t>లోకములోనుండి ఏర్పరచినావు (2)</a:t>
+              </a:r>
+            </a:p>
+            <a:p>
+              <a:pPr defTabSz="439781"/>
+              <a:r>
+                <a:rPr lang="te-IN" sz="1850" dirty="0">
+                  <a:latin typeface="Ramabhadra" panose="02000600000000000000" pitchFamily="2" charset="0"/>
+                  <a:cs typeface="Ramabhadra" panose="02000600000000000000" pitchFamily="2" charset="0"/>
+                </a:rPr>
+                <a:t>నీ దివ్య సంకల్పమే- అవనిలో శుభప్రదమై</a:t>
+              </a:r>
+            </a:p>
+            <a:p>
+              <a:pPr defTabSz="439781"/>
+              <a:r>
+                <a:rPr lang="te-IN" sz="1850" dirty="0">
+                  <a:latin typeface="Ramabhadra" panose="02000600000000000000" pitchFamily="2" charset="0"/>
+                  <a:cs typeface="Ramabhadra" panose="02000600000000000000" pitchFamily="2" charset="0"/>
+                </a:rPr>
+                <a:t>నీ నిత్య రాజ్యమునకై నిరీక్షణ కలిగించెను</a:t>
+              </a:r>
             </a:p>
           </p:txBody>
         </p:sp>
@@ -4704,10 +4545,10 @@
       </p:grpSp>
       <p:sp>
         <p:nvSpPr>
-          <p:cNvPr id="14" name="Rectangle 13">
+          <p:cNvPr id="16" name="Rectangle 15">
             <a:extLst>
               <a:ext uri="{FF2B5EF4-FFF2-40B4-BE49-F238E27FC236}">
-                <a16:creationId xmlns:a16="http://schemas.microsoft.com/office/drawing/2014/main" id="{E95DE29B-C121-4EE2-96D2-B50349B9AEB6}"/>
+                <a16:creationId xmlns:a16="http://schemas.microsoft.com/office/drawing/2014/main" id="{3FED3E2E-9809-49A6-A72F-F07A4D5B3E8A}"/>
               </a:ext>
             </a:extLst>
           </p:cNvPr>
@@ -4716,8 +4557,8 @@
         </p:nvSpPr>
         <p:spPr>
           <a:xfrm>
-            <a:off x="7021458" y="6684761"/>
-            <a:ext cx="902677" cy="182031"/>
+            <a:off x="7021458" y="6675966"/>
+            <a:ext cx="970017" cy="178310"/>
           </a:xfrm>
           <a:prstGeom prst="rect">
             <a:avLst/>
@@ -4754,17 +4595,17 @@
                   <a:schemeClr val="tx1"/>
                 </a:solidFill>
               </a:rPr>
-              <a:t>0002</a:t>
-            </a:r>
-          </a:p>
-        </p:txBody>
-      </p:sp>
-      <p:sp>
-        <p:nvSpPr>
-          <p:cNvPr id="15" name="Rectangle 14">
+              <a:t>05042025</a:t>
+            </a:r>
+          </a:p>
+        </p:txBody>
+      </p:sp>
+      <p:sp>
+        <p:nvSpPr>
+          <p:cNvPr id="17" name="Rectangle 16">
             <a:extLst>
               <a:ext uri="{FF2B5EF4-FFF2-40B4-BE49-F238E27FC236}">
-                <a16:creationId xmlns:a16="http://schemas.microsoft.com/office/drawing/2014/main" id="{D968D772-32D4-45FD-A15D-744327419879}"/>
+                <a16:creationId xmlns:a16="http://schemas.microsoft.com/office/drawing/2014/main" id="{2923DFFB-527A-46C3-AD65-93B3832D9C56}"/>
               </a:ext>
             </a:extLst>
           </p:cNvPr>
@@ -4773,8 +4614,8 @@
         </p:nvSpPr>
         <p:spPr>
           <a:xfrm>
-            <a:off x="2010310" y="6679690"/>
-            <a:ext cx="902677" cy="182031"/>
+            <a:off x="2010310" y="6670895"/>
+            <a:ext cx="970017" cy="178310"/>
           </a:xfrm>
           <a:prstGeom prst="rect">
             <a:avLst/>
@@ -4811,7 +4652,7 @@
                   <a:schemeClr val="tx1"/>
                 </a:solidFill>
               </a:rPr>
-              <a:t>0002</a:t>
+              <a:t>05042025</a:t>
             </a:r>
           </a:p>
         </p:txBody>

--- a/songsTemplate.pptx
+++ b/songsTemplate.pptx
@@ -255,7 +255,7 @@
           <a:p>
             <a:fld id="{F1102B08-ED9E-409F-B95F-09CAA1DAF6E0}" type="datetimeFigureOut">
               <a:rPr lang="en-IN" smtClean="0"/>
-              <a:t>05-04-2025</a:t>
+              <a:t>12-04-2025</a:t>
             </a:fld>
             <a:endParaRPr lang="en-IN"/>
           </a:p>
@@ -425,7 +425,7 @@
           <a:p>
             <a:fld id="{F1102B08-ED9E-409F-B95F-09CAA1DAF6E0}" type="datetimeFigureOut">
               <a:rPr lang="en-IN" smtClean="0"/>
-              <a:t>05-04-2025</a:t>
+              <a:t>12-04-2025</a:t>
             </a:fld>
             <a:endParaRPr lang="en-IN"/>
           </a:p>
@@ -605,7 +605,7 @@
           <a:p>
             <a:fld id="{F1102B08-ED9E-409F-B95F-09CAA1DAF6E0}" type="datetimeFigureOut">
               <a:rPr lang="en-IN" smtClean="0"/>
-              <a:t>05-04-2025</a:t>
+              <a:t>12-04-2025</a:t>
             </a:fld>
             <a:endParaRPr lang="en-IN"/>
           </a:p>
@@ -775,7 +775,7 @@
           <a:p>
             <a:fld id="{F1102B08-ED9E-409F-B95F-09CAA1DAF6E0}" type="datetimeFigureOut">
               <a:rPr lang="en-IN" smtClean="0"/>
-              <a:t>05-04-2025</a:t>
+              <a:t>12-04-2025</a:t>
             </a:fld>
             <a:endParaRPr lang="en-IN"/>
           </a:p>
@@ -1019,7 +1019,7 @@
           <a:p>
             <a:fld id="{F1102B08-ED9E-409F-B95F-09CAA1DAF6E0}" type="datetimeFigureOut">
               <a:rPr lang="en-IN" smtClean="0"/>
-              <a:t>05-04-2025</a:t>
+              <a:t>12-04-2025</a:t>
             </a:fld>
             <a:endParaRPr lang="en-IN"/>
           </a:p>
@@ -1251,7 +1251,7 @@
           <a:p>
             <a:fld id="{F1102B08-ED9E-409F-B95F-09CAA1DAF6E0}" type="datetimeFigureOut">
               <a:rPr lang="en-IN" smtClean="0"/>
-              <a:t>05-04-2025</a:t>
+              <a:t>12-04-2025</a:t>
             </a:fld>
             <a:endParaRPr lang="en-IN"/>
           </a:p>
@@ -1618,7 +1618,7 @@
           <a:p>
             <a:fld id="{F1102B08-ED9E-409F-B95F-09CAA1DAF6E0}" type="datetimeFigureOut">
               <a:rPr lang="en-IN" smtClean="0"/>
-              <a:t>05-04-2025</a:t>
+              <a:t>12-04-2025</a:t>
             </a:fld>
             <a:endParaRPr lang="en-IN"/>
           </a:p>
@@ -1736,7 +1736,7 @@
           <a:p>
             <a:fld id="{F1102B08-ED9E-409F-B95F-09CAA1DAF6E0}" type="datetimeFigureOut">
               <a:rPr lang="en-IN" smtClean="0"/>
-              <a:t>05-04-2025</a:t>
+              <a:t>12-04-2025</a:t>
             </a:fld>
             <a:endParaRPr lang="en-IN"/>
           </a:p>
@@ -1831,7 +1831,7 @@
           <a:p>
             <a:fld id="{F1102B08-ED9E-409F-B95F-09CAA1DAF6E0}" type="datetimeFigureOut">
               <a:rPr lang="en-IN" smtClean="0"/>
-              <a:t>05-04-2025</a:t>
+              <a:t>12-04-2025</a:t>
             </a:fld>
             <a:endParaRPr lang="en-IN"/>
           </a:p>
@@ -2108,7 +2108,7 @@
           <a:p>
             <a:fld id="{F1102B08-ED9E-409F-B95F-09CAA1DAF6E0}" type="datetimeFigureOut">
               <a:rPr lang="en-IN" smtClean="0"/>
-              <a:t>05-04-2025</a:t>
+              <a:t>12-04-2025</a:t>
             </a:fld>
             <a:endParaRPr lang="en-IN"/>
           </a:p>
@@ -2365,7 +2365,7 @@
           <a:p>
             <a:fld id="{F1102B08-ED9E-409F-B95F-09CAA1DAF6E0}" type="datetimeFigureOut">
               <a:rPr lang="en-IN" smtClean="0"/>
-              <a:t>05-04-2025</a:t>
+              <a:t>12-04-2025</a:t>
             </a:fld>
             <a:endParaRPr lang="en-IN"/>
           </a:p>
@@ -2578,7 +2578,7 @@
           <a:p>
             <a:fld id="{F1102B08-ED9E-409F-B95F-09CAA1DAF6E0}" type="datetimeFigureOut">
               <a:rPr lang="en-IN" smtClean="0"/>
-              <a:t>05-04-2025</a:t>
+              <a:t>12-04-2025</a:t>
             </a:fld>
             <a:endParaRPr lang="en-IN"/>
           </a:p>
@@ -3072,8 +3072,8 @@
           </p:nvSpPr>
           <p:spPr>
             <a:xfrm>
-              <a:off x="262396" y="505119"/>
-              <a:ext cx="4648200" cy="5632311"/>
+              <a:off x="262396" y="326429"/>
+              <a:ext cx="4648200" cy="6186309"/>
             </a:xfrm>
             <a:prstGeom prst="rect">
               <a:avLst/>
@@ -3087,128 +3087,194 @@
             <a:lstStyle/>
             <a:p>
               <a:r>
-                <a:rPr lang="te-IN" sz="2400" dirty="0">
-                  <a:latin typeface="Ramabhadra" panose="02000600000000000000" pitchFamily="2" charset="0"/>
-                  <a:cs typeface="Ramabhadra" panose="02000600000000000000" pitchFamily="2" charset="0"/>
-                </a:rPr>
-                <a:t>విన్నపములు వినువాడా</a:t>
-              </a:r>
-            </a:p>
-            <a:p>
-              <a:r>
-                <a:rPr lang="te-IN" sz="2400" dirty="0">
-                  <a:latin typeface="Ramabhadra" panose="02000600000000000000" pitchFamily="2" charset="0"/>
-                  <a:cs typeface="Ramabhadra" panose="02000600000000000000" pitchFamily="2" charset="0"/>
-                </a:rPr>
-                <a:t>నా కన్నీరు తుడుచు వాడా </a:t>
-              </a:r>
-            </a:p>
-            <a:p>
-              <a:r>
-                <a:rPr lang="te-IN" sz="2400" dirty="0">
-                  <a:latin typeface="Ramabhadra" panose="02000600000000000000" pitchFamily="2" charset="0"/>
-                  <a:cs typeface="Ramabhadra" panose="02000600000000000000" pitchFamily="2" charset="0"/>
-                </a:rPr>
-                <a:t>సుఖములు ఇచ్చువాడా స్తోత్రము యేసయ్యా </a:t>
-              </a:r>
-            </a:p>
-            <a:p>
-              <a:endParaRPr lang="te-IN" sz="2400" dirty="0">
+                <a:rPr lang="te-IN" dirty="0">
+                  <a:latin typeface="Ramabhadra" panose="02000600000000000000" pitchFamily="2" charset="0"/>
+                  <a:cs typeface="Ramabhadra" panose="02000600000000000000" pitchFamily="2" charset="0"/>
+                </a:rPr>
+                <a:t>నీ ప్రేమ నాలో మధురమైనది</a:t>
+              </a:r>
+            </a:p>
+            <a:p>
+              <a:r>
+                <a:rPr lang="te-IN" dirty="0">
+                  <a:latin typeface="Ramabhadra" panose="02000600000000000000" pitchFamily="2" charset="0"/>
+                  <a:cs typeface="Ramabhadra" panose="02000600000000000000" pitchFamily="2" charset="0"/>
+                </a:rPr>
+                <a:t>అది నా ఊహకందని క్షేమ శిఖరము (2)</a:t>
+              </a:r>
+            </a:p>
+            <a:p>
+              <a:r>
+                <a:rPr lang="te-IN" dirty="0">
+                  <a:latin typeface="Ramabhadra" panose="02000600000000000000" pitchFamily="2" charset="0"/>
+                  <a:cs typeface="Ramabhadra" panose="02000600000000000000" pitchFamily="2" charset="0"/>
+                </a:rPr>
+                <a:t>ఏరి కోరుకున్నావు ప్రేమ చూపి నన్ను</a:t>
+              </a:r>
+            </a:p>
+            <a:p>
+              <a:r>
+                <a:rPr lang="te-IN" dirty="0">
+                  <a:latin typeface="Ramabhadra" panose="02000600000000000000" pitchFamily="2" charset="0"/>
+                  <a:cs typeface="Ramabhadra" panose="02000600000000000000" pitchFamily="2" charset="0"/>
+                </a:rPr>
+                <a:t>పరవశించి నాలో మహిమపరతు నిన్నే</a:t>
+              </a:r>
+            </a:p>
+            <a:p>
+              <a:r>
+                <a:rPr lang="te-IN" dirty="0">
+                  <a:latin typeface="Ramabhadra" panose="02000600000000000000" pitchFamily="2" charset="0"/>
+                  <a:cs typeface="Ramabhadra" panose="02000600000000000000" pitchFamily="2" charset="0"/>
+                </a:rPr>
+                <a:t>సర్వకృపానిధి నీవు – సర్వాధికారివి నీవు</a:t>
+              </a:r>
+            </a:p>
+            <a:p>
+              <a:r>
+                <a:rPr lang="te-IN" dirty="0">
+                  <a:latin typeface="Ramabhadra" panose="02000600000000000000" pitchFamily="2" charset="0"/>
+                  <a:cs typeface="Ramabhadra" panose="02000600000000000000" pitchFamily="2" charset="0"/>
+                </a:rPr>
+                <a:t>సత్య స్వరూపివి నీవు – ఆరాధింతును నిన్నే</a:t>
+              </a:r>
+            </a:p>
+            <a:p>
+              <a:endParaRPr lang="te-IN" dirty="0">
                 <a:latin typeface="Ramabhadra" panose="02000600000000000000" pitchFamily="2" charset="0"/>
                 <a:cs typeface="Ramabhadra" panose="02000600000000000000" pitchFamily="2" charset="0"/>
               </a:endParaRPr>
             </a:p>
             <a:p>
               <a:r>
-                <a:rPr lang="te-IN" sz="2400" dirty="0">
-                  <a:latin typeface="Ramabhadra" panose="02000600000000000000" pitchFamily="2" charset="0"/>
-                  <a:cs typeface="Ramabhadra" panose="02000600000000000000" pitchFamily="2" charset="0"/>
-                </a:rPr>
-                <a:t>నీ నుండియే అన్ని సాధ్యమయ్యా </a:t>
-              </a:r>
-            </a:p>
-            <a:p>
-              <a:r>
-                <a:rPr lang="te-IN" sz="2400" dirty="0">
-                  <a:latin typeface="Ramabhadra" panose="02000600000000000000" pitchFamily="2" charset="0"/>
-                  <a:cs typeface="Ramabhadra" panose="02000600000000000000" pitchFamily="2" charset="0"/>
-                </a:rPr>
-                <a:t>మాట ఒకటి చాలునయ్య</a:t>
-              </a:r>
-            </a:p>
-            <a:p>
-              <a:r>
-                <a:rPr lang="te-IN" sz="2400" dirty="0">
-                  <a:latin typeface="Ramabhadra" panose="02000600000000000000" pitchFamily="2" charset="0"/>
-                  <a:cs typeface="Ramabhadra" panose="02000600000000000000" pitchFamily="2" charset="0"/>
-                </a:rPr>
-                <a:t>నీ మాట ఒకటి చాలునయ్య </a:t>
-              </a:r>
-            </a:p>
-            <a:p>
-              <a:endParaRPr lang="te-IN" sz="2400" dirty="0">
+                <a:rPr lang="te-IN" dirty="0">
+                  <a:latin typeface="Ramabhadra" panose="02000600000000000000" pitchFamily="2" charset="0"/>
+                  <a:cs typeface="Ramabhadra" panose="02000600000000000000" pitchFamily="2" charset="0"/>
+                </a:rPr>
+                <a:t>చేరితి నిన్నే విరిగిన మనస్సుతో</a:t>
+              </a:r>
+            </a:p>
+            <a:p>
+              <a:r>
+                <a:rPr lang="te-IN" dirty="0">
+                  <a:latin typeface="Ramabhadra" panose="02000600000000000000" pitchFamily="2" charset="0"/>
+                  <a:cs typeface="Ramabhadra" panose="02000600000000000000" pitchFamily="2" charset="0"/>
+                </a:rPr>
+                <a:t>కాదనలేదే నా మనవులు నీవు (2)</a:t>
+              </a:r>
+            </a:p>
+            <a:p>
+              <a:r>
+                <a:rPr lang="te-IN" dirty="0">
+                  <a:latin typeface="Ramabhadra" panose="02000600000000000000" pitchFamily="2" charset="0"/>
+                  <a:cs typeface="Ramabhadra" panose="02000600000000000000" pitchFamily="2" charset="0"/>
+                </a:rPr>
+                <a:t>హృదయము నిండిన గానం – నను నడిపే ప్రేమ కావ్యం</a:t>
+              </a:r>
+            </a:p>
+            <a:p>
+              <a:r>
+                <a:rPr lang="te-IN" dirty="0">
+                  <a:latin typeface="Ramabhadra" panose="02000600000000000000" pitchFamily="2" charset="0"/>
+                  <a:cs typeface="Ramabhadra" panose="02000600000000000000" pitchFamily="2" charset="0"/>
+                </a:rPr>
+                <a:t>నిరతము నాలో నీవే – చెరగని దివ్య రూపం (2)</a:t>
+              </a:r>
+            </a:p>
+            <a:p>
+              <a:r>
+                <a:rPr lang="te-IN" dirty="0">
+                  <a:latin typeface="Ramabhadra" panose="02000600000000000000" pitchFamily="2" charset="0"/>
+                  <a:cs typeface="Ramabhadra" panose="02000600000000000000" pitchFamily="2" charset="0"/>
+                </a:rPr>
+                <a:t>ఇది నీ బాహు బంధాల అనుబంధమా</a:t>
+              </a:r>
+            </a:p>
+            <a:p>
+              <a:r>
+                <a:rPr lang="te-IN" dirty="0">
+                  <a:latin typeface="Ramabhadra" panose="02000600000000000000" pitchFamily="2" charset="0"/>
+                  <a:cs typeface="Ramabhadra" panose="02000600000000000000" pitchFamily="2" charset="0"/>
+                </a:rPr>
+                <a:t>తేజోవిరాజా స్తుతి మహిమలు నీకే</a:t>
+              </a:r>
+            </a:p>
+            <a:p>
+              <a:r>
+                <a:rPr lang="te-IN" dirty="0">
+                  <a:latin typeface="Ramabhadra" panose="02000600000000000000" pitchFamily="2" charset="0"/>
+                  <a:cs typeface="Ramabhadra" panose="02000600000000000000" pitchFamily="2" charset="0"/>
+                </a:rPr>
+                <a:t>నా యేసురాజా ఆరాధన నీకే (2)</a:t>
+              </a:r>
+            </a:p>
+            <a:p>
+              <a:endParaRPr lang="te-IN" dirty="0">
                 <a:latin typeface="Ramabhadra" panose="02000600000000000000" pitchFamily="2" charset="0"/>
                 <a:cs typeface="Ramabhadra" panose="02000600000000000000" pitchFamily="2" charset="0"/>
               </a:endParaRPr>
             </a:p>
             <a:p>
               <a:r>
-                <a:rPr lang="te-IN" sz="2400" dirty="0">
-                  <a:latin typeface="Ramabhadra" panose="02000600000000000000" pitchFamily="2" charset="0"/>
-                  <a:cs typeface="Ramabhadra" panose="02000600000000000000" pitchFamily="2" charset="0"/>
-                </a:rPr>
-                <a:t>నా చిత్తమే శుద్ధి పొందు </a:t>
-              </a:r>
-            </a:p>
-            <a:p>
-              <a:r>
-                <a:rPr lang="te-IN" sz="2400" dirty="0">
-                  <a:latin typeface="Ramabhadra" panose="02000600000000000000" pitchFamily="2" charset="0"/>
-                  <a:cs typeface="Ramabhadra" panose="02000600000000000000" pitchFamily="2" charset="0"/>
-                </a:rPr>
-                <a:t>అని చెప్పి తాకితివే</a:t>
-              </a:r>
-            </a:p>
-            <a:p>
-              <a:r>
-                <a:rPr lang="te-IN" sz="2400" dirty="0">
-                  <a:latin typeface="Ramabhadra" panose="02000600000000000000" pitchFamily="2" charset="0"/>
-                  <a:cs typeface="Ramabhadra" panose="02000600000000000000" pitchFamily="2" charset="0"/>
-                </a:rPr>
-                <a:t>అయ్యా అని చెప్పి తాకితివే </a:t>
-              </a:r>
-            </a:p>
-            <a:p>
-              <a:endParaRPr lang="te-IN" sz="2400" dirty="0">
-                <a:latin typeface="Ramabhadra" panose="02000600000000000000" pitchFamily="2" charset="0"/>
-                <a:cs typeface="Ramabhadra" panose="02000600000000000000" pitchFamily="2" charset="0"/>
-              </a:endParaRPr>
-            </a:p>
-            <a:p>
-              <a:r>
-                <a:rPr lang="te-IN" sz="2400" dirty="0">
-                  <a:latin typeface="Ramabhadra" panose="02000600000000000000" pitchFamily="2" charset="0"/>
-                  <a:cs typeface="Ramabhadra" panose="02000600000000000000" pitchFamily="2" charset="0"/>
-                </a:rPr>
-                <a:t>నా వ్యాధిని సిలువ లోనా   </a:t>
-              </a:r>
-            </a:p>
-            <a:p>
-              <a:r>
-                <a:rPr lang="te-IN" sz="2400" dirty="0">
-                  <a:latin typeface="Ramabhadra" panose="02000600000000000000" pitchFamily="2" charset="0"/>
-                  <a:cs typeface="Ramabhadra" panose="02000600000000000000" pitchFamily="2" charset="0"/>
-                </a:rPr>
-                <a:t>నీవుపొంది తీర్చితివే</a:t>
-              </a:r>
-            </a:p>
-            <a:p>
-              <a:r>
-                <a:rPr lang="te-IN" sz="2400" dirty="0">
-                  <a:latin typeface="Ramabhadra" panose="02000600000000000000" pitchFamily="2" charset="0"/>
-                  <a:cs typeface="Ramabhadra" panose="02000600000000000000" pitchFamily="2" charset="0"/>
-                </a:rPr>
-                <a:t>అయ్యా నీవుపొంది తీర్చితివే</a:t>
+                <a:rPr lang="te-IN" dirty="0">
+                  <a:latin typeface="Ramabhadra" panose="02000600000000000000" pitchFamily="2" charset="0"/>
+                  <a:cs typeface="Ramabhadra" panose="02000600000000000000" pitchFamily="2" charset="0"/>
+                </a:rPr>
+                <a:t>నా ప్రతి పదములో జీవము నీవే</a:t>
+              </a:r>
+            </a:p>
+            <a:p>
+              <a:r>
+                <a:rPr lang="te-IN" dirty="0">
+                  <a:latin typeface="Ramabhadra" panose="02000600000000000000" pitchFamily="2" charset="0"/>
+                  <a:cs typeface="Ramabhadra" panose="02000600000000000000" pitchFamily="2" charset="0"/>
+                </a:rPr>
+                <a:t>నా ప్రతి అడుగులో విజయము నీవే (2)</a:t>
+              </a:r>
+            </a:p>
+            <a:p>
+              <a:r>
+                <a:rPr lang="te-IN" dirty="0">
+                  <a:latin typeface="Ramabhadra" panose="02000600000000000000" pitchFamily="2" charset="0"/>
+                  <a:cs typeface="Ramabhadra" panose="02000600000000000000" pitchFamily="2" charset="0"/>
+                </a:rPr>
+                <a:t>ఎన్నడు విడువని ప్రేమ – నిను చేరే క్షణము రాదా</a:t>
+              </a:r>
+            </a:p>
+            <a:p>
+              <a:r>
+                <a:rPr lang="te-IN" dirty="0">
+                  <a:latin typeface="Ramabhadra" panose="02000600000000000000" pitchFamily="2" charset="0"/>
+                  <a:cs typeface="Ramabhadra" panose="02000600000000000000" pitchFamily="2" charset="0"/>
+                </a:rPr>
+                <a:t>నీడగా నాతో నిలిచే – నీ కృపయే నాకు చాలును (2)</a:t>
+              </a:r>
+            </a:p>
+            <a:p>
+              <a:r>
+                <a:rPr lang="te-IN" dirty="0">
+                  <a:latin typeface="Ramabhadra" panose="02000600000000000000" pitchFamily="2" charset="0"/>
+                  <a:cs typeface="Ramabhadra" panose="02000600000000000000" pitchFamily="2" charset="0"/>
+                </a:rPr>
+                <a:t>ఇది నీ ప్రేమ కురిపించు హేమంతమా</a:t>
+              </a:r>
+            </a:p>
+            <a:p>
+              <a:r>
+                <a:rPr lang="te-IN" dirty="0">
+                  <a:latin typeface="Ramabhadra" panose="02000600000000000000" pitchFamily="2" charset="0"/>
+                  <a:cs typeface="Ramabhadra" panose="02000600000000000000" pitchFamily="2" charset="0"/>
+                </a:rPr>
+                <a:t>తేజోవిరాజా స్తుతి మహిమలు నీకే</a:t>
+              </a:r>
+            </a:p>
+            <a:p>
+              <a:r>
+                <a:rPr lang="te-IN" dirty="0">
+                  <a:latin typeface="Ramabhadra" panose="02000600000000000000" pitchFamily="2" charset="0"/>
+                  <a:cs typeface="Ramabhadra" panose="02000600000000000000" pitchFamily="2" charset="0"/>
+                </a:rPr>
+                <a:t>నా యేసురాజా ఆరాధన నీకే (2)</a:t>
               </a:r>
             </a:p>
           </p:txBody>
@@ -3291,9 +3357,9 @@
         <p:grpSpPr>
           <a:xfrm>
             <a:off x="5104338" y="182031"/>
-            <a:ext cx="4841942" cy="6493935"/>
+            <a:ext cx="4674462" cy="6493935"/>
             <a:chOff x="160868" y="182032"/>
-            <a:chExt cx="4841942" cy="6493935"/>
+            <a:chExt cx="4674462" cy="6493935"/>
           </a:xfrm>
         </p:grpSpPr>
         <p:sp>
@@ -3365,8 +3431,8 @@
           </p:nvSpPr>
           <p:spPr>
             <a:xfrm>
-              <a:off x="458141" y="483206"/>
-              <a:ext cx="4544669" cy="4769254"/>
+              <a:off x="290661" y="329202"/>
+              <a:ext cx="4544669" cy="6093976"/>
             </a:xfrm>
             <a:prstGeom prst="rect">
               <a:avLst/>
@@ -3385,12 +3451,29 @@
                 </a:lnSpc>
               </a:pPr>
               <a:r>
-                <a:rPr lang="te-IN" sz="2400" dirty="0">
-                  <a:latin typeface="Ramabhadra" panose="02000600000000000000" pitchFamily="2" charset="0"/>
-                  <a:cs typeface="Ramabhadra" panose="02000600000000000000" pitchFamily="2" charset="0"/>
-                </a:rPr>
-                <a:t>నమ్మకమైన దేవుడవైన</a:t>
-              </a:r>
+                <a:rPr lang="te-IN" sz="2000" dirty="0">
+                  <a:latin typeface="Ramabhadra" panose="02000600000000000000" pitchFamily="2" charset="0"/>
+                  <a:cs typeface="Ramabhadra" panose="02000600000000000000" pitchFamily="2" charset="0"/>
+                </a:rPr>
+                <a:t>యేసే నా పరిహారి ప్రియ యేసే నా పరిహారి</a:t>
+              </a:r>
+              <a:br>
+                <a:rPr lang="te-IN" sz="2000" dirty="0">
+                  <a:latin typeface="Ramabhadra" panose="02000600000000000000" pitchFamily="2" charset="0"/>
+                  <a:cs typeface="Ramabhadra" panose="02000600000000000000" pitchFamily="2" charset="0"/>
+                </a:rPr>
+              </a:br>
+              <a:r>
+                <a:rPr lang="te-IN" sz="2000" dirty="0">
+                  <a:latin typeface="Ramabhadra" panose="02000600000000000000" pitchFamily="2" charset="0"/>
+                  <a:cs typeface="Ramabhadra" panose="02000600000000000000" pitchFamily="2" charset="0"/>
+                </a:rPr>
+                <a:t>నా జీవిత కాలమెల్ల</a:t>
+              </a:r>
+              <a:endParaRPr lang="en-IN" sz="2000" dirty="0">
+                <a:latin typeface="Ramabhadra" panose="02000600000000000000" pitchFamily="2" charset="0"/>
+                <a:cs typeface="Ramabhadra" panose="02000600000000000000" pitchFamily="2" charset="0"/>
+              </a:endParaRPr>
             </a:p>
             <a:p>
               <a:pPr>
@@ -3399,11 +3482,11 @@
                 </a:lnSpc>
               </a:pPr>
               <a:r>
-                <a:rPr lang="te-IN" sz="2400" dirty="0">
-                  <a:latin typeface="Ramabhadra" panose="02000600000000000000" pitchFamily="2" charset="0"/>
-                  <a:cs typeface="Ramabhadra" panose="02000600000000000000" pitchFamily="2" charset="0"/>
-                </a:rPr>
-                <a:t>నీవే చాలు యేసయ్యా (2)</a:t>
+                <a:rPr lang="te-IN" sz="2000" dirty="0">
+                  <a:latin typeface="Ramabhadra" panose="02000600000000000000" pitchFamily="2" charset="0"/>
+                  <a:cs typeface="Ramabhadra" panose="02000600000000000000" pitchFamily="2" charset="0"/>
+                </a:rPr>
+                <a:t>ప్రియ ప్రభువే నా పరిహారి (2)         </a:t>
               </a:r>
             </a:p>
             <a:p>
@@ -3412,13 +3495,10 @@
                   <a:spcPts val="2600"/>
                 </a:lnSpc>
               </a:pPr>
-              <a:r>
-                <a:rPr lang="te-IN" sz="2400" dirty="0">
-                  <a:latin typeface="Ramabhadra" panose="02000600000000000000" pitchFamily="2" charset="0"/>
-                  <a:cs typeface="Ramabhadra" panose="02000600000000000000" pitchFamily="2" charset="0"/>
-                </a:rPr>
-                <a:t>నేనేమైయున్నా ఏ స్థితిలో ఉన్నా (2)</a:t>
-              </a:r>
+              <a:endParaRPr lang="te-IN" sz="2000" dirty="0">
+                <a:latin typeface="Ramabhadra" panose="02000600000000000000" pitchFamily="2" charset="0"/>
+                <a:cs typeface="Ramabhadra" panose="02000600000000000000" pitchFamily="2" charset="0"/>
+              </a:endParaRPr>
             </a:p>
             <a:p>
               <a:pPr>
@@ -3427,11 +3507,11 @@
                 </a:lnSpc>
               </a:pPr>
               <a:r>
-                <a:rPr lang="te-IN" sz="2400" dirty="0">
-                  <a:latin typeface="Ramabhadra" panose="02000600000000000000" pitchFamily="2" charset="0"/>
-                  <a:cs typeface="Ramabhadra" panose="02000600000000000000" pitchFamily="2" charset="0"/>
-                </a:rPr>
-                <a:t>ఇంకేమి కోరుకోనయ్యా (2)</a:t>
+                <a:rPr lang="te-IN" sz="2000" dirty="0">
+                  <a:latin typeface="Ramabhadra" panose="02000600000000000000" pitchFamily="2" charset="0"/>
+                  <a:cs typeface="Ramabhadra" panose="02000600000000000000" pitchFamily="2" charset="0"/>
+                </a:rPr>
+                <a:t>ఎన్ని కష్టాలు కలిగిననూ</a:t>
               </a:r>
             </a:p>
             <a:p>
@@ -3440,10 +3520,13 @@
                   <a:spcPts val="2600"/>
                 </a:lnSpc>
               </a:pPr>
-              <a:endParaRPr lang="te-IN" sz="2400" dirty="0">
-                <a:latin typeface="Ramabhadra" panose="02000600000000000000" pitchFamily="2" charset="0"/>
-                <a:cs typeface="Ramabhadra" panose="02000600000000000000" pitchFamily="2" charset="0"/>
-              </a:endParaRPr>
+              <a:r>
+                <a:rPr lang="te-IN" sz="2000" dirty="0">
+                  <a:latin typeface="Ramabhadra" panose="02000600000000000000" pitchFamily="2" charset="0"/>
+                  <a:cs typeface="Ramabhadra" panose="02000600000000000000" pitchFamily="2" charset="0"/>
+                </a:rPr>
+                <a:t>నన్ను కృంగించె భాదలెన్నో</a:t>
+              </a:r>
             </a:p>
             <a:p>
               <a:pPr>
@@ -3452,11 +3535,11 @@
                 </a:lnSpc>
               </a:pPr>
               <a:r>
-                <a:rPr lang="te-IN" sz="2400" dirty="0">
-                  <a:latin typeface="Ramabhadra" panose="02000600000000000000" pitchFamily="2" charset="0"/>
-                  <a:cs typeface="Ramabhadra" panose="02000600000000000000" pitchFamily="2" charset="0"/>
-                </a:rPr>
-                <a:t>ఆప్తులైన వారే హాని చేయచూసినా</a:t>
+                <a:rPr lang="te-IN" sz="2000" dirty="0">
+                  <a:latin typeface="Ramabhadra" panose="02000600000000000000" pitchFamily="2" charset="0"/>
+                  <a:cs typeface="Ramabhadra" panose="02000600000000000000" pitchFamily="2" charset="0"/>
+                </a:rPr>
+                <a:t>ఎన్ని నష్టాలు వాటిల్లినా </a:t>
               </a:r>
             </a:p>
             <a:p>
@@ -3466,11 +3549,11 @@
                 </a:lnSpc>
               </a:pPr>
               <a:r>
-                <a:rPr lang="te-IN" sz="2400" dirty="0">
-                  <a:latin typeface="Ramabhadra" panose="02000600000000000000" pitchFamily="2" charset="0"/>
-                  <a:cs typeface="Ramabhadra" panose="02000600000000000000" pitchFamily="2" charset="0"/>
-                </a:rPr>
-                <a:t>మిత్రులే నిలువకుండినా (2)</a:t>
+                <a:rPr lang="te-IN" sz="2000" dirty="0">
+                  <a:latin typeface="Ramabhadra" panose="02000600000000000000" pitchFamily="2" charset="0"/>
+                  <a:cs typeface="Ramabhadra" panose="02000600000000000000" pitchFamily="2" charset="0"/>
+                </a:rPr>
+                <a:t>ప్రియ ప్రభువే నా పరిహారి (2)        </a:t>
               </a:r>
             </a:p>
             <a:p>
@@ -3479,13 +3562,10 @@
                   <a:spcPts val="2600"/>
                 </a:lnSpc>
               </a:pPr>
-              <a:r>
-                <a:rPr lang="te-IN" sz="2400" dirty="0">
-                  <a:latin typeface="Ramabhadra" panose="02000600000000000000" pitchFamily="2" charset="0"/>
-                  <a:cs typeface="Ramabhadra" panose="02000600000000000000" pitchFamily="2" charset="0"/>
-                </a:rPr>
-                <a:t>న్యాయము తీర్చే నీవు నాకుంటే (2)</a:t>
-              </a:r>
+              <a:endParaRPr lang="te-IN" sz="2000" dirty="0">
+                <a:latin typeface="Ramabhadra" panose="02000600000000000000" pitchFamily="2" charset="0"/>
+                <a:cs typeface="Ramabhadra" panose="02000600000000000000" pitchFamily="2" charset="0"/>
+              </a:endParaRPr>
             </a:p>
             <a:p>
               <a:pPr>
@@ -3494,11 +3574,11 @@
                 </a:lnSpc>
               </a:pPr>
               <a:r>
-                <a:rPr lang="te-IN" sz="2400" dirty="0">
-                  <a:latin typeface="Ramabhadra" panose="02000600000000000000" pitchFamily="2" charset="0"/>
-                  <a:cs typeface="Ramabhadra" panose="02000600000000000000" pitchFamily="2" charset="0"/>
-                </a:rPr>
-                <a:t>చాలు యేసయ్యా (2)</a:t>
+                <a:rPr lang="te-IN" sz="2000" dirty="0">
+                  <a:latin typeface="Ramabhadra" panose="02000600000000000000" pitchFamily="2" charset="0"/>
+                  <a:cs typeface="Ramabhadra" panose="02000600000000000000" pitchFamily="2" charset="0"/>
+                </a:rPr>
+                <a:t>నన్ను సాతాను వెంబడించినా</a:t>
               </a:r>
             </a:p>
             <a:p>
@@ -3507,10 +3587,26 @@
                   <a:spcPts val="2600"/>
                 </a:lnSpc>
               </a:pPr>
-              <a:endParaRPr lang="te-IN" sz="2400" dirty="0">
-                <a:latin typeface="Ramabhadra" panose="02000600000000000000" pitchFamily="2" charset="0"/>
-                <a:cs typeface="Ramabhadra" panose="02000600000000000000" pitchFamily="2" charset="0"/>
-              </a:endParaRPr>
+              <a:r>
+                <a:rPr lang="te-IN" sz="2000" dirty="0">
+                  <a:latin typeface="Ramabhadra" panose="02000600000000000000" pitchFamily="2" charset="0"/>
+                  <a:cs typeface="Ramabhadra" panose="02000600000000000000" pitchFamily="2" charset="0"/>
+                </a:rPr>
+                <a:t>నన్ను శత్రువు ఎదిరించినా (2)</a:t>
+              </a:r>
+              <a:br>
+                <a:rPr lang="te-IN" sz="2000" dirty="0">
+                  <a:latin typeface="Ramabhadra" panose="02000600000000000000" pitchFamily="2" charset="0"/>
+                  <a:cs typeface="Ramabhadra" panose="02000600000000000000" pitchFamily="2" charset="0"/>
+                </a:rPr>
+              </a:br>
+              <a:r>
+                <a:rPr lang="te-IN" sz="2000" dirty="0">
+                  <a:latin typeface="Ramabhadra" panose="02000600000000000000" pitchFamily="2" charset="0"/>
+                  <a:cs typeface="Ramabhadra" panose="02000600000000000000" pitchFamily="2" charset="0"/>
+                </a:rPr>
+                <a:t>పలు నిందలు నను చుట్టినా</a:t>
+              </a:r>
             </a:p>
             <a:p>
               <a:pPr>
@@ -3519,11 +3615,11 @@
                 </a:lnSpc>
               </a:pPr>
               <a:r>
-                <a:rPr lang="te-IN" sz="2400" dirty="0">
-                  <a:latin typeface="Ramabhadra" panose="02000600000000000000" pitchFamily="2" charset="0"/>
-                  <a:cs typeface="Ramabhadra" panose="02000600000000000000" pitchFamily="2" charset="0"/>
-                </a:rPr>
-                <a:t>జ్ఞానమంత చూపి శక్తి ధారపోసినా</a:t>
+                <a:rPr lang="te-IN" sz="2000" dirty="0">
+                  <a:latin typeface="Ramabhadra" panose="02000600000000000000" pitchFamily="2" charset="0"/>
+                  <a:cs typeface="Ramabhadra" panose="02000600000000000000" pitchFamily="2" charset="0"/>
+                </a:rPr>
+                <a:t>ప్రియ ప్రభువే నా పరిహారి (2)          </a:t>
               </a:r>
             </a:p>
             <a:p>
@@ -3532,13 +3628,10 @@
                   <a:spcPts val="2600"/>
                 </a:lnSpc>
               </a:pPr>
-              <a:r>
-                <a:rPr lang="te-IN" sz="2400" dirty="0">
-                  <a:latin typeface="Ramabhadra" panose="02000600000000000000" pitchFamily="2" charset="0"/>
-                  <a:cs typeface="Ramabhadra" panose="02000600000000000000" pitchFamily="2" charset="0"/>
-                </a:rPr>
-                <a:t>నష్టమే మిగులుచుండినా (2)</a:t>
-              </a:r>
+              <a:endParaRPr lang="te-IN" sz="2000" dirty="0">
+                <a:latin typeface="Ramabhadra" panose="02000600000000000000" pitchFamily="2" charset="0"/>
+                <a:cs typeface="Ramabhadra" panose="02000600000000000000" pitchFamily="2" charset="0"/>
+              </a:endParaRPr>
             </a:p>
             <a:p>
               <a:pPr>
@@ -3547,11 +3640,11 @@
                 </a:lnSpc>
               </a:pPr>
               <a:r>
-                <a:rPr lang="te-IN" sz="2400" dirty="0">
-                  <a:latin typeface="Ramabhadra" panose="02000600000000000000" pitchFamily="2" charset="0"/>
-                  <a:cs typeface="Ramabhadra" panose="02000600000000000000" pitchFamily="2" charset="0"/>
-                </a:rPr>
-                <a:t>శాపము బాపే నీవు నాకుంటే (2)</a:t>
+                <a:rPr lang="te-IN" sz="2000" dirty="0">
+                  <a:latin typeface="Ramabhadra" panose="02000600000000000000" pitchFamily="2" charset="0"/>
+                  <a:cs typeface="Ramabhadra" panose="02000600000000000000" pitchFamily="2" charset="0"/>
+                </a:rPr>
+                <a:t>మణి మాన్యాలు లేకున్ననూ</a:t>
               </a:r>
             </a:p>
             <a:p>
@@ -3561,11 +3654,37 @@
                 </a:lnSpc>
               </a:pPr>
               <a:r>
-                <a:rPr lang="te-IN" sz="2400" dirty="0">
-                  <a:latin typeface="Ramabhadra" panose="02000600000000000000" pitchFamily="2" charset="0"/>
-                  <a:cs typeface="Ramabhadra" panose="02000600000000000000" pitchFamily="2" charset="0"/>
-                </a:rPr>
-                <a:t>చాలు యేసయ్యా (2)</a:t>
+                <a:rPr lang="te-IN" sz="2000" dirty="0">
+                  <a:latin typeface="Ramabhadra" panose="02000600000000000000" pitchFamily="2" charset="0"/>
+                  <a:cs typeface="Ramabhadra" panose="02000600000000000000" pitchFamily="2" charset="0"/>
+                </a:rPr>
+                <a:t>పలు వేదనలు వేధించినా (2)</a:t>
+              </a:r>
+              <a:br>
+                <a:rPr lang="te-IN" sz="2000" dirty="0">
+                  <a:latin typeface="Ramabhadra" panose="02000600000000000000" pitchFamily="2" charset="0"/>
+                  <a:cs typeface="Ramabhadra" panose="02000600000000000000" pitchFamily="2" charset="0"/>
+                </a:rPr>
+              </a:br>
+              <a:r>
+                <a:rPr lang="te-IN" sz="2000" dirty="0">
+                  <a:latin typeface="Ramabhadra" panose="02000600000000000000" pitchFamily="2" charset="0"/>
+                  <a:cs typeface="Ramabhadra" panose="02000600000000000000" pitchFamily="2" charset="0"/>
+                </a:rPr>
+                <a:t>నరులెల్లరు నను విడచినా</a:t>
+              </a:r>
+              <a:br>
+                <a:rPr lang="te-IN" sz="2000" dirty="0">
+                  <a:latin typeface="Ramabhadra" panose="02000600000000000000" pitchFamily="2" charset="0"/>
+                  <a:cs typeface="Ramabhadra" panose="02000600000000000000" pitchFamily="2" charset="0"/>
+                </a:rPr>
+              </a:br>
+              <a:r>
+                <a:rPr lang="te-IN" sz="2000" dirty="0">
+                  <a:latin typeface="Ramabhadra" panose="02000600000000000000" pitchFamily="2" charset="0"/>
+                  <a:cs typeface="Ramabhadra" panose="02000600000000000000" pitchFamily="2" charset="0"/>
+                </a:rPr>
+                <a:t>ప్రియ ప్రభువే నా పరిహారి (2)         </a:t>
               </a:r>
             </a:p>
           </p:txBody>
@@ -3685,7 +3804,7 @@
                   <a:schemeClr val="tx1"/>
                 </a:solidFill>
               </a:rPr>
-              <a:t>05042025</a:t>
+              <a:t>130425</a:t>
             </a:r>
           </a:p>
         </p:txBody>
@@ -3742,7 +3861,7 @@
                   <a:schemeClr val="tx1"/>
                 </a:solidFill>
               </a:rPr>
-              <a:t>05042025</a:t>
+              <a:t>130425</a:t>
             </a:r>
           </a:p>
         </p:txBody>
@@ -3792,9 +3911,9 @@
         <p:grpSpPr>
           <a:xfrm>
             <a:off x="160868" y="182032"/>
-            <a:ext cx="4751921" cy="6493935"/>
+            <a:ext cx="4792132" cy="6493935"/>
             <a:chOff x="160868" y="182032"/>
-            <a:chExt cx="4751921" cy="6493935"/>
+            <a:chExt cx="4792132" cy="6493935"/>
           </a:xfrm>
         </p:grpSpPr>
         <p:sp>
@@ -3866,8 +3985,8 @@
           </p:nvSpPr>
           <p:spPr>
             <a:xfrm>
-              <a:off x="271993" y="354076"/>
-              <a:ext cx="4640796" cy="5355312"/>
+              <a:off x="312204" y="335843"/>
+              <a:ext cx="4640796" cy="6186309"/>
             </a:xfrm>
             <a:prstGeom prst="rect">
               <a:avLst/>
@@ -3884,13 +4003,44 @@
                 <a:defRPr/>
               </a:pPr>
               <a:r>
-                <a:rPr lang="te-IN" sz="1900" dirty="0">
-                  <a:latin typeface="Ramabhadra" panose="02000600000000000000" pitchFamily="2" charset="0"/>
-                  <a:cs typeface="Ramabhadra" panose="02000600000000000000" pitchFamily="2" charset="0"/>
-                </a:rPr>
-                <a:t>అన్ని నామముల కన్న పై నామము</a:t>
-              </a:r>
-              <a:endParaRPr lang="en-IN" sz="1900" dirty="0">
+                <a:rPr lang="te-IN" sz="2200" dirty="0">
+                  <a:latin typeface="Ramabhadra" panose="02000600000000000000" pitchFamily="2" charset="0"/>
+                  <a:cs typeface="Ramabhadra" panose="02000600000000000000" pitchFamily="2" charset="0"/>
+                </a:rPr>
+                <a:t>శాశ్వతమైనది నీవు నాయెడ చూపిన కృప</a:t>
+              </a:r>
+              <a:br>
+                <a:rPr lang="te-IN" sz="2200" dirty="0">
+                  <a:latin typeface="Ramabhadra" panose="02000600000000000000" pitchFamily="2" charset="0"/>
+                  <a:cs typeface="Ramabhadra" panose="02000600000000000000" pitchFamily="2" charset="0"/>
+                </a:rPr>
+              </a:br>
+              <a:r>
+                <a:rPr lang="te-IN" sz="2200" dirty="0">
+                  <a:latin typeface="Ramabhadra" panose="02000600000000000000" pitchFamily="2" charset="0"/>
+                  <a:cs typeface="Ramabhadra" panose="02000600000000000000" pitchFamily="2" charset="0"/>
+                </a:rPr>
+                <a:t>అనుక్షణం నను కనుపాపవలె (2)</a:t>
+              </a:r>
+              <a:br>
+                <a:rPr lang="te-IN" sz="2200" dirty="0">
+                  <a:latin typeface="Ramabhadra" panose="02000600000000000000" pitchFamily="2" charset="0"/>
+                  <a:cs typeface="Ramabhadra" panose="02000600000000000000" pitchFamily="2" charset="0"/>
+                </a:rPr>
+              </a:br>
+              <a:r>
+                <a:rPr lang="te-IN" sz="2200" dirty="0">
+                  <a:latin typeface="Ramabhadra" panose="02000600000000000000" pitchFamily="2" charset="0"/>
+                  <a:cs typeface="Ramabhadra" panose="02000600000000000000" pitchFamily="2" charset="0"/>
+                </a:rPr>
+                <a:t>కాచిన కృప</a:t>
+              </a:r>
+            </a:p>
+            <a:p>
+              <a:pPr defTabSz="439781">
+                <a:defRPr/>
+              </a:pPr>
+              <a:endParaRPr lang="te-IN" sz="2200" dirty="0">
                 <a:latin typeface="Ramabhadra" panose="02000600000000000000" pitchFamily="2" charset="0"/>
                 <a:cs typeface="Ramabhadra" panose="02000600000000000000" pitchFamily="2" charset="0"/>
               </a:endParaRPr>
@@ -3900,26 +4050,55 @@
                 <a:defRPr/>
               </a:pPr>
               <a:r>
-                <a:rPr lang="te-IN" sz="1900" dirty="0">
-                  <a:latin typeface="Ramabhadra" panose="02000600000000000000" pitchFamily="2" charset="0"/>
-                  <a:cs typeface="Ramabhadra" panose="02000600000000000000" pitchFamily="2" charset="0"/>
-                </a:rPr>
-                <a:t>యేసుని నామము</a:t>
+                <a:rPr lang="te-IN" sz="2200" dirty="0">
+                  <a:latin typeface="Ramabhadra" panose="02000600000000000000" pitchFamily="2" charset="0"/>
+                  <a:cs typeface="Ramabhadra" panose="02000600000000000000" pitchFamily="2" charset="0"/>
+                </a:rPr>
+                <a:t>నీకు బహుదూరమైన నన్ను</a:t>
+              </a:r>
+            </a:p>
+            <a:p>
+              <a:pPr defTabSz="439781">
+                <a:defRPr/>
+              </a:pPr>
+              <a:r>
+                <a:rPr lang="te-IN" sz="2200" dirty="0">
+                  <a:latin typeface="Ramabhadra" panose="02000600000000000000" pitchFamily="2" charset="0"/>
+                  <a:cs typeface="Ramabhadra" panose="02000600000000000000" pitchFamily="2" charset="0"/>
+                </a:rPr>
+                <a:t>చేరదీసిన నా తండ్రివి (2)</a:t>
               </a:r>
               <a:br>
-                <a:rPr lang="te-IN" sz="1900" dirty="0">
+                <a:rPr lang="te-IN" sz="2200" dirty="0">
                   <a:latin typeface="Ramabhadra" panose="02000600000000000000" pitchFamily="2" charset="0"/>
                   <a:cs typeface="Ramabhadra" panose="02000600000000000000" pitchFamily="2" charset="0"/>
                 </a:rPr>
               </a:br>
               <a:r>
-                <a:rPr lang="te-IN" sz="1900" dirty="0">
-                  <a:latin typeface="Ramabhadra" panose="02000600000000000000" pitchFamily="2" charset="0"/>
-                  <a:cs typeface="Ramabhadra" panose="02000600000000000000" pitchFamily="2" charset="0"/>
-                </a:rPr>
-                <a:t>ఎన్ని తరములకైనా ఘనపరచ దగినది</a:t>
-              </a:r>
-              <a:endParaRPr lang="en-IN" sz="1900" dirty="0">
+                <a:rPr lang="te-IN" sz="2200" dirty="0">
+                  <a:latin typeface="Ramabhadra" panose="02000600000000000000" pitchFamily="2" charset="0"/>
+                  <a:cs typeface="Ramabhadra" panose="02000600000000000000" pitchFamily="2" charset="0"/>
+                </a:rPr>
+                <a:t>నిత్య సుఖశాంతియే</a:t>
+              </a:r>
+            </a:p>
+            <a:p>
+              <a:pPr defTabSz="439781">
+                <a:defRPr/>
+              </a:pPr>
+              <a:r>
+                <a:rPr lang="te-IN" sz="2200" dirty="0">
+                  <a:latin typeface="Ramabhadra" panose="02000600000000000000" pitchFamily="2" charset="0"/>
+                  <a:cs typeface="Ramabhadra" panose="02000600000000000000" pitchFamily="2" charset="0"/>
+                </a:rPr>
+                <a:t>నాకు నీదు కౌగిలిలో (2)</a:t>
+              </a:r>
+            </a:p>
+            <a:p>
+              <a:pPr defTabSz="439781">
+                <a:defRPr/>
+              </a:pPr>
+              <a:endParaRPr lang="te-IN" sz="2200" dirty="0">
                 <a:latin typeface="Ramabhadra" panose="02000600000000000000" pitchFamily="2" charset="0"/>
                 <a:cs typeface="Ramabhadra" panose="02000600000000000000" pitchFamily="2" charset="0"/>
               </a:endParaRPr>
@@ -3929,11 +4108,11 @@
                 <a:defRPr/>
               </a:pPr>
               <a:r>
-                <a:rPr lang="te-IN" sz="1900" dirty="0">
-                  <a:latin typeface="Ramabhadra" panose="02000600000000000000" pitchFamily="2" charset="0"/>
-                  <a:cs typeface="Ramabhadra" panose="02000600000000000000" pitchFamily="2" charset="0"/>
-                </a:rPr>
-                <a:t>క్రీస్తేసు నామము (2)</a:t>
+                <a:rPr lang="te-IN" sz="2200" dirty="0">
+                  <a:latin typeface="Ramabhadra" panose="02000600000000000000" pitchFamily="2" charset="0"/>
+                  <a:cs typeface="Ramabhadra" panose="02000600000000000000" pitchFamily="2" charset="0"/>
+                </a:rPr>
+                <a:t>తల్లి తన బిడ్డలను మరచినా</a:t>
               </a:r>
             </a:p>
             <a:p>
@@ -3941,13 +4120,43 @@
                 <a:defRPr/>
               </a:pPr>
               <a:r>
-                <a:rPr lang="te-IN" sz="1900" dirty="0">
-                  <a:latin typeface="Ramabhadra" panose="02000600000000000000" pitchFamily="2" charset="0"/>
-                  <a:cs typeface="Ramabhadra" panose="02000600000000000000" pitchFamily="2" charset="0"/>
-                </a:rPr>
-                <a:t>యేసు నామము జయం జయము –</a:t>
-              </a:r>
-              <a:endParaRPr lang="en-IN" sz="1900" dirty="0">
+                <a:rPr lang="te-IN" sz="2200" dirty="0">
+                  <a:latin typeface="Ramabhadra" panose="02000600000000000000" pitchFamily="2" charset="0"/>
+                  <a:cs typeface="Ramabhadra" panose="02000600000000000000" pitchFamily="2" charset="0"/>
+                </a:rPr>
+                <a:t>నేను మరువలేనంటివే (2)</a:t>
+              </a:r>
+              <a:br>
+                <a:rPr lang="te-IN" sz="2200" dirty="0">
+                  <a:latin typeface="Ramabhadra" panose="02000600000000000000" pitchFamily="2" charset="0"/>
+                  <a:cs typeface="Ramabhadra" panose="02000600000000000000" pitchFamily="2" charset="0"/>
+                </a:rPr>
+              </a:br>
+              <a:r>
+                <a:rPr lang="te-IN" sz="2200" dirty="0">
+                  <a:latin typeface="Ramabhadra" panose="02000600000000000000" pitchFamily="2" charset="0"/>
+                  <a:cs typeface="Ramabhadra" panose="02000600000000000000" pitchFamily="2" charset="0"/>
+                </a:rPr>
+                <a:t>నీదు ముఖకాంతియే</a:t>
+              </a:r>
+            </a:p>
+            <a:p>
+              <a:pPr defTabSz="439781">
+                <a:defRPr/>
+              </a:pPr>
+              <a:r>
+                <a:rPr lang="te-IN" sz="2200" dirty="0">
+                  <a:latin typeface="Ramabhadra" panose="02000600000000000000" pitchFamily="2" charset="0"/>
+                  <a:cs typeface="Ramabhadra" panose="02000600000000000000" pitchFamily="2" charset="0"/>
+                </a:rPr>
+                <a:t>నన్ను ఆదరించెనులే (2)</a:t>
+              </a:r>
+            </a:p>
+            <a:p>
+              <a:pPr defTabSz="439781">
+                <a:defRPr/>
+              </a:pPr>
+              <a:endParaRPr lang="te-IN" sz="2200" dirty="0">
                 <a:latin typeface="Ramabhadra" panose="02000600000000000000" pitchFamily="2" charset="0"/>
                 <a:cs typeface="Ramabhadra" panose="02000600000000000000" pitchFamily="2" charset="0"/>
               </a:endParaRPr>
@@ -3957,158 +4166,48 @@
                 <a:defRPr/>
               </a:pPr>
               <a:r>
-                <a:rPr lang="te-IN" sz="1900" dirty="0">
-                  <a:latin typeface="Ramabhadra" panose="02000600000000000000" pitchFamily="2" charset="0"/>
-                  <a:cs typeface="Ramabhadra" panose="02000600000000000000" pitchFamily="2" charset="0"/>
-                </a:rPr>
-                <a:t>సాతాను శక్తుల్ లయం లయము (2)</a:t>
-              </a:r>
-              <a:br>
-                <a:rPr lang="te-IN" sz="1900" dirty="0">
-                  <a:latin typeface="Ramabhadra" panose="02000600000000000000" pitchFamily="2" charset="0"/>
-                  <a:cs typeface="Ramabhadra" panose="02000600000000000000" pitchFamily="2" charset="0"/>
-                </a:rPr>
-              </a:br>
-              <a:r>
-                <a:rPr lang="te-IN" sz="1900" dirty="0">
-                  <a:latin typeface="Ramabhadra" panose="02000600000000000000" pitchFamily="2" charset="0"/>
-                  <a:cs typeface="Ramabhadra" panose="02000600000000000000" pitchFamily="2" charset="0"/>
-                </a:rPr>
-                <a:t>హల్లెలూయ హోసన్న హల్లెలూయా -</a:t>
-              </a:r>
-              <a:endParaRPr lang="en-IN" sz="1900" dirty="0">
-                <a:latin typeface="Ramabhadra" panose="02000600000000000000" pitchFamily="2" charset="0"/>
-                <a:cs typeface="Ramabhadra" panose="02000600000000000000" pitchFamily="2" charset="0"/>
-              </a:endParaRPr>
+                <a:rPr lang="te-IN" sz="2200" dirty="0">
+                  <a:latin typeface="Ramabhadra" panose="02000600000000000000" pitchFamily="2" charset="0"/>
+                  <a:cs typeface="Ramabhadra" panose="02000600000000000000" pitchFamily="2" charset="0"/>
+                </a:rPr>
+                <a:t>పర్వతములు తొలగినను</a:t>
+              </a:r>
             </a:p>
             <a:p>
               <a:pPr defTabSz="439781">
                 <a:defRPr/>
               </a:pPr>
               <a:r>
-                <a:rPr lang="te-IN" sz="1900" dirty="0">
-                  <a:latin typeface="Ramabhadra" panose="02000600000000000000" pitchFamily="2" charset="0"/>
-                  <a:cs typeface="Ramabhadra" panose="02000600000000000000" pitchFamily="2" charset="0"/>
-                </a:rPr>
-                <a:t>హల్లెలూయా ఆమెన్ (2)</a:t>
+                <a:rPr lang="te-IN" sz="2200" dirty="0">
+                  <a:latin typeface="Ramabhadra" panose="02000600000000000000" pitchFamily="2" charset="0"/>
+                  <a:cs typeface="Ramabhadra" panose="02000600000000000000" pitchFamily="2" charset="0"/>
+                </a:rPr>
+                <a:t>మెట్టలు తత్తరిల్లిన (2)</a:t>
+              </a:r>
+              <a:br>
+                <a:rPr lang="te-IN" sz="2200" dirty="0">
+                  <a:latin typeface="Ramabhadra" panose="02000600000000000000" pitchFamily="2" charset="0"/>
+                  <a:cs typeface="Ramabhadra" panose="02000600000000000000" pitchFamily="2" charset="0"/>
+                </a:rPr>
+              </a:br>
+              <a:r>
+                <a:rPr lang="te-IN" sz="2200" dirty="0">
+                  <a:latin typeface="Ramabhadra" panose="02000600000000000000" pitchFamily="2" charset="0"/>
+                  <a:cs typeface="Ramabhadra" panose="02000600000000000000" pitchFamily="2" charset="0"/>
+                </a:rPr>
+                <a:t>నా కృప నిను వీడదని</a:t>
               </a:r>
             </a:p>
             <a:p>
               <a:pPr defTabSz="439781">
                 <a:defRPr/>
               </a:pPr>
-              <a:endParaRPr lang="te-IN" sz="1900" dirty="0">
-                <a:latin typeface="Ramabhadra" panose="02000600000000000000" pitchFamily="2" charset="0"/>
-                <a:cs typeface="Ramabhadra" panose="02000600000000000000" pitchFamily="2" charset="0"/>
-              </a:endParaRPr>
-            </a:p>
-            <a:p>
-              <a:pPr defTabSz="439781">
-                <a:defRPr/>
-              </a:pPr>
-              <a:r>
-                <a:rPr lang="te-IN" sz="1900" dirty="0">
-                  <a:latin typeface="Ramabhadra" panose="02000600000000000000" pitchFamily="2" charset="0"/>
-                  <a:cs typeface="Ramabhadra" panose="02000600000000000000" pitchFamily="2" charset="0"/>
-                </a:rPr>
-                <a:t>పాపముల నుండి విడిపించును </a:t>
-              </a:r>
-            </a:p>
-            <a:p>
-              <a:pPr defTabSz="439781">
-                <a:defRPr/>
-              </a:pPr>
-              <a:r>
-                <a:rPr lang="te-IN" sz="1900" dirty="0">
-                  <a:latin typeface="Ramabhadra" panose="02000600000000000000" pitchFamily="2" charset="0"/>
-                  <a:cs typeface="Ramabhadra" panose="02000600000000000000" pitchFamily="2" charset="0"/>
-                </a:rPr>
-                <a:t>యేసుని నామము (2)</a:t>
-              </a:r>
-              <a:br>
-                <a:rPr lang="te-IN" sz="1900" dirty="0">
-                  <a:latin typeface="Ramabhadra" panose="02000600000000000000" pitchFamily="2" charset="0"/>
-                  <a:cs typeface="Ramabhadra" panose="02000600000000000000" pitchFamily="2" charset="0"/>
-                </a:rPr>
-              </a:br>
-              <a:r>
-                <a:rPr lang="te-IN" sz="1900" dirty="0">
-                  <a:latin typeface="Ramabhadra" panose="02000600000000000000" pitchFamily="2" charset="0"/>
-                  <a:cs typeface="Ramabhadra" panose="02000600000000000000" pitchFamily="2" charset="0"/>
-                </a:rPr>
-                <a:t>నిత్య నరకాగ్నిలో నుండి రక్షించును </a:t>
-              </a:r>
-            </a:p>
-            <a:p>
-              <a:pPr defTabSz="439781">
-                <a:defRPr/>
-              </a:pPr>
-              <a:r>
-                <a:rPr lang="te-IN" sz="1900" dirty="0">
-                  <a:latin typeface="Ramabhadra" panose="02000600000000000000" pitchFamily="2" charset="0"/>
-                  <a:cs typeface="Ramabhadra" panose="02000600000000000000" pitchFamily="2" charset="0"/>
-                </a:rPr>
-                <a:t>క్రీస్తేసు నామము (2) </a:t>
-              </a:r>
-            </a:p>
-            <a:p>
-              <a:pPr defTabSz="439781">
-                <a:defRPr/>
-              </a:pPr>
-              <a:endParaRPr lang="te-IN" sz="1900" dirty="0">
-                <a:latin typeface="Ramabhadra" panose="02000600000000000000" pitchFamily="2" charset="0"/>
-                <a:cs typeface="Ramabhadra" panose="02000600000000000000" pitchFamily="2" charset="0"/>
-              </a:endParaRPr>
-            </a:p>
-            <a:p>
-              <a:pPr defTabSz="439781">
-                <a:defRPr/>
-              </a:pPr>
-              <a:r>
-                <a:rPr lang="te-IN" sz="1900" dirty="0">
-                  <a:latin typeface="Ramabhadra" panose="02000600000000000000" pitchFamily="2" charset="0"/>
-                  <a:cs typeface="Ramabhadra" panose="02000600000000000000" pitchFamily="2" charset="0"/>
-                </a:rPr>
-                <a:t>సాతాను పై అధికారమిచ్చును</a:t>
-              </a:r>
-              <a:br>
-                <a:rPr lang="te-IN" sz="1900" dirty="0">
-                  <a:latin typeface="Ramabhadra" panose="02000600000000000000" pitchFamily="2" charset="0"/>
-                  <a:cs typeface="Ramabhadra" panose="02000600000000000000" pitchFamily="2" charset="0"/>
-                </a:rPr>
-              </a:br>
-              <a:r>
-                <a:rPr lang="te-IN" sz="1900" dirty="0">
-                  <a:latin typeface="Ramabhadra" panose="02000600000000000000" pitchFamily="2" charset="0"/>
-                  <a:cs typeface="Ramabhadra" panose="02000600000000000000" pitchFamily="2" charset="0"/>
-                </a:rPr>
-                <a:t>శక్తిగలిగిన యేసు నామము (2)</a:t>
-              </a:r>
-              <a:br>
-                <a:rPr lang="te-IN" sz="1900" dirty="0">
-                  <a:latin typeface="Ramabhadra" panose="02000600000000000000" pitchFamily="2" charset="0"/>
-                  <a:cs typeface="Ramabhadra" panose="02000600000000000000" pitchFamily="2" charset="0"/>
-                </a:rPr>
-              </a:br>
-              <a:r>
-                <a:rPr lang="te-IN" sz="1900" dirty="0">
-                  <a:latin typeface="Ramabhadra" panose="02000600000000000000" pitchFamily="2" charset="0"/>
-                  <a:cs typeface="Ramabhadra" panose="02000600000000000000" pitchFamily="2" charset="0"/>
-                </a:rPr>
-                <a:t>శత్రు సమూహము పై జయమునిచ్చును</a:t>
-              </a:r>
-              <a:br>
-                <a:rPr lang="te-IN" sz="1900" dirty="0">
-                  <a:latin typeface="Ramabhadra" panose="02000600000000000000" pitchFamily="2" charset="0"/>
-                  <a:cs typeface="Ramabhadra" panose="02000600000000000000" pitchFamily="2" charset="0"/>
-                </a:rPr>
-              </a:br>
-              <a:r>
-                <a:rPr lang="te-IN" sz="1900" dirty="0">
-                  <a:latin typeface="Ramabhadra" panose="02000600000000000000" pitchFamily="2" charset="0"/>
-                  <a:cs typeface="Ramabhadra" panose="02000600000000000000" pitchFamily="2" charset="0"/>
-                </a:rPr>
-                <a:t>జయశీలుడైన యేసు నామము (2) </a:t>
+              <a:r>
+                <a:rPr lang="te-IN" sz="2200" dirty="0">
+                  <a:latin typeface="Ramabhadra" panose="02000600000000000000" pitchFamily="2" charset="0"/>
+                  <a:cs typeface="Ramabhadra" panose="02000600000000000000" pitchFamily="2" charset="0"/>
+                </a:rPr>
+                <a:t>అభయమిచ్చితివే (2)</a:t>
               </a:r>
             </a:p>
           </p:txBody>
@@ -4191,9 +4290,9 @@
         <p:grpSpPr>
           <a:xfrm>
             <a:off x="5104338" y="182031"/>
-            <a:ext cx="4853522" cy="6493935"/>
+            <a:ext cx="4893733" cy="6493935"/>
             <a:chOff x="160868" y="182032"/>
-            <a:chExt cx="4853522" cy="6493935"/>
+            <a:chExt cx="4893733" cy="6493935"/>
           </a:xfrm>
         </p:grpSpPr>
         <p:sp>
@@ -4265,8 +4364,8 @@
           </p:nvSpPr>
           <p:spPr>
             <a:xfrm>
-              <a:off x="264589" y="710693"/>
-              <a:ext cx="4749801" cy="5501506"/>
+              <a:off x="304800" y="357760"/>
+              <a:ext cx="4749801" cy="5940088"/>
             </a:xfrm>
             <a:prstGeom prst="rect">
               <a:avLst/>
@@ -4281,56 +4380,46 @@
             <a:p>
               <a:pPr defTabSz="439781"/>
               <a:r>
-                <a:rPr lang="te-IN" sz="1850" dirty="0">
-                  <a:latin typeface="Ramabhadra" panose="02000600000000000000" pitchFamily="2" charset="0"/>
-                  <a:cs typeface="Ramabhadra" panose="02000600000000000000" pitchFamily="2" charset="0"/>
-                </a:rPr>
-                <a:t>స్తుతి పాడుటకే బ్రతికించిన – జీవనదాతవు నీవేనయ్యా</a:t>
+                <a:rPr lang="te-IN" sz="2000" dirty="0">
+                  <a:latin typeface="Ramabhadra" panose="02000600000000000000" pitchFamily="2" charset="0"/>
+                  <a:cs typeface="Ramabhadra" panose="02000600000000000000" pitchFamily="2" charset="0"/>
+                </a:rPr>
+                <a:t>నా స్తుతుల పైన నివసించువాడా</a:t>
               </a:r>
             </a:p>
             <a:p>
               <a:pPr defTabSz="439781"/>
               <a:r>
-                <a:rPr lang="te-IN" sz="1850" dirty="0">
-                  <a:latin typeface="Ramabhadra" panose="02000600000000000000" pitchFamily="2" charset="0"/>
-                  <a:cs typeface="Ramabhadra" panose="02000600000000000000" pitchFamily="2" charset="0"/>
-                </a:rPr>
-                <a:t>ఇన్నాళ్లుగా నను పోషించిన – తల్లివలె నను ఓదార్చిన</a:t>
+                <a:rPr lang="te-IN" sz="2000" dirty="0">
+                  <a:latin typeface="Ramabhadra" panose="02000600000000000000" pitchFamily="2" charset="0"/>
+                  <a:cs typeface="Ramabhadra" panose="02000600000000000000" pitchFamily="2" charset="0"/>
+                </a:rPr>
+                <a:t>నా అంతరంగికుడా యేసయ్యా (2)</a:t>
               </a:r>
             </a:p>
             <a:p>
               <a:pPr defTabSz="439781"/>
               <a:r>
-                <a:rPr lang="te-IN" sz="1850" dirty="0">
-                  <a:latin typeface="Ramabhadra" panose="02000600000000000000" pitchFamily="2" charset="0"/>
-                  <a:cs typeface="Ramabhadra" panose="02000600000000000000" pitchFamily="2" charset="0"/>
-                </a:rPr>
-                <a:t>నీ ప్రేమ నాపై ఎన్నడు మారదు యేసయ్యా (2)</a:t>
+                <a:rPr lang="te-IN" sz="2000" dirty="0">
+                  <a:latin typeface="Ramabhadra" panose="02000600000000000000" pitchFamily="2" charset="0"/>
+                  <a:cs typeface="Ramabhadra" panose="02000600000000000000" pitchFamily="2" charset="0"/>
+                </a:rPr>
+                <a:t>నీవు నా పక్షమై యున్నావు గనుకే</a:t>
               </a:r>
             </a:p>
             <a:p>
               <a:pPr defTabSz="439781"/>
               <a:r>
-                <a:rPr lang="te-IN" sz="1850" dirty="0">
-                  <a:latin typeface="Ramabhadra" panose="02000600000000000000" pitchFamily="2" charset="0"/>
-                  <a:cs typeface="Ramabhadra" panose="02000600000000000000" pitchFamily="2" charset="0"/>
-                </a:rPr>
-                <a:t>జీవితకాలమంతా ఆధారం నీవేనయ్యా</a:t>
+                <a:rPr lang="te-IN" sz="2000" dirty="0">
+                  <a:latin typeface="Ramabhadra" panose="02000600000000000000" pitchFamily="2" charset="0"/>
+                  <a:cs typeface="Ramabhadra" panose="02000600000000000000" pitchFamily="2" charset="0"/>
+                </a:rPr>
+                <a:t>జయమే జయమే ఎల్లవేళలా జయమే (2)</a:t>
               </a:r>
             </a:p>
             <a:p>
               <a:pPr defTabSz="439781"/>
-              <a:r>
-                <a:rPr lang="te-IN" sz="1850" dirty="0">
-                  <a:latin typeface="Ramabhadra" panose="02000600000000000000" pitchFamily="2" charset="0"/>
-                  <a:cs typeface="Ramabhadra" panose="02000600000000000000" pitchFamily="2" charset="0"/>
-                </a:rPr>
-                <a:t>నా జీవితకాలమంతా ఆరాధించి ఘనపరతును</a:t>
-              </a:r>
-            </a:p>
-            <a:p>
-              <a:pPr defTabSz="439781"/>
-              <a:endParaRPr lang="te-IN" sz="1850" dirty="0">
+              <a:endParaRPr lang="te-IN" sz="2000" dirty="0">
                 <a:latin typeface="Ramabhadra" panose="02000600000000000000" pitchFamily="2" charset="0"/>
                 <a:cs typeface="Ramabhadra" panose="02000600000000000000" pitchFamily="2" charset="0"/>
               </a:endParaRPr>
@@ -4338,13 +4427,46 @@
             <a:p>
               <a:pPr defTabSz="439781"/>
               <a:r>
-                <a:rPr lang="te-IN" sz="1850" dirty="0">
-                  <a:latin typeface="Ramabhadra" panose="02000600000000000000" pitchFamily="2" charset="0"/>
-                  <a:cs typeface="Ramabhadra" panose="02000600000000000000" pitchFamily="2" charset="0"/>
-                </a:rPr>
-                <a:t>ప్రాణభయమును తొలగించినావు –</a:t>
-              </a:r>
-              <a:endParaRPr lang="en-IN" sz="1850" dirty="0">
+                <a:rPr lang="te-IN" sz="2000" dirty="0">
+                  <a:latin typeface="Ramabhadra" panose="02000600000000000000" pitchFamily="2" charset="0"/>
+                  <a:cs typeface="Ramabhadra" panose="02000600000000000000" pitchFamily="2" charset="0"/>
+                </a:rPr>
+                <a:t>నన్ను నిర్మించిన రీతి తలచగా - ఎంతో ఆశ్చర్యమే</a:t>
+              </a:r>
+            </a:p>
+            <a:p>
+              <a:pPr defTabSz="439781"/>
+              <a:r>
+                <a:rPr lang="te-IN" sz="2000" dirty="0">
+                  <a:latin typeface="Ramabhadra" panose="02000600000000000000" pitchFamily="2" charset="0"/>
+                  <a:cs typeface="Ramabhadra" panose="02000600000000000000" pitchFamily="2" charset="0"/>
+                </a:rPr>
+                <a:t>అది నా ఊహకే వింతైనది (2)</a:t>
+              </a:r>
+            </a:p>
+            <a:p>
+              <a:pPr defTabSz="439781"/>
+              <a:r>
+                <a:rPr lang="te-IN" sz="2000" dirty="0">
+                  <a:latin typeface="Ramabhadra" panose="02000600000000000000" pitchFamily="2" charset="0"/>
+                  <a:cs typeface="Ramabhadra" panose="02000600000000000000" pitchFamily="2" charset="0"/>
+                </a:rPr>
+                <a:t>ఎరుపెక్కిన శత్రువుల చూపు నుండి తప్పించి</a:t>
+              </a:r>
+            </a:p>
+            <a:p>
+              <a:pPr defTabSz="439781"/>
+              <a:r>
+                <a:rPr lang="te-IN" sz="2000" dirty="0">
+                  <a:latin typeface="Ramabhadra" panose="02000600000000000000" pitchFamily="2" charset="0"/>
+                  <a:cs typeface="Ramabhadra" panose="02000600000000000000" pitchFamily="2" charset="0"/>
+                </a:rPr>
+                <a:t>ఎనలేని ప్రేమను నాపై కురిపించావు (2)</a:t>
+              </a:r>
+            </a:p>
+            <a:p>
+              <a:pPr defTabSz="439781"/>
+              <a:endParaRPr lang="te-IN" sz="2000" dirty="0">
                 <a:latin typeface="Ramabhadra" panose="02000600000000000000" pitchFamily="2" charset="0"/>
                 <a:cs typeface="Ramabhadra" panose="02000600000000000000" pitchFamily="2" charset="0"/>
               </a:endParaRPr>
@@ -4352,23 +4474,46 @@
             <a:p>
               <a:pPr defTabSz="439781"/>
               <a:r>
-                <a:rPr lang="te-IN" sz="1850" dirty="0">
-                  <a:latin typeface="Ramabhadra" panose="02000600000000000000" pitchFamily="2" charset="0"/>
-                  <a:cs typeface="Ramabhadra" panose="02000600000000000000" pitchFamily="2" charset="0"/>
-                </a:rPr>
-                <a:t>ప్రాకారములను స్థాపించినావు</a:t>
+                <a:rPr lang="te-IN" sz="2000" dirty="0">
+                  <a:latin typeface="Ramabhadra" panose="02000600000000000000" pitchFamily="2" charset="0"/>
+                  <a:cs typeface="Ramabhadra" panose="02000600000000000000" pitchFamily="2" charset="0"/>
+                </a:rPr>
+                <a:t>ద్రాక్షావల్లి అయిన నీలోనే - బహుగా వేరు పారగా</a:t>
               </a:r>
             </a:p>
             <a:p>
               <a:pPr defTabSz="439781"/>
               <a:r>
-                <a:rPr lang="te-IN" sz="1850" dirty="0">
-                  <a:latin typeface="Ramabhadra" panose="02000600000000000000" pitchFamily="2" charset="0"/>
-                  <a:cs typeface="Ramabhadra" panose="02000600000000000000" pitchFamily="2" charset="0"/>
-                </a:rPr>
-                <a:t>సర్వజనులలో నీ మహిమ వివరింప</a:t>
-              </a:r>
-              <a:endParaRPr lang="en-IN" sz="1850" dirty="0">
+                <a:rPr lang="te-IN" sz="2000" dirty="0">
+                  <a:latin typeface="Ramabhadra" panose="02000600000000000000" pitchFamily="2" charset="0"/>
+                  <a:cs typeface="Ramabhadra" panose="02000600000000000000" pitchFamily="2" charset="0"/>
+                </a:rPr>
+                <a:t>నీతో మధురమైన ఫలములీయనా (2)</a:t>
+              </a:r>
+            </a:p>
+            <a:p>
+              <a:pPr defTabSz="439781"/>
+              <a:r>
+                <a:rPr lang="te-IN" sz="2000" dirty="0">
+                  <a:latin typeface="Ramabhadra" panose="02000600000000000000" pitchFamily="2" charset="0"/>
+                  <a:cs typeface="Ramabhadra" panose="02000600000000000000" pitchFamily="2" charset="0"/>
+                </a:rPr>
+                <a:t>ఉన్నత స్థలములపై నాకు స్థానమిచ్చితివే</a:t>
+              </a:r>
+            </a:p>
+            <a:p>
+              <a:pPr defTabSz="439781"/>
+              <a:r>
+                <a:rPr lang="te-IN" sz="2000" dirty="0">
+                  <a:latin typeface="Ramabhadra" panose="02000600000000000000" pitchFamily="2" charset="0"/>
+                  <a:cs typeface="Ramabhadra" panose="02000600000000000000" pitchFamily="2" charset="0"/>
+                </a:rPr>
+                <a:t>విజయుడా నీ కృప చాలును నా జీవితాన (2)</a:t>
+              </a:r>
+            </a:p>
+            <a:p>
+              <a:pPr defTabSz="439781"/>
+              <a:endParaRPr lang="te-IN" sz="2000" dirty="0">
                 <a:latin typeface="Ramabhadra" panose="02000600000000000000" pitchFamily="2" charset="0"/>
                 <a:cs typeface="Ramabhadra" panose="02000600000000000000" pitchFamily="2" charset="0"/>
               </a:endParaRPr>
@@ -4376,106 +4521,41 @@
             <a:p>
               <a:pPr defTabSz="439781"/>
               <a:r>
-                <a:rPr lang="te-IN" sz="1850" dirty="0">
-                  <a:latin typeface="Ramabhadra" panose="02000600000000000000" pitchFamily="2" charset="0"/>
-                  <a:cs typeface="Ramabhadra" panose="02000600000000000000" pitchFamily="2" charset="0"/>
-                </a:rPr>
-                <a:t>దీర్ఘాయువుతో నను నింపినావు (2)</a:t>
+                <a:rPr lang="te-IN" sz="2000" dirty="0">
+                  <a:latin typeface="Ramabhadra" panose="02000600000000000000" pitchFamily="2" charset="0"/>
+                  <a:cs typeface="Ramabhadra" panose="02000600000000000000" pitchFamily="2" charset="0"/>
+                </a:rPr>
+                <a:t>నీతో యాత్ర చేయు మార్గములు - ఎంతో రమ్యమైనవి</a:t>
               </a:r>
             </a:p>
             <a:p>
               <a:pPr defTabSz="439781"/>
               <a:r>
-                <a:rPr lang="te-IN" sz="1850" dirty="0">
-                  <a:latin typeface="Ramabhadra" panose="02000600000000000000" pitchFamily="2" charset="0"/>
-                  <a:cs typeface="Ramabhadra" panose="02000600000000000000" pitchFamily="2" charset="0"/>
-                </a:rPr>
-                <a:t>నీ కృపా బాహుళ్యమే వీడని అనుబంధమై</a:t>
+                <a:rPr lang="te-IN" sz="2000" dirty="0">
+                  <a:latin typeface="Ramabhadra" panose="02000600000000000000" pitchFamily="2" charset="0"/>
+                  <a:cs typeface="Ramabhadra" panose="02000600000000000000" pitchFamily="2" charset="0"/>
+                </a:rPr>
+                <a:t>అవి నాకెంతో ప్రియమైనవి (2)</a:t>
               </a:r>
             </a:p>
             <a:p>
               <a:pPr defTabSz="439781"/>
               <a:r>
-                <a:rPr lang="te-IN" sz="1850" dirty="0">
-                  <a:latin typeface="Ramabhadra" panose="02000600000000000000" pitchFamily="2" charset="0"/>
-                  <a:cs typeface="Ramabhadra" panose="02000600000000000000" pitchFamily="2" charset="0"/>
-                </a:rPr>
-                <a:t>తలచిన ప్రతిక్షణమున నూతన బలమిచ్చెను</a:t>
+                <a:rPr lang="te-IN" sz="2000" dirty="0">
+                  <a:latin typeface="Ramabhadra" panose="02000600000000000000" pitchFamily="2" charset="0"/>
+                  <a:cs typeface="Ramabhadra" panose="02000600000000000000" pitchFamily="2" charset="0"/>
+                </a:rPr>
+                <a:t>నీ మహిమను కొనియాడు పరిశుద్ధులతో నిలిచి</a:t>
               </a:r>
             </a:p>
             <a:p>
               <a:pPr defTabSz="439781"/>
-              <a:endParaRPr lang="te-IN" sz="1850" dirty="0">
-                <a:latin typeface="Ramabhadra" panose="02000600000000000000" pitchFamily="2" charset="0"/>
-                <a:cs typeface="Ramabhadra" panose="02000600000000000000" pitchFamily="2" charset="0"/>
-              </a:endParaRPr>
-            </a:p>
-            <a:p>
-              <a:pPr defTabSz="439781"/>
-              <a:r>
-                <a:rPr lang="te-IN" sz="1850" dirty="0">
-                  <a:latin typeface="Ramabhadra" panose="02000600000000000000" pitchFamily="2" charset="0"/>
-                  <a:cs typeface="Ramabhadra" panose="02000600000000000000" pitchFamily="2" charset="0"/>
-                </a:rPr>
-                <a:t>నాపై ఉదయించె నీ మహిమ కిరణాలు –</a:t>
-              </a:r>
-              <a:endParaRPr lang="en-IN" sz="1850" dirty="0">
-                <a:latin typeface="Ramabhadra" panose="02000600000000000000" pitchFamily="2" charset="0"/>
-                <a:cs typeface="Ramabhadra" panose="02000600000000000000" pitchFamily="2" charset="0"/>
-              </a:endParaRPr>
-            </a:p>
-            <a:p>
-              <a:pPr defTabSz="439781"/>
-              <a:r>
-                <a:rPr lang="te-IN" sz="1850" dirty="0">
-                  <a:latin typeface="Ramabhadra" panose="02000600000000000000" pitchFamily="2" charset="0"/>
-                  <a:cs typeface="Ramabhadra" panose="02000600000000000000" pitchFamily="2" charset="0"/>
-                </a:rPr>
-                <a:t>కనుమరుగాయెను నా దుఖ:దినములు</a:t>
-              </a:r>
-            </a:p>
-            <a:p>
-              <a:pPr defTabSz="439781"/>
-              <a:r>
-                <a:rPr lang="te-IN" sz="1850" dirty="0">
-                  <a:latin typeface="Ramabhadra" panose="02000600000000000000" pitchFamily="2" charset="0"/>
-                  <a:cs typeface="Ramabhadra" panose="02000600000000000000" pitchFamily="2" charset="0"/>
-                </a:rPr>
-                <a:t>కృపలనుపొంది నీ కాడి మోయుటకు</a:t>
-              </a:r>
-              <a:endParaRPr lang="en-IN" sz="1850" dirty="0">
-                <a:latin typeface="Ramabhadra" panose="02000600000000000000" pitchFamily="2" charset="0"/>
-                <a:cs typeface="Ramabhadra" panose="02000600000000000000" pitchFamily="2" charset="0"/>
-              </a:endParaRPr>
-            </a:p>
-            <a:p>
-              <a:pPr defTabSz="439781"/>
-              <a:r>
-                <a:rPr lang="te-IN" sz="1850" dirty="0">
-                  <a:latin typeface="Ramabhadra" panose="02000600000000000000" pitchFamily="2" charset="0"/>
-                  <a:cs typeface="Ramabhadra" panose="02000600000000000000" pitchFamily="2" charset="0"/>
-                </a:rPr>
-                <a:t>లోకములోనుండి ఏర్పరచినావు (2)</a:t>
-              </a:r>
-            </a:p>
-            <a:p>
-              <a:pPr defTabSz="439781"/>
-              <a:r>
-                <a:rPr lang="te-IN" sz="1850" dirty="0">
-                  <a:latin typeface="Ramabhadra" panose="02000600000000000000" pitchFamily="2" charset="0"/>
-                  <a:cs typeface="Ramabhadra" panose="02000600000000000000" pitchFamily="2" charset="0"/>
-                </a:rPr>
-                <a:t>నీ దివ్య సంకల్పమే- అవనిలో శుభప్రదమై</a:t>
-              </a:r>
-            </a:p>
-            <a:p>
-              <a:pPr defTabSz="439781"/>
-              <a:r>
-                <a:rPr lang="te-IN" sz="1850" dirty="0">
-                  <a:latin typeface="Ramabhadra" panose="02000600000000000000" pitchFamily="2" charset="0"/>
-                  <a:cs typeface="Ramabhadra" panose="02000600000000000000" pitchFamily="2" charset="0"/>
-                </a:rPr>
-                <a:t>నీ నిత్య రాజ్యమునకై నిరీక్షణ కలిగించెను</a:t>
+              <a:r>
+                <a:rPr lang="te-IN" sz="2000" dirty="0">
+                  <a:latin typeface="Ramabhadra" panose="02000600000000000000" pitchFamily="2" charset="0"/>
+                  <a:cs typeface="Ramabhadra" panose="02000600000000000000" pitchFamily="2" charset="0"/>
+                </a:rPr>
+                <a:t>పది తంతుల సితారతో నిన్నే కీర్తించెద (2)</a:t>
               </a:r>
             </a:p>
           </p:txBody>
@@ -4595,7 +4675,7 @@
                   <a:schemeClr val="tx1"/>
                 </a:solidFill>
               </a:rPr>
-              <a:t>05042025</a:t>
+              <a:t>130425</a:t>
             </a:r>
           </a:p>
         </p:txBody>
@@ -4652,7 +4732,7 @@
                   <a:schemeClr val="tx1"/>
                 </a:solidFill>
               </a:rPr>
-              <a:t>05042025</a:t>
+              <a:t>130425</a:t>
             </a:r>
           </a:p>
         </p:txBody>

--- a/songsTemplate.pptx
+++ b/songsTemplate.pptx
@@ -255,7 +255,7 @@
           <a:p>
             <a:fld id="{F1102B08-ED9E-409F-B95F-09CAA1DAF6E0}" type="datetimeFigureOut">
               <a:rPr lang="en-IN" smtClean="0"/>
-              <a:t>12-04-2025</a:t>
+              <a:t>18-04-2025</a:t>
             </a:fld>
             <a:endParaRPr lang="en-IN"/>
           </a:p>
@@ -425,7 +425,7 @@
           <a:p>
             <a:fld id="{F1102B08-ED9E-409F-B95F-09CAA1DAF6E0}" type="datetimeFigureOut">
               <a:rPr lang="en-IN" smtClean="0"/>
-              <a:t>12-04-2025</a:t>
+              <a:t>18-04-2025</a:t>
             </a:fld>
             <a:endParaRPr lang="en-IN"/>
           </a:p>
@@ -605,7 +605,7 @@
           <a:p>
             <a:fld id="{F1102B08-ED9E-409F-B95F-09CAA1DAF6E0}" type="datetimeFigureOut">
               <a:rPr lang="en-IN" smtClean="0"/>
-              <a:t>12-04-2025</a:t>
+              <a:t>18-04-2025</a:t>
             </a:fld>
             <a:endParaRPr lang="en-IN"/>
           </a:p>
@@ -775,7 +775,7 @@
           <a:p>
             <a:fld id="{F1102B08-ED9E-409F-B95F-09CAA1DAF6E0}" type="datetimeFigureOut">
               <a:rPr lang="en-IN" smtClean="0"/>
-              <a:t>12-04-2025</a:t>
+              <a:t>18-04-2025</a:t>
             </a:fld>
             <a:endParaRPr lang="en-IN"/>
           </a:p>
@@ -1019,7 +1019,7 @@
           <a:p>
             <a:fld id="{F1102B08-ED9E-409F-B95F-09CAA1DAF6E0}" type="datetimeFigureOut">
               <a:rPr lang="en-IN" smtClean="0"/>
-              <a:t>12-04-2025</a:t>
+              <a:t>18-04-2025</a:t>
             </a:fld>
             <a:endParaRPr lang="en-IN"/>
           </a:p>
@@ -1251,7 +1251,7 @@
           <a:p>
             <a:fld id="{F1102B08-ED9E-409F-B95F-09CAA1DAF6E0}" type="datetimeFigureOut">
               <a:rPr lang="en-IN" smtClean="0"/>
-              <a:t>12-04-2025</a:t>
+              <a:t>18-04-2025</a:t>
             </a:fld>
             <a:endParaRPr lang="en-IN"/>
           </a:p>
@@ -1618,7 +1618,7 @@
           <a:p>
             <a:fld id="{F1102B08-ED9E-409F-B95F-09CAA1DAF6E0}" type="datetimeFigureOut">
               <a:rPr lang="en-IN" smtClean="0"/>
-              <a:t>12-04-2025</a:t>
+              <a:t>18-04-2025</a:t>
             </a:fld>
             <a:endParaRPr lang="en-IN"/>
           </a:p>
@@ -1736,7 +1736,7 @@
           <a:p>
             <a:fld id="{F1102B08-ED9E-409F-B95F-09CAA1DAF6E0}" type="datetimeFigureOut">
               <a:rPr lang="en-IN" smtClean="0"/>
-              <a:t>12-04-2025</a:t>
+              <a:t>18-04-2025</a:t>
             </a:fld>
             <a:endParaRPr lang="en-IN"/>
           </a:p>
@@ -1831,7 +1831,7 @@
           <a:p>
             <a:fld id="{F1102B08-ED9E-409F-B95F-09CAA1DAF6E0}" type="datetimeFigureOut">
               <a:rPr lang="en-IN" smtClean="0"/>
-              <a:t>12-04-2025</a:t>
+              <a:t>18-04-2025</a:t>
             </a:fld>
             <a:endParaRPr lang="en-IN"/>
           </a:p>
@@ -2108,7 +2108,7 @@
           <a:p>
             <a:fld id="{F1102B08-ED9E-409F-B95F-09CAA1DAF6E0}" type="datetimeFigureOut">
               <a:rPr lang="en-IN" smtClean="0"/>
-              <a:t>12-04-2025</a:t>
+              <a:t>18-04-2025</a:t>
             </a:fld>
             <a:endParaRPr lang="en-IN"/>
           </a:p>
@@ -2365,7 +2365,7 @@
           <a:p>
             <a:fld id="{F1102B08-ED9E-409F-B95F-09CAA1DAF6E0}" type="datetimeFigureOut">
               <a:rPr lang="en-IN" smtClean="0"/>
-              <a:t>12-04-2025</a:t>
+              <a:t>18-04-2025</a:t>
             </a:fld>
             <a:endParaRPr lang="en-IN"/>
           </a:p>
@@ -2578,7 +2578,7 @@
           <a:p>
             <a:fld id="{F1102B08-ED9E-409F-B95F-09CAA1DAF6E0}" type="datetimeFigureOut">
               <a:rPr lang="en-IN" smtClean="0"/>
-              <a:t>12-04-2025</a:t>
+              <a:t>18-04-2025</a:t>
             </a:fld>
             <a:endParaRPr lang="en-IN"/>
           </a:p>
@@ -3073,7 +3073,7 @@
           <p:spPr>
             <a:xfrm>
               <a:off x="262396" y="326429"/>
-              <a:ext cx="4648200" cy="6186309"/>
+              <a:ext cx="4648200" cy="4247317"/>
             </a:xfrm>
             <a:prstGeom prst="rect">
               <a:avLst/>
@@ -3091,7 +3091,7 @@
                   <a:latin typeface="Ramabhadra" panose="02000600000000000000" pitchFamily="2" charset="0"/>
                   <a:cs typeface="Ramabhadra" panose="02000600000000000000" pitchFamily="2" charset="0"/>
                 </a:rPr>
-                <a:t>నీ ప్రేమ నాలో మధురమైనది</a:t>
+                <a:t>సిలువలో ఆ సిలువలో ఆ ఘోర కల్వరిలో</a:t>
               </a:r>
             </a:p>
             <a:p>
@@ -3100,7 +3100,7 @@
                   <a:latin typeface="Ramabhadra" panose="02000600000000000000" pitchFamily="2" charset="0"/>
                   <a:cs typeface="Ramabhadra" panose="02000600000000000000" pitchFamily="2" charset="0"/>
                 </a:rPr>
-                <a:t>అది నా ఊహకందని క్షేమ శిఖరము (2)</a:t>
+                <a:t>తులువల మధ్యలో వ్రేళాడిన యేసయ్యా (2)</a:t>
               </a:r>
             </a:p>
             <a:p>
@@ -3109,7 +3109,7 @@
                   <a:latin typeface="Ramabhadra" panose="02000600000000000000" pitchFamily="2" charset="0"/>
                   <a:cs typeface="Ramabhadra" panose="02000600000000000000" pitchFamily="2" charset="0"/>
                 </a:rPr>
-                <a:t>ఏరి కోరుకున్నావు ప్రేమ చూపి నన్ను</a:t>
+                <a:t>వెలి అయిన యేసయ్యా – బలి అయిన యేసయ్యా</a:t>
               </a:r>
             </a:p>
             <a:p>
@@ -3118,25 +3118,7 @@
                   <a:latin typeface="Ramabhadra" panose="02000600000000000000" pitchFamily="2" charset="0"/>
                   <a:cs typeface="Ramabhadra" panose="02000600000000000000" pitchFamily="2" charset="0"/>
                 </a:rPr>
-                <a:t>పరవశించి నాలో మహిమపరతు నిన్నే</a:t>
-              </a:r>
-            </a:p>
-            <a:p>
-              <a:r>
-                <a:rPr lang="te-IN" dirty="0">
-                  <a:latin typeface="Ramabhadra" panose="02000600000000000000" pitchFamily="2" charset="0"/>
-                  <a:cs typeface="Ramabhadra" panose="02000600000000000000" pitchFamily="2" charset="0"/>
-                </a:rPr>
-                <a:t>సర్వకృపానిధి నీవు – సర్వాధికారివి నీవు</a:t>
-              </a:r>
-            </a:p>
-            <a:p>
-              <a:r>
-                <a:rPr lang="te-IN" dirty="0">
-                  <a:latin typeface="Ramabhadra" panose="02000600000000000000" pitchFamily="2" charset="0"/>
-                  <a:cs typeface="Ramabhadra" panose="02000600000000000000" pitchFamily="2" charset="0"/>
-                </a:rPr>
-                <a:t>సత్య స్వరూపివి నీవు – ఆరాధింతును నిన్నే</a:t>
+                <a:t>నిలువెల్ల నలిగితివా – నీవెంతో అలసితివా          ||సిలువలో||</a:t>
               </a:r>
             </a:p>
             <a:p>
@@ -3151,7 +3133,7 @@
                   <a:latin typeface="Ramabhadra" panose="02000600000000000000" pitchFamily="2" charset="0"/>
                   <a:cs typeface="Ramabhadra" panose="02000600000000000000" pitchFamily="2" charset="0"/>
                 </a:rPr>
-                <a:t>చేరితి నిన్నే విరిగిన మనస్సుతో</a:t>
+                <a:t>నేరము చేయని నీవు – ఈ ఘోర పాపి కొరకు</a:t>
               </a:r>
             </a:p>
             <a:p>
@@ -3160,7 +3142,7 @@
                   <a:latin typeface="Ramabhadra" panose="02000600000000000000" pitchFamily="2" charset="0"/>
                   <a:cs typeface="Ramabhadra" panose="02000600000000000000" pitchFamily="2" charset="0"/>
                 </a:rPr>
-                <a:t>కాదనలేదే నా మనవులు నీవు (2)</a:t>
+                <a:t>భారమైన సిలువ- మోయలేక మోసావు (2)</a:t>
               </a:r>
             </a:p>
             <a:p>
@@ -3169,7 +3151,7 @@
                   <a:latin typeface="Ramabhadra" panose="02000600000000000000" pitchFamily="2" charset="0"/>
                   <a:cs typeface="Ramabhadra" panose="02000600000000000000" pitchFamily="2" charset="0"/>
                 </a:rPr>
-                <a:t>హృదయము నిండిన గానం – నను నడిపే ప్రేమ కావ్యం</a:t>
+                <a:t>కొరడాలు చెల్లని చీల్చెనే – నీ సుందర దేహమునే (2)</a:t>
               </a:r>
             </a:p>
             <a:p>
@@ -3178,34 +3160,7 @@
                   <a:latin typeface="Ramabhadra" panose="02000600000000000000" pitchFamily="2" charset="0"/>
                   <a:cs typeface="Ramabhadra" panose="02000600000000000000" pitchFamily="2" charset="0"/>
                 </a:rPr>
-                <a:t>నిరతము నాలో నీవే – చెరగని దివ్య రూపం (2)</a:t>
-              </a:r>
-            </a:p>
-            <a:p>
-              <a:r>
-                <a:rPr lang="te-IN" dirty="0">
-                  <a:latin typeface="Ramabhadra" panose="02000600000000000000" pitchFamily="2" charset="0"/>
-                  <a:cs typeface="Ramabhadra" panose="02000600000000000000" pitchFamily="2" charset="0"/>
-                </a:rPr>
-                <a:t>ఇది నీ బాహు బంధాల అనుబంధమా</a:t>
-              </a:r>
-            </a:p>
-            <a:p>
-              <a:r>
-                <a:rPr lang="te-IN" dirty="0">
-                  <a:latin typeface="Ramabhadra" panose="02000600000000000000" pitchFamily="2" charset="0"/>
-                  <a:cs typeface="Ramabhadra" panose="02000600000000000000" pitchFamily="2" charset="0"/>
-                </a:rPr>
-                <a:t>తేజోవిరాజా స్తుతి మహిమలు నీకే</a:t>
-              </a:r>
-            </a:p>
-            <a:p>
-              <a:r>
-                <a:rPr lang="te-IN" dirty="0">
-                  <a:latin typeface="Ramabhadra" panose="02000600000000000000" pitchFamily="2" charset="0"/>
-                  <a:cs typeface="Ramabhadra" panose="02000600000000000000" pitchFamily="2" charset="0"/>
-                </a:rPr>
-                <a:t>నా యేసురాజా ఆరాధన నీకే (2)</a:t>
+                <a:t>తడిపెను నీ తనువునే – రుధిరంబు ధారలే (2)        ||వెలి||</a:t>
               </a:r>
             </a:p>
             <a:p>
@@ -3220,7 +3175,7 @@
                   <a:latin typeface="Ramabhadra" panose="02000600000000000000" pitchFamily="2" charset="0"/>
                   <a:cs typeface="Ramabhadra" panose="02000600000000000000" pitchFamily="2" charset="0"/>
                 </a:rPr>
-                <a:t>నా ప్రతి పదములో జీవము నీవే</a:t>
+                <a:t>వధకు సిద్దమైన గొర్రెపిల్ల వోలె</a:t>
               </a:r>
             </a:p>
             <a:p>
@@ -3229,7 +3184,7 @@
                   <a:latin typeface="Ramabhadra" panose="02000600000000000000" pitchFamily="2" charset="0"/>
                   <a:cs typeface="Ramabhadra" panose="02000600000000000000" pitchFamily="2" charset="0"/>
                 </a:rPr>
-                <a:t>నా ప్రతి అడుగులో విజయము నీవే (2)</a:t>
+                <a:t>మోమున ఉమ్మివేయ మౌనివైనావే (2)</a:t>
               </a:r>
             </a:p>
             <a:p>
@@ -3238,7 +3193,7 @@
                   <a:latin typeface="Ramabhadra" panose="02000600000000000000" pitchFamily="2" charset="0"/>
                   <a:cs typeface="Ramabhadra" panose="02000600000000000000" pitchFamily="2" charset="0"/>
                 </a:rPr>
-                <a:t>ఎన్నడు విడువని ప్రేమ – నిను చేరే క్షణము రాదా</a:t>
+                <a:t>దూషించి అపహసించి హింసించిరా నిన్ను (2)</a:t>
               </a:r>
             </a:p>
             <a:p>
@@ -3247,34 +3202,7 @@
                   <a:latin typeface="Ramabhadra" panose="02000600000000000000" pitchFamily="2" charset="0"/>
                   <a:cs typeface="Ramabhadra" panose="02000600000000000000" pitchFamily="2" charset="0"/>
                 </a:rPr>
-                <a:t>నీడగా నాతో నిలిచే – నీ కృపయే నాకు చాలును (2)</a:t>
-              </a:r>
-            </a:p>
-            <a:p>
-              <a:r>
-                <a:rPr lang="te-IN" dirty="0">
-                  <a:latin typeface="Ramabhadra" panose="02000600000000000000" pitchFamily="2" charset="0"/>
-                  <a:cs typeface="Ramabhadra" panose="02000600000000000000" pitchFamily="2" charset="0"/>
-                </a:rPr>
-                <a:t>ఇది నీ ప్రేమ కురిపించు హేమంతమా</a:t>
-              </a:r>
-            </a:p>
-            <a:p>
-              <a:r>
-                <a:rPr lang="te-IN" dirty="0">
-                  <a:latin typeface="Ramabhadra" panose="02000600000000000000" pitchFamily="2" charset="0"/>
-                  <a:cs typeface="Ramabhadra" panose="02000600000000000000" pitchFamily="2" charset="0"/>
-                </a:rPr>
-                <a:t>తేజోవిరాజా స్తుతి మహిమలు నీకే</a:t>
-              </a:r>
-            </a:p>
-            <a:p>
-              <a:r>
-                <a:rPr lang="te-IN" dirty="0">
-                  <a:latin typeface="Ramabhadra" panose="02000600000000000000" pitchFamily="2" charset="0"/>
-                  <a:cs typeface="Ramabhadra" panose="02000600000000000000" pitchFamily="2" charset="0"/>
-                </a:rPr>
-                <a:t>నా యేసురాజా ఆరాధన నీకే (2)</a:t>
+                <a:t>ఊహకు అందదు నీ త్యాగమేసయ్యా (2)        ||వెలి||</a:t>
               </a:r>
             </a:p>
           </p:txBody>
@@ -3432,7 +3360,7 @@
           <p:spPr>
             <a:xfrm>
               <a:off x="290661" y="329202"/>
-              <a:ext cx="4544669" cy="6093976"/>
+              <a:ext cx="4544669" cy="5760551"/>
             </a:xfrm>
             <a:prstGeom prst="rect">
               <a:avLst/>
@@ -3455,25 +3383,8 @@
                   <a:latin typeface="Ramabhadra" panose="02000600000000000000" pitchFamily="2" charset="0"/>
                   <a:cs typeface="Ramabhadra" panose="02000600000000000000" pitchFamily="2" charset="0"/>
                 </a:rPr>
-                <a:t>యేసే నా పరిహారి ప్రియ యేసే నా పరిహారి</a:t>
-              </a:r>
-              <a:br>
-                <a:rPr lang="te-IN" sz="2000" dirty="0">
-                  <a:latin typeface="Ramabhadra" panose="02000600000000000000" pitchFamily="2" charset="0"/>
-                  <a:cs typeface="Ramabhadra" panose="02000600000000000000" pitchFamily="2" charset="0"/>
-                </a:rPr>
-              </a:br>
-              <a:r>
-                <a:rPr lang="te-IN" sz="2000" dirty="0">
-                  <a:latin typeface="Ramabhadra" panose="02000600000000000000" pitchFamily="2" charset="0"/>
-                  <a:cs typeface="Ramabhadra" panose="02000600000000000000" pitchFamily="2" charset="0"/>
-                </a:rPr>
-                <a:t>నా జీవిత కాలమెల్ల</a:t>
-              </a:r>
-              <a:endParaRPr lang="en-IN" sz="2000" dirty="0">
-                <a:latin typeface="Ramabhadra" panose="02000600000000000000" pitchFamily="2" charset="0"/>
-                <a:cs typeface="Ramabhadra" panose="02000600000000000000" pitchFamily="2" charset="0"/>
-              </a:endParaRPr>
+                <a:t>సిలువలో సాగింది యాత్ర</a:t>
+              </a:r>
             </a:p>
             <a:p>
               <a:pPr>
@@ -3486,7 +3397,49 @@
                   <a:latin typeface="Ramabhadra" panose="02000600000000000000" pitchFamily="2" charset="0"/>
                   <a:cs typeface="Ramabhadra" panose="02000600000000000000" pitchFamily="2" charset="0"/>
                 </a:rPr>
-                <a:t>ప్రియ ప్రభువే నా పరిహారి (2)         </a:t>
+                <a:t>కరుణామయుని దయగల పాత్ర (2)</a:t>
+              </a:r>
+            </a:p>
+            <a:p>
+              <a:pPr>
+                <a:lnSpc>
+                  <a:spcPts val="2600"/>
+                </a:lnSpc>
+              </a:pPr>
+              <a:r>
+                <a:rPr lang="te-IN" sz="2000" dirty="0">
+                  <a:latin typeface="Ramabhadra" panose="02000600000000000000" pitchFamily="2" charset="0"/>
+                  <a:cs typeface="Ramabhadra" panose="02000600000000000000" pitchFamily="2" charset="0"/>
+                </a:rPr>
+                <a:t>ఇది ఎవరి కోసమో</a:t>
+              </a:r>
+            </a:p>
+            <a:p>
+              <a:pPr>
+                <a:lnSpc>
+                  <a:spcPts val="2600"/>
+                </a:lnSpc>
+              </a:pPr>
+              <a:r>
+                <a:rPr lang="te-IN" sz="2000" dirty="0">
+                  <a:latin typeface="Ramabhadra" panose="02000600000000000000" pitchFamily="2" charset="0"/>
+                  <a:cs typeface="Ramabhadra" panose="02000600000000000000" pitchFamily="2" charset="0"/>
+                </a:rPr>
+                <a:t>ఈ జగతి కోసమే</a:t>
+              </a:r>
+            </a:p>
+            <a:p>
+              <a:pPr>
+                <a:lnSpc>
+                  <a:spcPts val="2600"/>
+                </a:lnSpc>
+              </a:pPr>
+              <a:r>
+                <a:rPr lang="te-IN" sz="2000" dirty="0">
+                  <a:latin typeface="Ramabhadra" panose="02000600000000000000" pitchFamily="2" charset="0"/>
+                  <a:cs typeface="Ramabhadra" panose="02000600000000000000" pitchFamily="2" charset="0"/>
+                </a:rPr>
+                <a:t>ఈ జనుల కోసమే             ||సిలువలో||</a:t>
               </a:r>
             </a:p>
             <a:p>
@@ -3511,7 +3464,7 @@
                   <a:latin typeface="Ramabhadra" panose="02000600000000000000" pitchFamily="2" charset="0"/>
                   <a:cs typeface="Ramabhadra" panose="02000600000000000000" pitchFamily="2" charset="0"/>
                 </a:rPr>
-                <a:t>ఎన్ని కష్టాలు కలిగిననూ</a:t>
+                <a:t>పాలు కారు దేహము పైన</a:t>
               </a:r>
             </a:p>
             <a:p>
@@ -3525,7 +3478,7 @@
                   <a:latin typeface="Ramabhadra" panose="02000600000000000000" pitchFamily="2" charset="0"/>
                   <a:cs typeface="Ramabhadra" panose="02000600000000000000" pitchFamily="2" charset="0"/>
                 </a:rPr>
-                <a:t>నన్ను కృంగించె భాదలెన్నో</a:t>
+                <a:t>పాపాత్ముల కొరడాలెన్నో (2)</a:t>
               </a:r>
             </a:p>
             <a:p>
@@ -3539,7 +3492,7 @@
                   <a:latin typeface="Ramabhadra" panose="02000600000000000000" pitchFamily="2" charset="0"/>
                   <a:cs typeface="Ramabhadra" panose="02000600000000000000" pitchFamily="2" charset="0"/>
                 </a:rPr>
-                <a:t>ఎన్ని నష్టాలు వాటిల్లినా </a:t>
+                <a:t>నాట్యమాడినాయి నడి వీధిలో నిలిపాయి (2)</a:t>
               </a:r>
             </a:p>
             <a:p>
@@ -3553,7 +3506,21 @@
                   <a:latin typeface="Ramabhadra" panose="02000600000000000000" pitchFamily="2" charset="0"/>
                   <a:cs typeface="Ramabhadra" panose="02000600000000000000" pitchFamily="2" charset="0"/>
                 </a:rPr>
-                <a:t>ప్రియ ప్రభువే నా పరిహారి (2)        </a:t>
+                <a:t>నోరు తెరువ లేదాయే ప్రేమ</a:t>
+              </a:r>
+            </a:p>
+            <a:p>
+              <a:pPr>
+                <a:lnSpc>
+                  <a:spcPts val="2600"/>
+                </a:lnSpc>
+              </a:pPr>
+              <a:r>
+                <a:rPr lang="te-IN" sz="2000" dirty="0">
+                  <a:latin typeface="Ramabhadra" panose="02000600000000000000" pitchFamily="2" charset="0"/>
+                  <a:cs typeface="Ramabhadra" panose="02000600000000000000" pitchFamily="2" charset="0"/>
+                </a:rPr>
+                <a:t>బదులు పలుక లేదాయే ప్రేమ (2)       ||ఇది ఎవరి||</a:t>
               </a:r>
             </a:p>
             <a:p>
@@ -3578,7 +3545,7 @@
                   <a:latin typeface="Ramabhadra" panose="02000600000000000000" pitchFamily="2" charset="0"/>
                   <a:cs typeface="Ramabhadra" panose="02000600000000000000" pitchFamily="2" charset="0"/>
                 </a:rPr>
-                <a:t>నన్ను సాతాను వెంబడించినా</a:t>
+                <a:t>వెనుక నుండి తన్నింది ఒకరు</a:t>
               </a:r>
             </a:p>
             <a:p>
@@ -3592,20 +3559,7 @@
                   <a:latin typeface="Ramabhadra" panose="02000600000000000000" pitchFamily="2" charset="0"/>
                   <a:cs typeface="Ramabhadra" panose="02000600000000000000" pitchFamily="2" charset="0"/>
                 </a:rPr>
-                <a:t>నన్ను శత్రువు ఎదిరించినా (2)</a:t>
-              </a:r>
-              <a:br>
-                <a:rPr lang="te-IN" sz="2000" dirty="0">
-                  <a:latin typeface="Ramabhadra" panose="02000600000000000000" pitchFamily="2" charset="0"/>
-                  <a:cs typeface="Ramabhadra" panose="02000600000000000000" pitchFamily="2" charset="0"/>
-                </a:rPr>
-              </a:br>
-              <a:r>
-                <a:rPr lang="te-IN" sz="2000" dirty="0">
-                  <a:latin typeface="Ramabhadra" panose="02000600000000000000" pitchFamily="2" charset="0"/>
-                  <a:cs typeface="Ramabhadra" panose="02000600000000000000" pitchFamily="2" charset="0"/>
-                </a:rPr>
-                <a:t>పలు నిందలు నను చుట్టినా</a:t>
+                <a:t>తన ముందు నిలిచి నవ్వింది మరి ఒకరు (2)</a:t>
               </a:r>
             </a:p>
             <a:p>
@@ -3619,7 +3573,7 @@
                   <a:latin typeface="Ramabhadra" panose="02000600000000000000" pitchFamily="2" charset="0"/>
                   <a:cs typeface="Ramabhadra" panose="02000600000000000000" pitchFamily="2" charset="0"/>
                 </a:rPr>
-                <a:t>ప్రియ ప్రభువే నా పరిహారి (2)          </a:t>
+                <a:t>గేలి చేసినారు పరిహాసమాడినారు (2)</a:t>
               </a:r>
             </a:p>
             <a:p>
@@ -3628,10 +3582,13 @@
                   <a:spcPts val="2600"/>
                 </a:lnSpc>
               </a:pPr>
-              <a:endParaRPr lang="te-IN" sz="2000" dirty="0">
-                <a:latin typeface="Ramabhadra" panose="02000600000000000000" pitchFamily="2" charset="0"/>
-                <a:cs typeface="Ramabhadra" panose="02000600000000000000" pitchFamily="2" charset="0"/>
-              </a:endParaRPr>
+              <a:r>
+                <a:rPr lang="te-IN" sz="2000" dirty="0">
+                  <a:latin typeface="Ramabhadra" panose="02000600000000000000" pitchFamily="2" charset="0"/>
+                  <a:cs typeface="Ramabhadra" panose="02000600000000000000" pitchFamily="2" charset="0"/>
+                </a:rPr>
+                <a:t>నోరు తెరువ లేదాయే ప్రేమ</a:t>
+              </a:r>
             </a:p>
             <a:p>
               <a:pPr>
@@ -3644,47 +3601,7 @@
                   <a:latin typeface="Ramabhadra" panose="02000600000000000000" pitchFamily="2" charset="0"/>
                   <a:cs typeface="Ramabhadra" panose="02000600000000000000" pitchFamily="2" charset="0"/>
                 </a:rPr>
-                <a:t>మణి మాన్యాలు లేకున్ననూ</a:t>
-              </a:r>
-            </a:p>
-            <a:p>
-              <a:pPr>
-                <a:lnSpc>
-                  <a:spcPts val="2600"/>
-                </a:lnSpc>
-              </a:pPr>
-              <a:r>
-                <a:rPr lang="te-IN" sz="2000" dirty="0">
-                  <a:latin typeface="Ramabhadra" panose="02000600000000000000" pitchFamily="2" charset="0"/>
-                  <a:cs typeface="Ramabhadra" panose="02000600000000000000" pitchFamily="2" charset="0"/>
-                </a:rPr>
-                <a:t>పలు వేదనలు వేధించినా (2)</a:t>
-              </a:r>
-              <a:br>
-                <a:rPr lang="te-IN" sz="2000" dirty="0">
-                  <a:latin typeface="Ramabhadra" panose="02000600000000000000" pitchFamily="2" charset="0"/>
-                  <a:cs typeface="Ramabhadra" panose="02000600000000000000" pitchFamily="2" charset="0"/>
-                </a:rPr>
-              </a:br>
-              <a:r>
-                <a:rPr lang="te-IN" sz="2000" dirty="0">
-                  <a:latin typeface="Ramabhadra" panose="02000600000000000000" pitchFamily="2" charset="0"/>
-                  <a:cs typeface="Ramabhadra" panose="02000600000000000000" pitchFamily="2" charset="0"/>
-                </a:rPr>
-                <a:t>నరులెల్లరు నను విడచినా</a:t>
-              </a:r>
-              <a:br>
-                <a:rPr lang="te-IN" sz="2000" dirty="0">
-                  <a:latin typeface="Ramabhadra" panose="02000600000000000000" pitchFamily="2" charset="0"/>
-                  <a:cs typeface="Ramabhadra" panose="02000600000000000000" pitchFamily="2" charset="0"/>
-                </a:rPr>
-              </a:br>
-              <a:r>
-                <a:rPr lang="te-IN" sz="2000" dirty="0">
-                  <a:latin typeface="Ramabhadra" panose="02000600000000000000" pitchFamily="2" charset="0"/>
-                  <a:cs typeface="Ramabhadra" panose="02000600000000000000" pitchFamily="2" charset="0"/>
-                </a:rPr>
-                <a:t>ప్రియ ప్రభువే నా పరిహారి (2)         </a:t>
+                <a:t>బదులు పలుక లేదాయే ప్రేమ (2)       ||ఇది ఎవరి||</a:t>
               </a:r>
             </a:p>
           </p:txBody>
@@ -3911,9 +3828,9 @@
         <p:grpSpPr>
           <a:xfrm>
             <a:off x="160868" y="182032"/>
-            <a:ext cx="4792132" cy="6493935"/>
+            <a:ext cx="4943470" cy="6493935"/>
             <a:chOff x="160868" y="182032"/>
-            <a:chExt cx="4792132" cy="6493935"/>
+            <a:chExt cx="4943470" cy="6493935"/>
           </a:xfrm>
         </p:grpSpPr>
         <p:sp>
@@ -3986,7 +3903,7 @@
           <p:spPr>
             <a:xfrm>
               <a:off x="312204" y="335843"/>
-              <a:ext cx="4640796" cy="6186309"/>
+              <a:ext cx="4640796" cy="3108543"/>
             </a:xfrm>
             <a:prstGeom prst="rect">
               <a:avLst/>
@@ -4003,44 +3920,30 @@
                 <a:defRPr/>
               </a:pPr>
               <a:r>
-                <a:rPr lang="te-IN" sz="2200" dirty="0">
-                  <a:latin typeface="Ramabhadra" panose="02000600000000000000" pitchFamily="2" charset="0"/>
-                  <a:cs typeface="Ramabhadra" panose="02000600000000000000" pitchFamily="2" charset="0"/>
-                </a:rPr>
-                <a:t>శాశ్వతమైనది నీవు నాయెడ చూపిన కృప</a:t>
-              </a:r>
-              <a:br>
-                <a:rPr lang="te-IN" sz="2200" dirty="0">
-                  <a:latin typeface="Ramabhadra" panose="02000600000000000000" pitchFamily="2" charset="0"/>
-                  <a:cs typeface="Ramabhadra" panose="02000600000000000000" pitchFamily="2" charset="0"/>
-                </a:rPr>
-              </a:br>
-              <a:r>
-                <a:rPr lang="te-IN" sz="2200" dirty="0">
-                  <a:latin typeface="Ramabhadra" panose="02000600000000000000" pitchFamily="2" charset="0"/>
-                  <a:cs typeface="Ramabhadra" panose="02000600000000000000" pitchFamily="2" charset="0"/>
-                </a:rPr>
-                <a:t>అనుక్షణం నను కనుపాపవలె (2)</a:t>
-              </a:r>
-              <a:br>
-                <a:rPr lang="te-IN" sz="2200" dirty="0">
-                  <a:latin typeface="Ramabhadra" panose="02000600000000000000" pitchFamily="2" charset="0"/>
-                  <a:cs typeface="Ramabhadra" panose="02000600000000000000" pitchFamily="2" charset="0"/>
-                </a:rPr>
-              </a:br>
-              <a:r>
-                <a:rPr lang="te-IN" sz="2200" dirty="0">
-                  <a:latin typeface="Ramabhadra" panose="02000600000000000000" pitchFamily="2" charset="0"/>
-                  <a:cs typeface="Ramabhadra" panose="02000600000000000000" pitchFamily="2" charset="0"/>
-                </a:rPr>
-                <a:t>కాచిన కృప</a:t>
+                <a:rPr lang="te-IN" sz="1600" dirty="0">
+                  <a:latin typeface="Ramabhadra" panose="02000600000000000000" pitchFamily="2" charset="0"/>
+                  <a:cs typeface="Ramabhadra" panose="02000600000000000000" pitchFamily="2" charset="0"/>
+                </a:rPr>
+                <a:t>కలువరిగిరిలో సిలువధారియై</a:t>
               </a:r>
             </a:p>
             <a:p>
               <a:pPr defTabSz="439781">
                 <a:defRPr/>
               </a:pPr>
-              <a:endParaRPr lang="te-IN" sz="2200" dirty="0">
+              <a:r>
+                <a:rPr lang="te-IN" sz="1600" dirty="0">
+                  <a:latin typeface="Ramabhadra" panose="02000600000000000000" pitchFamily="2" charset="0"/>
+                  <a:cs typeface="Ramabhadra" panose="02000600000000000000" pitchFamily="2" charset="0"/>
+                </a:rPr>
+                <a:t>వ్రేలాడితివా నా యేసయ్యా ||2||</a:t>
+              </a:r>
+            </a:p>
+            <a:p>
+              <a:pPr defTabSz="439781">
+                <a:defRPr/>
+              </a:pPr>
+              <a:endParaRPr lang="te-IN" sz="1600" dirty="0">
                 <a:latin typeface="Ramabhadra" panose="02000600000000000000" pitchFamily="2" charset="0"/>
                 <a:cs typeface="Ramabhadra" panose="02000600000000000000" pitchFamily="2" charset="0"/>
               </a:endParaRPr>
@@ -4050,11 +3953,11 @@
                 <a:defRPr/>
               </a:pPr>
               <a:r>
-                <a:rPr lang="te-IN" sz="2200" dirty="0">
-                  <a:latin typeface="Ramabhadra" panose="02000600000000000000" pitchFamily="2" charset="0"/>
-                  <a:cs typeface="Ramabhadra" panose="02000600000000000000" pitchFamily="2" charset="0"/>
-                </a:rPr>
-                <a:t>నీకు బహుదూరమైన నన్ను</a:t>
+                <a:rPr lang="te-IN" sz="1600" dirty="0">
+                  <a:latin typeface="Ramabhadra" panose="02000600000000000000" pitchFamily="2" charset="0"/>
+                  <a:cs typeface="Ramabhadra" panose="02000600000000000000" pitchFamily="2" charset="0"/>
+                </a:rPr>
+                <a:t>1. అన్యాయపు తీర్పునొంది ఘోరమైన శిక్షను</a:t>
               </a:r>
             </a:p>
             <a:p>
@@ -4062,24 +3965,11 @@
                 <a:defRPr/>
               </a:pPr>
               <a:r>
-                <a:rPr lang="te-IN" sz="2200" dirty="0">
-                  <a:latin typeface="Ramabhadra" panose="02000600000000000000" pitchFamily="2" charset="0"/>
-                  <a:cs typeface="Ramabhadra" panose="02000600000000000000" pitchFamily="2" charset="0"/>
-                </a:rPr>
-                <a:t>చేరదీసిన నా తండ్రివి (2)</a:t>
-              </a:r>
-              <a:br>
-                <a:rPr lang="te-IN" sz="2200" dirty="0">
-                  <a:latin typeface="Ramabhadra" panose="02000600000000000000" pitchFamily="2" charset="0"/>
-                  <a:cs typeface="Ramabhadra" panose="02000600000000000000" pitchFamily="2" charset="0"/>
-                </a:rPr>
-              </a:br>
-              <a:r>
-                <a:rPr lang="te-IN" sz="2200" dirty="0">
-                  <a:latin typeface="Ramabhadra" panose="02000600000000000000" pitchFamily="2" charset="0"/>
-                  <a:cs typeface="Ramabhadra" panose="02000600000000000000" pitchFamily="2" charset="0"/>
-                </a:rPr>
-                <a:t>నిత్య సుఖశాంతియే</a:t>
+                <a:rPr lang="te-IN" sz="1600" dirty="0">
+                  <a:latin typeface="Ramabhadra" panose="02000600000000000000" pitchFamily="2" charset="0"/>
+                  <a:cs typeface="Ramabhadra" panose="02000600000000000000" pitchFamily="2" charset="0"/>
+                </a:rPr>
+                <a:t>ద్వేషాగ్ని జ్వాలలో దోషివై నిలిచావా ||2||</a:t>
               </a:r>
             </a:p>
             <a:p>
@@ -4087,18 +3977,30 @@
                 <a:defRPr/>
               </a:pPr>
               <a:r>
-                <a:rPr lang="te-IN" sz="2200" dirty="0">
-                  <a:latin typeface="Ramabhadra" panose="02000600000000000000" pitchFamily="2" charset="0"/>
-                  <a:cs typeface="Ramabhadra" panose="02000600000000000000" pitchFamily="2" charset="0"/>
-                </a:rPr>
-                <a:t>నాకు నీదు కౌగిలిలో (2)</a:t>
+                <a:rPr lang="te-IN" sz="1600" dirty="0">
+                  <a:latin typeface="Ramabhadra" panose="02000600000000000000" pitchFamily="2" charset="0"/>
+                  <a:cs typeface="Ramabhadra" panose="02000600000000000000" pitchFamily="2" charset="0"/>
+                </a:rPr>
+                <a:t>నా దోషక్రియలకై సిలువలో బలి అయితివా</a:t>
               </a:r>
             </a:p>
             <a:p>
               <a:pPr defTabSz="439781">
                 <a:defRPr/>
               </a:pPr>
-              <a:endParaRPr lang="te-IN" sz="2200" dirty="0">
+              <a:r>
+                <a:rPr lang="te-IN" sz="1600" dirty="0">
+                  <a:latin typeface="Ramabhadra" panose="02000600000000000000" pitchFamily="2" charset="0"/>
+                  <a:cs typeface="Ramabhadra" panose="02000600000000000000" pitchFamily="2" charset="0"/>
+                </a:rPr>
+                <a:t>నీ ప్రాణ క్రయ ధనముతో రక్షించితివా ||2||</a:t>
+              </a:r>
+            </a:p>
+            <a:p>
+              <a:pPr defTabSz="439781">
+                <a:defRPr/>
+              </a:pPr>
+              <a:endParaRPr lang="te-IN" sz="1600" dirty="0">
                 <a:latin typeface="Ramabhadra" panose="02000600000000000000" pitchFamily="2" charset="0"/>
                 <a:cs typeface="Ramabhadra" panose="02000600000000000000" pitchFamily="2" charset="0"/>
               </a:endParaRPr>
@@ -4108,11 +4010,11 @@
                 <a:defRPr/>
               </a:pPr>
               <a:r>
-                <a:rPr lang="te-IN" sz="2200" dirty="0">
-                  <a:latin typeface="Ramabhadra" panose="02000600000000000000" pitchFamily="2" charset="0"/>
-                  <a:cs typeface="Ramabhadra" panose="02000600000000000000" pitchFamily="2" charset="0"/>
-                </a:rPr>
-                <a:t>తల్లి తన బిడ్డలను మరచినా</a:t>
+                <a:rPr lang="te-IN" sz="1600" dirty="0">
+                  <a:latin typeface="Ramabhadra" panose="02000600000000000000" pitchFamily="2" charset="0"/>
+                  <a:cs typeface="Ramabhadra" panose="02000600000000000000" pitchFamily="2" charset="0"/>
+                </a:rPr>
+                <a:t>2. దారి తప్పిపోయిన గోర్రెనై తిరిగాను</a:t>
               </a:r>
             </a:p>
             <a:p>
@@ -4120,24 +4022,11 @@
                 <a:defRPr/>
               </a:pPr>
               <a:r>
-                <a:rPr lang="te-IN" sz="2200" dirty="0">
-                  <a:latin typeface="Ramabhadra" panose="02000600000000000000" pitchFamily="2" charset="0"/>
-                  <a:cs typeface="Ramabhadra" panose="02000600000000000000" pitchFamily="2" charset="0"/>
-                </a:rPr>
-                <a:t>నేను మరువలేనంటివే (2)</a:t>
-              </a:r>
-              <a:br>
-                <a:rPr lang="te-IN" sz="2200" dirty="0">
-                  <a:latin typeface="Ramabhadra" panose="02000600000000000000" pitchFamily="2" charset="0"/>
-                  <a:cs typeface="Ramabhadra" panose="02000600000000000000" pitchFamily="2" charset="0"/>
-                </a:rPr>
-              </a:br>
-              <a:r>
-                <a:rPr lang="te-IN" sz="2200" dirty="0">
-                  <a:latin typeface="Ramabhadra" panose="02000600000000000000" pitchFamily="2" charset="0"/>
-                  <a:cs typeface="Ramabhadra" panose="02000600000000000000" pitchFamily="2" charset="0"/>
-                </a:rPr>
-                <a:t>నీదు ముఖకాంతియే</a:t>
+                <a:rPr lang="te-IN" sz="1600" dirty="0">
+                  <a:latin typeface="Ramabhadra" panose="02000600000000000000" pitchFamily="2" charset="0"/>
+                  <a:cs typeface="Ramabhadra" panose="02000600000000000000" pitchFamily="2" charset="0"/>
+                </a:rPr>
+                <a:t>ఏ దారి కానరాక సిలువ దరికి చేరాను ||2||</a:t>
               </a:r>
             </a:p>
             <a:p>
@@ -4145,69 +4034,23 @@
                 <a:defRPr/>
               </a:pPr>
               <a:r>
-                <a:rPr lang="te-IN" sz="2200" dirty="0">
-                  <a:latin typeface="Ramabhadra" panose="02000600000000000000" pitchFamily="2" charset="0"/>
-                  <a:cs typeface="Ramabhadra" panose="02000600000000000000" pitchFamily="2" charset="0"/>
-                </a:rPr>
-                <a:t>నన్ను ఆదరించెనులే (2)</a:t>
+                <a:rPr lang="te-IN" sz="1600" dirty="0">
+                  <a:latin typeface="Ramabhadra" panose="02000600000000000000" pitchFamily="2" charset="0"/>
+                  <a:cs typeface="Ramabhadra" panose="02000600000000000000" pitchFamily="2" charset="0"/>
+                </a:rPr>
+                <a:t>ఆకరి రక్తపు బొట్టును నా కొరకై ధారపోసి</a:t>
               </a:r>
             </a:p>
             <a:p>
               <a:pPr defTabSz="439781">
                 <a:defRPr/>
               </a:pPr>
-              <a:endParaRPr lang="te-IN" sz="2200" dirty="0">
-                <a:latin typeface="Ramabhadra" panose="02000600000000000000" pitchFamily="2" charset="0"/>
-                <a:cs typeface="Ramabhadra" panose="02000600000000000000" pitchFamily="2" charset="0"/>
-              </a:endParaRPr>
-            </a:p>
-            <a:p>
-              <a:pPr defTabSz="439781">
-                <a:defRPr/>
-              </a:pPr>
-              <a:r>
-                <a:rPr lang="te-IN" sz="2200" dirty="0">
-                  <a:latin typeface="Ramabhadra" panose="02000600000000000000" pitchFamily="2" charset="0"/>
-                  <a:cs typeface="Ramabhadra" panose="02000600000000000000" pitchFamily="2" charset="0"/>
-                </a:rPr>
-                <a:t>పర్వతములు తొలగినను</a:t>
-              </a:r>
-            </a:p>
-            <a:p>
-              <a:pPr defTabSz="439781">
-                <a:defRPr/>
-              </a:pPr>
-              <a:r>
-                <a:rPr lang="te-IN" sz="2200" dirty="0">
-                  <a:latin typeface="Ramabhadra" panose="02000600000000000000" pitchFamily="2" charset="0"/>
-                  <a:cs typeface="Ramabhadra" panose="02000600000000000000" pitchFamily="2" charset="0"/>
-                </a:rPr>
-                <a:t>మెట్టలు తత్తరిల్లిన (2)</a:t>
-              </a:r>
-              <a:br>
-                <a:rPr lang="te-IN" sz="2200" dirty="0">
-                  <a:latin typeface="Ramabhadra" panose="02000600000000000000" pitchFamily="2" charset="0"/>
-                  <a:cs typeface="Ramabhadra" panose="02000600000000000000" pitchFamily="2" charset="0"/>
-                </a:rPr>
-              </a:br>
-              <a:r>
-                <a:rPr lang="te-IN" sz="2200" dirty="0">
-                  <a:latin typeface="Ramabhadra" panose="02000600000000000000" pitchFamily="2" charset="0"/>
-                  <a:cs typeface="Ramabhadra" panose="02000600000000000000" pitchFamily="2" charset="0"/>
-                </a:rPr>
-                <a:t>నా కృప నిను వీడదని</a:t>
-              </a:r>
-            </a:p>
-            <a:p>
-              <a:pPr defTabSz="439781">
-                <a:defRPr/>
-              </a:pPr>
-              <a:r>
-                <a:rPr lang="te-IN" sz="2200" dirty="0">
-                  <a:latin typeface="Ramabhadra" panose="02000600000000000000" pitchFamily="2" charset="0"/>
-                  <a:cs typeface="Ramabhadra" panose="02000600000000000000" pitchFamily="2" charset="0"/>
-                </a:rPr>
-                <a:t>అభయమిచ్చితివే (2)</a:t>
+              <a:r>
+                <a:rPr lang="te-IN" sz="1600" dirty="0">
+                  <a:latin typeface="Ramabhadra" panose="02000600000000000000" pitchFamily="2" charset="0"/>
+                  <a:cs typeface="Ramabhadra" panose="02000600000000000000" pitchFamily="2" charset="0"/>
+                </a:rPr>
+                <a:t>నీ ప్రాణ త్యాగముతో విడిపించితివా ||2|| </a:t>
               </a:r>
             </a:p>
           </p:txBody>
@@ -4226,8 +4069,8 @@
           </p:nvSpPr>
           <p:spPr>
             <a:xfrm>
-              <a:off x="4282546" y="320167"/>
-              <a:ext cx="390525" cy="390525"/>
+              <a:off x="4252686" y="333830"/>
+              <a:ext cx="348645" cy="363200"/>
             </a:xfrm>
             <a:prstGeom prst="ellipse">
               <a:avLst/>
@@ -4270,6 +4113,154 @@
                   </a:solidFill>
                 </a:rPr>
                 <a:t>2</a:t>
+              </a:r>
+            </a:p>
+          </p:txBody>
+        </p:sp>
+        <p:sp>
+          <p:nvSpPr>
+            <p:cNvPr id="14" name="TextBox 13">
+              <a:extLst>
+                <a:ext uri="{FF2B5EF4-FFF2-40B4-BE49-F238E27FC236}">
+                  <a16:creationId xmlns:a16="http://schemas.microsoft.com/office/drawing/2014/main" id="{558E687E-38BE-469D-BAB7-421D9664EFD9}"/>
+                </a:ext>
+              </a:extLst>
+            </p:cNvPr>
+            <p:cNvSpPr txBox="1"/>
+            <p:nvPr/>
+          </p:nvSpPr>
+          <p:spPr>
+            <a:xfrm>
+              <a:off x="463542" y="3637197"/>
+              <a:ext cx="4640796" cy="2554545"/>
+            </a:xfrm>
+            <a:prstGeom prst="rect">
+              <a:avLst/>
+            </a:prstGeom>
+            <a:noFill/>
+          </p:spPr>
+          <p:txBody>
+            <a:bodyPr wrap="square" rtlCol="0">
+              <a:spAutoFit/>
+            </a:bodyPr>
+            <a:lstStyle/>
+            <a:p>
+              <a:pPr defTabSz="439781">
+                <a:defRPr/>
+              </a:pPr>
+              <a:r>
+                <a:rPr lang="te-IN" sz="1600" dirty="0">
+                  <a:latin typeface="Ramabhadra" panose="02000600000000000000" pitchFamily="2" charset="0"/>
+                  <a:cs typeface="Ramabhadra" panose="02000600000000000000" pitchFamily="2" charset="0"/>
+                </a:rPr>
+                <a:t>ఎందుకో నన్నింతగా నీవు ప్రేమించితివో దేవా</a:t>
+              </a:r>
+              <a:br>
+                <a:rPr lang="te-IN" sz="1600" dirty="0">
+                  <a:latin typeface="Ramabhadra" panose="02000600000000000000" pitchFamily="2" charset="0"/>
+                  <a:cs typeface="Ramabhadra" panose="02000600000000000000" pitchFamily="2" charset="0"/>
+                </a:rPr>
+              </a:br>
+              <a:r>
+                <a:rPr lang="te-IN" sz="1600" dirty="0">
+                  <a:latin typeface="Ramabhadra" panose="02000600000000000000" pitchFamily="2" charset="0"/>
+                  <a:cs typeface="Ramabhadra" panose="02000600000000000000" pitchFamily="2" charset="0"/>
+                </a:rPr>
+                <a:t>అందుకో నా దీన స్తుతిపాత్ర హల్లెలూయ యేసయ్యా (2)</a:t>
+              </a:r>
+            </a:p>
+            <a:p>
+              <a:pPr defTabSz="439781">
+                <a:defRPr/>
+              </a:pPr>
+              <a:endParaRPr lang="te-IN" sz="1600" dirty="0">
+                <a:latin typeface="Ramabhadra" panose="02000600000000000000" pitchFamily="2" charset="0"/>
+                <a:cs typeface="Ramabhadra" panose="02000600000000000000" pitchFamily="2" charset="0"/>
+              </a:endParaRPr>
+            </a:p>
+            <a:p>
+              <a:pPr defTabSz="439781">
+                <a:defRPr/>
+              </a:pPr>
+              <a:r>
+                <a:rPr lang="te-IN" sz="1600" dirty="0">
+                  <a:latin typeface="Ramabhadra" panose="02000600000000000000" pitchFamily="2" charset="0"/>
+                  <a:cs typeface="Ramabhadra" panose="02000600000000000000" pitchFamily="2" charset="0"/>
+                </a:rPr>
+                <a:t>నా పాపము బాప నరరూపివైనావు</a:t>
+              </a:r>
+              <a:br>
+                <a:rPr lang="te-IN" sz="1600" dirty="0">
+                  <a:latin typeface="Ramabhadra" panose="02000600000000000000" pitchFamily="2" charset="0"/>
+                  <a:cs typeface="Ramabhadra" panose="02000600000000000000" pitchFamily="2" charset="0"/>
+                </a:rPr>
+              </a:br>
+              <a:r>
+                <a:rPr lang="te-IN" sz="1600" dirty="0">
+                  <a:latin typeface="Ramabhadra" panose="02000600000000000000" pitchFamily="2" charset="0"/>
+                  <a:cs typeface="Ramabhadra" panose="02000600000000000000" pitchFamily="2" charset="0"/>
+                </a:rPr>
+                <a:t>నా శాపము మాప నలిగి వ్రేలాడితివి</a:t>
+              </a:r>
+              <a:br>
+                <a:rPr lang="te-IN" sz="1600" dirty="0">
+                  <a:latin typeface="Ramabhadra" panose="02000600000000000000" pitchFamily="2" charset="0"/>
+                  <a:cs typeface="Ramabhadra" panose="02000600000000000000" pitchFamily="2" charset="0"/>
+                </a:rPr>
+              </a:br>
+              <a:r>
+                <a:rPr lang="te-IN" sz="1600" dirty="0">
+                  <a:latin typeface="Ramabhadra" panose="02000600000000000000" pitchFamily="2" charset="0"/>
+                  <a:cs typeface="Ramabhadra" panose="02000600000000000000" pitchFamily="2" charset="0"/>
+                </a:rPr>
+                <a:t>నాకు చాలిన దేవుడవు నీవే నా స్థానములో నీవే (2)         </a:t>
+              </a:r>
+            </a:p>
+            <a:p>
+              <a:pPr defTabSz="439781">
+                <a:defRPr/>
+              </a:pPr>
+              <a:endParaRPr lang="te-IN" sz="1600" dirty="0">
+                <a:latin typeface="Ramabhadra" panose="02000600000000000000" pitchFamily="2" charset="0"/>
+                <a:cs typeface="Ramabhadra" panose="02000600000000000000" pitchFamily="2" charset="0"/>
+              </a:endParaRPr>
+            </a:p>
+            <a:p>
+              <a:pPr defTabSz="439781">
+                <a:defRPr/>
+              </a:pPr>
+              <a:r>
+                <a:rPr lang="te-IN" sz="1600" dirty="0">
+                  <a:latin typeface="Ramabhadra" panose="02000600000000000000" pitchFamily="2" charset="0"/>
+                  <a:cs typeface="Ramabhadra" panose="02000600000000000000" pitchFamily="2" charset="0"/>
+                </a:rPr>
+                <a:t>నీ రూపము నాలో నిర్మించియున్నావు</a:t>
+              </a:r>
+              <a:br>
+                <a:rPr lang="te-IN" sz="1600" dirty="0">
+                  <a:latin typeface="Ramabhadra" panose="02000600000000000000" pitchFamily="2" charset="0"/>
+                  <a:cs typeface="Ramabhadra" panose="02000600000000000000" pitchFamily="2" charset="0"/>
+                </a:rPr>
+              </a:br>
+              <a:r>
+                <a:rPr lang="te-IN" sz="1600" dirty="0">
+                  <a:latin typeface="Ramabhadra" panose="02000600000000000000" pitchFamily="2" charset="0"/>
+                  <a:cs typeface="Ramabhadra" panose="02000600000000000000" pitchFamily="2" charset="0"/>
+                </a:rPr>
+                <a:t>నీ పోలికలోనే నివసించుమన్నావు</a:t>
+              </a:r>
+              <a:br>
+                <a:rPr lang="te-IN" sz="1600" dirty="0">
+                  <a:latin typeface="Ramabhadra" panose="02000600000000000000" pitchFamily="2" charset="0"/>
+                  <a:cs typeface="Ramabhadra" panose="02000600000000000000" pitchFamily="2" charset="0"/>
+                </a:rPr>
+              </a:br>
+              <a:r>
+                <a:rPr lang="te-IN" sz="1600" dirty="0">
+                  <a:latin typeface="Ramabhadra" panose="02000600000000000000" pitchFamily="2" charset="0"/>
+                  <a:cs typeface="Ramabhadra" panose="02000600000000000000" pitchFamily="2" charset="0"/>
+                </a:rPr>
+                <a:t>నీవు నన్ను ఎన్నుకొంటివి నీ కొరకై నీ కృపలో (2)           </a:t>
               </a:r>
             </a:p>
           </p:txBody>
@@ -4365,7 +4356,7 @@
           <p:spPr>
             <a:xfrm>
               <a:off x="304800" y="357760"/>
-              <a:ext cx="4749801" cy="5940088"/>
+              <a:ext cx="4749801" cy="5909310"/>
             </a:xfrm>
             <a:prstGeom prst="rect">
               <a:avLst/>
@@ -4380,46 +4371,36 @@
             <a:p>
               <a:pPr defTabSz="439781"/>
               <a:r>
-                <a:rPr lang="te-IN" sz="2000" dirty="0">
-                  <a:latin typeface="Ramabhadra" panose="02000600000000000000" pitchFamily="2" charset="0"/>
-                  <a:cs typeface="Ramabhadra" panose="02000600000000000000" pitchFamily="2" charset="0"/>
-                </a:rPr>
-                <a:t>నా స్తుతుల పైన నివసించువాడా</a:t>
+                <a:rPr lang="te-IN" dirty="0">
+                  <a:latin typeface="Ramabhadra" panose="02000600000000000000" pitchFamily="2" charset="0"/>
+                  <a:cs typeface="Ramabhadra" panose="02000600000000000000" pitchFamily="2" charset="0"/>
+                </a:rPr>
+                <a:t>ఇదిగో దేవా నా జీవితం</a:t>
               </a:r>
             </a:p>
             <a:p>
               <a:pPr defTabSz="439781"/>
               <a:r>
-                <a:rPr lang="te-IN" sz="2000" dirty="0">
-                  <a:latin typeface="Ramabhadra" panose="02000600000000000000" pitchFamily="2" charset="0"/>
-                  <a:cs typeface="Ramabhadra" panose="02000600000000000000" pitchFamily="2" charset="0"/>
-                </a:rPr>
-                <a:t>నా అంతరంగికుడా యేసయ్యా (2)</a:t>
+                <a:rPr lang="te-IN" dirty="0">
+                  <a:latin typeface="Ramabhadra" panose="02000600000000000000" pitchFamily="2" charset="0"/>
+                  <a:cs typeface="Ramabhadra" panose="02000600000000000000" pitchFamily="2" charset="0"/>
+                </a:rPr>
+                <a:t>ఆపాదమస్తకం నీకంకితం (2)</a:t>
               </a:r>
             </a:p>
             <a:p>
               <a:pPr defTabSz="439781"/>
               <a:r>
-                <a:rPr lang="te-IN" sz="2000" dirty="0">
-                  <a:latin typeface="Ramabhadra" panose="02000600000000000000" pitchFamily="2" charset="0"/>
-                  <a:cs typeface="Ramabhadra" panose="02000600000000000000" pitchFamily="2" charset="0"/>
-                </a:rPr>
-                <a:t>నీవు నా పక్షమై యున్నావు గనుకే</a:t>
+                <a:rPr lang="te-IN" dirty="0">
+                  <a:latin typeface="Ramabhadra" panose="02000600000000000000" pitchFamily="2" charset="0"/>
+                  <a:cs typeface="Ramabhadra" panose="02000600000000000000" pitchFamily="2" charset="0"/>
+                </a:rPr>
+                <a:t>శరణం నీ చరణం (4)                       ||ఇదిగో||</a:t>
               </a:r>
             </a:p>
             <a:p>
               <a:pPr defTabSz="439781"/>
-              <a:r>
-                <a:rPr lang="te-IN" sz="2000" dirty="0">
-                  <a:latin typeface="Ramabhadra" panose="02000600000000000000" pitchFamily="2" charset="0"/>
-                  <a:cs typeface="Ramabhadra" panose="02000600000000000000" pitchFamily="2" charset="0"/>
-                </a:rPr>
-                <a:t>జయమే జయమే ఎల్లవేళలా జయమే (2)</a:t>
-              </a:r>
-            </a:p>
-            <a:p>
-              <a:pPr defTabSz="439781"/>
-              <a:endParaRPr lang="te-IN" sz="2000" dirty="0">
+              <a:endParaRPr lang="te-IN" dirty="0">
                 <a:latin typeface="Ramabhadra" panose="02000600000000000000" pitchFamily="2" charset="0"/>
                 <a:cs typeface="Ramabhadra" panose="02000600000000000000" pitchFamily="2" charset="0"/>
               </a:endParaRPr>
@@ -4427,46 +4408,86 @@
             <a:p>
               <a:pPr defTabSz="439781"/>
               <a:r>
-                <a:rPr lang="te-IN" sz="2000" dirty="0">
-                  <a:latin typeface="Ramabhadra" panose="02000600000000000000" pitchFamily="2" charset="0"/>
-                  <a:cs typeface="Ramabhadra" panose="02000600000000000000" pitchFamily="2" charset="0"/>
-                </a:rPr>
-                <a:t>నన్ను నిర్మించిన రీతి తలచగా - ఎంతో ఆశ్చర్యమే</a:t>
+                <a:rPr lang="te-IN" dirty="0">
+                  <a:latin typeface="Ramabhadra" panose="02000600000000000000" pitchFamily="2" charset="0"/>
+                  <a:cs typeface="Ramabhadra" panose="02000600000000000000" pitchFamily="2" charset="0"/>
+                </a:rPr>
+                <a:t>పలుమార్లు వైదొలగినాను</a:t>
               </a:r>
             </a:p>
             <a:p>
               <a:pPr defTabSz="439781"/>
               <a:r>
-                <a:rPr lang="te-IN" sz="2000" dirty="0">
-                  <a:latin typeface="Ramabhadra" panose="02000600000000000000" pitchFamily="2" charset="0"/>
-                  <a:cs typeface="Ramabhadra" panose="02000600000000000000" pitchFamily="2" charset="0"/>
-                </a:rPr>
-                <a:t>అది నా ఊహకే వింతైనది (2)</a:t>
+                <a:rPr lang="te-IN" dirty="0">
+                  <a:latin typeface="Ramabhadra" panose="02000600000000000000" pitchFamily="2" charset="0"/>
+                  <a:cs typeface="Ramabhadra" panose="02000600000000000000" pitchFamily="2" charset="0"/>
+                </a:rPr>
+                <a:t>పరలోక దర్శనమునుండి</a:t>
               </a:r>
             </a:p>
             <a:p>
               <a:pPr defTabSz="439781"/>
               <a:r>
-                <a:rPr lang="te-IN" sz="2000" dirty="0">
-                  <a:latin typeface="Ramabhadra" panose="02000600000000000000" pitchFamily="2" charset="0"/>
-                  <a:cs typeface="Ramabhadra" panose="02000600000000000000" pitchFamily="2" charset="0"/>
-                </a:rPr>
-                <a:t>ఎరుపెక్కిన శత్రువుల చూపు నుండి తప్పించి</a:t>
+                <a:rPr lang="te-IN" dirty="0">
+                  <a:latin typeface="Ramabhadra" panose="02000600000000000000" pitchFamily="2" charset="0"/>
+                  <a:cs typeface="Ramabhadra" panose="02000600000000000000" pitchFamily="2" charset="0"/>
+                </a:rPr>
+                <a:t>విలువైన నీ దివ్య పిలుపుకు</a:t>
               </a:r>
             </a:p>
             <a:p>
               <a:pPr defTabSz="439781"/>
               <a:r>
-                <a:rPr lang="te-IN" sz="2000" dirty="0">
-                  <a:latin typeface="Ramabhadra" panose="02000600000000000000" pitchFamily="2" charset="0"/>
-                  <a:cs typeface="Ramabhadra" panose="02000600000000000000" pitchFamily="2" charset="0"/>
-                </a:rPr>
-                <a:t>ఎనలేని ప్రేమను నాపై కురిపించావు (2)</a:t>
+                <a:rPr lang="te-IN" dirty="0">
+                  <a:latin typeface="Ramabhadra" panose="02000600000000000000" pitchFamily="2" charset="0"/>
+                  <a:cs typeface="Ramabhadra" panose="02000600000000000000" pitchFamily="2" charset="0"/>
+                </a:rPr>
+                <a:t>నే తగినట్లు జీవించనైతి (2)</a:t>
               </a:r>
             </a:p>
             <a:p>
               <a:pPr defTabSz="439781"/>
-              <a:endParaRPr lang="te-IN" sz="2000" dirty="0">
+              <a:r>
+                <a:rPr lang="te-IN" dirty="0">
+                  <a:latin typeface="Ramabhadra" panose="02000600000000000000" pitchFamily="2" charset="0"/>
+                  <a:cs typeface="Ramabhadra" panose="02000600000000000000" pitchFamily="2" charset="0"/>
+                </a:rPr>
+                <a:t>అయినా నీ ప్రేమతో</a:t>
+              </a:r>
+            </a:p>
+            <a:p>
+              <a:pPr defTabSz="439781"/>
+              <a:r>
+                <a:rPr lang="te-IN" dirty="0">
+                  <a:latin typeface="Ramabhadra" panose="02000600000000000000" pitchFamily="2" charset="0"/>
+                  <a:cs typeface="Ramabhadra" panose="02000600000000000000" pitchFamily="2" charset="0"/>
+                </a:rPr>
+                <a:t>నన్ను దరిచేర్చినావు</a:t>
+              </a:r>
+            </a:p>
+            <a:p>
+              <a:pPr defTabSz="439781"/>
+              <a:r>
+                <a:rPr lang="te-IN" dirty="0">
+                  <a:latin typeface="Ramabhadra" panose="02000600000000000000" pitchFamily="2" charset="0"/>
+                  <a:cs typeface="Ramabhadra" panose="02000600000000000000" pitchFamily="2" charset="0"/>
+                </a:rPr>
+                <a:t>అందుకే గైకొనుము దేవా</a:t>
+              </a:r>
+            </a:p>
+            <a:p>
+              <a:pPr defTabSz="439781"/>
+              <a:r>
+                <a:rPr lang="te-IN" dirty="0">
+                  <a:latin typeface="Ramabhadra" panose="02000600000000000000" pitchFamily="2" charset="0"/>
+                  <a:cs typeface="Ramabhadra" panose="02000600000000000000" pitchFamily="2" charset="0"/>
+                </a:rPr>
+                <a:t>ఈ నా శేష జీవితం        ||ఇదిగో||</a:t>
+              </a:r>
+            </a:p>
+            <a:p>
+              <a:pPr defTabSz="439781"/>
+              <a:endParaRPr lang="te-IN" dirty="0">
                 <a:latin typeface="Ramabhadra" panose="02000600000000000000" pitchFamily="2" charset="0"/>
                 <a:cs typeface="Ramabhadra" panose="02000600000000000000" pitchFamily="2" charset="0"/>
               </a:endParaRPr>
@@ -4474,88 +4495,81 @@
             <a:p>
               <a:pPr defTabSz="439781"/>
               <a:r>
-                <a:rPr lang="te-IN" sz="2000" dirty="0">
-                  <a:latin typeface="Ramabhadra" panose="02000600000000000000" pitchFamily="2" charset="0"/>
-                  <a:cs typeface="Ramabhadra" panose="02000600000000000000" pitchFamily="2" charset="0"/>
-                </a:rPr>
-                <a:t>ద్రాక్షావల్లి అయిన నీలోనే - బహుగా వేరు పారగా</a:t>
+                <a:rPr lang="te-IN" dirty="0">
+                  <a:latin typeface="Ramabhadra" panose="02000600000000000000" pitchFamily="2" charset="0"/>
+                  <a:cs typeface="Ramabhadra" panose="02000600000000000000" pitchFamily="2" charset="0"/>
+                </a:rPr>
+                <a:t>నీ పాదముల చెంత చేరి</a:t>
               </a:r>
             </a:p>
             <a:p>
               <a:pPr defTabSz="439781"/>
               <a:r>
-                <a:rPr lang="te-IN" sz="2000" dirty="0">
-                  <a:latin typeface="Ramabhadra" panose="02000600000000000000" pitchFamily="2" charset="0"/>
-                  <a:cs typeface="Ramabhadra" panose="02000600000000000000" pitchFamily="2" charset="0"/>
-                </a:rPr>
-                <a:t>నీతో మధురమైన ఫలములీయనా (2)</a:t>
+                <a:rPr lang="te-IN" dirty="0">
+                  <a:latin typeface="Ramabhadra" panose="02000600000000000000" pitchFamily="2" charset="0"/>
+                  <a:cs typeface="Ramabhadra" panose="02000600000000000000" pitchFamily="2" charset="0"/>
+                </a:rPr>
+                <a:t>నీ చిత్తంబు నేనెరుగ నేర్పు</a:t>
               </a:r>
             </a:p>
             <a:p>
               <a:pPr defTabSz="439781"/>
               <a:r>
-                <a:rPr lang="te-IN" sz="2000" dirty="0">
-                  <a:latin typeface="Ramabhadra" panose="02000600000000000000" pitchFamily="2" charset="0"/>
-                  <a:cs typeface="Ramabhadra" panose="02000600000000000000" pitchFamily="2" charset="0"/>
-                </a:rPr>
-                <a:t>ఉన్నత స్థలములపై నాకు స్థానమిచ్చితివే</a:t>
+                <a:rPr lang="te-IN" dirty="0">
+                  <a:latin typeface="Ramabhadra" panose="02000600000000000000" pitchFamily="2" charset="0"/>
+                  <a:cs typeface="Ramabhadra" panose="02000600000000000000" pitchFamily="2" charset="0"/>
+                </a:rPr>
+                <a:t>నీ హృదయ భారంబు నొసగి</a:t>
               </a:r>
             </a:p>
             <a:p>
               <a:pPr defTabSz="439781"/>
               <a:r>
-                <a:rPr lang="te-IN" sz="2000" dirty="0">
-                  <a:latin typeface="Ramabhadra" panose="02000600000000000000" pitchFamily="2" charset="0"/>
-                  <a:cs typeface="Ramabhadra" panose="02000600000000000000" pitchFamily="2" charset="0"/>
-                </a:rPr>
-                <a:t>విజయుడా నీ కృప చాలును నా జీవితాన (2)</a:t>
+                <a:rPr lang="te-IN" dirty="0">
+                  <a:latin typeface="Ramabhadra" panose="02000600000000000000" pitchFamily="2" charset="0"/>
+                  <a:cs typeface="Ramabhadra" panose="02000600000000000000" pitchFamily="2" charset="0"/>
+                </a:rPr>
+                <a:t>ప్రార్థించి పనిచేయనిమ్ము (2)</a:t>
               </a:r>
             </a:p>
             <a:p>
               <a:pPr defTabSz="439781"/>
-              <a:endParaRPr lang="te-IN" sz="2000" dirty="0">
-                <a:latin typeface="Ramabhadra" panose="02000600000000000000" pitchFamily="2" charset="0"/>
-                <a:cs typeface="Ramabhadra" panose="02000600000000000000" pitchFamily="2" charset="0"/>
-              </a:endParaRPr>
+              <a:r>
+                <a:rPr lang="te-IN" dirty="0">
+                  <a:latin typeface="Ramabhadra" panose="02000600000000000000" pitchFamily="2" charset="0"/>
+                  <a:cs typeface="Ramabhadra" panose="02000600000000000000" pitchFamily="2" charset="0"/>
+                </a:rPr>
+                <a:t>ఆగిపోక సాగిపోవు</a:t>
+              </a:r>
             </a:p>
             <a:p>
               <a:pPr defTabSz="439781"/>
               <a:r>
-                <a:rPr lang="te-IN" sz="2000" dirty="0">
-                  <a:latin typeface="Ramabhadra" panose="02000600000000000000" pitchFamily="2" charset="0"/>
-                  <a:cs typeface="Ramabhadra" panose="02000600000000000000" pitchFamily="2" charset="0"/>
-                </a:rPr>
-                <a:t>నీతో యాత్ర చేయు మార్గములు - ఎంతో రమ్యమైనవి</a:t>
+                <a:rPr lang="te-IN" dirty="0">
+                  <a:latin typeface="Ramabhadra" panose="02000600000000000000" pitchFamily="2" charset="0"/>
+                  <a:cs typeface="Ramabhadra" panose="02000600000000000000" pitchFamily="2" charset="0"/>
+                </a:rPr>
+                <a:t>ప్రియసుతునిగా పనిచేయనిమ్ము</a:t>
               </a:r>
             </a:p>
             <a:p>
               <a:pPr defTabSz="439781"/>
               <a:r>
-                <a:rPr lang="te-IN" sz="2000" dirty="0">
-                  <a:latin typeface="Ramabhadra" panose="02000600000000000000" pitchFamily="2" charset="0"/>
-                  <a:cs typeface="Ramabhadra" panose="02000600000000000000" pitchFamily="2" charset="0"/>
-                </a:rPr>
-                <a:t>అవి నాకెంతో ప్రియమైనవి (2)</a:t>
+                <a:rPr lang="te-IN" dirty="0">
+                  <a:latin typeface="Ramabhadra" panose="02000600000000000000" pitchFamily="2" charset="0"/>
+                  <a:cs typeface="Ramabhadra" panose="02000600000000000000" pitchFamily="2" charset="0"/>
+                </a:rPr>
+                <a:t>ప్రతి చోట నీ సాక్షిగా</a:t>
               </a:r>
             </a:p>
             <a:p>
               <a:pPr defTabSz="439781"/>
               <a:r>
-                <a:rPr lang="te-IN" sz="2000" dirty="0">
-                  <a:latin typeface="Ramabhadra" panose="02000600000000000000" pitchFamily="2" charset="0"/>
-                  <a:cs typeface="Ramabhadra" panose="02000600000000000000" pitchFamily="2" charset="0"/>
-                </a:rPr>
-                <a:t>నీ మహిమను కొనియాడు పరిశుద్ధులతో నిలిచి</a:t>
-              </a:r>
-            </a:p>
-            <a:p>
-              <a:pPr defTabSz="439781"/>
-              <a:r>
-                <a:rPr lang="te-IN" sz="2000" dirty="0">
-                  <a:latin typeface="Ramabhadra" panose="02000600000000000000" pitchFamily="2" charset="0"/>
-                  <a:cs typeface="Ramabhadra" panose="02000600000000000000" pitchFamily="2" charset="0"/>
-                </a:rPr>
-                <a:t>పది తంతుల సితారతో నిన్నే కీర్తించెద (2)</a:t>
+                <a:rPr lang="te-IN" dirty="0">
+                  <a:latin typeface="Ramabhadra" panose="02000600000000000000" pitchFamily="2" charset="0"/>
+                  <a:cs typeface="Ramabhadra" panose="02000600000000000000" pitchFamily="2" charset="0"/>
+                </a:rPr>
+                <a:t>ప్రభువా నన్నుండనిమ్ము      ||ఇదిగో||</a:t>
               </a:r>
             </a:p>
           </p:txBody>
@@ -4734,6 +4748,62 @@
               </a:rPr>
               <a:t>130425</a:t>
             </a:r>
+          </a:p>
+        </p:txBody>
+      </p:sp>
+      <p:sp>
+        <p:nvSpPr>
+          <p:cNvPr id="2" name="Rectangle: Rounded Corners 1">
+            <a:extLst>
+              <a:ext uri="{FF2B5EF4-FFF2-40B4-BE49-F238E27FC236}">
+                <a16:creationId xmlns:a16="http://schemas.microsoft.com/office/drawing/2014/main" id="{26BE2B5C-43C0-41DC-A046-4A1B3A84D5BF}"/>
+              </a:ext>
+            </a:extLst>
+          </p:cNvPr>
+          <p:cNvSpPr/>
+          <p:nvPr/>
+        </p:nvSpPr>
+        <p:spPr>
+          <a:xfrm>
+            <a:off x="312204" y="3444386"/>
+            <a:ext cx="4289127" cy="3053271"/>
+          </a:xfrm>
+          <a:prstGeom prst="roundRect">
+            <a:avLst>
+              <a:gd name="adj" fmla="val 3357"/>
+            </a:avLst>
+          </a:prstGeom>
+          <a:noFill/>
+          <a:ln>
+            <a:solidFill>
+              <a:schemeClr val="tx2">
+                <a:lumMod val="50000"/>
+              </a:schemeClr>
+            </a:solidFill>
+          </a:ln>
+        </p:spPr>
+        <p:style>
+          <a:lnRef idx="2">
+            <a:schemeClr val="accent1">
+              <a:shade val="50000"/>
+            </a:schemeClr>
+          </a:lnRef>
+          <a:fillRef idx="1">
+            <a:schemeClr val="accent1"/>
+          </a:fillRef>
+          <a:effectRef idx="0">
+            <a:schemeClr val="accent1"/>
+          </a:effectRef>
+          <a:fontRef idx="minor">
+            <a:schemeClr val="lt1"/>
+          </a:fontRef>
+        </p:style>
+        <p:txBody>
+          <a:bodyPr rtlCol="0" anchor="ctr"/>
+          <a:lstStyle/>
+          <a:p>
+            <a:pPr algn="ctr"/>
+            <a:endParaRPr lang="en-IN"/>
           </a:p>
         </p:txBody>
       </p:sp>
